--- a/Seminario de Sistemas/Clases/Clase 13 - Diseño de interfaces/Presentacion.pptx
+++ b/Seminario de Sistemas/Clases/Clase 13 - Diseño de interfaces/Presentacion.pptx
@@ -19,6 +19,15 @@
     <p:sldId id="267" r:id="rId18"/>
     <p:sldId id="268" r:id="rId19"/>
     <p:sldId id="269" r:id="rId20"/>
+    <p:sldId id="270" r:id="rId21"/>
+    <p:sldId id="271" r:id="rId22"/>
+    <p:sldId id="272" r:id="rId23"/>
+    <p:sldId id="273" r:id="rId24"/>
+    <p:sldId id="274" r:id="rId25"/>
+    <p:sldId id="275" r:id="rId26"/>
+    <p:sldId id="276" r:id="rId27"/>
+    <p:sldId id="277" r:id="rId28"/>
+    <p:sldId id="278" r:id="rId29"/>
   </p:sldIdLst>
   <p:sldSz cx="12191695" cy="6858000" type="screen4x3"/>
   <p:notesSz cx="6858000" cy="9144000"/>
@@ -3619,111 +3628,21 @@
                 </a:solidFill>
                 <a:latin typeface="Calibri"/>
               </a:rPr>
-              <a:t>Taller PI — pasos guiados</a:t>
-            </a:r>
-          </a:p>
-        </p:txBody>
-      </p:sp>
-      <p:sp>
-        <p:nvSpPr>
-          <p:cNvPr id="5" name="Rounded Rectangle 4"/>
-          <p:cNvSpPr/>
-          <p:nvPr/>
-        </p:nvSpPr>
-        <p:spPr>
-          <a:xfrm>
-            <a:off x="457200" y="1234440"/>
-            <a:ext cx="11277295" cy="950976"/>
-          </a:xfrm>
-          <a:prstGeom prst="roundRect">
-            <a:avLst>
-              <a:gd name="adj" fmla="val 12000"/>
-            </a:avLst>
-          </a:prstGeom>
-          <a:solidFill>
-            <a:srgbClr val="F2F2F2"/>
-          </a:solidFill>
-          <a:ln>
-            <a:noFill/>
-          </a:ln>
-        </p:spPr>
-        <p:style>
-          <a:lnRef idx="1">
-            <a:schemeClr val="accent1"/>
-          </a:lnRef>
-          <a:fillRef idx="3">
-            <a:schemeClr val="accent1"/>
-          </a:fillRef>
-          <a:effectRef idx="2">
-            <a:schemeClr val="accent1"/>
-          </a:effectRef>
-          <a:fontRef idx="minor">
-            <a:schemeClr val="lt1"/>
-          </a:fontRef>
-        </p:style>
-        <p:txBody>
-          <a:bodyPr rtlCol="0" anchor="ctr"/>
-          <a:lstStyle/>
-          <a:p>
-            <a:pPr algn="ctr"/>
-          </a:p>
-        </p:txBody>
-      </p:sp>
-      <p:sp>
-        <p:nvSpPr>
-          <p:cNvPr id="6" name="Rounded Rectangle 5"/>
-          <p:cNvSpPr/>
-          <p:nvPr/>
-        </p:nvSpPr>
-        <p:spPr>
-          <a:xfrm>
-            <a:off x="594360" y="1490472"/>
-            <a:ext cx="438912" cy="438912"/>
-          </a:xfrm>
-          <a:prstGeom prst="roundRect">
-            <a:avLst>
-              <a:gd name="adj" fmla="val 12000"/>
-            </a:avLst>
-          </a:prstGeom>
-          <a:solidFill>
-            <a:srgbClr val="095292"/>
-          </a:solidFill>
-          <a:ln>
-            <a:noFill/>
-          </a:ln>
-        </p:spPr>
-        <p:style>
-          <a:lnRef idx="1">
-            <a:schemeClr val="accent1"/>
-          </a:lnRef>
-          <a:fillRef idx="3">
-            <a:schemeClr val="accent1"/>
-          </a:fillRef>
-          <a:effectRef idx="2">
-            <a:schemeClr val="accent1"/>
-          </a:effectRef>
-          <a:fontRef idx="minor">
-            <a:schemeClr val="lt1"/>
-          </a:fontRef>
-        </p:style>
-        <p:txBody>
-          <a:bodyPr rtlCol="0" anchor="ctr"/>
-          <a:lstStyle/>
-          <a:p>
-            <a:pPr algn="ctr"/>
-          </a:p>
-        </p:txBody>
-      </p:sp>
-      <p:sp>
-        <p:nvSpPr>
-          <p:cNvPr id="7" name="TextBox 6"/>
+              <a:t>La interfaz no se inventa: se deriva de los artefactos que el equipo ya... (1/2)</a:t>
+            </a:r>
+          </a:p>
+        </p:txBody>
+      </p:sp>
+      <p:sp>
+        <p:nvSpPr>
+          <p:cNvPr id="5" name="TextBox 4"/>
           <p:cNvSpPr txBox="1"/>
           <p:nvPr/>
         </p:nvSpPr>
         <p:spPr>
           <a:xfrm>
-            <a:off x="594360" y="1490472"/>
-            <a:ext cx="438912" cy="438912"/>
+            <a:off x="457200" y="1170432"/>
+            <a:ext cx="11277295" cy="5230368"/>
           </a:xfrm>
           <a:prstGeom prst="rect">
             <a:avLst/>
@@ -3731,677 +3650,95 @@
           <a:noFill/>
         </p:spPr>
         <p:txBody>
-          <a:bodyPr wrap="square" anchor="ctr"/>
-          <a:lstStyle/>
-          <a:p>
-            <a:pPr algn="ctr"/>
-            <a:r>
-              <a:rPr sz="1600" b="1" i="0">
-                <a:solidFill>
-                  <a:srgbClr val="FFFFFF"/>
-                </a:solidFill>
-                <a:latin typeface="Calibri"/>
-              </a:rPr>
-              <a:t>1</a:t>
-            </a:r>
-          </a:p>
-        </p:txBody>
-      </p:sp>
-      <p:sp>
-        <p:nvSpPr>
-          <p:cNvPr id="8" name="TextBox 7"/>
-          <p:cNvSpPr txBox="1"/>
-          <p:nvPr/>
-        </p:nvSpPr>
-        <p:spPr>
-          <a:xfrm>
-            <a:off x="1188720" y="1325880"/>
-            <a:ext cx="10271455" cy="786384"/>
-          </a:xfrm>
-          <a:prstGeom prst="rect">
-            <a:avLst/>
-          </a:prstGeom>
-          <a:noFill/>
-        </p:spPr>
-        <p:txBody>
-          <a:bodyPr wrap="square" anchor="ctr"/>
-          <a:lstStyle/>
-          <a:p>
-            <a:r>
-              <a:rPr sz="1400" b="1" i="0">
-                <a:solidFill>
-                  <a:srgbClr val="095292"/>
-                </a:solidFill>
-                <a:latin typeface="Calibri"/>
-              </a:rPr>
-              <a:t>Paso 1. En Excalidraw o en papel, dibujen el wireframe en gris de la pantalla Registrar mascota de VetCare, sin colores ni logos, ubicando bloque de dueño, bloque de datos de la mascota y zona de accion; el wireframe debe caber en una sola vista sin scroll y no puede tener mas de nueve campos.</a:t>
-            </a:r>
-          </a:p>
-        </p:txBody>
-      </p:sp>
-      <p:sp>
-        <p:nvSpPr>
-          <p:cNvPr id="9" name="Rounded Rectangle 8"/>
-          <p:cNvSpPr/>
-          <p:nvPr/>
-        </p:nvSpPr>
-        <p:spPr>
-          <a:xfrm>
-            <a:off x="457200" y="2276856"/>
-            <a:ext cx="11277295" cy="950976"/>
-          </a:xfrm>
-          <a:prstGeom prst="roundRect">
-            <a:avLst>
-              <a:gd name="adj" fmla="val 12000"/>
-            </a:avLst>
-          </a:prstGeom>
-          <a:solidFill>
-            <a:srgbClr val="E8F4FA"/>
-          </a:solidFill>
-          <a:ln>
-            <a:noFill/>
-          </a:ln>
-        </p:spPr>
-        <p:style>
-          <a:lnRef idx="1">
-            <a:schemeClr val="accent1"/>
-          </a:lnRef>
-          <a:fillRef idx="3">
-            <a:schemeClr val="accent1"/>
-          </a:fillRef>
-          <a:effectRef idx="2">
-            <a:schemeClr val="accent1"/>
-          </a:effectRef>
-          <a:fontRef idx="minor">
-            <a:schemeClr val="lt1"/>
-          </a:fontRef>
-        </p:style>
-        <p:txBody>
-          <a:bodyPr rtlCol="0" anchor="ctr"/>
-          <a:lstStyle/>
-          <a:p>
-            <a:pPr algn="ctr"/>
-          </a:p>
-        </p:txBody>
-      </p:sp>
-      <p:sp>
-        <p:nvSpPr>
-          <p:cNvPr id="10" name="Rounded Rectangle 9"/>
-          <p:cNvSpPr/>
-          <p:nvPr/>
-        </p:nvSpPr>
-        <p:spPr>
-          <a:xfrm>
-            <a:off x="594360" y="2532888"/>
-            <a:ext cx="438912" cy="438912"/>
-          </a:xfrm>
-          <a:prstGeom prst="roundRect">
-            <a:avLst>
-              <a:gd name="adj" fmla="val 12000"/>
-            </a:avLst>
-          </a:prstGeom>
-          <a:solidFill>
-            <a:srgbClr val="095292"/>
-          </a:solidFill>
-          <a:ln>
-            <a:noFill/>
-          </a:ln>
-        </p:spPr>
-        <p:style>
-          <a:lnRef idx="1">
-            <a:schemeClr val="accent1"/>
-          </a:lnRef>
-          <a:fillRef idx="3">
-            <a:schemeClr val="accent1"/>
-          </a:fillRef>
-          <a:effectRef idx="2">
-            <a:schemeClr val="accent1"/>
-          </a:effectRef>
-          <a:fontRef idx="minor">
-            <a:schemeClr val="lt1"/>
-          </a:fontRef>
-        </p:style>
-        <p:txBody>
-          <a:bodyPr rtlCol="0" anchor="ctr"/>
-          <a:lstStyle/>
-          <a:p>
-            <a:pPr algn="ctr"/>
-          </a:p>
-        </p:txBody>
-      </p:sp>
-      <p:sp>
-        <p:nvSpPr>
-          <p:cNvPr id="11" name="TextBox 10"/>
-          <p:cNvSpPr txBox="1"/>
-          <p:nvPr/>
-        </p:nvSpPr>
-        <p:spPr>
-          <a:xfrm>
-            <a:off x="594360" y="2532888"/>
-            <a:ext cx="438912" cy="438912"/>
-          </a:xfrm>
-          <a:prstGeom prst="rect">
-            <a:avLst/>
-          </a:prstGeom>
-          <a:noFill/>
-        </p:spPr>
-        <p:txBody>
-          <a:bodyPr wrap="square" anchor="ctr"/>
-          <a:lstStyle/>
-          <a:p>
-            <a:pPr algn="ctr"/>
-            <a:r>
-              <a:rPr sz="1600" b="1" i="0">
-                <a:solidFill>
-                  <a:srgbClr val="FFFFFF"/>
-                </a:solidFill>
-                <a:latin typeface="Calibri"/>
-              </a:rPr>
-              <a:t>2</a:t>
-            </a:r>
-          </a:p>
-        </p:txBody>
-      </p:sp>
-      <p:sp>
-        <p:nvSpPr>
-          <p:cNvPr id="12" name="TextBox 11"/>
-          <p:cNvSpPr txBox="1"/>
-          <p:nvPr/>
-        </p:nvSpPr>
-        <p:spPr>
-          <a:xfrm>
-            <a:off x="1188720" y="2368296"/>
-            <a:ext cx="10271455" cy="786384"/>
-          </a:xfrm>
-          <a:prstGeom prst="rect">
-            <a:avLst/>
-          </a:prstGeom>
-          <a:noFill/>
-        </p:spPr>
-        <p:txBody>
-          <a:bodyPr wrap="square" anchor="ctr"/>
-          <a:lstStyle/>
-          <a:p>
-            <a:r>
-              <a:rPr sz="1400" b="1" i="0">
-                <a:solidFill>
-                  <a:srgbClr val="095292"/>
-                </a:solidFill>
-                <a:latin typeface="Calibri"/>
-              </a:rPr>
-              <a:t>Paso 2. Numeren de uno a seis los elementos criticos del wireframe y llenen la tabla de anotaciones indicando para cada numero el atributo del diccionario de datos que lo respalda, el RF que lo exige y si es obligatorio u opcional; si un elemento no tiene RF, borrenlo o creen el requisito y dejenlo escrito.</a:t>
-            </a:r>
-          </a:p>
-        </p:txBody>
-      </p:sp>
-      <p:sp>
-        <p:nvSpPr>
-          <p:cNvPr id="13" name="Rounded Rectangle 12"/>
-          <p:cNvSpPr/>
-          <p:nvPr/>
-        </p:nvSpPr>
-        <p:spPr>
-          <a:xfrm>
-            <a:off x="457200" y="3319272"/>
-            <a:ext cx="11277295" cy="950976"/>
-          </a:xfrm>
-          <a:prstGeom prst="roundRect">
-            <a:avLst>
-              <a:gd name="adj" fmla="val 12000"/>
-            </a:avLst>
-          </a:prstGeom>
-          <a:solidFill>
-            <a:srgbClr val="F2F2F2"/>
-          </a:solidFill>
-          <a:ln>
-            <a:noFill/>
-          </a:ln>
-        </p:spPr>
-        <p:style>
-          <a:lnRef idx="1">
-            <a:schemeClr val="accent1"/>
-          </a:lnRef>
-          <a:fillRef idx="3">
-            <a:schemeClr val="accent1"/>
-          </a:fillRef>
-          <a:effectRef idx="2">
-            <a:schemeClr val="accent1"/>
-          </a:effectRef>
-          <a:fontRef idx="minor">
-            <a:schemeClr val="lt1"/>
-          </a:fontRef>
-        </p:style>
-        <p:txBody>
-          <a:bodyPr rtlCol="0" anchor="ctr"/>
-          <a:lstStyle/>
-          <a:p>
-            <a:pPr algn="ctr"/>
-          </a:p>
-        </p:txBody>
-      </p:sp>
-      <p:sp>
-        <p:nvSpPr>
-          <p:cNvPr id="14" name="Rounded Rectangle 13"/>
-          <p:cNvSpPr/>
-          <p:nvPr/>
-        </p:nvSpPr>
-        <p:spPr>
-          <a:xfrm>
-            <a:off x="594360" y="3575304"/>
-            <a:ext cx="438912" cy="438912"/>
-          </a:xfrm>
-          <a:prstGeom prst="roundRect">
-            <a:avLst>
-              <a:gd name="adj" fmla="val 12000"/>
-            </a:avLst>
-          </a:prstGeom>
-          <a:solidFill>
-            <a:srgbClr val="095292"/>
-          </a:solidFill>
-          <a:ln>
-            <a:noFill/>
-          </a:ln>
-        </p:spPr>
-        <p:style>
-          <a:lnRef idx="1">
-            <a:schemeClr val="accent1"/>
-          </a:lnRef>
-          <a:fillRef idx="3">
-            <a:schemeClr val="accent1"/>
-          </a:fillRef>
-          <a:effectRef idx="2">
-            <a:schemeClr val="accent1"/>
-          </a:effectRef>
-          <a:fontRef idx="minor">
-            <a:schemeClr val="lt1"/>
-          </a:fontRef>
-        </p:style>
-        <p:txBody>
-          <a:bodyPr rtlCol="0" anchor="ctr"/>
-          <a:lstStyle/>
-          <a:p>
-            <a:pPr algn="ctr"/>
-          </a:p>
-        </p:txBody>
-      </p:sp>
-      <p:sp>
-        <p:nvSpPr>
-          <p:cNvPr id="15" name="TextBox 14"/>
-          <p:cNvSpPr txBox="1"/>
-          <p:nvPr/>
-        </p:nvSpPr>
-        <p:spPr>
-          <a:xfrm>
-            <a:off x="594360" y="3575304"/>
-            <a:ext cx="438912" cy="438912"/>
-          </a:xfrm>
-          <a:prstGeom prst="rect">
-            <a:avLst/>
-          </a:prstGeom>
-          <a:noFill/>
-        </p:spPr>
-        <p:txBody>
-          <a:bodyPr wrap="square" anchor="ctr"/>
-          <a:lstStyle/>
-          <a:p>
-            <a:pPr algn="ctr"/>
-            <a:r>
-              <a:rPr sz="1600" b="1" i="0">
-                <a:solidFill>
-                  <a:srgbClr val="FFFFFF"/>
-                </a:solidFill>
-                <a:latin typeface="Calibri"/>
-              </a:rPr>
-              <a:t>3</a:t>
-            </a:r>
-          </a:p>
-        </p:txBody>
-      </p:sp>
-      <p:sp>
-        <p:nvSpPr>
-          <p:cNvPr id="16" name="TextBox 15"/>
-          <p:cNvSpPr txBox="1"/>
-          <p:nvPr/>
-        </p:nvSpPr>
-        <p:spPr>
-          <a:xfrm>
-            <a:off x="1188720" y="3410712"/>
-            <a:ext cx="10271455" cy="786384"/>
-          </a:xfrm>
-          <a:prstGeom prst="rect">
-            <a:avLst/>
-          </a:prstGeom>
-          <a:noFill/>
-        </p:spPr>
-        <p:txBody>
-          <a:bodyPr wrap="square" anchor="ctr"/>
-          <a:lstStyle/>
-          <a:p>
-            <a:r>
-              <a:rPr sz="1400" b="1" i="0">
-                <a:solidFill>
-                  <a:srgbClr val="095292"/>
-                </a:solidFill>
-                <a:latin typeface="Calibri"/>
-              </a:rPr>
-              <a:t>Paso 3. Diseñen la pantalla Buscar expediente resolviendo explicitamente el caso de resultados multiples: definan los tres criterios de busqueda, las columnas de la lista de resultados que permiten desambiguar y el mensaje exacto que se muestra cuando no hay ningun resultado.</a:t>
-            </a:r>
-          </a:p>
-        </p:txBody>
-      </p:sp>
-      <p:sp>
-        <p:nvSpPr>
-          <p:cNvPr id="17" name="Rounded Rectangle 16"/>
-          <p:cNvSpPr/>
-          <p:nvPr/>
-        </p:nvSpPr>
-        <p:spPr>
-          <a:xfrm>
-            <a:off x="457200" y="4361688"/>
-            <a:ext cx="11277295" cy="950976"/>
-          </a:xfrm>
-          <a:prstGeom prst="roundRect">
-            <a:avLst>
-              <a:gd name="adj" fmla="val 12000"/>
-            </a:avLst>
-          </a:prstGeom>
-          <a:solidFill>
-            <a:srgbClr val="E8F4FA"/>
-          </a:solidFill>
-          <a:ln>
-            <a:noFill/>
-          </a:ln>
-        </p:spPr>
-        <p:style>
-          <a:lnRef idx="1">
-            <a:schemeClr val="accent1"/>
-          </a:lnRef>
-          <a:fillRef idx="3">
-            <a:schemeClr val="accent1"/>
-          </a:fillRef>
-          <a:effectRef idx="2">
-            <a:schemeClr val="accent1"/>
-          </a:effectRef>
-          <a:fontRef idx="minor">
-            <a:schemeClr val="lt1"/>
-          </a:fontRef>
-        </p:style>
-        <p:txBody>
-          <a:bodyPr rtlCol="0" anchor="ctr"/>
-          <a:lstStyle/>
-          <a:p>
-            <a:pPr algn="ctr"/>
-          </a:p>
-        </p:txBody>
-      </p:sp>
-      <p:sp>
-        <p:nvSpPr>
-          <p:cNvPr id="18" name="Rounded Rectangle 17"/>
-          <p:cNvSpPr/>
-          <p:nvPr/>
-        </p:nvSpPr>
-        <p:spPr>
-          <a:xfrm>
-            <a:off x="594360" y="4617720"/>
-            <a:ext cx="438912" cy="438912"/>
-          </a:xfrm>
-          <a:prstGeom prst="roundRect">
-            <a:avLst>
-              <a:gd name="adj" fmla="val 12000"/>
-            </a:avLst>
-          </a:prstGeom>
-          <a:solidFill>
-            <a:srgbClr val="095292"/>
-          </a:solidFill>
-          <a:ln>
-            <a:noFill/>
-          </a:ln>
-        </p:spPr>
-        <p:style>
-          <a:lnRef idx="1">
-            <a:schemeClr val="accent1"/>
-          </a:lnRef>
-          <a:fillRef idx="3">
-            <a:schemeClr val="accent1"/>
-          </a:fillRef>
-          <a:effectRef idx="2">
-            <a:schemeClr val="accent1"/>
-          </a:effectRef>
-          <a:fontRef idx="minor">
-            <a:schemeClr val="lt1"/>
-          </a:fontRef>
-        </p:style>
-        <p:txBody>
-          <a:bodyPr rtlCol="0" anchor="ctr"/>
-          <a:lstStyle/>
-          <a:p>
-            <a:pPr algn="ctr"/>
-          </a:p>
-        </p:txBody>
-      </p:sp>
-      <p:sp>
-        <p:nvSpPr>
-          <p:cNvPr id="19" name="TextBox 18"/>
-          <p:cNvSpPr txBox="1"/>
-          <p:nvPr/>
-        </p:nvSpPr>
-        <p:spPr>
-          <a:xfrm>
-            <a:off x="594360" y="4617720"/>
-            <a:ext cx="438912" cy="438912"/>
-          </a:xfrm>
-          <a:prstGeom prst="rect">
-            <a:avLst/>
-          </a:prstGeom>
-          <a:noFill/>
-        </p:spPr>
-        <p:txBody>
-          <a:bodyPr wrap="square" anchor="ctr"/>
-          <a:lstStyle/>
-          <a:p>
-            <a:pPr algn="ctr"/>
-            <a:r>
-              <a:rPr sz="1600" b="1" i="0">
-                <a:solidFill>
-                  <a:srgbClr val="FFFFFF"/>
-                </a:solidFill>
-                <a:latin typeface="Calibri"/>
-              </a:rPr>
-              <a:t>4</a:t>
-            </a:r>
-          </a:p>
-        </p:txBody>
-      </p:sp>
-      <p:sp>
-        <p:nvSpPr>
-          <p:cNvPr id="20" name="TextBox 19"/>
-          <p:cNvSpPr txBox="1"/>
-          <p:nvPr/>
-        </p:nvSpPr>
-        <p:spPr>
-          <a:xfrm>
-            <a:off x="1188720" y="4453128"/>
-            <a:ext cx="10271455" cy="786384"/>
-          </a:xfrm>
-          <a:prstGeom prst="rect">
-            <a:avLst/>
-          </a:prstGeom>
-          <a:noFill/>
-        </p:spPr>
-        <p:txBody>
-          <a:bodyPr wrap="square" anchor="ctr"/>
-          <a:lstStyle/>
-          <a:p>
-            <a:r>
-              <a:rPr sz="1400" b="1" i="0">
-                <a:solidFill>
-                  <a:srgbClr val="095292"/>
-                </a:solidFill>
-                <a:latin typeface="Calibri"/>
-              </a:rPr>
-              <a:t>Paso 4. Pasen las dos pantallas a Figma o Penpot como mockup y conecten minimo tres transiciones navegables: Registrar mascota hacia la confirmacion con codigo, confirmacion hacia Buscar expediente, y un resultado de la lista hacia la ficha del paciente; escriban al lado de cada transicion que principio de usabilidad estan cumpliendo.</a:t>
-            </a:r>
-          </a:p>
-        </p:txBody>
-      </p:sp>
-      <p:sp>
-        <p:nvSpPr>
-          <p:cNvPr id="21" name="Rounded Rectangle 20"/>
-          <p:cNvSpPr/>
-          <p:nvPr/>
-        </p:nvSpPr>
-        <p:spPr>
-          <a:xfrm>
-            <a:off x="457200" y="5404104"/>
-            <a:ext cx="11277295" cy="950976"/>
-          </a:xfrm>
-          <a:prstGeom prst="roundRect">
-            <a:avLst>
-              <a:gd name="adj" fmla="val 12000"/>
-            </a:avLst>
-          </a:prstGeom>
-          <a:solidFill>
-            <a:srgbClr val="F2F2F2"/>
-          </a:solidFill>
-          <a:ln>
-            <a:noFill/>
-          </a:ln>
-        </p:spPr>
-        <p:style>
-          <a:lnRef idx="1">
-            <a:schemeClr val="accent1"/>
-          </a:lnRef>
-          <a:fillRef idx="3">
-            <a:schemeClr val="accent1"/>
-          </a:fillRef>
-          <a:effectRef idx="2">
-            <a:schemeClr val="accent1"/>
-          </a:effectRef>
-          <a:fontRef idx="minor">
-            <a:schemeClr val="lt1"/>
-          </a:fontRef>
-        </p:style>
-        <p:txBody>
-          <a:bodyPr rtlCol="0" anchor="ctr"/>
-          <a:lstStyle/>
-          <a:p>
-            <a:pPr algn="ctr"/>
-          </a:p>
-        </p:txBody>
-      </p:sp>
-      <p:sp>
-        <p:nvSpPr>
-          <p:cNvPr id="22" name="Rounded Rectangle 21"/>
-          <p:cNvSpPr/>
-          <p:nvPr/>
-        </p:nvSpPr>
-        <p:spPr>
-          <a:xfrm>
-            <a:off x="594360" y="5660136"/>
-            <a:ext cx="438912" cy="438912"/>
-          </a:xfrm>
-          <a:prstGeom prst="roundRect">
-            <a:avLst>
-              <a:gd name="adj" fmla="val 12000"/>
-            </a:avLst>
-          </a:prstGeom>
-          <a:solidFill>
-            <a:srgbClr val="095292"/>
-          </a:solidFill>
-          <a:ln>
-            <a:noFill/>
-          </a:ln>
-        </p:spPr>
-        <p:style>
-          <a:lnRef idx="1">
-            <a:schemeClr val="accent1"/>
-          </a:lnRef>
-          <a:fillRef idx="3">
-            <a:schemeClr val="accent1"/>
-          </a:fillRef>
-          <a:effectRef idx="2">
-            <a:schemeClr val="accent1"/>
-          </a:effectRef>
-          <a:fontRef idx="minor">
-            <a:schemeClr val="lt1"/>
-          </a:fontRef>
-        </p:style>
-        <p:txBody>
-          <a:bodyPr rtlCol="0" anchor="ctr"/>
-          <a:lstStyle/>
-          <a:p>
-            <a:pPr algn="ctr"/>
-          </a:p>
-        </p:txBody>
-      </p:sp>
-      <p:sp>
-        <p:nvSpPr>
-          <p:cNvPr id="23" name="TextBox 22"/>
-          <p:cNvSpPr txBox="1"/>
-          <p:nvPr/>
-        </p:nvSpPr>
-        <p:spPr>
-          <a:xfrm>
-            <a:off x="594360" y="5660136"/>
-            <a:ext cx="438912" cy="438912"/>
-          </a:xfrm>
-          <a:prstGeom prst="rect">
-            <a:avLst/>
-          </a:prstGeom>
-          <a:noFill/>
-        </p:spPr>
-        <p:txBody>
-          <a:bodyPr wrap="square" anchor="ctr"/>
-          <a:lstStyle/>
-          <a:p>
-            <a:pPr algn="ctr"/>
-            <a:r>
-              <a:rPr sz="1600" b="1" i="0">
-                <a:solidFill>
-                  <a:srgbClr val="FFFFFF"/>
-                </a:solidFill>
-                <a:latin typeface="Calibri"/>
-              </a:rPr>
-              <a:t>5</a:t>
-            </a:r>
-          </a:p>
-        </p:txBody>
-      </p:sp>
-      <p:sp>
-        <p:nvSpPr>
-          <p:cNvPr id="24" name="TextBox 23"/>
-          <p:cNvSpPr txBox="1"/>
-          <p:nvPr/>
-        </p:nvSpPr>
-        <p:spPr>
-          <a:xfrm>
-            <a:off x="1188720" y="5495544"/>
-            <a:ext cx="10271455" cy="786384"/>
-          </a:xfrm>
-          <a:prstGeom prst="rect">
-            <a:avLst/>
-          </a:prstGeom>
-          <a:noFill/>
-        </p:spPr>
-        <p:txBody>
-          <a:bodyPr wrap="square" anchor="ctr"/>
-          <a:lstStyle/>
-          <a:p>
-            <a:r>
-              <a:rPr sz="1400" b="1" i="0">
-                <a:solidFill>
-                  <a:srgbClr val="095292"/>
-                </a:solidFill>
-                <a:latin typeface="Calibri"/>
-              </a:rPr>
-              <a:t>Paso 5. Hagan prueba de pasillo con otro compañero, denle la tarea registrar la mascota Luna de la señora Perez y encontrar su ficha, no le expliquen nada, cronometren, cuenten clics y anoten los dos puntos donde dudo; escriban abajo los dos cambios concretos que haran al diseño por lo observado.</a:t>
-            </a:r>
-          </a:p>
-        </p:txBody>
-      </p:sp>
-      <p:sp>
-        <p:nvSpPr>
-          <p:cNvPr id="25" name="TextBox 24"/>
+          <a:bodyPr wrap="square">
+            <a:spAutoFit/>
+          </a:bodyPr>
+          <a:lstStyle/>
+          <a:p>
+            <a:pPr>
+              <a:spcAft>
+                <a:spcPts val="800"/>
+              </a:spcAft>
+            </a:pPr>
+            <a:r>
+              <a:rPr sz="2000" b="0" i="0">
+                <a:solidFill>
+                  <a:srgbClr val="333333"/>
+                </a:solidFill>
+                <a:latin typeface="Calibri"/>
+              </a:rPr>
+              <a:t>–   La interfaz no se inventa: se deriva de los artefactos que el equipo ya construyo en las clases anteriores.</a:t>
+            </a:r>
+          </a:p>
+          <a:p>
+            <a:pPr>
+              <a:spcAft>
+                <a:spcPts val="800"/>
+              </a:spcAft>
+            </a:pPr>
+            <a:r>
+              <a:rPr sz="2000" b="0" i="0">
+                <a:solidFill>
+                  <a:srgbClr val="333333"/>
+                </a:solidFill>
+                <a:latin typeface="Calibri"/>
+              </a:rPr>
+              <a:t>–   Cada pantalla debe poder señalar el requisito funcional que la origina, cada campo debe existir en el diccionario de datos con su tipo y su longitud</a:t>
+            </a:r>
+          </a:p>
+          <a:p>
+            <a:pPr>
+              <a:spcAft>
+                <a:spcPts val="800"/>
+              </a:spcAft>
+            </a:pPr>
+            <a:r>
+              <a:rPr sz="2000" b="0" i="0">
+                <a:solidFill>
+                  <a:srgbClr val="333333"/>
+                </a:solidFill>
+                <a:latin typeface="Calibri"/>
+              </a:rPr>
+              <a:t>–   Y cada boton debe corresponder a una operacion que aparece en el diagrama de casos de uso o en el de secuencia.</a:t>
+            </a:r>
+          </a:p>
+          <a:p>
+            <a:pPr>
+              <a:spcAft>
+                <a:spcPts val="800"/>
+              </a:spcAft>
+            </a:pPr>
+            <a:r>
+              <a:rPr sz="2000" b="0" i="0">
+                <a:solidFill>
+                  <a:srgbClr val="333333"/>
+                </a:solidFill>
+                <a:latin typeface="Calibri"/>
+              </a:rPr>
+              <a:t>–   Por eso los wireframes se entregan anotados: se ponen numeritos sobre el dibujo y al lado una tabla que dice, por ejemplo</a:t>
+            </a:r>
+          </a:p>
+          <a:p>
+            <a:pPr>
+              <a:spcAft>
+                <a:spcPts val="800"/>
+              </a:spcAft>
+            </a:pPr>
+            <a:r>
+              <a:rPr sz="2000" b="0" i="0">
+                <a:solidFill>
+                  <a:srgbClr val="333333"/>
+                </a:solidFill>
+                <a:latin typeface="Calibri"/>
+              </a:rPr>
+              <a:t>–   El numero uno es el campo Nombre de la mascota que sale del atributo Mascota.nombre, texto de sesenta caracteres, obligatorio, exigido por RF-03</a:t>
+            </a:r>
+          </a:p>
+        </p:txBody>
+      </p:sp>
+      <p:sp>
+        <p:nvSpPr>
+          <p:cNvPr id="6" name="TextBox 5"/>
           <p:cNvSpPr txBox="1"/>
           <p:nvPr/>
         </p:nvSpPr>
@@ -4575,154 +3912,21 @@
                 </a:solidFill>
                 <a:latin typeface="Calibri"/>
               </a:rPr>
-              <a:t>Antes de entregar — autochequeo</a:t>
-            </a:r>
-          </a:p>
-        </p:txBody>
-      </p:sp>
-      <p:sp>
-        <p:nvSpPr>
-          <p:cNvPr id="5" name="Rounded Rectangle 4"/>
-          <p:cNvSpPr/>
-          <p:nvPr/>
-        </p:nvSpPr>
-        <p:spPr>
-          <a:xfrm>
-            <a:off x="457200" y="1261872"/>
-            <a:ext cx="11277295" cy="566928"/>
-          </a:xfrm>
-          <a:prstGeom prst="roundRect">
-            <a:avLst>
-              <a:gd name="adj" fmla="val 12000"/>
-            </a:avLst>
-          </a:prstGeom>
-          <a:solidFill>
-            <a:srgbClr val="F2F2F2"/>
-          </a:solidFill>
-          <a:ln>
-            <a:noFill/>
-          </a:ln>
-        </p:spPr>
-        <p:style>
-          <a:lnRef idx="1">
-            <a:schemeClr val="accent1"/>
-          </a:lnRef>
-          <a:fillRef idx="3">
-            <a:schemeClr val="accent1"/>
-          </a:fillRef>
-          <a:effectRef idx="2">
-            <a:schemeClr val="accent1"/>
-          </a:effectRef>
-          <a:fontRef idx="minor">
-            <a:schemeClr val="lt1"/>
-          </a:fontRef>
-        </p:style>
-        <p:txBody>
-          <a:bodyPr rtlCol="0" anchor="ctr"/>
-          <a:lstStyle/>
-          <a:p>
-            <a:pPr algn="ctr"/>
-          </a:p>
-        </p:txBody>
-      </p:sp>
-      <p:sp>
-        <p:nvSpPr>
-          <p:cNvPr id="6" name="Rectangle 5"/>
-          <p:cNvSpPr/>
-          <p:nvPr/>
-        </p:nvSpPr>
-        <p:spPr>
-          <a:xfrm>
-            <a:off x="640080" y="1408175"/>
-            <a:ext cx="274320" cy="274320"/>
-          </a:xfrm>
-          <a:prstGeom prst="rect">
-            <a:avLst/>
-          </a:prstGeom>
-          <a:solidFill>
-            <a:srgbClr val="FFFFFF"/>
-          </a:solidFill>
-          <a:ln>
-            <a:solidFill>
-              <a:srgbClr val="333333"/>
-            </a:solidFill>
-          </a:ln>
-        </p:spPr>
-        <p:style>
-          <a:lnRef idx="1">
-            <a:schemeClr val="accent1"/>
-          </a:lnRef>
-          <a:fillRef idx="3">
-            <a:schemeClr val="accent1"/>
-          </a:fillRef>
-          <a:effectRef idx="2">
-            <a:schemeClr val="accent1"/>
-          </a:effectRef>
-          <a:fontRef idx="minor">
-            <a:schemeClr val="lt1"/>
-          </a:fontRef>
-        </p:style>
-        <p:txBody>
-          <a:bodyPr rtlCol="0" anchor="ctr"/>
-          <a:lstStyle/>
-          <a:p>
-            <a:pPr algn="ctr"/>
-          </a:p>
-        </p:txBody>
-      </p:sp>
-      <p:sp>
-        <p:nvSpPr>
-          <p:cNvPr id="7" name="Rectangle 6"/>
-          <p:cNvSpPr/>
-          <p:nvPr/>
-        </p:nvSpPr>
-        <p:spPr>
-          <a:xfrm>
-            <a:off x="640080" y="1408175"/>
-            <a:ext cx="73152" cy="274320"/>
-          </a:xfrm>
-          <a:prstGeom prst="rect">
-            <a:avLst/>
-          </a:prstGeom>
-          <a:solidFill>
-            <a:srgbClr val="269CCB"/>
-          </a:solidFill>
-          <a:ln>
-            <a:noFill/>
-          </a:ln>
-        </p:spPr>
-        <p:style>
-          <a:lnRef idx="1">
-            <a:schemeClr val="accent1"/>
-          </a:lnRef>
-          <a:fillRef idx="3">
-            <a:schemeClr val="accent1"/>
-          </a:fillRef>
-          <a:effectRef idx="2">
-            <a:schemeClr val="accent1"/>
-          </a:effectRef>
-          <a:fontRef idx="minor">
-            <a:schemeClr val="lt1"/>
-          </a:fontRef>
-        </p:style>
-        <p:txBody>
-          <a:bodyPr rtlCol="0" anchor="ctr"/>
-          <a:lstStyle/>
-          <a:p>
-            <a:pPr algn="ctr"/>
-          </a:p>
-        </p:txBody>
-      </p:sp>
-      <p:sp>
-        <p:nvSpPr>
-          <p:cNvPr id="8" name="TextBox 7"/>
+              <a:t>La interfaz no se inventa: se deriva de los artefactos que el equipo ya... (2/2)</a:t>
+            </a:r>
+          </a:p>
+        </p:txBody>
+      </p:sp>
+      <p:sp>
+        <p:nvSpPr>
+          <p:cNvPr id="5" name="TextBox 4"/>
           <p:cNvSpPr txBox="1"/>
           <p:nvPr/>
         </p:nvSpPr>
         <p:spPr>
           <a:xfrm>
-            <a:off x="1097280" y="1353312"/>
-            <a:ext cx="10362895" cy="402336"/>
+            <a:off x="457200" y="1170432"/>
+            <a:ext cx="11277295" cy="5230368"/>
           </a:xfrm>
           <a:prstGeom prst="rect">
             <a:avLst/>
@@ -4730,354 +3934,79 @@
           <a:noFill/>
         </p:spPr>
         <p:txBody>
-          <a:bodyPr wrap="square" anchor="ctr"/>
-          <a:lstStyle/>
-          <a:p>
-            <a:r>
-              <a:rPr sz="1500" b="0" i="0">
+          <a:bodyPr wrap="square">
+            <a:spAutoFit/>
+          </a:bodyPr>
+          <a:lstStyle/>
+          <a:p>
+            <a:pPr>
+              <a:spcAft>
+                <a:spcPts val="800"/>
+              </a:spcAft>
+            </a:pPr>
+            <a:r>
+              <a:rPr sz="2000" b="0" i="0">
                 <a:solidFill>
                   <a:srgbClr val="333333"/>
                 </a:solidFill>
                 <a:latin typeface="Calibri"/>
               </a:rPr>
-              <a:t>Si la recepcionista oprime Guardar y se va al telefono treinta segundos, cuando vuelva a mirar la pantalla sabe con certeza si el registro quedo o no quedo, y por que lo sabe.</a:t>
-            </a:r>
-          </a:p>
-        </p:txBody>
-      </p:sp>
-      <p:sp>
-        <p:nvSpPr>
-          <p:cNvPr id="9" name="Rounded Rectangle 8"/>
-          <p:cNvSpPr/>
-          <p:nvPr/>
-        </p:nvSpPr>
-        <p:spPr>
-          <a:xfrm>
-            <a:off x="457200" y="1938528"/>
-            <a:ext cx="11277295" cy="566928"/>
-          </a:xfrm>
-          <a:prstGeom prst="roundRect">
-            <a:avLst>
-              <a:gd name="adj" fmla="val 12000"/>
-            </a:avLst>
-          </a:prstGeom>
-          <a:solidFill>
-            <a:srgbClr val="F2F2F2"/>
-          </a:solidFill>
-          <a:ln>
-            <a:noFill/>
-          </a:ln>
-        </p:spPr>
-        <p:style>
-          <a:lnRef idx="1">
-            <a:schemeClr val="accent1"/>
-          </a:lnRef>
-          <a:fillRef idx="3">
-            <a:schemeClr val="accent1"/>
-          </a:fillRef>
-          <a:effectRef idx="2">
-            <a:schemeClr val="accent1"/>
-          </a:effectRef>
-          <a:fontRef idx="minor">
-            <a:schemeClr val="lt1"/>
-          </a:fontRef>
-        </p:style>
-        <p:txBody>
-          <a:bodyPr rtlCol="0" anchor="ctr"/>
-          <a:lstStyle/>
-          <a:p>
-            <a:pPr algn="ctr"/>
-          </a:p>
-        </p:txBody>
-      </p:sp>
-      <p:sp>
-        <p:nvSpPr>
-          <p:cNvPr id="10" name="Rectangle 9"/>
-          <p:cNvSpPr/>
-          <p:nvPr/>
-        </p:nvSpPr>
-        <p:spPr>
-          <a:xfrm>
-            <a:off x="640080" y="2084832"/>
-            <a:ext cx="274320" cy="274320"/>
-          </a:xfrm>
-          <a:prstGeom prst="rect">
-            <a:avLst/>
-          </a:prstGeom>
-          <a:solidFill>
-            <a:srgbClr val="FFFFFF"/>
-          </a:solidFill>
-          <a:ln>
-            <a:solidFill>
-              <a:srgbClr val="333333"/>
-            </a:solidFill>
-          </a:ln>
-        </p:spPr>
-        <p:style>
-          <a:lnRef idx="1">
-            <a:schemeClr val="accent1"/>
-          </a:lnRef>
-          <a:fillRef idx="3">
-            <a:schemeClr val="accent1"/>
-          </a:fillRef>
-          <a:effectRef idx="2">
-            <a:schemeClr val="accent1"/>
-          </a:effectRef>
-          <a:fontRef idx="minor">
-            <a:schemeClr val="lt1"/>
-          </a:fontRef>
-        </p:style>
-        <p:txBody>
-          <a:bodyPr rtlCol="0" anchor="ctr"/>
-          <a:lstStyle/>
-          <a:p>
-            <a:pPr algn="ctr"/>
-          </a:p>
-        </p:txBody>
-      </p:sp>
-      <p:sp>
-        <p:nvSpPr>
-          <p:cNvPr id="11" name="Rectangle 10"/>
-          <p:cNvSpPr/>
-          <p:nvPr/>
-        </p:nvSpPr>
-        <p:spPr>
-          <a:xfrm>
-            <a:off x="640080" y="2084832"/>
-            <a:ext cx="73152" cy="274320"/>
-          </a:xfrm>
-          <a:prstGeom prst="rect">
-            <a:avLst/>
-          </a:prstGeom>
-          <a:solidFill>
-            <a:srgbClr val="269CCB"/>
-          </a:solidFill>
-          <a:ln>
-            <a:noFill/>
-          </a:ln>
-        </p:spPr>
-        <p:style>
-          <a:lnRef idx="1">
-            <a:schemeClr val="accent1"/>
-          </a:lnRef>
-          <a:fillRef idx="3">
-            <a:schemeClr val="accent1"/>
-          </a:fillRef>
-          <a:effectRef idx="2">
-            <a:schemeClr val="accent1"/>
-          </a:effectRef>
-          <a:fontRef idx="minor">
-            <a:schemeClr val="lt1"/>
-          </a:fontRef>
-        </p:style>
-        <p:txBody>
-          <a:bodyPr rtlCol="0" anchor="ctr"/>
-          <a:lstStyle/>
-          <a:p>
-            <a:pPr algn="ctr"/>
-          </a:p>
-        </p:txBody>
-      </p:sp>
-      <p:sp>
-        <p:nvSpPr>
-          <p:cNvPr id="12" name="TextBox 11"/>
-          <p:cNvSpPr txBox="1"/>
-          <p:nvPr/>
-        </p:nvSpPr>
-        <p:spPr>
-          <a:xfrm>
-            <a:off x="1097280" y="2029968"/>
-            <a:ext cx="10362895" cy="402336"/>
-          </a:xfrm>
-          <a:prstGeom prst="rect">
-            <a:avLst/>
-          </a:prstGeom>
-          <a:noFill/>
-        </p:spPr>
-        <p:txBody>
-          <a:bodyPr wrap="square" anchor="ctr"/>
-          <a:lstStyle/>
-          <a:p>
-            <a:r>
-              <a:rPr sz="1500" b="0" i="0">
+              <a:t>–   El numero cuatro es el mensaje de confirmacion que cumple el RNF-02 de respuesta menor a tres segundos.</a:t>
+            </a:r>
+          </a:p>
+          <a:p>
+            <a:pPr>
+              <a:spcAft>
+                <a:spcPts val="800"/>
+              </a:spcAft>
+            </a:pPr>
+            <a:r>
+              <a:rPr sz="2000" b="0" i="0">
                 <a:solidFill>
                   <a:srgbClr val="333333"/>
                 </a:solidFill>
                 <a:latin typeface="Calibri"/>
               </a:rPr>
-              <a:t>De los campos que dibujaron, cuantos podria llenar mal una persona apurada, y cual de esos errores se puede volver imposible en vez de corregible.</a:t>
-            </a:r>
-          </a:p>
-        </p:txBody>
-      </p:sp>
-      <p:sp>
-        <p:nvSpPr>
-          <p:cNvPr id="13" name="Rounded Rectangle 12"/>
-          <p:cNvSpPr/>
-          <p:nvPr/>
-        </p:nvSpPr>
-        <p:spPr>
-          <a:xfrm>
-            <a:off x="457200" y="2615184"/>
-            <a:ext cx="11277295" cy="566928"/>
-          </a:xfrm>
-          <a:prstGeom prst="roundRect">
-            <a:avLst>
-              <a:gd name="adj" fmla="val 12000"/>
-            </a:avLst>
-          </a:prstGeom>
-          <a:solidFill>
-            <a:srgbClr val="F2F2F2"/>
-          </a:solidFill>
-          <a:ln>
-            <a:noFill/>
-          </a:ln>
-        </p:spPr>
-        <p:style>
-          <a:lnRef idx="1">
-            <a:schemeClr val="accent1"/>
-          </a:lnRef>
-          <a:fillRef idx="3">
-            <a:schemeClr val="accent1"/>
-          </a:fillRef>
-          <a:effectRef idx="2">
-            <a:schemeClr val="accent1"/>
-          </a:effectRef>
-          <a:fontRef idx="minor">
-            <a:schemeClr val="lt1"/>
-          </a:fontRef>
-        </p:style>
-        <p:txBody>
-          <a:bodyPr rtlCol="0" anchor="ctr"/>
-          <a:lstStyle/>
-          <a:p>
-            <a:pPr algn="ctr"/>
-          </a:p>
-        </p:txBody>
-      </p:sp>
-      <p:sp>
-        <p:nvSpPr>
-          <p:cNvPr id="14" name="Rectangle 13"/>
-          <p:cNvSpPr/>
-          <p:nvPr/>
-        </p:nvSpPr>
-        <p:spPr>
-          <a:xfrm>
-            <a:off x="640080" y="2761488"/>
-            <a:ext cx="274320" cy="274320"/>
-          </a:xfrm>
-          <a:prstGeom prst="rect">
-            <a:avLst/>
-          </a:prstGeom>
-          <a:solidFill>
-            <a:srgbClr val="FFFFFF"/>
-          </a:solidFill>
-          <a:ln>
-            <a:solidFill>
-              <a:srgbClr val="333333"/>
-            </a:solidFill>
-          </a:ln>
-        </p:spPr>
-        <p:style>
-          <a:lnRef idx="1">
-            <a:schemeClr val="accent1"/>
-          </a:lnRef>
-          <a:fillRef idx="3">
-            <a:schemeClr val="accent1"/>
-          </a:fillRef>
-          <a:effectRef idx="2">
-            <a:schemeClr val="accent1"/>
-          </a:effectRef>
-          <a:fontRef idx="minor">
-            <a:schemeClr val="lt1"/>
-          </a:fontRef>
-        </p:style>
-        <p:txBody>
-          <a:bodyPr rtlCol="0" anchor="ctr"/>
-          <a:lstStyle/>
-          <a:p>
-            <a:pPr algn="ctr"/>
-          </a:p>
-        </p:txBody>
-      </p:sp>
-      <p:sp>
-        <p:nvSpPr>
-          <p:cNvPr id="15" name="Rectangle 14"/>
-          <p:cNvSpPr/>
-          <p:nvPr/>
-        </p:nvSpPr>
-        <p:spPr>
-          <a:xfrm>
-            <a:off x="640080" y="2761488"/>
-            <a:ext cx="73152" cy="274320"/>
-          </a:xfrm>
-          <a:prstGeom prst="rect">
-            <a:avLst/>
-          </a:prstGeom>
-          <a:solidFill>
-            <a:srgbClr val="269CCB"/>
-          </a:solidFill>
-          <a:ln>
-            <a:noFill/>
-          </a:ln>
-        </p:spPr>
-        <p:style>
-          <a:lnRef idx="1">
-            <a:schemeClr val="accent1"/>
-          </a:lnRef>
-          <a:fillRef idx="3">
-            <a:schemeClr val="accent1"/>
-          </a:fillRef>
-          <a:effectRef idx="2">
-            <a:schemeClr val="accent1"/>
-          </a:effectRef>
-          <a:fontRef idx="minor">
-            <a:schemeClr val="lt1"/>
-          </a:fontRef>
-        </p:style>
-        <p:txBody>
-          <a:bodyPr rtlCol="0" anchor="ctr"/>
-          <a:lstStyle/>
-          <a:p>
-            <a:pPr algn="ctr"/>
-          </a:p>
-        </p:txBody>
-      </p:sp>
-      <p:sp>
-        <p:nvSpPr>
-          <p:cNvPr id="16" name="TextBox 15"/>
-          <p:cNvSpPr txBox="1"/>
-          <p:nvPr/>
-        </p:nvSpPr>
-        <p:spPr>
-          <a:xfrm>
-            <a:off x="1097280" y="2706624"/>
-            <a:ext cx="10362895" cy="402336"/>
-          </a:xfrm>
-          <a:prstGeom prst="rect">
-            <a:avLst/>
-          </a:prstGeom>
-          <a:noFill/>
-        </p:spPr>
-        <p:txBody>
-          <a:bodyPr wrap="square" anchor="ctr"/>
-          <a:lstStyle/>
-          <a:p>
-            <a:r>
-              <a:rPr sz="1500" b="0" i="0">
+              <a:t>–   Esa anotacion tiene un efecto secundario muy util: si aparece un campo en la pantalla que no esta en el diccionario de datos, entonces o falta un requisito o sobra el campo</a:t>
+            </a:r>
+          </a:p>
+          <a:p>
+            <a:pPr>
+              <a:spcAft>
+                <a:spcPts val="800"/>
+              </a:spcAft>
+            </a:pPr>
+            <a:r>
+              <a:rPr sz="2000" b="0" i="0">
                 <a:solidFill>
                   <a:srgbClr val="333333"/>
                 </a:solidFill>
                 <a:latin typeface="Calibri"/>
               </a:rPr>
-              <a:t>Si la busqueda por nombre devuelve doce mascotas llamadas Firulais, que dato adicional muestra la lista para que la recepcionista escoja la correcta sin abrir ninguna ficha.</a:t>
-            </a:r>
-          </a:p>
-        </p:txBody>
-      </p:sp>
-      <p:sp>
-        <p:nvSpPr>
-          <p:cNvPr id="17" name="TextBox 16"/>
+              <a:t>–   Y ambas cosas hay que resolverlas hoy y no cuando el compañero de Programacion II ya escribio la tabla.</a:t>
+            </a:r>
+          </a:p>
+          <a:p>
+            <a:pPr>
+              <a:spcAft>
+                <a:spcPts val="800"/>
+              </a:spcAft>
+            </a:pPr>
+            <a:r>
+              <a:rPr sz="2000" b="0" i="0">
+                <a:solidFill>
+                  <a:srgbClr val="333333"/>
+                </a:solidFill>
+                <a:latin typeface="Calibri"/>
+              </a:rPr>
+              <a:t>–   La trazabilidad no es burocracia, es el mecanismo que hace que los planos y la casa coincidan.</a:t>
+            </a:r>
+          </a:p>
+        </p:txBody>
+      </p:sp>
+      <p:sp>
+        <p:nvSpPr>
+          <p:cNvPr id="6" name="TextBox 5"/>
           <p:cNvSpPr txBox="1"/>
           <p:nvPr/>
         </p:nvSpPr>
@@ -5251,7 +4180,7 @@
                 </a:solidFill>
                 <a:latin typeface="Calibri"/>
               </a:rPr>
-              <a:t>Criterios de exito / entregable</a:t>
+              <a:t>Una interfaz se puede evaluar sin programarla, y esa es una de las... (1/2)</a:t>
             </a:r>
           </a:p>
         </p:txBody>
@@ -5290,25 +4219,7 @@
                 </a:solidFill>
                 <a:latin typeface="Calibri"/>
               </a:rPr>
-              <a:t>–   </a:t>
-            </a:r>
-            <a:r>
-              <a:rPr sz="2000" b="1" i="0">
-                <a:solidFill>
-                  <a:srgbClr val="333333"/>
-                </a:solidFill>
-                <a:latin typeface="Calibri"/>
-              </a:rPr>
-              <a:t>Entregable:</a:t>
-            </a:r>
-            <a:r>
-              <a:rPr sz="2000" b="0" i="0">
-                <a:solidFill>
-                  <a:srgbClr val="333333"/>
-                </a:solidFill>
-                <a:latin typeface="Calibri"/>
-              </a:rPr>
-              <a:t> Un archivo de Figma o Penpot con las dos pantallas anotadas y minimo tres transiciones navegables, mas la hoja de anotaciones que amarra cada campo a un RF y a un atributo del diccionario de datos, subido a la plataforma del curso.</a:t>
+              <a:t>–   Una interfaz se puede evaluar sin programarla, y esa es una de las habilidades mas valiosas que se lleva un analista.</a:t>
             </a:r>
           </a:p>
           <a:p>
@@ -5324,25 +4235,7 @@
                 </a:solidFill>
                 <a:latin typeface="Calibri"/>
               </a:rPr>
-              <a:t>–   </a:t>
-            </a:r>
-            <a:r>
-              <a:rPr sz="2000" b="1" i="0">
-                <a:solidFill>
-                  <a:srgbClr val="333333"/>
-                </a:solidFill>
-                <a:latin typeface="Calibri"/>
-              </a:rPr>
-              <a:t>Exito:</a:t>
-            </a:r>
-            <a:r>
-              <a:rPr sz="2000" b="0" i="0">
-                <a:solidFill>
-                  <a:srgbClr val="333333"/>
-                </a:solidFill>
-                <a:latin typeface="Calibri"/>
-              </a:rPr>
-              <a:t> Las dos pantallas se entregan primero como wireframe en gris y luego como mockup, y ambas versiones estan en el archivo entregado.</a:t>
+              <a:t>–   El metodo mas barato es el recorrido cognitivo: se toma una tarea concreta, por ejemplo registrar la mascota Luna de la señora Perez</a:t>
             </a:r>
           </a:p>
           <a:p>
@@ -5358,25 +4251,7 @@
                 </a:solidFill>
                 <a:latin typeface="Calibri"/>
               </a:rPr>
-              <a:t>–   </a:t>
-            </a:r>
-            <a:r>
-              <a:rPr sz="2000" b="1" i="0">
-                <a:solidFill>
-                  <a:srgbClr val="333333"/>
-                </a:solidFill>
-                <a:latin typeface="Calibri"/>
-              </a:rPr>
-              <a:t>Exito:</a:t>
-            </a:r>
-            <a:r>
-              <a:rPr sz="2000" b="0" i="0">
-                <a:solidFill>
-                  <a:srgbClr val="333333"/>
-                </a:solidFill>
-                <a:latin typeface="Calibri"/>
-              </a:rPr>
-              <a:t> Cada campo dibujado aparece en la tabla de anotaciones con su atributo del diccionario de datos y el RF que lo exige, sin campos huerfanos.</a:t>
+              <a:t>–   Y una persona que no participo en el diseño intenta hacerla sobre el prototipo sin que nadie le explique nada, mientras usted cuenta cuantos clics necesito, donde dudo y donde se equivoco.</a:t>
             </a:r>
           </a:p>
           <a:p>
@@ -5392,93 +4267,7 @@
                 </a:solidFill>
                 <a:latin typeface="Calibri"/>
               </a:rPr>
-              <a:t>–   </a:t>
-            </a:r>
-            <a:r>
-              <a:rPr sz="2000" b="1" i="0">
-                <a:solidFill>
-                  <a:srgbClr val="333333"/>
-                </a:solidFill>
-                <a:latin typeface="Calibri"/>
-              </a:rPr>
-              <a:t>Exito:</a:t>
-            </a:r>
-            <a:r>
-              <a:rPr sz="2000" b="0" i="0">
-                <a:solidFill>
-                  <a:srgbClr val="333333"/>
-                </a:solidFill>
-                <a:latin typeface="Calibri"/>
-              </a:rPr>
-              <a:t> El prototipo tiene al menos tres transiciones que funcionan al hacer clic y cubre minimo dos caminos alternos, entre ellos resultados multiples o dueño no registrado.</a:t>
-            </a:r>
-          </a:p>
-          <a:p>
-            <a:pPr>
-              <a:spcAft>
-                <a:spcPts val="800"/>
-              </a:spcAft>
-            </a:pPr>
-            <a:r>
-              <a:rPr sz="2000" b="0" i="0">
-                <a:solidFill>
-                  <a:srgbClr val="333333"/>
-                </a:solidFill>
-                <a:latin typeface="Calibri"/>
-              </a:rPr>
-              <a:t>–   </a:t>
-            </a:r>
-            <a:r>
-              <a:rPr sz="2000" b="1" i="0">
-                <a:solidFill>
-                  <a:srgbClr val="333333"/>
-                </a:solidFill>
-                <a:latin typeface="Calibri"/>
-              </a:rPr>
-              <a:t>Exito:</a:t>
-            </a:r>
-            <a:r>
-              <a:rPr sz="2000" b="0" i="0">
-                <a:solidFill>
-                  <a:srgbClr val="333333"/>
-                </a:solidFill>
-                <a:latin typeface="Calibri"/>
-              </a:rPr>
-              <a:t> El diseño evidencia por escrito los cuatro principios trabajados: hay mensaje de estado tras guardar, hay al menos dos mecanismos de prevencion de errores, los botones principales son consistentes entre pantallas y las listas cerradas reemplazan los campos de memoria.</a:t>
-            </a:r>
-          </a:p>
-          <a:p>
-            <a:pPr>
-              <a:spcAft>
-                <a:spcPts val="800"/>
-              </a:spcAft>
-            </a:pPr>
-            <a:r>
-              <a:rPr sz="2000" b="0" i="0">
-                <a:solidFill>
-                  <a:srgbClr val="333333"/>
-                </a:solidFill>
-                <a:latin typeface="Calibri"/>
-              </a:rPr>
-              <a:t>–   </a:t>
-            </a:r>
-            <a:r>
-              <a:rPr sz="2000" b="1" i="0">
-                <a:solidFill>
-                  <a:srgbClr val="333333"/>
-                </a:solidFill>
-                <a:latin typeface="Calibri"/>
-              </a:rPr>
-              <a:t>Entrega en la plataforma del curso</a:t>
-            </a:r>
-            <a:r>
-              <a:rPr sz="2000" b="0" i="0">
-                <a:solidFill>
-                  <a:srgbClr val="333333"/>
-                </a:solidFill>
-                <a:latin typeface="Calibri"/>
-              </a:rPr>
-              <a:t> — en la fecha que indique el docente.</a:t>
+              <a:t>–   La variante de bolsillo es la prueba de pasillo: se le pide a tres compañeros de otro grupo que lo intenten y se anota, sin defenderse ni explicar.</a:t>
             </a:r>
           </a:p>
         </p:txBody>
@@ -5659,109 +4448,21 @@
                 </a:solidFill>
                 <a:latin typeface="Calibri"/>
               </a:rPr>
-              <a:t>Para el PI esta semana</a:t>
-            </a:r>
-          </a:p>
-        </p:txBody>
-      </p:sp>
-      <p:sp>
-        <p:nvSpPr>
-          <p:cNvPr id="5" name="Rounded Rectangle 4"/>
-          <p:cNvSpPr/>
-          <p:nvPr/>
-        </p:nvSpPr>
-        <p:spPr>
-          <a:xfrm>
-            <a:off x="457200" y="1261872"/>
-            <a:ext cx="11277295" cy="1051560"/>
-          </a:xfrm>
-          <a:prstGeom prst="roundRect">
-            <a:avLst>
-              <a:gd name="adj" fmla="val 12000"/>
-            </a:avLst>
-          </a:prstGeom>
-          <a:solidFill>
-            <a:srgbClr val="E8F4FA"/>
-          </a:solidFill>
-          <a:ln>
-            <a:noFill/>
-          </a:ln>
-        </p:spPr>
-        <p:style>
-          <a:lnRef idx="1">
-            <a:schemeClr val="accent1"/>
-          </a:lnRef>
-          <a:fillRef idx="3">
-            <a:schemeClr val="accent1"/>
-          </a:fillRef>
-          <a:effectRef idx="2">
-            <a:schemeClr val="accent1"/>
-          </a:effectRef>
-          <a:fontRef idx="minor">
-            <a:schemeClr val="lt1"/>
-          </a:fontRef>
-        </p:style>
-        <p:txBody>
-          <a:bodyPr rtlCol="0" anchor="ctr"/>
-          <a:lstStyle/>
-          <a:p>
-            <a:pPr algn="ctr"/>
-          </a:p>
-        </p:txBody>
-      </p:sp>
-      <p:sp>
-        <p:nvSpPr>
-          <p:cNvPr id="6" name="Rectangle 5"/>
-          <p:cNvSpPr/>
-          <p:nvPr/>
-        </p:nvSpPr>
-        <p:spPr>
-          <a:xfrm>
-            <a:off x="457200" y="1261872"/>
-            <a:ext cx="128016" cy="1051560"/>
-          </a:xfrm>
-          <a:prstGeom prst="rect">
-            <a:avLst/>
-          </a:prstGeom>
-          <a:solidFill>
-            <a:srgbClr val="269CCB"/>
-          </a:solidFill>
-          <a:ln>
-            <a:noFill/>
-          </a:ln>
-        </p:spPr>
-        <p:style>
-          <a:lnRef idx="1">
-            <a:schemeClr val="accent1"/>
-          </a:lnRef>
-          <a:fillRef idx="3">
-            <a:schemeClr val="accent1"/>
-          </a:fillRef>
-          <a:effectRef idx="2">
-            <a:schemeClr val="accent1"/>
-          </a:effectRef>
-          <a:fontRef idx="minor">
-            <a:schemeClr val="lt1"/>
-          </a:fontRef>
-        </p:style>
-        <p:txBody>
-          <a:bodyPr rtlCol="0" anchor="ctr"/>
-          <a:lstStyle/>
-          <a:p>
-            <a:pPr algn="ctr"/>
-          </a:p>
-        </p:txBody>
-      </p:sp>
-      <p:sp>
-        <p:nvSpPr>
-          <p:cNvPr id="7" name="TextBox 6"/>
+              <a:t>Una interfaz se puede evaluar sin programarla, y esa es una de las... (2/2)</a:t>
+            </a:r>
+          </a:p>
+        </p:txBody>
+      </p:sp>
+      <p:sp>
+        <p:nvSpPr>
+          <p:cNvPr id="5" name="TextBox 4"/>
           <p:cNvSpPr txBox="1"/>
           <p:nvPr/>
         </p:nvSpPr>
         <p:spPr>
           <a:xfrm>
-            <a:off x="777240" y="1399031"/>
-            <a:ext cx="10774375" cy="822959"/>
+            <a:off x="457200" y="1170432"/>
+            <a:ext cx="11277295" cy="5230368"/>
           </a:xfrm>
           <a:prstGeom prst="rect">
             <a:avLst/>
@@ -5774,313 +4475,58 @@
           </a:bodyPr>
           <a:lstStyle/>
           <a:p>
-            <a:r>
-              <a:rPr sz="1200" b="1" i="0">
-                <a:solidFill>
-                  <a:srgbClr val="269CCB"/>
-                </a:solidFill>
-                <a:latin typeface="Calibri"/>
-              </a:rPr>
-              <a:t>Info</a:t>
-            </a:r>
-          </a:p>
-          <a:p>
             <a:pPr>
-              <a:spcBef>
-                <a:spcPts val="400"/>
-              </a:spcBef>
+              <a:spcAft>
+                <a:spcPts val="800"/>
+              </a:spcAft>
             </a:pPr>
             <a:r>
-              <a:rPr sz="1400" b="0" i="0">
+              <a:rPr sz="2000" b="0" i="0">
                 <a:solidFill>
                   <a:srgbClr val="333333"/>
                 </a:solidFill>
                 <a:latin typeface="Calibri"/>
               </a:rPr>
-              <a:t>Hito: Quedan listas las pantallas de Registrar mascota y Buscar expediente de VetCare, anotadas y conectadas en un prototipo navegable.</a:t>
-            </a:r>
-          </a:p>
-        </p:txBody>
-      </p:sp>
-      <p:sp>
-        <p:nvSpPr>
-          <p:cNvPr id="8" name="Rounded Rectangle 7"/>
-          <p:cNvSpPr/>
-          <p:nvPr/>
-        </p:nvSpPr>
-        <p:spPr>
-          <a:xfrm>
-            <a:off x="457200" y="2478024"/>
-            <a:ext cx="11277295" cy="1051560"/>
-          </a:xfrm>
-          <a:prstGeom prst="roundRect">
-            <a:avLst>
-              <a:gd name="adj" fmla="val 12000"/>
-            </a:avLst>
-          </a:prstGeom>
-          <a:solidFill>
-            <a:srgbClr val="FFF8E1"/>
-          </a:solidFill>
-          <a:ln>
-            <a:noFill/>
-          </a:ln>
-        </p:spPr>
-        <p:style>
-          <a:lnRef idx="1">
-            <a:schemeClr val="accent1"/>
-          </a:lnRef>
-          <a:fillRef idx="3">
-            <a:schemeClr val="accent1"/>
-          </a:fillRef>
-          <a:effectRef idx="2">
-            <a:schemeClr val="accent1"/>
-          </a:effectRef>
-          <a:fontRef idx="minor">
-            <a:schemeClr val="lt1"/>
-          </a:fontRef>
-        </p:style>
-        <p:txBody>
-          <a:bodyPr rtlCol="0" anchor="ctr"/>
-          <a:lstStyle/>
-          <a:p>
-            <a:pPr algn="ctr"/>
-          </a:p>
-        </p:txBody>
-      </p:sp>
-      <p:sp>
-        <p:nvSpPr>
-          <p:cNvPr id="9" name="Rectangle 8"/>
-          <p:cNvSpPr/>
-          <p:nvPr/>
-        </p:nvSpPr>
-        <p:spPr>
-          <a:xfrm>
-            <a:off x="457200" y="2478024"/>
-            <a:ext cx="128016" cy="1051560"/>
-          </a:xfrm>
-          <a:prstGeom prst="rect">
-            <a:avLst/>
-          </a:prstGeom>
-          <a:solidFill>
-            <a:srgbClr val="FFD000"/>
-          </a:solidFill>
-          <a:ln>
-            <a:noFill/>
-          </a:ln>
-        </p:spPr>
-        <p:style>
-          <a:lnRef idx="1">
-            <a:schemeClr val="accent1"/>
-          </a:lnRef>
-          <a:fillRef idx="3">
-            <a:schemeClr val="accent1"/>
-          </a:fillRef>
-          <a:effectRef idx="2">
-            <a:schemeClr val="accent1"/>
-          </a:effectRef>
-          <a:fontRef idx="minor">
-            <a:schemeClr val="lt1"/>
-          </a:fontRef>
-        </p:style>
-        <p:txBody>
-          <a:bodyPr rtlCol="0" anchor="ctr"/>
-          <a:lstStyle/>
-          <a:p>
-            <a:pPr algn="ctr"/>
-          </a:p>
-        </p:txBody>
-      </p:sp>
-      <p:sp>
-        <p:nvSpPr>
-          <p:cNvPr id="10" name="TextBox 9"/>
-          <p:cNvSpPr txBox="1"/>
-          <p:nvPr/>
-        </p:nvSpPr>
-        <p:spPr>
-          <a:xfrm>
-            <a:off x="777240" y="2615184"/>
-            <a:ext cx="10774375" cy="822959"/>
-          </a:xfrm>
-          <a:prstGeom prst="rect">
-            <a:avLst/>
-          </a:prstGeom>
-          <a:noFill/>
-        </p:spPr>
-        <p:txBody>
-          <a:bodyPr wrap="square">
-            <a:spAutoFit/>
-          </a:bodyPr>
-          <a:lstStyle/>
-          <a:p>
-            <a:r>
-              <a:rPr sz="1200" b="1" i="0">
-                <a:solidFill>
-                  <a:srgbClr val="FFD000"/>
-                </a:solidFill>
-                <a:latin typeface="Calibri"/>
-              </a:rPr>
-              <a:t>Aclaración</a:t>
+              <a:t>–   Para VetCare hay que evaluar pensando en la usuaria real, que es la recepcionista de Huellitas: no es experta en computadores, escribe lento, contesta el telefono mientras registra y tiene un perro ladrando al lado.</a:t>
             </a:r>
           </a:p>
           <a:p>
             <a:pPr>
-              <a:spcBef>
-                <a:spcPts val="400"/>
-              </a:spcBef>
+              <a:spcAft>
+                <a:spcPts val="800"/>
+              </a:spcAft>
             </a:pPr>
             <a:r>
-              <a:rPr sz="1400" b="0" i="0">
+              <a:rPr sz="2000" b="0" i="0">
                 <a:solidFill>
                   <a:srgbClr val="333333"/>
                 </a:solidFill>
                 <a:latin typeface="Calibri"/>
               </a:rPr>
-              <a:t>Enunciado completo: Clases/Proyecto Integrador/ (VetCare).</a:t>
-            </a:r>
-          </a:p>
-        </p:txBody>
-      </p:sp>
-      <p:sp>
-        <p:nvSpPr>
-          <p:cNvPr id="11" name="Rounded Rectangle 10"/>
-          <p:cNvSpPr/>
-          <p:nvPr/>
-        </p:nvSpPr>
-        <p:spPr>
-          <a:xfrm>
-            <a:off x="457200" y="3694176"/>
-            <a:ext cx="11277295" cy="1051560"/>
-          </a:xfrm>
-          <a:prstGeom prst="roundRect">
-            <a:avLst>
-              <a:gd name="adj" fmla="val 12000"/>
-            </a:avLst>
-          </a:prstGeom>
-          <a:solidFill>
-            <a:srgbClr val="FBE4E4"/>
-          </a:solidFill>
-          <a:ln>
-            <a:noFill/>
-          </a:ln>
-        </p:spPr>
-        <p:style>
-          <a:lnRef idx="1">
-            <a:schemeClr val="accent1"/>
-          </a:lnRef>
-          <a:fillRef idx="3">
-            <a:schemeClr val="accent1"/>
-          </a:fillRef>
-          <a:effectRef idx="2">
-            <a:schemeClr val="accent1"/>
-          </a:effectRef>
-          <a:fontRef idx="minor">
-            <a:schemeClr val="lt1"/>
-          </a:fontRef>
-        </p:style>
-        <p:txBody>
-          <a:bodyPr rtlCol="0" anchor="ctr"/>
-          <a:lstStyle/>
-          <a:p>
-            <a:pPr algn="ctr"/>
-          </a:p>
-        </p:txBody>
-      </p:sp>
-      <p:sp>
-        <p:nvSpPr>
-          <p:cNvPr id="12" name="Rectangle 11"/>
-          <p:cNvSpPr/>
-          <p:nvPr/>
-        </p:nvSpPr>
-        <p:spPr>
-          <a:xfrm>
-            <a:off x="457200" y="3694176"/>
-            <a:ext cx="128016" cy="1051560"/>
-          </a:xfrm>
-          <a:prstGeom prst="rect">
-            <a:avLst/>
-          </a:prstGeom>
-          <a:solidFill>
-            <a:srgbClr val="A02030"/>
-          </a:solidFill>
-          <a:ln>
-            <a:noFill/>
-          </a:ln>
-        </p:spPr>
-        <p:style>
-          <a:lnRef idx="1">
-            <a:schemeClr val="accent1"/>
-          </a:lnRef>
-          <a:fillRef idx="3">
-            <a:schemeClr val="accent1"/>
-          </a:fillRef>
-          <a:effectRef idx="2">
-            <a:schemeClr val="accent1"/>
-          </a:effectRef>
-          <a:fontRef idx="minor">
-            <a:schemeClr val="lt1"/>
-          </a:fontRef>
-        </p:style>
-        <p:txBody>
-          <a:bodyPr rtlCol="0" anchor="ctr"/>
-          <a:lstStyle/>
-          <a:p>
-            <a:pPr algn="ctr"/>
-          </a:p>
-        </p:txBody>
-      </p:sp>
-      <p:sp>
-        <p:nvSpPr>
-          <p:cNvPr id="13" name="TextBox 12"/>
-          <p:cNvSpPr txBox="1"/>
-          <p:nvPr/>
-        </p:nvSpPr>
-        <p:spPr>
-          <a:xfrm>
-            <a:off x="777240" y="3831336"/>
-            <a:ext cx="10774375" cy="822959"/>
-          </a:xfrm>
-          <a:prstGeom prst="rect">
-            <a:avLst/>
-          </a:prstGeom>
-          <a:noFill/>
-        </p:spPr>
-        <p:txBody>
-          <a:bodyPr wrap="square">
-            <a:spAutoFit/>
-          </a:bodyPr>
-          <a:lstStyle/>
-          <a:p>
-            <a:r>
-              <a:rPr sz="1200" b="1" i="0">
-                <a:solidFill>
-                  <a:srgbClr val="A02030"/>
-                </a:solidFill>
-                <a:latin typeface="Calibri"/>
-              </a:rPr>
-              <a:t>Atención</a:t>
+              <a:t>–   Eso obliga a decisiones de diseño concretas: letra grande, pocos campos obligatorios, nada de scroll interminable, tolerancia a la interrupcion para que si la llaman y vuelve en tres minutos no haya perdido lo escrito</a:t>
             </a:r>
           </a:p>
           <a:p>
             <a:pPr>
-              <a:spcBef>
-                <a:spcPts val="400"/>
-              </a:spcBef>
+              <a:spcAft>
+                <a:spcPts val="800"/>
+              </a:spcAft>
             </a:pPr>
             <a:r>
-              <a:rPr sz="1400" b="0" i="0">
+              <a:rPr sz="2000" b="0" i="0">
                 <a:solidFill>
                   <a:srgbClr val="333333"/>
                 </a:solidFill>
                 <a:latin typeface="Calibri"/>
               </a:rPr>
-              <a:t>Entrega del taller, si el docente lo asigna · en la fecha que indique el docente.</a:t>
-            </a:r>
-          </a:p>
-        </p:txBody>
-      </p:sp>
-      <p:sp>
-        <p:nvSpPr>
-          <p:cNvPr id="14" name="TextBox 13"/>
+              <a:t>–   Y mensajes en lenguaje de clinica y no de sistemas, es decir Esta mascota ya tiene ficha en la clinica y no Violacion de restriccion de unicidad.</a:t>
+            </a:r>
+          </a:p>
+        </p:txBody>
+      </p:sp>
+      <p:sp>
+        <p:nvSpPr>
+          <p:cNvPr id="6" name="TextBox 5"/>
           <p:cNvSpPr txBox="1"/>
           <p:nvPr/>
         </p:nvSpPr>
@@ -6148,13 +4594,13 @@
         <p:spPr>
           <a:xfrm>
             <a:off x="0" y="0"/>
-            <a:ext cx="12191695" cy="164592"/>
+            <a:ext cx="12191695" cy="960120"/>
           </a:xfrm>
           <a:prstGeom prst="rect">
             <a:avLst/>
           </a:prstGeom>
           <a:solidFill>
-            <a:srgbClr val="269CCB"/>
+            <a:srgbClr val="095292"/>
           </a:solidFill>
           <a:ln>
             <a:noFill/>
@@ -6182,9 +4628,1122 @@
           </a:p>
         </p:txBody>
       </p:sp>
+      <p:sp>
+        <p:nvSpPr>
+          <p:cNvPr id="3" name="Rectangle 2"/>
+          <p:cNvSpPr/>
+          <p:nvPr/>
+        </p:nvSpPr>
+        <p:spPr>
+          <a:xfrm>
+            <a:off x="0" y="960120"/>
+            <a:ext cx="12191695" cy="41148"/>
+          </a:xfrm>
+          <a:prstGeom prst="rect">
+            <a:avLst/>
+          </a:prstGeom>
+          <a:solidFill>
+            <a:srgbClr val="FFD000"/>
+          </a:solidFill>
+          <a:ln>
+            <a:noFill/>
+          </a:ln>
+        </p:spPr>
+        <p:style>
+          <a:lnRef idx="1">
+            <a:schemeClr val="accent1"/>
+          </a:lnRef>
+          <a:fillRef idx="3">
+            <a:schemeClr val="accent1"/>
+          </a:fillRef>
+          <a:effectRef idx="2">
+            <a:schemeClr val="accent1"/>
+          </a:effectRef>
+          <a:fontRef idx="minor">
+            <a:schemeClr val="lt1"/>
+          </a:fontRef>
+        </p:style>
+        <p:txBody>
+          <a:bodyPr rtlCol="0" anchor="ctr"/>
+          <a:lstStyle/>
+          <a:p>
+            <a:pPr algn="ctr"/>
+          </a:p>
+        </p:txBody>
+      </p:sp>
+      <p:sp>
+        <p:nvSpPr>
+          <p:cNvPr id="4" name="TextBox 3"/>
+          <p:cNvSpPr txBox="1"/>
+          <p:nvPr/>
+        </p:nvSpPr>
+        <p:spPr>
+          <a:xfrm>
+            <a:off x="457200" y="164592"/>
+            <a:ext cx="11277295" cy="502920"/>
+          </a:xfrm>
+          <a:prstGeom prst="rect">
+            <a:avLst/>
+          </a:prstGeom>
+          <a:noFill/>
+        </p:spPr>
+        <p:txBody>
+          <a:bodyPr wrap="square">
+            <a:spAutoFit/>
+          </a:bodyPr>
+          <a:lstStyle/>
+          <a:p>
+            <a:r>
+              <a:rPr sz="2600" b="1" i="0">
+                <a:solidFill>
+                  <a:srgbClr val="FFFFFF"/>
+                </a:solidFill>
+                <a:latin typeface="Calibri"/>
+              </a:rPr>
+              <a:t>Flujo de tarea de VetCare en Mermaid: registrar mascota y buscar expediente con caminos alternos</a:t>
+            </a:r>
+          </a:p>
+        </p:txBody>
+      </p:sp>
+      <p:sp>
+        <p:nvSpPr>
+          <p:cNvPr id="5" name="Rounded Rectangle 4"/>
+          <p:cNvSpPr/>
+          <p:nvPr/>
+        </p:nvSpPr>
+        <p:spPr>
+          <a:xfrm>
+            <a:off x="457200" y="1261872"/>
+            <a:ext cx="11277295" cy="4773168"/>
+          </a:xfrm>
+          <a:prstGeom prst="roundRect">
+            <a:avLst>
+              <a:gd name="adj" fmla="val 12000"/>
+            </a:avLst>
+          </a:prstGeom>
+          <a:solidFill>
+            <a:srgbClr val="1E2A38"/>
+          </a:solidFill>
+          <a:ln>
+            <a:noFill/>
+          </a:ln>
+        </p:spPr>
+        <p:style>
+          <a:lnRef idx="1">
+            <a:schemeClr val="accent1"/>
+          </a:lnRef>
+          <a:fillRef idx="3">
+            <a:schemeClr val="accent1"/>
+          </a:fillRef>
+          <a:effectRef idx="2">
+            <a:schemeClr val="accent1"/>
+          </a:effectRef>
+          <a:fontRef idx="minor">
+            <a:schemeClr val="lt1"/>
+          </a:fontRef>
+        </p:style>
+        <p:txBody>
+          <a:bodyPr rtlCol="0" anchor="ctr"/>
+          <a:lstStyle/>
+          <a:p>
+            <a:pPr algn="ctr"/>
+          </a:p>
+        </p:txBody>
+      </p:sp>
+      <p:sp>
+        <p:nvSpPr>
+          <p:cNvPr id="6" name="Rectangle 5"/>
+          <p:cNvSpPr/>
+          <p:nvPr/>
+        </p:nvSpPr>
+        <p:spPr>
+          <a:xfrm>
+            <a:off x="457200" y="1261872"/>
+            <a:ext cx="11277295" cy="320040"/>
+          </a:xfrm>
+          <a:prstGeom prst="rect">
+            <a:avLst/>
+          </a:prstGeom>
+          <a:solidFill>
+            <a:srgbClr val="095292"/>
+          </a:solidFill>
+          <a:ln>
+            <a:noFill/>
+          </a:ln>
+        </p:spPr>
+        <p:style>
+          <a:lnRef idx="1">
+            <a:schemeClr val="accent1"/>
+          </a:lnRef>
+          <a:fillRef idx="3">
+            <a:schemeClr val="accent1"/>
+          </a:fillRef>
+          <a:effectRef idx="2">
+            <a:schemeClr val="accent1"/>
+          </a:effectRef>
+          <a:fontRef idx="minor">
+            <a:schemeClr val="lt1"/>
+          </a:fontRef>
+        </p:style>
+        <p:txBody>
+          <a:bodyPr rtlCol="0" anchor="ctr"/>
+          <a:lstStyle/>
+          <a:p>
+            <a:pPr algn="ctr"/>
+          </a:p>
+        </p:txBody>
+      </p:sp>
+      <p:sp>
+        <p:nvSpPr>
+          <p:cNvPr id="7" name="TextBox 6"/>
+          <p:cNvSpPr txBox="1"/>
+          <p:nvPr/>
+        </p:nvSpPr>
+        <p:spPr>
+          <a:xfrm>
+            <a:off x="685800" y="1307592"/>
+            <a:ext cx="10820095" cy="256032"/>
+          </a:xfrm>
+          <a:prstGeom prst="rect">
+            <a:avLst/>
+          </a:prstGeom>
+          <a:noFill/>
+        </p:spPr>
+        <p:txBody>
+          <a:bodyPr wrap="square" anchor="ctr"/>
+          <a:lstStyle/>
+          <a:p>
+            <a:r>
+              <a:rPr sz="1000" b="1" i="0">
+                <a:solidFill>
+                  <a:srgbClr val="269CCB"/>
+                </a:solidFill>
+                <a:latin typeface="Calibri"/>
+              </a:rPr>
+              <a:t>● ● ●</a:t>
+            </a:r>
+          </a:p>
+        </p:txBody>
+      </p:sp>
+      <p:sp>
+        <p:nvSpPr>
+          <p:cNvPr id="8" name="TextBox 7"/>
+          <p:cNvSpPr txBox="1"/>
+          <p:nvPr/>
+        </p:nvSpPr>
+        <p:spPr>
+          <a:xfrm>
+            <a:off x="777240" y="1719072"/>
+            <a:ext cx="10637215" cy="4133087"/>
+          </a:xfrm>
+          <a:prstGeom prst="rect">
+            <a:avLst/>
+          </a:prstGeom>
+          <a:noFill/>
+        </p:spPr>
+        <p:txBody>
+          <a:bodyPr wrap="square">
+            <a:spAutoFit/>
+          </a:bodyPr>
+          <a:lstStyle/>
+          <a:p>
+            <a:pPr>
+              <a:spcAft>
+                <a:spcPts val="400"/>
+              </a:spcAft>
+            </a:pPr>
+            <a:r>
+              <a:rPr sz="1400" b="0" i="0">
+                <a:solidFill>
+                  <a:srgbClr val="FFFFFF"/>
+                </a:solidFill>
+                <a:latin typeface="Calibri"/>
+              </a:rPr>
+              <a:t>flowchart TD</a:t>
+            </a:r>
+          </a:p>
+          <a:p>
+            <a:pPr>
+              <a:spcAft>
+                <a:spcPts val="400"/>
+              </a:spcAft>
+            </a:pPr>
+            <a:r>
+              <a:rPr sz="1400" b="0" i="0">
+                <a:solidFill>
+                  <a:srgbClr val="FFFFFF"/>
+                </a:solidFill>
+                <a:latin typeface="Calibri"/>
+              </a:rPr>
+              <a:t>  A[Recepcion: llega el dueño con su mascota] --&gt; B{Dueño ya registrado?}</a:t>
+            </a:r>
+          </a:p>
+          <a:p>
+            <a:pPr>
+              <a:spcAft>
+                <a:spcPts val="400"/>
+              </a:spcAft>
+            </a:pPr>
+            <a:r>
+              <a:rPr sz="1400" b="0" i="0">
+                <a:solidFill>
+                  <a:srgbClr val="FFFFFF"/>
+                </a:solidFill>
+                <a:latin typeface="Calibri"/>
+              </a:rPr>
+              <a:t>  B -- No --&gt; C[Pantalla Registrar dueño]</a:t>
+            </a:r>
+          </a:p>
+          <a:p>
+            <a:pPr>
+              <a:spcAft>
+                <a:spcPts val="400"/>
+              </a:spcAft>
+            </a:pPr>
+            <a:r>
+              <a:rPr sz="1400" b="0" i="0">
+                <a:solidFill>
+                  <a:srgbClr val="FFFFFF"/>
+                </a:solidFill>
+                <a:latin typeface="Calibri"/>
+              </a:rPr>
+              <a:t>  B -- Si --&gt; D[Pantalla Registrar mascota]</a:t>
+            </a:r>
+          </a:p>
+          <a:p>
+            <a:pPr>
+              <a:spcAft>
+                <a:spcPts val="400"/>
+              </a:spcAft>
+            </a:pPr>
+            <a:r>
+              <a:rPr sz="1400" b="0" i="0">
+                <a:solidFill>
+                  <a:srgbClr val="FFFFFF"/>
+                </a:solidFill>
+                <a:latin typeface="Calibri"/>
+              </a:rPr>
+              <a:t>  C --&gt; D</a:t>
+            </a:r>
+          </a:p>
+          <a:p>
+            <a:pPr>
+              <a:spcAft>
+                <a:spcPts val="400"/>
+              </a:spcAft>
+            </a:pPr>
+            <a:r>
+              <a:rPr sz="1400" b="0" i="0">
+                <a:solidFill>
+                  <a:srgbClr val="FFFFFF"/>
+                </a:solidFill>
+                <a:latin typeface="Calibri"/>
+              </a:rPr>
+              <a:t>  D --&gt; E{Campos obligatorios completos?}</a:t>
+            </a:r>
+          </a:p>
+          <a:p>
+            <a:pPr>
+              <a:spcAft>
+                <a:spcPts val="400"/>
+              </a:spcAft>
+            </a:pPr>
+            <a:r>
+              <a:rPr sz="1400" b="0" i="0">
+                <a:solidFill>
+                  <a:srgbClr val="FFFFFF"/>
+                </a:solidFill>
+                <a:latin typeface="Calibri"/>
+              </a:rPr>
+              <a:t>  E -- No --&gt; F[Guardar deshabilitado + ayuda en el campo faltante]</a:t>
+            </a:r>
+          </a:p>
+          <a:p>
+            <a:pPr>
+              <a:spcAft>
+                <a:spcPts val="400"/>
+              </a:spcAft>
+            </a:pPr>
+            <a:r>
+              <a:rPr sz="1400" b="0" i="0">
+                <a:solidFill>
+                  <a:srgbClr val="FFFFFF"/>
+                </a:solidFill>
+                <a:latin typeface="Calibri"/>
+              </a:rPr>
+              <a:t>  F --&gt; D</a:t>
+            </a:r>
+          </a:p>
+          <a:p>
+            <a:pPr>
+              <a:spcAft>
+                <a:spcPts val="400"/>
+              </a:spcAft>
+            </a:pPr>
+            <a:r>
+              <a:rPr sz="1400" b="0" i="0">
+                <a:solidFill>
+                  <a:srgbClr val="FFFFFF"/>
+                </a:solidFill>
+                <a:latin typeface="Calibri"/>
+              </a:rPr>
+              <a:t>  E -- Si --&gt; G[Confirmacion: Ficha guardada, codigo M-0421]</a:t>
+            </a:r>
+          </a:p>
+          <a:p>
+            <a:pPr>
+              <a:spcAft>
+                <a:spcPts val="400"/>
+              </a:spcAft>
+            </a:pPr>
+            <a:r>
+              <a:rPr sz="1400" b="0" i="0">
+                <a:solidFill>
+                  <a:srgbClr val="FFFFFF"/>
+                </a:solidFill>
+                <a:latin typeface="Calibri"/>
+              </a:rPr>
+              <a:t>  G --&gt; H[Pantalla Buscar expediente]</a:t>
+            </a:r>
+          </a:p>
+          <a:p>
+            <a:pPr>
+              <a:spcAft>
+                <a:spcPts val="400"/>
+              </a:spcAft>
+            </a:pPr>
+            <a:r>
+              <a:rPr sz="1400" b="0" i="0">
+                <a:solidFill>
+                  <a:srgbClr val="FFFFFF"/>
+                </a:solidFill>
+                <a:latin typeface="Calibri"/>
+              </a:rPr>
+              <a:t>  H --&gt; I{Cuantos resultados?}</a:t>
+            </a:r>
+          </a:p>
+          <a:p>
+            <a:pPr>
+              <a:spcAft>
+                <a:spcPts val="400"/>
+              </a:spcAft>
+            </a:pPr>
+            <a:r>
+              <a:rPr sz="1400" b="0" i="0">
+                <a:solidFill>
+                  <a:srgbClr val="FFFFFF"/>
+                </a:solidFill>
+                <a:latin typeface="Calibri"/>
+              </a:rPr>
+              <a:t>  I -- Cero --&gt; J[Mensaje sin resultados + Buscar por otro criterio]</a:t>
+            </a:r>
+          </a:p>
+          <a:p>
+            <a:pPr>
+              <a:spcAft>
+                <a:spcPts val="400"/>
+              </a:spcAft>
+            </a:pPr>
+            <a:r>
+              <a:rPr sz="1400" b="0" i="0">
+                <a:solidFill>
+                  <a:srgbClr val="FFFFFF"/>
+                </a:solidFill>
+                <a:latin typeface="Calibri"/>
+              </a:rPr>
+              <a:t>  I -- Varios --&gt; K[Lista con especie, edad y dueño para desambiguar]</a:t>
+            </a:r>
+          </a:p>
+          <a:p>
+            <a:pPr>
+              <a:spcAft>
+                <a:spcPts val="400"/>
+              </a:spcAft>
+            </a:pPr>
+            <a:r>
+              <a:rPr sz="1400" b="0" i="0">
+                <a:solidFill>
+                  <a:srgbClr val="FFFFFF"/>
+                </a:solidFill>
+                <a:latin typeface="Calibri"/>
+              </a:rPr>
+              <a:t>  I -- Uno --&gt; L[Ficha del paciente]</a:t>
+            </a:r>
+          </a:p>
+        </p:txBody>
+      </p:sp>
+      <p:sp>
+        <p:nvSpPr>
+          <p:cNvPr id="9" name="TextBox 8"/>
+          <p:cNvSpPr txBox="1"/>
+          <p:nvPr/>
+        </p:nvSpPr>
+        <p:spPr>
+          <a:xfrm>
+            <a:off x="457200" y="6080760"/>
+            <a:ext cx="11277295" cy="320040"/>
+          </a:xfrm>
+          <a:prstGeom prst="rect">
+            <a:avLst/>
+          </a:prstGeom>
+          <a:noFill/>
+        </p:spPr>
+        <p:txBody>
+          <a:bodyPr wrap="square">
+            <a:spAutoFit/>
+          </a:bodyPr>
+          <a:lstStyle/>
+          <a:p>
+            <a:pPr algn="ctr"/>
+            <a:r>
+              <a:rPr sz="1200" b="0" i="1">
+                <a:solidFill>
+                  <a:srgbClr val="666666"/>
+                </a:solidFill>
+                <a:latin typeface="Calibri"/>
+              </a:rPr>
+              <a:t>La interfaz no son pantallas sueltas: es un camino con desvios, y los desvios son los que hay que diseñar.</a:t>
+            </a:r>
+          </a:p>
+        </p:txBody>
+      </p:sp>
+      <p:sp>
+        <p:nvSpPr>
+          <p:cNvPr id="10" name="TextBox 9"/>
+          <p:cNvSpPr txBox="1"/>
+          <p:nvPr/>
+        </p:nvSpPr>
+        <p:spPr>
+          <a:xfrm>
+            <a:off x="11185855" y="6473952"/>
+            <a:ext cx="640080" cy="274320"/>
+          </a:xfrm>
+          <a:prstGeom prst="rect">
+            <a:avLst/>
+          </a:prstGeom>
+          <a:noFill/>
+        </p:spPr>
+        <p:txBody>
+          <a:bodyPr wrap="square">
+            <a:spAutoFit/>
+          </a:bodyPr>
+          <a:lstStyle/>
+          <a:p>
+            <a:pPr algn="r"/>
+            <a:r>
+              <a:rPr sz="1100" b="0" i="0">
+                <a:solidFill>
+                  <a:srgbClr val="666666"/>
+                </a:solidFill>
+                <a:latin typeface="Calibri"/>
+              </a:rPr>
+              <a:t>14</a:t>
+            </a:r>
+          </a:p>
+        </p:txBody>
+      </p:sp>
+    </p:spTree>
+  </p:cSld>
+  <p:clrMapOvr>
+    <a:masterClrMapping/>
+  </p:clrMapOvr>
+</p:sld>
+</file>
+
+<file path=ppt/slides/slide15.xml><?xml version="1.0" encoding="utf-8"?>
+<p:sld xmlns:a="http://schemas.openxmlformats.org/drawingml/2006/main" xmlns:p="http://schemas.openxmlformats.org/presentationml/2006/main" xmlns:r="http://schemas.openxmlformats.org/officeDocument/2006/relationships">
+  <p:cSld>
+    <p:bg>
+      <p:bgPr>
+        <a:solidFill>
+          <a:srgbClr val="FFFFFF"/>
+        </a:solidFill>
+        <a:effectLst/>
+      </p:bgPr>
+    </p:bg>
+    <p:spTree>
+      <p:nvGrpSpPr>
+        <p:cNvPr id="1" name=""/>
+        <p:cNvGrpSpPr/>
+        <p:nvPr/>
+      </p:nvGrpSpPr>
+      <p:grpSpPr/>
+      <p:sp>
+        <p:nvSpPr>
+          <p:cNvPr id="2" name="Rectangle 1"/>
+          <p:cNvSpPr/>
+          <p:nvPr/>
+        </p:nvSpPr>
+        <p:spPr>
+          <a:xfrm>
+            <a:off x="0" y="0"/>
+            <a:ext cx="12191695" cy="960120"/>
+          </a:xfrm>
+          <a:prstGeom prst="rect">
+            <a:avLst/>
+          </a:prstGeom>
+          <a:solidFill>
+            <a:srgbClr val="095292"/>
+          </a:solidFill>
+          <a:ln>
+            <a:noFill/>
+          </a:ln>
+        </p:spPr>
+        <p:style>
+          <a:lnRef idx="1">
+            <a:schemeClr val="accent1"/>
+          </a:lnRef>
+          <a:fillRef idx="3">
+            <a:schemeClr val="accent1"/>
+          </a:fillRef>
+          <a:effectRef idx="2">
+            <a:schemeClr val="accent1"/>
+          </a:effectRef>
+          <a:fontRef idx="minor">
+            <a:schemeClr val="lt1"/>
+          </a:fontRef>
+        </p:style>
+        <p:txBody>
+          <a:bodyPr rtlCol="0" anchor="ctr"/>
+          <a:lstStyle/>
+          <a:p>
+            <a:pPr algn="ctr"/>
+          </a:p>
+        </p:txBody>
+      </p:sp>
+      <p:sp>
+        <p:nvSpPr>
+          <p:cNvPr id="3" name="Rectangle 2"/>
+          <p:cNvSpPr/>
+          <p:nvPr/>
+        </p:nvSpPr>
+        <p:spPr>
+          <a:xfrm>
+            <a:off x="0" y="960120"/>
+            <a:ext cx="12191695" cy="41148"/>
+          </a:xfrm>
+          <a:prstGeom prst="rect">
+            <a:avLst/>
+          </a:prstGeom>
+          <a:solidFill>
+            <a:srgbClr val="FFD000"/>
+          </a:solidFill>
+          <a:ln>
+            <a:noFill/>
+          </a:ln>
+        </p:spPr>
+        <p:style>
+          <a:lnRef idx="1">
+            <a:schemeClr val="accent1"/>
+          </a:lnRef>
+          <a:fillRef idx="3">
+            <a:schemeClr val="accent1"/>
+          </a:fillRef>
+          <a:effectRef idx="2">
+            <a:schemeClr val="accent1"/>
+          </a:effectRef>
+          <a:fontRef idx="minor">
+            <a:schemeClr val="lt1"/>
+          </a:fontRef>
+        </p:style>
+        <p:txBody>
+          <a:bodyPr rtlCol="0" anchor="ctr"/>
+          <a:lstStyle/>
+          <a:p>
+            <a:pPr algn="ctr"/>
+          </a:p>
+        </p:txBody>
+      </p:sp>
+      <p:sp>
+        <p:nvSpPr>
+          <p:cNvPr id="4" name="TextBox 3"/>
+          <p:cNvSpPr txBox="1"/>
+          <p:nvPr/>
+        </p:nvSpPr>
+        <p:spPr>
+          <a:xfrm>
+            <a:off x="457200" y="164592"/>
+            <a:ext cx="11277295" cy="502920"/>
+          </a:xfrm>
+          <a:prstGeom prst="rect">
+            <a:avLst/>
+          </a:prstGeom>
+          <a:noFill/>
+        </p:spPr>
+        <p:txBody>
+          <a:bodyPr wrap="square">
+            <a:spAutoFit/>
+          </a:bodyPr>
+          <a:lstStyle/>
+          <a:p>
+            <a:r>
+              <a:rPr sz="2600" b="1" i="0">
+                <a:solidFill>
+                  <a:srgbClr val="FFFFFF"/>
+                </a:solidFill>
+                <a:latin typeface="Calibri"/>
+              </a:rPr>
+              <a:t>Demo del dia</a:t>
+            </a:r>
+          </a:p>
+        </p:txBody>
+      </p:sp>
+      <p:sp>
+        <p:nvSpPr>
+          <p:cNvPr id="5" name="TextBox 4"/>
+          <p:cNvSpPr txBox="1"/>
+          <p:nvPr/>
+        </p:nvSpPr>
+        <p:spPr>
+          <a:xfrm>
+            <a:off x="457200" y="1170432"/>
+            <a:ext cx="11277295" cy="5230368"/>
+          </a:xfrm>
+          <a:prstGeom prst="rect">
+            <a:avLst/>
+          </a:prstGeom>
+          <a:noFill/>
+        </p:spPr>
+        <p:txBody>
+          <a:bodyPr wrap="square">
+            <a:spAutoFit/>
+          </a:bodyPr>
+          <a:lstStyle/>
+          <a:p>
+            <a:pPr>
+              <a:spcAft>
+                <a:spcPts val="800"/>
+              </a:spcAft>
+            </a:pPr>
+            <a:r>
+              <a:rPr sz="2000" b="0" i="0">
+                <a:solidFill>
+                  <a:srgbClr val="333333"/>
+                </a:solidFill>
+                <a:latin typeface="Calibri"/>
+              </a:rPr>
+              <a:t>–   </a:t>
+            </a:r>
+            <a:r>
+              <a:rPr sz="2000" b="1" i="0">
+                <a:solidFill>
+                  <a:srgbClr val="333333"/>
+                </a:solidFill>
+                <a:latin typeface="Calibri"/>
+              </a:rPr>
+              <a:t>Herramienta:</a:t>
+            </a:r>
+            <a:r>
+              <a:rPr sz="2000" b="0" i="0">
+                <a:solidFill>
+                  <a:srgbClr val="333333"/>
+                </a:solidFill>
+                <a:latin typeface="Calibri"/>
+              </a:rPr>
+              <a:t> Figma o Penpot · Excalidraw · Google Docs</a:t>
+            </a:r>
+          </a:p>
+          <a:p>
+            <a:pPr>
+              <a:spcAft>
+                <a:spcPts val="800"/>
+              </a:spcAft>
+            </a:pPr>
+            <a:r>
+              <a:rPr sz="2000" b="0" i="0">
+                <a:solidFill>
+                  <a:srgbClr val="333333"/>
+                </a:solidFill>
+                <a:latin typeface="Calibri"/>
+              </a:rPr>
+              <a:t>–   </a:t>
+            </a:r>
+            <a:r>
+              <a:rPr sz="2000" b="1" i="0">
+                <a:solidFill>
+                  <a:srgbClr val="333333"/>
+                </a:solidFill>
+                <a:latin typeface="Calibri"/>
+              </a:rPr>
+              <a:t>Demo:</a:t>
+            </a:r>
+            <a:r>
+              <a:rPr sz="2000" b="0" i="0">
+                <a:solidFill>
+                  <a:srgbClr val="333333"/>
+                </a:solidFill>
+                <a:latin typeface="Calibri"/>
+              </a:rPr>
+              <a:t> El docente dibuja en vivo el wireframe de Registrar mascota en Penpot, le pone tres anotaciones numeradas y lo conecta con Buscar expediente para que la clase vea en la misma pantalla la diferencia entre wireframe, mockup y prototipo.</a:t>
+            </a:r>
+          </a:p>
+          <a:p>
+            <a:pPr>
+              <a:spcAft>
+                <a:spcPts val="800"/>
+              </a:spcAft>
+            </a:pPr>
+            <a:r>
+              <a:rPr sz="2000" b="0" i="0">
+                <a:solidFill>
+                  <a:srgbClr val="333333"/>
+                </a:solidFill>
+                <a:latin typeface="Calibri"/>
+              </a:rPr>
+              <a:t>–   Mismo dominio VetCare — no otro ejemplo. Aqui se diseña, no se programa.</a:t>
+            </a:r>
+          </a:p>
+        </p:txBody>
+      </p:sp>
+      <p:sp>
+        <p:nvSpPr>
+          <p:cNvPr id="6" name="TextBox 5"/>
+          <p:cNvSpPr txBox="1"/>
+          <p:nvPr/>
+        </p:nvSpPr>
+        <p:spPr>
+          <a:xfrm>
+            <a:off x="11185855" y="6473952"/>
+            <a:ext cx="640080" cy="274320"/>
+          </a:xfrm>
+          <a:prstGeom prst="rect">
+            <a:avLst/>
+          </a:prstGeom>
+          <a:noFill/>
+        </p:spPr>
+        <p:txBody>
+          <a:bodyPr wrap="square">
+            <a:spAutoFit/>
+          </a:bodyPr>
+          <a:lstStyle/>
+          <a:p>
+            <a:pPr algn="r"/>
+            <a:r>
+              <a:rPr sz="1100" b="0" i="0">
+                <a:solidFill>
+                  <a:srgbClr val="666666"/>
+                </a:solidFill>
+                <a:latin typeface="Calibri"/>
+              </a:rPr>
+              <a:t>15</a:t>
+            </a:r>
+          </a:p>
+        </p:txBody>
+      </p:sp>
+    </p:spTree>
+  </p:cSld>
+  <p:clrMapOvr>
+    <a:masterClrMapping/>
+  </p:clrMapOvr>
+</p:sld>
+</file>
+
+<file path=ppt/slides/slide16.xml><?xml version="1.0" encoding="utf-8"?>
+<p:sld xmlns:a="http://schemas.openxmlformats.org/drawingml/2006/main" xmlns:p="http://schemas.openxmlformats.org/presentationml/2006/main" xmlns:r="http://schemas.openxmlformats.org/officeDocument/2006/relationships">
+  <p:cSld>
+    <p:bg>
+      <p:bgPr>
+        <a:solidFill>
+          <a:srgbClr val="FFFFFF"/>
+        </a:solidFill>
+        <a:effectLst/>
+      </p:bgPr>
+    </p:bg>
+    <p:spTree>
+      <p:nvGrpSpPr>
+        <p:cNvPr id="1" name=""/>
+        <p:cNvGrpSpPr/>
+        <p:nvPr/>
+      </p:nvGrpSpPr>
+      <p:grpSpPr/>
+      <p:sp>
+        <p:nvSpPr>
+          <p:cNvPr id="2" name="Rectangle 1"/>
+          <p:cNvSpPr/>
+          <p:nvPr/>
+        </p:nvSpPr>
+        <p:spPr>
+          <a:xfrm>
+            <a:off x="0" y="0"/>
+            <a:ext cx="12191695" cy="1170432"/>
+          </a:xfrm>
+          <a:prstGeom prst="rect">
+            <a:avLst/>
+          </a:prstGeom>
+          <a:solidFill>
+            <a:srgbClr val="095292"/>
+          </a:solidFill>
+          <a:ln>
+            <a:noFill/>
+          </a:ln>
+        </p:spPr>
+        <p:style>
+          <a:lnRef idx="1">
+            <a:schemeClr val="accent1"/>
+          </a:lnRef>
+          <a:fillRef idx="3">
+            <a:schemeClr val="accent1"/>
+          </a:fillRef>
+          <a:effectRef idx="2">
+            <a:schemeClr val="accent1"/>
+          </a:effectRef>
+          <a:fontRef idx="minor">
+            <a:schemeClr val="lt1"/>
+          </a:fontRef>
+        </p:style>
+        <p:txBody>
+          <a:bodyPr rtlCol="0" anchor="ctr"/>
+          <a:lstStyle/>
+          <a:p>
+            <a:pPr algn="ctr"/>
+          </a:p>
+        </p:txBody>
+      </p:sp>
+      <p:sp>
+        <p:nvSpPr>
+          <p:cNvPr id="3" name="Rectangle 2"/>
+          <p:cNvSpPr/>
+          <p:nvPr/>
+        </p:nvSpPr>
+        <p:spPr>
+          <a:xfrm>
+            <a:off x="0" y="1170432"/>
+            <a:ext cx="12191695" cy="41148"/>
+          </a:xfrm>
+          <a:prstGeom prst="rect">
+            <a:avLst/>
+          </a:prstGeom>
+          <a:solidFill>
+            <a:srgbClr val="FFD000"/>
+          </a:solidFill>
+          <a:ln>
+            <a:noFill/>
+          </a:ln>
+        </p:spPr>
+        <p:style>
+          <a:lnRef idx="1">
+            <a:schemeClr val="accent1"/>
+          </a:lnRef>
+          <a:fillRef idx="3">
+            <a:schemeClr val="accent1"/>
+          </a:fillRef>
+          <a:effectRef idx="2">
+            <a:schemeClr val="accent1"/>
+          </a:effectRef>
+          <a:fontRef idx="minor">
+            <a:schemeClr val="lt1"/>
+          </a:fontRef>
+        </p:style>
+        <p:txBody>
+          <a:bodyPr rtlCol="0" anchor="ctr"/>
+          <a:lstStyle/>
+          <a:p>
+            <a:pPr algn="ctr"/>
+          </a:p>
+        </p:txBody>
+      </p:sp>
+      <p:sp>
+        <p:nvSpPr>
+          <p:cNvPr id="4" name="TextBox 3"/>
+          <p:cNvSpPr txBox="1"/>
+          <p:nvPr/>
+        </p:nvSpPr>
+        <p:spPr>
+          <a:xfrm>
+            <a:off x="457200" y="164592"/>
+            <a:ext cx="11277295" cy="384048"/>
+          </a:xfrm>
+          <a:prstGeom prst="rect">
+            <a:avLst/>
+          </a:prstGeom>
+          <a:noFill/>
+        </p:spPr>
+        <p:txBody>
+          <a:bodyPr wrap="square">
+            <a:spAutoFit/>
+          </a:bodyPr>
+          <a:lstStyle/>
+          <a:p>
+            <a:r>
+              <a:rPr sz="2600" b="1" i="0">
+                <a:solidFill>
+                  <a:srgbClr val="FFFFFF"/>
+                </a:solidFill>
+                <a:latin typeface="Calibri"/>
+              </a:rPr>
+              <a:t>Herramientas de hoy</a:t>
+            </a:r>
+          </a:p>
+        </p:txBody>
+      </p:sp>
+      <p:sp>
+        <p:nvSpPr>
+          <p:cNvPr id="5" name="TextBox 4"/>
+          <p:cNvSpPr txBox="1"/>
+          <p:nvPr/>
+        </p:nvSpPr>
+        <p:spPr>
+          <a:xfrm>
+            <a:off x="457200" y="566928"/>
+            <a:ext cx="11277295" cy="411480"/>
+          </a:xfrm>
+          <a:prstGeom prst="rect">
+            <a:avLst/>
+          </a:prstGeom>
+          <a:noFill/>
+        </p:spPr>
+        <p:txBody>
+          <a:bodyPr wrap="square">
+            <a:spAutoFit/>
+          </a:bodyPr>
+          <a:lstStyle/>
+          <a:p>
+            <a:r>
+              <a:rPr sz="1400" b="0" i="0">
+                <a:solidFill>
+                  <a:srgbClr val="B8D8EE"/>
+                </a:solidFill>
+                <a:latin typeface="Calibri"/>
+              </a:rPr>
+              <a:t>Gratis · funcionan en el navegador</a:t>
+            </a:r>
+          </a:p>
+        </p:txBody>
+      </p:sp>
+      <p:sp>
+        <p:nvSpPr>
+          <p:cNvPr id="6" name="Rounded Rectangle 5"/>
+          <p:cNvSpPr/>
+          <p:nvPr/>
+        </p:nvSpPr>
+        <p:spPr>
+          <a:xfrm>
+            <a:off x="457200" y="1591056"/>
+            <a:ext cx="3624986" cy="2299716"/>
+          </a:xfrm>
+          <a:prstGeom prst="roundRect">
+            <a:avLst>
+              <a:gd name="adj" fmla="val 12000"/>
+            </a:avLst>
+          </a:prstGeom>
+          <a:solidFill>
+            <a:srgbClr val="F2F2F2"/>
+          </a:solidFill>
+          <a:ln>
+            <a:noFill/>
+          </a:ln>
+        </p:spPr>
+        <p:style>
+          <a:lnRef idx="1">
+            <a:schemeClr val="accent1"/>
+          </a:lnRef>
+          <a:fillRef idx="3">
+            <a:schemeClr val="accent1"/>
+          </a:fillRef>
+          <a:effectRef idx="2">
+            <a:schemeClr val="accent1"/>
+          </a:effectRef>
+          <a:fontRef idx="minor">
+            <a:schemeClr val="lt1"/>
+          </a:fontRef>
+        </p:style>
+        <p:txBody>
+          <a:bodyPr rtlCol="0" anchor="ctr"/>
+          <a:lstStyle/>
+          <a:p>
+            <a:pPr algn="ctr"/>
+          </a:p>
+        </p:txBody>
+      </p:sp>
+      <p:sp>
+        <p:nvSpPr>
+          <p:cNvPr id="7" name="Rectangle 6"/>
+          <p:cNvSpPr/>
+          <p:nvPr/>
+        </p:nvSpPr>
+        <p:spPr>
+          <a:xfrm>
+            <a:off x="457200" y="1591056"/>
+            <a:ext cx="3624986" cy="64008"/>
+          </a:xfrm>
+          <a:prstGeom prst="rect">
+            <a:avLst/>
+          </a:prstGeom>
+          <a:solidFill>
+            <a:srgbClr val="095292"/>
+          </a:solidFill>
+          <a:ln>
+            <a:noFill/>
+          </a:ln>
+        </p:spPr>
+        <p:style>
+          <a:lnRef idx="1">
+            <a:schemeClr val="accent1"/>
+          </a:lnRef>
+          <a:fillRef idx="3">
+            <a:schemeClr val="accent1"/>
+          </a:fillRef>
+          <a:effectRef idx="2">
+            <a:schemeClr val="accent1"/>
+          </a:effectRef>
+          <a:fontRef idx="minor">
+            <a:schemeClr val="lt1"/>
+          </a:fontRef>
+        </p:style>
+        <p:txBody>
+          <a:bodyPr rtlCol="0" anchor="ctr"/>
+          <a:lstStyle/>
+          <a:p>
+            <a:pPr algn="ctr"/>
+          </a:p>
+        </p:txBody>
+      </p:sp>
+      <p:sp>
+        <p:nvSpPr>
+          <p:cNvPr id="8" name="Rectangle 7"/>
+          <p:cNvSpPr/>
+          <p:nvPr/>
+        </p:nvSpPr>
+        <p:spPr>
+          <a:xfrm>
+            <a:off x="457200" y="1655064"/>
+            <a:ext cx="3624986" cy="27432"/>
+          </a:xfrm>
+          <a:prstGeom prst="rect">
+            <a:avLst/>
+          </a:prstGeom>
+          <a:solidFill>
+            <a:srgbClr val="FFD000"/>
+          </a:solidFill>
+          <a:ln>
+            <a:noFill/>
+          </a:ln>
+        </p:spPr>
+        <p:style>
+          <a:lnRef idx="1">
+            <a:schemeClr val="accent1"/>
+          </a:lnRef>
+          <a:fillRef idx="3">
+            <a:schemeClr val="accent1"/>
+          </a:fillRef>
+          <a:effectRef idx="2">
+            <a:schemeClr val="accent1"/>
+          </a:effectRef>
+          <a:fontRef idx="minor">
+            <a:schemeClr val="lt1"/>
+          </a:fontRef>
+        </p:style>
+        <p:txBody>
+          <a:bodyPr rtlCol="0" anchor="ctr"/>
+          <a:lstStyle/>
+          <a:p>
+            <a:pPr algn="ctr"/>
+          </a:p>
+        </p:txBody>
+      </p:sp>
       <p:pic>
         <p:nvPicPr>
-          <p:cNvPr id="3" name="Picture 2" descr="logo_uniajc_color.png"/>
+          <p:cNvPr id="9" name="Picture 8" descr="excalidraw.png"/>
           <p:cNvPicPr>
             <a:picLocks noChangeAspect="1"/>
           </p:cNvPicPr>
@@ -6198,8 +5757,8 @@
         </p:blipFill>
         <p:spPr>
           <a:xfrm>
-            <a:off x="10271455" y="5998464"/>
-            <a:ext cx="1463040" cy="643233"/>
+            <a:off x="1659331" y="1847087"/>
+            <a:ext cx="1220724" cy="1220724"/>
           </a:xfrm>
           <a:prstGeom prst="rect">
             <a:avLst/>
@@ -6208,14 +5767,14 @@
       </p:pic>
       <p:sp>
         <p:nvSpPr>
-          <p:cNvPr id="4" name="TextBox 3"/>
+          <p:cNvPr id="10" name="TextBox 9"/>
           <p:cNvSpPr txBox="1"/>
           <p:nvPr/>
         </p:nvSpPr>
         <p:spPr>
           <a:xfrm>
-            <a:off x="457200" y="1737360"/>
-            <a:ext cx="11277295" cy="1097280"/>
+            <a:off x="530352" y="3159251"/>
+            <a:ext cx="3478682" cy="621792"/>
           </a:xfrm>
           <a:prstGeom prst="rect">
             <a:avLst/>
@@ -6223,32 +5782,972 @@
           <a:noFill/>
         </p:spPr>
         <p:txBody>
+          <a:bodyPr wrap="square" anchor="t"/>
+          <a:lstStyle/>
+          <a:p>
+            <a:pPr algn="ctr"/>
+            <a:r>
+              <a:rPr sz="1300" b="1" i="0">
+                <a:solidFill>
+                  <a:srgbClr val="095292"/>
+                </a:solidFill>
+                <a:latin typeface="Calibri"/>
+              </a:rPr>
+              <a:t>Excalidraw</a:t>
+            </a:r>
+          </a:p>
+          <a:p>
+            <a:pPr algn="ctr">
+              <a:spcBef>
+                <a:spcPts val="200"/>
+              </a:spcBef>
+            </a:pPr>
+            <a:r>
+              <a:rPr sz="1000" b="0" i="0">
+                <a:solidFill>
+                  <a:srgbClr val="666666"/>
+                </a:solidFill>
+                <a:latin typeface="Calibri"/>
+              </a:rPr>
+              <a:t>Bocetos rapidos a mano alzada</a:t>
+            </a:r>
+          </a:p>
+        </p:txBody>
+      </p:sp>
+      <p:sp>
+        <p:nvSpPr>
+          <p:cNvPr id="11" name="Rounded Rectangle 10"/>
+          <p:cNvSpPr/>
+          <p:nvPr/>
+        </p:nvSpPr>
+        <p:spPr>
+          <a:xfrm>
+            <a:off x="4283354" y="1591056"/>
+            <a:ext cx="3624986" cy="2299716"/>
+          </a:xfrm>
+          <a:prstGeom prst="roundRect">
+            <a:avLst>
+              <a:gd name="adj" fmla="val 12000"/>
+            </a:avLst>
+          </a:prstGeom>
+          <a:solidFill>
+            <a:srgbClr val="F2F2F2"/>
+          </a:solidFill>
+          <a:ln>
+            <a:noFill/>
+          </a:ln>
+        </p:spPr>
+        <p:style>
+          <a:lnRef idx="1">
+            <a:schemeClr val="accent1"/>
+          </a:lnRef>
+          <a:fillRef idx="3">
+            <a:schemeClr val="accent1"/>
+          </a:fillRef>
+          <a:effectRef idx="2">
+            <a:schemeClr val="accent1"/>
+          </a:effectRef>
+          <a:fontRef idx="minor">
+            <a:schemeClr val="lt1"/>
+          </a:fontRef>
+        </p:style>
+        <p:txBody>
+          <a:bodyPr rtlCol="0" anchor="ctr"/>
+          <a:lstStyle/>
+          <a:p>
+            <a:pPr algn="ctr"/>
+          </a:p>
+        </p:txBody>
+      </p:sp>
+      <p:sp>
+        <p:nvSpPr>
+          <p:cNvPr id="12" name="Rectangle 11"/>
+          <p:cNvSpPr/>
+          <p:nvPr/>
+        </p:nvSpPr>
+        <p:spPr>
+          <a:xfrm>
+            <a:off x="4283354" y="1591056"/>
+            <a:ext cx="3624986" cy="64008"/>
+          </a:xfrm>
+          <a:prstGeom prst="rect">
+            <a:avLst/>
+          </a:prstGeom>
+          <a:solidFill>
+            <a:srgbClr val="095292"/>
+          </a:solidFill>
+          <a:ln>
+            <a:noFill/>
+          </a:ln>
+        </p:spPr>
+        <p:style>
+          <a:lnRef idx="1">
+            <a:schemeClr val="accent1"/>
+          </a:lnRef>
+          <a:fillRef idx="3">
+            <a:schemeClr val="accent1"/>
+          </a:fillRef>
+          <a:effectRef idx="2">
+            <a:schemeClr val="accent1"/>
+          </a:effectRef>
+          <a:fontRef idx="minor">
+            <a:schemeClr val="lt1"/>
+          </a:fontRef>
+        </p:style>
+        <p:txBody>
+          <a:bodyPr rtlCol="0" anchor="ctr"/>
+          <a:lstStyle/>
+          <a:p>
+            <a:pPr algn="ctr"/>
+          </a:p>
+        </p:txBody>
+      </p:sp>
+      <p:sp>
+        <p:nvSpPr>
+          <p:cNvPr id="13" name="Rectangle 12"/>
+          <p:cNvSpPr/>
+          <p:nvPr/>
+        </p:nvSpPr>
+        <p:spPr>
+          <a:xfrm>
+            <a:off x="4283354" y="1655064"/>
+            <a:ext cx="3624986" cy="27432"/>
+          </a:xfrm>
+          <a:prstGeom prst="rect">
+            <a:avLst/>
+          </a:prstGeom>
+          <a:solidFill>
+            <a:srgbClr val="FFD000"/>
+          </a:solidFill>
+          <a:ln>
+            <a:noFill/>
+          </a:ln>
+        </p:spPr>
+        <p:style>
+          <a:lnRef idx="1">
+            <a:schemeClr val="accent1"/>
+          </a:lnRef>
+          <a:fillRef idx="3">
+            <a:schemeClr val="accent1"/>
+          </a:fillRef>
+          <a:effectRef idx="2">
+            <a:schemeClr val="accent1"/>
+          </a:effectRef>
+          <a:fontRef idx="minor">
+            <a:schemeClr val="lt1"/>
+          </a:fontRef>
+        </p:style>
+        <p:txBody>
+          <a:bodyPr rtlCol="0" anchor="ctr"/>
+          <a:lstStyle/>
+          <a:p>
+            <a:pPr algn="ctr"/>
+          </a:p>
+        </p:txBody>
+      </p:sp>
+      <p:pic>
+        <p:nvPicPr>
+          <p:cNvPr id="14" name="Picture 13" descr="google_docs.png"/>
+          <p:cNvPicPr>
+            <a:picLocks noChangeAspect="1"/>
+          </p:cNvPicPr>
+          <p:nvPr/>
+        </p:nvPicPr>
+        <p:blipFill>
+          <a:blip r:embed="rId3"/>
+          <a:stretch>
+            <a:fillRect/>
+          </a:stretch>
+        </p:blipFill>
+        <p:spPr>
+          <a:xfrm>
+            <a:off x="5485485" y="1847087"/>
+            <a:ext cx="1220724" cy="1220724"/>
+          </a:xfrm>
+          <a:prstGeom prst="rect">
+            <a:avLst/>
+          </a:prstGeom>
+        </p:spPr>
+      </p:pic>
+      <p:sp>
+        <p:nvSpPr>
+          <p:cNvPr id="15" name="TextBox 14"/>
+          <p:cNvSpPr txBox="1"/>
+          <p:nvPr/>
+        </p:nvSpPr>
+        <p:spPr>
+          <a:xfrm>
+            <a:off x="4356506" y="3159251"/>
+            <a:ext cx="3478682" cy="621792"/>
+          </a:xfrm>
+          <a:prstGeom prst="rect">
+            <a:avLst/>
+          </a:prstGeom>
+          <a:noFill/>
+        </p:spPr>
+        <p:txBody>
+          <a:bodyPr wrap="square" anchor="t"/>
+          <a:lstStyle/>
+          <a:p>
+            <a:pPr algn="ctr"/>
+            <a:r>
+              <a:rPr sz="1300" b="1" i="0">
+                <a:solidFill>
+                  <a:srgbClr val="095292"/>
+                </a:solidFill>
+                <a:latin typeface="Calibri"/>
+              </a:rPr>
+              <a:t>google docs</a:t>
+            </a:r>
+          </a:p>
+          <a:p>
+            <a:pPr algn="ctr">
+              <a:spcBef>
+                <a:spcPts val="200"/>
+              </a:spcBef>
+            </a:pPr>
+            <a:r>
+              <a:rPr sz="1000" b="0" i="0">
+                <a:solidFill>
+                  <a:srgbClr val="666666"/>
+                </a:solidFill>
+                <a:latin typeface="Calibri"/>
+              </a:rPr>
+              <a:t>Documentos del paquete de diseño</a:t>
+            </a:r>
+          </a:p>
+        </p:txBody>
+      </p:sp>
+      <p:sp>
+        <p:nvSpPr>
+          <p:cNvPr id="16" name="Rounded Rectangle 15"/>
+          <p:cNvSpPr/>
+          <p:nvPr/>
+        </p:nvSpPr>
+        <p:spPr>
+          <a:xfrm>
+            <a:off x="8109508" y="1591056"/>
+            <a:ext cx="3624986" cy="2299716"/>
+          </a:xfrm>
+          <a:prstGeom prst="roundRect">
+            <a:avLst>
+              <a:gd name="adj" fmla="val 12000"/>
+            </a:avLst>
+          </a:prstGeom>
+          <a:solidFill>
+            <a:srgbClr val="F2F2F2"/>
+          </a:solidFill>
+          <a:ln>
+            <a:noFill/>
+          </a:ln>
+        </p:spPr>
+        <p:style>
+          <a:lnRef idx="1">
+            <a:schemeClr val="accent1"/>
+          </a:lnRef>
+          <a:fillRef idx="3">
+            <a:schemeClr val="accent1"/>
+          </a:fillRef>
+          <a:effectRef idx="2">
+            <a:schemeClr val="accent1"/>
+          </a:effectRef>
+          <a:fontRef idx="minor">
+            <a:schemeClr val="lt1"/>
+          </a:fontRef>
+        </p:style>
+        <p:txBody>
+          <a:bodyPr rtlCol="0" anchor="ctr"/>
+          <a:lstStyle/>
+          <a:p>
+            <a:pPr algn="ctr"/>
+          </a:p>
+        </p:txBody>
+      </p:sp>
+      <p:sp>
+        <p:nvSpPr>
+          <p:cNvPr id="17" name="Rectangle 16"/>
+          <p:cNvSpPr/>
+          <p:nvPr/>
+        </p:nvSpPr>
+        <p:spPr>
+          <a:xfrm>
+            <a:off x="8109508" y="1591056"/>
+            <a:ext cx="3624986" cy="64008"/>
+          </a:xfrm>
+          <a:prstGeom prst="rect">
+            <a:avLst/>
+          </a:prstGeom>
+          <a:solidFill>
+            <a:srgbClr val="095292"/>
+          </a:solidFill>
+          <a:ln>
+            <a:noFill/>
+          </a:ln>
+        </p:spPr>
+        <p:style>
+          <a:lnRef idx="1">
+            <a:schemeClr val="accent1"/>
+          </a:lnRef>
+          <a:fillRef idx="3">
+            <a:schemeClr val="accent1"/>
+          </a:fillRef>
+          <a:effectRef idx="2">
+            <a:schemeClr val="accent1"/>
+          </a:effectRef>
+          <a:fontRef idx="minor">
+            <a:schemeClr val="lt1"/>
+          </a:fontRef>
+        </p:style>
+        <p:txBody>
+          <a:bodyPr rtlCol="0" anchor="ctr"/>
+          <a:lstStyle/>
+          <a:p>
+            <a:pPr algn="ctr"/>
+          </a:p>
+        </p:txBody>
+      </p:sp>
+      <p:sp>
+        <p:nvSpPr>
+          <p:cNvPr id="18" name="Rectangle 17"/>
+          <p:cNvSpPr/>
+          <p:nvPr/>
+        </p:nvSpPr>
+        <p:spPr>
+          <a:xfrm>
+            <a:off x="8109508" y="1655064"/>
+            <a:ext cx="3624986" cy="27432"/>
+          </a:xfrm>
+          <a:prstGeom prst="rect">
+            <a:avLst/>
+          </a:prstGeom>
+          <a:solidFill>
+            <a:srgbClr val="FFD000"/>
+          </a:solidFill>
+          <a:ln>
+            <a:noFill/>
+          </a:ln>
+        </p:spPr>
+        <p:style>
+          <a:lnRef idx="1">
+            <a:schemeClr val="accent1"/>
+          </a:lnRef>
+          <a:fillRef idx="3">
+            <a:schemeClr val="accent1"/>
+          </a:fillRef>
+          <a:effectRef idx="2">
+            <a:schemeClr val="accent1"/>
+          </a:effectRef>
+          <a:fontRef idx="minor">
+            <a:schemeClr val="lt1"/>
+          </a:fontRef>
+        </p:style>
+        <p:txBody>
+          <a:bodyPr rtlCol="0" anchor="ctr"/>
+          <a:lstStyle/>
+          <a:p>
+            <a:pPr algn="ctr"/>
+          </a:p>
+        </p:txBody>
+      </p:sp>
+      <p:sp>
+        <p:nvSpPr>
+          <p:cNvPr id="19" name="Rounded Rectangle 18"/>
+          <p:cNvSpPr/>
+          <p:nvPr/>
+        </p:nvSpPr>
+        <p:spPr>
+          <a:xfrm>
+            <a:off x="9311640" y="1847087"/>
+            <a:ext cx="1220724" cy="1220724"/>
+          </a:xfrm>
+          <a:prstGeom prst="roundRect">
+            <a:avLst>
+              <a:gd name="adj" fmla="val 12000"/>
+            </a:avLst>
+          </a:prstGeom>
+          <a:solidFill>
+            <a:srgbClr val="E8F4FA"/>
+          </a:solidFill>
+          <a:ln>
+            <a:noFill/>
+          </a:ln>
+        </p:spPr>
+        <p:style>
+          <a:lnRef idx="1">
+            <a:schemeClr val="accent1"/>
+          </a:lnRef>
+          <a:fillRef idx="3">
+            <a:schemeClr val="accent1"/>
+          </a:fillRef>
+          <a:effectRef idx="2">
+            <a:schemeClr val="accent1"/>
+          </a:effectRef>
+          <a:fontRef idx="minor">
+            <a:schemeClr val="lt1"/>
+          </a:fontRef>
+        </p:style>
+        <p:txBody>
+          <a:bodyPr rtlCol="0" anchor="ctr"/>
+          <a:lstStyle/>
+          <a:p>
+            <a:pPr algn="ctr"/>
+          </a:p>
+        </p:txBody>
+      </p:sp>
+      <p:sp>
+        <p:nvSpPr>
+          <p:cNvPr id="20" name="TextBox 19"/>
+          <p:cNvSpPr txBox="1"/>
+          <p:nvPr/>
+        </p:nvSpPr>
+        <p:spPr>
+          <a:xfrm>
+            <a:off x="9311640" y="1847087"/>
+            <a:ext cx="1220724" cy="1220724"/>
+          </a:xfrm>
+          <a:prstGeom prst="rect">
+            <a:avLst/>
+          </a:prstGeom>
+          <a:noFill/>
+        </p:spPr>
+        <p:txBody>
           <a:bodyPr wrap="square" anchor="ctr"/>
           <a:lstStyle/>
           <a:p>
             <a:pPr algn="ctr"/>
             <a:r>
-              <a:rPr sz="3400" b="1" i="0">
+              <a:rPr sz="1600" b="1" i="0">
                 <a:solidFill>
                   <a:srgbClr val="095292"/>
                 </a:solidFill>
                 <a:latin typeface="Calibri"/>
               </a:rPr>
-              <a:t>Clase 13 · VetCare avanza</a:t>
-            </a:r>
-          </a:p>
-        </p:txBody>
-      </p:sp>
-      <p:sp>
-        <p:nvSpPr>
-          <p:cNvPr id="5" name="TextBox 4"/>
+              <a:t>F</a:t>
+            </a:r>
+          </a:p>
+        </p:txBody>
+      </p:sp>
+      <p:sp>
+        <p:nvSpPr>
+          <p:cNvPr id="21" name="TextBox 20"/>
           <p:cNvSpPr txBox="1"/>
           <p:nvPr/>
         </p:nvSpPr>
         <p:spPr>
           <a:xfrm>
-            <a:off x="457200" y="3017520"/>
-            <a:ext cx="11277295" cy="1645920"/>
+            <a:off x="8182660" y="3159251"/>
+            <a:ext cx="3478682" cy="621792"/>
+          </a:xfrm>
+          <a:prstGeom prst="rect">
+            <a:avLst/>
+          </a:prstGeom>
+          <a:noFill/>
+        </p:spPr>
+        <p:txBody>
+          <a:bodyPr wrap="square" anchor="t"/>
+          <a:lstStyle/>
+          <a:p>
+            <a:pPr algn="ctr"/>
+            <a:r>
+              <a:rPr sz="1300" b="1" i="0">
+                <a:solidFill>
+                  <a:srgbClr val="095292"/>
+                </a:solidFill>
+                <a:latin typeface="Calibri"/>
+              </a:rPr>
+              <a:t>Figma</a:t>
+            </a:r>
+          </a:p>
+          <a:p>
+            <a:pPr algn="ctr">
+              <a:spcBef>
+                <a:spcPts val="200"/>
+              </a:spcBef>
+            </a:pPr>
+            <a:r>
+              <a:rPr sz="1000" b="0" i="0">
+                <a:solidFill>
+                  <a:srgbClr val="666666"/>
+                </a:solidFill>
+                <a:latin typeface="Calibri"/>
+              </a:rPr>
+              <a:t>Wireframes y prototipo navegable</a:t>
+            </a:r>
+          </a:p>
+        </p:txBody>
+      </p:sp>
+      <p:sp>
+        <p:nvSpPr>
+          <p:cNvPr id="22" name="Rounded Rectangle 21"/>
+          <p:cNvSpPr/>
+          <p:nvPr/>
+        </p:nvSpPr>
+        <p:spPr>
+          <a:xfrm>
+            <a:off x="2370277" y="4055364"/>
+            <a:ext cx="3624986" cy="2299716"/>
+          </a:xfrm>
+          <a:prstGeom prst="roundRect">
+            <a:avLst>
+              <a:gd name="adj" fmla="val 12000"/>
+            </a:avLst>
+          </a:prstGeom>
+          <a:solidFill>
+            <a:srgbClr val="F2F2F2"/>
+          </a:solidFill>
+          <a:ln>
+            <a:noFill/>
+          </a:ln>
+        </p:spPr>
+        <p:style>
+          <a:lnRef idx="1">
+            <a:schemeClr val="accent1"/>
+          </a:lnRef>
+          <a:fillRef idx="3">
+            <a:schemeClr val="accent1"/>
+          </a:fillRef>
+          <a:effectRef idx="2">
+            <a:schemeClr val="accent1"/>
+          </a:effectRef>
+          <a:fontRef idx="minor">
+            <a:schemeClr val="lt1"/>
+          </a:fontRef>
+        </p:style>
+        <p:txBody>
+          <a:bodyPr rtlCol="0" anchor="ctr"/>
+          <a:lstStyle/>
+          <a:p>
+            <a:pPr algn="ctr"/>
+          </a:p>
+        </p:txBody>
+      </p:sp>
+      <p:sp>
+        <p:nvSpPr>
+          <p:cNvPr id="23" name="Rectangle 22"/>
+          <p:cNvSpPr/>
+          <p:nvPr/>
+        </p:nvSpPr>
+        <p:spPr>
+          <a:xfrm>
+            <a:off x="2370277" y="4055364"/>
+            <a:ext cx="3624986" cy="64008"/>
+          </a:xfrm>
+          <a:prstGeom prst="rect">
+            <a:avLst/>
+          </a:prstGeom>
+          <a:solidFill>
+            <a:srgbClr val="095292"/>
+          </a:solidFill>
+          <a:ln>
+            <a:noFill/>
+          </a:ln>
+        </p:spPr>
+        <p:style>
+          <a:lnRef idx="1">
+            <a:schemeClr val="accent1"/>
+          </a:lnRef>
+          <a:fillRef idx="3">
+            <a:schemeClr val="accent1"/>
+          </a:fillRef>
+          <a:effectRef idx="2">
+            <a:schemeClr val="accent1"/>
+          </a:effectRef>
+          <a:fontRef idx="minor">
+            <a:schemeClr val="lt1"/>
+          </a:fontRef>
+        </p:style>
+        <p:txBody>
+          <a:bodyPr rtlCol="0" anchor="ctr"/>
+          <a:lstStyle/>
+          <a:p>
+            <a:pPr algn="ctr"/>
+          </a:p>
+        </p:txBody>
+      </p:sp>
+      <p:sp>
+        <p:nvSpPr>
+          <p:cNvPr id="24" name="Rectangle 23"/>
+          <p:cNvSpPr/>
+          <p:nvPr/>
+        </p:nvSpPr>
+        <p:spPr>
+          <a:xfrm>
+            <a:off x="2370277" y="4119372"/>
+            <a:ext cx="3624986" cy="27432"/>
+          </a:xfrm>
+          <a:prstGeom prst="rect">
+            <a:avLst/>
+          </a:prstGeom>
+          <a:solidFill>
+            <a:srgbClr val="FFD000"/>
+          </a:solidFill>
+          <a:ln>
+            <a:noFill/>
+          </a:ln>
+        </p:spPr>
+        <p:style>
+          <a:lnRef idx="1">
+            <a:schemeClr val="accent1"/>
+          </a:lnRef>
+          <a:fillRef idx="3">
+            <a:schemeClr val="accent1"/>
+          </a:fillRef>
+          <a:effectRef idx="2">
+            <a:schemeClr val="accent1"/>
+          </a:effectRef>
+          <a:fontRef idx="minor">
+            <a:schemeClr val="lt1"/>
+          </a:fontRef>
+        </p:style>
+        <p:txBody>
+          <a:bodyPr rtlCol="0" anchor="ctr"/>
+          <a:lstStyle/>
+          <a:p>
+            <a:pPr algn="ctr"/>
+          </a:p>
+        </p:txBody>
+      </p:sp>
+      <p:sp>
+        <p:nvSpPr>
+          <p:cNvPr id="25" name="Rounded Rectangle 24"/>
+          <p:cNvSpPr/>
+          <p:nvPr/>
+        </p:nvSpPr>
+        <p:spPr>
+          <a:xfrm>
+            <a:off x="3572408" y="4311396"/>
+            <a:ext cx="1220724" cy="1220724"/>
+          </a:xfrm>
+          <a:prstGeom prst="roundRect">
+            <a:avLst>
+              <a:gd name="adj" fmla="val 12000"/>
+            </a:avLst>
+          </a:prstGeom>
+          <a:solidFill>
+            <a:srgbClr val="E8F4FA"/>
+          </a:solidFill>
+          <a:ln>
+            <a:noFill/>
+          </a:ln>
+        </p:spPr>
+        <p:style>
+          <a:lnRef idx="1">
+            <a:schemeClr val="accent1"/>
+          </a:lnRef>
+          <a:fillRef idx="3">
+            <a:schemeClr val="accent1"/>
+          </a:fillRef>
+          <a:effectRef idx="2">
+            <a:schemeClr val="accent1"/>
+          </a:effectRef>
+          <a:fontRef idx="minor">
+            <a:schemeClr val="lt1"/>
+          </a:fontRef>
+        </p:style>
+        <p:txBody>
+          <a:bodyPr rtlCol="0" anchor="ctr"/>
+          <a:lstStyle/>
+          <a:p>
+            <a:pPr algn="ctr"/>
+          </a:p>
+        </p:txBody>
+      </p:sp>
+      <p:sp>
+        <p:nvSpPr>
+          <p:cNvPr id="26" name="TextBox 25"/>
+          <p:cNvSpPr txBox="1"/>
+          <p:nvPr/>
+        </p:nvSpPr>
+        <p:spPr>
+          <a:xfrm>
+            <a:off x="3572408" y="4311396"/>
+            <a:ext cx="1220724" cy="1220724"/>
+          </a:xfrm>
+          <a:prstGeom prst="rect">
+            <a:avLst/>
+          </a:prstGeom>
+          <a:noFill/>
+        </p:spPr>
+        <p:txBody>
+          <a:bodyPr wrap="square" anchor="ctr"/>
+          <a:lstStyle/>
+          <a:p>
+            <a:pPr algn="ctr"/>
+            <a:r>
+              <a:rPr sz="1600" b="1" i="0">
+                <a:solidFill>
+                  <a:srgbClr val="095292"/>
+                </a:solidFill>
+                <a:latin typeface="Calibri"/>
+              </a:rPr>
+              <a:t>P</a:t>
+            </a:r>
+          </a:p>
+        </p:txBody>
+      </p:sp>
+      <p:sp>
+        <p:nvSpPr>
+          <p:cNvPr id="27" name="TextBox 26"/>
+          <p:cNvSpPr txBox="1"/>
+          <p:nvPr/>
+        </p:nvSpPr>
+        <p:spPr>
+          <a:xfrm>
+            <a:off x="2443429" y="5623560"/>
+            <a:ext cx="3478682" cy="621792"/>
+          </a:xfrm>
+          <a:prstGeom prst="rect">
+            <a:avLst/>
+          </a:prstGeom>
+          <a:noFill/>
+        </p:spPr>
+        <p:txBody>
+          <a:bodyPr wrap="square" anchor="t"/>
+          <a:lstStyle/>
+          <a:p>
+            <a:pPr algn="ctr"/>
+            <a:r>
+              <a:rPr sz="1300" b="1" i="0">
+                <a:solidFill>
+                  <a:srgbClr val="095292"/>
+                </a:solidFill>
+                <a:latin typeface="Calibri"/>
+              </a:rPr>
+              <a:t>Penpot</a:t>
+            </a:r>
+          </a:p>
+          <a:p>
+            <a:pPr algn="ctr">
+              <a:spcBef>
+                <a:spcPts val="200"/>
+              </a:spcBef>
+            </a:pPr>
+            <a:r>
+              <a:rPr sz="1000" b="0" i="0">
+                <a:solidFill>
+                  <a:srgbClr val="666666"/>
+                </a:solidFill>
+                <a:latin typeface="Calibri"/>
+              </a:rPr>
+              <a:t>Alternativa libre a Figma</a:t>
+            </a:r>
+          </a:p>
+        </p:txBody>
+      </p:sp>
+      <p:sp>
+        <p:nvSpPr>
+          <p:cNvPr id="28" name="Rounded Rectangle 27"/>
+          <p:cNvSpPr/>
+          <p:nvPr/>
+        </p:nvSpPr>
+        <p:spPr>
+          <a:xfrm>
+            <a:off x="6196431" y="4055364"/>
+            <a:ext cx="3624986" cy="2299716"/>
+          </a:xfrm>
+          <a:prstGeom prst="roundRect">
+            <a:avLst>
+              <a:gd name="adj" fmla="val 12000"/>
+            </a:avLst>
+          </a:prstGeom>
+          <a:solidFill>
+            <a:srgbClr val="F2F2F2"/>
+          </a:solidFill>
+          <a:ln>
+            <a:noFill/>
+          </a:ln>
+        </p:spPr>
+        <p:style>
+          <a:lnRef idx="1">
+            <a:schemeClr val="accent1"/>
+          </a:lnRef>
+          <a:fillRef idx="3">
+            <a:schemeClr val="accent1"/>
+          </a:fillRef>
+          <a:effectRef idx="2">
+            <a:schemeClr val="accent1"/>
+          </a:effectRef>
+          <a:fontRef idx="minor">
+            <a:schemeClr val="lt1"/>
+          </a:fontRef>
+        </p:style>
+        <p:txBody>
+          <a:bodyPr rtlCol="0" anchor="ctr"/>
+          <a:lstStyle/>
+          <a:p>
+            <a:pPr algn="ctr"/>
+          </a:p>
+        </p:txBody>
+      </p:sp>
+      <p:sp>
+        <p:nvSpPr>
+          <p:cNvPr id="29" name="Rectangle 28"/>
+          <p:cNvSpPr/>
+          <p:nvPr/>
+        </p:nvSpPr>
+        <p:spPr>
+          <a:xfrm>
+            <a:off x="6196431" y="4055364"/>
+            <a:ext cx="3624986" cy="64008"/>
+          </a:xfrm>
+          <a:prstGeom prst="rect">
+            <a:avLst/>
+          </a:prstGeom>
+          <a:solidFill>
+            <a:srgbClr val="095292"/>
+          </a:solidFill>
+          <a:ln>
+            <a:noFill/>
+          </a:ln>
+        </p:spPr>
+        <p:style>
+          <a:lnRef idx="1">
+            <a:schemeClr val="accent1"/>
+          </a:lnRef>
+          <a:fillRef idx="3">
+            <a:schemeClr val="accent1"/>
+          </a:fillRef>
+          <a:effectRef idx="2">
+            <a:schemeClr val="accent1"/>
+          </a:effectRef>
+          <a:fontRef idx="minor">
+            <a:schemeClr val="lt1"/>
+          </a:fontRef>
+        </p:style>
+        <p:txBody>
+          <a:bodyPr rtlCol="0" anchor="ctr"/>
+          <a:lstStyle/>
+          <a:p>
+            <a:pPr algn="ctr"/>
+          </a:p>
+        </p:txBody>
+      </p:sp>
+      <p:sp>
+        <p:nvSpPr>
+          <p:cNvPr id="30" name="Rectangle 29"/>
+          <p:cNvSpPr/>
+          <p:nvPr/>
+        </p:nvSpPr>
+        <p:spPr>
+          <a:xfrm>
+            <a:off x="6196431" y="4119372"/>
+            <a:ext cx="3624986" cy="27432"/>
+          </a:xfrm>
+          <a:prstGeom prst="rect">
+            <a:avLst/>
+          </a:prstGeom>
+          <a:solidFill>
+            <a:srgbClr val="FFD000"/>
+          </a:solidFill>
+          <a:ln>
+            <a:noFill/>
+          </a:ln>
+        </p:spPr>
+        <p:style>
+          <a:lnRef idx="1">
+            <a:schemeClr val="accent1"/>
+          </a:lnRef>
+          <a:fillRef idx="3">
+            <a:schemeClr val="accent1"/>
+          </a:fillRef>
+          <a:effectRef idx="2">
+            <a:schemeClr val="accent1"/>
+          </a:effectRef>
+          <a:fontRef idx="minor">
+            <a:schemeClr val="lt1"/>
+          </a:fontRef>
+        </p:style>
+        <p:txBody>
+          <a:bodyPr rtlCol="0" anchor="ctr"/>
+          <a:lstStyle/>
+          <a:p>
+            <a:pPr algn="ctr"/>
+          </a:p>
+        </p:txBody>
+      </p:sp>
+      <p:pic>
+        <p:nvPicPr>
+          <p:cNvPr id="31" name="Picture 30" descr="examlab.png"/>
+          <p:cNvPicPr>
+            <a:picLocks noChangeAspect="1"/>
+          </p:cNvPicPr>
+          <p:nvPr/>
+        </p:nvPicPr>
+        <p:blipFill>
+          <a:blip r:embed="rId4"/>
+          <a:stretch>
+            <a:fillRect/>
+          </a:stretch>
+        </p:blipFill>
+        <p:spPr>
+          <a:xfrm>
+            <a:off x="7398562" y="4311396"/>
+            <a:ext cx="1220724" cy="1220724"/>
+          </a:xfrm>
+          <a:prstGeom prst="rect">
+            <a:avLst/>
+          </a:prstGeom>
+        </p:spPr>
+      </p:pic>
+      <p:sp>
+        <p:nvSpPr>
+          <p:cNvPr id="32" name="TextBox 31"/>
+          <p:cNvSpPr txBox="1"/>
+          <p:nvPr/>
+        </p:nvSpPr>
+        <p:spPr>
+          <a:xfrm>
+            <a:off x="6269583" y="5623560"/>
+            <a:ext cx="3478682" cy="621792"/>
+          </a:xfrm>
+          <a:prstGeom prst="rect">
+            <a:avLst/>
+          </a:prstGeom>
+          <a:noFill/>
+        </p:spPr>
+        <p:txBody>
+          <a:bodyPr wrap="square" anchor="t"/>
+          <a:lstStyle/>
+          <a:p>
+            <a:pPr algn="ctr"/>
+            <a:r>
+              <a:rPr sz="1300" b="1" i="0">
+                <a:solidFill>
+                  <a:srgbClr val="095292"/>
+                </a:solidFill>
+                <a:latin typeface="Calibri"/>
+              </a:rPr>
+              <a:t>la plataforma del curso</a:t>
+            </a:r>
+          </a:p>
+          <a:p>
+            <a:pPr algn="ctr">
+              <a:spcBef>
+                <a:spcPts val="200"/>
+              </a:spcBef>
+            </a:pPr>
+            <a:r>
+              <a:rPr sz="1000" b="0" i="0">
+                <a:solidFill>
+                  <a:srgbClr val="666666"/>
+                </a:solidFill>
+                <a:latin typeface="Calibri"/>
+              </a:rPr>
+              <a:t>Entrega del taller · en la fecha que indique el docente</a:t>
+            </a:r>
+          </a:p>
+        </p:txBody>
+      </p:sp>
+      <p:sp>
+        <p:nvSpPr>
+          <p:cNvPr id="33" name="TextBox 32"/>
+          <p:cNvSpPr txBox="1"/>
+          <p:nvPr/>
+        </p:nvSpPr>
+        <p:spPr>
+          <a:xfrm>
+            <a:off x="11185855" y="6473952"/>
+            <a:ext cx="640080" cy="274320"/>
           </a:xfrm>
           <a:prstGeom prst="rect">
             <a:avLst/>
@@ -6261,65 +6760,141 @@
           </a:bodyPr>
           <a:lstStyle/>
           <a:p>
-            <a:pPr algn="ctr">
-              <a:spcAft>
-                <a:spcPts val="600"/>
-              </a:spcAft>
-            </a:pPr>
-            <a:r>
-              <a:rPr sz="1600" b="0" i="0">
-                <a:solidFill>
-                  <a:srgbClr val="333333"/>
-                </a:solidFill>
-                <a:latin typeface="Calibri"/>
-              </a:rPr>
-              <a:t>Quedan listas las pantallas de Registrar mascota y Buscar expediente de VetCare, anotadas y conectadas en un prototipo navegable.</a:t>
-            </a:r>
-          </a:p>
-          <a:p>
-            <a:pPr algn="ctr">
-              <a:spcAft>
-                <a:spcPts val="600"/>
-              </a:spcAft>
-            </a:pPr>
-            <a:r>
-              <a:rPr sz="1600" b="0" i="0">
-                <a:solidFill>
-                  <a:srgbClr val="333333"/>
-                </a:solidFill>
-                <a:latin typeface="Calibri"/>
-              </a:rPr>
-              <a:t>Entregable: Un archivo de Figma o Penpot con las dos pantallas anotadas y minimo tres transiciones navegables, mas la hoja de anotaciones que amarra cada campo a un RF y a un atributo del diccionario de datos, subido a la plataforma del curso.</a:t>
-            </a:r>
-          </a:p>
-          <a:p>
-            <a:pPr algn="ctr">
-              <a:spcAft>
-                <a:spcPts val="600"/>
-              </a:spcAft>
-            </a:pPr>
-            <a:r>
-              <a:rPr sz="1600" b="0" i="0">
-                <a:solidFill>
-                  <a:srgbClr val="333333"/>
-                </a:solidFill>
-                <a:latin typeface="Calibri"/>
-              </a:rPr>
-              <a:t>Siguiente clase: continuamos el hilo del PI</a:t>
-            </a:r>
-          </a:p>
-        </p:txBody>
-      </p:sp>
-      <p:sp>
-        <p:nvSpPr>
-          <p:cNvPr id="6" name="TextBox 5"/>
+            <a:pPr algn="r"/>
+            <a:r>
+              <a:rPr sz="1100" b="0" i="0">
+                <a:solidFill>
+                  <a:srgbClr val="666666"/>
+                </a:solidFill>
+                <a:latin typeface="Calibri"/>
+              </a:rPr>
+              <a:t>16</a:t>
+            </a:r>
+          </a:p>
+        </p:txBody>
+      </p:sp>
+    </p:spTree>
+  </p:cSld>
+  <p:clrMapOvr>
+    <a:masterClrMapping/>
+  </p:clrMapOvr>
+</p:sld>
+</file>
+
+<file path=ppt/slides/slide17.xml><?xml version="1.0" encoding="utf-8"?>
+<p:sld xmlns:a="http://schemas.openxmlformats.org/drawingml/2006/main" xmlns:p="http://schemas.openxmlformats.org/presentationml/2006/main" xmlns:r="http://schemas.openxmlformats.org/officeDocument/2006/relationships">
+  <p:cSld>
+    <p:bg>
+      <p:bgPr>
+        <a:solidFill>
+          <a:srgbClr val="FFFFFF"/>
+        </a:solidFill>
+        <a:effectLst/>
+      </p:bgPr>
+    </p:bg>
+    <p:spTree>
+      <p:nvGrpSpPr>
+        <p:cNvPr id="1" name=""/>
+        <p:cNvGrpSpPr/>
+        <p:nvPr/>
+      </p:nvGrpSpPr>
+      <p:grpSpPr/>
+      <p:sp>
+        <p:nvSpPr>
+          <p:cNvPr id="2" name="Rectangle 1"/>
+          <p:cNvSpPr/>
+          <p:nvPr/>
+        </p:nvSpPr>
+        <p:spPr>
+          <a:xfrm>
+            <a:off x="0" y="0"/>
+            <a:ext cx="12191695" cy="960120"/>
+          </a:xfrm>
+          <a:prstGeom prst="rect">
+            <a:avLst/>
+          </a:prstGeom>
+          <a:solidFill>
+            <a:srgbClr val="095292"/>
+          </a:solidFill>
+          <a:ln>
+            <a:noFill/>
+          </a:ln>
+        </p:spPr>
+        <p:style>
+          <a:lnRef idx="1">
+            <a:schemeClr val="accent1"/>
+          </a:lnRef>
+          <a:fillRef idx="3">
+            <a:schemeClr val="accent1"/>
+          </a:fillRef>
+          <a:effectRef idx="2">
+            <a:schemeClr val="accent1"/>
+          </a:effectRef>
+          <a:fontRef idx="minor">
+            <a:schemeClr val="lt1"/>
+          </a:fontRef>
+        </p:style>
+        <p:txBody>
+          <a:bodyPr rtlCol="0" anchor="ctr"/>
+          <a:lstStyle/>
+          <a:p>
+            <a:pPr algn="ctr"/>
+          </a:p>
+        </p:txBody>
+      </p:sp>
+      <p:sp>
+        <p:nvSpPr>
+          <p:cNvPr id="3" name="Rectangle 2"/>
+          <p:cNvSpPr/>
+          <p:nvPr/>
+        </p:nvSpPr>
+        <p:spPr>
+          <a:xfrm>
+            <a:off x="0" y="960120"/>
+            <a:ext cx="12191695" cy="41148"/>
+          </a:xfrm>
+          <a:prstGeom prst="rect">
+            <a:avLst/>
+          </a:prstGeom>
+          <a:solidFill>
+            <a:srgbClr val="FFD000"/>
+          </a:solidFill>
+          <a:ln>
+            <a:noFill/>
+          </a:ln>
+        </p:spPr>
+        <p:style>
+          <a:lnRef idx="1">
+            <a:schemeClr val="accent1"/>
+          </a:lnRef>
+          <a:fillRef idx="3">
+            <a:schemeClr val="accent1"/>
+          </a:fillRef>
+          <a:effectRef idx="2">
+            <a:schemeClr val="accent1"/>
+          </a:effectRef>
+          <a:fontRef idx="minor">
+            <a:schemeClr val="lt1"/>
+          </a:fontRef>
+        </p:style>
+        <p:txBody>
+          <a:bodyPr rtlCol="0" anchor="ctr"/>
+          <a:lstStyle/>
+          <a:p>
+            <a:pPr algn="ctr"/>
+          </a:p>
+        </p:txBody>
+      </p:sp>
+      <p:sp>
+        <p:nvSpPr>
+          <p:cNvPr id="4" name="TextBox 3"/>
           <p:cNvSpPr txBox="1"/>
           <p:nvPr/>
         </p:nvSpPr>
         <p:spPr>
           <a:xfrm>
-            <a:off x="457200" y="4754880"/>
-            <a:ext cx="11277295" cy="640080"/>
+            <a:off x="457200" y="164592"/>
+            <a:ext cx="11277295" cy="502920"/>
           </a:xfrm>
           <a:prstGeom prst="rect">
             <a:avLst/>
@@ -6332,15 +6907,1346 @@
           </a:bodyPr>
           <a:lstStyle/>
           <a:p>
+            <a:r>
+              <a:rPr sz="2600" b="1" i="0">
+                <a:solidFill>
+                  <a:srgbClr val="FFFFFF"/>
+                </a:solidFill>
+                <a:latin typeface="Calibri"/>
+              </a:rPr>
+              <a:t>Taller PI — por que importa</a:t>
+            </a:r>
+          </a:p>
+        </p:txBody>
+      </p:sp>
+      <p:sp>
+        <p:nvSpPr>
+          <p:cNvPr id="5" name="TextBox 4"/>
+          <p:cNvSpPr txBox="1"/>
+          <p:nvPr/>
+        </p:nvSpPr>
+        <p:spPr>
+          <a:xfrm>
+            <a:off x="457200" y="1170432"/>
+            <a:ext cx="11277295" cy="5230368"/>
+          </a:xfrm>
+          <a:prstGeom prst="rect">
+            <a:avLst/>
+          </a:prstGeom>
+          <a:noFill/>
+        </p:spPr>
+        <p:txBody>
+          <a:bodyPr wrap="square">
+            <a:spAutoFit/>
+          </a:bodyPr>
+          <a:lstStyle/>
+          <a:p>
+            <a:pPr>
+              <a:spcAft>
+                <a:spcPts val="800"/>
+              </a:spcAft>
+            </a:pPr>
+            <a:r>
+              <a:rPr sz="2000" b="0" i="0">
+                <a:solidFill>
+                  <a:srgbClr val="333333"/>
+                </a:solidFill>
+                <a:latin typeface="Calibri"/>
+              </a:rPr>
+              <a:t>–   </a:t>
+            </a:r>
+            <a:r>
+              <a:rPr sz="2000" b="1" i="0">
+                <a:solidFill>
+                  <a:srgbClr val="333333"/>
+                </a:solidFill>
+                <a:latin typeface="Calibri"/>
+              </a:rPr>
+              <a:t>Por que importa al PI:</a:t>
+            </a:r>
+            <a:r>
+              <a:rPr sz="2000" b="0" i="0">
+                <a:solidFill>
+                  <a:srgbClr val="333333"/>
+                </a:solidFill>
+                <a:latin typeface="Calibri"/>
+              </a:rPr>
+              <a:t> la interfaz es la cara visible del paquete de diseño de VetCare y es lo unico del PI que la clinica Huellitas entiende sin traduccion; ademas es el insumo directo con el que Programacion II construye las pantallas reales.</a:t>
+            </a:r>
+          </a:p>
+          <a:p>
+            <a:pPr>
+              <a:spcAft>
+                <a:spcPts val="800"/>
+              </a:spcAft>
+            </a:pPr>
+            <a:r>
+              <a:rPr sz="2000" b="0" i="0">
+                <a:solidFill>
+                  <a:srgbClr val="333333"/>
+                </a:solidFill>
+                <a:latin typeface="Calibri"/>
+              </a:rPr>
+              <a:t>–   Es la ultima clase con tema nuevo del curso: lo que se produzca hoy entra tal cual al documento final y a la sustentacion de la clase 14.</a:t>
+            </a:r>
+          </a:p>
+          <a:p>
+            <a:pPr>
+              <a:spcAft>
+                <a:spcPts val="800"/>
+              </a:spcAft>
+            </a:pPr>
+            <a:r>
+              <a:rPr sz="2000" b="0" i="0">
+                <a:solidFill>
+                  <a:srgbClr val="333333"/>
+                </a:solidFill>
+                <a:latin typeface="Calibri"/>
+              </a:rPr>
+              <a:t>–   Quien va solo por la ruta C cierra su PI con este prototipo navegable, que es entregable completo y valido por si mismo, no una version recortada del proyecto.</a:t>
+            </a:r>
+          </a:p>
+        </p:txBody>
+      </p:sp>
+      <p:sp>
+        <p:nvSpPr>
+          <p:cNvPr id="6" name="TextBox 5"/>
+          <p:cNvSpPr txBox="1"/>
+          <p:nvPr/>
+        </p:nvSpPr>
+        <p:spPr>
+          <a:xfrm>
+            <a:off x="11185855" y="6473952"/>
+            <a:ext cx="640080" cy="274320"/>
+          </a:xfrm>
+          <a:prstGeom prst="rect">
+            <a:avLst/>
+          </a:prstGeom>
+          <a:noFill/>
+        </p:spPr>
+        <p:txBody>
+          <a:bodyPr wrap="square">
+            <a:spAutoFit/>
+          </a:bodyPr>
+          <a:lstStyle/>
+          <a:p>
+            <a:pPr algn="r"/>
+            <a:r>
+              <a:rPr sz="1100" b="0" i="0">
+                <a:solidFill>
+                  <a:srgbClr val="666666"/>
+                </a:solidFill>
+                <a:latin typeface="Calibri"/>
+              </a:rPr>
+              <a:t>17</a:t>
+            </a:r>
+          </a:p>
+        </p:txBody>
+      </p:sp>
+    </p:spTree>
+  </p:cSld>
+  <p:clrMapOvr>
+    <a:masterClrMapping/>
+  </p:clrMapOvr>
+</p:sld>
+</file>
+
+<file path=ppt/slides/slide18.xml><?xml version="1.0" encoding="utf-8"?>
+<p:sld xmlns:a="http://schemas.openxmlformats.org/drawingml/2006/main" xmlns:p="http://schemas.openxmlformats.org/presentationml/2006/main" xmlns:r="http://schemas.openxmlformats.org/officeDocument/2006/relationships">
+  <p:cSld>
+    <p:bg>
+      <p:bgPr>
+        <a:solidFill>
+          <a:srgbClr val="FFFFFF"/>
+        </a:solidFill>
+        <a:effectLst/>
+      </p:bgPr>
+    </p:bg>
+    <p:spTree>
+      <p:nvGrpSpPr>
+        <p:cNvPr id="1" name=""/>
+        <p:cNvGrpSpPr/>
+        <p:nvPr/>
+      </p:nvGrpSpPr>
+      <p:grpSpPr/>
+      <p:sp>
+        <p:nvSpPr>
+          <p:cNvPr id="2" name="Rectangle 1"/>
+          <p:cNvSpPr/>
+          <p:nvPr/>
+        </p:nvSpPr>
+        <p:spPr>
+          <a:xfrm>
+            <a:off x="0" y="0"/>
+            <a:ext cx="12191695" cy="960120"/>
+          </a:xfrm>
+          <a:prstGeom prst="rect">
+            <a:avLst/>
+          </a:prstGeom>
+          <a:solidFill>
+            <a:srgbClr val="095292"/>
+          </a:solidFill>
+          <a:ln>
+            <a:noFill/>
+          </a:ln>
+        </p:spPr>
+        <p:style>
+          <a:lnRef idx="1">
+            <a:schemeClr val="accent1"/>
+          </a:lnRef>
+          <a:fillRef idx="3">
+            <a:schemeClr val="accent1"/>
+          </a:fillRef>
+          <a:effectRef idx="2">
+            <a:schemeClr val="accent1"/>
+          </a:effectRef>
+          <a:fontRef idx="minor">
+            <a:schemeClr val="lt1"/>
+          </a:fontRef>
+        </p:style>
+        <p:txBody>
+          <a:bodyPr rtlCol="0" anchor="ctr"/>
+          <a:lstStyle/>
+          <a:p>
             <a:pPr algn="ctr"/>
-            <a:r>
-              <a:rPr sz="2000" b="1" i="0">
-                <a:solidFill>
-                  <a:srgbClr val="269CCB"/>
-                </a:solidFill>
-                <a:latin typeface="Calibri"/>
-              </a:rPr>
-              <a:t>Teoria al servicio del proyecto</a:t>
+          </a:p>
+        </p:txBody>
+      </p:sp>
+      <p:sp>
+        <p:nvSpPr>
+          <p:cNvPr id="3" name="Rectangle 2"/>
+          <p:cNvSpPr/>
+          <p:nvPr/>
+        </p:nvSpPr>
+        <p:spPr>
+          <a:xfrm>
+            <a:off x="0" y="960120"/>
+            <a:ext cx="12191695" cy="41148"/>
+          </a:xfrm>
+          <a:prstGeom prst="rect">
+            <a:avLst/>
+          </a:prstGeom>
+          <a:solidFill>
+            <a:srgbClr val="FFD000"/>
+          </a:solidFill>
+          <a:ln>
+            <a:noFill/>
+          </a:ln>
+        </p:spPr>
+        <p:style>
+          <a:lnRef idx="1">
+            <a:schemeClr val="accent1"/>
+          </a:lnRef>
+          <a:fillRef idx="3">
+            <a:schemeClr val="accent1"/>
+          </a:fillRef>
+          <a:effectRef idx="2">
+            <a:schemeClr val="accent1"/>
+          </a:effectRef>
+          <a:fontRef idx="minor">
+            <a:schemeClr val="lt1"/>
+          </a:fontRef>
+        </p:style>
+        <p:txBody>
+          <a:bodyPr rtlCol="0" anchor="ctr"/>
+          <a:lstStyle/>
+          <a:p>
+            <a:pPr algn="ctr"/>
+          </a:p>
+        </p:txBody>
+      </p:sp>
+      <p:sp>
+        <p:nvSpPr>
+          <p:cNvPr id="4" name="TextBox 3"/>
+          <p:cNvSpPr txBox="1"/>
+          <p:nvPr/>
+        </p:nvSpPr>
+        <p:spPr>
+          <a:xfrm>
+            <a:off x="457200" y="164592"/>
+            <a:ext cx="11277295" cy="502920"/>
+          </a:xfrm>
+          <a:prstGeom prst="rect">
+            <a:avLst/>
+          </a:prstGeom>
+          <a:noFill/>
+        </p:spPr>
+        <p:txBody>
+          <a:bodyPr wrap="square">
+            <a:spAutoFit/>
+          </a:bodyPr>
+          <a:lstStyle/>
+          <a:p>
+            <a:r>
+              <a:rPr sz="2600" b="1" i="0">
+                <a:solidFill>
+                  <a:srgbClr val="FFFFFF"/>
+                </a:solidFill>
+                <a:latin typeface="Calibri"/>
+              </a:rPr>
+              <a:t>Taller PI — punto de partida</a:t>
+            </a:r>
+          </a:p>
+        </p:txBody>
+      </p:sp>
+      <p:sp>
+        <p:nvSpPr>
+          <p:cNvPr id="5" name="TextBox 4"/>
+          <p:cNvSpPr txBox="1"/>
+          <p:nvPr/>
+        </p:nvSpPr>
+        <p:spPr>
+          <a:xfrm>
+            <a:off x="457200" y="1170432"/>
+            <a:ext cx="11277295" cy="5230368"/>
+          </a:xfrm>
+          <a:prstGeom prst="rect">
+            <a:avLst/>
+          </a:prstGeom>
+          <a:noFill/>
+        </p:spPr>
+        <p:txBody>
+          <a:bodyPr wrap="square">
+            <a:spAutoFit/>
+          </a:bodyPr>
+          <a:lstStyle/>
+          <a:p>
+            <a:pPr>
+              <a:spcAft>
+                <a:spcPts val="800"/>
+              </a:spcAft>
+            </a:pPr>
+            <a:r>
+              <a:rPr sz="2000" b="0" i="0">
+                <a:solidFill>
+                  <a:srgbClr val="333333"/>
+                </a:solidFill>
+                <a:latin typeface="Calibri"/>
+              </a:rPr>
+              <a:t>–   El equipo ya tiene aprobados los RF y RNF, el diagrama de casos de uso, el de clases con Mascota, Dueño, Historia_Clinica y Cita, y el diccionario de datos con tipos y longitudes.</a:t>
+            </a:r>
+          </a:p>
+          <a:p>
+            <a:pPr>
+              <a:spcAft>
+                <a:spcPts val="800"/>
+              </a:spcAft>
+            </a:pPr>
+            <a:r>
+              <a:rPr sz="2000" b="0" i="0">
+                <a:solidFill>
+                  <a:srgbClr val="333333"/>
+                </a:solidFill>
+                <a:latin typeface="Calibri"/>
+              </a:rPr>
+              <a:t>–   Hasta hoy VetCare existe solo como texto y diagramas: nadie ha visto todavia como se veria la pantalla que va a usar la recepcionista de Huellitas.</a:t>
+            </a:r>
+          </a:p>
+          <a:p>
+            <a:pPr>
+              <a:spcAft>
+                <a:spcPts val="800"/>
+              </a:spcAft>
+            </a:pPr>
+            <a:r>
+              <a:rPr sz="2000" b="0" i="0">
+                <a:solidFill>
+                  <a:srgbClr val="333333"/>
+                </a:solidFill>
+                <a:latin typeface="Calibri"/>
+              </a:rPr>
+              <a:t>–   La usuaria de referencia esta descrita asi: recepcionista con experiencia clinica alta y experiencia informatica baja, atiende telefono mientras registra y necesita terminar el registro de un paciente nuevo en menos de dos minutos.</a:t>
+            </a:r>
+          </a:p>
+        </p:txBody>
+      </p:sp>
+      <p:sp>
+        <p:nvSpPr>
+          <p:cNvPr id="6" name="TextBox 5"/>
+          <p:cNvSpPr txBox="1"/>
+          <p:nvPr/>
+        </p:nvSpPr>
+        <p:spPr>
+          <a:xfrm>
+            <a:off x="11185855" y="6473952"/>
+            <a:ext cx="640080" cy="274320"/>
+          </a:xfrm>
+          <a:prstGeom prst="rect">
+            <a:avLst/>
+          </a:prstGeom>
+          <a:noFill/>
+        </p:spPr>
+        <p:txBody>
+          <a:bodyPr wrap="square">
+            <a:spAutoFit/>
+          </a:bodyPr>
+          <a:lstStyle/>
+          <a:p>
+            <a:pPr algn="r"/>
+            <a:r>
+              <a:rPr sz="1100" b="0" i="0">
+                <a:solidFill>
+                  <a:srgbClr val="666666"/>
+                </a:solidFill>
+                <a:latin typeface="Calibri"/>
+              </a:rPr>
+              <a:t>18</a:t>
+            </a:r>
+          </a:p>
+        </p:txBody>
+      </p:sp>
+    </p:spTree>
+  </p:cSld>
+  <p:clrMapOvr>
+    <a:masterClrMapping/>
+  </p:clrMapOvr>
+</p:sld>
+</file>
+
+<file path=ppt/slides/slide19.xml><?xml version="1.0" encoding="utf-8"?>
+<p:sld xmlns:a="http://schemas.openxmlformats.org/drawingml/2006/main" xmlns:p="http://schemas.openxmlformats.org/presentationml/2006/main" xmlns:r="http://schemas.openxmlformats.org/officeDocument/2006/relationships">
+  <p:cSld>
+    <p:bg>
+      <p:bgPr>
+        <a:solidFill>
+          <a:srgbClr val="FFFFFF"/>
+        </a:solidFill>
+        <a:effectLst/>
+      </p:bgPr>
+    </p:bg>
+    <p:spTree>
+      <p:nvGrpSpPr>
+        <p:cNvPr id="1" name=""/>
+        <p:cNvGrpSpPr/>
+        <p:nvPr/>
+      </p:nvGrpSpPr>
+      <p:grpSpPr/>
+      <p:sp>
+        <p:nvSpPr>
+          <p:cNvPr id="2" name="Rectangle 1"/>
+          <p:cNvSpPr/>
+          <p:nvPr/>
+        </p:nvSpPr>
+        <p:spPr>
+          <a:xfrm>
+            <a:off x="0" y="0"/>
+            <a:ext cx="12191695" cy="960120"/>
+          </a:xfrm>
+          <a:prstGeom prst="rect">
+            <a:avLst/>
+          </a:prstGeom>
+          <a:solidFill>
+            <a:srgbClr val="095292"/>
+          </a:solidFill>
+          <a:ln>
+            <a:noFill/>
+          </a:ln>
+        </p:spPr>
+        <p:style>
+          <a:lnRef idx="1">
+            <a:schemeClr val="accent1"/>
+          </a:lnRef>
+          <a:fillRef idx="3">
+            <a:schemeClr val="accent1"/>
+          </a:fillRef>
+          <a:effectRef idx="2">
+            <a:schemeClr val="accent1"/>
+          </a:effectRef>
+          <a:fontRef idx="minor">
+            <a:schemeClr val="lt1"/>
+          </a:fontRef>
+        </p:style>
+        <p:txBody>
+          <a:bodyPr rtlCol="0" anchor="ctr"/>
+          <a:lstStyle/>
+          <a:p>
+            <a:pPr algn="ctr"/>
+          </a:p>
+        </p:txBody>
+      </p:sp>
+      <p:sp>
+        <p:nvSpPr>
+          <p:cNvPr id="3" name="Rectangle 2"/>
+          <p:cNvSpPr/>
+          <p:nvPr/>
+        </p:nvSpPr>
+        <p:spPr>
+          <a:xfrm>
+            <a:off x="0" y="960120"/>
+            <a:ext cx="12191695" cy="41148"/>
+          </a:xfrm>
+          <a:prstGeom prst="rect">
+            <a:avLst/>
+          </a:prstGeom>
+          <a:solidFill>
+            <a:srgbClr val="FFD000"/>
+          </a:solidFill>
+          <a:ln>
+            <a:noFill/>
+          </a:ln>
+        </p:spPr>
+        <p:style>
+          <a:lnRef idx="1">
+            <a:schemeClr val="accent1"/>
+          </a:lnRef>
+          <a:fillRef idx="3">
+            <a:schemeClr val="accent1"/>
+          </a:fillRef>
+          <a:effectRef idx="2">
+            <a:schemeClr val="accent1"/>
+          </a:effectRef>
+          <a:fontRef idx="minor">
+            <a:schemeClr val="lt1"/>
+          </a:fontRef>
+        </p:style>
+        <p:txBody>
+          <a:bodyPr rtlCol="0" anchor="ctr"/>
+          <a:lstStyle/>
+          <a:p>
+            <a:pPr algn="ctr"/>
+          </a:p>
+        </p:txBody>
+      </p:sp>
+      <p:sp>
+        <p:nvSpPr>
+          <p:cNvPr id="4" name="TextBox 3"/>
+          <p:cNvSpPr txBox="1"/>
+          <p:nvPr/>
+        </p:nvSpPr>
+        <p:spPr>
+          <a:xfrm>
+            <a:off x="457200" y="164592"/>
+            <a:ext cx="11277295" cy="502920"/>
+          </a:xfrm>
+          <a:prstGeom prst="rect">
+            <a:avLst/>
+          </a:prstGeom>
+          <a:noFill/>
+        </p:spPr>
+        <p:txBody>
+          <a:bodyPr wrap="square">
+            <a:spAutoFit/>
+          </a:bodyPr>
+          <a:lstStyle/>
+          <a:p>
+            <a:r>
+              <a:rPr sz="2600" b="1" i="0">
+                <a:solidFill>
+                  <a:srgbClr val="FFFFFF"/>
+                </a:solidFill>
+                <a:latin typeface="Calibri"/>
+              </a:rPr>
+              <a:t>Taller PI — pasos guiados</a:t>
+            </a:r>
+          </a:p>
+        </p:txBody>
+      </p:sp>
+      <p:sp>
+        <p:nvSpPr>
+          <p:cNvPr id="5" name="Rounded Rectangle 4"/>
+          <p:cNvSpPr/>
+          <p:nvPr/>
+        </p:nvSpPr>
+        <p:spPr>
+          <a:xfrm>
+            <a:off x="457200" y="1234440"/>
+            <a:ext cx="11277295" cy="950976"/>
+          </a:xfrm>
+          <a:prstGeom prst="roundRect">
+            <a:avLst>
+              <a:gd name="adj" fmla="val 12000"/>
+            </a:avLst>
+          </a:prstGeom>
+          <a:solidFill>
+            <a:srgbClr val="F2F2F2"/>
+          </a:solidFill>
+          <a:ln>
+            <a:noFill/>
+          </a:ln>
+        </p:spPr>
+        <p:style>
+          <a:lnRef idx="1">
+            <a:schemeClr val="accent1"/>
+          </a:lnRef>
+          <a:fillRef idx="3">
+            <a:schemeClr val="accent1"/>
+          </a:fillRef>
+          <a:effectRef idx="2">
+            <a:schemeClr val="accent1"/>
+          </a:effectRef>
+          <a:fontRef idx="minor">
+            <a:schemeClr val="lt1"/>
+          </a:fontRef>
+        </p:style>
+        <p:txBody>
+          <a:bodyPr rtlCol="0" anchor="ctr"/>
+          <a:lstStyle/>
+          <a:p>
+            <a:pPr algn="ctr"/>
+          </a:p>
+        </p:txBody>
+      </p:sp>
+      <p:sp>
+        <p:nvSpPr>
+          <p:cNvPr id="6" name="Rounded Rectangle 5"/>
+          <p:cNvSpPr/>
+          <p:nvPr/>
+        </p:nvSpPr>
+        <p:spPr>
+          <a:xfrm>
+            <a:off x="594360" y="1490472"/>
+            <a:ext cx="438912" cy="438912"/>
+          </a:xfrm>
+          <a:prstGeom prst="roundRect">
+            <a:avLst>
+              <a:gd name="adj" fmla="val 12000"/>
+            </a:avLst>
+          </a:prstGeom>
+          <a:solidFill>
+            <a:srgbClr val="095292"/>
+          </a:solidFill>
+          <a:ln>
+            <a:noFill/>
+          </a:ln>
+        </p:spPr>
+        <p:style>
+          <a:lnRef idx="1">
+            <a:schemeClr val="accent1"/>
+          </a:lnRef>
+          <a:fillRef idx="3">
+            <a:schemeClr val="accent1"/>
+          </a:fillRef>
+          <a:effectRef idx="2">
+            <a:schemeClr val="accent1"/>
+          </a:effectRef>
+          <a:fontRef idx="minor">
+            <a:schemeClr val="lt1"/>
+          </a:fontRef>
+        </p:style>
+        <p:txBody>
+          <a:bodyPr rtlCol="0" anchor="ctr"/>
+          <a:lstStyle/>
+          <a:p>
+            <a:pPr algn="ctr"/>
+          </a:p>
+        </p:txBody>
+      </p:sp>
+      <p:sp>
+        <p:nvSpPr>
+          <p:cNvPr id="7" name="TextBox 6"/>
+          <p:cNvSpPr txBox="1"/>
+          <p:nvPr/>
+        </p:nvSpPr>
+        <p:spPr>
+          <a:xfrm>
+            <a:off x="594360" y="1490472"/>
+            <a:ext cx="438912" cy="438912"/>
+          </a:xfrm>
+          <a:prstGeom prst="rect">
+            <a:avLst/>
+          </a:prstGeom>
+          <a:noFill/>
+        </p:spPr>
+        <p:txBody>
+          <a:bodyPr wrap="square" anchor="ctr"/>
+          <a:lstStyle/>
+          <a:p>
+            <a:pPr algn="ctr"/>
+            <a:r>
+              <a:rPr sz="1600" b="1" i="0">
+                <a:solidFill>
+                  <a:srgbClr val="FFFFFF"/>
+                </a:solidFill>
+                <a:latin typeface="Calibri"/>
+              </a:rPr>
+              <a:t>1</a:t>
+            </a:r>
+          </a:p>
+        </p:txBody>
+      </p:sp>
+      <p:sp>
+        <p:nvSpPr>
+          <p:cNvPr id="8" name="TextBox 7"/>
+          <p:cNvSpPr txBox="1"/>
+          <p:nvPr/>
+        </p:nvSpPr>
+        <p:spPr>
+          <a:xfrm>
+            <a:off x="1188720" y="1325880"/>
+            <a:ext cx="10271455" cy="786384"/>
+          </a:xfrm>
+          <a:prstGeom prst="rect">
+            <a:avLst/>
+          </a:prstGeom>
+          <a:noFill/>
+        </p:spPr>
+        <p:txBody>
+          <a:bodyPr wrap="square" anchor="ctr"/>
+          <a:lstStyle/>
+          <a:p>
+            <a:r>
+              <a:rPr sz="1400" b="1" i="0">
+                <a:solidFill>
+                  <a:srgbClr val="095292"/>
+                </a:solidFill>
+                <a:latin typeface="Calibri"/>
+              </a:rPr>
+              <a:t>Paso 1. En Excalidraw o en papel, dibujen el wireframe en gris de la pantalla Registrar mascota de VetCare, sin colores ni logos, ubicando bloque de dueño, bloque de datos de la mascota y zona de accion; el wireframe debe caber en una sola vista sin scroll y no puede tener mas de nueve campos.</a:t>
+            </a:r>
+          </a:p>
+        </p:txBody>
+      </p:sp>
+      <p:sp>
+        <p:nvSpPr>
+          <p:cNvPr id="9" name="Rounded Rectangle 8"/>
+          <p:cNvSpPr/>
+          <p:nvPr/>
+        </p:nvSpPr>
+        <p:spPr>
+          <a:xfrm>
+            <a:off x="457200" y="2276856"/>
+            <a:ext cx="11277295" cy="950976"/>
+          </a:xfrm>
+          <a:prstGeom prst="roundRect">
+            <a:avLst>
+              <a:gd name="adj" fmla="val 12000"/>
+            </a:avLst>
+          </a:prstGeom>
+          <a:solidFill>
+            <a:srgbClr val="E8F4FA"/>
+          </a:solidFill>
+          <a:ln>
+            <a:noFill/>
+          </a:ln>
+        </p:spPr>
+        <p:style>
+          <a:lnRef idx="1">
+            <a:schemeClr val="accent1"/>
+          </a:lnRef>
+          <a:fillRef idx="3">
+            <a:schemeClr val="accent1"/>
+          </a:fillRef>
+          <a:effectRef idx="2">
+            <a:schemeClr val="accent1"/>
+          </a:effectRef>
+          <a:fontRef idx="minor">
+            <a:schemeClr val="lt1"/>
+          </a:fontRef>
+        </p:style>
+        <p:txBody>
+          <a:bodyPr rtlCol="0" anchor="ctr"/>
+          <a:lstStyle/>
+          <a:p>
+            <a:pPr algn="ctr"/>
+          </a:p>
+        </p:txBody>
+      </p:sp>
+      <p:sp>
+        <p:nvSpPr>
+          <p:cNvPr id="10" name="Rounded Rectangle 9"/>
+          <p:cNvSpPr/>
+          <p:nvPr/>
+        </p:nvSpPr>
+        <p:spPr>
+          <a:xfrm>
+            <a:off x="594360" y="2532888"/>
+            <a:ext cx="438912" cy="438912"/>
+          </a:xfrm>
+          <a:prstGeom prst="roundRect">
+            <a:avLst>
+              <a:gd name="adj" fmla="val 12000"/>
+            </a:avLst>
+          </a:prstGeom>
+          <a:solidFill>
+            <a:srgbClr val="095292"/>
+          </a:solidFill>
+          <a:ln>
+            <a:noFill/>
+          </a:ln>
+        </p:spPr>
+        <p:style>
+          <a:lnRef idx="1">
+            <a:schemeClr val="accent1"/>
+          </a:lnRef>
+          <a:fillRef idx="3">
+            <a:schemeClr val="accent1"/>
+          </a:fillRef>
+          <a:effectRef idx="2">
+            <a:schemeClr val="accent1"/>
+          </a:effectRef>
+          <a:fontRef idx="minor">
+            <a:schemeClr val="lt1"/>
+          </a:fontRef>
+        </p:style>
+        <p:txBody>
+          <a:bodyPr rtlCol="0" anchor="ctr"/>
+          <a:lstStyle/>
+          <a:p>
+            <a:pPr algn="ctr"/>
+          </a:p>
+        </p:txBody>
+      </p:sp>
+      <p:sp>
+        <p:nvSpPr>
+          <p:cNvPr id="11" name="TextBox 10"/>
+          <p:cNvSpPr txBox="1"/>
+          <p:nvPr/>
+        </p:nvSpPr>
+        <p:spPr>
+          <a:xfrm>
+            <a:off x="594360" y="2532888"/>
+            <a:ext cx="438912" cy="438912"/>
+          </a:xfrm>
+          <a:prstGeom prst="rect">
+            <a:avLst/>
+          </a:prstGeom>
+          <a:noFill/>
+        </p:spPr>
+        <p:txBody>
+          <a:bodyPr wrap="square" anchor="ctr"/>
+          <a:lstStyle/>
+          <a:p>
+            <a:pPr algn="ctr"/>
+            <a:r>
+              <a:rPr sz="1600" b="1" i="0">
+                <a:solidFill>
+                  <a:srgbClr val="FFFFFF"/>
+                </a:solidFill>
+                <a:latin typeface="Calibri"/>
+              </a:rPr>
+              <a:t>2</a:t>
+            </a:r>
+          </a:p>
+        </p:txBody>
+      </p:sp>
+      <p:sp>
+        <p:nvSpPr>
+          <p:cNvPr id="12" name="TextBox 11"/>
+          <p:cNvSpPr txBox="1"/>
+          <p:nvPr/>
+        </p:nvSpPr>
+        <p:spPr>
+          <a:xfrm>
+            <a:off x="1188720" y="2368296"/>
+            <a:ext cx="10271455" cy="786384"/>
+          </a:xfrm>
+          <a:prstGeom prst="rect">
+            <a:avLst/>
+          </a:prstGeom>
+          <a:noFill/>
+        </p:spPr>
+        <p:txBody>
+          <a:bodyPr wrap="square" anchor="ctr"/>
+          <a:lstStyle/>
+          <a:p>
+            <a:r>
+              <a:rPr sz="1400" b="1" i="0">
+                <a:solidFill>
+                  <a:srgbClr val="095292"/>
+                </a:solidFill>
+                <a:latin typeface="Calibri"/>
+              </a:rPr>
+              <a:t>Paso 2. Numeren de uno a seis los elementos criticos del wireframe y llenen la tabla de anotaciones indicando para cada numero el atributo del diccionario de datos que lo respalda, el RF que lo exige y si es obligatorio u opcional; si un elemento no tiene RF, borrenlo o creen el requisito y dejenlo escrito.</a:t>
+            </a:r>
+          </a:p>
+        </p:txBody>
+      </p:sp>
+      <p:sp>
+        <p:nvSpPr>
+          <p:cNvPr id="13" name="Rounded Rectangle 12"/>
+          <p:cNvSpPr/>
+          <p:nvPr/>
+        </p:nvSpPr>
+        <p:spPr>
+          <a:xfrm>
+            <a:off x="457200" y="3319272"/>
+            <a:ext cx="11277295" cy="950976"/>
+          </a:xfrm>
+          <a:prstGeom prst="roundRect">
+            <a:avLst>
+              <a:gd name="adj" fmla="val 12000"/>
+            </a:avLst>
+          </a:prstGeom>
+          <a:solidFill>
+            <a:srgbClr val="F2F2F2"/>
+          </a:solidFill>
+          <a:ln>
+            <a:noFill/>
+          </a:ln>
+        </p:spPr>
+        <p:style>
+          <a:lnRef idx="1">
+            <a:schemeClr val="accent1"/>
+          </a:lnRef>
+          <a:fillRef idx="3">
+            <a:schemeClr val="accent1"/>
+          </a:fillRef>
+          <a:effectRef idx="2">
+            <a:schemeClr val="accent1"/>
+          </a:effectRef>
+          <a:fontRef idx="minor">
+            <a:schemeClr val="lt1"/>
+          </a:fontRef>
+        </p:style>
+        <p:txBody>
+          <a:bodyPr rtlCol="0" anchor="ctr"/>
+          <a:lstStyle/>
+          <a:p>
+            <a:pPr algn="ctr"/>
+          </a:p>
+        </p:txBody>
+      </p:sp>
+      <p:sp>
+        <p:nvSpPr>
+          <p:cNvPr id="14" name="Rounded Rectangle 13"/>
+          <p:cNvSpPr/>
+          <p:nvPr/>
+        </p:nvSpPr>
+        <p:spPr>
+          <a:xfrm>
+            <a:off x="594360" y="3575304"/>
+            <a:ext cx="438912" cy="438912"/>
+          </a:xfrm>
+          <a:prstGeom prst="roundRect">
+            <a:avLst>
+              <a:gd name="adj" fmla="val 12000"/>
+            </a:avLst>
+          </a:prstGeom>
+          <a:solidFill>
+            <a:srgbClr val="095292"/>
+          </a:solidFill>
+          <a:ln>
+            <a:noFill/>
+          </a:ln>
+        </p:spPr>
+        <p:style>
+          <a:lnRef idx="1">
+            <a:schemeClr val="accent1"/>
+          </a:lnRef>
+          <a:fillRef idx="3">
+            <a:schemeClr val="accent1"/>
+          </a:fillRef>
+          <a:effectRef idx="2">
+            <a:schemeClr val="accent1"/>
+          </a:effectRef>
+          <a:fontRef idx="minor">
+            <a:schemeClr val="lt1"/>
+          </a:fontRef>
+        </p:style>
+        <p:txBody>
+          <a:bodyPr rtlCol="0" anchor="ctr"/>
+          <a:lstStyle/>
+          <a:p>
+            <a:pPr algn="ctr"/>
+          </a:p>
+        </p:txBody>
+      </p:sp>
+      <p:sp>
+        <p:nvSpPr>
+          <p:cNvPr id="15" name="TextBox 14"/>
+          <p:cNvSpPr txBox="1"/>
+          <p:nvPr/>
+        </p:nvSpPr>
+        <p:spPr>
+          <a:xfrm>
+            <a:off x="594360" y="3575304"/>
+            <a:ext cx="438912" cy="438912"/>
+          </a:xfrm>
+          <a:prstGeom prst="rect">
+            <a:avLst/>
+          </a:prstGeom>
+          <a:noFill/>
+        </p:spPr>
+        <p:txBody>
+          <a:bodyPr wrap="square" anchor="ctr"/>
+          <a:lstStyle/>
+          <a:p>
+            <a:pPr algn="ctr"/>
+            <a:r>
+              <a:rPr sz="1600" b="1" i="0">
+                <a:solidFill>
+                  <a:srgbClr val="FFFFFF"/>
+                </a:solidFill>
+                <a:latin typeface="Calibri"/>
+              </a:rPr>
+              <a:t>3</a:t>
+            </a:r>
+          </a:p>
+        </p:txBody>
+      </p:sp>
+      <p:sp>
+        <p:nvSpPr>
+          <p:cNvPr id="16" name="TextBox 15"/>
+          <p:cNvSpPr txBox="1"/>
+          <p:nvPr/>
+        </p:nvSpPr>
+        <p:spPr>
+          <a:xfrm>
+            <a:off x="1188720" y="3410712"/>
+            <a:ext cx="10271455" cy="786384"/>
+          </a:xfrm>
+          <a:prstGeom prst="rect">
+            <a:avLst/>
+          </a:prstGeom>
+          <a:noFill/>
+        </p:spPr>
+        <p:txBody>
+          <a:bodyPr wrap="square" anchor="ctr"/>
+          <a:lstStyle/>
+          <a:p>
+            <a:r>
+              <a:rPr sz="1400" b="1" i="0">
+                <a:solidFill>
+                  <a:srgbClr val="095292"/>
+                </a:solidFill>
+                <a:latin typeface="Calibri"/>
+              </a:rPr>
+              <a:t>Paso 3. Diseñen la pantalla Buscar expediente resolviendo explicitamente el caso de resultados multiples: definan los tres criterios de busqueda, las columnas de la lista de resultados que permiten desambiguar y el mensaje exacto que se muestra cuando no hay ningun resultado.</a:t>
+            </a:r>
+          </a:p>
+        </p:txBody>
+      </p:sp>
+      <p:sp>
+        <p:nvSpPr>
+          <p:cNvPr id="17" name="Rounded Rectangle 16"/>
+          <p:cNvSpPr/>
+          <p:nvPr/>
+        </p:nvSpPr>
+        <p:spPr>
+          <a:xfrm>
+            <a:off x="457200" y="4361688"/>
+            <a:ext cx="11277295" cy="950976"/>
+          </a:xfrm>
+          <a:prstGeom prst="roundRect">
+            <a:avLst>
+              <a:gd name="adj" fmla="val 12000"/>
+            </a:avLst>
+          </a:prstGeom>
+          <a:solidFill>
+            <a:srgbClr val="E8F4FA"/>
+          </a:solidFill>
+          <a:ln>
+            <a:noFill/>
+          </a:ln>
+        </p:spPr>
+        <p:style>
+          <a:lnRef idx="1">
+            <a:schemeClr val="accent1"/>
+          </a:lnRef>
+          <a:fillRef idx="3">
+            <a:schemeClr val="accent1"/>
+          </a:fillRef>
+          <a:effectRef idx="2">
+            <a:schemeClr val="accent1"/>
+          </a:effectRef>
+          <a:fontRef idx="minor">
+            <a:schemeClr val="lt1"/>
+          </a:fontRef>
+        </p:style>
+        <p:txBody>
+          <a:bodyPr rtlCol="0" anchor="ctr"/>
+          <a:lstStyle/>
+          <a:p>
+            <a:pPr algn="ctr"/>
+          </a:p>
+        </p:txBody>
+      </p:sp>
+      <p:sp>
+        <p:nvSpPr>
+          <p:cNvPr id="18" name="Rounded Rectangle 17"/>
+          <p:cNvSpPr/>
+          <p:nvPr/>
+        </p:nvSpPr>
+        <p:spPr>
+          <a:xfrm>
+            <a:off x="594360" y="4617720"/>
+            <a:ext cx="438912" cy="438912"/>
+          </a:xfrm>
+          <a:prstGeom prst="roundRect">
+            <a:avLst>
+              <a:gd name="adj" fmla="val 12000"/>
+            </a:avLst>
+          </a:prstGeom>
+          <a:solidFill>
+            <a:srgbClr val="095292"/>
+          </a:solidFill>
+          <a:ln>
+            <a:noFill/>
+          </a:ln>
+        </p:spPr>
+        <p:style>
+          <a:lnRef idx="1">
+            <a:schemeClr val="accent1"/>
+          </a:lnRef>
+          <a:fillRef idx="3">
+            <a:schemeClr val="accent1"/>
+          </a:fillRef>
+          <a:effectRef idx="2">
+            <a:schemeClr val="accent1"/>
+          </a:effectRef>
+          <a:fontRef idx="minor">
+            <a:schemeClr val="lt1"/>
+          </a:fontRef>
+        </p:style>
+        <p:txBody>
+          <a:bodyPr rtlCol="0" anchor="ctr"/>
+          <a:lstStyle/>
+          <a:p>
+            <a:pPr algn="ctr"/>
+          </a:p>
+        </p:txBody>
+      </p:sp>
+      <p:sp>
+        <p:nvSpPr>
+          <p:cNvPr id="19" name="TextBox 18"/>
+          <p:cNvSpPr txBox="1"/>
+          <p:nvPr/>
+        </p:nvSpPr>
+        <p:spPr>
+          <a:xfrm>
+            <a:off x="594360" y="4617720"/>
+            <a:ext cx="438912" cy="438912"/>
+          </a:xfrm>
+          <a:prstGeom prst="rect">
+            <a:avLst/>
+          </a:prstGeom>
+          <a:noFill/>
+        </p:spPr>
+        <p:txBody>
+          <a:bodyPr wrap="square" anchor="ctr"/>
+          <a:lstStyle/>
+          <a:p>
+            <a:pPr algn="ctr"/>
+            <a:r>
+              <a:rPr sz="1600" b="1" i="0">
+                <a:solidFill>
+                  <a:srgbClr val="FFFFFF"/>
+                </a:solidFill>
+                <a:latin typeface="Calibri"/>
+              </a:rPr>
+              <a:t>4</a:t>
+            </a:r>
+          </a:p>
+        </p:txBody>
+      </p:sp>
+      <p:sp>
+        <p:nvSpPr>
+          <p:cNvPr id="20" name="TextBox 19"/>
+          <p:cNvSpPr txBox="1"/>
+          <p:nvPr/>
+        </p:nvSpPr>
+        <p:spPr>
+          <a:xfrm>
+            <a:off x="1188720" y="4453128"/>
+            <a:ext cx="10271455" cy="786384"/>
+          </a:xfrm>
+          <a:prstGeom prst="rect">
+            <a:avLst/>
+          </a:prstGeom>
+          <a:noFill/>
+        </p:spPr>
+        <p:txBody>
+          <a:bodyPr wrap="square" anchor="ctr"/>
+          <a:lstStyle/>
+          <a:p>
+            <a:r>
+              <a:rPr sz="1400" b="1" i="0">
+                <a:solidFill>
+                  <a:srgbClr val="095292"/>
+                </a:solidFill>
+                <a:latin typeface="Calibri"/>
+              </a:rPr>
+              <a:t>Paso 4. Pasen las dos pantallas a Figma o Penpot como mockup y conecten minimo tres transiciones navegables: Registrar mascota hacia la confirmacion con codigo, confirmacion hacia Buscar expediente, y un resultado de la lista hacia la ficha del paciente; escriban al lado de cada transicion que principio de usabilidad estan cumpliendo.</a:t>
+            </a:r>
+          </a:p>
+        </p:txBody>
+      </p:sp>
+      <p:sp>
+        <p:nvSpPr>
+          <p:cNvPr id="21" name="Rounded Rectangle 20"/>
+          <p:cNvSpPr/>
+          <p:nvPr/>
+        </p:nvSpPr>
+        <p:spPr>
+          <a:xfrm>
+            <a:off x="457200" y="5404104"/>
+            <a:ext cx="11277295" cy="950976"/>
+          </a:xfrm>
+          <a:prstGeom prst="roundRect">
+            <a:avLst>
+              <a:gd name="adj" fmla="val 12000"/>
+            </a:avLst>
+          </a:prstGeom>
+          <a:solidFill>
+            <a:srgbClr val="F2F2F2"/>
+          </a:solidFill>
+          <a:ln>
+            <a:noFill/>
+          </a:ln>
+        </p:spPr>
+        <p:style>
+          <a:lnRef idx="1">
+            <a:schemeClr val="accent1"/>
+          </a:lnRef>
+          <a:fillRef idx="3">
+            <a:schemeClr val="accent1"/>
+          </a:fillRef>
+          <a:effectRef idx="2">
+            <a:schemeClr val="accent1"/>
+          </a:effectRef>
+          <a:fontRef idx="minor">
+            <a:schemeClr val="lt1"/>
+          </a:fontRef>
+        </p:style>
+        <p:txBody>
+          <a:bodyPr rtlCol="0" anchor="ctr"/>
+          <a:lstStyle/>
+          <a:p>
+            <a:pPr algn="ctr"/>
+          </a:p>
+        </p:txBody>
+      </p:sp>
+      <p:sp>
+        <p:nvSpPr>
+          <p:cNvPr id="22" name="Rounded Rectangle 21"/>
+          <p:cNvSpPr/>
+          <p:nvPr/>
+        </p:nvSpPr>
+        <p:spPr>
+          <a:xfrm>
+            <a:off x="594360" y="5660136"/>
+            <a:ext cx="438912" cy="438912"/>
+          </a:xfrm>
+          <a:prstGeom prst="roundRect">
+            <a:avLst>
+              <a:gd name="adj" fmla="val 12000"/>
+            </a:avLst>
+          </a:prstGeom>
+          <a:solidFill>
+            <a:srgbClr val="095292"/>
+          </a:solidFill>
+          <a:ln>
+            <a:noFill/>
+          </a:ln>
+        </p:spPr>
+        <p:style>
+          <a:lnRef idx="1">
+            <a:schemeClr val="accent1"/>
+          </a:lnRef>
+          <a:fillRef idx="3">
+            <a:schemeClr val="accent1"/>
+          </a:fillRef>
+          <a:effectRef idx="2">
+            <a:schemeClr val="accent1"/>
+          </a:effectRef>
+          <a:fontRef idx="minor">
+            <a:schemeClr val="lt1"/>
+          </a:fontRef>
+        </p:style>
+        <p:txBody>
+          <a:bodyPr rtlCol="0" anchor="ctr"/>
+          <a:lstStyle/>
+          <a:p>
+            <a:pPr algn="ctr"/>
+          </a:p>
+        </p:txBody>
+      </p:sp>
+      <p:sp>
+        <p:nvSpPr>
+          <p:cNvPr id="23" name="TextBox 22"/>
+          <p:cNvSpPr txBox="1"/>
+          <p:nvPr/>
+        </p:nvSpPr>
+        <p:spPr>
+          <a:xfrm>
+            <a:off x="594360" y="5660136"/>
+            <a:ext cx="438912" cy="438912"/>
+          </a:xfrm>
+          <a:prstGeom prst="rect">
+            <a:avLst/>
+          </a:prstGeom>
+          <a:noFill/>
+        </p:spPr>
+        <p:txBody>
+          <a:bodyPr wrap="square" anchor="ctr"/>
+          <a:lstStyle/>
+          <a:p>
+            <a:pPr algn="ctr"/>
+            <a:r>
+              <a:rPr sz="1600" b="1" i="0">
+                <a:solidFill>
+                  <a:srgbClr val="FFFFFF"/>
+                </a:solidFill>
+                <a:latin typeface="Calibri"/>
+              </a:rPr>
+              <a:t>5</a:t>
+            </a:r>
+          </a:p>
+        </p:txBody>
+      </p:sp>
+      <p:sp>
+        <p:nvSpPr>
+          <p:cNvPr id="24" name="TextBox 23"/>
+          <p:cNvSpPr txBox="1"/>
+          <p:nvPr/>
+        </p:nvSpPr>
+        <p:spPr>
+          <a:xfrm>
+            <a:off x="1188720" y="5495544"/>
+            <a:ext cx="10271455" cy="786384"/>
+          </a:xfrm>
+          <a:prstGeom prst="rect">
+            <a:avLst/>
+          </a:prstGeom>
+          <a:noFill/>
+        </p:spPr>
+        <p:txBody>
+          <a:bodyPr wrap="square" anchor="ctr"/>
+          <a:lstStyle/>
+          <a:p>
+            <a:r>
+              <a:rPr sz="1400" b="1" i="0">
+                <a:solidFill>
+                  <a:srgbClr val="095292"/>
+                </a:solidFill>
+                <a:latin typeface="Calibri"/>
+              </a:rPr>
+              <a:t>Paso 5. Hagan prueba de pasillo con otro compañero, denle la tarea registrar la mascota Luna de la señora Perez y encontrar su ficha, no le expliquen nada, cronometren, cuenten clics y anoten los dos puntos donde dudo; escriban abajo los dos cambios concretos que haran al diseño por lo observado.</a:t>
+            </a:r>
+          </a:p>
+        </p:txBody>
+      </p:sp>
+      <p:sp>
+        <p:nvSpPr>
+          <p:cNvPr id="25" name="TextBox 24"/>
+          <p:cNvSpPr txBox="1"/>
+          <p:nvPr/>
+        </p:nvSpPr>
+        <p:spPr>
+          <a:xfrm>
+            <a:off x="11185855" y="6473952"/>
+            <a:ext cx="640080" cy="274320"/>
+          </a:xfrm>
+          <a:prstGeom prst="rect">
+            <a:avLst/>
+          </a:prstGeom>
+          <a:noFill/>
+        </p:spPr>
+        <p:txBody>
+          <a:bodyPr wrap="square">
+            <a:spAutoFit/>
+          </a:bodyPr>
+          <a:lstStyle/>
+          <a:p>
+            <a:pPr algn="r"/>
+            <a:r>
+              <a:rPr sz="1100" b="0" i="0">
+                <a:solidFill>
+                  <a:srgbClr val="666666"/>
+                </a:solidFill>
+                <a:latin typeface="Calibri"/>
+              </a:rPr>
+              <a:t>19</a:t>
             </a:r>
           </a:p>
         </p:txBody>
@@ -6684,6 +8590,1917 @@
 </p:sld>
 </file>
 
+<file path=ppt/slides/slide20.xml><?xml version="1.0" encoding="utf-8"?>
+<p:sld xmlns:a="http://schemas.openxmlformats.org/drawingml/2006/main" xmlns:p="http://schemas.openxmlformats.org/presentationml/2006/main" xmlns:r="http://schemas.openxmlformats.org/officeDocument/2006/relationships">
+  <p:cSld>
+    <p:bg>
+      <p:bgPr>
+        <a:solidFill>
+          <a:srgbClr val="FFFFFF"/>
+        </a:solidFill>
+        <a:effectLst/>
+      </p:bgPr>
+    </p:bg>
+    <p:spTree>
+      <p:nvGrpSpPr>
+        <p:cNvPr id="1" name=""/>
+        <p:cNvGrpSpPr/>
+        <p:nvPr/>
+      </p:nvGrpSpPr>
+      <p:grpSpPr/>
+      <p:sp>
+        <p:nvSpPr>
+          <p:cNvPr id="2" name="Rectangle 1"/>
+          <p:cNvSpPr/>
+          <p:nvPr/>
+        </p:nvSpPr>
+        <p:spPr>
+          <a:xfrm>
+            <a:off x="0" y="0"/>
+            <a:ext cx="12191695" cy="960120"/>
+          </a:xfrm>
+          <a:prstGeom prst="rect">
+            <a:avLst/>
+          </a:prstGeom>
+          <a:solidFill>
+            <a:srgbClr val="095292"/>
+          </a:solidFill>
+          <a:ln>
+            <a:noFill/>
+          </a:ln>
+        </p:spPr>
+        <p:style>
+          <a:lnRef idx="1">
+            <a:schemeClr val="accent1"/>
+          </a:lnRef>
+          <a:fillRef idx="3">
+            <a:schemeClr val="accent1"/>
+          </a:fillRef>
+          <a:effectRef idx="2">
+            <a:schemeClr val="accent1"/>
+          </a:effectRef>
+          <a:fontRef idx="minor">
+            <a:schemeClr val="lt1"/>
+          </a:fontRef>
+        </p:style>
+        <p:txBody>
+          <a:bodyPr rtlCol="0" anchor="ctr"/>
+          <a:lstStyle/>
+          <a:p>
+            <a:pPr algn="ctr"/>
+          </a:p>
+        </p:txBody>
+      </p:sp>
+      <p:sp>
+        <p:nvSpPr>
+          <p:cNvPr id="3" name="Rectangle 2"/>
+          <p:cNvSpPr/>
+          <p:nvPr/>
+        </p:nvSpPr>
+        <p:spPr>
+          <a:xfrm>
+            <a:off x="0" y="960120"/>
+            <a:ext cx="12191695" cy="41148"/>
+          </a:xfrm>
+          <a:prstGeom prst="rect">
+            <a:avLst/>
+          </a:prstGeom>
+          <a:solidFill>
+            <a:srgbClr val="FFD000"/>
+          </a:solidFill>
+          <a:ln>
+            <a:noFill/>
+          </a:ln>
+        </p:spPr>
+        <p:style>
+          <a:lnRef idx="1">
+            <a:schemeClr val="accent1"/>
+          </a:lnRef>
+          <a:fillRef idx="3">
+            <a:schemeClr val="accent1"/>
+          </a:fillRef>
+          <a:effectRef idx="2">
+            <a:schemeClr val="accent1"/>
+          </a:effectRef>
+          <a:fontRef idx="minor">
+            <a:schemeClr val="lt1"/>
+          </a:fontRef>
+        </p:style>
+        <p:txBody>
+          <a:bodyPr rtlCol="0" anchor="ctr"/>
+          <a:lstStyle/>
+          <a:p>
+            <a:pPr algn="ctr"/>
+          </a:p>
+        </p:txBody>
+      </p:sp>
+      <p:sp>
+        <p:nvSpPr>
+          <p:cNvPr id="4" name="TextBox 3"/>
+          <p:cNvSpPr txBox="1"/>
+          <p:nvPr/>
+        </p:nvSpPr>
+        <p:spPr>
+          <a:xfrm>
+            <a:off x="457200" y="164592"/>
+            <a:ext cx="11277295" cy="502920"/>
+          </a:xfrm>
+          <a:prstGeom prst="rect">
+            <a:avLst/>
+          </a:prstGeom>
+          <a:noFill/>
+        </p:spPr>
+        <p:txBody>
+          <a:bodyPr wrap="square">
+            <a:spAutoFit/>
+          </a:bodyPr>
+          <a:lstStyle/>
+          <a:p>
+            <a:r>
+              <a:rPr sz="2600" b="1" i="0">
+                <a:solidFill>
+                  <a:srgbClr val="FFFFFF"/>
+                </a:solidFill>
+                <a:latin typeface="Calibri"/>
+              </a:rPr>
+              <a:t>Antes de entregar — autochequeo</a:t>
+            </a:r>
+          </a:p>
+        </p:txBody>
+      </p:sp>
+      <p:sp>
+        <p:nvSpPr>
+          <p:cNvPr id="5" name="Rounded Rectangle 4"/>
+          <p:cNvSpPr/>
+          <p:nvPr/>
+        </p:nvSpPr>
+        <p:spPr>
+          <a:xfrm>
+            <a:off x="457200" y="1261872"/>
+            <a:ext cx="11277295" cy="566928"/>
+          </a:xfrm>
+          <a:prstGeom prst="roundRect">
+            <a:avLst>
+              <a:gd name="adj" fmla="val 12000"/>
+            </a:avLst>
+          </a:prstGeom>
+          <a:solidFill>
+            <a:srgbClr val="F2F2F2"/>
+          </a:solidFill>
+          <a:ln>
+            <a:noFill/>
+          </a:ln>
+        </p:spPr>
+        <p:style>
+          <a:lnRef idx="1">
+            <a:schemeClr val="accent1"/>
+          </a:lnRef>
+          <a:fillRef idx="3">
+            <a:schemeClr val="accent1"/>
+          </a:fillRef>
+          <a:effectRef idx="2">
+            <a:schemeClr val="accent1"/>
+          </a:effectRef>
+          <a:fontRef idx="minor">
+            <a:schemeClr val="lt1"/>
+          </a:fontRef>
+        </p:style>
+        <p:txBody>
+          <a:bodyPr rtlCol="0" anchor="ctr"/>
+          <a:lstStyle/>
+          <a:p>
+            <a:pPr algn="ctr"/>
+          </a:p>
+        </p:txBody>
+      </p:sp>
+      <p:sp>
+        <p:nvSpPr>
+          <p:cNvPr id="6" name="Rectangle 5"/>
+          <p:cNvSpPr/>
+          <p:nvPr/>
+        </p:nvSpPr>
+        <p:spPr>
+          <a:xfrm>
+            <a:off x="640080" y="1408175"/>
+            <a:ext cx="274320" cy="274320"/>
+          </a:xfrm>
+          <a:prstGeom prst="rect">
+            <a:avLst/>
+          </a:prstGeom>
+          <a:solidFill>
+            <a:srgbClr val="FFFFFF"/>
+          </a:solidFill>
+          <a:ln>
+            <a:solidFill>
+              <a:srgbClr val="333333"/>
+            </a:solidFill>
+          </a:ln>
+        </p:spPr>
+        <p:style>
+          <a:lnRef idx="1">
+            <a:schemeClr val="accent1"/>
+          </a:lnRef>
+          <a:fillRef idx="3">
+            <a:schemeClr val="accent1"/>
+          </a:fillRef>
+          <a:effectRef idx="2">
+            <a:schemeClr val="accent1"/>
+          </a:effectRef>
+          <a:fontRef idx="minor">
+            <a:schemeClr val="lt1"/>
+          </a:fontRef>
+        </p:style>
+        <p:txBody>
+          <a:bodyPr rtlCol="0" anchor="ctr"/>
+          <a:lstStyle/>
+          <a:p>
+            <a:pPr algn="ctr"/>
+          </a:p>
+        </p:txBody>
+      </p:sp>
+      <p:sp>
+        <p:nvSpPr>
+          <p:cNvPr id="7" name="Rectangle 6"/>
+          <p:cNvSpPr/>
+          <p:nvPr/>
+        </p:nvSpPr>
+        <p:spPr>
+          <a:xfrm>
+            <a:off x="640080" y="1408175"/>
+            <a:ext cx="73152" cy="274320"/>
+          </a:xfrm>
+          <a:prstGeom prst="rect">
+            <a:avLst/>
+          </a:prstGeom>
+          <a:solidFill>
+            <a:srgbClr val="269CCB"/>
+          </a:solidFill>
+          <a:ln>
+            <a:noFill/>
+          </a:ln>
+        </p:spPr>
+        <p:style>
+          <a:lnRef idx="1">
+            <a:schemeClr val="accent1"/>
+          </a:lnRef>
+          <a:fillRef idx="3">
+            <a:schemeClr val="accent1"/>
+          </a:fillRef>
+          <a:effectRef idx="2">
+            <a:schemeClr val="accent1"/>
+          </a:effectRef>
+          <a:fontRef idx="minor">
+            <a:schemeClr val="lt1"/>
+          </a:fontRef>
+        </p:style>
+        <p:txBody>
+          <a:bodyPr rtlCol="0" anchor="ctr"/>
+          <a:lstStyle/>
+          <a:p>
+            <a:pPr algn="ctr"/>
+          </a:p>
+        </p:txBody>
+      </p:sp>
+      <p:sp>
+        <p:nvSpPr>
+          <p:cNvPr id="8" name="TextBox 7"/>
+          <p:cNvSpPr txBox="1"/>
+          <p:nvPr/>
+        </p:nvSpPr>
+        <p:spPr>
+          <a:xfrm>
+            <a:off x="1097280" y="1353312"/>
+            <a:ext cx="10362895" cy="402336"/>
+          </a:xfrm>
+          <a:prstGeom prst="rect">
+            <a:avLst/>
+          </a:prstGeom>
+          <a:noFill/>
+        </p:spPr>
+        <p:txBody>
+          <a:bodyPr wrap="square" anchor="ctr"/>
+          <a:lstStyle/>
+          <a:p>
+            <a:r>
+              <a:rPr sz="1500" b="0" i="0">
+                <a:solidFill>
+                  <a:srgbClr val="333333"/>
+                </a:solidFill>
+                <a:latin typeface="Calibri"/>
+              </a:rPr>
+              <a:t>Si la recepcionista oprime Guardar y se va al telefono treinta segundos, cuando vuelva a mirar la pantalla sabe con certeza si el registro quedo o no quedo, y por que lo sabe.</a:t>
+            </a:r>
+          </a:p>
+        </p:txBody>
+      </p:sp>
+      <p:sp>
+        <p:nvSpPr>
+          <p:cNvPr id="9" name="Rounded Rectangle 8"/>
+          <p:cNvSpPr/>
+          <p:nvPr/>
+        </p:nvSpPr>
+        <p:spPr>
+          <a:xfrm>
+            <a:off x="457200" y="1938528"/>
+            <a:ext cx="11277295" cy="566928"/>
+          </a:xfrm>
+          <a:prstGeom prst="roundRect">
+            <a:avLst>
+              <a:gd name="adj" fmla="val 12000"/>
+            </a:avLst>
+          </a:prstGeom>
+          <a:solidFill>
+            <a:srgbClr val="F2F2F2"/>
+          </a:solidFill>
+          <a:ln>
+            <a:noFill/>
+          </a:ln>
+        </p:spPr>
+        <p:style>
+          <a:lnRef idx="1">
+            <a:schemeClr val="accent1"/>
+          </a:lnRef>
+          <a:fillRef idx="3">
+            <a:schemeClr val="accent1"/>
+          </a:fillRef>
+          <a:effectRef idx="2">
+            <a:schemeClr val="accent1"/>
+          </a:effectRef>
+          <a:fontRef idx="minor">
+            <a:schemeClr val="lt1"/>
+          </a:fontRef>
+        </p:style>
+        <p:txBody>
+          <a:bodyPr rtlCol="0" anchor="ctr"/>
+          <a:lstStyle/>
+          <a:p>
+            <a:pPr algn="ctr"/>
+          </a:p>
+        </p:txBody>
+      </p:sp>
+      <p:sp>
+        <p:nvSpPr>
+          <p:cNvPr id="10" name="Rectangle 9"/>
+          <p:cNvSpPr/>
+          <p:nvPr/>
+        </p:nvSpPr>
+        <p:spPr>
+          <a:xfrm>
+            <a:off x="640080" y="2084832"/>
+            <a:ext cx="274320" cy="274320"/>
+          </a:xfrm>
+          <a:prstGeom prst="rect">
+            <a:avLst/>
+          </a:prstGeom>
+          <a:solidFill>
+            <a:srgbClr val="FFFFFF"/>
+          </a:solidFill>
+          <a:ln>
+            <a:solidFill>
+              <a:srgbClr val="333333"/>
+            </a:solidFill>
+          </a:ln>
+        </p:spPr>
+        <p:style>
+          <a:lnRef idx="1">
+            <a:schemeClr val="accent1"/>
+          </a:lnRef>
+          <a:fillRef idx="3">
+            <a:schemeClr val="accent1"/>
+          </a:fillRef>
+          <a:effectRef idx="2">
+            <a:schemeClr val="accent1"/>
+          </a:effectRef>
+          <a:fontRef idx="minor">
+            <a:schemeClr val="lt1"/>
+          </a:fontRef>
+        </p:style>
+        <p:txBody>
+          <a:bodyPr rtlCol="0" anchor="ctr"/>
+          <a:lstStyle/>
+          <a:p>
+            <a:pPr algn="ctr"/>
+          </a:p>
+        </p:txBody>
+      </p:sp>
+      <p:sp>
+        <p:nvSpPr>
+          <p:cNvPr id="11" name="Rectangle 10"/>
+          <p:cNvSpPr/>
+          <p:nvPr/>
+        </p:nvSpPr>
+        <p:spPr>
+          <a:xfrm>
+            <a:off x="640080" y="2084832"/>
+            <a:ext cx="73152" cy="274320"/>
+          </a:xfrm>
+          <a:prstGeom prst="rect">
+            <a:avLst/>
+          </a:prstGeom>
+          <a:solidFill>
+            <a:srgbClr val="269CCB"/>
+          </a:solidFill>
+          <a:ln>
+            <a:noFill/>
+          </a:ln>
+        </p:spPr>
+        <p:style>
+          <a:lnRef idx="1">
+            <a:schemeClr val="accent1"/>
+          </a:lnRef>
+          <a:fillRef idx="3">
+            <a:schemeClr val="accent1"/>
+          </a:fillRef>
+          <a:effectRef idx="2">
+            <a:schemeClr val="accent1"/>
+          </a:effectRef>
+          <a:fontRef idx="minor">
+            <a:schemeClr val="lt1"/>
+          </a:fontRef>
+        </p:style>
+        <p:txBody>
+          <a:bodyPr rtlCol="0" anchor="ctr"/>
+          <a:lstStyle/>
+          <a:p>
+            <a:pPr algn="ctr"/>
+          </a:p>
+        </p:txBody>
+      </p:sp>
+      <p:sp>
+        <p:nvSpPr>
+          <p:cNvPr id="12" name="TextBox 11"/>
+          <p:cNvSpPr txBox="1"/>
+          <p:nvPr/>
+        </p:nvSpPr>
+        <p:spPr>
+          <a:xfrm>
+            <a:off x="1097280" y="2029968"/>
+            <a:ext cx="10362895" cy="402336"/>
+          </a:xfrm>
+          <a:prstGeom prst="rect">
+            <a:avLst/>
+          </a:prstGeom>
+          <a:noFill/>
+        </p:spPr>
+        <p:txBody>
+          <a:bodyPr wrap="square" anchor="ctr"/>
+          <a:lstStyle/>
+          <a:p>
+            <a:r>
+              <a:rPr sz="1500" b="0" i="0">
+                <a:solidFill>
+                  <a:srgbClr val="333333"/>
+                </a:solidFill>
+                <a:latin typeface="Calibri"/>
+              </a:rPr>
+              <a:t>De los campos que dibujaron, cuantos podria llenar mal una persona apurada, y cual de esos errores se puede volver imposible en vez de corregible.</a:t>
+            </a:r>
+          </a:p>
+        </p:txBody>
+      </p:sp>
+      <p:sp>
+        <p:nvSpPr>
+          <p:cNvPr id="13" name="Rounded Rectangle 12"/>
+          <p:cNvSpPr/>
+          <p:nvPr/>
+        </p:nvSpPr>
+        <p:spPr>
+          <a:xfrm>
+            <a:off x="457200" y="2615184"/>
+            <a:ext cx="11277295" cy="566928"/>
+          </a:xfrm>
+          <a:prstGeom prst="roundRect">
+            <a:avLst>
+              <a:gd name="adj" fmla="val 12000"/>
+            </a:avLst>
+          </a:prstGeom>
+          <a:solidFill>
+            <a:srgbClr val="F2F2F2"/>
+          </a:solidFill>
+          <a:ln>
+            <a:noFill/>
+          </a:ln>
+        </p:spPr>
+        <p:style>
+          <a:lnRef idx="1">
+            <a:schemeClr val="accent1"/>
+          </a:lnRef>
+          <a:fillRef idx="3">
+            <a:schemeClr val="accent1"/>
+          </a:fillRef>
+          <a:effectRef idx="2">
+            <a:schemeClr val="accent1"/>
+          </a:effectRef>
+          <a:fontRef idx="minor">
+            <a:schemeClr val="lt1"/>
+          </a:fontRef>
+        </p:style>
+        <p:txBody>
+          <a:bodyPr rtlCol="0" anchor="ctr"/>
+          <a:lstStyle/>
+          <a:p>
+            <a:pPr algn="ctr"/>
+          </a:p>
+        </p:txBody>
+      </p:sp>
+      <p:sp>
+        <p:nvSpPr>
+          <p:cNvPr id="14" name="Rectangle 13"/>
+          <p:cNvSpPr/>
+          <p:nvPr/>
+        </p:nvSpPr>
+        <p:spPr>
+          <a:xfrm>
+            <a:off x="640080" y="2761488"/>
+            <a:ext cx="274320" cy="274320"/>
+          </a:xfrm>
+          <a:prstGeom prst="rect">
+            <a:avLst/>
+          </a:prstGeom>
+          <a:solidFill>
+            <a:srgbClr val="FFFFFF"/>
+          </a:solidFill>
+          <a:ln>
+            <a:solidFill>
+              <a:srgbClr val="333333"/>
+            </a:solidFill>
+          </a:ln>
+        </p:spPr>
+        <p:style>
+          <a:lnRef idx="1">
+            <a:schemeClr val="accent1"/>
+          </a:lnRef>
+          <a:fillRef idx="3">
+            <a:schemeClr val="accent1"/>
+          </a:fillRef>
+          <a:effectRef idx="2">
+            <a:schemeClr val="accent1"/>
+          </a:effectRef>
+          <a:fontRef idx="minor">
+            <a:schemeClr val="lt1"/>
+          </a:fontRef>
+        </p:style>
+        <p:txBody>
+          <a:bodyPr rtlCol="0" anchor="ctr"/>
+          <a:lstStyle/>
+          <a:p>
+            <a:pPr algn="ctr"/>
+          </a:p>
+        </p:txBody>
+      </p:sp>
+      <p:sp>
+        <p:nvSpPr>
+          <p:cNvPr id="15" name="Rectangle 14"/>
+          <p:cNvSpPr/>
+          <p:nvPr/>
+        </p:nvSpPr>
+        <p:spPr>
+          <a:xfrm>
+            <a:off x="640080" y="2761488"/>
+            <a:ext cx="73152" cy="274320"/>
+          </a:xfrm>
+          <a:prstGeom prst="rect">
+            <a:avLst/>
+          </a:prstGeom>
+          <a:solidFill>
+            <a:srgbClr val="269CCB"/>
+          </a:solidFill>
+          <a:ln>
+            <a:noFill/>
+          </a:ln>
+        </p:spPr>
+        <p:style>
+          <a:lnRef idx="1">
+            <a:schemeClr val="accent1"/>
+          </a:lnRef>
+          <a:fillRef idx="3">
+            <a:schemeClr val="accent1"/>
+          </a:fillRef>
+          <a:effectRef idx="2">
+            <a:schemeClr val="accent1"/>
+          </a:effectRef>
+          <a:fontRef idx="minor">
+            <a:schemeClr val="lt1"/>
+          </a:fontRef>
+        </p:style>
+        <p:txBody>
+          <a:bodyPr rtlCol="0" anchor="ctr"/>
+          <a:lstStyle/>
+          <a:p>
+            <a:pPr algn="ctr"/>
+          </a:p>
+        </p:txBody>
+      </p:sp>
+      <p:sp>
+        <p:nvSpPr>
+          <p:cNvPr id="16" name="TextBox 15"/>
+          <p:cNvSpPr txBox="1"/>
+          <p:nvPr/>
+        </p:nvSpPr>
+        <p:spPr>
+          <a:xfrm>
+            <a:off x="1097280" y="2706624"/>
+            <a:ext cx="10362895" cy="402336"/>
+          </a:xfrm>
+          <a:prstGeom prst="rect">
+            <a:avLst/>
+          </a:prstGeom>
+          <a:noFill/>
+        </p:spPr>
+        <p:txBody>
+          <a:bodyPr wrap="square" anchor="ctr"/>
+          <a:lstStyle/>
+          <a:p>
+            <a:r>
+              <a:rPr sz="1500" b="0" i="0">
+                <a:solidFill>
+                  <a:srgbClr val="333333"/>
+                </a:solidFill>
+                <a:latin typeface="Calibri"/>
+              </a:rPr>
+              <a:t>Si la busqueda por nombre devuelve doce mascotas llamadas Firulais, que dato adicional muestra la lista para que la recepcionista escoja la correcta sin abrir ninguna ficha.</a:t>
+            </a:r>
+          </a:p>
+        </p:txBody>
+      </p:sp>
+      <p:sp>
+        <p:nvSpPr>
+          <p:cNvPr id="17" name="TextBox 16"/>
+          <p:cNvSpPr txBox="1"/>
+          <p:nvPr/>
+        </p:nvSpPr>
+        <p:spPr>
+          <a:xfrm>
+            <a:off x="11185855" y="6473952"/>
+            <a:ext cx="640080" cy="274320"/>
+          </a:xfrm>
+          <a:prstGeom prst="rect">
+            <a:avLst/>
+          </a:prstGeom>
+          <a:noFill/>
+        </p:spPr>
+        <p:txBody>
+          <a:bodyPr wrap="square">
+            <a:spAutoFit/>
+          </a:bodyPr>
+          <a:lstStyle/>
+          <a:p>
+            <a:pPr algn="r"/>
+            <a:r>
+              <a:rPr sz="1100" b="0" i="0">
+                <a:solidFill>
+                  <a:srgbClr val="666666"/>
+                </a:solidFill>
+                <a:latin typeface="Calibri"/>
+              </a:rPr>
+              <a:t>20</a:t>
+            </a:r>
+          </a:p>
+        </p:txBody>
+      </p:sp>
+    </p:spTree>
+  </p:cSld>
+  <p:clrMapOvr>
+    <a:masterClrMapping/>
+  </p:clrMapOvr>
+</p:sld>
+</file>
+
+<file path=ppt/slides/slide21.xml><?xml version="1.0" encoding="utf-8"?>
+<p:sld xmlns:a="http://schemas.openxmlformats.org/drawingml/2006/main" xmlns:p="http://schemas.openxmlformats.org/presentationml/2006/main" xmlns:r="http://schemas.openxmlformats.org/officeDocument/2006/relationships">
+  <p:cSld>
+    <p:bg>
+      <p:bgPr>
+        <a:solidFill>
+          <a:srgbClr val="FFFFFF"/>
+        </a:solidFill>
+        <a:effectLst/>
+      </p:bgPr>
+    </p:bg>
+    <p:spTree>
+      <p:nvGrpSpPr>
+        <p:cNvPr id="1" name=""/>
+        <p:cNvGrpSpPr/>
+        <p:nvPr/>
+      </p:nvGrpSpPr>
+      <p:grpSpPr/>
+      <p:sp>
+        <p:nvSpPr>
+          <p:cNvPr id="2" name="Rectangle 1"/>
+          <p:cNvSpPr/>
+          <p:nvPr/>
+        </p:nvSpPr>
+        <p:spPr>
+          <a:xfrm>
+            <a:off x="0" y="0"/>
+            <a:ext cx="12191695" cy="960120"/>
+          </a:xfrm>
+          <a:prstGeom prst="rect">
+            <a:avLst/>
+          </a:prstGeom>
+          <a:solidFill>
+            <a:srgbClr val="095292"/>
+          </a:solidFill>
+          <a:ln>
+            <a:noFill/>
+          </a:ln>
+        </p:spPr>
+        <p:style>
+          <a:lnRef idx="1">
+            <a:schemeClr val="accent1"/>
+          </a:lnRef>
+          <a:fillRef idx="3">
+            <a:schemeClr val="accent1"/>
+          </a:fillRef>
+          <a:effectRef idx="2">
+            <a:schemeClr val="accent1"/>
+          </a:effectRef>
+          <a:fontRef idx="minor">
+            <a:schemeClr val="lt1"/>
+          </a:fontRef>
+        </p:style>
+        <p:txBody>
+          <a:bodyPr rtlCol="0" anchor="ctr"/>
+          <a:lstStyle/>
+          <a:p>
+            <a:pPr algn="ctr"/>
+          </a:p>
+        </p:txBody>
+      </p:sp>
+      <p:sp>
+        <p:nvSpPr>
+          <p:cNvPr id="3" name="Rectangle 2"/>
+          <p:cNvSpPr/>
+          <p:nvPr/>
+        </p:nvSpPr>
+        <p:spPr>
+          <a:xfrm>
+            <a:off x="0" y="960120"/>
+            <a:ext cx="12191695" cy="41148"/>
+          </a:xfrm>
+          <a:prstGeom prst="rect">
+            <a:avLst/>
+          </a:prstGeom>
+          <a:solidFill>
+            <a:srgbClr val="FFD000"/>
+          </a:solidFill>
+          <a:ln>
+            <a:noFill/>
+          </a:ln>
+        </p:spPr>
+        <p:style>
+          <a:lnRef idx="1">
+            <a:schemeClr val="accent1"/>
+          </a:lnRef>
+          <a:fillRef idx="3">
+            <a:schemeClr val="accent1"/>
+          </a:fillRef>
+          <a:effectRef idx="2">
+            <a:schemeClr val="accent1"/>
+          </a:effectRef>
+          <a:fontRef idx="minor">
+            <a:schemeClr val="lt1"/>
+          </a:fontRef>
+        </p:style>
+        <p:txBody>
+          <a:bodyPr rtlCol="0" anchor="ctr"/>
+          <a:lstStyle/>
+          <a:p>
+            <a:pPr algn="ctr"/>
+          </a:p>
+        </p:txBody>
+      </p:sp>
+      <p:sp>
+        <p:nvSpPr>
+          <p:cNvPr id="4" name="TextBox 3"/>
+          <p:cNvSpPr txBox="1"/>
+          <p:nvPr/>
+        </p:nvSpPr>
+        <p:spPr>
+          <a:xfrm>
+            <a:off x="457200" y="164592"/>
+            <a:ext cx="11277295" cy="502920"/>
+          </a:xfrm>
+          <a:prstGeom prst="rect">
+            <a:avLst/>
+          </a:prstGeom>
+          <a:noFill/>
+        </p:spPr>
+        <p:txBody>
+          <a:bodyPr wrap="square">
+            <a:spAutoFit/>
+          </a:bodyPr>
+          <a:lstStyle/>
+          <a:p>
+            <a:r>
+              <a:rPr sz="2600" b="1" i="0">
+                <a:solidFill>
+                  <a:srgbClr val="FFFFFF"/>
+                </a:solidFill>
+                <a:latin typeface="Calibri"/>
+              </a:rPr>
+              <a:t>Criterios de exito / entregable</a:t>
+            </a:r>
+          </a:p>
+        </p:txBody>
+      </p:sp>
+      <p:sp>
+        <p:nvSpPr>
+          <p:cNvPr id="5" name="TextBox 4"/>
+          <p:cNvSpPr txBox="1"/>
+          <p:nvPr/>
+        </p:nvSpPr>
+        <p:spPr>
+          <a:xfrm>
+            <a:off x="457200" y="1170432"/>
+            <a:ext cx="11277295" cy="5230368"/>
+          </a:xfrm>
+          <a:prstGeom prst="rect">
+            <a:avLst/>
+          </a:prstGeom>
+          <a:noFill/>
+        </p:spPr>
+        <p:txBody>
+          <a:bodyPr wrap="square">
+            <a:spAutoFit/>
+          </a:bodyPr>
+          <a:lstStyle/>
+          <a:p>
+            <a:pPr>
+              <a:spcAft>
+                <a:spcPts val="800"/>
+              </a:spcAft>
+            </a:pPr>
+            <a:r>
+              <a:rPr sz="2000" b="0" i="0">
+                <a:solidFill>
+                  <a:srgbClr val="333333"/>
+                </a:solidFill>
+                <a:latin typeface="Calibri"/>
+              </a:rPr>
+              <a:t>–   </a:t>
+            </a:r>
+            <a:r>
+              <a:rPr sz="2000" b="1" i="0">
+                <a:solidFill>
+                  <a:srgbClr val="333333"/>
+                </a:solidFill>
+                <a:latin typeface="Calibri"/>
+              </a:rPr>
+              <a:t>Entregable:</a:t>
+            </a:r>
+            <a:r>
+              <a:rPr sz="2000" b="0" i="0">
+                <a:solidFill>
+                  <a:srgbClr val="333333"/>
+                </a:solidFill>
+                <a:latin typeface="Calibri"/>
+              </a:rPr>
+              <a:t> Un archivo de Figma o Penpot con las dos pantallas anotadas y minimo tres transiciones navegables, mas la hoja de anotaciones que amarra cada campo a un RF y a un atributo del diccionario de datos, subido a la plataforma del curso.</a:t>
+            </a:r>
+          </a:p>
+          <a:p>
+            <a:pPr>
+              <a:spcAft>
+                <a:spcPts val="800"/>
+              </a:spcAft>
+            </a:pPr>
+            <a:r>
+              <a:rPr sz="2000" b="0" i="0">
+                <a:solidFill>
+                  <a:srgbClr val="333333"/>
+                </a:solidFill>
+                <a:latin typeface="Calibri"/>
+              </a:rPr>
+              <a:t>–   </a:t>
+            </a:r>
+            <a:r>
+              <a:rPr sz="2000" b="1" i="0">
+                <a:solidFill>
+                  <a:srgbClr val="333333"/>
+                </a:solidFill>
+                <a:latin typeface="Calibri"/>
+              </a:rPr>
+              <a:t>Exito:</a:t>
+            </a:r>
+            <a:r>
+              <a:rPr sz="2000" b="0" i="0">
+                <a:solidFill>
+                  <a:srgbClr val="333333"/>
+                </a:solidFill>
+                <a:latin typeface="Calibri"/>
+              </a:rPr>
+              <a:t> Las dos pantallas se entregan primero como wireframe en gris y luego como mockup, y ambas versiones estan en el archivo entregado.</a:t>
+            </a:r>
+          </a:p>
+          <a:p>
+            <a:pPr>
+              <a:spcAft>
+                <a:spcPts val="800"/>
+              </a:spcAft>
+            </a:pPr>
+            <a:r>
+              <a:rPr sz="2000" b="0" i="0">
+                <a:solidFill>
+                  <a:srgbClr val="333333"/>
+                </a:solidFill>
+                <a:latin typeface="Calibri"/>
+              </a:rPr>
+              <a:t>–   </a:t>
+            </a:r>
+            <a:r>
+              <a:rPr sz="2000" b="1" i="0">
+                <a:solidFill>
+                  <a:srgbClr val="333333"/>
+                </a:solidFill>
+                <a:latin typeface="Calibri"/>
+              </a:rPr>
+              <a:t>Exito:</a:t>
+            </a:r>
+            <a:r>
+              <a:rPr sz="2000" b="0" i="0">
+                <a:solidFill>
+                  <a:srgbClr val="333333"/>
+                </a:solidFill>
+                <a:latin typeface="Calibri"/>
+              </a:rPr>
+              <a:t> Cada campo dibujado aparece en la tabla de anotaciones con su atributo del diccionario de datos y el RF que lo exige, sin campos huerfanos.</a:t>
+            </a:r>
+          </a:p>
+          <a:p>
+            <a:pPr>
+              <a:spcAft>
+                <a:spcPts val="800"/>
+              </a:spcAft>
+            </a:pPr>
+            <a:r>
+              <a:rPr sz="2000" b="0" i="0">
+                <a:solidFill>
+                  <a:srgbClr val="333333"/>
+                </a:solidFill>
+                <a:latin typeface="Calibri"/>
+              </a:rPr>
+              <a:t>–   </a:t>
+            </a:r>
+            <a:r>
+              <a:rPr sz="2000" b="1" i="0">
+                <a:solidFill>
+                  <a:srgbClr val="333333"/>
+                </a:solidFill>
+                <a:latin typeface="Calibri"/>
+              </a:rPr>
+              <a:t>Exito:</a:t>
+            </a:r>
+            <a:r>
+              <a:rPr sz="2000" b="0" i="0">
+                <a:solidFill>
+                  <a:srgbClr val="333333"/>
+                </a:solidFill>
+                <a:latin typeface="Calibri"/>
+              </a:rPr>
+              <a:t> El prototipo tiene al menos tres transiciones que funcionan al hacer clic y cubre minimo dos caminos alternos, entre ellos resultados multiples o dueño no registrado.</a:t>
+            </a:r>
+          </a:p>
+          <a:p>
+            <a:pPr>
+              <a:spcAft>
+                <a:spcPts val="800"/>
+              </a:spcAft>
+            </a:pPr>
+            <a:r>
+              <a:rPr sz="2000" b="0" i="0">
+                <a:solidFill>
+                  <a:srgbClr val="333333"/>
+                </a:solidFill>
+                <a:latin typeface="Calibri"/>
+              </a:rPr>
+              <a:t>–   </a:t>
+            </a:r>
+            <a:r>
+              <a:rPr sz="2000" b="1" i="0">
+                <a:solidFill>
+                  <a:srgbClr val="333333"/>
+                </a:solidFill>
+                <a:latin typeface="Calibri"/>
+              </a:rPr>
+              <a:t>Exito:</a:t>
+            </a:r>
+            <a:r>
+              <a:rPr sz="2000" b="0" i="0">
+                <a:solidFill>
+                  <a:srgbClr val="333333"/>
+                </a:solidFill>
+                <a:latin typeface="Calibri"/>
+              </a:rPr>
+              <a:t> El diseño evidencia por escrito los cuatro principios trabajados: hay mensaje de estado tras guardar, hay al menos dos mecanismos de prevencion de errores, los botones principales son consistentes entre pantallas y las listas cerradas reemplazan los campos de memoria.</a:t>
+            </a:r>
+          </a:p>
+          <a:p>
+            <a:pPr>
+              <a:spcAft>
+                <a:spcPts val="800"/>
+              </a:spcAft>
+            </a:pPr>
+            <a:r>
+              <a:rPr sz="2000" b="0" i="0">
+                <a:solidFill>
+                  <a:srgbClr val="333333"/>
+                </a:solidFill>
+                <a:latin typeface="Calibri"/>
+              </a:rPr>
+              <a:t>–   </a:t>
+            </a:r>
+            <a:r>
+              <a:rPr sz="2000" b="1" i="0">
+                <a:solidFill>
+                  <a:srgbClr val="333333"/>
+                </a:solidFill>
+                <a:latin typeface="Calibri"/>
+              </a:rPr>
+              <a:t>Entrega en la plataforma del curso</a:t>
+            </a:r>
+            <a:r>
+              <a:rPr sz="2000" b="0" i="0">
+                <a:solidFill>
+                  <a:srgbClr val="333333"/>
+                </a:solidFill>
+                <a:latin typeface="Calibri"/>
+              </a:rPr>
+              <a:t> — en la fecha que indique el docente.</a:t>
+            </a:r>
+          </a:p>
+        </p:txBody>
+      </p:sp>
+      <p:sp>
+        <p:nvSpPr>
+          <p:cNvPr id="6" name="TextBox 5"/>
+          <p:cNvSpPr txBox="1"/>
+          <p:nvPr/>
+        </p:nvSpPr>
+        <p:spPr>
+          <a:xfrm>
+            <a:off x="11185855" y="6473952"/>
+            <a:ext cx="640080" cy="274320"/>
+          </a:xfrm>
+          <a:prstGeom prst="rect">
+            <a:avLst/>
+          </a:prstGeom>
+          <a:noFill/>
+        </p:spPr>
+        <p:txBody>
+          <a:bodyPr wrap="square">
+            <a:spAutoFit/>
+          </a:bodyPr>
+          <a:lstStyle/>
+          <a:p>
+            <a:pPr algn="r"/>
+            <a:r>
+              <a:rPr sz="1100" b="0" i="0">
+                <a:solidFill>
+                  <a:srgbClr val="666666"/>
+                </a:solidFill>
+                <a:latin typeface="Calibri"/>
+              </a:rPr>
+              <a:t>21</a:t>
+            </a:r>
+          </a:p>
+        </p:txBody>
+      </p:sp>
+    </p:spTree>
+  </p:cSld>
+  <p:clrMapOvr>
+    <a:masterClrMapping/>
+  </p:clrMapOvr>
+</p:sld>
+</file>
+
+<file path=ppt/slides/slide22.xml><?xml version="1.0" encoding="utf-8"?>
+<p:sld xmlns:a="http://schemas.openxmlformats.org/drawingml/2006/main" xmlns:p="http://schemas.openxmlformats.org/presentationml/2006/main" xmlns:r="http://schemas.openxmlformats.org/officeDocument/2006/relationships">
+  <p:cSld>
+    <p:bg>
+      <p:bgPr>
+        <a:solidFill>
+          <a:srgbClr val="FFFFFF"/>
+        </a:solidFill>
+        <a:effectLst/>
+      </p:bgPr>
+    </p:bg>
+    <p:spTree>
+      <p:nvGrpSpPr>
+        <p:cNvPr id="1" name=""/>
+        <p:cNvGrpSpPr/>
+        <p:nvPr/>
+      </p:nvGrpSpPr>
+      <p:grpSpPr/>
+      <p:sp>
+        <p:nvSpPr>
+          <p:cNvPr id="2" name="Rectangle 1"/>
+          <p:cNvSpPr/>
+          <p:nvPr/>
+        </p:nvSpPr>
+        <p:spPr>
+          <a:xfrm>
+            <a:off x="0" y="0"/>
+            <a:ext cx="12191695" cy="960120"/>
+          </a:xfrm>
+          <a:prstGeom prst="rect">
+            <a:avLst/>
+          </a:prstGeom>
+          <a:solidFill>
+            <a:srgbClr val="095292"/>
+          </a:solidFill>
+          <a:ln>
+            <a:noFill/>
+          </a:ln>
+        </p:spPr>
+        <p:style>
+          <a:lnRef idx="1">
+            <a:schemeClr val="accent1"/>
+          </a:lnRef>
+          <a:fillRef idx="3">
+            <a:schemeClr val="accent1"/>
+          </a:fillRef>
+          <a:effectRef idx="2">
+            <a:schemeClr val="accent1"/>
+          </a:effectRef>
+          <a:fontRef idx="minor">
+            <a:schemeClr val="lt1"/>
+          </a:fontRef>
+        </p:style>
+        <p:txBody>
+          <a:bodyPr rtlCol="0" anchor="ctr"/>
+          <a:lstStyle/>
+          <a:p>
+            <a:pPr algn="ctr"/>
+          </a:p>
+        </p:txBody>
+      </p:sp>
+      <p:sp>
+        <p:nvSpPr>
+          <p:cNvPr id="3" name="Rectangle 2"/>
+          <p:cNvSpPr/>
+          <p:nvPr/>
+        </p:nvSpPr>
+        <p:spPr>
+          <a:xfrm>
+            <a:off x="0" y="960120"/>
+            <a:ext cx="12191695" cy="41148"/>
+          </a:xfrm>
+          <a:prstGeom prst="rect">
+            <a:avLst/>
+          </a:prstGeom>
+          <a:solidFill>
+            <a:srgbClr val="FFD000"/>
+          </a:solidFill>
+          <a:ln>
+            <a:noFill/>
+          </a:ln>
+        </p:spPr>
+        <p:style>
+          <a:lnRef idx="1">
+            <a:schemeClr val="accent1"/>
+          </a:lnRef>
+          <a:fillRef idx="3">
+            <a:schemeClr val="accent1"/>
+          </a:fillRef>
+          <a:effectRef idx="2">
+            <a:schemeClr val="accent1"/>
+          </a:effectRef>
+          <a:fontRef idx="minor">
+            <a:schemeClr val="lt1"/>
+          </a:fontRef>
+        </p:style>
+        <p:txBody>
+          <a:bodyPr rtlCol="0" anchor="ctr"/>
+          <a:lstStyle/>
+          <a:p>
+            <a:pPr algn="ctr"/>
+          </a:p>
+        </p:txBody>
+      </p:sp>
+      <p:sp>
+        <p:nvSpPr>
+          <p:cNvPr id="4" name="TextBox 3"/>
+          <p:cNvSpPr txBox="1"/>
+          <p:nvPr/>
+        </p:nvSpPr>
+        <p:spPr>
+          <a:xfrm>
+            <a:off x="457200" y="164592"/>
+            <a:ext cx="11277295" cy="502920"/>
+          </a:xfrm>
+          <a:prstGeom prst="rect">
+            <a:avLst/>
+          </a:prstGeom>
+          <a:noFill/>
+        </p:spPr>
+        <p:txBody>
+          <a:bodyPr wrap="square">
+            <a:spAutoFit/>
+          </a:bodyPr>
+          <a:lstStyle/>
+          <a:p>
+            <a:r>
+              <a:rPr sz="2600" b="1" i="0">
+                <a:solidFill>
+                  <a:srgbClr val="FFFFFF"/>
+                </a:solidFill>
+                <a:latin typeface="Calibri"/>
+              </a:rPr>
+              <a:t>Para el PI esta semana</a:t>
+            </a:r>
+          </a:p>
+        </p:txBody>
+      </p:sp>
+      <p:sp>
+        <p:nvSpPr>
+          <p:cNvPr id="5" name="Rounded Rectangle 4"/>
+          <p:cNvSpPr/>
+          <p:nvPr/>
+        </p:nvSpPr>
+        <p:spPr>
+          <a:xfrm>
+            <a:off x="457200" y="1261872"/>
+            <a:ext cx="11277295" cy="1051560"/>
+          </a:xfrm>
+          <a:prstGeom prst="roundRect">
+            <a:avLst>
+              <a:gd name="adj" fmla="val 12000"/>
+            </a:avLst>
+          </a:prstGeom>
+          <a:solidFill>
+            <a:srgbClr val="E8F4FA"/>
+          </a:solidFill>
+          <a:ln>
+            <a:noFill/>
+          </a:ln>
+        </p:spPr>
+        <p:style>
+          <a:lnRef idx="1">
+            <a:schemeClr val="accent1"/>
+          </a:lnRef>
+          <a:fillRef idx="3">
+            <a:schemeClr val="accent1"/>
+          </a:fillRef>
+          <a:effectRef idx="2">
+            <a:schemeClr val="accent1"/>
+          </a:effectRef>
+          <a:fontRef idx="minor">
+            <a:schemeClr val="lt1"/>
+          </a:fontRef>
+        </p:style>
+        <p:txBody>
+          <a:bodyPr rtlCol="0" anchor="ctr"/>
+          <a:lstStyle/>
+          <a:p>
+            <a:pPr algn="ctr"/>
+          </a:p>
+        </p:txBody>
+      </p:sp>
+      <p:sp>
+        <p:nvSpPr>
+          <p:cNvPr id="6" name="Rectangle 5"/>
+          <p:cNvSpPr/>
+          <p:nvPr/>
+        </p:nvSpPr>
+        <p:spPr>
+          <a:xfrm>
+            <a:off x="457200" y="1261872"/>
+            <a:ext cx="128016" cy="1051560"/>
+          </a:xfrm>
+          <a:prstGeom prst="rect">
+            <a:avLst/>
+          </a:prstGeom>
+          <a:solidFill>
+            <a:srgbClr val="269CCB"/>
+          </a:solidFill>
+          <a:ln>
+            <a:noFill/>
+          </a:ln>
+        </p:spPr>
+        <p:style>
+          <a:lnRef idx="1">
+            <a:schemeClr val="accent1"/>
+          </a:lnRef>
+          <a:fillRef idx="3">
+            <a:schemeClr val="accent1"/>
+          </a:fillRef>
+          <a:effectRef idx="2">
+            <a:schemeClr val="accent1"/>
+          </a:effectRef>
+          <a:fontRef idx="minor">
+            <a:schemeClr val="lt1"/>
+          </a:fontRef>
+        </p:style>
+        <p:txBody>
+          <a:bodyPr rtlCol="0" anchor="ctr"/>
+          <a:lstStyle/>
+          <a:p>
+            <a:pPr algn="ctr"/>
+          </a:p>
+        </p:txBody>
+      </p:sp>
+      <p:sp>
+        <p:nvSpPr>
+          <p:cNvPr id="7" name="TextBox 6"/>
+          <p:cNvSpPr txBox="1"/>
+          <p:nvPr/>
+        </p:nvSpPr>
+        <p:spPr>
+          <a:xfrm>
+            <a:off x="777240" y="1399031"/>
+            <a:ext cx="10774375" cy="822959"/>
+          </a:xfrm>
+          <a:prstGeom prst="rect">
+            <a:avLst/>
+          </a:prstGeom>
+          <a:noFill/>
+        </p:spPr>
+        <p:txBody>
+          <a:bodyPr wrap="square">
+            <a:spAutoFit/>
+          </a:bodyPr>
+          <a:lstStyle/>
+          <a:p>
+            <a:r>
+              <a:rPr sz="1200" b="1" i="0">
+                <a:solidFill>
+                  <a:srgbClr val="269CCB"/>
+                </a:solidFill>
+                <a:latin typeface="Calibri"/>
+              </a:rPr>
+              <a:t>Info</a:t>
+            </a:r>
+          </a:p>
+          <a:p>
+            <a:pPr>
+              <a:spcBef>
+                <a:spcPts val="400"/>
+              </a:spcBef>
+            </a:pPr>
+            <a:r>
+              <a:rPr sz="1400" b="0" i="0">
+                <a:solidFill>
+                  <a:srgbClr val="333333"/>
+                </a:solidFill>
+                <a:latin typeface="Calibri"/>
+              </a:rPr>
+              <a:t>Hito: Quedan listas las pantallas de Registrar mascota y Buscar expediente de VetCare, anotadas y conectadas en un prototipo navegable.</a:t>
+            </a:r>
+          </a:p>
+        </p:txBody>
+      </p:sp>
+      <p:sp>
+        <p:nvSpPr>
+          <p:cNvPr id="8" name="Rounded Rectangle 7"/>
+          <p:cNvSpPr/>
+          <p:nvPr/>
+        </p:nvSpPr>
+        <p:spPr>
+          <a:xfrm>
+            <a:off x="457200" y="2478024"/>
+            <a:ext cx="11277295" cy="1051560"/>
+          </a:xfrm>
+          <a:prstGeom prst="roundRect">
+            <a:avLst>
+              <a:gd name="adj" fmla="val 12000"/>
+            </a:avLst>
+          </a:prstGeom>
+          <a:solidFill>
+            <a:srgbClr val="FFF8E1"/>
+          </a:solidFill>
+          <a:ln>
+            <a:noFill/>
+          </a:ln>
+        </p:spPr>
+        <p:style>
+          <a:lnRef idx="1">
+            <a:schemeClr val="accent1"/>
+          </a:lnRef>
+          <a:fillRef idx="3">
+            <a:schemeClr val="accent1"/>
+          </a:fillRef>
+          <a:effectRef idx="2">
+            <a:schemeClr val="accent1"/>
+          </a:effectRef>
+          <a:fontRef idx="minor">
+            <a:schemeClr val="lt1"/>
+          </a:fontRef>
+        </p:style>
+        <p:txBody>
+          <a:bodyPr rtlCol="0" anchor="ctr"/>
+          <a:lstStyle/>
+          <a:p>
+            <a:pPr algn="ctr"/>
+          </a:p>
+        </p:txBody>
+      </p:sp>
+      <p:sp>
+        <p:nvSpPr>
+          <p:cNvPr id="9" name="Rectangle 8"/>
+          <p:cNvSpPr/>
+          <p:nvPr/>
+        </p:nvSpPr>
+        <p:spPr>
+          <a:xfrm>
+            <a:off x="457200" y="2478024"/>
+            <a:ext cx="128016" cy="1051560"/>
+          </a:xfrm>
+          <a:prstGeom prst="rect">
+            <a:avLst/>
+          </a:prstGeom>
+          <a:solidFill>
+            <a:srgbClr val="FFD000"/>
+          </a:solidFill>
+          <a:ln>
+            <a:noFill/>
+          </a:ln>
+        </p:spPr>
+        <p:style>
+          <a:lnRef idx="1">
+            <a:schemeClr val="accent1"/>
+          </a:lnRef>
+          <a:fillRef idx="3">
+            <a:schemeClr val="accent1"/>
+          </a:fillRef>
+          <a:effectRef idx="2">
+            <a:schemeClr val="accent1"/>
+          </a:effectRef>
+          <a:fontRef idx="minor">
+            <a:schemeClr val="lt1"/>
+          </a:fontRef>
+        </p:style>
+        <p:txBody>
+          <a:bodyPr rtlCol="0" anchor="ctr"/>
+          <a:lstStyle/>
+          <a:p>
+            <a:pPr algn="ctr"/>
+          </a:p>
+        </p:txBody>
+      </p:sp>
+      <p:sp>
+        <p:nvSpPr>
+          <p:cNvPr id="10" name="TextBox 9"/>
+          <p:cNvSpPr txBox="1"/>
+          <p:nvPr/>
+        </p:nvSpPr>
+        <p:spPr>
+          <a:xfrm>
+            <a:off x="777240" y="2615184"/>
+            <a:ext cx="10774375" cy="822959"/>
+          </a:xfrm>
+          <a:prstGeom prst="rect">
+            <a:avLst/>
+          </a:prstGeom>
+          <a:noFill/>
+        </p:spPr>
+        <p:txBody>
+          <a:bodyPr wrap="square">
+            <a:spAutoFit/>
+          </a:bodyPr>
+          <a:lstStyle/>
+          <a:p>
+            <a:r>
+              <a:rPr sz="1200" b="1" i="0">
+                <a:solidFill>
+                  <a:srgbClr val="FFD000"/>
+                </a:solidFill>
+                <a:latin typeface="Calibri"/>
+              </a:rPr>
+              <a:t>Aclaración</a:t>
+            </a:r>
+          </a:p>
+          <a:p>
+            <a:pPr>
+              <a:spcBef>
+                <a:spcPts val="400"/>
+              </a:spcBef>
+            </a:pPr>
+            <a:r>
+              <a:rPr sz="1400" b="0" i="0">
+                <a:solidFill>
+                  <a:srgbClr val="333333"/>
+                </a:solidFill>
+                <a:latin typeface="Calibri"/>
+              </a:rPr>
+              <a:t>Enunciado completo: Clases/Proyecto Integrador/ (VetCare).</a:t>
+            </a:r>
+          </a:p>
+        </p:txBody>
+      </p:sp>
+      <p:sp>
+        <p:nvSpPr>
+          <p:cNvPr id="11" name="Rounded Rectangle 10"/>
+          <p:cNvSpPr/>
+          <p:nvPr/>
+        </p:nvSpPr>
+        <p:spPr>
+          <a:xfrm>
+            <a:off x="457200" y="3694176"/>
+            <a:ext cx="11277295" cy="1051560"/>
+          </a:xfrm>
+          <a:prstGeom prst="roundRect">
+            <a:avLst>
+              <a:gd name="adj" fmla="val 12000"/>
+            </a:avLst>
+          </a:prstGeom>
+          <a:solidFill>
+            <a:srgbClr val="FBE4E4"/>
+          </a:solidFill>
+          <a:ln>
+            <a:noFill/>
+          </a:ln>
+        </p:spPr>
+        <p:style>
+          <a:lnRef idx="1">
+            <a:schemeClr val="accent1"/>
+          </a:lnRef>
+          <a:fillRef idx="3">
+            <a:schemeClr val="accent1"/>
+          </a:fillRef>
+          <a:effectRef idx="2">
+            <a:schemeClr val="accent1"/>
+          </a:effectRef>
+          <a:fontRef idx="minor">
+            <a:schemeClr val="lt1"/>
+          </a:fontRef>
+        </p:style>
+        <p:txBody>
+          <a:bodyPr rtlCol="0" anchor="ctr"/>
+          <a:lstStyle/>
+          <a:p>
+            <a:pPr algn="ctr"/>
+          </a:p>
+        </p:txBody>
+      </p:sp>
+      <p:sp>
+        <p:nvSpPr>
+          <p:cNvPr id="12" name="Rectangle 11"/>
+          <p:cNvSpPr/>
+          <p:nvPr/>
+        </p:nvSpPr>
+        <p:spPr>
+          <a:xfrm>
+            <a:off x="457200" y="3694176"/>
+            <a:ext cx="128016" cy="1051560"/>
+          </a:xfrm>
+          <a:prstGeom prst="rect">
+            <a:avLst/>
+          </a:prstGeom>
+          <a:solidFill>
+            <a:srgbClr val="A02030"/>
+          </a:solidFill>
+          <a:ln>
+            <a:noFill/>
+          </a:ln>
+        </p:spPr>
+        <p:style>
+          <a:lnRef idx="1">
+            <a:schemeClr val="accent1"/>
+          </a:lnRef>
+          <a:fillRef idx="3">
+            <a:schemeClr val="accent1"/>
+          </a:fillRef>
+          <a:effectRef idx="2">
+            <a:schemeClr val="accent1"/>
+          </a:effectRef>
+          <a:fontRef idx="minor">
+            <a:schemeClr val="lt1"/>
+          </a:fontRef>
+        </p:style>
+        <p:txBody>
+          <a:bodyPr rtlCol="0" anchor="ctr"/>
+          <a:lstStyle/>
+          <a:p>
+            <a:pPr algn="ctr"/>
+          </a:p>
+        </p:txBody>
+      </p:sp>
+      <p:sp>
+        <p:nvSpPr>
+          <p:cNvPr id="13" name="TextBox 12"/>
+          <p:cNvSpPr txBox="1"/>
+          <p:nvPr/>
+        </p:nvSpPr>
+        <p:spPr>
+          <a:xfrm>
+            <a:off x="777240" y="3831336"/>
+            <a:ext cx="10774375" cy="822959"/>
+          </a:xfrm>
+          <a:prstGeom prst="rect">
+            <a:avLst/>
+          </a:prstGeom>
+          <a:noFill/>
+        </p:spPr>
+        <p:txBody>
+          <a:bodyPr wrap="square">
+            <a:spAutoFit/>
+          </a:bodyPr>
+          <a:lstStyle/>
+          <a:p>
+            <a:r>
+              <a:rPr sz="1200" b="1" i="0">
+                <a:solidFill>
+                  <a:srgbClr val="A02030"/>
+                </a:solidFill>
+                <a:latin typeface="Calibri"/>
+              </a:rPr>
+              <a:t>Atención</a:t>
+            </a:r>
+          </a:p>
+          <a:p>
+            <a:pPr>
+              <a:spcBef>
+                <a:spcPts val="400"/>
+              </a:spcBef>
+            </a:pPr>
+            <a:r>
+              <a:rPr sz="1400" b="0" i="0">
+                <a:solidFill>
+                  <a:srgbClr val="333333"/>
+                </a:solidFill>
+                <a:latin typeface="Calibri"/>
+              </a:rPr>
+              <a:t>Entrega del taller, si el docente lo asigna · en la fecha que indique el docente.</a:t>
+            </a:r>
+          </a:p>
+        </p:txBody>
+      </p:sp>
+      <p:sp>
+        <p:nvSpPr>
+          <p:cNvPr id="14" name="TextBox 13"/>
+          <p:cNvSpPr txBox="1"/>
+          <p:nvPr/>
+        </p:nvSpPr>
+        <p:spPr>
+          <a:xfrm>
+            <a:off x="11185855" y="6473952"/>
+            <a:ext cx="640080" cy="274320"/>
+          </a:xfrm>
+          <a:prstGeom prst="rect">
+            <a:avLst/>
+          </a:prstGeom>
+          <a:noFill/>
+        </p:spPr>
+        <p:txBody>
+          <a:bodyPr wrap="square">
+            <a:spAutoFit/>
+          </a:bodyPr>
+          <a:lstStyle/>
+          <a:p>
+            <a:pPr algn="r"/>
+            <a:r>
+              <a:rPr sz="1100" b="0" i="0">
+                <a:solidFill>
+                  <a:srgbClr val="666666"/>
+                </a:solidFill>
+                <a:latin typeface="Calibri"/>
+              </a:rPr>
+              <a:t>22</a:t>
+            </a:r>
+          </a:p>
+        </p:txBody>
+      </p:sp>
+    </p:spTree>
+  </p:cSld>
+  <p:clrMapOvr>
+    <a:masterClrMapping/>
+  </p:clrMapOvr>
+</p:sld>
+</file>
+
+<file path=ppt/slides/slide23.xml><?xml version="1.0" encoding="utf-8"?>
+<p:sld xmlns:a="http://schemas.openxmlformats.org/drawingml/2006/main" xmlns:p="http://schemas.openxmlformats.org/presentationml/2006/main" xmlns:r="http://schemas.openxmlformats.org/officeDocument/2006/relationships">
+  <p:cSld>
+    <p:bg>
+      <p:bgPr>
+        <a:solidFill>
+          <a:srgbClr val="FFFFFF"/>
+        </a:solidFill>
+        <a:effectLst/>
+      </p:bgPr>
+    </p:bg>
+    <p:spTree>
+      <p:nvGrpSpPr>
+        <p:cNvPr id="1" name=""/>
+        <p:cNvGrpSpPr/>
+        <p:nvPr/>
+      </p:nvGrpSpPr>
+      <p:grpSpPr/>
+      <p:sp>
+        <p:nvSpPr>
+          <p:cNvPr id="2" name="Rectangle 1"/>
+          <p:cNvSpPr/>
+          <p:nvPr/>
+        </p:nvSpPr>
+        <p:spPr>
+          <a:xfrm>
+            <a:off x="0" y="0"/>
+            <a:ext cx="12191695" cy="164592"/>
+          </a:xfrm>
+          <a:prstGeom prst="rect">
+            <a:avLst/>
+          </a:prstGeom>
+          <a:solidFill>
+            <a:srgbClr val="269CCB"/>
+          </a:solidFill>
+          <a:ln>
+            <a:noFill/>
+          </a:ln>
+        </p:spPr>
+        <p:style>
+          <a:lnRef idx="1">
+            <a:schemeClr val="accent1"/>
+          </a:lnRef>
+          <a:fillRef idx="3">
+            <a:schemeClr val="accent1"/>
+          </a:fillRef>
+          <a:effectRef idx="2">
+            <a:schemeClr val="accent1"/>
+          </a:effectRef>
+          <a:fontRef idx="minor">
+            <a:schemeClr val="lt1"/>
+          </a:fontRef>
+        </p:style>
+        <p:txBody>
+          <a:bodyPr rtlCol="0" anchor="ctr"/>
+          <a:lstStyle/>
+          <a:p>
+            <a:pPr algn="ctr"/>
+          </a:p>
+        </p:txBody>
+      </p:sp>
+      <p:pic>
+        <p:nvPicPr>
+          <p:cNvPr id="3" name="Picture 2" descr="logo_uniajc_color.png"/>
+          <p:cNvPicPr>
+            <a:picLocks noChangeAspect="1"/>
+          </p:cNvPicPr>
+          <p:nvPr/>
+        </p:nvPicPr>
+        <p:blipFill>
+          <a:blip r:embed="rId2"/>
+          <a:stretch>
+            <a:fillRect/>
+          </a:stretch>
+        </p:blipFill>
+        <p:spPr>
+          <a:xfrm>
+            <a:off x="10271455" y="5998464"/>
+            <a:ext cx="1463040" cy="643233"/>
+          </a:xfrm>
+          <a:prstGeom prst="rect">
+            <a:avLst/>
+          </a:prstGeom>
+        </p:spPr>
+      </p:pic>
+      <p:sp>
+        <p:nvSpPr>
+          <p:cNvPr id="4" name="TextBox 3"/>
+          <p:cNvSpPr txBox="1"/>
+          <p:nvPr/>
+        </p:nvSpPr>
+        <p:spPr>
+          <a:xfrm>
+            <a:off x="457200" y="1737360"/>
+            <a:ext cx="11277295" cy="1097280"/>
+          </a:xfrm>
+          <a:prstGeom prst="rect">
+            <a:avLst/>
+          </a:prstGeom>
+          <a:noFill/>
+        </p:spPr>
+        <p:txBody>
+          <a:bodyPr wrap="square" anchor="ctr"/>
+          <a:lstStyle/>
+          <a:p>
+            <a:pPr algn="ctr"/>
+            <a:r>
+              <a:rPr sz="3400" b="1" i="0">
+                <a:solidFill>
+                  <a:srgbClr val="095292"/>
+                </a:solidFill>
+                <a:latin typeface="Calibri"/>
+              </a:rPr>
+              <a:t>Clase 13 · VetCare avanza</a:t>
+            </a:r>
+          </a:p>
+        </p:txBody>
+      </p:sp>
+      <p:sp>
+        <p:nvSpPr>
+          <p:cNvPr id="5" name="TextBox 4"/>
+          <p:cNvSpPr txBox="1"/>
+          <p:nvPr/>
+        </p:nvSpPr>
+        <p:spPr>
+          <a:xfrm>
+            <a:off x="457200" y="3017520"/>
+            <a:ext cx="11277295" cy="1645920"/>
+          </a:xfrm>
+          <a:prstGeom prst="rect">
+            <a:avLst/>
+          </a:prstGeom>
+          <a:noFill/>
+        </p:spPr>
+        <p:txBody>
+          <a:bodyPr wrap="square">
+            <a:spAutoFit/>
+          </a:bodyPr>
+          <a:lstStyle/>
+          <a:p>
+            <a:pPr algn="ctr">
+              <a:spcAft>
+                <a:spcPts val="600"/>
+              </a:spcAft>
+            </a:pPr>
+            <a:r>
+              <a:rPr sz="1600" b="0" i="0">
+                <a:solidFill>
+                  <a:srgbClr val="333333"/>
+                </a:solidFill>
+                <a:latin typeface="Calibri"/>
+              </a:rPr>
+              <a:t>Quedan listas las pantallas de Registrar mascota y Buscar expediente de VetCare, anotadas y conectadas en un prototipo navegable.</a:t>
+            </a:r>
+          </a:p>
+          <a:p>
+            <a:pPr algn="ctr">
+              <a:spcAft>
+                <a:spcPts val="600"/>
+              </a:spcAft>
+            </a:pPr>
+            <a:r>
+              <a:rPr sz="1600" b="0" i="0">
+                <a:solidFill>
+                  <a:srgbClr val="333333"/>
+                </a:solidFill>
+                <a:latin typeface="Calibri"/>
+              </a:rPr>
+              <a:t>Entregable: Un archivo de Figma o Penpot con las dos pantallas anotadas y minimo tres transiciones navegables, mas la hoja de anotaciones que amarra cada campo a un RF y a un atributo del diccionario de datos, subido a la plataforma del curso.</a:t>
+            </a:r>
+          </a:p>
+          <a:p>
+            <a:pPr algn="ctr">
+              <a:spcAft>
+                <a:spcPts val="600"/>
+              </a:spcAft>
+            </a:pPr>
+            <a:r>
+              <a:rPr sz="1600" b="0" i="0">
+                <a:solidFill>
+                  <a:srgbClr val="333333"/>
+                </a:solidFill>
+                <a:latin typeface="Calibri"/>
+              </a:rPr>
+              <a:t>Siguiente clase: continuamos el hilo del PI</a:t>
+            </a:r>
+          </a:p>
+        </p:txBody>
+      </p:sp>
+      <p:sp>
+        <p:nvSpPr>
+          <p:cNvPr id="6" name="TextBox 5"/>
+          <p:cNvSpPr txBox="1"/>
+          <p:nvPr/>
+        </p:nvSpPr>
+        <p:spPr>
+          <a:xfrm>
+            <a:off x="457200" y="4754880"/>
+            <a:ext cx="11277295" cy="640080"/>
+          </a:xfrm>
+          <a:prstGeom prst="rect">
+            <a:avLst/>
+          </a:prstGeom>
+          <a:noFill/>
+        </p:spPr>
+        <p:txBody>
+          <a:bodyPr wrap="square">
+            <a:spAutoFit/>
+          </a:bodyPr>
+          <a:lstStyle/>
+          <a:p>
+            <a:pPr algn="ctr"/>
+            <a:r>
+              <a:rPr sz="2000" b="1" i="0">
+                <a:solidFill>
+                  <a:srgbClr val="269CCB"/>
+                </a:solidFill>
+                <a:latin typeface="Calibri"/>
+              </a:rPr>
+              <a:t>Teoria al servicio del proyecto</a:t>
+            </a:r>
+          </a:p>
+        </p:txBody>
+      </p:sp>
+    </p:spTree>
+  </p:cSld>
+  <p:clrMapOvr>
+    <a:masterClrMapping/>
+  </p:clrMapOvr>
+</p:sld>
+</file>
+
 <file path=ppt/slides/slide3.xml><?xml version="1.0" encoding="utf-8"?>
 <p:sld xmlns:a="http://schemas.openxmlformats.org/drawingml/2006/main" xmlns:p="http://schemas.openxmlformats.org/presentationml/2006/main" xmlns:r="http://schemas.openxmlformats.org/officeDocument/2006/relationships">
   <p:cSld>
@@ -7669,7 +11486,7 @@
                 </a:solidFill>
                 <a:latin typeface="Calibri"/>
               </a:rPr>
-              <a:t>Teoria Core</a:t>
+              <a:t>Un wireframe, un mockup y un prototipo no son tres nombres elegantes... (1/2)</a:t>
             </a:r>
           </a:p>
         </p:txBody>
@@ -7708,7 +11525,7 @@
                 </a:solidFill>
                 <a:latin typeface="Calibri"/>
               </a:rPr>
-              <a:t>–   Un wireframe, un mockup y un prototipo no son tres nombres elegantes para lo mismo: son tres momentos distintos…</a:t>
+              <a:t>–   Un wireframe, un mockup y un prototipo no son tres nombres elegantes para lo mismo: son tres momentos distintos del diseño y cada uno responde una pregunta diferente.</a:t>
             </a:r>
           </a:p>
           <a:p>
@@ -7724,7 +11541,7 @@
                 </a:solidFill>
                 <a:latin typeface="Calibri"/>
               </a:rPr>
-              <a:t>–   Los principios de usabilidad no son gusto ni estetica, son reglas observables que se pueden verificar sobre el…</a:t>
+              <a:t>–   El wireframe es el esqueleto en gris, cajas, lineas y etiquetas, sin colores ni logos, y responde a la pregunta que informacion va en esta pantalla y en que orden la va a leer la persona.</a:t>
             </a:r>
           </a:p>
           <a:p>
@@ -7740,7 +11557,7 @@
                 </a:solidFill>
                 <a:latin typeface="Calibri"/>
               </a:rPr>
-              <a:t>–   Una pantalla suelta no sirve para nada; lo que se diseña es un flujo de tarea completo, es decir el recorrido que…</a:t>
+              <a:t>–   El mockup ya es la foto fija de como se vera: tipografia, color, iconos, el logo de la clinica Huellitas, los espacios reales entre elementos; responde a la pregunta como se ve.</a:t>
             </a:r>
           </a:p>
           <a:p>
@@ -7756,7 +11573,7 @@
                 </a:solidFill>
                 <a:latin typeface="Calibri"/>
               </a:rPr>
-              <a:t>–   La interfaz no se inventa: se deriva de los artefactos que el equipo ya construyo en las clases anteriores</a:t>
+              <a:t>–   El prototipo es el mockup con clic, es decir uno oprime Guardar y la herramienta lo lleva a otra pantalla; responde a la pregunta como se siente usarlo.</a:t>
             </a:r>
           </a:p>
           <a:p>
@@ -7772,7 +11589,7 @@
                 </a:solidFill>
                 <a:latin typeface="Calibri"/>
               </a:rPr>
-              <a:t>–   Una interfaz se puede evaluar sin programarla, y esa es una de las habilidades mas valiosas que se lleva un…</a:t>
+              <a:t>–   En VetCare esto se traduce asi: el wireframe de Registrar mascota se hace en diez minutos en Excalidraw y solo dice que arriba va la busqueda del dueño, en el centro los datos de la mascota y abajo el boton Guardar</a:t>
             </a:r>
           </a:p>
         </p:txBody>
@@ -7953,141 +11770,21 @@
                 </a:solidFill>
                 <a:latin typeface="Calibri"/>
               </a:rPr>
-              <a:t>Flujo de tarea de VetCare en Mermaid: registrar mascota y buscar expediente con caminos alternos</a:t>
-            </a:r>
-          </a:p>
-        </p:txBody>
-      </p:sp>
-      <p:sp>
-        <p:nvSpPr>
-          <p:cNvPr id="5" name="Rounded Rectangle 4"/>
-          <p:cNvSpPr/>
-          <p:nvPr/>
-        </p:nvSpPr>
-        <p:spPr>
-          <a:xfrm>
-            <a:off x="457200" y="1261872"/>
-            <a:ext cx="11277295" cy="4773168"/>
-          </a:xfrm>
-          <a:prstGeom prst="roundRect">
-            <a:avLst>
-              <a:gd name="adj" fmla="val 12000"/>
-            </a:avLst>
-          </a:prstGeom>
-          <a:solidFill>
-            <a:srgbClr val="1E2A38"/>
-          </a:solidFill>
-          <a:ln>
-            <a:noFill/>
-          </a:ln>
-        </p:spPr>
-        <p:style>
-          <a:lnRef idx="1">
-            <a:schemeClr val="accent1"/>
-          </a:lnRef>
-          <a:fillRef idx="3">
-            <a:schemeClr val="accent1"/>
-          </a:fillRef>
-          <a:effectRef idx="2">
-            <a:schemeClr val="accent1"/>
-          </a:effectRef>
-          <a:fontRef idx="minor">
-            <a:schemeClr val="lt1"/>
-          </a:fontRef>
-        </p:style>
-        <p:txBody>
-          <a:bodyPr rtlCol="0" anchor="ctr"/>
-          <a:lstStyle/>
-          <a:p>
-            <a:pPr algn="ctr"/>
-          </a:p>
-        </p:txBody>
-      </p:sp>
-      <p:sp>
-        <p:nvSpPr>
-          <p:cNvPr id="6" name="Rectangle 5"/>
-          <p:cNvSpPr/>
-          <p:nvPr/>
-        </p:nvSpPr>
-        <p:spPr>
-          <a:xfrm>
-            <a:off x="457200" y="1261872"/>
-            <a:ext cx="11277295" cy="320040"/>
-          </a:xfrm>
-          <a:prstGeom prst="rect">
-            <a:avLst/>
-          </a:prstGeom>
-          <a:solidFill>
-            <a:srgbClr val="095292"/>
-          </a:solidFill>
-          <a:ln>
-            <a:noFill/>
-          </a:ln>
-        </p:spPr>
-        <p:style>
-          <a:lnRef idx="1">
-            <a:schemeClr val="accent1"/>
-          </a:lnRef>
-          <a:fillRef idx="3">
-            <a:schemeClr val="accent1"/>
-          </a:fillRef>
-          <a:effectRef idx="2">
-            <a:schemeClr val="accent1"/>
-          </a:effectRef>
-          <a:fontRef idx="minor">
-            <a:schemeClr val="lt1"/>
-          </a:fontRef>
-        </p:style>
-        <p:txBody>
-          <a:bodyPr rtlCol="0" anchor="ctr"/>
-          <a:lstStyle/>
-          <a:p>
-            <a:pPr algn="ctr"/>
-          </a:p>
-        </p:txBody>
-      </p:sp>
-      <p:sp>
-        <p:nvSpPr>
-          <p:cNvPr id="7" name="TextBox 6"/>
+              <a:t>Un wireframe, un mockup y un prototipo no son tres nombres elegantes... (2/2)</a:t>
+            </a:r>
+          </a:p>
+        </p:txBody>
+      </p:sp>
+      <p:sp>
+        <p:nvSpPr>
+          <p:cNvPr id="5" name="TextBox 4"/>
           <p:cNvSpPr txBox="1"/>
           <p:nvPr/>
         </p:nvSpPr>
         <p:spPr>
           <a:xfrm>
-            <a:off x="685800" y="1307592"/>
-            <a:ext cx="10820095" cy="256032"/>
-          </a:xfrm>
-          <a:prstGeom prst="rect">
-            <a:avLst/>
-          </a:prstGeom>
-          <a:noFill/>
-        </p:spPr>
-        <p:txBody>
-          <a:bodyPr wrap="square" anchor="ctr"/>
-          <a:lstStyle/>
-          <a:p>
-            <a:r>
-              <a:rPr sz="1000" b="1" i="0">
-                <a:solidFill>
-                  <a:srgbClr val="269CCB"/>
-                </a:solidFill>
-                <a:latin typeface="Calibri"/>
-              </a:rPr>
-              <a:t>● ● ●</a:t>
-            </a:r>
-          </a:p>
-        </p:txBody>
-      </p:sp>
-      <p:sp>
-        <p:nvSpPr>
-          <p:cNvPr id="8" name="TextBox 7"/>
-          <p:cNvSpPr txBox="1"/>
-          <p:nvPr/>
-        </p:nvSpPr>
-        <p:spPr>
-          <a:xfrm>
-            <a:off x="777240" y="1719072"/>
-            <a:ext cx="10637215" cy="4133087"/>
+            <a:off x="457200" y="1170432"/>
+            <a:ext cx="11277295" cy="5230368"/>
           </a:xfrm>
           <a:prstGeom prst="rect">
             <a:avLst/>
@@ -8102,267 +11799,56 @@
           <a:p>
             <a:pPr>
               <a:spcAft>
-                <a:spcPts val="400"/>
+                <a:spcPts val="800"/>
               </a:spcAft>
             </a:pPr>
             <a:r>
-              <a:rPr sz="1400" b="0" i="0">
-                <a:solidFill>
-                  <a:srgbClr val="FFFFFF"/>
-                </a:solidFill>
-                <a:latin typeface="Calibri"/>
-              </a:rPr>
-              <a:t>flowchart TD</a:t>
+              <a:rPr sz="2000" b="0" i="0">
+                <a:solidFill>
+                  <a:srgbClr val="333333"/>
+                </a:solidFill>
+                <a:latin typeface="Calibri"/>
+              </a:rPr>
+              <a:t>–   El mockup de esa misma pantalla ya usa el verde de la clinica y una tipografia grande porque la recepcionista tiene el monitor lejos; y el prototipo permite que el docente, en la sustentacion, oprima Guardar y aterrice en la ficha del paciente recien creado.</a:t>
             </a:r>
           </a:p>
           <a:p>
             <a:pPr>
               <a:spcAft>
-                <a:spcPts val="400"/>
+                <a:spcPts val="800"/>
               </a:spcAft>
             </a:pPr>
             <a:r>
-              <a:rPr sz="1400" b="0" i="0">
-                <a:solidFill>
-                  <a:srgbClr val="FFFFFF"/>
-                </a:solidFill>
-                <a:latin typeface="Calibri"/>
-              </a:rPr>
-              <a:t>  A[Recepcion: llega el dueño con su mascota] --&gt; B{Dueño ya registrado?}</a:t>
+              <a:rPr sz="2000" b="0" i="0">
+                <a:solidFill>
+                  <a:srgbClr val="333333"/>
+                </a:solidFill>
+                <a:latin typeface="Calibri"/>
+              </a:rPr>
+              <a:t>–   La razon de hacerlo en ese orden es puramente economica: mover una caja en un wireframe cuesta treinta segundos, mover esa misma caja cuando ya esta programada en Programacion II cuesta dos sesiones de trabajo.</a:t>
             </a:r>
           </a:p>
           <a:p>
             <a:pPr>
               <a:spcAft>
-                <a:spcPts val="400"/>
+                <a:spcPts val="800"/>
               </a:spcAft>
             </a:pPr>
             <a:r>
-              <a:rPr sz="1400" b="0" i="0">
-                <a:solidFill>
-                  <a:srgbClr val="FFFFFF"/>
-                </a:solidFill>
-                <a:latin typeface="Calibri"/>
-              </a:rPr>
-              <a:t>  B -- No --&gt; C[Pantalla Registrar dueño]</a:t>
-            </a:r>
-          </a:p>
-          <a:p>
-            <a:pPr>
-              <a:spcAft>
-                <a:spcPts val="400"/>
-              </a:spcAft>
-            </a:pPr>
-            <a:r>
-              <a:rPr sz="1400" b="0" i="0">
-                <a:solidFill>
-                  <a:srgbClr val="FFFFFF"/>
-                </a:solidFill>
-                <a:latin typeface="Calibri"/>
-              </a:rPr>
-              <a:t>  B -- Si --&gt; D[Pantalla Registrar mascota]</a:t>
-            </a:r>
-          </a:p>
-          <a:p>
-            <a:pPr>
-              <a:spcAft>
-                <a:spcPts val="400"/>
-              </a:spcAft>
-            </a:pPr>
-            <a:r>
-              <a:rPr sz="1400" b="0" i="0">
-                <a:solidFill>
-                  <a:srgbClr val="FFFFFF"/>
-                </a:solidFill>
-                <a:latin typeface="Calibri"/>
-              </a:rPr>
-              <a:t>  C --&gt; D</a:t>
-            </a:r>
-          </a:p>
-          <a:p>
-            <a:pPr>
-              <a:spcAft>
-                <a:spcPts val="400"/>
-              </a:spcAft>
-            </a:pPr>
-            <a:r>
-              <a:rPr sz="1400" b="0" i="0">
-                <a:solidFill>
-                  <a:srgbClr val="FFFFFF"/>
-                </a:solidFill>
-                <a:latin typeface="Calibri"/>
-              </a:rPr>
-              <a:t>  D --&gt; E{Campos obligatorios completos?}</a:t>
-            </a:r>
-          </a:p>
-          <a:p>
-            <a:pPr>
-              <a:spcAft>
-                <a:spcPts val="400"/>
-              </a:spcAft>
-            </a:pPr>
-            <a:r>
-              <a:rPr sz="1400" b="0" i="0">
-                <a:solidFill>
-                  <a:srgbClr val="FFFFFF"/>
-                </a:solidFill>
-                <a:latin typeface="Calibri"/>
-              </a:rPr>
-              <a:t>  E -- No --&gt; F[Guardar deshabilitado + ayuda en el campo faltante]</a:t>
-            </a:r>
-          </a:p>
-          <a:p>
-            <a:pPr>
-              <a:spcAft>
-                <a:spcPts val="400"/>
-              </a:spcAft>
-            </a:pPr>
-            <a:r>
-              <a:rPr sz="1400" b="0" i="0">
-                <a:solidFill>
-                  <a:srgbClr val="FFFFFF"/>
-                </a:solidFill>
-                <a:latin typeface="Calibri"/>
-              </a:rPr>
-              <a:t>  F --&gt; D</a:t>
-            </a:r>
-          </a:p>
-          <a:p>
-            <a:pPr>
-              <a:spcAft>
-                <a:spcPts val="400"/>
-              </a:spcAft>
-            </a:pPr>
-            <a:r>
-              <a:rPr sz="1400" b="0" i="0">
-                <a:solidFill>
-                  <a:srgbClr val="FFFFFF"/>
-                </a:solidFill>
-                <a:latin typeface="Calibri"/>
-              </a:rPr>
-              <a:t>  E -- Si --&gt; G[Confirmacion: Ficha guardada, codigo M-0421]</a:t>
-            </a:r>
-          </a:p>
-          <a:p>
-            <a:pPr>
-              <a:spcAft>
-                <a:spcPts val="400"/>
-              </a:spcAft>
-            </a:pPr>
-            <a:r>
-              <a:rPr sz="1400" b="0" i="0">
-                <a:solidFill>
-                  <a:srgbClr val="FFFFFF"/>
-                </a:solidFill>
-                <a:latin typeface="Calibri"/>
-              </a:rPr>
-              <a:t>  G --&gt; H[Pantalla Buscar expediente]</a:t>
-            </a:r>
-          </a:p>
-          <a:p>
-            <a:pPr>
-              <a:spcAft>
-                <a:spcPts val="400"/>
-              </a:spcAft>
-            </a:pPr>
-            <a:r>
-              <a:rPr sz="1400" b="0" i="0">
-                <a:solidFill>
-                  <a:srgbClr val="FFFFFF"/>
-                </a:solidFill>
-                <a:latin typeface="Calibri"/>
-              </a:rPr>
-              <a:t>  H --&gt; I{Cuantos resultados?}</a:t>
-            </a:r>
-          </a:p>
-          <a:p>
-            <a:pPr>
-              <a:spcAft>
-                <a:spcPts val="400"/>
-              </a:spcAft>
-            </a:pPr>
-            <a:r>
-              <a:rPr sz="1400" b="0" i="0">
-                <a:solidFill>
-                  <a:srgbClr val="FFFFFF"/>
-                </a:solidFill>
-                <a:latin typeface="Calibri"/>
-              </a:rPr>
-              <a:t>  I -- Cero --&gt; J[Mensaje sin resultados + Buscar por otro criterio]</a:t>
-            </a:r>
-          </a:p>
-          <a:p>
-            <a:pPr>
-              <a:spcAft>
-                <a:spcPts val="400"/>
-              </a:spcAft>
-            </a:pPr>
-            <a:r>
-              <a:rPr sz="1400" b="0" i="0">
-                <a:solidFill>
-                  <a:srgbClr val="FFFFFF"/>
-                </a:solidFill>
-                <a:latin typeface="Calibri"/>
-              </a:rPr>
-              <a:t>  I -- Varios --&gt; K[Lista con especie, edad y dueño para desambiguar]</a:t>
-            </a:r>
-          </a:p>
-          <a:p>
-            <a:pPr>
-              <a:spcAft>
-                <a:spcPts val="400"/>
-              </a:spcAft>
-            </a:pPr>
-            <a:r>
-              <a:rPr sz="1400" b="0" i="0">
-                <a:solidFill>
-                  <a:srgbClr val="FFFFFF"/>
-                </a:solidFill>
-                <a:latin typeface="Calibri"/>
-              </a:rPr>
-              <a:t>  I -- Uno --&gt; L[Ficha del paciente]</a:t>
-            </a:r>
-          </a:p>
-        </p:txBody>
-      </p:sp>
-      <p:sp>
-        <p:nvSpPr>
-          <p:cNvPr id="9" name="TextBox 8"/>
-          <p:cNvSpPr txBox="1"/>
-          <p:nvPr/>
-        </p:nvSpPr>
-        <p:spPr>
-          <a:xfrm>
-            <a:off x="457200" y="6080760"/>
-            <a:ext cx="11277295" cy="320040"/>
-          </a:xfrm>
-          <a:prstGeom prst="rect">
-            <a:avLst/>
-          </a:prstGeom>
-          <a:noFill/>
-        </p:spPr>
-        <p:txBody>
-          <a:bodyPr wrap="square">
-            <a:spAutoFit/>
-          </a:bodyPr>
-          <a:lstStyle/>
-          <a:p>
-            <a:pPr algn="ctr"/>
-            <a:r>
-              <a:rPr sz="1200" b="0" i="1">
-                <a:solidFill>
-                  <a:srgbClr val="666666"/>
-                </a:solidFill>
-                <a:latin typeface="Calibri"/>
-              </a:rPr>
-              <a:t>La interfaz no son pantallas sueltas: es un camino con desvios, y los desvios son los que hay que diseñar.</a:t>
-            </a:r>
-          </a:p>
-        </p:txBody>
-      </p:sp>
-      <p:sp>
-        <p:nvSpPr>
-          <p:cNvPr id="10" name="TextBox 9"/>
+              <a:rPr sz="2000" b="0" i="0">
+                <a:solidFill>
+                  <a:srgbClr val="333333"/>
+                </a:solidFill>
+                <a:latin typeface="Calibri"/>
+              </a:rPr>
+              <a:t>–   Diseñar es equivocarse barato.</a:t>
+            </a:r>
+          </a:p>
+        </p:txBody>
+      </p:sp>
+      <p:sp>
+        <p:nvSpPr>
+          <p:cNvPr id="6" name="TextBox 5"/>
           <p:cNvSpPr txBox="1"/>
           <p:nvPr/>
         </p:nvSpPr>
@@ -8536,7 +12022,7 @@
                 </a:solidFill>
                 <a:latin typeface="Calibri"/>
               </a:rPr>
-              <a:t>Demo del dia</a:t>
+              <a:t>Los principios de usabilidad no son gusto ni estetica, son reglas... (1/2)</a:t>
             </a:r>
           </a:p>
         </p:txBody>
@@ -8575,25 +12061,7 @@
                 </a:solidFill>
                 <a:latin typeface="Calibri"/>
               </a:rPr>
-              <a:t>–   </a:t>
-            </a:r>
-            <a:r>
-              <a:rPr sz="2000" b="1" i="0">
-                <a:solidFill>
-                  <a:srgbClr val="333333"/>
-                </a:solidFill>
-                <a:latin typeface="Calibri"/>
-              </a:rPr>
-              <a:t>Herramienta:</a:t>
-            </a:r>
-            <a:r>
-              <a:rPr sz="2000" b="0" i="0">
-                <a:solidFill>
-                  <a:srgbClr val="333333"/>
-                </a:solidFill>
-                <a:latin typeface="Calibri"/>
-              </a:rPr>
-              <a:t> Figma o Penpot · Excalidraw · Google Docs</a:t>
+              <a:t>–   Los principios de usabilidad no son gusto ni estetica, son reglas observables que se pueden verificar sobre el papel.</a:t>
             </a:r>
           </a:p>
           <a:p>
@@ -8609,25 +12077,7 @@
                 </a:solidFill>
                 <a:latin typeface="Calibri"/>
               </a:rPr>
-              <a:t>–   </a:t>
-            </a:r>
-            <a:r>
-              <a:rPr sz="2000" b="1" i="0">
-                <a:solidFill>
-                  <a:srgbClr val="333333"/>
-                </a:solidFill>
-                <a:latin typeface="Calibri"/>
-              </a:rPr>
-              <a:t>Demo:</a:t>
-            </a:r>
-            <a:r>
-              <a:rPr sz="2000" b="0" i="0">
-                <a:solidFill>
-                  <a:srgbClr val="333333"/>
-                </a:solidFill>
-                <a:latin typeface="Calibri"/>
-              </a:rPr>
-              <a:t> El docente dibuja en vivo el wireframe de Registrar mascota en Penpot, le pone tres anotaciones numeradas y lo conecta con Buscar expediente para que la clase vea en la misma pantalla la diferencia entre wireframe, mockup y prototipo.</a:t>
+              <a:t>–   Visibilidad del estado del sistema significa que la persona siempre sepa que esta pasando: si la recepcionista oprime Guardar y la pantalla no dice nada, ella va a oprimir Guardar otra vez y VetCare va a terminar con la mascota registrada dos veces</a:t>
             </a:r>
           </a:p>
           <a:p>
@@ -8643,7 +12093,39 @@
                 </a:solidFill>
                 <a:latin typeface="Calibri"/>
               </a:rPr>
-              <a:t>–   Mismo dominio VetCare — no otro ejemplo. Aqui se diseña, no se programa.</a:t>
+              <a:t>–   Por eso el diseño debe incluir el mensaje concreto Ficha guardada, codigo M-0421, y el boton debe quedar deshabilitado mientras se guarda.</a:t>
+            </a:r>
+          </a:p>
+          <a:p>
+            <a:pPr>
+              <a:spcAft>
+                <a:spcPts val="800"/>
+              </a:spcAft>
+            </a:pPr>
+            <a:r>
+              <a:rPr sz="2000" b="0" i="0">
+                <a:solidFill>
+                  <a:srgbClr val="333333"/>
+                </a:solidFill>
+                <a:latin typeface="Calibri"/>
+              </a:rPr>
+              <a:t>–   Prevencion de errores significa que es mejor impedir el error que ponerle un mensaje bonito despues: la fecha de nacimiento se escoge en un calendario y no se teclea</a:t>
+            </a:r>
+          </a:p>
+          <a:p>
+            <a:pPr>
+              <a:spcAft>
+                <a:spcPts val="800"/>
+              </a:spcAft>
+            </a:pPr>
+            <a:r>
+              <a:rPr sz="2000" b="0" i="0">
+                <a:solidFill>
+                  <a:srgbClr val="333333"/>
+                </a:solidFill>
+                <a:latin typeface="Calibri"/>
+              </a:rPr>
+              <a:t>–   La especie se elige de una lista cerrada con Canino, Felino y Otro, y el sistema pide confirmacion antes de eliminar una historia clinica.</a:t>
             </a:r>
           </a:p>
         </p:txBody>
@@ -8718,7 +12200,7 @@
         <p:spPr>
           <a:xfrm>
             <a:off x="0" y="0"/>
-            <a:ext cx="12191695" cy="1170432"/>
+            <a:ext cx="12191695" cy="960120"/>
           </a:xfrm>
           <a:prstGeom prst="rect">
             <a:avLst/>
@@ -8760,7 +12242,7 @@
         </p:nvSpPr>
         <p:spPr>
           <a:xfrm>
-            <a:off x="0" y="1170432"/>
+            <a:off x="0" y="960120"/>
             <a:ext cx="12191695" cy="41148"/>
           </a:xfrm>
           <a:prstGeom prst="rect">
@@ -8804,7 +12286,7 @@
         <p:spPr>
           <a:xfrm>
             <a:off x="457200" y="164592"/>
-            <a:ext cx="11277295" cy="384048"/>
+            <a:ext cx="11277295" cy="502920"/>
           </a:xfrm>
           <a:prstGeom prst="rect">
             <a:avLst/>
@@ -8824,7 +12306,7 @@
                 </a:solidFill>
                 <a:latin typeface="Calibri"/>
               </a:rPr>
-              <a:t>Herramientas de hoy</a:t>
+              <a:t>Los principios de usabilidad no son gusto ni estetica, son reglas... (2/2)</a:t>
             </a:r>
           </a:p>
         </p:txBody>
@@ -8837,8 +12319,8 @@
         </p:nvSpPr>
         <p:spPr>
           <a:xfrm>
-            <a:off x="457200" y="566928"/>
-            <a:ext cx="11277295" cy="411480"/>
+            <a:off x="457200" y="1170432"/>
+            <a:ext cx="11277295" cy="5230368"/>
           </a:xfrm>
           <a:prstGeom prst="rect">
             <a:avLst/>
@@ -8851,1149 +12333,74 @@
           </a:bodyPr>
           <a:lstStyle/>
           <a:p>
-            <a:r>
-              <a:rPr sz="1400" b="0" i="0">
-                <a:solidFill>
-                  <a:srgbClr val="B8D8EE"/>
-                </a:solidFill>
-                <a:latin typeface="Calibri"/>
-              </a:rPr>
-              <a:t>Gratis · funcionan en el navegador</a:t>
-            </a:r>
-          </a:p>
-        </p:txBody>
-      </p:sp>
-      <p:sp>
-        <p:nvSpPr>
-          <p:cNvPr id="6" name="Rounded Rectangle 5"/>
-          <p:cNvSpPr/>
-          <p:nvPr/>
-        </p:nvSpPr>
-        <p:spPr>
-          <a:xfrm>
-            <a:off x="457200" y="1591056"/>
-            <a:ext cx="3624986" cy="2299716"/>
-          </a:xfrm>
-          <a:prstGeom prst="roundRect">
-            <a:avLst>
-              <a:gd name="adj" fmla="val 12000"/>
-            </a:avLst>
-          </a:prstGeom>
-          <a:solidFill>
-            <a:srgbClr val="F2F2F2"/>
-          </a:solidFill>
-          <a:ln>
-            <a:noFill/>
-          </a:ln>
-        </p:spPr>
-        <p:style>
-          <a:lnRef idx="1">
-            <a:schemeClr val="accent1"/>
-          </a:lnRef>
-          <a:fillRef idx="3">
-            <a:schemeClr val="accent1"/>
-          </a:fillRef>
-          <a:effectRef idx="2">
-            <a:schemeClr val="accent1"/>
-          </a:effectRef>
-          <a:fontRef idx="minor">
-            <a:schemeClr val="lt1"/>
-          </a:fontRef>
-        </p:style>
-        <p:txBody>
-          <a:bodyPr rtlCol="0" anchor="ctr"/>
-          <a:lstStyle/>
-          <a:p>
-            <a:pPr algn="ctr"/>
-          </a:p>
-        </p:txBody>
-      </p:sp>
-      <p:sp>
-        <p:nvSpPr>
-          <p:cNvPr id="7" name="Rectangle 6"/>
-          <p:cNvSpPr/>
-          <p:nvPr/>
-        </p:nvSpPr>
-        <p:spPr>
-          <a:xfrm>
-            <a:off x="457200" y="1591056"/>
-            <a:ext cx="3624986" cy="64008"/>
-          </a:xfrm>
-          <a:prstGeom prst="rect">
-            <a:avLst/>
-          </a:prstGeom>
-          <a:solidFill>
-            <a:srgbClr val="095292"/>
-          </a:solidFill>
-          <a:ln>
-            <a:noFill/>
-          </a:ln>
-        </p:spPr>
-        <p:style>
-          <a:lnRef idx="1">
-            <a:schemeClr val="accent1"/>
-          </a:lnRef>
-          <a:fillRef idx="3">
-            <a:schemeClr val="accent1"/>
-          </a:fillRef>
-          <a:effectRef idx="2">
-            <a:schemeClr val="accent1"/>
-          </a:effectRef>
-          <a:fontRef idx="minor">
-            <a:schemeClr val="lt1"/>
-          </a:fontRef>
-        </p:style>
-        <p:txBody>
-          <a:bodyPr rtlCol="0" anchor="ctr"/>
-          <a:lstStyle/>
-          <a:p>
-            <a:pPr algn="ctr"/>
-          </a:p>
-        </p:txBody>
-      </p:sp>
-      <p:sp>
-        <p:nvSpPr>
-          <p:cNvPr id="8" name="Rectangle 7"/>
-          <p:cNvSpPr/>
-          <p:nvPr/>
-        </p:nvSpPr>
-        <p:spPr>
-          <a:xfrm>
-            <a:off x="457200" y="1655064"/>
-            <a:ext cx="3624986" cy="27432"/>
-          </a:xfrm>
-          <a:prstGeom prst="rect">
-            <a:avLst/>
-          </a:prstGeom>
-          <a:solidFill>
-            <a:srgbClr val="FFD000"/>
-          </a:solidFill>
-          <a:ln>
-            <a:noFill/>
-          </a:ln>
-        </p:spPr>
-        <p:style>
-          <a:lnRef idx="1">
-            <a:schemeClr val="accent1"/>
-          </a:lnRef>
-          <a:fillRef idx="3">
-            <a:schemeClr val="accent1"/>
-          </a:fillRef>
-          <a:effectRef idx="2">
-            <a:schemeClr val="accent1"/>
-          </a:effectRef>
-          <a:fontRef idx="minor">
-            <a:schemeClr val="lt1"/>
-          </a:fontRef>
-        </p:style>
-        <p:txBody>
-          <a:bodyPr rtlCol="0" anchor="ctr"/>
-          <a:lstStyle/>
-          <a:p>
-            <a:pPr algn="ctr"/>
-          </a:p>
-        </p:txBody>
-      </p:sp>
-      <p:pic>
-        <p:nvPicPr>
-          <p:cNvPr id="9" name="Picture 8" descr="excalidraw.png"/>
-          <p:cNvPicPr>
-            <a:picLocks noChangeAspect="1"/>
-          </p:cNvPicPr>
-          <p:nvPr/>
-        </p:nvPicPr>
-        <p:blipFill>
-          <a:blip r:embed="rId2"/>
-          <a:stretch>
-            <a:fillRect/>
-          </a:stretch>
-        </p:blipFill>
-        <p:spPr>
-          <a:xfrm>
-            <a:off x="1659331" y="1847087"/>
-            <a:ext cx="1220724" cy="1220724"/>
-          </a:xfrm>
-          <a:prstGeom prst="rect">
-            <a:avLst/>
-          </a:prstGeom>
-        </p:spPr>
-      </p:pic>
-      <p:sp>
-        <p:nvSpPr>
-          <p:cNvPr id="10" name="TextBox 9"/>
-          <p:cNvSpPr txBox="1"/>
-          <p:nvPr/>
-        </p:nvSpPr>
-        <p:spPr>
-          <a:xfrm>
-            <a:off x="530352" y="3159251"/>
-            <a:ext cx="3478682" cy="621792"/>
-          </a:xfrm>
-          <a:prstGeom prst="rect">
-            <a:avLst/>
-          </a:prstGeom>
-          <a:noFill/>
-        </p:spPr>
-        <p:txBody>
-          <a:bodyPr wrap="square" anchor="t"/>
-          <a:lstStyle/>
-          <a:p>
-            <a:pPr algn="ctr"/>
-            <a:r>
-              <a:rPr sz="1300" b="1" i="0">
-                <a:solidFill>
-                  <a:srgbClr val="095292"/>
-                </a:solidFill>
-                <a:latin typeface="Calibri"/>
-              </a:rPr>
-              <a:t>Excalidraw</a:t>
-            </a:r>
-          </a:p>
-          <a:p>
-            <a:pPr algn="ctr">
-              <a:spcBef>
-                <a:spcPts val="200"/>
-              </a:spcBef>
+            <a:pPr>
+              <a:spcAft>
+                <a:spcPts val="800"/>
+              </a:spcAft>
             </a:pPr>
             <a:r>
-              <a:rPr sz="1000" b="0" i="0">
-                <a:solidFill>
-                  <a:srgbClr val="666666"/>
-                </a:solidFill>
-                <a:latin typeface="Calibri"/>
-              </a:rPr>
-              <a:t>Bocetos rapidos a mano alzada</a:t>
-            </a:r>
-          </a:p>
-        </p:txBody>
-      </p:sp>
-      <p:sp>
-        <p:nvSpPr>
-          <p:cNvPr id="11" name="Rounded Rectangle 10"/>
-          <p:cNvSpPr/>
-          <p:nvPr/>
-        </p:nvSpPr>
-        <p:spPr>
-          <a:xfrm>
-            <a:off x="4283354" y="1591056"/>
-            <a:ext cx="3624986" cy="2299716"/>
-          </a:xfrm>
-          <a:prstGeom prst="roundRect">
-            <a:avLst>
-              <a:gd name="adj" fmla="val 12000"/>
-            </a:avLst>
-          </a:prstGeom>
-          <a:solidFill>
-            <a:srgbClr val="F2F2F2"/>
-          </a:solidFill>
-          <a:ln>
-            <a:noFill/>
-          </a:ln>
-        </p:spPr>
-        <p:style>
-          <a:lnRef idx="1">
-            <a:schemeClr val="accent1"/>
-          </a:lnRef>
-          <a:fillRef idx="3">
-            <a:schemeClr val="accent1"/>
-          </a:fillRef>
-          <a:effectRef idx="2">
-            <a:schemeClr val="accent1"/>
-          </a:effectRef>
-          <a:fontRef idx="minor">
-            <a:schemeClr val="lt1"/>
-          </a:fontRef>
-        </p:style>
-        <p:txBody>
-          <a:bodyPr rtlCol="0" anchor="ctr"/>
-          <a:lstStyle/>
-          <a:p>
-            <a:pPr algn="ctr"/>
-          </a:p>
-        </p:txBody>
-      </p:sp>
-      <p:sp>
-        <p:nvSpPr>
-          <p:cNvPr id="12" name="Rectangle 11"/>
-          <p:cNvSpPr/>
-          <p:nvPr/>
-        </p:nvSpPr>
-        <p:spPr>
-          <a:xfrm>
-            <a:off x="4283354" y="1591056"/>
-            <a:ext cx="3624986" cy="64008"/>
-          </a:xfrm>
-          <a:prstGeom prst="rect">
-            <a:avLst/>
-          </a:prstGeom>
-          <a:solidFill>
-            <a:srgbClr val="095292"/>
-          </a:solidFill>
-          <a:ln>
-            <a:noFill/>
-          </a:ln>
-        </p:spPr>
-        <p:style>
-          <a:lnRef idx="1">
-            <a:schemeClr val="accent1"/>
-          </a:lnRef>
-          <a:fillRef idx="3">
-            <a:schemeClr val="accent1"/>
-          </a:fillRef>
-          <a:effectRef idx="2">
-            <a:schemeClr val="accent1"/>
-          </a:effectRef>
-          <a:fontRef idx="minor">
-            <a:schemeClr val="lt1"/>
-          </a:fontRef>
-        </p:style>
-        <p:txBody>
-          <a:bodyPr rtlCol="0" anchor="ctr"/>
-          <a:lstStyle/>
-          <a:p>
-            <a:pPr algn="ctr"/>
-          </a:p>
-        </p:txBody>
-      </p:sp>
-      <p:sp>
-        <p:nvSpPr>
-          <p:cNvPr id="13" name="Rectangle 12"/>
-          <p:cNvSpPr/>
-          <p:nvPr/>
-        </p:nvSpPr>
-        <p:spPr>
-          <a:xfrm>
-            <a:off x="4283354" y="1655064"/>
-            <a:ext cx="3624986" cy="27432"/>
-          </a:xfrm>
-          <a:prstGeom prst="rect">
-            <a:avLst/>
-          </a:prstGeom>
-          <a:solidFill>
-            <a:srgbClr val="FFD000"/>
-          </a:solidFill>
-          <a:ln>
-            <a:noFill/>
-          </a:ln>
-        </p:spPr>
-        <p:style>
-          <a:lnRef idx="1">
-            <a:schemeClr val="accent1"/>
-          </a:lnRef>
-          <a:fillRef idx="3">
-            <a:schemeClr val="accent1"/>
-          </a:fillRef>
-          <a:effectRef idx="2">
-            <a:schemeClr val="accent1"/>
-          </a:effectRef>
-          <a:fontRef idx="minor">
-            <a:schemeClr val="lt1"/>
-          </a:fontRef>
-        </p:style>
-        <p:txBody>
-          <a:bodyPr rtlCol="0" anchor="ctr"/>
-          <a:lstStyle/>
-          <a:p>
-            <a:pPr algn="ctr"/>
-          </a:p>
-        </p:txBody>
-      </p:sp>
-      <p:pic>
-        <p:nvPicPr>
-          <p:cNvPr id="14" name="Picture 13" descr="google_docs.png"/>
-          <p:cNvPicPr>
-            <a:picLocks noChangeAspect="1"/>
-          </p:cNvPicPr>
-          <p:nvPr/>
-        </p:nvPicPr>
-        <p:blipFill>
-          <a:blip r:embed="rId3"/>
-          <a:stretch>
-            <a:fillRect/>
-          </a:stretch>
-        </p:blipFill>
-        <p:spPr>
-          <a:xfrm>
-            <a:off x="5485485" y="1847087"/>
-            <a:ext cx="1220724" cy="1220724"/>
-          </a:xfrm>
-          <a:prstGeom prst="rect">
-            <a:avLst/>
-          </a:prstGeom>
-        </p:spPr>
-      </p:pic>
-      <p:sp>
-        <p:nvSpPr>
-          <p:cNvPr id="15" name="TextBox 14"/>
-          <p:cNvSpPr txBox="1"/>
-          <p:nvPr/>
-        </p:nvSpPr>
-        <p:spPr>
-          <a:xfrm>
-            <a:off x="4356506" y="3159251"/>
-            <a:ext cx="3478682" cy="621792"/>
-          </a:xfrm>
-          <a:prstGeom prst="rect">
-            <a:avLst/>
-          </a:prstGeom>
-          <a:noFill/>
-        </p:spPr>
-        <p:txBody>
-          <a:bodyPr wrap="square" anchor="t"/>
-          <a:lstStyle/>
-          <a:p>
-            <a:pPr algn="ctr"/>
-            <a:r>
-              <a:rPr sz="1300" b="1" i="0">
-                <a:solidFill>
-                  <a:srgbClr val="095292"/>
-                </a:solidFill>
-                <a:latin typeface="Calibri"/>
-              </a:rPr>
-              <a:t>google docs</a:t>
-            </a:r>
-          </a:p>
-          <a:p>
-            <a:pPr algn="ctr">
-              <a:spcBef>
-                <a:spcPts val="200"/>
-              </a:spcBef>
+              <a:rPr sz="2000" b="0" i="0">
+                <a:solidFill>
+                  <a:srgbClr val="333333"/>
+                </a:solidFill>
+                <a:latin typeface="Calibri"/>
+              </a:rPr>
+              <a:t>–   Consistencia significa que la misma accion se llame igual y viva en el mismo lugar en todas las pantallas: si en Registrar mascota el boton principal se llama Guardar y esta abajo a la derecha</a:t>
+            </a:r>
+          </a:p>
+          <a:p>
+            <a:pPr>
+              <a:spcAft>
+                <a:spcPts val="800"/>
+              </a:spcAft>
             </a:pPr>
             <a:r>
-              <a:rPr sz="1000" b="0" i="0">
-                <a:solidFill>
-                  <a:srgbClr val="666666"/>
-                </a:solidFill>
-                <a:latin typeface="Calibri"/>
-              </a:rPr>
-              <a:t>Documentos del paquete de diseño</a:t>
-            </a:r>
-          </a:p>
-        </p:txBody>
-      </p:sp>
-      <p:sp>
-        <p:nvSpPr>
-          <p:cNvPr id="16" name="Rounded Rectangle 15"/>
-          <p:cNvSpPr/>
-          <p:nvPr/>
-        </p:nvSpPr>
-        <p:spPr>
-          <a:xfrm>
-            <a:off x="8109508" y="1591056"/>
-            <a:ext cx="3624986" cy="2299716"/>
-          </a:xfrm>
-          <a:prstGeom prst="roundRect">
-            <a:avLst>
-              <a:gd name="adj" fmla="val 12000"/>
-            </a:avLst>
-          </a:prstGeom>
-          <a:solidFill>
-            <a:srgbClr val="F2F2F2"/>
-          </a:solidFill>
-          <a:ln>
-            <a:noFill/>
-          </a:ln>
-        </p:spPr>
-        <p:style>
-          <a:lnRef idx="1">
-            <a:schemeClr val="accent1"/>
-          </a:lnRef>
-          <a:fillRef idx="3">
-            <a:schemeClr val="accent1"/>
-          </a:fillRef>
-          <a:effectRef idx="2">
-            <a:schemeClr val="accent1"/>
-          </a:effectRef>
-          <a:fontRef idx="minor">
-            <a:schemeClr val="lt1"/>
-          </a:fontRef>
-        </p:style>
-        <p:txBody>
-          <a:bodyPr rtlCol="0" anchor="ctr"/>
-          <a:lstStyle/>
-          <a:p>
-            <a:pPr algn="ctr"/>
-          </a:p>
-        </p:txBody>
-      </p:sp>
-      <p:sp>
-        <p:nvSpPr>
-          <p:cNvPr id="17" name="Rectangle 16"/>
-          <p:cNvSpPr/>
-          <p:nvPr/>
-        </p:nvSpPr>
-        <p:spPr>
-          <a:xfrm>
-            <a:off x="8109508" y="1591056"/>
-            <a:ext cx="3624986" cy="64008"/>
-          </a:xfrm>
-          <a:prstGeom prst="rect">
-            <a:avLst/>
-          </a:prstGeom>
-          <a:solidFill>
-            <a:srgbClr val="095292"/>
-          </a:solidFill>
-          <a:ln>
-            <a:noFill/>
-          </a:ln>
-        </p:spPr>
-        <p:style>
-          <a:lnRef idx="1">
-            <a:schemeClr val="accent1"/>
-          </a:lnRef>
-          <a:fillRef idx="3">
-            <a:schemeClr val="accent1"/>
-          </a:fillRef>
-          <a:effectRef idx="2">
-            <a:schemeClr val="accent1"/>
-          </a:effectRef>
-          <a:fontRef idx="minor">
-            <a:schemeClr val="lt1"/>
-          </a:fontRef>
-        </p:style>
-        <p:txBody>
-          <a:bodyPr rtlCol="0" anchor="ctr"/>
-          <a:lstStyle/>
-          <a:p>
-            <a:pPr algn="ctr"/>
-          </a:p>
-        </p:txBody>
-      </p:sp>
-      <p:sp>
-        <p:nvSpPr>
-          <p:cNvPr id="18" name="Rectangle 17"/>
-          <p:cNvSpPr/>
-          <p:nvPr/>
-        </p:nvSpPr>
-        <p:spPr>
-          <a:xfrm>
-            <a:off x="8109508" y="1655064"/>
-            <a:ext cx="3624986" cy="27432"/>
-          </a:xfrm>
-          <a:prstGeom prst="rect">
-            <a:avLst/>
-          </a:prstGeom>
-          <a:solidFill>
-            <a:srgbClr val="FFD000"/>
-          </a:solidFill>
-          <a:ln>
-            <a:noFill/>
-          </a:ln>
-        </p:spPr>
-        <p:style>
-          <a:lnRef idx="1">
-            <a:schemeClr val="accent1"/>
-          </a:lnRef>
-          <a:fillRef idx="3">
-            <a:schemeClr val="accent1"/>
-          </a:fillRef>
-          <a:effectRef idx="2">
-            <a:schemeClr val="accent1"/>
-          </a:effectRef>
-          <a:fontRef idx="minor">
-            <a:schemeClr val="lt1"/>
-          </a:fontRef>
-        </p:style>
-        <p:txBody>
-          <a:bodyPr rtlCol="0" anchor="ctr"/>
-          <a:lstStyle/>
-          <a:p>
-            <a:pPr algn="ctr"/>
-          </a:p>
-        </p:txBody>
-      </p:sp>
-      <p:sp>
-        <p:nvSpPr>
-          <p:cNvPr id="19" name="Rounded Rectangle 18"/>
-          <p:cNvSpPr/>
-          <p:nvPr/>
-        </p:nvSpPr>
-        <p:spPr>
-          <a:xfrm>
-            <a:off x="9311640" y="1847087"/>
-            <a:ext cx="1220724" cy="1220724"/>
-          </a:xfrm>
-          <a:prstGeom prst="roundRect">
-            <a:avLst>
-              <a:gd name="adj" fmla="val 12000"/>
-            </a:avLst>
-          </a:prstGeom>
-          <a:solidFill>
-            <a:srgbClr val="E8F4FA"/>
-          </a:solidFill>
-          <a:ln>
-            <a:noFill/>
-          </a:ln>
-        </p:spPr>
-        <p:style>
-          <a:lnRef idx="1">
-            <a:schemeClr val="accent1"/>
-          </a:lnRef>
-          <a:fillRef idx="3">
-            <a:schemeClr val="accent1"/>
-          </a:fillRef>
-          <a:effectRef idx="2">
-            <a:schemeClr val="accent1"/>
-          </a:effectRef>
-          <a:fontRef idx="minor">
-            <a:schemeClr val="lt1"/>
-          </a:fontRef>
-        </p:style>
-        <p:txBody>
-          <a:bodyPr rtlCol="0" anchor="ctr"/>
-          <a:lstStyle/>
-          <a:p>
-            <a:pPr algn="ctr"/>
-          </a:p>
-        </p:txBody>
-      </p:sp>
-      <p:sp>
-        <p:nvSpPr>
-          <p:cNvPr id="20" name="TextBox 19"/>
-          <p:cNvSpPr txBox="1"/>
-          <p:nvPr/>
-        </p:nvSpPr>
-        <p:spPr>
-          <a:xfrm>
-            <a:off x="9311640" y="1847087"/>
-            <a:ext cx="1220724" cy="1220724"/>
-          </a:xfrm>
-          <a:prstGeom prst="rect">
-            <a:avLst/>
-          </a:prstGeom>
-          <a:noFill/>
-        </p:spPr>
-        <p:txBody>
-          <a:bodyPr wrap="square" anchor="ctr"/>
-          <a:lstStyle/>
-          <a:p>
-            <a:pPr algn="ctr"/>
-            <a:r>
-              <a:rPr sz="1600" b="1" i="0">
-                <a:solidFill>
-                  <a:srgbClr val="095292"/>
-                </a:solidFill>
-                <a:latin typeface="Calibri"/>
-              </a:rPr>
-              <a:t>F</a:t>
-            </a:r>
-          </a:p>
-        </p:txBody>
-      </p:sp>
-      <p:sp>
-        <p:nvSpPr>
-          <p:cNvPr id="21" name="TextBox 20"/>
-          <p:cNvSpPr txBox="1"/>
-          <p:nvPr/>
-        </p:nvSpPr>
-        <p:spPr>
-          <a:xfrm>
-            <a:off x="8182660" y="3159251"/>
-            <a:ext cx="3478682" cy="621792"/>
-          </a:xfrm>
-          <a:prstGeom prst="rect">
-            <a:avLst/>
-          </a:prstGeom>
-          <a:noFill/>
-        </p:spPr>
-        <p:txBody>
-          <a:bodyPr wrap="square" anchor="t"/>
-          <a:lstStyle/>
-          <a:p>
-            <a:pPr algn="ctr"/>
-            <a:r>
-              <a:rPr sz="1300" b="1" i="0">
-                <a:solidFill>
-                  <a:srgbClr val="095292"/>
-                </a:solidFill>
-                <a:latin typeface="Calibri"/>
-              </a:rPr>
-              <a:t>Figma</a:t>
-            </a:r>
-          </a:p>
-          <a:p>
-            <a:pPr algn="ctr">
-              <a:spcBef>
-                <a:spcPts val="200"/>
-              </a:spcBef>
+              <a:rPr sz="2000" b="0" i="0">
+                <a:solidFill>
+                  <a:srgbClr val="333333"/>
+                </a:solidFill>
+                <a:latin typeface="Calibri"/>
+              </a:rPr>
+              <a:t>–   En Registrar dueño no puede llamarse Aceptar ni estar arriba a la izquierda.</a:t>
+            </a:r>
+          </a:p>
+          <a:p>
+            <a:pPr>
+              <a:spcAft>
+                <a:spcPts val="800"/>
+              </a:spcAft>
             </a:pPr>
             <a:r>
-              <a:rPr sz="1000" b="0" i="0">
-                <a:solidFill>
-                  <a:srgbClr val="666666"/>
-                </a:solidFill>
-                <a:latin typeface="Calibri"/>
-              </a:rPr>
-              <a:t>Wireframes y prototipo navegable</a:t>
-            </a:r>
-          </a:p>
-        </p:txBody>
-      </p:sp>
-      <p:sp>
-        <p:nvSpPr>
-          <p:cNvPr id="22" name="Rounded Rectangle 21"/>
-          <p:cNvSpPr/>
-          <p:nvPr/>
-        </p:nvSpPr>
-        <p:spPr>
-          <a:xfrm>
-            <a:off x="2370277" y="4055364"/>
-            <a:ext cx="3624986" cy="2299716"/>
-          </a:xfrm>
-          <a:prstGeom prst="roundRect">
-            <a:avLst>
-              <a:gd name="adj" fmla="val 12000"/>
-            </a:avLst>
-          </a:prstGeom>
-          <a:solidFill>
-            <a:srgbClr val="F2F2F2"/>
-          </a:solidFill>
-          <a:ln>
-            <a:noFill/>
-          </a:ln>
-        </p:spPr>
-        <p:style>
-          <a:lnRef idx="1">
-            <a:schemeClr val="accent1"/>
-          </a:lnRef>
-          <a:fillRef idx="3">
-            <a:schemeClr val="accent1"/>
-          </a:fillRef>
-          <a:effectRef idx="2">
-            <a:schemeClr val="accent1"/>
-          </a:effectRef>
-          <a:fontRef idx="minor">
-            <a:schemeClr val="lt1"/>
-          </a:fontRef>
-        </p:style>
-        <p:txBody>
-          <a:bodyPr rtlCol="0" anchor="ctr"/>
-          <a:lstStyle/>
-          <a:p>
-            <a:pPr algn="ctr"/>
-          </a:p>
-        </p:txBody>
-      </p:sp>
-      <p:sp>
-        <p:nvSpPr>
-          <p:cNvPr id="23" name="Rectangle 22"/>
-          <p:cNvSpPr/>
-          <p:nvPr/>
-        </p:nvSpPr>
-        <p:spPr>
-          <a:xfrm>
-            <a:off x="2370277" y="4055364"/>
-            <a:ext cx="3624986" cy="64008"/>
-          </a:xfrm>
-          <a:prstGeom prst="rect">
-            <a:avLst/>
-          </a:prstGeom>
-          <a:solidFill>
-            <a:srgbClr val="095292"/>
-          </a:solidFill>
-          <a:ln>
-            <a:noFill/>
-          </a:ln>
-        </p:spPr>
-        <p:style>
-          <a:lnRef idx="1">
-            <a:schemeClr val="accent1"/>
-          </a:lnRef>
-          <a:fillRef idx="3">
-            <a:schemeClr val="accent1"/>
-          </a:fillRef>
-          <a:effectRef idx="2">
-            <a:schemeClr val="accent1"/>
-          </a:effectRef>
-          <a:fontRef idx="minor">
-            <a:schemeClr val="lt1"/>
-          </a:fontRef>
-        </p:style>
-        <p:txBody>
-          <a:bodyPr rtlCol="0" anchor="ctr"/>
-          <a:lstStyle/>
-          <a:p>
-            <a:pPr algn="ctr"/>
-          </a:p>
-        </p:txBody>
-      </p:sp>
-      <p:sp>
-        <p:nvSpPr>
-          <p:cNvPr id="24" name="Rectangle 23"/>
-          <p:cNvSpPr/>
-          <p:nvPr/>
-        </p:nvSpPr>
-        <p:spPr>
-          <a:xfrm>
-            <a:off x="2370277" y="4119372"/>
-            <a:ext cx="3624986" cy="27432"/>
-          </a:xfrm>
-          <a:prstGeom prst="rect">
-            <a:avLst/>
-          </a:prstGeom>
-          <a:solidFill>
-            <a:srgbClr val="FFD000"/>
-          </a:solidFill>
-          <a:ln>
-            <a:noFill/>
-          </a:ln>
-        </p:spPr>
-        <p:style>
-          <a:lnRef idx="1">
-            <a:schemeClr val="accent1"/>
-          </a:lnRef>
-          <a:fillRef idx="3">
-            <a:schemeClr val="accent1"/>
-          </a:fillRef>
-          <a:effectRef idx="2">
-            <a:schemeClr val="accent1"/>
-          </a:effectRef>
-          <a:fontRef idx="minor">
-            <a:schemeClr val="lt1"/>
-          </a:fontRef>
-        </p:style>
-        <p:txBody>
-          <a:bodyPr rtlCol="0" anchor="ctr"/>
-          <a:lstStyle/>
-          <a:p>
-            <a:pPr algn="ctr"/>
-          </a:p>
-        </p:txBody>
-      </p:sp>
-      <p:sp>
-        <p:nvSpPr>
-          <p:cNvPr id="25" name="Rounded Rectangle 24"/>
-          <p:cNvSpPr/>
-          <p:nvPr/>
-        </p:nvSpPr>
-        <p:spPr>
-          <a:xfrm>
-            <a:off x="3572408" y="4311396"/>
-            <a:ext cx="1220724" cy="1220724"/>
-          </a:xfrm>
-          <a:prstGeom prst="roundRect">
-            <a:avLst>
-              <a:gd name="adj" fmla="val 12000"/>
-            </a:avLst>
-          </a:prstGeom>
-          <a:solidFill>
-            <a:srgbClr val="E8F4FA"/>
-          </a:solidFill>
-          <a:ln>
-            <a:noFill/>
-          </a:ln>
-        </p:spPr>
-        <p:style>
-          <a:lnRef idx="1">
-            <a:schemeClr val="accent1"/>
-          </a:lnRef>
-          <a:fillRef idx="3">
-            <a:schemeClr val="accent1"/>
-          </a:fillRef>
-          <a:effectRef idx="2">
-            <a:schemeClr val="accent1"/>
-          </a:effectRef>
-          <a:fontRef idx="minor">
-            <a:schemeClr val="lt1"/>
-          </a:fontRef>
-        </p:style>
-        <p:txBody>
-          <a:bodyPr rtlCol="0" anchor="ctr"/>
-          <a:lstStyle/>
-          <a:p>
-            <a:pPr algn="ctr"/>
-          </a:p>
-        </p:txBody>
-      </p:sp>
-      <p:sp>
-        <p:nvSpPr>
-          <p:cNvPr id="26" name="TextBox 25"/>
-          <p:cNvSpPr txBox="1"/>
-          <p:nvPr/>
-        </p:nvSpPr>
-        <p:spPr>
-          <a:xfrm>
-            <a:off x="3572408" y="4311396"/>
-            <a:ext cx="1220724" cy="1220724"/>
-          </a:xfrm>
-          <a:prstGeom prst="rect">
-            <a:avLst/>
-          </a:prstGeom>
-          <a:noFill/>
-        </p:spPr>
-        <p:txBody>
-          <a:bodyPr wrap="square" anchor="ctr"/>
-          <a:lstStyle/>
-          <a:p>
-            <a:pPr algn="ctr"/>
-            <a:r>
-              <a:rPr sz="1600" b="1" i="0">
-                <a:solidFill>
-                  <a:srgbClr val="095292"/>
-                </a:solidFill>
-                <a:latin typeface="Calibri"/>
-              </a:rPr>
-              <a:t>P</a:t>
-            </a:r>
-          </a:p>
-        </p:txBody>
-      </p:sp>
-      <p:sp>
-        <p:nvSpPr>
-          <p:cNvPr id="27" name="TextBox 26"/>
-          <p:cNvSpPr txBox="1"/>
-          <p:nvPr/>
-        </p:nvSpPr>
-        <p:spPr>
-          <a:xfrm>
-            <a:off x="2443429" y="5623560"/>
-            <a:ext cx="3478682" cy="621792"/>
-          </a:xfrm>
-          <a:prstGeom prst="rect">
-            <a:avLst/>
-          </a:prstGeom>
-          <a:noFill/>
-        </p:spPr>
-        <p:txBody>
-          <a:bodyPr wrap="square" anchor="t"/>
-          <a:lstStyle/>
-          <a:p>
-            <a:pPr algn="ctr"/>
-            <a:r>
-              <a:rPr sz="1300" b="1" i="0">
-                <a:solidFill>
-                  <a:srgbClr val="095292"/>
-                </a:solidFill>
-                <a:latin typeface="Calibri"/>
-              </a:rPr>
-              <a:t>Penpot</a:t>
-            </a:r>
-          </a:p>
-          <a:p>
-            <a:pPr algn="ctr">
-              <a:spcBef>
-                <a:spcPts val="200"/>
-              </a:spcBef>
+              <a:rPr sz="2000" b="0" i="0">
+                <a:solidFill>
+                  <a:srgbClr val="333333"/>
+                </a:solidFill>
+                <a:latin typeface="Calibri"/>
+              </a:rPr>
+              <a:t>–   Reconocer antes que recordar significa que la persona escoja de una lista en vez de acordarse de un codigo: la recepcionista no tiene por que memorizar que el codigo de raza mestiza es 07, se lo mostramos.</a:t>
+            </a:r>
+          </a:p>
+          <a:p>
+            <a:pPr>
+              <a:spcAft>
+                <a:spcPts val="800"/>
+              </a:spcAft>
             </a:pPr>
             <a:r>
-              <a:rPr sz="1000" b="0" i="0">
-                <a:solidFill>
-                  <a:srgbClr val="666666"/>
-                </a:solidFill>
-                <a:latin typeface="Calibri"/>
-              </a:rPr>
-              <a:t>Alternativa libre a Figma</a:t>
-            </a:r>
-          </a:p>
-        </p:txBody>
-      </p:sp>
-      <p:sp>
-        <p:nvSpPr>
-          <p:cNvPr id="28" name="Rounded Rectangle 27"/>
-          <p:cNvSpPr/>
-          <p:nvPr/>
-        </p:nvSpPr>
-        <p:spPr>
-          <a:xfrm>
-            <a:off x="6196431" y="4055364"/>
-            <a:ext cx="3624986" cy="2299716"/>
-          </a:xfrm>
-          <a:prstGeom prst="roundRect">
-            <a:avLst>
-              <a:gd name="adj" fmla="val 12000"/>
-            </a:avLst>
-          </a:prstGeom>
-          <a:solidFill>
-            <a:srgbClr val="F2F2F2"/>
-          </a:solidFill>
-          <a:ln>
-            <a:noFill/>
-          </a:ln>
-        </p:spPr>
-        <p:style>
-          <a:lnRef idx="1">
-            <a:schemeClr val="accent1"/>
-          </a:lnRef>
-          <a:fillRef idx="3">
-            <a:schemeClr val="accent1"/>
-          </a:fillRef>
-          <a:effectRef idx="2">
-            <a:schemeClr val="accent1"/>
-          </a:effectRef>
-          <a:fontRef idx="minor">
-            <a:schemeClr val="lt1"/>
-          </a:fontRef>
-        </p:style>
-        <p:txBody>
-          <a:bodyPr rtlCol="0" anchor="ctr"/>
-          <a:lstStyle/>
-          <a:p>
-            <a:pPr algn="ctr"/>
-          </a:p>
-        </p:txBody>
-      </p:sp>
-      <p:sp>
-        <p:nvSpPr>
-          <p:cNvPr id="29" name="Rectangle 28"/>
-          <p:cNvSpPr/>
-          <p:nvPr/>
-        </p:nvSpPr>
-        <p:spPr>
-          <a:xfrm>
-            <a:off x="6196431" y="4055364"/>
-            <a:ext cx="3624986" cy="64008"/>
-          </a:xfrm>
-          <a:prstGeom prst="rect">
-            <a:avLst/>
-          </a:prstGeom>
-          <a:solidFill>
-            <a:srgbClr val="095292"/>
-          </a:solidFill>
-          <a:ln>
-            <a:noFill/>
-          </a:ln>
-        </p:spPr>
-        <p:style>
-          <a:lnRef idx="1">
-            <a:schemeClr val="accent1"/>
-          </a:lnRef>
-          <a:fillRef idx="3">
-            <a:schemeClr val="accent1"/>
-          </a:fillRef>
-          <a:effectRef idx="2">
-            <a:schemeClr val="accent1"/>
-          </a:effectRef>
-          <a:fontRef idx="minor">
-            <a:schemeClr val="lt1"/>
-          </a:fontRef>
-        </p:style>
-        <p:txBody>
-          <a:bodyPr rtlCol="0" anchor="ctr"/>
-          <a:lstStyle/>
-          <a:p>
-            <a:pPr algn="ctr"/>
-          </a:p>
-        </p:txBody>
-      </p:sp>
-      <p:sp>
-        <p:nvSpPr>
-          <p:cNvPr id="30" name="Rectangle 29"/>
-          <p:cNvSpPr/>
-          <p:nvPr/>
-        </p:nvSpPr>
-        <p:spPr>
-          <a:xfrm>
-            <a:off x="6196431" y="4119372"/>
-            <a:ext cx="3624986" cy="27432"/>
-          </a:xfrm>
-          <a:prstGeom prst="rect">
-            <a:avLst/>
-          </a:prstGeom>
-          <a:solidFill>
-            <a:srgbClr val="FFD000"/>
-          </a:solidFill>
-          <a:ln>
-            <a:noFill/>
-          </a:ln>
-        </p:spPr>
-        <p:style>
-          <a:lnRef idx="1">
-            <a:schemeClr val="accent1"/>
-          </a:lnRef>
-          <a:fillRef idx="3">
-            <a:schemeClr val="accent1"/>
-          </a:fillRef>
-          <a:effectRef idx="2">
-            <a:schemeClr val="accent1"/>
-          </a:effectRef>
-          <a:fontRef idx="minor">
-            <a:schemeClr val="lt1"/>
-          </a:fontRef>
-        </p:style>
-        <p:txBody>
-          <a:bodyPr rtlCol="0" anchor="ctr"/>
-          <a:lstStyle/>
-          <a:p>
-            <a:pPr algn="ctr"/>
-          </a:p>
-        </p:txBody>
-      </p:sp>
-      <p:pic>
-        <p:nvPicPr>
-          <p:cNvPr id="31" name="Picture 30" descr="examlab.png"/>
-          <p:cNvPicPr>
-            <a:picLocks noChangeAspect="1"/>
-          </p:cNvPicPr>
-          <p:nvPr/>
-        </p:nvPicPr>
-        <p:blipFill>
-          <a:blip r:embed="rId4"/>
-          <a:stretch>
-            <a:fillRect/>
-          </a:stretch>
-        </p:blipFill>
-        <p:spPr>
-          <a:xfrm>
-            <a:off x="7398562" y="4311396"/>
-            <a:ext cx="1220724" cy="1220724"/>
-          </a:xfrm>
-          <a:prstGeom prst="rect">
-            <a:avLst/>
-          </a:prstGeom>
-        </p:spPr>
-      </p:pic>
-      <p:sp>
-        <p:nvSpPr>
-          <p:cNvPr id="32" name="TextBox 31"/>
-          <p:cNvSpPr txBox="1"/>
-          <p:nvPr/>
-        </p:nvSpPr>
-        <p:spPr>
-          <a:xfrm>
-            <a:off x="6269583" y="5623560"/>
-            <a:ext cx="3478682" cy="621792"/>
-          </a:xfrm>
-          <a:prstGeom prst="rect">
-            <a:avLst/>
-          </a:prstGeom>
-          <a:noFill/>
-        </p:spPr>
-        <p:txBody>
-          <a:bodyPr wrap="square" anchor="t"/>
-          <a:lstStyle/>
-          <a:p>
-            <a:pPr algn="ctr"/>
-            <a:r>
-              <a:rPr sz="1300" b="1" i="0">
-                <a:solidFill>
-                  <a:srgbClr val="095292"/>
-                </a:solidFill>
-                <a:latin typeface="Calibri"/>
-              </a:rPr>
-              <a:t>la plataforma del curso</a:t>
-            </a:r>
-          </a:p>
-          <a:p>
-            <a:pPr algn="ctr">
-              <a:spcBef>
-                <a:spcPts val="200"/>
-              </a:spcBef>
-            </a:pPr>
-            <a:r>
-              <a:rPr sz="1000" b="0" i="0">
-                <a:solidFill>
-                  <a:srgbClr val="666666"/>
-                </a:solidFill>
-                <a:latin typeface="Calibri"/>
-              </a:rPr>
-              <a:t>Entrega del taller · en la fecha que indique el docente</a:t>
-            </a:r>
-          </a:p>
-        </p:txBody>
-      </p:sp>
-      <p:sp>
-        <p:nvSpPr>
-          <p:cNvPr id="33" name="TextBox 32"/>
+              <a:rPr sz="2000" b="0" i="0">
+                <a:solidFill>
+                  <a:srgbClr val="333333"/>
+                </a:solidFill>
+                <a:latin typeface="Calibri"/>
+              </a:rPr>
+              <a:t>–   Cada uno de estos cuatro principios se puede auditar sobre un wireframe impreso, sin una sola linea de codigo, y esa auditoria es exactamente lo que se evalua en esta asignatura.</a:t>
+            </a:r>
+          </a:p>
+        </p:txBody>
+      </p:sp>
+      <p:sp>
+        <p:nvSpPr>
+          <p:cNvPr id="6" name="TextBox 5"/>
           <p:cNvSpPr txBox="1"/>
           <p:nvPr/>
         </p:nvSpPr>
@@ -10167,7 +12574,7 @@
                 </a:solidFill>
                 <a:latin typeface="Calibri"/>
               </a:rPr>
-              <a:t>Taller PI — por que importa</a:t>
+              <a:t>Una pantalla suelta no sirve para nada; lo que se diseña es un flujo de... (1/2)</a:t>
             </a:r>
           </a:p>
         </p:txBody>
@@ -10206,25 +12613,7 @@
                 </a:solidFill>
                 <a:latin typeface="Calibri"/>
               </a:rPr>
-              <a:t>–   </a:t>
-            </a:r>
-            <a:r>
-              <a:rPr sz="2000" b="1" i="0">
-                <a:solidFill>
-                  <a:srgbClr val="333333"/>
-                </a:solidFill>
-                <a:latin typeface="Calibri"/>
-              </a:rPr>
-              <a:t>Por que importa al PI:</a:t>
-            </a:r>
-            <a:r>
-              <a:rPr sz="2000" b="0" i="0">
-                <a:solidFill>
-                  <a:srgbClr val="333333"/>
-                </a:solidFill>
-                <a:latin typeface="Calibri"/>
-              </a:rPr>
-              <a:t> la interfaz es la cara visible del paquete de diseño de VetCare y es lo unico del PI que la clinica Huellitas entiende sin traduccion; ademas es el insumo directo con el que Programacion II construye las pantallas reales.</a:t>
+              <a:t>–   Una pantalla suelta no sirve para nada; lo que se diseña es un flujo de tarea completo, es decir el recorrido que hace una persona real desde que tiene una intencion hasta que la cumple.</a:t>
             </a:r>
           </a:p>
           <a:p>
@@ -10240,7 +12629,7 @@
                 </a:solidFill>
                 <a:latin typeface="Calibri"/>
               </a:rPr>
-              <a:t>–   Es la ultima clase con tema nuevo del curso: lo que se produzca hoy entra tal cual al documento final y a la sustentacion de la clase 14.</a:t>
+              <a:t>–   El flujo tiene un camino feliz y tiene caminos alternos, y los caminos alternos son donde se cae el diseño de los principiantes.</a:t>
             </a:r>
           </a:p>
           <a:p>
@@ -10256,7 +12645,39 @@
                 </a:solidFill>
                 <a:latin typeface="Calibri"/>
               </a:rPr>
-              <a:t>–   Quien va solo por la ruta C cierra su PI con este prototipo navegable, que es entregable completo y valido por si mismo, no una version recortada del proyecto.</a:t>
+              <a:t>–   En VetCare el camino feliz de registrar una mascota es: llega el dueño, la recepcionista lo busca, lo encuentra, registra la mascota y el sistema devuelve el codigo.</a:t>
+            </a:r>
+          </a:p>
+          <a:p>
+            <a:pPr>
+              <a:spcAft>
+                <a:spcPts val="800"/>
+              </a:spcAft>
+            </a:pPr>
+            <a:r>
+              <a:rPr sz="2000" b="0" i="0">
+                <a:solidFill>
+                  <a:srgbClr val="333333"/>
+                </a:solidFill>
+                <a:latin typeface="Calibri"/>
+              </a:rPr>
+              <a:t>–   Pero los caminos alternos son igual de reales: el dueño no esta registrado y hay que crearlo sin perder lo que ya se habia escrito de la mascota</a:t>
+            </a:r>
+          </a:p>
+          <a:p>
+            <a:pPr>
+              <a:spcAft>
+                <a:spcPts val="800"/>
+              </a:spcAft>
+            </a:pPr>
+            <a:r>
+              <a:rPr sz="2000" b="0" i="0">
+                <a:solidFill>
+                  <a:srgbClr val="333333"/>
+                </a:solidFill>
+                <a:latin typeface="Calibri"/>
+              </a:rPr>
+              <a:t>–   La mascota ya existe porque otro turno la registro ayer y hay que avisarlo en vez de duplicarla; el dueño no trae documento y hay que permitir el registro con telefono como identificador temporal.</a:t>
             </a:r>
           </a:p>
         </p:txBody>
@@ -10437,7 +12858,7 @@
                 </a:solidFill>
                 <a:latin typeface="Calibri"/>
               </a:rPr>
-              <a:t>Taller PI — punto de partida</a:t>
+              <a:t>Una pantalla suelta no sirve para nada; lo que se diseña es un flujo de... (2/2)</a:t>
             </a:r>
           </a:p>
         </p:txBody>
@@ -10476,7 +12897,7 @@
                 </a:solidFill>
                 <a:latin typeface="Calibri"/>
               </a:rPr>
-              <a:t>–   El equipo ya tiene aprobados los RF y RNF, el diagrama de casos de uso, el de clases con Mascota, Dueño, Historia_Clinica y Cita, y el diccionario de datos con tipos y longitudes.</a:t>
+              <a:t>–   En Buscar expediente pasa lo mismo: el camino feliz es buscar por documento del dueño y encontrar una sola ficha, pero hay que diseñar que ocurre cuando la busqueda por nombre devuelve doce mascotas llamadas Firulais</a:t>
             </a:r>
           </a:p>
           <a:p>
@@ -10492,7 +12913,7 @@
                 </a:solidFill>
                 <a:latin typeface="Calibri"/>
               </a:rPr>
-              <a:t>–   Hasta hoy VetCare existe solo como texto y diagramas: nadie ha visto todavia como se veria la pantalla que va a usar la recepcionista de Huellitas.</a:t>
+              <a:t>–   Y ahi la respuesta de diseño es mostrar en la lista de resultados la especie, la edad y el nombre del dueño para poder desambiguar de un vistazo.</a:t>
             </a:r>
           </a:p>
           <a:p>
@@ -10508,7 +12929,7 @@
                 </a:solidFill>
                 <a:latin typeface="Calibri"/>
               </a:rPr>
-              <a:t>–   La usuaria de referencia esta descrita asi: recepcionista con experiencia clinica alta y experiencia informatica baja, atiende telefono mientras registra y necesita terminar el registro de un paciente nuevo en menos de dos minutos.</a:t>
+              <a:t>–   Un flujo que solo dibuja el camino feliz no es un diseño, es una postal.</a:t>
             </a:r>
           </a:p>
         </p:txBody>

--- a/Seminario de Sistemas/Clases/Clase 13 - Diseño de interfaces/Presentacion.pptx
+++ b/Seminario de Sistemas/Clases/Clase 13 - Diseño de interfaces/Presentacion.pptx
@@ -26,8 +26,6 @@
     <p:sldId id="274" r:id="rId25"/>
     <p:sldId id="275" r:id="rId26"/>
     <p:sldId id="276" r:id="rId27"/>
-    <p:sldId id="277" r:id="rId28"/>
-    <p:sldId id="278" r:id="rId29"/>
   </p:sldIdLst>
   <p:sldSz cx="12191695" cy="6858000" type="screen4x3"/>
   <p:notesSz cx="6858000" cy="9144000"/>
@@ -3628,7 +3626,7 @@
                 </a:solidFill>
                 <a:latin typeface="Calibri"/>
               </a:rPr>
-              <a:t>La interfaz no se inventa: se deriva de los artefactos que el equipo ya... (1/2)</a:t>
+              <a:t>La interfaz no se inventa: se deriva de los artefactos que el equipo ya...</a:t>
             </a:r>
           </a:p>
         </p:txBody>
@@ -3715,23 +3713,7 @@
                 </a:solidFill>
                 <a:latin typeface="Calibri"/>
               </a:rPr>
-              <a:t>–   Por eso los wireframes se entregan anotados: se ponen numeritos sobre el dibujo y al lado una tabla que dice, por ejemplo</a:t>
-            </a:r>
-          </a:p>
-          <a:p>
-            <a:pPr>
-              <a:spcAft>
-                <a:spcPts val="800"/>
-              </a:spcAft>
-            </a:pPr>
-            <a:r>
-              <a:rPr sz="2000" b="0" i="0">
-                <a:solidFill>
-                  <a:srgbClr val="333333"/>
-                </a:solidFill>
-                <a:latin typeface="Calibri"/>
-              </a:rPr>
-              <a:t>–   El numero uno es el campo Nombre de la mascota que sale del atributo Mascota.nombre, texto de sesenta caracteres, obligatorio, exigido por RF-03</a:t>
+              <a:t>–   La trazabilidad no es burocracia, es el mecanismo que hace que los planos y la casa coincidan.</a:t>
             </a:r>
           </a:p>
         </p:txBody>
@@ -3912,7 +3894,7 @@
                 </a:solidFill>
                 <a:latin typeface="Calibri"/>
               </a:rPr>
-              <a:t>La interfaz no se inventa: se deriva de los artefactos que el equipo ya... (2/2)</a:t>
+              <a:t>Una interfaz se puede evaluar sin programarla, y esa es una de las...</a:t>
             </a:r>
           </a:p>
         </p:txBody>
@@ -3951,7 +3933,7 @@
                 </a:solidFill>
                 <a:latin typeface="Calibri"/>
               </a:rPr>
-              <a:t>–   El numero cuatro es el mensaje de confirmacion que cumple el RNF-02 de respuesta menor a tres segundos.</a:t>
+              <a:t>–   Una interfaz se puede evaluar sin programarla, y esa es una de las habilidades mas valiosas que se lleva un analista.</a:t>
             </a:r>
           </a:p>
           <a:p>
@@ -3967,7 +3949,7 @@
                 </a:solidFill>
                 <a:latin typeface="Calibri"/>
               </a:rPr>
-              <a:t>–   Esa anotacion tiene un efecto secundario muy util: si aparece un campo en la pantalla que no esta en el diccionario de datos, entonces o falta un requisito o sobra el campo</a:t>
+              <a:t>–   El metodo mas barato es el recorrido cognitivo: se toma una tarea concreta, por ejemplo registrar la mascota Luna de la señora Perez</a:t>
             </a:r>
           </a:p>
           <a:p>
@@ -3983,7 +3965,7 @@
                 </a:solidFill>
                 <a:latin typeface="Calibri"/>
               </a:rPr>
-              <a:t>–   Y ambas cosas hay que resolverlas hoy y no cuando el compañero de Programacion II ya escribio la tabla.</a:t>
+              <a:t>–   Y una persona que no participo en el diseño intenta hacerla sobre el prototipo sin que nadie le explique nada, mientras usted cuenta cuantos clics necesito, donde dudo y donde se equivoco.</a:t>
             </a:r>
           </a:p>
           <a:p>
@@ -3999,7 +3981,23 @@
                 </a:solidFill>
                 <a:latin typeface="Calibri"/>
               </a:rPr>
-              <a:t>–   La trazabilidad no es burocracia, es el mecanismo que hace que los planos y la casa coincidan.</a:t>
+              <a:t>–   La variante de bolsillo es la prueba de pasillo: se le pide a tres compañeros de otro grupo que lo intenten y se anota, sin defenderse ni explicar.</a:t>
+            </a:r>
+          </a:p>
+          <a:p>
+            <a:pPr>
+              <a:spcAft>
+                <a:spcPts val="800"/>
+              </a:spcAft>
+            </a:pPr>
+            <a:r>
+              <a:rPr sz="2000" b="0" i="0">
+                <a:solidFill>
+                  <a:srgbClr val="333333"/>
+                </a:solidFill>
+                <a:latin typeface="Calibri"/>
+              </a:rPr>
+              <a:t>–   Para VetCare hay que evaluar pensando en la usuaria real, que es la recepcionista de Huellitas: no es experta en computadores, escribe lento, contesta el telefono mientras registra y tiene un perro ladrando al lado.</a:t>
             </a:r>
           </a:p>
         </p:txBody>
@@ -4180,21 +4178,141 @@
                 </a:solidFill>
                 <a:latin typeface="Calibri"/>
               </a:rPr>
-              <a:t>Una interfaz se puede evaluar sin programarla, y esa es una de las... (1/2)</a:t>
-            </a:r>
-          </a:p>
-        </p:txBody>
-      </p:sp>
-      <p:sp>
-        <p:nvSpPr>
-          <p:cNvPr id="5" name="TextBox 4"/>
+              <a:t>Flujo de tarea de VetCare en Mermaid: registrar mascota y buscar expediente con caminos alternos</a:t>
+            </a:r>
+          </a:p>
+        </p:txBody>
+      </p:sp>
+      <p:sp>
+        <p:nvSpPr>
+          <p:cNvPr id="5" name="Rounded Rectangle 4"/>
+          <p:cNvSpPr/>
+          <p:nvPr/>
+        </p:nvSpPr>
+        <p:spPr>
+          <a:xfrm>
+            <a:off x="457200" y="1261872"/>
+            <a:ext cx="11277295" cy="4773168"/>
+          </a:xfrm>
+          <a:prstGeom prst="roundRect">
+            <a:avLst>
+              <a:gd name="adj" fmla="val 12000"/>
+            </a:avLst>
+          </a:prstGeom>
+          <a:solidFill>
+            <a:srgbClr val="1E2A38"/>
+          </a:solidFill>
+          <a:ln>
+            <a:noFill/>
+          </a:ln>
+        </p:spPr>
+        <p:style>
+          <a:lnRef idx="1">
+            <a:schemeClr val="accent1"/>
+          </a:lnRef>
+          <a:fillRef idx="3">
+            <a:schemeClr val="accent1"/>
+          </a:fillRef>
+          <a:effectRef idx="2">
+            <a:schemeClr val="accent1"/>
+          </a:effectRef>
+          <a:fontRef idx="minor">
+            <a:schemeClr val="lt1"/>
+          </a:fontRef>
+        </p:style>
+        <p:txBody>
+          <a:bodyPr rtlCol="0" anchor="ctr"/>
+          <a:lstStyle/>
+          <a:p>
+            <a:pPr algn="ctr"/>
+          </a:p>
+        </p:txBody>
+      </p:sp>
+      <p:sp>
+        <p:nvSpPr>
+          <p:cNvPr id="6" name="Rectangle 5"/>
+          <p:cNvSpPr/>
+          <p:nvPr/>
+        </p:nvSpPr>
+        <p:spPr>
+          <a:xfrm>
+            <a:off x="457200" y="1261872"/>
+            <a:ext cx="11277295" cy="320040"/>
+          </a:xfrm>
+          <a:prstGeom prst="rect">
+            <a:avLst/>
+          </a:prstGeom>
+          <a:solidFill>
+            <a:srgbClr val="095292"/>
+          </a:solidFill>
+          <a:ln>
+            <a:noFill/>
+          </a:ln>
+        </p:spPr>
+        <p:style>
+          <a:lnRef idx="1">
+            <a:schemeClr val="accent1"/>
+          </a:lnRef>
+          <a:fillRef idx="3">
+            <a:schemeClr val="accent1"/>
+          </a:fillRef>
+          <a:effectRef idx="2">
+            <a:schemeClr val="accent1"/>
+          </a:effectRef>
+          <a:fontRef idx="minor">
+            <a:schemeClr val="lt1"/>
+          </a:fontRef>
+        </p:style>
+        <p:txBody>
+          <a:bodyPr rtlCol="0" anchor="ctr"/>
+          <a:lstStyle/>
+          <a:p>
+            <a:pPr algn="ctr"/>
+          </a:p>
+        </p:txBody>
+      </p:sp>
+      <p:sp>
+        <p:nvSpPr>
+          <p:cNvPr id="7" name="TextBox 6"/>
           <p:cNvSpPr txBox="1"/>
           <p:nvPr/>
         </p:nvSpPr>
         <p:spPr>
           <a:xfrm>
-            <a:off x="457200" y="1170432"/>
-            <a:ext cx="11277295" cy="5230368"/>
+            <a:off x="685800" y="1307592"/>
+            <a:ext cx="10820095" cy="256032"/>
+          </a:xfrm>
+          <a:prstGeom prst="rect">
+            <a:avLst/>
+          </a:prstGeom>
+          <a:noFill/>
+        </p:spPr>
+        <p:txBody>
+          <a:bodyPr wrap="square" anchor="ctr"/>
+          <a:lstStyle/>
+          <a:p>
+            <a:r>
+              <a:rPr sz="1000" b="1" i="0">
+                <a:solidFill>
+                  <a:srgbClr val="269CCB"/>
+                </a:solidFill>
+                <a:latin typeface="Calibri"/>
+              </a:rPr>
+              <a:t>● ● ●</a:t>
+            </a:r>
+          </a:p>
+        </p:txBody>
+      </p:sp>
+      <p:sp>
+        <p:nvSpPr>
+          <p:cNvPr id="8" name="TextBox 7"/>
+          <p:cNvSpPr txBox="1"/>
+          <p:nvPr/>
+        </p:nvSpPr>
+        <p:spPr>
+          <a:xfrm>
+            <a:off x="777240" y="1719072"/>
+            <a:ext cx="10637215" cy="4133087"/>
           </a:xfrm>
           <a:prstGeom prst="rect">
             <a:avLst/>
@@ -4209,72 +4327,267 @@
           <a:p>
             <a:pPr>
               <a:spcAft>
-                <a:spcPts val="800"/>
+                <a:spcPts val="400"/>
               </a:spcAft>
             </a:pPr>
             <a:r>
-              <a:rPr sz="2000" b="0" i="0">
-                <a:solidFill>
-                  <a:srgbClr val="333333"/>
-                </a:solidFill>
-                <a:latin typeface="Calibri"/>
-              </a:rPr>
-              <a:t>–   Una interfaz se puede evaluar sin programarla, y esa es una de las habilidades mas valiosas que se lleva un analista.</a:t>
+              <a:rPr sz="1400" b="0" i="0">
+                <a:solidFill>
+                  <a:srgbClr val="FFFFFF"/>
+                </a:solidFill>
+                <a:latin typeface="Calibri"/>
+              </a:rPr>
+              <a:t>flowchart TD</a:t>
             </a:r>
           </a:p>
           <a:p>
             <a:pPr>
               <a:spcAft>
-                <a:spcPts val="800"/>
+                <a:spcPts val="400"/>
               </a:spcAft>
             </a:pPr>
             <a:r>
-              <a:rPr sz="2000" b="0" i="0">
-                <a:solidFill>
-                  <a:srgbClr val="333333"/>
-                </a:solidFill>
-                <a:latin typeface="Calibri"/>
-              </a:rPr>
-              <a:t>–   El metodo mas barato es el recorrido cognitivo: se toma una tarea concreta, por ejemplo registrar la mascota Luna de la señora Perez</a:t>
+              <a:rPr sz="1400" b="0" i="0">
+                <a:solidFill>
+                  <a:srgbClr val="FFFFFF"/>
+                </a:solidFill>
+                <a:latin typeface="Calibri"/>
+              </a:rPr>
+              <a:t>  A[Recepcion: llega el dueño con su mascota] --&gt; B{Dueño ya registrado?}</a:t>
             </a:r>
           </a:p>
           <a:p>
             <a:pPr>
               <a:spcAft>
-                <a:spcPts val="800"/>
+                <a:spcPts val="400"/>
               </a:spcAft>
             </a:pPr>
             <a:r>
-              <a:rPr sz="2000" b="0" i="0">
-                <a:solidFill>
-                  <a:srgbClr val="333333"/>
-                </a:solidFill>
-                <a:latin typeface="Calibri"/>
-              </a:rPr>
-              <a:t>–   Y una persona que no participo en el diseño intenta hacerla sobre el prototipo sin que nadie le explique nada, mientras usted cuenta cuantos clics necesito, donde dudo y donde se equivoco.</a:t>
+              <a:rPr sz="1400" b="0" i="0">
+                <a:solidFill>
+                  <a:srgbClr val="FFFFFF"/>
+                </a:solidFill>
+                <a:latin typeface="Calibri"/>
+              </a:rPr>
+              <a:t>  B -- No --&gt; C[Pantalla Registrar dueño]</a:t>
             </a:r>
           </a:p>
           <a:p>
             <a:pPr>
               <a:spcAft>
-                <a:spcPts val="800"/>
+                <a:spcPts val="400"/>
               </a:spcAft>
             </a:pPr>
             <a:r>
-              <a:rPr sz="2000" b="0" i="0">
-                <a:solidFill>
-                  <a:srgbClr val="333333"/>
-                </a:solidFill>
-                <a:latin typeface="Calibri"/>
-              </a:rPr>
-              <a:t>–   La variante de bolsillo es la prueba de pasillo: se le pide a tres compañeros de otro grupo que lo intenten y se anota, sin defenderse ni explicar.</a:t>
-            </a:r>
-          </a:p>
-        </p:txBody>
-      </p:sp>
-      <p:sp>
-        <p:nvSpPr>
-          <p:cNvPr id="6" name="TextBox 5"/>
+              <a:rPr sz="1400" b="0" i="0">
+                <a:solidFill>
+                  <a:srgbClr val="FFFFFF"/>
+                </a:solidFill>
+                <a:latin typeface="Calibri"/>
+              </a:rPr>
+              <a:t>  B -- Si --&gt; D[Pantalla Registrar mascota]</a:t>
+            </a:r>
+          </a:p>
+          <a:p>
+            <a:pPr>
+              <a:spcAft>
+                <a:spcPts val="400"/>
+              </a:spcAft>
+            </a:pPr>
+            <a:r>
+              <a:rPr sz="1400" b="0" i="0">
+                <a:solidFill>
+                  <a:srgbClr val="FFFFFF"/>
+                </a:solidFill>
+                <a:latin typeface="Calibri"/>
+              </a:rPr>
+              <a:t>  C --&gt; D</a:t>
+            </a:r>
+          </a:p>
+          <a:p>
+            <a:pPr>
+              <a:spcAft>
+                <a:spcPts val="400"/>
+              </a:spcAft>
+            </a:pPr>
+            <a:r>
+              <a:rPr sz="1400" b="0" i="0">
+                <a:solidFill>
+                  <a:srgbClr val="FFFFFF"/>
+                </a:solidFill>
+                <a:latin typeface="Calibri"/>
+              </a:rPr>
+              <a:t>  D --&gt; E{Campos obligatorios completos?}</a:t>
+            </a:r>
+          </a:p>
+          <a:p>
+            <a:pPr>
+              <a:spcAft>
+                <a:spcPts val="400"/>
+              </a:spcAft>
+            </a:pPr>
+            <a:r>
+              <a:rPr sz="1400" b="0" i="0">
+                <a:solidFill>
+                  <a:srgbClr val="FFFFFF"/>
+                </a:solidFill>
+                <a:latin typeface="Calibri"/>
+              </a:rPr>
+              <a:t>  E -- No --&gt; F[Guardar deshabilitado + ayuda en el campo faltante]</a:t>
+            </a:r>
+          </a:p>
+          <a:p>
+            <a:pPr>
+              <a:spcAft>
+                <a:spcPts val="400"/>
+              </a:spcAft>
+            </a:pPr>
+            <a:r>
+              <a:rPr sz="1400" b="0" i="0">
+                <a:solidFill>
+                  <a:srgbClr val="FFFFFF"/>
+                </a:solidFill>
+                <a:latin typeface="Calibri"/>
+              </a:rPr>
+              <a:t>  F --&gt; D</a:t>
+            </a:r>
+          </a:p>
+          <a:p>
+            <a:pPr>
+              <a:spcAft>
+                <a:spcPts val="400"/>
+              </a:spcAft>
+            </a:pPr>
+            <a:r>
+              <a:rPr sz="1400" b="0" i="0">
+                <a:solidFill>
+                  <a:srgbClr val="FFFFFF"/>
+                </a:solidFill>
+                <a:latin typeface="Calibri"/>
+              </a:rPr>
+              <a:t>  E -- Si --&gt; G[Confirmacion: Ficha guardada, codigo M-0421]</a:t>
+            </a:r>
+          </a:p>
+          <a:p>
+            <a:pPr>
+              <a:spcAft>
+                <a:spcPts val="400"/>
+              </a:spcAft>
+            </a:pPr>
+            <a:r>
+              <a:rPr sz="1400" b="0" i="0">
+                <a:solidFill>
+                  <a:srgbClr val="FFFFFF"/>
+                </a:solidFill>
+                <a:latin typeface="Calibri"/>
+              </a:rPr>
+              <a:t>  G --&gt; H[Pantalla Buscar expediente]</a:t>
+            </a:r>
+          </a:p>
+          <a:p>
+            <a:pPr>
+              <a:spcAft>
+                <a:spcPts val="400"/>
+              </a:spcAft>
+            </a:pPr>
+            <a:r>
+              <a:rPr sz="1400" b="0" i="0">
+                <a:solidFill>
+                  <a:srgbClr val="FFFFFF"/>
+                </a:solidFill>
+                <a:latin typeface="Calibri"/>
+              </a:rPr>
+              <a:t>  H --&gt; I{Cuantos resultados?}</a:t>
+            </a:r>
+          </a:p>
+          <a:p>
+            <a:pPr>
+              <a:spcAft>
+                <a:spcPts val="400"/>
+              </a:spcAft>
+            </a:pPr>
+            <a:r>
+              <a:rPr sz="1400" b="0" i="0">
+                <a:solidFill>
+                  <a:srgbClr val="FFFFFF"/>
+                </a:solidFill>
+                <a:latin typeface="Calibri"/>
+              </a:rPr>
+              <a:t>  I -- Cero --&gt; J[Mensaje sin resultados + Buscar por otro criterio]</a:t>
+            </a:r>
+          </a:p>
+          <a:p>
+            <a:pPr>
+              <a:spcAft>
+                <a:spcPts val="400"/>
+              </a:spcAft>
+            </a:pPr>
+            <a:r>
+              <a:rPr sz="1400" b="0" i="0">
+                <a:solidFill>
+                  <a:srgbClr val="FFFFFF"/>
+                </a:solidFill>
+                <a:latin typeface="Calibri"/>
+              </a:rPr>
+              <a:t>  I -- Varios --&gt; K[Lista con especie, edad y dueño para desambiguar]</a:t>
+            </a:r>
+          </a:p>
+          <a:p>
+            <a:pPr>
+              <a:spcAft>
+                <a:spcPts val="400"/>
+              </a:spcAft>
+            </a:pPr>
+            <a:r>
+              <a:rPr sz="1400" b="0" i="0">
+                <a:solidFill>
+                  <a:srgbClr val="FFFFFF"/>
+                </a:solidFill>
+                <a:latin typeface="Calibri"/>
+              </a:rPr>
+              <a:t>  I -- Uno --&gt; L[Ficha del paciente]</a:t>
+            </a:r>
+          </a:p>
+        </p:txBody>
+      </p:sp>
+      <p:sp>
+        <p:nvSpPr>
+          <p:cNvPr id="9" name="TextBox 8"/>
+          <p:cNvSpPr txBox="1"/>
+          <p:nvPr/>
+        </p:nvSpPr>
+        <p:spPr>
+          <a:xfrm>
+            <a:off x="457200" y="6080760"/>
+            <a:ext cx="11277295" cy="320040"/>
+          </a:xfrm>
+          <a:prstGeom prst="rect">
+            <a:avLst/>
+          </a:prstGeom>
+          <a:noFill/>
+        </p:spPr>
+        <p:txBody>
+          <a:bodyPr wrap="square">
+            <a:spAutoFit/>
+          </a:bodyPr>
+          <a:lstStyle/>
+          <a:p>
+            <a:pPr algn="ctr"/>
+            <a:r>
+              <a:rPr sz="1200" b="0" i="1">
+                <a:solidFill>
+                  <a:srgbClr val="666666"/>
+                </a:solidFill>
+                <a:latin typeface="Calibri"/>
+              </a:rPr>
+              <a:t>La interfaz no son pantallas sueltas: es un camino con desvios, y los desvios son los que hay que diseñar.</a:t>
+            </a:r>
+          </a:p>
+        </p:txBody>
+      </p:sp>
+      <p:sp>
+        <p:nvSpPr>
+          <p:cNvPr id="10" name="TextBox 9"/>
           <p:cNvSpPr txBox="1"/>
           <p:nvPr/>
         </p:nvSpPr>
@@ -4448,7 +4761,7 @@
                 </a:solidFill>
                 <a:latin typeface="Calibri"/>
               </a:rPr>
-              <a:t>Una interfaz se puede evaluar sin programarla, y esa es una de las... (2/2)</a:t>
+              <a:t>Demo del dia</a:t>
             </a:r>
           </a:p>
         </p:txBody>
@@ -4487,7 +4800,25 @@
                 </a:solidFill>
                 <a:latin typeface="Calibri"/>
               </a:rPr>
-              <a:t>–   Para VetCare hay que evaluar pensando en la usuaria real, que es la recepcionista de Huellitas: no es experta en computadores, escribe lento, contesta el telefono mientras registra y tiene un perro ladrando al lado.</a:t>
+              <a:t>–   </a:t>
+            </a:r>
+            <a:r>
+              <a:rPr sz="2000" b="1" i="0">
+                <a:solidFill>
+                  <a:srgbClr val="333333"/>
+                </a:solidFill>
+                <a:latin typeface="Calibri"/>
+              </a:rPr>
+              <a:t>Herramienta:</a:t>
+            </a:r>
+            <a:r>
+              <a:rPr sz="2000" b="0" i="0">
+                <a:solidFill>
+                  <a:srgbClr val="333333"/>
+                </a:solidFill>
+                <a:latin typeface="Calibri"/>
+              </a:rPr>
+              <a:t> Figma o Penpot · Excalidraw · Google Docs</a:t>
             </a:r>
           </a:p>
           <a:p>
@@ -4503,7 +4834,25 @@
                 </a:solidFill>
                 <a:latin typeface="Calibri"/>
               </a:rPr>
-              <a:t>–   Eso obliga a decisiones de diseño concretas: letra grande, pocos campos obligatorios, nada de scroll interminable, tolerancia a la interrupcion para que si la llaman y vuelve en tres minutos no haya perdido lo escrito</a:t>
+              <a:t>–   </a:t>
+            </a:r>
+            <a:r>
+              <a:rPr sz="2000" b="1" i="0">
+                <a:solidFill>
+                  <a:srgbClr val="333333"/>
+                </a:solidFill>
+                <a:latin typeface="Calibri"/>
+              </a:rPr>
+              <a:t>Demo:</a:t>
+            </a:r>
+            <a:r>
+              <a:rPr sz="2000" b="0" i="0">
+                <a:solidFill>
+                  <a:srgbClr val="333333"/>
+                </a:solidFill>
+                <a:latin typeface="Calibri"/>
+              </a:rPr>
+              <a:t> El docente dibuja en vivo el wireframe de Registrar mascota en Penpot, le pone tres anotaciones numeradas y lo conecta con Buscar expediente para que la clase vea en la misma pantalla la diferencia entre wireframe, mockup y prototipo.</a:t>
             </a:r>
           </a:p>
           <a:p>
@@ -4519,7 +4868,7 @@
                 </a:solidFill>
                 <a:latin typeface="Calibri"/>
               </a:rPr>
-              <a:t>–   Y mensajes en lenguaje de clinica y no de sistemas, es decir Esta mascota ya tiene ficha en la clinica y no Violacion de restriccion de unicidad.</a:t>
+              <a:t>–   Mismo dominio VetCare — no otro ejemplo. Aqui se diseña, no se programa.</a:t>
             </a:r>
           </a:p>
         </p:txBody>
@@ -4594,7 +4943,7 @@
         <p:spPr>
           <a:xfrm>
             <a:off x="0" y="0"/>
-            <a:ext cx="12191695" cy="960120"/>
+            <a:ext cx="12191695" cy="1170432"/>
           </a:xfrm>
           <a:prstGeom prst="rect">
             <a:avLst/>
@@ -4636,7 +4985,7 @@
         </p:nvSpPr>
         <p:spPr>
           <a:xfrm>
-            <a:off x="0" y="960120"/>
+            <a:off x="0" y="1170432"/>
             <a:ext cx="12191695" cy="41148"/>
           </a:xfrm>
           <a:prstGeom prst="rect">
@@ -4680,7 +5029,7 @@
         <p:spPr>
           <a:xfrm>
             <a:off x="457200" y="164592"/>
-            <a:ext cx="11277295" cy="502920"/>
+            <a:ext cx="11277295" cy="384048"/>
           </a:xfrm>
           <a:prstGeom prst="rect">
             <a:avLst/>
@@ -4700,21 +5049,55 @@
                 </a:solidFill>
                 <a:latin typeface="Calibri"/>
               </a:rPr>
-              <a:t>Flujo de tarea de VetCare en Mermaid: registrar mascota y buscar expediente con caminos alternos</a:t>
-            </a:r>
-          </a:p>
-        </p:txBody>
-      </p:sp>
-      <p:sp>
-        <p:nvSpPr>
-          <p:cNvPr id="5" name="Rounded Rectangle 4"/>
+              <a:t>Herramientas de hoy</a:t>
+            </a:r>
+          </a:p>
+        </p:txBody>
+      </p:sp>
+      <p:sp>
+        <p:nvSpPr>
+          <p:cNvPr id="5" name="TextBox 4"/>
+          <p:cNvSpPr txBox="1"/>
+          <p:nvPr/>
+        </p:nvSpPr>
+        <p:spPr>
+          <a:xfrm>
+            <a:off x="457200" y="566928"/>
+            <a:ext cx="11277295" cy="411480"/>
+          </a:xfrm>
+          <a:prstGeom prst="rect">
+            <a:avLst/>
+          </a:prstGeom>
+          <a:noFill/>
+        </p:spPr>
+        <p:txBody>
+          <a:bodyPr wrap="square">
+            <a:spAutoFit/>
+          </a:bodyPr>
+          <a:lstStyle/>
+          <a:p>
+            <a:r>
+              <a:rPr sz="1400" b="0" i="0">
+                <a:solidFill>
+                  <a:srgbClr val="B8D8EE"/>
+                </a:solidFill>
+                <a:latin typeface="Calibri"/>
+              </a:rPr>
+              <a:t>Gratis · funcionan en el navegador</a:t>
+            </a:r>
+          </a:p>
+        </p:txBody>
+      </p:sp>
+      <p:sp>
+        <p:nvSpPr>
+          <p:cNvPr id="6" name="Rounded Rectangle 5"/>
           <p:cNvSpPr/>
           <p:nvPr/>
         </p:nvSpPr>
         <p:spPr>
           <a:xfrm>
-            <a:off x="457200" y="1261872"/>
-            <a:ext cx="11277295" cy="4773168"/>
+            <a:off x="457200" y="1591056"/>
+            <a:ext cx="3624986" cy="2299716"/>
           </a:xfrm>
           <a:prstGeom prst="roundRect">
             <a:avLst>
@@ -4722,7 +5105,7 @@
             </a:avLst>
           </a:prstGeom>
           <a:solidFill>
-            <a:srgbClr val="1E2A38"/>
+            <a:srgbClr val="F2F2F2"/>
           </a:solidFill>
           <a:ln>
             <a:noFill/>
@@ -4752,14 +5135,14 @@
       </p:sp>
       <p:sp>
         <p:nvSpPr>
-          <p:cNvPr id="6" name="Rectangle 5"/>
+          <p:cNvPr id="7" name="Rectangle 6"/>
           <p:cNvSpPr/>
           <p:nvPr/>
         </p:nvSpPr>
         <p:spPr>
           <a:xfrm>
-            <a:off x="457200" y="1261872"/>
-            <a:ext cx="11277295" cy="320040"/>
+            <a:off x="457200" y="1591056"/>
+            <a:ext cx="3624986" cy="64008"/>
           </a:xfrm>
           <a:prstGeom prst="rect">
             <a:avLst/>
@@ -4795,14 +5178,81 @@
       </p:sp>
       <p:sp>
         <p:nvSpPr>
-          <p:cNvPr id="7" name="TextBox 6"/>
+          <p:cNvPr id="8" name="Rectangle 7"/>
+          <p:cNvSpPr/>
+          <p:nvPr/>
+        </p:nvSpPr>
+        <p:spPr>
+          <a:xfrm>
+            <a:off x="457200" y="1655064"/>
+            <a:ext cx="3624986" cy="27432"/>
+          </a:xfrm>
+          <a:prstGeom prst="rect">
+            <a:avLst/>
+          </a:prstGeom>
+          <a:solidFill>
+            <a:srgbClr val="FFD000"/>
+          </a:solidFill>
+          <a:ln>
+            <a:noFill/>
+          </a:ln>
+        </p:spPr>
+        <p:style>
+          <a:lnRef idx="1">
+            <a:schemeClr val="accent1"/>
+          </a:lnRef>
+          <a:fillRef idx="3">
+            <a:schemeClr val="accent1"/>
+          </a:fillRef>
+          <a:effectRef idx="2">
+            <a:schemeClr val="accent1"/>
+          </a:effectRef>
+          <a:fontRef idx="minor">
+            <a:schemeClr val="lt1"/>
+          </a:fontRef>
+        </p:style>
+        <p:txBody>
+          <a:bodyPr rtlCol="0" anchor="ctr"/>
+          <a:lstStyle/>
+          <a:p>
+            <a:pPr algn="ctr"/>
+          </a:p>
+        </p:txBody>
+      </p:sp>
+      <p:pic>
+        <p:nvPicPr>
+          <p:cNvPr id="9" name="Picture 8" descr="excalidraw.png"/>
+          <p:cNvPicPr>
+            <a:picLocks noChangeAspect="1"/>
+          </p:cNvPicPr>
+          <p:nvPr/>
+        </p:nvPicPr>
+        <p:blipFill>
+          <a:blip r:embed="rId2"/>
+          <a:stretch>
+            <a:fillRect/>
+          </a:stretch>
+        </p:blipFill>
+        <p:spPr>
+          <a:xfrm>
+            <a:off x="1659331" y="1847087"/>
+            <a:ext cx="1220724" cy="1220724"/>
+          </a:xfrm>
+          <a:prstGeom prst="rect">
+            <a:avLst/>
+          </a:prstGeom>
+        </p:spPr>
+      </p:pic>
+      <p:sp>
+        <p:nvSpPr>
+          <p:cNvPr id="10" name="TextBox 9"/>
           <p:cNvSpPr txBox="1"/>
           <p:nvPr/>
         </p:nvSpPr>
         <p:spPr>
           <a:xfrm>
-            <a:off x="685800" y="1307592"/>
-            <a:ext cx="10820095" cy="256032"/>
+            <a:off x="530352" y="3159251"/>
+            <a:ext cx="3478682" cy="621792"/>
           </a:xfrm>
           <a:prstGeom prst="rect">
             <a:avLst/>
@@ -4810,31 +5260,461 @@
           <a:noFill/>
         </p:spPr>
         <p:txBody>
+          <a:bodyPr wrap="square" anchor="t"/>
+          <a:lstStyle/>
+          <a:p>
+            <a:pPr algn="ctr"/>
+            <a:r>
+              <a:rPr sz="1300" b="1" i="0">
+                <a:solidFill>
+                  <a:srgbClr val="095292"/>
+                </a:solidFill>
+                <a:latin typeface="Calibri"/>
+              </a:rPr>
+              <a:t>Excalidraw</a:t>
+            </a:r>
+          </a:p>
+          <a:p>
+            <a:pPr algn="ctr">
+              <a:spcBef>
+                <a:spcPts val="200"/>
+              </a:spcBef>
+            </a:pPr>
+            <a:r>
+              <a:rPr sz="1000" b="0" i="0">
+                <a:solidFill>
+                  <a:srgbClr val="666666"/>
+                </a:solidFill>
+                <a:latin typeface="Calibri"/>
+              </a:rPr>
+              <a:t>Bocetos rapidos a mano alzada</a:t>
+            </a:r>
+          </a:p>
+        </p:txBody>
+      </p:sp>
+      <p:sp>
+        <p:nvSpPr>
+          <p:cNvPr id="11" name="Rounded Rectangle 10"/>
+          <p:cNvSpPr/>
+          <p:nvPr/>
+        </p:nvSpPr>
+        <p:spPr>
+          <a:xfrm>
+            <a:off x="4283354" y="1591056"/>
+            <a:ext cx="3624986" cy="2299716"/>
+          </a:xfrm>
+          <a:prstGeom prst="roundRect">
+            <a:avLst>
+              <a:gd name="adj" fmla="val 12000"/>
+            </a:avLst>
+          </a:prstGeom>
+          <a:solidFill>
+            <a:srgbClr val="F2F2F2"/>
+          </a:solidFill>
+          <a:ln>
+            <a:noFill/>
+          </a:ln>
+        </p:spPr>
+        <p:style>
+          <a:lnRef idx="1">
+            <a:schemeClr val="accent1"/>
+          </a:lnRef>
+          <a:fillRef idx="3">
+            <a:schemeClr val="accent1"/>
+          </a:fillRef>
+          <a:effectRef idx="2">
+            <a:schemeClr val="accent1"/>
+          </a:effectRef>
+          <a:fontRef idx="minor">
+            <a:schemeClr val="lt1"/>
+          </a:fontRef>
+        </p:style>
+        <p:txBody>
+          <a:bodyPr rtlCol="0" anchor="ctr"/>
+          <a:lstStyle/>
+          <a:p>
+            <a:pPr algn="ctr"/>
+          </a:p>
+        </p:txBody>
+      </p:sp>
+      <p:sp>
+        <p:nvSpPr>
+          <p:cNvPr id="12" name="Rectangle 11"/>
+          <p:cNvSpPr/>
+          <p:nvPr/>
+        </p:nvSpPr>
+        <p:spPr>
+          <a:xfrm>
+            <a:off x="4283354" y="1591056"/>
+            <a:ext cx="3624986" cy="64008"/>
+          </a:xfrm>
+          <a:prstGeom prst="rect">
+            <a:avLst/>
+          </a:prstGeom>
+          <a:solidFill>
+            <a:srgbClr val="095292"/>
+          </a:solidFill>
+          <a:ln>
+            <a:noFill/>
+          </a:ln>
+        </p:spPr>
+        <p:style>
+          <a:lnRef idx="1">
+            <a:schemeClr val="accent1"/>
+          </a:lnRef>
+          <a:fillRef idx="3">
+            <a:schemeClr val="accent1"/>
+          </a:fillRef>
+          <a:effectRef idx="2">
+            <a:schemeClr val="accent1"/>
+          </a:effectRef>
+          <a:fontRef idx="minor">
+            <a:schemeClr val="lt1"/>
+          </a:fontRef>
+        </p:style>
+        <p:txBody>
+          <a:bodyPr rtlCol="0" anchor="ctr"/>
+          <a:lstStyle/>
+          <a:p>
+            <a:pPr algn="ctr"/>
+          </a:p>
+        </p:txBody>
+      </p:sp>
+      <p:sp>
+        <p:nvSpPr>
+          <p:cNvPr id="13" name="Rectangle 12"/>
+          <p:cNvSpPr/>
+          <p:nvPr/>
+        </p:nvSpPr>
+        <p:spPr>
+          <a:xfrm>
+            <a:off x="4283354" y="1655064"/>
+            <a:ext cx="3624986" cy="27432"/>
+          </a:xfrm>
+          <a:prstGeom prst="rect">
+            <a:avLst/>
+          </a:prstGeom>
+          <a:solidFill>
+            <a:srgbClr val="FFD000"/>
+          </a:solidFill>
+          <a:ln>
+            <a:noFill/>
+          </a:ln>
+        </p:spPr>
+        <p:style>
+          <a:lnRef idx="1">
+            <a:schemeClr val="accent1"/>
+          </a:lnRef>
+          <a:fillRef idx="3">
+            <a:schemeClr val="accent1"/>
+          </a:fillRef>
+          <a:effectRef idx="2">
+            <a:schemeClr val="accent1"/>
+          </a:effectRef>
+          <a:fontRef idx="minor">
+            <a:schemeClr val="lt1"/>
+          </a:fontRef>
+        </p:style>
+        <p:txBody>
+          <a:bodyPr rtlCol="0" anchor="ctr"/>
+          <a:lstStyle/>
+          <a:p>
+            <a:pPr algn="ctr"/>
+          </a:p>
+        </p:txBody>
+      </p:sp>
+      <p:pic>
+        <p:nvPicPr>
+          <p:cNvPr id="14" name="Picture 13" descr="google_docs.png"/>
+          <p:cNvPicPr>
+            <a:picLocks noChangeAspect="1"/>
+          </p:cNvPicPr>
+          <p:nvPr/>
+        </p:nvPicPr>
+        <p:blipFill>
+          <a:blip r:embed="rId3"/>
+          <a:stretch>
+            <a:fillRect/>
+          </a:stretch>
+        </p:blipFill>
+        <p:spPr>
+          <a:xfrm>
+            <a:off x="5485485" y="1847087"/>
+            <a:ext cx="1220724" cy="1220724"/>
+          </a:xfrm>
+          <a:prstGeom prst="rect">
+            <a:avLst/>
+          </a:prstGeom>
+        </p:spPr>
+      </p:pic>
+      <p:sp>
+        <p:nvSpPr>
+          <p:cNvPr id="15" name="TextBox 14"/>
+          <p:cNvSpPr txBox="1"/>
+          <p:nvPr/>
+        </p:nvSpPr>
+        <p:spPr>
+          <a:xfrm>
+            <a:off x="4356506" y="3159251"/>
+            <a:ext cx="3478682" cy="621792"/>
+          </a:xfrm>
+          <a:prstGeom prst="rect">
+            <a:avLst/>
+          </a:prstGeom>
+          <a:noFill/>
+        </p:spPr>
+        <p:txBody>
+          <a:bodyPr wrap="square" anchor="t"/>
+          <a:lstStyle/>
+          <a:p>
+            <a:pPr algn="ctr"/>
+            <a:r>
+              <a:rPr sz="1300" b="1" i="0">
+                <a:solidFill>
+                  <a:srgbClr val="095292"/>
+                </a:solidFill>
+                <a:latin typeface="Calibri"/>
+              </a:rPr>
+              <a:t>google docs</a:t>
+            </a:r>
+          </a:p>
+          <a:p>
+            <a:pPr algn="ctr">
+              <a:spcBef>
+                <a:spcPts val="200"/>
+              </a:spcBef>
+            </a:pPr>
+            <a:r>
+              <a:rPr sz="1000" b="0" i="0">
+                <a:solidFill>
+                  <a:srgbClr val="666666"/>
+                </a:solidFill>
+                <a:latin typeface="Calibri"/>
+              </a:rPr>
+              <a:t>Documentos del paquete de diseño</a:t>
+            </a:r>
+          </a:p>
+        </p:txBody>
+      </p:sp>
+      <p:sp>
+        <p:nvSpPr>
+          <p:cNvPr id="16" name="Rounded Rectangle 15"/>
+          <p:cNvSpPr/>
+          <p:nvPr/>
+        </p:nvSpPr>
+        <p:spPr>
+          <a:xfrm>
+            <a:off x="8109508" y="1591056"/>
+            <a:ext cx="3624986" cy="2299716"/>
+          </a:xfrm>
+          <a:prstGeom prst="roundRect">
+            <a:avLst>
+              <a:gd name="adj" fmla="val 12000"/>
+            </a:avLst>
+          </a:prstGeom>
+          <a:solidFill>
+            <a:srgbClr val="F2F2F2"/>
+          </a:solidFill>
+          <a:ln>
+            <a:noFill/>
+          </a:ln>
+        </p:spPr>
+        <p:style>
+          <a:lnRef idx="1">
+            <a:schemeClr val="accent1"/>
+          </a:lnRef>
+          <a:fillRef idx="3">
+            <a:schemeClr val="accent1"/>
+          </a:fillRef>
+          <a:effectRef idx="2">
+            <a:schemeClr val="accent1"/>
+          </a:effectRef>
+          <a:fontRef idx="minor">
+            <a:schemeClr val="lt1"/>
+          </a:fontRef>
+        </p:style>
+        <p:txBody>
+          <a:bodyPr rtlCol="0" anchor="ctr"/>
+          <a:lstStyle/>
+          <a:p>
+            <a:pPr algn="ctr"/>
+          </a:p>
+        </p:txBody>
+      </p:sp>
+      <p:sp>
+        <p:nvSpPr>
+          <p:cNvPr id="17" name="Rectangle 16"/>
+          <p:cNvSpPr/>
+          <p:nvPr/>
+        </p:nvSpPr>
+        <p:spPr>
+          <a:xfrm>
+            <a:off x="8109508" y="1591056"/>
+            <a:ext cx="3624986" cy="64008"/>
+          </a:xfrm>
+          <a:prstGeom prst="rect">
+            <a:avLst/>
+          </a:prstGeom>
+          <a:solidFill>
+            <a:srgbClr val="095292"/>
+          </a:solidFill>
+          <a:ln>
+            <a:noFill/>
+          </a:ln>
+        </p:spPr>
+        <p:style>
+          <a:lnRef idx="1">
+            <a:schemeClr val="accent1"/>
+          </a:lnRef>
+          <a:fillRef idx="3">
+            <a:schemeClr val="accent1"/>
+          </a:fillRef>
+          <a:effectRef idx="2">
+            <a:schemeClr val="accent1"/>
+          </a:effectRef>
+          <a:fontRef idx="minor">
+            <a:schemeClr val="lt1"/>
+          </a:fontRef>
+        </p:style>
+        <p:txBody>
+          <a:bodyPr rtlCol="0" anchor="ctr"/>
+          <a:lstStyle/>
+          <a:p>
+            <a:pPr algn="ctr"/>
+          </a:p>
+        </p:txBody>
+      </p:sp>
+      <p:sp>
+        <p:nvSpPr>
+          <p:cNvPr id="18" name="Rectangle 17"/>
+          <p:cNvSpPr/>
+          <p:nvPr/>
+        </p:nvSpPr>
+        <p:spPr>
+          <a:xfrm>
+            <a:off x="8109508" y="1655064"/>
+            <a:ext cx="3624986" cy="27432"/>
+          </a:xfrm>
+          <a:prstGeom prst="rect">
+            <a:avLst/>
+          </a:prstGeom>
+          <a:solidFill>
+            <a:srgbClr val="FFD000"/>
+          </a:solidFill>
+          <a:ln>
+            <a:noFill/>
+          </a:ln>
+        </p:spPr>
+        <p:style>
+          <a:lnRef idx="1">
+            <a:schemeClr val="accent1"/>
+          </a:lnRef>
+          <a:fillRef idx="3">
+            <a:schemeClr val="accent1"/>
+          </a:fillRef>
+          <a:effectRef idx="2">
+            <a:schemeClr val="accent1"/>
+          </a:effectRef>
+          <a:fontRef idx="minor">
+            <a:schemeClr val="lt1"/>
+          </a:fontRef>
+        </p:style>
+        <p:txBody>
+          <a:bodyPr rtlCol="0" anchor="ctr"/>
+          <a:lstStyle/>
+          <a:p>
+            <a:pPr algn="ctr"/>
+          </a:p>
+        </p:txBody>
+      </p:sp>
+      <p:sp>
+        <p:nvSpPr>
+          <p:cNvPr id="19" name="Rounded Rectangle 18"/>
+          <p:cNvSpPr/>
+          <p:nvPr/>
+        </p:nvSpPr>
+        <p:spPr>
+          <a:xfrm>
+            <a:off x="9311640" y="1847087"/>
+            <a:ext cx="1220724" cy="1220724"/>
+          </a:xfrm>
+          <a:prstGeom prst="roundRect">
+            <a:avLst>
+              <a:gd name="adj" fmla="val 12000"/>
+            </a:avLst>
+          </a:prstGeom>
+          <a:solidFill>
+            <a:srgbClr val="E8F4FA"/>
+          </a:solidFill>
+          <a:ln>
+            <a:noFill/>
+          </a:ln>
+        </p:spPr>
+        <p:style>
+          <a:lnRef idx="1">
+            <a:schemeClr val="accent1"/>
+          </a:lnRef>
+          <a:fillRef idx="3">
+            <a:schemeClr val="accent1"/>
+          </a:fillRef>
+          <a:effectRef idx="2">
+            <a:schemeClr val="accent1"/>
+          </a:effectRef>
+          <a:fontRef idx="minor">
+            <a:schemeClr val="lt1"/>
+          </a:fontRef>
+        </p:style>
+        <p:txBody>
+          <a:bodyPr rtlCol="0" anchor="ctr"/>
+          <a:lstStyle/>
+          <a:p>
+            <a:pPr algn="ctr"/>
+          </a:p>
+        </p:txBody>
+      </p:sp>
+      <p:sp>
+        <p:nvSpPr>
+          <p:cNvPr id="20" name="TextBox 19"/>
+          <p:cNvSpPr txBox="1"/>
+          <p:nvPr/>
+        </p:nvSpPr>
+        <p:spPr>
+          <a:xfrm>
+            <a:off x="9311640" y="1847087"/>
+            <a:ext cx="1220724" cy="1220724"/>
+          </a:xfrm>
+          <a:prstGeom prst="rect">
+            <a:avLst/>
+          </a:prstGeom>
+          <a:noFill/>
+        </p:spPr>
+        <p:txBody>
           <a:bodyPr wrap="square" anchor="ctr"/>
           <a:lstStyle/>
           <a:p>
-            <a:r>
-              <a:rPr sz="1000" b="1" i="0">
-                <a:solidFill>
-                  <a:srgbClr val="269CCB"/>
-                </a:solidFill>
-                <a:latin typeface="Calibri"/>
-              </a:rPr>
-              <a:t>● ● ●</a:t>
-            </a:r>
-          </a:p>
-        </p:txBody>
-      </p:sp>
-      <p:sp>
-        <p:nvSpPr>
-          <p:cNvPr id="8" name="TextBox 7"/>
+            <a:pPr algn="ctr"/>
+            <a:r>
+              <a:rPr sz="1600" b="1" i="0">
+                <a:solidFill>
+                  <a:srgbClr val="095292"/>
+                </a:solidFill>
+                <a:latin typeface="Calibri"/>
+              </a:rPr>
+              <a:t>F</a:t>
+            </a:r>
+          </a:p>
+        </p:txBody>
+      </p:sp>
+      <p:sp>
+        <p:nvSpPr>
+          <p:cNvPr id="21" name="TextBox 20"/>
           <p:cNvSpPr txBox="1"/>
           <p:nvPr/>
         </p:nvSpPr>
         <p:spPr>
           <a:xfrm>
-            <a:off x="777240" y="1719072"/>
-            <a:ext cx="10637215" cy="4133087"/>
+            <a:off x="8182660" y="3159251"/>
+            <a:ext cx="3478682" cy="621792"/>
           </a:xfrm>
           <a:prstGeom prst="rect">
             <a:avLst/>
@@ -4842,274 +5722,503 @@
           <a:noFill/>
         </p:spPr>
         <p:txBody>
-          <a:bodyPr wrap="square">
-            <a:spAutoFit/>
-          </a:bodyPr>
-          <a:lstStyle/>
-          <a:p>
-            <a:pPr>
-              <a:spcAft>
-                <a:spcPts val="400"/>
-              </a:spcAft>
+          <a:bodyPr wrap="square" anchor="t"/>
+          <a:lstStyle/>
+          <a:p>
+            <a:pPr algn="ctr"/>
+            <a:r>
+              <a:rPr sz="1300" b="1" i="0">
+                <a:solidFill>
+                  <a:srgbClr val="095292"/>
+                </a:solidFill>
+                <a:latin typeface="Calibri"/>
+              </a:rPr>
+              <a:t>Figma</a:t>
+            </a:r>
+          </a:p>
+          <a:p>
+            <a:pPr algn="ctr">
+              <a:spcBef>
+                <a:spcPts val="200"/>
+              </a:spcBef>
             </a:pPr>
             <a:r>
-              <a:rPr sz="1400" b="0" i="0">
-                <a:solidFill>
-                  <a:srgbClr val="FFFFFF"/>
-                </a:solidFill>
-                <a:latin typeface="Calibri"/>
-              </a:rPr>
-              <a:t>flowchart TD</a:t>
-            </a:r>
-          </a:p>
-          <a:p>
-            <a:pPr>
-              <a:spcAft>
-                <a:spcPts val="400"/>
-              </a:spcAft>
+              <a:rPr sz="1000" b="0" i="0">
+                <a:solidFill>
+                  <a:srgbClr val="666666"/>
+                </a:solidFill>
+                <a:latin typeface="Calibri"/>
+              </a:rPr>
+              <a:t>Wireframes y prototipo navegable</a:t>
+            </a:r>
+          </a:p>
+        </p:txBody>
+      </p:sp>
+      <p:sp>
+        <p:nvSpPr>
+          <p:cNvPr id="22" name="Rounded Rectangle 21"/>
+          <p:cNvSpPr/>
+          <p:nvPr/>
+        </p:nvSpPr>
+        <p:spPr>
+          <a:xfrm>
+            <a:off x="2370277" y="4055364"/>
+            <a:ext cx="3624986" cy="2299716"/>
+          </a:xfrm>
+          <a:prstGeom prst="roundRect">
+            <a:avLst>
+              <a:gd name="adj" fmla="val 12000"/>
+            </a:avLst>
+          </a:prstGeom>
+          <a:solidFill>
+            <a:srgbClr val="F2F2F2"/>
+          </a:solidFill>
+          <a:ln>
+            <a:noFill/>
+          </a:ln>
+        </p:spPr>
+        <p:style>
+          <a:lnRef idx="1">
+            <a:schemeClr val="accent1"/>
+          </a:lnRef>
+          <a:fillRef idx="3">
+            <a:schemeClr val="accent1"/>
+          </a:fillRef>
+          <a:effectRef idx="2">
+            <a:schemeClr val="accent1"/>
+          </a:effectRef>
+          <a:fontRef idx="minor">
+            <a:schemeClr val="lt1"/>
+          </a:fontRef>
+        </p:style>
+        <p:txBody>
+          <a:bodyPr rtlCol="0" anchor="ctr"/>
+          <a:lstStyle/>
+          <a:p>
+            <a:pPr algn="ctr"/>
+          </a:p>
+        </p:txBody>
+      </p:sp>
+      <p:sp>
+        <p:nvSpPr>
+          <p:cNvPr id="23" name="Rectangle 22"/>
+          <p:cNvSpPr/>
+          <p:nvPr/>
+        </p:nvSpPr>
+        <p:spPr>
+          <a:xfrm>
+            <a:off x="2370277" y="4055364"/>
+            <a:ext cx="3624986" cy="64008"/>
+          </a:xfrm>
+          <a:prstGeom prst="rect">
+            <a:avLst/>
+          </a:prstGeom>
+          <a:solidFill>
+            <a:srgbClr val="095292"/>
+          </a:solidFill>
+          <a:ln>
+            <a:noFill/>
+          </a:ln>
+        </p:spPr>
+        <p:style>
+          <a:lnRef idx="1">
+            <a:schemeClr val="accent1"/>
+          </a:lnRef>
+          <a:fillRef idx="3">
+            <a:schemeClr val="accent1"/>
+          </a:fillRef>
+          <a:effectRef idx="2">
+            <a:schemeClr val="accent1"/>
+          </a:effectRef>
+          <a:fontRef idx="minor">
+            <a:schemeClr val="lt1"/>
+          </a:fontRef>
+        </p:style>
+        <p:txBody>
+          <a:bodyPr rtlCol="0" anchor="ctr"/>
+          <a:lstStyle/>
+          <a:p>
+            <a:pPr algn="ctr"/>
+          </a:p>
+        </p:txBody>
+      </p:sp>
+      <p:sp>
+        <p:nvSpPr>
+          <p:cNvPr id="24" name="Rectangle 23"/>
+          <p:cNvSpPr/>
+          <p:nvPr/>
+        </p:nvSpPr>
+        <p:spPr>
+          <a:xfrm>
+            <a:off x="2370277" y="4119372"/>
+            <a:ext cx="3624986" cy="27432"/>
+          </a:xfrm>
+          <a:prstGeom prst="rect">
+            <a:avLst/>
+          </a:prstGeom>
+          <a:solidFill>
+            <a:srgbClr val="FFD000"/>
+          </a:solidFill>
+          <a:ln>
+            <a:noFill/>
+          </a:ln>
+        </p:spPr>
+        <p:style>
+          <a:lnRef idx="1">
+            <a:schemeClr val="accent1"/>
+          </a:lnRef>
+          <a:fillRef idx="3">
+            <a:schemeClr val="accent1"/>
+          </a:fillRef>
+          <a:effectRef idx="2">
+            <a:schemeClr val="accent1"/>
+          </a:effectRef>
+          <a:fontRef idx="minor">
+            <a:schemeClr val="lt1"/>
+          </a:fontRef>
+        </p:style>
+        <p:txBody>
+          <a:bodyPr rtlCol="0" anchor="ctr"/>
+          <a:lstStyle/>
+          <a:p>
+            <a:pPr algn="ctr"/>
+          </a:p>
+        </p:txBody>
+      </p:sp>
+      <p:sp>
+        <p:nvSpPr>
+          <p:cNvPr id="25" name="Rounded Rectangle 24"/>
+          <p:cNvSpPr/>
+          <p:nvPr/>
+        </p:nvSpPr>
+        <p:spPr>
+          <a:xfrm>
+            <a:off x="3572408" y="4311396"/>
+            <a:ext cx="1220724" cy="1220724"/>
+          </a:xfrm>
+          <a:prstGeom prst="roundRect">
+            <a:avLst>
+              <a:gd name="adj" fmla="val 12000"/>
+            </a:avLst>
+          </a:prstGeom>
+          <a:solidFill>
+            <a:srgbClr val="E8F4FA"/>
+          </a:solidFill>
+          <a:ln>
+            <a:noFill/>
+          </a:ln>
+        </p:spPr>
+        <p:style>
+          <a:lnRef idx="1">
+            <a:schemeClr val="accent1"/>
+          </a:lnRef>
+          <a:fillRef idx="3">
+            <a:schemeClr val="accent1"/>
+          </a:fillRef>
+          <a:effectRef idx="2">
+            <a:schemeClr val="accent1"/>
+          </a:effectRef>
+          <a:fontRef idx="minor">
+            <a:schemeClr val="lt1"/>
+          </a:fontRef>
+        </p:style>
+        <p:txBody>
+          <a:bodyPr rtlCol="0" anchor="ctr"/>
+          <a:lstStyle/>
+          <a:p>
+            <a:pPr algn="ctr"/>
+          </a:p>
+        </p:txBody>
+      </p:sp>
+      <p:sp>
+        <p:nvSpPr>
+          <p:cNvPr id="26" name="TextBox 25"/>
+          <p:cNvSpPr txBox="1"/>
+          <p:nvPr/>
+        </p:nvSpPr>
+        <p:spPr>
+          <a:xfrm>
+            <a:off x="3572408" y="4311396"/>
+            <a:ext cx="1220724" cy="1220724"/>
+          </a:xfrm>
+          <a:prstGeom prst="rect">
+            <a:avLst/>
+          </a:prstGeom>
+          <a:noFill/>
+        </p:spPr>
+        <p:txBody>
+          <a:bodyPr wrap="square" anchor="ctr"/>
+          <a:lstStyle/>
+          <a:p>
+            <a:pPr algn="ctr"/>
+            <a:r>
+              <a:rPr sz="1600" b="1" i="0">
+                <a:solidFill>
+                  <a:srgbClr val="095292"/>
+                </a:solidFill>
+                <a:latin typeface="Calibri"/>
+              </a:rPr>
+              <a:t>P</a:t>
+            </a:r>
+          </a:p>
+        </p:txBody>
+      </p:sp>
+      <p:sp>
+        <p:nvSpPr>
+          <p:cNvPr id="27" name="TextBox 26"/>
+          <p:cNvSpPr txBox="1"/>
+          <p:nvPr/>
+        </p:nvSpPr>
+        <p:spPr>
+          <a:xfrm>
+            <a:off x="2443429" y="5623560"/>
+            <a:ext cx="3478682" cy="621792"/>
+          </a:xfrm>
+          <a:prstGeom prst="rect">
+            <a:avLst/>
+          </a:prstGeom>
+          <a:noFill/>
+        </p:spPr>
+        <p:txBody>
+          <a:bodyPr wrap="square" anchor="t"/>
+          <a:lstStyle/>
+          <a:p>
+            <a:pPr algn="ctr"/>
+            <a:r>
+              <a:rPr sz="1300" b="1" i="0">
+                <a:solidFill>
+                  <a:srgbClr val="095292"/>
+                </a:solidFill>
+                <a:latin typeface="Calibri"/>
+              </a:rPr>
+              <a:t>Penpot</a:t>
+            </a:r>
+          </a:p>
+          <a:p>
+            <a:pPr algn="ctr">
+              <a:spcBef>
+                <a:spcPts val="200"/>
+              </a:spcBef>
             </a:pPr>
             <a:r>
-              <a:rPr sz="1400" b="0" i="0">
-                <a:solidFill>
-                  <a:srgbClr val="FFFFFF"/>
-                </a:solidFill>
-                <a:latin typeface="Calibri"/>
-              </a:rPr>
-              <a:t>  A[Recepcion: llega el dueño con su mascota] --&gt; B{Dueño ya registrado?}</a:t>
-            </a:r>
-          </a:p>
-          <a:p>
-            <a:pPr>
-              <a:spcAft>
-                <a:spcPts val="400"/>
-              </a:spcAft>
+              <a:rPr sz="1000" b="0" i="0">
+                <a:solidFill>
+                  <a:srgbClr val="666666"/>
+                </a:solidFill>
+                <a:latin typeface="Calibri"/>
+              </a:rPr>
+              <a:t>Alternativa libre a Figma</a:t>
+            </a:r>
+          </a:p>
+        </p:txBody>
+      </p:sp>
+      <p:sp>
+        <p:nvSpPr>
+          <p:cNvPr id="28" name="Rounded Rectangle 27"/>
+          <p:cNvSpPr/>
+          <p:nvPr/>
+        </p:nvSpPr>
+        <p:spPr>
+          <a:xfrm>
+            <a:off x="6196431" y="4055364"/>
+            <a:ext cx="3624986" cy="2299716"/>
+          </a:xfrm>
+          <a:prstGeom prst="roundRect">
+            <a:avLst>
+              <a:gd name="adj" fmla="val 12000"/>
+            </a:avLst>
+          </a:prstGeom>
+          <a:solidFill>
+            <a:srgbClr val="F2F2F2"/>
+          </a:solidFill>
+          <a:ln>
+            <a:noFill/>
+          </a:ln>
+        </p:spPr>
+        <p:style>
+          <a:lnRef idx="1">
+            <a:schemeClr val="accent1"/>
+          </a:lnRef>
+          <a:fillRef idx="3">
+            <a:schemeClr val="accent1"/>
+          </a:fillRef>
+          <a:effectRef idx="2">
+            <a:schemeClr val="accent1"/>
+          </a:effectRef>
+          <a:fontRef idx="minor">
+            <a:schemeClr val="lt1"/>
+          </a:fontRef>
+        </p:style>
+        <p:txBody>
+          <a:bodyPr rtlCol="0" anchor="ctr"/>
+          <a:lstStyle/>
+          <a:p>
+            <a:pPr algn="ctr"/>
+          </a:p>
+        </p:txBody>
+      </p:sp>
+      <p:sp>
+        <p:nvSpPr>
+          <p:cNvPr id="29" name="Rectangle 28"/>
+          <p:cNvSpPr/>
+          <p:nvPr/>
+        </p:nvSpPr>
+        <p:spPr>
+          <a:xfrm>
+            <a:off x="6196431" y="4055364"/>
+            <a:ext cx="3624986" cy="64008"/>
+          </a:xfrm>
+          <a:prstGeom prst="rect">
+            <a:avLst/>
+          </a:prstGeom>
+          <a:solidFill>
+            <a:srgbClr val="095292"/>
+          </a:solidFill>
+          <a:ln>
+            <a:noFill/>
+          </a:ln>
+        </p:spPr>
+        <p:style>
+          <a:lnRef idx="1">
+            <a:schemeClr val="accent1"/>
+          </a:lnRef>
+          <a:fillRef idx="3">
+            <a:schemeClr val="accent1"/>
+          </a:fillRef>
+          <a:effectRef idx="2">
+            <a:schemeClr val="accent1"/>
+          </a:effectRef>
+          <a:fontRef idx="minor">
+            <a:schemeClr val="lt1"/>
+          </a:fontRef>
+        </p:style>
+        <p:txBody>
+          <a:bodyPr rtlCol="0" anchor="ctr"/>
+          <a:lstStyle/>
+          <a:p>
+            <a:pPr algn="ctr"/>
+          </a:p>
+        </p:txBody>
+      </p:sp>
+      <p:sp>
+        <p:nvSpPr>
+          <p:cNvPr id="30" name="Rectangle 29"/>
+          <p:cNvSpPr/>
+          <p:nvPr/>
+        </p:nvSpPr>
+        <p:spPr>
+          <a:xfrm>
+            <a:off x="6196431" y="4119372"/>
+            <a:ext cx="3624986" cy="27432"/>
+          </a:xfrm>
+          <a:prstGeom prst="rect">
+            <a:avLst/>
+          </a:prstGeom>
+          <a:solidFill>
+            <a:srgbClr val="FFD000"/>
+          </a:solidFill>
+          <a:ln>
+            <a:noFill/>
+          </a:ln>
+        </p:spPr>
+        <p:style>
+          <a:lnRef idx="1">
+            <a:schemeClr val="accent1"/>
+          </a:lnRef>
+          <a:fillRef idx="3">
+            <a:schemeClr val="accent1"/>
+          </a:fillRef>
+          <a:effectRef idx="2">
+            <a:schemeClr val="accent1"/>
+          </a:effectRef>
+          <a:fontRef idx="minor">
+            <a:schemeClr val="lt1"/>
+          </a:fontRef>
+        </p:style>
+        <p:txBody>
+          <a:bodyPr rtlCol="0" anchor="ctr"/>
+          <a:lstStyle/>
+          <a:p>
+            <a:pPr algn="ctr"/>
+          </a:p>
+        </p:txBody>
+      </p:sp>
+      <p:pic>
+        <p:nvPicPr>
+          <p:cNvPr id="31" name="Picture 30" descr="examlab.png"/>
+          <p:cNvPicPr>
+            <a:picLocks noChangeAspect="1"/>
+          </p:cNvPicPr>
+          <p:nvPr/>
+        </p:nvPicPr>
+        <p:blipFill>
+          <a:blip r:embed="rId4"/>
+          <a:stretch>
+            <a:fillRect/>
+          </a:stretch>
+        </p:blipFill>
+        <p:spPr>
+          <a:xfrm>
+            <a:off x="7398562" y="4311396"/>
+            <a:ext cx="1220724" cy="1220724"/>
+          </a:xfrm>
+          <a:prstGeom prst="rect">
+            <a:avLst/>
+          </a:prstGeom>
+        </p:spPr>
+      </p:pic>
+      <p:sp>
+        <p:nvSpPr>
+          <p:cNvPr id="32" name="TextBox 31"/>
+          <p:cNvSpPr txBox="1"/>
+          <p:nvPr/>
+        </p:nvSpPr>
+        <p:spPr>
+          <a:xfrm>
+            <a:off x="6269583" y="5623560"/>
+            <a:ext cx="3478682" cy="621792"/>
+          </a:xfrm>
+          <a:prstGeom prst="rect">
+            <a:avLst/>
+          </a:prstGeom>
+          <a:noFill/>
+        </p:spPr>
+        <p:txBody>
+          <a:bodyPr wrap="square" anchor="t"/>
+          <a:lstStyle/>
+          <a:p>
+            <a:pPr algn="ctr"/>
+            <a:r>
+              <a:rPr sz="1300" b="1" i="0">
+                <a:solidFill>
+                  <a:srgbClr val="095292"/>
+                </a:solidFill>
+                <a:latin typeface="Calibri"/>
+              </a:rPr>
+              <a:t>la plataforma del curso</a:t>
+            </a:r>
+          </a:p>
+          <a:p>
+            <a:pPr algn="ctr">
+              <a:spcBef>
+                <a:spcPts val="200"/>
+              </a:spcBef>
             </a:pPr>
             <a:r>
-              <a:rPr sz="1400" b="0" i="0">
-                <a:solidFill>
-                  <a:srgbClr val="FFFFFF"/>
-                </a:solidFill>
-                <a:latin typeface="Calibri"/>
-              </a:rPr>
-              <a:t>  B -- No --&gt; C[Pantalla Registrar dueño]</a:t>
-            </a:r>
-          </a:p>
-          <a:p>
-            <a:pPr>
-              <a:spcAft>
-                <a:spcPts val="400"/>
-              </a:spcAft>
-            </a:pPr>
-            <a:r>
-              <a:rPr sz="1400" b="0" i="0">
-                <a:solidFill>
-                  <a:srgbClr val="FFFFFF"/>
-                </a:solidFill>
-                <a:latin typeface="Calibri"/>
-              </a:rPr>
-              <a:t>  B -- Si --&gt; D[Pantalla Registrar mascota]</a:t>
-            </a:r>
-          </a:p>
-          <a:p>
-            <a:pPr>
-              <a:spcAft>
-                <a:spcPts val="400"/>
-              </a:spcAft>
-            </a:pPr>
-            <a:r>
-              <a:rPr sz="1400" b="0" i="0">
-                <a:solidFill>
-                  <a:srgbClr val="FFFFFF"/>
-                </a:solidFill>
-                <a:latin typeface="Calibri"/>
-              </a:rPr>
-              <a:t>  C --&gt; D</a:t>
-            </a:r>
-          </a:p>
-          <a:p>
-            <a:pPr>
-              <a:spcAft>
-                <a:spcPts val="400"/>
-              </a:spcAft>
-            </a:pPr>
-            <a:r>
-              <a:rPr sz="1400" b="0" i="0">
-                <a:solidFill>
-                  <a:srgbClr val="FFFFFF"/>
-                </a:solidFill>
-                <a:latin typeface="Calibri"/>
-              </a:rPr>
-              <a:t>  D --&gt; E{Campos obligatorios completos?}</a:t>
-            </a:r>
-          </a:p>
-          <a:p>
-            <a:pPr>
-              <a:spcAft>
-                <a:spcPts val="400"/>
-              </a:spcAft>
-            </a:pPr>
-            <a:r>
-              <a:rPr sz="1400" b="0" i="0">
-                <a:solidFill>
-                  <a:srgbClr val="FFFFFF"/>
-                </a:solidFill>
-                <a:latin typeface="Calibri"/>
-              </a:rPr>
-              <a:t>  E -- No --&gt; F[Guardar deshabilitado + ayuda en el campo faltante]</a:t>
-            </a:r>
-          </a:p>
-          <a:p>
-            <a:pPr>
-              <a:spcAft>
-                <a:spcPts val="400"/>
-              </a:spcAft>
-            </a:pPr>
-            <a:r>
-              <a:rPr sz="1400" b="0" i="0">
-                <a:solidFill>
-                  <a:srgbClr val="FFFFFF"/>
-                </a:solidFill>
-                <a:latin typeface="Calibri"/>
-              </a:rPr>
-              <a:t>  F --&gt; D</a:t>
-            </a:r>
-          </a:p>
-          <a:p>
-            <a:pPr>
-              <a:spcAft>
-                <a:spcPts val="400"/>
-              </a:spcAft>
-            </a:pPr>
-            <a:r>
-              <a:rPr sz="1400" b="0" i="0">
-                <a:solidFill>
-                  <a:srgbClr val="FFFFFF"/>
-                </a:solidFill>
-                <a:latin typeface="Calibri"/>
-              </a:rPr>
-              <a:t>  E -- Si --&gt; G[Confirmacion: Ficha guardada, codigo M-0421]</a:t>
-            </a:r>
-          </a:p>
-          <a:p>
-            <a:pPr>
-              <a:spcAft>
-                <a:spcPts val="400"/>
-              </a:spcAft>
-            </a:pPr>
-            <a:r>
-              <a:rPr sz="1400" b="0" i="0">
-                <a:solidFill>
-                  <a:srgbClr val="FFFFFF"/>
-                </a:solidFill>
-                <a:latin typeface="Calibri"/>
-              </a:rPr>
-              <a:t>  G --&gt; H[Pantalla Buscar expediente]</a:t>
-            </a:r>
-          </a:p>
-          <a:p>
-            <a:pPr>
-              <a:spcAft>
-                <a:spcPts val="400"/>
-              </a:spcAft>
-            </a:pPr>
-            <a:r>
-              <a:rPr sz="1400" b="0" i="0">
-                <a:solidFill>
-                  <a:srgbClr val="FFFFFF"/>
-                </a:solidFill>
-                <a:latin typeface="Calibri"/>
-              </a:rPr>
-              <a:t>  H --&gt; I{Cuantos resultados?}</a:t>
-            </a:r>
-          </a:p>
-          <a:p>
-            <a:pPr>
-              <a:spcAft>
-                <a:spcPts val="400"/>
-              </a:spcAft>
-            </a:pPr>
-            <a:r>
-              <a:rPr sz="1400" b="0" i="0">
-                <a:solidFill>
-                  <a:srgbClr val="FFFFFF"/>
-                </a:solidFill>
-                <a:latin typeface="Calibri"/>
-              </a:rPr>
-              <a:t>  I -- Cero --&gt; J[Mensaje sin resultados + Buscar por otro criterio]</a:t>
-            </a:r>
-          </a:p>
-          <a:p>
-            <a:pPr>
-              <a:spcAft>
-                <a:spcPts val="400"/>
-              </a:spcAft>
-            </a:pPr>
-            <a:r>
-              <a:rPr sz="1400" b="0" i="0">
-                <a:solidFill>
-                  <a:srgbClr val="FFFFFF"/>
-                </a:solidFill>
-                <a:latin typeface="Calibri"/>
-              </a:rPr>
-              <a:t>  I -- Varios --&gt; K[Lista con especie, edad y dueño para desambiguar]</a:t>
-            </a:r>
-          </a:p>
-          <a:p>
-            <a:pPr>
-              <a:spcAft>
-                <a:spcPts val="400"/>
-              </a:spcAft>
-            </a:pPr>
-            <a:r>
-              <a:rPr sz="1400" b="0" i="0">
-                <a:solidFill>
-                  <a:srgbClr val="FFFFFF"/>
-                </a:solidFill>
-                <a:latin typeface="Calibri"/>
-              </a:rPr>
-              <a:t>  I -- Uno --&gt; L[Ficha del paciente]</a:t>
-            </a:r>
-          </a:p>
-        </p:txBody>
-      </p:sp>
-      <p:sp>
-        <p:nvSpPr>
-          <p:cNvPr id="9" name="TextBox 8"/>
-          <p:cNvSpPr txBox="1"/>
-          <p:nvPr/>
-        </p:nvSpPr>
-        <p:spPr>
-          <a:xfrm>
-            <a:off x="457200" y="6080760"/>
-            <a:ext cx="11277295" cy="320040"/>
-          </a:xfrm>
-          <a:prstGeom prst="rect">
-            <a:avLst/>
-          </a:prstGeom>
-          <a:noFill/>
-        </p:spPr>
-        <p:txBody>
-          <a:bodyPr wrap="square">
-            <a:spAutoFit/>
-          </a:bodyPr>
-          <a:lstStyle/>
-          <a:p>
-            <a:pPr algn="ctr"/>
-            <a:r>
-              <a:rPr sz="1200" b="0" i="1">
+              <a:rPr sz="1000" b="0" i="0">
                 <a:solidFill>
                   <a:srgbClr val="666666"/>
                 </a:solidFill>
                 <a:latin typeface="Calibri"/>
               </a:rPr>
-              <a:t>La interfaz no son pantallas sueltas: es un camino con desvios, y los desvios son los que hay que diseñar.</a:t>
-            </a:r>
-          </a:p>
-        </p:txBody>
-      </p:sp>
-      <p:sp>
-        <p:nvSpPr>
-          <p:cNvPr id="10" name="TextBox 9"/>
+              <a:t>Entrega del taller · en la fecha que indique el docente</a:t>
+            </a:r>
+          </a:p>
+        </p:txBody>
+      </p:sp>
+      <p:sp>
+        <p:nvSpPr>
+          <p:cNvPr id="33" name="TextBox 32"/>
           <p:cNvSpPr txBox="1"/>
           <p:nvPr/>
         </p:nvSpPr>
@@ -5283,7 +6392,7 @@
                 </a:solidFill>
                 <a:latin typeface="Calibri"/>
               </a:rPr>
-              <a:t>Demo del dia</a:t>
+              <a:t>Taller PI — por que importa</a:t>
             </a:r>
           </a:p>
         </p:txBody>
@@ -5331,7 +6440,7 @@
                 </a:solidFill>
                 <a:latin typeface="Calibri"/>
               </a:rPr>
-              <a:t>Herramienta:</a:t>
+              <a:t>Por que importa al PI:</a:t>
             </a:r>
             <a:r>
               <a:rPr sz="2000" b="0" i="0">
@@ -5340,7 +6449,7 @@
                 </a:solidFill>
                 <a:latin typeface="Calibri"/>
               </a:rPr>
-              <a:t> Figma o Penpot · Excalidraw · Google Docs</a:t>
+              <a:t> la interfaz es la cara visible del paquete de diseño de VetCare y es lo unico del PI que la clinica Huellitas entiende sin traduccion; ademas es el insumo directo con el que Programacion II construye las pantallas reales.</a:t>
             </a:r>
           </a:p>
           <a:p>
@@ -5356,25 +6465,7 @@
                 </a:solidFill>
                 <a:latin typeface="Calibri"/>
               </a:rPr>
-              <a:t>–   </a:t>
-            </a:r>
-            <a:r>
-              <a:rPr sz="2000" b="1" i="0">
-                <a:solidFill>
-                  <a:srgbClr val="333333"/>
-                </a:solidFill>
-                <a:latin typeface="Calibri"/>
-              </a:rPr>
-              <a:t>Demo:</a:t>
-            </a:r>
-            <a:r>
-              <a:rPr sz="2000" b="0" i="0">
-                <a:solidFill>
-                  <a:srgbClr val="333333"/>
-                </a:solidFill>
-                <a:latin typeface="Calibri"/>
-              </a:rPr>
-              <a:t> El docente dibuja en vivo el wireframe de Registrar mascota en Penpot, le pone tres anotaciones numeradas y lo conecta con Buscar expediente para que la clase vea en la misma pantalla la diferencia entre wireframe, mockup y prototipo.</a:t>
+              <a:t>–   Es la ultima clase con tema nuevo del curso: lo que se produzca hoy entra tal cual al documento final y a la sustentacion de la clase 14.</a:t>
             </a:r>
           </a:p>
           <a:p>
@@ -5390,7 +6481,7 @@
                 </a:solidFill>
                 <a:latin typeface="Calibri"/>
               </a:rPr>
-              <a:t>–   Mismo dominio VetCare — no otro ejemplo. Aqui se diseña, no se programa.</a:t>
+              <a:t>–   Quien va solo por la ruta C cierra su PI con este prototipo navegable, que es entregable completo y valido por si mismo, no una version recortada del proyecto.</a:t>
             </a:r>
           </a:p>
         </p:txBody>
@@ -5465,7 +6556,7 @@
         <p:spPr>
           <a:xfrm>
             <a:off x="0" y="0"/>
-            <a:ext cx="12191695" cy="1170432"/>
+            <a:ext cx="12191695" cy="960120"/>
           </a:xfrm>
           <a:prstGeom prst="rect">
             <a:avLst/>
@@ -5507,7 +6598,7 @@
         </p:nvSpPr>
         <p:spPr>
           <a:xfrm>
-            <a:off x="0" y="1170432"/>
+            <a:off x="0" y="960120"/>
             <a:ext cx="12191695" cy="41148"/>
           </a:xfrm>
           <a:prstGeom prst="rect">
@@ -5551,7 +6642,7 @@
         <p:spPr>
           <a:xfrm>
             <a:off x="457200" y="164592"/>
-            <a:ext cx="11277295" cy="384048"/>
+            <a:ext cx="11277295" cy="502920"/>
           </a:xfrm>
           <a:prstGeom prst="rect">
             <a:avLst/>
@@ -5571,7 +6662,7 @@
                 </a:solidFill>
                 <a:latin typeface="Calibri"/>
               </a:rPr>
-              <a:t>Herramientas de hoy</a:t>
+              <a:t>Taller PI — punto de partida</a:t>
             </a:r>
           </a:p>
         </p:txBody>
@@ -5584,8 +6675,8 @@
         </p:nvSpPr>
         <p:spPr>
           <a:xfrm>
-            <a:off x="457200" y="566928"/>
-            <a:ext cx="11277295" cy="411480"/>
+            <a:off x="457200" y="1170432"/>
+            <a:ext cx="11277295" cy="5230368"/>
           </a:xfrm>
           <a:prstGeom prst="rect">
             <a:avLst/>
@@ -5598,1149 +6689,58 @@
           </a:bodyPr>
           <a:lstStyle/>
           <a:p>
-            <a:r>
-              <a:rPr sz="1400" b="0" i="0">
-                <a:solidFill>
-                  <a:srgbClr val="B8D8EE"/>
-                </a:solidFill>
-                <a:latin typeface="Calibri"/>
-              </a:rPr>
-              <a:t>Gratis · funcionan en el navegador</a:t>
-            </a:r>
-          </a:p>
-        </p:txBody>
-      </p:sp>
-      <p:sp>
-        <p:nvSpPr>
-          <p:cNvPr id="6" name="Rounded Rectangle 5"/>
-          <p:cNvSpPr/>
-          <p:nvPr/>
-        </p:nvSpPr>
-        <p:spPr>
-          <a:xfrm>
-            <a:off x="457200" y="1591056"/>
-            <a:ext cx="3624986" cy="2299716"/>
-          </a:xfrm>
-          <a:prstGeom prst="roundRect">
-            <a:avLst>
-              <a:gd name="adj" fmla="val 12000"/>
-            </a:avLst>
-          </a:prstGeom>
-          <a:solidFill>
-            <a:srgbClr val="F2F2F2"/>
-          </a:solidFill>
-          <a:ln>
-            <a:noFill/>
-          </a:ln>
-        </p:spPr>
-        <p:style>
-          <a:lnRef idx="1">
-            <a:schemeClr val="accent1"/>
-          </a:lnRef>
-          <a:fillRef idx="3">
-            <a:schemeClr val="accent1"/>
-          </a:fillRef>
-          <a:effectRef idx="2">
-            <a:schemeClr val="accent1"/>
-          </a:effectRef>
-          <a:fontRef idx="minor">
-            <a:schemeClr val="lt1"/>
-          </a:fontRef>
-        </p:style>
-        <p:txBody>
-          <a:bodyPr rtlCol="0" anchor="ctr"/>
-          <a:lstStyle/>
-          <a:p>
-            <a:pPr algn="ctr"/>
-          </a:p>
-        </p:txBody>
-      </p:sp>
-      <p:sp>
-        <p:nvSpPr>
-          <p:cNvPr id="7" name="Rectangle 6"/>
-          <p:cNvSpPr/>
-          <p:nvPr/>
-        </p:nvSpPr>
-        <p:spPr>
-          <a:xfrm>
-            <a:off x="457200" y="1591056"/>
-            <a:ext cx="3624986" cy="64008"/>
-          </a:xfrm>
-          <a:prstGeom prst="rect">
-            <a:avLst/>
-          </a:prstGeom>
-          <a:solidFill>
-            <a:srgbClr val="095292"/>
-          </a:solidFill>
-          <a:ln>
-            <a:noFill/>
-          </a:ln>
-        </p:spPr>
-        <p:style>
-          <a:lnRef idx="1">
-            <a:schemeClr val="accent1"/>
-          </a:lnRef>
-          <a:fillRef idx="3">
-            <a:schemeClr val="accent1"/>
-          </a:fillRef>
-          <a:effectRef idx="2">
-            <a:schemeClr val="accent1"/>
-          </a:effectRef>
-          <a:fontRef idx="minor">
-            <a:schemeClr val="lt1"/>
-          </a:fontRef>
-        </p:style>
-        <p:txBody>
-          <a:bodyPr rtlCol="0" anchor="ctr"/>
-          <a:lstStyle/>
-          <a:p>
-            <a:pPr algn="ctr"/>
-          </a:p>
-        </p:txBody>
-      </p:sp>
-      <p:sp>
-        <p:nvSpPr>
-          <p:cNvPr id="8" name="Rectangle 7"/>
-          <p:cNvSpPr/>
-          <p:nvPr/>
-        </p:nvSpPr>
-        <p:spPr>
-          <a:xfrm>
-            <a:off x="457200" y="1655064"/>
-            <a:ext cx="3624986" cy="27432"/>
-          </a:xfrm>
-          <a:prstGeom prst="rect">
-            <a:avLst/>
-          </a:prstGeom>
-          <a:solidFill>
-            <a:srgbClr val="FFD000"/>
-          </a:solidFill>
-          <a:ln>
-            <a:noFill/>
-          </a:ln>
-        </p:spPr>
-        <p:style>
-          <a:lnRef idx="1">
-            <a:schemeClr val="accent1"/>
-          </a:lnRef>
-          <a:fillRef idx="3">
-            <a:schemeClr val="accent1"/>
-          </a:fillRef>
-          <a:effectRef idx="2">
-            <a:schemeClr val="accent1"/>
-          </a:effectRef>
-          <a:fontRef idx="minor">
-            <a:schemeClr val="lt1"/>
-          </a:fontRef>
-        </p:style>
-        <p:txBody>
-          <a:bodyPr rtlCol="0" anchor="ctr"/>
-          <a:lstStyle/>
-          <a:p>
-            <a:pPr algn="ctr"/>
-          </a:p>
-        </p:txBody>
-      </p:sp>
-      <p:pic>
-        <p:nvPicPr>
-          <p:cNvPr id="9" name="Picture 8" descr="excalidraw.png"/>
-          <p:cNvPicPr>
-            <a:picLocks noChangeAspect="1"/>
-          </p:cNvPicPr>
-          <p:nvPr/>
-        </p:nvPicPr>
-        <p:blipFill>
-          <a:blip r:embed="rId2"/>
-          <a:stretch>
-            <a:fillRect/>
-          </a:stretch>
-        </p:blipFill>
-        <p:spPr>
-          <a:xfrm>
-            <a:off x="1659331" y="1847087"/>
-            <a:ext cx="1220724" cy="1220724"/>
-          </a:xfrm>
-          <a:prstGeom prst="rect">
-            <a:avLst/>
-          </a:prstGeom>
-        </p:spPr>
-      </p:pic>
-      <p:sp>
-        <p:nvSpPr>
-          <p:cNvPr id="10" name="TextBox 9"/>
-          <p:cNvSpPr txBox="1"/>
-          <p:nvPr/>
-        </p:nvSpPr>
-        <p:spPr>
-          <a:xfrm>
-            <a:off x="530352" y="3159251"/>
-            <a:ext cx="3478682" cy="621792"/>
-          </a:xfrm>
-          <a:prstGeom prst="rect">
-            <a:avLst/>
-          </a:prstGeom>
-          <a:noFill/>
-        </p:spPr>
-        <p:txBody>
-          <a:bodyPr wrap="square" anchor="t"/>
-          <a:lstStyle/>
-          <a:p>
-            <a:pPr algn="ctr"/>
-            <a:r>
-              <a:rPr sz="1300" b="1" i="0">
-                <a:solidFill>
-                  <a:srgbClr val="095292"/>
-                </a:solidFill>
-                <a:latin typeface="Calibri"/>
-              </a:rPr>
-              <a:t>Excalidraw</a:t>
-            </a:r>
-          </a:p>
-          <a:p>
-            <a:pPr algn="ctr">
-              <a:spcBef>
-                <a:spcPts val="200"/>
-              </a:spcBef>
+            <a:pPr>
+              <a:spcAft>
+                <a:spcPts val="800"/>
+              </a:spcAft>
             </a:pPr>
             <a:r>
-              <a:rPr sz="1000" b="0" i="0">
-                <a:solidFill>
-                  <a:srgbClr val="666666"/>
-                </a:solidFill>
-                <a:latin typeface="Calibri"/>
-              </a:rPr>
-              <a:t>Bocetos rapidos a mano alzada</a:t>
-            </a:r>
-          </a:p>
-        </p:txBody>
-      </p:sp>
-      <p:sp>
-        <p:nvSpPr>
-          <p:cNvPr id="11" name="Rounded Rectangle 10"/>
-          <p:cNvSpPr/>
-          <p:nvPr/>
-        </p:nvSpPr>
-        <p:spPr>
-          <a:xfrm>
-            <a:off x="4283354" y="1591056"/>
-            <a:ext cx="3624986" cy="2299716"/>
-          </a:xfrm>
-          <a:prstGeom prst="roundRect">
-            <a:avLst>
-              <a:gd name="adj" fmla="val 12000"/>
-            </a:avLst>
-          </a:prstGeom>
-          <a:solidFill>
-            <a:srgbClr val="F2F2F2"/>
-          </a:solidFill>
-          <a:ln>
-            <a:noFill/>
-          </a:ln>
-        </p:spPr>
-        <p:style>
-          <a:lnRef idx="1">
-            <a:schemeClr val="accent1"/>
-          </a:lnRef>
-          <a:fillRef idx="3">
-            <a:schemeClr val="accent1"/>
-          </a:fillRef>
-          <a:effectRef idx="2">
-            <a:schemeClr val="accent1"/>
-          </a:effectRef>
-          <a:fontRef idx="minor">
-            <a:schemeClr val="lt1"/>
-          </a:fontRef>
-        </p:style>
-        <p:txBody>
-          <a:bodyPr rtlCol="0" anchor="ctr"/>
-          <a:lstStyle/>
-          <a:p>
-            <a:pPr algn="ctr"/>
-          </a:p>
-        </p:txBody>
-      </p:sp>
-      <p:sp>
-        <p:nvSpPr>
-          <p:cNvPr id="12" name="Rectangle 11"/>
-          <p:cNvSpPr/>
-          <p:nvPr/>
-        </p:nvSpPr>
-        <p:spPr>
-          <a:xfrm>
-            <a:off x="4283354" y="1591056"/>
-            <a:ext cx="3624986" cy="64008"/>
-          </a:xfrm>
-          <a:prstGeom prst="rect">
-            <a:avLst/>
-          </a:prstGeom>
-          <a:solidFill>
-            <a:srgbClr val="095292"/>
-          </a:solidFill>
-          <a:ln>
-            <a:noFill/>
-          </a:ln>
-        </p:spPr>
-        <p:style>
-          <a:lnRef idx="1">
-            <a:schemeClr val="accent1"/>
-          </a:lnRef>
-          <a:fillRef idx="3">
-            <a:schemeClr val="accent1"/>
-          </a:fillRef>
-          <a:effectRef idx="2">
-            <a:schemeClr val="accent1"/>
-          </a:effectRef>
-          <a:fontRef idx="minor">
-            <a:schemeClr val="lt1"/>
-          </a:fontRef>
-        </p:style>
-        <p:txBody>
-          <a:bodyPr rtlCol="0" anchor="ctr"/>
-          <a:lstStyle/>
-          <a:p>
-            <a:pPr algn="ctr"/>
-          </a:p>
-        </p:txBody>
-      </p:sp>
-      <p:sp>
-        <p:nvSpPr>
-          <p:cNvPr id="13" name="Rectangle 12"/>
-          <p:cNvSpPr/>
-          <p:nvPr/>
-        </p:nvSpPr>
-        <p:spPr>
-          <a:xfrm>
-            <a:off x="4283354" y="1655064"/>
-            <a:ext cx="3624986" cy="27432"/>
-          </a:xfrm>
-          <a:prstGeom prst="rect">
-            <a:avLst/>
-          </a:prstGeom>
-          <a:solidFill>
-            <a:srgbClr val="FFD000"/>
-          </a:solidFill>
-          <a:ln>
-            <a:noFill/>
-          </a:ln>
-        </p:spPr>
-        <p:style>
-          <a:lnRef idx="1">
-            <a:schemeClr val="accent1"/>
-          </a:lnRef>
-          <a:fillRef idx="3">
-            <a:schemeClr val="accent1"/>
-          </a:fillRef>
-          <a:effectRef idx="2">
-            <a:schemeClr val="accent1"/>
-          </a:effectRef>
-          <a:fontRef idx="minor">
-            <a:schemeClr val="lt1"/>
-          </a:fontRef>
-        </p:style>
-        <p:txBody>
-          <a:bodyPr rtlCol="0" anchor="ctr"/>
-          <a:lstStyle/>
-          <a:p>
-            <a:pPr algn="ctr"/>
-          </a:p>
-        </p:txBody>
-      </p:sp>
-      <p:pic>
-        <p:nvPicPr>
-          <p:cNvPr id="14" name="Picture 13" descr="google_docs.png"/>
-          <p:cNvPicPr>
-            <a:picLocks noChangeAspect="1"/>
-          </p:cNvPicPr>
-          <p:nvPr/>
-        </p:nvPicPr>
-        <p:blipFill>
-          <a:blip r:embed="rId3"/>
-          <a:stretch>
-            <a:fillRect/>
-          </a:stretch>
-        </p:blipFill>
-        <p:spPr>
-          <a:xfrm>
-            <a:off x="5485485" y="1847087"/>
-            <a:ext cx="1220724" cy="1220724"/>
-          </a:xfrm>
-          <a:prstGeom prst="rect">
-            <a:avLst/>
-          </a:prstGeom>
-        </p:spPr>
-      </p:pic>
-      <p:sp>
-        <p:nvSpPr>
-          <p:cNvPr id="15" name="TextBox 14"/>
-          <p:cNvSpPr txBox="1"/>
-          <p:nvPr/>
-        </p:nvSpPr>
-        <p:spPr>
-          <a:xfrm>
-            <a:off x="4356506" y="3159251"/>
-            <a:ext cx="3478682" cy="621792"/>
-          </a:xfrm>
-          <a:prstGeom prst="rect">
-            <a:avLst/>
-          </a:prstGeom>
-          <a:noFill/>
-        </p:spPr>
-        <p:txBody>
-          <a:bodyPr wrap="square" anchor="t"/>
-          <a:lstStyle/>
-          <a:p>
-            <a:pPr algn="ctr"/>
-            <a:r>
-              <a:rPr sz="1300" b="1" i="0">
-                <a:solidFill>
-                  <a:srgbClr val="095292"/>
-                </a:solidFill>
-                <a:latin typeface="Calibri"/>
-              </a:rPr>
-              <a:t>google docs</a:t>
-            </a:r>
-          </a:p>
-          <a:p>
-            <a:pPr algn="ctr">
-              <a:spcBef>
-                <a:spcPts val="200"/>
-              </a:spcBef>
+              <a:rPr sz="2000" b="0" i="0">
+                <a:solidFill>
+                  <a:srgbClr val="333333"/>
+                </a:solidFill>
+                <a:latin typeface="Calibri"/>
+              </a:rPr>
+              <a:t>–   El equipo ya tiene aprobados los RF y RNF, el diagrama de casos de uso, el de clases con Mascota, Dueño, Historia_Clinica y Cita, y el diccionario de datos con tipos y longitudes.</a:t>
+            </a:r>
+          </a:p>
+          <a:p>
+            <a:pPr>
+              <a:spcAft>
+                <a:spcPts val="800"/>
+              </a:spcAft>
             </a:pPr>
             <a:r>
-              <a:rPr sz="1000" b="0" i="0">
-                <a:solidFill>
-                  <a:srgbClr val="666666"/>
-                </a:solidFill>
-                <a:latin typeface="Calibri"/>
-              </a:rPr>
-              <a:t>Documentos del paquete de diseño</a:t>
-            </a:r>
-          </a:p>
-        </p:txBody>
-      </p:sp>
-      <p:sp>
-        <p:nvSpPr>
-          <p:cNvPr id="16" name="Rounded Rectangle 15"/>
-          <p:cNvSpPr/>
-          <p:nvPr/>
-        </p:nvSpPr>
-        <p:spPr>
-          <a:xfrm>
-            <a:off x="8109508" y="1591056"/>
-            <a:ext cx="3624986" cy="2299716"/>
-          </a:xfrm>
-          <a:prstGeom prst="roundRect">
-            <a:avLst>
-              <a:gd name="adj" fmla="val 12000"/>
-            </a:avLst>
-          </a:prstGeom>
-          <a:solidFill>
-            <a:srgbClr val="F2F2F2"/>
-          </a:solidFill>
-          <a:ln>
-            <a:noFill/>
-          </a:ln>
-        </p:spPr>
-        <p:style>
-          <a:lnRef idx="1">
-            <a:schemeClr val="accent1"/>
-          </a:lnRef>
-          <a:fillRef idx="3">
-            <a:schemeClr val="accent1"/>
-          </a:fillRef>
-          <a:effectRef idx="2">
-            <a:schemeClr val="accent1"/>
-          </a:effectRef>
-          <a:fontRef idx="minor">
-            <a:schemeClr val="lt1"/>
-          </a:fontRef>
-        </p:style>
-        <p:txBody>
-          <a:bodyPr rtlCol="0" anchor="ctr"/>
-          <a:lstStyle/>
-          <a:p>
-            <a:pPr algn="ctr"/>
-          </a:p>
-        </p:txBody>
-      </p:sp>
-      <p:sp>
-        <p:nvSpPr>
-          <p:cNvPr id="17" name="Rectangle 16"/>
-          <p:cNvSpPr/>
-          <p:nvPr/>
-        </p:nvSpPr>
-        <p:spPr>
-          <a:xfrm>
-            <a:off x="8109508" y="1591056"/>
-            <a:ext cx="3624986" cy="64008"/>
-          </a:xfrm>
-          <a:prstGeom prst="rect">
-            <a:avLst/>
-          </a:prstGeom>
-          <a:solidFill>
-            <a:srgbClr val="095292"/>
-          </a:solidFill>
-          <a:ln>
-            <a:noFill/>
-          </a:ln>
-        </p:spPr>
-        <p:style>
-          <a:lnRef idx="1">
-            <a:schemeClr val="accent1"/>
-          </a:lnRef>
-          <a:fillRef idx="3">
-            <a:schemeClr val="accent1"/>
-          </a:fillRef>
-          <a:effectRef idx="2">
-            <a:schemeClr val="accent1"/>
-          </a:effectRef>
-          <a:fontRef idx="minor">
-            <a:schemeClr val="lt1"/>
-          </a:fontRef>
-        </p:style>
-        <p:txBody>
-          <a:bodyPr rtlCol="0" anchor="ctr"/>
-          <a:lstStyle/>
-          <a:p>
-            <a:pPr algn="ctr"/>
-          </a:p>
-        </p:txBody>
-      </p:sp>
-      <p:sp>
-        <p:nvSpPr>
-          <p:cNvPr id="18" name="Rectangle 17"/>
-          <p:cNvSpPr/>
-          <p:nvPr/>
-        </p:nvSpPr>
-        <p:spPr>
-          <a:xfrm>
-            <a:off x="8109508" y="1655064"/>
-            <a:ext cx="3624986" cy="27432"/>
-          </a:xfrm>
-          <a:prstGeom prst="rect">
-            <a:avLst/>
-          </a:prstGeom>
-          <a:solidFill>
-            <a:srgbClr val="FFD000"/>
-          </a:solidFill>
-          <a:ln>
-            <a:noFill/>
-          </a:ln>
-        </p:spPr>
-        <p:style>
-          <a:lnRef idx="1">
-            <a:schemeClr val="accent1"/>
-          </a:lnRef>
-          <a:fillRef idx="3">
-            <a:schemeClr val="accent1"/>
-          </a:fillRef>
-          <a:effectRef idx="2">
-            <a:schemeClr val="accent1"/>
-          </a:effectRef>
-          <a:fontRef idx="minor">
-            <a:schemeClr val="lt1"/>
-          </a:fontRef>
-        </p:style>
-        <p:txBody>
-          <a:bodyPr rtlCol="0" anchor="ctr"/>
-          <a:lstStyle/>
-          <a:p>
-            <a:pPr algn="ctr"/>
-          </a:p>
-        </p:txBody>
-      </p:sp>
-      <p:sp>
-        <p:nvSpPr>
-          <p:cNvPr id="19" name="Rounded Rectangle 18"/>
-          <p:cNvSpPr/>
-          <p:nvPr/>
-        </p:nvSpPr>
-        <p:spPr>
-          <a:xfrm>
-            <a:off x="9311640" y="1847087"/>
-            <a:ext cx="1220724" cy="1220724"/>
-          </a:xfrm>
-          <a:prstGeom prst="roundRect">
-            <a:avLst>
-              <a:gd name="adj" fmla="val 12000"/>
-            </a:avLst>
-          </a:prstGeom>
-          <a:solidFill>
-            <a:srgbClr val="E8F4FA"/>
-          </a:solidFill>
-          <a:ln>
-            <a:noFill/>
-          </a:ln>
-        </p:spPr>
-        <p:style>
-          <a:lnRef idx="1">
-            <a:schemeClr val="accent1"/>
-          </a:lnRef>
-          <a:fillRef idx="3">
-            <a:schemeClr val="accent1"/>
-          </a:fillRef>
-          <a:effectRef idx="2">
-            <a:schemeClr val="accent1"/>
-          </a:effectRef>
-          <a:fontRef idx="minor">
-            <a:schemeClr val="lt1"/>
-          </a:fontRef>
-        </p:style>
-        <p:txBody>
-          <a:bodyPr rtlCol="0" anchor="ctr"/>
-          <a:lstStyle/>
-          <a:p>
-            <a:pPr algn="ctr"/>
-          </a:p>
-        </p:txBody>
-      </p:sp>
-      <p:sp>
-        <p:nvSpPr>
-          <p:cNvPr id="20" name="TextBox 19"/>
-          <p:cNvSpPr txBox="1"/>
-          <p:nvPr/>
-        </p:nvSpPr>
-        <p:spPr>
-          <a:xfrm>
-            <a:off x="9311640" y="1847087"/>
-            <a:ext cx="1220724" cy="1220724"/>
-          </a:xfrm>
-          <a:prstGeom prst="rect">
-            <a:avLst/>
-          </a:prstGeom>
-          <a:noFill/>
-        </p:spPr>
-        <p:txBody>
-          <a:bodyPr wrap="square" anchor="ctr"/>
-          <a:lstStyle/>
-          <a:p>
-            <a:pPr algn="ctr"/>
-            <a:r>
-              <a:rPr sz="1600" b="1" i="0">
-                <a:solidFill>
-                  <a:srgbClr val="095292"/>
-                </a:solidFill>
-                <a:latin typeface="Calibri"/>
-              </a:rPr>
-              <a:t>F</a:t>
-            </a:r>
-          </a:p>
-        </p:txBody>
-      </p:sp>
-      <p:sp>
-        <p:nvSpPr>
-          <p:cNvPr id="21" name="TextBox 20"/>
-          <p:cNvSpPr txBox="1"/>
-          <p:nvPr/>
-        </p:nvSpPr>
-        <p:spPr>
-          <a:xfrm>
-            <a:off x="8182660" y="3159251"/>
-            <a:ext cx="3478682" cy="621792"/>
-          </a:xfrm>
-          <a:prstGeom prst="rect">
-            <a:avLst/>
-          </a:prstGeom>
-          <a:noFill/>
-        </p:spPr>
-        <p:txBody>
-          <a:bodyPr wrap="square" anchor="t"/>
-          <a:lstStyle/>
-          <a:p>
-            <a:pPr algn="ctr"/>
-            <a:r>
-              <a:rPr sz="1300" b="1" i="0">
-                <a:solidFill>
-                  <a:srgbClr val="095292"/>
-                </a:solidFill>
-                <a:latin typeface="Calibri"/>
-              </a:rPr>
-              <a:t>Figma</a:t>
-            </a:r>
-          </a:p>
-          <a:p>
-            <a:pPr algn="ctr">
-              <a:spcBef>
-                <a:spcPts val="200"/>
-              </a:spcBef>
+              <a:rPr sz="2000" b="0" i="0">
+                <a:solidFill>
+                  <a:srgbClr val="333333"/>
+                </a:solidFill>
+                <a:latin typeface="Calibri"/>
+              </a:rPr>
+              <a:t>–   Hasta hoy VetCare existe solo como texto y diagramas: nadie ha visto todavia como se veria la pantalla que va a usar la recepcionista de Huellitas.</a:t>
+            </a:r>
+          </a:p>
+          <a:p>
+            <a:pPr>
+              <a:spcAft>
+                <a:spcPts val="800"/>
+              </a:spcAft>
             </a:pPr>
             <a:r>
-              <a:rPr sz="1000" b="0" i="0">
-                <a:solidFill>
-                  <a:srgbClr val="666666"/>
-                </a:solidFill>
-                <a:latin typeface="Calibri"/>
-              </a:rPr>
-              <a:t>Wireframes y prototipo navegable</a:t>
-            </a:r>
-          </a:p>
-        </p:txBody>
-      </p:sp>
-      <p:sp>
-        <p:nvSpPr>
-          <p:cNvPr id="22" name="Rounded Rectangle 21"/>
-          <p:cNvSpPr/>
-          <p:nvPr/>
-        </p:nvSpPr>
-        <p:spPr>
-          <a:xfrm>
-            <a:off x="2370277" y="4055364"/>
-            <a:ext cx="3624986" cy="2299716"/>
-          </a:xfrm>
-          <a:prstGeom prst="roundRect">
-            <a:avLst>
-              <a:gd name="adj" fmla="val 12000"/>
-            </a:avLst>
-          </a:prstGeom>
-          <a:solidFill>
-            <a:srgbClr val="F2F2F2"/>
-          </a:solidFill>
-          <a:ln>
-            <a:noFill/>
-          </a:ln>
-        </p:spPr>
-        <p:style>
-          <a:lnRef idx="1">
-            <a:schemeClr val="accent1"/>
-          </a:lnRef>
-          <a:fillRef idx="3">
-            <a:schemeClr val="accent1"/>
-          </a:fillRef>
-          <a:effectRef idx="2">
-            <a:schemeClr val="accent1"/>
-          </a:effectRef>
-          <a:fontRef idx="minor">
-            <a:schemeClr val="lt1"/>
-          </a:fontRef>
-        </p:style>
-        <p:txBody>
-          <a:bodyPr rtlCol="0" anchor="ctr"/>
-          <a:lstStyle/>
-          <a:p>
-            <a:pPr algn="ctr"/>
-          </a:p>
-        </p:txBody>
-      </p:sp>
-      <p:sp>
-        <p:nvSpPr>
-          <p:cNvPr id="23" name="Rectangle 22"/>
-          <p:cNvSpPr/>
-          <p:nvPr/>
-        </p:nvSpPr>
-        <p:spPr>
-          <a:xfrm>
-            <a:off x="2370277" y="4055364"/>
-            <a:ext cx="3624986" cy="64008"/>
-          </a:xfrm>
-          <a:prstGeom prst="rect">
-            <a:avLst/>
-          </a:prstGeom>
-          <a:solidFill>
-            <a:srgbClr val="095292"/>
-          </a:solidFill>
-          <a:ln>
-            <a:noFill/>
-          </a:ln>
-        </p:spPr>
-        <p:style>
-          <a:lnRef idx="1">
-            <a:schemeClr val="accent1"/>
-          </a:lnRef>
-          <a:fillRef idx="3">
-            <a:schemeClr val="accent1"/>
-          </a:fillRef>
-          <a:effectRef idx="2">
-            <a:schemeClr val="accent1"/>
-          </a:effectRef>
-          <a:fontRef idx="minor">
-            <a:schemeClr val="lt1"/>
-          </a:fontRef>
-        </p:style>
-        <p:txBody>
-          <a:bodyPr rtlCol="0" anchor="ctr"/>
-          <a:lstStyle/>
-          <a:p>
-            <a:pPr algn="ctr"/>
-          </a:p>
-        </p:txBody>
-      </p:sp>
-      <p:sp>
-        <p:nvSpPr>
-          <p:cNvPr id="24" name="Rectangle 23"/>
-          <p:cNvSpPr/>
-          <p:nvPr/>
-        </p:nvSpPr>
-        <p:spPr>
-          <a:xfrm>
-            <a:off x="2370277" y="4119372"/>
-            <a:ext cx="3624986" cy="27432"/>
-          </a:xfrm>
-          <a:prstGeom prst="rect">
-            <a:avLst/>
-          </a:prstGeom>
-          <a:solidFill>
-            <a:srgbClr val="FFD000"/>
-          </a:solidFill>
-          <a:ln>
-            <a:noFill/>
-          </a:ln>
-        </p:spPr>
-        <p:style>
-          <a:lnRef idx="1">
-            <a:schemeClr val="accent1"/>
-          </a:lnRef>
-          <a:fillRef idx="3">
-            <a:schemeClr val="accent1"/>
-          </a:fillRef>
-          <a:effectRef idx="2">
-            <a:schemeClr val="accent1"/>
-          </a:effectRef>
-          <a:fontRef idx="minor">
-            <a:schemeClr val="lt1"/>
-          </a:fontRef>
-        </p:style>
-        <p:txBody>
-          <a:bodyPr rtlCol="0" anchor="ctr"/>
-          <a:lstStyle/>
-          <a:p>
-            <a:pPr algn="ctr"/>
-          </a:p>
-        </p:txBody>
-      </p:sp>
-      <p:sp>
-        <p:nvSpPr>
-          <p:cNvPr id="25" name="Rounded Rectangle 24"/>
-          <p:cNvSpPr/>
-          <p:nvPr/>
-        </p:nvSpPr>
-        <p:spPr>
-          <a:xfrm>
-            <a:off x="3572408" y="4311396"/>
-            <a:ext cx="1220724" cy="1220724"/>
-          </a:xfrm>
-          <a:prstGeom prst="roundRect">
-            <a:avLst>
-              <a:gd name="adj" fmla="val 12000"/>
-            </a:avLst>
-          </a:prstGeom>
-          <a:solidFill>
-            <a:srgbClr val="E8F4FA"/>
-          </a:solidFill>
-          <a:ln>
-            <a:noFill/>
-          </a:ln>
-        </p:spPr>
-        <p:style>
-          <a:lnRef idx="1">
-            <a:schemeClr val="accent1"/>
-          </a:lnRef>
-          <a:fillRef idx="3">
-            <a:schemeClr val="accent1"/>
-          </a:fillRef>
-          <a:effectRef idx="2">
-            <a:schemeClr val="accent1"/>
-          </a:effectRef>
-          <a:fontRef idx="minor">
-            <a:schemeClr val="lt1"/>
-          </a:fontRef>
-        </p:style>
-        <p:txBody>
-          <a:bodyPr rtlCol="0" anchor="ctr"/>
-          <a:lstStyle/>
-          <a:p>
-            <a:pPr algn="ctr"/>
-          </a:p>
-        </p:txBody>
-      </p:sp>
-      <p:sp>
-        <p:nvSpPr>
-          <p:cNvPr id="26" name="TextBox 25"/>
-          <p:cNvSpPr txBox="1"/>
-          <p:nvPr/>
-        </p:nvSpPr>
-        <p:spPr>
-          <a:xfrm>
-            <a:off x="3572408" y="4311396"/>
-            <a:ext cx="1220724" cy="1220724"/>
-          </a:xfrm>
-          <a:prstGeom prst="rect">
-            <a:avLst/>
-          </a:prstGeom>
-          <a:noFill/>
-        </p:spPr>
-        <p:txBody>
-          <a:bodyPr wrap="square" anchor="ctr"/>
-          <a:lstStyle/>
-          <a:p>
-            <a:pPr algn="ctr"/>
-            <a:r>
-              <a:rPr sz="1600" b="1" i="0">
-                <a:solidFill>
-                  <a:srgbClr val="095292"/>
-                </a:solidFill>
-                <a:latin typeface="Calibri"/>
-              </a:rPr>
-              <a:t>P</a:t>
-            </a:r>
-          </a:p>
-        </p:txBody>
-      </p:sp>
-      <p:sp>
-        <p:nvSpPr>
-          <p:cNvPr id="27" name="TextBox 26"/>
-          <p:cNvSpPr txBox="1"/>
-          <p:nvPr/>
-        </p:nvSpPr>
-        <p:spPr>
-          <a:xfrm>
-            <a:off x="2443429" y="5623560"/>
-            <a:ext cx="3478682" cy="621792"/>
-          </a:xfrm>
-          <a:prstGeom prst="rect">
-            <a:avLst/>
-          </a:prstGeom>
-          <a:noFill/>
-        </p:spPr>
-        <p:txBody>
-          <a:bodyPr wrap="square" anchor="t"/>
-          <a:lstStyle/>
-          <a:p>
-            <a:pPr algn="ctr"/>
-            <a:r>
-              <a:rPr sz="1300" b="1" i="0">
-                <a:solidFill>
-                  <a:srgbClr val="095292"/>
-                </a:solidFill>
-                <a:latin typeface="Calibri"/>
-              </a:rPr>
-              <a:t>Penpot</a:t>
-            </a:r>
-          </a:p>
-          <a:p>
-            <a:pPr algn="ctr">
-              <a:spcBef>
-                <a:spcPts val="200"/>
-              </a:spcBef>
-            </a:pPr>
-            <a:r>
-              <a:rPr sz="1000" b="0" i="0">
-                <a:solidFill>
-                  <a:srgbClr val="666666"/>
-                </a:solidFill>
-                <a:latin typeface="Calibri"/>
-              </a:rPr>
-              <a:t>Alternativa libre a Figma</a:t>
-            </a:r>
-          </a:p>
-        </p:txBody>
-      </p:sp>
-      <p:sp>
-        <p:nvSpPr>
-          <p:cNvPr id="28" name="Rounded Rectangle 27"/>
-          <p:cNvSpPr/>
-          <p:nvPr/>
-        </p:nvSpPr>
-        <p:spPr>
-          <a:xfrm>
-            <a:off x="6196431" y="4055364"/>
-            <a:ext cx="3624986" cy="2299716"/>
-          </a:xfrm>
-          <a:prstGeom prst="roundRect">
-            <a:avLst>
-              <a:gd name="adj" fmla="val 12000"/>
-            </a:avLst>
-          </a:prstGeom>
-          <a:solidFill>
-            <a:srgbClr val="F2F2F2"/>
-          </a:solidFill>
-          <a:ln>
-            <a:noFill/>
-          </a:ln>
-        </p:spPr>
-        <p:style>
-          <a:lnRef idx="1">
-            <a:schemeClr val="accent1"/>
-          </a:lnRef>
-          <a:fillRef idx="3">
-            <a:schemeClr val="accent1"/>
-          </a:fillRef>
-          <a:effectRef idx="2">
-            <a:schemeClr val="accent1"/>
-          </a:effectRef>
-          <a:fontRef idx="minor">
-            <a:schemeClr val="lt1"/>
-          </a:fontRef>
-        </p:style>
-        <p:txBody>
-          <a:bodyPr rtlCol="0" anchor="ctr"/>
-          <a:lstStyle/>
-          <a:p>
-            <a:pPr algn="ctr"/>
-          </a:p>
-        </p:txBody>
-      </p:sp>
-      <p:sp>
-        <p:nvSpPr>
-          <p:cNvPr id="29" name="Rectangle 28"/>
-          <p:cNvSpPr/>
-          <p:nvPr/>
-        </p:nvSpPr>
-        <p:spPr>
-          <a:xfrm>
-            <a:off x="6196431" y="4055364"/>
-            <a:ext cx="3624986" cy="64008"/>
-          </a:xfrm>
-          <a:prstGeom prst="rect">
-            <a:avLst/>
-          </a:prstGeom>
-          <a:solidFill>
-            <a:srgbClr val="095292"/>
-          </a:solidFill>
-          <a:ln>
-            <a:noFill/>
-          </a:ln>
-        </p:spPr>
-        <p:style>
-          <a:lnRef idx="1">
-            <a:schemeClr val="accent1"/>
-          </a:lnRef>
-          <a:fillRef idx="3">
-            <a:schemeClr val="accent1"/>
-          </a:fillRef>
-          <a:effectRef idx="2">
-            <a:schemeClr val="accent1"/>
-          </a:effectRef>
-          <a:fontRef idx="minor">
-            <a:schemeClr val="lt1"/>
-          </a:fontRef>
-        </p:style>
-        <p:txBody>
-          <a:bodyPr rtlCol="0" anchor="ctr"/>
-          <a:lstStyle/>
-          <a:p>
-            <a:pPr algn="ctr"/>
-          </a:p>
-        </p:txBody>
-      </p:sp>
-      <p:sp>
-        <p:nvSpPr>
-          <p:cNvPr id="30" name="Rectangle 29"/>
-          <p:cNvSpPr/>
-          <p:nvPr/>
-        </p:nvSpPr>
-        <p:spPr>
-          <a:xfrm>
-            <a:off x="6196431" y="4119372"/>
-            <a:ext cx="3624986" cy="27432"/>
-          </a:xfrm>
-          <a:prstGeom prst="rect">
-            <a:avLst/>
-          </a:prstGeom>
-          <a:solidFill>
-            <a:srgbClr val="FFD000"/>
-          </a:solidFill>
-          <a:ln>
-            <a:noFill/>
-          </a:ln>
-        </p:spPr>
-        <p:style>
-          <a:lnRef idx="1">
-            <a:schemeClr val="accent1"/>
-          </a:lnRef>
-          <a:fillRef idx="3">
-            <a:schemeClr val="accent1"/>
-          </a:fillRef>
-          <a:effectRef idx="2">
-            <a:schemeClr val="accent1"/>
-          </a:effectRef>
-          <a:fontRef idx="minor">
-            <a:schemeClr val="lt1"/>
-          </a:fontRef>
-        </p:style>
-        <p:txBody>
-          <a:bodyPr rtlCol="0" anchor="ctr"/>
-          <a:lstStyle/>
-          <a:p>
-            <a:pPr algn="ctr"/>
-          </a:p>
-        </p:txBody>
-      </p:sp>
-      <p:pic>
-        <p:nvPicPr>
-          <p:cNvPr id="31" name="Picture 30" descr="examlab.png"/>
-          <p:cNvPicPr>
-            <a:picLocks noChangeAspect="1"/>
-          </p:cNvPicPr>
-          <p:nvPr/>
-        </p:nvPicPr>
-        <p:blipFill>
-          <a:blip r:embed="rId4"/>
-          <a:stretch>
-            <a:fillRect/>
-          </a:stretch>
-        </p:blipFill>
-        <p:spPr>
-          <a:xfrm>
-            <a:off x="7398562" y="4311396"/>
-            <a:ext cx="1220724" cy="1220724"/>
-          </a:xfrm>
-          <a:prstGeom prst="rect">
-            <a:avLst/>
-          </a:prstGeom>
-        </p:spPr>
-      </p:pic>
-      <p:sp>
-        <p:nvSpPr>
-          <p:cNvPr id="32" name="TextBox 31"/>
-          <p:cNvSpPr txBox="1"/>
-          <p:nvPr/>
-        </p:nvSpPr>
-        <p:spPr>
-          <a:xfrm>
-            <a:off x="6269583" y="5623560"/>
-            <a:ext cx="3478682" cy="621792"/>
-          </a:xfrm>
-          <a:prstGeom prst="rect">
-            <a:avLst/>
-          </a:prstGeom>
-          <a:noFill/>
-        </p:spPr>
-        <p:txBody>
-          <a:bodyPr wrap="square" anchor="t"/>
-          <a:lstStyle/>
-          <a:p>
-            <a:pPr algn="ctr"/>
-            <a:r>
-              <a:rPr sz="1300" b="1" i="0">
-                <a:solidFill>
-                  <a:srgbClr val="095292"/>
-                </a:solidFill>
-                <a:latin typeface="Calibri"/>
-              </a:rPr>
-              <a:t>la plataforma del curso</a:t>
-            </a:r>
-          </a:p>
-          <a:p>
-            <a:pPr algn="ctr">
-              <a:spcBef>
-                <a:spcPts val="200"/>
-              </a:spcBef>
-            </a:pPr>
-            <a:r>
-              <a:rPr sz="1000" b="0" i="0">
-                <a:solidFill>
-                  <a:srgbClr val="666666"/>
-                </a:solidFill>
-                <a:latin typeface="Calibri"/>
-              </a:rPr>
-              <a:t>Entrega del taller · en la fecha que indique el docente</a:t>
-            </a:r>
-          </a:p>
-        </p:txBody>
-      </p:sp>
-      <p:sp>
-        <p:nvSpPr>
-          <p:cNvPr id="33" name="TextBox 32"/>
+              <a:rPr sz="2000" b="0" i="0">
+                <a:solidFill>
+                  <a:srgbClr val="333333"/>
+                </a:solidFill>
+                <a:latin typeface="Calibri"/>
+              </a:rPr>
+              <a:t>–   La usuaria de referencia esta descrita asi: recepcionista con experiencia clinica alta y experiencia informatica baja, atiende telefono mientras registra y necesita terminar el registro de un paciente nuevo en menos de dos minutos.</a:t>
+            </a:r>
+          </a:p>
+        </p:txBody>
+      </p:sp>
+      <p:sp>
+        <p:nvSpPr>
+          <p:cNvPr id="6" name="TextBox 5"/>
           <p:cNvSpPr txBox="1"/>
           <p:nvPr/>
         </p:nvSpPr>
@@ -6914,21 +6914,111 @@
                 </a:solidFill>
                 <a:latin typeface="Calibri"/>
               </a:rPr>
-              <a:t>Taller PI — por que importa</a:t>
-            </a:r>
-          </a:p>
-        </p:txBody>
-      </p:sp>
-      <p:sp>
-        <p:nvSpPr>
-          <p:cNvPr id="5" name="TextBox 4"/>
+              <a:t>Taller PI — pasos guiados</a:t>
+            </a:r>
+          </a:p>
+        </p:txBody>
+      </p:sp>
+      <p:sp>
+        <p:nvSpPr>
+          <p:cNvPr id="5" name="Rounded Rectangle 4"/>
+          <p:cNvSpPr/>
+          <p:nvPr/>
+        </p:nvSpPr>
+        <p:spPr>
+          <a:xfrm>
+            <a:off x="457200" y="1234440"/>
+            <a:ext cx="11277295" cy="950976"/>
+          </a:xfrm>
+          <a:prstGeom prst="roundRect">
+            <a:avLst>
+              <a:gd name="adj" fmla="val 12000"/>
+            </a:avLst>
+          </a:prstGeom>
+          <a:solidFill>
+            <a:srgbClr val="F2F2F2"/>
+          </a:solidFill>
+          <a:ln>
+            <a:noFill/>
+          </a:ln>
+        </p:spPr>
+        <p:style>
+          <a:lnRef idx="1">
+            <a:schemeClr val="accent1"/>
+          </a:lnRef>
+          <a:fillRef idx="3">
+            <a:schemeClr val="accent1"/>
+          </a:fillRef>
+          <a:effectRef idx="2">
+            <a:schemeClr val="accent1"/>
+          </a:effectRef>
+          <a:fontRef idx="minor">
+            <a:schemeClr val="lt1"/>
+          </a:fontRef>
+        </p:style>
+        <p:txBody>
+          <a:bodyPr rtlCol="0" anchor="ctr"/>
+          <a:lstStyle/>
+          <a:p>
+            <a:pPr algn="ctr"/>
+          </a:p>
+        </p:txBody>
+      </p:sp>
+      <p:sp>
+        <p:nvSpPr>
+          <p:cNvPr id="6" name="Rounded Rectangle 5"/>
+          <p:cNvSpPr/>
+          <p:nvPr/>
+        </p:nvSpPr>
+        <p:spPr>
+          <a:xfrm>
+            <a:off x="594360" y="1490472"/>
+            <a:ext cx="438912" cy="438912"/>
+          </a:xfrm>
+          <a:prstGeom prst="roundRect">
+            <a:avLst>
+              <a:gd name="adj" fmla="val 12000"/>
+            </a:avLst>
+          </a:prstGeom>
+          <a:solidFill>
+            <a:srgbClr val="095292"/>
+          </a:solidFill>
+          <a:ln>
+            <a:noFill/>
+          </a:ln>
+        </p:spPr>
+        <p:style>
+          <a:lnRef idx="1">
+            <a:schemeClr val="accent1"/>
+          </a:lnRef>
+          <a:fillRef idx="3">
+            <a:schemeClr val="accent1"/>
+          </a:fillRef>
+          <a:effectRef idx="2">
+            <a:schemeClr val="accent1"/>
+          </a:effectRef>
+          <a:fontRef idx="minor">
+            <a:schemeClr val="lt1"/>
+          </a:fontRef>
+        </p:style>
+        <p:txBody>
+          <a:bodyPr rtlCol="0" anchor="ctr"/>
+          <a:lstStyle/>
+          <a:p>
+            <a:pPr algn="ctr"/>
+          </a:p>
+        </p:txBody>
+      </p:sp>
+      <p:sp>
+        <p:nvSpPr>
+          <p:cNvPr id="7" name="TextBox 6"/>
           <p:cNvSpPr txBox="1"/>
           <p:nvPr/>
         </p:nvSpPr>
         <p:spPr>
           <a:xfrm>
-            <a:off x="457200" y="1170432"/>
-            <a:ext cx="11277295" cy="5230368"/>
+            <a:off x="594360" y="1490472"/>
+            <a:ext cx="438912" cy="438912"/>
           </a:xfrm>
           <a:prstGeom prst="rect">
             <a:avLst/>
@@ -6936,81 +7026,677 @@
           <a:noFill/>
         </p:spPr>
         <p:txBody>
-          <a:bodyPr wrap="square">
-            <a:spAutoFit/>
-          </a:bodyPr>
-          <a:lstStyle/>
-          <a:p>
-            <a:pPr>
-              <a:spcAft>
-                <a:spcPts val="800"/>
-              </a:spcAft>
-            </a:pPr>
-            <a:r>
-              <a:rPr sz="2000" b="0" i="0">
-                <a:solidFill>
-                  <a:srgbClr val="333333"/>
-                </a:solidFill>
-                <a:latin typeface="Calibri"/>
-              </a:rPr>
-              <a:t>–   </a:t>
-            </a:r>
-            <a:r>
-              <a:rPr sz="2000" b="1" i="0">
-                <a:solidFill>
-                  <a:srgbClr val="333333"/>
-                </a:solidFill>
-                <a:latin typeface="Calibri"/>
-              </a:rPr>
-              <a:t>Por que importa al PI:</a:t>
-            </a:r>
-            <a:r>
-              <a:rPr sz="2000" b="0" i="0">
-                <a:solidFill>
-                  <a:srgbClr val="333333"/>
-                </a:solidFill>
-                <a:latin typeface="Calibri"/>
-              </a:rPr>
-              <a:t> la interfaz es la cara visible del paquete de diseño de VetCare y es lo unico del PI que la clinica Huellitas entiende sin traduccion; ademas es el insumo directo con el que Programacion II construye las pantallas reales.</a:t>
-            </a:r>
-          </a:p>
-          <a:p>
-            <a:pPr>
-              <a:spcAft>
-                <a:spcPts val="800"/>
-              </a:spcAft>
-            </a:pPr>
-            <a:r>
-              <a:rPr sz="2000" b="0" i="0">
-                <a:solidFill>
-                  <a:srgbClr val="333333"/>
-                </a:solidFill>
-                <a:latin typeface="Calibri"/>
-              </a:rPr>
-              <a:t>–   Es la ultima clase con tema nuevo del curso: lo que se produzca hoy entra tal cual al documento final y a la sustentacion de la clase 14.</a:t>
-            </a:r>
-          </a:p>
-          <a:p>
-            <a:pPr>
-              <a:spcAft>
-                <a:spcPts val="800"/>
-              </a:spcAft>
-            </a:pPr>
-            <a:r>
-              <a:rPr sz="2000" b="0" i="0">
-                <a:solidFill>
-                  <a:srgbClr val="333333"/>
-                </a:solidFill>
-                <a:latin typeface="Calibri"/>
-              </a:rPr>
-              <a:t>–   Quien va solo por la ruta C cierra su PI con este prototipo navegable, que es entregable completo y valido por si mismo, no una version recortada del proyecto.</a:t>
-            </a:r>
-          </a:p>
-        </p:txBody>
-      </p:sp>
-      <p:sp>
-        <p:nvSpPr>
-          <p:cNvPr id="6" name="TextBox 5"/>
+          <a:bodyPr wrap="square" anchor="ctr"/>
+          <a:lstStyle/>
+          <a:p>
+            <a:pPr algn="ctr"/>
+            <a:r>
+              <a:rPr sz="1600" b="1" i="0">
+                <a:solidFill>
+                  <a:srgbClr val="FFFFFF"/>
+                </a:solidFill>
+                <a:latin typeface="Calibri"/>
+              </a:rPr>
+              <a:t>1</a:t>
+            </a:r>
+          </a:p>
+        </p:txBody>
+      </p:sp>
+      <p:sp>
+        <p:nvSpPr>
+          <p:cNvPr id="8" name="TextBox 7"/>
+          <p:cNvSpPr txBox="1"/>
+          <p:nvPr/>
+        </p:nvSpPr>
+        <p:spPr>
+          <a:xfrm>
+            <a:off x="1188720" y="1325880"/>
+            <a:ext cx="10271455" cy="786384"/>
+          </a:xfrm>
+          <a:prstGeom prst="rect">
+            <a:avLst/>
+          </a:prstGeom>
+          <a:noFill/>
+        </p:spPr>
+        <p:txBody>
+          <a:bodyPr wrap="square" anchor="ctr"/>
+          <a:lstStyle/>
+          <a:p>
+            <a:r>
+              <a:rPr sz="1400" b="1" i="0">
+                <a:solidFill>
+                  <a:srgbClr val="095292"/>
+                </a:solidFill>
+                <a:latin typeface="Calibri"/>
+              </a:rPr>
+              <a:t>Paso 1. En Excalidraw o en papel, dibujen el wireframe en gris de la pantalla Registrar mascota de VetCare, sin colores ni logos, ubicando bloque de dueño, bloque de datos de la mascota y zona de accion; el wireframe debe caber en una sola vista sin scroll y no puede tener mas de nueve campos.</a:t>
+            </a:r>
+          </a:p>
+        </p:txBody>
+      </p:sp>
+      <p:sp>
+        <p:nvSpPr>
+          <p:cNvPr id="9" name="Rounded Rectangle 8"/>
+          <p:cNvSpPr/>
+          <p:nvPr/>
+        </p:nvSpPr>
+        <p:spPr>
+          <a:xfrm>
+            <a:off x="457200" y="2276856"/>
+            <a:ext cx="11277295" cy="950976"/>
+          </a:xfrm>
+          <a:prstGeom prst="roundRect">
+            <a:avLst>
+              <a:gd name="adj" fmla="val 12000"/>
+            </a:avLst>
+          </a:prstGeom>
+          <a:solidFill>
+            <a:srgbClr val="E8F4FA"/>
+          </a:solidFill>
+          <a:ln>
+            <a:noFill/>
+          </a:ln>
+        </p:spPr>
+        <p:style>
+          <a:lnRef idx="1">
+            <a:schemeClr val="accent1"/>
+          </a:lnRef>
+          <a:fillRef idx="3">
+            <a:schemeClr val="accent1"/>
+          </a:fillRef>
+          <a:effectRef idx="2">
+            <a:schemeClr val="accent1"/>
+          </a:effectRef>
+          <a:fontRef idx="minor">
+            <a:schemeClr val="lt1"/>
+          </a:fontRef>
+        </p:style>
+        <p:txBody>
+          <a:bodyPr rtlCol="0" anchor="ctr"/>
+          <a:lstStyle/>
+          <a:p>
+            <a:pPr algn="ctr"/>
+          </a:p>
+        </p:txBody>
+      </p:sp>
+      <p:sp>
+        <p:nvSpPr>
+          <p:cNvPr id="10" name="Rounded Rectangle 9"/>
+          <p:cNvSpPr/>
+          <p:nvPr/>
+        </p:nvSpPr>
+        <p:spPr>
+          <a:xfrm>
+            <a:off x="594360" y="2532888"/>
+            <a:ext cx="438912" cy="438912"/>
+          </a:xfrm>
+          <a:prstGeom prst="roundRect">
+            <a:avLst>
+              <a:gd name="adj" fmla="val 12000"/>
+            </a:avLst>
+          </a:prstGeom>
+          <a:solidFill>
+            <a:srgbClr val="095292"/>
+          </a:solidFill>
+          <a:ln>
+            <a:noFill/>
+          </a:ln>
+        </p:spPr>
+        <p:style>
+          <a:lnRef idx="1">
+            <a:schemeClr val="accent1"/>
+          </a:lnRef>
+          <a:fillRef idx="3">
+            <a:schemeClr val="accent1"/>
+          </a:fillRef>
+          <a:effectRef idx="2">
+            <a:schemeClr val="accent1"/>
+          </a:effectRef>
+          <a:fontRef idx="minor">
+            <a:schemeClr val="lt1"/>
+          </a:fontRef>
+        </p:style>
+        <p:txBody>
+          <a:bodyPr rtlCol="0" anchor="ctr"/>
+          <a:lstStyle/>
+          <a:p>
+            <a:pPr algn="ctr"/>
+          </a:p>
+        </p:txBody>
+      </p:sp>
+      <p:sp>
+        <p:nvSpPr>
+          <p:cNvPr id="11" name="TextBox 10"/>
+          <p:cNvSpPr txBox="1"/>
+          <p:nvPr/>
+        </p:nvSpPr>
+        <p:spPr>
+          <a:xfrm>
+            <a:off x="594360" y="2532888"/>
+            <a:ext cx="438912" cy="438912"/>
+          </a:xfrm>
+          <a:prstGeom prst="rect">
+            <a:avLst/>
+          </a:prstGeom>
+          <a:noFill/>
+        </p:spPr>
+        <p:txBody>
+          <a:bodyPr wrap="square" anchor="ctr"/>
+          <a:lstStyle/>
+          <a:p>
+            <a:pPr algn="ctr"/>
+            <a:r>
+              <a:rPr sz="1600" b="1" i="0">
+                <a:solidFill>
+                  <a:srgbClr val="FFFFFF"/>
+                </a:solidFill>
+                <a:latin typeface="Calibri"/>
+              </a:rPr>
+              <a:t>2</a:t>
+            </a:r>
+          </a:p>
+        </p:txBody>
+      </p:sp>
+      <p:sp>
+        <p:nvSpPr>
+          <p:cNvPr id="12" name="TextBox 11"/>
+          <p:cNvSpPr txBox="1"/>
+          <p:nvPr/>
+        </p:nvSpPr>
+        <p:spPr>
+          <a:xfrm>
+            <a:off x="1188720" y="2368296"/>
+            <a:ext cx="10271455" cy="786384"/>
+          </a:xfrm>
+          <a:prstGeom prst="rect">
+            <a:avLst/>
+          </a:prstGeom>
+          <a:noFill/>
+        </p:spPr>
+        <p:txBody>
+          <a:bodyPr wrap="square" anchor="ctr"/>
+          <a:lstStyle/>
+          <a:p>
+            <a:r>
+              <a:rPr sz="1400" b="1" i="0">
+                <a:solidFill>
+                  <a:srgbClr val="095292"/>
+                </a:solidFill>
+                <a:latin typeface="Calibri"/>
+              </a:rPr>
+              <a:t>Paso 2. Numeren de uno a seis los elementos criticos del wireframe y llenen la tabla de anotaciones indicando para cada numero el atributo del diccionario de datos que lo respalda, el RF que lo exige y si es obligatorio u opcional; si un elemento no tiene RF, borrenlo o creen el requisito y dejenlo escrito.</a:t>
+            </a:r>
+          </a:p>
+        </p:txBody>
+      </p:sp>
+      <p:sp>
+        <p:nvSpPr>
+          <p:cNvPr id="13" name="Rounded Rectangle 12"/>
+          <p:cNvSpPr/>
+          <p:nvPr/>
+        </p:nvSpPr>
+        <p:spPr>
+          <a:xfrm>
+            <a:off x="457200" y="3319272"/>
+            <a:ext cx="11277295" cy="950976"/>
+          </a:xfrm>
+          <a:prstGeom prst="roundRect">
+            <a:avLst>
+              <a:gd name="adj" fmla="val 12000"/>
+            </a:avLst>
+          </a:prstGeom>
+          <a:solidFill>
+            <a:srgbClr val="F2F2F2"/>
+          </a:solidFill>
+          <a:ln>
+            <a:noFill/>
+          </a:ln>
+        </p:spPr>
+        <p:style>
+          <a:lnRef idx="1">
+            <a:schemeClr val="accent1"/>
+          </a:lnRef>
+          <a:fillRef idx="3">
+            <a:schemeClr val="accent1"/>
+          </a:fillRef>
+          <a:effectRef idx="2">
+            <a:schemeClr val="accent1"/>
+          </a:effectRef>
+          <a:fontRef idx="minor">
+            <a:schemeClr val="lt1"/>
+          </a:fontRef>
+        </p:style>
+        <p:txBody>
+          <a:bodyPr rtlCol="0" anchor="ctr"/>
+          <a:lstStyle/>
+          <a:p>
+            <a:pPr algn="ctr"/>
+          </a:p>
+        </p:txBody>
+      </p:sp>
+      <p:sp>
+        <p:nvSpPr>
+          <p:cNvPr id="14" name="Rounded Rectangle 13"/>
+          <p:cNvSpPr/>
+          <p:nvPr/>
+        </p:nvSpPr>
+        <p:spPr>
+          <a:xfrm>
+            <a:off x="594360" y="3575304"/>
+            <a:ext cx="438912" cy="438912"/>
+          </a:xfrm>
+          <a:prstGeom prst="roundRect">
+            <a:avLst>
+              <a:gd name="adj" fmla="val 12000"/>
+            </a:avLst>
+          </a:prstGeom>
+          <a:solidFill>
+            <a:srgbClr val="095292"/>
+          </a:solidFill>
+          <a:ln>
+            <a:noFill/>
+          </a:ln>
+        </p:spPr>
+        <p:style>
+          <a:lnRef idx="1">
+            <a:schemeClr val="accent1"/>
+          </a:lnRef>
+          <a:fillRef idx="3">
+            <a:schemeClr val="accent1"/>
+          </a:fillRef>
+          <a:effectRef idx="2">
+            <a:schemeClr val="accent1"/>
+          </a:effectRef>
+          <a:fontRef idx="minor">
+            <a:schemeClr val="lt1"/>
+          </a:fontRef>
+        </p:style>
+        <p:txBody>
+          <a:bodyPr rtlCol="0" anchor="ctr"/>
+          <a:lstStyle/>
+          <a:p>
+            <a:pPr algn="ctr"/>
+          </a:p>
+        </p:txBody>
+      </p:sp>
+      <p:sp>
+        <p:nvSpPr>
+          <p:cNvPr id="15" name="TextBox 14"/>
+          <p:cNvSpPr txBox="1"/>
+          <p:nvPr/>
+        </p:nvSpPr>
+        <p:spPr>
+          <a:xfrm>
+            <a:off x="594360" y="3575304"/>
+            <a:ext cx="438912" cy="438912"/>
+          </a:xfrm>
+          <a:prstGeom prst="rect">
+            <a:avLst/>
+          </a:prstGeom>
+          <a:noFill/>
+        </p:spPr>
+        <p:txBody>
+          <a:bodyPr wrap="square" anchor="ctr"/>
+          <a:lstStyle/>
+          <a:p>
+            <a:pPr algn="ctr"/>
+            <a:r>
+              <a:rPr sz="1600" b="1" i="0">
+                <a:solidFill>
+                  <a:srgbClr val="FFFFFF"/>
+                </a:solidFill>
+                <a:latin typeface="Calibri"/>
+              </a:rPr>
+              <a:t>3</a:t>
+            </a:r>
+          </a:p>
+        </p:txBody>
+      </p:sp>
+      <p:sp>
+        <p:nvSpPr>
+          <p:cNvPr id="16" name="TextBox 15"/>
+          <p:cNvSpPr txBox="1"/>
+          <p:nvPr/>
+        </p:nvSpPr>
+        <p:spPr>
+          <a:xfrm>
+            <a:off x="1188720" y="3410712"/>
+            <a:ext cx="10271455" cy="786384"/>
+          </a:xfrm>
+          <a:prstGeom prst="rect">
+            <a:avLst/>
+          </a:prstGeom>
+          <a:noFill/>
+        </p:spPr>
+        <p:txBody>
+          <a:bodyPr wrap="square" anchor="ctr"/>
+          <a:lstStyle/>
+          <a:p>
+            <a:r>
+              <a:rPr sz="1400" b="1" i="0">
+                <a:solidFill>
+                  <a:srgbClr val="095292"/>
+                </a:solidFill>
+                <a:latin typeface="Calibri"/>
+              </a:rPr>
+              <a:t>Paso 3. Diseñen la pantalla Buscar expediente resolviendo explicitamente el caso de resultados multiples: definan los tres criterios de busqueda, las columnas de la lista de resultados que permiten desambiguar y el mensaje exacto que se muestra cuando no hay ningun resultado.</a:t>
+            </a:r>
+          </a:p>
+        </p:txBody>
+      </p:sp>
+      <p:sp>
+        <p:nvSpPr>
+          <p:cNvPr id="17" name="Rounded Rectangle 16"/>
+          <p:cNvSpPr/>
+          <p:nvPr/>
+        </p:nvSpPr>
+        <p:spPr>
+          <a:xfrm>
+            <a:off x="457200" y="4361688"/>
+            <a:ext cx="11277295" cy="950976"/>
+          </a:xfrm>
+          <a:prstGeom prst="roundRect">
+            <a:avLst>
+              <a:gd name="adj" fmla="val 12000"/>
+            </a:avLst>
+          </a:prstGeom>
+          <a:solidFill>
+            <a:srgbClr val="E8F4FA"/>
+          </a:solidFill>
+          <a:ln>
+            <a:noFill/>
+          </a:ln>
+        </p:spPr>
+        <p:style>
+          <a:lnRef idx="1">
+            <a:schemeClr val="accent1"/>
+          </a:lnRef>
+          <a:fillRef idx="3">
+            <a:schemeClr val="accent1"/>
+          </a:fillRef>
+          <a:effectRef idx="2">
+            <a:schemeClr val="accent1"/>
+          </a:effectRef>
+          <a:fontRef idx="minor">
+            <a:schemeClr val="lt1"/>
+          </a:fontRef>
+        </p:style>
+        <p:txBody>
+          <a:bodyPr rtlCol="0" anchor="ctr"/>
+          <a:lstStyle/>
+          <a:p>
+            <a:pPr algn="ctr"/>
+          </a:p>
+        </p:txBody>
+      </p:sp>
+      <p:sp>
+        <p:nvSpPr>
+          <p:cNvPr id="18" name="Rounded Rectangle 17"/>
+          <p:cNvSpPr/>
+          <p:nvPr/>
+        </p:nvSpPr>
+        <p:spPr>
+          <a:xfrm>
+            <a:off x="594360" y="4617720"/>
+            <a:ext cx="438912" cy="438912"/>
+          </a:xfrm>
+          <a:prstGeom prst="roundRect">
+            <a:avLst>
+              <a:gd name="adj" fmla="val 12000"/>
+            </a:avLst>
+          </a:prstGeom>
+          <a:solidFill>
+            <a:srgbClr val="095292"/>
+          </a:solidFill>
+          <a:ln>
+            <a:noFill/>
+          </a:ln>
+        </p:spPr>
+        <p:style>
+          <a:lnRef idx="1">
+            <a:schemeClr val="accent1"/>
+          </a:lnRef>
+          <a:fillRef idx="3">
+            <a:schemeClr val="accent1"/>
+          </a:fillRef>
+          <a:effectRef idx="2">
+            <a:schemeClr val="accent1"/>
+          </a:effectRef>
+          <a:fontRef idx="minor">
+            <a:schemeClr val="lt1"/>
+          </a:fontRef>
+        </p:style>
+        <p:txBody>
+          <a:bodyPr rtlCol="0" anchor="ctr"/>
+          <a:lstStyle/>
+          <a:p>
+            <a:pPr algn="ctr"/>
+          </a:p>
+        </p:txBody>
+      </p:sp>
+      <p:sp>
+        <p:nvSpPr>
+          <p:cNvPr id="19" name="TextBox 18"/>
+          <p:cNvSpPr txBox="1"/>
+          <p:nvPr/>
+        </p:nvSpPr>
+        <p:spPr>
+          <a:xfrm>
+            <a:off x="594360" y="4617720"/>
+            <a:ext cx="438912" cy="438912"/>
+          </a:xfrm>
+          <a:prstGeom prst="rect">
+            <a:avLst/>
+          </a:prstGeom>
+          <a:noFill/>
+        </p:spPr>
+        <p:txBody>
+          <a:bodyPr wrap="square" anchor="ctr"/>
+          <a:lstStyle/>
+          <a:p>
+            <a:pPr algn="ctr"/>
+            <a:r>
+              <a:rPr sz="1600" b="1" i="0">
+                <a:solidFill>
+                  <a:srgbClr val="FFFFFF"/>
+                </a:solidFill>
+                <a:latin typeface="Calibri"/>
+              </a:rPr>
+              <a:t>4</a:t>
+            </a:r>
+          </a:p>
+        </p:txBody>
+      </p:sp>
+      <p:sp>
+        <p:nvSpPr>
+          <p:cNvPr id="20" name="TextBox 19"/>
+          <p:cNvSpPr txBox="1"/>
+          <p:nvPr/>
+        </p:nvSpPr>
+        <p:spPr>
+          <a:xfrm>
+            <a:off x="1188720" y="4453128"/>
+            <a:ext cx="10271455" cy="786384"/>
+          </a:xfrm>
+          <a:prstGeom prst="rect">
+            <a:avLst/>
+          </a:prstGeom>
+          <a:noFill/>
+        </p:spPr>
+        <p:txBody>
+          <a:bodyPr wrap="square" anchor="ctr"/>
+          <a:lstStyle/>
+          <a:p>
+            <a:r>
+              <a:rPr sz="1400" b="1" i="0">
+                <a:solidFill>
+                  <a:srgbClr val="095292"/>
+                </a:solidFill>
+                <a:latin typeface="Calibri"/>
+              </a:rPr>
+              <a:t>Paso 4. Pasen las dos pantallas a Figma o Penpot como mockup y conecten minimo tres transiciones navegables: Registrar mascota hacia la confirmacion con codigo, confirmacion hacia Buscar expediente, y un resultado de la lista hacia la ficha del paciente; escriban al lado de cada transicion que principio de usabilidad estan cumpliendo.</a:t>
+            </a:r>
+          </a:p>
+        </p:txBody>
+      </p:sp>
+      <p:sp>
+        <p:nvSpPr>
+          <p:cNvPr id="21" name="Rounded Rectangle 20"/>
+          <p:cNvSpPr/>
+          <p:nvPr/>
+        </p:nvSpPr>
+        <p:spPr>
+          <a:xfrm>
+            <a:off x="457200" y="5404104"/>
+            <a:ext cx="11277295" cy="950976"/>
+          </a:xfrm>
+          <a:prstGeom prst="roundRect">
+            <a:avLst>
+              <a:gd name="adj" fmla="val 12000"/>
+            </a:avLst>
+          </a:prstGeom>
+          <a:solidFill>
+            <a:srgbClr val="F2F2F2"/>
+          </a:solidFill>
+          <a:ln>
+            <a:noFill/>
+          </a:ln>
+        </p:spPr>
+        <p:style>
+          <a:lnRef idx="1">
+            <a:schemeClr val="accent1"/>
+          </a:lnRef>
+          <a:fillRef idx="3">
+            <a:schemeClr val="accent1"/>
+          </a:fillRef>
+          <a:effectRef idx="2">
+            <a:schemeClr val="accent1"/>
+          </a:effectRef>
+          <a:fontRef idx="minor">
+            <a:schemeClr val="lt1"/>
+          </a:fontRef>
+        </p:style>
+        <p:txBody>
+          <a:bodyPr rtlCol="0" anchor="ctr"/>
+          <a:lstStyle/>
+          <a:p>
+            <a:pPr algn="ctr"/>
+          </a:p>
+        </p:txBody>
+      </p:sp>
+      <p:sp>
+        <p:nvSpPr>
+          <p:cNvPr id="22" name="Rounded Rectangle 21"/>
+          <p:cNvSpPr/>
+          <p:nvPr/>
+        </p:nvSpPr>
+        <p:spPr>
+          <a:xfrm>
+            <a:off x="594360" y="5660136"/>
+            <a:ext cx="438912" cy="438912"/>
+          </a:xfrm>
+          <a:prstGeom prst="roundRect">
+            <a:avLst>
+              <a:gd name="adj" fmla="val 12000"/>
+            </a:avLst>
+          </a:prstGeom>
+          <a:solidFill>
+            <a:srgbClr val="095292"/>
+          </a:solidFill>
+          <a:ln>
+            <a:noFill/>
+          </a:ln>
+        </p:spPr>
+        <p:style>
+          <a:lnRef idx="1">
+            <a:schemeClr val="accent1"/>
+          </a:lnRef>
+          <a:fillRef idx="3">
+            <a:schemeClr val="accent1"/>
+          </a:fillRef>
+          <a:effectRef idx="2">
+            <a:schemeClr val="accent1"/>
+          </a:effectRef>
+          <a:fontRef idx="minor">
+            <a:schemeClr val="lt1"/>
+          </a:fontRef>
+        </p:style>
+        <p:txBody>
+          <a:bodyPr rtlCol="0" anchor="ctr"/>
+          <a:lstStyle/>
+          <a:p>
+            <a:pPr algn="ctr"/>
+          </a:p>
+        </p:txBody>
+      </p:sp>
+      <p:sp>
+        <p:nvSpPr>
+          <p:cNvPr id="23" name="TextBox 22"/>
+          <p:cNvSpPr txBox="1"/>
+          <p:nvPr/>
+        </p:nvSpPr>
+        <p:spPr>
+          <a:xfrm>
+            <a:off x="594360" y="5660136"/>
+            <a:ext cx="438912" cy="438912"/>
+          </a:xfrm>
+          <a:prstGeom prst="rect">
+            <a:avLst/>
+          </a:prstGeom>
+          <a:noFill/>
+        </p:spPr>
+        <p:txBody>
+          <a:bodyPr wrap="square" anchor="ctr"/>
+          <a:lstStyle/>
+          <a:p>
+            <a:pPr algn="ctr"/>
+            <a:r>
+              <a:rPr sz="1600" b="1" i="0">
+                <a:solidFill>
+                  <a:srgbClr val="FFFFFF"/>
+                </a:solidFill>
+                <a:latin typeface="Calibri"/>
+              </a:rPr>
+              <a:t>5</a:t>
+            </a:r>
+          </a:p>
+        </p:txBody>
+      </p:sp>
+      <p:sp>
+        <p:nvSpPr>
+          <p:cNvPr id="24" name="TextBox 23"/>
+          <p:cNvSpPr txBox="1"/>
+          <p:nvPr/>
+        </p:nvSpPr>
+        <p:spPr>
+          <a:xfrm>
+            <a:off x="1188720" y="5495544"/>
+            <a:ext cx="10271455" cy="786384"/>
+          </a:xfrm>
+          <a:prstGeom prst="rect">
+            <a:avLst/>
+          </a:prstGeom>
+          <a:noFill/>
+        </p:spPr>
+        <p:txBody>
+          <a:bodyPr wrap="square" anchor="ctr"/>
+          <a:lstStyle/>
+          <a:p>
+            <a:r>
+              <a:rPr sz="1400" b="1" i="0">
+                <a:solidFill>
+                  <a:srgbClr val="095292"/>
+                </a:solidFill>
+                <a:latin typeface="Calibri"/>
+              </a:rPr>
+              <a:t>Paso 5. Hagan prueba de pasillo con otro compañero, denle la tarea registrar la mascota Luna de la señora Perez y encontrar su ficha, no le expliquen nada, cronometren, cuenten clics y anoten los dos puntos donde dudo; escriban abajo los dos cambios concretos que haran al diseño por lo observado.</a:t>
+            </a:r>
+          </a:p>
+        </p:txBody>
+      </p:sp>
+      <p:sp>
+        <p:nvSpPr>
+          <p:cNvPr id="25" name="TextBox 24"/>
           <p:cNvSpPr txBox="1"/>
           <p:nvPr/>
         </p:nvSpPr>
@@ -7184,21 +7870,154 @@
                 </a:solidFill>
                 <a:latin typeface="Calibri"/>
               </a:rPr>
-              <a:t>Taller PI — punto de partida</a:t>
-            </a:r>
-          </a:p>
-        </p:txBody>
-      </p:sp>
-      <p:sp>
-        <p:nvSpPr>
-          <p:cNvPr id="5" name="TextBox 4"/>
+              <a:t>Antes de entregar — autochequeo</a:t>
+            </a:r>
+          </a:p>
+        </p:txBody>
+      </p:sp>
+      <p:sp>
+        <p:nvSpPr>
+          <p:cNvPr id="5" name="Rounded Rectangle 4"/>
+          <p:cNvSpPr/>
+          <p:nvPr/>
+        </p:nvSpPr>
+        <p:spPr>
+          <a:xfrm>
+            <a:off x="457200" y="1261872"/>
+            <a:ext cx="11277295" cy="566928"/>
+          </a:xfrm>
+          <a:prstGeom prst="roundRect">
+            <a:avLst>
+              <a:gd name="adj" fmla="val 12000"/>
+            </a:avLst>
+          </a:prstGeom>
+          <a:solidFill>
+            <a:srgbClr val="F2F2F2"/>
+          </a:solidFill>
+          <a:ln>
+            <a:noFill/>
+          </a:ln>
+        </p:spPr>
+        <p:style>
+          <a:lnRef idx="1">
+            <a:schemeClr val="accent1"/>
+          </a:lnRef>
+          <a:fillRef idx="3">
+            <a:schemeClr val="accent1"/>
+          </a:fillRef>
+          <a:effectRef idx="2">
+            <a:schemeClr val="accent1"/>
+          </a:effectRef>
+          <a:fontRef idx="minor">
+            <a:schemeClr val="lt1"/>
+          </a:fontRef>
+        </p:style>
+        <p:txBody>
+          <a:bodyPr rtlCol="0" anchor="ctr"/>
+          <a:lstStyle/>
+          <a:p>
+            <a:pPr algn="ctr"/>
+          </a:p>
+        </p:txBody>
+      </p:sp>
+      <p:sp>
+        <p:nvSpPr>
+          <p:cNvPr id="6" name="Rectangle 5"/>
+          <p:cNvSpPr/>
+          <p:nvPr/>
+        </p:nvSpPr>
+        <p:spPr>
+          <a:xfrm>
+            <a:off x="640080" y="1408175"/>
+            <a:ext cx="274320" cy="274320"/>
+          </a:xfrm>
+          <a:prstGeom prst="rect">
+            <a:avLst/>
+          </a:prstGeom>
+          <a:solidFill>
+            <a:srgbClr val="FFFFFF"/>
+          </a:solidFill>
+          <a:ln>
+            <a:solidFill>
+              <a:srgbClr val="333333"/>
+            </a:solidFill>
+          </a:ln>
+        </p:spPr>
+        <p:style>
+          <a:lnRef idx="1">
+            <a:schemeClr val="accent1"/>
+          </a:lnRef>
+          <a:fillRef idx="3">
+            <a:schemeClr val="accent1"/>
+          </a:fillRef>
+          <a:effectRef idx="2">
+            <a:schemeClr val="accent1"/>
+          </a:effectRef>
+          <a:fontRef idx="minor">
+            <a:schemeClr val="lt1"/>
+          </a:fontRef>
+        </p:style>
+        <p:txBody>
+          <a:bodyPr rtlCol="0" anchor="ctr"/>
+          <a:lstStyle/>
+          <a:p>
+            <a:pPr algn="ctr"/>
+          </a:p>
+        </p:txBody>
+      </p:sp>
+      <p:sp>
+        <p:nvSpPr>
+          <p:cNvPr id="7" name="Rectangle 6"/>
+          <p:cNvSpPr/>
+          <p:nvPr/>
+        </p:nvSpPr>
+        <p:spPr>
+          <a:xfrm>
+            <a:off x="640080" y="1408175"/>
+            <a:ext cx="73152" cy="274320"/>
+          </a:xfrm>
+          <a:prstGeom prst="rect">
+            <a:avLst/>
+          </a:prstGeom>
+          <a:solidFill>
+            <a:srgbClr val="269CCB"/>
+          </a:solidFill>
+          <a:ln>
+            <a:noFill/>
+          </a:ln>
+        </p:spPr>
+        <p:style>
+          <a:lnRef idx="1">
+            <a:schemeClr val="accent1"/>
+          </a:lnRef>
+          <a:fillRef idx="3">
+            <a:schemeClr val="accent1"/>
+          </a:fillRef>
+          <a:effectRef idx="2">
+            <a:schemeClr val="accent1"/>
+          </a:effectRef>
+          <a:fontRef idx="minor">
+            <a:schemeClr val="lt1"/>
+          </a:fontRef>
+        </p:style>
+        <p:txBody>
+          <a:bodyPr rtlCol="0" anchor="ctr"/>
+          <a:lstStyle/>
+          <a:p>
+            <a:pPr algn="ctr"/>
+          </a:p>
+        </p:txBody>
+      </p:sp>
+      <p:sp>
+        <p:nvSpPr>
+          <p:cNvPr id="8" name="TextBox 7"/>
           <p:cNvSpPr txBox="1"/>
           <p:nvPr/>
         </p:nvSpPr>
         <p:spPr>
           <a:xfrm>
-            <a:off x="457200" y="1170432"/>
-            <a:ext cx="11277295" cy="5230368"/>
+            <a:off x="1097280" y="1353312"/>
+            <a:ext cx="10362895" cy="402336"/>
           </a:xfrm>
           <a:prstGeom prst="rect">
             <a:avLst/>
@@ -7206,63 +8025,354 @@
           <a:noFill/>
         </p:spPr>
         <p:txBody>
-          <a:bodyPr wrap="square">
-            <a:spAutoFit/>
-          </a:bodyPr>
-          <a:lstStyle/>
-          <a:p>
-            <a:pPr>
-              <a:spcAft>
-                <a:spcPts val="800"/>
-              </a:spcAft>
-            </a:pPr>
-            <a:r>
-              <a:rPr sz="2000" b="0" i="0">
+          <a:bodyPr wrap="square" anchor="ctr"/>
+          <a:lstStyle/>
+          <a:p>
+            <a:r>
+              <a:rPr sz="1500" b="0" i="0">
                 <a:solidFill>
                   <a:srgbClr val="333333"/>
                 </a:solidFill>
                 <a:latin typeface="Calibri"/>
               </a:rPr>
-              <a:t>–   El equipo ya tiene aprobados los RF y RNF, el diagrama de casos de uso, el de clases con Mascota, Dueño, Historia_Clinica y Cita, y el diccionario de datos con tipos y longitudes.</a:t>
-            </a:r>
-          </a:p>
-          <a:p>
-            <a:pPr>
-              <a:spcAft>
-                <a:spcPts val="800"/>
-              </a:spcAft>
-            </a:pPr>
-            <a:r>
-              <a:rPr sz="2000" b="0" i="0">
+              <a:t>Si la recepcionista oprime Guardar y se va al telefono treinta segundos, cuando vuelva a mirar la pantalla sabe con certeza si el registro quedo o no quedo, y por que lo sabe.</a:t>
+            </a:r>
+          </a:p>
+        </p:txBody>
+      </p:sp>
+      <p:sp>
+        <p:nvSpPr>
+          <p:cNvPr id="9" name="Rounded Rectangle 8"/>
+          <p:cNvSpPr/>
+          <p:nvPr/>
+        </p:nvSpPr>
+        <p:spPr>
+          <a:xfrm>
+            <a:off x="457200" y="1938528"/>
+            <a:ext cx="11277295" cy="566928"/>
+          </a:xfrm>
+          <a:prstGeom prst="roundRect">
+            <a:avLst>
+              <a:gd name="adj" fmla="val 12000"/>
+            </a:avLst>
+          </a:prstGeom>
+          <a:solidFill>
+            <a:srgbClr val="F2F2F2"/>
+          </a:solidFill>
+          <a:ln>
+            <a:noFill/>
+          </a:ln>
+        </p:spPr>
+        <p:style>
+          <a:lnRef idx="1">
+            <a:schemeClr val="accent1"/>
+          </a:lnRef>
+          <a:fillRef idx="3">
+            <a:schemeClr val="accent1"/>
+          </a:fillRef>
+          <a:effectRef idx="2">
+            <a:schemeClr val="accent1"/>
+          </a:effectRef>
+          <a:fontRef idx="minor">
+            <a:schemeClr val="lt1"/>
+          </a:fontRef>
+        </p:style>
+        <p:txBody>
+          <a:bodyPr rtlCol="0" anchor="ctr"/>
+          <a:lstStyle/>
+          <a:p>
+            <a:pPr algn="ctr"/>
+          </a:p>
+        </p:txBody>
+      </p:sp>
+      <p:sp>
+        <p:nvSpPr>
+          <p:cNvPr id="10" name="Rectangle 9"/>
+          <p:cNvSpPr/>
+          <p:nvPr/>
+        </p:nvSpPr>
+        <p:spPr>
+          <a:xfrm>
+            <a:off x="640080" y="2084832"/>
+            <a:ext cx="274320" cy="274320"/>
+          </a:xfrm>
+          <a:prstGeom prst="rect">
+            <a:avLst/>
+          </a:prstGeom>
+          <a:solidFill>
+            <a:srgbClr val="FFFFFF"/>
+          </a:solidFill>
+          <a:ln>
+            <a:solidFill>
+              <a:srgbClr val="333333"/>
+            </a:solidFill>
+          </a:ln>
+        </p:spPr>
+        <p:style>
+          <a:lnRef idx="1">
+            <a:schemeClr val="accent1"/>
+          </a:lnRef>
+          <a:fillRef idx="3">
+            <a:schemeClr val="accent1"/>
+          </a:fillRef>
+          <a:effectRef idx="2">
+            <a:schemeClr val="accent1"/>
+          </a:effectRef>
+          <a:fontRef idx="minor">
+            <a:schemeClr val="lt1"/>
+          </a:fontRef>
+        </p:style>
+        <p:txBody>
+          <a:bodyPr rtlCol="0" anchor="ctr"/>
+          <a:lstStyle/>
+          <a:p>
+            <a:pPr algn="ctr"/>
+          </a:p>
+        </p:txBody>
+      </p:sp>
+      <p:sp>
+        <p:nvSpPr>
+          <p:cNvPr id="11" name="Rectangle 10"/>
+          <p:cNvSpPr/>
+          <p:nvPr/>
+        </p:nvSpPr>
+        <p:spPr>
+          <a:xfrm>
+            <a:off x="640080" y="2084832"/>
+            <a:ext cx="73152" cy="274320"/>
+          </a:xfrm>
+          <a:prstGeom prst="rect">
+            <a:avLst/>
+          </a:prstGeom>
+          <a:solidFill>
+            <a:srgbClr val="269CCB"/>
+          </a:solidFill>
+          <a:ln>
+            <a:noFill/>
+          </a:ln>
+        </p:spPr>
+        <p:style>
+          <a:lnRef idx="1">
+            <a:schemeClr val="accent1"/>
+          </a:lnRef>
+          <a:fillRef idx="3">
+            <a:schemeClr val="accent1"/>
+          </a:fillRef>
+          <a:effectRef idx="2">
+            <a:schemeClr val="accent1"/>
+          </a:effectRef>
+          <a:fontRef idx="minor">
+            <a:schemeClr val="lt1"/>
+          </a:fontRef>
+        </p:style>
+        <p:txBody>
+          <a:bodyPr rtlCol="0" anchor="ctr"/>
+          <a:lstStyle/>
+          <a:p>
+            <a:pPr algn="ctr"/>
+          </a:p>
+        </p:txBody>
+      </p:sp>
+      <p:sp>
+        <p:nvSpPr>
+          <p:cNvPr id="12" name="TextBox 11"/>
+          <p:cNvSpPr txBox="1"/>
+          <p:nvPr/>
+        </p:nvSpPr>
+        <p:spPr>
+          <a:xfrm>
+            <a:off x="1097280" y="2029968"/>
+            <a:ext cx="10362895" cy="402336"/>
+          </a:xfrm>
+          <a:prstGeom prst="rect">
+            <a:avLst/>
+          </a:prstGeom>
+          <a:noFill/>
+        </p:spPr>
+        <p:txBody>
+          <a:bodyPr wrap="square" anchor="ctr"/>
+          <a:lstStyle/>
+          <a:p>
+            <a:r>
+              <a:rPr sz="1500" b="0" i="0">
                 <a:solidFill>
                   <a:srgbClr val="333333"/>
                 </a:solidFill>
                 <a:latin typeface="Calibri"/>
               </a:rPr>
-              <a:t>–   Hasta hoy VetCare existe solo como texto y diagramas: nadie ha visto todavia como se veria la pantalla que va a usar la recepcionista de Huellitas.</a:t>
-            </a:r>
-          </a:p>
-          <a:p>
-            <a:pPr>
-              <a:spcAft>
-                <a:spcPts val="800"/>
-              </a:spcAft>
-            </a:pPr>
-            <a:r>
-              <a:rPr sz="2000" b="0" i="0">
+              <a:t>De los campos que dibujaron, cuantos podria llenar mal una persona apurada, y cual de esos errores se puede volver imposible en vez de corregible.</a:t>
+            </a:r>
+          </a:p>
+        </p:txBody>
+      </p:sp>
+      <p:sp>
+        <p:nvSpPr>
+          <p:cNvPr id="13" name="Rounded Rectangle 12"/>
+          <p:cNvSpPr/>
+          <p:nvPr/>
+        </p:nvSpPr>
+        <p:spPr>
+          <a:xfrm>
+            <a:off x="457200" y="2615184"/>
+            <a:ext cx="11277295" cy="566928"/>
+          </a:xfrm>
+          <a:prstGeom prst="roundRect">
+            <a:avLst>
+              <a:gd name="adj" fmla="val 12000"/>
+            </a:avLst>
+          </a:prstGeom>
+          <a:solidFill>
+            <a:srgbClr val="F2F2F2"/>
+          </a:solidFill>
+          <a:ln>
+            <a:noFill/>
+          </a:ln>
+        </p:spPr>
+        <p:style>
+          <a:lnRef idx="1">
+            <a:schemeClr val="accent1"/>
+          </a:lnRef>
+          <a:fillRef idx="3">
+            <a:schemeClr val="accent1"/>
+          </a:fillRef>
+          <a:effectRef idx="2">
+            <a:schemeClr val="accent1"/>
+          </a:effectRef>
+          <a:fontRef idx="minor">
+            <a:schemeClr val="lt1"/>
+          </a:fontRef>
+        </p:style>
+        <p:txBody>
+          <a:bodyPr rtlCol="0" anchor="ctr"/>
+          <a:lstStyle/>
+          <a:p>
+            <a:pPr algn="ctr"/>
+          </a:p>
+        </p:txBody>
+      </p:sp>
+      <p:sp>
+        <p:nvSpPr>
+          <p:cNvPr id="14" name="Rectangle 13"/>
+          <p:cNvSpPr/>
+          <p:nvPr/>
+        </p:nvSpPr>
+        <p:spPr>
+          <a:xfrm>
+            <a:off x="640080" y="2761488"/>
+            <a:ext cx="274320" cy="274320"/>
+          </a:xfrm>
+          <a:prstGeom prst="rect">
+            <a:avLst/>
+          </a:prstGeom>
+          <a:solidFill>
+            <a:srgbClr val="FFFFFF"/>
+          </a:solidFill>
+          <a:ln>
+            <a:solidFill>
+              <a:srgbClr val="333333"/>
+            </a:solidFill>
+          </a:ln>
+        </p:spPr>
+        <p:style>
+          <a:lnRef idx="1">
+            <a:schemeClr val="accent1"/>
+          </a:lnRef>
+          <a:fillRef idx="3">
+            <a:schemeClr val="accent1"/>
+          </a:fillRef>
+          <a:effectRef idx="2">
+            <a:schemeClr val="accent1"/>
+          </a:effectRef>
+          <a:fontRef idx="minor">
+            <a:schemeClr val="lt1"/>
+          </a:fontRef>
+        </p:style>
+        <p:txBody>
+          <a:bodyPr rtlCol="0" anchor="ctr"/>
+          <a:lstStyle/>
+          <a:p>
+            <a:pPr algn="ctr"/>
+          </a:p>
+        </p:txBody>
+      </p:sp>
+      <p:sp>
+        <p:nvSpPr>
+          <p:cNvPr id="15" name="Rectangle 14"/>
+          <p:cNvSpPr/>
+          <p:nvPr/>
+        </p:nvSpPr>
+        <p:spPr>
+          <a:xfrm>
+            <a:off x="640080" y="2761488"/>
+            <a:ext cx="73152" cy="274320"/>
+          </a:xfrm>
+          <a:prstGeom prst="rect">
+            <a:avLst/>
+          </a:prstGeom>
+          <a:solidFill>
+            <a:srgbClr val="269CCB"/>
+          </a:solidFill>
+          <a:ln>
+            <a:noFill/>
+          </a:ln>
+        </p:spPr>
+        <p:style>
+          <a:lnRef idx="1">
+            <a:schemeClr val="accent1"/>
+          </a:lnRef>
+          <a:fillRef idx="3">
+            <a:schemeClr val="accent1"/>
+          </a:fillRef>
+          <a:effectRef idx="2">
+            <a:schemeClr val="accent1"/>
+          </a:effectRef>
+          <a:fontRef idx="minor">
+            <a:schemeClr val="lt1"/>
+          </a:fontRef>
+        </p:style>
+        <p:txBody>
+          <a:bodyPr rtlCol="0" anchor="ctr"/>
+          <a:lstStyle/>
+          <a:p>
+            <a:pPr algn="ctr"/>
+          </a:p>
+        </p:txBody>
+      </p:sp>
+      <p:sp>
+        <p:nvSpPr>
+          <p:cNvPr id="16" name="TextBox 15"/>
+          <p:cNvSpPr txBox="1"/>
+          <p:nvPr/>
+        </p:nvSpPr>
+        <p:spPr>
+          <a:xfrm>
+            <a:off x="1097280" y="2706624"/>
+            <a:ext cx="10362895" cy="402336"/>
+          </a:xfrm>
+          <a:prstGeom prst="rect">
+            <a:avLst/>
+          </a:prstGeom>
+          <a:noFill/>
+        </p:spPr>
+        <p:txBody>
+          <a:bodyPr wrap="square" anchor="ctr"/>
+          <a:lstStyle/>
+          <a:p>
+            <a:r>
+              <a:rPr sz="1500" b="0" i="0">
                 <a:solidFill>
                   <a:srgbClr val="333333"/>
                 </a:solidFill>
                 <a:latin typeface="Calibri"/>
               </a:rPr>
-              <a:t>–   La usuaria de referencia esta descrita asi: recepcionista con experiencia clinica alta y experiencia informatica baja, atiende telefono mientras registra y necesita terminar el registro de un paciente nuevo en menos de dos minutos.</a:t>
-            </a:r>
-          </a:p>
-        </p:txBody>
-      </p:sp>
-      <p:sp>
-        <p:nvSpPr>
-          <p:cNvPr id="6" name="TextBox 5"/>
+              <a:t>Si la busqueda por nombre devuelve doce mascotas llamadas Firulais, que dato adicional muestra la lista para que la recepcionista escoja la correcta sin abrir ninguna ficha.</a:t>
+            </a:r>
+          </a:p>
+        </p:txBody>
+      </p:sp>
+      <p:sp>
+        <p:nvSpPr>
+          <p:cNvPr id="17" name="TextBox 16"/>
           <p:cNvSpPr txBox="1"/>
           <p:nvPr/>
         </p:nvSpPr>
@@ -7436,111 +8546,21 @@
                 </a:solidFill>
                 <a:latin typeface="Calibri"/>
               </a:rPr>
-              <a:t>Taller PI — pasos guiados</a:t>
-            </a:r>
-          </a:p>
-        </p:txBody>
-      </p:sp>
-      <p:sp>
-        <p:nvSpPr>
-          <p:cNvPr id="5" name="Rounded Rectangle 4"/>
-          <p:cNvSpPr/>
-          <p:nvPr/>
-        </p:nvSpPr>
-        <p:spPr>
-          <a:xfrm>
-            <a:off x="457200" y="1234440"/>
-            <a:ext cx="11277295" cy="950976"/>
-          </a:xfrm>
-          <a:prstGeom prst="roundRect">
-            <a:avLst>
-              <a:gd name="adj" fmla="val 12000"/>
-            </a:avLst>
-          </a:prstGeom>
-          <a:solidFill>
-            <a:srgbClr val="F2F2F2"/>
-          </a:solidFill>
-          <a:ln>
-            <a:noFill/>
-          </a:ln>
-        </p:spPr>
-        <p:style>
-          <a:lnRef idx="1">
-            <a:schemeClr val="accent1"/>
-          </a:lnRef>
-          <a:fillRef idx="3">
-            <a:schemeClr val="accent1"/>
-          </a:fillRef>
-          <a:effectRef idx="2">
-            <a:schemeClr val="accent1"/>
-          </a:effectRef>
-          <a:fontRef idx="minor">
-            <a:schemeClr val="lt1"/>
-          </a:fontRef>
-        </p:style>
-        <p:txBody>
-          <a:bodyPr rtlCol="0" anchor="ctr"/>
-          <a:lstStyle/>
-          <a:p>
-            <a:pPr algn="ctr"/>
-          </a:p>
-        </p:txBody>
-      </p:sp>
-      <p:sp>
-        <p:nvSpPr>
-          <p:cNvPr id="6" name="Rounded Rectangle 5"/>
-          <p:cNvSpPr/>
-          <p:nvPr/>
-        </p:nvSpPr>
-        <p:spPr>
-          <a:xfrm>
-            <a:off x="594360" y="1490472"/>
-            <a:ext cx="438912" cy="438912"/>
-          </a:xfrm>
-          <a:prstGeom prst="roundRect">
-            <a:avLst>
-              <a:gd name="adj" fmla="val 12000"/>
-            </a:avLst>
-          </a:prstGeom>
-          <a:solidFill>
-            <a:srgbClr val="095292"/>
-          </a:solidFill>
-          <a:ln>
-            <a:noFill/>
-          </a:ln>
-        </p:spPr>
-        <p:style>
-          <a:lnRef idx="1">
-            <a:schemeClr val="accent1"/>
-          </a:lnRef>
-          <a:fillRef idx="3">
-            <a:schemeClr val="accent1"/>
-          </a:fillRef>
-          <a:effectRef idx="2">
-            <a:schemeClr val="accent1"/>
-          </a:effectRef>
-          <a:fontRef idx="minor">
-            <a:schemeClr val="lt1"/>
-          </a:fontRef>
-        </p:style>
-        <p:txBody>
-          <a:bodyPr rtlCol="0" anchor="ctr"/>
-          <a:lstStyle/>
-          <a:p>
-            <a:pPr algn="ctr"/>
-          </a:p>
-        </p:txBody>
-      </p:sp>
-      <p:sp>
-        <p:nvSpPr>
-          <p:cNvPr id="7" name="TextBox 6"/>
+              <a:t>Criterios de exito / entregable</a:t>
+            </a:r>
+          </a:p>
+        </p:txBody>
+      </p:sp>
+      <p:sp>
+        <p:nvSpPr>
+          <p:cNvPr id="5" name="TextBox 4"/>
           <p:cNvSpPr txBox="1"/>
           <p:nvPr/>
         </p:nvSpPr>
         <p:spPr>
           <a:xfrm>
-            <a:off x="594360" y="1490472"/>
-            <a:ext cx="438912" cy="438912"/>
+            <a:off x="457200" y="1170432"/>
+            <a:ext cx="11277295" cy="5230368"/>
           </a:xfrm>
           <a:prstGeom prst="rect">
             <a:avLst/>
@@ -7548,677 +8568,219 @@
           <a:noFill/>
         </p:spPr>
         <p:txBody>
-          <a:bodyPr wrap="square" anchor="ctr"/>
-          <a:lstStyle/>
-          <a:p>
-            <a:pPr algn="ctr"/>
-            <a:r>
-              <a:rPr sz="1600" b="1" i="0">
-                <a:solidFill>
-                  <a:srgbClr val="FFFFFF"/>
-                </a:solidFill>
-                <a:latin typeface="Calibri"/>
-              </a:rPr>
-              <a:t>1</a:t>
-            </a:r>
-          </a:p>
-        </p:txBody>
-      </p:sp>
-      <p:sp>
-        <p:nvSpPr>
-          <p:cNvPr id="8" name="TextBox 7"/>
-          <p:cNvSpPr txBox="1"/>
-          <p:nvPr/>
-        </p:nvSpPr>
-        <p:spPr>
-          <a:xfrm>
-            <a:off x="1188720" y="1325880"/>
-            <a:ext cx="10271455" cy="786384"/>
-          </a:xfrm>
-          <a:prstGeom prst="rect">
-            <a:avLst/>
-          </a:prstGeom>
-          <a:noFill/>
-        </p:spPr>
-        <p:txBody>
-          <a:bodyPr wrap="square" anchor="ctr"/>
-          <a:lstStyle/>
-          <a:p>
-            <a:r>
-              <a:rPr sz="1400" b="1" i="0">
-                <a:solidFill>
-                  <a:srgbClr val="095292"/>
-                </a:solidFill>
-                <a:latin typeface="Calibri"/>
-              </a:rPr>
-              <a:t>Paso 1. En Excalidraw o en papel, dibujen el wireframe en gris de la pantalla Registrar mascota de VetCare, sin colores ni logos, ubicando bloque de dueño, bloque de datos de la mascota y zona de accion; el wireframe debe caber en una sola vista sin scroll y no puede tener mas de nueve campos.</a:t>
-            </a:r>
-          </a:p>
-        </p:txBody>
-      </p:sp>
-      <p:sp>
-        <p:nvSpPr>
-          <p:cNvPr id="9" name="Rounded Rectangle 8"/>
-          <p:cNvSpPr/>
-          <p:nvPr/>
-        </p:nvSpPr>
-        <p:spPr>
-          <a:xfrm>
-            <a:off x="457200" y="2276856"/>
-            <a:ext cx="11277295" cy="950976"/>
-          </a:xfrm>
-          <a:prstGeom prst="roundRect">
-            <a:avLst>
-              <a:gd name="adj" fmla="val 12000"/>
-            </a:avLst>
-          </a:prstGeom>
-          <a:solidFill>
-            <a:srgbClr val="E8F4FA"/>
-          </a:solidFill>
-          <a:ln>
-            <a:noFill/>
-          </a:ln>
-        </p:spPr>
-        <p:style>
-          <a:lnRef idx="1">
-            <a:schemeClr val="accent1"/>
-          </a:lnRef>
-          <a:fillRef idx="3">
-            <a:schemeClr val="accent1"/>
-          </a:fillRef>
-          <a:effectRef idx="2">
-            <a:schemeClr val="accent1"/>
-          </a:effectRef>
-          <a:fontRef idx="minor">
-            <a:schemeClr val="lt1"/>
-          </a:fontRef>
-        </p:style>
-        <p:txBody>
-          <a:bodyPr rtlCol="0" anchor="ctr"/>
-          <a:lstStyle/>
-          <a:p>
-            <a:pPr algn="ctr"/>
-          </a:p>
-        </p:txBody>
-      </p:sp>
-      <p:sp>
-        <p:nvSpPr>
-          <p:cNvPr id="10" name="Rounded Rectangle 9"/>
-          <p:cNvSpPr/>
-          <p:nvPr/>
-        </p:nvSpPr>
-        <p:spPr>
-          <a:xfrm>
-            <a:off x="594360" y="2532888"/>
-            <a:ext cx="438912" cy="438912"/>
-          </a:xfrm>
-          <a:prstGeom prst="roundRect">
-            <a:avLst>
-              <a:gd name="adj" fmla="val 12000"/>
-            </a:avLst>
-          </a:prstGeom>
-          <a:solidFill>
-            <a:srgbClr val="095292"/>
-          </a:solidFill>
-          <a:ln>
-            <a:noFill/>
-          </a:ln>
-        </p:spPr>
-        <p:style>
-          <a:lnRef idx="1">
-            <a:schemeClr val="accent1"/>
-          </a:lnRef>
-          <a:fillRef idx="3">
-            <a:schemeClr val="accent1"/>
-          </a:fillRef>
-          <a:effectRef idx="2">
-            <a:schemeClr val="accent1"/>
-          </a:effectRef>
-          <a:fontRef idx="minor">
-            <a:schemeClr val="lt1"/>
-          </a:fontRef>
-        </p:style>
-        <p:txBody>
-          <a:bodyPr rtlCol="0" anchor="ctr"/>
-          <a:lstStyle/>
-          <a:p>
-            <a:pPr algn="ctr"/>
-          </a:p>
-        </p:txBody>
-      </p:sp>
-      <p:sp>
-        <p:nvSpPr>
-          <p:cNvPr id="11" name="TextBox 10"/>
-          <p:cNvSpPr txBox="1"/>
-          <p:nvPr/>
-        </p:nvSpPr>
-        <p:spPr>
-          <a:xfrm>
-            <a:off x="594360" y="2532888"/>
-            <a:ext cx="438912" cy="438912"/>
-          </a:xfrm>
-          <a:prstGeom prst="rect">
-            <a:avLst/>
-          </a:prstGeom>
-          <a:noFill/>
-        </p:spPr>
-        <p:txBody>
-          <a:bodyPr wrap="square" anchor="ctr"/>
-          <a:lstStyle/>
-          <a:p>
-            <a:pPr algn="ctr"/>
-            <a:r>
-              <a:rPr sz="1600" b="1" i="0">
-                <a:solidFill>
-                  <a:srgbClr val="FFFFFF"/>
-                </a:solidFill>
-                <a:latin typeface="Calibri"/>
-              </a:rPr>
-              <a:t>2</a:t>
-            </a:r>
-          </a:p>
-        </p:txBody>
-      </p:sp>
-      <p:sp>
-        <p:nvSpPr>
-          <p:cNvPr id="12" name="TextBox 11"/>
-          <p:cNvSpPr txBox="1"/>
-          <p:nvPr/>
-        </p:nvSpPr>
-        <p:spPr>
-          <a:xfrm>
-            <a:off x="1188720" y="2368296"/>
-            <a:ext cx="10271455" cy="786384"/>
-          </a:xfrm>
-          <a:prstGeom prst="rect">
-            <a:avLst/>
-          </a:prstGeom>
-          <a:noFill/>
-        </p:spPr>
-        <p:txBody>
-          <a:bodyPr wrap="square" anchor="ctr"/>
-          <a:lstStyle/>
-          <a:p>
-            <a:r>
-              <a:rPr sz="1400" b="1" i="0">
-                <a:solidFill>
-                  <a:srgbClr val="095292"/>
-                </a:solidFill>
-                <a:latin typeface="Calibri"/>
-              </a:rPr>
-              <a:t>Paso 2. Numeren de uno a seis los elementos criticos del wireframe y llenen la tabla de anotaciones indicando para cada numero el atributo del diccionario de datos que lo respalda, el RF que lo exige y si es obligatorio u opcional; si un elemento no tiene RF, borrenlo o creen el requisito y dejenlo escrito.</a:t>
-            </a:r>
-          </a:p>
-        </p:txBody>
-      </p:sp>
-      <p:sp>
-        <p:nvSpPr>
-          <p:cNvPr id="13" name="Rounded Rectangle 12"/>
-          <p:cNvSpPr/>
-          <p:nvPr/>
-        </p:nvSpPr>
-        <p:spPr>
-          <a:xfrm>
-            <a:off x="457200" y="3319272"/>
-            <a:ext cx="11277295" cy="950976"/>
-          </a:xfrm>
-          <a:prstGeom prst="roundRect">
-            <a:avLst>
-              <a:gd name="adj" fmla="val 12000"/>
-            </a:avLst>
-          </a:prstGeom>
-          <a:solidFill>
-            <a:srgbClr val="F2F2F2"/>
-          </a:solidFill>
-          <a:ln>
-            <a:noFill/>
-          </a:ln>
-        </p:spPr>
-        <p:style>
-          <a:lnRef idx="1">
-            <a:schemeClr val="accent1"/>
-          </a:lnRef>
-          <a:fillRef idx="3">
-            <a:schemeClr val="accent1"/>
-          </a:fillRef>
-          <a:effectRef idx="2">
-            <a:schemeClr val="accent1"/>
-          </a:effectRef>
-          <a:fontRef idx="minor">
-            <a:schemeClr val="lt1"/>
-          </a:fontRef>
-        </p:style>
-        <p:txBody>
-          <a:bodyPr rtlCol="0" anchor="ctr"/>
-          <a:lstStyle/>
-          <a:p>
-            <a:pPr algn="ctr"/>
-          </a:p>
-        </p:txBody>
-      </p:sp>
-      <p:sp>
-        <p:nvSpPr>
-          <p:cNvPr id="14" name="Rounded Rectangle 13"/>
-          <p:cNvSpPr/>
-          <p:nvPr/>
-        </p:nvSpPr>
-        <p:spPr>
-          <a:xfrm>
-            <a:off x="594360" y="3575304"/>
-            <a:ext cx="438912" cy="438912"/>
-          </a:xfrm>
-          <a:prstGeom prst="roundRect">
-            <a:avLst>
-              <a:gd name="adj" fmla="val 12000"/>
-            </a:avLst>
-          </a:prstGeom>
-          <a:solidFill>
-            <a:srgbClr val="095292"/>
-          </a:solidFill>
-          <a:ln>
-            <a:noFill/>
-          </a:ln>
-        </p:spPr>
-        <p:style>
-          <a:lnRef idx="1">
-            <a:schemeClr val="accent1"/>
-          </a:lnRef>
-          <a:fillRef idx="3">
-            <a:schemeClr val="accent1"/>
-          </a:fillRef>
-          <a:effectRef idx="2">
-            <a:schemeClr val="accent1"/>
-          </a:effectRef>
-          <a:fontRef idx="minor">
-            <a:schemeClr val="lt1"/>
-          </a:fontRef>
-        </p:style>
-        <p:txBody>
-          <a:bodyPr rtlCol="0" anchor="ctr"/>
-          <a:lstStyle/>
-          <a:p>
-            <a:pPr algn="ctr"/>
-          </a:p>
-        </p:txBody>
-      </p:sp>
-      <p:sp>
-        <p:nvSpPr>
-          <p:cNvPr id="15" name="TextBox 14"/>
-          <p:cNvSpPr txBox="1"/>
-          <p:nvPr/>
-        </p:nvSpPr>
-        <p:spPr>
-          <a:xfrm>
-            <a:off x="594360" y="3575304"/>
-            <a:ext cx="438912" cy="438912"/>
-          </a:xfrm>
-          <a:prstGeom prst="rect">
-            <a:avLst/>
-          </a:prstGeom>
-          <a:noFill/>
-        </p:spPr>
-        <p:txBody>
-          <a:bodyPr wrap="square" anchor="ctr"/>
-          <a:lstStyle/>
-          <a:p>
-            <a:pPr algn="ctr"/>
-            <a:r>
-              <a:rPr sz="1600" b="1" i="0">
-                <a:solidFill>
-                  <a:srgbClr val="FFFFFF"/>
-                </a:solidFill>
-                <a:latin typeface="Calibri"/>
-              </a:rPr>
-              <a:t>3</a:t>
-            </a:r>
-          </a:p>
-        </p:txBody>
-      </p:sp>
-      <p:sp>
-        <p:nvSpPr>
-          <p:cNvPr id="16" name="TextBox 15"/>
-          <p:cNvSpPr txBox="1"/>
-          <p:nvPr/>
-        </p:nvSpPr>
-        <p:spPr>
-          <a:xfrm>
-            <a:off x="1188720" y="3410712"/>
-            <a:ext cx="10271455" cy="786384"/>
-          </a:xfrm>
-          <a:prstGeom prst="rect">
-            <a:avLst/>
-          </a:prstGeom>
-          <a:noFill/>
-        </p:spPr>
-        <p:txBody>
-          <a:bodyPr wrap="square" anchor="ctr"/>
-          <a:lstStyle/>
-          <a:p>
-            <a:r>
-              <a:rPr sz="1400" b="1" i="0">
-                <a:solidFill>
-                  <a:srgbClr val="095292"/>
-                </a:solidFill>
-                <a:latin typeface="Calibri"/>
-              </a:rPr>
-              <a:t>Paso 3. Diseñen la pantalla Buscar expediente resolviendo explicitamente el caso de resultados multiples: definan los tres criterios de busqueda, las columnas de la lista de resultados que permiten desambiguar y el mensaje exacto que se muestra cuando no hay ningun resultado.</a:t>
-            </a:r>
-          </a:p>
-        </p:txBody>
-      </p:sp>
-      <p:sp>
-        <p:nvSpPr>
-          <p:cNvPr id="17" name="Rounded Rectangle 16"/>
-          <p:cNvSpPr/>
-          <p:nvPr/>
-        </p:nvSpPr>
-        <p:spPr>
-          <a:xfrm>
-            <a:off x="457200" y="4361688"/>
-            <a:ext cx="11277295" cy="950976"/>
-          </a:xfrm>
-          <a:prstGeom prst="roundRect">
-            <a:avLst>
-              <a:gd name="adj" fmla="val 12000"/>
-            </a:avLst>
-          </a:prstGeom>
-          <a:solidFill>
-            <a:srgbClr val="E8F4FA"/>
-          </a:solidFill>
-          <a:ln>
-            <a:noFill/>
-          </a:ln>
-        </p:spPr>
-        <p:style>
-          <a:lnRef idx="1">
-            <a:schemeClr val="accent1"/>
-          </a:lnRef>
-          <a:fillRef idx="3">
-            <a:schemeClr val="accent1"/>
-          </a:fillRef>
-          <a:effectRef idx="2">
-            <a:schemeClr val="accent1"/>
-          </a:effectRef>
-          <a:fontRef idx="minor">
-            <a:schemeClr val="lt1"/>
-          </a:fontRef>
-        </p:style>
-        <p:txBody>
-          <a:bodyPr rtlCol="0" anchor="ctr"/>
-          <a:lstStyle/>
-          <a:p>
-            <a:pPr algn="ctr"/>
-          </a:p>
-        </p:txBody>
-      </p:sp>
-      <p:sp>
-        <p:nvSpPr>
-          <p:cNvPr id="18" name="Rounded Rectangle 17"/>
-          <p:cNvSpPr/>
-          <p:nvPr/>
-        </p:nvSpPr>
-        <p:spPr>
-          <a:xfrm>
-            <a:off x="594360" y="4617720"/>
-            <a:ext cx="438912" cy="438912"/>
-          </a:xfrm>
-          <a:prstGeom prst="roundRect">
-            <a:avLst>
-              <a:gd name="adj" fmla="val 12000"/>
-            </a:avLst>
-          </a:prstGeom>
-          <a:solidFill>
-            <a:srgbClr val="095292"/>
-          </a:solidFill>
-          <a:ln>
-            <a:noFill/>
-          </a:ln>
-        </p:spPr>
-        <p:style>
-          <a:lnRef idx="1">
-            <a:schemeClr val="accent1"/>
-          </a:lnRef>
-          <a:fillRef idx="3">
-            <a:schemeClr val="accent1"/>
-          </a:fillRef>
-          <a:effectRef idx="2">
-            <a:schemeClr val="accent1"/>
-          </a:effectRef>
-          <a:fontRef idx="minor">
-            <a:schemeClr val="lt1"/>
-          </a:fontRef>
-        </p:style>
-        <p:txBody>
-          <a:bodyPr rtlCol="0" anchor="ctr"/>
-          <a:lstStyle/>
-          <a:p>
-            <a:pPr algn="ctr"/>
-          </a:p>
-        </p:txBody>
-      </p:sp>
-      <p:sp>
-        <p:nvSpPr>
-          <p:cNvPr id="19" name="TextBox 18"/>
-          <p:cNvSpPr txBox="1"/>
-          <p:nvPr/>
-        </p:nvSpPr>
-        <p:spPr>
-          <a:xfrm>
-            <a:off x="594360" y="4617720"/>
-            <a:ext cx="438912" cy="438912"/>
-          </a:xfrm>
-          <a:prstGeom prst="rect">
-            <a:avLst/>
-          </a:prstGeom>
-          <a:noFill/>
-        </p:spPr>
-        <p:txBody>
-          <a:bodyPr wrap="square" anchor="ctr"/>
-          <a:lstStyle/>
-          <a:p>
-            <a:pPr algn="ctr"/>
-            <a:r>
-              <a:rPr sz="1600" b="1" i="0">
-                <a:solidFill>
-                  <a:srgbClr val="FFFFFF"/>
-                </a:solidFill>
-                <a:latin typeface="Calibri"/>
-              </a:rPr>
-              <a:t>4</a:t>
-            </a:r>
-          </a:p>
-        </p:txBody>
-      </p:sp>
-      <p:sp>
-        <p:nvSpPr>
-          <p:cNvPr id="20" name="TextBox 19"/>
-          <p:cNvSpPr txBox="1"/>
-          <p:nvPr/>
-        </p:nvSpPr>
-        <p:spPr>
-          <a:xfrm>
-            <a:off x="1188720" y="4453128"/>
-            <a:ext cx="10271455" cy="786384"/>
-          </a:xfrm>
-          <a:prstGeom prst="rect">
-            <a:avLst/>
-          </a:prstGeom>
-          <a:noFill/>
-        </p:spPr>
-        <p:txBody>
-          <a:bodyPr wrap="square" anchor="ctr"/>
-          <a:lstStyle/>
-          <a:p>
-            <a:r>
-              <a:rPr sz="1400" b="1" i="0">
-                <a:solidFill>
-                  <a:srgbClr val="095292"/>
-                </a:solidFill>
-                <a:latin typeface="Calibri"/>
-              </a:rPr>
-              <a:t>Paso 4. Pasen las dos pantallas a Figma o Penpot como mockup y conecten minimo tres transiciones navegables: Registrar mascota hacia la confirmacion con codigo, confirmacion hacia Buscar expediente, y un resultado de la lista hacia la ficha del paciente; escriban al lado de cada transicion que principio de usabilidad estan cumpliendo.</a:t>
-            </a:r>
-          </a:p>
-        </p:txBody>
-      </p:sp>
-      <p:sp>
-        <p:nvSpPr>
-          <p:cNvPr id="21" name="Rounded Rectangle 20"/>
-          <p:cNvSpPr/>
-          <p:nvPr/>
-        </p:nvSpPr>
-        <p:spPr>
-          <a:xfrm>
-            <a:off x="457200" y="5404104"/>
-            <a:ext cx="11277295" cy="950976"/>
-          </a:xfrm>
-          <a:prstGeom prst="roundRect">
-            <a:avLst>
-              <a:gd name="adj" fmla="val 12000"/>
-            </a:avLst>
-          </a:prstGeom>
-          <a:solidFill>
-            <a:srgbClr val="F2F2F2"/>
-          </a:solidFill>
-          <a:ln>
-            <a:noFill/>
-          </a:ln>
-        </p:spPr>
-        <p:style>
-          <a:lnRef idx="1">
-            <a:schemeClr val="accent1"/>
-          </a:lnRef>
-          <a:fillRef idx="3">
-            <a:schemeClr val="accent1"/>
-          </a:fillRef>
-          <a:effectRef idx="2">
-            <a:schemeClr val="accent1"/>
-          </a:effectRef>
-          <a:fontRef idx="minor">
-            <a:schemeClr val="lt1"/>
-          </a:fontRef>
-        </p:style>
-        <p:txBody>
-          <a:bodyPr rtlCol="0" anchor="ctr"/>
-          <a:lstStyle/>
-          <a:p>
-            <a:pPr algn="ctr"/>
-          </a:p>
-        </p:txBody>
-      </p:sp>
-      <p:sp>
-        <p:nvSpPr>
-          <p:cNvPr id="22" name="Rounded Rectangle 21"/>
-          <p:cNvSpPr/>
-          <p:nvPr/>
-        </p:nvSpPr>
-        <p:spPr>
-          <a:xfrm>
-            <a:off x="594360" y="5660136"/>
-            <a:ext cx="438912" cy="438912"/>
-          </a:xfrm>
-          <a:prstGeom prst="roundRect">
-            <a:avLst>
-              <a:gd name="adj" fmla="val 12000"/>
-            </a:avLst>
-          </a:prstGeom>
-          <a:solidFill>
-            <a:srgbClr val="095292"/>
-          </a:solidFill>
-          <a:ln>
-            <a:noFill/>
-          </a:ln>
-        </p:spPr>
-        <p:style>
-          <a:lnRef idx="1">
-            <a:schemeClr val="accent1"/>
-          </a:lnRef>
-          <a:fillRef idx="3">
-            <a:schemeClr val="accent1"/>
-          </a:fillRef>
-          <a:effectRef idx="2">
-            <a:schemeClr val="accent1"/>
-          </a:effectRef>
-          <a:fontRef idx="minor">
-            <a:schemeClr val="lt1"/>
-          </a:fontRef>
-        </p:style>
-        <p:txBody>
-          <a:bodyPr rtlCol="0" anchor="ctr"/>
-          <a:lstStyle/>
-          <a:p>
-            <a:pPr algn="ctr"/>
-          </a:p>
-        </p:txBody>
-      </p:sp>
-      <p:sp>
-        <p:nvSpPr>
-          <p:cNvPr id="23" name="TextBox 22"/>
-          <p:cNvSpPr txBox="1"/>
-          <p:nvPr/>
-        </p:nvSpPr>
-        <p:spPr>
-          <a:xfrm>
-            <a:off x="594360" y="5660136"/>
-            <a:ext cx="438912" cy="438912"/>
-          </a:xfrm>
-          <a:prstGeom prst="rect">
-            <a:avLst/>
-          </a:prstGeom>
-          <a:noFill/>
-        </p:spPr>
-        <p:txBody>
-          <a:bodyPr wrap="square" anchor="ctr"/>
-          <a:lstStyle/>
-          <a:p>
-            <a:pPr algn="ctr"/>
-            <a:r>
-              <a:rPr sz="1600" b="1" i="0">
-                <a:solidFill>
-                  <a:srgbClr val="FFFFFF"/>
-                </a:solidFill>
-                <a:latin typeface="Calibri"/>
-              </a:rPr>
-              <a:t>5</a:t>
-            </a:r>
-          </a:p>
-        </p:txBody>
-      </p:sp>
-      <p:sp>
-        <p:nvSpPr>
-          <p:cNvPr id="24" name="TextBox 23"/>
-          <p:cNvSpPr txBox="1"/>
-          <p:nvPr/>
-        </p:nvSpPr>
-        <p:spPr>
-          <a:xfrm>
-            <a:off x="1188720" y="5495544"/>
-            <a:ext cx="10271455" cy="786384"/>
-          </a:xfrm>
-          <a:prstGeom prst="rect">
-            <a:avLst/>
-          </a:prstGeom>
-          <a:noFill/>
-        </p:spPr>
-        <p:txBody>
-          <a:bodyPr wrap="square" anchor="ctr"/>
-          <a:lstStyle/>
-          <a:p>
-            <a:r>
-              <a:rPr sz="1400" b="1" i="0">
-                <a:solidFill>
-                  <a:srgbClr val="095292"/>
-                </a:solidFill>
-                <a:latin typeface="Calibri"/>
-              </a:rPr>
-              <a:t>Paso 5. Hagan prueba de pasillo con otro compañero, denle la tarea registrar la mascota Luna de la señora Perez y encontrar su ficha, no le expliquen nada, cronometren, cuenten clics y anoten los dos puntos donde dudo; escriban abajo los dos cambios concretos que haran al diseño por lo observado.</a:t>
-            </a:r>
-          </a:p>
-        </p:txBody>
-      </p:sp>
-      <p:sp>
-        <p:nvSpPr>
-          <p:cNvPr id="25" name="TextBox 24"/>
+          <a:bodyPr wrap="square">
+            <a:spAutoFit/>
+          </a:bodyPr>
+          <a:lstStyle/>
+          <a:p>
+            <a:pPr>
+              <a:spcAft>
+                <a:spcPts val="800"/>
+              </a:spcAft>
+            </a:pPr>
+            <a:r>
+              <a:rPr sz="2000" b="0" i="0">
+                <a:solidFill>
+                  <a:srgbClr val="333333"/>
+                </a:solidFill>
+                <a:latin typeface="Calibri"/>
+              </a:rPr>
+              <a:t>–   </a:t>
+            </a:r>
+            <a:r>
+              <a:rPr sz="2000" b="1" i="0">
+                <a:solidFill>
+                  <a:srgbClr val="333333"/>
+                </a:solidFill>
+                <a:latin typeface="Calibri"/>
+              </a:rPr>
+              <a:t>Entregable:</a:t>
+            </a:r>
+            <a:r>
+              <a:rPr sz="2000" b="0" i="0">
+                <a:solidFill>
+                  <a:srgbClr val="333333"/>
+                </a:solidFill>
+                <a:latin typeface="Calibri"/>
+              </a:rPr>
+              <a:t> Un archivo de Figma o Penpot con las dos pantallas anotadas y minimo tres transiciones navegables, mas la hoja de anotaciones que amarra cada campo a un RF y a un atributo del diccionario de datos, subido a la plataforma del curso.</a:t>
+            </a:r>
+          </a:p>
+          <a:p>
+            <a:pPr>
+              <a:spcAft>
+                <a:spcPts val="800"/>
+              </a:spcAft>
+            </a:pPr>
+            <a:r>
+              <a:rPr sz="2000" b="0" i="0">
+                <a:solidFill>
+                  <a:srgbClr val="333333"/>
+                </a:solidFill>
+                <a:latin typeface="Calibri"/>
+              </a:rPr>
+              <a:t>–   </a:t>
+            </a:r>
+            <a:r>
+              <a:rPr sz="2000" b="1" i="0">
+                <a:solidFill>
+                  <a:srgbClr val="333333"/>
+                </a:solidFill>
+                <a:latin typeface="Calibri"/>
+              </a:rPr>
+              <a:t>Exito:</a:t>
+            </a:r>
+            <a:r>
+              <a:rPr sz="2000" b="0" i="0">
+                <a:solidFill>
+                  <a:srgbClr val="333333"/>
+                </a:solidFill>
+                <a:latin typeface="Calibri"/>
+              </a:rPr>
+              <a:t> Las dos pantallas se entregan primero como wireframe en gris y luego como mockup, y ambas versiones estan en el archivo entregado.</a:t>
+            </a:r>
+          </a:p>
+          <a:p>
+            <a:pPr>
+              <a:spcAft>
+                <a:spcPts val="800"/>
+              </a:spcAft>
+            </a:pPr>
+            <a:r>
+              <a:rPr sz="2000" b="0" i="0">
+                <a:solidFill>
+                  <a:srgbClr val="333333"/>
+                </a:solidFill>
+                <a:latin typeface="Calibri"/>
+              </a:rPr>
+              <a:t>–   </a:t>
+            </a:r>
+            <a:r>
+              <a:rPr sz="2000" b="1" i="0">
+                <a:solidFill>
+                  <a:srgbClr val="333333"/>
+                </a:solidFill>
+                <a:latin typeface="Calibri"/>
+              </a:rPr>
+              <a:t>Exito:</a:t>
+            </a:r>
+            <a:r>
+              <a:rPr sz="2000" b="0" i="0">
+                <a:solidFill>
+                  <a:srgbClr val="333333"/>
+                </a:solidFill>
+                <a:latin typeface="Calibri"/>
+              </a:rPr>
+              <a:t> Cada campo dibujado aparece en la tabla de anotaciones con su atributo del diccionario de datos y el RF que lo exige, sin campos huerfanos.</a:t>
+            </a:r>
+          </a:p>
+          <a:p>
+            <a:pPr>
+              <a:spcAft>
+                <a:spcPts val="800"/>
+              </a:spcAft>
+            </a:pPr>
+            <a:r>
+              <a:rPr sz="2000" b="0" i="0">
+                <a:solidFill>
+                  <a:srgbClr val="333333"/>
+                </a:solidFill>
+                <a:latin typeface="Calibri"/>
+              </a:rPr>
+              <a:t>–   </a:t>
+            </a:r>
+            <a:r>
+              <a:rPr sz="2000" b="1" i="0">
+                <a:solidFill>
+                  <a:srgbClr val="333333"/>
+                </a:solidFill>
+                <a:latin typeface="Calibri"/>
+              </a:rPr>
+              <a:t>Exito:</a:t>
+            </a:r>
+            <a:r>
+              <a:rPr sz="2000" b="0" i="0">
+                <a:solidFill>
+                  <a:srgbClr val="333333"/>
+                </a:solidFill>
+                <a:latin typeface="Calibri"/>
+              </a:rPr>
+              <a:t> El prototipo tiene al menos tres transiciones que funcionan al hacer clic y cubre minimo dos caminos alternos, entre ellos resultados multiples o dueño no registrado.</a:t>
+            </a:r>
+          </a:p>
+          <a:p>
+            <a:pPr>
+              <a:spcAft>
+                <a:spcPts val="800"/>
+              </a:spcAft>
+            </a:pPr>
+            <a:r>
+              <a:rPr sz="2000" b="0" i="0">
+                <a:solidFill>
+                  <a:srgbClr val="333333"/>
+                </a:solidFill>
+                <a:latin typeface="Calibri"/>
+              </a:rPr>
+              <a:t>–   </a:t>
+            </a:r>
+            <a:r>
+              <a:rPr sz="2000" b="1" i="0">
+                <a:solidFill>
+                  <a:srgbClr val="333333"/>
+                </a:solidFill>
+                <a:latin typeface="Calibri"/>
+              </a:rPr>
+              <a:t>Exito:</a:t>
+            </a:r>
+            <a:r>
+              <a:rPr sz="2000" b="0" i="0">
+                <a:solidFill>
+                  <a:srgbClr val="333333"/>
+                </a:solidFill>
+                <a:latin typeface="Calibri"/>
+              </a:rPr>
+              <a:t> El diseño evidencia por escrito los cuatro principios trabajados: hay mensaje de estado tras guardar, hay al menos dos mecanismos de prevencion de errores, los botones principales son consistentes entre pantallas y las listas cerradas reemplazan los campos de memoria.</a:t>
+            </a:r>
+          </a:p>
+          <a:p>
+            <a:pPr>
+              <a:spcAft>
+                <a:spcPts val="800"/>
+              </a:spcAft>
+            </a:pPr>
+            <a:r>
+              <a:rPr sz="2000" b="0" i="0">
+                <a:solidFill>
+                  <a:srgbClr val="333333"/>
+                </a:solidFill>
+                <a:latin typeface="Calibri"/>
+              </a:rPr>
+              <a:t>–   </a:t>
+            </a:r>
+            <a:r>
+              <a:rPr sz="2000" b="1" i="0">
+                <a:solidFill>
+                  <a:srgbClr val="333333"/>
+                </a:solidFill>
+                <a:latin typeface="Calibri"/>
+              </a:rPr>
+              <a:t>Entrega en la plataforma del curso</a:t>
+            </a:r>
+            <a:r>
+              <a:rPr sz="2000" b="0" i="0">
+                <a:solidFill>
+                  <a:srgbClr val="333333"/>
+                </a:solidFill>
+                <a:latin typeface="Calibri"/>
+              </a:rPr>
+              <a:t> — en la fecha que indique el docente.</a:t>
+            </a:r>
+          </a:p>
+        </p:txBody>
+      </p:sp>
+      <p:sp>
+        <p:nvSpPr>
+          <p:cNvPr id="6" name="TextBox 5"/>
           <p:cNvSpPr txBox="1"/>
           <p:nvPr/>
         </p:nvSpPr>
@@ -8723,7 +9285,7 @@
                 </a:solidFill>
                 <a:latin typeface="Calibri"/>
               </a:rPr>
-              <a:t>Antes de entregar — autochequeo</a:t>
+              <a:t>Para el PI esta semana</a:t>
             </a:r>
           </a:p>
         </p:txBody>
@@ -8737,7 +9299,7 @@
         <p:spPr>
           <a:xfrm>
             <a:off x="457200" y="1261872"/>
-            <a:ext cx="11277295" cy="566928"/>
+            <a:ext cx="11277295" cy="1051560"/>
           </a:xfrm>
           <a:prstGeom prst="roundRect">
             <a:avLst>
@@ -8745,7 +9307,7 @@
             </a:avLst>
           </a:prstGeom>
           <a:solidFill>
-            <a:srgbClr val="F2F2F2"/>
+            <a:srgbClr val="E8F4FA"/>
           </a:solidFill>
           <a:ln>
             <a:noFill/>
@@ -8781,53 +9343,8 @@
         </p:nvSpPr>
         <p:spPr>
           <a:xfrm>
-            <a:off x="640080" y="1408175"/>
-            <a:ext cx="274320" cy="274320"/>
-          </a:xfrm>
-          <a:prstGeom prst="rect">
-            <a:avLst/>
-          </a:prstGeom>
-          <a:solidFill>
-            <a:srgbClr val="FFFFFF"/>
-          </a:solidFill>
-          <a:ln>
-            <a:solidFill>
-              <a:srgbClr val="333333"/>
-            </a:solidFill>
-          </a:ln>
-        </p:spPr>
-        <p:style>
-          <a:lnRef idx="1">
-            <a:schemeClr val="accent1"/>
-          </a:lnRef>
-          <a:fillRef idx="3">
-            <a:schemeClr val="accent1"/>
-          </a:fillRef>
-          <a:effectRef idx="2">
-            <a:schemeClr val="accent1"/>
-          </a:effectRef>
-          <a:fontRef idx="minor">
-            <a:schemeClr val="lt1"/>
-          </a:fontRef>
-        </p:style>
-        <p:txBody>
-          <a:bodyPr rtlCol="0" anchor="ctr"/>
-          <a:lstStyle/>
-          <a:p>
-            <a:pPr algn="ctr"/>
-          </a:p>
-        </p:txBody>
-      </p:sp>
-      <p:sp>
-        <p:nvSpPr>
-          <p:cNvPr id="7" name="Rectangle 6"/>
-          <p:cNvSpPr/>
-          <p:nvPr/>
-        </p:nvSpPr>
-        <p:spPr>
-          <a:xfrm>
-            <a:off x="640080" y="1408175"/>
-            <a:ext cx="73152" cy="274320"/>
+            <a:off x="457200" y="1261872"/>
+            <a:ext cx="128016" cy="1051560"/>
           </a:xfrm>
           <a:prstGeom prst="rect">
             <a:avLst/>
@@ -8863,14 +9380,14 @@
       </p:sp>
       <p:sp>
         <p:nvSpPr>
-          <p:cNvPr id="8" name="TextBox 7"/>
+          <p:cNvPr id="7" name="TextBox 6"/>
           <p:cNvSpPr txBox="1"/>
           <p:nvPr/>
         </p:nvSpPr>
         <p:spPr>
           <a:xfrm>
-            <a:off x="1097280" y="1353312"/>
-            <a:ext cx="10362895" cy="402336"/>
+            <a:off x="777240" y="1399031"/>
+            <a:ext cx="10774375" cy="822959"/>
           </a:xfrm>
           <a:prstGeom prst="rect">
             <a:avLst/>
@@ -8878,31 +9395,49 @@
           <a:noFill/>
         </p:spPr>
         <p:txBody>
-          <a:bodyPr wrap="square" anchor="ctr"/>
-          <a:lstStyle/>
-          <a:p>
-            <a:r>
-              <a:rPr sz="1500" b="0" i="0">
+          <a:bodyPr wrap="square">
+            <a:spAutoFit/>
+          </a:bodyPr>
+          <a:lstStyle/>
+          <a:p>
+            <a:r>
+              <a:rPr sz="1200" b="1" i="0">
+                <a:solidFill>
+                  <a:srgbClr val="269CCB"/>
+                </a:solidFill>
+                <a:latin typeface="Calibri"/>
+              </a:rPr>
+              <a:t>Info</a:t>
+            </a:r>
+          </a:p>
+          <a:p>
+            <a:pPr>
+              <a:spcBef>
+                <a:spcPts val="400"/>
+              </a:spcBef>
+            </a:pPr>
+            <a:r>
+              <a:rPr sz="1400" b="0" i="0">
                 <a:solidFill>
                   <a:srgbClr val="333333"/>
                 </a:solidFill>
                 <a:latin typeface="Calibri"/>
               </a:rPr>
-              <a:t>Si la recepcionista oprime Guardar y se va al telefono treinta segundos, cuando vuelva a mirar la pantalla sabe con certeza si el registro quedo o no quedo, y por que lo sabe.</a:t>
-            </a:r>
-          </a:p>
-        </p:txBody>
-      </p:sp>
-      <p:sp>
-        <p:nvSpPr>
-          <p:cNvPr id="9" name="Rounded Rectangle 8"/>
+              <a:t>Hito: Quedan listas las pantallas de Registrar mascota y Buscar expediente de VetCare, anotadas y conectadas en un prototipo navegable.</a:t>
+            </a:r>
+          </a:p>
+        </p:txBody>
+      </p:sp>
+      <p:sp>
+        <p:nvSpPr>
+          <p:cNvPr id="8" name="Rounded Rectangle 7"/>
           <p:cNvSpPr/>
           <p:nvPr/>
         </p:nvSpPr>
         <p:spPr>
           <a:xfrm>
-            <a:off x="457200" y="1938528"/>
-            <a:ext cx="11277295" cy="566928"/>
+            <a:off x="457200" y="2478024"/>
+            <a:ext cx="11277295" cy="1051560"/>
           </a:xfrm>
           <a:prstGeom prst="roundRect">
             <a:avLst>
@@ -8910,7 +9445,7 @@
             </a:avLst>
           </a:prstGeom>
           <a:solidFill>
-            <a:srgbClr val="F2F2F2"/>
+            <a:srgbClr val="FFF8E1"/>
           </a:solidFill>
           <a:ln>
             <a:noFill/>
@@ -8940,25 +9475,23 @@
       </p:sp>
       <p:sp>
         <p:nvSpPr>
-          <p:cNvPr id="10" name="Rectangle 9"/>
+          <p:cNvPr id="9" name="Rectangle 8"/>
           <p:cNvSpPr/>
           <p:nvPr/>
         </p:nvSpPr>
         <p:spPr>
           <a:xfrm>
-            <a:off x="640080" y="2084832"/>
-            <a:ext cx="274320" cy="274320"/>
+            <a:off x="457200" y="2478024"/>
+            <a:ext cx="128016" cy="1051560"/>
           </a:xfrm>
           <a:prstGeom prst="rect">
             <a:avLst/>
           </a:prstGeom>
           <a:solidFill>
-            <a:srgbClr val="FFFFFF"/>
+            <a:srgbClr val="FFD000"/>
           </a:solidFill>
           <a:ln>
-            <a:solidFill>
-              <a:srgbClr val="333333"/>
-            </a:solidFill>
+            <a:noFill/>
           </a:ln>
         </p:spPr>
         <p:style>
@@ -8985,20 +9518,72 @@
       </p:sp>
       <p:sp>
         <p:nvSpPr>
-          <p:cNvPr id="11" name="Rectangle 10"/>
+          <p:cNvPr id="10" name="TextBox 9"/>
+          <p:cNvSpPr txBox="1"/>
+          <p:nvPr/>
+        </p:nvSpPr>
+        <p:spPr>
+          <a:xfrm>
+            <a:off x="777240" y="2615184"/>
+            <a:ext cx="10774375" cy="822959"/>
+          </a:xfrm>
+          <a:prstGeom prst="rect">
+            <a:avLst/>
+          </a:prstGeom>
+          <a:noFill/>
+        </p:spPr>
+        <p:txBody>
+          <a:bodyPr wrap="square">
+            <a:spAutoFit/>
+          </a:bodyPr>
+          <a:lstStyle/>
+          <a:p>
+            <a:r>
+              <a:rPr sz="1200" b="1" i="0">
+                <a:solidFill>
+                  <a:srgbClr val="FFD000"/>
+                </a:solidFill>
+                <a:latin typeface="Calibri"/>
+              </a:rPr>
+              <a:t>Aclaración</a:t>
+            </a:r>
+          </a:p>
+          <a:p>
+            <a:pPr>
+              <a:spcBef>
+                <a:spcPts val="400"/>
+              </a:spcBef>
+            </a:pPr>
+            <a:r>
+              <a:rPr sz="1400" b="0" i="0">
+                <a:solidFill>
+                  <a:srgbClr val="333333"/>
+                </a:solidFill>
+                <a:latin typeface="Calibri"/>
+              </a:rPr>
+              <a:t>Enunciado completo: Clases/Proyecto Integrador/ (VetCare).</a:t>
+            </a:r>
+          </a:p>
+        </p:txBody>
+      </p:sp>
+      <p:sp>
+        <p:nvSpPr>
+          <p:cNvPr id="11" name="Rounded Rectangle 10"/>
           <p:cNvSpPr/>
           <p:nvPr/>
         </p:nvSpPr>
         <p:spPr>
           <a:xfrm>
-            <a:off x="640080" y="2084832"/>
-            <a:ext cx="73152" cy="274320"/>
-          </a:xfrm>
-          <a:prstGeom prst="rect">
-            <a:avLst/>
+            <a:off x="457200" y="3694176"/>
+            <a:ext cx="11277295" cy="1051560"/>
+          </a:xfrm>
+          <a:prstGeom prst="roundRect">
+            <a:avLst>
+              <a:gd name="adj" fmla="val 12000"/>
+            </a:avLst>
           </a:prstGeom>
           <a:solidFill>
-            <a:srgbClr val="269CCB"/>
+            <a:srgbClr val="FBE4E4"/>
           </a:solidFill>
           <a:ln>
             <a:noFill/>
@@ -9028,54 +9613,20 @@
       </p:sp>
       <p:sp>
         <p:nvSpPr>
-          <p:cNvPr id="12" name="TextBox 11"/>
-          <p:cNvSpPr txBox="1"/>
-          <p:nvPr/>
-        </p:nvSpPr>
-        <p:spPr>
-          <a:xfrm>
-            <a:off x="1097280" y="2029968"/>
-            <a:ext cx="10362895" cy="402336"/>
-          </a:xfrm>
-          <a:prstGeom prst="rect">
-            <a:avLst/>
-          </a:prstGeom>
-          <a:noFill/>
-        </p:spPr>
-        <p:txBody>
-          <a:bodyPr wrap="square" anchor="ctr"/>
-          <a:lstStyle/>
-          <a:p>
-            <a:r>
-              <a:rPr sz="1500" b="0" i="0">
-                <a:solidFill>
-                  <a:srgbClr val="333333"/>
-                </a:solidFill>
-                <a:latin typeface="Calibri"/>
-              </a:rPr>
-              <a:t>De los campos que dibujaron, cuantos podria llenar mal una persona apurada, y cual de esos errores se puede volver imposible en vez de corregible.</a:t>
-            </a:r>
-          </a:p>
-        </p:txBody>
-      </p:sp>
-      <p:sp>
-        <p:nvSpPr>
-          <p:cNvPr id="13" name="Rounded Rectangle 12"/>
+          <p:cNvPr id="12" name="Rectangle 11"/>
           <p:cNvSpPr/>
           <p:nvPr/>
         </p:nvSpPr>
         <p:spPr>
           <a:xfrm>
-            <a:off x="457200" y="2615184"/>
-            <a:ext cx="11277295" cy="566928"/>
-          </a:xfrm>
-          <a:prstGeom prst="roundRect">
-            <a:avLst>
-              <a:gd name="adj" fmla="val 12000"/>
-            </a:avLst>
+            <a:off x="457200" y="3694176"/>
+            <a:ext cx="128016" cy="1051560"/>
+          </a:xfrm>
+          <a:prstGeom prst="rect">
+            <a:avLst/>
           </a:prstGeom>
           <a:solidFill>
-            <a:srgbClr val="F2F2F2"/>
+            <a:srgbClr val="A02030"/>
           </a:solidFill>
           <a:ln>
             <a:noFill/>
@@ -9105,102 +9656,14 @@
       </p:sp>
       <p:sp>
         <p:nvSpPr>
-          <p:cNvPr id="14" name="Rectangle 13"/>
-          <p:cNvSpPr/>
-          <p:nvPr/>
-        </p:nvSpPr>
-        <p:spPr>
-          <a:xfrm>
-            <a:off x="640080" y="2761488"/>
-            <a:ext cx="274320" cy="274320"/>
-          </a:xfrm>
-          <a:prstGeom prst="rect">
-            <a:avLst/>
-          </a:prstGeom>
-          <a:solidFill>
-            <a:srgbClr val="FFFFFF"/>
-          </a:solidFill>
-          <a:ln>
-            <a:solidFill>
-              <a:srgbClr val="333333"/>
-            </a:solidFill>
-          </a:ln>
-        </p:spPr>
-        <p:style>
-          <a:lnRef idx="1">
-            <a:schemeClr val="accent1"/>
-          </a:lnRef>
-          <a:fillRef idx="3">
-            <a:schemeClr val="accent1"/>
-          </a:fillRef>
-          <a:effectRef idx="2">
-            <a:schemeClr val="accent1"/>
-          </a:effectRef>
-          <a:fontRef idx="minor">
-            <a:schemeClr val="lt1"/>
-          </a:fontRef>
-        </p:style>
-        <p:txBody>
-          <a:bodyPr rtlCol="0" anchor="ctr"/>
-          <a:lstStyle/>
-          <a:p>
-            <a:pPr algn="ctr"/>
-          </a:p>
-        </p:txBody>
-      </p:sp>
-      <p:sp>
-        <p:nvSpPr>
-          <p:cNvPr id="15" name="Rectangle 14"/>
-          <p:cNvSpPr/>
-          <p:nvPr/>
-        </p:nvSpPr>
-        <p:spPr>
-          <a:xfrm>
-            <a:off x="640080" y="2761488"/>
-            <a:ext cx="73152" cy="274320"/>
-          </a:xfrm>
-          <a:prstGeom prst="rect">
-            <a:avLst/>
-          </a:prstGeom>
-          <a:solidFill>
-            <a:srgbClr val="269CCB"/>
-          </a:solidFill>
-          <a:ln>
-            <a:noFill/>
-          </a:ln>
-        </p:spPr>
-        <p:style>
-          <a:lnRef idx="1">
-            <a:schemeClr val="accent1"/>
-          </a:lnRef>
-          <a:fillRef idx="3">
-            <a:schemeClr val="accent1"/>
-          </a:fillRef>
-          <a:effectRef idx="2">
-            <a:schemeClr val="accent1"/>
-          </a:effectRef>
-          <a:fontRef idx="minor">
-            <a:schemeClr val="lt1"/>
-          </a:fontRef>
-        </p:style>
-        <p:txBody>
-          <a:bodyPr rtlCol="0" anchor="ctr"/>
-          <a:lstStyle/>
-          <a:p>
-            <a:pPr algn="ctr"/>
-          </a:p>
-        </p:txBody>
-      </p:sp>
-      <p:sp>
-        <p:nvSpPr>
-          <p:cNvPr id="16" name="TextBox 15"/>
+          <p:cNvPr id="13" name="TextBox 12"/>
           <p:cNvSpPr txBox="1"/>
           <p:nvPr/>
         </p:nvSpPr>
         <p:spPr>
           <a:xfrm>
-            <a:off x="1097280" y="2706624"/>
-            <a:ext cx="10362895" cy="402336"/>
+            <a:off x="777240" y="3831336"/>
+            <a:ext cx="10774375" cy="822959"/>
           </a:xfrm>
           <a:prstGeom prst="rect">
             <a:avLst/>
@@ -9208,24 +9671,42 @@
           <a:noFill/>
         </p:spPr>
         <p:txBody>
-          <a:bodyPr wrap="square" anchor="ctr"/>
-          <a:lstStyle/>
-          <a:p>
-            <a:r>
-              <a:rPr sz="1500" b="0" i="0">
+          <a:bodyPr wrap="square">
+            <a:spAutoFit/>
+          </a:bodyPr>
+          <a:lstStyle/>
+          <a:p>
+            <a:r>
+              <a:rPr sz="1200" b="1" i="0">
+                <a:solidFill>
+                  <a:srgbClr val="A02030"/>
+                </a:solidFill>
+                <a:latin typeface="Calibri"/>
+              </a:rPr>
+              <a:t>Atención</a:t>
+            </a:r>
+          </a:p>
+          <a:p>
+            <a:pPr>
+              <a:spcBef>
+                <a:spcPts val="400"/>
+              </a:spcBef>
+            </a:pPr>
+            <a:r>
+              <a:rPr sz="1400" b="0" i="0">
                 <a:solidFill>
                   <a:srgbClr val="333333"/>
                 </a:solidFill>
                 <a:latin typeface="Calibri"/>
               </a:rPr>
-              <a:t>Si la busqueda por nombre devuelve doce mascotas llamadas Firulais, que dato adicional muestra la lista para que la recepcionista escoja la correcta sin abrir ninguna ficha.</a:t>
-            </a:r>
-          </a:p>
-        </p:txBody>
-      </p:sp>
-      <p:sp>
-        <p:nvSpPr>
-          <p:cNvPr id="17" name="TextBox 16"/>
+              <a:t>Entrega del taller, si el docente lo asigna · en la fecha que indique el docente.</a:t>
+            </a:r>
+          </a:p>
+        </p:txBody>
+      </p:sp>
+      <p:sp>
+        <p:nvSpPr>
+          <p:cNvPr id="14" name="TextBox 13"/>
           <p:cNvSpPr txBox="1"/>
           <p:nvPr/>
         </p:nvSpPr>
@@ -9267,1009 +9748,6 @@
 </file>
 
 <file path=ppt/slides/slide21.xml><?xml version="1.0" encoding="utf-8"?>
-<p:sld xmlns:a="http://schemas.openxmlformats.org/drawingml/2006/main" xmlns:p="http://schemas.openxmlformats.org/presentationml/2006/main" xmlns:r="http://schemas.openxmlformats.org/officeDocument/2006/relationships">
-  <p:cSld>
-    <p:bg>
-      <p:bgPr>
-        <a:solidFill>
-          <a:srgbClr val="FFFFFF"/>
-        </a:solidFill>
-        <a:effectLst/>
-      </p:bgPr>
-    </p:bg>
-    <p:spTree>
-      <p:nvGrpSpPr>
-        <p:cNvPr id="1" name=""/>
-        <p:cNvGrpSpPr/>
-        <p:nvPr/>
-      </p:nvGrpSpPr>
-      <p:grpSpPr/>
-      <p:sp>
-        <p:nvSpPr>
-          <p:cNvPr id="2" name="Rectangle 1"/>
-          <p:cNvSpPr/>
-          <p:nvPr/>
-        </p:nvSpPr>
-        <p:spPr>
-          <a:xfrm>
-            <a:off x="0" y="0"/>
-            <a:ext cx="12191695" cy="960120"/>
-          </a:xfrm>
-          <a:prstGeom prst="rect">
-            <a:avLst/>
-          </a:prstGeom>
-          <a:solidFill>
-            <a:srgbClr val="095292"/>
-          </a:solidFill>
-          <a:ln>
-            <a:noFill/>
-          </a:ln>
-        </p:spPr>
-        <p:style>
-          <a:lnRef idx="1">
-            <a:schemeClr val="accent1"/>
-          </a:lnRef>
-          <a:fillRef idx="3">
-            <a:schemeClr val="accent1"/>
-          </a:fillRef>
-          <a:effectRef idx="2">
-            <a:schemeClr val="accent1"/>
-          </a:effectRef>
-          <a:fontRef idx="minor">
-            <a:schemeClr val="lt1"/>
-          </a:fontRef>
-        </p:style>
-        <p:txBody>
-          <a:bodyPr rtlCol="0" anchor="ctr"/>
-          <a:lstStyle/>
-          <a:p>
-            <a:pPr algn="ctr"/>
-          </a:p>
-        </p:txBody>
-      </p:sp>
-      <p:sp>
-        <p:nvSpPr>
-          <p:cNvPr id="3" name="Rectangle 2"/>
-          <p:cNvSpPr/>
-          <p:nvPr/>
-        </p:nvSpPr>
-        <p:spPr>
-          <a:xfrm>
-            <a:off x="0" y="960120"/>
-            <a:ext cx="12191695" cy="41148"/>
-          </a:xfrm>
-          <a:prstGeom prst="rect">
-            <a:avLst/>
-          </a:prstGeom>
-          <a:solidFill>
-            <a:srgbClr val="FFD000"/>
-          </a:solidFill>
-          <a:ln>
-            <a:noFill/>
-          </a:ln>
-        </p:spPr>
-        <p:style>
-          <a:lnRef idx="1">
-            <a:schemeClr val="accent1"/>
-          </a:lnRef>
-          <a:fillRef idx="3">
-            <a:schemeClr val="accent1"/>
-          </a:fillRef>
-          <a:effectRef idx="2">
-            <a:schemeClr val="accent1"/>
-          </a:effectRef>
-          <a:fontRef idx="minor">
-            <a:schemeClr val="lt1"/>
-          </a:fontRef>
-        </p:style>
-        <p:txBody>
-          <a:bodyPr rtlCol="0" anchor="ctr"/>
-          <a:lstStyle/>
-          <a:p>
-            <a:pPr algn="ctr"/>
-          </a:p>
-        </p:txBody>
-      </p:sp>
-      <p:sp>
-        <p:nvSpPr>
-          <p:cNvPr id="4" name="TextBox 3"/>
-          <p:cNvSpPr txBox="1"/>
-          <p:nvPr/>
-        </p:nvSpPr>
-        <p:spPr>
-          <a:xfrm>
-            <a:off x="457200" y="164592"/>
-            <a:ext cx="11277295" cy="502920"/>
-          </a:xfrm>
-          <a:prstGeom prst="rect">
-            <a:avLst/>
-          </a:prstGeom>
-          <a:noFill/>
-        </p:spPr>
-        <p:txBody>
-          <a:bodyPr wrap="square">
-            <a:spAutoFit/>
-          </a:bodyPr>
-          <a:lstStyle/>
-          <a:p>
-            <a:r>
-              <a:rPr sz="2600" b="1" i="0">
-                <a:solidFill>
-                  <a:srgbClr val="FFFFFF"/>
-                </a:solidFill>
-                <a:latin typeface="Calibri"/>
-              </a:rPr>
-              <a:t>Criterios de exito / entregable</a:t>
-            </a:r>
-          </a:p>
-        </p:txBody>
-      </p:sp>
-      <p:sp>
-        <p:nvSpPr>
-          <p:cNvPr id="5" name="TextBox 4"/>
-          <p:cNvSpPr txBox="1"/>
-          <p:nvPr/>
-        </p:nvSpPr>
-        <p:spPr>
-          <a:xfrm>
-            <a:off x="457200" y="1170432"/>
-            <a:ext cx="11277295" cy="5230368"/>
-          </a:xfrm>
-          <a:prstGeom prst="rect">
-            <a:avLst/>
-          </a:prstGeom>
-          <a:noFill/>
-        </p:spPr>
-        <p:txBody>
-          <a:bodyPr wrap="square">
-            <a:spAutoFit/>
-          </a:bodyPr>
-          <a:lstStyle/>
-          <a:p>
-            <a:pPr>
-              <a:spcAft>
-                <a:spcPts val="800"/>
-              </a:spcAft>
-            </a:pPr>
-            <a:r>
-              <a:rPr sz="2000" b="0" i="0">
-                <a:solidFill>
-                  <a:srgbClr val="333333"/>
-                </a:solidFill>
-                <a:latin typeface="Calibri"/>
-              </a:rPr>
-              <a:t>–   </a:t>
-            </a:r>
-            <a:r>
-              <a:rPr sz="2000" b="1" i="0">
-                <a:solidFill>
-                  <a:srgbClr val="333333"/>
-                </a:solidFill>
-                <a:latin typeface="Calibri"/>
-              </a:rPr>
-              <a:t>Entregable:</a:t>
-            </a:r>
-            <a:r>
-              <a:rPr sz="2000" b="0" i="0">
-                <a:solidFill>
-                  <a:srgbClr val="333333"/>
-                </a:solidFill>
-                <a:latin typeface="Calibri"/>
-              </a:rPr>
-              <a:t> Un archivo de Figma o Penpot con las dos pantallas anotadas y minimo tres transiciones navegables, mas la hoja de anotaciones que amarra cada campo a un RF y a un atributo del diccionario de datos, subido a la plataforma del curso.</a:t>
-            </a:r>
-          </a:p>
-          <a:p>
-            <a:pPr>
-              <a:spcAft>
-                <a:spcPts val="800"/>
-              </a:spcAft>
-            </a:pPr>
-            <a:r>
-              <a:rPr sz="2000" b="0" i="0">
-                <a:solidFill>
-                  <a:srgbClr val="333333"/>
-                </a:solidFill>
-                <a:latin typeface="Calibri"/>
-              </a:rPr>
-              <a:t>–   </a:t>
-            </a:r>
-            <a:r>
-              <a:rPr sz="2000" b="1" i="0">
-                <a:solidFill>
-                  <a:srgbClr val="333333"/>
-                </a:solidFill>
-                <a:latin typeface="Calibri"/>
-              </a:rPr>
-              <a:t>Exito:</a:t>
-            </a:r>
-            <a:r>
-              <a:rPr sz="2000" b="0" i="0">
-                <a:solidFill>
-                  <a:srgbClr val="333333"/>
-                </a:solidFill>
-                <a:latin typeface="Calibri"/>
-              </a:rPr>
-              <a:t> Las dos pantallas se entregan primero como wireframe en gris y luego como mockup, y ambas versiones estan en el archivo entregado.</a:t>
-            </a:r>
-          </a:p>
-          <a:p>
-            <a:pPr>
-              <a:spcAft>
-                <a:spcPts val="800"/>
-              </a:spcAft>
-            </a:pPr>
-            <a:r>
-              <a:rPr sz="2000" b="0" i="0">
-                <a:solidFill>
-                  <a:srgbClr val="333333"/>
-                </a:solidFill>
-                <a:latin typeface="Calibri"/>
-              </a:rPr>
-              <a:t>–   </a:t>
-            </a:r>
-            <a:r>
-              <a:rPr sz="2000" b="1" i="0">
-                <a:solidFill>
-                  <a:srgbClr val="333333"/>
-                </a:solidFill>
-                <a:latin typeface="Calibri"/>
-              </a:rPr>
-              <a:t>Exito:</a:t>
-            </a:r>
-            <a:r>
-              <a:rPr sz="2000" b="0" i="0">
-                <a:solidFill>
-                  <a:srgbClr val="333333"/>
-                </a:solidFill>
-                <a:latin typeface="Calibri"/>
-              </a:rPr>
-              <a:t> Cada campo dibujado aparece en la tabla de anotaciones con su atributo del diccionario de datos y el RF que lo exige, sin campos huerfanos.</a:t>
-            </a:r>
-          </a:p>
-          <a:p>
-            <a:pPr>
-              <a:spcAft>
-                <a:spcPts val="800"/>
-              </a:spcAft>
-            </a:pPr>
-            <a:r>
-              <a:rPr sz="2000" b="0" i="0">
-                <a:solidFill>
-                  <a:srgbClr val="333333"/>
-                </a:solidFill>
-                <a:latin typeface="Calibri"/>
-              </a:rPr>
-              <a:t>–   </a:t>
-            </a:r>
-            <a:r>
-              <a:rPr sz="2000" b="1" i="0">
-                <a:solidFill>
-                  <a:srgbClr val="333333"/>
-                </a:solidFill>
-                <a:latin typeface="Calibri"/>
-              </a:rPr>
-              <a:t>Exito:</a:t>
-            </a:r>
-            <a:r>
-              <a:rPr sz="2000" b="0" i="0">
-                <a:solidFill>
-                  <a:srgbClr val="333333"/>
-                </a:solidFill>
-                <a:latin typeface="Calibri"/>
-              </a:rPr>
-              <a:t> El prototipo tiene al menos tres transiciones que funcionan al hacer clic y cubre minimo dos caminos alternos, entre ellos resultados multiples o dueño no registrado.</a:t>
-            </a:r>
-          </a:p>
-          <a:p>
-            <a:pPr>
-              <a:spcAft>
-                <a:spcPts val="800"/>
-              </a:spcAft>
-            </a:pPr>
-            <a:r>
-              <a:rPr sz="2000" b="0" i="0">
-                <a:solidFill>
-                  <a:srgbClr val="333333"/>
-                </a:solidFill>
-                <a:latin typeface="Calibri"/>
-              </a:rPr>
-              <a:t>–   </a:t>
-            </a:r>
-            <a:r>
-              <a:rPr sz="2000" b="1" i="0">
-                <a:solidFill>
-                  <a:srgbClr val="333333"/>
-                </a:solidFill>
-                <a:latin typeface="Calibri"/>
-              </a:rPr>
-              <a:t>Exito:</a:t>
-            </a:r>
-            <a:r>
-              <a:rPr sz="2000" b="0" i="0">
-                <a:solidFill>
-                  <a:srgbClr val="333333"/>
-                </a:solidFill>
-                <a:latin typeface="Calibri"/>
-              </a:rPr>
-              <a:t> El diseño evidencia por escrito los cuatro principios trabajados: hay mensaje de estado tras guardar, hay al menos dos mecanismos de prevencion de errores, los botones principales son consistentes entre pantallas y las listas cerradas reemplazan los campos de memoria.</a:t>
-            </a:r>
-          </a:p>
-          <a:p>
-            <a:pPr>
-              <a:spcAft>
-                <a:spcPts val="800"/>
-              </a:spcAft>
-            </a:pPr>
-            <a:r>
-              <a:rPr sz="2000" b="0" i="0">
-                <a:solidFill>
-                  <a:srgbClr val="333333"/>
-                </a:solidFill>
-                <a:latin typeface="Calibri"/>
-              </a:rPr>
-              <a:t>–   </a:t>
-            </a:r>
-            <a:r>
-              <a:rPr sz="2000" b="1" i="0">
-                <a:solidFill>
-                  <a:srgbClr val="333333"/>
-                </a:solidFill>
-                <a:latin typeface="Calibri"/>
-              </a:rPr>
-              <a:t>Entrega en la plataforma del curso</a:t>
-            </a:r>
-            <a:r>
-              <a:rPr sz="2000" b="0" i="0">
-                <a:solidFill>
-                  <a:srgbClr val="333333"/>
-                </a:solidFill>
-                <a:latin typeface="Calibri"/>
-              </a:rPr>
-              <a:t> — en la fecha que indique el docente.</a:t>
-            </a:r>
-          </a:p>
-        </p:txBody>
-      </p:sp>
-      <p:sp>
-        <p:nvSpPr>
-          <p:cNvPr id="6" name="TextBox 5"/>
-          <p:cNvSpPr txBox="1"/>
-          <p:nvPr/>
-        </p:nvSpPr>
-        <p:spPr>
-          <a:xfrm>
-            <a:off x="11185855" y="6473952"/>
-            <a:ext cx="640080" cy="274320"/>
-          </a:xfrm>
-          <a:prstGeom prst="rect">
-            <a:avLst/>
-          </a:prstGeom>
-          <a:noFill/>
-        </p:spPr>
-        <p:txBody>
-          <a:bodyPr wrap="square">
-            <a:spAutoFit/>
-          </a:bodyPr>
-          <a:lstStyle/>
-          <a:p>
-            <a:pPr algn="r"/>
-            <a:r>
-              <a:rPr sz="1100" b="0" i="0">
-                <a:solidFill>
-                  <a:srgbClr val="666666"/>
-                </a:solidFill>
-                <a:latin typeface="Calibri"/>
-              </a:rPr>
-              <a:t>21</a:t>
-            </a:r>
-          </a:p>
-        </p:txBody>
-      </p:sp>
-    </p:spTree>
-  </p:cSld>
-  <p:clrMapOvr>
-    <a:masterClrMapping/>
-  </p:clrMapOvr>
-</p:sld>
-</file>
-
-<file path=ppt/slides/slide22.xml><?xml version="1.0" encoding="utf-8"?>
-<p:sld xmlns:a="http://schemas.openxmlformats.org/drawingml/2006/main" xmlns:p="http://schemas.openxmlformats.org/presentationml/2006/main" xmlns:r="http://schemas.openxmlformats.org/officeDocument/2006/relationships">
-  <p:cSld>
-    <p:bg>
-      <p:bgPr>
-        <a:solidFill>
-          <a:srgbClr val="FFFFFF"/>
-        </a:solidFill>
-        <a:effectLst/>
-      </p:bgPr>
-    </p:bg>
-    <p:spTree>
-      <p:nvGrpSpPr>
-        <p:cNvPr id="1" name=""/>
-        <p:cNvGrpSpPr/>
-        <p:nvPr/>
-      </p:nvGrpSpPr>
-      <p:grpSpPr/>
-      <p:sp>
-        <p:nvSpPr>
-          <p:cNvPr id="2" name="Rectangle 1"/>
-          <p:cNvSpPr/>
-          <p:nvPr/>
-        </p:nvSpPr>
-        <p:spPr>
-          <a:xfrm>
-            <a:off x="0" y="0"/>
-            <a:ext cx="12191695" cy="960120"/>
-          </a:xfrm>
-          <a:prstGeom prst="rect">
-            <a:avLst/>
-          </a:prstGeom>
-          <a:solidFill>
-            <a:srgbClr val="095292"/>
-          </a:solidFill>
-          <a:ln>
-            <a:noFill/>
-          </a:ln>
-        </p:spPr>
-        <p:style>
-          <a:lnRef idx="1">
-            <a:schemeClr val="accent1"/>
-          </a:lnRef>
-          <a:fillRef idx="3">
-            <a:schemeClr val="accent1"/>
-          </a:fillRef>
-          <a:effectRef idx="2">
-            <a:schemeClr val="accent1"/>
-          </a:effectRef>
-          <a:fontRef idx="minor">
-            <a:schemeClr val="lt1"/>
-          </a:fontRef>
-        </p:style>
-        <p:txBody>
-          <a:bodyPr rtlCol="0" anchor="ctr"/>
-          <a:lstStyle/>
-          <a:p>
-            <a:pPr algn="ctr"/>
-          </a:p>
-        </p:txBody>
-      </p:sp>
-      <p:sp>
-        <p:nvSpPr>
-          <p:cNvPr id="3" name="Rectangle 2"/>
-          <p:cNvSpPr/>
-          <p:nvPr/>
-        </p:nvSpPr>
-        <p:spPr>
-          <a:xfrm>
-            <a:off x="0" y="960120"/>
-            <a:ext cx="12191695" cy="41148"/>
-          </a:xfrm>
-          <a:prstGeom prst="rect">
-            <a:avLst/>
-          </a:prstGeom>
-          <a:solidFill>
-            <a:srgbClr val="FFD000"/>
-          </a:solidFill>
-          <a:ln>
-            <a:noFill/>
-          </a:ln>
-        </p:spPr>
-        <p:style>
-          <a:lnRef idx="1">
-            <a:schemeClr val="accent1"/>
-          </a:lnRef>
-          <a:fillRef idx="3">
-            <a:schemeClr val="accent1"/>
-          </a:fillRef>
-          <a:effectRef idx="2">
-            <a:schemeClr val="accent1"/>
-          </a:effectRef>
-          <a:fontRef idx="minor">
-            <a:schemeClr val="lt1"/>
-          </a:fontRef>
-        </p:style>
-        <p:txBody>
-          <a:bodyPr rtlCol="0" anchor="ctr"/>
-          <a:lstStyle/>
-          <a:p>
-            <a:pPr algn="ctr"/>
-          </a:p>
-        </p:txBody>
-      </p:sp>
-      <p:sp>
-        <p:nvSpPr>
-          <p:cNvPr id="4" name="TextBox 3"/>
-          <p:cNvSpPr txBox="1"/>
-          <p:nvPr/>
-        </p:nvSpPr>
-        <p:spPr>
-          <a:xfrm>
-            <a:off x="457200" y="164592"/>
-            <a:ext cx="11277295" cy="502920"/>
-          </a:xfrm>
-          <a:prstGeom prst="rect">
-            <a:avLst/>
-          </a:prstGeom>
-          <a:noFill/>
-        </p:spPr>
-        <p:txBody>
-          <a:bodyPr wrap="square">
-            <a:spAutoFit/>
-          </a:bodyPr>
-          <a:lstStyle/>
-          <a:p>
-            <a:r>
-              <a:rPr sz="2600" b="1" i="0">
-                <a:solidFill>
-                  <a:srgbClr val="FFFFFF"/>
-                </a:solidFill>
-                <a:latin typeface="Calibri"/>
-              </a:rPr>
-              <a:t>Para el PI esta semana</a:t>
-            </a:r>
-          </a:p>
-        </p:txBody>
-      </p:sp>
-      <p:sp>
-        <p:nvSpPr>
-          <p:cNvPr id="5" name="Rounded Rectangle 4"/>
-          <p:cNvSpPr/>
-          <p:nvPr/>
-        </p:nvSpPr>
-        <p:spPr>
-          <a:xfrm>
-            <a:off x="457200" y="1261872"/>
-            <a:ext cx="11277295" cy="1051560"/>
-          </a:xfrm>
-          <a:prstGeom prst="roundRect">
-            <a:avLst>
-              <a:gd name="adj" fmla="val 12000"/>
-            </a:avLst>
-          </a:prstGeom>
-          <a:solidFill>
-            <a:srgbClr val="E8F4FA"/>
-          </a:solidFill>
-          <a:ln>
-            <a:noFill/>
-          </a:ln>
-        </p:spPr>
-        <p:style>
-          <a:lnRef idx="1">
-            <a:schemeClr val="accent1"/>
-          </a:lnRef>
-          <a:fillRef idx="3">
-            <a:schemeClr val="accent1"/>
-          </a:fillRef>
-          <a:effectRef idx="2">
-            <a:schemeClr val="accent1"/>
-          </a:effectRef>
-          <a:fontRef idx="minor">
-            <a:schemeClr val="lt1"/>
-          </a:fontRef>
-        </p:style>
-        <p:txBody>
-          <a:bodyPr rtlCol="0" anchor="ctr"/>
-          <a:lstStyle/>
-          <a:p>
-            <a:pPr algn="ctr"/>
-          </a:p>
-        </p:txBody>
-      </p:sp>
-      <p:sp>
-        <p:nvSpPr>
-          <p:cNvPr id="6" name="Rectangle 5"/>
-          <p:cNvSpPr/>
-          <p:nvPr/>
-        </p:nvSpPr>
-        <p:spPr>
-          <a:xfrm>
-            <a:off x="457200" y="1261872"/>
-            <a:ext cx="128016" cy="1051560"/>
-          </a:xfrm>
-          <a:prstGeom prst="rect">
-            <a:avLst/>
-          </a:prstGeom>
-          <a:solidFill>
-            <a:srgbClr val="269CCB"/>
-          </a:solidFill>
-          <a:ln>
-            <a:noFill/>
-          </a:ln>
-        </p:spPr>
-        <p:style>
-          <a:lnRef idx="1">
-            <a:schemeClr val="accent1"/>
-          </a:lnRef>
-          <a:fillRef idx="3">
-            <a:schemeClr val="accent1"/>
-          </a:fillRef>
-          <a:effectRef idx="2">
-            <a:schemeClr val="accent1"/>
-          </a:effectRef>
-          <a:fontRef idx="minor">
-            <a:schemeClr val="lt1"/>
-          </a:fontRef>
-        </p:style>
-        <p:txBody>
-          <a:bodyPr rtlCol="0" anchor="ctr"/>
-          <a:lstStyle/>
-          <a:p>
-            <a:pPr algn="ctr"/>
-          </a:p>
-        </p:txBody>
-      </p:sp>
-      <p:sp>
-        <p:nvSpPr>
-          <p:cNvPr id="7" name="TextBox 6"/>
-          <p:cNvSpPr txBox="1"/>
-          <p:nvPr/>
-        </p:nvSpPr>
-        <p:spPr>
-          <a:xfrm>
-            <a:off x="777240" y="1399031"/>
-            <a:ext cx="10774375" cy="822959"/>
-          </a:xfrm>
-          <a:prstGeom prst="rect">
-            <a:avLst/>
-          </a:prstGeom>
-          <a:noFill/>
-        </p:spPr>
-        <p:txBody>
-          <a:bodyPr wrap="square">
-            <a:spAutoFit/>
-          </a:bodyPr>
-          <a:lstStyle/>
-          <a:p>
-            <a:r>
-              <a:rPr sz="1200" b="1" i="0">
-                <a:solidFill>
-                  <a:srgbClr val="269CCB"/>
-                </a:solidFill>
-                <a:latin typeface="Calibri"/>
-              </a:rPr>
-              <a:t>Info</a:t>
-            </a:r>
-          </a:p>
-          <a:p>
-            <a:pPr>
-              <a:spcBef>
-                <a:spcPts val="400"/>
-              </a:spcBef>
-            </a:pPr>
-            <a:r>
-              <a:rPr sz="1400" b="0" i="0">
-                <a:solidFill>
-                  <a:srgbClr val="333333"/>
-                </a:solidFill>
-                <a:latin typeface="Calibri"/>
-              </a:rPr>
-              <a:t>Hito: Quedan listas las pantallas de Registrar mascota y Buscar expediente de VetCare, anotadas y conectadas en un prototipo navegable.</a:t>
-            </a:r>
-          </a:p>
-        </p:txBody>
-      </p:sp>
-      <p:sp>
-        <p:nvSpPr>
-          <p:cNvPr id="8" name="Rounded Rectangle 7"/>
-          <p:cNvSpPr/>
-          <p:nvPr/>
-        </p:nvSpPr>
-        <p:spPr>
-          <a:xfrm>
-            <a:off x="457200" y="2478024"/>
-            <a:ext cx="11277295" cy="1051560"/>
-          </a:xfrm>
-          <a:prstGeom prst="roundRect">
-            <a:avLst>
-              <a:gd name="adj" fmla="val 12000"/>
-            </a:avLst>
-          </a:prstGeom>
-          <a:solidFill>
-            <a:srgbClr val="FFF8E1"/>
-          </a:solidFill>
-          <a:ln>
-            <a:noFill/>
-          </a:ln>
-        </p:spPr>
-        <p:style>
-          <a:lnRef idx="1">
-            <a:schemeClr val="accent1"/>
-          </a:lnRef>
-          <a:fillRef idx="3">
-            <a:schemeClr val="accent1"/>
-          </a:fillRef>
-          <a:effectRef idx="2">
-            <a:schemeClr val="accent1"/>
-          </a:effectRef>
-          <a:fontRef idx="minor">
-            <a:schemeClr val="lt1"/>
-          </a:fontRef>
-        </p:style>
-        <p:txBody>
-          <a:bodyPr rtlCol="0" anchor="ctr"/>
-          <a:lstStyle/>
-          <a:p>
-            <a:pPr algn="ctr"/>
-          </a:p>
-        </p:txBody>
-      </p:sp>
-      <p:sp>
-        <p:nvSpPr>
-          <p:cNvPr id="9" name="Rectangle 8"/>
-          <p:cNvSpPr/>
-          <p:nvPr/>
-        </p:nvSpPr>
-        <p:spPr>
-          <a:xfrm>
-            <a:off x="457200" y="2478024"/>
-            <a:ext cx="128016" cy="1051560"/>
-          </a:xfrm>
-          <a:prstGeom prst="rect">
-            <a:avLst/>
-          </a:prstGeom>
-          <a:solidFill>
-            <a:srgbClr val="FFD000"/>
-          </a:solidFill>
-          <a:ln>
-            <a:noFill/>
-          </a:ln>
-        </p:spPr>
-        <p:style>
-          <a:lnRef idx="1">
-            <a:schemeClr val="accent1"/>
-          </a:lnRef>
-          <a:fillRef idx="3">
-            <a:schemeClr val="accent1"/>
-          </a:fillRef>
-          <a:effectRef idx="2">
-            <a:schemeClr val="accent1"/>
-          </a:effectRef>
-          <a:fontRef idx="minor">
-            <a:schemeClr val="lt1"/>
-          </a:fontRef>
-        </p:style>
-        <p:txBody>
-          <a:bodyPr rtlCol="0" anchor="ctr"/>
-          <a:lstStyle/>
-          <a:p>
-            <a:pPr algn="ctr"/>
-          </a:p>
-        </p:txBody>
-      </p:sp>
-      <p:sp>
-        <p:nvSpPr>
-          <p:cNvPr id="10" name="TextBox 9"/>
-          <p:cNvSpPr txBox="1"/>
-          <p:nvPr/>
-        </p:nvSpPr>
-        <p:spPr>
-          <a:xfrm>
-            <a:off x="777240" y="2615184"/>
-            <a:ext cx="10774375" cy="822959"/>
-          </a:xfrm>
-          <a:prstGeom prst="rect">
-            <a:avLst/>
-          </a:prstGeom>
-          <a:noFill/>
-        </p:spPr>
-        <p:txBody>
-          <a:bodyPr wrap="square">
-            <a:spAutoFit/>
-          </a:bodyPr>
-          <a:lstStyle/>
-          <a:p>
-            <a:r>
-              <a:rPr sz="1200" b="1" i="0">
-                <a:solidFill>
-                  <a:srgbClr val="FFD000"/>
-                </a:solidFill>
-                <a:latin typeface="Calibri"/>
-              </a:rPr>
-              <a:t>Aclaración</a:t>
-            </a:r>
-          </a:p>
-          <a:p>
-            <a:pPr>
-              <a:spcBef>
-                <a:spcPts val="400"/>
-              </a:spcBef>
-            </a:pPr>
-            <a:r>
-              <a:rPr sz="1400" b="0" i="0">
-                <a:solidFill>
-                  <a:srgbClr val="333333"/>
-                </a:solidFill>
-                <a:latin typeface="Calibri"/>
-              </a:rPr>
-              <a:t>Enunciado completo: Clases/Proyecto Integrador/ (VetCare).</a:t>
-            </a:r>
-          </a:p>
-        </p:txBody>
-      </p:sp>
-      <p:sp>
-        <p:nvSpPr>
-          <p:cNvPr id="11" name="Rounded Rectangle 10"/>
-          <p:cNvSpPr/>
-          <p:nvPr/>
-        </p:nvSpPr>
-        <p:spPr>
-          <a:xfrm>
-            <a:off x="457200" y="3694176"/>
-            <a:ext cx="11277295" cy="1051560"/>
-          </a:xfrm>
-          <a:prstGeom prst="roundRect">
-            <a:avLst>
-              <a:gd name="adj" fmla="val 12000"/>
-            </a:avLst>
-          </a:prstGeom>
-          <a:solidFill>
-            <a:srgbClr val="FBE4E4"/>
-          </a:solidFill>
-          <a:ln>
-            <a:noFill/>
-          </a:ln>
-        </p:spPr>
-        <p:style>
-          <a:lnRef idx="1">
-            <a:schemeClr val="accent1"/>
-          </a:lnRef>
-          <a:fillRef idx="3">
-            <a:schemeClr val="accent1"/>
-          </a:fillRef>
-          <a:effectRef idx="2">
-            <a:schemeClr val="accent1"/>
-          </a:effectRef>
-          <a:fontRef idx="minor">
-            <a:schemeClr val="lt1"/>
-          </a:fontRef>
-        </p:style>
-        <p:txBody>
-          <a:bodyPr rtlCol="0" anchor="ctr"/>
-          <a:lstStyle/>
-          <a:p>
-            <a:pPr algn="ctr"/>
-          </a:p>
-        </p:txBody>
-      </p:sp>
-      <p:sp>
-        <p:nvSpPr>
-          <p:cNvPr id="12" name="Rectangle 11"/>
-          <p:cNvSpPr/>
-          <p:nvPr/>
-        </p:nvSpPr>
-        <p:spPr>
-          <a:xfrm>
-            <a:off x="457200" y="3694176"/>
-            <a:ext cx="128016" cy="1051560"/>
-          </a:xfrm>
-          <a:prstGeom prst="rect">
-            <a:avLst/>
-          </a:prstGeom>
-          <a:solidFill>
-            <a:srgbClr val="A02030"/>
-          </a:solidFill>
-          <a:ln>
-            <a:noFill/>
-          </a:ln>
-        </p:spPr>
-        <p:style>
-          <a:lnRef idx="1">
-            <a:schemeClr val="accent1"/>
-          </a:lnRef>
-          <a:fillRef idx="3">
-            <a:schemeClr val="accent1"/>
-          </a:fillRef>
-          <a:effectRef idx="2">
-            <a:schemeClr val="accent1"/>
-          </a:effectRef>
-          <a:fontRef idx="minor">
-            <a:schemeClr val="lt1"/>
-          </a:fontRef>
-        </p:style>
-        <p:txBody>
-          <a:bodyPr rtlCol="0" anchor="ctr"/>
-          <a:lstStyle/>
-          <a:p>
-            <a:pPr algn="ctr"/>
-          </a:p>
-        </p:txBody>
-      </p:sp>
-      <p:sp>
-        <p:nvSpPr>
-          <p:cNvPr id="13" name="TextBox 12"/>
-          <p:cNvSpPr txBox="1"/>
-          <p:nvPr/>
-        </p:nvSpPr>
-        <p:spPr>
-          <a:xfrm>
-            <a:off x="777240" y="3831336"/>
-            <a:ext cx="10774375" cy="822959"/>
-          </a:xfrm>
-          <a:prstGeom prst="rect">
-            <a:avLst/>
-          </a:prstGeom>
-          <a:noFill/>
-        </p:spPr>
-        <p:txBody>
-          <a:bodyPr wrap="square">
-            <a:spAutoFit/>
-          </a:bodyPr>
-          <a:lstStyle/>
-          <a:p>
-            <a:r>
-              <a:rPr sz="1200" b="1" i="0">
-                <a:solidFill>
-                  <a:srgbClr val="A02030"/>
-                </a:solidFill>
-                <a:latin typeface="Calibri"/>
-              </a:rPr>
-              <a:t>Atención</a:t>
-            </a:r>
-          </a:p>
-          <a:p>
-            <a:pPr>
-              <a:spcBef>
-                <a:spcPts val="400"/>
-              </a:spcBef>
-            </a:pPr>
-            <a:r>
-              <a:rPr sz="1400" b="0" i="0">
-                <a:solidFill>
-                  <a:srgbClr val="333333"/>
-                </a:solidFill>
-                <a:latin typeface="Calibri"/>
-              </a:rPr>
-              <a:t>Entrega del taller, si el docente lo asigna · en la fecha que indique el docente.</a:t>
-            </a:r>
-          </a:p>
-        </p:txBody>
-      </p:sp>
-      <p:sp>
-        <p:nvSpPr>
-          <p:cNvPr id="14" name="TextBox 13"/>
-          <p:cNvSpPr txBox="1"/>
-          <p:nvPr/>
-        </p:nvSpPr>
-        <p:spPr>
-          <a:xfrm>
-            <a:off x="11185855" y="6473952"/>
-            <a:ext cx="640080" cy="274320"/>
-          </a:xfrm>
-          <a:prstGeom prst="rect">
-            <a:avLst/>
-          </a:prstGeom>
-          <a:noFill/>
-        </p:spPr>
-        <p:txBody>
-          <a:bodyPr wrap="square">
-            <a:spAutoFit/>
-          </a:bodyPr>
-          <a:lstStyle/>
-          <a:p>
-            <a:pPr algn="r"/>
-            <a:r>
-              <a:rPr sz="1100" b="0" i="0">
-                <a:solidFill>
-                  <a:srgbClr val="666666"/>
-                </a:solidFill>
-                <a:latin typeface="Calibri"/>
-              </a:rPr>
-              <a:t>22</a:t>
-            </a:r>
-          </a:p>
-        </p:txBody>
-      </p:sp>
-    </p:spTree>
-  </p:cSld>
-  <p:clrMapOvr>
-    <a:masterClrMapping/>
-  </p:clrMapOvr>
-</p:sld>
-</file>
-
-<file path=ppt/slides/slide23.xml><?xml version="1.0" encoding="utf-8"?>
 <p:sld xmlns:a="http://schemas.openxmlformats.org/drawingml/2006/main" xmlns:p="http://schemas.openxmlformats.org/presentationml/2006/main" xmlns:r="http://schemas.openxmlformats.org/officeDocument/2006/relationships">
   <p:cSld>
     <p:bg>

--- a/Seminario de Sistemas/Clases/Clase 13 - Diseño de interfaces/Presentacion.pptx
+++ b/Seminario de Sistemas/Clases/Clase 13 - Diseño de interfaces/Presentacion.pptx
@@ -26,6 +26,8 @@
     <p:sldId id="274" r:id="rId25"/>
     <p:sldId id="275" r:id="rId26"/>
     <p:sldId id="276" r:id="rId27"/>
+    <p:sldId id="277" r:id="rId28"/>
+    <p:sldId id="278" r:id="rId29"/>
   </p:sldIdLst>
   <p:sldSz cx="12191695" cy="6858000" type="screen4x3"/>
   <p:notesSz cx="6858000" cy="9144000"/>
@@ -4178,7 +4180,7 @@
                 </a:solidFill>
                 <a:latin typeface="Calibri"/>
               </a:rPr>
-              <a:t>Flujo de tarea de VetCare en Mermaid: registrar mascota y buscar expediente con caminos alternos</a:t>
+              <a:t>El mapa de navegacion del prototipo</a:t>
             </a:r>
           </a:p>
         </p:txBody>
@@ -4192,7 +4194,7 @@
         <p:spPr>
           <a:xfrm>
             <a:off x="457200" y="1261872"/>
-            <a:ext cx="11277295" cy="4773168"/>
+            <a:ext cx="11277295" cy="5093208"/>
           </a:xfrm>
           <a:prstGeom prst="roundRect">
             <a:avLst>
@@ -4312,7 +4314,7 @@
         <p:spPr>
           <a:xfrm>
             <a:off x="777240" y="1719072"/>
-            <a:ext cx="10637215" cy="4133087"/>
+            <a:ext cx="10637215" cy="4453128"/>
           </a:xfrm>
           <a:prstGeom prst="rect">
             <a:avLst/>
@@ -4337,7 +4339,7 @@
                 </a:solidFill>
                 <a:latin typeface="Calibri"/>
               </a:rPr>
-              <a:t>flowchart TD</a:t>
+              <a:t>flowchart LR</a:t>
             </a:r>
           </a:p>
           <a:p>
@@ -4353,7 +4355,7 @@
                 </a:solidFill>
                 <a:latin typeface="Calibri"/>
               </a:rPr>
-              <a:t>  A[Recepcion: llega el dueño con su mascota] --&gt; B{Dueño ya registrado?}</a:t>
+              <a:t>  login[Ingreso] --&gt; menu[Menu principal]</a:t>
             </a:r>
           </a:p>
           <a:p>
@@ -4369,7 +4371,7 @@
                 </a:solidFill>
                 <a:latin typeface="Calibri"/>
               </a:rPr>
-              <a:t>  B -- No --&gt; C[Pantalla Registrar dueño]</a:t>
+              <a:t>  menu --&gt; regm[Registrar mascota]</a:t>
             </a:r>
           </a:p>
           <a:p>
@@ -4385,7 +4387,7 @@
                 </a:solidFill>
                 <a:latin typeface="Calibri"/>
               </a:rPr>
-              <a:t>  B -- Si --&gt; D[Pantalla Registrar mascota]</a:t>
+              <a:t>  menu --&gt; busc[Buscar expediente]</a:t>
             </a:r>
           </a:p>
           <a:p>
@@ -4401,7 +4403,7 @@
                 </a:solidFill>
                 <a:latin typeface="Calibri"/>
               </a:rPr>
-              <a:t>  C --&gt; D</a:t>
+              <a:t>  menu --&gt; agen[Agendar cita]</a:t>
             </a:r>
           </a:p>
           <a:p>
@@ -4417,7 +4419,7 @@
                 </a:solidFill>
                 <a:latin typeface="Calibri"/>
               </a:rPr>
-              <a:t>  D --&gt; E{Campos obligatorios completos?}</a:t>
+              <a:t/>
             </a:r>
           </a:p>
           <a:p>
@@ -4433,7 +4435,7 @@
                 </a:solidFill>
                 <a:latin typeface="Calibri"/>
               </a:rPr>
-              <a:t>  E -- No --&gt; F[Guardar deshabilitado + ayuda en el campo faltante]</a:t>
+              <a:t>  regm --&gt;|guardar| menu</a:t>
             </a:r>
           </a:p>
           <a:p>
@@ -4449,7 +4451,7 @@
                 </a:solidFill>
                 <a:latin typeface="Calibri"/>
               </a:rPr>
-              <a:t>  F --&gt; D</a:t>
+              <a:t>  regm --&gt;|cancelar| menu</a:t>
             </a:r>
           </a:p>
           <a:p>
@@ -4465,7 +4467,7 @@
                 </a:solidFill>
                 <a:latin typeface="Calibri"/>
               </a:rPr>
-              <a:t>  E -- Si --&gt; G[Confirmacion: Ficha guardada, codigo M-0421]</a:t>
+              <a:t>  busc --&gt;|1 resultado| det[Detalle del expediente]</a:t>
             </a:r>
           </a:p>
           <a:p>
@@ -4481,7 +4483,7 @@
                 </a:solidFill>
                 <a:latin typeface="Calibri"/>
               </a:rPr>
-              <a:t>  G --&gt; H[Pantalla Buscar expediente]</a:t>
+              <a:t>  busc --&gt;|varios| lista[Lista de resultados] --&gt; det</a:t>
             </a:r>
           </a:p>
           <a:p>
@@ -4497,7 +4499,7 @@
                 </a:solidFill>
                 <a:latin typeface="Calibri"/>
               </a:rPr>
-              <a:t>  H --&gt; I{Cuantos resultados?}</a:t>
+              <a:t>  busc --&gt;|ninguno| vacio[Estado vacio&lt;br/&gt;con accion sugerida]</a:t>
             </a:r>
           </a:p>
           <a:p>
@@ -4513,7 +4515,7 @@
                 </a:solidFill>
                 <a:latin typeface="Calibri"/>
               </a:rPr>
-              <a:t>  I -- Cero --&gt; J[Mensaje sin resultados + Buscar por otro criterio]</a:t>
+              <a:t/>
             </a:r>
           </a:p>
           <a:p>
@@ -4529,7 +4531,7 @@
                 </a:solidFill>
                 <a:latin typeface="Calibri"/>
               </a:rPr>
-              <a:t>  I -- Varios --&gt; K[Lista con especie, edad y dueño para desambiguar]</a:t>
+              <a:t>%% Los tres caminos de una busqueda —uno, varios, ninguno— son lo que</a:t>
             </a:r>
           </a:p>
           <a:p>
@@ -4545,7 +4547,7 @@
                 </a:solidFill>
                 <a:latin typeface="Calibri"/>
               </a:rPr>
-              <a:t>  I -- Uno --&gt; L[Ficha del paciente]</a:t>
+              <a:t>%% separa un wireframe de un dibujo. El «ninguno» es el que se olvida.</a:t>
             </a:r>
           </a:p>
         </p:txBody>
@@ -4553,41 +4555,6 @@
       <p:sp>
         <p:nvSpPr>
           <p:cNvPr id="9" name="TextBox 8"/>
-          <p:cNvSpPr txBox="1"/>
-          <p:nvPr/>
-        </p:nvSpPr>
-        <p:spPr>
-          <a:xfrm>
-            <a:off x="457200" y="6080760"/>
-            <a:ext cx="11277295" cy="320040"/>
-          </a:xfrm>
-          <a:prstGeom prst="rect">
-            <a:avLst/>
-          </a:prstGeom>
-          <a:noFill/>
-        </p:spPr>
-        <p:txBody>
-          <a:bodyPr wrap="square">
-            <a:spAutoFit/>
-          </a:bodyPr>
-          <a:lstStyle/>
-          <a:p>
-            <a:pPr algn="ctr"/>
-            <a:r>
-              <a:rPr sz="1200" b="0" i="1">
-                <a:solidFill>
-                  <a:srgbClr val="666666"/>
-                </a:solidFill>
-                <a:latin typeface="Calibri"/>
-              </a:rPr>
-              <a:t>La interfaz no son pantallas sueltas: es un camino con desvios, y los desvios son los que hay que diseñar.</a:t>
-            </a:r>
-          </a:p>
-        </p:txBody>
-      </p:sp>
-      <p:sp>
-        <p:nvSpPr>
-          <p:cNvPr id="10" name="TextBox 9"/>
           <p:cNvSpPr txBox="1"/>
           <p:nvPr/>
         </p:nvSpPr>
@@ -4761,21 +4728,141 @@
                 </a:solidFill>
                 <a:latin typeface="Calibri"/>
               </a:rPr>
-              <a:t>Demo del dia</a:t>
-            </a:r>
-          </a:p>
-        </p:txBody>
-      </p:sp>
-      <p:sp>
-        <p:nvSpPr>
-          <p:cNvPr id="5" name="TextBox 4"/>
+              <a:t>La tabla de anotaciones del wireframe</a:t>
+            </a:r>
+          </a:p>
+        </p:txBody>
+      </p:sp>
+      <p:sp>
+        <p:nvSpPr>
+          <p:cNvPr id="5" name="Rounded Rectangle 4"/>
+          <p:cNvSpPr/>
+          <p:nvPr/>
+        </p:nvSpPr>
+        <p:spPr>
+          <a:xfrm>
+            <a:off x="457200" y="1261872"/>
+            <a:ext cx="11277295" cy="5093208"/>
+          </a:xfrm>
+          <a:prstGeom prst="roundRect">
+            <a:avLst>
+              <a:gd name="adj" fmla="val 12000"/>
+            </a:avLst>
+          </a:prstGeom>
+          <a:solidFill>
+            <a:srgbClr val="1E2A38"/>
+          </a:solidFill>
+          <a:ln>
+            <a:noFill/>
+          </a:ln>
+        </p:spPr>
+        <p:style>
+          <a:lnRef idx="1">
+            <a:schemeClr val="accent1"/>
+          </a:lnRef>
+          <a:fillRef idx="3">
+            <a:schemeClr val="accent1"/>
+          </a:fillRef>
+          <a:effectRef idx="2">
+            <a:schemeClr val="accent1"/>
+          </a:effectRef>
+          <a:fontRef idx="minor">
+            <a:schemeClr val="lt1"/>
+          </a:fontRef>
+        </p:style>
+        <p:txBody>
+          <a:bodyPr rtlCol="0" anchor="ctr"/>
+          <a:lstStyle/>
+          <a:p>
+            <a:pPr algn="ctr"/>
+          </a:p>
+        </p:txBody>
+      </p:sp>
+      <p:sp>
+        <p:nvSpPr>
+          <p:cNvPr id="6" name="Rectangle 5"/>
+          <p:cNvSpPr/>
+          <p:nvPr/>
+        </p:nvSpPr>
+        <p:spPr>
+          <a:xfrm>
+            <a:off x="457200" y="1261872"/>
+            <a:ext cx="11277295" cy="320040"/>
+          </a:xfrm>
+          <a:prstGeom prst="rect">
+            <a:avLst/>
+          </a:prstGeom>
+          <a:solidFill>
+            <a:srgbClr val="095292"/>
+          </a:solidFill>
+          <a:ln>
+            <a:noFill/>
+          </a:ln>
+        </p:spPr>
+        <p:style>
+          <a:lnRef idx="1">
+            <a:schemeClr val="accent1"/>
+          </a:lnRef>
+          <a:fillRef idx="3">
+            <a:schemeClr val="accent1"/>
+          </a:fillRef>
+          <a:effectRef idx="2">
+            <a:schemeClr val="accent1"/>
+          </a:effectRef>
+          <a:fontRef idx="minor">
+            <a:schemeClr val="lt1"/>
+          </a:fontRef>
+        </p:style>
+        <p:txBody>
+          <a:bodyPr rtlCol="0" anchor="ctr"/>
+          <a:lstStyle/>
+          <a:p>
+            <a:pPr algn="ctr"/>
+          </a:p>
+        </p:txBody>
+      </p:sp>
+      <p:sp>
+        <p:nvSpPr>
+          <p:cNvPr id="7" name="TextBox 6"/>
           <p:cNvSpPr txBox="1"/>
           <p:nvPr/>
         </p:nvSpPr>
         <p:spPr>
           <a:xfrm>
-            <a:off x="457200" y="1170432"/>
-            <a:ext cx="11277295" cy="5230368"/>
+            <a:off x="685800" y="1307592"/>
+            <a:ext cx="10820095" cy="256032"/>
+          </a:xfrm>
+          <a:prstGeom prst="rect">
+            <a:avLst/>
+          </a:prstGeom>
+          <a:noFill/>
+        </p:spPr>
+        <p:txBody>
+          <a:bodyPr wrap="square" anchor="ctr"/>
+          <a:lstStyle/>
+          <a:p>
+            <a:r>
+              <a:rPr sz="1000" b="1" i="0">
+                <a:solidFill>
+                  <a:srgbClr val="269CCB"/>
+                </a:solidFill>
+                <a:latin typeface="Calibri"/>
+              </a:rPr>
+              <a:t>● ● ●</a:t>
+            </a:r>
+          </a:p>
+        </p:txBody>
+      </p:sp>
+      <p:sp>
+        <p:nvSpPr>
+          <p:cNvPr id="8" name="TextBox 7"/>
+          <p:cNvSpPr txBox="1"/>
+          <p:nvPr/>
+        </p:nvSpPr>
+        <p:spPr>
+          <a:xfrm>
+            <a:off x="777240" y="1719072"/>
+            <a:ext cx="10637215" cy="4453128"/>
           </a:xfrm>
           <a:prstGeom prst="rect">
             <a:avLst/>
@@ -4790,92 +4877,168 @@
           <a:p>
             <a:pPr>
               <a:spcAft>
-                <a:spcPts val="800"/>
+                <a:spcPts val="400"/>
               </a:spcAft>
             </a:pPr>
             <a:r>
-              <a:rPr sz="2000" b="0" i="0">
-                <a:solidFill>
-                  <a:srgbClr val="333333"/>
-                </a:solidFill>
-                <a:latin typeface="Calibri"/>
-              </a:rPr>
-              <a:t>–   </a:t>
-            </a:r>
-            <a:r>
-              <a:rPr sz="2000" b="1" i="0">
-                <a:solidFill>
-                  <a:srgbClr val="333333"/>
-                </a:solidFill>
-                <a:latin typeface="Calibri"/>
-              </a:rPr>
-              <a:t>Herramienta:</a:t>
-            </a:r>
-            <a:r>
-              <a:rPr sz="2000" b="0" i="0">
-                <a:solidFill>
-                  <a:srgbClr val="333333"/>
-                </a:solidFill>
-                <a:latin typeface="Calibri"/>
-              </a:rPr>
-              <a:t> Figma o Penpot · Excalidraw · Google Docs</a:t>
+              <a:rPr sz="1400" b="0" i="0">
+                <a:solidFill>
+                  <a:srgbClr val="FFFFFF"/>
+                </a:solidFill>
+                <a:latin typeface="Calibri"/>
+              </a:rPr>
+              <a:t>| Campo de la pantalla | RF que lo exige | Atributo de la clase  | Validacion        |</a:t>
             </a:r>
           </a:p>
           <a:p>
             <a:pPr>
               <a:spcAft>
-                <a:spcPts val="800"/>
+                <a:spcPts val="400"/>
               </a:spcAft>
             </a:pPr>
             <a:r>
-              <a:rPr sz="2000" b="0" i="0">
-                <a:solidFill>
-                  <a:srgbClr val="333333"/>
-                </a:solidFill>
-                <a:latin typeface="Calibri"/>
-              </a:rPr>
-              <a:t>–   </a:t>
-            </a:r>
-            <a:r>
-              <a:rPr sz="2000" b="1" i="0">
-                <a:solidFill>
-                  <a:srgbClr val="333333"/>
-                </a:solidFill>
-                <a:latin typeface="Calibri"/>
-              </a:rPr>
-              <a:t>Demo:</a:t>
-            </a:r>
-            <a:r>
-              <a:rPr sz="2000" b="0" i="0">
-                <a:solidFill>
-                  <a:srgbClr val="333333"/>
-                </a:solidFill>
-                <a:latin typeface="Calibri"/>
-              </a:rPr>
-              <a:t> El docente dibuja en vivo el wireframe de Registrar mascota en Penpot, le pone tres anotaciones numeradas y lo conecta con Buscar expediente para que la clase vea en la misma pantalla la diferencia entre wireframe, mockup y prototipo.</a:t>
+              <a:rPr sz="1400" b="0" i="0">
+                <a:solidFill>
+                  <a:srgbClr val="FFFFFF"/>
+                </a:solidFill>
+                <a:latin typeface="Calibri"/>
+              </a:rPr>
+              <a:t>|----------------------|-----------------|-----------------------|-------------------|</a:t>
             </a:r>
           </a:p>
           <a:p>
             <a:pPr>
               <a:spcAft>
-                <a:spcPts val="800"/>
+                <a:spcPts val="400"/>
               </a:spcAft>
             </a:pPr>
             <a:r>
-              <a:rPr sz="2000" b="0" i="0">
-                <a:solidFill>
-                  <a:srgbClr val="333333"/>
-                </a:solidFill>
-                <a:latin typeface="Calibri"/>
-              </a:rPr>
-              <a:t>–   Mismo dominio VetCare — no otro ejemplo. Aqui se diseña, no se programa.</a:t>
-            </a:r>
-          </a:p>
-        </p:txBody>
-      </p:sp>
-      <p:sp>
-        <p:nvSpPr>
-          <p:cNvPr id="6" name="TextBox 5"/>
+              <a:rPr sz="1400" b="0" i="0">
+                <a:solidFill>
+                  <a:srgbClr val="FFFFFF"/>
+                </a:solidFill>
+                <a:latin typeface="Calibri"/>
+              </a:rPr>
+              <a:t>| Nombre               | RF-01           | Mascota.nombre        | obligatorio       |</a:t>
+            </a:r>
+          </a:p>
+          <a:p>
+            <a:pPr>
+              <a:spcAft>
+                <a:spcPts val="400"/>
+              </a:spcAft>
+            </a:pPr>
+            <a:r>
+              <a:rPr sz="1400" b="0" i="0">
+                <a:solidFill>
+                  <a:srgbClr val="FFFFFF"/>
+                </a:solidFill>
+                <a:latin typeface="Calibri"/>
+              </a:rPr>
+              <a:t>| Especie              | RF-01           | Mascota.especie       | lista cerrada     |</a:t>
+            </a:r>
+          </a:p>
+          <a:p>
+            <a:pPr>
+              <a:spcAft>
+                <a:spcPts val="400"/>
+              </a:spcAft>
+            </a:pPr>
+            <a:r>
+              <a:rPr sz="1400" b="0" i="0">
+                <a:solidFill>
+                  <a:srgbClr val="FFFFFF"/>
+                </a:solidFill>
+                <a:latin typeface="Calibri"/>
+              </a:rPr>
+              <a:t>| Fecha de nacimiento  | RF-02           | Mascota.fechaNac      | no futura         |</a:t>
+            </a:r>
+          </a:p>
+          <a:p>
+            <a:pPr>
+              <a:spcAft>
+                <a:spcPts val="400"/>
+              </a:spcAft>
+            </a:pPr>
+            <a:r>
+              <a:rPr sz="1400" b="0" i="0">
+                <a:solidFill>
+                  <a:srgbClr val="FFFFFF"/>
+                </a:solidFill>
+                <a:latin typeface="Calibri"/>
+              </a:rPr>
+              <a:t>| Dueno                | RF-01           | Mascota.idDueno (FK)  | debe existir      |</a:t>
+            </a:r>
+          </a:p>
+          <a:p>
+            <a:pPr>
+              <a:spcAft>
+                <a:spcPts val="400"/>
+              </a:spcAft>
+            </a:pPr>
+            <a:r>
+              <a:rPr sz="1400" b="0" i="0">
+                <a:solidFill>
+                  <a:srgbClr val="FFFFFF"/>
+                </a:solidFill>
+                <a:latin typeface="Calibri"/>
+              </a:rPr>
+              <a:t/>
+            </a:r>
+          </a:p>
+          <a:p>
+            <a:pPr>
+              <a:spcAft>
+                <a:spcPts val="400"/>
+              </a:spcAft>
+            </a:pPr>
+            <a:r>
+              <a:rPr sz="1400" b="0" i="0">
+                <a:solidFill>
+                  <a:srgbClr val="FFFFFF"/>
+                </a:solidFill>
+                <a:latin typeface="Calibri"/>
+              </a:rPr>
+              <a:t>-- Un campo sin RF que lo exija es un campo que nadie pidio: se quita o</a:t>
+            </a:r>
+          </a:p>
+          <a:p>
+            <a:pPr>
+              <a:spcAft>
+                <a:spcPts val="400"/>
+              </a:spcAft>
+            </a:pPr>
+            <a:r>
+              <a:rPr sz="1400" b="0" i="0">
+                <a:solidFill>
+                  <a:srgbClr val="FFFFFF"/>
+                </a:solidFill>
+                <a:latin typeface="Calibri"/>
+              </a:rPr>
+              <a:t>-- se agrega el requisito. Un atributo de la clase sin campo en ninguna</a:t>
+            </a:r>
+          </a:p>
+          <a:p>
+            <a:pPr>
+              <a:spcAft>
+                <a:spcPts val="400"/>
+              </a:spcAft>
+            </a:pPr>
+            <a:r>
+              <a:rPr sz="1400" b="0" i="0">
+                <a:solidFill>
+                  <a:srgbClr val="FFFFFF"/>
+                </a:solidFill>
+                <a:latin typeface="Calibri"/>
+              </a:rPr>
+              <a:t>-- pantalla es un dato que nadie puede ingresar.</a:t>
+            </a:r>
+          </a:p>
+        </p:txBody>
+      </p:sp>
+      <p:sp>
+        <p:nvSpPr>
+          <p:cNvPr id="9" name="TextBox 8"/>
           <p:cNvSpPr txBox="1"/>
           <p:nvPr/>
         </p:nvSpPr>
@@ -4943,7 +5106,7 @@
         <p:spPr>
           <a:xfrm>
             <a:off x="0" y="0"/>
-            <a:ext cx="12191695" cy="1170432"/>
+            <a:ext cx="12191695" cy="960120"/>
           </a:xfrm>
           <a:prstGeom prst="rect">
             <a:avLst/>
@@ -4985,7 +5148,7 @@
         </p:nvSpPr>
         <p:spPr>
           <a:xfrm>
-            <a:off x="0" y="1170432"/>
+            <a:off x="0" y="960120"/>
             <a:ext cx="12191695" cy="41148"/>
           </a:xfrm>
           <a:prstGeom prst="rect">
@@ -5029,7 +5192,7 @@
         <p:spPr>
           <a:xfrm>
             <a:off x="457200" y="164592"/>
-            <a:ext cx="11277295" cy="384048"/>
+            <a:ext cx="11277295" cy="502920"/>
           </a:xfrm>
           <a:prstGeom prst="rect">
             <a:avLst/>
@@ -5049,55 +5212,21 @@
                 </a:solidFill>
                 <a:latin typeface="Calibri"/>
               </a:rPr>
-              <a:t>Herramientas de hoy</a:t>
-            </a:r>
-          </a:p>
-        </p:txBody>
-      </p:sp>
-      <p:sp>
-        <p:nvSpPr>
-          <p:cNvPr id="5" name="TextBox 4"/>
-          <p:cNvSpPr txBox="1"/>
-          <p:nvPr/>
-        </p:nvSpPr>
-        <p:spPr>
-          <a:xfrm>
-            <a:off x="457200" y="566928"/>
-            <a:ext cx="11277295" cy="411480"/>
-          </a:xfrm>
-          <a:prstGeom prst="rect">
-            <a:avLst/>
-          </a:prstGeom>
-          <a:noFill/>
-        </p:spPr>
-        <p:txBody>
-          <a:bodyPr wrap="square">
-            <a:spAutoFit/>
-          </a:bodyPr>
-          <a:lstStyle/>
-          <a:p>
-            <a:r>
-              <a:rPr sz="1400" b="0" i="0">
-                <a:solidFill>
-                  <a:srgbClr val="B8D8EE"/>
-                </a:solidFill>
-                <a:latin typeface="Calibri"/>
-              </a:rPr>
-              <a:t>Gratis · funcionan en el navegador</a:t>
-            </a:r>
-          </a:p>
-        </p:txBody>
-      </p:sp>
-      <p:sp>
-        <p:nvSpPr>
-          <p:cNvPr id="6" name="Rounded Rectangle 5"/>
+              <a:t>Flujo de tarea de VetCare en Mermaid: registrar mascota y buscar expediente con caminos alternos</a:t>
+            </a:r>
+          </a:p>
+        </p:txBody>
+      </p:sp>
+      <p:sp>
+        <p:nvSpPr>
+          <p:cNvPr id="5" name="Rounded Rectangle 4"/>
           <p:cNvSpPr/>
           <p:nvPr/>
         </p:nvSpPr>
         <p:spPr>
           <a:xfrm>
-            <a:off x="457200" y="1591056"/>
-            <a:ext cx="3624986" cy="2299716"/>
+            <a:off x="457200" y="1261872"/>
+            <a:ext cx="11277295" cy="4773168"/>
           </a:xfrm>
           <a:prstGeom prst="roundRect">
             <a:avLst>
@@ -5105,7 +5234,7 @@
             </a:avLst>
           </a:prstGeom>
           <a:solidFill>
-            <a:srgbClr val="F2F2F2"/>
+            <a:srgbClr val="1E2A38"/>
           </a:solidFill>
           <a:ln>
             <a:noFill/>
@@ -5135,14 +5264,14 @@
       </p:sp>
       <p:sp>
         <p:nvSpPr>
-          <p:cNvPr id="7" name="Rectangle 6"/>
+          <p:cNvPr id="6" name="Rectangle 5"/>
           <p:cNvSpPr/>
           <p:nvPr/>
         </p:nvSpPr>
         <p:spPr>
           <a:xfrm>
-            <a:off x="457200" y="1591056"/>
-            <a:ext cx="3624986" cy="64008"/>
+            <a:off x="457200" y="1261872"/>
+            <a:ext cx="11277295" cy="320040"/>
           </a:xfrm>
           <a:prstGeom prst="rect">
             <a:avLst/>
@@ -5178,1047 +5307,321 @@
       </p:sp>
       <p:sp>
         <p:nvSpPr>
-          <p:cNvPr id="8" name="Rectangle 7"/>
-          <p:cNvSpPr/>
-          <p:nvPr/>
-        </p:nvSpPr>
-        <p:spPr>
-          <a:xfrm>
-            <a:off x="457200" y="1655064"/>
-            <a:ext cx="3624986" cy="27432"/>
-          </a:xfrm>
-          <a:prstGeom prst="rect">
-            <a:avLst/>
-          </a:prstGeom>
-          <a:solidFill>
-            <a:srgbClr val="FFD000"/>
-          </a:solidFill>
-          <a:ln>
-            <a:noFill/>
-          </a:ln>
-        </p:spPr>
-        <p:style>
-          <a:lnRef idx="1">
-            <a:schemeClr val="accent1"/>
-          </a:lnRef>
-          <a:fillRef idx="3">
-            <a:schemeClr val="accent1"/>
-          </a:fillRef>
-          <a:effectRef idx="2">
-            <a:schemeClr val="accent1"/>
-          </a:effectRef>
-          <a:fontRef idx="minor">
-            <a:schemeClr val="lt1"/>
-          </a:fontRef>
-        </p:style>
-        <p:txBody>
-          <a:bodyPr rtlCol="0" anchor="ctr"/>
+          <p:cNvPr id="7" name="TextBox 6"/>
+          <p:cNvSpPr txBox="1"/>
+          <p:nvPr/>
+        </p:nvSpPr>
+        <p:spPr>
+          <a:xfrm>
+            <a:off x="685800" y="1307592"/>
+            <a:ext cx="10820095" cy="256032"/>
+          </a:xfrm>
+          <a:prstGeom prst="rect">
+            <a:avLst/>
+          </a:prstGeom>
+          <a:noFill/>
+        </p:spPr>
+        <p:txBody>
+          <a:bodyPr wrap="square" anchor="ctr"/>
+          <a:lstStyle/>
+          <a:p>
+            <a:r>
+              <a:rPr sz="1000" b="1" i="0">
+                <a:solidFill>
+                  <a:srgbClr val="269CCB"/>
+                </a:solidFill>
+                <a:latin typeface="Calibri"/>
+              </a:rPr>
+              <a:t>● ● ●</a:t>
+            </a:r>
+          </a:p>
+        </p:txBody>
+      </p:sp>
+      <p:sp>
+        <p:nvSpPr>
+          <p:cNvPr id="8" name="TextBox 7"/>
+          <p:cNvSpPr txBox="1"/>
+          <p:nvPr/>
+        </p:nvSpPr>
+        <p:spPr>
+          <a:xfrm>
+            <a:off x="777240" y="1719072"/>
+            <a:ext cx="10637215" cy="4133087"/>
+          </a:xfrm>
+          <a:prstGeom prst="rect">
+            <a:avLst/>
+          </a:prstGeom>
+          <a:noFill/>
+        </p:spPr>
+        <p:txBody>
+          <a:bodyPr wrap="square">
+            <a:spAutoFit/>
+          </a:bodyPr>
+          <a:lstStyle/>
+          <a:p>
+            <a:pPr>
+              <a:spcAft>
+                <a:spcPts val="400"/>
+              </a:spcAft>
+            </a:pPr>
+            <a:r>
+              <a:rPr sz="1400" b="0" i="0">
+                <a:solidFill>
+                  <a:srgbClr val="FFFFFF"/>
+                </a:solidFill>
+                <a:latin typeface="Calibri"/>
+              </a:rPr>
+              <a:t>flowchart TD</a:t>
+            </a:r>
+          </a:p>
+          <a:p>
+            <a:pPr>
+              <a:spcAft>
+                <a:spcPts val="400"/>
+              </a:spcAft>
+            </a:pPr>
+            <a:r>
+              <a:rPr sz="1400" b="0" i="0">
+                <a:solidFill>
+                  <a:srgbClr val="FFFFFF"/>
+                </a:solidFill>
+                <a:latin typeface="Calibri"/>
+              </a:rPr>
+              <a:t>  A[Recepcion: llega el dueño con su mascota] --&gt; B{Dueño ya registrado?}</a:t>
+            </a:r>
+          </a:p>
+          <a:p>
+            <a:pPr>
+              <a:spcAft>
+                <a:spcPts val="400"/>
+              </a:spcAft>
+            </a:pPr>
+            <a:r>
+              <a:rPr sz="1400" b="0" i="0">
+                <a:solidFill>
+                  <a:srgbClr val="FFFFFF"/>
+                </a:solidFill>
+                <a:latin typeface="Calibri"/>
+              </a:rPr>
+              <a:t>  B -- No --&gt; C[Pantalla Registrar dueño]</a:t>
+            </a:r>
+          </a:p>
+          <a:p>
+            <a:pPr>
+              <a:spcAft>
+                <a:spcPts val="400"/>
+              </a:spcAft>
+            </a:pPr>
+            <a:r>
+              <a:rPr sz="1400" b="0" i="0">
+                <a:solidFill>
+                  <a:srgbClr val="FFFFFF"/>
+                </a:solidFill>
+                <a:latin typeface="Calibri"/>
+              </a:rPr>
+              <a:t>  B -- Si --&gt; D[Pantalla Registrar mascota]</a:t>
+            </a:r>
+          </a:p>
+          <a:p>
+            <a:pPr>
+              <a:spcAft>
+                <a:spcPts val="400"/>
+              </a:spcAft>
+            </a:pPr>
+            <a:r>
+              <a:rPr sz="1400" b="0" i="0">
+                <a:solidFill>
+                  <a:srgbClr val="FFFFFF"/>
+                </a:solidFill>
+                <a:latin typeface="Calibri"/>
+              </a:rPr>
+              <a:t>  C --&gt; D</a:t>
+            </a:r>
+          </a:p>
+          <a:p>
+            <a:pPr>
+              <a:spcAft>
+                <a:spcPts val="400"/>
+              </a:spcAft>
+            </a:pPr>
+            <a:r>
+              <a:rPr sz="1400" b="0" i="0">
+                <a:solidFill>
+                  <a:srgbClr val="FFFFFF"/>
+                </a:solidFill>
+                <a:latin typeface="Calibri"/>
+              </a:rPr>
+              <a:t>  D --&gt; E{Campos obligatorios completos?}</a:t>
+            </a:r>
+          </a:p>
+          <a:p>
+            <a:pPr>
+              <a:spcAft>
+                <a:spcPts val="400"/>
+              </a:spcAft>
+            </a:pPr>
+            <a:r>
+              <a:rPr sz="1400" b="0" i="0">
+                <a:solidFill>
+                  <a:srgbClr val="FFFFFF"/>
+                </a:solidFill>
+                <a:latin typeface="Calibri"/>
+              </a:rPr>
+              <a:t>  E -- No --&gt; F[Guardar deshabilitado + ayuda en el campo faltante]</a:t>
+            </a:r>
+          </a:p>
+          <a:p>
+            <a:pPr>
+              <a:spcAft>
+                <a:spcPts val="400"/>
+              </a:spcAft>
+            </a:pPr>
+            <a:r>
+              <a:rPr sz="1400" b="0" i="0">
+                <a:solidFill>
+                  <a:srgbClr val="FFFFFF"/>
+                </a:solidFill>
+                <a:latin typeface="Calibri"/>
+              </a:rPr>
+              <a:t>  F --&gt; D</a:t>
+            </a:r>
+          </a:p>
+          <a:p>
+            <a:pPr>
+              <a:spcAft>
+                <a:spcPts val="400"/>
+              </a:spcAft>
+            </a:pPr>
+            <a:r>
+              <a:rPr sz="1400" b="0" i="0">
+                <a:solidFill>
+                  <a:srgbClr val="FFFFFF"/>
+                </a:solidFill>
+                <a:latin typeface="Calibri"/>
+              </a:rPr>
+              <a:t>  E -- Si --&gt; G[Confirmacion: Ficha guardada, codigo M-0421]</a:t>
+            </a:r>
+          </a:p>
+          <a:p>
+            <a:pPr>
+              <a:spcAft>
+                <a:spcPts val="400"/>
+              </a:spcAft>
+            </a:pPr>
+            <a:r>
+              <a:rPr sz="1400" b="0" i="0">
+                <a:solidFill>
+                  <a:srgbClr val="FFFFFF"/>
+                </a:solidFill>
+                <a:latin typeface="Calibri"/>
+              </a:rPr>
+              <a:t>  G --&gt; H[Pantalla Buscar expediente]</a:t>
+            </a:r>
+          </a:p>
+          <a:p>
+            <a:pPr>
+              <a:spcAft>
+                <a:spcPts val="400"/>
+              </a:spcAft>
+            </a:pPr>
+            <a:r>
+              <a:rPr sz="1400" b="0" i="0">
+                <a:solidFill>
+                  <a:srgbClr val="FFFFFF"/>
+                </a:solidFill>
+                <a:latin typeface="Calibri"/>
+              </a:rPr>
+              <a:t>  H --&gt; I{Cuantos resultados?}</a:t>
+            </a:r>
+          </a:p>
+          <a:p>
+            <a:pPr>
+              <a:spcAft>
+                <a:spcPts val="400"/>
+              </a:spcAft>
+            </a:pPr>
+            <a:r>
+              <a:rPr sz="1400" b="0" i="0">
+                <a:solidFill>
+                  <a:srgbClr val="FFFFFF"/>
+                </a:solidFill>
+                <a:latin typeface="Calibri"/>
+              </a:rPr>
+              <a:t>  I -- Cero --&gt; J[Mensaje sin resultados + Buscar por otro criterio]</a:t>
+            </a:r>
+          </a:p>
+          <a:p>
+            <a:pPr>
+              <a:spcAft>
+                <a:spcPts val="400"/>
+              </a:spcAft>
+            </a:pPr>
+            <a:r>
+              <a:rPr sz="1400" b="0" i="0">
+                <a:solidFill>
+                  <a:srgbClr val="FFFFFF"/>
+                </a:solidFill>
+                <a:latin typeface="Calibri"/>
+              </a:rPr>
+              <a:t>  I -- Varios --&gt; K[Lista con especie, edad y dueño para desambiguar]</a:t>
+            </a:r>
+          </a:p>
+          <a:p>
+            <a:pPr>
+              <a:spcAft>
+                <a:spcPts val="400"/>
+              </a:spcAft>
+            </a:pPr>
+            <a:r>
+              <a:rPr sz="1400" b="0" i="0">
+                <a:solidFill>
+                  <a:srgbClr val="FFFFFF"/>
+                </a:solidFill>
+                <a:latin typeface="Calibri"/>
+              </a:rPr>
+              <a:t>  I -- Uno --&gt; L[Ficha del paciente]</a:t>
+            </a:r>
+          </a:p>
+        </p:txBody>
+      </p:sp>
+      <p:sp>
+        <p:nvSpPr>
+          <p:cNvPr id="9" name="TextBox 8"/>
+          <p:cNvSpPr txBox="1"/>
+          <p:nvPr/>
+        </p:nvSpPr>
+        <p:spPr>
+          <a:xfrm>
+            <a:off x="457200" y="6080760"/>
+            <a:ext cx="11277295" cy="320040"/>
+          </a:xfrm>
+          <a:prstGeom prst="rect">
+            <a:avLst/>
+          </a:prstGeom>
+          <a:noFill/>
+        </p:spPr>
+        <p:txBody>
+          <a:bodyPr wrap="square">
+            <a:spAutoFit/>
+          </a:bodyPr>
           <a:lstStyle/>
           <a:p>
             <a:pPr algn="ctr"/>
-          </a:p>
-        </p:txBody>
-      </p:sp>
-      <p:pic>
-        <p:nvPicPr>
-          <p:cNvPr id="9" name="Picture 8" descr="excalidraw.png"/>
-          <p:cNvPicPr>
-            <a:picLocks noChangeAspect="1"/>
-          </p:cNvPicPr>
-          <p:nvPr/>
-        </p:nvPicPr>
-        <p:blipFill>
-          <a:blip r:embed="rId2"/>
-          <a:stretch>
-            <a:fillRect/>
-          </a:stretch>
-        </p:blipFill>
-        <p:spPr>
-          <a:xfrm>
-            <a:off x="1659331" y="1847087"/>
-            <a:ext cx="1220724" cy="1220724"/>
-          </a:xfrm>
-          <a:prstGeom prst="rect">
-            <a:avLst/>
-          </a:prstGeom>
-        </p:spPr>
-      </p:pic>
+            <a:r>
+              <a:rPr sz="1200" b="0" i="1">
+                <a:solidFill>
+                  <a:srgbClr val="666666"/>
+                </a:solidFill>
+                <a:latin typeface="Calibri"/>
+              </a:rPr>
+              <a:t>La interfaz no son pantallas sueltas: es un camino con desvios, y los desvios son los que hay que diseñar.</a:t>
+            </a:r>
+          </a:p>
+        </p:txBody>
+      </p:sp>
       <p:sp>
         <p:nvSpPr>
           <p:cNvPr id="10" name="TextBox 9"/>
-          <p:cNvSpPr txBox="1"/>
-          <p:nvPr/>
-        </p:nvSpPr>
-        <p:spPr>
-          <a:xfrm>
-            <a:off x="530352" y="3159251"/>
-            <a:ext cx="3478682" cy="621792"/>
-          </a:xfrm>
-          <a:prstGeom prst="rect">
-            <a:avLst/>
-          </a:prstGeom>
-          <a:noFill/>
-        </p:spPr>
-        <p:txBody>
-          <a:bodyPr wrap="square" anchor="t"/>
-          <a:lstStyle/>
-          <a:p>
-            <a:pPr algn="ctr"/>
-            <a:r>
-              <a:rPr sz="1300" b="1" i="0">
-                <a:solidFill>
-                  <a:srgbClr val="095292"/>
-                </a:solidFill>
-                <a:latin typeface="Calibri"/>
-              </a:rPr>
-              <a:t>Excalidraw</a:t>
-            </a:r>
-          </a:p>
-          <a:p>
-            <a:pPr algn="ctr">
-              <a:spcBef>
-                <a:spcPts val="200"/>
-              </a:spcBef>
-            </a:pPr>
-            <a:r>
-              <a:rPr sz="1000" b="0" i="0">
-                <a:solidFill>
-                  <a:srgbClr val="666666"/>
-                </a:solidFill>
-                <a:latin typeface="Calibri"/>
-              </a:rPr>
-              <a:t>Bocetos rapidos a mano alzada</a:t>
-            </a:r>
-          </a:p>
-        </p:txBody>
-      </p:sp>
-      <p:sp>
-        <p:nvSpPr>
-          <p:cNvPr id="11" name="Rounded Rectangle 10"/>
-          <p:cNvSpPr/>
-          <p:nvPr/>
-        </p:nvSpPr>
-        <p:spPr>
-          <a:xfrm>
-            <a:off x="4283354" y="1591056"/>
-            <a:ext cx="3624986" cy="2299716"/>
-          </a:xfrm>
-          <a:prstGeom prst="roundRect">
-            <a:avLst>
-              <a:gd name="adj" fmla="val 12000"/>
-            </a:avLst>
-          </a:prstGeom>
-          <a:solidFill>
-            <a:srgbClr val="F2F2F2"/>
-          </a:solidFill>
-          <a:ln>
-            <a:noFill/>
-          </a:ln>
-        </p:spPr>
-        <p:style>
-          <a:lnRef idx="1">
-            <a:schemeClr val="accent1"/>
-          </a:lnRef>
-          <a:fillRef idx="3">
-            <a:schemeClr val="accent1"/>
-          </a:fillRef>
-          <a:effectRef idx="2">
-            <a:schemeClr val="accent1"/>
-          </a:effectRef>
-          <a:fontRef idx="minor">
-            <a:schemeClr val="lt1"/>
-          </a:fontRef>
-        </p:style>
-        <p:txBody>
-          <a:bodyPr rtlCol="0" anchor="ctr"/>
-          <a:lstStyle/>
-          <a:p>
-            <a:pPr algn="ctr"/>
-          </a:p>
-        </p:txBody>
-      </p:sp>
-      <p:sp>
-        <p:nvSpPr>
-          <p:cNvPr id="12" name="Rectangle 11"/>
-          <p:cNvSpPr/>
-          <p:nvPr/>
-        </p:nvSpPr>
-        <p:spPr>
-          <a:xfrm>
-            <a:off x="4283354" y="1591056"/>
-            <a:ext cx="3624986" cy="64008"/>
-          </a:xfrm>
-          <a:prstGeom prst="rect">
-            <a:avLst/>
-          </a:prstGeom>
-          <a:solidFill>
-            <a:srgbClr val="095292"/>
-          </a:solidFill>
-          <a:ln>
-            <a:noFill/>
-          </a:ln>
-        </p:spPr>
-        <p:style>
-          <a:lnRef idx="1">
-            <a:schemeClr val="accent1"/>
-          </a:lnRef>
-          <a:fillRef idx="3">
-            <a:schemeClr val="accent1"/>
-          </a:fillRef>
-          <a:effectRef idx="2">
-            <a:schemeClr val="accent1"/>
-          </a:effectRef>
-          <a:fontRef idx="minor">
-            <a:schemeClr val="lt1"/>
-          </a:fontRef>
-        </p:style>
-        <p:txBody>
-          <a:bodyPr rtlCol="0" anchor="ctr"/>
-          <a:lstStyle/>
-          <a:p>
-            <a:pPr algn="ctr"/>
-          </a:p>
-        </p:txBody>
-      </p:sp>
-      <p:sp>
-        <p:nvSpPr>
-          <p:cNvPr id="13" name="Rectangle 12"/>
-          <p:cNvSpPr/>
-          <p:nvPr/>
-        </p:nvSpPr>
-        <p:spPr>
-          <a:xfrm>
-            <a:off x="4283354" y="1655064"/>
-            <a:ext cx="3624986" cy="27432"/>
-          </a:xfrm>
-          <a:prstGeom prst="rect">
-            <a:avLst/>
-          </a:prstGeom>
-          <a:solidFill>
-            <a:srgbClr val="FFD000"/>
-          </a:solidFill>
-          <a:ln>
-            <a:noFill/>
-          </a:ln>
-        </p:spPr>
-        <p:style>
-          <a:lnRef idx="1">
-            <a:schemeClr val="accent1"/>
-          </a:lnRef>
-          <a:fillRef idx="3">
-            <a:schemeClr val="accent1"/>
-          </a:fillRef>
-          <a:effectRef idx="2">
-            <a:schemeClr val="accent1"/>
-          </a:effectRef>
-          <a:fontRef idx="minor">
-            <a:schemeClr val="lt1"/>
-          </a:fontRef>
-        </p:style>
-        <p:txBody>
-          <a:bodyPr rtlCol="0" anchor="ctr"/>
-          <a:lstStyle/>
-          <a:p>
-            <a:pPr algn="ctr"/>
-          </a:p>
-        </p:txBody>
-      </p:sp>
-      <p:pic>
-        <p:nvPicPr>
-          <p:cNvPr id="14" name="Picture 13" descr="google_docs.png"/>
-          <p:cNvPicPr>
-            <a:picLocks noChangeAspect="1"/>
-          </p:cNvPicPr>
-          <p:nvPr/>
-        </p:nvPicPr>
-        <p:blipFill>
-          <a:blip r:embed="rId3"/>
-          <a:stretch>
-            <a:fillRect/>
-          </a:stretch>
-        </p:blipFill>
-        <p:spPr>
-          <a:xfrm>
-            <a:off x="5485485" y="1847087"/>
-            <a:ext cx="1220724" cy="1220724"/>
-          </a:xfrm>
-          <a:prstGeom prst="rect">
-            <a:avLst/>
-          </a:prstGeom>
-        </p:spPr>
-      </p:pic>
-      <p:sp>
-        <p:nvSpPr>
-          <p:cNvPr id="15" name="TextBox 14"/>
-          <p:cNvSpPr txBox="1"/>
-          <p:nvPr/>
-        </p:nvSpPr>
-        <p:spPr>
-          <a:xfrm>
-            <a:off x="4356506" y="3159251"/>
-            <a:ext cx="3478682" cy="621792"/>
-          </a:xfrm>
-          <a:prstGeom prst="rect">
-            <a:avLst/>
-          </a:prstGeom>
-          <a:noFill/>
-        </p:spPr>
-        <p:txBody>
-          <a:bodyPr wrap="square" anchor="t"/>
-          <a:lstStyle/>
-          <a:p>
-            <a:pPr algn="ctr"/>
-            <a:r>
-              <a:rPr sz="1300" b="1" i="0">
-                <a:solidFill>
-                  <a:srgbClr val="095292"/>
-                </a:solidFill>
-                <a:latin typeface="Calibri"/>
-              </a:rPr>
-              <a:t>google docs</a:t>
-            </a:r>
-          </a:p>
-          <a:p>
-            <a:pPr algn="ctr">
-              <a:spcBef>
-                <a:spcPts val="200"/>
-              </a:spcBef>
-            </a:pPr>
-            <a:r>
-              <a:rPr sz="1000" b="0" i="0">
-                <a:solidFill>
-                  <a:srgbClr val="666666"/>
-                </a:solidFill>
-                <a:latin typeface="Calibri"/>
-              </a:rPr>
-              <a:t>Documentos del paquete de diseño</a:t>
-            </a:r>
-          </a:p>
-        </p:txBody>
-      </p:sp>
-      <p:sp>
-        <p:nvSpPr>
-          <p:cNvPr id="16" name="Rounded Rectangle 15"/>
-          <p:cNvSpPr/>
-          <p:nvPr/>
-        </p:nvSpPr>
-        <p:spPr>
-          <a:xfrm>
-            <a:off x="8109508" y="1591056"/>
-            <a:ext cx="3624986" cy="2299716"/>
-          </a:xfrm>
-          <a:prstGeom prst="roundRect">
-            <a:avLst>
-              <a:gd name="adj" fmla="val 12000"/>
-            </a:avLst>
-          </a:prstGeom>
-          <a:solidFill>
-            <a:srgbClr val="F2F2F2"/>
-          </a:solidFill>
-          <a:ln>
-            <a:noFill/>
-          </a:ln>
-        </p:spPr>
-        <p:style>
-          <a:lnRef idx="1">
-            <a:schemeClr val="accent1"/>
-          </a:lnRef>
-          <a:fillRef idx="3">
-            <a:schemeClr val="accent1"/>
-          </a:fillRef>
-          <a:effectRef idx="2">
-            <a:schemeClr val="accent1"/>
-          </a:effectRef>
-          <a:fontRef idx="minor">
-            <a:schemeClr val="lt1"/>
-          </a:fontRef>
-        </p:style>
-        <p:txBody>
-          <a:bodyPr rtlCol="0" anchor="ctr"/>
-          <a:lstStyle/>
-          <a:p>
-            <a:pPr algn="ctr"/>
-          </a:p>
-        </p:txBody>
-      </p:sp>
-      <p:sp>
-        <p:nvSpPr>
-          <p:cNvPr id="17" name="Rectangle 16"/>
-          <p:cNvSpPr/>
-          <p:nvPr/>
-        </p:nvSpPr>
-        <p:spPr>
-          <a:xfrm>
-            <a:off x="8109508" y="1591056"/>
-            <a:ext cx="3624986" cy="64008"/>
-          </a:xfrm>
-          <a:prstGeom prst="rect">
-            <a:avLst/>
-          </a:prstGeom>
-          <a:solidFill>
-            <a:srgbClr val="095292"/>
-          </a:solidFill>
-          <a:ln>
-            <a:noFill/>
-          </a:ln>
-        </p:spPr>
-        <p:style>
-          <a:lnRef idx="1">
-            <a:schemeClr val="accent1"/>
-          </a:lnRef>
-          <a:fillRef idx="3">
-            <a:schemeClr val="accent1"/>
-          </a:fillRef>
-          <a:effectRef idx="2">
-            <a:schemeClr val="accent1"/>
-          </a:effectRef>
-          <a:fontRef idx="minor">
-            <a:schemeClr val="lt1"/>
-          </a:fontRef>
-        </p:style>
-        <p:txBody>
-          <a:bodyPr rtlCol="0" anchor="ctr"/>
-          <a:lstStyle/>
-          <a:p>
-            <a:pPr algn="ctr"/>
-          </a:p>
-        </p:txBody>
-      </p:sp>
-      <p:sp>
-        <p:nvSpPr>
-          <p:cNvPr id="18" name="Rectangle 17"/>
-          <p:cNvSpPr/>
-          <p:nvPr/>
-        </p:nvSpPr>
-        <p:spPr>
-          <a:xfrm>
-            <a:off x="8109508" y="1655064"/>
-            <a:ext cx="3624986" cy="27432"/>
-          </a:xfrm>
-          <a:prstGeom prst="rect">
-            <a:avLst/>
-          </a:prstGeom>
-          <a:solidFill>
-            <a:srgbClr val="FFD000"/>
-          </a:solidFill>
-          <a:ln>
-            <a:noFill/>
-          </a:ln>
-        </p:spPr>
-        <p:style>
-          <a:lnRef idx="1">
-            <a:schemeClr val="accent1"/>
-          </a:lnRef>
-          <a:fillRef idx="3">
-            <a:schemeClr val="accent1"/>
-          </a:fillRef>
-          <a:effectRef idx="2">
-            <a:schemeClr val="accent1"/>
-          </a:effectRef>
-          <a:fontRef idx="minor">
-            <a:schemeClr val="lt1"/>
-          </a:fontRef>
-        </p:style>
-        <p:txBody>
-          <a:bodyPr rtlCol="0" anchor="ctr"/>
-          <a:lstStyle/>
-          <a:p>
-            <a:pPr algn="ctr"/>
-          </a:p>
-        </p:txBody>
-      </p:sp>
-      <p:sp>
-        <p:nvSpPr>
-          <p:cNvPr id="19" name="Rounded Rectangle 18"/>
-          <p:cNvSpPr/>
-          <p:nvPr/>
-        </p:nvSpPr>
-        <p:spPr>
-          <a:xfrm>
-            <a:off x="9311640" y="1847087"/>
-            <a:ext cx="1220724" cy="1220724"/>
-          </a:xfrm>
-          <a:prstGeom prst="roundRect">
-            <a:avLst>
-              <a:gd name="adj" fmla="val 12000"/>
-            </a:avLst>
-          </a:prstGeom>
-          <a:solidFill>
-            <a:srgbClr val="E8F4FA"/>
-          </a:solidFill>
-          <a:ln>
-            <a:noFill/>
-          </a:ln>
-        </p:spPr>
-        <p:style>
-          <a:lnRef idx="1">
-            <a:schemeClr val="accent1"/>
-          </a:lnRef>
-          <a:fillRef idx="3">
-            <a:schemeClr val="accent1"/>
-          </a:fillRef>
-          <a:effectRef idx="2">
-            <a:schemeClr val="accent1"/>
-          </a:effectRef>
-          <a:fontRef idx="minor">
-            <a:schemeClr val="lt1"/>
-          </a:fontRef>
-        </p:style>
-        <p:txBody>
-          <a:bodyPr rtlCol="0" anchor="ctr"/>
-          <a:lstStyle/>
-          <a:p>
-            <a:pPr algn="ctr"/>
-          </a:p>
-        </p:txBody>
-      </p:sp>
-      <p:sp>
-        <p:nvSpPr>
-          <p:cNvPr id="20" name="TextBox 19"/>
-          <p:cNvSpPr txBox="1"/>
-          <p:nvPr/>
-        </p:nvSpPr>
-        <p:spPr>
-          <a:xfrm>
-            <a:off x="9311640" y="1847087"/>
-            <a:ext cx="1220724" cy="1220724"/>
-          </a:xfrm>
-          <a:prstGeom prst="rect">
-            <a:avLst/>
-          </a:prstGeom>
-          <a:noFill/>
-        </p:spPr>
-        <p:txBody>
-          <a:bodyPr wrap="square" anchor="ctr"/>
-          <a:lstStyle/>
-          <a:p>
-            <a:pPr algn="ctr"/>
-            <a:r>
-              <a:rPr sz="1600" b="1" i="0">
-                <a:solidFill>
-                  <a:srgbClr val="095292"/>
-                </a:solidFill>
-                <a:latin typeface="Calibri"/>
-              </a:rPr>
-              <a:t>F</a:t>
-            </a:r>
-          </a:p>
-        </p:txBody>
-      </p:sp>
-      <p:sp>
-        <p:nvSpPr>
-          <p:cNvPr id="21" name="TextBox 20"/>
-          <p:cNvSpPr txBox="1"/>
-          <p:nvPr/>
-        </p:nvSpPr>
-        <p:spPr>
-          <a:xfrm>
-            <a:off x="8182660" y="3159251"/>
-            <a:ext cx="3478682" cy="621792"/>
-          </a:xfrm>
-          <a:prstGeom prst="rect">
-            <a:avLst/>
-          </a:prstGeom>
-          <a:noFill/>
-        </p:spPr>
-        <p:txBody>
-          <a:bodyPr wrap="square" anchor="t"/>
-          <a:lstStyle/>
-          <a:p>
-            <a:pPr algn="ctr"/>
-            <a:r>
-              <a:rPr sz="1300" b="1" i="0">
-                <a:solidFill>
-                  <a:srgbClr val="095292"/>
-                </a:solidFill>
-                <a:latin typeface="Calibri"/>
-              </a:rPr>
-              <a:t>Figma</a:t>
-            </a:r>
-          </a:p>
-          <a:p>
-            <a:pPr algn="ctr">
-              <a:spcBef>
-                <a:spcPts val="200"/>
-              </a:spcBef>
-            </a:pPr>
-            <a:r>
-              <a:rPr sz="1000" b="0" i="0">
-                <a:solidFill>
-                  <a:srgbClr val="666666"/>
-                </a:solidFill>
-                <a:latin typeface="Calibri"/>
-              </a:rPr>
-              <a:t>Wireframes y prototipo navegable</a:t>
-            </a:r>
-          </a:p>
-        </p:txBody>
-      </p:sp>
-      <p:sp>
-        <p:nvSpPr>
-          <p:cNvPr id="22" name="Rounded Rectangle 21"/>
-          <p:cNvSpPr/>
-          <p:nvPr/>
-        </p:nvSpPr>
-        <p:spPr>
-          <a:xfrm>
-            <a:off x="2370277" y="4055364"/>
-            <a:ext cx="3624986" cy="2299716"/>
-          </a:xfrm>
-          <a:prstGeom prst="roundRect">
-            <a:avLst>
-              <a:gd name="adj" fmla="val 12000"/>
-            </a:avLst>
-          </a:prstGeom>
-          <a:solidFill>
-            <a:srgbClr val="F2F2F2"/>
-          </a:solidFill>
-          <a:ln>
-            <a:noFill/>
-          </a:ln>
-        </p:spPr>
-        <p:style>
-          <a:lnRef idx="1">
-            <a:schemeClr val="accent1"/>
-          </a:lnRef>
-          <a:fillRef idx="3">
-            <a:schemeClr val="accent1"/>
-          </a:fillRef>
-          <a:effectRef idx="2">
-            <a:schemeClr val="accent1"/>
-          </a:effectRef>
-          <a:fontRef idx="minor">
-            <a:schemeClr val="lt1"/>
-          </a:fontRef>
-        </p:style>
-        <p:txBody>
-          <a:bodyPr rtlCol="0" anchor="ctr"/>
-          <a:lstStyle/>
-          <a:p>
-            <a:pPr algn="ctr"/>
-          </a:p>
-        </p:txBody>
-      </p:sp>
-      <p:sp>
-        <p:nvSpPr>
-          <p:cNvPr id="23" name="Rectangle 22"/>
-          <p:cNvSpPr/>
-          <p:nvPr/>
-        </p:nvSpPr>
-        <p:spPr>
-          <a:xfrm>
-            <a:off x="2370277" y="4055364"/>
-            <a:ext cx="3624986" cy="64008"/>
-          </a:xfrm>
-          <a:prstGeom prst="rect">
-            <a:avLst/>
-          </a:prstGeom>
-          <a:solidFill>
-            <a:srgbClr val="095292"/>
-          </a:solidFill>
-          <a:ln>
-            <a:noFill/>
-          </a:ln>
-        </p:spPr>
-        <p:style>
-          <a:lnRef idx="1">
-            <a:schemeClr val="accent1"/>
-          </a:lnRef>
-          <a:fillRef idx="3">
-            <a:schemeClr val="accent1"/>
-          </a:fillRef>
-          <a:effectRef idx="2">
-            <a:schemeClr val="accent1"/>
-          </a:effectRef>
-          <a:fontRef idx="minor">
-            <a:schemeClr val="lt1"/>
-          </a:fontRef>
-        </p:style>
-        <p:txBody>
-          <a:bodyPr rtlCol="0" anchor="ctr"/>
-          <a:lstStyle/>
-          <a:p>
-            <a:pPr algn="ctr"/>
-          </a:p>
-        </p:txBody>
-      </p:sp>
-      <p:sp>
-        <p:nvSpPr>
-          <p:cNvPr id="24" name="Rectangle 23"/>
-          <p:cNvSpPr/>
-          <p:nvPr/>
-        </p:nvSpPr>
-        <p:spPr>
-          <a:xfrm>
-            <a:off x="2370277" y="4119372"/>
-            <a:ext cx="3624986" cy="27432"/>
-          </a:xfrm>
-          <a:prstGeom prst="rect">
-            <a:avLst/>
-          </a:prstGeom>
-          <a:solidFill>
-            <a:srgbClr val="FFD000"/>
-          </a:solidFill>
-          <a:ln>
-            <a:noFill/>
-          </a:ln>
-        </p:spPr>
-        <p:style>
-          <a:lnRef idx="1">
-            <a:schemeClr val="accent1"/>
-          </a:lnRef>
-          <a:fillRef idx="3">
-            <a:schemeClr val="accent1"/>
-          </a:fillRef>
-          <a:effectRef idx="2">
-            <a:schemeClr val="accent1"/>
-          </a:effectRef>
-          <a:fontRef idx="minor">
-            <a:schemeClr val="lt1"/>
-          </a:fontRef>
-        </p:style>
-        <p:txBody>
-          <a:bodyPr rtlCol="0" anchor="ctr"/>
-          <a:lstStyle/>
-          <a:p>
-            <a:pPr algn="ctr"/>
-          </a:p>
-        </p:txBody>
-      </p:sp>
-      <p:sp>
-        <p:nvSpPr>
-          <p:cNvPr id="25" name="Rounded Rectangle 24"/>
-          <p:cNvSpPr/>
-          <p:nvPr/>
-        </p:nvSpPr>
-        <p:spPr>
-          <a:xfrm>
-            <a:off x="3572408" y="4311396"/>
-            <a:ext cx="1220724" cy="1220724"/>
-          </a:xfrm>
-          <a:prstGeom prst="roundRect">
-            <a:avLst>
-              <a:gd name="adj" fmla="val 12000"/>
-            </a:avLst>
-          </a:prstGeom>
-          <a:solidFill>
-            <a:srgbClr val="E8F4FA"/>
-          </a:solidFill>
-          <a:ln>
-            <a:noFill/>
-          </a:ln>
-        </p:spPr>
-        <p:style>
-          <a:lnRef idx="1">
-            <a:schemeClr val="accent1"/>
-          </a:lnRef>
-          <a:fillRef idx="3">
-            <a:schemeClr val="accent1"/>
-          </a:fillRef>
-          <a:effectRef idx="2">
-            <a:schemeClr val="accent1"/>
-          </a:effectRef>
-          <a:fontRef idx="minor">
-            <a:schemeClr val="lt1"/>
-          </a:fontRef>
-        </p:style>
-        <p:txBody>
-          <a:bodyPr rtlCol="0" anchor="ctr"/>
-          <a:lstStyle/>
-          <a:p>
-            <a:pPr algn="ctr"/>
-          </a:p>
-        </p:txBody>
-      </p:sp>
-      <p:sp>
-        <p:nvSpPr>
-          <p:cNvPr id="26" name="TextBox 25"/>
-          <p:cNvSpPr txBox="1"/>
-          <p:nvPr/>
-        </p:nvSpPr>
-        <p:spPr>
-          <a:xfrm>
-            <a:off x="3572408" y="4311396"/>
-            <a:ext cx="1220724" cy="1220724"/>
-          </a:xfrm>
-          <a:prstGeom prst="rect">
-            <a:avLst/>
-          </a:prstGeom>
-          <a:noFill/>
-        </p:spPr>
-        <p:txBody>
-          <a:bodyPr wrap="square" anchor="ctr"/>
-          <a:lstStyle/>
-          <a:p>
-            <a:pPr algn="ctr"/>
-            <a:r>
-              <a:rPr sz="1600" b="1" i="0">
-                <a:solidFill>
-                  <a:srgbClr val="095292"/>
-                </a:solidFill>
-                <a:latin typeface="Calibri"/>
-              </a:rPr>
-              <a:t>P</a:t>
-            </a:r>
-          </a:p>
-        </p:txBody>
-      </p:sp>
-      <p:sp>
-        <p:nvSpPr>
-          <p:cNvPr id="27" name="TextBox 26"/>
-          <p:cNvSpPr txBox="1"/>
-          <p:nvPr/>
-        </p:nvSpPr>
-        <p:spPr>
-          <a:xfrm>
-            <a:off x="2443429" y="5623560"/>
-            <a:ext cx="3478682" cy="621792"/>
-          </a:xfrm>
-          <a:prstGeom prst="rect">
-            <a:avLst/>
-          </a:prstGeom>
-          <a:noFill/>
-        </p:spPr>
-        <p:txBody>
-          <a:bodyPr wrap="square" anchor="t"/>
-          <a:lstStyle/>
-          <a:p>
-            <a:pPr algn="ctr"/>
-            <a:r>
-              <a:rPr sz="1300" b="1" i="0">
-                <a:solidFill>
-                  <a:srgbClr val="095292"/>
-                </a:solidFill>
-                <a:latin typeface="Calibri"/>
-              </a:rPr>
-              <a:t>Penpot</a:t>
-            </a:r>
-          </a:p>
-          <a:p>
-            <a:pPr algn="ctr">
-              <a:spcBef>
-                <a:spcPts val="200"/>
-              </a:spcBef>
-            </a:pPr>
-            <a:r>
-              <a:rPr sz="1000" b="0" i="0">
-                <a:solidFill>
-                  <a:srgbClr val="666666"/>
-                </a:solidFill>
-                <a:latin typeface="Calibri"/>
-              </a:rPr>
-              <a:t>Alternativa libre a Figma</a:t>
-            </a:r>
-          </a:p>
-        </p:txBody>
-      </p:sp>
-      <p:sp>
-        <p:nvSpPr>
-          <p:cNvPr id="28" name="Rounded Rectangle 27"/>
-          <p:cNvSpPr/>
-          <p:nvPr/>
-        </p:nvSpPr>
-        <p:spPr>
-          <a:xfrm>
-            <a:off x="6196431" y="4055364"/>
-            <a:ext cx="3624986" cy="2299716"/>
-          </a:xfrm>
-          <a:prstGeom prst="roundRect">
-            <a:avLst>
-              <a:gd name="adj" fmla="val 12000"/>
-            </a:avLst>
-          </a:prstGeom>
-          <a:solidFill>
-            <a:srgbClr val="F2F2F2"/>
-          </a:solidFill>
-          <a:ln>
-            <a:noFill/>
-          </a:ln>
-        </p:spPr>
-        <p:style>
-          <a:lnRef idx="1">
-            <a:schemeClr val="accent1"/>
-          </a:lnRef>
-          <a:fillRef idx="3">
-            <a:schemeClr val="accent1"/>
-          </a:fillRef>
-          <a:effectRef idx="2">
-            <a:schemeClr val="accent1"/>
-          </a:effectRef>
-          <a:fontRef idx="minor">
-            <a:schemeClr val="lt1"/>
-          </a:fontRef>
-        </p:style>
-        <p:txBody>
-          <a:bodyPr rtlCol="0" anchor="ctr"/>
-          <a:lstStyle/>
-          <a:p>
-            <a:pPr algn="ctr"/>
-          </a:p>
-        </p:txBody>
-      </p:sp>
-      <p:sp>
-        <p:nvSpPr>
-          <p:cNvPr id="29" name="Rectangle 28"/>
-          <p:cNvSpPr/>
-          <p:nvPr/>
-        </p:nvSpPr>
-        <p:spPr>
-          <a:xfrm>
-            <a:off x="6196431" y="4055364"/>
-            <a:ext cx="3624986" cy="64008"/>
-          </a:xfrm>
-          <a:prstGeom prst="rect">
-            <a:avLst/>
-          </a:prstGeom>
-          <a:solidFill>
-            <a:srgbClr val="095292"/>
-          </a:solidFill>
-          <a:ln>
-            <a:noFill/>
-          </a:ln>
-        </p:spPr>
-        <p:style>
-          <a:lnRef idx="1">
-            <a:schemeClr val="accent1"/>
-          </a:lnRef>
-          <a:fillRef idx="3">
-            <a:schemeClr val="accent1"/>
-          </a:fillRef>
-          <a:effectRef idx="2">
-            <a:schemeClr val="accent1"/>
-          </a:effectRef>
-          <a:fontRef idx="minor">
-            <a:schemeClr val="lt1"/>
-          </a:fontRef>
-        </p:style>
-        <p:txBody>
-          <a:bodyPr rtlCol="0" anchor="ctr"/>
-          <a:lstStyle/>
-          <a:p>
-            <a:pPr algn="ctr"/>
-          </a:p>
-        </p:txBody>
-      </p:sp>
-      <p:sp>
-        <p:nvSpPr>
-          <p:cNvPr id="30" name="Rectangle 29"/>
-          <p:cNvSpPr/>
-          <p:nvPr/>
-        </p:nvSpPr>
-        <p:spPr>
-          <a:xfrm>
-            <a:off x="6196431" y="4119372"/>
-            <a:ext cx="3624986" cy="27432"/>
-          </a:xfrm>
-          <a:prstGeom prst="rect">
-            <a:avLst/>
-          </a:prstGeom>
-          <a:solidFill>
-            <a:srgbClr val="FFD000"/>
-          </a:solidFill>
-          <a:ln>
-            <a:noFill/>
-          </a:ln>
-        </p:spPr>
-        <p:style>
-          <a:lnRef idx="1">
-            <a:schemeClr val="accent1"/>
-          </a:lnRef>
-          <a:fillRef idx="3">
-            <a:schemeClr val="accent1"/>
-          </a:fillRef>
-          <a:effectRef idx="2">
-            <a:schemeClr val="accent1"/>
-          </a:effectRef>
-          <a:fontRef idx="minor">
-            <a:schemeClr val="lt1"/>
-          </a:fontRef>
-        </p:style>
-        <p:txBody>
-          <a:bodyPr rtlCol="0" anchor="ctr"/>
-          <a:lstStyle/>
-          <a:p>
-            <a:pPr algn="ctr"/>
-          </a:p>
-        </p:txBody>
-      </p:sp>
-      <p:pic>
-        <p:nvPicPr>
-          <p:cNvPr id="31" name="Picture 30" descr="examlab.png"/>
-          <p:cNvPicPr>
-            <a:picLocks noChangeAspect="1"/>
-          </p:cNvPicPr>
-          <p:nvPr/>
-        </p:nvPicPr>
-        <p:blipFill>
-          <a:blip r:embed="rId4"/>
-          <a:stretch>
-            <a:fillRect/>
-          </a:stretch>
-        </p:blipFill>
-        <p:spPr>
-          <a:xfrm>
-            <a:off x="7398562" y="4311396"/>
-            <a:ext cx="1220724" cy="1220724"/>
-          </a:xfrm>
-          <a:prstGeom prst="rect">
-            <a:avLst/>
-          </a:prstGeom>
-        </p:spPr>
-      </p:pic>
-      <p:sp>
-        <p:nvSpPr>
-          <p:cNvPr id="32" name="TextBox 31"/>
-          <p:cNvSpPr txBox="1"/>
-          <p:nvPr/>
-        </p:nvSpPr>
-        <p:spPr>
-          <a:xfrm>
-            <a:off x="6269583" y="5623560"/>
-            <a:ext cx="3478682" cy="621792"/>
-          </a:xfrm>
-          <a:prstGeom prst="rect">
-            <a:avLst/>
-          </a:prstGeom>
-          <a:noFill/>
-        </p:spPr>
-        <p:txBody>
-          <a:bodyPr wrap="square" anchor="t"/>
-          <a:lstStyle/>
-          <a:p>
-            <a:pPr algn="ctr"/>
-            <a:r>
-              <a:rPr sz="1300" b="1" i="0">
-                <a:solidFill>
-                  <a:srgbClr val="095292"/>
-                </a:solidFill>
-                <a:latin typeface="Calibri"/>
-              </a:rPr>
-              <a:t>la plataforma del curso</a:t>
-            </a:r>
-          </a:p>
-          <a:p>
-            <a:pPr algn="ctr">
-              <a:spcBef>
-                <a:spcPts val="200"/>
-              </a:spcBef>
-            </a:pPr>
-            <a:r>
-              <a:rPr sz="1000" b="0" i="0">
-                <a:solidFill>
-                  <a:srgbClr val="666666"/>
-                </a:solidFill>
-                <a:latin typeface="Calibri"/>
-              </a:rPr>
-              <a:t>Entrega del taller · en la fecha que indique el docente</a:t>
-            </a:r>
-          </a:p>
-        </p:txBody>
-      </p:sp>
-      <p:sp>
-        <p:nvSpPr>
-          <p:cNvPr id="33" name="TextBox 32"/>
           <p:cNvSpPr txBox="1"/>
           <p:nvPr/>
         </p:nvSpPr>
@@ -6392,7 +5795,7 @@
                 </a:solidFill>
                 <a:latin typeface="Calibri"/>
               </a:rPr>
-              <a:t>Taller PI — por que importa</a:t>
+              <a:t>Demo del dia</a:t>
             </a:r>
           </a:p>
         </p:txBody>
@@ -6440,7 +5843,7 @@
                 </a:solidFill>
                 <a:latin typeface="Calibri"/>
               </a:rPr>
-              <a:t>Por que importa al PI:</a:t>
+              <a:t>Herramienta:</a:t>
             </a:r>
             <a:r>
               <a:rPr sz="2000" b="0" i="0">
@@ -6449,7 +5852,7 @@
                 </a:solidFill>
                 <a:latin typeface="Calibri"/>
               </a:rPr>
-              <a:t> la interfaz es la cara visible del paquete de diseño de VetCare y es lo unico del PI que la clinica Huellitas entiende sin traduccion; ademas es el insumo directo con el que Programacion II construye las pantallas reales.</a:t>
+              <a:t> Figma o Penpot · Excalidraw · Google Docs</a:t>
             </a:r>
           </a:p>
           <a:p>
@@ -6465,7 +5868,25 @@
                 </a:solidFill>
                 <a:latin typeface="Calibri"/>
               </a:rPr>
-              <a:t>–   Es la ultima clase con tema nuevo del curso: lo que se produzca hoy entra tal cual al documento final y a la sustentacion de la clase 14.</a:t>
+              <a:t>–   </a:t>
+            </a:r>
+            <a:r>
+              <a:rPr sz="2000" b="1" i="0">
+                <a:solidFill>
+                  <a:srgbClr val="333333"/>
+                </a:solidFill>
+                <a:latin typeface="Calibri"/>
+              </a:rPr>
+              <a:t>Demo:</a:t>
+            </a:r>
+            <a:r>
+              <a:rPr sz="2000" b="0" i="0">
+                <a:solidFill>
+                  <a:srgbClr val="333333"/>
+                </a:solidFill>
+                <a:latin typeface="Calibri"/>
+              </a:rPr>
+              <a:t> El docente dibuja en vivo el wireframe de Registrar mascota en Penpot, le pone tres anotaciones numeradas y lo conecta con Buscar expediente para que la clase vea en la misma pantalla la diferencia entre wireframe, mockup y prototipo.</a:t>
             </a:r>
           </a:p>
           <a:p>
@@ -6481,7 +5902,7 @@
                 </a:solidFill>
                 <a:latin typeface="Calibri"/>
               </a:rPr>
-              <a:t>–   Quien va solo por la ruta C cierra su PI con este prototipo navegable, que es entregable completo y valido por si mismo, no una version recortada del proyecto.</a:t>
+              <a:t>–   Mismo dominio VetCare — no otro ejemplo. Aqui se diseña, no se programa.</a:t>
             </a:r>
           </a:p>
         </p:txBody>
@@ -6556,7 +5977,7 @@
         <p:spPr>
           <a:xfrm>
             <a:off x="0" y="0"/>
-            <a:ext cx="12191695" cy="960120"/>
+            <a:ext cx="12191695" cy="1170432"/>
           </a:xfrm>
           <a:prstGeom prst="rect">
             <a:avLst/>
@@ -6598,7 +6019,7 @@
         </p:nvSpPr>
         <p:spPr>
           <a:xfrm>
-            <a:off x="0" y="960120"/>
+            <a:off x="0" y="1170432"/>
             <a:ext cx="12191695" cy="41148"/>
           </a:xfrm>
           <a:prstGeom prst="rect">
@@ -6642,7 +6063,7 @@
         <p:spPr>
           <a:xfrm>
             <a:off x="457200" y="164592"/>
-            <a:ext cx="11277295" cy="502920"/>
+            <a:ext cx="11277295" cy="384048"/>
           </a:xfrm>
           <a:prstGeom prst="rect">
             <a:avLst/>
@@ -6662,7 +6083,7 @@
                 </a:solidFill>
                 <a:latin typeface="Calibri"/>
               </a:rPr>
-              <a:t>Taller PI — punto de partida</a:t>
+              <a:t>Herramientas de hoy</a:t>
             </a:r>
           </a:p>
         </p:txBody>
@@ -6675,8 +6096,8 @@
         </p:nvSpPr>
         <p:spPr>
           <a:xfrm>
-            <a:off x="457200" y="1170432"/>
-            <a:ext cx="11277295" cy="5230368"/>
+            <a:off x="457200" y="566928"/>
+            <a:ext cx="11277295" cy="411480"/>
           </a:xfrm>
           <a:prstGeom prst="rect">
             <a:avLst/>
@@ -6689,58 +6110,1149 @@
           </a:bodyPr>
           <a:lstStyle/>
           <a:p>
-            <a:pPr>
-              <a:spcAft>
-                <a:spcPts val="800"/>
-              </a:spcAft>
+            <a:r>
+              <a:rPr sz="1400" b="0" i="0">
+                <a:solidFill>
+                  <a:srgbClr val="B8D8EE"/>
+                </a:solidFill>
+                <a:latin typeface="Calibri"/>
+              </a:rPr>
+              <a:t>Gratis · funcionan en el navegador</a:t>
+            </a:r>
+          </a:p>
+        </p:txBody>
+      </p:sp>
+      <p:sp>
+        <p:nvSpPr>
+          <p:cNvPr id="6" name="Rounded Rectangle 5"/>
+          <p:cNvSpPr/>
+          <p:nvPr/>
+        </p:nvSpPr>
+        <p:spPr>
+          <a:xfrm>
+            <a:off x="457200" y="1591056"/>
+            <a:ext cx="3624986" cy="2299716"/>
+          </a:xfrm>
+          <a:prstGeom prst="roundRect">
+            <a:avLst>
+              <a:gd name="adj" fmla="val 12000"/>
+            </a:avLst>
+          </a:prstGeom>
+          <a:solidFill>
+            <a:srgbClr val="F2F2F2"/>
+          </a:solidFill>
+          <a:ln>
+            <a:noFill/>
+          </a:ln>
+        </p:spPr>
+        <p:style>
+          <a:lnRef idx="1">
+            <a:schemeClr val="accent1"/>
+          </a:lnRef>
+          <a:fillRef idx="3">
+            <a:schemeClr val="accent1"/>
+          </a:fillRef>
+          <a:effectRef idx="2">
+            <a:schemeClr val="accent1"/>
+          </a:effectRef>
+          <a:fontRef idx="minor">
+            <a:schemeClr val="lt1"/>
+          </a:fontRef>
+        </p:style>
+        <p:txBody>
+          <a:bodyPr rtlCol="0" anchor="ctr"/>
+          <a:lstStyle/>
+          <a:p>
+            <a:pPr algn="ctr"/>
+          </a:p>
+        </p:txBody>
+      </p:sp>
+      <p:sp>
+        <p:nvSpPr>
+          <p:cNvPr id="7" name="Rectangle 6"/>
+          <p:cNvSpPr/>
+          <p:nvPr/>
+        </p:nvSpPr>
+        <p:spPr>
+          <a:xfrm>
+            <a:off x="457200" y="1591056"/>
+            <a:ext cx="3624986" cy="64008"/>
+          </a:xfrm>
+          <a:prstGeom prst="rect">
+            <a:avLst/>
+          </a:prstGeom>
+          <a:solidFill>
+            <a:srgbClr val="095292"/>
+          </a:solidFill>
+          <a:ln>
+            <a:noFill/>
+          </a:ln>
+        </p:spPr>
+        <p:style>
+          <a:lnRef idx="1">
+            <a:schemeClr val="accent1"/>
+          </a:lnRef>
+          <a:fillRef idx="3">
+            <a:schemeClr val="accent1"/>
+          </a:fillRef>
+          <a:effectRef idx="2">
+            <a:schemeClr val="accent1"/>
+          </a:effectRef>
+          <a:fontRef idx="minor">
+            <a:schemeClr val="lt1"/>
+          </a:fontRef>
+        </p:style>
+        <p:txBody>
+          <a:bodyPr rtlCol="0" anchor="ctr"/>
+          <a:lstStyle/>
+          <a:p>
+            <a:pPr algn="ctr"/>
+          </a:p>
+        </p:txBody>
+      </p:sp>
+      <p:sp>
+        <p:nvSpPr>
+          <p:cNvPr id="8" name="Rectangle 7"/>
+          <p:cNvSpPr/>
+          <p:nvPr/>
+        </p:nvSpPr>
+        <p:spPr>
+          <a:xfrm>
+            <a:off x="457200" y="1655064"/>
+            <a:ext cx="3624986" cy="27432"/>
+          </a:xfrm>
+          <a:prstGeom prst="rect">
+            <a:avLst/>
+          </a:prstGeom>
+          <a:solidFill>
+            <a:srgbClr val="FFD000"/>
+          </a:solidFill>
+          <a:ln>
+            <a:noFill/>
+          </a:ln>
+        </p:spPr>
+        <p:style>
+          <a:lnRef idx="1">
+            <a:schemeClr val="accent1"/>
+          </a:lnRef>
+          <a:fillRef idx="3">
+            <a:schemeClr val="accent1"/>
+          </a:fillRef>
+          <a:effectRef idx="2">
+            <a:schemeClr val="accent1"/>
+          </a:effectRef>
+          <a:fontRef idx="minor">
+            <a:schemeClr val="lt1"/>
+          </a:fontRef>
+        </p:style>
+        <p:txBody>
+          <a:bodyPr rtlCol="0" anchor="ctr"/>
+          <a:lstStyle/>
+          <a:p>
+            <a:pPr algn="ctr"/>
+          </a:p>
+        </p:txBody>
+      </p:sp>
+      <p:pic>
+        <p:nvPicPr>
+          <p:cNvPr id="9" name="Picture 8" descr="excalidraw.png"/>
+          <p:cNvPicPr>
+            <a:picLocks noChangeAspect="1"/>
+          </p:cNvPicPr>
+          <p:nvPr/>
+        </p:nvPicPr>
+        <p:blipFill>
+          <a:blip r:embed="rId2"/>
+          <a:stretch>
+            <a:fillRect/>
+          </a:stretch>
+        </p:blipFill>
+        <p:spPr>
+          <a:xfrm>
+            <a:off x="1659331" y="1847087"/>
+            <a:ext cx="1220724" cy="1220724"/>
+          </a:xfrm>
+          <a:prstGeom prst="rect">
+            <a:avLst/>
+          </a:prstGeom>
+        </p:spPr>
+      </p:pic>
+      <p:sp>
+        <p:nvSpPr>
+          <p:cNvPr id="10" name="TextBox 9"/>
+          <p:cNvSpPr txBox="1"/>
+          <p:nvPr/>
+        </p:nvSpPr>
+        <p:spPr>
+          <a:xfrm>
+            <a:off x="530352" y="3159251"/>
+            <a:ext cx="3478682" cy="621792"/>
+          </a:xfrm>
+          <a:prstGeom prst="rect">
+            <a:avLst/>
+          </a:prstGeom>
+          <a:noFill/>
+        </p:spPr>
+        <p:txBody>
+          <a:bodyPr wrap="square" anchor="t"/>
+          <a:lstStyle/>
+          <a:p>
+            <a:pPr algn="ctr"/>
+            <a:r>
+              <a:rPr sz="1300" b="1" i="0">
+                <a:solidFill>
+                  <a:srgbClr val="095292"/>
+                </a:solidFill>
+                <a:latin typeface="Calibri"/>
+              </a:rPr>
+              <a:t>Excalidraw</a:t>
+            </a:r>
+          </a:p>
+          <a:p>
+            <a:pPr algn="ctr">
+              <a:spcBef>
+                <a:spcPts val="200"/>
+              </a:spcBef>
             </a:pPr>
             <a:r>
-              <a:rPr sz="2000" b="0" i="0">
-                <a:solidFill>
-                  <a:srgbClr val="333333"/>
-                </a:solidFill>
-                <a:latin typeface="Calibri"/>
-              </a:rPr>
-              <a:t>–   El equipo ya tiene aprobados los RF y RNF, el diagrama de casos de uso, el de clases con Mascota, Dueño, Historia_Clinica y Cita, y el diccionario de datos con tipos y longitudes.</a:t>
-            </a:r>
-          </a:p>
-          <a:p>
-            <a:pPr>
-              <a:spcAft>
-                <a:spcPts val="800"/>
-              </a:spcAft>
+              <a:rPr sz="1000" b="0" i="0">
+                <a:solidFill>
+                  <a:srgbClr val="666666"/>
+                </a:solidFill>
+                <a:latin typeface="Calibri"/>
+              </a:rPr>
+              <a:t>Bocetos rapidos a mano alzada</a:t>
+            </a:r>
+          </a:p>
+        </p:txBody>
+      </p:sp>
+      <p:sp>
+        <p:nvSpPr>
+          <p:cNvPr id="11" name="Rounded Rectangle 10"/>
+          <p:cNvSpPr/>
+          <p:nvPr/>
+        </p:nvSpPr>
+        <p:spPr>
+          <a:xfrm>
+            <a:off x="4283354" y="1591056"/>
+            <a:ext cx="3624986" cy="2299716"/>
+          </a:xfrm>
+          <a:prstGeom prst="roundRect">
+            <a:avLst>
+              <a:gd name="adj" fmla="val 12000"/>
+            </a:avLst>
+          </a:prstGeom>
+          <a:solidFill>
+            <a:srgbClr val="F2F2F2"/>
+          </a:solidFill>
+          <a:ln>
+            <a:noFill/>
+          </a:ln>
+        </p:spPr>
+        <p:style>
+          <a:lnRef idx="1">
+            <a:schemeClr val="accent1"/>
+          </a:lnRef>
+          <a:fillRef idx="3">
+            <a:schemeClr val="accent1"/>
+          </a:fillRef>
+          <a:effectRef idx="2">
+            <a:schemeClr val="accent1"/>
+          </a:effectRef>
+          <a:fontRef idx="minor">
+            <a:schemeClr val="lt1"/>
+          </a:fontRef>
+        </p:style>
+        <p:txBody>
+          <a:bodyPr rtlCol="0" anchor="ctr"/>
+          <a:lstStyle/>
+          <a:p>
+            <a:pPr algn="ctr"/>
+          </a:p>
+        </p:txBody>
+      </p:sp>
+      <p:sp>
+        <p:nvSpPr>
+          <p:cNvPr id="12" name="Rectangle 11"/>
+          <p:cNvSpPr/>
+          <p:nvPr/>
+        </p:nvSpPr>
+        <p:spPr>
+          <a:xfrm>
+            <a:off x="4283354" y="1591056"/>
+            <a:ext cx="3624986" cy="64008"/>
+          </a:xfrm>
+          <a:prstGeom prst="rect">
+            <a:avLst/>
+          </a:prstGeom>
+          <a:solidFill>
+            <a:srgbClr val="095292"/>
+          </a:solidFill>
+          <a:ln>
+            <a:noFill/>
+          </a:ln>
+        </p:spPr>
+        <p:style>
+          <a:lnRef idx="1">
+            <a:schemeClr val="accent1"/>
+          </a:lnRef>
+          <a:fillRef idx="3">
+            <a:schemeClr val="accent1"/>
+          </a:fillRef>
+          <a:effectRef idx="2">
+            <a:schemeClr val="accent1"/>
+          </a:effectRef>
+          <a:fontRef idx="minor">
+            <a:schemeClr val="lt1"/>
+          </a:fontRef>
+        </p:style>
+        <p:txBody>
+          <a:bodyPr rtlCol="0" anchor="ctr"/>
+          <a:lstStyle/>
+          <a:p>
+            <a:pPr algn="ctr"/>
+          </a:p>
+        </p:txBody>
+      </p:sp>
+      <p:sp>
+        <p:nvSpPr>
+          <p:cNvPr id="13" name="Rectangle 12"/>
+          <p:cNvSpPr/>
+          <p:nvPr/>
+        </p:nvSpPr>
+        <p:spPr>
+          <a:xfrm>
+            <a:off x="4283354" y="1655064"/>
+            <a:ext cx="3624986" cy="27432"/>
+          </a:xfrm>
+          <a:prstGeom prst="rect">
+            <a:avLst/>
+          </a:prstGeom>
+          <a:solidFill>
+            <a:srgbClr val="FFD000"/>
+          </a:solidFill>
+          <a:ln>
+            <a:noFill/>
+          </a:ln>
+        </p:spPr>
+        <p:style>
+          <a:lnRef idx="1">
+            <a:schemeClr val="accent1"/>
+          </a:lnRef>
+          <a:fillRef idx="3">
+            <a:schemeClr val="accent1"/>
+          </a:fillRef>
+          <a:effectRef idx="2">
+            <a:schemeClr val="accent1"/>
+          </a:effectRef>
+          <a:fontRef idx="minor">
+            <a:schemeClr val="lt1"/>
+          </a:fontRef>
+        </p:style>
+        <p:txBody>
+          <a:bodyPr rtlCol="0" anchor="ctr"/>
+          <a:lstStyle/>
+          <a:p>
+            <a:pPr algn="ctr"/>
+          </a:p>
+        </p:txBody>
+      </p:sp>
+      <p:pic>
+        <p:nvPicPr>
+          <p:cNvPr id="14" name="Picture 13" descr="google_docs.png"/>
+          <p:cNvPicPr>
+            <a:picLocks noChangeAspect="1"/>
+          </p:cNvPicPr>
+          <p:nvPr/>
+        </p:nvPicPr>
+        <p:blipFill>
+          <a:blip r:embed="rId3"/>
+          <a:stretch>
+            <a:fillRect/>
+          </a:stretch>
+        </p:blipFill>
+        <p:spPr>
+          <a:xfrm>
+            <a:off x="5485485" y="1847087"/>
+            <a:ext cx="1220724" cy="1220724"/>
+          </a:xfrm>
+          <a:prstGeom prst="rect">
+            <a:avLst/>
+          </a:prstGeom>
+        </p:spPr>
+      </p:pic>
+      <p:sp>
+        <p:nvSpPr>
+          <p:cNvPr id="15" name="TextBox 14"/>
+          <p:cNvSpPr txBox="1"/>
+          <p:nvPr/>
+        </p:nvSpPr>
+        <p:spPr>
+          <a:xfrm>
+            <a:off x="4356506" y="3159251"/>
+            <a:ext cx="3478682" cy="621792"/>
+          </a:xfrm>
+          <a:prstGeom prst="rect">
+            <a:avLst/>
+          </a:prstGeom>
+          <a:noFill/>
+        </p:spPr>
+        <p:txBody>
+          <a:bodyPr wrap="square" anchor="t"/>
+          <a:lstStyle/>
+          <a:p>
+            <a:pPr algn="ctr"/>
+            <a:r>
+              <a:rPr sz="1300" b="1" i="0">
+                <a:solidFill>
+                  <a:srgbClr val="095292"/>
+                </a:solidFill>
+                <a:latin typeface="Calibri"/>
+              </a:rPr>
+              <a:t>google docs</a:t>
+            </a:r>
+          </a:p>
+          <a:p>
+            <a:pPr algn="ctr">
+              <a:spcBef>
+                <a:spcPts val="200"/>
+              </a:spcBef>
             </a:pPr>
             <a:r>
-              <a:rPr sz="2000" b="0" i="0">
-                <a:solidFill>
-                  <a:srgbClr val="333333"/>
-                </a:solidFill>
-                <a:latin typeface="Calibri"/>
-              </a:rPr>
-              <a:t>–   Hasta hoy VetCare existe solo como texto y diagramas: nadie ha visto todavia como se veria la pantalla que va a usar la recepcionista de Huellitas.</a:t>
-            </a:r>
-          </a:p>
-          <a:p>
-            <a:pPr>
-              <a:spcAft>
-                <a:spcPts val="800"/>
-              </a:spcAft>
+              <a:rPr sz="1000" b="0" i="0">
+                <a:solidFill>
+                  <a:srgbClr val="666666"/>
+                </a:solidFill>
+                <a:latin typeface="Calibri"/>
+              </a:rPr>
+              <a:t>Documentos del paquete de diseño</a:t>
+            </a:r>
+          </a:p>
+        </p:txBody>
+      </p:sp>
+      <p:sp>
+        <p:nvSpPr>
+          <p:cNvPr id="16" name="Rounded Rectangle 15"/>
+          <p:cNvSpPr/>
+          <p:nvPr/>
+        </p:nvSpPr>
+        <p:spPr>
+          <a:xfrm>
+            <a:off x="8109508" y="1591056"/>
+            <a:ext cx="3624986" cy="2299716"/>
+          </a:xfrm>
+          <a:prstGeom prst="roundRect">
+            <a:avLst>
+              <a:gd name="adj" fmla="val 12000"/>
+            </a:avLst>
+          </a:prstGeom>
+          <a:solidFill>
+            <a:srgbClr val="F2F2F2"/>
+          </a:solidFill>
+          <a:ln>
+            <a:noFill/>
+          </a:ln>
+        </p:spPr>
+        <p:style>
+          <a:lnRef idx="1">
+            <a:schemeClr val="accent1"/>
+          </a:lnRef>
+          <a:fillRef idx="3">
+            <a:schemeClr val="accent1"/>
+          </a:fillRef>
+          <a:effectRef idx="2">
+            <a:schemeClr val="accent1"/>
+          </a:effectRef>
+          <a:fontRef idx="minor">
+            <a:schemeClr val="lt1"/>
+          </a:fontRef>
+        </p:style>
+        <p:txBody>
+          <a:bodyPr rtlCol="0" anchor="ctr"/>
+          <a:lstStyle/>
+          <a:p>
+            <a:pPr algn="ctr"/>
+          </a:p>
+        </p:txBody>
+      </p:sp>
+      <p:sp>
+        <p:nvSpPr>
+          <p:cNvPr id="17" name="Rectangle 16"/>
+          <p:cNvSpPr/>
+          <p:nvPr/>
+        </p:nvSpPr>
+        <p:spPr>
+          <a:xfrm>
+            <a:off x="8109508" y="1591056"/>
+            <a:ext cx="3624986" cy="64008"/>
+          </a:xfrm>
+          <a:prstGeom prst="rect">
+            <a:avLst/>
+          </a:prstGeom>
+          <a:solidFill>
+            <a:srgbClr val="095292"/>
+          </a:solidFill>
+          <a:ln>
+            <a:noFill/>
+          </a:ln>
+        </p:spPr>
+        <p:style>
+          <a:lnRef idx="1">
+            <a:schemeClr val="accent1"/>
+          </a:lnRef>
+          <a:fillRef idx="3">
+            <a:schemeClr val="accent1"/>
+          </a:fillRef>
+          <a:effectRef idx="2">
+            <a:schemeClr val="accent1"/>
+          </a:effectRef>
+          <a:fontRef idx="minor">
+            <a:schemeClr val="lt1"/>
+          </a:fontRef>
+        </p:style>
+        <p:txBody>
+          <a:bodyPr rtlCol="0" anchor="ctr"/>
+          <a:lstStyle/>
+          <a:p>
+            <a:pPr algn="ctr"/>
+          </a:p>
+        </p:txBody>
+      </p:sp>
+      <p:sp>
+        <p:nvSpPr>
+          <p:cNvPr id="18" name="Rectangle 17"/>
+          <p:cNvSpPr/>
+          <p:nvPr/>
+        </p:nvSpPr>
+        <p:spPr>
+          <a:xfrm>
+            <a:off x="8109508" y="1655064"/>
+            <a:ext cx="3624986" cy="27432"/>
+          </a:xfrm>
+          <a:prstGeom prst="rect">
+            <a:avLst/>
+          </a:prstGeom>
+          <a:solidFill>
+            <a:srgbClr val="FFD000"/>
+          </a:solidFill>
+          <a:ln>
+            <a:noFill/>
+          </a:ln>
+        </p:spPr>
+        <p:style>
+          <a:lnRef idx="1">
+            <a:schemeClr val="accent1"/>
+          </a:lnRef>
+          <a:fillRef idx="3">
+            <a:schemeClr val="accent1"/>
+          </a:fillRef>
+          <a:effectRef idx="2">
+            <a:schemeClr val="accent1"/>
+          </a:effectRef>
+          <a:fontRef idx="minor">
+            <a:schemeClr val="lt1"/>
+          </a:fontRef>
+        </p:style>
+        <p:txBody>
+          <a:bodyPr rtlCol="0" anchor="ctr"/>
+          <a:lstStyle/>
+          <a:p>
+            <a:pPr algn="ctr"/>
+          </a:p>
+        </p:txBody>
+      </p:sp>
+      <p:sp>
+        <p:nvSpPr>
+          <p:cNvPr id="19" name="Rounded Rectangle 18"/>
+          <p:cNvSpPr/>
+          <p:nvPr/>
+        </p:nvSpPr>
+        <p:spPr>
+          <a:xfrm>
+            <a:off x="9311640" y="1847087"/>
+            <a:ext cx="1220724" cy="1220724"/>
+          </a:xfrm>
+          <a:prstGeom prst="roundRect">
+            <a:avLst>
+              <a:gd name="adj" fmla="val 12000"/>
+            </a:avLst>
+          </a:prstGeom>
+          <a:solidFill>
+            <a:srgbClr val="E8F4FA"/>
+          </a:solidFill>
+          <a:ln>
+            <a:noFill/>
+          </a:ln>
+        </p:spPr>
+        <p:style>
+          <a:lnRef idx="1">
+            <a:schemeClr val="accent1"/>
+          </a:lnRef>
+          <a:fillRef idx="3">
+            <a:schemeClr val="accent1"/>
+          </a:fillRef>
+          <a:effectRef idx="2">
+            <a:schemeClr val="accent1"/>
+          </a:effectRef>
+          <a:fontRef idx="minor">
+            <a:schemeClr val="lt1"/>
+          </a:fontRef>
+        </p:style>
+        <p:txBody>
+          <a:bodyPr rtlCol="0" anchor="ctr"/>
+          <a:lstStyle/>
+          <a:p>
+            <a:pPr algn="ctr"/>
+          </a:p>
+        </p:txBody>
+      </p:sp>
+      <p:sp>
+        <p:nvSpPr>
+          <p:cNvPr id="20" name="TextBox 19"/>
+          <p:cNvSpPr txBox="1"/>
+          <p:nvPr/>
+        </p:nvSpPr>
+        <p:spPr>
+          <a:xfrm>
+            <a:off x="9311640" y="1847087"/>
+            <a:ext cx="1220724" cy="1220724"/>
+          </a:xfrm>
+          <a:prstGeom prst="rect">
+            <a:avLst/>
+          </a:prstGeom>
+          <a:noFill/>
+        </p:spPr>
+        <p:txBody>
+          <a:bodyPr wrap="square" anchor="ctr"/>
+          <a:lstStyle/>
+          <a:p>
+            <a:pPr algn="ctr"/>
+            <a:r>
+              <a:rPr sz="1600" b="1" i="0">
+                <a:solidFill>
+                  <a:srgbClr val="095292"/>
+                </a:solidFill>
+                <a:latin typeface="Calibri"/>
+              </a:rPr>
+              <a:t>F</a:t>
+            </a:r>
+          </a:p>
+        </p:txBody>
+      </p:sp>
+      <p:sp>
+        <p:nvSpPr>
+          <p:cNvPr id="21" name="TextBox 20"/>
+          <p:cNvSpPr txBox="1"/>
+          <p:nvPr/>
+        </p:nvSpPr>
+        <p:spPr>
+          <a:xfrm>
+            <a:off x="8182660" y="3159251"/>
+            <a:ext cx="3478682" cy="621792"/>
+          </a:xfrm>
+          <a:prstGeom prst="rect">
+            <a:avLst/>
+          </a:prstGeom>
+          <a:noFill/>
+        </p:spPr>
+        <p:txBody>
+          <a:bodyPr wrap="square" anchor="t"/>
+          <a:lstStyle/>
+          <a:p>
+            <a:pPr algn="ctr"/>
+            <a:r>
+              <a:rPr sz="1300" b="1" i="0">
+                <a:solidFill>
+                  <a:srgbClr val="095292"/>
+                </a:solidFill>
+                <a:latin typeface="Calibri"/>
+              </a:rPr>
+              <a:t>Figma</a:t>
+            </a:r>
+          </a:p>
+          <a:p>
+            <a:pPr algn="ctr">
+              <a:spcBef>
+                <a:spcPts val="200"/>
+              </a:spcBef>
             </a:pPr>
             <a:r>
-              <a:rPr sz="2000" b="0" i="0">
-                <a:solidFill>
-                  <a:srgbClr val="333333"/>
-                </a:solidFill>
-                <a:latin typeface="Calibri"/>
-              </a:rPr>
-              <a:t>–   La usuaria de referencia esta descrita asi: recepcionista con experiencia clinica alta y experiencia informatica baja, atiende telefono mientras registra y necesita terminar el registro de un paciente nuevo en menos de dos minutos.</a:t>
-            </a:r>
-          </a:p>
-        </p:txBody>
-      </p:sp>
-      <p:sp>
-        <p:nvSpPr>
-          <p:cNvPr id="6" name="TextBox 5"/>
+              <a:rPr sz="1000" b="0" i="0">
+                <a:solidFill>
+                  <a:srgbClr val="666666"/>
+                </a:solidFill>
+                <a:latin typeface="Calibri"/>
+              </a:rPr>
+              <a:t>Wireframes y prototipo navegable</a:t>
+            </a:r>
+          </a:p>
+        </p:txBody>
+      </p:sp>
+      <p:sp>
+        <p:nvSpPr>
+          <p:cNvPr id="22" name="Rounded Rectangle 21"/>
+          <p:cNvSpPr/>
+          <p:nvPr/>
+        </p:nvSpPr>
+        <p:spPr>
+          <a:xfrm>
+            <a:off x="2370277" y="4055364"/>
+            <a:ext cx="3624986" cy="2299716"/>
+          </a:xfrm>
+          <a:prstGeom prst="roundRect">
+            <a:avLst>
+              <a:gd name="adj" fmla="val 12000"/>
+            </a:avLst>
+          </a:prstGeom>
+          <a:solidFill>
+            <a:srgbClr val="F2F2F2"/>
+          </a:solidFill>
+          <a:ln>
+            <a:noFill/>
+          </a:ln>
+        </p:spPr>
+        <p:style>
+          <a:lnRef idx="1">
+            <a:schemeClr val="accent1"/>
+          </a:lnRef>
+          <a:fillRef idx="3">
+            <a:schemeClr val="accent1"/>
+          </a:fillRef>
+          <a:effectRef idx="2">
+            <a:schemeClr val="accent1"/>
+          </a:effectRef>
+          <a:fontRef idx="minor">
+            <a:schemeClr val="lt1"/>
+          </a:fontRef>
+        </p:style>
+        <p:txBody>
+          <a:bodyPr rtlCol="0" anchor="ctr"/>
+          <a:lstStyle/>
+          <a:p>
+            <a:pPr algn="ctr"/>
+          </a:p>
+        </p:txBody>
+      </p:sp>
+      <p:sp>
+        <p:nvSpPr>
+          <p:cNvPr id="23" name="Rectangle 22"/>
+          <p:cNvSpPr/>
+          <p:nvPr/>
+        </p:nvSpPr>
+        <p:spPr>
+          <a:xfrm>
+            <a:off x="2370277" y="4055364"/>
+            <a:ext cx="3624986" cy="64008"/>
+          </a:xfrm>
+          <a:prstGeom prst="rect">
+            <a:avLst/>
+          </a:prstGeom>
+          <a:solidFill>
+            <a:srgbClr val="095292"/>
+          </a:solidFill>
+          <a:ln>
+            <a:noFill/>
+          </a:ln>
+        </p:spPr>
+        <p:style>
+          <a:lnRef idx="1">
+            <a:schemeClr val="accent1"/>
+          </a:lnRef>
+          <a:fillRef idx="3">
+            <a:schemeClr val="accent1"/>
+          </a:fillRef>
+          <a:effectRef idx="2">
+            <a:schemeClr val="accent1"/>
+          </a:effectRef>
+          <a:fontRef idx="minor">
+            <a:schemeClr val="lt1"/>
+          </a:fontRef>
+        </p:style>
+        <p:txBody>
+          <a:bodyPr rtlCol="0" anchor="ctr"/>
+          <a:lstStyle/>
+          <a:p>
+            <a:pPr algn="ctr"/>
+          </a:p>
+        </p:txBody>
+      </p:sp>
+      <p:sp>
+        <p:nvSpPr>
+          <p:cNvPr id="24" name="Rectangle 23"/>
+          <p:cNvSpPr/>
+          <p:nvPr/>
+        </p:nvSpPr>
+        <p:spPr>
+          <a:xfrm>
+            <a:off x="2370277" y="4119372"/>
+            <a:ext cx="3624986" cy="27432"/>
+          </a:xfrm>
+          <a:prstGeom prst="rect">
+            <a:avLst/>
+          </a:prstGeom>
+          <a:solidFill>
+            <a:srgbClr val="FFD000"/>
+          </a:solidFill>
+          <a:ln>
+            <a:noFill/>
+          </a:ln>
+        </p:spPr>
+        <p:style>
+          <a:lnRef idx="1">
+            <a:schemeClr val="accent1"/>
+          </a:lnRef>
+          <a:fillRef idx="3">
+            <a:schemeClr val="accent1"/>
+          </a:fillRef>
+          <a:effectRef idx="2">
+            <a:schemeClr val="accent1"/>
+          </a:effectRef>
+          <a:fontRef idx="minor">
+            <a:schemeClr val="lt1"/>
+          </a:fontRef>
+        </p:style>
+        <p:txBody>
+          <a:bodyPr rtlCol="0" anchor="ctr"/>
+          <a:lstStyle/>
+          <a:p>
+            <a:pPr algn="ctr"/>
+          </a:p>
+        </p:txBody>
+      </p:sp>
+      <p:sp>
+        <p:nvSpPr>
+          <p:cNvPr id="25" name="Rounded Rectangle 24"/>
+          <p:cNvSpPr/>
+          <p:nvPr/>
+        </p:nvSpPr>
+        <p:spPr>
+          <a:xfrm>
+            <a:off x="3572408" y="4311396"/>
+            <a:ext cx="1220724" cy="1220724"/>
+          </a:xfrm>
+          <a:prstGeom prst="roundRect">
+            <a:avLst>
+              <a:gd name="adj" fmla="val 12000"/>
+            </a:avLst>
+          </a:prstGeom>
+          <a:solidFill>
+            <a:srgbClr val="E8F4FA"/>
+          </a:solidFill>
+          <a:ln>
+            <a:noFill/>
+          </a:ln>
+        </p:spPr>
+        <p:style>
+          <a:lnRef idx="1">
+            <a:schemeClr val="accent1"/>
+          </a:lnRef>
+          <a:fillRef idx="3">
+            <a:schemeClr val="accent1"/>
+          </a:fillRef>
+          <a:effectRef idx="2">
+            <a:schemeClr val="accent1"/>
+          </a:effectRef>
+          <a:fontRef idx="minor">
+            <a:schemeClr val="lt1"/>
+          </a:fontRef>
+        </p:style>
+        <p:txBody>
+          <a:bodyPr rtlCol="0" anchor="ctr"/>
+          <a:lstStyle/>
+          <a:p>
+            <a:pPr algn="ctr"/>
+          </a:p>
+        </p:txBody>
+      </p:sp>
+      <p:sp>
+        <p:nvSpPr>
+          <p:cNvPr id="26" name="TextBox 25"/>
+          <p:cNvSpPr txBox="1"/>
+          <p:nvPr/>
+        </p:nvSpPr>
+        <p:spPr>
+          <a:xfrm>
+            <a:off x="3572408" y="4311396"/>
+            <a:ext cx="1220724" cy="1220724"/>
+          </a:xfrm>
+          <a:prstGeom prst="rect">
+            <a:avLst/>
+          </a:prstGeom>
+          <a:noFill/>
+        </p:spPr>
+        <p:txBody>
+          <a:bodyPr wrap="square" anchor="ctr"/>
+          <a:lstStyle/>
+          <a:p>
+            <a:pPr algn="ctr"/>
+            <a:r>
+              <a:rPr sz="1600" b="1" i="0">
+                <a:solidFill>
+                  <a:srgbClr val="095292"/>
+                </a:solidFill>
+                <a:latin typeface="Calibri"/>
+              </a:rPr>
+              <a:t>P</a:t>
+            </a:r>
+          </a:p>
+        </p:txBody>
+      </p:sp>
+      <p:sp>
+        <p:nvSpPr>
+          <p:cNvPr id="27" name="TextBox 26"/>
+          <p:cNvSpPr txBox="1"/>
+          <p:nvPr/>
+        </p:nvSpPr>
+        <p:spPr>
+          <a:xfrm>
+            <a:off x="2443429" y="5623560"/>
+            <a:ext cx="3478682" cy="621792"/>
+          </a:xfrm>
+          <a:prstGeom prst="rect">
+            <a:avLst/>
+          </a:prstGeom>
+          <a:noFill/>
+        </p:spPr>
+        <p:txBody>
+          <a:bodyPr wrap="square" anchor="t"/>
+          <a:lstStyle/>
+          <a:p>
+            <a:pPr algn="ctr"/>
+            <a:r>
+              <a:rPr sz="1300" b="1" i="0">
+                <a:solidFill>
+                  <a:srgbClr val="095292"/>
+                </a:solidFill>
+                <a:latin typeface="Calibri"/>
+              </a:rPr>
+              <a:t>Penpot</a:t>
+            </a:r>
+          </a:p>
+          <a:p>
+            <a:pPr algn="ctr">
+              <a:spcBef>
+                <a:spcPts val="200"/>
+              </a:spcBef>
+            </a:pPr>
+            <a:r>
+              <a:rPr sz="1000" b="0" i="0">
+                <a:solidFill>
+                  <a:srgbClr val="666666"/>
+                </a:solidFill>
+                <a:latin typeface="Calibri"/>
+              </a:rPr>
+              <a:t>Alternativa libre a Figma</a:t>
+            </a:r>
+          </a:p>
+        </p:txBody>
+      </p:sp>
+      <p:sp>
+        <p:nvSpPr>
+          <p:cNvPr id="28" name="Rounded Rectangle 27"/>
+          <p:cNvSpPr/>
+          <p:nvPr/>
+        </p:nvSpPr>
+        <p:spPr>
+          <a:xfrm>
+            <a:off x="6196431" y="4055364"/>
+            <a:ext cx="3624986" cy="2299716"/>
+          </a:xfrm>
+          <a:prstGeom prst="roundRect">
+            <a:avLst>
+              <a:gd name="adj" fmla="val 12000"/>
+            </a:avLst>
+          </a:prstGeom>
+          <a:solidFill>
+            <a:srgbClr val="F2F2F2"/>
+          </a:solidFill>
+          <a:ln>
+            <a:noFill/>
+          </a:ln>
+        </p:spPr>
+        <p:style>
+          <a:lnRef idx="1">
+            <a:schemeClr val="accent1"/>
+          </a:lnRef>
+          <a:fillRef idx="3">
+            <a:schemeClr val="accent1"/>
+          </a:fillRef>
+          <a:effectRef idx="2">
+            <a:schemeClr val="accent1"/>
+          </a:effectRef>
+          <a:fontRef idx="minor">
+            <a:schemeClr val="lt1"/>
+          </a:fontRef>
+        </p:style>
+        <p:txBody>
+          <a:bodyPr rtlCol="0" anchor="ctr"/>
+          <a:lstStyle/>
+          <a:p>
+            <a:pPr algn="ctr"/>
+          </a:p>
+        </p:txBody>
+      </p:sp>
+      <p:sp>
+        <p:nvSpPr>
+          <p:cNvPr id="29" name="Rectangle 28"/>
+          <p:cNvSpPr/>
+          <p:nvPr/>
+        </p:nvSpPr>
+        <p:spPr>
+          <a:xfrm>
+            <a:off x="6196431" y="4055364"/>
+            <a:ext cx="3624986" cy="64008"/>
+          </a:xfrm>
+          <a:prstGeom prst="rect">
+            <a:avLst/>
+          </a:prstGeom>
+          <a:solidFill>
+            <a:srgbClr val="095292"/>
+          </a:solidFill>
+          <a:ln>
+            <a:noFill/>
+          </a:ln>
+        </p:spPr>
+        <p:style>
+          <a:lnRef idx="1">
+            <a:schemeClr val="accent1"/>
+          </a:lnRef>
+          <a:fillRef idx="3">
+            <a:schemeClr val="accent1"/>
+          </a:fillRef>
+          <a:effectRef idx="2">
+            <a:schemeClr val="accent1"/>
+          </a:effectRef>
+          <a:fontRef idx="minor">
+            <a:schemeClr val="lt1"/>
+          </a:fontRef>
+        </p:style>
+        <p:txBody>
+          <a:bodyPr rtlCol="0" anchor="ctr"/>
+          <a:lstStyle/>
+          <a:p>
+            <a:pPr algn="ctr"/>
+          </a:p>
+        </p:txBody>
+      </p:sp>
+      <p:sp>
+        <p:nvSpPr>
+          <p:cNvPr id="30" name="Rectangle 29"/>
+          <p:cNvSpPr/>
+          <p:nvPr/>
+        </p:nvSpPr>
+        <p:spPr>
+          <a:xfrm>
+            <a:off x="6196431" y="4119372"/>
+            <a:ext cx="3624986" cy="27432"/>
+          </a:xfrm>
+          <a:prstGeom prst="rect">
+            <a:avLst/>
+          </a:prstGeom>
+          <a:solidFill>
+            <a:srgbClr val="FFD000"/>
+          </a:solidFill>
+          <a:ln>
+            <a:noFill/>
+          </a:ln>
+        </p:spPr>
+        <p:style>
+          <a:lnRef idx="1">
+            <a:schemeClr val="accent1"/>
+          </a:lnRef>
+          <a:fillRef idx="3">
+            <a:schemeClr val="accent1"/>
+          </a:fillRef>
+          <a:effectRef idx="2">
+            <a:schemeClr val="accent1"/>
+          </a:effectRef>
+          <a:fontRef idx="minor">
+            <a:schemeClr val="lt1"/>
+          </a:fontRef>
+        </p:style>
+        <p:txBody>
+          <a:bodyPr rtlCol="0" anchor="ctr"/>
+          <a:lstStyle/>
+          <a:p>
+            <a:pPr algn="ctr"/>
+          </a:p>
+        </p:txBody>
+      </p:sp>
+      <p:pic>
+        <p:nvPicPr>
+          <p:cNvPr id="31" name="Picture 30" descr="examlab.png"/>
+          <p:cNvPicPr>
+            <a:picLocks noChangeAspect="1"/>
+          </p:cNvPicPr>
+          <p:nvPr/>
+        </p:nvPicPr>
+        <p:blipFill>
+          <a:blip r:embed="rId4"/>
+          <a:stretch>
+            <a:fillRect/>
+          </a:stretch>
+        </p:blipFill>
+        <p:spPr>
+          <a:xfrm>
+            <a:off x="7398562" y="4311396"/>
+            <a:ext cx="1220724" cy="1220724"/>
+          </a:xfrm>
+          <a:prstGeom prst="rect">
+            <a:avLst/>
+          </a:prstGeom>
+        </p:spPr>
+      </p:pic>
+      <p:sp>
+        <p:nvSpPr>
+          <p:cNvPr id="32" name="TextBox 31"/>
+          <p:cNvSpPr txBox="1"/>
+          <p:nvPr/>
+        </p:nvSpPr>
+        <p:spPr>
+          <a:xfrm>
+            <a:off x="6269583" y="5623560"/>
+            <a:ext cx="3478682" cy="621792"/>
+          </a:xfrm>
+          <a:prstGeom prst="rect">
+            <a:avLst/>
+          </a:prstGeom>
+          <a:noFill/>
+        </p:spPr>
+        <p:txBody>
+          <a:bodyPr wrap="square" anchor="t"/>
+          <a:lstStyle/>
+          <a:p>
+            <a:pPr algn="ctr"/>
+            <a:r>
+              <a:rPr sz="1300" b="1" i="0">
+                <a:solidFill>
+                  <a:srgbClr val="095292"/>
+                </a:solidFill>
+                <a:latin typeface="Calibri"/>
+              </a:rPr>
+              <a:t>la plataforma del curso</a:t>
+            </a:r>
+          </a:p>
+          <a:p>
+            <a:pPr algn="ctr">
+              <a:spcBef>
+                <a:spcPts val="200"/>
+              </a:spcBef>
+            </a:pPr>
+            <a:r>
+              <a:rPr sz="1000" b="0" i="0">
+                <a:solidFill>
+                  <a:srgbClr val="666666"/>
+                </a:solidFill>
+                <a:latin typeface="Calibri"/>
+              </a:rPr>
+              <a:t>Entrega del taller · en la fecha que indique el docente</a:t>
+            </a:r>
+          </a:p>
+        </p:txBody>
+      </p:sp>
+      <p:sp>
+        <p:nvSpPr>
+          <p:cNvPr id="33" name="TextBox 32"/>
           <p:cNvSpPr txBox="1"/>
           <p:nvPr/>
         </p:nvSpPr>
@@ -6914,111 +7426,21 @@
                 </a:solidFill>
                 <a:latin typeface="Calibri"/>
               </a:rPr>
-              <a:t>Taller PI — pasos guiados</a:t>
-            </a:r>
-          </a:p>
-        </p:txBody>
-      </p:sp>
-      <p:sp>
-        <p:nvSpPr>
-          <p:cNvPr id="5" name="Rounded Rectangle 4"/>
-          <p:cNvSpPr/>
-          <p:nvPr/>
-        </p:nvSpPr>
-        <p:spPr>
-          <a:xfrm>
-            <a:off x="457200" y="1234440"/>
-            <a:ext cx="11277295" cy="950976"/>
-          </a:xfrm>
-          <a:prstGeom prst="roundRect">
-            <a:avLst>
-              <a:gd name="adj" fmla="val 12000"/>
-            </a:avLst>
-          </a:prstGeom>
-          <a:solidFill>
-            <a:srgbClr val="F2F2F2"/>
-          </a:solidFill>
-          <a:ln>
-            <a:noFill/>
-          </a:ln>
-        </p:spPr>
-        <p:style>
-          <a:lnRef idx="1">
-            <a:schemeClr val="accent1"/>
-          </a:lnRef>
-          <a:fillRef idx="3">
-            <a:schemeClr val="accent1"/>
-          </a:fillRef>
-          <a:effectRef idx="2">
-            <a:schemeClr val="accent1"/>
-          </a:effectRef>
-          <a:fontRef idx="minor">
-            <a:schemeClr val="lt1"/>
-          </a:fontRef>
-        </p:style>
-        <p:txBody>
-          <a:bodyPr rtlCol="0" anchor="ctr"/>
-          <a:lstStyle/>
-          <a:p>
-            <a:pPr algn="ctr"/>
-          </a:p>
-        </p:txBody>
-      </p:sp>
-      <p:sp>
-        <p:nvSpPr>
-          <p:cNvPr id="6" name="Rounded Rectangle 5"/>
-          <p:cNvSpPr/>
-          <p:nvPr/>
-        </p:nvSpPr>
-        <p:spPr>
-          <a:xfrm>
-            <a:off x="594360" y="1490472"/>
-            <a:ext cx="438912" cy="438912"/>
-          </a:xfrm>
-          <a:prstGeom prst="roundRect">
-            <a:avLst>
-              <a:gd name="adj" fmla="val 12000"/>
-            </a:avLst>
-          </a:prstGeom>
-          <a:solidFill>
-            <a:srgbClr val="095292"/>
-          </a:solidFill>
-          <a:ln>
-            <a:noFill/>
-          </a:ln>
-        </p:spPr>
-        <p:style>
-          <a:lnRef idx="1">
-            <a:schemeClr val="accent1"/>
-          </a:lnRef>
-          <a:fillRef idx="3">
-            <a:schemeClr val="accent1"/>
-          </a:fillRef>
-          <a:effectRef idx="2">
-            <a:schemeClr val="accent1"/>
-          </a:effectRef>
-          <a:fontRef idx="minor">
-            <a:schemeClr val="lt1"/>
-          </a:fontRef>
-        </p:style>
-        <p:txBody>
-          <a:bodyPr rtlCol="0" anchor="ctr"/>
-          <a:lstStyle/>
-          <a:p>
-            <a:pPr algn="ctr"/>
-          </a:p>
-        </p:txBody>
-      </p:sp>
-      <p:sp>
-        <p:nvSpPr>
-          <p:cNvPr id="7" name="TextBox 6"/>
+              <a:t>Taller PI — por que importa</a:t>
+            </a:r>
+          </a:p>
+        </p:txBody>
+      </p:sp>
+      <p:sp>
+        <p:nvSpPr>
+          <p:cNvPr id="5" name="TextBox 4"/>
           <p:cNvSpPr txBox="1"/>
           <p:nvPr/>
         </p:nvSpPr>
         <p:spPr>
           <a:xfrm>
-            <a:off x="594360" y="1490472"/>
-            <a:ext cx="438912" cy="438912"/>
+            <a:off x="457200" y="1170432"/>
+            <a:ext cx="11277295" cy="5230368"/>
           </a:xfrm>
           <a:prstGeom prst="rect">
             <a:avLst/>
@@ -7026,677 +7448,81 @@
           <a:noFill/>
         </p:spPr>
         <p:txBody>
-          <a:bodyPr wrap="square" anchor="ctr"/>
-          <a:lstStyle/>
-          <a:p>
-            <a:pPr algn="ctr"/>
-            <a:r>
-              <a:rPr sz="1600" b="1" i="0">
-                <a:solidFill>
-                  <a:srgbClr val="FFFFFF"/>
-                </a:solidFill>
-                <a:latin typeface="Calibri"/>
-              </a:rPr>
-              <a:t>1</a:t>
-            </a:r>
-          </a:p>
-        </p:txBody>
-      </p:sp>
-      <p:sp>
-        <p:nvSpPr>
-          <p:cNvPr id="8" name="TextBox 7"/>
-          <p:cNvSpPr txBox="1"/>
-          <p:nvPr/>
-        </p:nvSpPr>
-        <p:spPr>
-          <a:xfrm>
-            <a:off x="1188720" y="1325880"/>
-            <a:ext cx="10271455" cy="786384"/>
-          </a:xfrm>
-          <a:prstGeom prst="rect">
-            <a:avLst/>
-          </a:prstGeom>
-          <a:noFill/>
-        </p:spPr>
-        <p:txBody>
-          <a:bodyPr wrap="square" anchor="ctr"/>
-          <a:lstStyle/>
-          <a:p>
-            <a:r>
-              <a:rPr sz="1400" b="1" i="0">
-                <a:solidFill>
-                  <a:srgbClr val="095292"/>
-                </a:solidFill>
-                <a:latin typeface="Calibri"/>
-              </a:rPr>
-              <a:t>Paso 1. En Excalidraw o en papel, dibujen el wireframe en gris de la pantalla Registrar mascota de VetCare, sin colores ni logos, ubicando bloque de dueño, bloque de datos de la mascota y zona de accion; el wireframe debe caber en una sola vista sin scroll y no puede tener mas de nueve campos.</a:t>
-            </a:r>
-          </a:p>
-        </p:txBody>
-      </p:sp>
-      <p:sp>
-        <p:nvSpPr>
-          <p:cNvPr id="9" name="Rounded Rectangle 8"/>
-          <p:cNvSpPr/>
-          <p:nvPr/>
-        </p:nvSpPr>
-        <p:spPr>
-          <a:xfrm>
-            <a:off x="457200" y="2276856"/>
-            <a:ext cx="11277295" cy="950976"/>
-          </a:xfrm>
-          <a:prstGeom prst="roundRect">
-            <a:avLst>
-              <a:gd name="adj" fmla="val 12000"/>
-            </a:avLst>
-          </a:prstGeom>
-          <a:solidFill>
-            <a:srgbClr val="E8F4FA"/>
-          </a:solidFill>
-          <a:ln>
-            <a:noFill/>
-          </a:ln>
-        </p:spPr>
-        <p:style>
-          <a:lnRef idx="1">
-            <a:schemeClr val="accent1"/>
-          </a:lnRef>
-          <a:fillRef idx="3">
-            <a:schemeClr val="accent1"/>
-          </a:fillRef>
-          <a:effectRef idx="2">
-            <a:schemeClr val="accent1"/>
-          </a:effectRef>
-          <a:fontRef idx="minor">
-            <a:schemeClr val="lt1"/>
-          </a:fontRef>
-        </p:style>
-        <p:txBody>
-          <a:bodyPr rtlCol="0" anchor="ctr"/>
-          <a:lstStyle/>
-          <a:p>
-            <a:pPr algn="ctr"/>
-          </a:p>
-        </p:txBody>
-      </p:sp>
-      <p:sp>
-        <p:nvSpPr>
-          <p:cNvPr id="10" name="Rounded Rectangle 9"/>
-          <p:cNvSpPr/>
-          <p:nvPr/>
-        </p:nvSpPr>
-        <p:spPr>
-          <a:xfrm>
-            <a:off x="594360" y="2532888"/>
-            <a:ext cx="438912" cy="438912"/>
-          </a:xfrm>
-          <a:prstGeom prst="roundRect">
-            <a:avLst>
-              <a:gd name="adj" fmla="val 12000"/>
-            </a:avLst>
-          </a:prstGeom>
-          <a:solidFill>
-            <a:srgbClr val="095292"/>
-          </a:solidFill>
-          <a:ln>
-            <a:noFill/>
-          </a:ln>
-        </p:spPr>
-        <p:style>
-          <a:lnRef idx="1">
-            <a:schemeClr val="accent1"/>
-          </a:lnRef>
-          <a:fillRef idx="3">
-            <a:schemeClr val="accent1"/>
-          </a:fillRef>
-          <a:effectRef idx="2">
-            <a:schemeClr val="accent1"/>
-          </a:effectRef>
-          <a:fontRef idx="minor">
-            <a:schemeClr val="lt1"/>
-          </a:fontRef>
-        </p:style>
-        <p:txBody>
-          <a:bodyPr rtlCol="0" anchor="ctr"/>
-          <a:lstStyle/>
-          <a:p>
-            <a:pPr algn="ctr"/>
-          </a:p>
-        </p:txBody>
-      </p:sp>
-      <p:sp>
-        <p:nvSpPr>
-          <p:cNvPr id="11" name="TextBox 10"/>
-          <p:cNvSpPr txBox="1"/>
-          <p:nvPr/>
-        </p:nvSpPr>
-        <p:spPr>
-          <a:xfrm>
-            <a:off x="594360" y="2532888"/>
-            <a:ext cx="438912" cy="438912"/>
-          </a:xfrm>
-          <a:prstGeom prst="rect">
-            <a:avLst/>
-          </a:prstGeom>
-          <a:noFill/>
-        </p:spPr>
-        <p:txBody>
-          <a:bodyPr wrap="square" anchor="ctr"/>
-          <a:lstStyle/>
-          <a:p>
-            <a:pPr algn="ctr"/>
-            <a:r>
-              <a:rPr sz="1600" b="1" i="0">
-                <a:solidFill>
-                  <a:srgbClr val="FFFFFF"/>
-                </a:solidFill>
-                <a:latin typeface="Calibri"/>
-              </a:rPr>
-              <a:t>2</a:t>
-            </a:r>
-          </a:p>
-        </p:txBody>
-      </p:sp>
-      <p:sp>
-        <p:nvSpPr>
-          <p:cNvPr id="12" name="TextBox 11"/>
-          <p:cNvSpPr txBox="1"/>
-          <p:nvPr/>
-        </p:nvSpPr>
-        <p:spPr>
-          <a:xfrm>
-            <a:off x="1188720" y="2368296"/>
-            <a:ext cx="10271455" cy="786384"/>
-          </a:xfrm>
-          <a:prstGeom prst="rect">
-            <a:avLst/>
-          </a:prstGeom>
-          <a:noFill/>
-        </p:spPr>
-        <p:txBody>
-          <a:bodyPr wrap="square" anchor="ctr"/>
-          <a:lstStyle/>
-          <a:p>
-            <a:r>
-              <a:rPr sz="1400" b="1" i="0">
-                <a:solidFill>
-                  <a:srgbClr val="095292"/>
-                </a:solidFill>
-                <a:latin typeface="Calibri"/>
-              </a:rPr>
-              <a:t>Paso 2. Numeren de uno a seis los elementos criticos del wireframe y llenen la tabla de anotaciones indicando para cada numero el atributo del diccionario de datos que lo respalda, el RF que lo exige y si es obligatorio u opcional; si un elemento no tiene RF, borrenlo o creen el requisito y dejenlo escrito.</a:t>
-            </a:r>
-          </a:p>
-        </p:txBody>
-      </p:sp>
-      <p:sp>
-        <p:nvSpPr>
-          <p:cNvPr id="13" name="Rounded Rectangle 12"/>
-          <p:cNvSpPr/>
-          <p:nvPr/>
-        </p:nvSpPr>
-        <p:spPr>
-          <a:xfrm>
-            <a:off x="457200" y="3319272"/>
-            <a:ext cx="11277295" cy="950976"/>
-          </a:xfrm>
-          <a:prstGeom prst="roundRect">
-            <a:avLst>
-              <a:gd name="adj" fmla="val 12000"/>
-            </a:avLst>
-          </a:prstGeom>
-          <a:solidFill>
-            <a:srgbClr val="F2F2F2"/>
-          </a:solidFill>
-          <a:ln>
-            <a:noFill/>
-          </a:ln>
-        </p:spPr>
-        <p:style>
-          <a:lnRef idx="1">
-            <a:schemeClr val="accent1"/>
-          </a:lnRef>
-          <a:fillRef idx="3">
-            <a:schemeClr val="accent1"/>
-          </a:fillRef>
-          <a:effectRef idx="2">
-            <a:schemeClr val="accent1"/>
-          </a:effectRef>
-          <a:fontRef idx="minor">
-            <a:schemeClr val="lt1"/>
-          </a:fontRef>
-        </p:style>
-        <p:txBody>
-          <a:bodyPr rtlCol="0" anchor="ctr"/>
-          <a:lstStyle/>
-          <a:p>
-            <a:pPr algn="ctr"/>
-          </a:p>
-        </p:txBody>
-      </p:sp>
-      <p:sp>
-        <p:nvSpPr>
-          <p:cNvPr id="14" name="Rounded Rectangle 13"/>
-          <p:cNvSpPr/>
-          <p:nvPr/>
-        </p:nvSpPr>
-        <p:spPr>
-          <a:xfrm>
-            <a:off x="594360" y="3575304"/>
-            <a:ext cx="438912" cy="438912"/>
-          </a:xfrm>
-          <a:prstGeom prst="roundRect">
-            <a:avLst>
-              <a:gd name="adj" fmla="val 12000"/>
-            </a:avLst>
-          </a:prstGeom>
-          <a:solidFill>
-            <a:srgbClr val="095292"/>
-          </a:solidFill>
-          <a:ln>
-            <a:noFill/>
-          </a:ln>
-        </p:spPr>
-        <p:style>
-          <a:lnRef idx="1">
-            <a:schemeClr val="accent1"/>
-          </a:lnRef>
-          <a:fillRef idx="3">
-            <a:schemeClr val="accent1"/>
-          </a:fillRef>
-          <a:effectRef idx="2">
-            <a:schemeClr val="accent1"/>
-          </a:effectRef>
-          <a:fontRef idx="minor">
-            <a:schemeClr val="lt1"/>
-          </a:fontRef>
-        </p:style>
-        <p:txBody>
-          <a:bodyPr rtlCol="0" anchor="ctr"/>
-          <a:lstStyle/>
-          <a:p>
-            <a:pPr algn="ctr"/>
-          </a:p>
-        </p:txBody>
-      </p:sp>
-      <p:sp>
-        <p:nvSpPr>
-          <p:cNvPr id="15" name="TextBox 14"/>
-          <p:cNvSpPr txBox="1"/>
-          <p:nvPr/>
-        </p:nvSpPr>
-        <p:spPr>
-          <a:xfrm>
-            <a:off x="594360" y="3575304"/>
-            <a:ext cx="438912" cy="438912"/>
-          </a:xfrm>
-          <a:prstGeom prst="rect">
-            <a:avLst/>
-          </a:prstGeom>
-          <a:noFill/>
-        </p:spPr>
-        <p:txBody>
-          <a:bodyPr wrap="square" anchor="ctr"/>
-          <a:lstStyle/>
-          <a:p>
-            <a:pPr algn="ctr"/>
-            <a:r>
-              <a:rPr sz="1600" b="1" i="0">
-                <a:solidFill>
-                  <a:srgbClr val="FFFFFF"/>
-                </a:solidFill>
-                <a:latin typeface="Calibri"/>
-              </a:rPr>
-              <a:t>3</a:t>
-            </a:r>
-          </a:p>
-        </p:txBody>
-      </p:sp>
-      <p:sp>
-        <p:nvSpPr>
-          <p:cNvPr id="16" name="TextBox 15"/>
-          <p:cNvSpPr txBox="1"/>
-          <p:nvPr/>
-        </p:nvSpPr>
-        <p:spPr>
-          <a:xfrm>
-            <a:off x="1188720" y="3410712"/>
-            <a:ext cx="10271455" cy="786384"/>
-          </a:xfrm>
-          <a:prstGeom prst="rect">
-            <a:avLst/>
-          </a:prstGeom>
-          <a:noFill/>
-        </p:spPr>
-        <p:txBody>
-          <a:bodyPr wrap="square" anchor="ctr"/>
-          <a:lstStyle/>
-          <a:p>
-            <a:r>
-              <a:rPr sz="1400" b="1" i="0">
-                <a:solidFill>
-                  <a:srgbClr val="095292"/>
-                </a:solidFill>
-                <a:latin typeface="Calibri"/>
-              </a:rPr>
-              <a:t>Paso 3. Diseñen la pantalla Buscar expediente resolviendo explicitamente el caso de resultados multiples: definan los tres criterios de busqueda, las columnas de la lista de resultados que permiten desambiguar y el mensaje exacto que se muestra cuando no hay ningun resultado.</a:t>
-            </a:r>
-          </a:p>
-        </p:txBody>
-      </p:sp>
-      <p:sp>
-        <p:nvSpPr>
-          <p:cNvPr id="17" name="Rounded Rectangle 16"/>
-          <p:cNvSpPr/>
-          <p:nvPr/>
-        </p:nvSpPr>
-        <p:spPr>
-          <a:xfrm>
-            <a:off x="457200" y="4361688"/>
-            <a:ext cx="11277295" cy="950976"/>
-          </a:xfrm>
-          <a:prstGeom prst="roundRect">
-            <a:avLst>
-              <a:gd name="adj" fmla="val 12000"/>
-            </a:avLst>
-          </a:prstGeom>
-          <a:solidFill>
-            <a:srgbClr val="E8F4FA"/>
-          </a:solidFill>
-          <a:ln>
-            <a:noFill/>
-          </a:ln>
-        </p:spPr>
-        <p:style>
-          <a:lnRef idx="1">
-            <a:schemeClr val="accent1"/>
-          </a:lnRef>
-          <a:fillRef idx="3">
-            <a:schemeClr val="accent1"/>
-          </a:fillRef>
-          <a:effectRef idx="2">
-            <a:schemeClr val="accent1"/>
-          </a:effectRef>
-          <a:fontRef idx="minor">
-            <a:schemeClr val="lt1"/>
-          </a:fontRef>
-        </p:style>
-        <p:txBody>
-          <a:bodyPr rtlCol="0" anchor="ctr"/>
-          <a:lstStyle/>
-          <a:p>
-            <a:pPr algn="ctr"/>
-          </a:p>
-        </p:txBody>
-      </p:sp>
-      <p:sp>
-        <p:nvSpPr>
-          <p:cNvPr id="18" name="Rounded Rectangle 17"/>
-          <p:cNvSpPr/>
-          <p:nvPr/>
-        </p:nvSpPr>
-        <p:spPr>
-          <a:xfrm>
-            <a:off x="594360" y="4617720"/>
-            <a:ext cx="438912" cy="438912"/>
-          </a:xfrm>
-          <a:prstGeom prst="roundRect">
-            <a:avLst>
-              <a:gd name="adj" fmla="val 12000"/>
-            </a:avLst>
-          </a:prstGeom>
-          <a:solidFill>
-            <a:srgbClr val="095292"/>
-          </a:solidFill>
-          <a:ln>
-            <a:noFill/>
-          </a:ln>
-        </p:spPr>
-        <p:style>
-          <a:lnRef idx="1">
-            <a:schemeClr val="accent1"/>
-          </a:lnRef>
-          <a:fillRef idx="3">
-            <a:schemeClr val="accent1"/>
-          </a:fillRef>
-          <a:effectRef idx="2">
-            <a:schemeClr val="accent1"/>
-          </a:effectRef>
-          <a:fontRef idx="minor">
-            <a:schemeClr val="lt1"/>
-          </a:fontRef>
-        </p:style>
-        <p:txBody>
-          <a:bodyPr rtlCol="0" anchor="ctr"/>
-          <a:lstStyle/>
-          <a:p>
-            <a:pPr algn="ctr"/>
-          </a:p>
-        </p:txBody>
-      </p:sp>
-      <p:sp>
-        <p:nvSpPr>
-          <p:cNvPr id="19" name="TextBox 18"/>
-          <p:cNvSpPr txBox="1"/>
-          <p:nvPr/>
-        </p:nvSpPr>
-        <p:spPr>
-          <a:xfrm>
-            <a:off x="594360" y="4617720"/>
-            <a:ext cx="438912" cy="438912"/>
-          </a:xfrm>
-          <a:prstGeom prst="rect">
-            <a:avLst/>
-          </a:prstGeom>
-          <a:noFill/>
-        </p:spPr>
-        <p:txBody>
-          <a:bodyPr wrap="square" anchor="ctr"/>
-          <a:lstStyle/>
-          <a:p>
-            <a:pPr algn="ctr"/>
-            <a:r>
-              <a:rPr sz="1600" b="1" i="0">
-                <a:solidFill>
-                  <a:srgbClr val="FFFFFF"/>
-                </a:solidFill>
-                <a:latin typeface="Calibri"/>
-              </a:rPr>
-              <a:t>4</a:t>
-            </a:r>
-          </a:p>
-        </p:txBody>
-      </p:sp>
-      <p:sp>
-        <p:nvSpPr>
-          <p:cNvPr id="20" name="TextBox 19"/>
-          <p:cNvSpPr txBox="1"/>
-          <p:nvPr/>
-        </p:nvSpPr>
-        <p:spPr>
-          <a:xfrm>
-            <a:off x="1188720" y="4453128"/>
-            <a:ext cx="10271455" cy="786384"/>
-          </a:xfrm>
-          <a:prstGeom prst="rect">
-            <a:avLst/>
-          </a:prstGeom>
-          <a:noFill/>
-        </p:spPr>
-        <p:txBody>
-          <a:bodyPr wrap="square" anchor="ctr"/>
-          <a:lstStyle/>
-          <a:p>
-            <a:r>
-              <a:rPr sz="1400" b="1" i="0">
-                <a:solidFill>
-                  <a:srgbClr val="095292"/>
-                </a:solidFill>
-                <a:latin typeface="Calibri"/>
-              </a:rPr>
-              <a:t>Paso 4. Pasen las dos pantallas a Figma o Penpot como mockup y conecten minimo tres transiciones navegables: Registrar mascota hacia la confirmacion con codigo, confirmacion hacia Buscar expediente, y un resultado de la lista hacia la ficha del paciente; escriban al lado de cada transicion que principio de usabilidad estan cumpliendo.</a:t>
-            </a:r>
-          </a:p>
-        </p:txBody>
-      </p:sp>
-      <p:sp>
-        <p:nvSpPr>
-          <p:cNvPr id="21" name="Rounded Rectangle 20"/>
-          <p:cNvSpPr/>
-          <p:nvPr/>
-        </p:nvSpPr>
-        <p:spPr>
-          <a:xfrm>
-            <a:off x="457200" y="5404104"/>
-            <a:ext cx="11277295" cy="950976"/>
-          </a:xfrm>
-          <a:prstGeom prst="roundRect">
-            <a:avLst>
-              <a:gd name="adj" fmla="val 12000"/>
-            </a:avLst>
-          </a:prstGeom>
-          <a:solidFill>
-            <a:srgbClr val="F2F2F2"/>
-          </a:solidFill>
-          <a:ln>
-            <a:noFill/>
-          </a:ln>
-        </p:spPr>
-        <p:style>
-          <a:lnRef idx="1">
-            <a:schemeClr val="accent1"/>
-          </a:lnRef>
-          <a:fillRef idx="3">
-            <a:schemeClr val="accent1"/>
-          </a:fillRef>
-          <a:effectRef idx="2">
-            <a:schemeClr val="accent1"/>
-          </a:effectRef>
-          <a:fontRef idx="minor">
-            <a:schemeClr val="lt1"/>
-          </a:fontRef>
-        </p:style>
-        <p:txBody>
-          <a:bodyPr rtlCol="0" anchor="ctr"/>
-          <a:lstStyle/>
-          <a:p>
-            <a:pPr algn="ctr"/>
-          </a:p>
-        </p:txBody>
-      </p:sp>
-      <p:sp>
-        <p:nvSpPr>
-          <p:cNvPr id="22" name="Rounded Rectangle 21"/>
-          <p:cNvSpPr/>
-          <p:nvPr/>
-        </p:nvSpPr>
-        <p:spPr>
-          <a:xfrm>
-            <a:off x="594360" y="5660136"/>
-            <a:ext cx="438912" cy="438912"/>
-          </a:xfrm>
-          <a:prstGeom prst="roundRect">
-            <a:avLst>
-              <a:gd name="adj" fmla="val 12000"/>
-            </a:avLst>
-          </a:prstGeom>
-          <a:solidFill>
-            <a:srgbClr val="095292"/>
-          </a:solidFill>
-          <a:ln>
-            <a:noFill/>
-          </a:ln>
-        </p:spPr>
-        <p:style>
-          <a:lnRef idx="1">
-            <a:schemeClr val="accent1"/>
-          </a:lnRef>
-          <a:fillRef idx="3">
-            <a:schemeClr val="accent1"/>
-          </a:fillRef>
-          <a:effectRef idx="2">
-            <a:schemeClr val="accent1"/>
-          </a:effectRef>
-          <a:fontRef idx="minor">
-            <a:schemeClr val="lt1"/>
-          </a:fontRef>
-        </p:style>
-        <p:txBody>
-          <a:bodyPr rtlCol="0" anchor="ctr"/>
-          <a:lstStyle/>
-          <a:p>
-            <a:pPr algn="ctr"/>
-          </a:p>
-        </p:txBody>
-      </p:sp>
-      <p:sp>
-        <p:nvSpPr>
-          <p:cNvPr id="23" name="TextBox 22"/>
-          <p:cNvSpPr txBox="1"/>
-          <p:nvPr/>
-        </p:nvSpPr>
-        <p:spPr>
-          <a:xfrm>
-            <a:off x="594360" y="5660136"/>
-            <a:ext cx="438912" cy="438912"/>
-          </a:xfrm>
-          <a:prstGeom prst="rect">
-            <a:avLst/>
-          </a:prstGeom>
-          <a:noFill/>
-        </p:spPr>
-        <p:txBody>
-          <a:bodyPr wrap="square" anchor="ctr"/>
-          <a:lstStyle/>
-          <a:p>
-            <a:pPr algn="ctr"/>
-            <a:r>
-              <a:rPr sz="1600" b="1" i="0">
-                <a:solidFill>
-                  <a:srgbClr val="FFFFFF"/>
-                </a:solidFill>
-                <a:latin typeface="Calibri"/>
-              </a:rPr>
-              <a:t>5</a:t>
-            </a:r>
-          </a:p>
-        </p:txBody>
-      </p:sp>
-      <p:sp>
-        <p:nvSpPr>
-          <p:cNvPr id="24" name="TextBox 23"/>
-          <p:cNvSpPr txBox="1"/>
-          <p:nvPr/>
-        </p:nvSpPr>
-        <p:spPr>
-          <a:xfrm>
-            <a:off x="1188720" y="5495544"/>
-            <a:ext cx="10271455" cy="786384"/>
-          </a:xfrm>
-          <a:prstGeom prst="rect">
-            <a:avLst/>
-          </a:prstGeom>
-          <a:noFill/>
-        </p:spPr>
-        <p:txBody>
-          <a:bodyPr wrap="square" anchor="ctr"/>
-          <a:lstStyle/>
-          <a:p>
-            <a:r>
-              <a:rPr sz="1400" b="1" i="0">
-                <a:solidFill>
-                  <a:srgbClr val="095292"/>
-                </a:solidFill>
-                <a:latin typeface="Calibri"/>
-              </a:rPr>
-              <a:t>Paso 5. Hagan prueba de pasillo con otro compañero, denle la tarea registrar la mascota Luna de la señora Perez y encontrar su ficha, no le expliquen nada, cronometren, cuenten clics y anoten los dos puntos donde dudo; escriban abajo los dos cambios concretos que haran al diseño por lo observado.</a:t>
-            </a:r>
-          </a:p>
-        </p:txBody>
-      </p:sp>
-      <p:sp>
-        <p:nvSpPr>
-          <p:cNvPr id="25" name="TextBox 24"/>
+          <a:bodyPr wrap="square">
+            <a:spAutoFit/>
+          </a:bodyPr>
+          <a:lstStyle/>
+          <a:p>
+            <a:pPr>
+              <a:spcAft>
+                <a:spcPts val="800"/>
+              </a:spcAft>
+            </a:pPr>
+            <a:r>
+              <a:rPr sz="2000" b="0" i="0">
+                <a:solidFill>
+                  <a:srgbClr val="333333"/>
+                </a:solidFill>
+                <a:latin typeface="Calibri"/>
+              </a:rPr>
+              <a:t>–   </a:t>
+            </a:r>
+            <a:r>
+              <a:rPr sz="2000" b="1" i="0">
+                <a:solidFill>
+                  <a:srgbClr val="333333"/>
+                </a:solidFill>
+                <a:latin typeface="Calibri"/>
+              </a:rPr>
+              <a:t>Por que importa al PI:</a:t>
+            </a:r>
+            <a:r>
+              <a:rPr sz="2000" b="0" i="0">
+                <a:solidFill>
+                  <a:srgbClr val="333333"/>
+                </a:solidFill>
+                <a:latin typeface="Calibri"/>
+              </a:rPr>
+              <a:t> la interfaz es la cara visible del paquete de diseño de VetCare y es lo unico del PI que la clinica Huellitas entiende sin traduccion; ademas es el insumo directo con el que Programacion II construye las pantallas reales.</a:t>
+            </a:r>
+          </a:p>
+          <a:p>
+            <a:pPr>
+              <a:spcAft>
+                <a:spcPts val="800"/>
+              </a:spcAft>
+            </a:pPr>
+            <a:r>
+              <a:rPr sz="2000" b="0" i="0">
+                <a:solidFill>
+                  <a:srgbClr val="333333"/>
+                </a:solidFill>
+                <a:latin typeface="Calibri"/>
+              </a:rPr>
+              <a:t>–   Es la ultima clase con tema nuevo del curso: lo que se produzca hoy entra tal cual al documento final y a la sustentacion de la clase 14.</a:t>
+            </a:r>
+          </a:p>
+          <a:p>
+            <a:pPr>
+              <a:spcAft>
+                <a:spcPts val="800"/>
+              </a:spcAft>
+            </a:pPr>
+            <a:r>
+              <a:rPr sz="2000" b="0" i="0">
+                <a:solidFill>
+                  <a:srgbClr val="333333"/>
+                </a:solidFill>
+                <a:latin typeface="Calibri"/>
+              </a:rPr>
+              <a:t>–   Quien va solo por la ruta C cierra su PI con este prototipo navegable, que es entregable completo y valido por si mismo, no una version recortada del proyecto.</a:t>
+            </a:r>
+          </a:p>
+        </p:txBody>
+      </p:sp>
+      <p:sp>
+        <p:nvSpPr>
+          <p:cNvPr id="6" name="TextBox 5"/>
           <p:cNvSpPr txBox="1"/>
           <p:nvPr/>
         </p:nvSpPr>
@@ -7870,154 +7696,21 @@
                 </a:solidFill>
                 <a:latin typeface="Calibri"/>
               </a:rPr>
-              <a:t>Antes de entregar — autochequeo</a:t>
-            </a:r>
-          </a:p>
-        </p:txBody>
-      </p:sp>
-      <p:sp>
-        <p:nvSpPr>
-          <p:cNvPr id="5" name="Rounded Rectangle 4"/>
-          <p:cNvSpPr/>
-          <p:nvPr/>
-        </p:nvSpPr>
-        <p:spPr>
-          <a:xfrm>
-            <a:off x="457200" y="1261872"/>
-            <a:ext cx="11277295" cy="566928"/>
-          </a:xfrm>
-          <a:prstGeom prst="roundRect">
-            <a:avLst>
-              <a:gd name="adj" fmla="val 12000"/>
-            </a:avLst>
-          </a:prstGeom>
-          <a:solidFill>
-            <a:srgbClr val="F2F2F2"/>
-          </a:solidFill>
-          <a:ln>
-            <a:noFill/>
-          </a:ln>
-        </p:spPr>
-        <p:style>
-          <a:lnRef idx="1">
-            <a:schemeClr val="accent1"/>
-          </a:lnRef>
-          <a:fillRef idx="3">
-            <a:schemeClr val="accent1"/>
-          </a:fillRef>
-          <a:effectRef idx="2">
-            <a:schemeClr val="accent1"/>
-          </a:effectRef>
-          <a:fontRef idx="minor">
-            <a:schemeClr val="lt1"/>
-          </a:fontRef>
-        </p:style>
-        <p:txBody>
-          <a:bodyPr rtlCol="0" anchor="ctr"/>
-          <a:lstStyle/>
-          <a:p>
-            <a:pPr algn="ctr"/>
-          </a:p>
-        </p:txBody>
-      </p:sp>
-      <p:sp>
-        <p:nvSpPr>
-          <p:cNvPr id="6" name="Rectangle 5"/>
-          <p:cNvSpPr/>
-          <p:nvPr/>
-        </p:nvSpPr>
-        <p:spPr>
-          <a:xfrm>
-            <a:off x="640080" y="1408175"/>
-            <a:ext cx="274320" cy="274320"/>
-          </a:xfrm>
-          <a:prstGeom prst="rect">
-            <a:avLst/>
-          </a:prstGeom>
-          <a:solidFill>
-            <a:srgbClr val="FFFFFF"/>
-          </a:solidFill>
-          <a:ln>
-            <a:solidFill>
-              <a:srgbClr val="333333"/>
-            </a:solidFill>
-          </a:ln>
-        </p:spPr>
-        <p:style>
-          <a:lnRef idx="1">
-            <a:schemeClr val="accent1"/>
-          </a:lnRef>
-          <a:fillRef idx="3">
-            <a:schemeClr val="accent1"/>
-          </a:fillRef>
-          <a:effectRef idx="2">
-            <a:schemeClr val="accent1"/>
-          </a:effectRef>
-          <a:fontRef idx="minor">
-            <a:schemeClr val="lt1"/>
-          </a:fontRef>
-        </p:style>
-        <p:txBody>
-          <a:bodyPr rtlCol="0" anchor="ctr"/>
-          <a:lstStyle/>
-          <a:p>
-            <a:pPr algn="ctr"/>
-          </a:p>
-        </p:txBody>
-      </p:sp>
-      <p:sp>
-        <p:nvSpPr>
-          <p:cNvPr id="7" name="Rectangle 6"/>
-          <p:cNvSpPr/>
-          <p:nvPr/>
-        </p:nvSpPr>
-        <p:spPr>
-          <a:xfrm>
-            <a:off x="640080" y="1408175"/>
-            <a:ext cx="73152" cy="274320"/>
-          </a:xfrm>
-          <a:prstGeom prst="rect">
-            <a:avLst/>
-          </a:prstGeom>
-          <a:solidFill>
-            <a:srgbClr val="269CCB"/>
-          </a:solidFill>
-          <a:ln>
-            <a:noFill/>
-          </a:ln>
-        </p:spPr>
-        <p:style>
-          <a:lnRef idx="1">
-            <a:schemeClr val="accent1"/>
-          </a:lnRef>
-          <a:fillRef idx="3">
-            <a:schemeClr val="accent1"/>
-          </a:fillRef>
-          <a:effectRef idx="2">
-            <a:schemeClr val="accent1"/>
-          </a:effectRef>
-          <a:fontRef idx="minor">
-            <a:schemeClr val="lt1"/>
-          </a:fontRef>
-        </p:style>
-        <p:txBody>
-          <a:bodyPr rtlCol="0" anchor="ctr"/>
-          <a:lstStyle/>
-          <a:p>
-            <a:pPr algn="ctr"/>
-          </a:p>
-        </p:txBody>
-      </p:sp>
-      <p:sp>
-        <p:nvSpPr>
-          <p:cNvPr id="8" name="TextBox 7"/>
+              <a:t>Taller PI — punto de partida</a:t>
+            </a:r>
+          </a:p>
+        </p:txBody>
+      </p:sp>
+      <p:sp>
+        <p:nvSpPr>
+          <p:cNvPr id="5" name="TextBox 4"/>
           <p:cNvSpPr txBox="1"/>
           <p:nvPr/>
         </p:nvSpPr>
         <p:spPr>
           <a:xfrm>
-            <a:off x="1097280" y="1353312"/>
-            <a:ext cx="10362895" cy="402336"/>
+            <a:off x="457200" y="1170432"/>
+            <a:ext cx="11277295" cy="5230368"/>
           </a:xfrm>
           <a:prstGeom prst="rect">
             <a:avLst/>
@@ -8025,354 +7718,63 @@
           <a:noFill/>
         </p:spPr>
         <p:txBody>
-          <a:bodyPr wrap="square" anchor="ctr"/>
-          <a:lstStyle/>
-          <a:p>
-            <a:r>
-              <a:rPr sz="1500" b="0" i="0">
+          <a:bodyPr wrap="square">
+            <a:spAutoFit/>
+          </a:bodyPr>
+          <a:lstStyle/>
+          <a:p>
+            <a:pPr>
+              <a:spcAft>
+                <a:spcPts val="800"/>
+              </a:spcAft>
+            </a:pPr>
+            <a:r>
+              <a:rPr sz="2000" b="0" i="0">
                 <a:solidFill>
                   <a:srgbClr val="333333"/>
                 </a:solidFill>
                 <a:latin typeface="Calibri"/>
               </a:rPr>
-              <a:t>Si la recepcionista oprime Guardar y se va al telefono treinta segundos, cuando vuelva a mirar la pantalla sabe con certeza si el registro quedo o no quedo, y por que lo sabe.</a:t>
-            </a:r>
-          </a:p>
-        </p:txBody>
-      </p:sp>
-      <p:sp>
-        <p:nvSpPr>
-          <p:cNvPr id="9" name="Rounded Rectangle 8"/>
-          <p:cNvSpPr/>
-          <p:nvPr/>
-        </p:nvSpPr>
-        <p:spPr>
-          <a:xfrm>
-            <a:off x="457200" y="1938528"/>
-            <a:ext cx="11277295" cy="566928"/>
-          </a:xfrm>
-          <a:prstGeom prst="roundRect">
-            <a:avLst>
-              <a:gd name="adj" fmla="val 12000"/>
-            </a:avLst>
-          </a:prstGeom>
-          <a:solidFill>
-            <a:srgbClr val="F2F2F2"/>
-          </a:solidFill>
-          <a:ln>
-            <a:noFill/>
-          </a:ln>
-        </p:spPr>
-        <p:style>
-          <a:lnRef idx="1">
-            <a:schemeClr val="accent1"/>
-          </a:lnRef>
-          <a:fillRef idx="3">
-            <a:schemeClr val="accent1"/>
-          </a:fillRef>
-          <a:effectRef idx="2">
-            <a:schemeClr val="accent1"/>
-          </a:effectRef>
-          <a:fontRef idx="minor">
-            <a:schemeClr val="lt1"/>
-          </a:fontRef>
-        </p:style>
-        <p:txBody>
-          <a:bodyPr rtlCol="0" anchor="ctr"/>
-          <a:lstStyle/>
-          <a:p>
-            <a:pPr algn="ctr"/>
-          </a:p>
-        </p:txBody>
-      </p:sp>
-      <p:sp>
-        <p:nvSpPr>
-          <p:cNvPr id="10" name="Rectangle 9"/>
-          <p:cNvSpPr/>
-          <p:nvPr/>
-        </p:nvSpPr>
-        <p:spPr>
-          <a:xfrm>
-            <a:off x="640080" y="2084832"/>
-            <a:ext cx="274320" cy="274320"/>
-          </a:xfrm>
-          <a:prstGeom prst="rect">
-            <a:avLst/>
-          </a:prstGeom>
-          <a:solidFill>
-            <a:srgbClr val="FFFFFF"/>
-          </a:solidFill>
-          <a:ln>
-            <a:solidFill>
-              <a:srgbClr val="333333"/>
-            </a:solidFill>
-          </a:ln>
-        </p:spPr>
-        <p:style>
-          <a:lnRef idx="1">
-            <a:schemeClr val="accent1"/>
-          </a:lnRef>
-          <a:fillRef idx="3">
-            <a:schemeClr val="accent1"/>
-          </a:fillRef>
-          <a:effectRef idx="2">
-            <a:schemeClr val="accent1"/>
-          </a:effectRef>
-          <a:fontRef idx="minor">
-            <a:schemeClr val="lt1"/>
-          </a:fontRef>
-        </p:style>
-        <p:txBody>
-          <a:bodyPr rtlCol="0" anchor="ctr"/>
-          <a:lstStyle/>
-          <a:p>
-            <a:pPr algn="ctr"/>
-          </a:p>
-        </p:txBody>
-      </p:sp>
-      <p:sp>
-        <p:nvSpPr>
-          <p:cNvPr id="11" name="Rectangle 10"/>
-          <p:cNvSpPr/>
-          <p:nvPr/>
-        </p:nvSpPr>
-        <p:spPr>
-          <a:xfrm>
-            <a:off x="640080" y="2084832"/>
-            <a:ext cx="73152" cy="274320"/>
-          </a:xfrm>
-          <a:prstGeom prst="rect">
-            <a:avLst/>
-          </a:prstGeom>
-          <a:solidFill>
-            <a:srgbClr val="269CCB"/>
-          </a:solidFill>
-          <a:ln>
-            <a:noFill/>
-          </a:ln>
-        </p:spPr>
-        <p:style>
-          <a:lnRef idx="1">
-            <a:schemeClr val="accent1"/>
-          </a:lnRef>
-          <a:fillRef idx="3">
-            <a:schemeClr val="accent1"/>
-          </a:fillRef>
-          <a:effectRef idx="2">
-            <a:schemeClr val="accent1"/>
-          </a:effectRef>
-          <a:fontRef idx="minor">
-            <a:schemeClr val="lt1"/>
-          </a:fontRef>
-        </p:style>
-        <p:txBody>
-          <a:bodyPr rtlCol="0" anchor="ctr"/>
-          <a:lstStyle/>
-          <a:p>
-            <a:pPr algn="ctr"/>
-          </a:p>
-        </p:txBody>
-      </p:sp>
-      <p:sp>
-        <p:nvSpPr>
-          <p:cNvPr id="12" name="TextBox 11"/>
-          <p:cNvSpPr txBox="1"/>
-          <p:nvPr/>
-        </p:nvSpPr>
-        <p:spPr>
-          <a:xfrm>
-            <a:off x="1097280" y="2029968"/>
-            <a:ext cx="10362895" cy="402336"/>
-          </a:xfrm>
-          <a:prstGeom prst="rect">
-            <a:avLst/>
-          </a:prstGeom>
-          <a:noFill/>
-        </p:spPr>
-        <p:txBody>
-          <a:bodyPr wrap="square" anchor="ctr"/>
-          <a:lstStyle/>
-          <a:p>
-            <a:r>
-              <a:rPr sz="1500" b="0" i="0">
+              <a:t>–   El equipo ya tiene aprobados los RF y RNF, el diagrama de casos de uso, el de clases con Mascota, Dueño, Historia_Clinica y Cita, y el diccionario de datos con tipos y longitudes.</a:t>
+            </a:r>
+          </a:p>
+          <a:p>
+            <a:pPr>
+              <a:spcAft>
+                <a:spcPts val="800"/>
+              </a:spcAft>
+            </a:pPr>
+            <a:r>
+              <a:rPr sz="2000" b="0" i="0">
                 <a:solidFill>
                   <a:srgbClr val="333333"/>
                 </a:solidFill>
                 <a:latin typeface="Calibri"/>
               </a:rPr>
-              <a:t>De los campos que dibujaron, cuantos podria llenar mal una persona apurada, y cual de esos errores se puede volver imposible en vez de corregible.</a:t>
-            </a:r>
-          </a:p>
-        </p:txBody>
-      </p:sp>
-      <p:sp>
-        <p:nvSpPr>
-          <p:cNvPr id="13" name="Rounded Rectangle 12"/>
-          <p:cNvSpPr/>
-          <p:nvPr/>
-        </p:nvSpPr>
-        <p:spPr>
-          <a:xfrm>
-            <a:off x="457200" y="2615184"/>
-            <a:ext cx="11277295" cy="566928"/>
-          </a:xfrm>
-          <a:prstGeom prst="roundRect">
-            <a:avLst>
-              <a:gd name="adj" fmla="val 12000"/>
-            </a:avLst>
-          </a:prstGeom>
-          <a:solidFill>
-            <a:srgbClr val="F2F2F2"/>
-          </a:solidFill>
-          <a:ln>
-            <a:noFill/>
-          </a:ln>
-        </p:spPr>
-        <p:style>
-          <a:lnRef idx="1">
-            <a:schemeClr val="accent1"/>
-          </a:lnRef>
-          <a:fillRef idx="3">
-            <a:schemeClr val="accent1"/>
-          </a:fillRef>
-          <a:effectRef idx="2">
-            <a:schemeClr val="accent1"/>
-          </a:effectRef>
-          <a:fontRef idx="minor">
-            <a:schemeClr val="lt1"/>
-          </a:fontRef>
-        </p:style>
-        <p:txBody>
-          <a:bodyPr rtlCol="0" anchor="ctr"/>
-          <a:lstStyle/>
-          <a:p>
-            <a:pPr algn="ctr"/>
-          </a:p>
-        </p:txBody>
-      </p:sp>
-      <p:sp>
-        <p:nvSpPr>
-          <p:cNvPr id="14" name="Rectangle 13"/>
-          <p:cNvSpPr/>
-          <p:nvPr/>
-        </p:nvSpPr>
-        <p:spPr>
-          <a:xfrm>
-            <a:off x="640080" y="2761488"/>
-            <a:ext cx="274320" cy="274320"/>
-          </a:xfrm>
-          <a:prstGeom prst="rect">
-            <a:avLst/>
-          </a:prstGeom>
-          <a:solidFill>
-            <a:srgbClr val="FFFFFF"/>
-          </a:solidFill>
-          <a:ln>
-            <a:solidFill>
-              <a:srgbClr val="333333"/>
-            </a:solidFill>
-          </a:ln>
-        </p:spPr>
-        <p:style>
-          <a:lnRef idx="1">
-            <a:schemeClr val="accent1"/>
-          </a:lnRef>
-          <a:fillRef idx="3">
-            <a:schemeClr val="accent1"/>
-          </a:fillRef>
-          <a:effectRef idx="2">
-            <a:schemeClr val="accent1"/>
-          </a:effectRef>
-          <a:fontRef idx="minor">
-            <a:schemeClr val="lt1"/>
-          </a:fontRef>
-        </p:style>
-        <p:txBody>
-          <a:bodyPr rtlCol="0" anchor="ctr"/>
-          <a:lstStyle/>
-          <a:p>
-            <a:pPr algn="ctr"/>
-          </a:p>
-        </p:txBody>
-      </p:sp>
-      <p:sp>
-        <p:nvSpPr>
-          <p:cNvPr id="15" name="Rectangle 14"/>
-          <p:cNvSpPr/>
-          <p:nvPr/>
-        </p:nvSpPr>
-        <p:spPr>
-          <a:xfrm>
-            <a:off x="640080" y="2761488"/>
-            <a:ext cx="73152" cy="274320"/>
-          </a:xfrm>
-          <a:prstGeom prst="rect">
-            <a:avLst/>
-          </a:prstGeom>
-          <a:solidFill>
-            <a:srgbClr val="269CCB"/>
-          </a:solidFill>
-          <a:ln>
-            <a:noFill/>
-          </a:ln>
-        </p:spPr>
-        <p:style>
-          <a:lnRef idx="1">
-            <a:schemeClr val="accent1"/>
-          </a:lnRef>
-          <a:fillRef idx="3">
-            <a:schemeClr val="accent1"/>
-          </a:fillRef>
-          <a:effectRef idx="2">
-            <a:schemeClr val="accent1"/>
-          </a:effectRef>
-          <a:fontRef idx="minor">
-            <a:schemeClr val="lt1"/>
-          </a:fontRef>
-        </p:style>
-        <p:txBody>
-          <a:bodyPr rtlCol="0" anchor="ctr"/>
-          <a:lstStyle/>
-          <a:p>
-            <a:pPr algn="ctr"/>
-          </a:p>
-        </p:txBody>
-      </p:sp>
-      <p:sp>
-        <p:nvSpPr>
-          <p:cNvPr id="16" name="TextBox 15"/>
-          <p:cNvSpPr txBox="1"/>
-          <p:nvPr/>
-        </p:nvSpPr>
-        <p:spPr>
-          <a:xfrm>
-            <a:off x="1097280" y="2706624"/>
-            <a:ext cx="10362895" cy="402336"/>
-          </a:xfrm>
-          <a:prstGeom prst="rect">
-            <a:avLst/>
-          </a:prstGeom>
-          <a:noFill/>
-        </p:spPr>
-        <p:txBody>
-          <a:bodyPr wrap="square" anchor="ctr"/>
-          <a:lstStyle/>
-          <a:p>
-            <a:r>
-              <a:rPr sz="1500" b="0" i="0">
+              <a:t>–   Hasta hoy VetCare existe solo como texto y diagramas: nadie ha visto todavia como se veria la pantalla que va a usar la recepcionista de Huellitas.</a:t>
+            </a:r>
+          </a:p>
+          <a:p>
+            <a:pPr>
+              <a:spcAft>
+                <a:spcPts val="800"/>
+              </a:spcAft>
+            </a:pPr>
+            <a:r>
+              <a:rPr sz="2000" b="0" i="0">
                 <a:solidFill>
                   <a:srgbClr val="333333"/>
                 </a:solidFill>
                 <a:latin typeface="Calibri"/>
               </a:rPr>
-              <a:t>Si la busqueda por nombre devuelve doce mascotas llamadas Firulais, que dato adicional muestra la lista para que la recepcionista escoja la correcta sin abrir ninguna ficha.</a:t>
-            </a:r>
-          </a:p>
-        </p:txBody>
-      </p:sp>
-      <p:sp>
-        <p:nvSpPr>
-          <p:cNvPr id="17" name="TextBox 16"/>
+              <a:t>–   La usuaria de referencia esta descrita asi: recepcionista con experiencia clinica alta y experiencia informatica baja, atiende telefono mientras registra y necesita terminar el registro de un paciente nuevo en menos de dos minutos.</a:t>
+            </a:r>
+          </a:p>
+        </p:txBody>
+      </p:sp>
+      <p:sp>
+        <p:nvSpPr>
+          <p:cNvPr id="6" name="TextBox 5"/>
           <p:cNvSpPr txBox="1"/>
           <p:nvPr/>
         </p:nvSpPr>
@@ -8546,21 +7948,111 @@
                 </a:solidFill>
                 <a:latin typeface="Calibri"/>
               </a:rPr>
-              <a:t>Criterios de exito / entregable</a:t>
-            </a:r>
-          </a:p>
-        </p:txBody>
-      </p:sp>
-      <p:sp>
-        <p:nvSpPr>
-          <p:cNvPr id="5" name="TextBox 4"/>
+              <a:t>Taller PI — pasos guiados</a:t>
+            </a:r>
+          </a:p>
+        </p:txBody>
+      </p:sp>
+      <p:sp>
+        <p:nvSpPr>
+          <p:cNvPr id="5" name="Rounded Rectangle 4"/>
+          <p:cNvSpPr/>
+          <p:nvPr/>
+        </p:nvSpPr>
+        <p:spPr>
+          <a:xfrm>
+            <a:off x="457200" y="1234440"/>
+            <a:ext cx="11277295" cy="950976"/>
+          </a:xfrm>
+          <a:prstGeom prst="roundRect">
+            <a:avLst>
+              <a:gd name="adj" fmla="val 12000"/>
+            </a:avLst>
+          </a:prstGeom>
+          <a:solidFill>
+            <a:srgbClr val="F2F2F2"/>
+          </a:solidFill>
+          <a:ln>
+            <a:noFill/>
+          </a:ln>
+        </p:spPr>
+        <p:style>
+          <a:lnRef idx="1">
+            <a:schemeClr val="accent1"/>
+          </a:lnRef>
+          <a:fillRef idx="3">
+            <a:schemeClr val="accent1"/>
+          </a:fillRef>
+          <a:effectRef idx="2">
+            <a:schemeClr val="accent1"/>
+          </a:effectRef>
+          <a:fontRef idx="minor">
+            <a:schemeClr val="lt1"/>
+          </a:fontRef>
+        </p:style>
+        <p:txBody>
+          <a:bodyPr rtlCol="0" anchor="ctr"/>
+          <a:lstStyle/>
+          <a:p>
+            <a:pPr algn="ctr"/>
+          </a:p>
+        </p:txBody>
+      </p:sp>
+      <p:sp>
+        <p:nvSpPr>
+          <p:cNvPr id="6" name="Rounded Rectangle 5"/>
+          <p:cNvSpPr/>
+          <p:nvPr/>
+        </p:nvSpPr>
+        <p:spPr>
+          <a:xfrm>
+            <a:off x="594360" y="1490472"/>
+            <a:ext cx="438912" cy="438912"/>
+          </a:xfrm>
+          <a:prstGeom prst="roundRect">
+            <a:avLst>
+              <a:gd name="adj" fmla="val 12000"/>
+            </a:avLst>
+          </a:prstGeom>
+          <a:solidFill>
+            <a:srgbClr val="095292"/>
+          </a:solidFill>
+          <a:ln>
+            <a:noFill/>
+          </a:ln>
+        </p:spPr>
+        <p:style>
+          <a:lnRef idx="1">
+            <a:schemeClr val="accent1"/>
+          </a:lnRef>
+          <a:fillRef idx="3">
+            <a:schemeClr val="accent1"/>
+          </a:fillRef>
+          <a:effectRef idx="2">
+            <a:schemeClr val="accent1"/>
+          </a:effectRef>
+          <a:fontRef idx="minor">
+            <a:schemeClr val="lt1"/>
+          </a:fontRef>
+        </p:style>
+        <p:txBody>
+          <a:bodyPr rtlCol="0" anchor="ctr"/>
+          <a:lstStyle/>
+          <a:p>
+            <a:pPr algn="ctr"/>
+          </a:p>
+        </p:txBody>
+      </p:sp>
+      <p:sp>
+        <p:nvSpPr>
+          <p:cNvPr id="7" name="TextBox 6"/>
           <p:cNvSpPr txBox="1"/>
           <p:nvPr/>
         </p:nvSpPr>
         <p:spPr>
           <a:xfrm>
-            <a:off x="457200" y="1170432"/>
-            <a:ext cx="11277295" cy="5230368"/>
+            <a:off x="594360" y="1490472"/>
+            <a:ext cx="438912" cy="438912"/>
           </a:xfrm>
           <a:prstGeom prst="rect">
             <a:avLst/>
@@ -8568,219 +8060,677 @@
           <a:noFill/>
         </p:spPr>
         <p:txBody>
-          <a:bodyPr wrap="square">
-            <a:spAutoFit/>
-          </a:bodyPr>
-          <a:lstStyle/>
-          <a:p>
-            <a:pPr>
-              <a:spcAft>
-                <a:spcPts val="800"/>
-              </a:spcAft>
-            </a:pPr>
-            <a:r>
-              <a:rPr sz="2000" b="0" i="0">
-                <a:solidFill>
-                  <a:srgbClr val="333333"/>
-                </a:solidFill>
-                <a:latin typeface="Calibri"/>
-              </a:rPr>
-              <a:t>–   </a:t>
-            </a:r>
-            <a:r>
-              <a:rPr sz="2000" b="1" i="0">
-                <a:solidFill>
-                  <a:srgbClr val="333333"/>
-                </a:solidFill>
-                <a:latin typeface="Calibri"/>
-              </a:rPr>
-              <a:t>Entregable:</a:t>
-            </a:r>
-            <a:r>
-              <a:rPr sz="2000" b="0" i="0">
-                <a:solidFill>
-                  <a:srgbClr val="333333"/>
-                </a:solidFill>
-                <a:latin typeface="Calibri"/>
-              </a:rPr>
-              <a:t> Un archivo de Figma o Penpot con las dos pantallas anotadas y minimo tres transiciones navegables, mas la hoja de anotaciones que amarra cada campo a un RF y a un atributo del diccionario de datos, subido a la plataforma del curso.</a:t>
-            </a:r>
-          </a:p>
-          <a:p>
-            <a:pPr>
-              <a:spcAft>
-                <a:spcPts val="800"/>
-              </a:spcAft>
-            </a:pPr>
-            <a:r>
-              <a:rPr sz="2000" b="0" i="0">
-                <a:solidFill>
-                  <a:srgbClr val="333333"/>
-                </a:solidFill>
-                <a:latin typeface="Calibri"/>
-              </a:rPr>
-              <a:t>–   </a:t>
-            </a:r>
-            <a:r>
-              <a:rPr sz="2000" b="1" i="0">
-                <a:solidFill>
-                  <a:srgbClr val="333333"/>
-                </a:solidFill>
-                <a:latin typeface="Calibri"/>
-              </a:rPr>
-              <a:t>Exito:</a:t>
-            </a:r>
-            <a:r>
-              <a:rPr sz="2000" b="0" i="0">
-                <a:solidFill>
-                  <a:srgbClr val="333333"/>
-                </a:solidFill>
-                <a:latin typeface="Calibri"/>
-              </a:rPr>
-              <a:t> Las dos pantallas se entregan primero como wireframe en gris y luego como mockup, y ambas versiones estan en el archivo entregado.</a:t>
-            </a:r>
-          </a:p>
-          <a:p>
-            <a:pPr>
-              <a:spcAft>
-                <a:spcPts val="800"/>
-              </a:spcAft>
-            </a:pPr>
-            <a:r>
-              <a:rPr sz="2000" b="0" i="0">
-                <a:solidFill>
-                  <a:srgbClr val="333333"/>
-                </a:solidFill>
-                <a:latin typeface="Calibri"/>
-              </a:rPr>
-              <a:t>–   </a:t>
-            </a:r>
-            <a:r>
-              <a:rPr sz="2000" b="1" i="0">
-                <a:solidFill>
-                  <a:srgbClr val="333333"/>
-                </a:solidFill>
-                <a:latin typeface="Calibri"/>
-              </a:rPr>
-              <a:t>Exito:</a:t>
-            </a:r>
-            <a:r>
-              <a:rPr sz="2000" b="0" i="0">
-                <a:solidFill>
-                  <a:srgbClr val="333333"/>
-                </a:solidFill>
-                <a:latin typeface="Calibri"/>
-              </a:rPr>
-              <a:t> Cada campo dibujado aparece en la tabla de anotaciones con su atributo del diccionario de datos y el RF que lo exige, sin campos huerfanos.</a:t>
-            </a:r>
-          </a:p>
-          <a:p>
-            <a:pPr>
-              <a:spcAft>
-                <a:spcPts val="800"/>
-              </a:spcAft>
-            </a:pPr>
-            <a:r>
-              <a:rPr sz="2000" b="0" i="0">
-                <a:solidFill>
-                  <a:srgbClr val="333333"/>
-                </a:solidFill>
-                <a:latin typeface="Calibri"/>
-              </a:rPr>
-              <a:t>–   </a:t>
-            </a:r>
-            <a:r>
-              <a:rPr sz="2000" b="1" i="0">
-                <a:solidFill>
-                  <a:srgbClr val="333333"/>
-                </a:solidFill>
-                <a:latin typeface="Calibri"/>
-              </a:rPr>
-              <a:t>Exito:</a:t>
-            </a:r>
-            <a:r>
-              <a:rPr sz="2000" b="0" i="0">
-                <a:solidFill>
-                  <a:srgbClr val="333333"/>
-                </a:solidFill>
-                <a:latin typeface="Calibri"/>
-              </a:rPr>
-              <a:t> El prototipo tiene al menos tres transiciones que funcionan al hacer clic y cubre minimo dos caminos alternos, entre ellos resultados multiples o dueño no registrado.</a:t>
-            </a:r>
-          </a:p>
-          <a:p>
-            <a:pPr>
-              <a:spcAft>
-                <a:spcPts val="800"/>
-              </a:spcAft>
-            </a:pPr>
-            <a:r>
-              <a:rPr sz="2000" b="0" i="0">
-                <a:solidFill>
-                  <a:srgbClr val="333333"/>
-                </a:solidFill>
-                <a:latin typeface="Calibri"/>
-              </a:rPr>
-              <a:t>–   </a:t>
-            </a:r>
-            <a:r>
-              <a:rPr sz="2000" b="1" i="0">
-                <a:solidFill>
-                  <a:srgbClr val="333333"/>
-                </a:solidFill>
-                <a:latin typeface="Calibri"/>
-              </a:rPr>
-              <a:t>Exito:</a:t>
-            </a:r>
-            <a:r>
-              <a:rPr sz="2000" b="0" i="0">
-                <a:solidFill>
-                  <a:srgbClr val="333333"/>
-                </a:solidFill>
-                <a:latin typeface="Calibri"/>
-              </a:rPr>
-              <a:t> El diseño evidencia por escrito los cuatro principios trabajados: hay mensaje de estado tras guardar, hay al menos dos mecanismos de prevencion de errores, los botones principales son consistentes entre pantallas y las listas cerradas reemplazan los campos de memoria.</a:t>
-            </a:r>
-          </a:p>
-          <a:p>
-            <a:pPr>
-              <a:spcAft>
-                <a:spcPts val="800"/>
-              </a:spcAft>
-            </a:pPr>
-            <a:r>
-              <a:rPr sz="2000" b="0" i="0">
-                <a:solidFill>
-                  <a:srgbClr val="333333"/>
-                </a:solidFill>
-                <a:latin typeface="Calibri"/>
-              </a:rPr>
-              <a:t>–   </a:t>
-            </a:r>
-            <a:r>
-              <a:rPr sz="2000" b="1" i="0">
-                <a:solidFill>
-                  <a:srgbClr val="333333"/>
-                </a:solidFill>
-                <a:latin typeface="Calibri"/>
-              </a:rPr>
-              <a:t>Entrega en la plataforma del curso</a:t>
-            </a:r>
-            <a:r>
-              <a:rPr sz="2000" b="0" i="0">
-                <a:solidFill>
-                  <a:srgbClr val="333333"/>
-                </a:solidFill>
-                <a:latin typeface="Calibri"/>
-              </a:rPr>
-              <a:t> — en la fecha que indique el docente.</a:t>
-            </a:r>
-          </a:p>
-        </p:txBody>
-      </p:sp>
-      <p:sp>
-        <p:nvSpPr>
-          <p:cNvPr id="6" name="TextBox 5"/>
+          <a:bodyPr wrap="square" anchor="ctr"/>
+          <a:lstStyle/>
+          <a:p>
+            <a:pPr algn="ctr"/>
+            <a:r>
+              <a:rPr sz="1600" b="1" i="0">
+                <a:solidFill>
+                  <a:srgbClr val="FFFFFF"/>
+                </a:solidFill>
+                <a:latin typeface="Calibri"/>
+              </a:rPr>
+              <a:t>1</a:t>
+            </a:r>
+          </a:p>
+        </p:txBody>
+      </p:sp>
+      <p:sp>
+        <p:nvSpPr>
+          <p:cNvPr id="8" name="TextBox 7"/>
+          <p:cNvSpPr txBox="1"/>
+          <p:nvPr/>
+        </p:nvSpPr>
+        <p:spPr>
+          <a:xfrm>
+            <a:off x="1188720" y="1325880"/>
+            <a:ext cx="10271455" cy="786384"/>
+          </a:xfrm>
+          <a:prstGeom prst="rect">
+            <a:avLst/>
+          </a:prstGeom>
+          <a:noFill/>
+        </p:spPr>
+        <p:txBody>
+          <a:bodyPr wrap="square" anchor="ctr"/>
+          <a:lstStyle/>
+          <a:p>
+            <a:r>
+              <a:rPr sz="1400" b="1" i="0">
+                <a:solidFill>
+                  <a:srgbClr val="095292"/>
+                </a:solidFill>
+                <a:latin typeface="Calibri"/>
+              </a:rPr>
+              <a:t>Paso 1. En Excalidraw o en papel, dibujen el wireframe en gris de la pantalla Registrar mascota de VetCare, sin colores ni logos, ubicando bloque de dueño, bloque de datos de la mascota y zona de accion; el wireframe debe caber en una sola vista sin scroll y no puede tener mas de nueve campos.</a:t>
+            </a:r>
+          </a:p>
+        </p:txBody>
+      </p:sp>
+      <p:sp>
+        <p:nvSpPr>
+          <p:cNvPr id="9" name="Rounded Rectangle 8"/>
+          <p:cNvSpPr/>
+          <p:nvPr/>
+        </p:nvSpPr>
+        <p:spPr>
+          <a:xfrm>
+            <a:off x="457200" y="2276856"/>
+            <a:ext cx="11277295" cy="950976"/>
+          </a:xfrm>
+          <a:prstGeom prst="roundRect">
+            <a:avLst>
+              <a:gd name="adj" fmla="val 12000"/>
+            </a:avLst>
+          </a:prstGeom>
+          <a:solidFill>
+            <a:srgbClr val="E8F4FA"/>
+          </a:solidFill>
+          <a:ln>
+            <a:noFill/>
+          </a:ln>
+        </p:spPr>
+        <p:style>
+          <a:lnRef idx="1">
+            <a:schemeClr val="accent1"/>
+          </a:lnRef>
+          <a:fillRef idx="3">
+            <a:schemeClr val="accent1"/>
+          </a:fillRef>
+          <a:effectRef idx="2">
+            <a:schemeClr val="accent1"/>
+          </a:effectRef>
+          <a:fontRef idx="minor">
+            <a:schemeClr val="lt1"/>
+          </a:fontRef>
+        </p:style>
+        <p:txBody>
+          <a:bodyPr rtlCol="0" anchor="ctr"/>
+          <a:lstStyle/>
+          <a:p>
+            <a:pPr algn="ctr"/>
+          </a:p>
+        </p:txBody>
+      </p:sp>
+      <p:sp>
+        <p:nvSpPr>
+          <p:cNvPr id="10" name="Rounded Rectangle 9"/>
+          <p:cNvSpPr/>
+          <p:nvPr/>
+        </p:nvSpPr>
+        <p:spPr>
+          <a:xfrm>
+            <a:off x="594360" y="2532888"/>
+            <a:ext cx="438912" cy="438912"/>
+          </a:xfrm>
+          <a:prstGeom prst="roundRect">
+            <a:avLst>
+              <a:gd name="adj" fmla="val 12000"/>
+            </a:avLst>
+          </a:prstGeom>
+          <a:solidFill>
+            <a:srgbClr val="095292"/>
+          </a:solidFill>
+          <a:ln>
+            <a:noFill/>
+          </a:ln>
+        </p:spPr>
+        <p:style>
+          <a:lnRef idx="1">
+            <a:schemeClr val="accent1"/>
+          </a:lnRef>
+          <a:fillRef idx="3">
+            <a:schemeClr val="accent1"/>
+          </a:fillRef>
+          <a:effectRef idx="2">
+            <a:schemeClr val="accent1"/>
+          </a:effectRef>
+          <a:fontRef idx="minor">
+            <a:schemeClr val="lt1"/>
+          </a:fontRef>
+        </p:style>
+        <p:txBody>
+          <a:bodyPr rtlCol="0" anchor="ctr"/>
+          <a:lstStyle/>
+          <a:p>
+            <a:pPr algn="ctr"/>
+          </a:p>
+        </p:txBody>
+      </p:sp>
+      <p:sp>
+        <p:nvSpPr>
+          <p:cNvPr id="11" name="TextBox 10"/>
+          <p:cNvSpPr txBox="1"/>
+          <p:nvPr/>
+        </p:nvSpPr>
+        <p:spPr>
+          <a:xfrm>
+            <a:off x="594360" y="2532888"/>
+            <a:ext cx="438912" cy="438912"/>
+          </a:xfrm>
+          <a:prstGeom prst="rect">
+            <a:avLst/>
+          </a:prstGeom>
+          <a:noFill/>
+        </p:spPr>
+        <p:txBody>
+          <a:bodyPr wrap="square" anchor="ctr"/>
+          <a:lstStyle/>
+          <a:p>
+            <a:pPr algn="ctr"/>
+            <a:r>
+              <a:rPr sz="1600" b="1" i="0">
+                <a:solidFill>
+                  <a:srgbClr val="FFFFFF"/>
+                </a:solidFill>
+                <a:latin typeface="Calibri"/>
+              </a:rPr>
+              <a:t>2</a:t>
+            </a:r>
+          </a:p>
+        </p:txBody>
+      </p:sp>
+      <p:sp>
+        <p:nvSpPr>
+          <p:cNvPr id="12" name="TextBox 11"/>
+          <p:cNvSpPr txBox="1"/>
+          <p:nvPr/>
+        </p:nvSpPr>
+        <p:spPr>
+          <a:xfrm>
+            <a:off x="1188720" y="2368296"/>
+            <a:ext cx="10271455" cy="786384"/>
+          </a:xfrm>
+          <a:prstGeom prst="rect">
+            <a:avLst/>
+          </a:prstGeom>
+          <a:noFill/>
+        </p:spPr>
+        <p:txBody>
+          <a:bodyPr wrap="square" anchor="ctr"/>
+          <a:lstStyle/>
+          <a:p>
+            <a:r>
+              <a:rPr sz="1400" b="1" i="0">
+                <a:solidFill>
+                  <a:srgbClr val="095292"/>
+                </a:solidFill>
+                <a:latin typeface="Calibri"/>
+              </a:rPr>
+              <a:t>Paso 2. Numeren de uno a seis los elementos criticos del wireframe y llenen la tabla de anotaciones indicando para cada numero el atributo del diccionario de datos que lo respalda, el RF que lo exige y si es obligatorio u opcional; si un elemento no tiene RF, borrenlo o creen el requisito y dejenlo escrito.</a:t>
+            </a:r>
+          </a:p>
+        </p:txBody>
+      </p:sp>
+      <p:sp>
+        <p:nvSpPr>
+          <p:cNvPr id="13" name="Rounded Rectangle 12"/>
+          <p:cNvSpPr/>
+          <p:nvPr/>
+        </p:nvSpPr>
+        <p:spPr>
+          <a:xfrm>
+            <a:off x="457200" y="3319272"/>
+            <a:ext cx="11277295" cy="950976"/>
+          </a:xfrm>
+          <a:prstGeom prst="roundRect">
+            <a:avLst>
+              <a:gd name="adj" fmla="val 12000"/>
+            </a:avLst>
+          </a:prstGeom>
+          <a:solidFill>
+            <a:srgbClr val="F2F2F2"/>
+          </a:solidFill>
+          <a:ln>
+            <a:noFill/>
+          </a:ln>
+        </p:spPr>
+        <p:style>
+          <a:lnRef idx="1">
+            <a:schemeClr val="accent1"/>
+          </a:lnRef>
+          <a:fillRef idx="3">
+            <a:schemeClr val="accent1"/>
+          </a:fillRef>
+          <a:effectRef idx="2">
+            <a:schemeClr val="accent1"/>
+          </a:effectRef>
+          <a:fontRef idx="minor">
+            <a:schemeClr val="lt1"/>
+          </a:fontRef>
+        </p:style>
+        <p:txBody>
+          <a:bodyPr rtlCol="0" anchor="ctr"/>
+          <a:lstStyle/>
+          <a:p>
+            <a:pPr algn="ctr"/>
+          </a:p>
+        </p:txBody>
+      </p:sp>
+      <p:sp>
+        <p:nvSpPr>
+          <p:cNvPr id="14" name="Rounded Rectangle 13"/>
+          <p:cNvSpPr/>
+          <p:nvPr/>
+        </p:nvSpPr>
+        <p:spPr>
+          <a:xfrm>
+            <a:off x="594360" y="3575304"/>
+            <a:ext cx="438912" cy="438912"/>
+          </a:xfrm>
+          <a:prstGeom prst="roundRect">
+            <a:avLst>
+              <a:gd name="adj" fmla="val 12000"/>
+            </a:avLst>
+          </a:prstGeom>
+          <a:solidFill>
+            <a:srgbClr val="095292"/>
+          </a:solidFill>
+          <a:ln>
+            <a:noFill/>
+          </a:ln>
+        </p:spPr>
+        <p:style>
+          <a:lnRef idx="1">
+            <a:schemeClr val="accent1"/>
+          </a:lnRef>
+          <a:fillRef idx="3">
+            <a:schemeClr val="accent1"/>
+          </a:fillRef>
+          <a:effectRef idx="2">
+            <a:schemeClr val="accent1"/>
+          </a:effectRef>
+          <a:fontRef idx="minor">
+            <a:schemeClr val="lt1"/>
+          </a:fontRef>
+        </p:style>
+        <p:txBody>
+          <a:bodyPr rtlCol="0" anchor="ctr"/>
+          <a:lstStyle/>
+          <a:p>
+            <a:pPr algn="ctr"/>
+          </a:p>
+        </p:txBody>
+      </p:sp>
+      <p:sp>
+        <p:nvSpPr>
+          <p:cNvPr id="15" name="TextBox 14"/>
+          <p:cNvSpPr txBox="1"/>
+          <p:nvPr/>
+        </p:nvSpPr>
+        <p:spPr>
+          <a:xfrm>
+            <a:off x="594360" y="3575304"/>
+            <a:ext cx="438912" cy="438912"/>
+          </a:xfrm>
+          <a:prstGeom prst="rect">
+            <a:avLst/>
+          </a:prstGeom>
+          <a:noFill/>
+        </p:spPr>
+        <p:txBody>
+          <a:bodyPr wrap="square" anchor="ctr"/>
+          <a:lstStyle/>
+          <a:p>
+            <a:pPr algn="ctr"/>
+            <a:r>
+              <a:rPr sz="1600" b="1" i="0">
+                <a:solidFill>
+                  <a:srgbClr val="FFFFFF"/>
+                </a:solidFill>
+                <a:latin typeface="Calibri"/>
+              </a:rPr>
+              <a:t>3</a:t>
+            </a:r>
+          </a:p>
+        </p:txBody>
+      </p:sp>
+      <p:sp>
+        <p:nvSpPr>
+          <p:cNvPr id="16" name="TextBox 15"/>
+          <p:cNvSpPr txBox="1"/>
+          <p:nvPr/>
+        </p:nvSpPr>
+        <p:spPr>
+          <a:xfrm>
+            <a:off x="1188720" y="3410712"/>
+            <a:ext cx="10271455" cy="786384"/>
+          </a:xfrm>
+          <a:prstGeom prst="rect">
+            <a:avLst/>
+          </a:prstGeom>
+          <a:noFill/>
+        </p:spPr>
+        <p:txBody>
+          <a:bodyPr wrap="square" anchor="ctr"/>
+          <a:lstStyle/>
+          <a:p>
+            <a:r>
+              <a:rPr sz="1400" b="1" i="0">
+                <a:solidFill>
+                  <a:srgbClr val="095292"/>
+                </a:solidFill>
+                <a:latin typeface="Calibri"/>
+              </a:rPr>
+              <a:t>Paso 3. Diseñen la pantalla Buscar expediente resolviendo explicitamente el caso de resultados multiples: definan los tres criterios de busqueda, las columnas de la lista de resultados que permiten desambiguar y el mensaje exacto que se muestra cuando no hay ningun resultado.</a:t>
+            </a:r>
+          </a:p>
+        </p:txBody>
+      </p:sp>
+      <p:sp>
+        <p:nvSpPr>
+          <p:cNvPr id="17" name="Rounded Rectangle 16"/>
+          <p:cNvSpPr/>
+          <p:nvPr/>
+        </p:nvSpPr>
+        <p:spPr>
+          <a:xfrm>
+            <a:off x="457200" y="4361688"/>
+            <a:ext cx="11277295" cy="950976"/>
+          </a:xfrm>
+          <a:prstGeom prst="roundRect">
+            <a:avLst>
+              <a:gd name="adj" fmla="val 12000"/>
+            </a:avLst>
+          </a:prstGeom>
+          <a:solidFill>
+            <a:srgbClr val="E8F4FA"/>
+          </a:solidFill>
+          <a:ln>
+            <a:noFill/>
+          </a:ln>
+        </p:spPr>
+        <p:style>
+          <a:lnRef idx="1">
+            <a:schemeClr val="accent1"/>
+          </a:lnRef>
+          <a:fillRef idx="3">
+            <a:schemeClr val="accent1"/>
+          </a:fillRef>
+          <a:effectRef idx="2">
+            <a:schemeClr val="accent1"/>
+          </a:effectRef>
+          <a:fontRef idx="minor">
+            <a:schemeClr val="lt1"/>
+          </a:fontRef>
+        </p:style>
+        <p:txBody>
+          <a:bodyPr rtlCol="0" anchor="ctr"/>
+          <a:lstStyle/>
+          <a:p>
+            <a:pPr algn="ctr"/>
+          </a:p>
+        </p:txBody>
+      </p:sp>
+      <p:sp>
+        <p:nvSpPr>
+          <p:cNvPr id="18" name="Rounded Rectangle 17"/>
+          <p:cNvSpPr/>
+          <p:nvPr/>
+        </p:nvSpPr>
+        <p:spPr>
+          <a:xfrm>
+            <a:off x="594360" y="4617720"/>
+            <a:ext cx="438912" cy="438912"/>
+          </a:xfrm>
+          <a:prstGeom prst="roundRect">
+            <a:avLst>
+              <a:gd name="adj" fmla="val 12000"/>
+            </a:avLst>
+          </a:prstGeom>
+          <a:solidFill>
+            <a:srgbClr val="095292"/>
+          </a:solidFill>
+          <a:ln>
+            <a:noFill/>
+          </a:ln>
+        </p:spPr>
+        <p:style>
+          <a:lnRef idx="1">
+            <a:schemeClr val="accent1"/>
+          </a:lnRef>
+          <a:fillRef idx="3">
+            <a:schemeClr val="accent1"/>
+          </a:fillRef>
+          <a:effectRef idx="2">
+            <a:schemeClr val="accent1"/>
+          </a:effectRef>
+          <a:fontRef idx="minor">
+            <a:schemeClr val="lt1"/>
+          </a:fontRef>
+        </p:style>
+        <p:txBody>
+          <a:bodyPr rtlCol="0" anchor="ctr"/>
+          <a:lstStyle/>
+          <a:p>
+            <a:pPr algn="ctr"/>
+          </a:p>
+        </p:txBody>
+      </p:sp>
+      <p:sp>
+        <p:nvSpPr>
+          <p:cNvPr id="19" name="TextBox 18"/>
+          <p:cNvSpPr txBox="1"/>
+          <p:nvPr/>
+        </p:nvSpPr>
+        <p:spPr>
+          <a:xfrm>
+            <a:off x="594360" y="4617720"/>
+            <a:ext cx="438912" cy="438912"/>
+          </a:xfrm>
+          <a:prstGeom prst="rect">
+            <a:avLst/>
+          </a:prstGeom>
+          <a:noFill/>
+        </p:spPr>
+        <p:txBody>
+          <a:bodyPr wrap="square" anchor="ctr"/>
+          <a:lstStyle/>
+          <a:p>
+            <a:pPr algn="ctr"/>
+            <a:r>
+              <a:rPr sz="1600" b="1" i="0">
+                <a:solidFill>
+                  <a:srgbClr val="FFFFFF"/>
+                </a:solidFill>
+                <a:latin typeface="Calibri"/>
+              </a:rPr>
+              <a:t>4</a:t>
+            </a:r>
+          </a:p>
+        </p:txBody>
+      </p:sp>
+      <p:sp>
+        <p:nvSpPr>
+          <p:cNvPr id="20" name="TextBox 19"/>
+          <p:cNvSpPr txBox="1"/>
+          <p:nvPr/>
+        </p:nvSpPr>
+        <p:spPr>
+          <a:xfrm>
+            <a:off x="1188720" y="4453128"/>
+            <a:ext cx="10271455" cy="786384"/>
+          </a:xfrm>
+          <a:prstGeom prst="rect">
+            <a:avLst/>
+          </a:prstGeom>
+          <a:noFill/>
+        </p:spPr>
+        <p:txBody>
+          <a:bodyPr wrap="square" anchor="ctr"/>
+          <a:lstStyle/>
+          <a:p>
+            <a:r>
+              <a:rPr sz="1400" b="1" i="0">
+                <a:solidFill>
+                  <a:srgbClr val="095292"/>
+                </a:solidFill>
+                <a:latin typeface="Calibri"/>
+              </a:rPr>
+              <a:t>Paso 4. Pasen las dos pantallas a Figma o Penpot como mockup y conecten minimo tres transiciones navegables: Registrar mascota hacia la confirmacion con codigo, confirmacion hacia Buscar expediente, y un resultado de la lista hacia la ficha del paciente; escriban al lado de cada transicion que principio de usabilidad estan cumpliendo.</a:t>
+            </a:r>
+          </a:p>
+        </p:txBody>
+      </p:sp>
+      <p:sp>
+        <p:nvSpPr>
+          <p:cNvPr id="21" name="Rounded Rectangle 20"/>
+          <p:cNvSpPr/>
+          <p:nvPr/>
+        </p:nvSpPr>
+        <p:spPr>
+          <a:xfrm>
+            <a:off x="457200" y="5404104"/>
+            <a:ext cx="11277295" cy="950976"/>
+          </a:xfrm>
+          <a:prstGeom prst="roundRect">
+            <a:avLst>
+              <a:gd name="adj" fmla="val 12000"/>
+            </a:avLst>
+          </a:prstGeom>
+          <a:solidFill>
+            <a:srgbClr val="F2F2F2"/>
+          </a:solidFill>
+          <a:ln>
+            <a:noFill/>
+          </a:ln>
+        </p:spPr>
+        <p:style>
+          <a:lnRef idx="1">
+            <a:schemeClr val="accent1"/>
+          </a:lnRef>
+          <a:fillRef idx="3">
+            <a:schemeClr val="accent1"/>
+          </a:fillRef>
+          <a:effectRef idx="2">
+            <a:schemeClr val="accent1"/>
+          </a:effectRef>
+          <a:fontRef idx="minor">
+            <a:schemeClr val="lt1"/>
+          </a:fontRef>
+        </p:style>
+        <p:txBody>
+          <a:bodyPr rtlCol="0" anchor="ctr"/>
+          <a:lstStyle/>
+          <a:p>
+            <a:pPr algn="ctr"/>
+          </a:p>
+        </p:txBody>
+      </p:sp>
+      <p:sp>
+        <p:nvSpPr>
+          <p:cNvPr id="22" name="Rounded Rectangle 21"/>
+          <p:cNvSpPr/>
+          <p:nvPr/>
+        </p:nvSpPr>
+        <p:spPr>
+          <a:xfrm>
+            <a:off x="594360" y="5660136"/>
+            <a:ext cx="438912" cy="438912"/>
+          </a:xfrm>
+          <a:prstGeom prst="roundRect">
+            <a:avLst>
+              <a:gd name="adj" fmla="val 12000"/>
+            </a:avLst>
+          </a:prstGeom>
+          <a:solidFill>
+            <a:srgbClr val="095292"/>
+          </a:solidFill>
+          <a:ln>
+            <a:noFill/>
+          </a:ln>
+        </p:spPr>
+        <p:style>
+          <a:lnRef idx="1">
+            <a:schemeClr val="accent1"/>
+          </a:lnRef>
+          <a:fillRef idx="3">
+            <a:schemeClr val="accent1"/>
+          </a:fillRef>
+          <a:effectRef idx="2">
+            <a:schemeClr val="accent1"/>
+          </a:effectRef>
+          <a:fontRef idx="minor">
+            <a:schemeClr val="lt1"/>
+          </a:fontRef>
+        </p:style>
+        <p:txBody>
+          <a:bodyPr rtlCol="0" anchor="ctr"/>
+          <a:lstStyle/>
+          <a:p>
+            <a:pPr algn="ctr"/>
+          </a:p>
+        </p:txBody>
+      </p:sp>
+      <p:sp>
+        <p:nvSpPr>
+          <p:cNvPr id="23" name="TextBox 22"/>
+          <p:cNvSpPr txBox="1"/>
+          <p:nvPr/>
+        </p:nvSpPr>
+        <p:spPr>
+          <a:xfrm>
+            <a:off x="594360" y="5660136"/>
+            <a:ext cx="438912" cy="438912"/>
+          </a:xfrm>
+          <a:prstGeom prst="rect">
+            <a:avLst/>
+          </a:prstGeom>
+          <a:noFill/>
+        </p:spPr>
+        <p:txBody>
+          <a:bodyPr wrap="square" anchor="ctr"/>
+          <a:lstStyle/>
+          <a:p>
+            <a:pPr algn="ctr"/>
+            <a:r>
+              <a:rPr sz="1600" b="1" i="0">
+                <a:solidFill>
+                  <a:srgbClr val="FFFFFF"/>
+                </a:solidFill>
+                <a:latin typeface="Calibri"/>
+              </a:rPr>
+              <a:t>5</a:t>
+            </a:r>
+          </a:p>
+        </p:txBody>
+      </p:sp>
+      <p:sp>
+        <p:nvSpPr>
+          <p:cNvPr id="24" name="TextBox 23"/>
+          <p:cNvSpPr txBox="1"/>
+          <p:nvPr/>
+        </p:nvSpPr>
+        <p:spPr>
+          <a:xfrm>
+            <a:off x="1188720" y="5495544"/>
+            <a:ext cx="10271455" cy="786384"/>
+          </a:xfrm>
+          <a:prstGeom prst="rect">
+            <a:avLst/>
+          </a:prstGeom>
+          <a:noFill/>
+        </p:spPr>
+        <p:txBody>
+          <a:bodyPr wrap="square" anchor="ctr"/>
+          <a:lstStyle/>
+          <a:p>
+            <a:r>
+              <a:rPr sz="1400" b="1" i="0">
+                <a:solidFill>
+                  <a:srgbClr val="095292"/>
+                </a:solidFill>
+                <a:latin typeface="Calibri"/>
+              </a:rPr>
+              <a:t>Paso 5. Hagan prueba de pasillo con otro compañero, denle la tarea registrar la mascota Luna de la señora Perez y encontrar su ficha, no le expliquen nada, cronometren, cuenten clics y anoten los dos puntos donde dudo; escriban abajo los dos cambios concretos que haran al diseño por lo observado.</a:t>
+            </a:r>
+          </a:p>
+        </p:txBody>
+      </p:sp>
+      <p:sp>
+        <p:nvSpPr>
+          <p:cNvPr id="25" name="TextBox 24"/>
           <p:cNvSpPr txBox="1"/>
           <p:nvPr/>
         </p:nvSpPr>
@@ -9285,7 +9235,7 @@
                 </a:solidFill>
                 <a:latin typeface="Calibri"/>
               </a:rPr>
-              <a:t>Para el PI esta semana</a:t>
+              <a:t>Antes de entregar — autochequeo</a:t>
             </a:r>
           </a:p>
         </p:txBody>
@@ -9299,7 +9249,7 @@
         <p:spPr>
           <a:xfrm>
             <a:off x="457200" y="1261872"/>
-            <a:ext cx="11277295" cy="1051560"/>
+            <a:ext cx="11277295" cy="566928"/>
           </a:xfrm>
           <a:prstGeom prst="roundRect">
             <a:avLst>
@@ -9307,7 +9257,7 @@
             </a:avLst>
           </a:prstGeom>
           <a:solidFill>
-            <a:srgbClr val="E8F4FA"/>
+            <a:srgbClr val="F2F2F2"/>
           </a:solidFill>
           <a:ln>
             <a:noFill/>
@@ -9343,8 +9293,53 @@
         </p:nvSpPr>
         <p:spPr>
           <a:xfrm>
-            <a:off x="457200" y="1261872"/>
-            <a:ext cx="128016" cy="1051560"/>
+            <a:off x="640080" y="1408175"/>
+            <a:ext cx="274320" cy="274320"/>
+          </a:xfrm>
+          <a:prstGeom prst="rect">
+            <a:avLst/>
+          </a:prstGeom>
+          <a:solidFill>
+            <a:srgbClr val="FFFFFF"/>
+          </a:solidFill>
+          <a:ln>
+            <a:solidFill>
+              <a:srgbClr val="333333"/>
+            </a:solidFill>
+          </a:ln>
+        </p:spPr>
+        <p:style>
+          <a:lnRef idx="1">
+            <a:schemeClr val="accent1"/>
+          </a:lnRef>
+          <a:fillRef idx="3">
+            <a:schemeClr val="accent1"/>
+          </a:fillRef>
+          <a:effectRef idx="2">
+            <a:schemeClr val="accent1"/>
+          </a:effectRef>
+          <a:fontRef idx="minor">
+            <a:schemeClr val="lt1"/>
+          </a:fontRef>
+        </p:style>
+        <p:txBody>
+          <a:bodyPr rtlCol="0" anchor="ctr"/>
+          <a:lstStyle/>
+          <a:p>
+            <a:pPr algn="ctr"/>
+          </a:p>
+        </p:txBody>
+      </p:sp>
+      <p:sp>
+        <p:nvSpPr>
+          <p:cNvPr id="7" name="Rectangle 6"/>
+          <p:cNvSpPr/>
+          <p:nvPr/>
+        </p:nvSpPr>
+        <p:spPr>
+          <a:xfrm>
+            <a:off x="640080" y="1408175"/>
+            <a:ext cx="73152" cy="274320"/>
           </a:xfrm>
           <a:prstGeom prst="rect">
             <a:avLst/>
@@ -9380,14 +9375,14 @@
       </p:sp>
       <p:sp>
         <p:nvSpPr>
-          <p:cNvPr id="7" name="TextBox 6"/>
+          <p:cNvPr id="8" name="TextBox 7"/>
           <p:cNvSpPr txBox="1"/>
           <p:nvPr/>
         </p:nvSpPr>
         <p:spPr>
           <a:xfrm>
-            <a:off x="777240" y="1399031"/>
-            <a:ext cx="10774375" cy="822959"/>
+            <a:off x="1097280" y="1353312"/>
+            <a:ext cx="10362895" cy="402336"/>
           </a:xfrm>
           <a:prstGeom prst="rect">
             <a:avLst/>
@@ -9395,49 +9390,31 @@
           <a:noFill/>
         </p:spPr>
         <p:txBody>
-          <a:bodyPr wrap="square">
-            <a:spAutoFit/>
-          </a:bodyPr>
-          <a:lstStyle/>
-          <a:p>
-            <a:r>
-              <a:rPr sz="1200" b="1" i="0">
-                <a:solidFill>
-                  <a:srgbClr val="269CCB"/>
-                </a:solidFill>
-                <a:latin typeface="Calibri"/>
-              </a:rPr>
-              <a:t>Info</a:t>
-            </a:r>
-          </a:p>
-          <a:p>
-            <a:pPr>
-              <a:spcBef>
-                <a:spcPts val="400"/>
-              </a:spcBef>
-            </a:pPr>
-            <a:r>
-              <a:rPr sz="1400" b="0" i="0">
+          <a:bodyPr wrap="square" anchor="ctr"/>
+          <a:lstStyle/>
+          <a:p>
+            <a:r>
+              <a:rPr sz="1500" b="0" i="0">
                 <a:solidFill>
                   <a:srgbClr val="333333"/>
                 </a:solidFill>
                 <a:latin typeface="Calibri"/>
               </a:rPr>
-              <a:t>Hito: Quedan listas las pantallas de Registrar mascota y Buscar expediente de VetCare, anotadas y conectadas en un prototipo navegable.</a:t>
-            </a:r>
-          </a:p>
-        </p:txBody>
-      </p:sp>
-      <p:sp>
-        <p:nvSpPr>
-          <p:cNvPr id="8" name="Rounded Rectangle 7"/>
+              <a:t>Si la recepcionista oprime Guardar y se va al telefono treinta segundos, cuando vuelva a mirar la pantalla sabe con certeza si el registro quedo o no quedo, y por que lo sabe.</a:t>
+            </a:r>
+          </a:p>
+        </p:txBody>
+      </p:sp>
+      <p:sp>
+        <p:nvSpPr>
+          <p:cNvPr id="9" name="Rounded Rectangle 8"/>
           <p:cNvSpPr/>
           <p:nvPr/>
         </p:nvSpPr>
         <p:spPr>
           <a:xfrm>
-            <a:off x="457200" y="2478024"/>
-            <a:ext cx="11277295" cy="1051560"/>
+            <a:off x="457200" y="1938528"/>
+            <a:ext cx="11277295" cy="566928"/>
           </a:xfrm>
           <a:prstGeom prst="roundRect">
             <a:avLst>
@@ -9445,7 +9422,7 @@
             </a:avLst>
           </a:prstGeom>
           <a:solidFill>
-            <a:srgbClr val="FFF8E1"/>
+            <a:srgbClr val="F2F2F2"/>
           </a:solidFill>
           <a:ln>
             <a:noFill/>
@@ -9475,23 +9452,25 @@
       </p:sp>
       <p:sp>
         <p:nvSpPr>
-          <p:cNvPr id="9" name="Rectangle 8"/>
+          <p:cNvPr id="10" name="Rectangle 9"/>
           <p:cNvSpPr/>
           <p:nvPr/>
         </p:nvSpPr>
         <p:spPr>
           <a:xfrm>
-            <a:off x="457200" y="2478024"/>
-            <a:ext cx="128016" cy="1051560"/>
+            <a:off x="640080" y="2084832"/>
+            <a:ext cx="274320" cy="274320"/>
           </a:xfrm>
           <a:prstGeom prst="rect">
             <a:avLst/>
           </a:prstGeom>
           <a:solidFill>
-            <a:srgbClr val="FFD000"/>
+            <a:srgbClr val="FFFFFF"/>
           </a:solidFill>
           <a:ln>
-            <a:noFill/>
+            <a:solidFill>
+              <a:srgbClr val="333333"/>
+            </a:solidFill>
           </a:ln>
         </p:spPr>
         <p:style>
@@ -9518,72 +9497,20 @@
       </p:sp>
       <p:sp>
         <p:nvSpPr>
-          <p:cNvPr id="10" name="TextBox 9"/>
-          <p:cNvSpPr txBox="1"/>
-          <p:nvPr/>
-        </p:nvSpPr>
-        <p:spPr>
-          <a:xfrm>
-            <a:off x="777240" y="2615184"/>
-            <a:ext cx="10774375" cy="822959"/>
-          </a:xfrm>
-          <a:prstGeom prst="rect">
-            <a:avLst/>
-          </a:prstGeom>
-          <a:noFill/>
-        </p:spPr>
-        <p:txBody>
-          <a:bodyPr wrap="square">
-            <a:spAutoFit/>
-          </a:bodyPr>
-          <a:lstStyle/>
-          <a:p>
-            <a:r>
-              <a:rPr sz="1200" b="1" i="0">
-                <a:solidFill>
-                  <a:srgbClr val="FFD000"/>
-                </a:solidFill>
-                <a:latin typeface="Calibri"/>
-              </a:rPr>
-              <a:t>Aclaración</a:t>
-            </a:r>
-          </a:p>
-          <a:p>
-            <a:pPr>
-              <a:spcBef>
-                <a:spcPts val="400"/>
-              </a:spcBef>
-            </a:pPr>
-            <a:r>
-              <a:rPr sz="1400" b="0" i="0">
-                <a:solidFill>
-                  <a:srgbClr val="333333"/>
-                </a:solidFill>
-                <a:latin typeface="Calibri"/>
-              </a:rPr>
-              <a:t>Enunciado completo: Clases/Proyecto Integrador/ (VetCare).</a:t>
-            </a:r>
-          </a:p>
-        </p:txBody>
-      </p:sp>
-      <p:sp>
-        <p:nvSpPr>
-          <p:cNvPr id="11" name="Rounded Rectangle 10"/>
+          <p:cNvPr id="11" name="Rectangle 10"/>
           <p:cNvSpPr/>
           <p:nvPr/>
         </p:nvSpPr>
         <p:spPr>
           <a:xfrm>
-            <a:off x="457200" y="3694176"/>
-            <a:ext cx="11277295" cy="1051560"/>
-          </a:xfrm>
-          <a:prstGeom prst="roundRect">
-            <a:avLst>
-              <a:gd name="adj" fmla="val 12000"/>
-            </a:avLst>
+            <a:off x="640080" y="2084832"/>
+            <a:ext cx="73152" cy="274320"/>
+          </a:xfrm>
+          <a:prstGeom prst="rect">
+            <a:avLst/>
           </a:prstGeom>
           <a:solidFill>
-            <a:srgbClr val="FBE4E4"/>
+            <a:srgbClr val="269CCB"/>
           </a:solidFill>
           <a:ln>
             <a:noFill/>
@@ -9613,20 +9540,54 @@
       </p:sp>
       <p:sp>
         <p:nvSpPr>
-          <p:cNvPr id="12" name="Rectangle 11"/>
+          <p:cNvPr id="12" name="TextBox 11"/>
+          <p:cNvSpPr txBox="1"/>
+          <p:nvPr/>
+        </p:nvSpPr>
+        <p:spPr>
+          <a:xfrm>
+            <a:off x="1097280" y="2029968"/>
+            <a:ext cx="10362895" cy="402336"/>
+          </a:xfrm>
+          <a:prstGeom prst="rect">
+            <a:avLst/>
+          </a:prstGeom>
+          <a:noFill/>
+        </p:spPr>
+        <p:txBody>
+          <a:bodyPr wrap="square" anchor="ctr"/>
+          <a:lstStyle/>
+          <a:p>
+            <a:r>
+              <a:rPr sz="1500" b="0" i="0">
+                <a:solidFill>
+                  <a:srgbClr val="333333"/>
+                </a:solidFill>
+                <a:latin typeface="Calibri"/>
+              </a:rPr>
+              <a:t>De los campos que dibujaron, cuantos podria llenar mal una persona apurada, y cual de esos errores se puede volver imposible en vez de corregible.</a:t>
+            </a:r>
+          </a:p>
+        </p:txBody>
+      </p:sp>
+      <p:sp>
+        <p:nvSpPr>
+          <p:cNvPr id="13" name="Rounded Rectangle 12"/>
           <p:cNvSpPr/>
           <p:nvPr/>
         </p:nvSpPr>
         <p:spPr>
           <a:xfrm>
-            <a:off x="457200" y="3694176"/>
-            <a:ext cx="128016" cy="1051560"/>
-          </a:xfrm>
-          <a:prstGeom prst="rect">
-            <a:avLst/>
+            <a:off x="457200" y="2615184"/>
+            <a:ext cx="11277295" cy="566928"/>
+          </a:xfrm>
+          <a:prstGeom prst="roundRect">
+            <a:avLst>
+              <a:gd name="adj" fmla="val 12000"/>
+            </a:avLst>
           </a:prstGeom>
           <a:solidFill>
-            <a:srgbClr val="A02030"/>
+            <a:srgbClr val="F2F2F2"/>
           </a:solidFill>
           <a:ln>
             <a:noFill/>
@@ -9656,14 +9617,102 @@
       </p:sp>
       <p:sp>
         <p:nvSpPr>
-          <p:cNvPr id="13" name="TextBox 12"/>
+          <p:cNvPr id="14" name="Rectangle 13"/>
+          <p:cNvSpPr/>
+          <p:nvPr/>
+        </p:nvSpPr>
+        <p:spPr>
+          <a:xfrm>
+            <a:off x="640080" y="2761488"/>
+            <a:ext cx="274320" cy="274320"/>
+          </a:xfrm>
+          <a:prstGeom prst="rect">
+            <a:avLst/>
+          </a:prstGeom>
+          <a:solidFill>
+            <a:srgbClr val="FFFFFF"/>
+          </a:solidFill>
+          <a:ln>
+            <a:solidFill>
+              <a:srgbClr val="333333"/>
+            </a:solidFill>
+          </a:ln>
+        </p:spPr>
+        <p:style>
+          <a:lnRef idx="1">
+            <a:schemeClr val="accent1"/>
+          </a:lnRef>
+          <a:fillRef idx="3">
+            <a:schemeClr val="accent1"/>
+          </a:fillRef>
+          <a:effectRef idx="2">
+            <a:schemeClr val="accent1"/>
+          </a:effectRef>
+          <a:fontRef idx="minor">
+            <a:schemeClr val="lt1"/>
+          </a:fontRef>
+        </p:style>
+        <p:txBody>
+          <a:bodyPr rtlCol="0" anchor="ctr"/>
+          <a:lstStyle/>
+          <a:p>
+            <a:pPr algn="ctr"/>
+          </a:p>
+        </p:txBody>
+      </p:sp>
+      <p:sp>
+        <p:nvSpPr>
+          <p:cNvPr id="15" name="Rectangle 14"/>
+          <p:cNvSpPr/>
+          <p:nvPr/>
+        </p:nvSpPr>
+        <p:spPr>
+          <a:xfrm>
+            <a:off x="640080" y="2761488"/>
+            <a:ext cx="73152" cy="274320"/>
+          </a:xfrm>
+          <a:prstGeom prst="rect">
+            <a:avLst/>
+          </a:prstGeom>
+          <a:solidFill>
+            <a:srgbClr val="269CCB"/>
+          </a:solidFill>
+          <a:ln>
+            <a:noFill/>
+          </a:ln>
+        </p:spPr>
+        <p:style>
+          <a:lnRef idx="1">
+            <a:schemeClr val="accent1"/>
+          </a:lnRef>
+          <a:fillRef idx="3">
+            <a:schemeClr val="accent1"/>
+          </a:fillRef>
+          <a:effectRef idx="2">
+            <a:schemeClr val="accent1"/>
+          </a:effectRef>
+          <a:fontRef idx="minor">
+            <a:schemeClr val="lt1"/>
+          </a:fontRef>
+        </p:style>
+        <p:txBody>
+          <a:bodyPr rtlCol="0" anchor="ctr"/>
+          <a:lstStyle/>
+          <a:p>
+            <a:pPr algn="ctr"/>
+          </a:p>
+        </p:txBody>
+      </p:sp>
+      <p:sp>
+        <p:nvSpPr>
+          <p:cNvPr id="16" name="TextBox 15"/>
           <p:cNvSpPr txBox="1"/>
           <p:nvPr/>
         </p:nvSpPr>
         <p:spPr>
           <a:xfrm>
-            <a:off x="777240" y="3831336"/>
-            <a:ext cx="10774375" cy="822959"/>
+            <a:off x="1097280" y="2706624"/>
+            <a:ext cx="10362895" cy="402336"/>
           </a:xfrm>
           <a:prstGeom prst="rect">
             <a:avLst/>
@@ -9671,42 +9720,24 @@
           <a:noFill/>
         </p:spPr>
         <p:txBody>
-          <a:bodyPr wrap="square">
-            <a:spAutoFit/>
-          </a:bodyPr>
-          <a:lstStyle/>
-          <a:p>
-            <a:r>
-              <a:rPr sz="1200" b="1" i="0">
-                <a:solidFill>
-                  <a:srgbClr val="A02030"/>
-                </a:solidFill>
-                <a:latin typeface="Calibri"/>
-              </a:rPr>
-              <a:t>Atención</a:t>
-            </a:r>
-          </a:p>
-          <a:p>
-            <a:pPr>
-              <a:spcBef>
-                <a:spcPts val="400"/>
-              </a:spcBef>
-            </a:pPr>
-            <a:r>
-              <a:rPr sz="1400" b="0" i="0">
+          <a:bodyPr wrap="square" anchor="ctr"/>
+          <a:lstStyle/>
+          <a:p>
+            <a:r>
+              <a:rPr sz="1500" b="0" i="0">
                 <a:solidFill>
                   <a:srgbClr val="333333"/>
                 </a:solidFill>
                 <a:latin typeface="Calibri"/>
               </a:rPr>
-              <a:t>Entrega del taller, si el docente lo asigna · en la fecha que indique el docente.</a:t>
-            </a:r>
-          </a:p>
-        </p:txBody>
-      </p:sp>
-      <p:sp>
-        <p:nvSpPr>
-          <p:cNvPr id="14" name="TextBox 13"/>
+              <a:t>Si la busqueda por nombre devuelve doce mascotas llamadas Firulais, que dato adicional muestra la lista para que la recepcionista escoja la correcta sin abrir ninguna ficha.</a:t>
+            </a:r>
+          </a:p>
+        </p:txBody>
+      </p:sp>
+      <p:sp>
+        <p:nvSpPr>
+          <p:cNvPr id="17" name="TextBox 16"/>
           <p:cNvSpPr txBox="1"/>
           <p:nvPr/>
         </p:nvSpPr>
@@ -9748,6 +9779,1009 @@
 </file>
 
 <file path=ppt/slides/slide21.xml><?xml version="1.0" encoding="utf-8"?>
+<p:sld xmlns:a="http://schemas.openxmlformats.org/drawingml/2006/main" xmlns:p="http://schemas.openxmlformats.org/presentationml/2006/main" xmlns:r="http://schemas.openxmlformats.org/officeDocument/2006/relationships">
+  <p:cSld>
+    <p:bg>
+      <p:bgPr>
+        <a:solidFill>
+          <a:srgbClr val="FFFFFF"/>
+        </a:solidFill>
+        <a:effectLst/>
+      </p:bgPr>
+    </p:bg>
+    <p:spTree>
+      <p:nvGrpSpPr>
+        <p:cNvPr id="1" name=""/>
+        <p:cNvGrpSpPr/>
+        <p:nvPr/>
+      </p:nvGrpSpPr>
+      <p:grpSpPr/>
+      <p:sp>
+        <p:nvSpPr>
+          <p:cNvPr id="2" name="Rectangle 1"/>
+          <p:cNvSpPr/>
+          <p:nvPr/>
+        </p:nvSpPr>
+        <p:spPr>
+          <a:xfrm>
+            <a:off x="0" y="0"/>
+            <a:ext cx="12191695" cy="960120"/>
+          </a:xfrm>
+          <a:prstGeom prst="rect">
+            <a:avLst/>
+          </a:prstGeom>
+          <a:solidFill>
+            <a:srgbClr val="095292"/>
+          </a:solidFill>
+          <a:ln>
+            <a:noFill/>
+          </a:ln>
+        </p:spPr>
+        <p:style>
+          <a:lnRef idx="1">
+            <a:schemeClr val="accent1"/>
+          </a:lnRef>
+          <a:fillRef idx="3">
+            <a:schemeClr val="accent1"/>
+          </a:fillRef>
+          <a:effectRef idx="2">
+            <a:schemeClr val="accent1"/>
+          </a:effectRef>
+          <a:fontRef idx="minor">
+            <a:schemeClr val="lt1"/>
+          </a:fontRef>
+        </p:style>
+        <p:txBody>
+          <a:bodyPr rtlCol="0" anchor="ctr"/>
+          <a:lstStyle/>
+          <a:p>
+            <a:pPr algn="ctr"/>
+          </a:p>
+        </p:txBody>
+      </p:sp>
+      <p:sp>
+        <p:nvSpPr>
+          <p:cNvPr id="3" name="Rectangle 2"/>
+          <p:cNvSpPr/>
+          <p:nvPr/>
+        </p:nvSpPr>
+        <p:spPr>
+          <a:xfrm>
+            <a:off x="0" y="960120"/>
+            <a:ext cx="12191695" cy="41148"/>
+          </a:xfrm>
+          <a:prstGeom prst="rect">
+            <a:avLst/>
+          </a:prstGeom>
+          <a:solidFill>
+            <a:srgbClr val="FFD000"/>
+          </a:solidFill>
+          <a:ln>
+            <a:noFill/>
+          </a:ln>
+        </p:spPr>
+        <p:style>
+          <a:lnRef idx="1">
+            <a:schemeClr val="accent1"/>
+          </a:lnRef>
+          <a:fillRef idx="3">
+            <a:schemeClr val="accent1"/>
+          </a:fillRef>
+          <a:effectRef idx="2">
+            <a:schemeClr val="accent1"/>
+          </a:effectRef>
+          <a:fontRef idx="minor">
+            <a:schemeClr val="lt1"/>
+          </a:fontRef>
+        </p:style>
+        <p:txBody>
+          <a:bodyPr rtlCol="0" anchor="ctr"/>
+          <a:lstStyle/>
+          <a:p>
+            <a:pPr algn="ctr"/>
+          </a:p>
+        </p:txBody>
+      </p:sp>
+      <p:sp>
+        <p:nvSpPr>
+          <p:cNvPr id="4" name="TextBox 3"/>
+          <p:cNvSpPr txBox="1"/>
+          <p:nvPr/>
+        </p:nvSpPr>
+        <p:spPr>
+          <a:xfrm>
+            <a:off x="457200" y="164592"/>
+            <a:ext cx="11277295" cy="502920"/>
+          </a:xfrm>
+          <a:prstGeom prst="rect">
+            <a:avLst/>
+          </a:prstGeom>
+          <a:noFill/>
+        </p:spPr>
+        <p:txBody>
+          <a:bodyPr wrap="square">
+            <a:spAutoFit/>
+          </a:bodyPr>
+          <a:lstStyle/>
+          <a:p>
+            <a:r>
+              <a:rPr sz="2600" b="1" i="0">
+                <a:solidFill>
+                  <a:srgbClr val="FFFFFF"/>
+                </a:solidFill>
+                <a:latin typeface="Calibri"/>
+              </a:rPr>
+              <a:t>Criterios de exito / entregable</a:t>
+            </a:r>
+          </a:p>
+        </p:txBody>
+      </p:sp>
+      <p:sp>
+        <p:nvSpPr>
+          <p:cNvPr id="5" name="TextBox 4"/>
+          <p:cNvSpPr txBox="1"/>
+          <p:nvPr/>
+        </p:nvSpPr>
+        <p:spPr>
+          <a:xfrm>
+            <a:off x="457200" y="1170432"/>
+            <a:ext cx="11277295" cy="5230368"/>
+          </a:xfrm>
+          <a:prstGeom prst="rect">
+            <a:avLst/>
+          </a:prstGeom>
+          <a:noFill/>
+        </p:spPr>
+        <p:txBody>
+          <a:bodyPr wrap="square">
+            <a:spAutoFit/>
+          </a:bodyPr>
+          <a:lstStyle/>
+          <a:p>
+            <a:pPr>
+              <a:spcAft>
+                <a:spcPts val="800"/>
+              </a:spcAft>
+            </a:pPr>
+            <a:r>
+              <a:rPr sz="2000" b="0" i="0">
+                <a:solidFill>
+                  <a:srgbClr val="333333"/>
+                </a:solidFill>
+                <a:latin typeface="Calibri"/>
+              </a:rPr>
+              <a:t>–   </a:t>
+            </a:r>
+            <a:r>
+              <a:rPr sz="2000" b="1" i="0">
+                <a:solidFill>
+                  <a:srgbClr val="333333"/>
+                </a:solidFill>
+                <a:latin typeface="Calibri"/>
+              </a:rPr>
+              <a:t>Entregable:</a:t>
+            </a:r>
+            <a:r>
+              <a:rPr sz="2000" b="0" i="0">
+                <a:solidFill>
+                  <a:srgbClr val="333333"/>
+                </a:solidFill>
+                <a:latin typeface="Calibri"/>
+              </a:rPr>
+              <a:t> Un archivo de Figma o Penpot con las dos pantallas anotadas y minimo tres transiciones navegables, mas la hoja de anotaciones que amarra cada campo a un RF y a un atributo del diccionario de datos, subido a la plataforma del curso.</a:t>
+            </a:r>
+          </a:p>
+          <a:p>
+            <a:pPr>
+              <a:spcAft>
+                <a:spcPts val="800"/>
+              </a:spcAft>
+            </a:pPr>
+            <a:r>
+              <a:rPr sz="2000" b="0" i="0">
+                <a:solidFill>
+                  <a:srgbClr val="333333"/>
+                </a:solidFill>
+                <a:latin typeface="Calibri"/>
+              </a:rPr>
+              <a:t>–   </a:t>
+            </a:r>
+            <a:r>
+              <a:rPr sz="2000" b="1" i="0">
+                <a:solidFill>
+                  <a:srgbClr val="333333"/>
+                </a:solidFill>
+                <a:latin typeface="Calibri"/>
+              </a:rPr>
+              <a:t>Exito:</a:t>
+            </a:r>
+            <a:r>
+              <a:rPr sz="2000" b="0" i="0">
+                <a:solidFill>
+                  <a:srgbClr val="333333"/>
+                </a:solidFill>
+                <a:latin typeface="Calibri"/>
+              </a:rPr>
+              <a:t> Las dos pantallas se entregan primero como wireframe en gris y luego como mockup, y ambas versiones estan en el archivo entregado.</a:t>
+            </a:r>
+          </a:p>
+          <a:p>
+            <a:pPr>
+              <a:spcAft>
+                <a:spcPts val="800"/>
+              </a:spcAft>
+            </a:pPr>
+            <a:r>
+              <a:rPr sz="2000" b="0" i="0">
+                <a:solidFill>
+                  <a:srgbClr val="333333"/>
+                </a:solidFill>
+                <a:latin typeface="Calibri"/>
+              </a:rPr>
+              <a:t>–   </a:t>
+            </a:r>
+            <a:r>
+              <a:rPr sz="2000" b="1" i="0">
+                <a:solidFill>
+                  <a:srgbClr val="333333"/>
+                </a:solidFill>
+                <a:latin typeface="Calibri"/>
+              </a:rPr>
+              <a:t>Exito:</a:t>
+            </a:r>
+            <a:r>
+              <a:rPr sz="2000" b="0" i="0">
+                <a:solidFill>
+                  <a:srgbClr val="333333"/>
+                </a:solidFill>
+                <a:latin typeface="Calibri"/>
+              </a:rPr>
+              <a:t> Cada campo dibujado aparece en la tabla de anotaciones con su atributo del diccionario de datos y el RF que lo exige, sin campos huerfanos.</a:t>
+            </a:r>
+          </a:p>
+          <a:p>
+            <a:pPr>
+              <a:spcAft>
+                <a:spcPts val="800"/>
+              </a:spcAft>
+            </a:pPr>
+            <a:r>
+              <a:rPr sz="2000" b="0" i="0">
+                <a:solidFill>
+                  <a:srgbClr val="333333"/>
+                </a:solidFill>
+                <a:latin typeface="Calibri"/>
+              </a:rPr>
+              <a:t>–   </a:t>
+            </a:r>
+            <a:r>
+              <a:rPr sz="2000" b="1" i="0">
+                <a:solidFill>
+                  <a:srgbClr val="333333"/>
+                </a:solidFill>
+                <a:latin typeface="Calibri"/>
+              </a:rPr>
+              <a:t>Exito:</a:t>
+            </a:r>
+            <a:r>
+              <a:rPr sz="2000" b="0" i="0">
+                <a:solidFill>
+                  <a:srgbClr val="333333"/>
+                </a:solidFill>
+                <a:latin typeface="Calibri"/>
+              </a:rPr>
+              <a:t> El prototipo tiene al menos tres transiciones que funcionan al hacer clic y cubre minimo dos caminos alternos, entre ellos resultados multiples o dueño no registrado.</a:t>
+            </a:r>
+          </a:p>
+          <a:p>
+            <a:pPr>
+              <a:spcAft>
+                <a:spcPts val="800"/>
+              </a:spcAft>
+            </a:pPr>
+            <a:r>
+              <a:rPr sz="2000" b="0" i="0">
+                <a:solidFill>
+                  <a:srgbClr val="333333"/>
+                </a:solidFill>
+                <a:latin typeface="Calibri"/>
+              </a:rPr>
+              <a:t>–   </a:t>
+            </a:r>
+            <a:r>
+              <a:rPr sz="2000" b="1" i="0">
+                <a:solidFill>
+                  <a:srgbClr val="333333"/>
+                </a:solidFill>
+                <a:latin typeface="Calibri"/>
+              </a:rPr>
+              <a:t>Exito:</a:t>
+            </a:r>
+            <a:r>
+              <a:rPr sz="2000" b="0" i="0">
+                <a:solidFill>
+                  <a:srgbClr val="333333"/>
+                </a:solidFill>
+                <a:latin typeface="Calibri"/>
+              </a:rPr>
+              <a:t> El diseño evidencia por escrito los cuatro principios trabajados: hay mensaje de estado tras guardar, hay al menos dos mecanismos de prevencion de errores, los botones principales son consistentes entre pantallas y las listas cerradas reemplazan los campos de memoria.</a:t>
+            </a:r>
+          </a:p>
+          <a:p>
+            <a:pPr>
+              <a:spcAft>
+                <a:spcPts val="800"/>
+              </a:spcAft>
+            </a:pPr>
+            <a:r>
+              <a:rPr sz="2000" b="0" i="0">
+                <a:solidFill>
+                  <a:srgbClr val="333333"/>
+                </a:solidFill>
+                <a:latin typeface="Calibri"/>
+              </a:rPr>
+              <a:t>–   </a:t>
+            </a:r>
+            <a:r>
+              <a:rPr sz="2000" b="1" i="0">
+                <a:solidFill>
+                  <a:srgbClr val="333333"/>
+                </a:solidFill>
+                <a:latin typeface="Calibri"/>
+              </a:rPr>
+              <a:t>Entrega en la plataforma del curso</a:t>
+            </a:r>
+            <a:r>
+              <a:rPr sz="2000" b="0" i="0">
+                <a:solidFill>
+                  <a:srgbClr val="333333"/>
+                </a:solidFill>
+                <a:latin typeface="Calibri"/>
+              </a:rPr>
+              <a:t> — en la fecha que indique el docente.</a:t>
+            </a:r>
+          </a:p>
+        </p:txBody>
+      </p:sp>
+      <p:sp>
+        <p:nvSpPr>
+          <p:cNvPr id="6" name="TextBox 5"/>
+          <p:cNvSpPr txBox="1"/>
+          <p:nvPr/>
+        </p:nvSpPr>
+        <p:spPr>
+          <a:xfrm>
+            <a:off x="11185855" y="6473952"/>
+            <a:ext cx="640080" cy="274320"/>
+          </a:xfrm>
+          <a:prstGeom prst="rect">
+            <a:avLst/>
+          </a:prstGeom>
+          <a:noFill/>
+        </p:spPr>
+        <p:txBody>
+          <a:bodyPr wrap="square">
+            <a:spAutoFit/>
+          </a:bodyPr>
+          <a:lstStyle/>
+          <a:p>
+            <a:pPr algn="r"/>
+            <a:r>
+              <a:rPr sz="1100" b="0" i="0">
+                <a:solidFill>
+                  <a:srgbClr val="666666"/>
+                </a:solidFill>
+                <a:latin typeface="Calibri"/>
+              </a:rPr>
+              <a:t>21</a:t>
+            </a:r>
+          </a:p>
+        </p:txBody>
+      </p:sp>
+    </p:spTree>
+  </p:cSld>
+  <p:clrMapOvr>
+    <a:masterClrMapping/>
+  </p:clrMapOvr>
+</p:sld>
+</file>
+
+<file path=ppt/slides/slide22.xml><?xml version="1.0" encoding="utf-8"?>
+<p:sld xmlns:a="http://schemas.openxmlformats.org/drawingml/2006/main" xmlns:p="http://schemas.openxmlformats.org/presentationml/2006/main" xmlns:r="http://schemas.openxmlformats.org/officeDocument/2006/relationships">
+  <p:cSld>
+    <p:bg>
+      <p:bgPr>
+        <a:solidFill>
+          <a:srgbClr val="FFFFFF"/>
+        </a:solidFill>
+        <a:effectLst/>
+      </p:bgPr>
+    </p:bg>
+    <p:spTree>
+      <p:nvGrpSpPr>
+        <p:cNvPr id="1" name=""/>
+        <p:cNvGrpSpPr/>
+        <p:nvPr/>
+      </p:nvGrpSpPr>
+      <p:grpSpPr/>
+      <p:sp>
+        <p:nvSpPr>
+          <p:cNvPr id="2" name="Rectangle 1"/>
+          <p:cNvSpPr/>
+          <p:nvPr/>
+        </p:nvSpPr>
+        <p:spPr>
+          <a:xfrm>
+            <a:off x="0" y="0"/>
+            <a:ext cx="12191695" cy="960120"/>
+          </a:xfrm>
+          <a:prstGeom prst="rect">
+            <a:avLst/>
+          </a:prstGeom>
+          <a:solidFill>
+            <a:srgbClr val="095292"/>
+          </a:solidFill>
+          <a:ln>
+            <a:noFill/>
+          </a:ln>
+        </p:spPr>
+        <p:style>
+          <a:lnRef idx="1">
+            <a:schemeClr val="accent1"/>
+          </a:lnRef>
+          <a:fillRef idx="3">
+            <a:schemeClr val="accent1"/>
+          </a:fillRef>
+          <a:effectRef idx="2">
+            <a:schemeClr val="accent1"/>
+          </a:effectRef>
+          <a:fontRef idx="minor">
+            <a:schemeClr val="lt1"/>
+          </a:fontRef>
+        </p:style>
+        <p:txBody>
+          <a:bodyPr rtlCol="0" anchor="ctr"/>
+          <a:lstStyle/>
+          <a:p>
+            <a:pPr algn="ctr"/>
+          </a:p>
+        </p:txBody>
+      </p:sp>
+      <p:sp>
+        <p:nvSpPr>
+          <p:cNvPr id="3" name="Rectangle 2"/>
+          <p:cNvSpPr/>
+          <p:nvPr/>
+        </p:nvSpPr>
+        <p:spPr>
+          <a:xfrm>
+            <a:off x="0" y="960120"/>
+            <a:ext cx="12191695" cy="41148"/>
+          </a:xfrm>
+          <a:prstGeom prst="rect">
+            <a:avLst/>
+          </a:prstGeom>
+          <a:solidFill>
+            <a:srgbClr val="FFD000"/>
+          </a:solidFill>
+          <a:ln>
+            <a:noFill/>
+          </a:ln>
+        </p:spPr>
+        <p:style>
+          <a:lnRef idx="1">
+            <a:schemeClr val="accent1"/>
+          </a:lnRef>
+          <a:fillRef idx="3">
+            <a:schemeClr val="accent1"/>
+          </a:fillRef>
+          <a:effectRef idx="2">
+            <a:schemeClr val="accent1"/>
+          </a:effectRef>
+          <a:fontRef idx="minor">
+            <a:schemeClr val="lt1"/>
+          </a:fontRef>
+        </p:style>
+        <p:txBody>
+          <a:bodyPr rtlCol="0" anchor="ctr"/>
+          <a:lstStyle/>
+          <a:p>
+            <a:pPr algn="ctr"/>
+          </a:p>
+        </p:txBody>
+      </p:sp>
+      <p:sp>
+        <p:nvSpPr>
+          <p:cNvPr id="4" name="TextBox 3"/>
+          <p:cNvSpPr txBox="1"/>
+          <p:nvPr/>
+        </p:nvSpPr>
+        <p:spPr>
+          <a:xfrm>
+            <a:off x="457200" y="164592"/>
+            <a:ext cx="11277295" cy="502920"/>
+          </a:xfrm>
+          <a:prstGeom prst="rect">
+            <a:avLst/>
+          </a:prstGeom>
+          <a:noFill/>
+        </p:spPr>
+        <p:txBody>
+          <a:bodyPr wrap="square">
+            <a:spAutoFit/>
+          </a:bodyPr>
+          <a:lstStyle/>
+          <a:p>
+            <a:r>
+              <a:rPr sz="2600" b="1" i="0">
+                <a:solidFill>
+                  <a:srgbClr val="FFFFFF"/>
+                </a:solidFill>
+                <a:latin typeface="Calibri"/>
+              </a:rPr>
+              <a:t>Para el PI esta semana</a:t>
+            </a:r>
+          </a:p>
+        </p:txBody>
+      </p:sp>
+      <p:sp>
+        <p:nvSpPr>
+          <p:cNvPr id="5" name="Rounded Rectangle 4"/>
+          <p:cNvSpPr/>
+          <p:nvPr/>
+        </p:nvSpPr>
+        <p:spPr>
+          <a:xfrm>
+            <a:off x="457200" y="1261872"/>
+            <a:ext cx="11277295" cy="1051560"/>
+          </a:xfrm>
+          <a:prstGeom prst="roundRect">
+            <a:avLst>
+              <a:gd name="adj" fmla="val 12000"/>
+            </a:avLst>
+          </a:prstGeom>
+          <a:solidFill>
+            <a:srgbClr val="E8F4FA"/>
+          </a:solidFill>
+          <a:ln>
+            <a:noFill/>
+          </a:ln>
+        </p:spPr>
+        <p:style>
+          <a:lnRef idx="1">
+            <a:schemeClr val="accent1"/>
+          </a:lnRef>
+          <a:fillRef idx="3">
+            <a:schemeClr val="accent1"/>
+          </a:fillRef>
+          <a:effectRef idx="2">
+            <a:schemeClr val="accent1"/>
+          </a:effectRef>
+          <a:fontRef idx="minor">
+            <a:schemeClr val="lt1"/>
+          </a:fontRef>
+        </p:style>
+        <p:txBody>
+          <a:bodyPr rtlCol="0" anchor="ctr"/>
+          <a:lstStyle/>
+          <a:p>
+            <a:pPr algn="ctr"/>
+          </a:p>
+        </p:txBody>
+      </p:sp>
+      <p:sp>
+        <p:nvSpPr>
+          <p:cNvPr id="6" name="Rectangle 5"/>
+          <p:cNvSpPr/>
+          <p:nvPr/>
+        </p:nvSpPr>
+        <p:spPr>
+          <a:xfrm>
+            <a:off x="457200" y="1261872"/>
+            <a:ext cx="128016" cy="1051560"/>
+          </a:xfrm>
+          <a:prstGeom prst="rect">
+            <a:avLst/>
+          </a:prstGeom>
+          <a:solidFill>
+            <a:srgbClr val="269CCB"/>
+          </a:solidFill>
+          <a:ln>
+            <a:noFill/>
+          </a:ln>
+        </p:spPr>
+        <p:style>
+          <a:lnRef idx="1">
+            <a:schemeClr val="accent1"/>
+          </a:lnRef>
+          <a:fillRef idx="3">
+            <a:schemeClr val="accent1"/>
+          </a:fillRef>
+          <a:effectRef idx="2">
+            <a:schemeClr val="accent1"/>
+          </a:effectRef>
+          <a:fontRef idx="minor">
+            <a:schemeClr val="lt1"/>
+          </a:fontRef>
+        </p:style>
+        <p:txBody>
+          <a:bodyPr rtlCol="0" anchor="ctr"/>
+          <a:lstStyle/>
+          <a:p>
+            <a:pPr algn="ctr"/>
+          </a:p>
+        </p:txBody>
+      </p:sp>
+      <p:sp>
+        <p:nvSpPr>
+          <p:cNvPr id="7" name="TextBox 6"/>
+          <p:cNvSpPr txBox="1"/>
+          <p:nvPr/>
+        </p:nvSpPr>
+        <p:spPr>
+          <a:xfrm>
+            <a:off x="777240" y="1399031"/>
+            <a:ext cx="10774375" cy="822959"/>
+          </a:xfrm>
+          <a:prstGeom prst="rect">
+            <a:avLst/>
+          </a:prstGeom>
+          <a:noFill/>
+        </p:spPr>
+        <p:txBody>
+          <a:bodyPr wrap="square">
+            <a:spAutoFit/>
+          </a:bodyPr>
+          <a:lstStyle/>
+          <a:p>
+            <a:r>
+              <a:rPr sz="1200" b="1" i="0">
+                <a:solidFill>
+                  <a:srgbClr val="269CCB"/>
+                </a:solidFill>
+                <a:latin typeface="Calibri"/>
+              </a:rPr>
+              <a:t>Info</a:t>
+            </a:r>
+          </a:p>
+          <a:p>
+            <a:pPr>
+              <a:spcBef>
+                <a:spcPts val="400"/>
+              </a:spcBef>
+            </a:pPr>
+            <a:r>
+              <a:rPr sz="1400" b="0" i="0">
+                <a:solidFill>
+                  <a:srgbClr val="333333"/>
+                </a:solidFill>
+                <a:latin typeface="Calibri"/>
+              </a:rPr>
+              <a:t>Hito: Quedan listas las pantallas de Registrar mascota y Buscar expediente de VetCare, anotadas y conectadas en un prototipo navegable.</a:t>
+            </a:r>
+          </a:p>
+        </p:txBody>
+      </p:sp>
+      <p:sp>
+        <p:nvSpPr>
+          <p:cNvPr id="8" name="Rounded Rectangle 7"/>
+          <p:cNvSpPr/>
+          <p:nvPr/>
+        </p:nvSpPr>
+        <p:spPr>
+          <a:xfrm>
+            <a:off x="457200" y="2478024"/>
+            <a:ext cx="11277295" cy="1051560"/>
+          </a:xfrm>
+          <a:prstGeom prst="roundRect">
+            <a:avLst>
+              <a:gd name="adj" fmla="val 12000"/>
+            </a:avLst>
+          </a:prstGeom>
+          <a:solidFill>
+            <a:srgbClr val="FFF8E1"/>
+          </a:solidFill>
+          <a:ln>
+            <a:noFill/>
+          </a:ln>
+        </p:spPr>
+        <p:style>
+          <a:lnRef idx="1">
+            <a:schemeClr val="accent1"/>
+          </a:lnRef>
+          <a:fillRef idx="3">
+            <a:schemeClr val="accent1"/>
+          </a:fillRef>
+          <a:effectRef idx="2">
+            <a:schemeClr val="accent1"/>
+          </a:effectRef>
+          <a:fontRef idx="minor">
+            <a:schemeClr val="lt1"/>
+          </a:fontRef>
+        </p:style>
+        <p:txBody>
+          <a:bodyPr rtlCol="0" anchor="ctr"/>
+          <a:lstStyle/>
+          <a:p>
+            <a:pPr algn="ctr"/>
+          </a:p>
+        </p:txBody>
+      </p:sp>
+      <p:sp>
+        <p:nvSpPr>
+          <p:cNvPr id="9" name="Rectangle 8"/>
+          <p:cNvSpPr/>
+          <p:nvPr/>
+        </p:nvSpPr>
+        <p:spPr>
+          <a:xfrm>
+            <a:off x="457200" y="2478024"/>
+            <a:ext cx="128016" cy="1051560"/>
+          </a:xfrm>
+          <a:prstGeom prst="rect">
+            <a:avLst/>
+          </a:prstGeom>
+          <a:solidFill>
+            <a:srgbClr val="FFD000"/>
+          </a:solidFill>
+          <a:ln>
+            <a:noFill/>
+          </a:ln>
+        </p:spPr>
+        <p:style>
+          <a:lnRef idx="1">
+            <a:schemeClr val="accent1"/>
+          </a:lnRef>
+          <a:fillRef idx="3">
+            <a:schemeClr val="accent1"/>
+          </a:fillRef>
+          <a:effectRef idx="2">
+            <a:schemeClr val="accent1"/>
+          </a:effectRef>
+          <a:fontRef idx="minor">
+            <a:schemeClr val="lt1"/>
+          </a:fontRef>
+        </p:style>
+        <p:txBody>
+          <a:bodyPr rtlCol="0" anchor="ctr"/>
+          <a:lstStyle/>
+          <a:p>
+            <a:pPr algn="ctr"/>
+          </a:p>
+        </p:txBody>
+      </p:sp>
+      <p:sp>
+        <p:nvSpPr>
+          <p:cNvPr id="10" name="TextBox 9"/>
+          <p:cNvSpPr txBox="1"/>
+          <p:nvPr/>
+        </p:nvSpPr>
+        <p:spPr>
+          <a:xfrm>
+            <a:off x="777240" y="2615184"/>
+            <a:ext cx="10774375" cy="822959"/>
+          </a:xfrm>
+          <a:prstGeom prst="rect">
+            <a:avLst/>
+          </a:prstGeom>
+          <a:noFill/>
+        </p:spPr>
+        <p:txBody>
+          <a:bodyPr wrap="square">
+            <a:spAutoFit/>
+          </a:bodyPr>
+          <a:lstStyle/>
+          <a:p>
+            <a:r>
+              <a:rPr sz="1200" b="1" i="0">
+                <a:solidFill>
+                  <a:srgbClr val="FFD000"/>
+                </a:solidFill>
+                <a:latin typeface="Calibri"/>
+              </a:rPr>
+              <a:t>Aclaración</a:t>
+            </a:r>
+          </a:p>
+          <a:p>
+            <a:pPr>
+              <a:spcBef>
+                <a:spcPts val="400"/>
+              </a:spcBef>
+            </a:pPr>
+            <a:r>
+              <a:rPr sz="1400" b="0" i="0">
+                <a:solidFill>
+                  <a:srgbClr val="333333"/>
+                </a:solidFill>
+                <a:latin typeface="Calibri"/>
+              </a:rPr>
+              <a:t>Enunciado completo: Clases/Proyecto Integrador/ (VetCare).</a:t>
+            </a:r>
+          </a:p>
+        </p:txBody>
+      </p:sp>
+      <p:sp>
+        <p:nvSpPr>
+          <p:cNvPr id="11" name="Rounded Rectangle 10"/>
+          <p:cNvSpPr/>
+          <p:nvPr/>
+        </p:nvSpPr>
+        <p:spPr>
+          <a:xfrm>
+            <a:off x="457200" y="3694176"/>
+            <a:ext cx="11277295" cy="1051560"/>
+          </a:xfrm>
+          <a:prstGeom prst="roundRect">
+            <a:avLst>
+              <a:gd name="adj" fmla="val 12000"/>
+            </a:avLst>
+          </a:prstGeom>
+          <a:solidFill>
+            <a:srgbClr val="FBE4E4"/>
+          </a:solidFill>
+          <a:ln>
+            <a:noFill/>
+          </a:ln>
+        </p:spPr>
+        <p:style>
+          <a:lnRef idx="1">
+            <a:schemeClr val="accent1"/>
+          </a:lnRef>
+          <a:fillRef idx="3">
+            <a:schemeClr val="accent1"/>
+          </a:fillRef>
+          <a:effectRef idx="2">
+            <a:schemeClr val="accent1"/>
+          </a:effectRef>
+          <a:fontRef idx="minor">
+            <a:schemeClr val="lt1"/>
+          </a:fontRef>
+        </p:style>
+        <p:txBody>
+          <a:bodyPr rtlCol="0" anchor="ctr"/>
+          <a:lstStyle/>
+          <a:p>
+            <a:pPr algn="ctr"/>
+          </a:p>
+        </p:txBody>
+      </p:sp>
+      <p:sp>
+        <p:nvSpPr>
+          <p:cNvPr id="12" name="Rectangle 11"/>
+          <p:cNvSpPr/>
+          <p:nvPr/>
+        </p:nvSpPr>
+        <p:spPr>
+          <a:xfrm>
+            <a:off x="457200" y="3694176"/>
+            <a:ext cx="128016" cy="1051560"/>
+          </a:xfrm>
+          <a:prstGeom prst="rect">
+            <a:avLst/>
+          </a:prstGeom>
+          <a:solidFill>
+            <a:srgbClr val="A02030"/>
+          </a:solidFill>
+          <a:ln>
+            <a:noFill/>
+          </a:ln>
+        </p:spPr>
+        <p:style>
+          <a:lnRef idx="1">
+            <a:schemeClr val="accent1"/>
+          </a:lnRef>
+          <a:fillRef idx="3">
+            <a:schemeClr val="accent1"/>
+          </a:fillRef>
+          <a:effectRef idx="2">
+            <a:schemeClr val="accent1"/>
+          </a:effectRef>
+          <a:fontRef idx="minor">
+            <a:schemeClr val="lt1"/>
+          </a:fontRef>
+        </p:style>
+        <p:txBody>
+          <a:bodyPr rtlCol="0" anchor="ctr"/>
+          <a:lstStyle/>
+          <a:p>
+            <a:pPr algn="ctr"/>
+          </a:p>
+        </p:txBody>
+      </p:sp>
+      <p:sp>
+        <p:nvSpPr>
+          <p:cNvPr id="13" name="TextBox 12"/>
+          <p:cNvSpPr txBox="1"/>
+          <p:nvPr/>
+        </p:nvSpPr>
+        <p:spPr>
+          <a:xfrm>
+            <a:off x="777240" y="3831336"/>
+            <a:ext cx="10774375" cy="822959"/>
+          </a:xfrm>
+          <a:prstGeom prst="rect">
+            <a:avLst/>
+          </a:prstGeom>
+          <a:noFill/>
+        </p:spPr>
+        <p:txBody>
+          <a:bodyPr wrap="square">
+            <a:spAutoFit/>
+          </a:bodyPr>
+          <a:lstStyle/>
+          <a:p>
+            <a:r>
+              <a:rPr sz="1200" b="1" i="0">
+                <a:solidFill>
+                  <a:srgbClr val="A02030"/>
+                </a:solidFill>
+                <a:latin typeface="Calibri"/>
+              </a:rPr>
+              <a:t>Atención</a:t>
+            </a:r>
+          </a:p>
+          <a:p>
+            <a:pPr>
+              <a:spcBef>
+                <a:spcPts val="400"/>
+              </a:spcBef>
+            </a:pPr>
+            <a:r>
+              <a:rPr sz="1400" b="0" i="0">
+                <a:solidFill>
+                  <a:srgbClr val="333333"/>
+                </a:solidFill>
+                <a:latin typeface="Calibri"/>
+              </a:rPr>
+              <a:t>Entrega del taller, si el docente lo asigna · en la fecha que indique el docente.</a:t>
+            </a:r>
+          </a:p>
+        </p:txBody>
+      </p:sp>
+      <p:sp>
+        <p:nvSpPr>
+          <p:cNvPr id="14" name="TextBox 13"/>
+          <p:cNvSpPr txBox="1"/>
+          <p:nvPr/>
+        </p:nvSpPr>
+        <p:spPr>
+          <a:xfrm>
+            <a:off x="11185855" y="6473952"/>
+            <a:ext cx="640080" cy="274320"/>
+          </a:xfrm>
+          <a:prstGeom prst="rect">
+            <a:avLst/>
+          </a:prstGeom>
+          <a:noFill/>
+        </p:spPr>
+        <p:txBody>
+          <a:bodyPr wrap="square">
+            <a:spAutoFit/>
+          </a:bodyPr>
+          <a:lstStyle/>
+          <a:p>
+            <a:pPr algn="r"/>
+            <a:r>
+              <a:rPr sz="1100" b="0" i="0">
+                <a:solidFill>
+                  <a:srgbClr val="666666"/>
+                </a:solidFill>
+                <a:latin typeface="Calibri"/>
+              </a:rPr>
+              <a:t>22</a:t>
+            </a:r>
+          </a:p>
+        </p:txBody>
+      </p:sp>
+    </p:spTree>
+  </p:cSld>
+  <p:clrMapOvr>
+    <a:masterClrMapping/>
+  </p:clrMapOvr>
+</p:sld>
+</file>
+
+<file path=ppt/slides/slide23.xml><?xml version="1.0" encoding="utf-8"?>
 <p:sld xmlns:a="http://schemas.openxmlformats.org/drawingml/2006/main" xmlns:p="http://schemas.openxmlformats.org/presentationml/2006/main" xmlns:r="http://schemas.openxmlformats.org/officeDocument/2006/relationships">
   <p:cSld>
     <p:bg>

--- a/Seminario de Sistemas/Clases/Clase 13 - Diseño de interfaces/Presentacion.pptx
+++ b/Seminario de Sistemas/Clases/Clase 13 - Diseño de interfaces/Presentacion.pptx
@@ -15,19 +15,12 @@
     <p:sldId id="263" r:id="rId14"/>
     <p:sldId id="264" r:id="rId15"/>
     <p:sldId id="265" r:id="rId16"/>
-    <p:sldId id="266" r:id="rId17"/>
-    <p:sldId id="267" r:id="rId18"/>
-    <p:sldId id="268" r:id="rId19"/>
-    <p:sldId id="269" r:id="rId20"/>
-    <p:sldId id="270" r:id="rId21"/>
-    <p:sldId id="271" r:id="rId22"/>
-    <p:sldId id="272" r:id="rId23"/>
-    <p:sldId id="273" r:id="rId24"/>
-    <p:sldId id="274" r:id="rId25"/>
-    <p:sldId id="275" r:id="rId26"/>
-    <p:sldId id="276" r:id="rId27"/>
-    <p:sldId id="277" r:id="rId28"/>
-    <p:sldId id="278" r:id="rId29"/>
+    <p:sldId id="266" r:id="rId18"/>
+    <p:sldId id="267" r:id="rId19"/>
+    <p:sldId id="268" r:id="rId20"/>
+    <p:sldId id="269" r:id="rId21"/>
+    <p:sldId id="270" r:id="rId22"/>
+    <p:sldId id="271" r:id="rId23"/>
   </p:sldIdLst>
   <p:sldSz cx="12191695" cy="6858000" type="screen4x3"/>
   <p:notesSz cx="6858000" cy="9144000"/>
@@ -127,6 +120,502 @@
     </a:lvl9pPr>
   </p:defaultTextStyle>
 </p:presentation>
+</file>
+
+<file path=ppt/notesMasters/notesMaster1.xml><?xml version="1.0" encoding="utf-8"?>
+<p:notesMaster xmlns:a="http://schemas.openxmlformats.org/drawingml/2006/main" xmlns:p="http://schemas.openxmlformats.org/presentationml/2006/main" xmlns:r="http://schemas.openxmlformats.org/officeDocument/2006/relationships">
+  <p:cSld>
+    <p:bg>
+      <p:bgRef idx="1001">
+        <a:schemeClr val="bg1"/>
+      </p:bgRef>
+    </p:bg>
+    <p:spTree>
+      <p:nvGrpSpPr>
+        <p:cNvPr id="1" name=""/>
+        <p:cNvGrpSpPr/>
+        <p:nvPr/>
+      </p:nvGrpSpPr>
+      <p:grpSpPr>
+        <a:xfrm>
+          <a:off x="0" y="0"/>
+          <a:ext cx="0" cy="0"/>
+          <a:chOff x="0" y="0"/>
+          <a:chExt cx="0" cy="0"/>
+        </a:xfrm>
+      </p:grpSpPr>
+      <p:sp>
+        <p:nvSpPr>
+          <p:cNvPr id="2" name="Header Placeholder 1"/>
+          <p:cNvSpPr>
+            <a:spLocks noGrp="1"/>
+          </p:cNvSpPr>
+          <p:nvPr>
+            <p:ph type="hdr" sz="quarter"/>
+          </p:nvPr>
+        </p:nvSpPr>
+        <p:spPr>
+          <a:xfrm>
+            <a:off x="0" y="0"/>
+            <a:ext cx="2971800" cy="457200"/>
+          </a:xfrm>
+          <a:prstGeom prst="rect">
+            <a:avLst/>
+          </a:prstGeom>
+        </p:spPr>
+        <p:txBody>
+          <a:bodyPr vert="horz" lIns="91440" tIns="45720" rIns="91440" bIns="45720" rtlCol="0"/>
+          <a:lstStyle>
+            <a:lvl1pPr algn="l">
+              <a:defRPr sz="1200"/>
+            </a:lvl1pPr>
+          </a:lstStyle>
+          <a:p>
+            <a:endParaRPr lang="en-US"/>
+          </a:p>
+        </p:txBody>
+      </p:sp>
+      <p:sp>
+        <p:nvSpPr>
+          <p:cNvPr id="3" name="Date Placeholder 2"/>
+          <p:cNvSpPr>
+            <a:spLocks noGrp="1"/>
+          </p:cNvSpPr>
+          <p:nvPr>
+            <p:ph type="dt" idx="1"/>
+          </p:nvPr>
+        </p:nvSpPr>
+        <p:spPr>
+          <a:xfrm>
+            <a:off x="3884613" y="0"/>
+            <a:ext cx="2971800" cy="457200"/>
+          </a:xfrm>
+          <a:prstGeom prst="rect">
+            <a:avLst/>
+          </a:prstGeom>
+        </p:spPr>
+        <p:txBody>
+          <a:bodyPr vert="horz" lIns="91440" tIns="45720" rIns="91440" bIns="45720" rtlCol="0"/>
+          <a:lstStyle>
+            <a:lvl1pPr algn="r">
+              <a:defRPr sz="1200"/>
+            </a:lvl1pPr>
+          </a:lstStyle>
+          <a:p>
+            <a:fld id="{0F89C1C7-3DCD-1040-A9CF-14679D8B5DDD}" type="datetimeFigureOut">
+              <a:rPr lang="en-US" smtClean="0"/>
+              <a:t>10/17/16</a:t>
+            </a:fld>
+            <a:endParaRPr lang="en-US"/>
+          </a:p>
+        </p:txBody>
+      </p:sp>
+      <p:sp>
+        <p:nvSpPr>
+          <p:cNvPr id="4" name="Slide Image Placeholder 3"/>
+          <p:cNvSpPr>
+            <a:spLocks noGrp="1" noRot="1" noChangeAspect="1"/>
+          </p:cNvSpPr>
+          <p:nvPr>
+            <p:ph type="sldImg" idx="2"/>
+          </p:nvPr>
+        </p:nvSpPr>
+        <p:spPr>
+          <a:xfrm>
+            <a:off x="1143000" y="685800"/>
+            <a:ext cx="4572000" cy="3429000"/>
+          </a:xfrm>
+          <a:prstGeom prst="rect">
+            <a:avLst/>
+          </a:prstGeom>
+          <a:noFill/>
+          <a:ln w="12700">
+            <a:solidFill>
+              <a:prstClr val="black"/>
+            </a:solidFill>
+          </a:ln>
+        </p:spPr>
+        <p:txBody>
+          <a:bodyPr vert="horz" lIns="91440" tIns="45720" rIns="91440" bIns="45720" rtlCol="0" anchor="ctr"/>
+          <a:lstStyle/>
+          <a:p>
+            <a:endParaRPr lang="en-US"/>
+          </a:p>
+        </p:txBody>
+      </p:sp>
+      <p:sp>
+        <p:nvSpPr>
+          <p:cNvPr id="5" name="Notes Placeholder 4"/>
+          <p:cNvSpPr>
+            <a:spLocks noGrp="1"/>
+          </p:cNvSpPr>
+          <p:nvPr>
+            <p:ph type="body" sz="quarter" idx="3"/>
+          </p:nvPr>
+        </p:nvSpPr>
+        <p:spPr>
+          <a:xfrm>
+            <a:off x="685800" y="4343400"/>
+            <a:ext cx="5486400" cy="4114800"/>
+          </a:xfrm>
+          <a:prstGeom prst="rect">
+            <a:avLst/>
+          </a:prstGeom>
+        </p:spPr>
+        <p:txBody>
+          <a:bodyPr vert="horz" lIns="91440" tIns="45720" rIns="91440" bIns="45720" rtlCol="0"/>
+          <a:lstStyle/>
+          <a:p>
+            <a:pPr lvl="0"/>
+            <a:r>
+              <a:rPr lang="en-US" smtClean="0"/>
+              <a:t>Click to edit Master text styles</a:t>
+            </a:r>
+          </a:p>
+          <a:p>
+            <a:pPr lvl="1"/>
+            <a:r>
+              <a:rPr lang="en-US" smtClean="0"/>
+              <a:t>Second level</a:t>
+            </a:r>
+          </a:p>
+          <a:p>
+            <a:pPr lvl="2"/>
+            <a:r>
+              <a:rPr lang="en-US" smtClean="0"/>
+              <a:t>Third level</a:t>
+            </a:r>
+          </a:p>
+          <a:p>
+            <a:pPr lvl="3"/>
+            <a:r>
+              <a:rPr lang="en-US" smtClean="0"/>
+              <a:t>Fourth level</a:t>
+            </a:r>
+          </a:p>
+          <a:p>
+            <a:pPr lvl="4"/>
+            <a:r>
+              <a:rPr lang="en-US" smtClean="0"/>
+              <a:t>Fifth level</a:t>
+            </a:r>
+            <a:endParaRPr lang="en-US"/>
+          </a:p>
+        </p:txBody>
+      </p:sp>
+      <p:sp>
+        <p:nvSpPr>
+          <p:cNvPr id="6" name="Footer Placeholder 5"/>
+          <p:cNvSpPr>
+            <a:spLocks noGrp="1"/>
+          </p:cNvSpPr>
+          <p:nvPr>
+            <p:ph type="ftr" sz="quarter" idx="4"/>
+          </p:nvPr>
+        </p:nvSpPr>
+        <p:spPr>
+          <a:xfrm>
+            <a:off x="0" y="8685213"/>
+            <a:ext cx="2971800" cy="457200"/>
+          </a:xfrm>
+          <a:prstGeom prst="rect">
+            <a:avLst/>
+          </a:prstGeom>
+        </p:spPr>
+        <p:txBody>
+          <a:bodyPr vert="horz" lIns="91440" tIns="45720" rIns="91440" bIns="45720" rtlCol="0" anchor="b"/>
+          <a:lstStyle>
+            <a:lvl1pPr algn="l">
+              <a:defRPr sz="1200"/>
+            </a:lvl1pPr>
+          </a:lstStyle>
+          <a:p>
+            <a:endParaRPr lang="en-US"/>
+          </a:p>
+        </p:txBody>
+      </p:sp>
+      <p:sp>
+        <p:nvSpPr>
+          <p:cNvPr id="7" name="Slide Number Placeholder 6"/>
+          <p:cNvSpPr>
+            <a:spLocks noGrp="1"/>
+          </p:cNvSpPr>
+          <p:nvPr>
+            <p:ph type="sldNum" sz="quarter" idx="5"/>
+          </p:nvPr>
+        </p:nvSpPr>
+        <p:spPr>
+          <a:xfrm>
+            <a:off x="3884613" y="8685213"/>
+            <a:ext cx="2971800" cy="457200"/>
+          </a:xfrm>
+          <a:prstGeom prst="rect">
+            <a:avLst/>
+          </a:prstGeom>
+        </p:spPr>
+        <p:txBody>
+          <a:bodyPr vert="horz" lIns="91440" tIns="45720" rIns="91440" bIns="45720" rtlCol="0" anchor="b"/>
+          <a:lstStyle>
+            <a:lvl1pPr algn="r">
+              <a:defRPr sz="1200"/>
+            </a:lvl1pPr>
+          </a:lstStyle>
+          <a:p>
+            <a:fld id="{BB5E49A5-4136-284D-997B-48E1D791AD67}" type="slidenum">
+              <a:rPr lang="en-US" smtClean="0"/>
+              <a:t>‹#›</a:t>
+            </a:fld>
+            <a:endParaRPr lang="en-US"/>
+          </a:p>
+        </p:txBody>
+      </p:sp>
+    </p:spTree>
+    <p:extLst>
+      <p:ext uri="{BB962C8B-B14F-4D97-AF65-F5344CB8AC3E}">
+        <p14:creationId xmlns:p14="http://schemas.microsoft.com/office/powerpoint/2010/main" val="2623252185"/>
+      </p:ext>
+    </p:extLst>
+  </p:cSld>
+  <p:clrMap bg1="lt1" tx1="dk1" bg2="lt2" tx2="dk2" accent1="accent1" accent2="accent2" accent3="accent3" accent4="accent4" accent5="accent5" accent6="accent6" hlink="hlink" folHlink="folHlink"/>
+  <p:notesStyle>
+    <a:lvl1pPr marL="0" algn="l" defTabSz="457200" rtl="0" eaLnBrk="1" latinLnBrk="0" hangingPunct="1">
+      <a:defRPr sz="1200" kern="1200">
+        <a:solidFill>
+          <a:schemeClr val="tx1"/>
+        </a:solidFill>
+        <a:latin typeface="+mn-lt"/>
+        <a:ea typeface="+mn-ea"/>
+        <a:cs typeface="+mn-cs"/>
+      </a:defRPr>
+    </a:lvl1pPr>
+    <a:lvl2pPr marL="457200" algn="l" defTabSz="457200" rtl="0" eaLnBrk="1" latinLnBrk="0" hangingPunct="1">
+      <a:defRPr sz="1200" kern="1200">
+        <a:solidFill>
+          <a:schemeClr val="tx1"/>
+        </a:solidFill>
+        <a:latin typeface="+mn-lt"/>
+        <a:ea typeface="+mn-ea"/>
+        <a:cs typeface="+mn-cs"/>
+      </a:defRPr>
+    </a:lvl2pPr>
+    <a:lvl3pPr marL="914400" algn="l" defTabSz="457200" rtl="0" eaLnBrk="1" latinLnBrk="0" hangingPunct="1">
+      <a:defRPr sz="1200" kern="1200">
+        <a:solidFill>
+          <a:schemeClr val="tx1"/>
+        </a:solidFill>
+        <a:latin typeface="+mn-lt"/>
+        <a:ea typeface="+mn-ea"/>
+        <a:cs typeface="+mn-cs"/>
+      </a:defRPr>
+    </a:lvl3pPr>
+    <a:lvl4pPr marL="1371600" algn="l" defTabSz="457200" rtl="0" eaLnBrk="1" latinLnBrk="0" hangingPunct="1">
+      <a:defRPr sz="1200" kern="1200">
+        <a:solidFill>
+          <a:schemeClr val="tx1"/>
+        </a:solidFill>
+        <a:latin typeface="+mn-lt"/>
+        <a:ea typeface="+mn-ea"/>
+        <a:cs typeface="+mn-cs"/>
+      </a:defRPr>
+    </a:lvl4pPr>
+    <a:lvl5pPr marL="1828800" algn="l" defTabSz="457200" rtl="0" eaLnBrk="1" latinLnBrk="0" hangingPunct="1">
+      <a:defRPr sz="1200" kern="1200">
+        <a:solidFill>
+          <a:schemeClr val="tx1"/>
+        </a:solidFill>
+        <a:latin typeface="+mn-lt"/>
+        <a:ea typeface="+mn-ea"/>
+        <a:cs typeface="+mn-cs"/>
+      </a:defRPr>
+    </a:lvl5pPr>
+    <a:lvl6pPr marL="2286000" algn="l" defTabSz="457200" rtl="0" eaLnBrk="1" latinLnBrk="0" hangingPunct="1">
+      <a:defRPr sz="1200" kern="1200">
+        <a:solidFill>
+          <a:schemeClr val="tx1"/>
+        </a:solidFill>
+        <a:latin typeface="+mn-lt"/>
+        <a:ea typeface="+mn-ea"/>
+        <a:cs typeface="+mn-cs"/>
+      </a:defRPr>
+    </a:lvl6pPr>
+    <a:lvl7pPr marL="2743200" algn="l" defTabSz="457200" rtl="0" eaLnBrk="1" latinLnBrk="0" hangingPunct="1">
+      <a:defRPr sz="1200" kern="1200">
+        <a:solidFill>
+          <a:schemeClr val="tx1"/>
+        </a:solidFill>
+        <a:latin typeface="+mn-lt"/>
+        <a:ea typeface="+mn-ea"/>
+        <a:cs typeface="+mn-cs"/>
+      </a:defRPr>
+    </a:lvl7pPr>
+    <a:lvl8pPr marL="3200400" algn="l" defTabSz="457200" rtl="0" eaLnBrk="1" latinLnBrk="0" hangingPunct="1">
+      <a:defRPr sz="1200" kern="1200">
+        <a:solidFill>
+          <a:schemeClr val="tx1"/>
+        </a:solidFill>
+        <a:latin typeface="+mn-lt"/>
+        <a:ea typeface="+mn-ea"/>
+        <a:cs typeface="+mn-cs"/>
+      </a:defRPr>
+    </a:lvl8pPr>
+    <a:lvl9pPr marL="3657600" algn="l" defTabSz="457200" rtl="0" eaLnBrk="1" latinLnBrk="0" hangingPunct="1">
+      <a:defRPr sz="1200" kern="1200">
+        <a:solidFill>
+          <a:schemeClr val="tx1"/>
+        </a:solidFill>
+        <a:latin typeface="+mn-lt"/>
+        <a:ea typeface="+mn-ea"/>
+        <a:cs typeface="+mn-cs"/>
+      </a:defRPr>
+    </a:lvl9pPr>
+  </p:notesStyle>
+</p:notesMaster>
+</file>
+
+<file path=ppt/notesSlides/notesSlide1.xml><?xml version="1.0" encoding="utf-8"?>
+<p:notes xmlns:a="http://schemas.openxmlformats.org/drawingml/2006/main" xmlns:p="http://schemas.openxmlformats.org/presentationml/2006/main" xmlns:r="http://schemas.openxmlformats.org/officeDocument/2006/relationships">
+  <p:cSld>
+    <p:spTree>
+      <p:nvGrpSpPr>
+        <p:cNvPr id="1" name=""/>
+        <p:cNvGrpSpPr/>
+        <p:nvPr/>
+      </p:nvGrpSpPr>
+      <p:grpSpPr>
+        <a:xfrm>
+          <a:off x="0" y="0"/>
+          <a:ext cx="0" cy="0"/>
+          <a:chOff x="0" y="0"/>
+          <a:chExt cx="0" cy="0"/>
+        </a:xfrm>
+      </p:grpSpPr>
+      <p:sp>
+        <p:nvSpPr>
+          <p:cNvPr id="2" name="Slide Image Placeholder 1"/>
+          <p:cNvSpPr>
+            <a:spLocks noGrp="1"/>
+          </p:cNvSpPr>
+          <p:nvPr>
+            <p:ph type="sldImg" idx="2"/>
+          </p:nvPr>
+        </p:nvSpPr>
+        <p:spPr/>
+      </p:sp>
+      <p:sp>
+        <p:nvSpPr>
+          <p:cNvPr id="3" name="Notes Placeholder 2"/>
+          <p:cNvSpPr>
+            <a:spLocks noGrp="1"/>
+          </p:cNvSpPr>
+          <p:nvPr>
+            <p:ph type="body" idx="3" sz="quarter"/>
+          </p:nvPr>
+        </p:nvSpPr>
+        <p:spPr/>
+        <p:txBody>
+          <a:bodyPr/>
+          <a:lstStyle/>
+          <a:p>
+            <a:r>
+              <a:t>Por eso los wireframes se entregan anotados: se ponen numeritos sobre el dibujo y al lado una tabla que dice, por ejemplo, el numero uno es el campo Nombre de la mascota que sale del atributo Mascota.nombre, texto de sesenta caracteres, obligatorio, exigido por RF-03; el numero cuatro es el mensaje de confirmacion que cumple el RNF-02 de respuesta menor a tres segundos.</a:t>
+            </a:r>
+          </a:p>
+          <a:p/>
+          <a:p>
+            <a:r>
+              <a:t>Esa anotacion tiene un efecto secundario muy util: si aparece un campo en la pantalla que no esta en el diccionario de datos, entonces o falta un requisito o sobra el campo, y ambas cosas hay que resolverlas hoy y no cuando el compañero de Programacion II ya escribio la tabla.</a:t>
+            </a:r>
+          </a:p>
+        </p:txBody>
+      </p:sp>
+      <p:sp>
+        <p:nvSpPr>
+          <p:cNvPr id="4" name="Slide Number Placeholder 3"/>
+          <p:cNvSpPr>
+            <a:spLocks noGrp="1"/>
+          </p:cNvSpPr>
+          <p:nvPr>
+            <p:ph type="sldNum" idx="5" sz="quarter"/>
+          </p:nvPr>
+        </p:nvSpPr>
+        <p:spPr/>
+      </p:sp>
+    </p:spTree>
+  </p:cSld>
+  <p:clrMapOvr>
+    <a:masterClrMapping/>
+  </p:clrMapOvr>
+</p:notes>
+</file>
+
+<file path=ppt/notesSlides/notesSlide2.xml><?xml version="1.0" encoding="utf-8"?>
+<p:notes xmlns:a="http://schemas.openxmlformats.org/drawingml/2006/main" xmlns:p="http://schemas.openxmlformats.org/presentationml/2006/main" xmlns:r="http://schemas.openxmlformats.org/officeDocument/2006/relationships">
+  <p:cSld>
+    <p:spTree>
+      <p:nvGrpSpPr>
+        <p:cNvPr id="1" name=""/>
+        <p:cNvGrpSpPr/>
+        <p:nvPr/>
+      </p:nvGrpSpPr>
+      <p:grpSpPr>
+        <a:xfrm>
+          <a:off x="0" y="0"/>
+          <a:ext cx="0" cy="0"/>
+          <a:chOff x="0" y="0"/>
+          <a:chExt cx="0" cy="0"/>
+        </a:xfrm>
+      </p:grpSpPr>
+      <p:sp>
+        <p:nvSpPr>
+          <p:cNvPr id="2" name="Slide Image Placeholder 1"/>
+          <p:cNvSpPr>
+            <a:spLocks noGrp="1"/>
+          </p:cNvSpPr>
+          <p:nvPr>
+            <p:ph type="sldImg" idx="2"/>
+          </p:nvPr>
+        </p:nvSpPr>
+        <p:spPr/>
+      </p:sp>
+      <p:sp>
+        <p:nvSpPr>
+          <p:cNvPr id="3" name="Notes Placeholder 2"/>
+          <p:cNvSpPr>
+            <a:spLocks noGrp="1"/>
+          </p:cNvSpPr>
+          <p:nvPr>
+            <p:ph type="body" idx="3" sz="quarter"/>
+          </p:nvPr>
+        </p:nvSpPr>
+        <p:spPr/>
+        <p:txBody>
+          <a:bodyPr/>
+          <a:lstStyle/>
+          <a:p>
+            <a:r>
+              <a:t>Eso obliga a decisiones de diseño concretas: letra grande, pocos campos obligatorios, nada de scroll interminable, tolerancia a la interrupcion para que si la llaman y vuelve en tres minutos no haya perdido lo escrito, y mensajes en lenguaje de clinica y no de sistemas, es decir Esta mascota ya tiene ficha en la clinica y no Violacion de restriccion de unicidad.</a:t>
+            </a:r>
+          </a:p>
+        </p:txBody>
+      </p:sp>
+      <p:sp>
+        <p:nvSpPr>
+          <p:cNvPr id="4" name="Slide Number Placeholder 3"/>
+          <p:cNvSpPr>
+            <a:spLocks noGrp="1"/>
+          </p:cNvSpPr>
+          <p:nvPr>
+            <p:ph type="sldNum" idx="5" sz="quarter"/>
+          </p:nvPr>
+        </p:nvSpPr>
+        <p:spPr/>
+      </p:sp>
+    </p:spTree>
+  </p:cSld>
+  <p:clrMapOvr>
+    <a:masterClrMapping/>
+  </p:clrMapOvr>
+</p:notes>
 </file>
 
 <file path=ppt/slideLayouts/slideLayout1.xml><?xml version="1.0" encoding="utf-8"?>
@@ -5977,13 +6466,13 @@
         <p:spPr>
           <a:xfrm>
             <a:off x="0" y="0"/>
-            <a:ext cx="12191695" cy="1170432"/>
+            <a:ext cx="12191695" cy="164592"/>
           </a:xfrm>
           <a:prstGeom prst="rect">
             <a:avLst/>
           </a:prstGeom>
           <a:solidFill>
-            <a:srgbClr val="095292"/>
+            <a:srgbClr val="269CCB"/>
           </a:solidFill>
           <a:ln>
             <a:noFill/>
@@ -6011,251 +6500,9 @@
           </a:p>
         </p:txBody>
       </p:sp>
-      <p:sp>
-        <p:nvSpPr>
-          <p:cNvPr id="3" name="Rectangle 2"/>
-          <p:cNvSpPr/>
-          <p:nvPr/>
-        </p:nvSpPr>
-        <p:spPr>
-          <a:xfrm>
-            <a:off x="0" y="1170432"/>
-            <a:ext cx="12191695" cy="41148"/>
-          </a:xfrm>
-          <a:prstGeom prst="rect">
-            <a:avLst/>
-          </a:prstGeom>
-          <a:solidFill>
-            <a:srgbClr val="FFD000"/>
-          </a:solidFill>
-          <a:ln>
-            <a:noFill/>
-          </a:ln>
-        </p:spPr>
-        <p:style>
-          <a:lnRef idx="1">
-            <a:schemeClr val="accent1"/>
-          </a:lnRef>
-          <a:fillRef idx="3">
-            <a:schemeClr val="accent1"/>
-          </a:fillRef>
-          <a:effectRef idx="2">
-            <a:schemeClr val="accent1"/>
-          </a:effectRef>
-          <a:fontRef idx="minor">
-            <a:schemeClr val="lt1"/>
-          </a:fontRef>
-        </p:style>
-        <p:txBody>
-          <a:bodyPr rtlCol="0" anchor="ctr"/>
-          <a:lstStyle/>
-          <a:p>
-            <a:pPr algn="ctr"/>
-          </a:p>
-        </p:txBody>
-      </p:sp>
-      <p:sp>
-        <p:nvSpPr>
-          <p:cNvPr id="4" name="TextBox 3"/>
-          <p:cNvSpPr txBox="1"/>
-          <p:nvPr/>
-        </p:nvSpPr>
-        <p:spPr>
-          <a:xfrm>
-            <a:off x="457200" y="164592"/>
-            <a:ext cx="11277295" cy="384048"/>
-          </a:xfrm>
-          <a:prstGeom prst="rect">
-            <a:avLst/>
-          </a:prstGeom>
-          <a:noFill/>
-        </p:spPr>
-        <p:txBody>
-          <a:bodyPr wrap="square">
-            <a:spAutoFit/>
-          </a:bodyPr>
-          <a:lstStyle/>
-          <a:p>
-            <a:r>
-              <a:rPr sz="2600" b="1" i="0">
-                <a:solidFill>
-                  <a:srgbClr val="FFFFFF"/>
-                </a:solidFill>
-                <a:latin typeface="Calibri"/>
-              </a:rPr>
-              <a:t>Herramientas de hoy</a:t>
-            </a:r>
-          </a:p>
-        </p:txBody>
-      </p:sp>
-      <p:sp>
-        <p:nvSpPr>
-          <p:cNvPr id="5" name="TextBox 4"/>
-          <p:cNvSpPr txBox="1"/>
-          <p:nvPr/>
-        </p:nvSpPr>
-        <p:spPr>
-          <a:xfrm>
-            <a:off x="457200" y="566928"/>
-            <a:ext cx="11277295" cy="411480"/>
-          </a:xfrm>
-          <a:prstGeom prst="rect">
-            <a:avLst/>
-          </a:prstGeom>
-          <a:noFill/>
-        </p:spPr>
-        <p:txBody>
-          <a:bodyPr wrap="square">
-            <a:spAutoFit/>
-          </a:bodyPr>
-          <a:lstStyle/>
-          <a:p>
-            <a:r>
-              <a:rPr sz="1400" b="0" i="0">
-                <a:solidFill>
-                  <a:srgbClr val="B8D8EE"/>
-                </a:solidFill>
-                <a:latin typeface="Calibri"/>
-              </a:rPr>
-              <a:t>Gratis · funcionan en el navegador</a:t>
-            </a:r>
-          </a:p>
-        </p:txBody>
-      </p:sp>
-      <p:sp>
-        <p:nvSpPr>
-          <p:cNvPr id="6" name="Rounded Rectangle 5"/>
-          <p:cNvSpPr/>
-          <p:nvPr/>
-        </p:nvSpPr>
-        <p:spPr>
-          <a:xfrm>
-            <a:off x="457200" y="1591056"/>
-            <a:ext cx="3624986" cy="2299716"/>
-          </a:xfrm>
-          <a:prstGeom prst="roundRect">
-            <a:avLst>
-              <a:gd name="adj" fmla="val 12000"/>
-            </a:avLst>
-          </a:prstGeom>
-          <a:solidFill>
-            <a:srgbClr val="F2F2F2"/>
-          </a:solidFill>
-          <a:ln>
-            <a:noFill/>
-          </a:ln>
-        </p:spPr>
-        <p:style>
-          <a:lnRef idx="1">
-            <a:schemeClr val="accent1"/>
-          </a:lnRef>
-          <a:fillRef idx="3">
-            <a:schemeClr val="accent1"/>
-          </a:fillRef>
-          <a:effectRef idx="2">
-            <a:schemeClr val="accent1"/>
-          </a:effectRef>
-          <a:fontRef idx="minor">
-            <a:schemeClr val="lt1"/>
-          </a:fontRef>
-        </p:style>
-        <p:txBody>
-          <a:bodyPr rtlCol="0" anchor="ctr"/>
-          <a:lstStyle/>
-          <a:p>
-            <a:pPr algn="ctr"/>
-          </a:p>
-        </p:txBody>
-      </p:sp>
-      <p:sp>
-        <p:nvSpPr>
-          <p:cNvPr id="7" name="Rectangle 6"/>
-          <p:cNvSpPr/>
-          <p:nvPr/>
-        </p:nvSpPr>
-        <p:spPr>
-          <a:xfrm>
-            <a:off x="457200" y="1591056"/>
-            <a:ext cx="3624986" cy="64008"/>
-          </a:xfrm>
-          <a:prstGeom prst="rect">
-            <a:avLst/>
-          </a:prstGeom>
-          <a:solidFill>
-            <a:srgbClr val="095292"/>
-          </a:solidFill>
-          <a:ln>
-            <a:noFill/>
-          </a:ln>
-        </p:spPr>
-        <p:style>
-          <a:lnRef idx="1">
-            <a:schemeClr val="accent1"/>
-          </a:lnRef>
-          <a:fillRef idx="3">
-            <a:schemeClr val="accent1"/>
-          </a:fillRef>
-          <a:effectRef idx="2">
-            <a:schemeClr val="accent1"/>
-          </a:effectRef>
-          <a:fontRef idx="minor">
-            <a:schemeClr val="lt1"/>
-          </a:fontRef>
-        </p:style>
-        <p:txBody>
-          <a:bodyPr rtlCol="0" anchor="ctr"/>
-          <a:lstStyle/>
-          <a:p>
-            <a:pPr algn="ctr"/>
-          </a:p>
-        </p:txBody>
-      </p:sp>
-      <p:sp>
-        <p:nvSpPr>
-          <p:cNvPr id="8" name="Rectangle 7"/>
-          <p:cNvSpPr/>
-          <p:nvPr/>
-        </p:nvSpPr>
-        <p:spPr>
-          <a:xfrm>
-            <a:off x="457200" y="1655064"/>
-            <a:ext cx="3624986" cy="27432"/>
-          </a:xfrm>
-          <a:prstGeom prst="rect">
-            <a:avLst/>
-          </a:prstGeom>
-          <a:solidFill>
-            <a:srgbClr val="FFD000"/>
-          </a:solidFill>
-          <a:ln>
-            <a:noFill/>
-          </a:ln>
-        </p:spPr>
-        <p:style>
-          <a:lnRef idx="1">
-            <a:schemeClr val="accent1"/>
-          </a:lnRef>
-          <a:fillRef idx="3">
-            <a:schemeClr val="accent1"/>
-          </a:fillRef>
-          <a:effectRef idx="2">
-            <a:schemeClr val="accent1"/>
-          </a:effectRef>
-          <a:fontRef idx="minor">
-            <a:schemeClr val="lt1"/>
-          </a:fontRef>
-        </p:style>
-        <p:txBody>
-          <a:bodyPr rtlCol="0" anchor="ctr"/>
-          <a:lstStyle/>
-          <a:p>
-            <a:pPr algn="ctr"/>
-          </a:p>
-        </p:txBody>
-      </p:sp>
       <p:pic>
         <p:nvPicPr>
-          <p:cNvPr id="9" name="Picture 8" descr="excalidraw.png"/>
+          <p:cNvPr id="3" name="Picture 2" descr="logo_uniajc_color.png"/>
           <p:cNvPicPr>
             <a:picLocks noChangeAspect="1"/>
           </p:cNvPicPr>
@@ -6269,8 +6516,8 @@
         </p:blipFill>
         <p:spPr>
           <a:xfrm>
-            <a:off x="1659331" y="1847087"/>
-            <a:ext cx="1220724" cy="1220724"/>
+            <a:off x="10271455" y="5998464"/>
+            <a:ext cx="1463040" cy="643233"/>
           </a:xfrm>
           <a:prstGeom prst="rect">
             <a:avLst/>
@@ -6279,14 +6526,14 @@
       </p:pic>
       <p:sp>
         <p:nvSpPr>
-          <p:cNvPr id="10" name="TextBox 9"/>
+          <p:cNvPr id="4" name="TextBox 3"/>
           <p:cNvSpPr txBox="1"/>
           <p:nvPr/>
         </p:nvSpPr>
         <p:spPr>
           <a:xfrm>
-            <a:off x="530352" y="3159251"/>
-            <a:ext cx="3478682" cy="621792"/>
+            <a:off x="457200" y="1737360"/>
+            <a:ext cx="11277295" cy="1097280"/>
           </a:xfrm>
           <a:prstGeom prst="rect">
             <a:avLst/>
@@ -6294,972 +6541,32 @@
           <a:noFill/>
         </p:spPr>
         <p:txBody>
-          <a:bodyPr wrap="square" anchor="t"/>
+          <a:bodyPr wrap="square" anchor="ctr"/>
           <a:lstStyle/>
           <a:p>
             <a:pPr algn="ctr"/>
             <a:r>
-              <a:rPr sz="1300" b="1" i="0">
+              <a:rPr sz="3400" b="1" i="0">
                 <a:solidFill>
                   <a:srgbClr val="095292"/>
                 </a:solidFill>
                 <a:latin typeface="Calibri"/>
               </a:rPr>
-              <a:t>Excalidraw</a:t>
-            </a:r>
-          </a:p>
-          <a:p>
-            <a:pPr algn="ctr">
-              <a:spcBef>
-                <a:spcPts val="200"/>
-              </a:spcBef>
-            </a:pPr>
-            <a:r>
-              <a:rPr sz="1000" b="0" i="0">
-                <a:solidFill>
-                  <a:srgbClr val="666666"/>
-                </a:solidFill>
-                <a:latin typeface="Calibri"/>
-              </a:rPr>
-              <a:t>Bocetos rapidos a mano alzada</a:t>
-            </a:r>
-          </a:p>
-        </p:txBody>
-      </p:sp>
-      <p:sp>
-        <p:nvSpPr>
-          <p:cNvPr id="11" name="Rounded Rectangle 10"/>
-          <p:cNvSpPr/>
-          <p:nvPr/>
-        </p:nvSpPr>
-        <p:spPr>
-          <a:xfrm>
-            <a:off x="4283354" y="1591056"/>
-            <a:ext cx="3624986" cy="2299716"/>
-          </a:xfrm>
-          <a:prstGeom prst="roundRect">
-            <a:avLst>
-              <a:gd name="adj" fmla="val 12000"/>
-            </a:avLst>
-          </a:prstGeom>
-          <a:solidFill>
-            <a:srgbClr val="F2F2F2"/>
-          </a:solidFill>
-          <a:ln>
-            <a:noFill/>
-          </a:ln>
-        </p:spPr>
-        <p:style>
-          <a:lnRef idx="1">
-            <a:schemeClr val="accent1"/>
-          </a:lnRef>
-          <a:fillRef idx="3">
-            <a:schemeClr val="accent1"/>
-          </a:fillRef>
-          <a:effectRef idx="2">
-            <a:schemeClr val="accent1"/>
-          </a:effectRef>
-          <a:fontRef idx="minor">
-            <a:schemeClr val="lt1"/>
-          </a:fontRef>
-        </p:style>
-        <p:txBody>
-          <a:bodyPr rtlCol="0" anchor="ctr"/>
-          <a:lstStyle/>
-          <a:p>
-            <a:pPr algn="ctr"/>
-          </a:p>
-        </p:txBody>
-      </p:sp>
-      <p:sp>
-        <p:nvSpPr>
-          <p:cNvPr id="12" name="Rectangle 11"/>
-          <p:cNvSpPr/>
-          <p:nvPr/>
-        </p:nvSpPr>
-        <p:spPr>
-          <a:xfrm>
-            <a:off x="4283354" y="1591056"/>
-            <a:ext cx="3624986" cy="64008"/>
-          </a:xfrm>
-          <a:prstGeom prst="rect">
-            <a:avLst/>
-          </a:prstGeom>
-          <a:solidFill>
-            <a:srgbClr val="095292"/>
-          </a:solidFill>
-          <a:ln>
-            <a:noFill/>
-          </a:ln>
-        </p:spPr>
-        <p:style>
-          <a:lnRef idx="1">
-            <a:schemeClr val="accent1"/>
-          </a:lnRef>
-          <a:fillRef idx="3">
-            <a:schemeClr val="accent1"/>
-          </a:fillRef>
-          <a:effectRef idx="2">
-            <a:schemeClr val="accent1"/>
-          </a:effectRef>
-          <a:fontRef idx="minor">
-            <a:schemeClr val="lt1"/>
-          </a:fontRef>
-        </p:style>
-        <p:txBody>
-          <a:bodyPr rtlCol="0" anchor="ctr"/>
-          <a:lstStyle/>
-          <a:p>
-            <a:pPr algn="ctr"/>
-          </a:p>
-        </p:txBody>
-      </p:sp>
-      <p:sp>
-        <p:nvSpPr>
-          <p:cNvPr id="13" name="Rectangle 12"/>
-          <p:cNvSpPr/>
-          <p:nvPr/>
-        </p:nvSpPr>
-        <p:spPr>
-          <a:xfrm>
-            <a:off x="4283354" y="1655064"/>
-            <a:ext cx="3624986" cy="27432"/>
-          </a:xfrm>
-          <a:prstGeom prst="rect">
-            <a:avLst/>
-          </a:prstGeom>
-          <a:solidFill>
-            <a:srgbClr val="FFD000"/>
-          </a:solidFill>
-          <a:ln>
-            <a:noFill/>
-          </a:ln>
-        </p:spPr>
-        <p:style>
-          <a:lnRef idx="1">
-            <a:schemeClr val="accent1"/>
-          </a:lnRef>
-          <a:fillRef idx="3">
-            <a:schemeClr val="accent1"/>
-          </a:fillRef>
-          <a:effectRef idx="2">
-            <a:schemeClr val="accent1"/>
-          </a:effectRef>
-          <a:fontRef idx="minor">
-            <a:schemeClr val="lt1"/>
-          </a:fontRef>
-        </p:style>
-        <p:txBody>
-          <a:bodyPr rtlCol="0" anchor="ctr"/>
-          <a:lstStyle/>
-          <a:p>
-            <a:pPr algn="ctr"/>
-          </a:p>
-        </p:txBody>
-      </p:sp>
-      <p:pic>
-        <p:nvPicPr>
-          <p:cNvPr id="14" name="Picture 13" descr="google_docs.png"/>
-          <p:cNvPicPr>
-            <a:picLocks noChangeAspect="1"/>
-          </p:cNvPicPr>
-          <p:nvPr/>
-        </p:nvPicPr>
-        <p:blipFill>
-          <a:blip r:embed="rId3"/>
-          <a:stretch>
-            <a:fillRect/>
-          </a:stretch>
-        </p:blipFill>
-        <p:spPr>
-          <a:xfrm>
-            <a:off x="5485485" y="1847087"/>
-            <a:ext cx="1220724" cy="1220724"/>
-          </a:xfrm>
-          <a:prstGeom prst="rect">
-            <a:avLst/>
-          </a:prstGeom>
-        </p:spPr>
-      </p:pic>
-      <p:sp>
-        <p:nvSpPr>
-          <p:cNvPr id="15" name="TextBox 14"/>
+              <a:t>Clase 13 · Diseño de interfaces</a:t>
+            </a:r>
+          </a:p>
+        </p:txBody>
+      </p:sp>
+      <p:sp>
+        <p:nvSpPr>
+          <p:cNvPr id="5" name="TextBox 4"/>
           <p:cNvSpPr txBox="1"/>
           <p:nvPr/>
         </p:nvSpPr>
         <p:spPr>
           <a:xfrm>
-            <a:off x="4356506" y="3159251"/>
-            <a:ext cx="3478682" cy="621792"/>
-          </a:xfrm>
-          <a:prstGeom prst="rect">
-            <a:avLst/>
-          </a:prstGeom>
-          <a:noFill/>
-        </p:spPr>
-        <p:txBody>
-          <a:bodyPr wrap="square" anchor="t"/>
-          <a:lstStyle/>
-          <a:p>
-            <a:pPr algn="ctr"/>
-            <a:r>
-              <a:rPr sz="1300" b="1" i="0">
-                <a:solidFill>
-                  <a:srgbClr val="095292"/>
-                </a:solidFill>
-                <a:latin typeface="Calibri"/>
-              </a:rPr>
-              <a:t>google docs</a:t>
-            </a:r>
-          </a:p>
-          <a:p>
-            <a:pPr algn="ctr">
-              <a:spcBef>
-                <a:spcPts val="200"/>
-              </a:spcBef>
-            </a:pPr>
-            <a:r>
-              <a:rPr sz="1000" b="0" i="0">
-                <a:solidFill>
-                  <a:srgbClr val="666666"/>
-                </a:solidFill>
-                <a:latin typeface="Calibri"/>
-              </a:rPr>
-              <a:t>Documentos del paquete de diseño</a:t>
-            </a:r>
-          </a:p>
-        </p:txBody>
-      </p:sp>
-      <p:sp>
-        <p:nvSpPr>
-          <p:cNvPr id="16" name="Rounded Rectangle 15"/>
-          <p:cNvSpPr/>
-          <p:nvPr/>
-        </p:nvSpPr>
-        <p:spPr>
-          <a:xfrm>
-            <a:off x="8109508" y="1591056"/>
-            <a:ext cx="3624986" cy="2299716"/>
-          </a:xfrm>
-          <a:prstGeom prst="roundRect">
-            <a:avLst>
-              <a:gd name="adj" fmla="val 12000"/>
-            </a:avLst>
-          </a:prstGeom>
-          <a:solidFill>
-            <a:srgbClr val="F2F2F2"/>
-          </a:solidFill>
-          <a:ln>
-            <a:noFill/>
-          </a:ln>
-        </p:spPr>
-        <p:style>
-          <a:lnRef idx="1">
-            <a:schemeClr val="accent1"/>
-          </a:lnRef>
-          <a:fillRef idx="3">
-            <a:schemeClr val="accent1"/>
-          </a:fillRef>
-          <a:effectRef idx="2">
-            <a:schemeClr val="accent1"/>
-          </a:effectRef>
-          <a:fontRef idx="minor">
-            <a:schemeClr val="lt1"/>
-          </a:fontRef>
-        </p:style>
-        <p:txBody>
-          <a:bodyPr rtlCol="0" anchor="ctr"/>
-          <a:lstStyle/>
-          <a:p>
-            <a:pPr algn="ctr"/>
-          </a:p>
-        </p:txBody>
-      </p:sp>
-      <p:sp>
-        <p:nvSpPr>
-          <p:cNvPr id="17" name="Rectangle 16"/>
-          <p:cNvSpPr/>
-          <p:nvPr/>
-        </p:nvSpPr>
-        <p:spPr>
-          <a:xfrm>
-            <a:off x="8109508" y="1591056"/>
-            <a:ext cx="3624986" cy="64008"/>
-          </a:xfrm>
-          <a:prstGeom prst="rect">
-            <a:avLst/>
-          </a:prstGeom>
-          <a:solidFill>
-            <a:srgbClr val="095292"/>
-          </a:solidFill>
-          <a:ln>
-            <a:noFill/>
-          </a:ln>
-        </p:spPr>
-        <p:style>
-          <a:lnRef idx="1">
-            <a:schemeClr val="accent1"/>
-          </a:lnRef>
-          <a:fillRef idx="3">
-            <a:schemeClr val="accent1"/>
-          </a:fillRef>
-          <a:effectRef idx="2">
-            <a:schemeClr val="accent1"/>
-          </a:effectRef>
-          <a:fontRef idx="minor">
-            <a:schemeClr val="lt1"/>
-          </a:fontRef>
-        </p:style>
-        <p:txBody>
-          <a:bodyPr rtlCol="0" anchor="ctr"/>
-          <a:lstStyle/>
-          <a:p>
-            <a:pPr algn="ctr"/>
-          </a:p>
-        </p:txBody>
-      </p:sp>
-      <p:sp>
-        <p:nvSpPr>
-          <p:cNvPr id="18" name="Rectangle 17"/>
-          <p:cNvSpPr/>
-          <p:nvPr/>
-        </p:nvSpPr>
-        <p:spPr>
-          <a:xfrm>
-            <a:off x="8109508" y="1655064"/>
-            <a:ext cx="3624986" cy="27432"/>
-          </a:xfrm>
-          <a:prstGeom prst="rect">
-            <a:avLst/>
-          </a:prstGeom>
-          <a:solidFill>
-            <a:srgbClr val="FFD000"/>
-          </a:solidFill>
-          <a:ln>
-            <a:noFill/>
-          </a:ln>
-        </p:spPr>
-        <p:style>
-          <a:lnRef idx="1">
-            <a:schemeClr val="accent1"/>
-          </a:lnRef>
-          <a:fillRef idx="3">
-            <a:schemeClr val="accent1"/>
-          </a:fillRef>
-          <a:effectRef idx="2">
-            <a:schemeClr val="accent1"/>
-          </a:effectRef>
-          <a:fontRef idx="minor">
-            <a:schemeClr val="lt1"/>
-          </a:fontRef>
-        </p:style>
-        <p:txBody>
-          <a:bodyPr rtlCol="0" anchor="ctr"/>
-          <a:lstStyle/>
-          <a:p>
-            <a:pPr algn="ctr"/>
-          </a:p>
-        </p:txBody>
-      </p:sp>
-      <p:sp>
-        <p:nvSpPr>
-          <p:cNvPr id="19" name="Rounded Rectangle 18"/>
-          <p:cNvSpPr/>
-          <p:nvPr/>
-        </p:nvSpPr>
-        <p:spPr>
-          <a:xfrm>
-            <a:off x="9311640" y="1847087"/>
-            <a:ext cx="1220724" cy="1220724"/>
-          </a:xfrm>
-          <a:prstGeom prst="roundRect">
-            <a:avLst>
-              <a:gd name="adj" fmla="val 12000"/>
-            </a:avLst>
-          </a:prstGeom>
-          <a:solidFill>
-            <a:srgbClr val="E8F4FA"/>
-          </a:solidFill>
-          <a:ln>
-            <a:noFill/>
-          </a:ln>
-        </p:spPr>
-        <p:style>
-          <a:lnRef idx="1">
-            <a:schemeClr val="accent1"/>
-          </a:lnRef>
-          <a:fillRef idx="3">
-            <a:schemeClr val="accent1"/>
-          </a:fillRef>
-          <a:effectRef idx="2">
-            <a:schemeClr val="accent1"/>
-          </a:effectRef>
-          <a:fontRef idx="minor">
-            <a:schemeClr val="lt1"/>
-          </a:fontRef>
-        </p:style>
-        <p:txBody>
-          <a:bodyPr rtlCol="0" anchor="ctr"/>
-          <a:lstStyle/>
-          <a:p>
-            <a:pPr algn="ctr"/>
-          </a:p>
-        </p:txBody>
-      </p:sp>
-      <p:sp>
-        <p:nvSpPr>
-          <p:cNvPr id="20" name="TextBox 19"/>
-          <p:cNvSpPr txBox="1"/>
-          <p:nvPr/>
-        </p:nvSpPr>
-        <p:spPr>
-          <a:xfrm>
-            <a:off x="9311640" y="1847087"/>
-            <a:ext cx="1220724" cy="1220724"/>
-          </a:xfrm>
-          <a:prstGeom prst="rect">
-            <a:avLst/>
-          </a:prstGeom>
-          <a:noFill/>
-        </p:spPr>
-        <p:txBody>
-          <a:bodyPr wrap="square" anchor="ctr"/>
-          <a:lstStyle/>
-          <a:p>
-            <a:pPr algn="ctr"/>
-            <a:r>
-              <a:rPr sz="1600" b="1" i="0">
-                <a:solidFill>
-                  <a:srgbClr val="095292"/>
-                </a:solidFill>
-                <a:latin typeface="Calibri"/>
-              </a:rPr>
-              <a:t>F</a:t>
-            </a:r>
-          </a:p>
-        </p:txBody>
-      </p:sp>
-      <p:sp>
-        <p:nvSpPr>
-          <p:cNvPr id="21" name="TextBox 20"/>
-          <p:cNvSpPr txBox="1"/>
-          <p:nvPr/>
-        </p:nvSpPr>
-        <p:spPr>
-          <a:xfrm>
-            <a:off x="8182660" y="3159251"/>
-            <a:ext cx="3478682" cy="621792"/>
-          </a:xfrm>
-          <a:prstGeom prst="rect">
-            <a:avLst/>
-          </a:prstGeom>
-          <a:noFill/>
-        </p:spPr>
-        <p:txBody>
-          <a:bodyPr wrap="square" anchor="t"/>
-          <a:lstStyle/>
-          <a:p>
-            <a:pPr algn="ctr"/>
-            <a:r>
-              <a:rPr sz="1300" b="1" i="0">
-                <a:solidFill>
-                  <a:srgbClr val="095292"/>
-                </a:solidFill>
-                <a:latin typeface="Calibri"/>
-              </a:rPr>
-              <a:t>Figma</a:t>
-            </a:r>
-          </a:p>
-          <a:p>
-            <a:pPr algn="ctr">
-              <a:spcBef>
-                <a:spcPts val="200"/>
-              </a:spcBef>
-            </a:pPr>
-            <a:r>
-              <a:rPr sz="1000" b="0" i="0">
-                <a:solidFill>
-                  <a:srgbClr val="666666"/>
-                </a:solidFill>
-                <a:latin typeface="Calibri"/>
-              </a:rPr>
-              <a:t>Wireframes y prototipo navegable</a:t>
-            </a:r>
-          </a:p>
-        </p:txBody>
-      </p:sp>
-      <p:sp>
-        <p:nvSpPr>
-          <p:cNvPr id="22" name="Rounded Rectangle 21"/>
-          <p:cNvSpPr/>
-          <p:nvPr/>
-        </p:nvSpPr>
-        <p:spPr>
-          <a:xfrm>
-            <a:off x="2370277" y="4055364"/>
-            <a:ext cx="3624986" cy="2299716"/>
-          </a:xfrm>
-          <a:prstGeom prst="roundRect">
-            <a:avLst>
-              <a:gd name="adj" fmla="val 12000"/>
-            </a:avLst>
-          </a:prstGeom>
-          <a:solidFill>
-            <a:srgbClr val="F2F2F2"/>
-          </a:solidFill>
-          <a:ln>
-            <a:noFill/>
-          </a:ln>
-        </p:spPr>
-        <p:style>
-          <a:lnRef idx="1">
-            <a:schemeClr val="accent1"/>
-          </a:lnRef>
-          <a:fillRef idx="3">
-            <a:schemeClr val="accent1"/>
-          </a:fillRef>
-          <a:effectRef idx="2">
-            <a:schemeClr val="accent1"/>
-          </a:effectRef>
-          <a:fontRef idx="minor">
-            <a:schemeClr val="lt1"/>
-          </a:fontRef>
-        </p:style>
-        <p:txBody>
-          <a:bodyPr rtlCol="0" anchor="ctr"/>
-          <a:lstStyle/>
-          <a:p>
-            <a:pPr algn="ctr"/>
-          </a:p>
-        </p:txBody>
-      </p:sp>
-      <p:sp>
-        <p:nvSpPr>
-          <p:cNvPr id="23" name="Rectangle 22"/>
-          <p:cNvSpPr/>
-          <p:nvPr/>
-        </p:nvSpPr>
-        <p:spPr>
-          <a:xfrm>
-            <a:off x="2370277" y="4055364"/>
-            <a:ext cx="3624986" cy="64008"/>
-          </a:xfrm>
-          <a:prstGeom prst="rect">
-            <a:avLst/>
-          </a:prstGeom>
-          <a:solidFill>
-            <a:srgbClr val="095292"/>
-          </a:solidFill>
-          <a:ln>
-            <a:noFill/>
-          </a:ln>
-        </p:spPr>
-        <p:style>
-          <a:lnRef idx="1">
-            <a:schemeClr val="accent1"/>
-          </a:lnRef>
-          <a:fillRef idx="3">
-            <a:schemeClr val="accent1"/>
-          </a:fillRef>
-          <a:effectRef idx="2">
-            <a:schemeClr val="accent1"/>
-          </a:effectRef>
-          <a:fontRef idx="minor">
-            <a:schemeClr val="lt1"/>
-          </a:fontRef>
-        </p:style>
-        <p:txBody>
-          <a:bodyPr rtlCol="0" anchor="ctr"/>
-          <a:lstStyle/>
-          <a:p>
-            <a:pPr algn="ctr"/>
-          </a:p>
-        </p:txBody>
-      </p:sp>
-      <p:sp>
-        <p:nvSpPr>
-          <p:cNvPr id="24" name="Rectangle 23"/>
-          <p:cNvSpPr/>
-          <p:nvPr/>
-        </p:nvSpPr>
-        <p:spPr>
-          <a:xfrm>
-            <a:off x="2370277" y="4119372"/>
-            <a:ext cx="3624986" cy="27432"/>
-          </a:xfrm>
-          <a:prstGeom prst="rect">
-            <a:avLst/>
-          </a:prstGeom>
-          <a:solidFill>
-            <a:srgbClr val="FFD000"/>
-          </a:solidFill>
-          <a:ln>
-            <a:noFill/>
-          </a:ln>
-        </p:spPr>
-        <p:style>
-          <a:lnRef idx="1">
-            <a:schemeClr val="accent1"/>
-          </a:lnRef>
-          <a:fillRef idx="3">
-            <a:schemeClr val="accent1"/>
-          </a:fillRef>
-          <a:effectRef idx="2">
-            <a:schemeClr val="accent1"/>
-          </a:effectRef>
-          <a:fontRef idx="minor">
-            <a:schemeClr val="lt1"/>
-          </a:fontRef>
-        </p:style>
-        <p:txBody>
-          <a:bodyPr rtlCol="0" anchor="ctr"/>
-          <a:lstStyle/>
-          <a:p>
-            <a:pPr algn="ctr"/>
-          </a:p>
-        </p:txBody>
-      </p:sp>
-      <p:sp>
-        <p:nvSpPr>
-          <p:cNvPr id="25" name="Rounded Rectangle 24"/>
-          <p:cNvSpPr/>
-          <p:nvPr/>
-        </p:nvSpPr>
-        <p:spPr>
-          <a:xfrm>
-            <a:off x="3572408" y="4311396"/>
-            <a:ext cx="1220724" cy="1220724"/>
-          </a:xfrm>
-          <a:prstGeom prst="roundRect">
-            <a:avLst>
-              <a:gd name="adj" fmla="val 12000"/>
-            </a:avLst>
-          </a:prstGeom>
-          <a:solidFill>
-            <a:srgbClr val="E8F4FA"/>
-          </a:solidFill>
-          <a:ln>
-            <a:noFill/>
-          </a:ln>
-        </p:spPr>
-        <p:style>
-          <a:lnRef idx="1">
-            <a:schemeClr val="accent1"/>
-          </a:lnRef>
-          <a:fillRef idx="3">
-            <a:schemeClr val="accent1"/>
-          </a:fillRef>
-          <a:effectRef idx="2">
-            <a:schemeClr val="accent1"/>
-          </a:effectRef>
-          <a:fontRef idx="minor">
-            <a:schemeClr val="lt1"/>
-          </a:fontRef>
-        </p:style>
-        <p:txBody>
-          <a:bodyPr rtlCol="0" anchor="ctr"/>
-          <a:lstStyle/>
-          <a:p>
-            <a:pPr algn="ctr"/>
-          </a:p>
-        </p:txBody>
-      </p:sp>
-      <p:sp>
-        <p:nvSpPr>
-          <p:cNvPr id="26" name="TextBox 25"/>
-          <p:cNvSpPr txBox="1"/>
-          <p:nvPr/>
-        </p:nvSpPr>
-        <p:spPr>
-          <a:xfrm>
-            <a:off x="3572408" y="4311396"/>
-            <a:ext cx="1220724" cy="1220724"/>
-          </a:xfrm>
-          <a:prstGeom prst="rect">
-            <a:avLst/>
-          </a:prstGeom>
-          <a:noFill/>
-        </p:spPr>
-        <p:txBody>
-          <a:bodyPr wrap="square" anchor="ctr"/>
-          <a:lstStyle/>
-          <a:p>
-            <a:pPr algn="ctr"/>
-            <a:r>
-              <a:rPr sz="1600" b="1" i="0">
-                <a:solidFill>
-                  <a:srgbClr val="095292"/>
-                </a:solidFill>
-                <a:latin typeface="Calibri"/>
-              </a:rPr>
-              <a:t>P</a:t>
-            </a:r>
-          </a:p>
-        </p:txBody>
-      </p:sp>
-      <p:sp>
-        <p:nvSpPr>
-          <p:cNvPr id="27" name="TextBox 26"/>
-          <p:cNvSpPr txBox="1"/>
-          <p:nvPr/>
-        </p:nvSpPr>
-        <p:spPr>
-          <a:xfrm>
-            <a:off x="2443429" y="5623560"/>
-            <a:ext cx="3478682" cy="621792"/>
-          </a:xfrm>
-          <a:prstGeom prst="rect">
-            <a:avLst/>
-          </a:prstGeom>
-          <a:noFill/>
-        </p:spPr>
-        <p:txBody>
-          <a:bodyPr wrap="square" anchor="t"/>
-          <a:lstStyle/>
-          <a:p>
-            <a:pPr algn="ctr"/>
-            <a:r>
-              <a:rPr sz="1300" b="1" i="0">
-                <a:solidFill>
-                  <a:srgbClr val="095292"/>
-                </a:solidFill>
-                <a:latin typeface="Calibri"/>
-              </a:rPr>
-              <a:t>Penpot</a:t>
-            </a:r>
-          </a:p>
-          <a:p>
-            <a:pPr algn="ctr">
-              <a:spcBef>
-                <a:spcPts val="200"/>
-              </a:spcBef>
-            </a:pPr>
-            <a:r>
-              <a:rPr sz="1000" b="0" i="0">
-                <a:solidFill>
-                  <a:srgbClr val="666666"/>
-                </a:solidFill>
-                <a:latin typeface="Calibri"/>
-              </a:rPr>
-              <a:t>Alternativa libre a Figma</a:t>
-            </a:r>
-          </a:p>
-        </p:txBody>
-      </p:sp>
-      <p:sp>
-        <p:nvSpPr>
-          <p:cNvPr id="28" name="Rounded Rectangle 27"/>
-          <p:cNvSpPr/>
-          <p:nvPr/>
-        </p:nvSpPr>
-        <p:spPr>
-          <a:xfrm>
-            <a:off x="6196431" y="4055364"/>
-            <a:ext cx="3624986" cy="2299716"/>
-          </a:xfrm>
-          <a:prstGeom prst="roundRect">
-            <a:avLst>
-              <a:gd name="adj" fmla="val 12000"/>
-            </a:avLst>
-          </a:prstGeom>
-          <a:solidFill>
-            <a:srgbClr val="F2F2F2"/>
-          </a:solidFill>
-          <a:ln>
-            <a:noFill/>
-          </a:ln>
-        </p:spPr>
-        <p:style>
-          <a:lnRef idx="1">
-            <a:schemeClr val="accent1"/>
-          </a:lnRef>
-          <a:fillRef idx="3">
-            <a:schemeClr val="accent1"/>
-          </a:fillRef>
-          <a:effectRef idx="2">
-            <a:schemeClr val="accent1"/>
-          </a:effectRef>
-          <a:fontRef idx="minor">
-            <a:schemeClr val="lt1"/>
-          </a:fontRef>
-        </p:style>
-        <p:txBody>
-          <a:bodyPr rtlCol="0" anchor="ctr"/>
-          <a:lstStyle/>
-          <a:p>
-            <a:pPr algn="ctr"/>
-          </a:p>
-        </p:txBody>
-      </p:sp>
-      <p:sp>
-        <p:nvSpPr>
-          <p:cNvPr id="29" name="Rectangle 28"/>
-          <p:cNvSpPr/>
-          <p:nvPr/>
-        </p:nvSpPr>
-        <p:spPr>
-          <a:xfrm>
-            <a:off x="6196431" y="4055364"/>
-            <a:ext cx="3624986" cy="64008"/>
-          </a:xfrm>
-          <a:prstGeom prst="rect">
-            <a:avLst/>
-          </a:prstGeom>
-          <a:solidFill>
-            <a:srgbClr val="095292"/>
-          </a:solidFill>
-          <a:ln>
-            <a:noFill/>
-          </a:ln>
-        </p:spPr>
-        <p:style>
-          <a:lnRef idx="1">
-            <a:schemeClr val="accent1"/>
-          </a:lnRef>
-          <a:fillRef idx="3">
-            <a:schemeClr val="accent1"/>
-          </a:fillRef>
-          <a:effectRef idx="2">
-            <a:schemeClr val="accent1"/>
-          </a:effectRef>
-          <a:fontRef idx="minor">
-            <a:schemeClr val="lt1"/>
-          </a:fontRef>
-        </p:style>
-        <p:txBody>
-          <a:bodyPr rtlCol="0" anchor="ctr"/>
-          <a:lstStyle/>
-          <a:p>
-            <a:pPr algn="ctr"/>
-          </a:p>
-        </p:txBody>
-      </p:sp>
-      <p:sp>
-        <p:nvSpPr>
-          <p:cNvPr id="30" name="Rectangle 29"/>
-          <p:cNvSpPr/>
-          <p:nvPr/>
-        </p:nvSpPr>
-        <p:spPr>
-          <a:xfrm>
-            <a:off x="6196431" y="4119372"/>
-            <a:ext cx="3624986" cy="27432"/>
-          </a:xfrm>
-          <a:prstGeom prst="rect">
-            <a:avLst/>
-          </a:prstGeom>
-          <a:solidFill>
-            <a:srgbClr val="FFD000"/>
-          </a:solidFill>
-          <a:ln>
-            <a:noFill/>
-          </a:ln>
-        </p:spPr>
-        <p:style>
-          <a:lnRef idx="1">
-            <a:schemeClr val="accent1"/>
-          </a:lnRef>
-          <a:fillRef idx="3">
-            <a:schemeClr val="accent1"/>
-          </a:fillRef>
-          <a:effectRef idx="2">
-            <a:schemeClr val="accent1"/>
-          </a:effectRef>
-          <a:fontRef idx="minor">
-            <a:schemeClr val="lt1"/>
-          </a:fontRef>
-        </p:style>
-        <p:txBody>
-          <a:bodyPr rtlCol="0" anchor="ctr"/>
-          <a:lstStyle/>
-          <a:p>
-            <a:pPr algn="ctr"/>
-          </a:p>
-        </p:txBody>
-      </p:sp>
-      <p:pic>
-        <p:nvPicPr>
-          <p:cNvPr id="31" name="Picture 30" descr="examlab.png"/>
-          <p:cNvPicPr>
-            <a:picLocks noChangeAspect="1"/>
-          </p:cNvPicPr>
-          <p:nvPr/>
-        </p:nvPicPr>
-        <p:blipFill>
-          <a:blip r:embed="rId4"/>
-          <a:stretch>
-            <a:fillRect/>
-          </a:stretch>
-        </p:blipFill>
-        <p:spPr>
-          <a:xfrm>
-            <a:off x="7398562" y="4311396"/>
-            <a:ext cx="1220724" cy="1220724"/>
-          </a:xfrm>
-          <a:prstGeom prst="rect">
-            <a:avLst/>
-          </a:prstGeom>
-        </p:spPr>
-      </p:pic>
-      <p:sp>
-        <p:nvSpPr>
-          <p:cNvPr id="32" name="TextBox 31"/>
-          <p:cNvSpPr txBox="1"/>
-          <p:nvPr/>
-        </p:nvSpPr>
-        <p:spPr>
-          <a:xfrm>
-            <a:off x="6269583" y="5623560"/>
-            <a:ext cx="3478682" cy="621792"/>
-          </a:xfrm>
-          <a:prstGeom prst="rect">
-            <a:avLst/>
-          </a:prstGeom>
-          <a:noFill/>
-        </p:spPr>
-        <p:txBody>
-          <a:bodyPr wrap="square" anchor="t"/>
-          <a:lstStyle/>
-          <a:p>
-            <a:pPr algn="ctr"/>
-            <a:r>
-              <a:rPr sz="1300" b="1" i="0">
-                <a:solidFill>
-                  <a:srgbClr val="095292"/>
-                </a:solidFill>
-                <a:latin typeface="Calibri"/>
-              </a:rPr>
-              <a:t>la plataforma del curso</a:t>
-            </a:r>
-          </a:p>
-          <a:p>
-            <a:pPr algn="ctr">
-              <a:spcBef>
-                <a:spcPts val="200"/>
-              </a:spcBef>
-            </a:pPr>
-            <a:r>
-              <a:rPr sz="1000" b="0" i="0">
-                <a:solidFill>
-                  <a:srgbClr val="666666"/>
-                </a:solidFill>
-                <a:latin typeface="Calibri"/>
-              </a:rPr>
-              <a:t>Entrega del taller · en la fecha que indique el docente</a:t>
-            </a:r>
-          </a:p>
-        </p:txBody>
-      </p:sp>
-      <p:sp>
-        <p:nvSpPr>
-          <p:cNvPr id="33" name="TextBox 32"/>
-          <p:cNvSpPr txBox="1"/>
-          <p:nvPr/>
-        </p:nvSpPr>
-        <p:spPr>
-          <a:xfrm>
-            <a:off x="11185855" y="6473952"/>
-            <a:ext cx="640080" cy="274320"/>
+            <a:off x="457200" y="3017520"/>
+            <a:ext cx="11277295" cy="1645920"/>
           </a:xfrm>
           <a:prstGeom prst="rect">
             <a:avLst/>
@@ -7272,141 +6579,65 @@
           </a:bodyPr>
           <a:lstStyle/>
           <a:p>
-            <a:pPr algn="r"/>
-            <a:r>
-              <a:rPr sz="1100" b="0" i="0">
-                <a:solidFill>
-                  <a:srgbClr val="666666"/>
-                </a:solidFill>
-                <a:latin typeface="Calibri"/>
-              </a:rPr>
-              <a:t>16</a:t>
-            </a:r>
-          </a:p>
-        </p:txBody>
-      </p:sp>
-    </p:spTree>
-  </p:cSld>
-  <p:clrMapOvr>
-    <a:masterClrMapping/>
-  </p:clrMapOvr>
-</p:sld>
-</file>
-
-<file path=ppt/slides/slide17.xml><?xml version="1.0" encoding="utf-8"?>
-<p:sld xmlns:a="http://schemas.openxmlformats.org/drawingml/2006/main" xmlns:p="http://schemas.openxmlformats.org/presentationml/2006/main" xmlns:r="http://schemas.openxmlformats.org/officeDocument/2006/relationships">
-  <p:cSld>
-    <p:bg>
-      <p:bgPr>
-        <a:solidFill>
-          <a:srgbClr val="FFFFFF"/>
-        </a:solidFill>
-        <a:effectLst/>
-      </p:bgPr>
-    </p:bg>
-    <p:spTree>
-      <p:nvGrpSpPr>
-        <p:cNvPr id="1" name=""/>
-        <p:cNvGrpSpPr/>
-        <p:nvPr/>
-      </p:nvGrpSpPr>
-      <p:grpSpPr/>
-      <p:sp>
-        <p:nvSpPr>
-          <p:cNvPr id="2" name="Rectangle 1"/>
-          <p:cNvSpPr/>
-          <p:nvPr/>
-        </p:nvSpPr>
-        <p:spPr>
-          <a:xfrm>
-            <a:off x="0" y="0"/>
-            <a:ext cx="12191695" cy="960120"/>
-          </a:xfrm>
-          <a:prstGeom prst="rect">
-            <a:avLst/>
-          </a:prstGeom>
-          <a:solidFill>
-            <a:srgbClr val="095292"/>
-          </a:solidFill>
-          <a:ln>
-            <a:noFill/>
-          </a:ln>
-        </p:spPr>
-        <p:style>
-          <a:lnRef idx="1">
-            <a:schemeClr val="accent1"/>
-          </a:lnRef>
-          <a:fillRef idx="3">
-            <a:schemeClr val="accent1"/>
-          </a:fillRef>
-          <a:effectRef idx="2">
-            <a:schemeClr val="accent1"/>
-          </a:effectRef>
-          <a:fontRef idx="minor">
-            <a:schemeClr val="lt1"/>
-          </a:fontRef>
-        </p:style>
-        <p:txBody>
-          <a:bodyPr rtlCol="0" anchor="ctr"/>
-          <a:lstStyle/>
-          <a:p>
-            <a:pPr algn="ctr"/>
-          </a:p>
-        </p:txBody>
-      </p:sp>
-      <p:sp>
-        <p:nvSpPr>
-          <p:cNvPr id="3" name="Rectangle 2"/>
-          <p:cNvSpPr/>
-          <p:nvPr/>
-        </p:nvSpPr>
-        <p:spPr>
-          <a:xfrm>
-            <a:off x="0" y="960120"/>
-            <a:ext cx="12191695" cy="41148"/>
-          </a:xfrm>
-          <a:prstGeom prst="rect">
-            <a:avLst/>
-          </a:prstGeom>
-          <a:solidFill>
-            <a:srgbClr val="FFD000"/>
-          </a:solidFill>
-          <a:ln>
-            <a:noFill/>
-          </a:ln>
-        </p:spPr>
-        <p:style>
-          <a:lnRef idx="1">
-            <a:schemeClr val="accent1"/>
-          </a:lnRef>
-          <a:fillRef idx="3">
-            <a:schemeClr val="accent1"/>
-          </a:fillRef>
-          <a:effectRef idx="2">
-            <a:schemeClr val="accent1"/>
-          </a:effectRef>
-          <a:fontRef idx="minor">
-            <a:schemeClr val="lt1"/>
-          </a:fontRef>
-        </p:style>
-        <p:txBody>
-          <a:bodyPr rtlCol="0" anchor="ctr"/>
-          <a:lstStyle/>
-          <a:p>
-            <a:pPr algn="ctr"/>
-          </a:p>
-        </p:txBody>
-      </p:sp>
-      <p:sp>
-        <p:nvSpPr>
-          <p:cNvPr id="4" name="TextBox 3"/>
+            <a:pPr algn="ctr">
+              <a:spcAft>
+                <a:spcPts val="600"/>
+              </a:spcAft>
+            </a:pPr>
+            <a:r>
+              <a:rPr sz="1600" b="0" i="0">
+                <a:solidFill>
+                  <a:srgbClr val="333333"/>
+                </a:solidFill>
+                <a:latin typeface="Calibri"/>
+              </a:rPr>
+              <a:t>Del boceto en gris al prototipo que se puede recorrer</a:t>
+            </a:r>
+          </a:p>
+          <a:p>
+            <a:pPr algn="ctr">
+              <a:spcAft>
+                <a:spcPts val="600"/>
+              </a:spcAft>
+            </a:pPr>
+            <a:r>
+              <a:rPr sz="1600" b="0" i="0">
+                <a:solidFill>
+                  <a:srgbClr val="333333"/>
+                </a:solidFill>
+                <a:latin typeface="Calibri"/>
+              </a:rPr>
+              <a:t>Repasen las laminas de teoria: cada concepto esta completo</a:t>
+            </a:r>
+          </a:p>
+          <a:p>
+            <a:pPr algn="ctr">
+              <a:spcAft>
+                <a:spcPts val="600"/>
+              </a:spcAft>
+            </a:pPr>
+            <a:r>
+              <a:rPr sz="1600" b="0" i="0">
+                <a:solidFill>
+                  <a:srgbClr val="333333"/>
+                </a:solidFill>
+                <a:latin typeface="Calibri"/>
+              </a:rPr>
+              <a:t>Siguiente clase: continuamos con el siguiente tema</a:t>
+            </a:r>
+          </a:p>
+        </p:txBody>
+      </p:sp>
+      <p:sp>
+        <p:nvSpPr>
+          <p:cNvPr id="6" name="TextBox 5"/>
           <p:cNvSpPr txBox="1"/>
           <p:nvPr/>
         </p:nvSpPr>
         <p:spPr>
           <a:xfrm>
-            <a:off x="457200" y="164592"/>
-            <a:ext cx="11277295" cy="502920"/>
+            <a:off x="457200" y="4754880"/>
+            <a:ext cx="11277295" cy="640080"/>
           </a:xfrm>
           <a:prstGeom prst="rect">
             <a:avLst/>
@@ -7419,1346 +6650,15 @@
           </a:bodyPr>
           <a:lstStyle/>
           <a:p>
-            <a:r>
-              <a:rPr sz="2600" b="1" i="0">
-                <a:solidFill>
-                  <a:srgbClr val="FFFFFF"/>
-                </a:solidFill>
-                <a:latin typeface="Calibri"/>
-              </a:rPr>
-              <a:t>Taller PI — por que importa</a:t>
-            </a:r>
-          </a:p>
-        </p:txBody>
-      </p:sp>
-      <p:sp>
-        <p:nvSpPr>
-          <p:cNvPr id="5" name="TextBox 4"/>
-          <p:cNvSpPr txBox="1"/>
-          <p:nvPr/>
-        </p:nvSpPr>
-        <p:spPr>
-          <a:xfrm>
-            <a:off x="457200" y="1170432"/>
-            <a:ext cx="11277295" cy="5230368"/>
-          </a:xfrm>
-          <a:prstGeom prst="rect">
-            <a:avLst/>
-          </a:prstGeom>
-          <a:noFill/>
-        </p:spPr>
-        <p:txBody>
-          <a:bodyPr wrap="square">
-            <a:spAutoFit/>
-          </a:bodyPr>
-          <a:lstStyle/>
-          <a:p>
-            <a:pPr>
-              <a:spcAft>
-                <a:spcPts val="800"/>
-              </a:spcAft>
-            </a:pPr>
-            <a:r>
-              <a:rPr sz="2000" b="0" i="0">
-                <a:solidFill>
-                  <a:srgbClr val="333333"/>
-                </a:solidFill>
-                <a:latin typeface="Calibri"/>
-              </a:rPr>
-              <a:t>–   </a:t>
-            </a:r>
+            <a:pPr algn="ctr"/>
             <a:r>
               <a:rPr sz="2000" b="1" i="0">
                 <a:solidFill>
-                  <a:srgbClr val="333333"/>
-                </a:solidFill>
-                <a:latin typeface="Calibri"/>
-              </a:rPr>
-              <a:t>Por que importa al PI:</a:t>
-            </a:r>
-            <a:r>
-              <a:rPr sz="2000" b="0" i="0">
-                <a:solidFill>
-                  <a:srgbClr val="333333"/>
-                </a:solidFill>
-                <a:latin typeface="Calibri"/>
-              </a:rPr>
-              <a:t> la interfaz es la cara visible del paquete de diseño de VetCare y es lo unico del PI que la clinica Huellitas entiende sin traduccion; ademas es el insumo directo con el que Programacion II construye las pantallas reales.</a:t>
-            </a:r>
-          </a:p>
-          <a:p>
-            <a:pPr>
-              <a:spcAft>
-                <a:spcPts val="800"/>
-              </a:spcAft>
-            </a:pPr>
-            <a:r>
-              <a:rPr sz="2000" b="0" i="0">
-                <a:solidFill>
-                  <a:srgbClr val="333333"/>
-                </a:solidFill>
-                <a:latin typeface="Calibri"/>
-              </a:rPr>
-              <a:t>–   Es la ultima clase con tema nuevo del curso: lo que se produzca hoy entra tal cual al documento final y a la sustentacion de la clase 14.</a:t>
-            </a:r>
-          </a:p>
-          <a:p>
-            <a:pPr>
-              <a:spcAft>
-                <a:spcPts val="800"/>
-              </a:spcAft>
-            </a:pPr>
-            <a:r>
-              <a:rPr sz="2000" b="0" i="0">
-                <a:solidFill>
-                  <a:srgbClr val="333333"/>
-                </a:solidFill>
-                <a:latin typeface="Calibri"/>
-              </a:rPr>
-              <a:t>–   Quien va solo por la ruta C cierra su PI con este prototipo navegable, que es entregable completo y valido por si mismo, no una version recortada del proyecto.</a:t>
-            </a:r>
-          </a:p>
-        </p:txBody>
-      </p:sp>
-      <p:sp>
-        <p:nvSpPr>
-          <p:cNvPr id="6" name="TextBox 5"/>
-          <p:cNvSpPr txBox="1"/>
-          <p:nvPr/>
-        </p:nvSpPr>
-        <p:spPr>
-          <a:xfrm>
-            <a:off x="11185855" y="6473952"/>
-            <a:ext cx="640080" cy="274320"/>
-          </a:xfrm>
-          <a:prstGeom prst="rect">
-            <a:avLst/>
-          </a:prstGeom>
-          <a:noFill/>
-        </p:spPr>
-        <p:txBody>
-          <a:bodyPr wrap="square">
-            <a:spAutoFit/>
-          </a:bodyPr>
-          <a:lstStyle/>
-          <a:p>
-            <a:pPr algn="r"/>
-            <a:r>
-              <a:rPr sz="1100" b="0" i="0">
-                <a:solidFill>
-                  <a:srgbClr val="666666"/>
-                </a:solidFill>
-                <a:latin typeface="Calibri"/>
-              </a:rPr>
-              <a:t>17</a:t>
-            </a:r>
-          </a:p>
-        </p:txBody>
-      </p:sp>
-    </p:spTree>
-  </p:cSld>
-  <p:clrMapOvr>
-    <a:masterClrMapping/>
-  </p:clrMapOvr>
-</p:sld>
-</file>
-
-<file path=ppt/slides/slide18.xml><?xml version="1.0" encoding="utf-8"?>
-<p:sld xmlns:a="http://schemas.openxmlformats.org/drawingml/2006/main" xmlns:p="http://schemas.openxmlformats.org/presentationml/2006/main" xmlns:r="http://schemas.openxmlformats.org/officeDocument/2006/relationships">
-  <p:cSld>
-    <p:bg>
-      <p:bgPr>
-        <a:solidFill>
-          <a:srgbClr val="FFFFFF"/>
-        </a:solidFill>
-        <a:effectLst/>
-      </p:bgPr>
-    </p:bg>
-    <p:spTree>
-      <p:nvGrpSpPr>
-        <p:cNvPr id="1" name=""/>
-        <p:cNvGrpSpPr/>
-        <p:nvPr/>
-      </p:nvGrpSpPr>
-      <p:grpSpPr/>
-      <p:sp>
-        <p:nvSpPr>
-          <p:cNvPr id="2" name="Rectangle 1"/>
-          <p:cNvSpPr/>
-          <p:nvPr/>
-        </p:nvSpPr>
-        <p:spPr>
-          <a:xfrm>
-            <a:off x="0" y="0"/>
-            <a:ext cx="12191695" cy="960120"/>
-          </a:xfrm>
-          <a:prstGeom prst="rect">
-            <a:avLst/>
-          </a:prstGeom>
-          <a:solidFill>
-            <a:srgbClr val="095292"/>
-          </a:solidFill>
-          <a:ln>
-            <a:noFill/>
-          </a:ln>
-        </p:spPr>
-        <p:style>
-          <a:lnRef idx="1">
-            <a:schemeClr val="accent1"/>
-          </a:lnRef>
-          <a:fillRef idx="3">
-            <a:schemeClr val="accent1"/>
-          </a:fillRef>
-          <a:effectRef idx="2">
-            <a:schemeClr val="accent1"/>
-          </a:effectRef>
-          <a:fontRef idx="minor">
-            <a:schemeClr val="lt1"/>
-          </a:fontRef>
-        </p:style>
-        <p:txBody>
-          <a:bodyPr rtlCol="0" anchor="ctr"/>
-          <a:lstStyle/>
-          <a:p>
-            <a:pPr algn="ctr"/>
-          </a:p>
-        </p:txBody>
-      </p:sp>
-      <p:sp>
-        <p:nvSpPr>
-          <p:cNvPr id="3" name="Rectangle 2"/>
-          <p:cNvSpPr/>
-          <p:nvPr/>
-        </p:nvSpPr>
-        <p:spPr>
-          <a:xfrm>
-            <a:off x="0" y="960120"/>
-            <a:ext cx="12191695" cy="41148"/>
-          </a:xfrm>
-          <a:prstGeom prst="rect">
-            <a:avLst/>
-          </a:prstGeom>
-          <a:solidFill>
-            <a:srgbClr val="FFD000"/>
-          </a:solidFill>
-          <a:ln>
-            <a:noFill/>
-          </a:ln>
-        </p:spPr>
-        <p:style>
-          <a:lnRef idx="1">
-            <a:schemeClr val="accent1"/>
-          </a:lnRef>
-          <a:fillRef idx="3">
-            <a:schemeClr val="accent1"/>
-          </a:fillRef>
-          <a:effectRef idx="2">
-            <a:schemeClr val="accent1"/>
-          </a:effectRef>
-          <a:fontRef idx="minor">
-            <a:schemeClr val="lt1"/>
-          </a:fontRef>
-        </p:style>
-        <p:txBody>
-          <a:bodyPr rtlCol="0" anchor="ctr"/>
-          <a:lstStyle/>
-          <a:p>
-            <a:pPr algn="ctr"/>
-          </a:p>
-        </p:txBody>
-      </p:sp>
-      <p:sp>
-        <p:nvSpPr>
-          <p:cNvPr id="4" name="TextBox 3"/>
-          <p:cNvSpPr txBox="1"/>
-          <p:nvPr/>
-        </p:nvSpPr>
-        <p:spPr>
-          <a:xfrm>
-            <a:off x="457200" y="164592"/>
-            <a:ext cx="11277295" cy="502920"/>
-          </a:xfrm>
-          <a:prstGeom prst="rect">
-            <a:avLst/>
-          </a:prstGeom>
-          <a:noFill/>
-        </p:spPr>
-        <p:txBody>
-          <a:bodyPr wrap="square">
-            <a:spAutoFit/>
-          </a:bodyPr>
-          <a:lstStyle/>
-          <a:p>
-            <a:r>
-              <a:rPr sz="2600" b="1" i="0">
-                <a:solidFill>
-                  <a:srgbClr val="FFFFFF"/>
-                </a:solidFill>
-                <a:latin typeface="Calibri"/>
-              </a:rPr>
-              <a:t>Taller PI — punto de partida</a:t>
-            </a:r>
-          </a:p>
-        </p:txBody>
-      </p:sp>
-      <p:sp>
-        <p:nvSpPr>
-          <p:cNvPr id="5" name="TextBox 4"/>
-          <p:cNvSpPr txBox="1"/>
-          <p:nvPr/>
-        </p:nvSpPr>
-        <p:spPr>
-          <a:xfrm>
-            <a:off x="457200" y="1170432"/>
-            <a:ext cx="11277295" cy="5230368"/>
-          </a:xfrm>
-          <a:prstGeom prst="rect">
-            <a:avLst/>
-          </a:prstGeom>
-          <a:noFill/>
-        </p:spPr>
-        <p:txBody>
-          <a:bodyPr wrap="square">
-            <a:spAutoFit/>
-          </a:bodyPr>
-          <a:lstStyle/>
-          <a:p>
-            <a:pPr>
-              <a:spcAft>
-                <a:spcPts val="800"/>
-              </a:spcAft>
-            </a:pPr>
-            <a:r>
-              <a:rPr sz="2000" b="0" i="0">
-                <a:solidFill>
-                  <a:srgbClr val="333333"/>
-                </a:solidFill>
-                <a:latin typeface="Calibri"/>
-              </a:rPr>
-              <a:t>–   El equipo ya tiene aprobados los RF y RNF, el diagrama de casos de uso, el de clases con Mascota, Dueño, Historia_Clinica y Cita, y el diccionario de datos con tipos y longitudes.</a:t>
-            </a:r>
-          </a:p>
-          <a:p>
-            <a:pPr>
-              <a:spcAft>
-                <a:spcPts val="800"/>
-              </a:spcAft>
-            </a:pPr>
-            <a:r>
-              <a:rPr sz="2000" b="0" i="0">
-                <a:solidFill>
-                  <a:srgbClr val="333333"/>
-                </a:solidFill>
-                <a:latin typeface="Calibri"/>
-              </a:rPr>
-              <a:t>–   Hasta hoy VetCare existe solo como texto y diagramas: nadie ha visto todavia como se veria la pantalla que va a usar la recepcionista de Huellitas.</a:t>
-            </a:r>
-          </a:p>
-          <a:p>
-            <a:pPr>
-              <a:spcAft>
-                <a:spcPts val="800"/>
-              </a:spcAft>
-            </a:pPr>
-            <a:r>
-              <a:rPr sz="2000" b="0" i="0">
-                <a:solidFill>
-                  <a:srgbClr val="333333"/>
-                </a:solidFill>
-                <a:latin typeface="Calibri"/>
-              </a:rPr>
-              <a:t>–   La usuaria de referencia esta descrita asi: recepcionista con experiencia clinica alta y experiencia informatica baja, atiende telefono mientras registra y necesita terminar el registro de un paciente nuevo en menos de dos minutos.</a:t>
-            </a:r>
-          </a:p>
-        </p:txBody>
-      </p:sp>
-      <p:sp>
-        <p:nvSpPr>
-          <p:cNvPr id="6" name="TextBox 5"/>
-          <p:cNvSpPr txBox="1"/>
-          <p:nvPr/>
-        </p:nvSpPr>
-        <p:spPr>
-          <a:xfrm>
-            <a:off x="11185855" y="6473952"/>
-            <a:ext cx="640080" cy="274320"/>
-          </a:xfrm>
-          <a:prstGeom prst="rect">
-            <a:avLst/>
-          </a:prstGeom>
-          <a:noFill/>
-        </p:spPr>
-        <p:txBody>
-          <a:bodyPr wrap="square">
-            <a:spAutoFit/>
-          </a:bodyPr>
-          <a:lstStyle/>
-          <a:p>
-            <a:pPr algn="r"/>
-            <a:r>
-              <a:rPr sz="1100" b="0" i="0">
-                <a:solidFill>
-                  <a:srgbClr val="666666"/>
-                </a:solidFill>
-                <a:latin typeface="Calibri"/>
-              </a:rPr>
-              <a:t>18</a:t>
-            </a:r>
-          </a:p>
-        </p:txBody>
-      </p:sp>
-    </p:spTree>
-  </p:cSld>
-  <p:clrMapOvr>
-    <a:masterClrMapping/>
-  </p:clrMapOvr>
-</p:sld>
-</file>
-
-<file path=ppt/slides/slide19.xml><?xml version="1.0" encoding="utf-8"?>
-<p:sld xmlns:a="http://schemas.openxmlformats.org/drawingml/2006/main" xmlns:p="http://schemas.openxmlformats.org/presentationml/2006/main" xmlns:r="http://schemas.openxmlformats.org/officeDocument/2006/relationships">
-  <p:cSld>
-    <p:bg>
-      <p:bgPr>
-        <a:solidFill>
-          <a:srgbClr val="FFFFFF"/>
-        </a:solidFill>
-        <a:effectLst/>
-      </p:bgPr>
-    </p:bg>
-    <p:spTree>
-      <p:nvGrpSpPr>
-        <p:cNvPr id="1" name=""/>
-        <p:cNvGrpSpPr/>
-        <p:nvPr/>
-      </p:nvGrpSpPr>
-      <p:grpSpPr/>
-      <p:sp>
-        <p:nvSpPr>
-          <p:cNvPr id="2" name="Rectangle 1"/>
-          <p:cNvSpPr/>
-          <p:nvPr/>
-        </p:nvSpPr>
-        <p:spPr>
-          <a:xfrm>
-            <a:off x="0" y="0"/>
-            <a:ext cx="12191695" cy="960120"/>
-          </a:xfrm>
-          <a:prstGeom prst="rect">
-            <a:avLst/>
-          </a:prstGeom>
-          <a:solidFill>
-            <a:srgbClr val="095292"/>
-          </a:solidFill>
-          <a:ln>
-            <a:noFill/>
-          </a:ln>
-        </p:spPr>
-        <p:style>
-          <a:lnRef idx="1">
-            <a:schemeClr val="accent1"/>
-          </a:lnRef>
-          <a:fillRef idx="3">
-            <a:schemeClr val="accent1"/>
-          </a:fillRef>
-          <a:effectRef idx="2">
-            <a:schemeClr val="accent1"/>
-          </a:effectRef>
-          <a:fontRef idx="minor">
-            <a:schemeClr val="lt1"/>
-          </a:fontRef>
-        </p:style>
-        <p:txBody>
-          <a:bodyPr rtlCol="0" anchor="ctr"/>
-          <a:lstStyle/>
-          <a:p>
-            <a:pPr algn="ctr"/>
-          </a:p>
-        </p:txBody>
-      </p:sp>
-      <p:sp>
-        <p:nvSpPr>
-          <p:cNvPr id="3" name="Rectangle 2"/>
-          <p:cNvSpPr/>
-          <p:nvPr/>
-        </p:nvSpPr>
-        <p:spPr>
-          <a:xfrm>
-            <a:off x="0" y="960120"/>
-            <a:ext cx="12191695" cy="41148"/>
-          </a:xfrm>
-          <a:prstGeom prst="rect">
-            <a:avLst/>
-          </a:prstGeom>
-          <a:solidFill>
-            <a:srgbClr val="FFD000"/>
-          </a:solidFill>
-          <a:ln>
-            <a:noFill/>
-          </a:ln>
-        </p:spPr>
-        <p:style>
-          <a:lnRef idx="1">
-            <a:schemeClr val="accent1"/>
-          </a:lnRef>
-          <a:fillRef idx="3">
-            <a:schemeClr val="accent1"/>
-          </a:fillRef>
-          <a:effectRef idx="2">
-            <a:schemeClr val="accent1"/>
-          </a:effectRef>
-          <a:fontRef idx="minor">
-            <a:schemeClr val="lt1"/>
-          </a:fontRef>
-        </p:style>
-        <p:txBody>
-          <a:bodyPr rtlCol="0" anchor="ctr"/>
-          <a:lstStyle/>
-          <a:p>
-            <a:pPr algn="ctr"/>
-          </a:p>
-        </p:txBody>
-      </p:sp>
-      <p:sp>
-        <p:nvSpPr>
-          <p:cNvPr id="4" name="TextBox 3"/>
-          <p:cNvSpPr txBox="1"/>
-          <p:nvPr/>
-        </p:nvSpPr>
-        <p:spPr>
-          <a:xfrm>
-            <a:off x="457200" y="164592"/>
-            <a:ext cx="11277295" cy="502920"/>
-          </a:xfrm>
-          <a:prstGeom prst="rect">
-            <a:avLst/>
-          </a:prstGeom>
-          <a:noFill/>
-        </p:spPr>
-        <p:txBody>
-          <a:bodyPr wrap="square">
-            <a:spAutoFit/>
-          </a:bodyPr>
-          <a:lstStyle/>
-          <a:p>
-            <a:r>
-              <a:rPr sz="2600" b="1" i="0">
-                <a:solidFill>
-                  <a:srgbClr val="FFFFFF"/>
-                </a:solidFill>
-                <a:latin typeface="Calibri"/>
-              </a:rPr>
-              <a:t>Taller PI — pasos guiados</a:t>
-            </a:r>
-          </a:p>
-        </p:txBody>
-      </p:sp>
-      <p:sp>
-        <p:nvSpPr>
-          <p:cNvPr id="5" name="Rounded Rectangle 4"/>
-          <p:cNvSpPr/>
-          <p:nvPr/>
-        </p:nvSpPr>
-        <p:spPr>
-          <a:xfrm>
-            <a:off x="457200" y="1234440"/>
-            <a:ext cx="11277295" cy="950976"/>
-          </a:xfrm>
-          <a:prstGeom prst="roundRect">
-            <a:avLst>
-              <a:gd name="adj" fmla="val 12000"/>
-            </a:avLst>
-          </a:prstGeom>
-          <a:solidFill>
-            <a:srgbClr val="F2F2F2"/>
-          </a:solidFill>
-          <a:ln>
-            <a:noFill/>
-          </a:ln>
-        </p:spPr>
-        <p:style>
-          <a:lnRef idx="1">
-            <a:schemeClr val="accent1"/>
-          </a:lnRef>
-          <a:fillRef idx="3">
-            <a:schemeClr val="accent1"/>
-          </a:fillRef>
-          <a:effectRef idx="2">
-            <a:schemeClr val="accent1"/>
-          </a:effectRef>
-          <a:fontRef idx="minor">
-            <a:schemeClr val="lt1"/>
-          </a:fontRef>
-        </p:style>
-        <p:txBody>
-          <a:bodyPr rtlCol="0" anchor="ctr"/>
-          <a:lstStyle/>
-          <a:p>
-            <a:pPr algn="ctr"/>
-          </a:p>
-        </p:txBody>
-      </p:sp>
-      <p:sp>
-        <p:nvSpPr>
-          <p:cNvPr id="6" name="Rounded Rectangle 5"/>
-          <p:cNvSpPr/>
-          <p:nvPr/>
-        </p:nvSpPr>
-        <p:spPr>
-          <a:xfrm>
-            <a:off x="594360" y="1490472"/>
-            <a:ext cx="438912" cy="438912"/>
-          </a:xfrm>
-          <a:prstGeom prst="roundRect">
-            <a:avLst>
-              <a:gd name="adj" fmla="val 12000"/>
-            </a:avLst>
-          </a:prstGeom>
-          <a:solidFill>
-            <a:srgbClr val="095292"/>
-          </a:solidFill>
-          <a:ln>
-            <a:noFill/>
-          </a:ln>
-        </p:spPr>
-        <p:style>
-          <a:lnRef idx="1">
-            <a:schemeClr val="accent1"/>
-          </a:lnRef>
-          <a:fillRef idx="3">
-            <a:schemeClr val="accent1"/>
-          </a:fillRef>
-          <a:effectRef idx="2">
-            <a:schemeClr val="accent1"/>
-          </a:effectRef>
-          <a:fontRef idx="minor">
-            <a:schemeClr val="lt1"/>
-          </a:fontRef>
-        </p:style>
-        <p:txBody>
-          <a:bodyPr rtlCol="0" anchor="ctr"/>
-          <a:lstStyle/>
-          <a:p>
-            <a:pPr algn="ctr"/>
-          </a:p>
-        </p:txBody>
-      </p:sp>
-      <p:sp>
-        <p:nvSpPr>
-          <p:cNvPr id="7" name="TextBox 6"/>
-          <p:cNvSpPr txBox="1"/>
-          <p:nvPr/>
-        </p:nvSpPr>
-        <p:spPr>
-          <a:xfrm>
-            <a:off x="594360" y="1490472"/>
-            <a:ext cx="438912" cy="438912"/>
-          </a:xfrm>
-          <a:prstGeom prst="rect">
-            <a:avLst/>
-          </a:prstGeom>
-          <a:noFill/>
-        </p:spPr>
-        <p:txBody>
-          <a:bodyPr wrap="square" anchor="ctr"/>
-          <a:lstStyle/>
-          <a:p>
-            <a:pPr algn="ctr"/>
-            <a:r>
-              <a:rPr sz="1600" b="1" i="0">
-                <a:solidFill>
-                  <a:srgbClr val="FFFFFF"/>
-                </a:solidFill>
-                <a:latin typeface="Calibri"/>
-              </a:rPr>
-              <a:t>1</a:t>
-            </a:r>
-          </a:p>
-        </p:txBody>
-      </p:sp>
-      <p:sp>
-        <p:nvSpPr>
-          <p:cNvPr id="8" name="TextBox 7"/>
-          <p:cNvSpPr txBox="1"/>
-          <p:nvPr/>
-        </p:nvSpPr>
-        <p:spPr>
-          <a:xfrm>
-            <a:off x="1188720" y="1325880"/>
-            <a:ext cx="10271455" cy="786384"/>
-          </a:xfrm>
-          <a:prstGeom prst="rect">
-            <a:avLst/>
-          </a:prstGeom>
-          <a:noFill/>
-        </p:spPr>
-        <p:txBody>
-          <a:bodyPr wrap="square" anchor="ctr"/>
-          <a:lstStyle/>
-          <a:p>
-            <a:r>
-              <a:rPr sz="1400" b="1" i="0">
-                <a:solidFill>
-                  <a:srgbClr val="095292"/>
-                </a:solidFill>
-                <a:latin typeface="Calibri"/>
-              </a:rPr>
-              <a:t>Paso 1. En Excalidraw o en papel, dibujen el wireframe en gris de la pantalla Registrar mascota de VetCare, sin colores ni logos, ubicando bloque de dueño, bloque de datos de la mascota y zona de accion; el wireframe debe caber en una sola vista sin scroll y no puede tener mas de nueve campos.</a:t>
-            </a:r>
-          </a:p>
-        </p:txBody>
-      </p:sp>
-      <p:sp>
-        <p:nvSpPr>
-          <p:cNvPr id="9" name="Rounded Rectangle 8"/>
-          <p:cNvSpPr/>
-          <p:nvPr/>
-        </p:nvSpPr>
-        <p:spPr>
-          <a:xfrm>
-            <a:off x="457200" y="2276856"/>
-            <a:ext cx="11277295" cy="950976"/>
-          </a:xfrm>
-          <a:prstGeom prst="roundRect">
-            <a:avLst>
-              <a:gd name="adj" fmla="val 12000"/>
-            </a:avLst>
-          </a:prstGeom>
-          <a:solidFill>
-            <a:srgbClr val="E8F4FA"/>
-          </a:solidFill>
-          <a:ln>
-            <a:noFill/>
-          </a:ln>
-        </p:spPr>
-        <p:style>
-          <a:lnRef idx="1">
-            <a:schemeClr val="accent1"/>
-          </a:lnRef>
-          <a:fillRef idx="3">
-            <a:schemeClr val="accent1"/>
-          </a:fillRef>
-          <a:effectRef idx="2">
-            <a:schemeClr val="accent1"/>
-          </a:effectRef>
-          <a:fontRef idx="minor">
-            <a:schemeClr val="lt1"/>
-          </a:fontRef>
-        </p:style>
-        <p:txBody>
-          <a:bodyPr rtlCol="0" anchor="ctr"/>
-          <a:lstStyle/>
-          <a:p>
-            <a:pPr algn="ctr"/>
-          </a:p>
-        </p:txBody>
-      </p:sp>
-      <p:sp>
-        <p:nvSpPr>
-          <p:cNvPr id="10" name="Rounded Rectangle 9"/>
-          <p:cNvSpPr/>
-          <p:nvPr/>
-        </p:nvSpPr>
-        <p:spPr>
-          <a:xfrm>
-            <a:off x="594360" y="2532888"/>
-            <a:ext cx="438912" cy="438912"/>
-          </a:xfrm>
-          <a:prstGeom prst="roundRect">
-            <a:avLst>
-              <a:gd name="adj" fmla="val 12000"/>
-            </a:avLst>
-          </a:prstGeom>
-          <a:solidFill>
-            <a:srgbClr val="095292"/>
-          </a:solidFill>
-          <a:ln>
-            <a:noFill/>
-          </a:ln>
-        </p:spPr>
-        <p:style>
-          <a:lnRef idx="1">
-            <a:schemeClr val="accent1"/>
-          </a:lnRef>
-          <a:fillRef idx="3">
-            <a:schemeClr val="accent1"/>
-          </a:fillRef>
-          <a:effectRef idx="2">
-            <a:schemeClr val="accent1"/>
-          </a:effectRef>
-          <a:fontRef idx="minor">
-            <a:schemeClr val="lt1"/>
-          </a:fontRef>
-        </p:style>
-        <p:txBody>
-          <a:bodyPr rtlCol="0" anchor="ctr"/>
-          <a:lstStyle/>
-          <a:p>
-            <a:pPr algn="ctr"/>
-          </a:p>
-        </p:txBody>
-      </p:sp>
-      <p:sp>
-        <p:nvSpPr>
-          <p:cNvPr id="11" name="TextBox 10"/>
-          <p:cNvSpPr txBox="1"/>
-          <p:nvPr/>
-        </p:nvSpPr>
-        <p:spPr>
-          <a:xfrm>
-            <a:off x="594360" y="2532888"/>
-            <a:ext cx="438912" cy="438912"/>
-          </a:xfrm>
-          <a:prstGeom prst="rect">
-            <a:avLst/>
-          </a:prstGeom>
-          <a:noFill/>
-        </p:spPr>
-        <p:txBody>
-          <a:bodyPr wrap="square" anchor="ctr"/>
-          <a:lstStyle/>
-          <a:p>
-            <a:pPr algn="ctr"/>
-            <a:r>
-              <a:rPr sz="1600" b="1" i="0">
-                <a:solidFill>
-                  <a:srgbClr val="FFFFFF"/>
-                </a:solidFill>
-                <a:latin typeface="Calibri"/>
-              </a:rPr>
-              <a:t>2</a:t>
-            </a:r>
-          </a:p>
-        </p:txBody>
-      </p:sp>
-      <p:sp>
-        <p:nvSpPr>
-          <p:cNvPr id="12" name="TextBox 11"/>
-          <p:cNvSpPr txBox="1"/>
-          <p:nvPr/>
-        </p:nvSpPr>
-        <p:spPr>
-          <a:xfrm>
-            <a:off x="1188720" y="2368296"/>
-            <a:ext cx="10271455" cy="786384"/>
-          </a:xfrm>
-          <a:prstGeom prst="rect">
-            <a:avLst/>
-          </a:prstGeom>
-          <a:noFill/>
-        </p:spPr>
-        <p:txBody>
-          <a:bodyPr wrap="square" anchor="ctr"/>
-          <a:lstStyle/>
-          <a:p>
-            <a:r>
-              <a:rPr sz="1400" b="1" i="0">
-                <a:solidFill>
-                  <a:srgbClr val="095292"/>
-                </a:solidFill>
-                <a:latin typeface="Calibri"/>
-              </a:rPr>
-              <a:t>Paso 2. Numeren de uno a seis los elementos criticos del wireframe y llenen la tabla de anotaciones indicando para cada numero el atributo del diccionario de datos que lo respalda, el RF que lo exige y si es obligatorio u opcional; si un elemento no tiene RF, borrenlo o creen el requisito y dejenlo escrito.</a:t>
-            </a:r>
-          </a:p>
-        </p:txBody>
-      </p:sp>
-      <p:sp>
-        <p:nvSpPr>
-          <p:cNvPr id="13" name="Rounded Rectangle 12"/>
-          <p:cNvSpPr/>
-          <p:nvPr/>
-        </p:nvSpPr>
-        <p:spPr>
-          <a:xfrm>
-            <a:off x="457200" y="3319272"/>
-            <a:ext cx="11277295" cy="950976"/>
-          </a:xfrm>
-          <a:prstGeom prst="roundRect">
-            <a:avLst>
-              <a:gd name="adj" fmla="val 12000"/>
-            </a:avLst>
-          </a:prstGeom>
-          <a:solidFill>
-            <a:srgbClr val="F2F2F2"/>
-          </a:solidFill>
-          <a:ln>
-            <a:noFill/>
-          </a:ln>
-        </p:spPr>
-        <p:style>
-          <a:lnRef idx="1">
-            <a:schemeClr val="accent1"/>
-          </a:lnRef>
-          <a:fillRef idx="3">
-            <a:schemeClr val="accent1"/>
-          </a:fillRef>
-          <a:effectRef idx="2">
-            <a:schemeClr val="accent1"/>
-          </a:effectRef>
-          <a:fontRef idx="minor">
-            <a:schemeClr val="lt1"/>
-          </a:fontRef>
-        </p:style>
-        <p:txBody>
-          <a:bodyPr rtlCol="0" anchor="ctr"/>
-          <a:lstStyle/>
-          <a:p>
-            <a:pPr algn="ctr"/>
-          </a:p>
-        </p:txBody>
-      </p:sp>
-      <p:sp>
-        <p:nvSpPr>
-          <p:cNvPr id="14" name="Rounded Rectangle 13"/>
-          <p:cNvSpPr/>
-          <p:nvPr/>
-        </p:nvSpPr>
-        <p:spPr>
-          <a:xfrm>
-            <a:off x="594360" y="3575304"/>
-            <a:ext cx="438912" cy="438912"/>
-          </a:xfrm>
-          <a:prstGeom prst="roundRect">
-            <a:avLst>
-              <a:gd name="adj" fmla="val 12000"/>
-            </a:avLst>
-          </a:prstGeom>
-          <a:solidFill>
-            <a:srgbClr val="095292"/>
-          </a:solidFill>
-          <a:ln>
-            <a:noFill/>
-          </a:ln>
-        </p:spPr>
-        <p:style>
-          <a:lnRef idx="1">
-            <a:schemeClr val="accent1"/>
-          </a:lnRef>
-          <a:fillRef idx="3">
-            <a:schemeClr val="accent1"/>
-          </a:fillRef>
-          <a:effectRef idx="2">
-            <a:schemeClr val="accent1"/>
-          </a:effectRef>
-          <a:fontRef idx="minor">
-            <a:schemeClr val="lt1"/>
-          </a:fontRef>
-        </p:style>
-        <p:txBody>
-          <a:bodyPr rtlCol="0" anchor="ctr"/>
-          <a:lstStyle/>
-          <a:p>
-            <a:pPr algn="ctr"/>
-          </a:p>
-        </p:txBody>
-      </p:sp>
-      <p:sp>
-        <p:nvSpPr>
-          <p:cNvPr id="15" name="TextBox 14"/>
-          <p:cNvSpPr txBox="1"/>
-          <p:nvPr/>
-        </p:nvSpPr>
-        <p:spPr>
-          <a:xfrm>
-            <a:off x="594360" y="3575304"/>
-            <a:ext cx="438912" cy="438912"/>
-          </a:xfrm>
-          <a:prstGeom prst="rect">
-            <a:avLst/>
-          </a:prstGeom>
-          <a:noFill/>
-        </p:spPr>
-        <p:txBody>
-          <a:bodyPr wrap="square" anchor="ctr"/>
-          <a:lstStyle/>
-          <a:p>
-            <a:pPr algn="ctr"/>
-            <a:r>
-              <a:rPr sz="1600" b="1" i="0">
-                <a:solidFill>
-                  <a:srgbClr val="FFFFFF"/>
-                </a:solidFill>
-                <a:latin typeface="Calibri"/>
-              </a:rPr>
-              <a:t>3</a:t>
-            </a:r>
-          </a:p>
-        </p:txBody>
-      </p:sp>
-      <p:sp>
-        <p:nvSpPr>
-          <p:cNvPr id="16" name="TextBox 15"/>
-          <p:cNvSpPr txBox="1"/>
-          <p:nvPr/>
-        </p:nvSpPr>
-        <p:spPr>
-          <a:xfrm>
-            <a:off x="1188720" y="3410712"/>
-            <a:ext cx="10271455" cy="786384"/>
-          </a:xfrm>
-          <a:prstGeom prst="rect">
-            <a:avLst/>
-          </a:prstGeom>
-          <a:noFill/>
-        </p:spPr>
-        <p:txBody>
-          <a:bodyPr wrap="square" anchor="ctr"/>
-          <a:lstStyle/>
-          <a:p>
-            <a:r>
-              <a:rPr sz="1400" b="1" i="0">
-                <a:solidFill>
-                  <a:srgbClr val="095292"/>
-                </a:solidFill>
-                <a:latin typeface="Calibri"/>
-              </a:rPr>
-              <a:t>Paso 3. Diseñen la pantalla Buscar expediente resolviendo explicitamente el caso de resultados multiples: definan los tres criterios de busqueda, las columnas de la lista de resultados que permiten desambiguar y el mensaje exacto que se muestra cuando no hay ningun resultado.</a:t>
-            </a:r>
-          </a:p>
-        </p:txBody>
-      </p:sp>
-      <p:sp>
-        <p:nvSpPr>
-          <p:cNvPr id="17" name="Rounded Rectangle 16"/>
-          <p:cNvSpPr/>
-          <p:nvPr/>
-        </p:nvSpPr>
-        <p:spPr>
-          <a:xfrm>
-            <a:off x="457200" y="4361688"/>
-            <a:ext cx="11277295" cy="950976"/>
-          </a:xfrm>
-          <a:prstGeom prst="roundRect">
-            <a:avLst>
-              <a:gd name="adj" fmla="val 12000"/>
-            </a:avLst>
-          </a:prstGeom>
-          <a:solidFill>
-            <a:srgbClr val="E8F4FA"/>
-          </a:solidFill>
-          <a:ln>
-            <a:noFill/>
-          </a:ln>
-        </p:spPr>
-        <p:style>
-          <a:lnRef idx="1">
-            <a:schemeClr val="accent1"/>
-          </a:lnRef>
-          <a:fillRef idx="3">
-            <a:schemeClr val="accent1"/>
-          </a:fillRef>
-          <a:effectRef idx="2">
-            <a:schemeClr val="accent1"/>
-          </a:effectRef>
-          <a:fontRef idx="minor">
-            <a:schemeClr val="lt1"/>
-          </a:fontRef>
-        </p:style>
-        <p:txBody>
-          <a:bodyPr rtlCol="0" anchor="ctr"/>
-          <a:lstStyle/>
-          <a:p>
-            <a:pPr algn="ctr"/>
-          </a:p>
-        </p:txBody>
-      </p:sp>
-      <p:sp>
-        <p:nvSpPr>
-          <p:cNvPr id="18" name="Rounded Rectangle 17"/>
-          <p:cNvSpPr/>
-          <p:nvPr/>
-        </p:nvSpPr>
-        <p:spPr>
-          <a:xfrm>
-            <a:off x="594360" y="4617720"/>
-            <a:ext cx="438912" cy="438912"/>
-          </a:xfrm>
-          <a:prstGeom prst="roundRect">
-            <a:avLst>
-              <a:gd name="adj" fmla="val 12000"/>
-            </a:avLst>
-          </a:prstGeom>
-          <a:solidFill>
-            <a:srgbClr val="095292"/>
-          </a:solidFill>
-          <a:ln>
-            <a:noFill/>
-          </a:ln>
-        </p:spPr>
-        <p:style>
-          <a:lnRef idx="1">
-            <a:schemeClr val="accent1"/>
-          </a:lnRef>
-          <a:fillRef idx="3">
-            <a:schemeClr val="accent1"/>
-          </a:fillRef>
-          <a:effectRef idx="2">
-            <a:schemeClr val="accent1"/>
-          </a:effectRef>
-          <a:fontRef idx="minor">
-            <a:schemeClr val="lt1"/>
-          </a:fontRef>
-        </p:style>
-        <p:txBody>
-          <a:bodyPr rtlCol="0" anchor="ctr"/>
-          <a:lstStyle/>
-          <a:p>
-            <a:pPr algn="ctr"/>
-          </a:p>
-        </p:txBody>
-      </p:sp>
-      <p:sp>
-        <p:nvSpPr>
-          <p:cNvPr id="19" name="TextBox 18"/>
-          <p:cNvSpPr txBox="1"/>
-          <p:nvPr/>
-        </p:nvSpPr>
-        <p:spPr>
-          <a:xfrm>
-            <a:off x="594360" y="4617720"/>
-            <a:ext cx="438912" cy="438912"/>
-          </a:xfrm>
-          <a:prstGeom prst="rect">
-            <a:avLst/>
-          </a:prstGeom>
-          <a:noFill/>
-        </p:spPr>
-        <p:txBody>
-          <a:bodyPr wrap="square" anchor="ctr"/>
-          <a:lstStyle/>
-          <a:p>
-            <a:pPr algn="ctr"/>
-            <a:r>
-              <a:rPr sz="1600" b="1" i="0">
-                <a:solidFill>
-                  <a:srgbClr val="FFFFFF"/>
-                </a:solidFill>
-                <a:latin typeface="Calibri"/>
-              </a:rPr>
-              <a:t>4</a:t>
-            </a:r>
-          </a:p>
-        </p:txBody>
-      </p:sp>
-      <p:sp>
-        <p:nvSpPr>
-          <p:cNvPr id="20" name="TextBox 19"/>
-          <p:cNvSpPr txBox="1"/>
-          <p:nvPr/>
-        </p:nvSpPr>
-        <p:spPr>
-          <a:xfrm>
-            <a:off x="1188720" y="4453128"/>
-            <a:ext cx="10271455" cy="786384"/>
-          </a:xfrm>
-          <a:prstGeom prst="rect">
-            <a:avLst/>
-          </a:prstGeom>
-          <a:noFill/>
-        </p:spPr>
-        <p:txBody>
-          <a:bodyPr wrap="square" anchor="ctr"/>
-          <a:lstStyle/>
-          <a:p>
-            <a:r>
-              <a:rPr sz="1400" b="1" i="0">
-                <a:solidFill>
-                  <a:srgbClr val="095292"/>
-                </a:solidFill>
-                <a:latin typeface="Calibri"/>
-              </a:rPr>
-              <a:t>Paso 4. Pasen las dos pantallas a Figma o Penpot como mockup y conecten minimo tres transiciones navegables: Registrar mascota hacia la confirmacion con codigo, confirmacion hacia Buscar expediente, y un resultado de la lista hacia la ficha del paciente; escriban al lado de cada transicion que principio de usabilidad estan cumpliendo.</a:t>
-            </a:r>
-          </a:p>
-        </p:txBody>
-      </p:sp>
-      <p:sp>
-        <p:nvSpPr>
-          <p:cNvPr id="21" name="Rounded Rectangle 20"/>
-          <p:cNvSpPr/>
-          <p:nvPr/>
-        </p:nvSpPr>
-        <p:spPr>
-          <a:xfrm>
-            <a:off x="457200" y="5404104"/>
-            <a:ext cx="11277295" cy="950976"/>
-          </a:xfrm>
-          <a:prstGeom prst="roundRect">
-            <a:avLst>
-              <a:gd name="adj" fmla="val 12000"/>
-            </a:avLst>
-          </a:prstGeom>
-          <a:solidFill>
-            <a:srgbClr val="F2F2F2"/>
-          </a:solidFill>
-          <a:ln>
-            <a:noFill/>
-          </a:ln>
-        </p:spPr>
-        <p:style>
-          <a:lnRef idx="1">
-            <a:schemeClr val="accent1"/>
-          </a:lnRef>
-          <a:fillRef idx="3">
-            <a:schemeClr val="accent1"/>
-          </a:fillRef>
-          <a:effectRef idx="2">
-            <a:schemeClr val="accent1"/>
-          </a:effectRef>
-          <a:fontRef idx="minor">
-            <a:schemeClr val="lt1"/>
-          </a:fontRef>
-        </p:style>
-        <p:txBody>
-          <a:bodyPr rtlCol="0" anchor="ctr"/>
-          <a:lstStyle/>
-          <a:p>
-            <a:pPr algn="ctr"/>
-          </a:p>
-        </p:txBody>
-      </p:sp>
-      <p:sp>
-        <p:nvSpPr>
-          <p:cNvPr id="22" name="Rounded Rectangle 21"/>
-          <p:cNvSpPr/>
-          <p:nvPr/>
-        </p:nvSpPr>
-        <p:spPr>
-          <a:xfrm>
-            <a:off x="594360" y="5660136"/>
-            <a:ext cx="438912" cy="438912"/>
-          </a:xfrm>
-          <a:prstGeom prst="roundRect">
-            <a:avLst>
-              <a:gd name="adj" fmla="val 12000"/>
-            </a:avLst>
-          </a:prstGeom>
-          <a:solidFill>
-            <a:srgbClr val="095292"/>
-          </a:solidFill>
-          <a:ln>
-            <a:noFill/>
-          </a:ln>
-        </p:spPr>
-        <p:style>
-          <a:lnRef idx="1">
-            <a:schemeClr val="accent1"/>
-          </a:lnRef>
-          <a:fillRef idx="3">
-            <a:schemeClr val="accent1"/>
-          </a:fillRef>
-          <a:effectRef idx="2">
-            <a:schemeClr val="accent1"/>
-          </a:effectRef>
-          <a:fontRef idx="minor">
-            <a:schemeClr val="lt1"/>
-          </a:fontRef>
-        </p:style>
-        <p:txBody>
-          <a:bodyPr rtlCol="0" anchor="ctr"/>
-          <a:lstStyle/>
-          <a:p>
-            <a:pPr algn="ctr"/>
-          </a:p>
-        </p:txBody>
-      </p:sp>
-      <p:sp>
-        <p:nvSpPr>
-          <p:cNvPr id="23" name="TextBox 22"/>
-          <p:cNvSpPr txBox="1"/>
-          <p:nvPr/>
-        </p:nvSpPr>
-        <p:spPr>
-          <a:xfrm>
-            <a:off x="594360" y="5660136"/>
-            <a:ext cx="438912" cy="438912"/>
-          </a:xfrm>
-          <a:prstGeom prst="rect">
-            <a:avLst/>
-          </a:prstGeom>
-          <a:noFill/>
-        </p:spPr>
-        <p:txBody>
-          <a:bodyPr wrap="square" anchor="ctr"/>
-          <a:lstStyle/>
-          <a:p>
-            <a:pPr algn="ctr"/>
-            <a:r>
-              <a:rPr sz="1600" b="1" i="0">
-                <a:solidFill>
-                  <a:srgbClr val="FFFFFF"/>
-                </a:solidFill>
-                <a:latin typeface="Calibri"/>
-              </a:rPr>
-              <a:t>5</a:t>
-            </a:r>
-          </a:p>
-        </p:txBody>
-      </p:sp>
-      <p:sp>
-        <p:nvSpPr>
-          <p:cNvPr id="24" name="TextBox 23"/>
-          <p:cNvSpPr txBox="1"/>
-          <p:nvPr/>
-        </p:nvSpPr>
-        <p:spPr>
-          <a:xfrm>
-            <a:off x="1188720" y="5495544"/>
-            <a:ext cx="10271455" cy="786384"/>
-          </a:xfrm>
-          <a:prstGeom prst="rect">
-            <a:avLst/>
-          </a:prstGeom>
-          <a:noFill/>
-        </p:spPr>
-        <p:txBody>
-          <a:bodyPr wrap="square" anchor="ctr"/>
-          <a:lstStyle/>
-          <a:p>
-            <a:r>
-              <a:rPr sz="1400" b="1" i="0">
-                <a:solidFill>
-                  <a:srgbClr val="095292"/>
-                </a:solidFill>
-                <a:latin typeface="Calibri"/>
-              </a:rPr>
-              <a:t>Paso 5. Hagan prueba de pasillo con otro compañero, denle la tarea registrar la mascota Luna de la señora Perez y encontrar su ficha, no le expliquen nada, cronometren, cuenten clics y anoten los dos puntos donde dudo; escriban abajo los dos cambios concretos que haran al diseño por lo observado.</a:t>
-            </a:r>
-          </a:p>
-        </p:txBody>
-      </p:sp>
-      <p:sp>
-        <p:nvSpPr>
-          <p:cNvPr id="25" name="TextBox 24"/>
-          <p:cNvSpPr txBox="1"/>
-          <p:nvPr/>
-        </p:nvSpPr>
-        <p:spPr>
-          <a:xfrm>
-            <a:off x="11185855" y="6473952"/>
-            <a:ext cx="640080" cy="274320"/>
-          </a:xfrm>
-          <a:prstGeom prst="rect">
-            <a:avLst/>
-          </a:prstGeom>
-          <a:noFill/>
-        </p:spPr>
-        <p:txBody>
-          <a:bodyPr wrap="square">
-            <a:spAutoFit/>
-          </a:bodyPr>
-          <a:lstStyle/>
-          <a:p>
-            <a:pPr algn="r"/>
-            <a:r>
-              <a:rPr sz="1100" b="0" i="0">
-                <a:solidFill>
-                  <a:srgbClr val="666666"/>
-                </a:solidFill>
-                <a:latin typeface="Calibri"/>
-              </a:rPr>
-              <a:t>19</a:t>
+                  <a:srgbClr val="269CCB"/>
+                </a:solidFill>
+                <a:latin typeface="Calibri"/>
+              </a:rPr>
+              <a:t>Teoria al servicio del diseño</a:t>
             </a:r>
           </a:p>
         </p:txBody>
@@ -8904,7 +6804,7 @@
                 </a:solidFill>
                 <a:latin typeface="Calibri"/>
               </a:rPr>
-              <a:t>Encuadre de hoy · Objetivo del PI</a:t>
+              <a:t>Encuadre de hoy</a:t>
             </a:r>
           </a:p>
         </p:txBody>
@@ -8952,7 +6852,7 @@
                 </a:solidFill>
                 <a:latin typeface="Calibri"/>
               </a:rPr>
-              <a:t>Hoy avanzamos VetCare en:</a:t>
+              <a:t>Tema:</a:t>
             </a:r>
             <a:r>
               <a:rPr sz="2000" b="0" i="0">
@@ -8961,7 +6861,7 @@
                 </a:solidFill>
                 <a:latin typeface="Calibri"/>
               </a:rPr>
-              <a:t> Quedan listas las pantallas de Registrar mascota y Buscar expediente de VetCare, anotadas y conectadas en un prototipo navegable.</a:t>
+              <a:t> Diseño de interfaces</a:t>
             </a:r>
           </a:p>
           <a:p>
@@ -8977,34 +6877,7 @@
                 </a:solidFill>
                 <a:latin typeface="Calibri"/>
               </a:rPr>
-              <a:t>–   Herramienta: </a:t>
-            </a:r>
-            <a:r>
-              <a:rPr sz="2000" b="1" i="0">
-                <a:solidFill>
-                  <a:srgbClr val="333333"/>
-                </a:solidFill>
-                <a:latin typeface="Calibri"/>
-              </a:rPr>
-              <a:t>Figma o Penpot · Excalidraw · Google Docs</a:t>
-            </a:r>
-            <a:r>
-              <a:rPr sz="2000" b="0" i="0">
-                <a:solidFill>
-                  <a:srgbClr val="333333"/>
-                </a:solidFill>
-                <a:latin typeface="Calibri"/>
-              </a:rPr>
-              <a:t> · Bloque </a:t>
-            </a:r>
-            <a:r>
-              <a:rPr sz="2000" b="1" i="0">
-                <a:solidFill>
-                  <a:srgbClr val="333333"/>
-                </a:solidFill>
-                <a:latin typeface="Calibri"/>
-              </a:rPr>
-              <a:t>120 min</a:t>
+              <a:t>–   Del boceto en gris al prototipo que se puede recorrer</a:t>
             </a:r>
           </a:p>
           <a:p>
@@ -9020,7 +6893,7 @@
                 </a:solidFill>
                 <a:latin typeface="Calibri"/>
               </a:rPr>
-              <a:t>–   </a:t>
+              <a:t>–   Herramienta del tema: </a:t>
             </a:r>
             <a:r>
               <a:rPr sz="2000" b="1" i="0">
@@ -9029,7 +6902,7 @@
                 </a:solidFill>
                 <a:latin typeface="Calibri"/>
               </a:rPr>
-              <a:t>Entregable de hoy:</a:t>
+              <a:t>Figma o Penpot · Excalidraw · Google Docs</a:t>
             </a:r>
             <a:r>
               <a:rPr sz="2000" b="0" i="0">
@@ -9038,7 +6911,16 @@
                 </a:solidFill>
                 <a:latin typeface="Calibri"/>
               </a:rPr>
-              <a:t> Un archivo de Figma o Penpot con las dos pantallas anotadas y minimo tres transiciones navegables, mas la hoja de anotaciones que amarra cada campo a un RF y a un atributo del diccionario de datos, subido a la plataforma del curso.</a:t>
+              <a:t> · Bloque </a:t>
+            </a:r>
+            <a:r>
+              <a:rPr sz="2000" b="1" i="0">
+                <a:solidFill>
+                  <a:srgbClr val="333333"/>
+                </a:solidFill>
+                <a:latin typeface="Calibri"/>
+              </a:rPr>
+              <a:t>120 min</a:t>
             </a:r>
           </a:p>
           <a:p>
@@ -9054,7 +6936,7 @@
                 </a:solidFill>
                 <a:latin typeface="Calibri"/>
               </a:rPr>
-              <a:t>–   La teoria esta al servicio del producto: al salir, VetCare avanzo.</a:t>
+              <a:t>–   Ejemplo de toda la clase: VetCare, el sistema de la clinica «Huellitas».</a:t>
             </a:r>
           </a:p>
         </p:txBody>
@@ -9090,1917 +6972,6 @@
                 <a:latin typeface="Calibri"/>
               </a:rPr>
               <a:t>2</a:t>
-            </a:r>
-          </a:p>
-        </p:txBody>
-      </p:sp>
-    </p:spTree>
-  </p:cSld>
-  <p:clrMapOvr>
-    <a:masterClrMapping/>
-  </p:clrMapOvr>
-</p:sld>
-</file>
-
-<file path=ppt/slides/slide20.xml><?xml version="1.0" encoding="utf-8"?>
-<p:sld xmlns:a="http://schemas.openxmlformats.org/drawingml/2006/main" xmlns:p="http://schemas.openxmlformats.org/presentationml/2006/main" xmlns:r="http://schemas.openxmlformats.org/officeDocument/2006/relationships">
-  <p:cSld>
-    <p:bg>
-      <p:bgPr>
-        <a:solidFill>
-          <a:srgbClr val="FFFFFF"/>
-        </a:solidFill>
-        <a:effectLst/>
-      </p:bgPr>
-    </p:bg>
-    <p:spTree>
-      <p:nvGrpSpPr>
-        <p:cNvPr id="1" name=""/>
-        <p:cNvGrpSpPr/>
-        <p:nvPr/>
-      </p:nvGrpSpPr>
-      <p:grpSpPr/>
-      <p:sp>
-        <p:nvSpPr>
-          <p:cNvPr id="2" name="Rectangle 1"/>
-          <p:cNvSpPr/>
-          <p:nvPr/>
-        </p:nvSpPr>
-        <p:spPr>
-          <a:xfrm>
-            <a:off x="0" y="0"/>
-            <a:ext cx="12191695" cy="960120"/>
-          </a:xfrm>
-          <a:prstGeom prst="rect">
-            <a:avLst/>
-          </a:prstGeom>
-          <a:solidFill>
-            <a:srgbClr val="095292"/>
-          </a:solidFill>
-          <a:ln>
-            <a:noFill/>
-          </a:ln>
-        </p:spPr>
-        <p:style>
-          <a:lnRef idx="1">
-            <a:schemeClr val="accent1"/>
-          </a:lnRef>
-          <a:fillRef idx="3">
-            <a:schemeClr val="accent1"/>
-          </a:fillRef>
-          <a:effectRef idx="2">
-            <a:schemeClr val="accent1"/>
-          </a:effectRef>
-          <a:fontRef idx="minor">
-            <a:schemeClr val="lt1"/>
-          </a:fontRef>
-        </p:style>
-        <p:txBody>
-          <a:bodyPr rtlCol="0" anchor="ctr"/>
-          <a:lstStyle/>
-          <a:p>
-            <a:pPr algn="ctr"/>
-          </a:p>
-        </p:txBody>
-      </p:sp>
-      <p:sp>
-        <p:nvSpPr>
-          <p:cNvPr id="3" name="Rectangle 2"/>
-          <p:cNvSpPr/>
-          <p:nvPr/>
-        </p:nvSpPr>
-        <p:spPr>
-          <a:xfrm>
-            <a:off x="0" y="960120"/>
-            <a:ext cx="12191695" cy="41148"/>
-          </a:xfrm>
-          <a:prstGeom prst="rect">
-            <a:avLst/>
-          </a:prstGeom>
-          <a:solidFill>
-            <a:srgbClr val="FFD000"/>
-          </a:solidFill>
-          <a:ln>
-            <a:noFill/>
-          </a:ln>
-        </p:spPr>
-        <p:style>
-          <a:lnRef idx="1">
-            <a:schemeClr val="accent1"/>
-          </a:lnRef>
-          <a:fillRef idx="3">
-            <a:schemeClr val="accent1"/>
-          </a:fillRef>
-          <a:effectRef idx="2">
-            <a:schemeClr val="accent1"/>
-          </a:effectRef>
-          <a:fontRef idx="minor">
-            <a:schemeClr val="lt1"/>
-          </a:fontRef>
-        </p:style>
-        <p:txBody>
-          <a:bodyPr rtlCol="0" anchor="ctr"/>
-          <a:lstStyle/>
-          <a:p>
-            <a:pPr algn="ctr"/>
-          </a:p>
-        </p:txBody>
-      </p:sp>
-      <p:sp>
-        <p:nvSpPr>
-          <p:cNvPr id="4" name="TextBox 3"/>
-          <p:cNvSpPr txBox="1"/>
-          <p:nvPr/>
-        </p:nvSpPr>
-        <p:spPr>
-          <a:xfrm>
-            <a:off x="457200" y="164592"/>
-            <a:ext cx="11277295" cy="502920"/>
-          </a:xfrm>
-          <a:prstGeom prst="rect">
-            <a:avLst/>
-          </a:prstGeom>
-          <a:noFill/>
-        </p:spPr>
-        <p:txBody>
-          <a:bodyPr wrap="square">
-            <a:spAutoFit/>
-          </a:bodyPr>
-          <a:lstStyle/>
-          <a:p>
-            <a:r>
-              <a:rPr sz="2600" b="1" i="0">
-                <a:solidFill>
-                  <a:srgbClr val="FFFFFF"/>
-                </a:solidFill>
-                <a:latin typeface="Calibri"/>
-              </a:rPr>
-              <a:t>Antes de entregar — autochequeo</a:t>
-            </a:r>
-          </a:p>
-        </p:txBody>
-      </p:sp>
-      <p:sp>
-        <p:nvSpPr>
-          <p:cNvPr id="5" name="Rounded Rectangle 4"/>
-          <p:cNvSpPr/>
-          <p:nvPr/>
-        </p:nvSpPr>
-        <p:spPr>
-          <a:xfrm>
-            <a:off x="457200" y="1261872"/>
-            <a:ext cx="11277295" cy="566928"/>
-          </a:xfrm>
-          <a:prstGeom prst="roundRect">
-            <a:avLst>
-              <a:gd name="adj" fmla="val 12000"/>
-            </a:avLst>
-          </a:prstGeom>
-          <a:solidFill>
-            <a:srgbClr val="F2F2F2"/>
-          </a:solidFill>
-          <a:ln>
-            <a:noFill/>
-          </a:ln>
-        </p:spPr>
-        <p:style>
-          <a:lnRef idx="1">
-            <a:schemeClr val="accent1"/>
-          </a:lnRef>
-          <a:fillRef idx="3">
-            <a:schemeClr val="accent1"/>
-          </a:fillRef>
-          <a:effectRef idx="2">
-            <a:schemeClr val="accent1"/>
-          </a:effectRef>
-          <a:fontRef idx="minor">
-            <a:schemeClr val="lt1"/>
-          </a:fontRef>
-        </p:style>
-        <p:txBody>
-          <a:bodyPr rtlCol="0" anchor="ctr"/>
-          <a:lstStyle/>
-          <a:p>
-            <a:pPr algn="ctr"/>
-          </a:p>
-        </p:txBody>
-      </p:sp>
-      <p:sp>
-        <p:nvSpPr>
-          <p:cNvPr id="6" name="Rectangle 5"/>
-          <p:cNvSpPr/>
-          <p:nvPr/>
-        </p:nvSpPr>
-        <p:spPr>
-          <a:xfrm>
-            <a:off x="640080" y="1408175"/>
-            <a:ext cx="274320" cy="274320"/>
-          </a:xfrm>
-          <a:prstGeom prst="rect">
-            <a:avLst/>
-          </a:prstGeom>
-          <a:solidFill>
-            <a:srgbClr val="FFFFFF"/>
-          </a:solidFill>
-          <a:ln>
-            <a:solidFill>
-              <a:srgbClr val="333333"/>
-            </a:solidFill>
-          </a:ln>
-        </p:spPr>
-        <p:style>
-          <a:lnRef idx="1">
-            <a:schemeClr val="accent1"/>
-          </a:lnRef>
-          <a:fillRef idx="3">
-            <a:schemeClr val="accent1"/>
-          </a:fillRef>
-          <a:effectRef idx="2">
-            <a:schemeClr val="accent1"/>
-          </a:effectRef>
-          <a:fontRef idx="minor">
-            <a:schemeClr val="lt1"/>
-          </a:fontRef>
-        </p:style>
-        <p:txBody>
-          <a:bodyPr rtlCol="0" anchor="ctr"/>
-          <a:lstStyle/>
-          <a:p>
-            <a:pPr algn="ctr"/>
-          </a:p>
-        </p:txBody>
-      </p:sp>
-      <p:sp>
-        <p:nvSpPr>
-          <p:cNvPr id="7" name="Rectangle 6"/>
-          <p:cNvSpPr/>
-          <p:nvPr/>
-        </p:nvSpPr>
-        <p:spPr>
-          <a:xfrm>
-            <a:off x="640080" y="1408175"/>
-            <a:ext cx="73152" cy="274320"/>
-          </a:xfrm>
-          <a:prstGeom prst="rect">
-            <a:avLst/>
-          </a:prstGeom>
-          <a:solidFill>
-            <a:srgbClr val="269CCB"/>
-          </a:solidFill>
-          <a:ln>
-            <a:noFill/>
-          </a:ln>
-        </p:spPr>
-        <p:style>
-          <a:lnRef idx="1">
-            <a:schemeClr val="accent1"/>
-          </a:lnRef>
-          <a:fillRef idx="3">
-            <a:schemeClr val="accent1"/>
-          </a:fillRef>
-          <a:effectRef idx="2">
-            <a:schemeClr val="accent1"/>
-          </a:effectRef>
-          <a:fontRef idx="minor">
-            <a:schemeClr val="lt1"/>
-          </a:fontRef>
-        </p:style>
-        <p:txBody>
-          <a:bodyPr rtlCol="0" anchor="ctr"/>
-          <a:lstStyle/>
-          <a:p>
-            <a:pPr algn="ctr"/>
-          </a:p>
-        </p:txBody>
-      </p:sp>
-      <p:sp>
-        <p:nvSpPr>
-          <p:cNvPr id="8" name="TextBox 7"/>
-          <p:cNvSpPr txBox="1"/>
-          <p:nvPr/>
-        </p:nvSpPr>
-        <p:spPr>
-          <a:xfrm>
-            <a:off x="1097280" y="1353312"/>
-            <a:ext cx="10362895" cy="402336"/>
-          </a:xfrm>
-          <a:prstGeom prst="rect">
-            <a:avLst/>
-          </a:prstGeom>
-          <a:noFill/>
-        </p:spPr>
-        <p:txBody>
-          <a:bodyPr wrap="square" anchor="ctr"/>
-          <a:lstStyle/>
-          <a:p>
-            <a:r>
-              <a:rPr sz="1500" b="0" i="0">
-                <a:solidFill>
-                  <a:srgbClr val="333333"/>
-                </a:solidFill>
-                <a:latin typeface="Calibri"/>
-              </a:rPr>
-              <a:t>Si la recepcionista oprime Guardar y se va al telefono treinta segundos, cuando vuelva a mirar la pantalla sabe con certeza si el registro quedo o no quedo, y por que lo sabe.</a:t>
-            </a:r>
-          </a:p>
-        </p:txBody>
-      </p:sp>
-      <p:sp>
-        <p:nvSpPr>
-          <p:cNvPr id="9" name="Rounded Rectangle 8"/>
-          <p:cNvSpPr/>
-          <p:nvPr/>
-        </p:nvSpPr>
-        <p:spPr>
-          <a:xfrm>
-            <a:off x="457200" y="1938528"/>
-            <a:ext cx="11277295" cy="566928"/>
-          </a:xfrm>
-          <a:prstGeom prst="roundRect">
-            <a:avLst>
-              <a:gd name="adj" fmla="val 12000"/>
-            </a:avLst>
-          </a:prstGeom>
-          <a:solidFill>
-            <a:srgbClr val="F2F2F2"/>
-          </a:solidFill>
-          <a:ln>
-            <a:noFill/>
-          </a:ln>
-        </p:spPr>
-        <p:style>
-          <a:lnRef idx="1">
-            <a:schemeClr val="accent1"/>
-          </a:lnRef>
-          <a:fillRef idx="3">
-            <a:schemeClr val="accent1"/>
-          </a:fillRef>
-          <a:effectRef idx="2">
-            <a:schemeClr val="accent1"/>
-          </a:effectRef>
-          <a:fontRef idx="minor">
-            <a:schemeClr val="lt1"/>
-          </a:fontRef>
-        </p:style>
-        <p:txBody>
-          <a:bodyPr rtlCol="0" anchor="ctr"/>
-          <a:lstStyle/>
-          <a:p>
-            <a:pPr algn="ctr"/>
-          </a:p>
-        </p:txBody>
-      </p:sp>
-      <p:sp>
-        <p:nvSpPr>
-          <p:cNvPr id="10" name="Rectangle 9"/>
-          <p:cNvSpPr/>
-          <p:nvPr/>
-        </p:nvSpPr>
-        <p:spPr>
-          <a:xfrm>
-            <a:off x="640080" y="2084832"/>
-            <a:ext cx="274320" cy="274320"/>
-          </a:xfrm>
-          <a:prstGeom prst="rect">
-            <a:avLst/>
-          </a:prstGeom>
-          <a:solidFill>
-            <a:srgbClr val="FFFFFF"/>
-          </a:solidFill>
-          <a:ln>
-            <a:solidFill>
-              <a:srgbClr val="333333"/>
-            </a:solidFill>
-          </a:ln>
-        </p:spPr>
-        <p:style>
-          <a:lnRef idx="1">
-            <a:schemeClr val="accent1"/>
-          </a:lnRef>
-          <a:fillRef idx="3">
-            <a:schemeClr val="accent1"/>
-          </a:fillRef>
-          <a:effectRef idx="2">
-            <a:schemeClr val="accent1"/>
-          </a:effectRef>
-          <a:fontRef idx="minor">
-            <a:schemeClr val="lt1"/>
-          </a:fontRef>
-        </p:style>
-        <p:txBody>
-          <a:bodyPr rtlCol="0" anchor="ctr"/>
-          <a:lstStyle/>
-          <a:p>
-            <a:pPr algn="ctr"/>
-          </a:p>
-        </p:txBody>
-      </p:sp>
-      <p:sp>
-        <p:nvSpPr>
-          <p:cNvPr id="11" name="Rectangle 10"/>
-          <p:cNvSpPr/>
-          <p:nvPr/>
-        </p:nvSpPr>
-        <p:spPr>
-          <a:xfrm>
-            <a:off x="640080" y="2084832"/>
-            <a:ext cx="73152" cy="274320"/>
-          </a:xfrm>
-          <a:prstGeom prst="rect">
-            <a:avLst/>
-          </a:prstGeom>
-          <a:solidFill>
-            <a:srgbClr val="269CCB"/>
-          </a:solidFill>
-          <a:ln>
-            <a:noFill/>
-          </a:ln>
-        </p:spPr>
-        <p:style>
-          <a:lnRef idx="1">
-            <a:schemeClr val="accent1"/>
-          </a:lnRef>
-          <a:fillRef idx="3">
-            <a:schemeClr val="accent1"/>
-          </a:fillRef>
-          <a:effectRef idx="2">
-            <a:schemeClr val="accent1"/>
-          </a:effectRef>
-          <a:fontRef idx="minor">
-            <a:schemeClr val="lt1"/>
-          </a:fontRef>
-        </p:style>
-        <p:txBody>
-          <a:bodyPr rtlCol="0" anchor="ctr"/>
-          <a:lstStyle/>
-          <a:p>
-            <a:pPr algn="ctr"/>
-          </a:p>
-        </p:txBody>
-      </p:sp>
-      <p:sp>
-        <p:nvSpPr>
-          <p:cNvPr id="12" name="TextBox 11"/>
-          <p:cNvSpPr txBox="1"/>
-          <p:nvPr/>
-        </p:nvSpPr>
-        <p:spPr>
-          <a:xfrm>
-            <a:off x="1097280" y="2029968"/>
-            <a:ext cx="10362895" cy="402336"/>
-          </a:xfrm>
-          <a:prstGeom prst="rect">
-            <a:avLst/>
-          </a:prstGeom>
-          <a:noFill/>
-        </p:spPr>
-        <p:txBody>
-          <a:bodyPr wrap="square" anchor="ctr"/>
-          <a:lstStyle/>
-          <a:p>
-            <a:r>
-              <a:rPr sz="1500" b="0" i="0">
-                <a:solidFill>
-                  <a:srgbClr val="333333"/>
-                </a:solidFill>
-                <a:latin typeface="Calibri"/>
-              </a:rPr>
-              <a:t>De los campos que dibujaron, cuantos podria llenar mal una persona apurada, y cual de esos errores se puede volver imposible en vez de corregible.</a:t>
-            </a:r>
-          </a:p>
-        </p:txBody>
-      </p:sp>
-      <p:sp>
-        <p:nvSpPr>
-          <p:cNvPr id="13" name="Rounded Rectangle 12"/>
-          <p:cNvSpPr/>
-          <p:nvPr/>
-        </p:nvSpPr>
-        <p:spPr>
-          <a:xfrm>
-            <a:off x="457200" y="2615184"/>
-            <a:ext cx="11277295" cy="566928"/>
-          </a:xfrm>
-          <a:prstGeom prst="roundRect">
-            <a:avLst>
-              <a:gd name="adj" fmla="val 12000"/>
-            </a:avLst>
-          </a:prstGeom>
-          <a:solidFill>
-            <a:srgbClr val="F2F2F2"/>
-          </a:solidFill>
-          <a:ln>
-            <a:noFill/>
-          </a:ln>
-        </p:spPr>
-        <p:style>
-          <a:lnRef idx="1">
-            <a:schemeClr val="accent1"/>
-          </a:lnRef>
-          <a:fillRef idx="3">
-            <a:schemeClr val="accent1"/>
-          </a:fillRef>
-          <a:effectRef idx="2">
-            <a:schemeClr val="accent1"/>
-          </a:effectRef>
-          <a:fontRef idx="minor">
-            <a:schemeClr val="lt1"/>
-          </a:fontRef>
-        </p:style>
-        <p:txBody>
-          <a:bodyPr rtlCol="0" anchor="ctr"/>
-          <a:lstStyle/>
-          <a:p>
-            <a:pPr algn="ctr"/>
-          </a:p>
-        </p:txBody>
-      </p:sp>
-      <p:sp>
-        <p:nvSpPr>
-          <p:cNvPr id="14" name="Rectangle 13"/>
-          <p:cNvSpPr/>
-          <p:nvPr/>
-        </p:nvSpPr>
-        <p:spPr>
-          <a:xfrm>
-            <a:off x="640080" y="2761488"/>
-            <a:ext cx="274320" cy="274320"/>
-          </a:xfrm>
-          <a:prstGeom prst="rect">
-            <a:avLst/>
-          </a:prstGeom>
-          <a:solidFill>
-            <a:srgbClr val="FFFFFF"/>
-          </a:solidFill>
-          <a:ln>
-            <a:solidFill>
-              <a:srgbClr val="333333"/>
-            </a:solidFill>
-          </a:ln>
-        </p:spPr>
-        <p:style>
-          <a:lnRef idx="1">
-            <a:schemeClr val="accent1"/>
-          </a:lnRef>
-          <a:fillRef idx="3">
-            <a:schemeClr val="accent1"/>
-          </a:fillRef>
-          <a:effectRef idx="2">
-            <a:schemeClr val="accent1"/>
-          </a:effectRef>
-          <a:fontRef idx="minor">
-            <a:schemeClr val="lt1"/>
-          </a:fontRef>
-        </p:style>
-        <p:txBody>
-          <a:bodyPr rtlCol="0" anchor="ctr"/>
-          <a:lstStyle/>
-          <a:p>
-            <a:pPr algn="ctr"/>
-          </a:p>
-        </p:txBody>
-      </p:sp>
-      <p:sp>
-        <p:nvSpPr>
-          <p:cNvPr id="15" name="Rectangle 14"/>
-          <p:cNvSpPr/>
-          <p:nvPr/>
-        </p:nvSpPr>
-        <p:spPr>
-          <a:xfrm>
-            <a:off x="640080" y="2761488"/>
-            <a:ext cx="73152" cy="274320"/>
-          </a:xfrm>
-          <a:prstGeom prst="rect">
-            <a:avLst/>
-          </a:prstGeom>
-          <a:solidFill>
-            <a:srgbClr val="269CCB"/>
-          </a:solidFill>
-          <a:ln>
-            <a:noFill/>
-          </a:ln>
-        </p:spPr>
-        <p:style>
-          <a:lnRef idx="1">
-            <a:schemeClr val="accent1"/>
-          </a:lnRef>
-          <a:fillRef idx="3">
-            <a:schemeClr val="accent1"/>
-          </a:fillRef>
-          <a:effectRef idx="2">
-            <a:schemeClr val="accent1"/>
-          </a:effectRef>
-          <a:fontRef idx="minor">
-            <a:schemeClr val="lt1"/>
-          </a:fontRef>
-        </p:style>
-        <p:txBody>
-          <a:bodyPr rtlCol="0" anchor="ctr"/>
-          <a:lstStyle/>
-          <a:p>
-            <a:pPr algn="ctr"/>
-          </a:p>
-        </p:txBody>
-      </p:sp>
-      <p:sp>
-        <p:nvSpPr>
-          <p:cNvPr id="16" name="TextBox 15"/>
-          <p:cNvSpPr txBox="1"/>
-          <p:nvPr/>
-        </p:nvSpPr>
-        <p:spPr>
-          <a:xfrm>
-            <a:off x="1097280" y="2706624"/>
-            <a:ext cx="10362895" cy="402336"/>
-          </a:xfrm>
-          <a:prstGeom prst="rect">
-            <a:avLst/>
-          </a:prstGeom>
-          <a:noFill/>
-        </p:spPr>
-        <p:txBody>
-          <a:bodyPr wrap="square" anchor="ctr"/>
-          <a:lstStyle/>
-          <a:p>
-            <a:r>
-              <a:rPr sz="1500" b="0" i="0">
-                <a:solidFill>
-                  <a:srgbClr val="333333"/>
-                </a:solidFill>
-                <a:latin typeface="Calibri"/>
-              </a:rPr>
-              <a:t>Si la busqueda por nombre devuelve doce mascotas llamadas Firulais, que dato adicional muestra la lista para que la recepcionista escoja la correcta sin abrir ninguna ficha.</a:t>
-            </a:r>
-          </a:p>
-        </p:txBody>
-      </p:sp>
-      <p:sp>
-        <p:nvSpPr>
-          <p:cNvPr id="17" name="TextBox 16"/>
-          <p:cNvSpPr txBox="1"/>
-          <p:nvPr/>
-        </p:nvSpPr>
-        <p:spPr>
-          <a:xfrm>
-            <a:off x="11185855" y="6473952"/>
-            <a:ext cx="640080" cy="274320"/>
-          </a:xfrm>
-          <a:prstGeom prst="rect">
-            <a:avLst/>
-          </a:prstGeom>
-          <a:noFill/>
-        </p:spPr>
-        <p:txBody>
-          <a:bodyPr wrap="square">
-            <a:spAutoFit/>
-          </a:bodyPr>
-          <a:lstStyle/>
-          <a:p>
-            <a:pPr algn="r"/>
-            <a:r>
-              <a:rPr sz="1100" b="0" i="0">
-                <a:solidFill>
-                  <a:srgbClr val="666666"/>
-                </a:solidFill>
-                <a:latin typeface="Calibri"/>
-              </a:rPr>
-              <a:t>20</a:t>
-            </a:r>
-          </a:p>
-        </p:txBody>
-      </p:sp>
-    </p:spTree>
-  </p:cSld>
-  <p:clrMapOvr>
-    <a:masterClrMapping/>
-  </p:clrMapOvr>
-</p:sld>
-</file>
-
-<file path=ppt/slides/slide21.xml><?xml version="1.0" encoding="utf-8"?>
-<p:sld xmlns:a="http://schemas.openxmlformats.org/drawingml/2006/main" xmlns:p="http://schemas.openxmlformats.org/presentationml/2006/main" xmlns:r="http://schemas.openxmlformats.org/officeDocument/2006/relationships">
-  <p:cSld>
-    <p:bg>
-      <p:bgPr>
-        <a:solidFill>
-          <a:srgbClr val="FFFFFF"/>
-        </a:solidFill>
-        <a:effectLst/>
-      </p:bgPr>
-    </p:bg>
-    <p:spTree>
-      <p:nvGrpSpPr>
-        <p:cNvPr id="1" name=""/>
-        <p:cNvGrpSpPr/>
-        <p:nvPr/>
-      </p:nvGrpSpPr>
-      <p:grpSpPr/>
-      <p:sp>
-        <p:nvSpPr>
-          <p:cNvPr id="2" name="Rectangle 1"/>
-          <p:cNvSpPr/>
-          <p:nvPr/>
-        </p:nvSpPr>
-        <p:spPr>
-          <a:xfrm>
-            <a:off x="0" y="0"/>
-            <a:ext cx="12191695" cy="960120"/>
-          </a:xfrm>
-          <a:prstGeom prst="rect">
-            <a:avLst/>
-          </a:prstGeom>
-          <a:solidFill>
-            <a:srgbClr val="095292"/>
-          </a:solidFill>
-          <a:ln>
-            <a:noFill/>
-          </a:ln>
-        </p:spPr>
-        <p:style>
-          <a:lnRef idx="1">
-            <a:schemeClr val="accent1"/>
-          </a:lnRef>
-          <a:fillRef idx="3">
-            <a:schemeClr val="accent1"/>
-          </a:fillRef>
-          <a:effectRef idx="2">
-            <a:schemeClr val="accent1"/>
-          </a:effectRef>
-          <a:fontRef idx="minor">
-            <a:schemeClr val="lt1"/>
-          </a:fontRef>
-        </p:style>
-        <p:txBody>
-          <a:bodyPr rtlCol="0" anchor="ctr"/>
-          <a:lstStyle/>
-          <a:p>
-            <a:pPr algn="ctr"/>
-          </a:p>
-        </p:txBody>
-      </p:sp>
-      <p:sp>
-        <p:nvSpPr>
-          <p:cNvPr id="3" name="Rectangle 2"/>
-          <p:cNvSpPr/>
-          <p:nvPr/>
-        </p:nvSpPr>
-        <p:spPr>
-          <a:xfrm>
-            <a:off x="0" y="960120"/>
-            <a:ext cx="12191695" cy="41148"/>
-          </a:xfrm>
-          <a:prstGeom prst="rect">
-            <a:avLst/>
-          </a:prstGeom>
-          <a:solidFill>
-            <a:srgbClr val="FFD000"/>
-          </a:solidFill>
-          <a:ln>
-            <a:noFill/>
-          </a:ln>
-        </p:spPr>
-        <p:style>
-          <a:lnRef idx="1">
-            <a:schemeClr val="accent1"/>
-          </a:lnRef>
-          <a:fillRef idx="3">
-            <a:schemeClr val="accent1"/>
-          </a:fillRef>
-          <a:effectRef idx="2">
-            <a:schemeClr val="accent1"/>
-          </a:effectRef>
-          <a:fontRef idx="minor">
-            <a:schemeClr val="lt1"/>
-          </a:fontRef>
-        </p:style>
-        <p:txBody>
-          <a:bodyPr rtlCol="0" anchor="ctr"/>
-          <a:lstStyle/>
-          <a:p>
-            <a:pPr algn="ctr"/>
-          </a:p>
-        </p:txBody>
-      </p:sp>
-      <p:sp>
-        <p:nvSpPr>
-          <p:cNvPr id="4" name="TextBox 3"/>
-          <p:cNvSpPr txBox="1"/>
-          <p:nvPr/>
-        </p:nvSpPr>
-        <p:spPr>
-          <a:xfrm>
-            <a:off x="457200" y="164592"/>
-            <a:ext cx="11277295" cy="502920"/>
-          </a:xfrm>
-          <a:prstGeom prst="rect">
-            <a:avLst/>
-          </a:prstGeom>
-          <a:noFill/>
-        </p:spPr>
-        <p:txBody>
-          <a:bodyPr wrap="square">
-            <a:spAutoFit/>
-          </a:bodyPr>
-          <a:lstStyle/>
-          <a:p>
-            <a:r>
-              <a:rPr sz="2600" b="1" i="0">
-                <a:solidFill>
-                  <a:srgbClr val="FFFFFF"/>
-                </a:solidFill>
-                <a:latin typeface="Calibri"/>
-              </a:rPr>
-              <a:t>Criterios de exito / entregable</a:t>
-            </a:r>
-          </a:p>
-        </p:txBody>
-      </p:sp>
-      <p:sp>
-        <p:nvSpPr>
-          <p:cNvPr id="5" name="TextBox 4"/>
-          <p:cNvSpPr txBox="1"/>
-          <p:nvPr/>
-        </p:nvSpPr>
-        <p:spPr>
-          <a:xfrm>
-            <a:off x="457200" y="1170432"/>
-            <a:ext cx="11277295" cy="5230368"/>
-          </a:xfrm>
-          <a:prstGeom prst="rect">
-            <a:avLst/>
-          </a:prstGeom>
-          <a:noFill/>
-        </p:spPr>
-        <p:txBody>
-          <a:bodyPr wrap="square">
-            <a:spAutoFit/>
-          </a:bodyPr>
-          <a:lstStyle/>
-          <a:p>
-            <a:pPr>
-              <a:spcAft>
-                <a:spcPts val="800"/>
-              </a:spcAft>
-            </a:pPr>
-            <a:r>
-              <a:rPr sz="2000" b="0" i="0">
-                <a:solidFill>
-                  <a:srgbClr val="333333"/>
-                </a:solidFill>
-                <a:latin typeface="Calibri"/>
-              </a:rPr>
-              <a:t>–   </a:t>
-            </a:r>
-            <a:r>
-              <a:rPr sz="2000" b="1" i="0">
-                <a:solidFill>
-                  <a:srgbClr val="333333"/>
-                </a:solidFill>
-                <a:latin typeface="Calibri"/>
-              </a:rPr>
-              <a:t>Entregable:</a:t>
-            </a:r>
-            <a:r>
-              <a:rPr sz="2000" b="0" i="0">
-                <a:solidFill>
-                  <a:srgbClr val="333333"/>
-                </a:solidFill>
-                <a:latin typeface="Calibri"/>
-              </a:rPr>
-              <a:t> Un archivo de Figma o Penpot con las dos pantallas anotadas y minimo tres transiciones navegables, mas la hoja de anotaciones que amarra cada campo a un RF y a un atributo del diccionario de datos, subido a la plataforma del curso.</a:t>
-            </a:r>
-          </a:p>
-          <a:p>
-            <a:pPr>
-              <a:spcAft>
-                <a:spcPts val="800"/>
-              </a:spcAft>
-            </a:pPr>
-            <a:r>
-              <a:rPr sz="2000" b="0" i="0">
-                <a:solidFill>
-                  <a:srgbClr val="333333"/>
-                </a:solidFill>
-                <a:latin typeface="Calibri"/>
-              </a:rPr>
-              <a:t>–   </a:t>
-            </a:r>
-            <a:r>
-              <a:rPr sz="2000" b="1" i="0">
-                <a:solidFill>
-                  <a:srgbClr val="333333"/>
-                </a:solidFill>
-                <a:latin typeface="Calibri"/>
-              </a:rPr>
-              <a:t>Exito:</a:t>
-            </a:r>
-            <a:r>
-              <a:rPr sz="2000" b="0" i="0">
-                <a:solidFill>
-                  <a:srgbClr val="333333"/>
-                </a:solidFill>
-                <a:latin typeface="Calibri"/>
-              </a:rPr>
-              <a:t> Las dos pantallas se entregan primero como wireframe en gris y luego como mockup, y ambas versiones estan en el archivo entregado.</a:t>
-            </a:r>
-          </a:p>
-          <a:p>
-            <a:pPr>
-              <a:spcAft>
-                <a:spcPts val="800"/>
-              </a:spcAft>
-            </a:pPr>
-            <a:r>
-              <a:rPr sz="2000" b="0" i="0">
-                <a:solidFill>
-                  <a:srgbClr val="333333"/>
-                </a:solidFill>
-                <a:latin typeface="Calibri"/>
-              </a:rPr>
-              <a:t>–   </a:t>
-            </a:r>
-            <a:r>
-              <a:rPr sz="2000" b="1" i="0">
-                <a:solidFill>
-                  <a:srgbClr val="333333"/>
-                </a:solidFill>
-                <a:latin typeface="Calibri"/>
-              </a:rPr>
-              <a:t>Exito:</a:t>
-            </a:r>
-            <a:r>
-              <a:rPr sz="2000" b="0" i="0">
-                <a:solidFill>
-                  <a:srgbClr val="333333"/>
-                </a:solidFill>
-                <a:latin typeface="Calibri"/>
-              </a:rPr>
-              <a:t> Cada campo dibujado aparece en la tabla de anotaciones con su atributo del diccionario de datos y el RF que lo exige, sin campos huerfanos.</a:t>
-            </a:r>
-          </a:p>
-          <a:p>
-            <a:pPr>
-              <a:spcAft>
-                <a:spcPts val="800"/>
-              </a:spcAft>
-            </a:pPr>
-            <a:r>
-              <a:rPr sz="2000" b="0" i="0">
-                <a:solidFill>
-                  <a:srgbClr val="333333"/>
-                </a:solidFill>
-                <a:latin typeface="Calibri"/>
-              </a:rPr>
-              <a:t>–   </a:t>
-            </a:r>
-            <a:r>
-              <a:rPr sz="2000" b="1" i="0">
-                <a:solidFill>
-                  <a:srgbClr val="333333"/>
-                </a:solidFill>
-                <a:latin typeface="Calibri"/>
-              </a:rPr>
-              <a:t>Exito:</a:t>
-            </a:r>
-            <a:r>
-              <a:rPr sz="2000" b="0" i="0">
-                <a:solidFill>
-                  <a:srgbClr val="333333"/>
-                </a:solidFill>
-                <a:latin typeface="Calibri"/>
-              </a:rPr>
-              <a:t> El prototipo tiene al menos tres transiciones que funcionan al hacer clic y cubre minimo dos caminos alternos, entre ellos resultados multiples o dueño no registrado.</a:t>
-            </a:r>
-          </a:p>
-          <a:p>
-            <a:pPr>
-              <a:spcAft>
-                <a:spcPts val="800"/>
-              </a:spcAft>
-            </a:pPr>
-            <a:r>
-              <a:rPr sz="2000" b="0" i="0">
-                <a:solidFill>
-                  <a:srgbClr val="333333"/>
-                </a:solidFill>
-                <a:latin typeface="Calibri"/>
-              </a:rPr>
-              <a:t>–   </a:t>
-            </a:r>
-            <a:r>
-              <a:rPr sz="2000" b="1" i="0">
-                <a:solidFill>
-                  <a:srgbClr val="333333"/>
-                </a:solidFill>
-                <a:latin typeface="Calibri"/>
-              </a:rPr>
-              <a:t>Exito:</a:t>
-            </a:r>
-            <a:r>
-              <a:rPr sz="2000" b="0" i="0">
-                <a:solidFill>
-                  <a:srgbClr val="333333"/>
-                </a:solidFill>
-                <a:latin typeface="Calibri"/>
-              </a:rPr>
-              <a:t> El diseño evidencia por escrito los cuatro principios trabajados: hay mensaje de estado tras guardar, hay al menos dos mecanismos de prevencion de errores, los botones principales son consistentes entre pantallas y las listas cerradas reemplazan los campos de memoria.</a:t>
-            </a:r>
-          </a:p>
-          <a:p>
-            <a:pPr>
-              <a:spcAft>
-                <a:spcPts val="800"/>
-              </a:spcAft>
-            </a:pPr>
-            <a:r>
-              <a:rPr sz="2000" b="0" i="0">
-                <a:solidFill>
-                  <a:srgbClr val="333333"/>
-                </a:solidFill>
-                <a:latin typeface="Calibri"/>
-              </a:rPr>
-              <a:t>–   </a:t>
-            </a:r>
-            <a:r>
-              <a:rPr sz="2000" b="1" i="0">
-                <a:solidFill>
-                  <a:srgbClr val="333333"/>
-                </a:solidFill>
-                <a:latin typeface="Calibri"/>
-              </a:rPr>
-              <a:t>Entrega en la plataforma del curso</a:t>
-            </a:r>
-            <a:r>
-              <a:rPr sz="2000" b="0" i="0">
-                <a:solidFill>
-                  <a:srgbClr val="333333"/>
-                </a:solidFill>
-                <a:latin typeface="Calibri"/>
-              </a:rPr>
-              <a:t> — en la fecha que indique el docente.</a:t>
-            </a:r>
-          </a:p>
-        </p:txBody>
-      </p:sp>
-      <p:sp>
-        <p:nvSpPr>
-          <p:cNvPr id="6" name="TextBox 5"/>
-          <p:cNvSpPr txBox="1"/>
-          <p:nvPr/>
-        </p:nvSpPr>
-        <p:spPr>
-          <a:xfrm>
-            <a:off x="11185855" y="6473952"/>
-            <a:ext cx="640080" cy="274320"/>
-          </a:xfrm>
-          <a:prstGeom prst="rect">
-            <a:avLst/>
-          </a:prstGeom>
-          <a:noFill/>
-        </p:spPr>
-        <p:txBody>
-          <a:bodyPr wrap="square">
-            <a:spAutoFit/>
-          </a:bodyPr>
-          <a:lstStyle/>
-          <a:p>
-            <a:pPr algn="r"/>
-            <a:r>
-              <a:rPr sz="1100" b="0" i="0">
-                <a:solidFill>
-                  <a:srgbClr val="666666"/>
-                </a:solidFill>
-                <a:latin typeface="Calibri"/>
-              </a:rPr>
-              <a:t>21</a:t>
-            </a:r>
-          </a:p>
-        </p:txBody>
-      </p:sp>
-    </p:spTree>
-  </p:cSld>
-  <p:clrMapOvr>
-    <a:masterClrMapping/>
-  </p:clrMapOvr>
-</p:sld>
-</file>
-
-<file path=ppt/slides/slide22.xml><?xml version="1.0" encoding="utf-8"?>
-<p:sld xmlns:a="http://schemas.openxmlformats.org/drawingml/2006/main" xmlns:p="http://schemas.openxmlformats.org/presentationml/2006/main" xmlns:r="http://schemas.openxmlformats.org/officeDocument/2006/relationships">
-  <p:cSld>
-    <p:bg>
-      <p:bgPr>
-        <a:solidFill>
-          <a:srgbClr val="FFFFFF"/>
-        </a:solidFill>
-        <a:effectLst/>
-      </p:bgPr>
-    </p:bg>
-    <p:spTree>
-      <p:nvGrpSpPr>
-        <p:cNvPr id="1" name=""/>
-        <p:cNvGrpSpPr/>
-        <p:nvPr/>
-      </p:nvGrpSpPr>
-      <p:grpSpPr/>
-      <p:sp>
-        <p:nvSpPr>
-          <p:cNvPr id="2" name="Rectangle 1"/>
-          <p:cNvSpPr/>
-          <p:nvPr/>
-        </p:nvSpPr>
-        <p:spPr>
-          <a:xfrm>
-            <a:off x="0" y="0"/>
-            <a:ext cx="12191695" cy="960120"/>
-          </a:xfrm>
-          <a:prstGeom prst="rect">
-            <a:avLst/>
-          </a:prstGeom>
-          <a:solidFill>
-            <a:srgbClr val="095292"/>
-          </a:solidFill>
-          <a:ln>
-            <a:noFill/>
-          </a:ln>
-        </p:spPr>
-        <p:style>
-          <a:lnRef idx="1">
-            <a:schemeClr val="accent1"/>
-          </a:lnRef>
-          <a:fillRef idx="3">
-            <a:schemeClr val="accent1"/>
-          </a:fillRef>
-          <a:effectRef idx="2">
-            <a:schemeClr val="accent1"/>
-          </a:effectRef>
-          <a:fontRef idx="minor">
-            <a:schemeClr val="lt1"/>
-          </a:fontRef>
-        </p:style>
-        <p:txBody>
-          <a:bodyPr rtlCol="0" anchor="ctr"/>
-          <a:lstStyle/>
-          <a:p>
-            <a:pPr algn="ctr"/>
-          </a:p>
-        </p:txBody>
-      </p:sp>
-      <p:sp>
-        <p:nvSpPr>
-          <p:cNvPr id="3" name="Rectangle 2"/>
-          <p:cNvSpPr/>
-          <p:nvPr/>
-        </p:nvSpPr>
-        <p:spPr>
-          <a:xfrm>
-            <a:off x="0" y="960120"/>
-            <a:ext cx="12191695" cy="41148"/>
-          </a:xfrm>
-          <a:prstGeom prst="rect">
-            <a:avLst/>
-          </a:prstGeom>
-          <a:solidFill>
-            <a:srgbClr val="FFD000"/>
-          </a:solidFill>
-          <a:ln>
-            <a:noFill/>
-          </a:ln>
-        </p:spPr>
-        <p:style>
-          <a:lnRef idx="1">
-            <a:schemeClr val="accent1"/>
-          </a:lnRef>
-          <a:fillRef idx="3">
-            <a:schemeClr val="accent1"/>
-          </a:fillRef>
-          <a:effectRef idx="2">
-            <a:schemeClr val="accent1"/>
-          </a:effectRef>
-          <a:fontRef idx="minor">
-            <a:schemeClr val="lt1"/>
-          </a:fontRef>
-        </p:style>
-        <p:txBody>
-          <a:bodyPr rtlCol="0" anchor="ctr"/>
-          <a:lstStyle/>
-          <a:p>
-            <a:pPr algn="ctr"/>
-          </a:p>
-        </p:txBody>
-      </p:sp>
-      <p:sp>
-        <p:nvSpPr>
-          <p:cNvPr id="4" name="TextBox 3"/>
-          <p:cNvSpPr txBox="1"/>
-          <p:nvPr/>
-        </p:nvSpPr>
-        <p:spPr>
-          <a:xfrm>
-            <a:off x="457200" y="164592"/>
-            <a:ext cx="11277295" cy="502920"/>
-          </a:xfrm>
-          <a:prstGeom prst="rect">
-            <a:avLst/>
-          </a:prstGeom>
-          <a:noFill/>
-        </p:spPr>
-        <p:txBody>
-          <a:bodyPr wrap="square">
-            <a:spAutoFit/>
-          </a:bodyPr>
-          <a:lstStyle/>
-          <a:p>
-            <a:r>
-              <a:rPr sz="2600" b="1" i="0">
-                <a:solidFill>
-                  <a:srgbClr val="FFFFFF"/>
-                </a:solidFill>
-                <a:latin typeface="Calibri"/>
-              </a:rPr>
-              <a:t>Para el PI esta semana</a:t>
-            </a:r>
-          </a:p>
-        </p:txBody>
-      </p:sp>
-      <p:sp>
-        <p:nvSpPr>
-          <p:cNvPr id="5" name="Rounded Rectangle 4"/>
-          <p:cNvSpPr/>
-          <p:nvPr/>
-        </p:nvSpPr>
-        <p:spPr>
-          <a:xfrm>
-            <a:off x="457200" y="1261872"/>
-            <a:ext cx="11277295" cy="1051560"/>
-          </a:xfrm>
-          <a:prstGeom prst="roundRect">
-            <a:avLst>
-              <a:gd name="adj" fmla="val 12000"/>
-            </a:avLst>
-          </a:prstGeom>
-          <a:solidFill>
-            <a:srgbClr val="E8F4FA"/>
-          </a:solidFill>
-          <a:ln>
-            <a:noFill/>
-          </a:ln>
-        </p:spPr>
-        <p:style>
-          <a:lnRef idx="1">
-            <a:schemeClr val="accent1"/>
-          </a:lnRef>
-          <a:fillRef idx="3">
-            <a:schemeClr val="accent1"/>
-          </a:fillRef>
-          <a:effectRef idx="2">
-            <a:schemeClr val="accent1"/>
-          </a:effectRef>
-          <a:fontRef idx="minor">
-            <a:schemeClr val="lt1"/>
-          </a:fontRef>
-        </p:style>
-        <p:txBody>
-          <a:bodyPr rtlCol="0" anchor="ctr"/>
-          <a:lstStyle/>
-          <a:p>
-            <a:pPr algn="ctr"/>
-          </a:p>
-        </p:txBody>
-      </p:sp>
-      <p:sp>
-        <p:nvSpPr>
-          <p:cNvPr id="6" name="Rectangle 5"/>
-          <p:cNvSpPr/>
-          <p:nvPr/>
-        </p:nvSpPr>
-        <p:spPr>
-          <a:xfrm>
-            <a:off x="457200" y="1261872"/>
-            <a:ext cx="128016" cy="1051560"/>
-          </a:xfrm>
-          <a:prstGeom prst="rect">
-            <a:avLst/>
-          </a:prstGeom>
-          <a:solidFill>
-            <a:srgbClr val="269CCB"/>
-          </a:solidFill>
-          <a:ln>
-            <a:noFill/>
-          </a:ln>
-        </p:spPr>
-        <p:style>
-          <a:lnRef idx="1">
-            <a:schemeClr val="accent1"/>
-          </a:lnRef>
-          <a:fillRef idx="3">
-            <a:schemeClr val="accent1"/>
-          </a:fillRef>
-          <a:effectRef idx="2">
-            <a:schemeClr val="accent1"/>
-          </a:effectRef>
-          <a:fontRef idx="minor">
-            <a:schemeClr val="lt1"/>
-          </a:fontRef>
-        </p:style>
-        <p:txBody>
-          <a:bodyPr rtlCol="0" anchor="ctr"/>
-          <a:lstStyle/>
-          <a:p>
-            <a:pPr algn="ctr"/>
-          </a:p>
-        </p:txBody>
-      </p:sp>
-      <p:sp>
-        <p:nvSpPr>
-          <p:cNvPr id="7" name="TextBox 6"/>
-          <p:cNvSpPr txBox="1"/>
-          <p:nvPr/>
-        </p:nvSpPr>
-        <p:spPr>
-          <a:xfrm>
-            <a:off x="777240" y="1399031"/>
-            <a:ext cx="10774375" cy="822959"/>
-          </a:xfrm>
-          <a:prstGeom prst="rect">
-            <a:avLst/>
-          </a:prstGeom>
-          <a:noFill/>
-        </p:spPr>
-        <p:txBody>
-          <a:bodyPr wrap="square">
-            <a:spAutoFit/>
-          </a:bodyPr>
-          <a:lstStyle/>
-          <a:p>
-            <a:r>
-              <a:rPr sz="1200" b="1" i="0">
-                <a:solidFill>
-                  <a:srgbClr val="269CCB"/>
-                </a:solidFill>
-                <a:latin typeface="Calibri"/>
-              </a:rPr>
-              <a:t>Info</a:t>
-            </a:r>
-          </a:p>
-          <a:p>
-            <a:pPr>
-              <a:spcBef>
-                <a:spcPts val="400"/>
-              </a:spcBef>
-            </a:pPr>
-            <a:r>
-              <a:rPr sz="1400" b="0" i="0">
-                <a:solidFill>
-                  <a:srgbClr val="333333"/>
-                </a:solidFill>
-                <a:latin typeface="Calibri"/>
-              </a:rPr>
-              <a:t>Hito: Quedan listas las pantallas de Registrar mascota y Buscar expediente de VetCare, anotadas y conectadas en un prototipo navegable.</a:t>
-            </a:r>
-          </a:p>
-        </p:txBody>
-      </p:sp>
-      <p:sp>
-        <p:nvSpPr>
-          <p:cNvPr id="8" name="Rounded Rectangle 7"/>
-          <p:cNvSpPr/>
-          <p:nvPr/>
-        </p:nvSpPr>
-        <p:spPr>
-          <a:xfrm>
-            <a:off x="457200" y="2478024"/>
-            <a:ext cx="11277295" cy="1051560"/>
-          </a:xfrm>
-          <a:prstGeom prst="roundRect">
-            <a:avLst>
-              <a:gd name="adj" fmla="val 12000"/>
-            </a:avLst>
-          </a:prstGeom>
-          <a:solidFill>
-            <a:srgbClr val="FFF8E1"/>
-          </a:solidFill>
-          <a:ln>
-            <a:noFill/>
-          </a:ln>
-        </p:spPr>
-        <p:style>
-          <a:lnRef idx="1">
-            <a:schemeClr val="accent1"/>
-          </a:lnRef>
-          <a:fillRef idx="3">
-            <a:schemeClr val="accent1"/>
-          </a:fillRef>
-          <a:effectRef idx="2">
-            <a:schemeClr val="accent1"/>
-          </a:effectRef>
-          <a:fontRef idx="minor">
-            <a:schemeClr val="lt1"/>
-          </a:fontRef>
-        </p:style>
-        <p:txBody>
-          <a:bodyPr rtlCol="0" anchor="ctr"/>
-          <a:lstStyle/>
-          <a:p>
-            <a:pPr algn="ctr"/>
-          </a:p>
-        </p:txBody>
-      </p:sp>
-      <p:sp>
-        <p:nvSpPr>
-          <p:cNvPr id="9" name="Rectangle 8"/>
-          <p:cNvSpPr/>
-          <p:nvPr/>
-        </p:nvSpPr>
-        <p:spPr>
-          <a:xfrm>
-            <a:off x="457200" y="2478024"/>
-            <a:ext cx="128016" cy="1051560"/>
-          </a:xfrm>
-          <a:prstGeom prst="rect">
-            <a:avLst/>
-          </a:prstGeom>
-          <a:solidFill>
-            <a:srgbClr val="FFD000"/>
-          </a:solidFill>
-          <a:ln>
-            <a:noFill/>
-          </a:ln>
-        </p:spPr>
-        <p:style>
-          <a:lnRef idx="1">
-            <a:schemeClr val="accent1"/>
-          </a:lnRef>
-          <a:fillRef idx="3">
-            <a:schemeClr val="accent1"/>
-          </a:fillRef>
-          <a:effectRef idx="2">
-            <a:schemeClr val="accent1"/>
-          </a:effectRef>
-          <a:fontRef idx="minor">
-            <a:schemeClr val="lt1"/>
-          </a:fontRef>
-        </p:style>
-        <p:txBody>
-          <a:bodyPr rtlCol="0" anchor="ctr"/>
-          <a:lstStyle/>
-          <a:p>
-            <a:pPr algn="ctr"/>
-          </a:p>
-        </p:txBody>
-      </p:sp>
-      <p:sp>
-        <p:nvSpPr>
-          <p:cNvPr id="10" name="TextBox 9"/>
-          <p:cNvSpPr txBox="1"/>
-          <p:nvPr/>
-        </p:nvSpPr>
-        <p:spPr>
-          <a:xfrm>
-            <a:off x="777240" y="2615184"/>
-            <a:ext cx="10774375" cy="822959"/>
-          </a:xfrm>
-          <a:prstGeom prst="rect">
-            <a:avLst/>
-          </a:prstGeom>
-          <a:noFill/>
-        </p:spPr>
-        <p:txBody>
-          <a:bodyPr wrap="square">
-            <a:spAutoFit/>
-          </a:bodyPr>
-          <a:lstStyle/>
-          <a:p>
-            <a:r>
-              <a:rPr sz="1200" b="1" i="0">
-                <a:solidFill>
-                  <a:srgbClr val="FFD000"/>
-                </a:solidFill>
-                <a:latin typeface="Calibri"/>
-              </a:rPr>
-              <a:t>Aclaración</a:t>
-            </a:r>
-          </a:p>
-          <a:p>
-            <a:pPr>
-              <a:spcBef>
-                <a:spcPts val="400"/>
-              </a:spcBef>
-            </a:pPr>
-            <a:r>
-              <a:rPr sz="1400" b="0" i="0">
-                <a:solidFill>
-                  <a:srgbClr val="333333"/>
-                </a:solidFill>
-                <a:latin typeface="Calibri"/>
-              </a:rPr>
-              <a:t>Enunciado completo: Clases/Proyecto Integrador/ (VetCare).</a:t>
-            </a:r>
-          </a:p>
-        </p:txBody>
-      </p:sp>
-      <p:sp>
-        <p:nvSpPr>
-          <p:cNvPr id="11" name="Rounded Rectangle 10"/>
-          <p:cNvSpPr/>
-          <p:nvPr/>
-        </p:nvSpPr>
-        <p:spPr>
-          <a:xfrm>
-            <a:off x="457200" y="3694176"/>
-            <a:ext cx="11277295" cy="1051560"/>
-          </a:xfrm>
-          <a:prstGeom prst="roundRect">
-            <a:avLst>
-              <a:gd name="adj" fmla="val 12000"/>
-            </a:avLst>
-          </a:prstGeom>
-          <a:solidFill>
-            <a:srgbClr val="FBE4E4"/>
-          </a:solidFill>
-          <a:ln>
-            <a:noFill/>
-          </a:ln>
-        </p:spPr>
-        <p:style>
-          <a:lnRef idx="1">
-            <a:schemeClr val="accent1"/>
-          </a:lnRef>
-          <a:fillRef idx="3">
-            <a:schemeClr val="accent1"/>
-          </a:fillRef>
-          <a:effectRef idx="2">
-            <a:schemeClr val="accent1"/>
-          </a:effectRef>
-          <a:fontRef idx="minor">
-            <a:schemeClr val="lt1"/>
-          </a:fontRef>
-        </p:style>
-        <p:txBody>
-          <a:bodyPr rtlCol="0" anchor="ctr"/>
-          <a:lstStyle/>
-          <a:p>
-            <a:pPr algn="ctr"/>
-          </a:p>
-        </p:txBody>
-      </p:sp>
-      <p:sp>
-        <p:nvSpPr>
-          <p:cNvPr id="12" name="Rectangle 11"/>
-          <p:cNvSpPr/>
-          <p:nvPr/>
-        </p:nvSpPr>
-        <p:spPr>
-          <a:xfrm>
-            <a:off x="457200" y="3694176"/>
-            <a:ext cx="128016" cy="1051560"/>
-          </a:xfrm>
-          <a:prstGeom prst="rect">
-            <a:avLst/>
-          </a:prstGeom>
-          <a:solidFill>
-            <a:srgbClr val="A02030"/>
-          </a:solidFill>
-          <a:ln>
-            <a:noFill/>
-          </a:ln>
-        </p:spPr>
-        <p:style>
-          <a:lnRef idx="1">
-            <a:schemeClr val="accent1"/>
-          </a:lnRef>
-          <a:fillRef idx="3">
-            <a:schemeClr val="accent1"/>
-          </a:fillRef>
-          <a:effectRef idx="2">
-            <a:schemeClr val="accent1"/>
-          </a:effectRef>
-          <a:fontRef idx="minor">
-            <a:schemeClr val="lt1"/>
-          </a:fontRef>
-        </p:style>
-        <p:txBody>
-          <a:bodyPr rtlCol="0" anchor="ctr"/>
-          <a:lstStyle/>
-          <a:p>
-            <a:pPr algn="ctr"/>
-          </a:p>
-        </p:txBody>
-      </p:sp>
-      <p:sp>
-        <p:nvSpPr>
-          <p:cNvPr id="13" name="TextBox 12"/>
-          <p:cNvSpPr txBox="1"/>
-          <p:nvPr/>
-        </p:nvSpPr>
-        <p:spPr>
-          <a:xfrm>
-            <a:off x="777240" y="3831336"/>
-            <a:ext cx="10774375" cy="822959"/>
-          </a:xfrm>
-          <a:prstGeom prst="rect">
-            <a:avLst/>
-          </a:prstGeom>
-          <a:noFill/>
-        </p:spPr>
-        <p:txBody>
-          <a:bodyPr wrap="square">
-            <a:spAutoFit/>
-          </a:bodyPr>
-          <a:lstStyle/>
-          <a:p>
-            <a:r>
-              <a:rPr sz="1200" b="1" i="0">
-                <a:solidFill>
-                  <a:srgbClr val="A02030"/>
-                </a:solidFill>
-                <a:latin typeface="Calibri"/>
-              </a:rPr>
-              <a:t>Atención</a:t>
-            </a:r>
-          </a:p>
-          <a:p>
-            <a:pPr>
-              <a:spcBef>
-                <a:spcPts val="400"/>
-              </a:spcBef>
-            </a:pPr>
-            <a:r>
-              <a:rPr sz="1400" b="0" i="0">
-                <a:solidFill>
-                  <a:srgbClr val="333333"/>
-                </a:solidFill>
-                <a:latin typeface="Calibri"/>
-              </a:rPr>
-              <a:t>Entrega del taller, si el docente lo asigna · en la fecha que indique el docente.</a:t>
-            </a:r>
-          </a:p>
-        </p:txBody>
-      </p:sp>
-      <p:sp>
-        <p:nvSpPr>
-          <p:cNvPr id="14" name="TextBox 13"/>
-          <p:cNvSpPr txBox="1"/>
-          <p:nvPr/>
-        </p:nvSpPr>
-        <p:spPr>
-          <a:xfrm>
-            <a:off x="11185855" y="6473952"/>
-            <a:ext cx="640080" cy="274320"/>
-          </a:xfrm>
-          <a:prstGeom prst="rect">
-            <a:avLst/>
-          </a:prstGeom>
-          <a:noFill/>
-        </p:spPr>
-        <p:txBody>
-          <a:bodyPr wrap="square">
-            <a:spAutoFit/>
-          </a:bodyPr>
-          <a:lstStyle/>
-          <a:p>
-            <a:pPr algn="r"/>
-            <a:r>
-              <a:rPr sz="1100" b="0" i="0">
-                <a:solidFill>
-                  <a:srgbClr val="666666"/>
-                </a:solidFill>
-                <a:latin typeface="Calibri"/>
-              </a:rPr>
-              <a:t>22</a:t>
-            </a:r>
-          </a:p>
-        </p:txBody>
-      </p:sp>
-    </p:spTree>
-  </p:cSld>
-  <p:clrMapOvr>
-    <a:masterClrMapping/>
-  </p:clrMapOvr>
-</p:sld>
-</file>
-
-<file path=ppt/slides/slide23.xml><?xml version="1.0" encoding="utf-8"?>
-<p:sld xmlns:a="http://schemas.openxmlformats.org/drawingml/2006/main" xmlns:p="http://schemas.openxmlformats.org/presentationml/2006/main" xmlns:r="http://schemas.openxmlformats.org/officeDocument/2006/relationships">
-  <p:cSld>
-    <p:bg>
-      <p:bgPr>
-        <a:solidFill>
-          <a:srgbClr val="FFFFFF"/>
-        </a:solidFill>
-        <a:effectLst/>
-      </p:bgPr>
-    </p:bg>
-    <p:spTree>
-      <p:nvGrpSpPr>
-        <p:cNvPr id="1" name=""/>
-        <p:cNvGrpSpPr/>
-        <p:nvPr/>
-      </p:nvGrpSpPr>
-      <p:grpSpPr/>
-      <p:sp>
-        <p:nvSpPr>
-          <p:cNvPr id="2" name="Rectangle 1"/>
-          <p:cNvSpPr/>
-          <p:nvPr/>
-        </p:nvSpPr>
-        <p:spPr>
-          <a:xfrm>
-            <a:off x="0" y="0"/>
-            <a:ext cx="12191695" cy="164592"/>
-          </a:xfrm>
-          <a:prstGeom prst="rect">
-            <a:avLst/>
-          </a:prstGeom>
-          <a:solidFill>
-            <a:srgbClr val="269CCB"/>
-          </a:solidFill>
-          <a:ln>
-            <a:noFill/>
-          </a:ln>
-        </p:spPr>
-        <p:style>
-          <a:lnRef idx="1">
-            <a:schemeClr val="accent1"/>
-          </a:lnRef>
-          <a:fillRef idx="3">
-            <a:schemeClr val="accent1"/>
-          </a:fillRef>
-          <a:effectRef idx="2">
-            <a:schemeClr val="accent1"/>
-          </a:effectRef>
-          <a:fontRef idx="minor">
-            <a:schemeClr val="lt1"/>
-          </a:fontRef>
-        </p:style>
-        <p:txBody>
-          <a:bodyPr rtlCol="0" anchor="ctr"/>
-          <a:lstStyle/>
-          <a:p>
-            <a:pPr algn="ctr"/>
-          </a:p>
-        </p:txBody>
-      </p:sp>
-      <p:pic>
-        <p:nvPicPr>
-          <p:cNvPr id="3" name="Picture 2" descr="logo_uniajc_color.png"/>
-          <p:cNvPicPr>
-            <a:picLocks noChangeAspect="1"/>
-          </p:cNvPicPr>
-          <p:nvPr/>
-        </p:nvPicPr>
-        <p:blipFill>
-          <a:blip r:embed="rId2"/>
-          <a:stretch>
-            <a:fillRect/>
-          </a:stretch>
-        </p:blipFill>
-        <p:spPr>
-          <a:xfrm>
-            <a:off x="10271455" y="5998464"/>
-            <a:ext cx="1463040" cy="643233"/>
-          </a:xfrm>
-          <a:prstGeom prst="rect">
-            <a:avLst/>
-          </a:prstGeom>
-        </p:spPr>
-      </p:pic>
-      <p:sp>
-        <p:nvSpPr>
-          <p:cNvPr id="4" name="TextBox 3"/>
-          <p:cNvSpPr txBox="1"/>
-          <p:nvPr/>
-        </p:nvSpPr>
-        <p:spPr>
-          <a:xfrm>
-            <a:off x="457200" y="1737360"/>
-            <a:ext cx="11277295" cy="1097280"/>
-          </a:xfrm>
-          <a:prstGeom prst="rect">
-            <a:avLst/>
-          </a:prstGeom>
-          <a:noFill/>
-        </p:spPr>
-        <p:txBody>
-          <a:bodyPr wrap="square" anchor="ctr"/>
-          <a:lstStyle/>
-          <a:p>
-            <a:pPr algn="ctr"/>
-            <a:r>
-              <a:rPr sz="3400" b="1" i="0">
-                <a:solidFill>
-                  <a:srgbClr val="095292"/>
-                </a:solidFill>
-                <a:latin typeface="Calibri"/>
-              </a:rPr>
-              <a:t>Clase 13 · VetCare avanza</a:t>
-            </a:r>
-          </a:p>
-        </p:txBody>
-      </p:sp>
-      <p:sp>
-        <p:nvSpPr>
-          <p:cNvPr id="5" name="TextBox 4"/>
-          <p:cNvSpPr txBox="1"/>
-          <p:nvPr/>
-        </p:nvSpPr>
-        <p:spPr>
-          <a:xfrm>
-            <a:off x="457200" y="3017520"/>
-            <a:ext cx="11277295" cy="1645920"/>
-          </a:xfrm>
-          <a:prstGeom prst="rect">
-            <a:avLst/>
-          </a:prstGeom>
-          <a:noFill/>
-        </p:spPr>
-        <p:txBody>
-          <a:bodyPr wrap="square">
-            <a:spAutoFit/>
-          </a:bodyPr>
-          <a:lstStyle/>
-          <a:p>
-            <a:pPr algn="ctr">
-              <a:spcAft>
-                <a:spcPts val="600"/>
-              </a:spcAft>
-            </a:pPr>
-            <a:r>
-              <a:rPr sz="1600" b="0" i="0">
-                <a:solidFill>
-                  <a:srgbClr val="333333"/>
-                </a:solidFill>
-                <a:latin typeface="Calibri"/>
-              </a:rPr>
-              <a:t>Quedan listas las pantallas de Registrar mascota y Buscar expediente de VetCare, anotadas y conectadas en un prototipo navegable.</a:t>
-            </a:r>
-          </a:p>
-          <a:p>
-            <a:pPr algn="ctr">
-              <a:spcAft>
-                <a:spcPts val="600"/>
-              </a:spcAft>
-            </a:pPr>
-            <a:r>
-              <a:rPr sz="1600" b="0" i="0">
-                <a:solidFill>
-                  <a:srgbClr val="333333"/>
-                </a:solidFill>
-                <a:latin typeface="Calibri"/>
-              </a:rPr>
-              <a:t>Entregable: Un archivo de Figma o Penpot con las dos pantallas anotadas y minimo tres transiciones navegables, mas la hoja de anotaciones que amarra cada campo a un RF y a un atributo del diccionario de datos, subido a la plataforma del curso.</a:t>
-            </a:r>
-          </a:p>
-          <a:p>
-            <a:pPr algn="ctr">
-              <a:spcAft>
-                <a:spcPts val="600"/>
-              </a:spcAft>
-            </a:pPr>
-            <a:r>
-              <a:rPr sz="1600" b="0" i="0">
-                <a:solidFill>
-                  <a:srgbClr val="333333"/>
-                </a:solidFill>
-                <a:latin typeface="Calibri"/>
-              </a:rPr>
-              <a:t>Siguiente clase: continuamos el hilo del PI</a:t>
-            </a:r>
-          </a:p>
-        </p:txBody>
-      </p:sp>
-      <p:sp>
-        <p:nvSpPr>
-          <p:cNvPr id="6" name="TextBox 5"/>
-          <p:cNvSpPr txBox="1"/>
-          <p:nvPr/>
-        </p:nvSpPr>
-        <p:spPr>
-          <a:xfrm>
-            <a:off x="457200" y="4754880"/>
-            <a:ext cx="11277295" cy="640080"/>
-          </a:xfrm>
-          <a:prstGeom prst="rect">
-            <a:avLst/>
-          </a:prstGeom>
-          <a:noFill/>
-        </p:spPr>
-        <p:txBody>
-          <a:bodyPr wrap="square">
-            <a:spAutoFit/>
-          </a:bodyPr>
-          <a:lstStyle/>
-          <a:p>
-            <a:pPr algn="ctr"/>
-            <a:r>
-              <a:rPr sz="2000" b="1" i="0">
-                <a:solidFill>
-                  <a:srgbClr val="269CCB"/>
-                </a:solidFill>
-                <a:latin typeface="Calibri"/>
-              </a:rPr>
-              <a:t>Teoria al servicio del proyecto</a:t>
             </a:r>
           </a:p>
         </p:txBody>
@@ -11304,7 +7275,7 @@
                 </a:solidFill>
                 <a:latin typeface="Calibri"/>
               </a:rPr>
-              <a:t>Encuadre y repaso del avance</a:t>
+              <a:t>Encuadre y repaso</a:t>
             </a:r>
           </a:p>
         </p:txBody>
@@ -11649,7 +7620,7 @@
                 </a:solidFill>
                 <a:latin typeface="Calibri"/>
               </a:rPr>
-              <a:t>Taller guiado = avance del PI</a:t>
+              <a:t>Practica (opcional, guia en la carpeta)</a:t>
             </a:r>
           </a:p>
         </p:txBody>
@@ -11764,7 +7735,7 @@
                 </a:solidFill>
                 <a:latin typeface="Calibri"/>
               </a:rPr>
-              <a:t>Criterios de exito y cierre</a:t>
+              <a:t>Sintesis y cierre</a:t>
             </a:r>
           </a:p>
         </p:txBody>
@@ -13807,4 +9778,324 @@
   </a:objectDefaults>
   <a:extraClrSchemeLst/>
 </a:theme>
+</file>
+
+<file path=ppt/theme/theme2.xml><?xml version="1.0" encoding="utf-8"?>
+<a:theme xmlns:a="http://schemas.openxmlformats.org/drawingml/2006/main" name="Office Theme">
+  <a:themeElements>
+    <a:clrScheme name="Office">
+      <a:dk1>
+        <a:sysClr val="windowText" lastClr="000000"/>
+      </a:dk1>
+      <a:lt1>
+        <a:sysClr val="window" lastClr="FFFFFF"/>
+      </a:lt1>
+      <a:dk2>
+        <a:srgbClr val="1F497D"/>
+      </a:dk2>
+      <a:lt2>
+        <a:srgbClr val="EEECE1"/>
+      </a:lt2>
+      <a:accent1>
+        <a:srgbClr val="4F81BD"/>
+      </a:accent1>
+      <a:accent2>
+        <a:srgbClr val="C0504D"/>
+      </a:accent2>
+      <a:accent3>
+        <a:srgbClr val="9BBB59"/>
+      </a:accent3>
+      <a:accent4>
+        <a:srgbClr val="8064A2"/>
+      </a:accent4>
+      <a:accent5>
+        <a:srgbClr val="4BACC6"/>
+      </a:accent5>
+      <a:accent6>
+        <a:srgbClr val="F79646"/>
+      </a:accent6>
+      <a:hlink>
+        <a:srgbClr val="0000FF"/>
+      </a:hlink>
+      <a:folHlink>
+        <a:srgbClr val="800080"/>
+      </a:folHlink>
+    </a:clrScheme>
+    <a:fontScheme name="Office">
+      <a:majorFont>
+        <a:latin typeface="Calibri"/>
+        <a:ea typeface=""/>
+        <a:cs typeface=""/>
+        <a:font script="Jpan" typeface="ＭＳ Ｐゴシック"/>
+        <a:font script="Hang" typeface="맑은 고딕"/>
+        <a:font script="Hans" typeface="宋体"/>
+        <a:font script="Hant" typeface="新細明體"/>
+        <a:font script="Arab" typeface="Times New Roman"/>
+        <a:font script="Hebr" typeface="Times New Roman"/>
+        <a:font script="Thai" typeface="Angsana New"/>
+        <a:font script="Ethi" typeface="Nyala"/>
+        <a:font script="Beng" typeface="Vrinda"/>
+        <a:font script="Gujr" typeface="Shruti"/>
+        <a:font script="Khmr" typeface="MoolBoran"/>
+        <a:font script="Knda" typeface="Tunga"/>
+        <a:font script="Guru" typeface="Raavi"/>
+        <a:font script="Cans" typeface="Euphemia"/>
+        <a:font script="Cher" typeface="Plantagenet Cherokee"/>
+        <a:font script="Yiii" typeface="Microsoft Yi Baiti"/>
+        <a:font script="Tibt" typeface="Microsoft Himalaya"/>
+        <a:font script="Thaa" typeface="MV Boli"/>
+        <a:font script="Deva" typeface="Mangal"/>
+        <a:font script="Telu" typeface="Gautami"/>
+        <a:font script="Taml" typeface="Latha"/>
+        <a:font script="Syrc" typeface="Estrangelo Edessa"/>
+        <a:font script="Orya" typeface="Kalinga"/>
+        <a:font script="Mlym" typeface="Kartika"/>
+        <a:font script="Laoo" typeface="DokChampa"/>
+        <a:font script="Sinh" typeface="Iskoola Pota"/>
+        <a:font script="Mong" typeface="Mongolian Baiti"/>
+        <a:font script="Viet" typeface="Times New Roman"/>
+        <a:font script="Uigh" typeface="Microsoft Uighur"/>
+        <a:font script="Geor" typeface="Sylfaen"/>
+      </a:majorFont>
+      <a:minorFont>
+        <a:latin typeface="Calibri"/>
+        <a:ea typeface=""/>
+        <a:cs typeface=""/>
+        <a:font script="Jpan" typeface="ＭＳ Ｐゴシック"/>
+        <a:font script="Hang" typeface="맑은 고딕"/>
+        <a:font script="Hans" typeface="宋体"/>
+        <a:font script="Hant" typeface="新細明體"/>
+        <a:font script="Arab" typeface="Arial"/>
+        <a:font script="Hebr" typeface="Arial"/>
+        <a:font script="Thai" typeface="Cordia New"/>
+        <a:font script="Ethi" typeface="Nyala"/>
+        <a:font script="Beng" typeface="Vrinda"/>
+        <a:font script="Gujr" typeface="Shruti"/>
+        <a:font script="Khmr" typeface="DaunPenh"/>
+        <a:font script="Knda" typeface="Tunga"/>
+        <a:font script="Guru" typeface="Raavi"/>
+        <a:font script="Cans" typeface="Euphemia"/>
+        <a:font script="Cher" typeface="Plantagenet Cherokee"/>
+        <a:font script="Yiii" typeface="Microsoft Yi Baiti"/>
+        <a:font script="Tibt" typeface="Microsoft Himalaya"/>
+        <a:font script="Thaa" typeface="MV Boli"/>
+        <a:font script="Deva" typeface="Mangal"/>
+        <a:font script="Telu" typeface="Gautami"/>
+        <a:font script="Taml" typeface="Latha"/>
+        <a:font script="Syrc" typeface="Estrangelo Edessa"/>
+        <a:font script="Orya" typeface="Kalinga"/>
+        <a:font script="Mlym" typeface="Kartika"/>
+        <a:font script="Laoo" typeface="DokChampa"/>
+        <a:font script="Sinh" typeface="Iskoola Pota"/>
+        <a:font script="Mong" typeface="Mongolian Baiti"/>
+        <a:font script="Viet" typeface="Arial"/>
+        <a:font script="Uigh" typeface="Microsoft Uighur"/>
+        <a:font script="Geor" typeface="Sylfaen"/>
+      </a:minorFont>
+    </a:fontScheme>
+    <a:fmtScheme name="Office">
+      <a:fillStyleLst>
+        <a:solidFill>
+          <a:schemeClr val="phClr"/>
+        </a:solidFill>
+        <a:gradFill rotWithShape="1">
+          <a:gsLst>
+            <a:gs pos="0">
+              <a:schemeClr val="phClr">
+                <a:tint val="50000"/>
+                <a:satMod val="300000"/>
+              </a:schemeClr>
+            </a:gs>
+            <a:gs pos="35000">
+              <a:schemeClr val="phClr">
+                <a:tint val="37000"/>
+                <a:satMod val="300000"/>
+              </a:schemeClr>
+            </a:gs>
+            <a:gs pos="100000">
+              <a:schemeClr val="phClr">
+                <a:tint val="15000"/>
+                <a:satMod val="350000"/>
+              </a:schemeClr>
+            </a:gs>
+          </a:gsLst>
+          <a:lin ang="16200000" scaled="1"/>
+        </a:gradFill>
+        <a:gradFill rotWithShape="1">
+          <a:gsLst>
+            <a:gs pos="0">
+              <a:schemeClr val="phClr">
+                <a:tint val="100000"/>
+                <a:shade val="100000"/>
+                <a:satMod val="130000"/>
+              </a:schemeClr>
+            </a:gs>
+            <a:gs pos="100000">
+              <a:schemeClr val="phClr">
+                <a:tint val="50000"/>
+                <a:shade val="100000"/>
+                <a:satMod val="350000"/>
+              </a:schemeClr>
+            </a:gs>
+          </a:gsLst>
+          <a:lin ang="16200000" scaled="0"/>
+        </a:gradFill>
+      </a:fillStyleLst>
+      <a:lnStyleLst>
+        <a:ln w="9525" cap="flat" cmpd="sng" algn="ctr">
+          <a:solidFill>
+            <a:schemeClr val="phClr">
+              <a:shade val="95000"/>
+              <a:satMod val="105000"/>
+            </a:schemeClr>
+          </a:solidFill>
+          <a:prstDash val="solid"/>
+        </a:ln>
+        <a:ln w="25400" cap="flat" cmpd="sng" algn="ctr">
+          <a:solidFill>
+            <a:schemeClr val="phClr"/>
+          </a:solidFill>
+          <a:prstDash val="solid"/>
+        </a:ln>
+        <a:ln w="38100" cap="flat" cmpd="sng" algn="ctr">
+          <a:solidFill>
+            <a:schemeClr val="phClr"/>
+          </a:solidFill>
+          <a:prstDash val="solid"/>
+        </a:ln>
+      </a:lnStyleLst>
+      <a:effectStyleLst>
+        <a:effectStyle>
+          <a:effectLst>
+            <a:outerShdw blurRad="40000" dist="20000" dir="5400000" rotWithShape="0">
+              <a:srgbClr val="000000">
+                <a:alpha val="38000"/>
+              </a:srgbClr>
+            </a:outerShdw>
+          </a:effectLst>
+        </a:effectStyle>
+        <a:effectStyle>
+          <a:effectLst>
+            <a:outerShdw blurRad="40000" dist="23000" dir="5400000" rotWithShape="0">
+              <a:srgbClr val="000000">
+                <a:alpha val="35000"/>
+              </a:srgbClr>
+            </a:outerShdw>
+          </a:effectLst>
+        </a:effectStyle>
+        <a:effectStyle>
+          <a:effectLst>
+            <a:outerShdw blurRad="40000" dist="23000" dir="5400000" rotWithShape="0">
+              <a:srgbClr val="000000">
+                <a:alpha val="35000"/>
+              </a:srgbClr>
+            </a:outerShdw>
+          </a:effectLst>
+          <a:scene3d>
+            <a:camera prst="orthographicFront">
+              <a:rot lat="0" lon="0" rev="0"/>
+            </a:camera>
+            <a:lightRig rig="threePt" dir="t">
+              <a:rot lat="0" lon="0" rev="1200000"/>
+            </a:lightRig>
+          </a:scene3d>
+          <a:sp3d>
+            <a:bevelT w="63500" h="25400"/>
+          </a:sp3d>
+        </a:effectStyle>
+      </a:effectStyleLst>
+      <a:bgFillStyleLst>
+        <a:solidFill>
+          <a:schemeClr val="phClr"/>
+        </a:solidFill>
+        <a:gradFill rotWithShape="1">
+          <a:gsLst>
+            <a:gs pos="0">
+              <a:schemeClr val="phClr">
+                <a:tint val="40000"/>
+                <a:satMod val="350000"/>
+              </a:schemeClr>
+            </a:gs>
+            <a:gs pos="40000">
+              <a:schemeClr val="phClr">
+                <a:tint val="45000"/>
+                <a:shade val="99000"/>
+                <a:satMod val="350000"/>
+              </a:schemeClr>
+            </a:gs>
+            <a:gs pos="100000">
+              <a:schemeClr val="phClr">
+                <a:shade val="20000"/>
+                <a:satMod val="255000"/>
+              </a:schemeClr>
+            </a:gs>
+          </a:gsLst>
+          <a:path path="circle">
+            <a:fillToRect l="50000" t="-80000" r="50000" b="180000"/>
+          </a:path>
+        </a:gradFill>
+        <a:gradFill rotWithShape="1">
+          <a:gsLst>
+            <a:gs pos="0">
+              <a:schemeClr val="phClr">
+                <a:tint val="80000"/>
+                <a:satMod val="300000"/>
+              </a:schemeClr>
+            </a:gs>
+            <a:gs pos="100000">
+              <a:schemeClr val="phClr">
+                <a:shade val="30000"/>
+                <a:satMod val="200000"/>
+              </a:schemeClr>
+            </a:gs>
+          </a:gsLst>
+          <a:path path="circle">
+            <a:fillToRect l="50000" t="50000" r="50000" b="50000"/>
+          </a:path>
+        </a:gradFill>
+      </a:bgFillStyleLst>
+    </a:fmtScheme>
+  </a:themeElements>
+  <a:objectDefaults>
+    <a:spDef>
+      <a:spPr/>
+      <a:bodyPr/>
+      <a:lstStyle/>
+      <a:style>
+        <a:lnRef idx="1">
+          <a:schemeClr val="accent1"/>
+        </a:lnRef>
+        <a:fillRef idx="3">
+          <a:schemeClr val="accent1"/>
+        </a:fillRef>
+        <a:effectRef idx="2">
+          <a:schemeClr val="accent1"/>
+        </a:effectRef>
+        <a:fontRef idx="minor">
+          <a:schemeClr val="lt1"/>
+        </a:fontRef>
+      </a:style>
+    </a:spDef>
+    <a:lnDef>
+      <a:spPr/>
+      <a:bodyPr/>
+      <a:lstStyle/>
+      <a:style>
+        <a:lnRef idx="2">
+          <a:schemeClr val="accent1"/>
+        </a:lnRef>
+        <a:fillRef idx="0">
+          <a:schemeClr val="accent1"/>
+        </a:fillRef>
+        <a:effectRef idx="1">
+          <a:schemeClr val="accent1"/>
+        </a:effectRef>
+        <a:fontRef idx="minor">
+          <a:schemeClr val="tx1"/>
+        </a:fontRef>
+      </a:style>
+    </a:lnDef>
+  </a:objectDefaults>
+  <a:extraClrSchemeLst/>
+</a:theme>
 </file>
--- a/Seminario de Sistemas/Clases/Clase 13 - Diseño de interfaces/Presentacion.pptx
+++ b/Seminario de Sistemas/Clases/Clase 13 - Diseño de interfaces/Presentacion.pptx
@@ -21,6 +21,7 @@
     <p:sldId id="269" r:id="rId21"/>
     <p:sldId id="270" r:id="rId22"/>
     <p:sldId id="271" r:id="rId23"/>
+    <p:sldId id="272" r:id="rId24"/>
   </p:sldIdLst>
   <p:sldSz cx="12191695" cy="6858000" type="screen4x3"/>
   <p:notesSz cx="6858000" cy="9144000"/>
@@ -4385,7 +4386,7 @@
                 </a:solidFill>
                 <a:latin typeface="Calibri"/>
               </a:rPr>
-              <a:t>Una interfaz se puede evaluar sin programarla, y esa es una de las...</a:t>
+              <a:t>Una interfaz se puede evaluar sin programarla, y esa es una de las... (1/2)</a:t>
             </a:r>
           </a:p>
         </p:txBody>
@@ -4457,38 +4458,6 @@
                 <a:latin typeface="Calibri"/>
               </a:rPr>
               <a:t>–   Y una persona que no participo en el diseño intenta hacerla sobre el prototipo sin que nadie le explique nada, mientras usted cuenta cuantos clics necesito, donde dudo y donde se equivoco.</a:t>
-            </a:r>
-          </a:p>
-          <a:p>
-            <a:pPr>
-              <a:spcAft>
-                <a:spcPts val="800"/>
-              </a:spcAft>
-            </a:pPr>
-            <a:r>
-              <a:rPr sz="2000" b="0" i="0">
-                <a:solidFill>
-                  <a:srgbClr val="333333"/>
-                </a:solidFill>
-                <a:latin typeface="Calibri"/>
-              </a:rPr>
-              <a:t>–   La variante de bolsillo es la prueba de pasillo: se le pide a tres compañeros de otro grupo que lo intenten y se anota, sin defenderse ni explicar.</a:t>
-            </a:r>
-          </a:p>
-          <a:p>
-            <a:pPr>
-              <a:spcAft>
-                <a:spcPts val="800"/>
-              </a:spcAft>
-            </a:pPr>
-            <a:r>
-              <a:rPr sz="2000" b="0" i="0">
-                <a:solidFill>
-                  <a:srgbClr val="333333"/>
-                </a:solidFill>
-                <a:latin typeface="Calibri"/>
-              </a:rPr>
-              <a:t>–   Para VetCare hay que evaluar pensando en la usuaria real, que es la recepcionista de Huellitas: no es experta en computadores, escribe lento, contesta el telefono mientras registra y tiene un perro ladrando al lado.</a:t>
             </a:r>
           </a:p>
         </p:txBody>
@@ -4669,141 +4638,21 @@
                 </a:solidFill>
                 <a:latin typeface="Calibri"/>
               </a:rPr>
-              <a:t>El mapa de navegacion del prototipo</a:t>
-            </a:r>
-          </a:p>
-        </p:txBody>
-      </p:sp>
-      <p:sp>
-        <p:nvSpPr>
-          <p:cNvPr id="5" name="Rounded Rectangle 4"/>
-          <p:cNvSpPr/>
-          <p:nvPr/>
-        </p:nvSpPr>
-        <p:spPr>
-          <a:xfrm>
-            <a:off x="457200" y="1261872"/>
-            <a:ext cx="11277295" cy="5093208"/>
-          </a:xfrm>
-          <a:prstGeom prst="roundRect">
-            <a:avLst>
-              <a:gd name="adj" fmla="val 12000"/>
-            </a:avLst>
-          </a:prstGeom>
-          <a:solidFill>
-            <a:srgbClr val="1E2A38"/>
-          </a:solidFill>
-          <a:ln>
-            <a:noFill/>
-          </a:ln>
-        </p:spPr>
-        <p:style>
-          <a:lnRef idx="1">
-            <a:schemeClr val="accent1"/>
-          </a:lnRef>
-          <a:fillRef idx="3">
-            <a:schemeClr val="accent1"/>
-          </a:fillRef>
-          <a:effectRef idx="2">
-            <a:schemeClr val="accent1"/>
-          </a:effectRef>
-          <a:fontRef idx="minor">
-            <a:schemeClr val="lt1"/>
-          </a:fontRef>
-        </p:style>
-        <p:txBody>
-          <a:bodyPr rtlCol="0" anchor="ctr"/>
-          <a:lstStyle/>
-          <a:p>
-            <a:pPr algn="ctr"/>
-          </a:p>
-        </p:txBody>
-      </p:sp>
-      <p:sp>
-        <p:nvSpPr>
-          <p:cNvPr id="6" name="Rectangle 5"/>
-          <p:cNvSpPr/>
-          <p:nvPr/>
-        </p:nvSpPr>
-        <p:spPr>
-          <a:xfrm>
-            <a:off x="457200" y="1261872"/>
-            <a:ext cx="11277295" cy="320040"/>
-          </a:xfrm>
-          <a:prstGeom prst="rect">
-            <a:avLst/>
-          </a:prstGeom>
-          <a:solidFill>
-            <a:srgbClr val="095292"/>
-          </a:solidFill>
-          <a:ln>
-            <a:noFill/>
-          </a:ln>
-        </p:spPr>
-        <p:style>
-          <a:lnRef idx="1">
-            <a:schemeClr val="accent1"/>
-          </a:lnRef>
-          <a:fillRef idx="3">
-            <a:schemeClr val="accent1"/>
-          </a:fillRef>
-          <a:effectRef idx="2">
-            <a:schemeClr val="accent1"/>
-          </a:effectRef>
-          <a:fontRef idx="minor">
-            <a:schemeClr val="lt1"/>
-          </a:fontRef>
-        </p:style>
-        <p:txBody>
-          <a:bodyPr rtlCol="0" anchor="ctr"/>
-          <a:lstStyle/>
-          <a:p>
-            <a:pPr algn="ctr"/>
-          </a:p>
-        </p:txBody>
-      </p:sp>
-      <p:sp>
-        <p:nvSpPr>
-          <p:cNvPr id="7" name="TextBox 6"/>
+              <a:t>Una interfaz se puede evaluar sin programarla, y esa es una de las... (2/2)</a:t>
+            </a:r>
+          </a:p>
+        </p:txBody>
+      </p:sp>
+      <p:sp>
+        <p:nvSpPr>
+          <p:cNvPr id="5" name="TextBox 4"/>
           <p:cNvSpPr txBox="1"/>
           <p:nvPr/>
         </p:nvSpPr>
         <p:spPr>
           <a:xfrm>
-            <a:off x="685800" y="1307592"/>
-            <a:ext cx="10820095" cy="256032"/>
-          </a:xfrm>
-          <a:prstGeom prst="rect">
-            <a:avLst/>
-          </a:prstGeom>
-          <a:noFill/>
-        </p:spPr>
-        <p:txBody>
-          <a:bodyPr wrap="square" anchor="ctr"/>
-          <a:lstStyle/>
-          <a:p>
-            <a:r>
-              <a:rPr sz="1000" b="1" i="0">
-                <a:solidFill>
-                  <a:srgbClr val="269CCB"/>
-                </a:solidFill>
-                <a:latin typeface="Calibri"/>
-              </a:rPr>
-              <a:t>● ● ●</a:t>
-            </a:r>
-          </a:p>
-        </p:txBody>
-      </p:sp>
-      <p:sp>
-        <p:nvSpPr>
-          <p:cNvPr id="8" name="TextBox 7"/>
-          <p:cNvSpPr txBox="1"/>
-          <p:nvPr/>
-        </p:nvSpPr>
-        <p:spPr>
-          <a:xfrm>
-            <a:off x="777240" y="1719072"/>
-            <a:ext cx="10637215" cy="4453128"/>
+            <a:off x="457200" y="1170432"/>
+            <a:ext cx="11277295" cy="5230368"/>
           </a:xfrm>
           <a:prstGeom prst="rect">
             <a:avLst/>
@@ -4818,232 +4667,40 @@
           <a:p>
             <a:pPr>
               <a:spcAft>
-                <a:spcPts val="400"/>
+                <a:spcPts val="800"/>
               </a:spcAft>
             </a:pPr>
             <a:r>
-              <a:rPr sz="1400" b="0" i="0">
-                <a:solidFill>
-                  <a:srgbClr val="FFFFFF"/>
-                </a:solidFill>
-                <a:latin typeface="Calibri"/>
-              </a:rPr>
-              <a:t>flowchart LR</a:t>
+              <a:rPr sz="2000" b="0" i="0">
+                <a:solidFill>
+                  <a:srgbClr val="333333"/>
+                </a:solidFill>
+                <a:latin typeface="Calibri"/>
+              </a:rPr>
+              <a:t>–   La variante de bolsillo es la prueba de pasillo: se le pide a tres compañeros de otro grupo que lo intenten y se anota, sin defenderse ni explicar.</a:t>
             </a:r>
           </a:p>
           <a:p>
             <a:pPr>
               <a:spcAft>
-                <a:spcPts val="400"/>
+                <a:spcPts val="800"/>
               </a:spcAft>
             </a:pPr>
             <a:r>
-              <a:rPr sz="1400" b="0" i="0">
-                <a:solidFill>
-                  <a:srgbClr val="FFFFFF"/>
-                </a:solidFill>
-                <a:latin typeface="Calibri"/>
-              </a:rPr>
-              <a:t>  login[Ingreso] --&gt; menu[Menu principal]</a:t>
-            </a:r>
-          </a:p>
-          <a:p>
-            <a:pPr>
-              <a:spcAft>
-                <a:spcPts val="400"/>
-              </a:spcAft>
-            </a:pPr>
-            <a:r>
-              <a:rPr sz="1400" b="0" i="0">
-                <a:solidFill>
-                  <a:srgbClr val="FFFFFF"/>
-                </a:solidFill>
-                <a:latin typeface="Calibri"/>
-              </a:rPr>
-              <a:t>  menu --&gt; regm[Registrar mascota]</a:t>
-            </a:r>
-          </a:p>
-          <a:p>
-            <a:pPr>
-              <a:spcAft>
-                <a:spcPts val="400"/>
-              </a:spcAft>
-            </a:pPr>
-            <a:r>
-              <a:rPr sz="1400" b="0" i="0">
-                <a:solidFill>
-                  <a:srgbClr val="FFFFFF"/>
-                </a:solidFill>
-                <a:latin typeface="Calibri"/>
-              </a:rPr>
-              <a:t>  menu --&gt; busc[Buscar expediente]</a:t>
-            </a:r>
-          </a:p>
-          <a:p>
-            <a:pPr>
-              <a:spcAft>
-                <a:spcPts val="400"/>
-              </a:spcAft>
-            </a:pPr>
-            <a:r>
-              <a:rPr sz="1400" b="0" i="0">
-                <a:solidFill>
-                  <a:srgbClr val="FFFFFF"/>
-                </a:solidFill>
-                <a:latin typeface="Calibri"/>
-              </a:rPr>
-              <a:t>  menu --&gt; agen[Agendar cita]</a:t>
-            </a:r>
-          </a:p>
-          <a:p>
-            <a:pPr>
-              <a:spcAft>
-                <a:spcPts val="400"/>
-              </a:spcAft>
-            </a:pPr>
-            <a:r>
-              <a:rPr sz="1400" b="0" i="0">
-                <a:solidFill>
-                  <a:srgbClr val="FFFFFF"/>
-                </a:solidFill>
-                <a:latin typeface="Calibri"/>
-              </a:rPr>
-              <a:t/>
-            </a:r>
-          </a:p>
-          <a:p>
-            <a:pPr>
-              <a:spcAft>
-                <a:spcPts val="400"/>
-              </a:spcAft>
-            </a:pPr>
-            <a:r>
-              <a:rPr sz="1400" b="0" i="0">
-                <a:solidFill>
-                  <a:srgbClr val="FFFFFF"/>
-                </a:solidFill>
-                <a:latin typeface="Calibri"/>
-              </a:rPr>
-              <a:t>  regm --&gt;|guardar| menu</a:t>
-            </a:r>
-          </a:p>
-          <a:p>
-            <a:pPr>
-              <a:spcAft>
-                <a:spcPts val="400"/>
-              </a:spcAft>
-            </a:pPr>
-            <a:r>
-              <a:rPr sz="1400" b="0" i="0">
-                <a:solidFill>
-                  <a:srgbClr val="FFFFFF"/>
-                </a:solidFill>
-                <a:latin typeface="Calibri"/>
-              </a:rPr>
-              <a:t>  regm --&gt;|cancelar| menu</a:t>
-            </a:r>
-          </a:p>
-          <a:p>
-            <a:pPr>
-              <a:spcAft>
-                <a:spcPts val="400"/>
-              </a:spcAft>
-            </a:pPr>
-            <a:r>
-              <a:rPr sz="1400" b="0" i="0">
-                <a:solidFill>
-                  <a:srgbClr val="FFFFFF"/>
-                </a:solidFill>
-                <a:latin typeface="Calibri"/>
-              </a:rPr>
-              <a:t>  busc --&gt;|1 resultado| det[Detalle del expediente]</a:t>
-            </a:r>
-          </a:p>
-          <a:p>
-            <a:pPr>
-              <a:spcAft>
-                <a:spcPts val="400"/>
-              </a:spcAft>
-            </a:pPr>
-            <a:r>
-              <a:rPr sz="1400" b="0" i="0">
-                <a:solidFill>
-                  <a:srgbClr val="FFFFFF"/>
-                </a:solidFill>
-                <a:latin typeface="Calibri"/>
-              </a:rPr>
-              <a:t>  busc --&gt;|varios| lista[Lista de resultados] --&gt; det</a:t>
-            </a:r>
-          </a:p>
-          <a:p>
-            <a:pPr>
-              <a:spcAft>
-                <a:spcPts val="400"/>
-              </a:spcAft>
-            </a:pPr>
-            <a:r>
-              <a:rPr sz="1400" b="0" i="0">
-                <a:solidFill>
-                  <a:srgbClr val="FFFFFF"/>
-                </a:solidFill>
-                <a:latin typeface="Calibri"/>
-              </a:rPr>
-              <a:t>  busc --&gt;|ninguno| vacio[Estado vacio&lt;br/&gt;con accion sugerida]</a:t>
-            </a:r>
-          </a:p>
-          <a:p>
-            <a:pPr>
-              <a:spcAft>
-                <a:spcPts val="400"/>
-              </a:spcAft>
-            </a:pPr>
-            <a:r>
-              <a:rPr sz="1400" b="0" i="0">
-                <a:solidFill>
-                  <a:srgbClr val="FFFFFF"/>
-                </a:solidFill>
-                <a:latin typeface="Calibri"/>
-              </a:rPr>
-              <a:t/>
-            </a:r>
-          </a:p>
-          <a:p>
-            <a:pPr>
-              <a:spcAft>
-                <a:spcPts val="400"/>
-              </a:spcAft>
-            </a:pPr>
-            <a:r>
-              <a:rPr sz="1400" b="0" i="0">
-                <a:solidFill>
-                  <a:srgbClr val="FFFFFF"/>
-                </a:solidFill>
-                <a:latin typeface="Calibri"/>
-              </a:rPr>
-              <a:t>%% Los tres caminos de una busqueda —uno, varios, ninguno— son lo que</a:t>
-            </a:r>
-          </a:p>
-          <a:p>
-            <a:pPr>
-              <a:spcAft>
-                <a:spcPts val="400"/>
-              </a:spcAft>
-            </a:pPr>
-            <a:r>
-              <a:rPr sz="1400" b="0" i="0">
-                <a:solidFill>
-                  <a:srgbClr val="FFFFFF"/>
-                </a:solidFill>
-                <a:latin typeface="Calibri"/>
-              </a:rPr>
-              <a:t>%% separa un wireframe de un dibujo. El «ninguno» es el que se olvida.</a:t>
-            </a:r>
-          </a:p>
-        </p:txBody>
-      </p:sp>
-      <p:sp>
-        <p:nvSpPr>
-          <p:cNvPr id="9" name="TextBox 8"/>
+              <a:rPr sz="2000" b="0" i="0">
+                <a:solidFill>
+                  <a:srgbClr val="333333"/>
+                </a:solidFill>
+                <a:latin typeface="Calibri"/>
+              </a:rPr>
+              <a:t>–   Para el sistema de la clinica hay que evaluar pensando en la usuaria real, que es la recepcionista de la clinica: no es experta en computadores, escribe lento, contesta el telefono mientras registra y tiene un perro ladrando al lado.</a:t>
+            </a:r>
+          </a:p>
+        </p:txBody>
+      </p:sp>
+      <p:sp>
+        <p:nvSpPr>
+          <p:cNvPr id="6" name="TextBox 5"/>
           <p:cNvSpPr txBox="1"/>
           <p:nvPr/>
         </p:nvSpPr>
@@ -5217,7 +4874,7 @@
                 </a:solidFill>
                 <a:latin typeface="Calibri"/>
               </a:rPr>
-              <a:t>La tabla de anotaciones del wireframe</a:t>
+              <a:t>El mapa de navegacion del prototipo</a:t>
             </a:r>
           </a:p>
         </p:txBody>
@@ -5376,7 +5033,7 @@
                 </a:solidFill>
                 <a:latin typeface="Calibri"/>
               </a:rPr>
-              <a:t>| Campo de la pantalla | RF que lo exige | Atributo de la clase  | Validacion        |</a:t>
+              <a:t>flowchart LR</a:t>
             </a:r>
           </a:p>
           <a:p>
@@ -5392,7 +5049,7 @@
                 </a:solidFill>
                 <a:latin typeface="Calibri"/>
               </a:rPr>
-              <a:t>|----------------------|-----------------|-----------------------|-------------------|</a:t>
+              <a:t>  login[Ingreso] --&gt; menu[Menu principal]</a:t>
             </a:r>
           </a:p>
           <a:p>
@@ -5408,7 +5065,7 @@
                 </a:solidFill>
                 <a:latin typeface="Calibri"/>
               </a:rPr>
-              <a:t>| Nombre               | RF-01           | Mascota.nombre        | obligatorio       |</a:t>
+              <a:t>  menu --&gt; regm[Registrar mascota]</a:t>
             </a:r>
           </a:p>
           <a:p>
@@ -5424,7 +5081,7 @@
                 </a:solidFill>
                 <a:latin typeface="Calibri"/>
               </a:rPr>
-              <a:t>| Especie              | RF-01           | Mascota.especie       | lista cerrada     |</a:t>
+              <a:t>  menu --&gt; busc[Buscar expediente]</a:t>
             </a:r>
           </a:p>
           <a:p>
@@ -5440,7 +5097,7 @@
                 </a:solidFill>
                 <a:latin typeface="Calibri"/>
               </a:rPr>
-              <a:t>| Fecha de nacimiento  | RF-02           | Mascota.fechaNac      | no futura         |</a:t>
+              <a:t>  menu --&gt; agen[Agendar cita]</a:t>
             </a:r>
           </a:p>
           <a:p>
@@ -5456,7 +5113,7 @@
                 </a:solidFill>
                 <a:latin typeface="Calibri"/>
               </a:rPr>
-              <a:t>| Dueno                | RF-01           | Mascota.idDueno (FK)  | debe existir      |</a:t>
+              <a:t/>
             </a:r>
           </a:p>
           <a:p>
@@ -5472,7 +5129,7 @@
                 </a:solidFill>
                 <a:latin typeface="Calibri"/>
               </a:rPr>
-              <a:t/>
+              <a:t>  regm --&gt;|guardar| menu</a:t>
             </a:r>
           </a:p>
           <a:p>
@@ -5488,7 +5145,7 @@
                 </a:solidFill>
                 <a:latin typeface="Calibri"/>
               </a:rPr>
-              <a:t>-- Un campo sin RF que lo exija es un campo que nadie pidio: se quita o</a:t>
+              <a:t>  regm --&gt;|cancelar| menu</a:t>
             </a:r>
           </a:p>
           <a:p>
@@ -5504,7 +5161,7 @@
                 </a:solidFill>
                 <a:latin typeface="Calibri"/>
               </a:rPr>
-              <a:t>-- se agrega el requisito. Un atributo de la clase sin campo en ninguna</a:t>
+              <a:t>  busc --&gt;|1 resultado| det[Detalle del expediente]</a:t>
             </a:r>
           </a:p>
           <a:p>
@@ -5520,7 +5177,71 @@
                 </a:solidFill>
                 <a:latin typeface="Calibri"/>
               </a:rPr>
-              <a:t>-- pantalla es un dato que nadie puede ingresar.</a:t>
+              <a:t>  busc --&gt;|varios| lista[Lista de resultados] --&gt; det</a:t>
+            </a:r>
+          </a:p>
+          <a:p>
+            <a:pPr>
+              <a:spcAft>
+                <a:spcPts val="400"/>
+              </a:spcAft>
+            </a:pPr>
+            <a:r>
+              <a:rPr sz="1400" b="0" i="0">
+                <a:solidFill>
+                  <a:srgbClr val="FFFFFF"/>
+                </a:solidFill>
+                <a:latin typeface="Calibri"/>
+              </a:rPr>
+              <a:t>  busc --&gt;|ninguno| vacio[Estado vacio&lt;br/&gt;con accion sugerida]</a:t>
+            </a:r>
+          </a:p>
+          <a:p>
+            <a:pPr>
+              <a:spcAft>
+                <a:spcPts val="400"/>
+              </a:spcAft>
+            </a:pPr>
+            <a:r>
+              <a:rPr sz="1400" b="0" i="0">
+                <a:solidFill>
+                  <a:srgbClr val="FFFFFF"/>
+                </a:solidFill>
+                <a:latin typeface="Calibri"/>
+              </a:rPr>
+              <a:t/>
+            </a:r>
+          </a:p>
+          <a:p>
+            <a:pPr>
+              <a:spcAft>
+                <a:spcPts val="400"/>
+              </a:spcAft>
+            </a:pPr>
+            <a:r>
+              <a:rPr sz="1400" b="0" i="0">
+                <a:solidFill>
+                  <a:srgbClr val="FFFFFF"/>
+                </a:solidFill>
+                <a:latin typeface="Calibri"/>
+              </a:rPr>
+              <a:t>%% Los tres caminos de una busqueda —uno, varios, ninguno— son lo que</a:t>
+            </a:r>
+          </a:p>
+          <a:p>
+            <a:pPr>
+              <a:spcAft>
+                <a:spcPts val="400"/>
+              </a:spcAft>
+            </a:pPr>
+            <a:r>
+              <a:rPr sz="1400" b="0" i="0">
+                <a:solidFill>
+                  <a:srgbClr val="FFFFFF"/>
+                </a:solidFill>
+                <a:latin typeface="Calibri"/>
+              </a:rPr>
+              <a:t>%% separa un wireframe de un dibujo. El «ninguno» es el que se olvida.</a:t>
             </a:r>
           </a:p>
         </p:txBody>
@@ -5701,7 +5422,7 @@
                 </a:solidFill>
                 <a:latin typeface="Calibri"/>
               </a:rPr>
-              <a:t>Flujo de tarea de VetCare en Mermaid: registrar mascota y buscar expediente con caminos alternos</a:t>
+              <a:t>La tabla de anotaciones del wireframe</a:t>
             </a:r>
           </a:p>
         </p:txBody>
@@ -5715,7 +5436,7 @@
         <p:spPr>
           <a:xfrm>
             <a:off x="457200" y="1261872"/>
-            <a:ext cx="11277295" cy="4773168"/>
+            <a:ext cx="11277295" cy="5093208"/>
           </a:xfrm>
           <a:prstGeom prst="roundRect">
             <a:avLst>
@@ -5835,7 +5556,7 @@
         <p:spPr>
           <a:xfrm>
             <a:off x="777240" y="1719072"/>
-            <a:ext cx="10637215" cy="4133087"/>
+            <a:ext cx="10637215" cy="4453128"/>
           </a:xfrm>
           <a:prstGeom prst="rect">
             <a:avLst/>
@@ -5860,7 +5581,7 @@
                 </a:solidFill>
                 <a:latin typeface="Calibri"/>
               </a:rPr>
-              <a:t>flowchart TD</a:t>
+              <a:t>| Campo de la pantalla | RF que lo exige | Atributo de la clase  | Validacion        |</a:t>
             </a:r>
           </a:p>
           <a:p>
@@ -5876,7 +5597,7 @@
                 </a:solidFill>
                 <a:latin typeface="Calibri"/>
               </a:rPr>
-              <a:t>  A[Recepcion: llega el dueño con su mascota] --&gt; B{Dueño ya registrado?}</a:t>
+              <a:t>|----------------------|-----------------|-----------------------|-------------------|</a:t>
             </a:r>
           </a:p>
           <a:p>
@@ -5892,7 +5613,7 @@
                 </a:solidFill>
                 <a:latin typeface="Calibri"/>
               </a:rPr>
-              <a:t>  B -- No --&gt; C[Pantalla Registrar dueño]</a:t>
+              <a:t>| Nombre               | RF-01           | Mascota.nombre        | obligatorio       |</a:t>
             </a:r>
           </a:p>
           <a:p>
@@ -5908,7 +5629,7 @@
                 </a:solidFill>
                 <a:latin typeface="Calibri"/>
               </a:rPr>
-              <a:t>  B -- Si --&gt; D[Pantalla Registrar mascota]</a:t>
+              <a:t>| Especie              | RF-01           | Mascota.especie       | lista cerrada     |</a:t>
             </a:r>
           </a:p>
           <a:p>
@@ -5924,7 +5645,7 @@
                 </a:solidFill>
                 <a:latin typeface="Calibri"/>
               </a:rPr>
-              <a:t>  C --&gt; D</a:t>
+              <a:t>| Fecha de nacimiento  | RF-02           | Mascota.fechaNac      | no futura         |</a:t>
             </a:r>
           </a:p>
           <a:p>
@@ -5940,7 +5661,7 @@
                 </a:solidFill>
                 <a:latin typeface="Calibri"/>
               </a:rPr>
-              <a:t>  D --&gt; E{Campos obligatorios completos?}</a:t>
+              <a:t>| Dueno                | RF-01           | Mascota.idDueno (FK)  | debe existir      |</a:t>
             </a:r>
           </a:p>
           <a:p>
@@ -5956,7 +5677,7 @@
                 </a:solidFill>
                 <a:latin typeface="Calibri"/>
               </a:rPr>
-              <a:t>  E -- No --&gt; F[Guardar deshabilitado + ayuda en el campo faltante]</a:t>
+              <a:t/>
             </a:r>
           </a:p>
           <a:p>
@@ -5972,7 +5693,7 @@
                 </a:solidFill>
                 <a:latin typeface="Calibri"/>
               </a:rPr>
-              <a:t>  F --&gt; D</a:t>
+              <a:t>-- Un campo sin RF que lo exija es un campo que nadie pidio: se quita o</a:t>
             </a:r>
           </a:p>
           <a:p>
@@ -5988,7 +5709,7 @@
                 </a:solidFill>
                 <a:latin typeface="Calibri"/>
               </a:rPr>
-              <a:t>  E -- Si --&gt; G[Confirmacion: Ficha guardada, codigo M-0421]</a:t>
+              <a:t>-- se agrega el requisito. Un atributo de la clase sin campo en ninguna</a:t>
             </a:r>
           </a:p>
           <a:p>
@@ -6004,71 +5725,7 @@
                 </a:solidFill>
                 <a:latin typeface="Calibri"/>
               </a:rPr>
-              <a:t>  G --&gt; H[Pantalla Buscar expediente]</a:t>
-            </a:r>
-          </a:p>
-          <a:p>
-            <a:pPr>
-              <a:spcAft>
-                <a:spcPts val="400"/>
-              </a:spcAft>
-            </a:pPr>
-            <a:r>
-              <a:rPr sz="1400" b="0" i="0">
-                <a:solidFill>
-                  <a:srgbClr val="FFFFFF"/>
-                </a:solidFill>
-                <a:latin typeface="Calibri"/>
-              </a:rPr>
-              <a:t>  H --&gt; I{Cuantos resultados?}</a:t>
-            </a:r>
-          </a:p>
-          <a:p>
-            <a:pPr>
-              <a:spcAft>
-                <a:spcPts val="400"/>
-              </a:spcAft>
-            </a:pPr>
-            <a:r>
-              <a:rPr sz="1400" b="0" i="0">
-                <a:solidFill>
-                  <a:srgbClr val="FFFFFF"/>
-                </a:solidFill>
-                <a:latin typeface="Calibri"/>
-              </a:rPr>
-              <a:t>  I -- Cero --&gt; J[Mensaje sin resultados + Buscar por otro criterio]</a:t>
-            </a:r>
-          </a:p>
-          <a:p>
-            <a:pPr>
-              <a:spcAft>
-                <a:spcPts val="400"/>
-              </a:spcAft>
-            </a:pPr>
-            <a:r>
-              <a:rPr sz="1400" b="0" i="0">
-                <a:solidFill>
-                  <a:srgbClr val="FFFFFF"/>
-                </a:solidFill>
-                <a:latin typeface="Calibri"/>
-              </a:rPr>
-              <a:t>  I -- Varios --&gt; K[Lista con especie, edad y dueño para desambiguar]</a:t>
-            </a:r>
-          </a:p>
-          <a:p>
-            <a:pPr>
-              <a:spcAft>
-                <a:spcPts val="400"/>
-              </a:spcAft>
-            </a:pPr>
-            <a:r>
-              <a:rPr sz="1400" b="0" i="0">
-                <a:solidFill>
-                  <a:srgbClr val="FFFFFF"/>
-                </a:solidFill>
-                <a:latin typeface="Calibri"/>
-              </a:rPr>
-              <a:t>  I -- Uno --&gt; L[Ficha del paciente]</a:t>
+              <a:t>-- pantalla es un dato que nadie puede ingresar.</a:t>
             </a:r>
           </a:p>
         </p:txBody>
@@ -6076,41 +5733,6 @@
       <p:sp>
         <p:nvSpPr>
           <p:cNvPr id="9" name="TextBox 8"/>
-          <p:cNvSpPr txBox="1"/>
-          <p:nvPr/>
-        </p:nvSpPr>
-        <p:spPr>
-          <a:xfrm>
-            <a:off x="457200" y="6080760"/>
-            <a:ext cx="11277295" cy="320040"/>
-          </a:xfrm>
-          <a:prstGeom prst="rect">
-            <a:avLst/>
-          </a:prstGeom>
-          <a:noFill/>
-        </p:spPr>
-        <p:txBody>
-          <a:bodyPr wrap="square">
-            <a:spAutoFit/>
-          </a:bodyPr>
-          <a:lstStyle/>
-          <a:p>
-            <a:pPr algn="ctr"/>
-            <a:r>
-              <a:rPr sz="1200" b="0" i="1">
-                <a:solidFill>
-                  <a:srgbClr val="666666"/>
-                </a:solidFill>
-                <a:latin typeface="Calibri"/>
-              </a:rPr>
-              <a:t>La interfaz no son pantallas sueltas: es un camino con desvios, y los desvios son los que hay que diseñar.</a:t>
-            </a:r>
-          </a:p>
-        </p:txBody>
-      </p:sp>
-      <p:sp>
-        <p:nvSpPr>
-          <p:cNvPr id="10" name="TextBox 9"/>
           <p:cNvSpPr txBox="1"/>
           <p:nvPr/>
         </p:nvSpPr>
@@ -6284,21 +5906,141 @@
                 </a:solidFill>
                 <a:latin typeface="Calibri"/>
               </a:rPr>
-              <a:t>Demo del dia</a:t>
-            </a:r>
-          </a:p>
-        </p:txBody>
-      </p:sp>
-      <p:sp>
-        <p:nvSpPr>
-          <p:cNvPr id="5" name="TextBox 4"/>
+              <a:t>Flujo de tarea del sistema de la clinica en Mermaid: registrar mascota y buscar expediente con caminos alternos</a:t>
+            </a:r>
+          </a:p>
+        </p:txBody>
+      </p:sp>
+      <p:sp>
+        <p:nvSpPr>
+          <p:cNvPr id="5" name="Rounded Rectangle 4"/>
+          <p:cNvSpPr/>
+          <p:nvPr/>
+        </p:nvSpPr>
+        <p:spPr>
+          <a:xfrm>
+            <a:off x="457200" y="1261872"/>
+            <a:ext cx="11277295" cy="4773168"/>
+          </a:xfrm>
+          <a:prstGeom prst="roundRect">
+            <a:avLst>
+              <a:gd name="adj" fmla="val 12000"/>
+            </a:avLst>
+          </a:prstGeom>
+          <a:solidFill>
+            <a:srgbClr val="1E2A38"/>
+          </a:solidFill>
+          <a:ln>
+            <a:noFill/>
+          </a:ln>
+        </p:spPr>
+        <p:style>
+          <a:lnRef idx="1">
+            <a:schemeClr val="accent1"/>
+          </a:lnRef>
+          <a:fillRef idx="3">
+            <a:schemeClr val="accent1"/>
+          </a:fillRef>
+          <a:effectRef idx="2">
+            <a:schemeClr val="accent1"/>
+          </a:effectRef>
+          <a:fontRef idx="minor">
+            <a:schemeClr val="lt1"/>
+          </a:fontRef>
+        </p:style>
+        <p:txBody>
+          <a:bodyPr rtlCol="0" anchor="ctr"/>
+          <a:lstStyle/>
+          <a:p>
+            <a:pPr algn="ctr"/>
+          </a:p>
+        </p:txBody>
+      </p:sp>
+      <p:sp>
+        <p:nvSpPr>
+          <p:cNvPr id="6" name="Rectangle 5"/>
+          <p:cNvSpPr/>
+          <p:nvPr/>
+        </p:nvSpPr>
+        <p:spPr>
+          <a:xfrm>
+            <a:off x="457200" y="1261872"/>
+            <a:ext cx="11277295" cy="320040"/>
+          </a:xfrm>
+          <a:prstGeom prst="rect">
+            <a:avLst/>
+          </a:prstGeom>
+          <a:solidFill>
+            <a:srgbClr val="095292"/>
+          </a:solidFill>
+          <a:ln>
+            <a:noFill/>
+          </a:ln>
+        </p:spPr>
+        <p:style>
+          <a:lnRef idx="1">
+            <a:schemeClr val="accent1"/>
+          </a:lnRef>
+          <a:fillRef idx="3">
+            <a:schemeClr val="accent1"/>
+          </a:fillRef>
+          <a:effectRef idx="2">
+            <a:schemeClr val="accent1"/>
+          </a:effectRef>
+          <a:fontRef idx="minor">
+            <a:schemeClr val="lt1"/>
+          </a:fontRef>
+        </p:style>
+        <p:txBody>
+          <a:bodyPr rtlCol="0" anchor="ctr"/>
+          <a:lstStyle/>
+          <a:p>
+            <a:pPr algn="ctr"/>
+          </a:p>
+        </p:txBody>
+      </p:sp>
+      <p:sp>
+        <p:nvSpPr>
+          <p:cNvPr id="7" name="TextBox 6"/>
           <p:cNvSpPr txBox="1"/>
           <p:nvPr/>
         </p:nvSpPr>
         <p:spPr>
           <a:xfrm>
-            <a:off x="457200" y="1170432"/>
-            <a:ext cx="11277295" cy="5230368"/>
+            <a:off x="685800" y="1307592"/>
+            <a:ext cx="10820095" cy="256032"/>
+          </a:xfrm>
+          <a:prstGeom prst="rect">
+            <a:avLst/>
+          </a:prstGeom>
+          <a:noFill/>
+        </p:spPr>
+        <p:txBody>
+          <a:bodyPr wrap="square" anchor="ctr"/>
+          <a:lstStyle/>
+          <a:p>
+            <a:r>
+              <a:rPr sz="1000" b="1" i="0">
+                <a:solidFill>
+                  <a:srgbClr val="269CCB"/>
+                </a:solidFill>
+                <a:latin typeface="Calibri"/>
+              </a:rPr>
+              <a:t>● ● ●</a:t>
+            </a:r>
+          </a:p>
+        </p:txBody>
+      </p:sp>
+      <p:sp>
+        <p:nvSpPr>
+          <p:cNvPr id="8" name="TextBox 7"/>
+          <p:cNvSpPr txBox="1"/>
+          <p:nvPr/>
+        </p:nvSpPr>
+        <p:spPr>
+          <a:xfrm>
+            <a:off x="777240" y="1719072"/>
+            <a:ext cx="10637215" cy="4133087"/>
           </a:xfrm>
           <a:prstGeom prst="rect">
             <a:avLst/>
@@ -6313,92 +6055,267 @@
           <a:p>
             <a:pPr>
               <a:spcAft>
-                <a:spcPts val="800"/>
+                <a:spcPts val="400"/>
               </a:spcAft>
             </a:pPr>
             <a:r>
-              <a:rPr sz="2000" b="0" i="0">
-                <a:solidFill>
-                  <a:srgbClr val="333333"/>
-                </a:solidFill>
-                <a:latin typeface="Calibri"/>
-              </a:rPr>
-              <a:t>–   </a:t>
-            </a:r>
-            <a:r>
-              <a:rPr sz="2000" b="1" i="0">
-                <a:solidFill>
-                  <a:srgbClr val="333333"/>
-                </a:solidFill>
-                <a:latin typeface="Calibri"/>
-              </a:rPr>
-              <a:t>Herramienta:</a:t>
-            </a:r>
-            <a:r>
-              <a:rPr sz="2000" b="0" i="0">
-                <a:solidFill>
-                  <a:srgbClr val="333333"/>
-                </a:solidFill>
-                <a:latin typeface="Calibri"/>
-              </a:rPr>
-              <a:t> Figma o Penpot · Excalidraw · Google Docs</a:t>
+              <a:rPr sz="1400" b="0" i="0">
+                <a:solidFill>
+                  <a:srgbClr val="FFFFFF"/>
+                </a:solidFill>
+                <a:latin typeface="Calibri"/>
+              </a:rPr>
+              <a:t>flowchart TD</a:t>
             </a:r>
           </a:p>
           <a:p>
             <a:pPr>
               <a:spcAft>
-                <a:spcPts val="800"/>
+                <a:spcPts val="400"/>
               </a:spcAft>
             </a:pPr>
             <a:r>
-              <a:rPr sz="2000" b="0" i="0">
-                <a:solidFill>
-                  <a:srgbClr val="333333"/>
-                </a:solidFill>
-                <a:latin typeface="Calibri"/>
-              </a:rPr>
-              <a:t>–   </a:t>
-            </a:r>
-            <a:r>
-              <a:rPr sz="2000" b="1" i="0">
-                <a:solidFill>
-                  <a:srgbClr val="333333"/>
-                </a:solidFill>
-                <a:latin typeface="Calibri"/>
-              </a:rPr>
-              <a:t>Demo:</a:t>
-            </a:r>
-            <a:r>
-              <a:rPr sz="2000" b="0" i="0">
-                <a:solidFill>
-                  <a:srgbClr val="333333"/>
-                </a:solidFill>
-                <a:latin typeface="Calibri"/>
-              </a:rPr>
-              <a:t> El docente dibuja en vivo el wireframe de Registrar mascota en Penpot, le pone tres anotaciones numeradas y lo conecta con Buscar expediente para que la clase vea en la misma pantalla la diferencia entre wireframe, mockup y prototipo.</a:t>
+              <a:rPr sz="1400" b="0" i="0">
+                <a:solidFill>
+                  <a:srgbClr val="FFFFFF"/>
+                </a:solidFill>
+                <a:latin typeface="Calibri"/>
+              </a:rPr>
+              <a:t>  A[Recepcion: llega el dueño con su mascota] --&gt; B{Dueño ya registrado?}</a:t>
             </a:r>
           </a:p>
           <a:p>
             <a:pPr>
               <a:spcAft>
-                <a:spcPts val="800"/>
+                <a:spcPts val="400"/>
               </a:spcAft>
             </a:pPr>
             <a:r>
-              <a:rPr sz="2000" b="0" i="0">
-                <a:solidFill>
-                  <a:srgbClr val="333333"/>
-                </a:solidFill>
-                <a:latin typeface="Calibri"/>
-              </a:rPr>
-              <a:t>–   Mismo dominio VetCare — no otro ejemplo. Aqui se diseña, no se programa.</a:t>
-            </a:r>
-          </a:p>
-        </p:txBody>
-      </p:sp>
-      <p:sp>
-        <p:nvSpPr>
-          <p:cNvPr id="6" name="TextBox 5"/>
+              <a:rPr sz="1400" b="0" i="0">
+                <a:solidFill>
+                  <a:srgbClr val="FFFFFF"/>
+                </a:solidFill>
+                <a:latin typeface="Calibri"/>
+              </a:rPr>
+              <a:t>  B -- No --&gt; C[Pantalla Registrar dueño]</a:t>
+            </a:r>
+          </a:p>
+          <a:p>
+            <a:pPr>
+              <a:spcAft>
+                <a:spcPts val="400"/>
+              </a:spcAft>
+            </a:pPr>
+            <a:r>
+              <a:rPr sz="1400" b="0" i="0">
+                <a:solidFill>
+                  <a:srgbClr val="FFFFFF"/>
+                </a:solidFill>
+                <a:latin typeface="Calibri"/>
+              </a:rPr>
+              <a:t>  B -- Si --&gt; D[Pantalla Registrar mascota]</a:t>
+            </a:r>
+          </a:p>
+          <a:p>
+            <a:pPr>
+              <a:spcAft>
+                <a:spcPts val="400"/>
+              </a:spcAft>
+            </a:pPr>
+            <a:r>
+              <a:rPr sz="1400" b="0" i="0">
+                <a:solidFill>
+                  <a:srgbClr val="FFFFFF"/>
+                </a:solidFill>
+                <a:latin typeface="Calibri"/>
+              </a:rPr>
+              <a:t>  C --&gt; D</a:t>
+            </a:r>
+          </a:p>
+          <a:p>
+            <a:pPr>
+              <a:spcAft>
+                <a:spcPts val="400"/>
+              </a:spcAft>
+            </a:pPr>
+            <a:r>
+              <a:rPr sz="1400" b="0" i="0">
+                <a:solidFill>
+                  <a:srgbClr val="FFFFFF"/>
+                </a:solidFill>
+                <a:latin typeface="Calibri"/>
+              </a:rPr>
+              <a:t>  D --&gt; E{Campos obligatorios completos?}</a:t>
+            </a:r>
+          </a:p>
+          <a:p>
+            <a:pPr>
+              <a:spcAft>
+                <a:spcPts val="400"/>
+              </a:spcAft>
+            </a:pPr>
+            <a:r>
+              <a:rPr sz="1400" b="0" i="0">
+                <a:solidFill>
+                  <a:srgbClr val="FFFFFF"/>
+                </a:solidFill>
+                <a:latin typeface="Calibri"/>
+              </a:rPr>
+              <a:t>  E -- No --&gt; F[Guardar deshabilitado + ayuda en el campo faltante]</a:t>
+            </a:r>
+          </a:p>
+          <a:p>
+            <a:pPr>
+              <a:spcAft>
+                <a:spcPts val="400"/>
+              </a:spcAft>
+            </a:pPr>
+            <a:r>
+              <a:rPr sz="1400" b="0" i="0">
+                <a:solidFill>
+                  <a:srgbClr val="FFFFFF"/>
+                </a:solidFill>
+                <a:latin typeface="Calibri"/>
+              </a:rPr>
+              <a:t>  F --&gt; D</a:t>
+            </a:r>
+          </a:p>
+          <a:p>
+            <a:pPr>
+              <a:spcAft>
+                <a:spcPts val="400"/>
+              </a:spcAft>
+            </a:pPr>
+            <a:r>
+              <a:rPr sz="1400" b="0" i="0">
+                <a:solidFill>
+                  <a:srgbClr val="FFFFFF"/>
+                </a:solidFill>
+                <a:latin typeface="Calibri"/>
+              </a:rPr>
+              <a:t>  E -- Si --&gt; G[Confirmacion: Ficha guardada, codigo M-0421]</a:t>
+            </a:r>
+          </a:p>
+          <a:p>
+            <a:pPr>
+              <a:spcAft>
+                <a:spcPts val="400"/>
+              </a:spcAft>
+            </a:pPr>
+            <a:r>
+              <a:rPr sz="1400" b="0" i="0">
+                <a:solidFill>
+                  <a:srgbClr val="FFFFFF"/>
+                </a:solidFill>
+                <a:latin typeface="Calibri"/>
+              </a:rPr>
+              <a:t>  G --&gt; H[Pantalla Buscar expediente]</a:t>
+            </a:r>
+          </a:p>
+          <a:p>
+            <a:pPr>
+              <a:spcAft>
+                <a:spcPts val="400"/>
+              </a:spcAft>
+            </a:pPr>
+            <a:r>
+              <a:rPr sz="1400" b="0" i="0">
+                <a:solidFill>
+                  <a:srgbClr val="FFFFFF"/>
+                </a:solidFill>
+                <a:latin typeface="Calibri"/>
+              </a:rPr>
+              <a:t>  H --&gt; I{Cuantos resultados?}</a:t>
+            </a:r>
+          </a:p>
+          <a:p>
+            <a:pPr>
+              <a:spcAft>
+                <a:spcPts val="400"/>
+              </a:spcAft>
+            </a:pPr>
+            <a:r>
+              <a:rPr sz="1400" b="0" i="0">
+                <a:solidFill>
+                  <a:srgbClr val="FFFFFF"/>
+                </a:solidFill>
+                <a:latin typeface="Calibri"/>
+              </a:rPr>
+              <a:t>  I -- Cero --&gt; J[Mensaje sin resultados + Buscar por otro criterio]</a:t>
+            </a:r>
+          </a:p>
+          <a:p>
+            <a:pPr>
+              <a:spcAft>
+                <a:spcPts val="400"/>
+              </a:spcAft>
+            </a:pPr>
+            <a:r>
+              <a:rPr sz="1400" b="0" i="0">
+                <a:solidFill>
+                  <a:srgbClr val="FFFFFF"/>
+                </a:solidFill>
+                <a:latin typeface="Calibri"/>
+              </a:rPr>
+              <a:t>  I -- Varios --&gt; K[Lista con especie, edad y dueño para desambiguar]</a:t>
+            </a:r>
+          </a:p>
+          <a:p>
+            <a:pPr>
+              <a:spcAft>
+                <a:spcPts val="400"/>
+              </a:spcAft>
+            </a:pPr>
+            <a:r>
+              <a:rPr sz="1400" b="0" i="0">
+                <a:solidFill>
+                  <a:srgbClr val="FFFFFF"/>
+                </a:solidFill>
+                <a:latin typeface="Calibri"/>
+              </a:rPr>
+              <a:t>  I -- Uno --&gt; L[Ficha del paciente]</a:t>
+            </a:r>
+          </a:p>
+        </p:txBody>
+      </p:sp>
+      <p:sp>
+        <p:nvSpPr>
+          <p:cNvPr id="9" name="TextBox 8"/>
+          <p:cNvSpPr txBox="1"/>
+          <p:nvPr/>
+        </p:nvSpPr>
+        <p:spPr>
+          <a:xfrm>
+            <a:off x="457200" y="6080760"/>
+            <a:ext cx="11277295" cy="320040"/>
+          </a:xfrm>
+          <a:prstGeom prst="rect">
+            <a:avLst/>
+          </a:prstGeom>
+          <a:noFill/>
+        </p:spPr>
+        <p:txBody>
+          <a:bodyPr wrap="square">
+            <a:spAutoFit/>
+          </a:bodyPr>
+          <a:lstStyle/>
+          <a:p>
+            <a:pPr algn="ctr"/>
+            <a:r>
+              <a:rPr sz="1200" b="0" i="1">
+                <a:solidFill>
+                  <a:srgbClr val="666666"/>
+                </a:solidFill>
+                <a:latin typeface="Calibri"/>
+              </a:rPr>
+              <a:t>La interfaz no son pantallas sueltas: es un camino con desvios, y los desvios son los que hay que diseñar.</a:t>
+            </a:r>
+          </a:p>
+        </p:txBody>
+      </p:sp>
+      <p:sp>
+        <p:nvSpPr>
+          <p:cNvPr id="10" name="TextBox 9"/>
           <p:cNvSpPr txBox="1"/>
           <p:nvPr/>
         </p:nvSpPr>
@@ -6466,6 +6383,294 @@
         <p:spPr>
           <a:xfrm>
             <a:off x="0" y="0"/>
+            <a:ext cx="12191695" cy="960120"/>
+          </a:xfrm>
+          <a:prstGeom prst="rect">
+            <a:avLst/>
+          </a:prstGeom>
+          <a:solidFill>
+            <a:srgbClr val="095292"/>
+          </a:solidFill>
+          <a:ln>
+            <a:noFill/>
+          </a:ln>
+        </p:spPr>
+        <p:style>
+          <a:lnRef idx="1">
+            <a:schemeClr val="accent1"/>
+          </a:lnRef>
+          <a:fillRef idx="3">
+            <a:schemeClr val="accent1"/>
+          </a:fillRef>
+          <a:effectRef idx="2">
+            <a:schemeClr val="accent1"/>
+          </a:effectRef>
+          <a:fontRef idx="minor">
+            <a:schemeClr val="lt1"/>
+          </a:fontRef>
+        </p:style>
+        <p:txBody>
+          <a:bodyPr rtlCol="0" anchor="ctr"/>
+          <a:lstStyle/>
+          <a:p>
+            <a:pPr algn="ctr"/>
+          </a:p>
+        </p:txBody>
+      </p:sp>
+      <p:sp>
+        <p:nvSpPr>
+          <p:cNvPr id="3" name="Rectangle 2"/>
+          <p:cNvSpPr/>
+          <p:nvPr/>
+        </p:nvSpPr>
+        <p:spPr>
+          <a:xfrm>
+            <a:off x="0" y="960120"/>
+            <a:ext cx="12191695" cy="41148"/>
+          </a:xfrm>
+          <a:prstGeom prst="rect">
+            <a:avLst/>
+          </a:prstGeom>
+          <a:solidFill>
+            <a:srgbClr val="FFD000"/>
+          </a:solidFill>
+          <a:ln>
+            <a:noFill/>
+          </a:ln>
+        </p:spPr>
+        <p:style>
+          <a:lnRef idx="1">
+            <a:schemeClr val="accent1"/>
+          </a:lnRef>
+          <a:fillRef idx="3">
+            <a:schemeClr val="accent1"/>
+          </a:fillRef>
+          <a:effectRef idx="2">
+            <a:schemeClr val="accent1"/>
+          </a:effectRef>
+          <a:fontRef idx="minor">
+            <a:schemeClr val="lt1"/>
+          </a:fontRef>
+        </p:style>
+        <p:txBody>
+          <a:bodyPr rtlCol="0" anchor="ctr"/>
+          <a:lstStyle/>
+          <a:p>
+            <a:pPr algn="ctr"/>
+          </a:p>
+        </p:txBody>
+      </p:sp>
+      <p:sp>
+        <p:nvSpPr>
+          <p:cNvPr id="4" name="TextBox 3"/>
+          <p:cNvSpPr txBox="1"/>
+          <p:nvPr/>
+        </p:nvSpPr>
+        <p:spPr>
+          <a:xfrm>
+            <a:off x="457200" y="164592"/>
+            <a:ext cx="11277295" cy="502920"/>
+          </a:xfrm>
+          <a:prstGeom prst="rect">
+            <a:avLst/>
+          </a:prstGeom>
+          <a:noFill/>
+        </p:spPr>
+        <p:txBody>
+          <a:bodyPr wrap="square">
+            <a:spAutoFit/>
+          </a:bodyPr>
+          <a:lstStyle/>
+          <a:p>
+            <a:r>
+              <a:rPr sz="2600" b="1" i="0">
+                <a:solidFill>
+                  <a:srgbClr val="FFFFFF"/>
+                </a:solidFill>
+                <a:latin typeface="Calibri"/>
+              </a:rPr>
+              <a:t>Demo del dia</a:t>
+            </a:r>
+          </a:p>
+        </p:txBody>
+      </p:sp>
+      <p:sp>
+        <p:nvSpPr>
+          <p:cNvPr id="5" name="TextBox 4"/>
+          <p:cNvSpPr txBox="1"/>
+          <p:nvPr/>
+        </p:nvSpPr>
+        <p:spPr>
+          <a:xfrm>
+            <a:off x="457200" y="1170432"/>
+            <a:ext cx="11277295" cy="5230368"/>
+          </a:xfrm>
+          <a:prstGeom prst="rect">
+            <a:avLst/>
+          </a:prstGeom>
+          <a:noFill/>
+        </p:spPr>
+        <p:txBody>
+          <a:bodyPr wrap="square">
+            <a:spAutoFit/>
+          </a:bodyPr>
+          <a:lstStyle/>
+          <a:p>
+            <a:pPr>
+              <a:spcAft>
+                <a:spcPts val="800"/>
+              </a:spcAft>
+            </a:pPr>
+            <a:r>
+              <a:rPr sz="2000" b="0" i="0">
+                <a:solidFill>
+                  <a:srgbClr val="333333"/>
+                </a:solidFill>
+                <a:latin typeface="Calibri"/>
+              </a:rPr>
+              <a:t>–   </a:t>
+            </a:r>
+            <a:r>
+              <a:rPr sz="2000" b="1" i="0">
+                <a:solidFill>
+                  <a:srgbClr val="333333"/>
+                </a:solidFill>
+                <a:latin typeface="Calibri"/>
+              </a:rPr>
+              <a:t>Herramienta:</a:t>
+            </a:r>
+            <a:r>
+              <a:rPr sz="2000" b="0" i="0">
+                <a:solidFill>
+                  <a:srgbClr val="333333"/>
+                </a:solidFill>
+                <a:latin typeface="Calibri"/>
+              </a:rPr>
+              <a:t> Figma o Penpot · Excalidraw · Google Docs</a:t>
+            </a:r>
+          </a:p>
+          <a:p>
+            <a:pPr>
+              <a:spcAft>
+                <a:spcPts val="800"/>
+              </a:spcAft>
+            </a:pPr>
+            <a:r>
+              <a:rPr sz="2000" b="0" i="0">
+                <a:solidFill>
+                  <a:srgbClr val="333333"/>
+                </a:solidFill>
+                <a:latin typeface="Calibri"/>
+              </a:rPr>
+              <a:t>–   </a:t>
+            </a:r>
+            <a:r>
+              <a:rPr sz="2000" b="1" i="0">
+                <a:solidFill>
+                  <a:srgbClr val="333333"/>
+                </a:solidFill>
+                <a:latin typeface="Calibri"/>
+              </a:rPr>
+              <a:t>Demo:</a:t>
+            </a:r>
+            <a:r>
+              <a:rPr sz="2000" b="0" i="0">
+                <a:solidFill>
+                  <a:srgbClr val="333333"/>
+                </a:solidFill>
+                <a:latin typeface="Calibri"/>
+              </a:rPr>
+              <a:t> El docente dibuja en vivo el wireframe de Registrar mascota en Penpot, le pone tres anotaciones numeradas y lo conecta con Buscar expediente para que la clase vea en la misma pantalla la diferencia entre wireframe, mockup y prototipo.</a:t>
+            </a:r>
+          </a:p>
+          <a:p>
+            <a:pPr>
+              <a:spcAft>
+                <a:spcPts val="800"/>
+              </a:spcAft>
+            </a:pPr>
+            <a:r>
+              <a:rPr sz="2000" b="0" i="0">
+                <a:solidFill>
+                  <a:srgbClr val="333333"/>
+                </a:solidFill>
+                <a:latin typeface="Calibri"/>
+              </a:rPr>
+              <a:t>–   Mismo dominio: la clinica veterinaria — no otro ejemplo. Aqui se diseña, no se programa.</a:t>
+            </a:r>
+          </a:p>
+        </p:txBody>
+      </p:sp>
+      <p:sp>
+        <p:nvSpPr>
+          <p:cNvPr id="6" name="TextBox 5"/>
+          <p:cNvSpPr txBox="1"/>
+          <p:nvPr/>
+        </p:nvSpPr>
+        <p:spPr>
+          <a:xfrm>
+            <a:off x="11185855" y="6473952"/>
+            <a:ext cx="640080" cy="274320"/>
+          </a:xfrm>
+          <a:prstGeom prst="rect">
+            <a:avLst/>
+          </a:prstGeom>
+          <a:noFill/>
+        </p:spPr>
+        <p:txBody>
+          <a:bodyPr wrap="square">
+            <a:spAutoFit/>
+          </a:bodyPr>
+          <a:lstStyle/>
+          <a:p>
+            <a:pPr algn="r"/>
+            <a:r>
+              <a:rPr sz="1100" b="0" i="0">
+                <a:solidFill>
+                  <a:srgbClr val="666666"/>
+                </a:solidFill>
+                <a:latin typeface="Calibri"/>
+              </a:rPr>
+              <a:t>16</a:t>
+            </a:r>
+          </a:p>
+        </p:txBody>
+      </p:sp>
+    </p:spTree>
+  </p:cSld>
+  <p:clrMapOvr>
+    <a:masterClrMapping/>
+  </p:clrMapOvr>
+</p:sld>
+</file>
+
+<file path=ppt/slides/slide17.xml><?xml version="1.0" encoding="utf-8"?>
+<p:sld xmlns:a="http://schemas.openxmlformats.org/drawingml/2006/main" xmlns:p="http://schemas.openxmlformats.org/presentationml/2006/main" xmlns:r="http://schemas.openxmlformats.org/officeDocument/2006/relationships">
+  <p:cSld>
+    <p:bg>
+      <p:bgPr>
+        <a:solidFill>
+          <a:srgbClr val="FFFFFF"/>
+        </a:solidFill>
+        <a:effectLst/>
+      </p:bgPr>
+    </p:bg>
+    <p:spTree>
+      <p:nvGrpSpPr>
+        <p:cNvPr id="1" name=""/>
+        <p:cNvGrpSpPr/>
+        <p:nvPr/>
+      </p:nvGrpSpPr>
+      <p:grpSpPr/>
+      <p:sp>
+        <p:nvSpPr>
+          <p:cNvPr id="2" name="Rectangle 1"/>
+          <p:cNvSpPr/>
+          <p:nvPr/>
+        </p:nvSpPr>
+        <p:spPr>
+          <a:xfrm>
+            <a:off x="0" y="0"/>
             <a:ext cx="12191695" cy="164592"/>
           </a:xfrm>
           <a:prstGeom prst="rect">
@@ -6936,7 +7141,7 @@
                 </a:solidFill>
                 <a:latin typeface="Calibri"/>
               </a:rPr>
-              <a:t>–   Ejemplo de toda la clase: VetCare, el sistema de la clinica «Huellitas».</a:t>
+              <a:t>–   Ejemplo de toda la clase: el sistema de una clinica veterinaria.</a:t>
             </a:r>
           </a:p>
         </p:txBody>
@@ -7505,7 +7710,7 @@
                 </a:solidFill>
                 <a:latin typeface="Calibri"/>
               </a:rPr>
-              <a:t>Demo en vivo sobre VetCare</a:t>
+              <a:t>Demo en vivo sobre la clinica</a:t>
             </a:r>
           </a:p>
         </p:txBody>
@@ -8040,7 +8245,7 @@
                 </a:solidFill>
                 <a:latin typeface="Calibri"/>
               </a:rPr>
-              <a:t>–   El mockup ya es la foto fija de como se vera: tipografia, color, iconos, el logo de la clinica Huellitas, los espacios reales entre elementos; responde a la pregunta como se ve.</a:t>
+              <a:t>–   El mockup ya es la foto fija de como se vera: tipografia, color, iconos, el logo de la clinica, los espacios reales entre elementos; responde a la pregunta como se ve.</a:t>
             </a:r>
           </a:p>
           <a:p>
@@ -8072,7 +8277,7 @@
                 </a:solidFill>
                 <a:latin typeface="Calibri"/>
               </a:rPr>
-              <a:t>–   En VetCare esto se traduce asi: el wireframe de Registrar mascota se hace en diez minutos en Excalidraw y solo dice que arriba va la busqueda del dueño, en el centro los datos de la mascota y abajo el boton Guardar</a:t>
+              <a:t>–   En el sistema de la clinica esto se traduce asi: el wireframe de Registrar mascota se hace en diez minutos en Excalidraw y solo dice que arriba va la busqueda del dueño, en el centro los datos de la mascota y abajo el boton Guardar</a:t>
             </a:r>
           </a:p>
         </p:txBody>
@@ -8560,7 +8765,7 @@
                 </a:solidFill>
                 <a:latin typeface="Calibri"/>
               </a:rPr>
-              <a:t>–   Visibilidad del estado del sistema significa que la persona siempre sepa que esta pasando: si la recepcionista oprime Guardar y la pantalla no dice nada, ella va a oprimir Guardar otra vez y VetCare va a terminar con la mascota registrada dos veces</a:t>
+              <a:t>–   Visibilidad del estado del sistema significa que la persona siempre sepa que esta pasando: si la recepcionista oprime Guardar y la pantalla no dice nada, ella va a oprimir Guardar otra vez y el sistema va a terminar con la mascota registrada dos veces</a:t>
             </a:r>
           </a:p>
           <a:p>
@@ -9128,7 +9333,7 @@
                 </a:solidFill>
                 <a:latin typeface="Calibri"/>
               </a:rPr>
-              <a:t>–   En VetCare el camino feliz de registrar una mascota es: llega el dueño, la recepcionista lo busca, lo encuentra, registra la mascota y el sistema devuelve el codigo.</a:t>
+              <a:t>–   En el sistema de la clinica el camino feliz de registrar una mascota es: llega el dueño, la recepcionista lo busca, lo encuentra, registra la mascota y el sistema devuelve el codigo.</a:t>
             </a:r>
           </a:p>
           <a:p>
@@ -9145,22 +9350,6 @@
                 <a:latin typeface="Calibri"/>
               </a:rPr>
               <a:t>–   Pero los caminos alternos son igual de reales: el dueño no esta registrado y hay que crearlo sin perder lo que ya se habia escrito de la mascota</a:t>
-            </a:r>
-          </a:p>
-          <a:p>
-            <a:pPr>
-              <a:spcAft>
-                <a:spcPts val="800"/>
-              </a:spcAft>
-            </a:pPr>
-            <a:r>
-              <a:rPr sz="2000" b="0" i="0">
-                <a:solidFill>
-                  <a:srgbClr val="333333"/>
-                </a:solidFill>
-                <a:latin typeface="Calibri"/>
-              </a:rPr>
-              <a:t>–   La mascota ya existe porque otro turno la registro ayer y hay que avisarlo en vez de duplicarla; el dueño no trae documento y hay que permitir el registro con telefono como identificador temporal.</a:t>
             </a:r>
           </a:p>
         </p:txBody>
@@ -9367,6 +9556,22 @@
             <a:spAutoFit/>
           </a:bodyPr>
           <a:lstStyle/>
+          <a:p>
+            <a:pPr>
+              <a:spcAft>
+                <a:spcPts val="800"/>
+              </a:spcAft>
+            </a:pPr>
+            <a:r>
+              <a:rPr sz="2000" b="0" i="0">
+                <a:solidFill>
+                  <a:srgbClr val="333333"/>
+                </a:solidFill>
+                <a:latin typeface="Calibri"/>
+              </a:rPr>
+              <a:t>–   La mascota ya existe porque otro turno la registro ayer y hay que avisarlo en vez de duplicarla; el dueño no trae documento y hay que permitir el registro con telefono como identificador temporal.</a:t>
+            </a:r>
+          </a:p>
           <a:p>
             <a:pPr>
               <a:spcAft>

--- a/Seminario de Sistemas/Clases/Clase 13 - Diseño de interfaces/Presentacion.pptx
+++ b/Seminario de Sistemas/Clases/Clase 13 - Diseño de interfaces/Presentacion.pptx
@@ -4693,7 +4693,7 @@
                 </a:solidFill>
                 <a:latin typeface="Calibri"/>
               </a:rPr>
-              <a:t>–   Para el sistema de la clinica hay que evaluar pensando en la usuaria real, que es la recepcionista de la clinica: no es experta en computadores, escribe lento, contesta el telefono mientras registra y tiene un perro ladrando al lado.</a:t>
+              <a:t>–   Para la clinica hay que evaluar pensando en la usuaria real, que es la recepcionista de la clinica: no es experta en computadores, escribe lento, contesta el telefono mientras registra y tiene un perro ladrando al lado.</a:t>
             </a:r>
           </a:p>
         </p:txBody>
@@ -5906,7 +5906,7 @@
                 </a:solidFill>
                 <a:latin typeface="Calibri"/>
               </a:rPr>
-              <a:t>Flujo de tarea del sistema de la clinica en Mermaid: registrar mascota y buscar expediente con caminos alternos</a:t>
+              <a:t>Flujo de tarea de la clinica en Mermaid: registrar mascota y buscar expediente con caminos alternos</a:t>
             </a:r>
           </a:p>
         </p:txBody>
@@ -6580,7 +6580,7 @@
                 </a:solidFill>
                 <a:latin typeface="Calibri"/>
               </a:rPr>
-              <a:t> El docente dibuja en vivo el wireframe de Registrar mascota en Penpot, le pone tres anotaciones numeradas y lo conecta con Buscar expediente para que la clase vea en la misma pantalla la diferencia entre wireframe, mockup y prototipo.</a:t>
+              <a:t> Se dibuja en vivo el wireframe de Registrar mascota en Penpot, le pone tres anotaciones numeradas y lo conecta con Buscar expediente para que la clase vea en la misma pantalla la diferencia entre wireframe, mockup y prototipo.</a:t>
             </a:r>
           </a:p>
           <a:p>
@@ -8277,7 +8277,7 @@
                 </a:solidFill>
                 <a:latin typeface="Calibri"/>
               </a:rPr>
-              <a:t>–   En el sistema de la clinica esto se traduce asi: el wireframe de Registrar mascota se hace en diez minutos en Excalidraw y solo dice que arriba va la busqueda del dueño, en el centro los datos de la mascota y abajo el boton Guardar</a:t>
+              <a:t>–   En la clinica esto se traduce asi: el wireframe de Registrar mascota se hace en diez minutos en Excalidraw y solo dice que arriba va la busqueda del dueño, en el centro los datos de la mascota y abajo el boton Guardar</a:t>
             </a:r>
           </a:p>
         </p:txBody>
@@ -9333,7 +9333,7 @@
                 </a:solidFill>
                 <a:latin typeface="Calibri"/>
               </a:rPr>
-              <a:t>–   En el sistema de la clinica el camino feliz de registrar una mascota es: llega el dueño, la recepcionista lo busca, lo encuentra, registra la mascota y el sistema devuelve el codigo.</a:t>
+              <a:t>–   En la clinica el camino feliz de registrar una mascota es: llega el dueño, la recepcionista lo busca, lo encuentra, registra la mascota y el sistema devuelve el codigo.</a:t>
             </a:r>
           </a:p>
           <a:p>
@@ -9350,6 +9350,22 @@
                 <a:latin typeface="Calibri"/>
               </a:rPr>
               <a:t>–   Pero los caminos alternos son igual de reales: el dueño no esta registrado y hay que crearlo sin perder lo que ya se habia escrito de la mascota</a:t>
+            </a:r>
+          </a:p>
+          <a:p>
+            <a:pPr>
+              <a:spcAft>
+                <a:spcPts val="800"/>
+              </a:spcAft>
+            </a:pPr>
+            <a:r>
+              <a:rPr sz="2000" b="0" i="0">
+                <a:solidFill>
+                  <a:srgbClr val="333333"/>
+                </a:solidFill>
+                <a:latin typeface="Calibri"/>
+              </a:rPr>
+              <a:t>–   La mascota ya existe porque otro turno la registro ayer y hay que avisarlo en vez de duplicarla; el dueño no trae documento y hay que permitir el registro con telefono como identificador temporal.</a:t>
             </a:r>
           </a:p>
         </p:txBody>
@@ -9556,22 +9572,6 @@
             <a:spAutoFit/>
           </a:bodyPr>
           <a:lstStyle/>
-          <a:p>
-            <a:pPr>
-              <a:spcAft>
-                <a:spcPts val="800"/>
-              </a:spcAft>
-            </a:pPr>
-            <a:r>
-              <a:rPr sz="2000" b="0" i="0">
-                <a:solidFill>
-                  <a:srgbClr val="333333"/>
-                </a:solidFill>
-                <a:latin typeface="Calibri"/>
-              </a:rPr>
-              <a:t>–   La mascota ya existe porque otro turno la registro ayer y hay que avisarlo en vez de duplicarla; el dueño no trae documento y hay que permitir el registro con telefono como identificador temporal.</a:t>
-            </a:r>
-          </a:p>
           <a:p>
             <a:pPr>
               <a:spcAft>

--- a/Seminario de Sistemas/Clases/Clase 13 - Diseño de interfaces/Presentacion.pptx
+++ b/Seminario de Sistemas/Clases/Clase 13 - Diseño de interfaces/Presentacion.pptx
@@ -9,19 +9,15 @@
     <p:sldId id="257" r:id="rId8"/>
     <p:sldId id="258" r:id="rId9"/>
     <p:sldId id="259" r:id="rId10"/>
-    <p:sldId id="260" r:id="rId11"/>
-    <p:sldId id="261" r:id="rId12"/>
-    <p:sldId id="262" r:id="rId13"/>
-    <p:sldId id="263" r:id="rId14"/>
-    <p:sldId id="264" r:id="rId15"/>
-    <p:sldId id="265" r:id="rId16"/>
+    <p:sldId id="260" r:id="rId12"/>
+    <p:sldId id="261" r:id="rId13"/>
+    <p:sldId id="262" r:id="rId14"/>
+    <p:sldId id="263" r:id="rId15"/>
+    <p:sldId id="264" r:id="rId16"/>
+    <p:sldId id="265" r:id="rId17"/>
     <p:sldId id="266" r:id="rId18"/>
     <p:sldId id="267" r:id="rId19"/>
     <p:sldId id="268" r:id="rId20"/>
-    <p:sldId id="269" r:id="rId21"/>
-    <p:sldId id="270" r:id="rId22"/>
-    <p:sldId id="271" r:id="rId23"/>
-    <p:sldId id="272" r:id="rId24"/>
   </p:sldIdLst>
   <p:sldSz cx="12191695" cy="6858000" type="screen4x3"/>
   <p:notesSz cx="6858000" cy="9144000"/>
@@ -518,13 +514,55 @@
           <a:lstStyle/>
           <a:p>
             <a:r>
-              <a:t>Por eso los wireframes se entregan anotados: se ponen numeritos sobre el dibujo y al lado una tabla que dice, por ejemplo, el numero uno es el campo Nombre de la mascota que sale del atributo Mascota.nombre, texto de sesenta caracteres, obligatorio, exigido por RF-03; el numero cuatro es el mensaje de confirmacion que cumple el RNF-02 de respuesta menor a tres segundos.</a:t>
+              <a:t>DESARROLLO (para explicarlo, no se proyecta):</a:t>
             </a:r>
           </a:p>
           <a:p/>
           <a:p>
             <a:r>
-              <a:t>Esa anotacion tiene un efecto secundario muy util: si aparece un campo en la pantalla que no esta en el diccionario de datos, entonces o falta un requisito o sobra el campo, y ambas cosas hay que resolverlas hoy y no cuando el compañero de Programacion II ya escribio la tabla.</a:t>
+              <a:t>Un wireframe, un mockup y un prototipo no son tres nombres elegantes para lo mismo: son tres momentos distintos del diseño y cada uno responde una pregunta diferente.</a:t>
+            </a:r>
+          </a:p>
+          <a:p/>
+          <a:p>
+            <a:r>
+              <a:t>El wireframe es el esqueleto en gris, cajas, lineas y etiquetas, sin colores ni logos, y responde a la pregunta que informacion va en esta pantalla y en que orden la va a leer la persona.</a:t>
+            </a:r>
+          </a:p>
+          <a:p/>
+          <a:p>
+            <a:r>
+              <a:t>El mockup ya es la foto fija de como se vera: tipografia, color, iconos, el logo de la clinica, los espacios reales entre elementos; responde a la pregunta como se ve.</a:t>
+            </a:r>
+          </a:p>
+          <a:p/>
+          <a:p>
+            <a:r>
+              <a:t>El prototipo es el mockup con clic, es decir uno oprime Guardar y la herramienta lo lleva a otra pantalla; responde a la pregunta como se siente usarlo.</a:t>
+            </a:r>
+          </a:p>
+          <a:p/>
+          <a:p>
+            <a:r>
+              <a:t>En la clinica esto se traduce asi: el wireframe de Registrar mascota se hace en diez minutos en Excalidraw y solo dice que arriba va la busqueda del dueño, en el centro los datos de la mascota y abajo el boton Guardar</a:t>
+            </a:r>
+          </a:p>
+          <a:p/>
+          <a:p>
+            <a:r>
+              <a:t>El mockup de esa misma pantalla ya usa el verde de la clinica y una tipografia grande porque la recepcionista tiene el monitor lejos; y el prototipo permite que el docente, en la sustentacion, oprima Guardar y aterrice en la ficha del paciente recien creado.</a:t>
+            </a:r>
+          </a:p>
+          <a:p/>
+          <a:p>
+            <a:r>
+              <a:t>La razon de hacerlo en ese orden es puramente economica: mover una caja en un wireframe cuesta treinta segundos, mover esa misma caja cuando ya esta programada en Programacion II cuesta dos sesiones de trabajo.</a:t>
+            </a:r>
+          </a:p>
+          <a:p/>
+          <a:p>
+            <a:r>
+              <a:t>Diseñar es equivocarse barato.</a:t>
             </a:r>
           </a:p>
         </p:txBody>
@@ -594,7 +632,491 @@
           <a:lstStyle/>
           <a:p>
             <a:r>
+              <a:t>DESARROLLO (para explicarlo, no se proyecta):</a:t>
+            </a:r>
+          </a:p>
+          <a:p/>
+          <a:p>
+            <a:r>
+              <a:t>Los principios de usabilidad no son gusto ni estetica, son reglas observables que se pueden verificar sobre el papel.</a:t>
+            </a:r>
+          </a:p>
+          <a:p/>
+          <a:p>
+            <a:r>
+              <a:t>Visibilidad del estado del sistema significa que la persona siempre sepa que esta pasando: si la recepcionista oprime Guardar y la pantalla no dice nada, ella va a oprimir Guardar otra vez y el sistema va a terminar con la mascota registrada dos veces</a:t>
+            </a:r>
+          </a:p>
+          <a:p/>
+          <a:p>
+            <a:r>
+              <a:t>Por eso el diseño debe incluir el mensaje concreto Ficha guardada, codigo M-0421, y el boton debe quedar deshabilitado mientras se guarda.</a:t>
+            </a:r>
+          </a:p>
+          <a:p/>
+          <a:p>
+            <a:r>
+              <a:t>Prevencion de errores significa que es mejor impedir el error que ponerle un mensaje bonito despues: la fecha de nacimiento se escoge en un calendario y no se teclea</a:t>
+            </a:r>
+          </a:p>
+          <a:p/>
+          <a:p>
+            <a:r>
+              <a:t>La especie se elige de una lista cerrada con Canino, Felino y Otro, y el sistema pide confirmacion antes de eliminar una historia clinica.</a:t>
+            </a:r>
+          </a:p>
+          <a:p/>
+          <a:p>
+            <a:r>
+              <a:t>Consistencia significa que la misma accion se llame igual y viva en el mismo lugar en todas las pantallas: si en Registrar mascota el boton principal se llama Guardar y esta abajo a la derecha</a:t>
+            </a:r>
+          </a:p>
+          <a:p/>
+          <a:p>
+            <a:r>
+              <a:t>En Registrar dueño no puede llamarse Aceptar ni estar arriba a la izquierda.</a:t>
+            </a:r>
+          </a:p>
+          <a:p/>
+          <a:p>
+            <a:r>
+              <a:t>Reconocer antes que recordar significa que la persona escoja de una lista en vez de acordarse de un codigo: la recepcionista no tiene por que memorizar que el codigo de raza mestiza es 07, se lo mostramos.</a:t>
+            </a:r>
+          </a:p>
+          <a:p/>
+          <a:p>
+            <a:r>
+              <a:t>Cada uno de estos cuatro principios se puede auditar sobre un wireframe impreso, sin una sola linea de codigo, y esa auditoria es exactamente lo que se evalua en esta asignatura.</a:t>
+            </a:r>
+          </a:p>
+        </p:txBody>
+      </p:sp>
+      <p:sp>
+        <p:nvSpPr>
+          <p:cNvPr id="4" name="Slide Number Placeholder 3"/>
+          <p:cNvSpPr>
+            <a:spLocks noGrp="1"/>
+          </p:cNvSpPr>
+          <p:nvPr>
+            <p:ph type="sldNum" idx="5" sz="quarter"/>
+          </p:nvPr>
+        </p:nvSpPr>
+        <p:spPr/>
+      </p:sp>
+    </p:spTree>
+  </p:cSld>
+  <p:clrMapOvr>
+    <a:masterClrMapping/>
+  </p:clrMapOvr>
+</p:notes>
+</file>
+
+<file path=ppt/notesSlides/notesSlide3.xml><?xml version="1.0" encoding="utf-8"?>
+<p:notes xmlns:a="http://schemas.openxmlformats.org/drawingml/2006/main" xmlns:p="http://schemas.openxmlformats.org/presentationml/2006/main" xmlns:r="http://schemas.openxmlformats.org/officeDocument/2006/relationships">
+  <p:cSld>
+    <p:spTree>
+      <p:nvGrpSpPr>
+        <p:cNvPr id="1" name=""/>
+        <p:cNvGrpSpPr/>
+        <p:nvPr/>
+      </p:nvGrpSpPr>
+      <p:grpSpPr>
+        <a:xfrm>
+          <a:off x="0" y="0"/>
+          <a:ext cx="0" cy="0"/>
+          <a:chOff x="0" y="0"/>
+          <a:chExt cx="0" cy="0"/>
+        </a:xfrm>
+      </p:grpSpPr>
+      <p:sp>
+        <p:nvSpPr>
+          <p:cNvPr id="2" name="Slide Image Placeholder 1"/>
+          <p:cNvSpPr>
+            <a:spLocks noGrp="1"/>
+          </p:cNvSpPr>
+          <p:nvPr>
+            <p:ph type="sldImg" idx="2"/>
+          </p:nvPr>
+        </p:nvSpPr>
+        <p:spPr/>
+      </p:sp>
+      <p:sp>
+        <p:nvSpPr>
+          <p:cNvPr id="3" name="Notes Placeholder 2"/>
+          <p:cNvSpPr>
+            <a:spLocks noGrp="1"/>
+          </p:cNvSpPr>
+          <p:nvPr>
+            <p:ph type="body" idx="3" sz="quarter"/>
+          </p:nvPr>
+        </p:nvSpPr>
+        <p:spPr/>
+        <p:txBody>
+          <a:bodyPr/>
+          <a:lstStyle/>
+          <a:p>
+            <a:r>
+              <a:t>DESARROLLO (para explicarlo, no se proyecta):</a:t>
+            </a:r>
+          </a:p>
+          <a:p/>
+          <a:p>
+            <a:r>
+              <a:t>Una pantalla suelta no sirve para nada; lo que se diseña es un flujo de tarea completo, es decir el recorrido que hace una persona real desde que tiene una intencion hasta que la cumple.</a:t>
+            </a:r>
+          </a:p>
+          <a:p/>
+          <a:p>
+            <a:r>
+              <a:t>El flujo tiene un camino feliz y tiene caminos alternos, y los caminos alternos son donde se cae el diseño de los principiantes.</a:t>
+            </a:r>
+          </a:p>
+          <a:p/>
+          <a:p>
+            <a:r>
+              <a:t>En la clinica el camino feliz de registrar una mascota es: llega el dueño, la recepcionista lo busca, lo encuentra, registra la mascota y el sistema devuelve el codigo.</a:t>
+            </a:r>
+          </a:p>
+          <a:p/>
+          <a:p>
+            <a:r>
+              <a:t>Pero los caminos alternos son igual de reales: el dueño no esta registrado y hay que crearlo sin perder lo que ya se habia escrito de la mascota</a:t>
+            </a:r>
+          </a:p>
+          <a:p/>
+          <a:p>
+            <a:r>
+              <a:t>La mascota ya existe porque otro turno la registro ayer y hay que avisarlo en vez de duplicarla; el dueño no trae documento y hay que permitir el registro con telefono como identificador temporal.</a:t>
+            </a:r>
+          </a:p>
+          <a:p/>
+          <a:p>
+            <a:r>
+              <a:t>En Buscar expediente pasa lo mismo: el camino feliz es buscar por documento del dueño y encontrar una sola ficha, pero hay que diseñar que ocurre cuando la busqueda por nombre devuelve doce mascotas llamadas Firulais</a:t>
+            </a:r>
+          </a:p>
+          <a:p/>
+          <a:p>
+            <a:r>
+              <a:t>Y ahi la respuesta de diseño es mostrar en la lista de resultados la especie, la edad y el nombre del dueño para poder desambiguar de un vistazo.</a:t>
+            </a:r>
+          </a:p>
+          <a:p/>
+          <a:p>
+            <a:r>
+              <a:t>Un flujo que solo dibuja el camino feliz no es un diseño, es una postal.</a:t>
+            </a:r>
+          </a:p>
+        </p:txBody>
+      </p:sp>
+      <p:sp>
+        <p:nvSpPr>
+          <p:cNvPr id="4" name="Slide Number Placeholder 3"/>
+          <p:cNvSpPr>
+            <a:spLocks noGrp="1"/>
+          </p:cNvSpPr>
+          <p:nvPr>
+            <p:ph type="sldNum" idx="5" sz="quarter"/>
+          </p:nvPr>
+        </p:nvSpPr>
+        <p:spPr/>
+      </p:sp>
+    </p:spTree>
+  </p:cSld>
+  <p:clrMapOvr>
+    <a:masterClrMapping/>
+  </p:clrMapOvr>
+</p:notes>
+</file>
+
+<file path=ppt/notesSlides/notesSlide4.xml><?xml version="1.0" encoding="utf-8"?>
+<p:notes xmlns:a="http://schemas.openxmlformats.org/drawingml/2006/main" xmlns:p="http://schemas.openxmlformats.org/presentationml/2006/main" xmlns:r="http://schemas.openxmlformats.org/officeDocument/2006/relationships">
+  <p:cSld>
+    <p:spTree>
+      <p:nvGrpSpPr>
+        <p:cNvPr id="1" name=""/>
+        <p:cNvGrpSpPr/>
+        <p:nvPr/>
+      </p:nvGrpSpPr>
+      <p:grpSpPr>
+        <a:xfrm>
+          <a:off x="0" y="0"/>
+          <a:ext cx="0" cy="0"/>
+          <a:chOff x="0" y="0"/>
+          <a:chExt cx="0" cy="0"/>
+        </a:xfrm>
+      </p:grpSpPr>
+      <p:sp>
+        <p:nvSpPr>
+          <p:cNvPr id="2" name="Slide Image Placeholder 1"/>
+          <p:cNvSpPr>
+            <a:spLocks noGrp="1"/>
+          </p:cNvSpPr>
+          <p:nvPr>
+            <p:ph type="sldImg" idx="2"/>
+          </p:nvPr>
+        </p:nvSpPr>
+        <p:spPr/>
+      </p:sp>
+      <p:sp>
+        <p:nvSpPr>
+          <p:cNvPr id="3" name="Notes Placeholder 2"/>
+          <p:cNvSpPr>
+            <a:spLocks noGrp="1"/>
+          </p:cNvSpPr>
+          <p:nvPr>
+            <p:ph type="body" idx="3" sz="quarter"/>
+          </p:nvPr>
+        </p:nvSpPr>
+        <p:spPr/>
+        <p:txBody>
+          <a:bodyPr/>
+          <a:lstStyle/>
+          <a:p>
+            <a:r>
+              <a:t>DESARROLLO (para explicarlo, no se proyecta):</a:t>
+            </a:r>
+          </a:p>
+          <a:p/>
+          <a:p>
+            <a:r>
+              <a:t>La interfaz no se inventa: se deriva de los artefactos que el equipo ya construyo en las clases anteriores.</a:t>
+            </a:r>
+          </a:p>
+          <a:p/>
+          <a:p>
+            <a:r>
+              <a:t>Cada pantalla debe poder señalar el requisito funcional que la origina, cada campo debe existir en el diccionario de datos con su tipo y su longitud</a:t>
+            </a:r>
+          </a:p>
+          <a:p/>
+          <a:p>
+            <a:r>
+              <a:t>Y cada boton debe corresponder a una operacion que aparece en el diagrama de casos de uso o en el de secuencia.</a:t>
+            </a:r>
+          </a:p>
+          <a:p/>
+          <a:p>
+            <a:r>
+              <a:t>La trazabilidad no es burocracia, es el mecanismo que hace que los planos y la casa coincidan.</a:t>
+            </a:r>
+          </a:p>
+          <a:p/>
+          <a:p>
+            <a:r>
+              <a:t>NOTAS:</a:t>
+            </a:r>
+          </a:p>
+          <a:p/>
+          <a:p>
+            <a:r>
+              <a:t>Por eso los wireframes se entregan anotados: se ponen numeritos sobre el dibujo y al lado una tabla que dice, por ejemplo, el numero uno es el campo Nombre de la mascota que sale del atributo Mascota.nombre, texto de sesenta caracteres, obligatorio, exigido por RF-03; el numero cuatro es el mensaje de confirmacion que cumple el RNF-02 de respuesta menor a tres segundos.</a:t>
+            </a:r>
+          </a:p>
+          <a:p/>
+          <a:p>
+            <a:r>
+              <a:t>Esa anotacion tiene un efecto secundario muy util: si aparece un campo en la pantalla que no esta en el diccionario de datos, entonces o falta un requisito o sobra el campo, y ambas cosas hay que resolverlas hoy y no cuando el compañero de Programacion II ya escribio la tabla.</a:t>
+            </a:r>
+          </a:p>
+        </p:txBody>
+      </p:sp>
+      <p:sp>
+        <p:nvSpPr>
+          <p:cNvPr id="4" name="Slide Number Placeholder 3"/>
+          <p:cNvSpPr>
+            <a:spLocks noGrp="1"/>
+          </p:cNvSpPr>
+          <p:nvPr>
+            <p:ph type="sldNum" idx="5" sz="quarter"/>
+          </p:nvPr>
+        </p:nvSpPr>
+        <p:spPr/>
+      </p:sp>
+    </p:spTree>
+  </p:cSld>
+  <p:clrMapOvr>
+    <a:masterClrMapping/>
+  </p:clrMapOvr>
+</p:notes>
+</file>
+
+<file path=ppt/notesSlides/notesSlide5.xml><?xml version="1.0" encoding="utf-8"?>
+<p:notes xmlns:a="http://schemas.openxmlformats.org/drawingml/2006/main" xmlns:p="http://schemas.openxmlformats.org/presentationml/2006/main" xmlns:r="http://schemas.openxmlformats.org/officeDocument/2006/relationships">
+  <p:cSld>
+    <p:spTree>
+      <p:nvGrpSpPr>
+        <p:cNvPr id="1" name=""/>
+        <p:cNvGrpSpPr/>
+        <p:nvPr/>
+      </p:nvGrpSpPr>
+      <p:grpSpPr>
+        <a:xfrm>
+          <a:off x="0" y="0"/>
+          <a:ext cx="0" cy="0"/>
+          <a:chOff x="0" y="0"/>
+          <a:chExt cx="0" cy="0"/>
+        </a:xfrm>
+      </p:grpSpPr>
+      <p:sp>
+        <p:nvSpPr>
+          <p:cNvPr id="2" name="Slide Image Placeholder 1"/>
+          <p:cNvSpPr>
+            <a:spLocks noGrp="1"/>
+          </p:cNvSpPr>
+          <p:nvPr>
+            <p:ph type="sldImg" idx="2"/>
+          </p:nvPr>
+        </p:nvSpPr>
+        <p:spPr/>
+      </p:sp>
+      <p:sp>
+        <p:nvSpPr>
+          <p:cNvPr id="3" name="Notes Placeholder 2"/>
+          <p:cNvSpPr>
+            <a:spLocks noGrp="1"/>
+          </p:cNvSpPr>
+          <p:nvPr>
+            <p:ph type="body" idx="3" sz="quarter"/>
+          </p:nvPr>
+        </p:nvSpPr>
+        <p:spPr/>
+        <p:txBody>
+          <a:bodyPr/>
+          <a:lstStyle/>
+          <a:p>
+            <a:r>
+              <a:t>DESARROLLO (para explicarlo, no se proyecta):</a:t>
+            </a:r>
+          </a:p>
+          <a:p/>
+          <a:p>
+            <a:r>
+              <a:t>Una interfaz se puede evaluar sin programarla, y esa es una de las habilidades mas valiosas que se lleva un analista.</a:t>
+            </a:r>
+          </a:p>
+          <a:p/>
+          <a:p>
+            <a:r>
+              <a:t>El metodo mas barato es el recorrido cognitivo: se toma una tarea concreta, por ejemplo registrar la mascota Luna de la señora Perez</a:t>
+            </a:r>
+          </a:p>
+          <a:p/>
+          <a:p>
+            <a:r>
+              <a:t>Y una persona que no participo en el diseño intenta hacerla sobre el prototipo sin que nadie le explique nada, mientras usted cuenta cuantos clics necesito, donde dudo y donde se equivoco.</a:t>
+            </a:r>
+          </a:p>
+          <a:p/>
+          <a:p>
+            <a:r>
+              <a:t>La variante de bolsillo es la prueba de pasillo: se le pide a tres compañeros de otro grupo que lo intenten y se anota, sin defenderse ni explicar.</a:t>
+            </a:r>
+          </a:p>
+          <a:p/>
+          <a:p>
+            <a:r>
+              <a:t>Para la clinica hay que evaluar pensando en la usuaria real, que es la recepcionista de la clinica: no es experta en computadores, escribe lento, contesta el telefono mientras registra y tiene un perro ladrando al lado.</a:t>
+            </a:r>
+          </a:p>
+          <a:p/>
+          <a:p>
+            <a:r>
+              <a:t>NOTAS:</a:t>
+            </a:r>
+          </a:p>
+          <a:p/>
+          <a:p>
+            <a:r>
               <a:t>Eso obliga a decisiones de diseño concretas: letra grande, pocos campos obligatorios, nada de scroll interminable, tolerancia a la interrupcion para que si la llaman y vuelve en tres minutos no haya perdido lo escrito, y mensajes en lenguaje de clinica y no de sistemas, es decir Esta mascota ya tiene ficha en la clinica y no Violacion de restriccion de unicidad.</a:t>
+            </a:r>
+          </a:p>
+        </p:txBody>
+      </p:sp>
+      <p:sp>
+        <p:nvSpPr>
+          <p:cNvPr id="4" name="Slide Number Placeholder 3"/>
+          <p:cNvSpPr>
+            <a:spLocks noGrp="1"/>
+          </p:cNvSpPr>
+          <p:nvPr>
+            <p:ph type="sldNum" idx="5" sz="quarter"/>
+          </p:nvPr>
+        </p:nvSpPr>
+        <p:spPr/>
+      </p:sp>
+    </p:spTree>
+  </p:cSld>
+  <p:clrMapOvr>
+    <a:masterClrMapping/>
+  </p:clrMapOvr>
+</p:notes>
+</file>
+
+<file path=ppt/notesSlides/notesSlide6.xml><?xml version="1.0" encoding="utf-8"?>
+<p:notes xmlns:a="http://schemas.openxmlformats.org/drawingml/2006/main" xmlns:p="http://schemas.openxmlformats.org/presentationml/2006/main" xmlns:r="http://schemas.openxmlformats.org/officeDocument/2006/relationships">
+  <p:cSld>
+    <p:spTree>
+      <p:nvGrpSpPr>
+        <p:cNvPr id="1" name=""/>
+        <p:cNvGrpSpPr/>
+        <p:nvPr/>
+      </p:nvGrpSpPr>
+      <p:grpSpPr>
+        <a:xfrm>
+          <a:off x="0" y="0"/>
+          <a:ext cx="0" cy="0"/>
+          <a:chOff x="0" y="0"/>
+          <a:chExt cx="0" cy="0"/>
+        </a:xfrm>
+      </p:grpSpPr>
+      <p:sp>
+        <p:nvSpPr>
+          <p:cNvPr id="2" name="Slide Image Placeholder 1"/>
+          <p:cNvSpPr>
+            <a:spLocks noGrp="1"/>
+          </p:cNvSpPr>
+          <p:nvPr>
+            <p:ph type="sldImg" idx="2"/>
+          </p:nvPr>
+        </p:nvSpPr>
+        <p:spPr/>
+      </p:sp>
+      <p:sp>
+        <p:nvSpPr>
+          <p:cNvPr id="3" name="Notes Placeholder 2"/>
+          <p:cNvSpPr>
+            <a:spLocks noGrp="1"/>
+          </p:cNvSpPr>
+          <p:nvPr>
+            <p:ph type="body" idx="3" sz="quarter"/>
+          </p:nvPr>
+        </p:nvSpPr>
+        <p:spPr/>
+        <p:txBody>
+          <a:bodyPr/>
+          <a:lstStyle/>
+          <a:p>
+            <a:r>
+              <a:t>TEXTO COMPLETO DE LA LÁMINA (se proyecta resumido):</a:t>
+            </a:r>
+          </a:p>
+          <a:p/>
+          <a:p>
+            <a:r>
+              <a:t>Herramienta: Figma o Penpot · Excalidraw · Google Docs</a:t>
+            </a:r>
+          </a:p>
+          <a:p/>
+          <a:p>
+            <a:r>
+              <a:t>Demo: Se dibuja en vivo el wireframe de Registrar mascota en Penpot, le pone tres anotaciones numeradas y lo conecta con Buscar expediente para que la clase vea en la misma pantalla la diferencia entre wireframe, mockup y prototipo.</a:t>
+            </a:r>
+          </a:p>
+          <a:p/>
+          <a:p>
+            <a:r>
+              <a:t>Mismo dominio: la clinica veterinaria — no otro ejemplo. Aqui se diseña, no se programa.</a:t>
             </a:r>
           </a:p>
         </p:txBody>
@@ -4118,21 +4640,238 @@
                 </a:solidFill>
                 <a:latin typeface="Calibri"/>
               </a:rPr>
-              <a:t>La interfaz no se inventa: se deriva de los artefactos que el equipo ya...</a:t>
-            </a:r>
-          </a:p>
-        </p:txBody>
-      </p:sp>
-      <p:sp>
-        <p:nvSpPr>
-          <p:cNvPr id="5" name="TextBox 4"/>
+              <a:t>La tabla de anotaciones del wireframe</a:t>
+            </a:r>
+          </a:p>
+        </p:txBody>
+      </p:sp>
+      <p:sp>
+        <p:nvSpPr>
+          <p:cNvPr id="5" name="Rounded Rectangle 4"/>
+          <p:cNvSpPr/>
+          <p:nvPr/>
+        </p:nvSpPr>
+        <p:spPr>
+          <a:xfrm>
+            <a:off x="457200" y="1261872"/>
+            <a:ext cx="11277295" cy="4530784"/>
+          </a:xfrm>
+          <a:prstGeom prst="roundRect">
+            <a:avLst>
+              <a:gd name="adj" fmla="val 4000"/>
+            </a:avLst>
+          </a:prstGeom>
+          <a:solidFill>
+            <a:srgbClr val="1E1E1E"/>
+          </a:solidFill>
+          <a:ln>
+            <a:noFill/>
+          </a:ln>
+        </p:spPr>
+        <p:style>
+          <a:lnRef idx="1">
+            <a:schemeClr val="accent1"/>
+          </a:lnRef>
+          <a:fillRef idx="3">
+            <a:schemeClr val="accent1"/>
+          </a:fillRef>
+          <a:effectRef idx="2">
+            <a:schemeClr val="accent1"/>
+          </a:effectRef>
+          <a:fontRef idx="minor">
+            <a:schemeClr val="lt1"/>
+          </a:fontRef>
+        </p:style>
+        <p:txBody>
+          <a:bodyPr rtlCol="0" anchor="ctr"/>
+          <a:lstStyle/>
+          <a:p>
+            <a:pPr algn="ctr"/>
+          </a:p>
+        </p:txBody>
+      </p:sp>
+      <p:sp>
+        <p:nvSpPr>
+          <p:cNvPr id="6" name="Rectangle 5"/>
+          <p:cNvSpPr/>
+          <p:nvPr/>
+        </p:nvSpPr>
+        <p:spPr>
+          <a:xfrm>
+            <a:off x="457200" y="1261872"/>
+            <a:ext cx="11277295" cy="365760"/>
+          </a:xfrm>
+          <a:prstGeom prst="rect">
+            <a:avLst/>
+          </a:prstGeom>
+          <a:solidFill>
+            <a:srgbClr val="2D2D30"/>
+          </a:solidFill>
+          <a:ln>
+            <a:noFill/>
+          </a:ln>
+        </p:spPr>
+        <p:style>
+          <a:lnRef idx="1">
+            <a:schemeClr val="accent1"/>
+          </a:lnRef>
+          <a:fillRef idx="3">
+            <a:schemeClr val="accent1"/>
+          </a:fillRef>
+          <a:effectRef idx="2">
+            <a:schemeClr val="accent1"/>
+          </a:effectRef>
+          <a:fontRef idx="minor">
+            <a:schemeClr val="lt1"/>
+          </a:fontRef>
+        </p:style>
+        <p:txBody>
+          <a:bodyPr rtlCol="0" anchor="ctr"/>
+          <a:lstStyle/>
+          <a:p>
+            <a:pPr algn="ctr"/>
+          </a:p>
+        </p:txBody>
+      </p:sp>
+      <p:sp>
+        <p:nvSpPr>
+          <p:cNvPr id="7" name="Oval 6"/>
+          <p:cNvSpPr/>
+          <p:nvPr/>
+        </p:nvSpPr>
+        <p:spPr>
+          <a:xfrm>
+            <a:off x="658368" y="1380743"/>
+            <a:ext cx="128016" cy="128016"/>
+          </a:xfrm>
+          <a:prstGeom prst="ellipse">
+            <a:avLst/>
+          </a:prstGeom>
+          <a:solidFill>
+            <a:srgbClr val="FF5F56"/>
+          </a:solidFill>
+          <a:ln>
+            <a:noFill/>
+          </a:ln>
+        </p:spPr>
+        <p:style>
+          <a:lnRef idx="1">
+            <a:schemeClr val="accent1"/>
+          </a:lnRef>
+          <a:fillRef idx="3">
+            <a:schemeClr val="accent1"/>
+          </a:fillRef>
+          <a:effectRef idx="2">
+            <a:schemeClr val="accent1"/>
+          </a:effectRef>
+          <a:fontRef idx="minor">
+            <a:schemeClr val="lt1"/>
+          </a:fontRef>
+        </p:style>
+        <p:txBody>
+          <a:bodyPr rtlCol="0" anchor="ctr"/>
+          <a:lstStyle/>
+          <a:p>
+            <a:pPr algn="ctr"/>
+          </a:p>
+        </p:txBody>
+      </p:sp>
+      <p:sp>
+        <p:nvSpPr>
+          <p:cNvPr id="8" name="Oval 7"/>
+          <p:cNvSpPr/>
+          <p:nvPr/>
+        </p:nvSpPr>
+        <p:spPr>
+          <a:xfrm>
+            <a:off x="877824" y="1380743"/>
+            <a:ext cx="128016" cy="128016"/>
+          </a:xfrm>
+          <a:prstGeom prst="ellipse">
+            <a:avLst/>
+          </a:prstGeom>
+          <a:solidFill>
+            <a:srgbClr val="FFBD2E"/>
+          </a:solidFill>
+          <a:ln>
+            <a:noFill/>
+          </a:ln>
+        </p:spPr>
+        <p:style>
+          <a:lnRef idx="1">
+            <a:schemeClr val="accent1"/>
+          </a:lnRef>
+          <a:fillRef idx="3">
+            <a:schemeClr val="accent1"/>
+          </a:fillRef>
+          <a:effectRef idx="2">
+            <a:schemeClr val="accent1"/>
+          </a:effectRef>
+          <a:fontRef idx="minor">
+            <a:schemeClr val="lt1"/>
+          </a:fontRef>
+        </p:style>
+        <p:txBody>
+          <a:bodyPr rtlCol="0" anchor="ctr"/>
+          <a:lstStyle/>
+          <a:p>
+            <a:pPr algn="ctr"/>
+          </a:p>
+        </p:txBody>
+      </p:sp>
+      <p:sp>
+        <p:nvSpPr>
+          <p:cNvPr id="9" name="Oval 8"/>
+          <p:cNvSpPr/>
+          <p:nvPr/>
+        </p:nvSpPr>
+        <p:spPr>
+          <a:xfrm>
+            <a:off x="1097280" y="1380743"/>
+            <a:ext cx="128016" cy="128016"/>
+          </a:xfrm>
+          <a:prstGeom prst="ellipse">
+            <a:avLst/>
+          </a:prstGeom>
+          <a:solidFill>
+            <a:srgbClr val="27C93F"/>
+          </a:solidFill>
+          <a:ln>
+            <a:noFill/>
+          </a:ln>
+        </p:spPr>
+        <p:style>
+          <a:lnRef idx="1">
+            <a:schemeClr val="accent1"/>
+          </a:lnRef>
+          <a:fillRef idx="3">
+            <a:schemeClr val="accent1"/>
+          </a:fillRef>
+          <a:effectRef idx="2">
+            <a:schemeClr val="accent1"/>
+          </a:effectRef>
+          <a:fontRef idx="minor">
+            <a:schemeClr val="lt1"/>
+          </a:fontRef>
+        </p:style>
+        <p:txBody>
+          <a:bodyPr rtlCol="0" anchor="ctr"/>
+          <a:lstStyle/>
+          <a:p>
+            <a:pPr algn="ctr"/>
+          </a:p>
+        </p:txBody>
+      </p:sp>
+      <p:sp>
+        <p:nvSpPr>
+          <p:cNvPr id="10" name="TextBox 9"/>
           <p:cNvSpPr txBox="1"/>
           <p:nvPr/>
         </p:nvSpPr>
         <p:spPr>
           <a:xfrm>
-            <a:off x="457200" y="1170432"/>
-            <a:ext cx="11277295" cy="5230368"/>
+            <a:off x="1371600" y="1298448"/>
+            <a:ext cx="10180015" cy="292608"/>
           </a:xfrm>
           <a:prstGeom prst="rect">
             <a:avLst/>
@@ -4140,6 +4879,39 @@
           <a:noFill/>
         </p:spPr>
         <p:txBody>
+          <a:bodyPr wrap="square" anchor="ctr"/>
+          <a:lstStyle/>
+          <a:p>
+            <a:pPr algn="r"/>
+            <a:r>
+              <a:rPr sz="1100" b="1" i="0">
+                <a:solidFill>
+                  <a:srgbClr val="BBBBBB"/>
+                </a:solidFill>
+                <a:latin typeface="Calibri"/>
+              </a:rPr>
+              <a:t>Tabla Markdown</a:t>
+            </a:r>
+          </a:p>
+        </p:txBody>
+      </p:sp>
+      <p:sp>
+        <p:nvSpPr>
+          <p:cNvPr id="11" name="TextBox 10"/>
+          <p:cNvSpPr txBox="1"/>
+          <p:nvPr/>
+        </p:nvSpPr>
+        <p:spPr>
+          <a:xfrm>
+            <a:off x="1188720" y="1719072"/>
+            <a:ext cx="10271455" cy="3936424"/>
+          </a:xfrm>
+          <a:prstGeom prst="rect">
+            <a:avLst/>
+          </a:prstGeom>
+          <a:noFill/>
+        </p:spPr>
+        <p:txBody>
           <a:bodyPr wrap="square">
             <a:spAutoFit/>
           </a:bodyPr>
@@ -4147,72 +4919,933 @@
           <a:p>
             <a:pPr>
               <a:spcAft>
-                <a:spcPts val="800"/>
+                <a:spcPts val="428"/>
               </a:spcAft>
             </a:pPr>
             <a:r>
-              <a:rPr sz="2000" b="0" i="0">
-                <a:solidFill>
-                  <a:srgbClr val="333333"/>
-                </a:solidFill>
-                <a:latin typeface="Calibri"/>
-              </a:rPr>
-              <a:t>–   La interfaz no se inventa: se deriva de los artefactos que el equipo ya construyo en las clases anteriores.</a:t>
+              <a:rPr sz="2000" i="0" b="0">
+                <a:solidFill>
+                  <a:srgbClr val="D4D4D4"/>
+                </a:solidFill>
+                <a:latin typeface="Consolas"/>
+              </a:rPr>
+              <a:t>| </a:t>
+            </a:r>
+            <a:r>
+              <a:rPr sz="2000" i="0" b="0">
+                <a:solidFill>
+                  <a:srgbClr val="D4D4D4"/>
+                </a:solidFill>
+                <a:latin typeface="Consolas"/>
+              </a:rPr>
+              <a:t>Campo</a:t>
+            </a:r>
+            <a:r>
+              <a:rPr sz="2000" i="0" b="0">
+                <a:solidFill>
+                  <a:srgbClr val="D4D4D4"/>
+                </a:solidFill>
+                <a:latin typeface="Consolas"/>
+              </a:rPr>
+              <a:t> </a:t>
+            </a:r>
+            <a:r>
+              <a:rPr sz="2000" i="0" b="0">
+                <a:solidFill>
+                  <a:srgbClr val="D4D4D4"/>
+                </a:solidFill>
+                <a:latin typeface="Consolas"/>
+              </a:rPr>
+              <a:t>de</a:t>
+            </a:r>
+            <a:r>
+              <a:rPr sz="2000" i="0" b="0">
+                <a:solidFill>
+                  <a:srgbClr val="D4D4D4"/>
+                </a:solidFill>
+                <a:latin typeface="Consolas"/>
+              </a:rPr>
+              <a:t> </a:t>
+            </a:r>
+            <a:r>
+              <a:rPr sz="2000" i="0" b="0">
+                <a:solidFill>
+                  <a:srgbClr val="D4D4D4"/>
+                </a:solidFill>
+                <a:latin typeface="Consolas"/>
+              </a:rPr>
+              <a:t>la</a:t>
+            </a:r>
+            <a:r>
+              <a:rPr sz="2000" i="0" b="0">
+                <a:solidFill>
+                  <a:srgbClr val="D4D4D4"/>
+                </a:solidFill>
+                <a:latin typeface="Consolas"/>
+              </a:rPr>
+              <a:t> </a:t>
+            </a:r>
+            <a:r>
+              <a:rPr sz="2000" i="0" b="0">
+                <a:solidFill>
+                  <a:srgbClr val="D4D4D4"/>
+                </a:solidFill>
+                <a:latin typeface="Consolas"/>
+              </a:rPr>
+              <a:t>pantalla</a:t>
+            </a:r>
+            <a:r>
+              <a:rPr sz="2000" i="0" b="0">
+                <a:solidFill>
+                  <a:srgbClr val="D4D4D4"/>
+                </a:solidFill>
+                <a:latin typeface="Consolas"/>
+              </a:rPr>
+              <a:t> | </a:t>
+            </a:r>
+            <a:r>
+              <a:rPr sz="2000" i="0" b="0">
+                <a:solidFill>
+                  <a:srgbClr val="D4D4D4"/>
+                </a:solidFill>
+                <a:latin typeface="Consolas"/>
+              </a:rPr>
+              <a:t>RF</a:t>
+            </a:r>
+            <a:r>
+              <a:rPr sz="2000" i="0" b="0">
+                <a:solidFill>
+                  <a:srgbClr val="D4D4D4"/>
+                </a:solidFill>
+                <a:latin typeface="Consolas"/>
+              </a:rPr>
+              <a:t> </a:t>
+            </a:r>
+            <a:r>
+              <a:rPr sz="2000" i="0" b="0">
+                <a:solidFill>
+                  <a:srgbClr val="D4D4D4"/>
+                </a:solidFill>
+                <a:latin typeface="Consolas"/>
+              </a:rPr>
+              <a:t>que</a:t>
+            </a:r>
+            <a:r>
+              <a:rPr sz="2000" i="0" b="0">
+                <a:solidFill>
+                  <a:srgbClr val="D4D4D4"/>
+                </a:solidFill>
+                <a:latin typeface="Consolas"/>
+              </a:rPr>
+              <a:t> </a:t>
+            </a:r>
+            <a:r>
+              <a:rPr sz="2000" i="0" b="0">
+                <a:solidFill>
+                  <a:srgbClr val="D4D4D4"/>
+                </a:solidFill>
+                <a:latin typeface="Consolas"/>
+              </a:rPr>
+              <a:t>lo</a:t>
+            </a:r>
+            <a:r>
+              <a:rPr sz="2000" i="0" b="0">
+                <a:solidFill>
+                  <a:srgbClr val="D4D4D4"/>
+                </a:solidFill>
+                <a:latin typeface="Consolas"/>
+              </a:rPr>
+              <a:t> </a:t>
+            </a:r>
+            <a:r>
+              <a:rPr sz="2000" i="0" b="0">
+                <a:solidFill>
+                  <a:srgbClr val="D4D4D4"/>
+                </a:solidFill>
+                <a:latin typeface="Consolas"/>
+              </a:rPr>
+              <a:t>exige</a:t>
+            </a:r>
+            <a:r>
+              <a:rPr sz="2000" i="0" b="0">
+                <a:solidFill>
+                  <a:srgbClr val="D4D4D4"/>
+                </a:solidFill>
+                <a:latin typeface="Consolas"/>
+              </a:rPr>
+              <a:t> | </a:t>
+            </a:r>
+            <a:r>
+              <a:rPr sz="2000" i="0" b="0">
+                <a:solidFill>
+                  <a:srgbClr val="D4D4D4"/>
+                </a:solidFill>
+                <a:latin typeface="Consolas"/>
+              </a:rPr>
+              <a:t>Atributo</a:t>
+            </a:r>
+            <a:r>
+              <a:rPr sz="2000" i="0" b="0">
+                <a:solidFill>
+                  <a:srgbClr val="D4D4D4"/>
+                </a:solidFill>
+                <a:latin typeface="Consolas"/>
+              </a:rPr>
+              <a:t> </a:t>
+            </a:r>
+            <a:r>
+              <a:rPr sz="2000" i="0" b="0">
+                <a:solidFill>
+                  <a:srgbClr val="D4D4D4"/>
+                </a:solidFill>
+                <a:latin typeface="Consolas"/>
+              </a:rPr>
+              <a:t>de</a:t>
+            </a:r>
+            <a:r>
+              <a:rPr sz="2000" i="0" b="0">
+                <a:solidFill>
+                  <a:srgbClr val="D4D4D4"/>
+                </a:solidFill>
+                <a:latin typeface="Consolas"/>
+              </a:rPr>
+              <a:t> </a:t>
+            </a:r>
+            <a:r>
+              <a:rPr sz="2000" i="0" b="0">
+                <a:solidFill>
+                  <a:srgbClr val="D4D4D4"/>
+                </a:solidFill>
+                <a:latin typeface="Consolas"/>
+              </a:rPr>
+              <a:t>la</a:t>
+            </a:r>
+            <a:r>
+              <a:rPr sz="2000" i="0" b="0">
+                <a:solidFill>
+                  <a:srgbClr val="D4D4D4"/>
+                </a:solidFill>
+                <a:latin typeface="Consolas"/>
+              </a:rPr>
+              <a:t> </a:t>
+            </a:r>
+            <a:r>
+              <a:rPr sz="2000" i="0" b="0">
+                <a:solidFill>
+                  <a:srgbClr val="D4D4D4"/>
+                </a:solidFill>
+                <a:latin typeface="Consolas"/>
+              </a:rPr>
+              <a:t>clase</a:t>
+            </a:r>
+            <a:r>
+              <a:rPr sz="2000" i="0" b="0">
+                <a:solidFill>
+                  <a:srgbClr val="D4D4D4"/>
+                </a:solidFill>
+                <a:latin typeface="Consolas"/>
+              </a:rPr>
+              <a:t>  | </a:t>
+            </a:r>
+            <a:r>
+              <a:rPr sz="2000" i="0" b="0">
+                <a:solidFill>
+                  <a:srgbClr val="D4D4D4"/>
+                </a:solidFill>
+                <a:latin typeface="Consolas"/>
+              </a:rPr>
+              <a:t>Validacion</a:t>
+            </a:r>
+            <a:r>
+              <a:rPr sz="2000" i="0" b="0">
+                <a:solidFill>
+                  <a:srgbClr val="D4D4D4"/>
+                </a:solidFill>
+                <a:latin typeface="Consolas"/>
+              </a:rPr>
+              <a:t>        |</a:t>
             </a:r>
           </a:p>
           <a:p>
             <a:pPr>
               <a:spcAft>
-                <a:spcPts val="800"/>
+                <a:spcPts val="428"/>
               </a:spcAft>
             </a:pPr>
             <a:r>
-              <a:rPr sz="2000" b="0" i="0">
-                <a:solidFill>
-                  <a:srgbClr val="333333"/>
-                </a:solidFill>
-                <a:latin typeface="Calibri"/>
-              </a:rPr>
-              <a:t>–   Cada pantalla debe poder señalar el requisito funcional que la origina, cada campo debe existir en el diccionario de datos con su tipo y su longitud</a:t>
+              <a:rPr sz="2000" i="0" b="0">
+                <a:solidFill>
+                  <a:srgbClr val="D4D4D4"/>
+                </a:solidFill>
+                <a:latin typeface="Consolas"/>
+              </a:rPr>
+              <a:t>|--------------------</a:t>
+            </a:r>
+            <a:r>
+              <a:rPr sz="2000" i="0" b="0">
+                <a:solidFill>
+                  <a:srgbClr val="D4D4D4"/>
+                </a:solidFill>
+                <a:latin typeface="Consolas"/>
+              </a:rPr>
+              <a:t>--|-----------------|-----------------------|-------------------|</a:t>
             </a:r>
           </a:p>
           <a:p>
             <a:pPr>
               <a:spcAft>
-                <a:spcPts val="800"/>
+                <a:spcPts val="428"/>
               </a:spcAft>
             </a:pPr>
             <a:r>
-              <a:rPr sz="2000" b="0" i="0">
-                <a:solidFill>
-                  <a:srgbClr val="333333"/>
-                </a:solidFill>
-                <a:latin typeface="Calibri"/>
-              </a:rPr>
-              <a:t>–   Y cada boton debe corresponder a una operacion que aparece en el diagrama de casos de uso o en el de secuencia.</a:t>
+              <a:rPr sz="2000" i="0" b="0">
+                <a:solidFill>
+                  <a:srgbClr val="D4D4D4"/>
+                </a:solidFill>
+                <a:latin typeface="Consolas"/>
+              </a:rPr>
+              <a:t>| </a:t>
+            </a:r>
+            <a:r>
+              <a:rPr sz="2000" i="0" b="0">
+                <a:solidFill>
+                  <a:srgbClr val="D4D4D4"/>
+                </a:solidFill>
+                <a:latin typeface="Consolas"/>
+              </a:rPr>
+              <a:t>Nombre</a:t>
+            </a:r>
+            <a:r>
+              <a:rPr sz="2000" i="0" b="0">
+                <a:solidFill>
+                  <a:srgbClr val="D4D4D4"/>
+                </a:solidFill>
+                <a:latin typeface="Consolas"/>
+              </a:rPr>
+              <a:t>               | </a:t>
+            </a:r>
+            <a:r>
+              <a:rPr sz="2000" i="0" b="0">
+                <a:solidFill>
+                  <a:srgbClr val="D4D4D4"/>
+                </a:solidFill>
+                <a:latin typeface="Consolas"/>
+              </a:rPr>
+              <a:t>RF</a:t>
+            </a:r>
+            <a:r>
+              <a:rPr sz="2000" i="0" b="0">
+                <a:solidFill>
+                  <a:srgbClr val="D4D4D4"/>
+                </a:solidFill>
+                <a:latin typeface="Consolas"/>
+              </a:rPr>
+              <a:t>-</a:t>
+            </a:r>
+            <a:r>
+              <a:rPr sz="2000" i="0" b="0">
+                <a:solidFill>
+                  <a:srgbClr val="B5CEA8"/>
+                </a:solidFill>
+                <a:latin typeface="Consolas"/>
+              </a:rPr>
+              <a:t>01</a:t>
+            </a:r>
+            <a:r>
+              <a:rPr sz="2000" i="0" b="0">
+                <a:solidFill>
+                  <a:srgbClr val="D4D4D4"/>
+                </a:solidFill>
+                <a:latin typeface="Consolas"/>
+              </a:rPr>
+              <a:t>           | </a:t>
+            </a:r>
+            <a:r>
+              <a:rPr sz="2000" i="0" b="0">
+                <a:solidFill>
+                  <a:srgbClr val="D4D4D4"/>
+                </a:solidFill>
+                <a:latin typeface="Consolas"/>
+              </a:rPr>
+              <a:t>Mascota</a:t>
+            </a:r>
+            <a:r>
+              <a:rPr sz="2000" i="0" b="0">
+                <a:solidFill>
+                  <a:srgbClr val="D4D4D4"/>
+                </a:solidFill>
+                <a:latin typeface="Consolas"/>
+              </a:rPr>
+              <a:t>.</a:t>
+            </a:r>
+            <a:r>
+              <a:rPr sz="2000" i="0" b="0">
+                <a:solidFill>
+                  <a:srgbClr val="D4D4D4"/>
+                </a:solidFill>
+                <a:latin typeface="Consolas"/>
+              </a:rPr>
+              <a:t>nombre</a:t>
+            </a:r>
+            <a:r>
+              <a:rPr sz="2000" i="0" b="0">
+                <a:solidFill>
+                  <a:srgbClr val="D4D4D4"/>
+                </a:solidFill>
+                <a:latin typeface="Consolas"/>
+              </a:rPr>
+              <a:t>        | </a:t>
+            </a:r>
+            <a:r>
+              <a:rPr sz="2000" i="0" b="0">
+                <a:solidFill>
+                  <a:srgbClr val="D4D4D4"/>
+                </a:solidFill>
+                <a:latin typeface="Consolas"/>
+              </a:rPr>
+              <a:t>obligatorio</a:t>
+            </a:r>
+            <a:r>
+              <a:rPr sz="2000" i="0" b="0">
+                <a:solidFill>
+                  <a:srgbClr val="D4D4D4"/>
+                </a:solidFill>
+                <a:latin typeface="Consolas"/>
+              </a:rPr>
+              <a:t>       |</a:t>
             </a:r>
           </a:p>
           <a:p>
             <a:pPr>
               <a:spcAft>
-                <a:spcPts val="800"/>
+                <a:spcPts val="428"/>
               </a:spcAft>
             </a:pPr>
             <a:r>
-              <a:rPr sz="2000" b="0" i="0">
-                <a:solidFill>
-                  <a:srgbClr val="333333"/>
-                </a:solidFill>
-                <a:latin typeface="Calibri"/>
-              </a:rPr>
-              <a:t>–   La trazabilidad no es burocracia, es el mecanismo que hace que los planos y la casa coincidan.</a:t>
-            </a:r>
-          </a:p>
-        </p:txBody>
-      </p:sp>
-      <p:sp>
-        <p:nvSpPr>
-          <p:cNvPr id="6" name="TextBox 5"/>
+              <a:rPr sz="2000" i="0" b="0">
+                <a:solidFill>
+                  <a:srgbClr val="D4D4D4"/>
+                </a:solidFill>
+                <a:latin typeface="Consolas"/>
+              </a:rPr>
+              <a:t>| </a:t>
+            </a:r>
+            <a:r>
+              <a:rPr sz="2000" i="0" b="0">
+                <a:solidFill>
+                  <a:srgbClr val="D4D4D4"/>
+                </a:solidFill>
+                <a:latin typeface="Consolas"/>
+              </a:rPr>
+              <a:t>Especie</a:t>
+            </a:r>
+            <a:r>
+              <a:rPr sz="2000" i="0" b="0">
+                <a:solidFill>
+                  <a:srgbClr val="D4D4D4"/>
+                </a:solidFill>
+                <a:latin typeface="Consolas"/>
+              </a:rPr>
+              <a:t>              | </a:t>
+            </a:r>
+            <a:r>
+              <a:rPr sz="2000" i="0" b="0">
+                <a:solidFill>
+                  <a:srgbClr val="D4D4D4"/>
+                </a:solidFill>
+                <a:latin typeface="Consolas"/>
+              </a:rPr>
+              <a:t>RF</a:t>
+            </a:r>
+            <a:r>
+              <a:rPr sz="2000" i="0" b="0">
+                <a:solidFill>
+                  <a:srgbClr val="D4D4D4"/>
+                </a:solidFill>
+                <a:latin typeface="Consolas"/>
+              </a:rPr>
+              <a:t>-</a:t>
+            </a:r>
+            <a:r>
+              <a:rPr sz="2000" i="0" b="0">
+                <a:solidFill>
+                  <a:srgbClr val="B5CEA8"/>
+                </a:solidFill>
+                <a:latin typeface="Consolas"/>
+              </a:rPr>
+              <a:t>01</a:t>
+            </a:r>
+            <a:r>
+              <a:rPr sz="2000" i="0" b="0">
+                <a:solidFill>
+                  <a:srgbClr val="D4D4D4"/>
+                </a:solidFill>
+                <a:latin typeface="Consolas"/>
+              </a:rPr>
+              <a:t>           | </a:t>
+            </a:r>
+            <a:r>
+              <a:rPr sz="2000" i="0" b="0">
+                <a:solidFill>
+                  <a:srgbClr val="D4D4D4"/>
+                </a:solidFill>
+                <a:latin typeface="Consolas"/>
+              </a:rPr>
+              <a:t>Mascota</a:t>
+            </a:r>
+            <a:r>
+              <a:rPr sz="2000" i="0" b="0">
+                <a:solidFill>
+                  <a:srgbClr val="D4D4D4"/>
+                </a:solidFill>
+                <a:latin typeface="Consolas"/>
+              </a:rPr>
+              <a:t>.</a:t>
+            </a:r>
+            <a:r>
+              <a:rPr sz="2000" i="0" b="0">
+                <a:solidFill>
+                  <a:srgbClr val="D4D4D4"/>
+                </a:solidFill>
+                <a:latin typeface="Consolas"/>
+              </a:rPr>
+              <a:t>especie</a:t>
+            </a:r>
+            <a:r>
+              <a:rPr sz="2000" i="0" b="0">
+                <a:solidFill>
+                  <a:srgbClr val="D4D4D4"/>
+                </a:solidFill>
+                <a:latin typeface="Consolas"/>
+              </a:rPr>
+              <a:t>       | </a:t>
+            </a:r>
+            <a:r>
+              <a:rPr sz="2000" i="0" b="0">
+                <a:solidFill>
+                  <a:srgbClr val="D4D4D4"/>
+                </a:solidFill>
+                <a:latin typeface="Consolas"/>
+              </a:rPr>
+              <a:t>lista</a:t>
+            </a:r>
+            <a:r>
+              <a:rPr sz="2000" i="0" b="0">
+                <a:solidFill>
+                  <a:srgbClr val="D4D4D4"/>
+                </a:solidFill>
+                <a:latin typeface="Consolas"/>
+              </a:rPr>
+              <a:t> </a:t>
+            </a:r>
+            <a:r>
+              <a:rPr sz="2000" i="0" b="0">
+                <a:solidFill>
+                  <a:srgbClr val="D4D4D4"/>
+                </a:solidFill>
+                <a:latin typeface="Consolas"/>
+              </a:rPr>
+              <a:t>cerrada</a:t>
+            </a:r>
+            <a:r>
+              <a:rPr sz="2000" i="0" b="0">
+                <a:solidFill>
+                  <a:srgbClr val="D4D4D4"/>
+                </a:solidFill>
+                <a:latin typeface="Consolas"/>
+              </a:rPr>
+              <a:t>     |</a:t>
+            </a:r>
+          </a:p>
+          <a:p>
+            <a:pPr>
+              <a:spcAft>
+                <a:spcPts val="428"/>
+              </a:spcAft>
+            </a:pPr>
+            <a:r>
+              <a:rPr sz="2000" i="0" b="0">
+                <a:solidFill>
+                  <a:srgbClr val="D4D4D4"/>
+                </a:solidFill>
+                <a:latin typeface="Consolas"/>
+              </a:rPr>
+              <a:t>| </a:t>
+            </a:r>
+            <a:r>
+              <a:rPr sz="2000" i="0" b="0">
+                <a:solidFill>
+                  <a:srgbClr val="D4D4D4"/>
+                </a:solidFill>
+                <a:latin typeface="Consolas"/>
+              </a:rPr>
+              <a:t>Fecha</a:t>
+            </a:r>
+            <a:r>
+              <a:rPr sz="2000" i="0" b="0">
+                <a:solidFill>
+                  <a:srgbClr val="D4D4D4"/>
+                </a:solidFill>
+                <a:latin typeface="Consolas"/>
+              </a:rPr>
+              <a:t> </a:t>
+            </a:r>
+            <a:r>
+              <a:rPr sz="2000" i="0" b="0">
+                <a:solidFill>
+                  <a:srgbClr val="D4D4D4"/>
+                </a:solidFill>
+                <a:latin typeface="Consolas"/>
+              </a:rPr>
+              <a:t>de</a:t>
+            </a:r>
+            <a:r>
+              <a:rPr sz="2000" i="0" b="0">
+                <a:solidFill>
+                  <a:srgbClr val="D4D4D4"/>
+                </a:solidFill>
+                <a:latin typeface="Consolas"/>
+              </a:rPr>
+              <a:t> </a:t>
+            </a:r>
+            <a:r>
+              <a:rPr sz="2000" i="0" b="0">
+                <a:solidFill>
+                  <a:srgbClr val="D4D4D4"/>
+                </a:solidFill>
+                <a:latin typeface="Consolas"/>
+              </a:rPr>
+              <a:t>nacimiento</a:t>
+            </a:r>
+            <a:r>
+              <a:rPr sz="2000" i="0" b="0">
+                <a:solidFill>
+                  <a:srgbClr val="D4D4D4"/>
+                </a:solidFill>
+                <a:latin typeface="Consolas"/>
+              </a:rPr>
+              <a:t>  | </a:t>
+            </a:r>
+            <a:r>
+              <a:rPr sz="2000" i="0" b="0">
+                <a:solidFill>
+                  <a:srgbClr val="D4D4D4"/>
+                </a:solidFill>
+                <a:latin typeface="Consolas"/>
+              </a:rPr>
+              <a:t>RF</a:t>
+            </a:r>
+            <a:r>
+              <a:rPr sz="2000" i="0" b="0">
+                <a:solidFill>
+                  <a:srgbClr val="D4D4D4"/>
+                </a:solidFill>
+                <a:latin typeface="Consolas"/>
+              </a:rPr>
+              <a:t>-</a:t>
+            </a:r>
+            <a:r>
+              <a:rPr sz="2000" i="0" b="0">
+                <a:solidFill>
+                  <a:srgbClr val="B5CEA8"/>
+                </a:solidFill>
+                <a:latin typeface="Consolas"/>
+              </a:rPr>
+              <a:t>02</a:t>
+            </a:r>
+            <a:r>
+              <a:rPr sz="2000" i="0" b="0">
+                <a:solidFill>
+                  <a:srgbClr val="D4D4D4"/>
+                </a:solidFill>
+                <a:latin typeface="Consolas"/>
+              </a:rPr>
+              <a:t>           | </a:t>
+            </a:r>
+            <a:r>
+              <a:rPr sz="2000" i="0" b="0">
+                <a:solidFill>
+                  <a:srgbClr val="D4D4D4"/>
+                </a:solidFill>
+                <a:latin typeface="Consolas"/>
+              </a:rPr>
+              <a:t>Mascota</a:t>
+            </a:r>
+            <a:r>
+              <a:rPr sz="2000" i="0" b="0">
+                <a:solidFill>
+                  <a:srgbClr val="D4D4D4"/>
+                </a:solidFill>
+                <a:latin typeface="Consolas"/>
+              </a:rPr>
+              <a:t>.</a:t>
+            </a:r>
+            <a:r>
+              <a:rPr sz="2000" i="0" b="0">
+                <a:solidFill>
+                  <a:srgbClr val="D4D4D4"/>
+                </a:solidFill>
+                <a:latin typeface="Consolas"/>
+              </a:rPr>
+              <a:t>fechaNac</a:t>
+            </a:r>
+            <a:r>
+              <a:rPr sz="2000" i="0" b="0">
+                <a:solidFill>
+                  <a:srgbClr val="D4D4D4"/>
+                </a:solidFill>
+                <a:latin typeface="Consolas"/>
+              </a:rPr>
+              <a:t>      | </a:t>
+            </a:r>
+            <a:r>
+              <a:rPr sz="2000" i="0" b="0">
+                <a:solidFill>
+                  <a:srgbClr val="D4D4D4"/>
+                </a:solidFill>
+                <a:latin typeface="Consolas"/>
+              </a:rPr>
+              <a:t>no</a:t>
+            </a:r>
+            <a:r>
+              <a:rPr sz="2000" i="0" b="0">
+                <a:solidFill>
+                  <a:srgbClr val="D4D4D4"/>
+                </a:solidFill>
+                <a:latin typeface="Consolas"/>
+              </a:rPr>
+              <a:t> </a:t>
+            </a:r>
+            <a:r>
+              <a:rPr sz="2000" i="0" b="0">
+                <a:solidFill>
+                  <a:srgbClr val="D4D4D4"/>
+                </a:solidFill>
+                <a:latin typeface="Consolas"/>
+              </a:rPr>
+              <a:t>futura</a:t>
+            </a:r>
+            <a:r>
+              <a:rPr sz="2000" i="0" b="0">
+                <a:solidFill>
+                  <a:srgbClr val="D4D4D4"/>
+                </a:solidFill>
+                <a:latin typeface="Consolas"/>
+              </a:rPr>
+              <a:t>         |</a:t>
+            </a:r>
+          </a:p>
+          <a:p>
+            <a:pPr>
+              <a:spcAft>
+                <a:spcPts val="428"/>
+              </a:spcAft>
+            </a:pPr>
+            <a:r>
+              <a:rPr sz="2000" i="0" b="0">
+                <a:solidFill>
+                  <a:srgbClr val="D4D4D4"/>
+                </a:solidFill>
+                <a:latin typeface="Consolas"/>
+              </a:rPr>
+              <a:t>| </a:t>
+            </a:r>
+            <a:r>
+              <a:rPr sz="2000" i="0" b="0">
+                <a:solidFill>
+                  <a:srgbClr val="D4D4D4"/>
+                </a:solidFill>
+                <a:latin typeface="Consolas"/>
+              </a:rPr>
+              <a:t>Dueno</a:t>
+            </a:r>
+            <a:r>
+              <a:rPr sz="2000" i="0" b="0">
+                <a:solidFill>
+                  <a:srgbClr val="D4D4D4"/>
+                </a:solidFill>
+                <a:latin typeface="Consolas"/>
+              </a:rPr>
+              <a:t>                | </a:t>
+            </a:r>
+            <a:r>
+              <a:rPr sz="2000" i="0" b="0">
+                <a:solidFill>
+                  <a:srgbClr val="D4D4D4"/>
+                </a:solidFill>
+                <a:latin typeface="Consolas"/>
+              </a:rPr>
+              <a:t>RF</a:t>
+            </a:r>
+            <a:r>
+              <a:rPr sz="2000" i="0" b="0">
+                <a:solidFill>
+                  <a:srgbClr val="D4D4D4"/>
+                </a:solidFill>
+                <a:latin typeface="Consolas"/>
+              </a:rPr>
+              <a:t>-</a:t>
+            </a:r>
+            <a:r>
+              <a:rPr sz="2000" i="0" b="0">
+                <a:solidFill>
+                  <a:srgbClr val="B5CEA8"/>
+                </a:solidFill>
+                <a:latin typeface="Consolas"/>
+              </a:rPr>
+              <a:t>01</a:t>
+            </a:r>
+            <a:r>
+              <a:rPr sz="2000" i="0" b="0">
+                <a:solidFill>
+                  <a:srgbClr val="D4D4D4"/>
+                </a:solidFill>
+                <a:latin typeface="Consolas"/>
+              </a:rPr>
+              <a:t>           | </a:t>
+            </a:r>
+            <a:r>
+              <a:rPr sz="2000" i="0" b="0">
+                <a:solidFill>
+                  <a:srgbClr val="DCDCAA"/>
+                </a:solidFill>
+                <a:latin typeface="Consolas"/>
+              </a:rPr>
+              <a:t>Mascota.idDueno</a:t>
+            </a:r>
+            <a:r>
+              <a:rPr sz="2000" i="0" b="0">
+                <a:solidFill>
+                  <a:srgbClr val="D4D4D4"/>
+                </a:solidFill>
+                <a:latin typeface="Consolas"/>
+              </a:rPr>
+              <a:t> (</a:t>
+            </a:r>
+            <a:r>
+              <a:rPr sz="2000" i="0" b="0">
+                <a:solidFill>
+                  <a:srgbClr val="D4D4D4"/>
+                </a:solidFill>
+                <a:latin typeface="Consolas"/>
+              </a:rPr>
+              <a:t>FK</a:t>
+            </a:r>
+            <a:r>
+              <a:rPr sz="2000" i="0" b="0">
+                <a:solidFill>
+                  <a:srgbClr val="D4D4D4"/>
+                </a:solidFill>
+                <a:latin typeface="Consolas"/>
+              </a:rPr>
+              <a:t>)  | </a:t>
+            </a:r>
+            <a:r>
+              <a:rPr sz="2000" i="0" b="0">
+                <a:solidFill>
+                  <a:srgbClr val="D4D4D4"/>
+                </a:solidFill>
+                <a:latin typeface="Consolas"/>
+              </a:rPr>
+              <a:t>debe</a:t>
+            </a:r>
+            <a:r>
+              <a:rPr sz="2000" i="0" b="0">
+                <a:solidFill>
+                  <a:srgbClr val="D4D4D4"/>
+                </a:solidFill>
+                <a:latin typeface="Consolas"/>
+              </a:rPr>
+              <a:t> </a:t>
+            </a:r>
+            <a:r>
+              <a:rPr sz="2000" i="0" b="0">
+                <a:solidFill>
+                  <a:srgbClr val="D4D4D4"/>
+                </a:solidFill>
+                <a:latin typeface="Consolas"/>
+              </a:rPr>
+              <a:t>existir</a:t>
+            </a:r>
+            <a:r>
+              <a:rPr sz="2000" i="0" b="0">
+                <a:solidFill>
+                  <a:srgbClr val="D4D4D4"/>
+                </a:solidFill>
+                <a:latin typeface="Consolas"/>
+              </a:rPr>
+              <a:t>      |</a:t>
+            </a:r>
+          </a:p>
+          <a:p>
+            <a:pPr>
+              <a:spcAft>
+                <a:spcPts val="428"/>
+              </a:spcAft>
+            </a:pPr>
+            <a:r>
+              <a:rPr sz="2000" i="0" b="0">
+                <a:solidFill>
+                  <a:srgbClr val="D4D4D4"/>
+                </a:solidFill>
+                <a:latin typeface="Consolas"/>
+              </a:rPr>
+              <a:t/>
+            </a:r>
+          </a:p>
+          <a:p>
+            <a:pPr>
+              <a:spcAft>
+                <a:spcPts val="428"/>
+              </a:spcAft>
+            </a:pPr>
+            <a:r>
+              <a:rPr sz="2000" i="0" b="0">
+                <a:solidFill>
+                  <a:srgbClr val="D4D4D4"/>
+                </a:solidFill>
+                <a:latin typeface="Consolas"/>
+              </a:rPr>
+              <a:t>-- Un campo sin RF que lo exija es un campo que nadie pidio: se quita o</a:t>
+            </a:r>
+          </a:p>
+          <a:p>
+            <a:pPr>
+              <a:spcAft>
+                <a:spcPts val="428"/>
+              </a:spcAft>
+            </a:pPr>
+            <a:r>
+              <a:rPr sz="2000" i="0" b="0">
+                <a:solidFill>
+                  <a:srgbClr val="D4D4D4"/>
+                </a:solidFill>
+                <a:latin typeface="Consolas"/>
+              </a:rPr>
+              <a:t>-- se agrega el requisito. Un atributo de la clase sin campo en ninguna</a:t>
+            </a:r>
+          </a:p>
+          <a:p>
+            <a:pPr>
+              <a:spcAft>
+                <a:spcPts val="428"/>
+              </a:spcAft>
+            </a:pPr>
+            <a:r>
+              <a:rPr sz="2000" i="0" b="0">
+                <a:solidFill>
+                  <a:srgbClr val="D4D4D4"/>
+                </a:solidFill>
+                <a:latin typeface="Consolas"/>
+              </a:rPr>
+              <a:t>-- pantalla es un dato que nadie puede ingresar.</a:t>
+            </a:r>
+          </a:p>
+        </p:txBody>
+      </p:sp>
+      <p:sp>
+        <p:nvSpPr>
+          <p:cNvPr id="12" name="TextBox 11"/>
           <p:cNvSpPr txBox="1"/>
           <p:nvPr/>
         </p:nvSpPr>
@@ -4386,21 +6019,125 @@
                 </a:solidFill>
                 <a:latin typeface="Calibri"/>
               </a:rPr>
-              <a:t>Una interfaz se puede evaluar sin programarla, y esa es una de las... (1/2)</a:t>
-            </a:r>
-          </a:p>
-        </p:txBody>
-      </p:sp>
-      <p:sp>
-        <p:nvSpPr>
-          <p:cNvPr id="5" name="TextBox 4"/>
+              <a:t>Evaluar una interfaz sin programarla</a:t>
+            </a:r>
+          </a:p>
+        </p:txBody>
+      </p:sp>
+      <p:sp>
+        <p:nvSpPr>
+          <p:cNvPr id="5" name="Rounded Rectangle 4"/>
+          <p:cNvSpPr/>
+          <p:nvPr/>
+        </p:nvSpPr>
+        <p:spPr>
+          <a:xfrm>
+            <a:off x="5797149" y="1570693"/>
+            <a:ext cx="6010497" cy="4064084"/>
+          </a:xfrm>
+          <a:prstGeom prst="roundRect">
+            <a:avLst>
+              <a:gd name="adj" fmla="val 4000"/>
+            </a:avLst>
+          </a:prstGeom>
+          <a:solidFill>
+            <a:srgbClr val="E8EEF4"/>
+          </a:solidFill>
+          <a:ln>
+            <a:noFill/>
+          </a:ln>
+        </p:spPr>
+        <p:style>
+          <a:lnRef idx="1">
+            <a:schemeClr val="accent1"/>
+          </a:lnRef>
+          <a:fillRef idx="3">
+            <a:schemeClr val="accent1"/>
+          </a:fillRef>
+          <a:effectRef idx="2">
+            <a:schemeClr val="accent1"/>
+          </a:effectRef>
+          <a:fontRef idx="minor">
+            <a:schemeClr val="lt1"/>
+          </a:fontRef>
+        </p:style>
+        <p:txBody>
+          <a:bodyPr rtlCol="0" anchor="ctr"/>
+          <a:lstStyle/>
+          <a:p>
+            <a:pPr algn="ctr"/>
+          </a:p>
+        </p:txBody>
+      </p:sp>
+      <p:pic>
+        <p:nvPicPr>
+          <p:cNvPr id="6" name="Picture 5" descr="usability-testing-laptop.jpg"/>
+          <p:cNvPicPr>
+            <a:picLocks noChangeAspect="1"/>
+          </p:cNvPicPr>
+          <p:nvPr/>
+        </p:nvPicPr>
+        <p:blipFill>
+          <a:blip r:embed="rId2"/>
+          <a:stretch>
+            <a:fillRect/>
+          </a:stretch>
+        </p:blipFill>
+        <p:spPr>
+          <a:xfrm>
+            <a:off x="5870301" y="1643845"/>
+            <a:ext cx="5864193" cy="3917780"/>
+          </a:xfrm>
+          <a:prstGeom prst="rect">
+            <a:avLst/>
+          </a:prstGeom>
+        </p:spPr>
+      </p:pic>
+      <p:sp>
+        <p:nvSpPr>
+          <p:cNvPr id="7" name="TextBox 6"/>
           <p:cNvSpPr txBox="1"/>
           <p:nvPr/>
         </p:nvSpPr>
         <p:spPr>
           <a:xfrm>
-            <a:off x="457200" y="1170432"/>
-            <a:ext cx="11277295" cy="5230368"/>
+            <a:off x="5870301" y="5961888"/>
+            <a:ext cx="5864193" cy="320040"/>
+          </a:xfrm>
+          <a:prstGeom prst="rect">
+            <a:avLst/>
+          </a:prstGeom>
+          <a:noFill/>
+        </p:spPr>
+        <p:txBody>
+          <a:bodyPr wrap="square">
+            <a:spAutoFit/>
+          </a:bodyPr>
+          <a:lstStyle/>
+          <a:p>
+            <a:pPr algn="ctr"/>
+            <a:r>
+              <a:rPr sz="1100" b="0" i="1">
+                <a:solidFill>
+                  <a:srgbClr val="666666"/>
+                </a:solidFill>
+                <a:latin typeface="Calibri"/>
+              </a:rPr>
+              <a:t>Foto: Pixabay · Pexels</a:t>
+            </a:r>
+          </a:p>
+        </p:txBody>
+      </p:sp>
+      <p:sp>
+        <p:nvSpPr>
+          <p:cNvPr id="8" name="TextBox 7"/>
+          <p:cNvSpPr txBox="1"/>
+          <p:nvPr/>
+        </p:nvSpPr>
+        <p:spPr>
+          <a:xfrm>
+            <a:off x="457200" y="1353312"/>
+            <a:ext cx="5093061" cy="5047488"/>
           </a:xfrm>
           <a:prstGeom prst="rect">
             <a:avLst/>
@@ -4425,7 +6162,7 @@
                 </a:solidFill>
                 <a:latin typeface="Calibri"/>
               </a:rPr>
-              <a:t>–   Una interfaz se puede evaluar sin programarla, y esa es una de las habilidades mas valiosas que se lleva un analista.</a:t>
+              <a:t>–   Recorrido cognitivo: alguien ajeno al diseño intenta una tarea concreta sin ayuda; se cuentan clics, dudas y errores.</a:t>
             </a:r>
           </a:p>
           <a:p>
@@ -4441,7 +6178,7 @@
                 </a:solidFill>
                 <a:latin typeface="Calibri"/>
               </a:rPr>
-              <a:t>–   El metodo mas barato es el recorrido cognitivo: se toma una tarea concreta, por ejemplo registrar la mascota Luna de la señora Perez</a:t>
+              <a:t>–   Prueba de pasillo: tres personas de otro grupo, y se anota sin defenderse.</a:t>
             </a:r>
           </a:p>
           <a:p>
@@ -4457,14 +6194,30 @@
                 </a:solidFill>
                 <a:latin typeface="Calibri"/>
               </a:rPr>
-              <a:t>–   Y una persona que no participo en el diseño intenta hacerla sobre el prototipo sin que nadie le explique nada, mientras usted cuenta cuantos clics necesito, donde dudo y donde se equivoco.</a:t>
-            </a:r>
-          </a:p>
-        </p:txBody>
-      </p:sp>
-      <p:sp>
-        <p:nvSpPr>
-          <p:cNvPr id="6" name="TextBox 5"/>
+              <a:t>–   Se evalúa con la usuaria real: escribe lento, la interrumpen, el monitor está lejos.</a:t>
+            </a:r>
+          </a:p>
+          <a:p>
+            <a:pPr>
+              <a:spcAft>
+                <a:spcPts val="800"/>
+              </a:spcAft>
+            </a:pPr>
+            <a:r>
+              <a:rPr sz="2000" b="0" i="0">
+                <a:solidFill>
+                  <a:srgbClr val="333333"/>
+                </a:solidFill>
+                <a:latin typeface="Calibri"/>
+              </a:rPr>
+              <a:t>–   Mensajes de la clínica: «Esta mascota ya tiene ficha», no «violación de unicidad».</a:t>
+            </a:r>
+          </a:p>
+        </p:txBody>
+      </p:sp>
+      <p:sp>
+        <p:nvSpPr>
+          <p:cNvPr id="9" name="TextBox 8"/>
           <p:cNvSpPr txBox="1"/>
           <p:nvPr/>
         </p:nvSpPr>
@@ -4638,21 +6391,125 @@
                 </a:solidFill>
                 <a:latin typeface="Calibri"/>
               </a:rPr>
-              <a:t>Una interfaz se puede evaluar sin programarla, y esa es una de las... (2/2)</a:t>
-            </a:r>
-          </a:p>
-        </p:txBody>
-      </p:sp>
-      <p:sp>
-        <p:nvSpPr>
-          <p:cNvPr id="5" name="TextBox 4"/>
+              <a:t>Demo del dia</a:t>
+            </a:r>
+          </a:p>
+        </p:txBody>
+      </p:sp>
+      <p:sp>
+        <p:nvSpPr>
+          <p:cNvPr id="5" name="Rounded Rectangle 4"/>
+          <p:cNvSpPr/>
+          <p:nvPr/>
+        </p:nvSpPr>
+        <p:spPr>
+          <a:xfrm>
+            <a:off x="5797149" y="1573813"/>
+            <a:ext cx="6010497" cy="4057845"/>
+          </a:xfrm>
+          <a:prstGeom prst="roundRect">
+            <a:avLst>
+              <a:gd name="adj" fmla="val 4000"/>
+            </a:avLst>
+          </a:prstGeom>
+          <a:solidFill>
+            <a:srgbClr val="E8EEF4"/>
+          </a:solidFill>
+          <a:ln>
+            <a:noFill/>
+          </a:ln>
+        </p:spPr>
+        <p:style>
+          <a:lnRef idx="1">
+            <a:schemeClr val="accent1"/>
+          </a:lnRef>
+          <a:fillRef idx="3">
+            <a:schemeClr val="accent1"/>
+          </a:fillRef>
+          <a:effectRef idx="2">
+            <a:schemeClr val="accent1"/>
+          </a:effectRef>
+          <a:fontRef idx="minor">
+            <a:schemeClr val="lt1"/>
+          </a:fontRef>
+        </p:style>
+        <p:txBody>
+          <a:bodyPr rtlCol="0" anchor="ctr"/>
+          <a:lstStyle/>
+          <a:p>
+            <a:pPr algn="ctr"/>
+          </a:p>
+        </p:txBody>
+      </p:sp>
+      <p:pic>
+        <p:nvPicPr>
+          <p:cNvPr id="6" name="Picture 5" descr="laptop-code-live-demo.jpg"/>
+          <p:cNvPicPr>
+            <a:picLocks noChangeAspect="1"/>
+          </p:cNvPicPr>
+          <p:nvPr/>
+        </p:nvPicPr>
+        <p:blipFill>
+          <a:blip r:embed="rId2"/>
+          <a:stretch>
+            <a:fillRect/>
+          </a:stretch>
+        </p:blipFill>
+        <p:spPr>
+          <a:xfrm>
+            <a:off x="5870301" y="1646965"/>
+            <a:ext cx="5864193" cy="3911541"/>
+          </a:xfrm>
+          <a:prstGeom prst="rect">
+            <a:avLst/>
+          </a:prstGeom>
+        </p:spPr>
+      </p:pic>
+      <p:sp>
+        <p:nvSpPr>
+          <p:cNvPr id="7" name="TextBox 6"/>
           <p:cNvSpPr txBox="1"/>
           <p:nvPr/>
         </p:nvSpPr>
         <p:spPr>
           <a:xfrm>
-            <a:off x="457200" y="1170432"/>
-            <a:ext cx="11277295" cy="5230368"/>
+            <a:off x="5870301" y="5961888"/>
+            <a:ext cx="5864193" cy="320040"/>
+          </a:xfrm>
+          <a:prstGeom prst="rect">
+            <a:avLst/>
+          </a:prstGeom>
+          <a:noFill/>
+        </p:spPr>
+        <p:txBody>
+          <a:bodyPr wrap="square">
+            <a:spAutoFit/>
+          </a:bodyPr>
+          <a:lstStyle/>
+          <a:p>
+            <a:pPr algn="ctr"/>
+            <a:r>
+              <a:rPr sz="1100" b="0" i="1">
+                <a:solidFill>
+                  <a:srgbClr val="666666"/>
+                </a:solidFill>
+                <a:latin typeface="Calibri"/>
+              </a:rPr>
+              <a:t>Foto: olia danilevich · Pexels</a:t>
+            </a:r>
+          </a:p>
+        </p:txBody>
+      </p:sp>
+      <p:sp>
+        <p:nvSpPr>
+          <p:cNvPr id="8" name="TextBox 7"/>
+          <p:cNvSpPr txBox="1"/>
+          <p:nvPr/>
+        </p:nvSpPr>
+        <p:spPr>
+          <a:xfrm>
+            <a:off x="457200" y="1353312"/>
+            <a:ext cx="5093061" cy="5047488"/>
           </a:xfrm>
           <a:prstGeom prst="rect">
             <a:avLst/>
@@ -4677,7 +6534,25 @@
                 </a:solidFill>
                 <a:latin typeface="Calibri"/>
               </a:rPr>
-              <a:t>–   La variante de bolsillo es la prueba de pasillo: se le pide a tres compañeros de otro grupo que lo intenten y se anota, sin defenderse ni explicar.</a:t>
+              <a:t>–   </a:t>
+            </a:r>
+            <a:r>
+              <a:rPr sz="2000" b="1" i="0">
+                <a:solidFill>
+                  <a:srgbClr val="333333"/>
+                </a:solidFill>
+                <a:latin typeface="Calibri"/>
+              </a:rPr>
+              <a:t>Herramienta:</a:t>
+            </a:r>
+            <a:r>
+              <a:rPr sz="2000" b="0" i="0">
+                <a:solidFill>
+                  <a:srgbClr val="333333"/>
+                </a:solidFill>
+                <a:latin typeface="Calibri"/>
+              </a:rPr>
+              <a:t> Figma o Penpot · Excalidraw · Google Docs</a:t>
             </a:r>
           </a:p>
           <a:p>
@@ -4693,14 +6568,39 @@
                 </a:solidFill>
                 <a:latin typeface="Calibri"/>
               </a:rPr>
-              <a:t>–   Para la clinica hay que evaluar pensando en la usuaria real, que es la recepcionista de la clinica: no es experta en computadores, escribe lento, contesta el telefono mientras registra y tiene un perro ladrando al lado.</a:t>
-            </a:r>
-          </a:p>
-        </p:txBody>
-      </p:sp>
-      <p:sp>
-        <p:nvSpPr>
-          <p:cNvPr id="6" name="TextBox 5"/>
+              <a:t>–   </a:t>
+            </a:r>
+            <a:r>
+              <a:rPr sz="2000" b="1" i="0">
+                <a:solidFill>
+                  <a:srgbClr val="333333"/>
+                </a:solidFill>
+                <a:latin typeface="Calibri"/>
+              </a:rPr>
+              <a:t>Demo:</a:t>
+            </a:r>
+          </a:p>
+          <a:p>
+            <a:pPr>
+              <a:spcAft>
+                <a:spcPts val="800"/>
+              </a:spcAft>
+            </a:pPr>
+            <a:r>
+              <a:rPr sz="2000" b="0" i="0">
+                <a:solidFill>
+                  <a:srgbClr val="333333"/>
+                </a:solidFill>
+                <a:latin typeface="Calibri"/>
+              </a:rPr>
+              <a:t>–   Mismo dominio: la clinica veterinaria — no otro ejemplo. Aqui se diseña, no se programa.</a:t>
+            </a:r>
+          </a:p>
+        </p:txBody>
+      </p:sp>
+      <p:sp>
+        <p:nvSpPr>
+          <p:cNvPr id="9" name="TextBox 8"/>
           <p:cNvSpPr txBox="1"/>
           <p:nvPr/>
         </p:nvSpPr>
@@ -4768,1909 +6668,6 @@
         <p:spPr>
           <a:xfrm>
             <a:off x="0" y="0"/>
-            <a:ext cx="12191695" cy="960120"/>
-          </a:xfrm>
-          <a:prstGeom prst="rect">
-            <a:avLst/>
-          </a:prstGeom>
-          <a:solidFill>
-            <a:srgbClr val="095292"/>
-          </a:solidFill>
-          <a:ln>
-            <a:noFill/>
-          </a:ln>
-        </p:spPr>
-        <p:style>
-          <a:lnRef idx="1">
-            <a:schemeClr val="accent1"/>
-          </a:lnRef>
-          <a:fillRef idx="3">
-            <a:schemeClr val="accent1"/>
-          </a:fillRef>
-          <a:effectRef idx="2">
-            <a:schemeClr val="accent1"/>
-          </a:effectRef>
-          <a:fontRef idx="minor">
-            <a:schemeClr val="lt1"/>
-          </a:fontRef>
-        </p:style>
-        <p:txBody>
-          <a:bodyPr rtlCol="0" anchor="ctr"/>
-          <a:lstStyle/>
-          <a:p>
-            <a:pPr algn="ctr"/>
-          </a:p>
-        </p:txBody>
-      </p:sp>
-      <p:sp>
-        <p:nvSpPr>
-          <p:cNvPr id="3" name="Rectangle 2"/>
-          <p:cNvSpPr/>
-          <p:nvPr/>
-        </p:nvSpPr>
-        <p:spPr>
-          <a:xfrm>
-            <a:off x="0" y="960120"/>
-            <a:ext cx="12191695" cy="41148"/>
-          </a:xfrm>
-          <a:prstGeom prst="rect">
-            <a:avLst/>
-          </a:prstGeom>
-          <a:solidFill>
-            <a:srgbClr val="FFD000"/>
-          </a:solidFill>
-          <a:ln>
-            <a:noFill/>
-          </a:ln>
-        </p:spPr>
-        <p:style>
-          <a:lnRef idx="1">
-            <a:schemeClr val="accent1"/>
-          </a:lnRef>
-          <a:fillRef idx="3">
-            <a:schemeClr val="accent1"/>
-          </a:fillRef>
-          <a:effectRef idx="2">
-            <a:schemeClr val="accent1"/>
-          </a:effectRef>
-          <a:fontRef idx="minor">
-            <a:schemeClr val="lt1"/>
-          </a:fontRef>
-        </p:style>
-        <p:txBody>
-          <a:bodyPr rtlCol="0" anchor="ctr"/>
-          <a:lstStyle/>
-          <a:p>
-            <a:pPr algn="ctr"/>
-          </a:p>
-        </p:txBody>
-      </p:sp>
-      <p:sp>
-        <p:nvSpPr>
-          <p:cNvPr id="4" name="TextBox 3"/>
-          <p:cNvSpPr txBox="1"/>
-          <p:nvPr/>
-        </p:nvSpPr>
-        <p:spPr>
-          <a:xfrm>
-            <a:off x="457200" y="164592"/>
-            <a:ext cx="11277295" cy="502920"/>
-          </a:xfrm>
-          <a:prstGeom prst="rect">
-            <a:avLst/>
-          </a:prstGeom>
-          <a:noFill/>
-        </p:spPr>
-        <p:txBody>
-          <a:bodyPr wrap="square">
-            <a:spAutoFit/>
-          </a:bodyPr>
-          <a:lstStyle/>
-          <a:p>
-            <a:r>
-              <a:rPr sz="2600" b="1" i="0">
-                <a:solidFill>
-                  <a:srgbClr val="FFFFFF"/>
-                </a:solidFill>
-                <a:latin typeface="Calibri"/>
-              </a:rPr>
-              <a:t>El mapa de navegacion del prototipo</a:t>
-            </a:r>
-          </a:p>
-        </p:txBody>
-      </p:sp>
-      <p:sp>
-        <p:nvSpPr>
-          <p:cNvPr id="5" name="Rounded Rectangle 4"/>
-          <p:cNvSpPr/>
-          <p:nvPr/>
-        </p:nvSpPr>
-        <p:spPr>
-          <a:xfrm>
-            <a:off x="457200" y="1261872"/>
-            <a:ext cx="11277295" cy="5093208"/>
-          </a:xfrm>
-          <a:prstGeom prst="roundRect">
-            <a:avLst>
-              <a:gd name="adj" fmla="val 12000"/>
-            </a:avLst>
-          </a:prstGeom>
-          <a:solidFill>
-            <a:srgbClr val="1E2A38"/>
-          </a:solidFill>
-          <a:ln>
-            <a:noFill/>
-          </a:ln>
-        </p:spPr>
-        <p:style>
-          <a:lnRef idx="1">
-            <a:schemeClr val="accent1"/>
-          </a:lnRef>
-          <a:fillRef idx="3">
-            <a:schemeClr val="accent1"/>
-          </a:fillRef>
-          <a:effectRef idx="2">
-            <a:schemeClr val="accent1"/>
-          </a:effectRef>
-          <a:fontRef idx="minor">
-            <a:schemeClr val="lt1"/>
-          </a:fontRef>
-        </p:style>
-        <p:txBody>
-          <a:bodyPr rtlCol="0" anchor="ctr"/>
-          <a:lstStyle/>
-          <a:p>
-            <a:pPr algn="ctr"/>
-          </a:p>
-        </p:txBody>
-      </p:sp>
-      <p:sp>
-        <p:nvSpPr>
-          <p:cNvPr id="6" name="Rectangle 5"/>
-          <p:cNvSpPr/>
-          <p:nvPr/>
-        </p:nvSpPr>
-        <p:spPr>
-          <a:xfrm>
-            <a:off x="457200" y="1261872"/>
-            <a:ext cx="11277295" cy="320040"/>
-          </a:xfrm>
-          <a:prstGeom prst="rect">
-            <a:avLst/>
-          </a:prstGeom>
-          <a:solidFill>
-            <a:srgbClr val="095292"/>
-          </a:solidFill>
-          <a:ln>
-            <a:noFill/>
-          </a:ln>
-        </p:spPr>
-        <p:style>
-          <a:lnRef idx="1">
-            <a:schemeClr val="accent1"/>
-          </a:lnRef>
-          <a:fillRef idx="3">
-            <a:schemeClr val="accent1"/>
-          </a:fillRef>
-          <a:effectRef idx="2">
-            <a:schemeClr val="accent1"/>
-          </a:effectRef>
-          <a:fontRef idx="minor">
-            <a:schemeClr val="lt1"/>
-          </a:fontRef>
-        </p:style>
-        <p:txBody>
-          <a:bodyPr rtlCol="0" anchor="ctr"/>
-          <a:lstStyle/>
-          <a:p>
-            <a:pPr algn="ctr"/>
-          </a:p>
-        </p:txBody>
-      </p:sp>
-      <p:sp>
-        <p:nvSpPr>
-          <p:cNvPr id="7" name="TextBox 6"/>
-          <p:cNvSpPr txBox="1"/>
-          <p:nvPr/>
-        </p:nvSpPr>
-        <p:spPr>
-          <a:xfrm>
-            <a:off x="685800" y="1307592"/>
-            <a:ext cx="10820095" cy="256032"/>
-          </a:xfrm>
-          <a:prstGeom prst="rect">
-            <a:avLst/>
-          </a:prstGeom>
-          <a:noFill/>
-        </p:spPr>
-        <p:txBody>
-          <a:bodyPr wrap="square" anchor="ctr"/>
-          <a:lstStyle/>
-          <a:p>
-            <a:r>
-              <a:rPr sz="1000" b="1" i="0">
-                <a:solidFill>
-                  <a:srgbClr val="269CCB"/>
-                </a:solidFill>
-                <a:latin typeface="Calibri"/>
-              </a:rPr>
-              <a:t>● ● ●</a:t>
-            </a:r>
-          </a:p>
-        </p:txBody>
-      </p:sp>
-      <p:sp>
-        <p:nvSpPr>
-          <p:cNvPr id="8" name="TextBox 7"/>
-          <p:cNvSpPr txBox="1"/>
-          <p:nvPr/>
-        </p:nvSpPr>
-        <p:spPr>
-          <a:xfrm>
-            <a:off x="777240" y="1719072"/>
-            <a:ext cx="10637215" cy="4453128"/>
-          </a:xfrm>
-          <a:prstGeom prst="rect">
-            <a:avLst/>
-          </a:prstGeom>
-          <a:noFill/>
-        </p:spPr>
-        <p:txBody>
-          <a:bodyPr wrap="square">
-            <a:spAutoFit/>
-          </a:bodyPr>
-          <a:lstStyle/>
-          <a:p>
-            <a:pPr>
-              <a:spcAft>
-                <a:spcPts val="400"/>
-              </a:spcAft>
-            </a:pPr>
-            <a:r>
-              <a:rPr sz="1400" b="0" i="0">
-                <a:solidFill>
-                  <a:srgbClr val="FFFFFF"/>
-                </a:solidFill>
-                <a:latin typeface="Calibri"/>
-              </a:rPr>
-              <a:t>flowchart LR</a:t>
-            </a:r>
-          </a:p>
-          <a:p>
-            <a:pPr>
-              <a:spcAft>
-                <a:spcPts val="400"/>
-              </a:spcAft>
-            </a:pPr>
-            <a:r>
-              <a:rPr sz="1400" b="0" i="0">
-                <a:solidFill>
-                  <a:srgbClr val="FFFFFF"/>
-                </a:solidFill>
-                <a:latin typeface="Calibri"/>
-              </a:rPr>
-              <a:t>  login[Ingreso] --&gt; menu[Menu principal]</a:t>
-            </a:r>
-          </a:p>
-          <a:p>
-            <a:pPr>
-              <a:spcAft>
-                <a:spcPts val="400"/>
-              </a:spcAft>
-            </a:pPr>
-            <a:r>
-              <a:rPr sz="1400" b="0" i="0">
-                <a:solidFill>
-                  <a:srgbClr val="FFFFFF"/>
-                </a:solidFill>
-                <a:latin typeface="Calibri"/>
-              </a:rPr>
-              <a:t>  menu --&gt; regm[Registrar mascota]</a:t>
-            </a:r>
-          </a:p>
-          <a:p>
-            <a:pPr>
-              <a:spcAft>
-                <a:spcPts val="400"/>
-              </a:spcAft>
-            </a:pPr>
-            <a:r>
-              <a:rPr sz="1400" b="0" i="0">
-                <a:solidFill>
-                  <a:srgbClr val="FFFFFF"/>
-                </a:solidFill>
-                <a:latin typeface="Calibri"/>
-              </a:rPr>
-              <a:t>  menu --&gt; busc[Buscar expediente]</a:t>
-            </a:r>
-          </a:p>
-          <a:p>
-            <a:pPr>
-              <a:spcAft>
-                <a:spcPts val="400"/>
-              </a:spcAft>
-            </a:pPr>
-            <a:r>
-              <a:rPr sz="1400" b="0" i="0">
-                <a:solidFill>
-                  <a:srgbClr val="FFFFFF"/>
-                </a:solidFill>
-                <a:latin typeface="Calibri"/>
-              </a:rPr>
-              <a:t>  menu --&gt; agen[Agendar cita]</a:t>
-            </a:r>
-          </a:p>
-          <a:p>
-            <a:pPr>
-              <a:spcAft>
-                <a:spcPts val="400"/>
-              </a:spcAft>
-            </a:pPr>
-            <a:r>
-              <a:rPr sz="1400" b="0" i="0">
-                <a:solidFill>
-                  <a:srgbClr val="FFFFFF"/>
-                </a:solidFill>
-                <a:latin typeface="Calibri"/>
-              </a:rPr>
-              <a:t/>
-            </a:r>
-          </a:p>
-          <a:p>
-            <a:pPr>
-              <a:spcAft>
-                <a:spcPts val="400"/>
-              </a:spcAft>
-            </a:pPr>
-            <a:r>
-              <a:rPr sz="1400" b="0" i="0">
-                <a:solidFill>
-                  <a:srgbClr val="FFFFFF"/>
-                </a:solidFill>
-                <a:latin typeface="Calibri"/>
-              </a:rPr>
-              <a:t>  regm --&gt;|guardar| menu</a:t>
-            </a:r>
-          </a:p>
-          <a:p>
-            <a:pPr>
-              <a:spcAft>
-                <a:spcPts val="400"/>
-              </a:spcAft>
-            </a:pPr>
-            <a:r>
-              <a:rPr sz="1400" b="0" i="0">
-                <a:solidFill>
-                  <a:srgbClr val="FFFFFF"/>
-                </a:solidFill>
-                <a:latin typeface="Calibri"/>
-              </a:rPr>
-              <a:t>  regm --&gt;|cancelar| menu</a:t>
-            </a:r>
-          </a:p>
-          <a:p>
-            <a:pPr>
-              <a:spcAft>
-                <a:spcPts val="400"/>
-              </a:spcAft>
-            </a:pPr>
-            <a:r>
-              <a:rPr sz="1400" b="0" i="0">
-                <a:solidFill>
-                  <a:srgbClr val="FFFFFF"/>
-                </a:solidFill>
-                <a:latin typeface="Calibri"/>
-              </a:rPr>
-              <a:t>  busc --&gt;|1 resultado| det[Detalle del expediente]</a:t>
-            </a:r>
-          </a:p>
-          <a:p>
-            <a:pPr>
-              <a:spcAft>
-                <a:spcPts val="400"/>
-              </a:spcAft>
-            </a:pPr>
-            <a:r>
-              <a:rPr sz="1400" b="0" i="0">
-                <a:solidFill>
-                  <a:srgbClr val="FFFFFF"/>
-                </a:solidFill>
-                <a:latin typeface="Calibri"/>
-              </a:rPr>
-              <a:t>  busc --&gt;|varios| lista[Lista de resultados] --&gt; det</a:t>
-            </a:r>
-          </a:p>
-          <a:p>
-            <a:pPr>
-              <a:spcAft>
-                <a:spcPts val="400"/>
-              </a:spcAft>
-            </a:pPr>
-            <a:r>
-              <a:rPr sz="1400" b="0" i="0">
-                <a:solidFill>
-                  <a:srgbClr val="FFFFFF"/>
-                </a:solidFill>
-                <a:latin typeface="Calibri"/>
-              </a:rPr>
-              <a:t>  busc --&gt;|ninguno| vacio[Estado vacio&lt;br/&gt;con accion sugerida]</a:t>
-            </a:r>
-          </a:p>
-          <a:p>
-            <a:pPr>
-              <a:spcAft>
-                <a:spcPts val="400"/>
-              </a:spcAft>
-            </a:pPr>
-            <a:r>
-              <a:rPr sz="1400" b="0" i="0">
-                <a:solidFill>
-                  <a:srgbClr val="FFFFFF"/>
-                </a:solidFill>
-                <a:latin typeface="Calibri"/>
-              </a:rPr>
-              <a:t/>
-            </a:r>
-          </a:p>
-          <a:p>
-            <a:pPr>
-              <a:spcAft>
-                <a:spcPts val="400"/>
-              </a:spcAft>
-            </a:pPr>
-            <a:r>
-              <a:rPr sz="1400" b="0" i="0">
-                <a:solidFill>
-                  <a:srgbClr val="FFFFFF"/>
-                </a:solidFill>
-                <a:latin typeface="Calibri"/>
-              </a:rPr>
-              <a:t>%% Los tres caminos de una busqueda —uno, varios, ninguno— son lo que</a:t>
-            </a:r>
-          </a:p>
-          <a:p>
-            <a:pPr>
-              <a:spcAft>
-                <a:spcPts val="400"/>
-              </a:spcAft>
-            </a:pPr>
-            <a:r>
-              <a:rPr sz="1400" b="0" i="0">
-                <a:solidFill>
-                  <a:srgbClr val="FFFFFF"/>
-                </a:solidFill>
-                <a:latin typeface="Calibri"/>
-              </a:rPr>
-              <a:t>%% separa un wireframe de un dibujo. El «ninguno» es el que se olvida.</a:t>
-            </a:r>
-          </a:p>
-        </p:txBody>
-      </p:sp>
-      <p:sp>
-        <p:nvSpPr>
-          <p:cNvPr id="9" name="TextBox 8"/>
-          <p:cNvSpPr txBox="1"/>
-          <p:nvPr/>
-        </p:nvSpPr>
-        <p:spPr>
-          <a:xfrm>
-            <a:off x="11185855" y="6473952"/>
-            <a:ext cx="640080" cy="274320"/>
-          </a:xfrm>
-          <a:prstGeom prst="rect">
-            <a:avLst/>
-          </a:prstGeom>
-          <a:noFill/>
-        </p:spPr>
-        <p:txBody>
-          <a:bodyPr wrap="square">
-            <a:spAutoFit/>
-          </a:bodyPr>
-          <a:lstStyle/>
-          <a:p>
-            <a:pPr algn="r"/>
-            <a:r>
-              <a:rPr sz="1100" b="0" i="0">
-                <a:solidFill>
-                  <a:srgbClr val="666666"/>
-                </a:solidFill>
-                <a:latin typeface="Calibri"/>
-              </a:rPr>
-              <a:t>13</a:t>
-            </a:r>
-          </a:p>
-        </p:txBody>
-      </p:sp>
-    </p:spTree>
-  </p:cSld>
-  <p:clrMapOvr>
-    <a:masterClrMapping/>
-  </p:clrMapOvr>
-</p:sld>
-</file>
-
-<file path=ppt/slides/slide14.xml><?xml version="1.0" encoding="utf-8"?>
-<p:sld xmlns:a="http://schemas.openxmlformats.org/drawingml/2006/main" xmlns:p="http://schemas.openxmlformats.org/presentationml/2006/main" xmlns:r="http://schemas.openxmlformats.org/officeDocument/2006/relationships">
-  <p:cSld>
-    <p:bg>
-      <p:bgPr>
-        <a:solidFill>
-          <a:srgbClr val="FFFFFF"/>
-        </a:solidFill>
-        <a:effectLst/>
-      </p:bgPr>
-    </p:bg>
-    <p:spTree>
-      <p:nvGrpSpPr>
-        <p:cNvPr id="1" name=""/>
-        <p:cNvGrpSpPr/>
-        <p:nvPr/>
-      </p:nvGrpSpPr>
-      <p:grpSpPr/>
-      <p:sp>
-        <p:nvSpPr>
-          <p:cNvPr id="2" name="Rectangle 1"/>
-          <p:cNvSpPr/>
-          <p:nvPr/>
-        </p:nvSpPr>
-        <p:spPr>
-          <a:xfrm>
-            <a:off x="0" y="0"/>
-            <a:ext cx="12191695" cy="960120"/>
-          </a:xfrm>
-          <a:prstGeom prst="rect">
-            <a:avLst/>
-          </a:prstGeom>
-          <a:solidFill>
-            <a:srgbClr val="095292"/>
-          </a:solidFill>
-          <a:ln>
-            <a:noFill/>
-          </a:ln>
-        </p:spPr>
-        <p:style>
-          <a:lnRef idx="1">
-            <a:schemeClr val="accent1"/>
-          </a:lnRef>
-          <a:fillRef idx="3">
-            <a:schemeClr val="accent1"/>
-          </a:fillRef>
-          <a:effectRef idx="2">
-            <a:schemeClr val="accent1"/>
-          </a:effectRef>
-          <a:fontRef idx="minor">
-            <a:schemeClr val="lt1"/>
-          </a:fontRef>
-        </p:style>
-        <p:txBody>
-          <a:bodyPr rtlCol="0" anchor="ctr"/>
-          <a:lstStyle/>
-          <a:p>
-            <a:pPr algn="ctr"/>
-          </a:p>
-        </p:txBody>
-      </p:sp>
-      <p:sp>
-        <p:nvSpPr>
-          <p:cNvPr id="3" name="Rectangle 2"/>
-          <p:cNvSpPr/>
-          <p:nvPr/>
-        </p:nvSpPr>
-        <p:spPr>
-          <a:xfrm>
-            <a:off x="0" y="960120"/>
-            <a:ext cx="12191695" cy="41148"/>
-          </a:xfrm>
-          <a:prstGeom prst="rect">
-            <a:avLst/>
-          </a:prstGeom>
-          <a:solidFill>
-            <a:srgbClr val="FFD000"/>
-          </a:solidFill>
-          <a:ln>
-            <a:noFill/>
-          </a:ln>
-        </p:spPr>
-        <p:style>
-          <a:lnRef idx="1">
-            <a:schemeClr val="accent1"/>
-          </a:lnRef>
-          <a:fillRef idx="3">
-            <a:schemeClr val="accent1"/>
-          </a:fillRef>
-          <a:effectRef idx="2">
-            <a:schemeClr val="accent1"/>
-          </a:effectRef>
-          <a:fontRef idx="minor">
-            <a:schemeClr val="lt1"/>
-          </a:fontRef>
-        </p:style>
-        <p:txBody>
-          <a:bodyPr rtlCol="0" anchor="ctr"/>
-          <a:lstStyle/>
-          <a:p>
-            <a:pPr algn="ctr"/>
-          </a:p>
-        </p:txBody>
-      </p:sp>
-      <p:sp>
-        <p:nvSpPr>
-          <p:cNvPr id="4" name="TextBox 3"/>
-          <p:cNvSpPr txBox="1"/>
-          <p:nvPr/>
-        </p:nvSpPr>
-        <p:spPr>
-          <a:xfrm>
-            <a:off x="457200" y="164592"/>
-            <a:ext cx="11277295" cy="502920"/>
-          </a:xfrm>
-          <a:prstGeom prst="rect">
-            <a:avLst/>
-          </a:prstGeom>
-          <a:noFill/>
-        </p:spPr>
-        <p:txBody>
-          <a:bodyPr wrap="square">
-            <a:spAutoFit/>
-          </a:bodyPr>
-          <a:lstStyle/>
-          <a:p>
-            <a:r>
-              <a:rPr sz="2600" b="1" i="0">
-                <a:solidFill>
-                  <a:srgbClr val="FFFFFF"/>
-                </a:solidFill>
-                <a:latin typeface="Calibri"/>
-              </a:rPr>
-              <a:t>La tabla de anotaciones del wireframe</a:t>
-            </a:r>
-          </a:p>
-        </p:txBody>
-      </p:sp>
-      <p:sp>
-        <p:nvSpPr>
-          <p:cNvPr id="5" name="Rounded Rectangle 4"/>
-          <p:cNvSpPr/>
-          <p:nvPr/>
-        </p:nvSpPr>
-        <p:spPr>
-          <a:xfrm>
-            <a:off x="457200" y="1261872"/>
-            <a:ext cx="11277295" cy="5093208"/>
-          </a:xfrm>
-          <a:prstGeom prst="roundRect">
-            <a:avLst>
-              <a:gd name="adj" fmla="val 12000"/>
-            </a:avLst>
-          </a:prstGeom>
-          <a:solidFill>
-            <a:srgbClr val="1E2A38"/>
-          </a:solidFill>
-          <a:ln>
-            <a:noFill/>
-          </a:ln>
-        </p:spPr>
-        <p:style>
-          <a:lnRef idx="1">
-            <a:schemeClr val="accent1"/>
-          </a:lnRef>
-          <a:fillRef idx="3">
-            <a:schemeClr val="accent1"/>
-          </a:fillRef>
-          <a:effectRef idx="2">
-            <a:schemeClr val="accent1"/>
-          </a:effectRef>
-          <a:fontRef idx="minor">
-            <a:schemeClr val="lt1"/>
-          </a:fontRef>
-        </p:style>
-        <p:txBody>
-          <a:bodyPr rtlCol="0" anchor="ctr"/>
-          <a:lstStyle/>
-          <a:p>
-            <a:pPr algn="ctr"/>
-          </a:p>
-        </p:txBody>
-      </p:sp>
-      <p:sp>
-        <p:nvSpPr>
-          <p:cNvPr id="6" name="Rectangle 5"/>
-          <p:cNvSpPr/>
-          <p:nvPr/>
-        </p:nvSpPr>
-        <p:spPr>
-          <a:xfrm>
-            <a:off x="457200" y="1261872"/>
-            <a:ext cx="11277295" cy="320040"/>
-          </a:xfrm>
-          <a:prstGeom prst="rect">
-            <a:avLst/>
-          </a:prstGeom>
-          <a:solidFill>
-            <a:srgbClr val="095292"/>
-          </a:solidFill>
-          <a:ln>
-            <a:noFill/>
-          </a:ln>
-        </p:spPr>
-        <p:style>
-          <a:lnRef idx="1">
-            <a:schemeClr val="accent1"/>
-          </a:lnRef>
-          <a:fillRef idx="3">
-            <a:schemeClr val="accent1"/>
-          </a:fillRef>
-          <a:effectRef idx="2">
-            <a:schemeClr val="accent1"/>
-          </a:effectRef>
-          <a:fontRef idx="minor">
-            <a:schemeClr val="lt1"/>
-          </a:fontRef>
-        </p:style>
-        <p:txBody>
-          <a:bodyPr rtlCol="0" anchor="ctr"/>
-          <a:lstStyle/>
-          <a:p>
-            <a:pPr algn="ctr"/>
-          </a:p>
-        </p:txBody>
-      </p:sp>
-      <p:sp>
-        <p:nvSpPr>
-          <p:cNvPr id="7" name="TextBox 6"/>
-          <p:cNvSpPr txBox="1"/>
-          <p:nvPr/>
-        </p:nvSpPr>
-        <p:spPr>
-          <a:xfrm>
-            <a:off x="685800" y="1307592"/>
-            <a:ext cx="10820095" cy="256032"/>
-          </a:xfrm>
-          <a:prstGeom prst="rect">
-            <a:avLst/>
-          </a:prstGeom>
-          <a:noFill/>
-        </p:spPr>
-        <p:txBody>
-          <a:bodyPr wrap="square" anchor="ctr"/>
-          <a:lstStyle/>
-          <a:p>
-            <a:r>
-              <a:rPr sz="1000" b="1" i="0">
-                <a:solidFill>
-                  <a:srgbClr val="269CCB"/>
-                </a:solidFill>
-                <a:latin typeface="Calibri"/>
-              </a:rPr>
-              <a:t>● ● ●</a:t>
-            </a:r>
-          </a:p>
-        </p:txBody>
-      </p:sp>
-      <p:sp>
-        <p:nvSpPr>
-          <p:cNvPr id="8" name="TextBox 7"/>
-          <p:cNvSpPr txBox="1"/>
-          <p:nvPr/>
-        </p:nvSpPr>
-        <p:spPr>
-          <a:xfrm>
-            <a:off x="777240" y="1719072"/>
-            <a:ext cx="10637215" cy="4453128"/>
-          </a:xfrm>
-          <a:prstGeom prst="rect">
-            <a:avLst/>
-          </a:prstGeom>
-          <a:noFill/>
-        </p:spPr>
-        <p:txBody>
-          <a:bodyPr wrap="square">
-            <a:spAutoFit/>
-          </a:bodyPr>
-          <a:lstStyle/>
-          <a:p>
-            <a:pPr>
-              <a:spcAft>
-                <a:spcPts val="400"/>
-              </a:spcAft>
-            </a:pPr>
-            <a:r>
-              <a:rPr sz="1400" b="0" i="0">
-                <a:solidFill>
-                  <a:srgbClr val="FFFFFF"/>
-                </a:solidFill>
-                <a:latin typeface="Calibri"/>
-              </a:rPr>
-              <a:t>| Campo de la pantalla | RF que lo exige | Atributo de la clase  | Validacion        |</a:t>
-            </a:r>
-          </a:p>
-          <a:p>
-            <a:pPr>
-              <a:spcAft>
-                <a:spcPts val="400"/>
-              </a:spcAft>
-            </a:pPr>
-            <a:r>
-              <a:rPr sz="1400" b="0" i="0">
-                <a:solidFill>
-                  <a:srgbClr val="FFFFFF"/>
-                </a:solidFill>
-                <a:latin typeface="Calibri"/>
-              </a:rPr>
-              <a:t>|----------------------|-----------------|-----------------------|-------------------|</a:t>
-            </a:r>
-          </a:p>
-          <a:p>
-            <a:pPr>
-              <a:spcAft>
-                <a:spcPts val="400"/>
-              </a:spcAft>
-            </a:pPr>
-            <a:r>
-              <a:rPr sz="1400" b="0" i="0">
-                <a:solidFill>
-                  <a:srgbClr val="FFFFFF"/>
-                </a:solidFill>
-                <a:latin typeface="Calibri"/>
-              </a:rPr>
-              <a:t>| Nombre               | RF-01           | Mascota.nombre        | obligatorio       |</a:t>
-            </a:r>
-          </a:p>
-          <a:p>
-            <a:pPr>
-              <a:spcAft>
-                <a:spcPts val="400"/>
-              </a:spcAft>
-            </a:pPr>
-            <a:r>
-              <a:rPr sz="1400" b="0" i="0">
-                <a:solidFill>
-                  <a:srgbClr val="FFFFFF"/>
-                </a:solidFill>
-                <a:latin typeface="Calibri"/>
-              </a:rPr>
-              <a:t>| Especie              | RF-01           | Mascota.especie       | lista cerrada     |</a:t>
-            </a:r>
-          </a:p>
-          <a:p>
-            <a:pPr>
-              <a:spcAft>
-                <a:spcPts val="400"/>
-              </a:spcAft>
-            </a:pPr>
-            <a:r>
-              <a:rPr sz="1400" b="0" i="0">
-                <a:solidFill>
-                  <a:srgbClr val="FFFFFF"/>
-                </a:solidFill>
-                <a:latin typeface="Calibri"/>
-              </a:rPr>
-              <a:t>| Fecha de nacimiento  | RF-02           | Mascota.fechaNac      | no futura         |</a:t>
-            </a:r>
-          </a:p>
-          <a:p>
-            <a:pPr>
-              <a:spcAft>
-                <a:spcPts val="400"/>
-              </a:spcAft>
-            </a:pPr>
-            <a:r>
-              <a:rPr sz="1400" b="0" i="0">
-                <a:solidFill>
-                  <a:srgbClr val="FFFFFF"/>
-                </a:solidFill>
-                <a:latin typeface="Calibri"/>
-              </a:rPr>
-              <a:t>| Dueno                | RF-01           | Mascota.idDueno (FK)  | debe existir      |</a:t>
-            </a:r>
-          </a:p>
-          <a:p>
-            <a:pPr>
-              <a:spcAft>
-                <a:spcPts val="400"/>
-              </a:spcAft>
-            </a:pPr>
-            <a:r>
-              <a:rPr sz="1400" b="0" i="0">
-                <a:solidFill>
-                  <a:srgbClr val="FFFFFF"/>
-                </a:solidFill>
-                <a:latin typeface="Calibri"/>
-              </a:rPr>
-              <a:t/>
-            </a:r>
-          </a:p>
-          <a:p>
-            <a:pPr>
-              <a:spcAft>
-                <a:spcPts val="400"/>
-              </a:spcAft>
-            </a:pPr>
-            <a:r>
-              <a:rPr sz="1400" b="0" i="0">
-                <a:solidFill>
-                  <a:srgbClr val="FFFFFF"/>
-                </a:solidFill>
-                <a:latin typeface="Calibri"/>
-              </a:rPr>
-              <a:t>-- Un campo sin RF que lo exija es un campo que nadie pidio: se quita o</a:t>
-            </a:r>
-          </a:p>
-          <a:p>
-            <a:pPr>
-              <a:spcAft>
-                <a:spcPts val="400"/>
-              </a:spcAft>
-            </a:pPr>
-            <a:r>
-              <a:rPr sz="1400" b="0" i="0">
-                <a:solidFill>
-                  <a:srgbClr val="FFFFFF"/>
-                </a:solidFill>
-                <a:latin typeface="Calibri"/>
-              </a:rPr>
-              <a:t>-- se agrega el requisito. Un atributo de la clase sin campo en ninguna</a:t>
-            </a:r>
-          </a:p>
-          <a:p>
-            <a:pPr>
-              <a:spcAft>
-                <a:spcPts val="400"/>
-              </a:spcAft>
-            </a:pPr>
-            <a:r>
-              <a:rPr sz="1400" b="0" i="0">
-                <a:solidFill>
-                  <a:srgbClr val="FFFFFF"/>
-                </a:solidFill>
-                <a:latin typeface="Calibri"/>
-              </a:rPr>
-              <a:t>-- pantalla es un dato que nadie puede ingresar.</a:t>
-            </a:r>
-          </a:p>
-        </p:txBody>
-      </p:sp>
-      <p:sp>
-        <p:nvSpPr>
-          <p:cNvPr id="9" name="TextBox 8"/>
-          <p:cNvSpPr txBox="1"/>
-          <p:nvPr/>
-        </p:nvSpPr>
-        <p:spPr>
-          <a:xfrm>
-            <a:off x="11185855" y="6473952"/>
-            <a:ext cx="640080" cy="274320"/>
-          </a:xfrm>
-          <a:prstGeom prst="rect">
-            <a:avLst/>
-          </a:prstGeom>
-          <a:noFill/>
-        </p:spPr>
-        <p:txBody>
-          <a:bodyPr wrap="square">
-            <a:spAutoFit/>
-          </a:bodyPr>
-          <a:lstStyle/>
-          <a:p>
-            <a:pPr algn="r"/>
-            <a:r>
-              <a:rPr sz="1100" b="0" i="0">
-                <a:solidFill>
-                  <a:srgbClr val="666666"/>
-                </a:solidFill>
-                <a:latin typeface="Calibri"/>
-              </a:rPr>
-              <a:t>14</a:t>
-            </a:r>
-          </a:p>
-        </p:txBody>
-      </p:sp>
-    </p:spTree>
-  </p:cSld>
-  <p:clrMapOvr>
-    <a:masterClrMapping/>
-  </p:clrMapOvr>
-</p:sld>
-</file>
-
-<file path=ppt/slides/slide15.xml><?xml version="1.0" encoding="utf-8"?>
-<p:sld xmlns:a="http://schemas.openxmlformats.org/drawingml/2006/main" xmlns:p="http://schemas.openxmlformats.org/presentationml/2006/main" xmlns:r="http://schemas.openxmlformats.org/officeDocument/2006/relationships">
-  <p:cSld>
-    <p:bg>
-      <p:bgPr>
-        <a:solidFill>
-          <a:srgbClr val="FFFFFF"/>
-        </a:solidFill>
-        <a:effectLst/>
-      </p:bgPr>
-    </p:bg>
-    <p:spTree>
-      <p:nvGrpSpPr>
-        <p:cNvPr id="1" name=""/>
-        <p:cNvGrpSpPr/>
-        <p:nvPr/>
-      </p:nvGrpSpPr>
-      <p:grpSpPr/>
-      <p:sp>
-        <p:nvSpPr>
-          <p:cNvPr id="2" name="Rectangle 1"/>
-          <p:cNvSpPr/>
-          <p:nvPr/>
-        </p:nvSpPr>
-        <p:spPr>
-          <a:xfrm>
-            <a:off x="0" y="0"/>
-            <a:ext cx="12191695" cy="960120"/>
-          </a:xfrm>
-          <a:prstGeom prst="rect">
-            <a:avLst/>
-          </a:prstGeom>
-          <a:solidFill>
-            <a:srgbClr val="095292"/>
-          </a:solidFill>
-          <a:ln>
-            <a:noFill/>
-          </a:ln>
-        </p:spPr>
-        <p:style>
-          <a:lnRef idx="1">
-            <a:schemeClr val="accent1"/>
-          </a:lnRef>
-          <a:fillRef idx="3">
-            <a:schemeClr val="accent1"/>
-          </a:fillRef>
-          <a:effectRef idx="2">
-            <a:schemeClr val="accent1"/>
-          </a:effectRef>
-          <a:fontRef idx="minor">
-            <a:schemeClr val="lt1"/>
-          </a:fontRef>
-        </p:style>
-        <p:txBody>
-          <a:bodyPr rtlCol="0" anchor="ctr"/>
-          <a:lstStyle/>
-          <a:p>
-            <a:pPr algn="ctr"/>
-          </a:p>
-        </p:txBody>
-      </p:sp>
-      <p:sp>
-        <p:nvSpPr>
-          <p:cNvPr id="3" name="Rectangle 2"/>
-          <p:cNvSpPr/>
-          <p:nvPr/>
-        </p:nvSpPr>
-        <p:spPr>
-          <a:xfrm>
-            <a:off x="0" y="960120"/>
-            <a:ext cx="12191695" cy="41148"/>
-          </a:xfrm>
-          <a:prstGeom prst="rect">
-            <a:avLst/>
-          </a:prstGeom>
-          <a:solidFill>
-            <a:srgbClr val="FFD000"/>
-          </a:solidFill>
-          <a:ln>
-            <a:noFill/>
-          </a:ln>
-        </p:spPr>
-        <p:style>
-          <a:lnRef idx="1">
-            <a:schemeClr val="accent1"/>
-          </a:lnRef>
-          <a:fillRef idx="3">
-            <a:schemeClr val="accent1"/>
-          </a:fillRef>
-          <a:effectRef idx="2">
-            <a:schemeClr val="accent1"/>
-          </a:effectRef>
-          <a:fontRef idx="minor">
-            <a:schemeClr val="lt1"/>
-          </a:fontRef>
-        </p:style>
-        <p:txBody>
-          <a:bodyPr rtlCol="0" anchor="ctr"/>
-          <a:lstStyle/>
-          <a:p>
-            <a:pPr algn="ctr"/>
-          </a:p>
-        </p:txBody>
-      </p:sp>
-      <p:sp>
-        <p:nvSpPr>
-          <p:cNvPr id="4" name="TextBox 3"/>
-          <p:cNvSpPr txBox="1"/>
-          <p:nvPr/>
-        </p:nvSpPr>
-        <p:spPr>
-          <a:xfrm>
-            <a:off x="457200" y="164592"/>
-            <a:ext cx="11277295" cy="502920"/>
-          </a:xfrm>
-          <a:prstGeom prst="rect">
-            <a:avLst/>
-          </a:prstGeom>
-          <a:noFill/>
-        </p:spPr>
-        <p:txBody>
-          <a:bodyPr wrap="square">
-            <a:spAutoFit/>
-          </a:bodyPr>
-          <a:lstStyle/>
-          <a:p>
-            <a:r>
-              <a:rPr sz="2600" b="1" i="0">
-                <a:solidFill>
-                  <a:srgbClr val="FFFFFF"/>
-                </a:solidFill>
-                <a:latin typeface="Calibri"/>
-              </a:rPr>
-              <a:t>Flujo de tarea de la clinica en Mermaid: registrar mascota y buscar expediente con caminos alternos</a:t>
-            </a:r>
-          </a:p>
-        </p:txBody>
-      </p:sp>
-      <p:sp>
-        <p:nvSpPr>
-          <p:cNvPr id="5" name="Rounded Rectangle 4"/>
-          <p:cNvSpPr/>
-          <p:nvPr/>
-        </p:nvSpPr>
-        <p:spPr>
-          <a:xfrm>
-            <a:off x="457200" y="1261872"/>
-            <a:ext cx="11277295" cy="4773168"/>
-          </a:xfrm>
-          <a:prstGeom prst="roundRect">
-            <a:avLst>
-              <a:gd name="adj" fmla="val 12000"/>
-            </a:avLst>
-          </a:prstGeom>
-          <a:solidFill>
-            <a:srgbClr val="1E2A38"/>
-          </a:solidFill>
-          <a:ln>
-            <a:noFill/>
-          </a:ln>
-        </p:spPr>
-        <p:style>
-          <a:lnRef idx="1">
-            <a:schemeClr val="accent1"/>
-          </a:lnRef>
-          <a:fillRef idx="3">
-            <a:schemeClr val="accent1"/>
-          </a:fillRef>
-          <a:effectRef idx="2">
-            <a:schemeClr val="accent1"/>
-          </a:effectRef>
-          <a:fontRef idx="minor">
-            <a:schemeClr val="lt1"/>
-          </a:fontRef>
-        </p:style>
-        <p:txBody>
-          <a:bodyPr rtlCol="0" anchor="ctr"/>
-          <a:lstStyle/>
-          <a:p>
-            <a:pPr algn="ctr"/>
-          </a:p>
-        </p:txBody>
-      </p:sp>
-      <p:sp>
-        <p:nvSpPr>
-          <p:cNvPr id="6" name="Rectangle 5"/>
-          <p:cNvSpPr/>
-          <p:nvPr/>
-        </p:nvSpPr>
-        <p:spPr>
-          <a:xfrm>
-            <a:off x="457200" y="1261872"/>
-            <a:ext cx="11277295" cy="320040"/>
-          </a:xfrm>
-          <a:prstGeom prst="rect">
-            <a:avLst/>
-          </a:prstGeom>
-          <a:solidFill>
-            <a:srgbClr val="095292"/>
-          </a:solidFill>
-          <a:ln>
-            <a:noFill/>
-          </a:ln>
-        </p:spPr>
-        <p:style>
-          <a:lnRef idx="1">
-            <a:schemeClr val="accent1"/>
-          </a:lnRef>
-          <a:fillRef idx="3">
-            <a:schemeClr val="accent1"/>
-          </a:fillRef>
-          <a:effectRef idx="2">
-            <a:schemeClr val="accent1"/>
-          </a:effectRef>
-          <a:fontRef idx="minor">
-            <a:schemeClr val="lt1"/>
-          </a:fontRef>
-        </p:style>
-        <p:txBody>
-          <a:bodyPr rtlCol="0" anchor="ctr"/>
-          <a:lstStyle/>
-          <a:p>
-            <a:pPr algn="ctr"/>
-          </a:p>
-        </p:txBody>
-      </p:sp>
-      <p:sp>
-        <p:nvSpPr>
-          <p:cNvPr id="7" name="TextBox 6"/>
-          <p:cNvSpPr txBox="1"/>
-          <p:nvPr/>
-        </p:nvSpPr>
-        <p:spPr>
-          <a:xfrm>
-            <a:off x="685800" y="1307592"/>
-            <a:ext cx="10820095" cy="256032"/>
-          </a:xfrm>
-          <a:prstGeom prst="rect">
-            <a:avLst/>
-          </a:prstGeom>
-          <a:noFill/>
-        </p:spPr>
-        <p:txBody>
-          <a:bodyPr wrap="square" anchor="ctr"/>
-          <a:lstStyle/>
-          <a:p>
-            <a:r>
-              <a:rPr sz="1000" b="1" i="0">
-                <a:solidFill>
-                  <a:srgbClr val="269CCB"/>
-                </a:solidFill>
-                <a:latin typeface="Calibri"/>
-              </a:rPr>
-              <a:t>● ● ●</a:t>
-            </a:r>
-          </a:p>
-        </p:txBody>
-      </p:sp>
-      <p:sp>
-        <p:nvSpPr>
-          <p:cNvPr id="8" name="TextBox 7"/>
-          <p:cNvSpPr txBox="1"/>
-          <p:nvPr/>
-        </p:nvSpPr>
-        <p:spPr>
-          <a:xfrm>
-            <a:off x="777240" y="1719072"/>
-            <a:ext cx="10637215" cy="4133087"/>
-          </a:xfrm>
-          <a:prstGeom prst="rect">
-            <a:avLst/>
-          </a:prstGeom>
-          <a:noFill/>
-        </p:spPr>
-        <p:txBody>
-          <a:bodyPr wrap="square">
-            <a:spAutoFit/>
-          </a:bodyPr>
-          <a:lstStyle/>
-          <a:p>
-            <a:pPr>
-              <a:spcAft>
-                <a:spcPts val="400"/>
-              </a:spcAft>
-            </a:pPr>
-            <a:r>
-              <a:rPr sz="1400" b="0" i="0">
-                <a:solidFill>
-                  <a:srgbClr val="FFFFFF"/>
-                </a:solidFill>
-                <a:latin typeface="Calibri"/>
-              </a:rPr>
-              <a:t>flowchart TD</a:t>
-            </a:r>
-          </a:p>
-          <a:p>
-            <a:pPr>
-              <a:spcAft>
-                <a:spcPts val="400"/>
-              </a:spcAft>
-            </a:pPr>
-            <a:r>
-              <a:rPr sz="1400" b="0" i="0">
-                <a:solidFill>
-                  <a:srgbClr val="FFFFFF"/>
-                </a:solidFill>
-                <a:latin typeface="Calibri"/>
-              </a:rPr>
-              <a:t>  A[Recepcion: llega el dueño con su mascota] --&gt; B{Dueño ya registrado?}</a:t>
-            </a:r>
-          </a:p>
-          <a:p>
-            <a:pPr>
-              <a:spcAft>
-                <a:spcPts val="400"/>
-              </a:spcAft>
-            </a:pPr>
-            <a:r>
-              <a:rPr sz="1400" b="0" i="0">
-                <a:solidFill>
-                  <a:srgbClr val="FFFFFF"/>
-                </a:solidFill>
-                <a:latin typeface="Calibri"/>
-              </a:rPr>
-              <a:t>  B -- No --&gt; C[Pantalla Registrar dueño]</a:t>
-            </a:r>
-          </a:p>
-          <a:p>
-            <a:pPr>
-              <a:spcAft>
-                <a:spcPts val="400"/>
-              </a:spcAft>
-            </a:pPr>
-            <a:r>
-              <a:rPr sz="1400" b="0" i="0">
-                <a:solidFill>
-                  <a:srgbClr val="FFFFFF"/>
-                </a:solidFill>
-                <a:latin typeface="Calibri"/>
-              </a:rPr>
-              <a:t>  B -- Si --&gt; D[Pantalla Registrar mascota]</a:t>
-            </a:r>
-          </a:p>
-          <a:p>
-            <a:pPr>
-              <a:spcAft>
-                <a:spcPts val="400"/>
-              </a:spcAft>
-            </a:pPr>
-            <a:r>
-              <a:rPr sz="1400" b="0" i="0">
-                <a:solidFill>
-                  <a:srgbClr val="FFFFFF"/>
-                </a:solidFill>
-                <a:latin typeface="Calibri"/>
-              </a:rPr>
-              <a:t>  C --&gt; D</a:t>
-            </a:r>
-          </a:p>
-          <a:p>
-            <a:pPr>
-              <a:spcAft>
-                <a:spcPts val="400"/>
-              </a:spcAft>
-            </a:pPr>
-            <a:r>
-              <a:rPr sz="1400" b="0" i="0">
-                <a:solidFill>
-                  <a:srgbClr val="FFFFFF"/>
-                </a:solidFill>
-                <a:latin typeface="Calibri"/>
-              </a:rPr>
-              <a:t>  D --&gt; E{Campos obligatorios completos?}</a:t>
-            </a:r>
-          </a:p>
-          <a:p>
-            <a:pPr>
-              <a:spcAft>
-                <a:spcPts val="400"/>
-              </a:spcAft>
-            </a:pPr>
-            <a:r>
-              <a:rPr sz="1400" b="0" i="0">
-                <a:solidFill>
-                  <a:srgbClr val="FFFFFF"/>
-                </a:solidFill>
-                <a:latin typeface="Calibri"/>
-              </a:rPr>
-              <a:t>  E -- No --&gt; F[Guardar deshabilitado + ayuda en el campo faltante]</a:t>
-            </a:r>
-          </a:p>
-          <a:p>
-            <a:pPr>
-              <a:spcAft>
-                <a:spcPts val="400"/>
-              </a:spcAft>
-            </a:pPr>
-            <a:r>
-              <a:rPr sz="1400" b="0" i="0">
-                <a:solidFill>
-                  <a:srgbClr val="FFFFFF"/>
-                </a:solidFill>
-                <a:latin typeface="Calibri"/>
-              </a:rPr>
-              <a:t>  F --&gt; D</a:t>
-            </a:r>
-          </a:p>
-          <a:p>
-            <a:pPr>
-              <a:spcAft>
-                <a:spcPts val="400"/>
-              </a:spcAft>
-            </a:pPr>
-            <a:r>
-              <a:rPr sz="1400" b="0" i="0">
-                <a:solidFill>
-                  <a:srgbClr val="FFFFFF"/>
-                </a:solidFill>
-                <a:latin typeface="Calibri"/>
-              </a:rPr>
-              <a:t>  E -- Si --&gt; G[Confirmacion: Ficha guardada, codigo M-0421]</a:t>
-            </a:r>
-          </a:p>
-          <a:p>
-            <a:pPr>
-              <a:spcAft>
-                <a:spcPts val="400"/>
-              </a:spcAft>
-            </a:pPr>
-            <a:r>
-              <a:rPr sz="1400" b="0" i="0">
-                <a:solidFill>
-                  <a:srgbClr val="FFFFFF"/>
-                </a:solidFill>
-                <a:latin typeface="Calibri"/>
-              </a:rPr>
-              <a:t>  G --&gt; H[Pantalla Buscar expediente]</a:t>
-            </a:r>
-          </a:p>
-          <a:p>
-            <a:pPr>
-              <a:spcAft>
-                <a:spcPts val="400"/>
-              </a:spcAft>
-            </a:pPr>
-            <a:r>
-              <a:rPr sz="1400" b="0" i="0">
-                <a:solidFill>
-                  <a:srgbClr val="FFFFFF"/>
-                </a:solidFill>
-                <a:latin typeface="Calibri"/>
-              </a:rPr>
-              <a:t>  H --&gt; I{Cuantos resultados?}</a:t>
-            </a:r>
-          </a:p>
-          <a:p>
-            <a:pPr>
-              <a:spcAft>
-                <a:spcPts val="400"/>
-              </a:spcAft>
-            </a:pPr>
-            <a:r>
-              <a:rPr sz="1400" b="0" i="0">
-                <a:solidFill>
-                  <a:srgbClr val="FFFFFF"/>
-                </a:solidFill>
-                <a:latin typeface="Calibri"/>
-              </a:rPr>
-              <a:t>  I -- Cero --&gt; J[Mensaje sin resultados + Buscar por otro criterio]</a:t>
-            </a:r>
-          </a:p>
-          <a:p>
-            <a:pPr>
-              <a:spcAft>
-                <a:spcPts val="400"/>
-              </a:spcAft>
-            </a:pPr>
-            <a:r>
-              <a:rPr sz="1400" b="0" i="0">
-                <a:solidFill>
-                  <a:srgbClr val="FFFFFF"/>
-                </a:solidFill>
-                <a:latin typeface="Calibri"/>
-              </a:rPr>
-              <a:t>  I -- Varios --&gt; K[Lista con especie, edad y dueño para desambiguar]</a:t>
-            </a:r>
-          </a:p>
-          <a:p>
-            <a:pPr>
-              <a:spcAft>
-                <a:spcPts val="400"/>
-              </a:spcAft>
-            </a:pPr>
-            <a:r>
-              <a:rPr sz="1400" b="0" i="0">
-                <a:solidFill>
-                  <a:srgbClr val="FFFFFF"/>
-                </a:solidFill>
-                <a:latin typeface="Calibri"/>
-              </a:rPr>
-              <a:t>  I -- Uno --&gt; L[Ficha del paciente]</a:t>
-            </a:r>
-          </a:p>
-        </p:txBody>
-      </p:sp>
-      <p:sp>
-        <p:nvSpPr>
-          <p:cNvPr id="9" name="TextBox 8"/>
-          <p:cNvSpPr txBox="1"/>
-          <p:nvPr/>
-        </p:nvSpPr>
-        <p:spPr>
-          <a:xfrm>
-            <a:off x="457200" y="6080760"/>
-            <a:ext cx="11277295" cy="320040"/>
-          </a:xfrm>
-          <a:prstGeom prst="rect">
-            <a:avLst/>
-          </a:prstGeom>
-          <a:noFill/>
-        </p:spPr>
-        <p:txBody>
-          <a:bodyPr wrap="square">
-            <a:spAutoFit/>
-          </a:bodyPr>
-          <a:lstStyle/>
-          <a:p>
-            <a:pPr algn="ctr"/>
-            <a:r>
-              <a:rPr sz="1200" b="0" i="1">
-                <a:solidFill>
-                  <a:srgbClr val="666666"/>
-                </a:solidFill>
-                <a:latin typeface="Calibri"/>
-              </a:rPr>
-              <a:t>La interfaz no son pantallas sueltas: es un camino con desvios, y los desvios son los que hay que diseñar.</a:t>
-            </a:r>
-          </a:p>
-        </p:txBody>
-      </p:sp>
-      <p:sp>
-        <p:nvSpPr>
-          <p:cNvPr id="10" name="TextBox 9"/>
-          <p:cNvSpPr txBox="1"/>
-          <p:nvPr/>
-        </p:nvSpPr>
-        <p:spPr>
-          <a:xfrm>
-            <a:off x="11185855" y="6473952"/>
-            <a:ext cx="640080" cy="274320"/>
-          </a:xfrm>
-          <a:prstGeom prst="rect">
-            <a:avLst/>
-          </a:prstGeom>
-          <a:noFill/>
-        </p:spPr>
-        <p:txBody>
-          <a:bodyPr wrap="square">
-            <a:spAutoFit/>
-          </a:bodyPr>
-          <a:lstStyle/>
-          <a:p>
-            <a:pPr algn="r"/>
-            <a:r>
-              <a:rPr sz="1100" b="0" i="0">
-                <a:solidFill>
-                  <a:srgbClr val="666666"/>
-                </a:solidFill>
-                <a:latin typeface="Calibri"/>
-              </a:rPr>
-              <a:t>15</a:t>
-            </a:r>
-          </a:p>
-        </p:txBody>
-      </p:sp>
-    </p:spTree>
-  </p:cSld>
-  <p:clrMapOvr>
-    <a:masterClrMapping/>
-  </p:clrMapOvr>
-</p:sld>
-</file>
-
-<file path=ppt/slides/slide16.xml><?xml version="1.0" encoding="utf-8"?>
-<p:sld xmlns:a="http://schemas.openxmlformats.org/drawingml/2006/main" xmlns:p="http://schemas.openxmlformats.org/presentationml/2006/main" xmlns:r="http://schemas.openxmlformats.org/officeDocument/2006/relationships">
-  <p:cSld>
-    <p:bg>
-      <p:bgPr>
-        <a:solidFill>
-          <a:srgbClr val="FFFFFF"/>
-        </a:solidFill>
-        <a:effectLst/>
-      </p:bgPr>
-    </p:bg>
-    <p:spTree>
-      <p:nvGrpSpPr>
-        <p:cNvPr id="1" name=""/>
-        <p:cNvGrpSpPr/>
-        <p:nvPr/>
-      </p:nvGrpSpPr>
-      <p:grpSpPr/>
-      <p:sp>
-        <p:nvSpPr>
-          <p:cNvPr id="2" name="Rectangle 1"/>
-          <p:cNvSpPr/>
-          <p:nvPr/>
-        </p:nvSpPr>
-        <p:spPr>
-          <a:xfrm>
-            <a:off x="0" y="0"/>
-            <a:ext cx="12191695" cy="960120"/>
-          </a:xfrm>
-          <a:prstGeom prst="rect">
-            <a:avLst/>
-          </a:prstGeom>
-          <a:solidFill>
-            <a:srgbClr val="095292"/>
-          </a:solidFill>
-          <a:ln>
-            <a:noFill/>
-          </a:ln>
-        </p:spPr>
-        <p:style>
-          <a:lnRef idx="1">
-            <a:schemeClr val="accent1"/>
-          </a:lnRef>
-          <a:fillRef idx="3">
-            <a:schemeClr val="accent1"/>
-          </a:fillRef>
-          <a:effectRef idx="2">
-            <a:schemeClr val="accent1"/>
-          </a:effectRef>
-          <a:fontRef idx="minor">
-            <a:schemeClr val="lt1"/>
-          </a:fontRef>
-        </p:style>
-        <p:txBody>
-          <a:bodyPr rtlCol="0" anchor="ctr"/>
-          <a:lstStyle/>
-          <a:p>
-            <a:pPr algn="ctr"/>
-          </a:p>
-        </p:txBody>
-      </p:sp>
-      <p:sp>
-        <p:nvSpPr>
-          <p:cNvPr id="3" name="Rectangle 2"/>
-          <p:cNvSpPr/>
-          <p:nvPr/>
-        </p:nvSpPr>
-        <p:spPr>
-          <a:xfrm>
-            <a:off x="0" y="960120"/>
-            <a:ext cx="12191695" cy="41148"/>
-          </a:xfrm>
-          <a:prstGeom prst="rect">
-            <a:avLst/>
-          </a:prstGeom>
-          <a:solidFill>
-            <a:srgbClr val="FFD000"/>
-          </a:solidFill>
-          <a:ln>
-            <a:noFill/>
-          </a:ln>
-        </p:spPr>
-        <p:style>
-          <a:lnRef idx="1">
-            <a:schemeClr val="accent1"/>
-          </a:lnRef>
-          <a:fillRef idx="3">
-            <a:schemeClr val="accent1"/>
-          </a:fillRef>
-          <a:effectRef idx="2">
-            <a:schemeClr val="accent1"/>
-          </a:effectRef>
-          <a:fontRef idx="minor">
-            <a:schemeClr val="lt1"/>
-          </a:fontRef>
-        </p:style>
-        <p:txBody>
-          <a:bodyPr rtlCol="0" anchor="ctr"/>
-          <a:lstStyle/>
-          <a:p>
-            <a:pPr algn="ctr"/>
-          </a:p>
-        </p:txBody>
-      </p:sp>
-      <p:sp>
-        <p:nvSpPr>
-          <p:cNvPr id="4" name="TextBox 3"/>
-          <p:cNvSpPr txBox="1"/>
-          <p:nvPr/>
-        </p:nvSpPr>
-        <p:spPr>
-          <a:xfrm>
-            <a:off x="457200" y="164592"/>
-            <a:ext cx="11277295" cy="502920"/>
-          </a:xfrm>
-          <a:prstGeom prst="rect">
-            <a:avLst/>
-          </a:prstGeom>
-          <a:noFill/>
-        </p:spPr>
-        <p:txBody>
-          <a:bodyPr wrap="square">
-            <a:spAutoFit/>
-          </a:bodyPr>
-          <a:lstStyle/>
-          <a:p>
-            <a:r>
-              <a:rPr sz="2600" b="1" i="0">
-                <a:solidFill>
-                  <a:srgbClr val="FFFFFF"/>
-                </a:solidFill>
-                <a:latin typeface="Calibri"/>
-              </a:rPr>
-              <a:t>Demo del dia</a:t>
-            </a:r>
-          </a:p>
-        </p:txBody>
-      </p:sp>
-      <p:sp>
-        <p:nvSpPr>
-          <p:cNvPr id="5" name="TextBox 4"/>
-          <p:cNvSpPr txBox="1"/>
-          <p:nvPr/>
-        </p:nvSpPr>
-        <p:spPr>
-          <a:xfrm>
-            <a:off x="457200" y="1170432"/>
-            <a:ext cx="11277295" cy="5230368"/>
-          </a:xfrm>
-          <a:prstGeom prst="rect">
-            <a:avLst/>
-          </a:prstGeom>
-          <a:noFill/>
-        </p:spPr>
-        <p:txBody>
-          <a:bodyPr wrap="square">
-            <a:spAutoFit/>
-          </a:bodyPr>
-          <a:lstStyle/>
-          <a:p>
-            <a:pPr>
-              <a:spcAft>
-                <a:spcPts val="800"/>
-              </a:spcAft>
-            </a:pPr>
-            <a:r>
-              <a:rPr sz="2000" b="0" i="0">
-                <a:solidFill>
-                  <a:srgbClr val="333333"/>
-                </a:solidFill>
-                <a:latin typeface="Calibri"/>
-              </a:rPr>
-              <a:t>–   </a:t>
-            </a:r>
-            <a:r>
-              <a:rPr sz="2000" b="1" i="0">
-                <a:solidFill>
-                  <a:srgbClr val="333333"/>
-                </a:solidFill>
-                <a:latin typeface="Calibri"/>
-              </a:rPr>
-              <a:t>Herramienta:</a:t>
-            </a:r>
-            <a:r>
-              <a:rPr sz="2000" b="0" i="0">
-                <a:solidFill>
-                  <a:srgbClr val="333333"/>
-                </a:solidFill>
-                <a:latin typeface="Calibri"/>
-              </a:rPr>
-              <a:t> Figma o Penpot · Excalidraw · Google Docs</a:t>
-            </a:r>
-          </a:p>
-          <a:p>
-            <a:pPr>
-              <a:spcAft>
-                <a:spcPts val="800"/>
-              </a:spcAft>
-            </a:pPr>
-            <a:r>
-              <a:rPr sz="2000" b="0" i="0">
-                <a:solidFill>
-                  <a:srgbClr val="333333"/>
-                </a:solidFill>
-                <a:latin typeface="Calibri"/>
-              </a:rPr>
-              <a:t>–   </a:t>
-            </a:r>
-            <a:r>
-              <a:rPr sz="2000" b="1" i="0">
-                <a:solidFill>
-                  <a:srgbClr val="333333"/>
-                </a:solidFill>
-                <a:latin typeface="Calibri"/>
-              </a:rPr>
-              <a:t>Demo:</a:t>
-            </a:r>
-            <a:r>
-              <a:rPr sz="2000" b="0" i="0">
-                <a:solidFill>
-                  <a:srgbClr val="333333"/>
-                </a:solidFill>
-                <a:latin typeface="Calibri"/>
-              </a:rPr>
-              <a:t> Se dibuja en vivo el wireframe de Registrar mascota en Penpot, le pone tres anotaciones numeradas y lo conecta con Buscar expediente para que la clase vea en la misma pantalla la diferencia entre wireframe, mockup y prototipo.</a:t>
-            </a:r>
-          </a:p>
-          <a:p>
-            <a:pPr>
-              <a:spcAft>
-                <a:spcPts val="800"/>
-              </a:spcAft>
-            </a:pPr>
-            <a:r>
-              <a:rPr sz="2000" b="0" i="0">
-                <a:solidFill>
-                  <a:srgbClr val="333333"/>
-                </a:solidFill>
-                <a:latin typeface="Calibri"/>
-              </a:rPr>
-              <a:t>–   Mismo dominio: la clinica veterinaria — no otro ejemplo. Aqui se diseña, no se programa.</a:t>
-            </a:r>
-          </a:p>
-        </p:txBody>
-      </p:sp>
-      <p:sp>
-        <p:nvSpPr>
-          <p:cNvPr id="6" name="TextBox 5"/>
-          <p:cNvSpPr txBox="1"/>
-          <p:nvPr/>
-        </p:nvSpPr>
-        <p:spPr>
-          <a:xfrm>
-            <a:off x="11185855" y="6473952"/>
-            <a:ext cx="640080" cy="274320"/>
-          </a:xfrm>
-          <a:prstGeom prst="rect">
-            <a:avLst/>
-          </a:prstGeom>
-          <a:noFill/>
-        </p:spPr>
-        <p:txBody>
-          <a:bodyPr wrap="square">
-            <a:spAutoFit/>
-          </a:bodyPr>
-          <a:lstStyle/>
-          <a:p>
-            <a:pPr algn="r"/>
-            <a:r>
-              <a:rPr sz="1100" b="0" i="0">
-                <a:solidFill>
-                  <a:srgbClr val="666666"/>
-                </a:solidFill>
-                <a:latin typeface="Calibri"/>
-              </a:rPr>
-              <a:t>16</a:t>
-            </a:r>
-          </a:p>
-        </p:txBody>
-      </p:sp>
-    </p:spTree>
-  </p:cSld>
-  <p:clrMapOvr>
-    <a:masterClrMapping/>
-  </p:clrMapOvr>
-</p:sld>
-</file>
-
-<file path=ppt/slides/slide17.xml><?xml version="1.0" encoding="utf-8"?>
-<p:sld xmlns:a="http://schemas.openxmlformats.org/drawingml/2006/main" xmlns:p="http://schemas.openxmlformats.org/presentationml/2006/main" xmlns:r="http://schemas.openxmlformats.org/officeDocument/2006/relationships">
-  <p:cSld>
-    <p:bg>
-      <p:bgPr>
-        <a:solidFill>
-          <a:srgbClr val="FFFFFF"/>
-        </a:solidFill>
-        <a:effectLst/>
-      </p:bgPr>
-    </p:bg>
-    <p:spTree>
-      <p:nvGrpSpPr>
-        <p:cNvPr id="1" name=""/>
-        <p:cNvGrpSpPr/>
-        <p:nvPr/>
-      </p:nvGrpSpPr>
-      <p:grpSpPr/>
-      <p:sp>
-        <p:nvSpPr>
-          <p:cNvPr id="2" name="Rectangle 1"/>
-          <p:cNvSpPr/>
-          <p:nvPr/>
-        </p:nvSpPr>
-        <p:spPr>
-          <a:xfrm>
-            <a:off x="0" y="0"/>
             <a:ext cx="12191695" cy="164592"/>
           </a:xfrm>
           <a:prstGeom prst="rect">
@@ -7016,14 +7013,118 @@
       </p:sp>
       <p:sp>
         <p:nvSpPr>
-          <p:cNvPr id="5" name="TextBox 4"/>
+          <p:cNvPr id="5" name="Rounded Rectangle 4"/>
+          <p:cNvSpPr/>
+          <p:nvPr/>
+        </p:nvSpPr>
+        <p:spPr>
+          <a:xfrm>
+            <a:off x="5797149" y="1573813"/>
+            <a:ext cx="6010497" cy="4057845"/>
+          </a:xfrm>
+          <a:prstGeom prst="roundRect">
+            <a:avLst>
+              <a:gd name="adj" fmla="val 4000"/>
+            </a:avLst>
+          </a:prstGeom>
+          <a:solidFill>
+            <a:srgbClr val="E8EEF4"/>
+          </a:solidFill>
+          <a:ln>
+            <a:noFill/>
+          </a:ln>
+        </p:spPr>
+        <p:style>
+          <a:lnRef idx="1">
+            <a:schemeClr val="accent1"/>
+          </a:lnRef>
+          <a:fillRef idx="3">
+            <a:schemeClr val="accent1"/>
+          </a:fillRef>
+          <a:effectRef idx="2">
+            <a:schemeClr val="accent1"/>
+          </a:effectRef>
+          <a:fontRef idx="minor">
+            <a:schemeClr val="lt1"/>
+          </a:fontRef>
+        </p:style>
+        <p:txBody>
+          <a:bodyPr rtlCol="0" anchor="ctr"/>
+          <a:lstStyle/>
+          <a:p>
+            <a:pPr algn="ctr"/>
+          </a:p>
+        </p:txBody>
+      </p:sp>
+      <p:pic>
+        <p:nvPicPr>
+          <p:cNvPr id="6" name="Picture 5" descr="notebook-planning-desk-coffee.jpg"/>
+          <p:cNvPicPr>
+            <a:picLocks noChangeAspect="1"/>
+          </p:cNvPicPr>
+          <p:nvPr/>
+        </p:nvPicPr>
+        <p:blipFill>
+          <a:blip r:embed="rId2"/>
+          <a:stretch>
+            <a:fillRect/>
+          </a:stretch>
+        </p:blipFill>
+        <p:spPr>
+          <a:xfrm>
+            <a:off x="5870301" y="1646965"/>
+            <a:ext cx="5864193" cy="3911541"/>
+          </a:xfrm>
+          <a:prstGeom prst="rect">
+            <a:avLst/>
+          </a:prstGeom>
+        </p:spPr>
+      </p:pic>
+      <p:sp>
+        <p:nvSpPr>
+          <p:cNvPr id="7" name="TextBox 6"/>
           <p:cNvSpPr txBox="1"/>
           <p:nvPr/>
         </p:nvSpPr>
         <p:spPr>
           <a:xfrm>
-            <a:off x="457200" y="1170432"/>
-            <a:ext cx="11277295" cy="5230368"/>
+            <a:off x="5870301" y="5961888"/>
+            <a:ext cx="5864193" cy="320040"/>
+          </a:xfrm>
+          <a:prstGeom prst="rect">
+            <a:avLst/>
+          </a:prstGeom>
+          <a:noFill/>
+        </p:spPr>
+        <p:txBody>
+          <a:bodyPr wrap="square">
+            <a:spAutoFit/>
+          </a:bodyPr>
+          <a:lstStyle/>
+          <a:p>
+            <a:pPr algn="ctr"/>
+            <a:r>
+              <a:rPr sz="1100" b="0" i="1">
+                <a:solidFill>
+                  <a:srgbClr val="666666"/>
+                </a:solidFill>
+                <a:latin typeface="Calibri"/>
+              </a:rPr>
+              <a:t>Foto: Cup of  Couple · Pexels</a:t>
+            </a:r>
+          </a:p>
+        </p:txBody>
+      </p:sp>
+      <p:sp>
+        <p:nvSpPr>
+          <p:cNvPr id="8" name="TextBox 7"/>
+          <p:cNvSpPr txBox="1"/>
+          <p:nvPr/>
+        </p:nvSpPr>
+        <p:spPr>
+          <a:xfrm>
+            <a:off x="457200" y="1353312"/>
+            <a:ext cx="5093061" cy="5047488"/>
           </a:xfrm>
           <a:prstGeom prst="rect">
             <a:avLst/>
@@ -7148,7 +7249,7 @@
       </p:sp>
       <p:sp>
         <p:nvSpPr>
-          <p:cNvPr id="6" name="TextBox 5"/>
+          <p:cNvPr id="9" name="TextBox 8"/>
           <p:cNvSpPr txBox="1"/>
           <p:nvPr/>
         </p:nvSpPr>
@@ -8174,21 +8275,173 @@
                 </a:solidFill>
                 <a:latin typeface="Calibri"/>
               </a:rPr>
-              <a:t>Un wireframe, un mockup y un prototipo no son tres nombres elegantes... (1/2)</a:t>
-            </a:r>
-          </a:p>
-        </p:txBody>
-      </p:sp>
-      <p:sp>
-        <p:nvSpPr>
-          <p:cNvPr id="5" name="TextBox 4"/>
+              <a:t>Wireframe, mockup y prototipo</a:t>
+            </a:r>
+          </a:p>
+        </p:txBody>
+      </p:sp>
+      <p:sp>
+        <p:nvSpPr>
+          <p:cNvPr id="5" name="Rounded Rectangle 4"/>
+          <p:cNvSpPr/>
+          <p:nvPr/>
+        </p:nvSpPr>
+        <p:spPr>
+          <a:xfrm>
+            <a:off x="5803166" y="1188719"/>
+            <a:ext cx="5998464" cy="4828032"/>
+          </a:xfrm>
+          <a:prstGeom prst="roundRect">
+            <a:avLst>
+              <a:gd name="adj" fmla="val 4000"/>
+            </a:avLst>
+          </a:prstGeom>
+          <a:solidFill>
+            <a:srgbClr val="E8EEF4"/>
+          </a:solidFill>
+          <a:ln>
+            <a:noFill/>
+          </a:ln>
+        </p:spPr>
+        <p:style>
+          <a:lnRef idx="1">
+            <a:schemeClr val="accent1"/>
+          </a:lnRef>
+          <a:fillRef idx="3">
+            <a:schemeClr val="accent1"/>
+          </a:fillRef>
+          <a:effectRef idx="2">
+            <a:schemeClr val="accent1"/>
+          </a:effectRef>
+          <a:fontRef idx="minor">
+            <a:schemeClr val="lt1"/>
+          </a:fontRef>
+        </p:style>
+        <p:txBody>
+          <a:bodyPr rtlCol="0" anchor="ctr"/>
+          <a:lstStyle/>
+          <a:p>
+            <a:pPr algn="ctr"/>
+          </a:p>
+        </p:txBody>
+      </p:sp>
+      <p:pic>
+        <p:nvPicPr>
+          <p:cNvPr id="6" name="Picture 5" descr="wire-mock-proto-paso1.png"/>
+          <p:cNvPicPr>
+            <a:picLocks noChangeAspect="1"/>
+          </p:cNvPicPr>
+          <p:nvPr/>
+        </p:nvPicPr>
+        <p:blipFill>
+          <a:blip r:embed="rId2"/>
+          <a:stretch>
+            <a:fillRect/>
+          </a:stretch>
+        </p:blipFill>
+        <p:spPr>
+          <a:xfrm>
+            <a:off x="5876318" y="1261872"/>
+            <a:ext cx="5852160" cy="4681728"/>
+          </a:xfrm>
+          <a:prstGeom prst="rect">
+            <a:avLst/>
+          </a:prstGeom>
+        </p:spPr>
+      </p:pic>
+      <p:pic>
+        <p:nvPicPr>
+          <p:cNvPr id="7" name="Picture 6" descr="wire-mock-proto-paso2.png"/>
+          <p:cNvPicPr>
+            <a:picLocks noChangeAspect="1"/>
+          </p:cNvPicPr>
+          <p:nvPr/>
+        </p:nvPicPr>
+        <p:blipFill>
+          <a:blip r:embed="rId3"/>
+          <a:stretch>
+            <a:fillRect/>
+          </a:stretch>
+        </p:blipFill>
+        <p:spPr>
+          <a:xfrm>
+            <a:off x="5876318" y="1261872"/>
+            <a:ext cx="5852160" cy="4681728"/>
+          </a:xfrm>
+          <a:prstGeom prst="rect">
+            <a:avLst/>
+          </a:prstGeom>
+        </p:spPr>
+      </p:pic>
+      <p:pic>
+        <p:nvPicPr>
+          <p:cNvPr id="8" name="Picture 7" descr="wire-mock-proto-paso3.png"/>
+          <p:cNvPicPr>
+            <a:picLocks noChangeAspect="1"/>
+          </p:cNvPicPr>
+          <p:nvPr/>
+        </p:nvPicPr>
+        <p:blipFill>
+          <a:blip r:embed="rId4"/>
+          <a:stretch>
+            <a:fillRect/>
+          </a:stretch>
+        </p:blipFill>
+        <p:spPr>
+          <a:xfrm>
+            <a:off x="5876318" y="1261872"/>
+            <a:ext cx="5852160" cy="4681728"/>
+          </a:xfrm>
+          <a:prstGeom prst="rect">
+            <a:avLst/>
+          </a:prstGeom>
+        </p:spPr>
+      </p:pic>
+      <p:sp>
+        <p:nvSpPr>
+          <p:cNvPr id="13" name="TextBox 12"/>
           <p:cNvSpPr txBox="1"/>
           <p:nvPr/>
         </p:nvSpPr>
         <p:spPr>
           <a:xfrm>
-            <a:off x="457200" y="1170432"/>
-            <a:ext cx="11277295" cy="5230368"/>
+            <a:off x="5870301" y="5961888"/>
+            <a:ext cx="5864193" cy="320040"/>
+          </a:xfrm>
+          <a:prstGeom prst="rect">
+            <a:avLst/>
+          </a:prstGeom>
+          <a:noFill/>
+        </p:spPr>
+        <p:txBody>
+          <a:bodyPr wrap="square">
+            <a:spAutoFit/>
+          </a:bodyPr>
+          <a:lstStyle/>
+          <a:p>
+            <a:pPr algn="ctr"/>
+            <a:r>
+              <a:rPr sz="1100" b="0" i="1">
+                <a:solidFill>
+                  <a:srgbClr val="666666"/>
+                </a:solidFill>
+                <a:latin typeface="Calibri"/>
+              </a:rPr>
+              <a:t>Clic para avanzar la animación</a:t>
+            </a:r>
+          </a:p>
+        </p:txBody>
+      </p:sp>
+      <p:sp>
+        <p:nvSpPr>
+          <p:cNvPr id="14" name="TextBox 13"/>
+          <p:cNvSpPr txBox="1"/>
+          <p:nvPr/>
+        </p:nvSpPr>
+        <p:spPr>
+          <a:xfrm>
+            <a:off x="457200" y="1353312"/>
+            <a:ext cx="5093061" cy="5047488"/>
           </a:xfrm>
           <a:prstGeom prst="rect">
             <a:avLst/>
@@ -8213,7 +8466,7 @@
                 </a:solidFill>
                 <a:latin typeface="Calibri"/>
               </a:rPr>
-              <a:t>–   Un wireframe, un mockup y un prototipo no son tres nombres elegantes para lo mismo: son tres momentos distintos del diseño y cada uno responde una pregunta diferente.</a:t>
+              <a:t>–   Wireframe: esqueleto en gris. ¿Qué información va y en qué orden se lee?</a:t>
             </a:r>
           </a:p>
           <a:p>
@@ -8229,7 +8482,7 @@
                 </a:solidFill>
                 <a:latin typeface="Calibri"/>
               </a:rPr>
-              <a:t>–   El wireframe es el esqueleto en gris, cajas, lineas y etiquetas, sin colores ni logos, y responde a la pregunta que informacion va en esta pantalla y en que orden la va a leer la persona.</a:t>
+              <a:t>–   Mockup: la foto fija de cómo se verá: tipografía, color, iconos. ¿Cómo se ve?</a:t>
             </a:r>
           </a:p>
           <a:p>
@@ -8245,7 +8498,7 @@
                 </a:solidFill>
                 <a:latin typeface="Calibri"/>
               </a:rPr>
-              <a:t>–   El mockup ya es la foto fija de como se vera: tipografia, color, iconos, el logo de la clinica, los espacios reales entre elementos; responde a la pregunta como se ve.</a:t>
+              <a:t>–   Prototipo: el mockup con clic. ¿Cómo se siente usarlo?</a:t>
             </a:r>
           </a:p>
           <a:p>
@@ -8261,30 +8514,14 @@
                 </a:solidFill>
                 <a:latin typeface="Calibri"/>
               </a:rPr>
-              <a:t>–   El prototipo es el mockup con clic, es decir uno oprime Guardar y la herramienta lo lleva a otra pantalla; responde a la pregunta como se siente usarlo.</a:t>
-            </a:r>
-          </a:p>
-          <a:p>
-            <a:pPr>
-              <a:spcAft>
-                <a:spcPts val="800"/>
-              </a:spcAft>
-            </a:pPr>
-            <a:r>
-              <a:rPr sz="2000" b="0" i="0">
-                <a:solidFill>
-                  <a:srgbClr val="333333"/>
-                </a:solidFill>
-                <a:latin typeface="Calibri"/>
-              </a:rPr>
-              <a:t>–   En la clinica esto se traduce asi: el wireframe de Registrar mascota se hace en diez minutos en Excalidraw y solo dice que arriba va la busqueda del dueño, en el centro los datos de la mascota y abajo el boton Guardar</a:t>
-            </a:r>
-          </a:p>
-        </p:txBody>
-      </p:sp>
-      <p:sp>
-        <p:nvSpPr>
-          <p:cNvPr id="6" name="TextBox 5"/>
+              <a:t>–   Mover una caja en un wireframe cuesta treinta segundos; ya programada, dos sesiones.</a:t>
+            </a:r>
+          </a:p>
+        </p:txBody>
+      </p:sp>
+      <p:sp>
+        <p:nvSpPr>
+          <p:cNvPr id="15" name="TextBox 14"/>
           <p:cNvSpPr txBox="1"/>
           <p:nvPr/>
         </p:nvSpPr>
@@ -8322,6 +8559,142 @@
   <p:clrMapOvr>
     <a:masterClrMapping/>
   </p:clrMapOvr>
+  <p:timing>
+    <p:tnLst>
+      <p:par>
+        <p:cTn id="1" dur="indefinite" restart="never" nodeType="tmRoot">
+          <p:childTnLst>
+            <p:seq concurrent="1" nextAc="seek">
+              <p:cTn id="2" dur="indefinite" nodeType="mainSeq">
+                <p:childTnLst>
+                  <p:par>
+                    <p:cTn id="3" fill="hold">
+                      <p:stCondLst>
+                        <p:cond delay="indefinite"/>
+                      </p:stCondLst>
+                      <p:childTnLst>
+                        <p:par>
+                          <p:cTn id="4" fill="hold">
+                            <p:stCondLst>
+                              <p:cond delay="0"/>
+                            </p:stCondLst>
+                            <p:childTnLst>
+                              <p:par>
+                                <p:cTn id="5" presetID="10" presetClass="entr" presetSubtype="0" fill="hold" nodeType="clickEffect">
+                                  <p:stCondLst>
+                                    <p:cond delay="0"/>
+                                  </p:stCondLst>
+                                  <p:childTnLst>
+                                    <p:set>
+                                      <p:cBhvr>
+                                        <p:cTn id="6" dur="1" fill="hold">
+                                          <p:stCondLst>
+                                            <p:cond delay="0"/>
+                                          </p:stCondLst>
+                                        </p:cTn>
+                                        <p:tgtEl>
+                                          <p:spTgt spid="7"/>
+                                        </p:tgtEl>
+                                        <p:attrNameLst>
+                                          <p:attrName>style.visibility</p:attrName>
+                                        </p:attrNameLst>
+                                      </p:cBhvr>
+                                      <p:to>
+                                        <p:strVal val="visible"/>
+                                      </p:to>
+                                    </p:set>
+                                    <p:animEffect transition="in" filter="fade">
+                                      <p:cBhvr>
+                                        <p:cTn id="7" dur="450"/>
+                                        <p:tgtEl>
+                                          <p:spTgt spid="7"/>
+                                        </p:tgtEl>
+                                      </p:cBhvr>
+                                    </p:animEffect>
+                                  </p:childTnLst>
+                                </p:cTn>
+                              </p:par>
+                            </p:childTnLst>
+                          </p:cTn>
+                        </p:par>
+                      </p:childTnLst>
+                    </p:cTn>
+                  </p:par>
+                  <p:par>
+                    <p:cTn id="8" fill="hold">
+                      <p:stCondLst>
+                        <p:cond delay="indefinite"/>
+                      </p:stCondLst>
+                      <p:childTnLst>
+                        <p:par>
+                          <p:cTn id="9" fill="hold">
+                            <p:stCondLst>
+                              <p:cond delay="0"/>
+                            </p:stCondLst>
+                            <p:childTnLst>
+                              <p:par>
+                                <p:cTn id="10" presetID="10" presetClass="entr" presetSubtype="0" fill="hold" nodeType="clickEffect">
+                                  <p:stCondLst>
+                                    <p:cond delay="0"/>
+                                  </p:stCondLst>
+                                  <p:childTnLst>
+                                    <p:set>
+                                      <p:cBhvr>
+                                        <p:cTn id="11" dur="1" fill="hold">
+                                          <p:stCondLst>
+                                            <p:cond delay="0"/>
+                                          </p:stCondLst>
+                                        </p:cTn>
+                                        <p:tgtEl>
+                                          <p:spTgt spid="8"/>
+                                        </p:tgtEl>
+                                        <p:attrNameLst>
+                                          <p:attrName>style.visibility</p:attrName>
+                                        </p:attrNameLst>
+                                      </p:cBhvr>
+                                      <p:to>
+                                        <p:strVal val="visible"/>
+                                      </p:to>
+                                    </p:set>
+                                    <p:animEffect transition="in" filter="fade">
+                                      <p:cBhvr>
+                                        <p:cTn id="12" dur="450"/>
+                                        <p:tgtEl>
+                                          <p:spTgt spid="8"/>
+                                        </p:tgtEl>
+                                      </p:cBhvr>
+                                    </p:animEffect>
+                                  </p:childTnLst>
+                                </p:cTn>
+                              </p:par>
+                            </p:childTnLst>
+                          </p:cTn>
+                        </p:par>
+                      </p:childTnLst>
+                    </p:cTn>
+                  </p:par>
+                </p:childTnLst>
+              </p:cTn>
+              <p:prevCondLst>
+                <p:cond evt="onPrev" delay="0">
+                  <p:tgtEl>
+                    <p:sldTgt/>
+                  </p:tgtEl>
+                </p:cond>
+              </p:prevCondLst>
+              <p:nextCondLst>
+                <p:cond evt="onNext" delay="0">
+                  <p:tgtEl>
+                    <p:sldTgt/>
+                  </p:tgtEl>
+                </p:cond>
+              </p:nextCondLst>
+            </p:seq>
+          </p:childTnLst>
+        </p:cTn>
+      </p:par>
+    </p:tnLst>
+  </p:timing>
 </p:sld>
 </file>
 
@@ -8458,21 +8831,197 @@
                 </a:solidFill>
                 <a:latin typeface="Calibri"/>
               </a:rPr>
-              <a:t>Un wireframe, un mockup y un prototipo no son tres nombres elegantes... (2/2)</a:t>
-            </a:r>
-          </a:p>
-        </p:txBody>
-      </p:sp>
-      <p:sp>
-        <p:nvSpPr>
-          <p:cNvPr id="5" name="TextBox 4"/>
+              <a:t>Cuatro principios de usabilidad</a:t>
+            </a:r>
+          </a:p>
+        </p:txBody>
+      </p:sp>
+      <p:sp>
+        <p:nvSpPr>
+          <p:cNvPr id="5" name="Rounded Rectangle 4"/>
+          <p:cNvSpPr/>
+          <p:nvPr/>
+        </p:nvSpPr>
+        <p:spPr>
+          <a:xfrm>
+            <a:off x="5803166" y="1188719"/>
+            <a:ext cx="5998464" cy="4828032"/>
+          </a:xfrm>
+          <a:prstGeom prst="roundRect">
+            <a:avLst>
+              <a:gd name="adj" fmla="val 4000"/>
+            </a:avLst>
+          </a:prstGeom>
+          <a:solidFill>
+            <a:srgbClr val="E8EEF4"/>
+          </a:solidFill>
+          <a:ln>
+            <a:noFill/>
+          </a:ln>
+        </p:spPr>
+        <p:style>
+          <a:lnRef idx="1">
+            <a:schemeClr val="accent1"/>
+          </a:lnRef>
+          <a:fillRef idx="3">
+            <a:schemeClr val="accent1"/>
+          </a:fillRef>
+          <a:effectRef idx="2">
+            <a:schemeClr val="accent1"/>
+          </a:effectRef>
+          <a:fontRef idx="minor">
+            <a:schemeClr val="lt1"/>
+          </a:fontRef>
+        </p:style>
+        <p:txBody>
+          <a:bodyPr rtlCol="0" anchor="ctr"/>
+          <a:lstStyle/>
+          <a:p>
+            <a:pPr algn="ctr"/>
+          </a:p>
+        </p:txBody>
+      </p:sp>
+      <p:pic>
+        <p:nvPicPr>
+          <p:cNvPr id="6" name="Picture 5" descr="usabilidad-paso1.png"/>
+          <p:cNvPicPr>
+            <a:picLocks noChangeAspect="1"/>
+          </p:cNvPicPr>
+          <p:nvPr/>
+        </p:nvPicPr>
+        <p:blipFill>
+          <a:blip r:embed="rId2"/>
+          <a:stretch>
+            <a:fillRect/>
+          </a:stretch>
+        </p:blipFill>
+        <p:spPr>
+          <a:xfrm>
+            <a:off x="5876318" y="1261872"/>
+            <a:ext cx="5852160" cy="4681728"/>
+          </a:xfrm>
+          <a:prstGeom prst="rect">
+            <a:avLst/>
+          </a:prstGeom>
+        </p:spPr>
+      </p:pic>
+      <p:pic>
+        <p:nvPicPr>
+          <p:cNvPr id="7" name="Picture 6" descr="usabilidad-paso2.png"/>
+          <p:cNvPicPr>
+            <a:picLocks noChangeAspect="1"/>
+          </p:cNvPicPr>
+          <p:nvPr/>
+        </p:nvPicPr>
+        <p:blipFill>
+          <a:blip r:embed="rId3"/>
+          <a:stretch>
+            <a:fillRect/>
+          </a:stretch>
+        </p:blipFill>
+        <p:spPr>
+          <a:xfrm>
+            <a:off x="5876318" y="1261872"/>
+            <a:ext cx="5852160" cy="4681728"/>
+          </a:xfrm>
+          <a:prstGeom prst="rect">
+            <a:avLst/>
+          </a:prstGeom>
+        </p:spPr>
+      </p:pic>
+      <p:pic>
+        <p:nvPicPr>
+          <p:cNvPr id="8" name="Picture 7" descr="usabilidad-paso3.png"/>
+          <p:cNvPicPr>
+            <a:picLocks noChangeAspect="1"/>
+          </p:cNvPicPr>
+          <p:nvPr/>
+        </p:nvPicPr>
+        <p:blipFill>
+          <a:blip r:embed="rId4"/>
+          <a:stretch>
+            <a:fillRect/>
+          </a:stretch>
+        </p:blipFill>
+        <p:spPr>
+          <a:xfrm>
+            <a:off x="5876318" y="1261872"/>
+            <a:ext cx="5852160" cy="4681728"/>
+          </a:xfrm>
+          <a:prstGeom prst="rect">
+            <a:avLst/>
+          </a:prstGeom>
+        </p:spPr>
+      </p:pic>
+      <p:pic>
+        <p:nvPicPr>
+          <p:cNvPr id="9" name="Picture 8" descr="usabilidad-paso4.png"/>
+          <p:cNvPicPr>
+            <a:picLocks noChangeAspect="1"/>
+          </p:cNvPicPr>
+          <p:nvPr/>
+        </p:nvPicPr>
+        <p:blipFill>
+          <a:blip r:embed="rId5"/>
+          <a:stretch>
+            <a:fillRect/>
+          </a:stretch>
+        </p:blipFill>
+        <p:spPr>
+          <a:xfrm>
+            <a:off x="5876318" y="1261872"/>
+            <a:ext cx="5852160" cy="4681728"/>
+          </a:xfrm>
+          <a:prstGeom prst="rect">
+            <a:avLst/>
+          </a:prstGeom>
+        </p:spPr>
+      </p:pic>
+      <p:sp>
+        <p:nvSpPr>
+          <p:cNvPr id="18" name="TextBox 17"/>
           <p:cNvSpPr txBox="1"/>
           <p:nvPr/>
         </p:nvSpPr>
         <p:spPr>
           <a:xfrm>
-            <a:off x="457200" y="1170432"/>
-            <a:ext cx="11277295" cy="5230368"/>
+            <a:off x="5870301" y="5961888"/>
+            <a:ext cx="5864193" cy="320040"/>
+          </a:xfrm>
+          <a:prstGeom prst="rect">
+            <a:avLst/>
+          </a:prstGeom>
+          <a:noFill/>
+        </p:spPr>
+        <p:txBody>
+          <a:bodyPr wrap="square">
+            <a:spAutoFit/>
+          </a:bodyPr>
+          <a:lstStyle/>
+          <a:p>
+            <a:pPr algn="ctr"/>
+            <a:r>
+              <a:rPr sz="1100" b="0" i="1">
+                <a:solidFill>
+                  <a:srgbClr val="666666"/>
+                </a:solidFill>
+                <a:latin typeface="Calibri"/>
+              </a:rPr>
+              <a:t>Clic para avanzar la animación</a:t>
+            </a:r>
+          </a:p>
+        </p:txBody>
+      </p:sp>
+      <p:sp>
+        <p:nvSpPr>
+          <p:cNvPr id="19" name="TextBox 18"/>
+          <p:cNvSpPr txBox="1"/>
+          <p:nvPr/>
+        </p:nvSpPr>
+        <p:spPr>
+          <a:xfrm>
+            <a:off x="457200" y="1353312"/>
+            <a:ext cx="5093061" cy="5047488"/>
           </a:xfrm>
           <a:prstGeom prst="rect">
             <a:avLst/>
@@ -8497,7 +9046,7 @@
                 </a:solidFill>
                 <a:latin typeface="Calibri"/>
               </a:rPr>
-              <a:t>–   El mockup de esa misma pantalla ya usa el verde de la clinica y una tipografia grande porque la recepcionista tiene el monitor lejos; y el prototipo permite que el docente, en la sustentacion, oprima Guardar y aterrice en la ficha del paciente recien creado.</a:t>
+              <a:t>–   Visibilidad del estado: «Ficha guardada, código M-0421» y el botón deshabilitado mientras guarda.</a:t>
             </a:r>
           </a:p>
           <a:p>
@@ -8513,7 +9062,7 @@
                 </a:solidFill>
                 <a:latin typeface="Calibri"/>
               </a:rPr>
-              <a:t>–   La razon de hacerlo en ese orden es puramente economica: mover una caja en un wireframe cuesta treinta segundos, mover esa misma caja cuando ya esta programada en Programacion II cuesta dos sesiones de trabajo.</a:t>
+              <a:t>–   Prevención de errores: calendario en vez de teclear, especie de una lista cerrada.</a:t>
             </a:r>
           </a:p>
           <a:p>
@@ -8529,14 +9078,30 @@
                 </a:solidFill>
                 <a:latin typeface="Calibri"/>
               </a:rPr>
-              <a:t>–   Diseñar es equivocarse barato.</a:t>
-            </a:r>
-          </a:p>
-        </p:txBody>
-      </p:sp>
-      <p:sp>
-        <p:nvSpPr>
-          <p:cNvPr id="6" name="TextBox 5"/>
+              <a:t>–   Consistencia: la misma acción con el mismo nombre y en el mismo lugar.</a:t>
+            </a:r>
+          </a:p>
+          <a:p>
+            <a:pPr>
+              <a:spcAft>
+                <a:spcPts val="800"/>
+              </a:spcAft>
+            </a:pPr>
+            <a:r>
+              <a:rPr sz="2000" b="0" i="0">
+                <a:solidFill>
+                  <a:srgbClr val="333333"/>
+                </a:solidFill>
+                <a:latin typeface="Calibri"/>
+              </a:rPr>
+              <a:t>–   Reconocer antes que recordar: elegir de una lista, no memorizar códigos.</a:t>
+            </a:r>
+          </a:p>
+        </p:txBody>
+      </p:sp>
+      <p:sp>
+        <p:nvSpPr>
+          <p:cNvPr id="20" name="TextBox 19"/>
           <p:cNvSpPr txBox="1"/>
           <p:nvPr/>
         </p:nvSpPr>
@@ -8574,6 +9139,195 @@
   <p:clrMapOvr>
     <a:masterClrMapping/>
   </p:clrMapOvr>
+  <p:timing>
+    <p:tnLst>
+      <p:par>
+        <p:cTn id="1" dur="indefinite" restart="never" nodeType="tmRoot">
+          <p:childTnLst>
+            <p:seq concurrent="1" nextAc="seek">
+              <p:cTn id="2" dur="indefinite" nodeType="mainSeq">
+                <p:childTnLst>
+                  <p:par>
+                    <p:cTn id="3" fill="hold">
+                      <p:stCondLst>
+                        <p:cond delay="indefinite"/>
+                      </p:stCondLst>
+                      <p:childTnLst>
+                        <p:par>
+                          <p:cTn id="4" fill="hold">
+                            <p:stCondLst>
+                              <p:cond delay="0"/>
+                            </p:stCondLst>
+                            <p:childTnLst>
+                              <p:par>
+                                <p:cTn id="5" presetID="10" presetClass="entr" presetSubtype="0" fill="hold" nodeType="clickEffect">
+                                  <p:stCondLst>
+                                    <p:cond delay="0"/>
+                                  </p:stCondLst>
+                                  <p:childTnLst>
+                                    <p:set>
+                                      <p:cBhvr>
+                                        <p:cTn id="6" dur="1" fill="hold">
+                                          <p:stCondLst>
+                                            <p:cond delay="0"/>
+                                          </p:stCondLst>
+                                        </p:cTn>
+                                        <p:tgtEl>
+                                          <p:spTgt spid="7"/>
+                                        </p:tgtEl>
+                                        <p:attrNameLst>
+                                          <p:attrName>style.visibility</p:attrName>
+                                        </p:attrNameLst>
+                                      </p:cBhvr>
+                                      <p:to>
+                                        <p:strVal val="visible"/>
+                                      </p:to>
+                                    </p:set>
+                                    <p:animEffect transition="in" filter="fade">
+                                      <p:cBhvr>
+                                        <p:cTn id="7" dur="450"/>
+                                        <p:tgtEl>
+                                          <p:spTgt spid="7"/>
+                                        </p:tgtEl>
+                                      </p:cBhvr>
+                                    </p:animEffect>
+                                  </p:childTnLst>
+                                </p:cTn>
+                              </p:par>
+                            </p:childTnLst>
+                          </p:cTn>
+                        </p:par>
+                      </p:childTnLst>
+                    </p:cTn>
+                  </p:par>
+                  <p:par>
+                    <p:cTn id="8" fill="hold">
+                      <p:stCondLst>
+                        <p:cond delay="indefinite"/>
+                      </p:stCondLst>
+                      <p:childTnLst>
+                        <p:par>
+                          <p:cTn id="9" fill="hold">
+                            <p:stCondLst>
+                              <p:cond delay="0"/>
+                            </p:stCondLst>
+                            <p:childTnLst>
+                              <p:par>
+                                <p:cTn id="10" presetID="10" presetClass="entr" presetSubtype="0" fill="hold" nodeType="clickEffect">
+                                  <p:stCondLst>
+                                    <p:cond delay="0"/>
+                                  </p:stCondLst>
+                                  <p:childTnLst>
+                                    <p:set>
+                                      <p:cBhvr>
+                                        <p:cTn id="11" dur="1" fill="hold">
+                                          <p:stCondLst>
+                                            <p:cond delay="0"/>
+                                          </p:stCondLst>
+                                        </p:cTn>
+                                        <p:tgtEl>
+                                          <p:spTgt spid="8"/>
+                                        </p:tgtEl>
+                                        <p:attrNameLst>
+                                          <p:attrName>style.visibility</p:attrName>
+                                        </p:attrNameLst>
+                                      </p:cBhvr>
+                                      <p:to>
+                                        <p:strVal val="visible"/>
+                                      </p:to>
+                                    </p:set>
+                                    <p:animEffect transition="in" filter="fade">
+                                      <p:cBhvr>
+                                        <p:cTn id="12" dur="450"/>
+                                        <p:tgtEl>
+                                          <p:spTgt spid="8"/>
+                                        </p:tgtEl>
+                                      </p:cBhvr>
+                                    </p:animEffect>
+                                  </p:childTnLst>
+                                </p:cTn>
+                              </p:par>
+                            </p:childTnLst>
+                          </p:cTn>
+                        </p:par>
+                      </p:childTnLst>
+                    </p:cTn>
+                  </p:par>
+                  <p:par>
+                    <p:cTn id="13" fill="hold">
+                      <p:stCondLst>
+                        <p:cond delay="indefinite"/>
+                      </p:stCondLst>
+                      <p:childTnLst>
+                        <p:par>
+                          <p:cTn id="14" fill="hold">
+                            <p:stCondLst>
+                              <p:cond delay="0"/>
+                            </p:stCondLst>
+                            <p:childTnLst>
+                              <p:par>
+                                <p:cTn id="15" presetID="10" presetClass="entr" presetSubtype="0" fill="hold" nodeType="clickEffect">
+                                  <p:stCondLst>
+                                    <p:cond delay="0"/>
+                                  </p:stCondLst>
+                                  <p:childTnLst>
+                                    <p:set>
+                                      <p:cBhvr>
+                                        <p:cTn id="16" dur="1" fill="hold">
+                                          <p:stCondLst>
+                                            <p:cond delay="0"/>
+                                          </p:stCondLst>
+                                        </p:cTn>
+                                        <p:tgtEl>
+                                          <p:spTgt spid="9"/>
+                                        </p:tgtEl>
+                                        <p:attrNameLst>
+                                          <p:attrName>style.visibility</p:attrName>
+                                        </p:attrNameLst>
+                                      </p:cBhvr>
+                                      <p:to>
+                                        <p:strVal val="visible"/>
+                                      </p:to>
+                                    </p:set>
+                                    <p:animEffect transition="in" filter="fade">
+                                      <p:cBhvr>
+                                        <p:cTn id="17" dur="450"/>
+                                        <p:tgtEl>
+                                          <p:spTgt spid="9"/>
+                                        </p:tgtEl>
+                                      </p:cBhvr>
+                                    </p:animEffect>
+                                  </p:childTnLst>
+                                </p:cTn>
+                              </p:par>
+                            </p:childTnLst>
+                          </p:cTn>
+                        </p:par>
+                      </p:childTnLst>
+                    </p:cTn>
+                  </p:par>
+                </p:childTnLst>
+              </p:cTn>
+              <p:prevCondLst>
+                <p:cond evt="onPrev" delay="0">
+                  <p:tgtEl>
+                    <p:sldTgt/>
+                  </p:tgtEl>
+                </p:cond>
+              </p:prevCondLst>
+              <p:nextCondLst>
+                <p:cond evt="onNext" delay="0">
+                  <p:tgtEl>
+                    <p:sldTgt/>
+                  </p:tgtEl>
+                </p:cond>
+              </p:nextCondLst>
+            </p:seq>
+          </p:childTnLst>
+        </p:cTn>
+      </p:par>
+    </p:tnLst>
+  </p:timing>
 </p:sld>
 </file>
 
@@ -8710,21 +9464,173 @@
                 </a:solidFill>
                 <a:latin typeface="Calibri"/>
               </a:rPr>
-              <a:t>Los principios de usabilidad no son gusto ni estetica, son reglas... (1/2)</a:t>
-            </a:r>
-          </a:p>
-        </p:txBody>
-      </p:sp>
-      <p:sp>
-        <p:nvSpPr>
-          <p:cNvPr id="5" name="TextBox 4"/>
+              <a:t>El flujo de tarea y sus caminos alternos</a:t>
+            </a:r>
+          </a:p>
+        </p:txBody>
+      </p:sp>
+      <p:sp>
+        <p:nvSpPr>
+          <p:cNvPr id="5" name="Rounded Rectangle 4"/>
+          <p:cNvSpPr/>
+          <p:nvPr/>
+        </p:nvSpPr>
+        <p:spPr>
+          <a:xfrm>
+            <a:off x="5803166" y="1188719"/>
+            <a:ext cx="5998464" cy="4828032"/>
+          </a:xfrm>
+          <a:prstGeom prst="roundRect">
+            <a:avLst>
+              <a:gd name="adj" fmla="val 4000"/>
+            </a:avLst>
+          </a:prstGeom>
+          <a:solidFill>
+            <a:srgbClr val="E8EEF4"/>
+          </a:solidFill>
+          <a:ln>
+            <a:noFill/>
+          </a:ln>
+        </p:spPr>
+        <p:style>
+          <a:lnRef idx="1">
+            <a:schemeClr val="accent1"/>
+          </a:lnRef>
+          <a:fillRef idx="3">
+            <a:schemeClr val="accent1"/>
+          </a:fillRef>
+          <a:effectRef idx="2">
+            <a:schemeClr val="accent1"/>
+          </a:effectRef>
+          <a:fontRef idx="minor">
+            <a:schemeClr val="lt1"/>
+          </a:fontRef>
+        </p:style>
+        <p:txBody>
+          <a:bodyPr rtlCol="0" anchor="ctr"/>
+          <a:lstStyle/>
+          <a:p>
+            <a:pPr algn="ctr"/>
+          </a:p>
+        </p:txBody>
+      </p:sp>
+      <p:pic>
+        <p:nvPicPr>
+          <p:cNvPr id="6" name="Picture 5" descr="flujo-tarea-paso1.png"/>
+          <p:cNvPicPr>
+            <a:picLocks noChangeAspect="1"/>
+          </p:cNvPicPr>
+          <p:nvPr/>
+        </p:nvPicPr>
+        <p:blipFill>
+          <a:blip r:embed="rId2"/>
+          <a:stretch>
+            <a:fillRect/>
+          </a:stretch>
+        </p:blipFill>
+        <p:spPr>
+          <a:xfrm>
+            <a:off x="5876318" y="1261872"/>
+            <a:ext cx="5852160" cy="4681728"/>
+          </a:xfrm>
+          <a:prstGeom prst="rect">
+            <a:avLst/>
+          </a:prstGeom>
+        </p:spPr>
+      </p:pic>
+      <p:pic>
+        <p:nvPicPr>
+          <p:cNvPr id="7" name="Picture 6" descr="flujo-tarea-paso2.png"/>
+          <p:cNvPicPr>
+            <a:picLocks noChangeAspect="1"/>
+          </p:cNvPicPr>
+          <p:nvPr/>
+        </p:nvPicPr>
+        <p:blipFill>
+          <a:blip r:embed="rId3"/>
+          <a:stretch>
+            <a:fillRect/>
+          </a:stretch>
+        </p:blipFill>
+        <p:spPr>
+          <a:xfrm>
+            <a:off x="5876318" y="1261872"/>
+            <a:ext cx="5852160" cy="4681728"/>
+          </a:xfrm>
+          <a:prstGeom prst="rect">
+            <a:avLst/>
+          </a:prstGeom>
+        </p:spPr>
+      </p:pic>
+      <p:pic>
+        <p:nvPicPr>
+          <p:cNvPr id="8" name="Picture 7" descr="flujo-tarea-paso3.png"/>
+          <p:cNvPicPr>
+            <a:picLocks noChangeAspect="1"/>
+          </p:cNvPicPr>
+          <p:nvPr/>
+        </p:nvPicPr>
+        <p:blipFill>
+          <a:blip r:embed="rId4"/>
+          <a:stretch>
+            <a:fillRect/>
+          </a:stretch>
+        </p:blipFill>
+        <p:spPr>
+          <a:xfrm>
+            <a:off x="5876318" y="1261872"/>
+            <a:ext cx="5852160" cy="4681728"/>
+          </a:xfrm>
+          <a:prstGeom prst="rect">
+            <a:avLst/>
+          </a:prstGeom>
+        </p:spPr>
+      </p:pic>
+      <p:sp>
+        <p:nvSpPr>
+          <p:cNvPr id="13" name="TextBox 12"/>
           <p:cNvSpPr txBox="1"/>
           <p:nvPr/>
         </p:nvSpPr>
         <p:spPr>
           <a:xfrm>
-            <a:off x="457200" y="1170432"/>
-            <a:ext cx="11277295" cy="5230368"/>
+            <a:off x="5870301" y="5961888"/>
+            <a:ext cx="5864193" cy="320040"/>
+          </a:xfrm>
+          <a:prstGeom prst="rect">
+            <a:avLst/>
+          </a:prstGeom>
+          <a:noFill/>
+        </p:spPr>
+        <p:txBody>
+          <a:bodyPr wrap="square">
+            <a:spAutoFit/>
+          </a:bodyPr>
+          <a:lstStyle/>
+          <a:p>
+            <a:pPr algn="ctr"/>
+            <a:r>
+              <a:rPr sz="1100" b="0" i="1">
+                <a:solidFill>
+                  <a:srgbClr val="666666"/>
+                </a:solidFill>
+                <a:latin typeface="Calibri"/>
+              </a:rPr>
+              <a:t>Clic para avanzar la animación</a:t>
+            </a:r>
+          </a:p>
+        </p:txBody>
+      </p:sp>
+      <p:sp>
+        <p:nvSpPr>
+          <p:cNvPr id="14" name="TextBox 13"/>
+          <p:cNvSpPr txBox="1"/>
+          <p:nvPr/>
+        </p:nvSpPr>
+        <p:spPr>
+          <a:xfrm>
+            <a:off x="457200" y="1353312"/>
+            <a:ext cx="5093061" cy="5047488"/>
           </a:xfrm>
           <a:prstGeom prst="rect">
             <a:avLst/>
@@ -8749,7 +9655,7 @@
                 </a:solidFill>
                 <a:latin typeface="Calibri"/>
               </a:rPr>
-              <a:t>–   Los principios de usabilidad no son gusto ni estetica, son reglas observables que se pueden verificar sobre el papel.</a:t>
+              <a:t>–   Se diseña el recorrido completo, de la intención a la tarea cumplida.</a:t>
             </a:r>
           </a:p>
           <a:p>
@@ -8765,7 +9671,7 @@
                 </a:solidFill>
                 <a:latin typeface="Calibri"/>
               </a:rPr>
-              <a:t>–   Visibilidad del estado del sistema significa que la persona siempre sepa que esta pasando: si la recepcionista oprime Guardar y la pantalla no dice nada, ella va a oprimir Guardar otra vez y el sistema va a terminar con la mascota registrada dos veces</a:t>
+              <a:t>–   Camino feliz: buscar al dueño, encontrarlo, registrar la mascota y recibir el código.</a:t>
             </a:r>
           </a:p>
           <a:p>
@@ -8781,7 +9687,7 @@
                 </a:solidFill>
                 <a:latin typeface="Calibri"/>
               </a:rPr>
-              <a:t>–   Por eso el diseño debe incluir el mensaje concreto Ficha guardada, codigo M-0421, y el boton debe quedar deshabilitado mientras se guarda.</a:t>
+              <a:t>–   Alternos: dueño no registrado, mascota ya existente, dueño sin documento.</a:t>
             </a:r>
           </a:p>
           <a:p>
@@ -8797,30 +9703,14 @@
                 </a:solidFill>
                 <a:latin typeface="Calibri"/>
               </a:rPr>
-              <a:t>–   Prevencion de errores significa que es mejor impedir el error que ponerle un mensaje bonito despues: la fecha de nacimiento se escoge en un calendario y no se teclea</a:t>
-            </a:r>
-          </a:p>
-          <a:p>
-            <a:pPr>
-              <a:spcAft>
-                <a:spcPts val="800"/>
-              </a:spcAft>
-            </a:pPr>
-            <a:r>
-              <a:rPr sz="2000" b="0" i="0">
-                <a:solidFill>
-                  <a:srgbClr val="333333"/>
-                </a:solidFill>
-                <a:latin typeface="Calibri"/>
-              </a:rPr>
-              <a:t>–   La especie se elige de una lista cerrada con Canino, Felino y Otro, y el sistema pide confirmacion antes de eliminar una historia clinica.</a:t>
-            </a:r>
-          </a:p>
-        </p:txBody>
-      </p:sp>
-      <p:sp>
-        <p:nvSpPr>
-          <p:cNvPr id="6" name="TextBox 5"/>
+              <a:t>–   Doce mascotas llamadas Firulais: mostrar especie, edad y dueño para desambiguar.</a:t>
+            </a:r>
+          </a:p>
+        </p:txBody>
+      </p:sp>
+      <p:sp>
+        <p:nvSpPr>
+          <p:cNvPr id="15" name="TextBox 14"/>
           <p:cNvSpPr txBox="1"/>
           <p:nvPr/>
         </p:nvSpPr>
@@ -8858,6 +9748,142 @@
   <p:clrMapOvr>
     <a:masterClrMapping/>
   </p:clrMapOvr>
+  <p:timing>
+    <p:tnLst>
+      <p:par>
+        <p:cTn id="1" dur="indefinite" restart="never" nodeType="tmRoot">
+          <p:childTnLst>
+            <p:seq concurrent="1" nextAc="seek">
+              <p:cTn id="2" dur="indefinite" nodeType="mainSeq">
+                <p:childTnLst>
+                  <p:par>
+                    <p:cTn id="3" fill="hold">
+                      <p:stCondLst>
+                        <p:cond delay="indefinite"/>
+                      </p:stCondLst>
+                      <p:childTnLst>
+                        <p:par>
+                          <p:cTn id="4" fill="hold">
+                            <p:stCondLst>
+                              <p:cond delay="0"/>
+                            </p:stCondLst>
+                            <p:childTnLst>
+                              <p:par>
+                                <p:cTn id="5" presetID="10" presetClass="entr" presetSubtype="0" fill="hold" nodeType="clickEffect">
+                                  <p:stCondLst>
+                                    <p:cond delay="0"/>
+                                  </p:stCondLst>
+                                  <p:childTnLst>
+                                    <p:set>
+                                      <p:cBhvr>
+                                        <p:cTn id="6" dur="1" fill="hold">
+                                          <p:stCondLst>
+                                            <p:cond delay="0"/>
+                                          </p:stCondLst>
+                                        </p:cTn>
+                                        <p:tgtEl>
+                                          <p:spTgt spid="7"/>
+                                        </p:tgtEl>
+                                        <p:attrNameLst>
+                                          <p:attrName>style.visibility</p:attrName>
+                                        </p:attrNameLst>
+                                      </p:cBhvr>
+                                      <p:to>
+                                        <p:strVal val="visible"/>
+                                      </p:to>
+                                    </p:set>
+                                    <p:animEffect transition="in" filter="fade">
+                                      <p:cBhvr>
+                                        <p:cTn id="7" dur="450"/>
+                                        <p:tgtEl>
+                                          <p:spTgt spid="7"/>
+                                        </p:tgtEl>
+                                      </p:cBhvr>
+                                    </p:animEffect>
+                                  </p:childTnLst>
+                                </p:cTn>
+                              </p:par>
+                            </p:childTnLst>
+                          </p:cTn>
+                        </p:par>
+                      </p:childTnLst>
+                    </p:cTn>
+                  </p:par>
+                  <p:par>
+                    <p:cTn id="8" fill="hold">
+                      <p:stCondLst>
+                        <p:cond delay="indefinite"/>
+                      </p:stCondLst>
+                      <p:childTnLst>
+                        <p:par>
+                          <p:cTn id="9" fill="hold">
+                            <p:stCondLst>
+                              <p:cond delay="0"/>
+                            </p:stCondLst>
+                            <p:childTnLst>
+                              <p:par>
+                                <p:cTn id="10" presetID="10" presetClass="entr" presetSubtype="0" fill="hold" nodeType="clickEffect">
+                                  <p:stCondLst>
+                                    <p:cond delay="0"/>
+                                  </p:stCondLst>
+                                  <p:childTnLst>
+                                    <p:set>
+                                      <p:cBhvr>
+                                        <p:cTn id="11" dur="1" fill="hold">
+                                          <p:stCondLst>
+                                            <p:cond delay="0"/>
+                                          </p:stCondLst>
+                                        </p:cTn>
+                                        <p:tgtEl>
+                                          <p:spTgt spid="8"/>
+                                        </p:tgtEl>
+                                        <p:attrNameLst>
+                                          <p:attrName>style.visibility</p:attrName>
+                                        </p:attrNameLst>
+                                      </p:cBhvr>
+                                      <p:to>
+                                        <p:strVal val="visible"/>
+                                      </p:to>
+                                    </p:set>
+                                    <p:animEffect transition="in" filter="fade">
+                                      <p:cBhvr>
+                                        <p:cTn id="12" dur="450"/>
+                                        <p:tgtEl>
+                                          <p:spTgt spid="8"/>
+                                        </p:tgtEl>
+                                      </p:cBhvr>
+                                    </p:animEffect>
+                                  </p:childTnLst>
+                                </p:cTn>
+                              </p:par>
+                            </p:childTnLst>
+                          </p:cTn>
+                        </p:par>
+                      </p:childTnLst>
+                    </p:cTn>
+                  </p:par>
+                </p:childTnLst>
+              </p:cTn>
+              <p:prevCondLst>
+                <p:cond evt="onPrev" delay="0">
+                  <p:tgtEl>
+                    <p:sldTgt/>
+                  </p:tgtEl>
+                </p:cond>
+              </p:prevCondLst>
+              <p:nextCondLst>
+                <p:cond evt="onNext" delay="0">
+                  <p:tgtEl>
+                    <p:sldTgt/>
+                  </p:tgtEl>
+                </p:cond>
+              </p:nextCondLst>
+            </p:seq>
+          </p:childTnLst>
+        </p:cTn>
+      </p:par>
+    </p:tnLst>
+  </p:timing>
 </p:sld>
 </file>
 
@@ -8994,21 +10020,238 @@
                 </a:solidFill>
                 <a:latin typeface="Calibri"/>
               </a:rPr>
-              <a:t>Los principios de usabilidad no son gusto ni estetica, son reglas... (2/2)</a:t>
-            </a:r>
-          </a:p>
-        </p:txBody>
-      </p:sp>
-      <p:sp>
-        <p:nvSpPr>
-          <p:cNvPr id="5" name="TextBox 4"/>
+              <a:t>El mapa de navegacion del prototipo</a:t>
+            </a:r>
+          </a:p>
+        </p:txBody>
+      </p:sp>
+      <p:sp>
+        <p:nvSpPr>
+          <p:cNvPr id="5" name="Rounded Rectangle 4"/>
+          <p:cNvSpPr/>
+          <p:nvPr/>
+        </p:nvSpPr>
+        <p:spPr>
+          <a:xfrm>
+            <a:off x="457200" y="1261872"/>
+            <a:ext cx="11277295" cy="5179278"/>
+          </a:xfrm>
+          <a:prstGeom prst="roundRect">
+            <a:avLst>
+              <a:gd name="adj" fmla="val 4000"/>
+            </a:avLst>
+          </a:prstGeom>
+          <a:solidFill>
+            <a:srgbClr val="1E1E1E"/>
+          </a:solidFill>
+          <a:ln>
+            <a:noFill/>
+          </a:ln>
+        </p:spPr>
+        <p:style>
+          <a:lnRef idx="1">
+            <a:schemeClr val="accent1"/>
+          </a:lnRef>
+          <a:fillRef idx="3">
+            <a:schemeClr val="accent1"/>
+          </a:fillRef>
+          <a:effectRef idx="2">
+            <a:schemeClr val="accent1"/>
+          </a:effectRef>
+          <a:fontRef idx="minor">
+            <a:schemeClr val="lt1"/>
+          </a:fontRef>
+        </p:style>
+        <p:txBody>
+          <a:bodyPr rtlCol="0" anchor="ctr"/>
+          <a:lstStyle/>
+          <a:p>
+            <a:pPr algn="ctr"/>
+          </a:p>
+        </p:txBody>
+      </p:sp>
+      <p:sp>
+        <p:nvSpPr>
+          <p:cNvPr id="6" name="Rectangle 5"/>
+          <p:cNvSpPr/>
+          <p:nvPr/>
+        </p:nvSpPr>
+        <p:spPr>
+          <a:xfrm>
+            <a:off x="457200" y="1261872"/>
+            <a:ext cx="11277295" cy="365760"/>
+          </a:xfrm>
+          <a:prstGeom prst="rect">
+            <a:avLst/>
+          </a:prstGeom>
+          <a:solidFill>
+            <a:srgbClr val="2D2D30"/>
+          </a:solidFill>
+          <a:ln>
+            <a:noFill/>
+          </a:ln>
+        </p:spPr>
+        <p:style>
+          <a:lnRef idx="1">
+            <a:schemeClr val="accent1"/>
+          </a:lnRef>
+          <a:fillRef idx="3">
+            <a:schemeClr val="accent1"/>
+          </a:fillRef>
+          <a:effectRef idx="2">
+            <a:schemeClr val="accent1"/>
+          </a:effectRef>
+          <a:fontRef idx="minor">
+            <a:schemeClr val="lt1"/>
+          </a:fontRef>
+        </p:style>
+        <p:txBody>
+          <a:bodyPr rtlCol="0" anchor="ctr"/>
+          <a:lstStyle/>
+          <a:p>
+            <a:pPr algn="ctr"/>
+          </a:p>
+        </p:txBody>
+      </p:sp>
+      <p:sp>
+        <p:nvSpPr>
+          <p:cNvPr id="7" name="Oval 6"/>
+          <p:cNvSpPr/>
+          <p:nvPr/>
+        </p:nvSpPr>
+        <p:spPr>
+          <a:xfrm>
+            <a:off x="658368" y="1380743"/>
+            <a:ext cx="128016" cy="128016"/>
+          </a:xfrm>
+          <a:prstGeom prst="ellipse">
+            <a:avLst/>
+          </a:prstGeom>
+          <a:solidFill>
+            <a:srgbClr val="FF5F56"/>
+          </a:solidFill>
+          <a:ln>
+            <a:noFill/>
+          </a:ln>
+        </p:spPr>
+        <p:style>
+          <a:lnRef idx="1">
+            <a:schemeClr val="accent1"/>
+          </a:lnRef>
+          <a:fillRef idx="3">
+            <a:schemeClr val="accent1"/>
+          </a:fillRef>
+          <a:effectRef idx="2">
+            <a:schemeClr val="accent1"/>
+          </a:effectRef>
+          <a:fontRef idx="minor">
+            <a:schemeClr val="lt1"/>
+          </a:fontRef>
+        </p:style>
+        <p:txBody>
+          <a:bodyPr rtlCol="0" anchor="ctr"/>
+          <a:lstStyle/>
+          <a:p>
+            <a:pPr algn="ctr"/>
+          </a:p>
+        </p:txBody>
+      </p:sp>
+      <p:sp>
+        <p:nvSpPr>
+          <p:cNvPr id="8" name="Oval 7"/>
+          <p:cNvSpPr/>
+          <p:nvPr/>
+        </p:nvSpPr>
+        <p:spPr>
+          <a:xfrm>
+            <a:off x="877824" y="1380743"/>
+            <a:ext cx="128016" cy="128016"/>
+          </a:xfrm>
+          <a:prstGeom prst="ellipse">
+            <a:avLst/>
+          </a:prstGeom>
+          <a:solidFill>
+            <a:srgbClr val="FFBD2E"/>
+          </a:solidFill>
+          <a:ln>
+            <a:noFill/>
+          </a:ln>
+        </p:spPr>
+        <p:style>
+          <a:lnRef idx="1">
+            <a:schemeClr val="accent1"/>
+          </a:lnRef>
+          <a:fillRef idx="3">
+            <a:schemeClr val="accent1"/>
+          </a:fillRef>
+          <a:effectRef idx="2">
+            <a:schemeClr val="accent1"/>
+          </a:effectRef>
+          <a:fontRef idx="minor">
+            <a:schemeClr val="lt1"/>
+          </a:fontRef>
+        </p:style>
+        <p:txBody>
+          <a:bodyPr rtlCol="0" anchor="ctr"/>
+          <a:lstStyle/>
+          <a:p>
+            <a:pPr algn="ctr"/>
+          </a:p>
+        </p:txBody>
+      </p:sp>
+      <p:sp>
+        <p:nvSpPr>
+          <p:cNvPr id="9" name="Oval 8"/>
+          <p:cNvSpPr/>
+          <p:nvPr/>
+        </p:nvSpPr>
+        <p:spPr>
+          <a:xfrm>
+            <a:off x="1097280" y="1380743"/>
+            <a:ext cx="128016" cy="128016"/>
+          </a:xfrm>
+          <a:prstGeom prst="ellipse">
+            <a:avLst/>
+          </a:prstGeom>
+          <a:solidFill>
+            <a:srgbClr val="27C93F"/>
+          </a:solidFill>
+          <a:ln>
+            <a:noFill/>
+          </a:ln>
+        </p:spPr>
+        <p:style>
+          <a:lnRef idx="1">
+            <a:schemeClr val="accent1"/>
+          </a:lnRef>
+          <a:fillRef idx="3">
+            <a:schemeClr val="accent1"/>
+          </a:fillRef>
+          <a:effectRef idx="2">
+            <a:schemeClr val="accent1"/>
+          </a:effectRef>
+          <a:fontRef idx="minor">
+            <a:schemeClr val="lt1"/>
+          </a:fontRef>
+        </p:style>
+        <p:txBody>
+          <a:bodyPr rtlCol="0" anchor="ctr"/>
+          <a:lstStyle/>
+          <a:p>
+            <a:pPr algn="ctr"/>
+          </a:p>
+        </p:txBody>
+      </p:sp>
+      <p:sp>
+        <p:nvSpPr>
+          <p:cNvPr id="10" name="TextBox 9"/>
           <p:cNvSpPr txBox="1"/>
           <p:nvPr/>
         </p:nvSpPr>
         <p:spPr>
           <a:xfrm>
-            <a:off x="457200" y="1170432"/>
-            <a:ext cx="11277295" cy="5230368"/>
+            <a:off x="1371600" y="1298448"/>
+            <a:ext cx="10180015" cy="292608"/>
           </a:xfrm>
           <a:prstGeom prst="rect">
             <a:avLst/>
@@ -9016,79 +10259,1338 @@
           <a:noFill/>
         </p:spPr>
         <p:txBody>
+          <a:bodyPr wrap="square" anchor="ctr"/>
+          <a:lstStyle/>
+          <a:p>
+            <a:pPr algn="r"/>
+            <a:r>
+              <a:rPr sz="1100" b="1" i="0">
+                <a:solidFill>
+                  <a:srgbClr val="BBBBBB"/>
+                </a:solidFill>
+                <a:latin typeface="Calibri"/>
+              </a:rPr>
+              <a:t>Mermaid</a:t>
+            </a:r>
+          </a:p>
+        </p:txBody>
+      </p:sp>
+      <p:sp>
+        <p:nvSpPr>
+          <p:cNvPr id="11" name="TextBox 10"/>
+          <p:cNvSpPr txBox="1"/>
+          <p:nvPr/>
+        </p:nvSpPr>
+        <p:spPr>
+          <a:xfrm>
+            <a:off x="685800" y="1719072"/>
+            <a:ext cx="502920" cy="4584918"/>
+          </a:xfrm>
+          <a:prstGeom prst="rect">
+            <a:avLst/>
+          </a:prstGeom>
+          <a:noFill/>
+        </p:spPr>
+        <p:txBody>
           <a:bodyPr wrap="square">
             <a:spAutoFit/>
           </a:bodyPr>
           <a:lstStyle/>
           <a:p>
+            <a:pPr algn="r">
+              <a:spcAft>
+                <a:spcPts val="385"/>
+              </a:spcAft>
+            </a:pPr>
+            <a:r>
+              <a:rPr sz="1800" i="0" b="0">
+                <a:solidFill>
+                  <a:srgbClr val="858585"/>
+                </a:solidFill>
+                <a:latin typeface="Consolas"/>
+              </a:rPr>
+              <a:t>1</a:t>
+            </a:r>
+          </a:p>
+          <a:p>
+            <a:pPr algn="r">
+              <a:spcAft>
+                <a:spcPts val="385"/>
+              </a:spcAft>
+            </a:pPr>
+            <a:r>
+              <a:rPr sz="1800" i="0" b="0">
+                <a:solidFill>
+                  <a:srgbClr val="858585"/>
+                </a:solidFill>
+                <a:latin typeface="Consolas"/>
+              </a:rPr>
+              <a:t>2</a:t>
+            </a:r>
+          </a:p>
+          <a:p>
+            <a:pPr algn="r">
+              <a:spcAft>
+                <a:spcPts val="385"/>
+              </a:spcAft>
+            </a:pPr>
+            <a:r>
+              <a:rPr sz="1800" i="0" b="0">
+                <a:solidFill>
+                  <a:srgbClr val="858585"/>
+                </a:solidFill>
+                <a:latin typeface="Consolas"/>
+              </a:rPr>
+              <a:t>3</a:t>
+            </a:r>
+          </a:p>
+          <a:p>
+            <a:pPr algn="r">
+              <a:spcAft>
+                <a:spcPts val="385"/>
+              </a:spcAft>
+            </a:pPr>
+            <a:r>
+              <a:rPr sz="1800" i="0" b="0">
+                <a:solidFill>
+                  <a:srgbClr val="858585"/>
+                </a:solidFill>
+                <a:latin typeface="Consolas"/>
+              </a:rPr>
+              <a:t>4</a:t>
+            </a:r>
+          </a:p>
+          <a:p>
+            <a:pPr algn="r">
+              <a:spcAft>
+                <a:spcPts val="385"/>
+              </a:spcAft>
+            </a:pPr>
+            <a:r>
+              <a:rPr sz="1800" i="0" b="0">
+                <a:solidFill>
+                  <a:srgbClr val="858585"/>
+                </a:solidFill>
+                <a:latin typeface="Consolas"/>
+              </a:rPr>
+              <a:t>5</a:t>
+            </a:r>
+          </a:p>
+          <a:p>
+            <a:pPr algn="r">
+              <a:spcAft>
+                <a:spcPts val="385"/>
+              </a:spcAft>
+            </a:pPr>
+            <a:r>
+              <a:rPr sz="1800" i="0" b="0">
+                <a:solidFill>
+                  <a:srgbClr val="858585"/>
+                </a:solidFill>
+                <a:latin typeface="Consolas"/>
+              </a:rPr>
+              <a:t>6</a:t>
+            </a:r>
+          </a:p>
+          <a:p>
+            <a:pPr algn="r">
+              <a:spcAft>
+                <a:spcPts val="385"/>
+              </a:spcAft>
+            </a:pPr>
+            <a:r>
+              <a:rPr sz="1800" i="0" b="0">
+                <a:solidFill>
+                  <a:srgbClr val="858585"/>
+                </a:solidFill>
+                <a:latin typeface="Consolas"/>
+              </a:rPr>
+              <a:t>7</a:t>
+            </a:r>
+          </a:p>
+          <a:p>
+            <a:pPr algn="r">
+              <a:spcAft>
+                <a:spcPts val="385"/>
+              </a:spcAft>
+            </a:pPr>
+            <a:r>
+              <a:rPr sz="1800" i="0" b="0">
+                <a:solidFill>
+                  <a:srgbClr val="858585"/>
+                </a:solidFill>
+                <a:latin typeface="Consolas"/>
+              </a:rPr>
+              <a:t>8</a:t>
+            </a:r>
+          </a:p>
+          <a:p>
+            <a:pPr algn="r">
+              <a:spcAft>
+                <a:spcPts val="385"/>
+              </a:spcAft>
+            </a:pPr>
+            <a:r>
+              <a:rPr sz="1800" i="0" b="0">
+                <a:solidFill>
+                  <a:srgbClr val="858585"/>
+                </a:solidFill>
+                <a:latin typeface="Consolas"/>
+              </a:rPr>
+              <a:t>9</a:t>
+            </a:r>
+          </a:p>
+          <a:p>
+            <a:pPr algn="r">
+              <a:spcAft>
+                <a:spcPts val="385"/>
+              </a:spcAft>
+            </a:pPr>
+            <a:r>
+              <a:rPr sz="1800" i="0" b="0">
+                <a:solidFill>
+                  <a:srgbClr val="858585"/>
+                </a:solidFill>
+                <a:latin typeface="Consolas"/>
+              </a:rPr>
+              <a:t>10</a:t>
+            </a:r>
+          </a:p>
+          <a:p>
+            <a:pPr algn="r">
+              <a:spcAft>
+                <a:spcPts val="385"/>
+              </a:spcAft>
+            </a:pPr>
+            <a:r>
+              <a:rPr sz="1800" i="0" b="0">
+                <a:solidFill>
+                  <a:srgbClr val="858585"/>
+                </a:solidFill>
+                <a:latin typeface="Consolas"/>
+              </a:rPr>
+              <a:t>11</a:t>
+            </a:r>
+          </a:p>
+          <a:p>
+            <a:pPr algn="r">
+              <a:spcAft>
+                <a:spcPts val="385"/>
+              </a:spcAft>
+            </a:pPr>
+            <a:r>
+              <a:rPr sz="1800" i="0" b="0">
+                <a:solidFill>
+                  <a:srgbClr val="858585"/>
+                </a:solidFill>
+                <a:latin typeface="Consolas"/>
+              </a:rPr>
+              <a:t>12</a:t>
+            </a:r>
+          </a:p>
+          <a:p>
+            <a:pPr algn="r">
+              <a:spcAft>
+                <a:spcPts val="385"/>
+              </a:spcAft>
+            </a:pPr>
+            <a:r>
+              <a:rPr sz="1800" i="0" b="0">
+                <a:solidFill>
+                  <a:srgbClr val="858585"/>
+                </a:solidFill>
+                <a:latin typeface="Consolas"/>
+              </a:rPr>
+              <a:t>13</a:t>
+            </a:r>
+          </a:p>
+          <a:p>
+            <a:pPr algn="r">
+              <a:spcAft>
+                <a:spcPts val="385"/>
+              </a:spcAft>
+            </a:pPr>
+            <a:r>
+              <a:rPr sz="1800" i="0" b="0">
+                <a:solidFill>
+                  <a:srgbClr val="858585"/>
+                </a:solidFill>
+                <a:latin typeface="Consolas"/>
+              </a:rPr>
+              <a:t>14</a:t>
+            </a:r>
+          </a:p>
+        </p:txBody>
+      </p:sp>
+      <p:sp>
+        <p:nvSpPr>
+          <p:cNvPr id="12" name="TextBox 11"/>
+          <p:cNvSpPr txBox="1"/>
+          <p:nvPr/>
+        </p:nvSpPr>
+        <p:spPr>
+          <a:xfrm>
+            <a:off x="1188720" y="1719072"/>
+            <a:ext cx="10271455" cy="4584918"/>
+          </a:xfrm>
+          <a:prstGeom prst="rect">
+            <a:avLst/>
+          </a:prstGeom>
+          <a:noFill/>
+        </p:spPr>
+        <p:txBody>
+          <a:bodyPr wrap="square">
+            <a:spAutoFit/>
+          </a:bodyPr>
+          <a:lstStyle/>
+          <a:p>
             <a:pPr>
               <a:spcAft>
-                <a:spcPts val="800"/>
+                <a:spcPts val="385"/>
               </a:spcAft>
             </a:pPr>
             <a:r>
-              <a:rPr sz="2000" b="0" i="0">
-                <a:solidFill>
-                  <a:srgbClr val="333333"/>
-                </a:solidFill>
-                <a:latin typeface="Calibri"/>
-              </a:rPr>
-              <a:t>–   Consistencia significa que la misma accion se llame igual y viva en el mismo lugar en todas las pantallas: si en Registrar mascota el boton principal se llama Guardar y esta abajo a la derecha</a:t>
+              <a:rPr sz="1800" i="0" b="0">
+                <a:solidFill>
+                  <a:srgbClr val="D4D4D4"/>
+                </a:solidFill>
+                <a:latin typeface="Consolas"/>
+              </a:rPr>
+              <a:t>flowchart</a:t>
+            </a:r>
+            <a:r>
+              <a:rPr sz="1800" i="0" b="0">
+                <a:solidFill>
+                  <a:srgbClr val="D4D4D4"/>
+                </a:solidFill>
+                <a:latin typeface="Consolas"/>
+              </a:rPr>
+              <a:t> </a:t>
+            </a:r>
+            <a:r>
+              <a:rPr sz="1800" i="0" b="0">
+                <a:solidFill>
+                  <a:srgbClr val="D4D4D4"/>
+                </a:solidFill>
+                <a:latin typeface="Consolas"/>
+              </a:rPr>
+              <a:t>LR</a:t>
             </a:r>
           </a:p>
           <a:p>
             <a:pPr>
               <a:spcAft>
-                <a:spcPts val="800"/>
+                <a:spcPts val="385"/>
               </a:spcAft>
             </a:pPr>
             <a:r>
-              <a:rPr sz="2000" b="0" i="0">
-                <a:solidFill>
-                  <a:srgbClr val="333333"/>
-                </a:solidFill>
-                <a:latin typeface="Calibri"/>
-              </a:rPr>
-              <a:t>–   En Registrar dueño no puede llamarse Aceptar ni estar arriba a la izquierda.</a:t>
+              <a:rPr sz="1800" i="0" b="0">
+                <a:solidFill>
+                  <a:srgbClr val="D4D4D4"/>
+                </a:solidFill>
+                <a:latin typeface="Consolas"/>
+              </a:rPr>
+              <a:t>  </a:t>
+            </a:r>
+            <a:r>
+              <a:rPr sz="1800" i="0" b="0">
+                <a:solidFill>
+                  <a:srgbClr val="D4D4D4"/>
+                </a:solidFill>
+                <a:latin typeface="Consolas"/>
+              </a:rPr>
+              <a:t>login</a:t>
+            </a:r>
+            <a:r>
+              <a:rPr sz="1800" i="0" b="0">
+                <a:solidFill>
+                  <a:srgbClr val="D4D4D4"/>
+                </a:solidFill>
+                <a:latin typeface="Consolas"/>
+              </a:rPr>
+              <a:t>[</a:t>
+            </a:r>
+            <a:r>
+              <a:rPr sz="1800" i="0" b="0">
+                <a:solidFill>
+                  <a:srgbClr val="D4D4D4"/>
+                </a:solidFill>
+                <a:latin typeface="Consolas"/>
+              </a:rPr>
+              <a:t>Ingreso</a:t>
+            </a:r>
+            <a:r>
+              <a:rPr sz="1800" i="0" b="0">
+                <a:solidFill>
+                  <a:srgbClr val="D4D4D4"/>
+                </a:solidFill>
+                <a:latin typeface="Consolas"/>
+              </a:rPr>
+              <a:t>] --&gt; </a:t>
+            </a:r>
+            <a:r>
+              <a:rPr sz="1800" i="0" b="0">
+                <a:solidFill>
+                  <a:srgbClr val="D4D4D4"/>
+                </a:solidFill>
+                <a:latin typeface="Consolas"/>
+              </a:rPr>
+              <a:t>menu</a:t>
+            </a:r>
+            <a:r>
+              <a:rPr sz="1800" i="0" b="0">
+                <a:solidFill>
+                  <a:srgbClr val="D4D4D4"/>
+                </a:solidFill>
+                <a:latin typeface="Consolas"/>
+              </a:rPr>
+              <a:t>[</a:t>
+            </a:r>
+            <a:r>
+              <a:rPr sz="1800" i="0" b="0">
+                <a:solidFill>
+                  <a:srgbClr val="D4D4D4"/>
+                </a:solidFill>
+                <a:latin typeface="Consolas"/>
+              </a:rPr>
+              <a:t>Menu</a:t>
+            </a:r>
+            <a:r>
+              <a:rPr sz="1800" i="0" b="0">
+                <a:solidFill>
+                  <a:srgbClr val="D4D4D4"/>
+                </a:solidFill>
+                <a:latin typeface="Consolas"/>
+              </a:rPr>
+              <a:t> </a:t>
+            </a:r>
+            <a:r>
+              <a:rPr sz="1800" i="0" b="0">
+                <a:solidFill>
+                  <a:srgbClr val="D4D4D4"/>
+                </a:solidFill>
+                <a:latin typeface="Consolas"/>
+              </a:rPr>
+              <a:t>principal</a:t>
+            </a:r>
+            <a:r>
+              <a:rPr sz="1800" i="0" b="0">
+                <a:solidFill>
+                  <a:srgbClr val="D4D4D4"/>
+                </a:solidFill>
+                <a:latin typeface="Consolas"/>
+              </a:rPr>
+              <a:t>]</a:t>
             </a:r>
           </a:p>
           <a:p>
             <a:pPr>
               <a:spcAft>
-                <a:spcPts val="800"/>
+                <a:spcPts val="385"/>
               </a:spcAft>
             </a:pPr>
             <a:r>
-              <a:rPr sz="2000" b="0" i="0">
-                <a:solidFill>
-                  <a:srgbClr val="333333"/>
-                </a:solidFill>
-                <a:latin typeface="Calibri"/>
-              </a:rPr>
-              <a:t>–   Reconocer antes que recordar significa que la persona escoja de una lista en vez de acordarse de un codigo: la recepcionista no tiene por que memorizar que el codigo de raza mestiza es 07, se lo mostramos.</a:t>
+              <a:rPr sz="1800" i="0" b="0">
+                <a:solidFill>
+                  <a:srgbClr val="D4D4D4"/>
+                </a:solidFill>
+                <a:latin typeface="Consolas"/>
+              </a:rPr>
+              <a:t>  </a:t>
+            </a:r>
+            <a:r>
+              <a:rPr sz="1800" i="0" b="0">
+                <a:solidFill>
+                  <a:srgbClr val="D4D4D4"/>
+                </a:solidFill>
+                <a:latin typeface="Consolas"/>
+              </a:rPr>
+              <a:t>menu</a:t>
+            </a:r>
+            <a:r>
+              <a:rPr sz="1800" i="0" b="0">
+                <a:solidFill>
+                  <a:srgbClr val="D4D4D4"/>
+                </a:solidFill>
+                <a:latin typeface="Consolas"/>
+              </a:rPr>
+              <a:t> --&gt; </a:t>
+            </a:r>
+            <a:r>
+              <a:rPr sz="1800" i="0" b="0">
+                <a:solidFill>
+                  <a:srgbClr val="D4D4D4"/>
+                </a:solidFill>
+                <a:latin typeface="Consolas"/>
+              </a:rPr>
+              <a:t>regm</a:t>
+            </a:r>
+            <a:r>
+              <a:rPr sz="1800" i="0" b="0">
+                <a:solidFill>
+                  <a:srgbClr val="D4D4D4"/>
+                </a:solidFill>
+                <a:latin typeface="Consolas"/>
+              </a:rPr>
+              <a:t>[</a:t>
+            </a:r>
+            <a:r>
+              <a:rPr sz="1800" i="0" b="0">
+                <a:solidFill>
+                  <a:srgbClr val="D4D4D4"/>
+                </a:solidFill>
+                <a:latin typeface="Consolas"/>
+              </a:rPr>
+              <a:t>Registrar</a:t>
+            </a:r>
+            <a:r>
+              <a:rPr sz="1800" i="0" b="0">
+                <a:solidFill>
+                  <a:srgbClr val="D4D4D4"/>
+                </a:solidFill>
+                <a:latin typeface="Consolas"/>
+              </a:rPr>
+              <a:t> </a:t>
+            </a:r>
+            <a:r>
+              <a:rPr sz="1800" i="0" b="0">
+                <a:solidFill>
+                  <a:srgbClr val="D4D4D4"/>
+                </a:solidFill>
+                <a:latin typeface="Consolas"/>
+              </a:rPr>
+              <a:t>mascota</a:t>
+            </a:r>
+            <a:r>
+              <a:rPr sz="1800" i="0" b="0">
+                <a:solidFill>
+                  <a:srgbClr val="D4D4D4"/>
+                </a:solidFill>
+                <a:latin typeface="Consolas"/>
+              </a:rPr>
+              <a:t>]</a:t>
             </a:r>
           </a:p>
           <a:p>
             <a:pPr>
               <a:spcAft>
-                <a:spcPts val="800"/>
+                <a:spcPts val="385"/>
               </a:spcAft>
             </a:pPr>
             <a:r>
-              <a:rPr sz="2000" b="0" i="0">
-                <a:solidFill>
-                  <a:srgbClr val="333333"/>
-                </a:solidFill>
-                <a:latin typeface="Calibri"/>
-              </a:rPr>
-              <a:t>–   Cada uno de estos cuatro principios se puede auditar sobre un wireframe impreso, sin una sola linea de codigo, y esa auditoria es exactamente lo que se evalua en esta asignatura.</a:t>
-            </a:r>
-          </a:p>
-        </p:txBody>
-      </p:sp>
-      <p:sp>
-        <p:nvSpPr>
-          <p:cNvPr id="6" name="TextBox 5"/>
+              <a:rPr sz="1800" i="0" b="0">
+                <a:solidFill>
+                  <a:srgbClr val="D4D4D4"/>
+                </a:solidFill>
+                <a:latin typeface="Consolas"/>
+              </a:rPr>
+              <a:t>  </a:t>
+            </a:r>
+            <a:r>
+              <a:rPr sz="1800" i="0" b="0">
+                <a:solidFill>
+                  <a:srgbClr val="D4D4D4"/>
+                </a:solidFill>
+                <a:latin typeface="Consolas"/>
+              </a:rPr>
+              <a:t>menu</a:t>
+            </a:r>
+            <a:r>
+              <a:rPr sz="1800" i="0" b="0">
+                <a:solidFill>
+                  <a:srgbClr val="D4D4D4"/>
+                </a:solidFill>
+                <a:latin typeface="Consolas"/>
+              </a:rPr>
+              <a:t> --&gt; </a:t>
+            </a:r>
+            <a:r>
+              <a:rPr sz="1800" i="0" b="0">
+                <a:solidFill>
+                  <a:srgbClr val="D4D4D4"/>
+                </a:solidFill>
+                <a:latin typeface="Consolas"/>
+              </a:rPr>
+              <a:t>busc</a:t>
+            </a:r>
+            <a:r>
+              <a:rPr sz="1800" i="0" b="0">
+                <a:solidFill>
+                  <a:srgbClr val="D4D4D4"/>
+                </a:solidFill>
+                <a:latin typeface="Consolas"/>
+              </a:rPr>
+              <a:t>[</a:t>
+            </a:r>
+            <a:r>
+              <a:rPr sz="1800" i="0" b="0">
+                <a:solidFill>
+                  <a:srgbClr val="D4D4D4"/>
+                </a:solidFill>
+                <a:latin typeface="Consolas"/>
+              </a:rPr>
+              <a:t>Buscar</a:t>
+            </a:r>
+            <a:r>
+              <a:rPr sz="1800" i="0" b="0">
+                <a:solidFill>
+                  <a:srgbClr val="D4D4D4"/>
+                </a:solidFill>
+                <a:latin typeface="Consolas"/>
+              </a:rPr>
+              <a:t> </a:t>
+            </a:r>
+            <a:r>
+              <a:rPr sz="1800" i="0" b="0">
+                <a:solidFill>
+                  <a:srgbClr val="D4D4D4"/>
+                </a:solidFill>
+                <a:latin typeface="Consolas"/>
+              </a:rPr>
+              <a:t>expediente</a:t>
+            </a:r>
+            <a:r>
+              <a:rPr sz="1800" i="0" b="0">
+                <a:solidFill>
+                  <a:srgbClr val="D4D4D4"/>
+                </a:solidFill>
+                <a:latin typeface="Consolas"/>
+              </a:rPr>
+              <a:t>]</a:t>
+            </a:r>
+          </a:p>
+          <a:p>
+            <a:pPr>
+              <a:spcAft>
+                <a:spcPts val="385"/>
+              </a:spcAft>
+            </a:pPr>
+            <a:r>
+              <a:rPr sz="1800" i="0" b="0">
+                <a:solidFill>
+                  <a:srgbClr val="D4D4D4"/>
+                </a:solidFill>
+                <a:latin typeface="Consolas"/>
+              </a:rPr>
+              <a:t>  </a:t>
+            </a:r>
+            <a:r>
+              <a:rPr sz="1800" i="0" b="0">
+                <a:solidFill>
+                  <a:srgbClr val="D4D4D4"/>
+                </a:solidFill>
+                <a:latin typeface="Consolas"/>
+              </a:rPr>
+              <a:t>menu</a:t>
+            </a:r>
+            <a:r>
+              <a:rPr sz="1800" i="0" b="0">
+                <a:solidFill>
+                  <a:srgbClr val="D4D4D4"/>
+                </a:solidFill>
+                <a:latin typeface="Consolas"/>
+              </a:rPr>
+              <a:t> --&gt; </a:t>
+            </a:r>
+            <a:r>
+              <a:rPr sz="1800" i="0" b="0">
+                <a:solidFill>
+                  <a:srgbClr val="D4D4D4"/>
+                </a:solidFill>
+                <a:latin typeface="Consolas"/>
+              </a:rPr>
+              <a:t>agen</a:t>
+            </a:r>
+            <a:r>
+              <a:rPr sz="1800" i="0" b="0">
+                <a:solidFill>
+                  <a:srgbClr val="D4D4D4"/>
+                </a:solidFill>
+                <a:latin typeface="Consolas"/>
+              </a:rPr>
+              <a:t>[</a:t>
+            </a:r>
+            <a:r>
+              <a:rPr sz="1800" i="0" b="0">
+                <a:solidFill>
+                  <a:srgbClr val="D4D4D4"/>
+                </a:solidFill>
+                <a:latin typeface="Consolas"/>
+              </a:rPr>
+              <a:t>Agendar</a:t>
+            </a:r>
+            <a:r>
+              <a:rPr sz="1800" i="0" b="0">
+                <a:solidFill>
+                  <a:srgbClr val="D4D4D4"/>
+                </a:solidFill>
+                <a:latin typeface="Consolas"/>
+              </a:rPr>
+              <a:t> </a:t>
+            </a:r>
+            <a:r>
+              <a:rPr sz="1800" i="0" b="0">
+                <a:solidFill>
+                  <a:srgbClr val="D4D4D4"/>
+                </a:solidFill>
+                <a:latin typeface="Consolas"/>
+              </a:rPr>
+              <a:t>cita</a:t>
+            </a:r>
+            <a:r>
+              <a:rPr sz="1800" i="0" b="0">
+                <a:solidFill>
+                  <a:srgbClr val="D4D4D4"/>
+                </a:solidFill>
+                <a:latin typeface="Consolas"/>
+              </a:rPr>
+              <a:t>]</a:t>
+            </a:r>
+          </a:p>
+          <a:p>
+            <a:pPr>
+              <a:spcAft>
+                <a:spcPts val="385"/>
+              </a:spcAft>
+            </a:pPr>
+            <a:r>
+              <a:rPr sz="1800" i="0" b="0">
+                <a:solidFill>
+                  <a:srgbClr val="D4D4D4"/>
+                </a:solidFill>
+                <a:latin typeface="Consolas"/>
+              </a:rPr>
+              <a:t/>
+            </a:r>
+          </a:p>
+          <a:p>
+            <a:pPr>
+              <a:spcAft>
+                <a:spcPts val="385"/>
+              </a:spcAft>
+            </a:pPr>
+            <a:r>
+              <a:rPr sz="1800" i="0" b="0">
+                <a:solidFill>
+                  <a:srgbClr val="D4D4D4"/>
+                </a:solidFill>
+                <a:latin typeface="Consolas"/>
+              </a:rPr>
+              <a:t>  </a:t>
+            </a:r>
+            <a:r>
+              <a:rPr sz="1800" i="0" b="0">
+                <a:solidFill>
+                  <a:srgbClr val="D4D4D4"/>
+                </a:solidFill>
+                <a:latin typeface="Consolas"/>
+              </a:rPr>
+              <a:t>regm</a:t>
+            </a:r>
+            <a:r>
+              <a:rPr sz="1800" i="0" b="0">
+                <a:solidFill>
+                  <a:srgbClr val="D4D4D4"/>
+                </a:solidFill>
+                <a:latin typeface="Consolas"/>
+              </a:rPr>
+              <a:t> --&gt;|</a:t>
+            </a:r>
+            <a:r>
+              <a:rPr sz="1800" i="0" b="0">
+                <a:solidFill>
+                  <a:srgbClr val="D4D4D4"/>
+                </a:solidFill>
+                <a:latin typeface="Consolas"/>
+              </a:rPr>
+              <a:t>guardar</a:t>
+            </a:r>
+            <a:r>
+              <a:rPr sz="1800" i="0" b="0">
+                <a:solidFill>
+                  <a:srgbClr val="D4D4D4"/>
+                </a:solidFill>
+                <a:latin typeface="Consolas"/>
+              </a:rPr>
+              <a:t>| </a:t>
+            </a:r>
+            <a:r>
+              <a:rPr sz="1800" i="0" b="0">
+                <a:solidFill>
+                  <a:srgbClr val="D4D4D4"/>
+                </a:solidFill>
+                <a:latin typeface="Consolas"/>
+              </a:rPr>
+              <a:t>menu</a:t>
+            </a:r>
+          </a:p>
+          <a:p>
+            <a:pPr>
+              <a:spcAft>
+                <a:spcPts val="385"/>
+              </a:spcAft>
+            </a:pPr>
+            <a:r>
+              <a:rPr sz="1800" i="0" b="0">
+                <a:solidFill>
+                  <a:srgbClr val="D4D4D4"/>
+                </a:solidFill>
+                <a:latin typeface="Consolas"/>
+              </a:rPr>
+              <a:t>  </a:t>
+            </a:r>
+            <a:r>
+              <a:rPr sz="1800" i="0" b="0">
+                <a:solidFill>
+                  <a:srgbClr val="D4D4D4"/>
+                </a:solidFill>
+                <a:latin typeface="Consolas"/>
+              </a:rPr>
+              <a:t>regm</a:t>
+            </a:r>
+            <a:r>
+              <a:rPr sz="1800" i="0" b="0">
+                <a:solidFill>
+                  <a:srgbClr val="D4D4D4"/>
+                </a:solidFill>
+                <a:latin typeface="Consolas"/>
+              </a:rPr>
+              <a:t> --&gt;|</a:t>
+            </a:r>
+            <a:r>
+              <a:rPr sz="1800" i="0" b="0">
+                <a:solidFill>
+                  <a:srgbClr val="D4D4D4"/>
+                </a:solidFill>
+                <a:latin typeface="Consolas"/>
+              </a:rPr>
+              <a:t>cancelar</a:t>
+            </a:r>
+            <a:r>
+              <a:rPr sz="1800" i="0" b="0">
+                <a:solidFill>
+                  <a:srgbClr val="D4D4D4"/>
+                </a:solidFill>
+                <a:latin typeface="Consolas"/>
+              </a:rPr>
+              <a:t>| </a:t>
+            </a:r>
+            <a:r>
+              <a:rPr sz="1800" i="0" b="0">
+                <a:solidFill>
+                  <a:srgbClr val="D4D4D4"/>
+                </a:solidFill>
+                <a:latin typeface="Consolas"/>
+              </a:rPr>
+              <a:t>menu</a:t>
+            </a:r>
+          </a:p>
+          <a:p>
+            <a:pPr>
+              <a:spcAft>
+                <a:spcPts val="385"/>
+              </a:spcAft>
+            </a:pPr>
+            <a:r>
+              <a:rPr sz="1800" i="0" b="0">
+                <a:solidFill>
+                  <a:srgbClr val="D4D4D4"/>
+                </a:solidFill>
+                <a:latin typeface="Consolas"/>
+              </a:rPr>
+              <a:t>  </a:t>
+            </a:r>
+            <a:r>
+              <a:rPr sz="1800" i="0" b="0">
+                <a:solidFill>
+                  <a:srgbClr val="D4D4D4"/>
+                </a:solidFill>
+                <a:latin typeface="Consolas"/>
+              </a:rPr>
+              <a:t>busc</a:t>
+            </a:r>
+            <a:r>
+              <a:rPr sz="1800" i="0" b="0">
+                <a:solidFill>
+                  <a:srgbClr val="D4D4D4"/>
+                </a:solidFill>
+                <a:latin typeface="Consolas"/>
+              </a:rPr>
+              <a:t> --&gt;|</a:t>
+            </a:r>
+            <a:r>
+              <a:rPr sz="1800" i="0" b="0">
+                <a:solidFill>
+                  <a:srgbClr val="B5CEA8"/>
+                </a:solidFill>
+                <a:latin typeface="Consolas"/>
+              </a:rPr>
+              <a:t>1</a:t>
+            </a:r>
+            <a:r>
+              <a:rPr sz="1800" i="0" b="0">
+                <a:solidFill>
+                  <a:srgbClr val="D4D4D4"/>
+                </a:solidFill>
+                <a:latin typeface="Consolas"/>
+              </a:rPr>
+              <a:t> </a:t>
+            </a:r>
+            <a:r>
+              <a:rPr sz="1800" i="0" b="0">
+                <a:solidFill>
+                  <a:srgbClr val="D4D4D4"/>
+                </a:solidFill>
+                <a:latin typeface="Consolas"/>
+              </a:rPr>
+              <a:t>resultado</a:t>
+            </a:r>
+            <a:r>
+              <a:rPr sz="1800" i="0" b="0">
+                <a:solidFill>
+                  <a:srgbClr val="D4D4D4"/>
+                </a:solidFill>
+                <a:latin typeface="Consolas"/>
+              </a:rPr>
+              <a:t>| </a:t>
+            </a:r>
+            <a:r>
+              <a:rPr sz="1800" i="0" b="0">
+                <a:solidFill>
+                  <a:srgbClr val="D4D4D4"/>
+                </a:solidFill>
+                <a:latin typeface="Consolas"/>
+              </a:rPr>
+              <a:t>det</a:t>
+            </a:r>
+            <a:r>
+              <a:rPr sz="1800" i="0" b="0">
+                <a:solidFill>
+                  <a:srgbClr val="D4D4D4"/>
+                </a:solidFill>
+                <a:latin typeface="Consolas"/>
+              </a:rPr>
+              <a:t>[</a:t>
+            </a:r>
+            <a:r>
+              <a:rPr sz="1800" i="0" b="0">
+                <a:solidFill>
+                  <a:srgbClr val="D4D4D4"/>
+                </a:solidFill>
+                <a:latin typeface="Consolas"/>
+              </a:rPr>
+              <a:t>Detalle</a:t>
+            </a:r>
+            <a:r>
+              <a:rPr sz="1800" i="0" b="0">
+                <a:solidFill>
+                  <a:srgbClr val="D4D4D4"/>
+                </a:solidFill>
+                <a:latin typeface="Consolas"/>
+              </a:rPr>
+              <a:t> </a:t>
+            </a:r>
+            <a:r>
+              <a:rPr sz="1800" i="0" b="0">
+                <a:solidFill>
+                  <a:srgbClr val="D4D4D4"/>
+                </a:solidFill>
+                <a:latin typeface="Consolas"/>
+              </a:rPr>
+              <a:t>del</a:t>
+            </a:r>
+            <a:r>
+              <a:rPr sz="1800" i="0" b="0">
+                <a:solidFill>
+                  <a:srgbClr val="D4D4D4"/>
+                </a:solidFill>
+                <a:latin typeface="Consolas"/>
+              </a:rPr>
+              <a:t> </a:t>
+            </a:r>
+            <a:r>
+              <a:rPr sz="1800" i="0" b="0">
+                <a:solidFill>
+                  <a:srgbClr val="D4D4D4"/>
+                </a:solidFill>
+                <a:latin typeface="Consolas"/>
+              </a:rPr>
+              <a:t>expediente</a:t>
+            </a:r>
+            <a:r>
+              <a:rPr sz="1800" i="0" b="0">
+                <a:solidFill>
+                  <a:srgbClr val="D4D4D4"/>
+                </a:solidFill>
+                <a:latin typeface="Consolas"/>
+              </a:rPr>
+              <a:t>]</a:t>
+            </a:r>
+          </a:p>
+          <a:p>
+            <a:pPr>
+              <a:spcAft>
+                <a:spcPts val="385"/>
+              </a:spcAft>
+            </a:pPr>
+            <a:r>
+              <a:rPr sz="1800" i="0" b="0">
+                <a:solidFill>
+                  <a:srgbClr val="D4D4D4"/>
+                </a:solidFill>
+                <a:latin typeface="Consolas"/>
+              </a:rPr>
+              <a:t>  </a:t>
+            </a:r>
+            <a:r>
+              <a:rPr sz="1800" i="0" b="0">
+                <a:solidFill>
+                  <a:srgbClr val="D4D4D4"/>
+                </a:solidFill>
+                <a:latin typeface="Consolas"/>
+              </a:rPr>
+              <a:t>busc</a:t>
+            </a:r>
+            <a:r>
+              <a:rPr sz="1800" i="0" b="0">
+                <a:solidFill>
+                  <a:srgbClr val="D4D4D4"/>
+                </a:solidFill>
+                <a:latin typeface="Consolas"/>
+              </a:rPr>
+              <a:t> --&gt;|</a:t>
+            </a:r>
+            <a:r>
+              <a:rPr sz="1800" i="0" b="0">
+                <a:solidFill>
+                  <a:srgbClr val="D4D4D4"/>
+                </a:solidFill>
+                <a:latin typeface="Consolas"/>
+              </a:rPr>
+              <a:t>varios</a:t>
+            </a:r>
+            <a:r>
+              <a:rPr sz="1800" i="0" b="0">
+                <a:solidFill>
+                  <a:srgbClr val="D4D4D4"/>
+                </a:solidFill>
+                <a:latin typeface="Consolas"/>
+              </a:rPr>
+              <a:t>| </a:t>
+            </a:r>
+            <a:r>
+              <a:rPr sz="1800" i="0" b="0">
+                <a:solidFill>
+                  <a:srgbClr val="D4D4D4"/>
+                </a:solidFill>
+                <a:latin typeface="Consolas"/>
+              </a:rPr>
+              <a:t>lista</a:t>
+            </a:r>
+            <a:r>
+              <a:rPr sz="1800" i="0" b="0">
+                <a:solidFill>
+                  <a:srgbClr val="D4D4D4"/>
+                </a:solidFill>
+                <a:latin typeface="Consolas"/>
+              </a:rPr>
+              <a:t>[</a:t>
+            </a:r>
+            <a:r>
+              <a:rPr sz="1800" i="0" b="0">
+                <a:solidFill>
+                  <a:srgbClr val="D4D4D4"/>
+                </a:solidFill>
+                <a:latin typeface="Consolas"/>
+              </a:rPr>
+              <a:t>Lista</a:t>
+            </a:r>
+            <a:r>
+              <a:rPr sz="1800" i="0" b="0">
+                <a:solidFill>
+                  <a:srgbClr val="D4D4D4"/>
+                </a:solidFill>
+                <a:latin typeface="Consolas"/>
+              </a:rPr>
+              <a:t> </a:t>
+            </a:r>
+            <a:r>
+              <a:rPr sz="1800" i="0" b="0">
+                <a:solidFill>
+                  <a:srgbClr val="D4D4D4"/>
+                </a:solidFill>
+                <a:latin typeface="Consolas"/>
+              </a:rPr>
+              <a:t>de</a:t>
+            </a:r>
+            <a:r>
+              <a:rPr sz="1800" i="0" b="0">
+                <a:solidFill>
+                  <a:srgbClr val="D4D4D4"/>
+                </a:solidFill>
+                <a:latin typeface="Consolas"/>
+              </a:rPr>
+              <a:t> </a:t>
+            </a:r>
+            <a:r>
+              <a:rPr sz="1800" i="0" b="0">
+                <a:solidFill>
+                  <a:srgbClr val="D4D4D4"/>
+                </a:solidFill>
+                <a:latin typeface="Consolas"/>
+              </a:rPr>
+              <a:t>resultados</a:t>
+            </a:r>
+            <a:r>
+              <a:rPr sz="1800" i="0" b="0">
+                <a:solidFill>
+                  <a:srgbClr val="D4D4D4"/>
+                </a:solidFill>
+                <a:latin typeface="Consolas"/>
+              </a:rPr>
+              <a:t>] --&gt; </a:t>
+            </a:r>
+            <a:r>
+              <a:rPr sz="1800" i="0" b="0">
+                <a:solidFill>
+                  <a:srgbClr val="D4D4D4"/>
+                </a:solidFill>
+                <a:latin typeface="Consolas"/>
+              </a:rPr>
+              <a:t>det</a:t>
+            </a:r>
+          </a:p>
+          <a:p>
+            <a:pPr>
+              <a:spcAft>
+                <a:spcPts val="385"/>
+              </a:spcAft>
+            </a:pPr>
+            <a:r>
+              <a:rPr sz="1800" i="0" b="0">
+                <a:solidFill>
+                  <a:srgbClr val="D4D4D4"/>
+                </a:solidFill>
+                <a:latin typeface="Consolas"/>
+              </a:rPr>
+              <a:t>  </a:t>
+            </a:r>
+            <a:r>
+              <a:rPr sz="1800" i="0" b="0">
+                <a:solidFill>
+                  <a:srgbClr val="D4D4D4"/>
+                </a:solidFill>
+                <a:latin typeface="Consolas"/>
+              </a:rPr>
+              <a:t>busc</a:t>
+            </a:r>
+            <a:r>
+              <a:rPr sz="1800" i="0" b="0">
+                <a:solidFill>
+                  <a:srgbClr val="D4D4D4"/>
+                </a:solidFill>
+                <a:latin typeface="Consolas"/>
+              </a:rPr>
+              <a:t> --&gt;|</a:t>
+            </a:r>
+            <a:r>
+              <a:rPr sz="1800" i="0" b="0">
+                <a:solidFill>
+                  <a:srgbClr val="D4D4D4"/>
+                </a:solidFill>
+                <a:latin typeface="Consolas"/>
+              </a:rPr>
+              <a:t>ninguno</a:t>
+            </a:r>
+            <a:r>
+              <a:rPr sz="1800" i="0" b="0">
+                <a:solidFill>
+                  <a:srgbClr val="D4D4D4"/>
+                </a:solidFill>
+                <a:latin typeface="Consolas"/>
+              </a:rPr>
+              <a:t>| </a:t>
+            </a:r>
+            <a:r>
+              <a:rPr sz="1800" i="0" b="0">
+                <a:solidFill>
+                  <a:srgbClr val="D4D4D4"/>
+                </a:solidFill>
+                <a:latin typeface="Consolas"/>
+              </a:rPr>
+              <a:t>vacio</a:t>
+            </a:r>
+            <a:r>
+              <a:rPr sz="1800" i="0" b="0">
+                <a:solidFill>
+                  <a:srgbClr val="D4D4D4"/>
+                </a:solidFill>
+                <a:latin typeface="Consolas"/>
+              </a:rPr>
+              <a:t>[</a:t>
+            </a:r>
+            <a:r>
+              <a:rPr sz="1800" i="0" b="0">
+                <a:solidFill>
+                  <a:srgbClr val="D4D4D4"/>
+                </a:solidFill>
+                <a:latin typeface="Consolas"/>
+              </a:rPr>
+              <a:t>Estado</a:t>
+            </a:r>
+            <a:r>
+              <a:rPr sz="1800" i="0" b="0">
+                <a:solidFill>
+                  <a:srgbClr val="D4D4D4"/>
+                </a:solidFill>
+                <a:latin typeface="Consolas"/>
+              </a:rPr>
+              <a:t> </a:t>
+            </a:r>
+            <a:r>
+              <a:rPr sz="1800" i="0" b="0">
+                <a:solidFill>
+                  <a:srgbClr val="D4D4D4"/>
+                </a:solidFill>
+                <a:latin typeface="Consolas"/>
+              </a:rPr>
+              <a:t>vacio</a:t>
+            </a:r>
+            <a:r>
+              <a:rPr sz="1800" i="0" b="0">
+                <a:solidFill>
+                  <a:srgbClr val="D4D4D4"/>
+                </a:solidFill>
+                <a:latin typeface="Consolas"/>
+              </a:rPr>
+              <a:t>&lt;</a:t>
+            </a:r>
+            <a:r>
+              <a:rPr sz="1800" i="0" b="0">
+                <a:solidFill>
+                  <a:srgbClr val="D4D4D4"/>
+                </a:solidFill>
+                <a:latin typeface="Consolas"/>
+              </a:rPr>
+              <a:t>br</a:t>
+            </a:r>
+            <a:r>
+              <a:rPr sz="1800" i="0" b="0">
+                <a:solidFill>
+                  <a:srgbClr val="D4D4D4"/>
+                </a:solidFill>
+                <a:latin typeface="Consolas"/>
+              </a:rPr>
+              <a:t>/&gt;</a:t>
+            </a:r>
+            <a:r>
+              <a:rPr sz="1800" i="0" b="0">
+                <a:solidFill>
+                  <a:srgbClr val="D4D4D4"/>
+                </a:solidFill>
+                <a:latin typeface="Consolas"/>
+              </a:rPr>
+              <a:t>con</a:t>
+            </a:r>
+            <a:r>
+              <a:rPr sz="1800" i="0" b="0">
+                <a:solidFill>
+                  <a:srgbClr val="D4D4D4"/>
+                </a:solidFill>
+                <a:latin typeface="Consolas"/>
+              </a:rPr>
+              <a:t> </a:t>
+            </a:r>
+            <a:r>
+              <a:rPr sz="1800" i="0" b="0">
+                <a:solidFill>
+                  <a:srgbClr val="D4D4D4"/>
+                </a:solidFill>
+                <a:latin typeface="Consolas"/>
+              </a:rPr>
+              <a:t>accion</a:t>
+            </a:r>
+            <a:r>
+              <a:rPr sz="1800" i="0" b="0">
+                <a:solidFill>
+                  <a:srgbClr val="D4D4D4"/>
+                </a:solidFill>
+                <a:latin typeface="Consolas"/>
+              </a:rPr>
+              <a:t> </a:t>
+            </a:r>
+            <a:r>
+              <a:rPr sz="1800" i="0" b="0">
+                <a:solidFill>
+                  <a:srgbClr val="D4D4D4"/>
+                </a:solidFill>
+                <a:latin typeface="Consolas"/>
+              </a:rPr>
+              <a:t>sugerida</a:t>
+            </a:r>
+            <a:r>
+              <a:rPr sz="1800" i="0" b="0">
+                <a:solidFill>
+                  <a:srgbClr val="D4D4D4"/>
+                </a:solidFill>
+                <a:latin typeface="Consolas"/>
+              </a:rPr>
+              <a:t>]</a:t>
+            </a:r>
+          </a:p>
+          <a:p>
+            <a:pPr>
+              <a:spcAft>
+                <a:spcPts val="385"/>
+              </a:spcAft>
+            </a:pPr>
+            <a:r>
+              <a:rPr sz="1800" i="0" b="0">
+                <a:solidFill>
+                  <a:srgbClr val="D4D4D4"/>
+                </a:solidFill>
+                <a:latin typeface="Consolas"/>
+              </a:rPr>
+              <a:t/>
+            </a:r>
+          </a:p>
+          <a:p>
+            <a:pPr>
+              <a:spcAft>
+                <a:spcPts val="385"/>
+              </a:spcAft>
+            </a:pPr>
+            <a:r>
+              <a:rPr sz="1800" i="1" b="0">
+                <a:solidFill>
+                  <a:srgbClr val="6A9955"/>
+                </a:solidFill>
+                <a:latin typeface="Consolas"/>
+              </a:rPr>
+              <a:t>%% Los tres caminos de una busqueda —uno, varios, ninguno— son lo que</a:t>
+            </a:r>
+          </a:p>
+          <a:p>
+            <a:pPr>
+              <a:spcAft>
+                <a:spcPts val="385"/>
+              </a:spcAft>
+            </a:pPr>
+            <a:r>
+              <a:rPr sz="1800" i="1" b="0">
+                <a:solidFill>
+                  <a:srgbClr val="6A9955"/>
+                </a:solidFill>
+                <a:latin typeface="Consolas"/>
+              </a:rPr>
+              <a:t>%% separa un wireframe de un dibujo. El «ninguno» es el que se olvida.</a:t>
+            </a:r>
+          </a:p>
+        </p:txBody>
+      </p:sp>
+      <p:sp>
+        <p:nvSpPr>
+          <p:cNvPr id="13" name="TextBox 12"/>
           <p:cNvSpPr txBox="1"/>
           <p:nvPr/>
         </p:nvSpPr>
@@ -9262,21 +11764,238 @@
                 </a:solidFill>
                 <a:latin typeface="Calibri"/>
               </a:rPr>
-              <a:t>Una pantalla suelta no sirve para nada; lo que se diseña es un flujo de... (1/2)</a:t>
-            </a:r>
-          </a:p>
-        </p:txBody>
-      </p:sp>
-      <p:sp>
-        <p:nvSpPr>
-          <p:cNvPr id="5" name="TextBox 4"/>
+              <a:t>Flujo de tarea con caminos alternos en Mermaid</a:t>
+            </a:r>
+          </a:p>
+        </p:txBody>
+      </p:sp>
+      <p:sp>
+        <p:nvSpPr>
+          <p:cNvPr id="5" name="Rounded Rectangle 4"/>
+          <p:cNvSpPr/>
+          <p:nvPr/>
+        </p:nvSpPr>
+        <p:spPr>
+          <a:xfrm>
+            <a:off x="457200" y="1261872"/>
+            <a:ext cx="11277295" cy="4745196"/>
+          </a:xfrm>
+          <a:prstGeom prst="roundRect">
+            <a:avLst>
+              <a:gd name="adj" fmla="val 4000"/>
+            </a:avLst>
+          </a:prstGeom>
+          <a:solidFill>
+            <a:srgbClr val="1E1E1E"/>
+          </a:solidFill>
+          <a:ln>
+            <a:noFill/>
+          </a:ln>
+        </p:spPr>
+        <p:style>
+          <a:lnRef idx="1">
+            <a:schemeClr val="accent1"/>
+          </a:lnRef>
+          <a:fillRef idx="3">
+            <a:schemeClr val="accent1"/>
+          </a:fillRef>
+          <a:effectRef idx="2">
+            <a:schemeClr val="accent1"/>
+          </a:effectRef>
+          <a:fontRef idx="minor">
+            <a:schemeClr val="lt1"/>
+          </a:fontRef>
+        </p:style>
+        <p:txBody>
+          <a:bodyPr rtlCol="0" anchor="ctr"/>
+          <a:lstStyle/>
+          <a:p>
+            <a:pPr algn="ctr"/>
+          </a:p>
+        </p:txBody>
+      </p:sp>
+      <p:sp>
+        <p:nvSpPr>
+          <p:cNvPr id="6" name="Rectangle 5"/>
+          <p:cNvSpPr/>
+          <p:nvPr/>
+        </p:nvSpPr>
+        <p:spPr>
+          <a:xfrm>
+            <a:off x="457200" y="1261872"/>
+            <a:ext cx="11277295" cy="365760"/>
+          </a:xfrm>
+          <a:prstGeom prst="rect">
+            <a:avLst/>
+          </a:prstGeom>
+          <a:solidFill>
+            <a:srgbClr val="2D2D30"/>
+          </a:solidFill>
+          <a:ln>
+            <a:noFill/>
+          </a:ln>
+        </p:spPr>
+        <p:style>
+          <a:lnRef idx="1">
+            <a:schemeClr val="accent1"/>
+          </a:lnRef>
+          <a:fillRef idx="3">
+            <a:schemeClr val="accent1"/>
+          </a:fillRef>
+          <a:effectRef idx="2">
+            <a:schemeClr val="accent1"/>
+          </a:effectRef>
+          <a:fontRef idx="minor">
+            <a:schemeClr val="lt1"/>
+          </a:fontRef>
+        </p:style>
+        <p:txBody>
+          <a:bodyPr rtlCol="0" anchor="ctr"/>
+          <a:lstStyle/>
+          <a:p>
+            <a:pPr algn="ctr"/>
+          </a:p>
+        </p:txBody>
+      </p:sp>
+      <p:sp>
+        <p:nvSpPr>
+          <p:cNvPr id="7" name="Oval 6"/>
+          <p:cNvSpPr/>
+          <p:nvPr/>
+        </p:nvSpPr>
+        <p:spPr>
+          <a:xfrm>
+            <a:off x="658368" y="1380743"/>
+            <a:ext cx="128016" cy="128016"/>
+          </a:xfrm>
+          <a:prstGeom prst="ellipse">
+            <a:avLst/>
+          </a:prstGeom>
+          <a:solidFill>
+            <a:srgbClr val="FF5F56"/>
+          </a:solidFill>
+          <a:ln>
+            <a:noFill/>
+          </a:ln>
+        </p:spPr>
+        <p:style>
+          <a:lnRef idx="1">
+            <a:schemeClr val="accent1"/>
+          </a:lnRef>
+          <a:fillRef idx="3">
+            <a:schemeClr val="accent1"/>
+          </a:fillRef>
+          <a:effectRef idx="2">
+            <a:schemeClr val="accent1"/>
+          </a:effectRef>
+          <a:fontRef idx="minor">
+            <a:schemeClr val="lt1"/>
+          </a:fontRef>
+        </p:style>
+        <p:txBody>
+          <a:bodyPr rtlCol="0" anchor="ctr"/>
+          <a:lstStyle/>
+          <a:p>
+            <a:pPr algn="ctr"/>
+          </a:p>
+        </p:txBody>
+      </p:sp>
+      <p:sp>
+        <p:nvSpPr>
+          <p:cNvPr id="8" name="Oval 7"/>
+          <p:cNvSpPr/>
+          <p:nvPr/>
+        </p:nvSpPr>
+        <p:spPr>
+          <a:xfrm>
+            <a:off x="877824" y="1380743"/>
+            <a:ext cx="128016" cy="128016"/>
+          </a:xfrm>
+          <a:prstGeom prst="ellipse">
+            <a:avLst/>
+          </a:prstGeom>
+          <a:solidFill>
+            <a:srgbClr val="FFBD2E"/>
+          </a:solidFill>
+          <a:ln>
+            <a:noFill/>
+          </a:ln>
+        </p:spPr>
+        <p:style>
+          <a:lnRef idx="1">
+            <a:schemeClr val="accent1"/>
+          </a:lnRef>
+          <a:fillRef idx="3">
+            <a:schemeClr val="accent1"/>
+          </a:fillRef>
+          <a:effectRef idx="2">
+            <a:schemeClr val="accent1"/>
+          </a:effectRef>
+          <a:fontRef idx="minor">
+            <a:schemeClr val="lt1"/>
+          </a:fontRef>
+        </p:style>
+        <p:txBody>
+          <a:bodyPr rtlCol="0" anchor="ctr"/>
+          <a:lstStyle/>
+          <a:p>
+            <a:pPr algn="ctr"/>
+          </a:p>
+        </p:txBody>
+      </p:sp>
+      <p:sp>
+        <p:nvSpPr>
+          <p:cNvPr id="9" name="Oval 8"/>
+          <p:cNvSpPr/>
+          <p:nvPr/>
+        </p:nvSpPr>
+        <p:spPr>
+          <a:xfrm>
+            <a:off x="1097280" y="1380743"/>
+            <a:ext cx="128016" cy="128016"/>
+          </a:xfrm>
+          <a:prstGeom prst="ellipse">
+            <a:avLst/>
+          </a:prstGeom>
+          <a:solidFill>
+            <a:srgbClr val="27C93F"/>
+          </a:solidFill>
+          <a:ln>
+            <a:noFill/>
+          </a:ln>
+        </p:spPr>
+        <p:style>
+          <a:lnRef idx="1">
+            <a:schemeClr val="accent1"/>
+          </a:lnRef>
+          <a:fillRef idx="3">
+            <a:schemeClr val="accent1"/>
+          </a:fillRef>
+          <a:effectRef idx="2">
+            <a:schemeClr val="accent1"/>
+          </a:effectRef>
+          <a:fontRef idx="minor">
+            <a:schemeClr val="lt1"/>
+          </a:fontRef>
+        </p:style>
+        <p:txBody>
+          <a:bodyPr rtlCol="0" anchor="ctr"/>
+          <a:lstStyle/>
+          <a:p>
+            <a:pPr algn="ctr"/>
+          </a:p>
+        </p:txBody>
+      </p:sp>
+      <p:sp>
+        <p:nvSpPr>
+          <p:cNvPr id="10" name="TextBox 9"/>
           <p:cNvSpPr txBox="1"/>
           <p:nvPr/>
         </p:nvSpPr>
         <p:spPr>
           <a:xfrm>
-            <a:off x="457200" y="1170432"/>
-            <a:ext cx="11277295" cy="5230368"/>
+            <a:off x="1371600" y="1298448"/>
+            <a:ext cx="10180015" cy="292608"/>
           </a:xfrm>
           <a:prstGeom prst="rect">
             <a:avLst/>
@@ -9284,95 +12003,2138 @@
           <a:noFill/>
         </p:spPr>
         <p:txBody>
+          <a:bodyPr wrap="square" anchor="ctr"/>
+          <a:lstStyle/>
+          <a:p>
+            <a:pPr algn="r"/>
+            <a:r>
+              <a:rPr sz="1100" b="1" i="0">
+                <a:solidFill>
+                  <a:srgbClr val="BBBBBB"/>
+                </a:solidFill>
+                <a:latin typeface="Calibri"/>
+              </a:rPr>
+              <a:t>Mermaid</a:t>
+            </a:r>
+          </a:p>
+        </p:txBody>
+      </p:sp>
+      <p:sp>
+        <p:nvSpPr>
+          <p:cNvPr id="11" name="TextBox 10"/>
+          <p:cNvSpPr txBox="1"/>
+          <p:nvPr/>
+        </p:nvSpPr>
+        <p:spPr>
+          <a:xfrm>
+            <a:off x="685800" y="1719072"/>
+            <a:ext cx="502920" cy="4150836"/>
+          </a:xfrm>
+          <a:prstGeom prst="rect">
+            <a:avLst/>
+          </a:prstGeom>
+          <a:noFill/>
+        </p:spPr>
+        <p:txBody>
           <a:bodyPr wrap="square">
             <a:spAutoFit/>
           </a:bodyPr>
           <a:lstStyle/>
           <a:p>
+            <a:pPr algn="r">
+              <a:spcAft>
+                <a:spcPts val="342"/>
+              </a:spcAft>
+            </a:pPr>
+            <a:r>
+              <a:rPr sz="1600" i="0" b="0">
+                <a:solidFill>
+                  <a:srgbClr val="858585"/>
+                </a:solidFill>
+                <a:latin typeface="Consolas"/>
+              </a:rPr>
+              <a:t>1</a:t>
+            </a:r>
+          </a:p>
+          <a:p>
+            <a:pPr algn="r">
+              <a:spcAft>
+                <a:spcPts val="342"/>
+              </a:spcAft>
+            </a:pPr>
+            <a:r>
+              <a:rPr sz="1600" i="0" b="0">
+                <a:solidFill>
+                  <a:srgbClr val="858585"/>
+                </a:solidFill>
+                <a:latin typeface="Consolas"/>
+              </a:rPr>
+              <a:t>2</a:t>
+            </a:r>
+          </a:p>
+          <a:p>
+            <a:pPr algn="r">
+              <a:spcAft>
+                <a:spcPts val="342"/>
+              </a:spcAft>
+            </a:pPr>
+            <a:r>
+              <a:rPr sz="1600" i="0" b="0">
+                <a:solidFill>
+                  <a:srgbClr val="858585"/>
+                </a:solidFill>
+                <a:latin typeface="Consolas"/>
+              </a:rPr>
+              <a:t>3</a:t>
+            </a:r>
+          </a:p>
+          <a:p>
+            <a:pPr algn="r">
+              <a:spcAft>
+                <a:spcPts val="342"/>
+              </a:spcAft>
+            </a:pPr>
+            <a:r>
+              <a:rPr sz="1600" i="0" b="0">
+                <a:solidFill>
+                  <a:srgbClr val="858585"/>
+                </a:solidFill>
+                <a:latin typeface="Consolas"/>
+              </a:rPr>
+              <a:t>4</a:t>
+            </a:r>
+          </a:p>
+          <a:p>
+            <a:pPr algn="r">
+              <a:spcAft>
+                <a:spcPts val="342"/>
+              </a:spcAft>
+            </a:pPr>
+            <a:r>
+              <a:rPr sz="1600" i="0" b="0">
+                <a:solidFill>
+                  <a:srgbClr val="858585"/>
+                </a:solidFill>
+                <a:latin typeface="Consolas"/>
+              </a:rPr>
+              <a:t>5</a:t>
+            </a:r>
+          </a:p>
+          <a:p>
+            <a:pPr algn="r">
+              <a:spcAft>
+                <a:spcPts val="342"/>
+              </a:spcAft>
+            </a:pPr>
+            <a:r>
+              <a:rPr sz="1600" i="0" b="0">
+                <a:solidFill>
+                  <a:srgbClr val="858585"/>
+                </a:solidFill>
+                <a:latin typeface="Consolas"/>
+              </a:rPr>
+              <a:t>6</a:t>
+            </a:r>
+          </a:p>
+          <a:p>
+            <a:pPr algn="r">
+              <a:spcAft>
+                <a:spcPts val="342"/>
+              </a:spcAft>
+            </a:pPr>
+            <a:r>
+              <a:rPr sz="1600" i="0" b="0">
+                <a:solidFill>
+                  <a:srgbClr val="858585"/>
+                </a:solidFill>
+                <a:latin typeface="Consolas"/>
+              </a:rPr>
+              <a:t>7</a:t>
+            </a:r>
+          </a:p>
+          <a:p>
+            <a:pPr algn="r">
+              <a:spcAft>
+                <a:spcPts val="342"/>
+              </a:spcAft>
+            </a:pPr>
+            <a:r>
+              <a:rPr sz="1600" i="0" b="0">
+                <a:solidFill>
+                  <a:srgbClr val="858585"/>
+                </a:solidFill>
+                <a:latin typeface="Consolas"/>
+              </a:rPr>
+              <a:t>8</a:t>
+            </a:r>
+          </a:p>
+          <a:p>
+            <a:pPr algn="r">
+              <a:spcAft>
+                <a:spcPts val="342"/>
+              </a:spcAft>
+            </a:pPr>
+            <a:r>
+              <a:rPr sz="1600" i="0" b="0">
+                <a:solidFill>
+                  <a:srgbClr val="858585"/>
+                </a:solidFill>
+                <a:latin typeface="Consolas"/>
+              </a:rPr>
+              <a:t>9</a:t>
+            </a:r>
+          </a:p>
+          <a:p>
+            <a:pPr algn="r">
+              <a:spcAft>
+                <a:spcPts val="342"/>
+              </a:spcAft>
+            </a:pPr>
+            <a:r>
+              <a:rPr sz="1600" i="0" b="0">
+                <a:solidFill>
+                  <a:srgbClr val="858585"/>
+                </a:solidFill>
+                <a:latin typeface="Consolas"/>
+              </a:rPr>
+              <a:t>10</a:t>
+            </a:r>
+          </a:p>
+          <a:p>
+            <a:pPr algn="r">
+              <a:spcAft>
+                <a:spcPts val="342"/>
+              </a:spcAft>
+            </a:pPr>
+            <a:r>
+              <a:rPr sz="1600" i="0" b="0">
+                <a:solidFill>
+                  <a:srgbClr val="858585"/>
+                </a:solidFill>
+                <a:latin typeface="Consolas"/>
+              </a:rPr>
+              <a:t>11</a:t>
+            </a:r>
+          </a:p>
+          <a:p>
+            <a:pPr algn="r">
+              <a:spcAft>
+                <a:spcPts val="342"/>
+              </a:spcAft>
+            </a:pPr>
+            <a:r>
+              <a:rPr sz="1600" i="0" b="0">
+                <a:solidFill>
+                  <a:srgbClr val="858585"/>
+                </a:solidFill>
+                <a:latin typeface="Consolas"/>
+              </a:rPr>
+              <a:t>12</a:t>
+            </a:r>
+          </a:p>
+          <a:p>
+            <a:pPr algn="r">
+              <a:spcAft>
+                <a:spcPts val="342"/>
+              </a:spcAft>
+            </a:pPr>
+            <a:r>
+              <a:rPr sz="1600" i="0" b="0">
+                <a:solidFill>
+                  <a:srgbClr val="858585"/>
+                </a:solidFill>
+                <a:latin typeface="Consolas"/>
+              </a:rPr>
+              <a:t>13</a:t>
+            </a:r>
+          </a:p>
+          <a:p>
+            <a:pPr algn="r">
+              <a:spcAft>
+                <a:spcPts val="342"/>
+              </a:spcAft>
+            </a:pPr>
+            <a:r>
+              <a:rPr sz="1600" i="0" b="0">
+                <a:solidFill>
+                  <a:srgbClr val="858585"/>
+                </a:solidFill>
+                <a:latin typeface="Consolas"/>
+              </a:rPr>
+              <a:t>14</a:t>
+            </a:r>
+          </a:p>
+        </p:txBody>
+      </p:sp>
+      <p:sp>
+        <p:nvSpPr>
+          <p:cNvPr id="12" name="TextBox 11"/>
+          <p:cNvSpPr txBox="1"/>
+          <p:nvPr/>
+        </p:nvSpPr>
+        <p:spPr>
+          <a:xfrm>
+            <a:off x="1188720" y="1719072"/>
+            <a:ext cx="10271455" cy="4150836"/>
+          </a:xfrm>
+          <a:prstGeom prst="rect">
+            <a:avLst/>
+          </a:prstGeom>
+          <a:noFill/>
+        </p:spPr>
+        <p:txBody>
+          <a:bodyPr wrap="square">
+            <a:spAutoFit/>
+          </a:bodyPr>
+          <a:lstStyle/>
+          <a:p>
             <a:pPr>
               <a:spcAft>
-                <a:spcPts val="800"/>
+                <a:spcPts val="342"/>
               </a:spcAft>
             </a:pPr>
             <a:r>
-              <a:rPr sz="2000" b="0" i="0">
-                <a:solidFill>
-                  <a:srgbClr val="333333"/>
-                </a:solidFill>
-                <a:latin typeface="Calibri"/>
-              </a:rPr>
-              <a:t>–   Una pantalla suelta no sirve para nada; lo que se diseña es un flujo de tarea completo, es decir el recorrido que hace una persona real desde que tiene una intencion hasta que la cumple.</a:t>
+              <a:rPr sz="1600" i="0" b="0">
+                <a:solidFill>
+                  <a:srgbClr val="D4D4D4"/>
+                </a:solidFill>
+                <a:latin typeface="Consolas"/>
+              </a:rPr>
+              <a:t>flowchart</a:t>
+            </a:r>
+            <a:r>
+              <a:rPr sz="1600" i="0" b="0">
+                <a:solidFill>
+                  <a:srgbClr val="D4D4D4"/>
+                </a:solidFill>
+                <a:latin typeface="Consolas"/>
+              </a:rPr>
+              <a:t> </a:t>
+            </a:r>
+            <a:r>
+              <a:rPr sz="1600" i="0" b="0">
+                <a:solidFill>
+                  <a:srgbClr val="D4D4D4"/>
+                </a:solidFill>
+                <a:latin typeface="Consolas"/>
+              </a:rPr>
+              <a:t>TD</a:t>
             </a:r>
           </a:p>
           <a:p>
             <a:pPr>
               <a:spcAft>
-                <a:spcPts val="800"/>
+                <a:spcPts val="342"/>
               </a:spcAft>
             </a:pPr>
             <a:r>
-              <a:rPr sz="2000" b="0" i="0">
-                <a:solidFill>
-                  <a:srgbClr val="333333"/>
-                </a:solidFill>
-                <a:latin typeface="Calibri"/>
-              </a:rPr>
-              <a:t>–   El flujo tiene un camino feliz y tiene caminos alternos, y los caminos alternos son donde se cae el diseño de los principiantes.</a:t>
+              <a:rPr sz="1600" i="0" b="0">
+                <a:solidFill>
+                  <a:srgbClr val="D4D4D4"/>
+                </a:solidFill>
+                <a:latin typeface="Consolas"/>
+              </a:rPr>
+              <a:t>  </a:t>
+            </a:r>
+            <a:r>
+              <a:rPr sz="1600" i="0" b="0">
+                <a:solidFill>
+                  <a:srgbClr val="D4D4D4"/>
+                </a:solidFill>
+                <a:latin typeface="Consolas"/>
+              </a:rPr>
+              <a:t>A</a:t>
+            </a:r>
+            <a:r>
+              <a:rPr sz="1600" i="0" b="0">
+                <a:solidFill>
+                  <a:srgbClr val="D4D4D4"/>
+                </a:solidFill>
+                <a:latin typeface="Consolas"/>
+              </a:rPr>
+              <a:t>[</a:t>
+            </a:r>
+            <a:r>
+              <a:rPr sz="1600" i="0" b="0">
+                <a:solidFill>
+                  <a:srgbClr val="D4D4D4"/>
+                </a:solidFill>
+                <a:latin typeface="Consolas"/>
+              </a:rPr>
+              <a:t>Recepcion</a:t>
+            </a:r>
+            <a:r>
+              <a:rPr sz="1600" i="0" b="0">
+                <a:solidFill>
+                  <a:srgbClr val="D4D4D4"/>
+                </a:solidFill>
+                <a:latin typeface="Consolas"/>
+              </a:rPr>
+              <a:t>: </a:t>
+            </a:r>
+            <a:r>
+              <a:rPr sz="1600" i="0" b="0">
+                <a:solidFill>
+                  <a:srgbClr val="D4D4D4"/>
+                </a:solidFill>
+                <a:latin typeface="Consolas"/>
+              </a:rPr>
+              <a:t>llega</a:t>
+            </a:r>
+            <a:r>
+              <a:rPr sz="1600" i="0" b="0">
+                <a:solidFill>
+                  <a:srgbClr val="D4D4D4"/>
+                </a:solidFill>
+                <a:latin typeface="Consolas"/>
+              </a:rPr>
+              <a:t> </a:t>
+            </a:r>
+            <a:r>
+              <a:rPr sz="1600" i="0" b="0">
+                <a:solidFill>
+                  <a:srgbClr val="D4D4D4"/>
+                </a:solidFill>
+                <a:latin typeface="Consolas"/>
+              </a:rPr>
+              <a:t>el</a:t>
+            </a:r>
+            <a:r>
+              <a:rPr sz="1600" i="0" b="0">
+                <a:solidFill>
+                  <a:srgbClr val="D4D4D4"/>
+                </a:solidFill>
+                <a:latin typeface="Consolas"/>
+              </a:rPr>
+              <a:t> </a:t>
+            </a:r>
+            <a:r>
+              <a:rPr sz="1600" i="0" b="0">
+                <a:solidFill>
+                  <a:srgbClr val="D4D4D4"/>
+                </a:solidFill>
+                <a:latin typeface="Consolas"/>
+              </a:rPr>
+              <a:t>dueño</a:t>
+            </a:r>
+            <a:r>
+              <a:rPr sz="1600" i="0" b="0">
+                <a:solidFill>
+                  <a:srgbClr val="D4D4D4"/>
+                </a:solidFill>
+                <a:latin typeface="Consolas"/>
+              </a:rPr>
+              <a:t> </a:t>
+            </a:r>
+            <a:r>
+              <a:rPr sz="1600" i="0" b="0">
+                <a:solidFill>
+                  <a:srgbClr val="D4D4D4"/>
+                </a:solidFill>
+                <a:latin typeface="Consolas"/>
+              </a:rPr>
+              <a:t>con</a:t>
+            </a:r>
+            <a:r>
+              <a:rPr sz="1600" i="0" b="0">
+                <a:solidFill>
+                  <a:srgbClr val="D4D4D4"/>
+                </a:solidFill>
+                <a:latin typeface="Consolas"/>
+              </a:rPr>
+              <a:t> </a:t>
+            </a:r>
+            <a:r>
+              <a:rPr sz="1600" i="0" b="0">
+                <a:solidFill>
+                  <a:srgbClr val="D4D4D4"/>
+                </a:solidFill>
+                <a:latin typeface="Consolas"/>
+              </a:rPr>
+              <a:t>su</a:t>
+            </a:r>
+            <a:r>
+              <a:rPr sz="1600" i="0" b="0">
+                <a:solidFill>
+                  <a:srgbClr val="D4D4D4"/>
+                </a:solidFill>
+                <a:latin typeface="Consolas"/>
+              </a:rPr>
+              <a:t> </a:t>
+            </a:r>
+            <a:r>
+              <a:rPr sz="1600" i="0" b="0">
+                <a:solidFill>
+                  <a:srgbClr val="D4D4D4"/>
+                </a:solidFill>
+                <a:latin typeface="Consolas"/>
+              </a:rPr>
+              <a:t>mascota</a:t>
+            </a:r>
+            <a:r>
+              <a:rPr sz="1600" i="0" b="0">
+                <a:solidFill>
+                  <a:srgbClr val="D4D4D4"/>
+                </a:solidFill>
+                <a:latin typeface="Consolas"/>
+              </a:rPr>
+              <a:t>] --&gt; </a:t>
+            </a:r>
+            <a:r>
+              <a:rPr sz="1600" i="0" b="0">
+                <a:solidFill>
+                  <a:srgbClr val="D4D4D4"/>
+                </a:solidFill>
+                <a:latin typeface="Consolas"/>
+              </a:rPr>
+              <a:t>B</a:t>
+            </a:r>
+            <a:r>
+              <a:rPr sz="1600" i="0" b="0">
+                <a:solidFill>
+                  <a:srgbClr val="D4D4D4"/>
+                </a:solidFill>
+                <a:latin typeface="Consolas"/>
+              </a:rPr>
+              <a:t>{</a:t>
+            </a:r>
+            <a:r>
+              <a:rPr sz="1600" i="0" b="0">
+                <a:solidFill>
+                  <a:srgbClr val="D4D4D4"/>
+                </a:solidFill>
+                <a:latin typeface="Consolas"/>
+              </a:rPr>
+              <a:t>Dueño</a:t>
+            </a:r>
+            <a:r>
+              <a:rPr sz="1600" i="0" b="0">
+                <a:solidFill>
+                  <a:srgbClr val="D4D4D4"/>
+                </a:solidFill>
+                <a:latin typeface="Consolas"/>
+              </a:rPr>
+              <a:t> </a:t>
+            </a:r>
+            <a:r>
+              <a:rPr sz="1600" i="0" b="0">
+                <a:solidFill>
+                  <a:srgbClr val="D4D4D4"/>
+                </a:solidFill>
+                <a:latin typeface="Consolas"/>
+              </a:rPr>
+              <a:t>ya</a:t>
+            </a:r>
+            <a:r>
+              <a:rPr sz="1600" i="0" b="0">
+                <a:solidFill>
+                  <a:srgbClr val="D4D4D4"/>
+                </a:solidFill>
+                <a:latin typeface="Consolas"/>
+              </a:rPr>
+              <a:t> </a:t>
+            </a:r>
+            <a:r>
+              <a:rPr sz="1600" i="0" b="0">
+                <a:solidFill>
+                  <a:srgbClr val="D4D4D4"/>
+                </a:solidFill>
+                <a:latin typeface="Consolas"/>
+              </a:rPr>
+              <a:t>registrado</a:t>
+            </a:r>
+            <a:r>
+              <a:rPr sz="1600" i="0" b="0">
+                <a:solidFill>
+                  <a:srgbClr val="D4D4D4"/>
+                </a:solidFill>
+                <a:latin typeface="Consolas"/>
+              </a:rPr>
+              <a:t>?}</a:t>
             </a:r>
           </a:p>
           <a:p>
             <a:pPr>
               <a:spcAft>
-                <a:spcPts val="800"/>
+                <a:spcPts val="342"/>
               </a:spcAft>
             </a:pPr>
             <a:r>
-              <a:rPr sz="2000" b="0" i="0">
-                <a:solidFill>
-                  <a:srgbClr val="333333"/>
-                </a:solidFill>
-                <a:latin typeface="Calibri"/>
-              </a:rPr>
-              <a:t>–   En la clinica el camino feliz de registrar una mascota es: llega el dueño, la recepcionista lo busca, lo encuentra, registra la mascota y el sistema devuelve el codigo.</a:t>
+              <a:rPr sz="1600" i="0" b="0">
+                <a:solidFill>
+                  <a:srgbClr val="D4D4D4"/>
+                </a:solidFill>
+                <a:latin typeface="Consolas"/>
+              </a:rPr>
+              <a:t>  </a:t>
+            </a:r>
+            <a:r>
+              <a:rPr sz="1600" i="0" b="0">
+                <a:solidFill>
+                  <a:srgbClr val="D4D4D4"/>
+                </a:solidFill>
+                <a:latin typeface="Consolas"/>
+              </a:rPr>
+              <a:t>B</a:t>
+            </a:r>
+            <a:r>
+              <a:rPr sz="1600" i="0" b="0">
+                <a:solidFill>
+                  <a:srgbClr val="D4D4D4"/>
+                </a:solidFill>
+                <a:latin typeface="Consolas"/>
+              </a:rPr>
+              <a:t> -- </a:t>
+            </a:r>
+            <a:r>
+              <a:rPr sz="1600" i="0" b="0">
+                <a:solidFill>
+                  <a:srgbClr val="D4D4D4"/>
+                </a:solidFill>
+                <a:latin typeface="Consolas"/>
+              </a:rPr>
+              <a:t>No</a:t>
+            </a:r>
+            <a:r>
+              <a:rPr sz="1600" i="0" b="0">
+                <a:solidFill>
+                  <a:srgbClr val="D4D4D4"/>
+                </a:solidFill>
+                <a:latin typeface="Consolas"/>
+              </a:rPr>
+              <a:t> --&gt; </a:t>
+            </a:r>
+            <a:r>
+              <a:rPr sz="1600" i="0" b="0">
+                <a:solidFill>
+                  <a:srgbClr val="D4D4D4"/>
+                </a:solidFill>
+                <a:latin typeface="Consolas"/>
+              </a:rPr>
+              <a:t>C</a:t>
+            </a:r>
+            <a:r>
+              <a:rPr sz="1600" i="0" b="0">
+                <a:solidFill>
+                  <a:srgbClr val="D4D4D4"/>
+                </a:solidFill>
+                <a:latin typeface="Consolas"/>
+              </a:rPr>
+              <a:t>[</a:t>
+            </a:r>
+            <a:r>
+              <a:rPr sz="1600" i="0" b="0">
+                <a:solidFill>
+                  <a:srgbClr val="D4D4D4"/>
+                </a:solidFill>
+                <a:latin typeface="Consolas"/>
+              </a:rPr>
+              <a:t>Pantalla</a:t>
+            </a:r>
+            <a:r>
+              <a:rPr sz="1600" i="0" b="0">
+                <a:solidFill>
+                  <a:srgbClr val="D4D4D4"/>
+                </a:solidFill>
+                <a:latin typeface="Consolas"/>
+              </a:rPr>
+              <a:t> </a:t>
+            </a:r>
+            <a:r>
+              <a:rPr sz="1600" i="0" b="0">
+                <a:solidFill>
+                  <a:srgbClr val="D4D4D4"/>
+                </a:solidFill>
+                <a:latin typeface="Consolas"/>
+              </a:rPr>
+              <a:t>Registrar</a:t>
+            </a:r>
+            <a:r>
+              <a:rPr sz="1600" i="0" b="0">
+                <a:solidFill>
+                  <a:srgbClr val="D4D4D4"/>
+                </a:solidFill>
+                <a:latin typeface="Consolas"/>
+              </a:rPr>
+              <a:t> </a:t>
+            </a:r>
+            <a:r>
+              <a:rPr sz="1600" i="0" b="0">
+                <a:solidFill>
+                  <a:srgbClr val="D4D4D4"/>
+                </a:solidFill>
+                <a:latin typeface="Consolas"/>
+              </a:rPr>
+              <a:t>dueño</a:t>
+            </a:r>
+            <a:r>
+              <a:rPr sz="1600" i="0" b="0">
+                <a:solidFill>
+                  <a:srgbClr val="D4D4D4"/>
+                </a:solidFill>
+                <a:latin typeface="Consolas"/>
+              </a:rPr>
+              <a:t>]</a:t>
             </a:r>
           </a:p>
           <a:p>
             <a:pPr>
               <a:spcAft>
-                <a:spcPts val="800"/>
+                <a:spcPts val="342"/>
               </a:spcAft>
             </a:pPr>
             <a:r>
-              <a:rPr sz="2000" b="0" i="0">
-                <a:solidFill>
-                  <a:srgbClr val="333333"/>
-                </a:solidFill>
-                <a:latin typeface="Calibri"/>
-              </a:rPr>
-              <a:t>–   Pero los caminos alternos son igual de reales: el dueño no esta registrado y hay que crearlo sin perder lo que ya se habia escrito de la mascota</a:t>
+              <a:rPr sz="1600" i="0" b="0">
+                <a:solidFill>
+                  <a:srgbClr val="D4D4D4"/>
+                </a:solidFill>
+                <a:latin typeface="Consolas"/>
+              </a:rPr>
+              <a:t>  </a:t>
+            </a:r>
+            <a:r>
+              <a:rPr sz="1600" i="0" b="0">
+                <a:solidFill>
+                  <a:srgbClr val="D4D4D4"/>
+                </a:solidFill>
+                <a:latin typeface="Consolas"/>
+              </a:rPr>
+              <a:t>B</a:t>
+            </a:r>
+            <a:r>
+              <a:rPr sz="1600" i="0" b="0">
+                <a:solidFill>
+                  <a:srgbClr val="D4D4D4"/>
+                </a:solidFill>
+                <a:latin typeface="Consolas"/>
+              </a:rPr>
+              <a:t> -- </a:t>
+            </a:r>
+            <a:r>
+              <a:rPr sz="1600" i="0" b="0">
+                <a:solidFill>
+                  <a:srgbClr val="D4D4D4"/>
+                </a:solidFill>
+                <a:latin typeface="Consolas"/>
+              </a:rPr>
+              <a:t>Si</a:t>
+            </a:r>
+            <a:r>
+              <a:rPr sz="1600" i="0" b="0">
+                <a:solidFill>
+                  <a:srgbClr val="D4D4D4"/>
+                </a:solidFill>
+                <a:latin typeface="Consolas"/>
+              </a:rPr>
+              <a:t> --&gt; </a:t>
+            </a:r>
+            <a:r>
+              <a:rPr sz="1600" i="0" b="0">
+                <a:solidFill>
+                  <a:srgbClr val="D4D4D4"/>
+                </a:solidFill>
+                <a:latin typeface="Consolas"/>
+              </a:rPr>
+              <a:t>D</a:t>
+            </a:r>
+            <a:r>
+              <a:rPr sz="1600" i="0" b="0">
+                <a:solidFill>
+                  <a:srgbClr val="D4D4D4"/>
+                </a:solidFill>
+                <a:latin typeface="Consolas"/>
+              </a:rPr>
+              <a:t>[</a:t>
+            </a:r>
+            <a:r>
+              <a:rPr sz="1600" i="0" b="0">
+                <a:solidFill>
+                  <a:srgbClr val="D4D4D4"/>
+                </a:solidFill>
+                <a:latin typeface="Consolas"/>
+              </a:rPr>
+              <a:t>Pantalla</a:t>
+            </a:r>
+            <a:r>
+              <a:rPr sz="1600" i="0" b="0">
+                <a:solidFill>
+                  <a:srgbClr val="D4D4D4"/>
+                </a:solidFill>
+                <a:latin typeface="Consolas"/>
+              </a:rPr>
+              <a:t> </a:t>
+            </a:r>
+            <a:r>
+              <a:rPr sz="1600" i="0" b="0">
+                <a:solidFill>
+                  <a:srgbClr val="D4D4D4"/>
+                </a:solidFill>
+                <a:latin typeface="Consolas"/>
+              </a:rPr>
+              <a:t>Registrar</a:t>
+            </a:r>
+            <a:r>
+              <a:rPr sz="1600" i="0" b="0">
+                <a:solidFill>
+                  <a:srgbClr val="D4D4D4"/>
+                </a:solidFill>
+                <a:latin typeface="Consolas"/>
+              </a:rPr>
+              <a:t> </a:t>
+            </a:r>
+            <a:r>
+              <a:rPr sz="1600" i="0" b="0">
+                <a:solidFill>
+                  <a:srgbClr val="D4D4D4"/>
+                </a:solidFill>
+                <a:latin typeface="Consolas"/>
+              </a:rPr>
+              <a:t>mascota</a:t>
+            </a:r>
+            <a:r>
+              <a:rPr sz="1600" i="0" b="0">
+                <a:solidFill>
+                  <a:srgbClr val="D4D4D4"/>
+                </a:solidFill>
+                <a:latin typeface="Consolas"/>
+              </a:rPr>
+              <a:t>]</a:t>
             </a:r>
           </a:p>
           <a:p>
             <a:pPr>
               <a:spcAft>
-                <a:spcPts val="800"/>
+                <a:spcPts val="342"/>
               </a:spcAft>
             </a:pPr>
             <a:r>
-              <a:rPr sz="2000" b="0" i="0">
-                <a:solidFill>
-                  <a:srgbClr val="333333"/>
+              <a:rPr sz="1600" i="0" b="0">
+                <a:solidFill>
+                  <a:srgbClr val="D4D4D4"/>
+                </a:solidFill>
+                <a:latin typeface="Consolas"/>
+              </a:rPr>
+              <a:t>  </a:t>
+            </a:r>
+            <a:r>
+              <a:rPr sz="1600" i="0" b="0">
+                <a:solidFill>
+                  <a:srgbClr val="D4D4D4"/>
+                </a:solidFill>
+                <a:latin typeface="Consolas"/>
+              </a:rPr>
+              <a:t>C</a:t>
+            </a:r>
+            <a:r>
+              <a:rPr sz="1600" i="0" b="0">
+                <a:solidFill>
+                  <a:srgbClr val="D4D4D4"/>
+                </a:solidFill>
+                <a:latin typeface="Consolas"/>
+              </a:rPr>
+              <a:t> --&gt; </a:t>
+            </a:r>
+            <a:r>
+              <a:rPr sz="1600" i="0" b="0">
+                <a:solidFill>
+                  <a:srgbClr val="D4D4D4"/>
+                </a:solidFill>
+                <a:latin typeface="Consolas"/>
+              </a:rPr>
+              <a:t>D</a:t>
+            </a:r>
+          </a:p>
+          <a:p>
+            <a:pPr>
+              <a:spcAft>
+                <a:spcPts val="342"/>
+              </a:spcAft>
+            </a:pPr>
+            <a:r>
+              <a:rPr sz="1600" i="0" b="0">
+                <a:solidFill>
+                  <a:srgbClr val="D4D4D4"/>
+                </a:solidFill>
+                <a:latin typeface="Consolas"/>
+              </a:rPr>
+              <a:t>  </a:t>
+            </a:r>
+            <a:r>
+              <a:rPr sz="1600" i="0" b="0">
+                <a:solidFill>
+                  <a:srgbClr val="D4D4D4"/>
+                </a:solidFill>
+                <a:latin typeface="Consolas"/>
+              </a:rPr>
+              <a:t>D</a:t>
+            </a:r>
+            <a:r>
+              <a:rPr sz="1600" i="0" b="0">
+                <a:solidFill>
+                  <a:srgbClr val="D4D4D4"/>
+                </a:solidFill>
+                <a:latin typeface="Consolas"/>
+              </a:rPr>
+              <a:t> --&gt; </a:t>
+            </a:r>
+            <a:r>
+              <a:rPr sz="1600" i="0" b="0">
+                <a:solidFill>
+                  <a:srgbClr val="D4D4D4"/>
+                </a:solidFill>
+                <a:latin typeface="Consolas"/>
+              </a:rPr>
+              <a:t>E</a:t>
+            </a:r>
+            <a:r>
+              <a:rPr sz="1600" i="0" b="0">
+                <a:solidFill>
+                  <a:srgbClr val="D4D4D4"/>
+                </a:solidFill>
+                <a:latin typeface="Consolas"/>
+              </a:rPr>
+              <a:t>{</a:t>
+            </a:r>
+            <a:r>
+              <a:rPr sz="1600" i="0" b="0">
+                <a:solidFill>
+                  <a:srgbClr val="D4D4D4"/>
+                </a:solidFill>
+                <a:latin typeface="Consolas"/>
+              </a:rPr>
+              <a:t>Campos</a:t>
+            </a:r>
+            <a:r>
+              <a:rPr sz="1600" i="0" b="0">
+                <a:solidFill>
+                  <a:srgbClr val="D4D4D4"/>
+                </a:solidFill>
+                <a:latin typeface="Consolas"/>
+              </a:rPr>
+              <a:t> </a:t>
+            </a:r>
+            <a:r>
+              <a:rPr sz="1600" i="0" b="0">
+                <a:solidFill>
+                  <a:srgbClr val="D4D4D4"/>
+                </a:solidFill>
+                <a:latin typeface="Consolas"/>
+              </a:rPr>
+              <a:t>obligatorios</a:t>
+            </a:r>
+            <a:r>
+              <a:rPr sz="1600" i="0" b="0">
+                <a:solidFill>
+                  <a:srgbClr val="D4D4D4"/>
+                </a:solidFill>
+                <a:latin typeface="Consolas"/>
+              </a:rPr>
+              <a:t> </a:t>
+            </a:r>
+            <a:r>
+              <a:rPr sz="1600" i="0" b="0">
+                <a:solidFill>
+                  <a:srgbClr val="D4D4D4"/>
+                </a:solidFill>
+                <a:latin typeface="Consolas"/>
+              </a:rPr>
+              <a:t>completos</a:t>
+            </a:r>
+            <a:r>
+              <a:rPr sz="1600" i="0" b="0">
+                <a:solidFill>
+                  <a:srgbClr val="D4D4D4"/>
+                </a:solidFill>
+                <a:latin typeface="Consolas"/>
+              </a:rPr>
+              <a:t>?}</a:t>
+            </a:r>
+          </a:p>
+          <a:p>
+            <a:pPr>
+              <a:spcAft>
+                <a:spcPts val="342"/>
+              </a:spcAft>
+            </a:pPr>
+            <a:r>
+              <a:rPr sz="1600" i="0" b="0">
+                <a:solidFill>
+                  <a:srgbClr val="D4D4D4"/>
+                </a:solidFill>
+                <a:latin typeface="Consolas"/>
+              </a:rPr>
+              <a:t>  </a:t>
+            </a:r>
+            <a:r>
+              <a:rPr sz="1600" i="0" b="0">
+                <a:solidFill>
+                  <a:srgbClr val="D4D4D4"/>
+                </a:solidFill>
+                <a:latin typeface="Consolas"/>
+              </a:rPr>
+              <a:t>E</a:t>
+            </a:r>
+            <a:r>
+              <a:rPr sz="1600" i="0" b="0">
+                <a:solidFill>
+                  <a:srgbClr val="D4D4D4"/>
+                </a:solidFill>
+                <a:latin typeface="Consolas"/>
+              </a:rPr>
+              <a:t> -- </a:t>
+            </a:r>
+            <a:r>
+              <a:rPr sz="1600" i="0" b="0">
+                <a:solidFill>
+                  <a:srgbClr val="D4D4D4"/>
+                </a:solidFill>
+                <a:latin typeface="Consolas"/>
+              </a:rPr>
+              <a:t>No</a:t>
+            </a:r>
+            <a:r>
+              <a:rPr sz="1600" i="0" b="0">
+                <a:solidFill>
+                  <a:srgbClr val="D4D4D4"/>
+                </a:solidFill>
+                <a:latin typeface="Consolas"/>
+              </a:rPr>
+              <a:t> --&gt; </a:t>
+            </a:r>
+            <a:r>
+              <a:rPr sz="1600" i="0" b="0">
+                <a:solidFill>
+                  <a:srgbClr val="D4D4D4"/>
+                </a:solidFill>
+                <a:latin typeface="Consolas"/>
+              </a:rPr>
+              <a:t>F</a:t>
+            </a:r>
+            <a:r>
+              <a:rPr sz="1600" i="0" b="0">
+                <a:solidFill>
+                  <a:srgbClr val="D4D4D4"/>
+                </a:solidFill>
+                <a:latin typeface="Consolas"/>
+              </a:rPr>
+              <a:t>[</a:t>
+            </a:r>
+            <a:r>
+              <a:rPr sz="1600" i="0" b="0">
+                <a:solidFill>
+                  <a:srgbClr val="D4D4D4"/>
+                </a:solidFill>
+                <a:latin typeface="Consolas"/>
+              </a:rPr>
+              <a:t>Guardar</a:t>
+            </a:r>
+            <a:r>
+              <a:rPr sz="1600" i="0" b="0">
+                <a:solidFill>
+                  <a:srgbClr val="D4D4D4"/>
+                </a:solidFill>
+                <a:latin typeface="Consolas"/>
+              </a:rPr>
+              <a:t> </a:t>
+            </a:r>
+            <a:r>
+              <a:rPr sz="1600" i="0" b="0">
+                <a:solidFill>
+                  <a:srgbClr val="D4D4D4"/>
+                </a:solidFill>
+                <a:latin typeface="Consolas"/>
+              </a:rPr>
+              <a:t>deshabilitado</a:t>
+            </a:r>
+            <a:r>
+              <a:rPr sz="1600" i="0" b="0">
+                <a:solidFill>
+                  <a:srgbClr val="D4D4D4"/>
+                </a:solidFill>
+                <a:latin typeface="Consolas"/>
+              </a:rPr>
+              <a:t> + </a:t>
+            </a:r>
+            <a:r>
+              <a:rPr sz="1600" i="0" b="0">
+                <a:solidFill>
+                  <a:srgbClr val="D4D4D4"/>
+                </a:solidFill>
+                <a:latin typeface="Consolas"/>
+              </a:rPr>
+              <a:t>ayuda</a:t>
+            </a:r>
+            <a:r>
+              <a:rPr sz="1600" i="0" b="0">
+                <a:solidFill>
+                  <a:srgbClr val="D4D4D4"/>
+                </a:solidFill>
+                <a:latin typeface="Consolas"/>
+              </a:rPr>
+              <a:t> </a:t>
+            </a:r>
+            <a:r>
+              <a:rPr sz="1600" i="0" b="0">
+                <a:solidFill>
+                  <a:srgbClr val="D4D4D4"/>
+                </a:solidFill>
+                <a:latin typeface="Consolas"/>
+              </a:rPr>
+              <a:t>en</a:t>
+            </a:r>
+            <a:r>
+              <a:rPr sz="1600" i="0" b="0">
+                <a:solidFill>
+                  <a:srgbClr val="D4D4D4"/>
+                </a:solidFill>
+                <a:latin typeface="Consolas"/>
+              </a:rPr>
+              <a:t> </a:t>
+            </a:r>
+            <a:r>
+              <a:rPr sz="1600" i="0" b="0">
+                <a:solidFill>
+                  <a:srgbClr val="D4D4D4"/>
+                </a:solidFill>
+                <a:latin typeface="Consolas"/>
+              </a:rPr>
+              <a:t>el</a:t>
+            </a:r>
+            <a:r>
+              <a:rPr sz="1600" i="0" b="0">
+                <a:solidFill>
+                  <a:srgbClr val="D4D4D4"/>
+                </a:solidFill>
+                <a:latin typeface="Consolas"/>
+              </a:rPr>
+              <a:t> </a:t>
+            </a:r>
+            <a:r>
+              <a:rPr sz="1600" i="0" b="0">
+                <a:solidFill>
+                  <a:srgbClr val="D4D4D4"/>
+                </a:solidFill>
+                <a:latin typeface="Consolas"/>
+              </a:rPr>
+              <a:t>campo</a:t>
+            </a:r>
+            <a:r>
+              <a:rPr sz="1600" i="0" b="0">
+                <a:solidFill>
+                  <a:srgbClr val="D4D4D4"/>
+                </a:solidFill>
+                <a:latin typeface="Consolas"/>
+              </a:rPr>
+              <a:t> </a:t>
+            </a:r>
+            <a:r>
+              <a:rPr sz="1600" i="0" b="0">
+                <a:solidFill>
+                  <a:srgbClr val="D4D4D4"/>
+                </a:solidFill>
+                <a:latin typeface="Consolas"/>
+              </a:rPr>
+              <a:t>faltante</a:t>
+            </a:r>
+            <a:r>
+              <a:rPr sz="1600" i="0" b="0">
+                <a:solidFill>
+                  <a:srgbClr val="D4D4D4"/>
+                </a:solidFill>
+                <a:latin typeface="Consolas"/>
+              </a:rPr>
+              <a:t>]</a:t>
+            </a:r>
+          </a:p>
+          <a:p>
+            <a:pPr>
+              <a:spcAft>
+                <a:spcPts val="342"/>
+              </a:spcAft>
+            </a:pPr>
+            <a:r>
+              <a:rPr sz="1600" i="0" b="0">
+                <a:solidFill>
+                  <a:srgbClr val="D4D4D4"/>
+                </a:solidFill>
+                <a:latin typeface="Consolas"/>
+              </a:rPr>
+              <a:t>  </a:t>
+            </a:r>
+            <a:r>
+              <a:rPr sz="1600" i="0" b="0">
+                <a:solidFill>
+                  <a:srgbClr val="D4D4D4"/>
+                </a:solidFill>
+                <a:latin typeface="Consolas"/>
+              </a:rPr>
+              <a:t>F</a:t>
+            </a:r>
+            <a:r>
+              <a:rPr sz="1600" i="0" b="0">
+                <a:solidFill>
+                  <a:srgbClr val="D4D4D4"/>
+                </a:solidFill>
+                <a:latin typeface="Consolas"/>
+              </a:rPr>
+              <a:t> --&gt; </a:t>
+            </a:r>
+            <a:r>
+              <a:rPr sz="1600" i="0" b="0">
+                <a:solidFill>
+                  <a:srgbClr val="D4D4D4"/>
+                </a:solidFill>
+                <a:latin typeface="Consolas"/>
+              </a:rPr>
+              <a:t>D</a:t>
+            </a:r>
+          </a:p>
+          <a:p>
+            <a:pPr>
+              <a:spcAft>
+                <a:spcPts val="342"/>
+              </a:spcAft>
+            </a:pPr>
+            <a:r>
+              <a:rPr sz="1600" i="0" b="0">
+                <a:solidFill>
+                  <a:srgbClr val="D4D4D4"/>
+                </a:solidFill>
+                <a:latin typeface="Consolas"/>
+              </a:rPr>
+              <a:t>  </a:t>
+            </a:r>
+            <a:r>
+              <a:rPr sz="1600" i="0" b="0">
+                <a:solidFill>
+                  <a:srgbClr val="D4D4D4"/>
+                </a:solidFill>
+                <a:latin typeface="Consolas"/>
+              </a:rPr>
+              <a:t>E</a:t>
+            </a:r>
+            <a:r>
+              <a:rPr sz="1600" i="0" b="0">
+                <a:solidFill>
+                  <a:srgbClr val="D4D4D4"/>
+                </a:solidFill>
+                <a:latin typeface="Consolas"/>
+              </a:rPr>
+              <a:t> -- </a:t>
+            </a:r>
+            <a:r>
+              <a:rPr sz="1600" i="0" b="0">
+                <a:solidFill>
+                  <a:srgbClr val="D4D4D4"/>
+                </a:solidFill>
+                <a:latin typeface="Consolas"/>
+              </a:rPr>
+              <a:t>Si</a:t>
+            </a:r>
+            <a:r>
+              <a:rPr sz="1600" i="0" b="0">
+                <a:solidFill>
+                  <a:srgbClr val="D4D4D4"/>
+                </a:solidFill>
+                <a:latin typeface="Consolas"/>
+              </a:rPr>
+              <a:t> --&gt; </a:t>
+            </a:r>
+            <a:r>
+              <a:rPr sz="1600" i="0" b="0">
+                <a:solidFill>
+                  <a:srgbClr val="D4D4D4"/>
+                </a:solidFill>
+                <a:latin typeface="Consolas"/>
+              </a:rPr>
+              <a:t>G</a:t>
+            </a:r>
+            <a:r>
+              <a:rPr sz="1600" i="0" b="0">
+                <a:solidFill>
+                  <a:srgbClr val="D4D4D4"/>
+                </a:solidFill>
+                <a:latin typeface="Consolas"/>
+              </a:rPr>
+              <a:t>[</a:t>
+            </a:r>
+            <a:r>
+              <a:rPr sz="1600" i="0" b="0">
+                <a:solidFill>
+                  <a:srgbClr val="D4D4D4"/>
+                </a:solidFill>
+                <a:latin typeface="Consolas"/>
+              </a:rPr>
+              <a:t>Confirmacion</a:t>
+            </a:r>
+            <a:r>
+              <a:rPr sz="1600" i="0" b="0">
+                <a:solidFill>
+                  <a:srgbClr val="D4D4D4"/>
+                </a:solidFill>
+                <a:latin typeface="Consolas"/>
+              </a:rPr>
+              <a:t>: </a:t>
+            </a:r>
+            <a:r>
+              <a:rPr sz="1600" i="0" b="0">
+                <a:solidFill>
+                  <a:srgbClr val="D4D4D4"/>
+                </a:solidFill>
+                <a:latin typeface="Consolas"/>
+              </a:rPr>
+              <a:t>Ficha</a:t>
+            </a:r>
+            <a:r>
+              <a:rPr sz="1600" i="0" b="0">
+                <a:solidFill>
+                  <a:srgbClr val="D4D4D4"/>
+                </a:solidFill>
+                <a:latin typeface="Consolas"/>
+              </a:rPr>
+              <a:t> </a:t>
+            </a:r>
+            <a:r>
+              <a:rPr sz="1600" i="0" b="0">
+                <a:solidFill>
+                  <a:srgbClr val="D4D4D4"/>
+                </a:solidFill>
+                <a:latin typeface="Consolas"/>
+              </a:rPr>
+              <a:t>guardada</a:t>
+            </a:r>
+            <a:r>
+              <a:rPr sz="1600" i="0" b="0">
+                <a:solidFill>
+                  <a:srgbClr val="D4D4D4"/>
+                </a:solidFill>
+                <a:latin typeface="Consolas"/>
+              </a:rPr>
+              <a:t>, </a:t>
+            </a:r>
+            <a:r>
+              <a:rPr sz="1600" i="0" b="0">
+                <a:solidFill>
+                  <a:srgbClr val="D4D4D4"/>
+                </a:solidFill>
+                <a:latin typeface="Consolas"/>
+              </a:rPr>
+              <a:t>codigo</a:t>
+            </a:r>
+            <a:r>
+              <a:rPr sz="1600" i="0" b="0">
+                <a:solidFill>
+                  <a:srgbClr val="D4D4D4"/>
+                </a:solidFill>
+                <a:latin typeface="Consolas"/>
+              </a:rPr>
+              <a:t> </a:t>
+            </a:r>
+            <a:r>
+              <a:rPr sz="1600" i="0" b="0">
+                <a:solidFill>
+                  <a:srgbClr val="D4D4D4"/>
+                </a:solidFill>
+                <a:latin typeface="Consolas"/>
+              </a:rPr>
+              <a:t>M</a:t>
+            </a:r>
+            <a:r>
+              <a:rPr sz="1600" i="0" b="0">
+                <a:solidFill>
+                  <a:srgbClr val="D4D4D4"/>
+                </a:solidFill>
+                <a:latin typeface="Consolas"/>
+              </a:rPr>
+              <a:t>-</a:t>
+            </a:r>
+            <a:r>
+              <a:rPr sz="1600" i="0" b="0">
+                <a:solidFill>
+                  <a:srgbClr val="B5CEA8"/>
+                </a:solidFill>
+                <a:latin typeface="Consolas"/>
+              </a:rPr>
+              <a:t>0421</a:t>
+            </a:r>
+            <a:r>
+              <a:rPr sz="1600" i="0" b="0">
+                <a:solidFill>
+                  <a:srgbClr val="D4D4D4"/>
+                </a:solidFill>
+                <a:latin typeface="Consolas"/>
+              </a:rPr>
+              <a:t>]</a:t>
+            </a:r>
+          </a:p>
+          <a:p>
+            <a:pPr>
+              <a:spcAft>
+                <a:spcPts val="342"/>
+              </a:spcAft>
+            </a:pPr>
+            <a:r>
+              <a:rPr sz="1600" i="0" b="0">
+                <a:solidFill>
+                  <a:srgbClr val="D4D4D4"/>
+                </a:solidFill>
+                <a:latin typeface="Consolas"/>
+              </a:rPr>
+              <a:t>  </a:t>
+            </a:r>
+            <a:r>
+              <a:rPr sz="1600" i="0" b="0">
+                <a:solidFill>
+                  <a:srgbClr val="D4D4D4"/>
+                </a:solidFill>
+                <a:latin typeface="Consolas"/>
+              </a:rPr>
+              <a:t>G</a:t>
+            </a:r>
+            <a:r>
+              <a:rPr sz="1600" i="0" b="0">
+                <a:solidFill>
+                  <a:srgbClr val="D4D4D4"/>
+                </a:solidFill>
+                <a:latin typeface="Consolas"/>
+              </a:rPr>
+              <a:t> --&gt; </a:t>
+            </a:r>
+            <a:r>
+              <a:rPr sz="1600" i="0" b="0">
+                <a:solidFill>
+                  <a:srgbClr val="D4D4D4"/>
+                </a:solidFill>
+                <a:latin typeface="Consolas"/>
+              </a:rPr>
+              <a:t>H</a:t>
+            </a:r>
+            <a:r>
+              <a:rPr sz="1600" i="0" b="0">
+                <a:solidFill>
+                  <a:srgbClr val="D4D4D4"/>
+                </a:solidFill>
+                <a:latin typeface="Consolas"/>
+              </a:rPr>
+              <a:t>[</a:t>
+            </a:r>
+            <a:r>
+              <a:rPr sz="1600" i="0" b="0">
+                <a:solidFill>
+                  <a:srgbClr val="D4D4D4"/>
+                </a:solidFill>
+                <a:latin typeface="Consolas"/>
+              </a:rPr>
+              <a:t>Pantalla</a:t>
+            </a:r>
+            <a:r>
+              <a:rPr sz="1600" i="0" b="0">
+                <a:solidFill>
+                  <a:srgbClr val="D4D4D4"/>
+                </a:solidFill>
+                <a:latin typeface="Consolas"/>
+              </a:rPr>
+              <a:t> </a:t>
+            </a:r>
+            <a:r>
+              <a:rPr sz="1600" i="0" b="0">
+                <a:solidFill>
+                  <a:srgbClr val="D4D4D4"/>
+                </a:solidFill>
+                <a:latin typeface="Consolas"/>
+              </a:rPr>
+              <a:t>Buscar</a:t>
+            </a:r>
+            <a:r>
+              <a:rPr sz="1600" i="0" b="0">
+                <a:solidFill>
+                  <a:srgbClr val="D4D4D4"/>
+                </a:solidFill>
+                <a:latin typeface="Consolas"/>
+              </a:rPr>
+              <a:t> </a:t>
+            </a:r>
+            <a:r>
+              <a:rPr sz="1600" i="0" b="0">
+                <a:solidFill>
+                  <a:srgbClr val="D4D4D4"/>
+                </a:solidFill>
+                <a:latin typeface="Consolas"/>
+              </a:rPr>
+              <a:t>expediente</a:t>
+            </a:r>
+            <a:r>
+              <a:rPr sz="1600" i="0" b="0">
+                <a:solidFill>
+                  <a:srgbClr val="D4D4D4"/>
+                </a:solidFill>
+                <a:latin typeface="Consolas"/>
+              </a:rPr>
+              <a:t>]</a:t>
+            </a:r>
+          </a:p>
+          <a:p>
+            <a:pPr>
+              <a:spcAft>
+                <a:spcPts val="342"/>
+              </a:spcAft>
+            </a:pPr>
+            <a:r>
+              <a:rPr sz="1600" i="0" b="0">
+                <a:solidFill>
+                  <a:srgbClr val="D4D4D4"/>
+                </a:solidFill>
+                <a:latin typeface="Consolas"/>
+              </a:rPr>
+              <a:t>  </a:t>
+            </a:r>
+            <a:r>
+              <a:rPr sz="1600" i="0" b="0">
+                <a:solidFill>
+                  <a:srgbClr val="D4D4D4"/>
+                </a:solidFill>
+                <a:latin typeface="Consolas"/>
+              </a:rPr>
+              <a:t>H</a:t>
+            </a:r>
+            <a:r>
+              <a:rPr sz="1600" i="0" b="0">
+                <a:solidFill>
+                  <a:srgbClr val="D4D4D4"/>
+                </a:solidFill>
+                <a:latin typeface="Consolas"/>
+              </a:rPr>
+              <a:t> --&gt; </a:t>
+            </a:r>
+            <a:r>
+              <a:rPr sz="1600" i="0" b="0">
+                <a:solidFill>
+                  <a:srgbClr val="D4D4D4"/>
+                </a:solidFill>
+                <a:latin typeface="Consolas"/>
+              </a:rPr>
+              <a:t>I</a:t>
+            </a:r>
+            <a:r>
+              <a:rPr sz="1600" i="0" b="0">
+                <a:solidFill>
+                  <a:srgbClr val="D4D4D4"/>
+                </a:solidFill>
+                <a:latin typeface="Consolas"/>
+              </a:rPr>
+              <a:t>{</a:t>
+            </a:r>
+            <a:r>
+              <a:rPr sz="1600" i="0" b="0">
+                <a:solidFill>
+                  <a:srgbClr val="D4D4D4"/>
+                </a:solidFill>
+                <a:latin typeface="Consolas"/>
+              </a:rPr>
+              <a:t>Cuantos</a:t>
+            </a:r>
+            <a:r>
+              <a:rPr sz="1600" i="0" b="0">
+                <a:solidFill>
+                  <a:srgbClr val="D4D4D4"/>
+                </a:solidFill>
+                <a:latin typeface="Consolas"/>
+              </a:rPr>
+              <a:t> </a:t>
+            </a:r>
+            <a:r>
+              <a:rPr sz="1600" i="0" b="0">
+                <a:solidFill>
+                  <a:srgbClr val="D4D4D4"/>
+                </a:solidFill>
+                <a:latin typeface="Consolas"/>
+              </a:rPr>
+              <a:t>resultados</a:t>
+            </a:r>
+            <a:r>
+              <a:rPr sz="1600" i="0" b="0">
+                <a:solidFill>
+                  <a:srgbClr val="D4D4D4"/>
+                </a:solidFill>
+                <a:latin typeface="Consolas"/>
+              </a:rPr>
+              <a:t>?}</a:t>
+            </a:r>
+          </a:p>
+          <a:p>
+            <a:pPr>
+              <a:spcAft>
+                <a:spcPts val="342"/>
+              </a:spcAft>
+            </a:pPr>
+            <a:r>
+              <a:rPr sz="1600" i="0" b="0">
+                <a:solidFill>
+                  <a:srgbClr val="D4D4D4"/>
+                </a:solidFill>
+                <a:latin typeface="Consolas"/>
+              </a:rPr>
+              <a:t>  </a:t>
+            </a:r>
+            <a:r>
+              <a:rPr sz="1600" i="0" b="0">
+                <a:solidFill>
+                  <a:srgbClr val="D4D4D4"/>
+                </a:solidFill>
+                <a:latin typeface="Consolas"/>
+              </a:rPr>
+              <a:t>I</a:t>
+            </a:r>
+            <a:r>
+              <a:rPr sz="1600" i="0" b="0">
+                <a:solidFill>
+                  <a:srgbClr val="D4D4D4"/>
+                </a:solidFill>
+                <a:latin typeface="Consolas"/>
+              </a:rPr>
+              <a:t> -- </a:t>
+            </a:r>
+            <a:r>
+              <a:rPr sz="1600" i="0" b="0">
+                <a:solidFill>
+                  <a:srgbClr val="D4D4D4"/>
+                </a:solidFill>
+                <a:latin typeface="Consolas"/>
+              </a:rPr>
+              <a:t>Cero</a:t>
+            </a:r>
+            <a:r>
+              <a:rPr sz="1600" i="0" b="0">
+                <a:solidFill>
+                  <a:srgbClr val="D4D4D4"/>
+                </a:solidFill>
+                <a:latin typeface="Consolas"/>
+              </a:rPr>
+              <a:t> --&gt; </a:t>
+            </a:r>
+            <a:r>
+              <a:rPr sz="1600" i="0" b="0">
+                <a:solidFill>
+                  <a:srgbClr val="D4D4D4"/>
+                </a:solidFill>
+                <a:latin typeface="Consolas"/>
+              </a:rPr>
+              <a:t>J</a:t>
+            </a:r>
+            <a:r>
+              <a:rPr sz="1600" i="0" b="0">
+                <a:solidFill>
+                  <a:srgbClr val="D4D4D4"/>
+                </a:solidFill>
+                <a:latin typeface="Consolas"/>
+              </a:rPr>
+              <a:t>[</a:t>
+            </a:r>
+            <a:r>
+              <a:rPr sz="1600" i="0" b="0">
+                <a:solidFill>
+                  <a:srgbClr val="D4D4D4"/>
+                </a:solidFill>
+                <a:latin typeface="Consolas"/>
+              </a:rPr>
+              <a:t>Mensaje</a:t>
+            </a:r>
+            <a:r>
+              <a:rPr sz="1600" i="0" b="0">
+                <a:solidFill>
+                  <a:srgbClr val="D4D4D4"/>
+                </a:solidFill>
+                <a:latin typeface="Consolas"/>
+              </a:rPr>
+              <a:t> </a:t>
+            </a:r>
+            <a:r>
+              <a:rPr sz="1600" i="0" b="0">
+                <a:solidFill>
+                  <a:srgbClr val="D4D4D4"/>
+                </a:solidFill>
+                <a:latin typeface="Consolas"/>
+              </a:rPr>
+              <a:t>sin</a:t>
+            </a:r>
+            <a:r>
+              <a:rPr sz="1600" i="0" b="0">
+                <a:solidFill>
+                  <a:srgbClr val="D4D4D4"/>
+                </a:solidFill>
+                <a:latin typeface="Consolas"/>
+              </a:rPr>
+              <a:t> </a:t>
+            </a:r>
+            <a:r>
+              <a:rPr sz="1600" i="0" b="0">
+                <a:solidFill>
+                  <a:srgbClr val="D4D4D4"/>
+                </a:solidFill>
+                <a:latin typeface="Consolas"/>
+              </a:rPr>
+              <a:t>resultados</a:t>
+            </a:r>
+            <a:r>
+              <a:rPr sz="1600" i="0" b="0">
+                <a:solidFill>
+                  <a:srgbClr val="D4D4D4"/>
+                </a:solidFill>
+                <a:latin typeface="Consolas"/>
+              </a:rPr>
+              <a:t> + </a:t>
+            </a:r>
+            <a:r>
+              <a:rPr sz="1600" i="0" b="0">
+                <a:solidFill>
+                  <a:srgbClr val="D4D4D4"/>
+                </a:solidFill>
+                <a:latin typeface="Consolas"/>
+              </a:rPr>
+              <a:t>Buscar</a:t>
+            </a:r>
+            <a:r>
+              <a:rPr sz="1600" i="0" b="0">
+                <a:solidFill>
+                  <a:srgbClr val="D4D4D4"/>
+                </a:solidFill>
+                <a:latin typeface="Consolas"/>
+              </a:rPr>
+              <a:t> </a:t>
+            </a:r>
+            <a:r>
+              <a:rPr sz="1600" i="0" b="0">
+                <a:solidFill>
+                  <a:srgbClr val="D4D4D4"/>
+                </a:solidFill>
+                <a:latin typeface="Consolas"/>
+              </a:rPr>
+              <a:t>por</a:t>
+            </a:r>
+            <a:r>
+              <a:rPr sz="1600" i="0" b="0">
+                <a:solidFill>
+                  <a:srgbClr val="D4D4D4"/>
+                </a:solidFill>
+                <a:latin typeface="Consolas"/>
+              </a:rPr>
+              <a:t> </a:t>
+            </a:r>
+            <a:r>
+              <a:rPr sz="1600" i="0" b="0">
+                <a:solidFill>
+                  <a:srgbClr val="D4D4D4"/>
+                </a:solidFill>
+                <a:latin typeface="Consolas"/>
+              </a:rPr>
+              <a:t>otro</a:t>
+            </a:r>
+            <a:r>
+              <a:rPr sz="1600" i="0" b="0">
+                <a:solidFill>
+                  <a:srgbClr val="D4D4D4"/>
+                </a:solidFill>
+                <a:latin typeface="Consolas"/>
+              </a:rPr>
+              <a:t> </a:t>
+            </a:r>
+            <a:r>
+              <a:rPr sz="1600" i="0" b="0">
+                <a:solidFill>
+                  <a:srgbClr val="D4D4D4"/>
+                </a:solidFill>
+                <a:latin typeface="Consolas"/>
+              </a:rPr>
+              <a:t>criterio</a:t>
+            </a:r>
+            <a:r>
+              <a:rPr sz="1600" i="0" b="0">
+                <a:solidFill>
+                  <a:srgbClr val="D4D4D4"/>
+                </a:solidFill>
+                <a:latin typeface="Consolas"/>
+              </a:rPr>
+              <a:t>]</a:t>
+            </a:r>
+          </a:p>
+          <a:p>
+            <a:pPr>
+              <a:spcAft>
+                <a:spcPts val="342"/>
+              </a:spcAft>
+            </a:pPr>
+            <a:r>
+              <a:rPr sz="1600" i="0" b="0">
+                <a:solidFill>
+                  <a:srgbClr val="D4D4D4"/>
+                </a:solidFill>
+                <a:latin typeface="Consolas"/>
+              </a:rPr>
+              <a:t>  </a:t>
+            </a:r>
+            <a:r>
+              <a:rPr sz="1600" i="0" b="0">
+                <a:solidFill>
+                  <a:srgbClr val="D4D4D4"/>
+                </a:solidFill>
+                <a:latin typeface="Consolas"/>
+              </a:rPr>
+              <a:t>I</a:t>
+            </a:r>
+            <a:r>
+              <a:rPr sz="1600" i="0" b="0">
+                <a:solidFill>
+                  <a:srgbClr val="D4D4D4"/>
+                </a:solidFill>
+                <a:latin typeface="Consolas"/>
+              </a:rPr>
+              <a:t> -- </a:t>
+            </a:r>
+            <a:r>
+              <a:rPr sz="1600" i="0" b="0">
+                <a:solidFill>
+                  <a:srgbClr val="D4D4D4"/>
+                </a:solidFill>
+                <a:latin typeface="Consolas"/>
+              </a:rPr>
+              <a:t>Varios</a:t>
+            </a:r>
+            <a:r>
+              <a:rPr sz="1600" i="0" b="0">
+                <a:solidFill>
+                  <a:srgbClr val="D4D4D4"/>
+                </a:solidFill>
+                <a:latin typeface="Consolas"/>
+              </a:rPr>
+              <a:t> --&gt; </a:t>
+            </a:r>
+            <a:r>
+              <a:rPr sz="1600" i="0" b="0">
+                <a:solidFill>
+                  <a:srgbClr val="D4D4D4"/>
+                </a:solidFill>
+                <a:latin typeface="Consolas"/>
+              </a:rPr>
+              <a:t>K</a:t>
+            </a:r>
+            <a:r>
+              <a:rPr sz="1600" i="0" b="0">
+                <a:solidFill>
+                  <a:srgbClr val="D4D4D4"/>
+                </a:solidFill>
+                <a:latin typeface="Consolas"/>
+              </a:rPr>
+              <a:t>[</a:t>
+            </a:r>
+            <a:r>
+              <a:rPr sz="1600" i="0" b="0">
+                <a:solidFill>
+                  <a:srgbClr val="D4D4D4"/>
+                </a:solidFill>
+                <a:latin typeface="Consolas"/>
+              </a:rPr>
+              <a:t>Lista</a:t>
+            </a:r>
+            <a:r>
+              <a:rPr sz="1600" i="0" b="0">
+                <a:solidFill>
+                  <a:srgbClr val="D4D4D4"/>
+                </a:solidFill>
+                <a:latin typeface="Consolas"/>
+              </a:rPr>
+              <a:t> </a:t>
+            </a:r>
+            <a:r>
+              <a:rPr sz="1600" i="0" b="0">
+                <a:solidFill>
+                  <a:srgbClr val="D4D4D4"/>
+                </a:solidFill>
+                <a:latin typeface="Consolas"/>
+              </a:rPr>
+              <a:t>con</a:t>
+            </a:r>
+            <a:r>
+              <a:rPr sz="1600" i="0" b="0">
+                <a:solidFill>
+                  <a:srgbClr val="D4D4D4"/>
+                </a:solidFill>
+                <a:latin typeface="Consolas"/>
+              </a:rPr>
+              <a:t> </a:t>
+            </a:r>
+            <a:r>
+              <a:rPr sz="1600" i="0" b="0">
+                <a:solidFill>
+                  <a:srgbClr val="D4D4D4"/>
+                </a:solidFill>
+                <a:latin typeface="Consolas"/>
+              </a:rPr>
+              <a:t>especie</a:t>
+            </a:r>
+            <a:r>
+              <a:rPr sz="1600" i="0" b="0">
+                <a:solidFill>
+                  <a:srgbClr val="D4D4D4"/>
+                </a:solidFill>
+                <a:latin typeface="Consolas"/>
+              </a:rPr>
+              <a:t>, </a:t>
+            </a:r>
+            <a:r>
+              <a:rPr sz="1600" i="0" b="0">
+                <a:solidFill>
+                  <a:srgbClr val="D4D4D4"/>
+                </a:solidFill>
+                <a:latin typeface="Consolas"/>
+              </a:rPr>
+              <a:t>edad</a:t>
+            </a:r>
+            <a:r>
+              <a:rPr sz="1600" i="0" b="0">
+                <a:solidFill>
+                  <a:srgbClr val="D4D4D4"/>
+                </a:solidFill>
+                <a:latin typeface="Consolas"/>
+              </a:rPr>
+              <a:t> </a:t>
+            </a:r>
+            <a:r>
+              <a:rPr sz="1600" i="0" b="0">
+                <a:solidFill>
+                  <a:srgbClr val="D4D4D4"/>
+                </a:solidFill>
+                <a:latin typeface="Consolas"/>
+              </a:rPr>
+              <a:t>y</a:t>
+            </a:r>
+            <a:r>
+              <a:rPr sz="1600" i="0" b="0">
+                <a:solidFill>
+                  <a:srgbClr val="D4D4D4"/>
+                </a:solidFill>
+                <a:latin typeface="Consolas"/>
+              </a:rPr>
+              <a:t> </a:t>
+            </a:r>
+            <a:r>
+              <a:rPr sz="1600" i="0" b="0">
+                <a:solidFill>
+                  <a:srgbClr val="D4D4D4"/>
+                </a:solidFill>
+                <a:latin typeface="Consolas"/>
+              </a:rPr>
+              <a:t>dueño</a:t>
+            </a:r>
+            <a:r>
+              <a:rPr sz="1600" i="0" b="0">
+                <a:solidFill>
+                  <a:srgbClr val="D4D4D4"/>
+                </a:solidFill>
+                <a:latin typeface="Consolas"/>
+              </a:rPr>
+              <a:t> </a:t>
+            </a:r>
+            <a:r>
+              <a:rPr sz="1600" i="0" b="0">
+                <a:solidFill>
+                  <a:srgbClr val="D4D4D4"/>
+                </a:solidFill>
+                <a:latin typeface="Consolas"/>
+              </a:rPr>
+              <a:t>para</a:t>
+            </a:r>
+            <a:r>
+              <a:rPr sz="1600" i="0" b="0">
+                <a:solidFill>
+                  <a:srgbClr val="D4D4D4"/>
+                </a:solidFill>
+                <a:latin typeface="Consolas"/>
+              </a:rPr>
+              <a:t> </a:t>
+            </a:r>
+            <a:r>
+              <a:rPr sz="1600" i="0" b="0">
+                <a:solidFill>
+                  <a:srgbClr val="D4D4D4"/>
+                </a:solidFill>
+                <a:latin typeface="Consolas"/>
+              </a:rPr>
+              <a:t>desambiguar</a:t>
+            </a:r>
+            <a:r>
+              <a:rPr sz="1600" i="0" b="0">
+                <a:solidFill>
+                  <a:srgbClr val="D4D4D4"/>
+                </a:solidFill>
+                <a:latin typeface="Consolas"/>
+              </a:rPr>
+              <a:t>]</a:t>
+            </a:r>
+          </a:p>
+          <a:p>
+            <a:pPr>
+              <a:spcAft>
+                <a:spcPts val="342"/>
+              </a:spcAft>
+            </a:pPr>
+            <a:r>
+              <a:rPr sz="1600" i="0" b="0">
+                <a:solidFill>
+                  <a:srgbClr val="D4D4D4"/>
+                </a:solidFill>
+                <a:latin typeface="Consolas"/>
+              </a:rPr>
+              <a:t>  </a:t>
+            </a:r>
+            <a:r>
+              <a:rPr sz="1600" i="0" b="0">
+                <a:solidFill>
+                  <a:srgbClr val="D4D4D4"/>
+                </a:solidFill>
+                <a:latin typeface="Consolas"/>
+              </a:rPr>
+              <a:t>I</a:t>
+            </a:r>
+            <a:r>
+              <a:rPr sz="1600" i="0" b="0">
+                <a:solidFill>
+                  <a:srgbClr val="D4D4D4"/>
+                </a:solidFill>
+                <a:latin typeface="Consolas"/>
+              </a:rPr>
+              <a:t> -- </a:t>
+            </a:r>
+            <a:r>
+              <a:rPr sz="1600" i="0" b="0">
+                <a:solidFill>
+                  <a:srgbClr val="D4D4D4"/>
+                </a:solidFill>
+                <a:latin typeface="Consolas"/>
+              </a:rPr>
+              <a:t>Uno</a:t>
+            </a:r>
+            <a:r>
+              <a:rPr sz="1600" i="0" b="0">
+                <a:solidFill>
+                  <a:srgbClr val="D4D4D4"/>
+                </a:solidFill>
+                <a:latin typeface="Consolas"/>
+              </a:rPr>
+              <a:t> --&gt; </a:t>
+            </a:r>
+            <a:r>
+              <a:rPr sz="1600" i="0" b="0">
+                <a:solidFill>
+                  <a:srgbClr val="D4D4D4"/>
+                </a:solidFill>
+                <a:latin typeface="Consolas"/>
+              </a:rPr>
+              <a:t>L</a:t>
+            </a:r>
+            <a:r>
+              <a:rPr sz="1600" i="0" b="0">
+                <a:solidFill>
+                  <a:srgbClr val="D4D4D4"/>
+                </a:solidFill>
+                <a:latin typeface="Consolas"/>
+              </a:rPr>
+              <a:t>[</a:t>
+            </a:r>
+            <a:r>
+              <a:rPr sz="1600" i="0" b="0">
+                <a:solidFill>
+                  <a:srgbClr val="D4D4D4"/>
+                </a:solidFill>
+                <a:latin typeface="Consolas"/>
+              </a:rPr>
+              <a:t>Ficha</a:t>
+            </a:r>
+            <a:r>
+              <a:rPr sz="1600" i="0" b="0">
+                <a:solidFill>
+                  <a:srgbClr val="D4D4D4"/>
+                </a:solidFill>
+                <a:latin typeface="Consolas"/>
+              </a:rPr>
+              <a:t> </a:t>
+            </a:r>
+            <a:r>
+              <a:rPr sz="1600" i="0" b="0">
+                <a:solidFill>
+                  <a:srgbClr val="D4D4D4"/>
+                </a:solidFill>
+                <a:latin typeface="Consolas"/>
+              </a:rPr>
+              <a:t>del</a:t>
+            </a:r>
+            <a:r>
+              <a:rPr sz="1600" i="0" b="0">
+                <a:solidFill>
+                  <a:srgbClr val="D4D4D4"/>
+                </a:solidFill>
+                <a:latin typeface="Consolas"/>
+              </a:rPr>
+              <a:t> </a:t>
+            </a:r>
+            <a:r>
+              <a:rPr sz="1600" i="0" b="0">
+                <a:solidFill>
+                  <a:srgbClr val="D4D4D4"/>
+                </a:solidFill>
+                <a:latin typeface="Consolas"/>
+              </a:rPr>
+              <a:t>paciente</a:t>
+            </a:r>
+            <a:r>
+              <a:rPr sz="1600" i="0" b="0">
+                <a:solidFill>
+                  <a:srgbClr val="D4D4D4"/>
+                </a:solidFill>
+                <a:latin typeface="Consolas"/>
+              </a:rPr>
+              <a:t>]</a:t>
+            </a:r>
+          </a:p>
+        </p:txBody>
+      </p:sp>
+      <p:sp>
+        <p:nvSpPr>
+          <p:cNvPr id="13" name="TextBox 12"/>
+          <p:cNvSpPr txBox="1"/>
+          <p:nvPr/>
+        </p:nvSpPr>
+        <p:spPr>
+          <a:xfrm>
+            <a:off x="457200" y="6035040"/>
+            <a:ext cx="11277295" cy="365760"/>
+          </a:xfrm>
+          <a:prstGeom prst="rect">
+            <a:avLst/>
+          </a:prstGeom>
+          <a:noFill/>
+        </p:spPr>
+        <p:txBody>
+          <a:bodyPr wrap="square">
+            <a:spAutoFit/>
+          </a:bodyPr>
+          <a:lstStyle/>
+          <a:p>
+            <a:pPr algn="ctr"/>
+            <a:r>
+              <a:rPr sz="1300" b="0" i="1">
+                <a:solidFill>
+                  <a:srgbClr val="666666"/>
                 </a:solidFill>
                 <a:latin typeface="Calibri"/>
               </a:rPr>
-              <a:t>–   La mascota ya existe porque otro turno la registro ayer y hay que avisarlo en vez de duplicarla; el dueño no trae documento y hay que permitir el registro con telefono como identificador temporal.</a:t>
-            </a:r>
-          </a:p>
-        </p:txBody>
-      </p:sp>
-      <p:sp>
-        <p:nvSpPr>
-          <p:cNvPr id="6" name="TextBox 5"/>
+              <a:t>La interfaz no son pantallas sueltas: es un camino con desvios, y los desvios son los que hay que diseñar.</a:t>
+            </a:r>
+          </a:p>
+        </p:txBody>
+      </p:sp>
+      <p:sp>
+        <p:nvSpPr>
+          <p:cNvPr id="14" name="TextBox 13"/>
           <p:cNvSpPr txBox="1"/>
           <p:nvPr/>
         </p:nvSpPr>
@@ -9546,21 +14308,173 @@
                 </a:solidFill>
                 <a:latin typeface="Calibri"/>
               </a:rPr>
-              <a:t>Una pantalla suelta no sirve para nada; lo que se diseña es un flujo de... (2/2)</a:t>
-            </a:r>
-          </a:p>
-        </p:txBody>
-      </p:sp>
-      <p:sp>
-        <p:nvSpPr>
-          <p:cNvPr id="5" name="TextBox 4"/>
+              <a:t>La interfaz se deriva de los artefactos</a:t>
+            </a:r>
+          </a:p>
+        </p:txBody>
+      </p:sp>
+      <p:sp>
+        <p:nvSpPr>
+          <p:cNvPr id="5" name="Rounded Rectangle 4"/>
+          <p:cNvSpPr/>
+          <p:nvPr/>
+        </p:nvSpPr>
+        <p:spPr>
+          <a:xfrm>
+            <a:off x="5803166" y="1188719"/>
+            <a:ext cx="5998464" cy="4828032"/>
+          </a:xfrm>
+          <a:prstGeom prst="roundRect">
+            <a:avLst>
+              <a:gd name="adj" fmla="val 4000"/>
+            </a:avLst>
+          </a:prstGeom>
+          <a:solidFill>
+            <a:srgbClr val="E8EEF4"/>
+          </a:solidFill>
+          <a:ln>
+            <a:noFill/>
+          </a:ln>
+        </p:spPr>
+        <p:style>
+          <a:lnRef idx="1">
+            <a:schemeClr val="accent1"/>
+          </a:lnRef>
+          <a:fillRef idx="3">
+            <a:schemeClr val="accent1"/>
+          </a:fillRef>
+          <a:effectRef idx="2">
+            <a:schemeClr val="accent1"/>
+          </a:effectRef>
+          <a:fontRef idx="minor">
+            <a:schemeClr val="lt1"/>
+          </a:fontRef>
+        </p:style>
+        <p:txBody>
+          <a:bodyPr rtlCol="0" anchor="ctr"/>
+          <a:lstStyle/>
+          <a:p>
+            <a:pPr algn="ctr"/>
+          </a:p>
+        </p:txBody>
+      </p:sp>
+      <p:pic>
+        <p:nvPicPr>
+          <p:cNvPr id="6" name="Picture 5" descr="wireframe-anotado-paso1.png"/>
+          <p:cNvPicPr>
+            <a:picLocks noChangeAspect="1"/>
+          </p:cNvPicPr>
+          <p:nvPr/>
+        </p:nvPicPr>
+        <p:blipFill>
+          <a:blip r:embed="rId2"/>
+          <a:stretch>
+            <a:fillRect/>
+          </a:stretch>
+        </p:blipFill>
+        <p:spPr>
+          <a:xfrm>
+            <a:off x="5876318" y="1261872"/>
+            <a:ext cx="5852160" cy="4681728"/>
+          </a:xfrm>
+          <a:prstGeom prst="rect">
+            <a:avLst/>
+          </a:prstGeom>
+        </p:spPr>
+      </p:pic>
+      <p:pic>
+        <p:nvPicPr>
+          <p:cNvPr id="7" name="Picture 6" descr="wireframe-anotado-paso2.png"/>
+          <p:cNvPicPr>
+            <a:picLocks noChangeAspect="1"/>
+          </p:cNvPicPr>
+          <p:nvPr/>
+        </p:nvPicPr>
+        <p:blipFill>
+          <a:blip r:embed="rId3"/>
+          <a:stretch>
+            <a:fillRect/>
+          </a:stretch>
+        </p:blipFill>
+        <p:spPr>
+          <a:xfrm>
+            <a:off x="5876318" y="1261872"/>
+            <a:ext cx="5852160" cy="4681728"/>
+          </a:xfrm>
+          <a:prstGeom prst="rect">
+            <a:avLst/>
+          </a:prstGeom>
+        </p:spPr>
+      </p:pic>
+      <p:pic>
+        <p:nvPicPr>
+          <p:cNvPr id="8" name="Picture 7" descr="wireframe-anotado-paso3.png"/>
+          <p:cNvPicPr>
+            <a:picLocks noChangeAspect="1"/>
+          </p:cNvPicPr>
+          <p:nvPr/>
+        </p:nvPicPr>
+        <p:blipFill>
+          <a:blip r:embed="rId4"/>
+          <a:stretch>
+            <a:fillRect/>
+          </a:stretch>
+        </p:blipFill>
+        <p:spPr>
+          <a:xfrm>
+            <a:off x="5876318" y="1261872"/>
+            <a:ext cx="5852160" cy="4681728"/>
+          </a:xfrm>
+          <a:prstGeom prst="rect">
+            <a:avLst/>
+          </a:prstGeom>
+        </p:spPr>
+      </p:pic>
+      <p:sp>
+        <p:nvSpPr>
+          <p:cNvPr id="13" name="TextBox 12"/>
           <p:cNvSpPr txBox="1"/>
           <p:nvPr/>
         </p:nvSpPr>
         <p:spPr>
           <a:xfrm>
-            <a:off x="457200" y="1170432"/>
-            <a:ext cx="11277295" cy="5230368"/>
+            <a:off x="5870301" y="5961888"/>
+            <a:ext cx="5864193" cy="320040"/>
+          </a:xfrm>
+          <a:prstGeom prst="rect">
+            <a:avLst/>
+          </a:prstGeom>
+          <a:noFill/>
+        </p:spPr>
+        <p:txBody>
+          <a:bodyPr wrap="square">
+            <a:spAutoFit/>
+          </a:bodyPr>
+          <a:lstStyle/>
+          <a:p>
+            <a:pPr algn="ctr"/>
+            <a:r>
+              <a:rPr sz="1100" b="0" i="1">
+                <a:solidFill>
+                  <a:srgbClr val="666666"/>
+                </a:solidFill>
+                <a:latin typeface="Calibri"/>
+              </a:rPr>
+              <a:t>Clic para avanzar la animación</a:t>
+            </a:r>
+          </a:p>
+        </p:txBody>
+      </p:sp>
+      <p:sp>
+        <p:nvSpPr>
+          <p:cNvPr id="14" name="TextBox 13"/>
+          <p:cNvSpPr txBox="1"/>
+          <p:nvPr/>
+        </p:nvSpPr>
+        <p:spPr>
+          <a:xfrm>
+            <a:off x="457200" y="1353312"/>
+            <a:ext cx="5093061" cy="5047488"/>
           </a:xfrm>
           <a:prstGeom prst="rect">
             <a:avLst/>
@@ -9585,7 +14499,7 @@
                 </a:solidFill>
                 <a:latin typeface="Calibri"/>
               </a:rPr>
-              <a:t>–   En Buscar expediente pasa lo mismo: el camino feliz es buscar por documento del dueño y encontrar una sola ficha, pero hay que diseñar que ocurre cuando la busqueda por nombre devuelve doce mascotas llamadas Firulais</a:t>
+              <a:t>–   Cada pantalla señala el RF que la origina.</a:t>
             </a:r>
           </a:p>
           <a:p>
@@ -9601,7 +14515,7 @@
                 </a:solidFill>
                 <a:latin typeface="Calibri"/>
               </a:rPr>
-              <a:t>–   Y ahi la respuesta de diseño es mostrar en la lista de resultados la especie, la edad y el nombre del dueño para poder desambiguar de un vistazo.</a:t>
+              <a:t>–   Cada campo existe en el diccionario de datos con su tipo y longitud.</a:t>
             </a:r>
           </a:p>
           <a:p>
@@ -9617,14 +14531,30 @@
                 </a:solidFill>
                 <a:latin typeface="Calibri"/>
               </a:rPr>
-              <a:t>–   Un flujo que solo dibuja el camino feliz no es un diseño, es una postal.</a:t>
-            </a:r>
-          </a:p>
-        </p:txBody>
-      </p:sp>
-      <p:sp>
-        <p:nvSpPr>
-          <p:cNvPr id="6" name="TextBox 5"/>
+              <a:t>–   Cada botón corresponde a una operación del caso de uso o de la secuencia.</a:t>
+            </a:r>
+          </a:p>
+          <a:p>
+            <a:pPr>
+              <a:spcAft>
+                <a:spcPts val="800"/>
+              </a:spcAft>
+            </a:pPr>
+            <a:r>
+              <a:rPr sz="2000" b="0" i="0">
+                <a:solidFill>
+                  <a:srgbClr val="333333"/>
+                </a:solidFill>
+                <a:latin typeface="Calibri"/>
+              </a:rPr>
+              <a:t>–   Un campo sin respaldo en el diccionario: o falta un requisito o sobra el campo.</a:t>
+            </a:r>
+          </a:p>
+        </p:txBody>
+      </p:sp>
+      <p:sp>
+        <p:nvSpPr>
+          <p:cNvPr id="15" name="TextBox 14"/>
           <p:cNvSpPr txBox="1"/>
           <p:nvPr/>
         </p:nvSpPr>
@@ -9662,6 +14592,142 @@
   <p:clrMapOvr>
     <a:masterClrMapping/>
   </p:clrMapOvr>
+  <p:timing>
+    <p:tnLst>
+      <p:par>
+        <p:cTn id="1" dur="indefinite" restart="never" nodeType="tmRoot">
+          <p:childTnLst>
+            <p:seq concurrent="1" nextAc="seek">
+              <p:cTn id="2" dur="indefinite" nodeType="mainSeq">
+                <p:childTnLst>
+                  <p:par>
+                    <p:cTn id="3" fill="hold">
+                      <p:stCondLst>
+                        <p:cond delay="indefinite"/>
+                      </p:stCondLst>
+                      <p:childTnLst>
+                        <p:par>
+                          <p:cTn id="4" fill="hold">
+                            <p:stCondLst>
+                              <p:cond delay="0"/>
+                            </p:stCondLst>
+                            <p:childTnLst>
+                              <p:par>
+                                <p:cTn id="5" presetID="10" presetClass="entr" presetSubtype="0" fill="hold" nodeType="clickEffect">
+                                  <p:stCondLst>
+                                    <p:cond delay="0"/>
+                                  </p:stCondLst>
+                                  <p:childTnLst>
+                                    <p:set>
+                                      <p:cBhvr>
+                                        <p:cTn id="6" dur="1" fill="hold">
+                                          <p:stCondLst>
+                                            <p:cond delay="0"/>
+                                          </p:stCondLst>
+                                        </p:cTn>
+                                        <p:tgtEl>
+                                          <p:spTgt spid="7"/>
+                                        </p:tgtEl>
+                                        <p:attrNameLst>
+                                          <p:attrName>style.visibility</p:attrName>
+                                        </p:attrNameLst>
+                                      </p:cBhvr>
+                                      <p:to>
+                                        <p:strVal val="visible"/>
+                                      </p:to>
+                                    </p:set>
+                                    <p:animEffect transition="in" filter="fade">
+                                      <p:cBhvr>
+                                        <p:cTn id="7" dur="450"/>
+                                        <p:tgtEl>
+                                          <p:spTgt spid="7"/>
+                                        </p:tgtEl>
+                                      </p:cBhvr>
+                                    </p:animEffect>
+                                  </p:childTnLst>
+                                </p:cTn>
+                              </p:par>
+                            </p:childTnLst>
+                          </p:cTn>
+                        </p:par>
+                      </p:childTnLst>
+                    </p:cTn>
+                  </p:par>
+                  <p:par>
+                    <p:cTn id="8" fill="hold">
+                      <p:stCondLst>
+                        <p:cond delay="indefinite"/>
+                      </p:stCondLst>
+                      <p:childTnLst>
+                        <p:par>
+                          <p:cTn id="9" fill="hold">
+                            <p:stCondLst>
+                              <p:cond delay="0"/>
+                            </p:stCondLst>
+                            <p:childTnLst>
+                              <p:par>
+                                <p:cTn id="10" presetID="10" presetClass="entr" presetSubtype="0" fill="hold" nodeType="clickEffect">
+                                  <p:stCondLst>
+                                    <p:cond delay="0"/>
+                                  </p:stCondLst>
+                                  <p:childTnLst>
+                                    <p:set>
+                                      <p:cBhvr>
+                                        <p:cTn id="11" dur="1" fill="hold">
+                                          <p:stCondLst>
+                                            <p:cond delay="0"/>
+                                          </p:stCondLst>
+                                        </p:cTn>
+                                        <p:tgtEl>
+                                          <p:spTgt spid="8"/>
+                                        </p:tgtEl>
+                                        <p:attrNameLst>
+                                          <p:attrName>style.visibility</p:attrName>
+                                        </p:attrNameLst>
+                                      </p:cBhvr>
+                                      <p:to>
+                                        <p:strVal val="visible"/>
+                                      </p:to>
+                                    </p:set>
+                                    <p:animEffect transition="in" filter="fade">
+                                      <p:cBhvr>
+                                        <p:cTn id="12" dur="450"/>
+                                        <p:tgtEl>
+                                          <p:spTgt spid="8"/>
+                                        </p:tgtEl>
+                                      </p:cBhvr>
+                                    </p:animEffect>
+                                  </p:childTnLst>
+                                </p:cTn>
+                              </p:par>
+                            </p:childTnLst>
+                          </p:cTn>
+                        </p:par>
+                      </p:childTnLst>
+                    </p:cTn>
+                  </p:par>
+                </p:childTnLst>
+              </p:cTn>
+              <p:prevCondLst>
+                <p:cond evt="onPrev" delay="0">
+                  <p:tgtEl>
+                    <p:sldTgt/>
+                  </p:tgtEl>
+                </p:cond>
+              </p:prevCondLst>
+              <p:nextCondLst>
+                <p:cond evt="onNext" delay="0">
+                  <p:tgtEl>
+                    <p:sldTgt/>
+                  </p:tgtEl>
+                </p:cond>
+              </p:nextCondLst>
+            </p:seq>
+          </p:childTnLst>
+        </p:cTn>
+      </p:par>
+    </p:tnLst>
+  </p:timing>
 </p:sld>
 </file>
 

--- a/Seminario de Sistemas/Clases/Clase 13 - Diseño de interfaces/Presentacion.pptx
+++ b/Seminario de Sistemas/Clases/Clase 13 - Diseño de interfaces/Presentacion.pptx
@@ -1029,94 +1029,6 @@
           <a:p>
             <a:r>
               <a:t>Eso obliga a decisiones de diseño concretas: letra grande, pocos campos obligatorios, nada de scroll interminable, tolerancia a la interrupcion para que si la llaman y vuelve en tres minutos no haya perdido lo escrito, y mensajes en lenguaje de clinica y no de sistemas, es decir Esta mascota ya tiene ficha en la clinica y no Violacion de restriccion de unicidad.</a:t>
-            </a:r>
-          </a:p>
-        </p:txBody>
-      </p:sp>
-      <p:sp>
-        <p:nvSpPr>
-          <p:cNvPr id="4" name="Slide Number Placeholder 3"/>
-          <p:cNvSpPr>
-            <a:spLocks noGrp="1"/>
-          </p:cNvSpPr>
-          <p:nvPr>
-            <p:ph type="sldNum" idx="5" sz="quarter"/>
-          </p:nvPr>
-        </p:nvSpPr>
-        <p:spPr/>
-      </p:sp>
-    </p:spTree>
-  </p:cSld>
-  <p:clrMapOvr>
-    <a:masterClrMapping/>
-  </p:clrMapOvr>
-</p:notes>
-</file>
-
-<file path=ppt/notesSlides/notesSlide6.xml><?xml version="1.0" encoding="utf-8"?>
-<p:notes xmlns:a="http://schemas.openxmlformats.org/drawingml/2006/main" xmlns:p="http://schemas.openxmlformats.org/presentationml/2006/main" xmlns:r="http://schemas.openxmlformats.org/officeDocument/2006/relationships">
-  <p:cSld>
-    <p:spTree>
-      <p:nvGrpSpPr>
-        <p:cNvPr id="1" name=""/>
-        <p:cNvGrpSpPr/>
-        <p:nvPr/>
-      </p:nvGrpSpPr>
-      <p:grpSpPr>
-        <a:xfrm>
-          <a:off x="0" y="0"/>
-          <a:ext cx="0" cy="0"/>
-          <a:chOff x="0" y="0"/>
-          <a:chExt cx="0" cy="0"/>
-        </a:xfrm>
-      </p:grpSpPr>
-      <p:sp>
-        <p:nvSpPr>
-          <p:cNvPr id="2" name="Slide Image Placeholder 1"/>
-          <p:cNvSpPr>
-            <a:spLocks noGrp="1"/>
-          </p:cNvSpPr>
-          <p:nvPr>
-            <p:ph type="sldImg" idx="2"/>
-          </p:nvPr>
-        </p:nvSpPr>
-        <p:spPr/>
-      </p:sp>
-      <p:sp>
-        <p:nvSpPr>
-          <p:cNvPr id="3" name="Notes Placeholder 2"/>
-          <p:cNvSpPr>
-            <a:spLocks noGrp="1"/>
-          </p:cNvSpPr>
-          <p:nvPr>
-            <p:ph type="body" idx="3" sz="quarter"/>
-          </p:nvPr>
-        </p:nvSpPr>
-        <p:spPr/>
-        <p:txBody>
-          <a:bodyPr/>
-          <a:lstStyle/>
-          <a:p>
-            <a:r>
-              <a:t>TEXTO COMPLETO DE LA LÁMINA (se proyecta resumido):</a:t>
-            </a:r>
-          </a:p>
-          <a:p/>
-          <a:p>
-            <a:r>
-              <a:t>Herramienta: Figma o Penpot · Excalidraw · Google Docs</a:t>
-            </a:r>
-          </a:p>
-          <a:p/>
-          <a:p>
-            <a:r>
-              <a:t>Demo: Se dibuja en vivo el wireframe de Registrar mascota en Penpot, le pone tres anotaciones numeradas y lo conecta con Buscar expediente para que la clase vea en la misma pantalla la diferencia entre wireframe, mockup y prototipo.</a:t>
-            </a:r>
-          </a:p>
-          <a:p/>
-          <a:p>
-            <a:r>
-              <a:t>Mismo dominio: la clinica veterinaria — no otro ejemplo. Aqui se diseña, no se programa.</a:t>
             </a:r>
           </a:p>
         </p:txBody>
@@ -6026,118 +5938,14 @@
       </p:sp>
       <p:sp>
         <p:nvSpPr>
-          <p:cNvPr id="5" name="Rounded Rectangle 4"/>
-          <p:cNvSpPr/>
-          <p:nvPr/>
-        </p:nvSpPr>
-        <p:spPr>
-          <a:xfrm>
-            <a:off x="5797149" y="1570693"/>
-            <a:ext cx="6010497" cy="4064084"/>
-          </a:xfrm>
-          <a:prstGeom prst="roundRect">
-            <a:avLst>
-              <a:gd name="adj" fmla="val 4000"/>
-            </a:avLst>
-          </a:prstGeom>
-          <a:solidFill>
-            <a:srgbClr val="E8EEF4"/>
-          </a:solidFill>
-          <a:ln>
-            <a:noFill/>
-          </a:ln>
-        </p:spPr>
-        <p:style>
-          <a:lnRef idx="1">
-            <a:schemeClr val="accent1"/>
-          </a:lnRef>
-          <a:fillRef idx="3">
-            <a:schemeClr val="accent1"/>
-          </a:fillRef>
-          <a:effectRef idx="2">
-            <a:schemeClr val="accent1"/>
-          </a:effectRef>
-          <a:fontRef idx="minor">
-            <a:schemeClr val="lt1"/>
-          </a:fontRef>
-        </p:style>
-        <p:txBody>
-          <a:bodyPr rtlCol="0" anchor="ctr"/>
-          <a:lstStyle/>
-          <a:p>
-            <a:pPr algn="ctr"/>
-          </a:p>
-        </p:txBody>
-      </p:sp>
-      <p:pic>
-        <p:nvPicPr>
-          <p:cNvPr id="6" name="Picture 5" descr="usability-testing-laptop.jpg"/>
-          <p:cNvPicPr>
-            <a:picLocks noChangeAspect="1"/>
-          </p:cNvPicPr>
-          <p:nvPr/>
-        </p:nvPicPr>
-        <p:blipFill>
-          <a:blip r:embed="rId2"/>
-          <a:stretch>
-            <a:fillRect/>
-          </a:stretch>
-        </p:blipFill>
-        <p:spPr>
-          <a:xfrm>
-            <a:off x="5870301" y="1643845"/>
-            <a:ext cx="5864193" cy="3917780"/>
-          </a:xfrm>
-          <a:prstGeom prst="rect">
-            <a:avLst/>
-          </a:prstGeom>
-        </p:spPr>
-      </p:pic>
-      <p:sp>
-        <p:nvSpPr>
-          <p:cNvPr id="7" name="TextBox 6"/>
+          <p:cNvPr id="5" name="TextBox 4"/>
           <p:cNvSpPr txBox="1"/>
           <p:nvPr/>
         </p:nvSpPr>
         <p:spPr>
           <a:xfrm>
-            <a:off x="5870301" y="5961888"/>
-            <a:ext cx="5864193" cy="320040"/>
-          </a:xfrm>
-          <a:prstGeom prst="rect">
-            <a:avLst/>
-          </a:prstGeom>
-          <a:noFill/>
-        </p:spPr>
-        <p:txBody>
-          <a:bodyPr wrap="square">
-            <a:spAutoFit/>
-          </a:bodyPr>
-          <a:lstStyle/>
-          <a:p>
-            <a:pPr algn="ctr"/>
-            <a:r>
-              <a:rPr sz="1100" b="0" i="1">
-                <a:solidFill>
-                  <a:srgbClr val="666666"/>
-                </a:solidFill>
-                <a:latin typeface="Calibri"/>
-              </a:rPr>
-              <a:t>Foto: Pixabay · Pexels</a:t>
-            </a:r>
-          </a:p>
-        </p:txBody>
-      </p:sp>
-      <p:sp>
-        <p:nvSpPr>
-          <p:cNvPr id="8" name="TextBox 7"/>
-          <p:cNvSpPr txBox="1"/>
-          <p:nvPr/>
-        </p:nvSpPr>
-        <p:spPr>
-          <a:xfrm>
-            <a:off x="457200" y="1353312"/>
-            <a:ext cx="5093061" cy="5047488"/>
+            <a:off x="457200" y="1170432"/>
+            <a:ext cx="11277295" cy="5230368"/>
           </a:xfrm>
           <a:prstGeom prst="rect">
             <a:avLst/>
@@ -6217,7 +6025,7 @@
       </p:sp>
       <p:sp>
         <p:nvSpPr>
-          <p:cNvPr id="9" name="TextBox 8"/>
+          <p:cNvPr id="6" name="TextBox 5"/>
           <p:cNvSpPr txBox="1"/>
           <p:nvPr/>
         </p:nvSpPr>
@@ -6398,118 +6206,14 @@
       </p:sp>
       <p:sp>
         <p:nvSpPr>
-          <p:cNvPr id="5" name="Rounded Rectangle 4"/>
-          <p:cNvSpPr/>
-          <p:nvPr/>
-        </p:nvSpPr>
-        <p:spPr>
-          <a:xfrm>
-            <a:off x="5797149" y="1573813"/>
-            <a:ext cx="6010497" cy="4057845"/>
-          </a:xfrm>
-          <a:prstGeom prst="roundRect">
-            <a:avLst>
-              <a:gd name="adj" fmla="val 4000"/>
-            </a:avLst>
-          </a:prstGeom>
-          <a:solidFill>
-            <a:srgbClr val="E8EEF4"/>
-          </a:solidFill>
-          <a:ln>
-            <a:noFill/>
-          </a:ln>
-        </p:spPr>
-        <p:style>
-          <a:lnRef idx="1">
-            <a:schemeClr val="accent1"/>
-          </a:lnRef>
-          <a:fillRef idx="3">
-            <a:schemeClr val="accent1"/>
-          </a:fillRef>
-          <a:effectRef idx="2">
-            <a:schemeClr val="accent1"/>
-          </a:effectRef>
-          <a:fontRef idx="minor">
-            <a:schemeClr val="lt1"/>
-          </a:fontRef>
-        </p:style>
-        <p:txBody>
-          <a:bodyPr rtlCol="0" anchor="ctr"/>
-          <a:lstStyle/>
-          <a:p>
-            <a:pPr algn="ctr"/>
-          </a:p>
-        </p:txBody>
-      </p:sp>
-      <p:pic>
-        <p:nvPicPr>
-          <p:cNvPr id="6" name="Picture 5" descr="laptop-code-live-demo.jpg"/>
-          <p:cNvPicPr>
-            <a:picLocks noChangeAspect="1"/>
-          </p:cNvPicPr>
-          <p:nvPr/>
-        </p:nvPicPr>
-        <p:blipFill>
-          <a:blip r:embed="rId2"/>
-          <a:stretch>
-            <a:fillRect/>
-          </a:stretch>
-        </p:blipFill>
-        <p:spPr>
-          <a:xfrm>
-            <a:off x="5870301" y="1646965"/>
-            <a:ext cx="5864193" cy="3911541"/>
-          </a:xfrm>
-          <a:prstGeom prst="rect">
-            <a:avLst/>
-          </a:prstGeom>
-        </p:spPr>
-      </p:pic>
-      <p:sp>
-        <p:nvSpPr>
-          <p:cNvPr id="7" name="TextBox 6"/>
+          <p:cNvPr id="5" name="TextBox 4"/>
           <p:cNvSpPr txBox="1"/>
           <p:nvPr/>
         </p:nvSpPr>
         <p:spPr>
           <a:xfrm>
-            <a:off x="5870301" y="5961888"/>
-            <a:ext cx="5864193" cy="320040"/>
-          </a:xfrm>
-          <a:prstGeom prst="rect">
-            <a:avLst/>
-          </a:prstGeom>
-          <a:noFill/>
-        </p:spPr>
-        <p:txBody>
-          <a:bodyPr wrap="square">
-            <a:spAutoFit/>
-          </a:bodyPr>
-          <a:lstStyle/>
-          <a:p>
-            <a:pPr algn="ctr"/>
-            <a:r>
-              <a:rPr sz="1100" b="0" i="1">
-                <a:solidFill>
-                  <a:srgbClr val="666666"/>
-                </a:solidFill>
-                <a:latin typeface="Calibri"/>
-              </a:rPr>
-              <a:t>Foto: olia danilevich · Pexels</a:t>
-            </a:r>
-          </a:p>
-        </p:txBody>
-      </p:sp>
-      <p:sp>
-        <p:nvSpPr>
-          <p:cNvPr id="8" name="TextBox 7"/>
-          <p:cNvSpPr txBox="1"/>
-          <p:nvPr/>
-        </p:nvSpPr>
-        <p:spPr>
-          <a:xfrm>
-            <a:off x="457200" y="1353312"/>
-            <a:ext cx="5093061" cy="5047488"/>
+            <a:off x="457200" y="1170432"/>
+            <a:ext cx="11277295" cy="5230368"/>
           </a:xfrm>
           <a:prstGeom prst="rect">
             <a:avLst/>
@@ -6579,6 +6283,15 @@
               </a:rPr>
               <a:t>Demo:</a:t>
             </a:r>
+            <a:r>
+              <a:rPr sz="2000" b="0" i="0">
+                <a:solidFill>
+                  <a:srgbClr val="333333"/>
+                </a:solidFill>
+                <a:latin typeface="Calibri"/>
+              </a:rPr>
+              <a:t> Se dibuja en vivo el wireframe de Registrar mascota en Penpot, le pone tres anotaciones numeradas y lo conecta con Buscar expediente para que la clase vea en la misma pantalla la diferencia entre wireframe, mockup y prototipo.</a:t>
+            </a:r>
           </a:p>
           <a:p>
             <a:pPr>
@@ -6600,7 +6313,7 @@
       </p:sp>
       <p:sp>
         <p:nvSpPr>
-          <p:cNvPr id="9" name="TextBox 8"/>
+          <p:cNvPr id="6" name="TextBox 5"/>
           <p:cNvSpPr txBox="1"/>
           <p:nvPr/>
         </p:nvSpPr>
@@ -7013,118 +6726,14 @@
       </p:sp>
       <p:sp>
         <p:nvSpPr>
-          <p:cNvPr id="5" name="Rounded Rectangle 4"/>
-          <p:cNvSpPr/>
-          <p:nvPr/>
-        </p:nvSpPr>
-        <p:spPr>
-          <a:xfrm>
-            <a:off x="5797149" y="1573813"/>
-            <a:ext cx="6010497" cy="4057845"/>
-          </a:xfrm>
-          <a:prstGeom prst="roundRect">
-            <a:avLst>
-              <a:gd name="adj" fmla="val 4000"/>
-            </a:avLst>
-          </a:prstGeom>
-          <a:solidFill>
-            <a:srgbClr val="E8EEF4"/>
-          </a:solidFill>
-          <a:ln>
-            <a:noFill/>
-          </a:ln>
-        </p:spPr>
-        <p:style>
-          <a:lnRef idx="1">
-            <a:schemeClr val="accent1"/>
-          </a:lnRef>
-          <a:fillRef idx="3">
-            <a:schemeClr val="accent1"/>
-          </a:fillRef>
-          <a:effectRef idx="2">
-            <a:schemeClr val="accent1"/>
-          </a:effectRef>
-          <a:fontRef idx="minor">
-            <a:schemeClr val="lt1"/>
-          </a:fontRef>
-        </p:style>
-        <p:txBody>
-          <a:bodyPr rtlCol="0" anchor="ctr"/>
-          <a:lstStyle/>
-          <a:p>
-            <a:pPr algn="ctr"/>
-          </a:p>
-        </p:txBody>
-      </p:sp>
-      <p:pic>
-        <p:nvPicPr>
-          <p:cNvPr id="6" name="Picture 5" descr="notebook-planning-desk-coffee.jpg"/>
-          <p:cNvPicPr>
-            <a:picLocks noChangeAspect="1"/>
-          </p:cNvPicPr>
-          <p:nvPr/>
-        </p:nvPicPr>
-        <p:blipFill>
-          <a:blip r:embed="rId2"/>
-          <a:stretch>
-            <a:fillRect/>
-          </a:stretch>
-        </p:blipFill>
-        <p:spPr>
-          <a:xfrm>
-            <a:off x="5870301" y="1646965"/>
-            <a:ext cx="5864193" cy="3911541"/>
-          </a:xfrm>
-          <a:prstGeom prst="rect">
-            <a:avLst/>
-          </a:prstGeom>
-        </p:spPr>
-      </p:pic>
-      <p:sp>
-        <p:nvSpPr>
-          <p:cNvPr id="7" name="TextBox 6"/>
+          <p:cNvPr id="5" name="TextBox 4"/>
           <p:cNvSpPr txBox="1"/>
           <p:nvPr/>
         </p:nvSpPr>
         <p:spPr>
           <a:xfrm>
-            <a:off x="5870301" y="5961888"/>
-            <a:ext cx="5864193" cy="320040"/>
-          </a:xfrm>
-          <a:prstGeom prst="rect">
-            <a:avLst/>
-          </a:prstGeom>
-          <a:noFill/>
-        </p:spPr>
-        <p:txBody>
-          <a:bodyPr wrap="square">
-            <a:spAutoFit/>
-          </a:bodyPr>
-          <a:lstStyle/>
-          <a:p>
-            <a:pPr algn="ctr"/>
-            <a:r>
-              <a:rPr sz="1100" b="0" i="1">
-                <a:solidFill>
-                  <a:srgbClr val="666666"/>
-                </a:solidFill>
-                <a:latin typeface="Calibri"/>
-              </a:rPr>
-              <a:t>Foto: Cup of  Couple · Pexels</a:t>
-            </a:r>
-          </a:p>
-        </p:txBody>
-      </p:sp>
-      <p:sp>
-        <p:nvSpPr>
-          <p:cNvPr id="8" name="TextBox 7"/>
-          <p:cNvSpPr txBox="1"/>
-          <p:nvPr/>
-        </p:nvSpPr>
-        <p:spPr>
-          <a:xfrm>
-            <a:off x="457200" y="1353312"/>
-            <a:ext cx="5093061" cy="5047488"/>
+            <a:off x="457200" y="1170432"/>
+            <a:ext cx="11277295" cy="5230368"/>
           </a:xfrm>
           <a:prstGeom prst="rect">
             <a:avLst/>
@@ -7249,7 +6858,7 @@
       </p:sp>
       <p:sp>
         <p:nvSpPr>
-          <p:cNvPr id="9" name="TextBox 8"/>
+          <p:cNvPr id="6" name="TextBox 5"/>
           <p:cNvSpPr txBox="1"/>
           <p:nvPr/>
         </p:nvSpPr>

--- a/Seminario de Sistemas/Clases/Clase 13 - Diseño de interfaces/Presentacion.pptx
+++ b/Seminario de Sistemas/Clases/Clase 13 - Diseño de interfaces/Presentacion.pptx
@@ -1029,6 +1029,94 @@
           <a:p>
             <a:r>
               <a:t>Eso obliga a decisiones de diseño concretas: letra grande, pocos campos obligatorios, nada de scroll interminable, tolerancia a la interrupcion para que si la llaman y vuelve en tres minutos no haya perdido lo escrito, y mensajes en lenguaje de clinica y no de sistemas, es decir Esta mascota ya tiene ficha en la clinica y no Violacion de restriccion de unicidad.</a:t>
+            </a:r>
+          </a:p>
+        </p:txBody>
+      </p:sp>
+      <p:sp>
+        <p:nvSpPr>
+          <p:cNvPr id="4" name="Slide Number Placeholder 3"/>
+          <p:cNvSpPr>
+            <a:spLocks noGrp="1"/>
+          </p:cNvSpPr>
+          <p:nvPr>
+            <p:ph type="sldNum" idx="5" sz="quarter"/>
+          </p:nvPr>
+        </p:nvSpPr>
+        <p:spPr/>
+      </p:sp>
+    </p:spTree>
+  </p:cSld>
+  <p:clrMapOvr>
+    <a:masterClrMapping/>
+  </p:clrMapOvr>
+</p:notes>
+</file>
+
+<file path=ppt/notesSlides/notesSlide6.xml><?xml version="1.0" encoding="utf-8"?>
+<p:notes xmlns:a="http://schemas.openxmlformats.org/drawingml/2006/main" xmlns:p="http://schemas.openxmlformats.org/presentationml/2006/main" xmlns:r="http://schemas.openxmlformats.org/officeDocument/2006/relationships">
+  <p:cSld>
+    <p:spTree>
+      <p:nvGrpSpPr>
+        <p:cNvPr id="1" name=""/>
+        <p:cNvGrpSpPr/>
+        <p:nvPr/>
+      </p:nvGrpSpPr>
+      <p:grpSpPr>
+        <a:xfrm>
+          <a:off x="0" y="0"/>
+          <a:ext cx="0" cy="0"/>
+          <a:chOff x="0" y="0"/>
+          <a:chExt cx="0" cy="0"/>
+        </a:xfrm>
+      </p:grpSpPr>
+      <p:sp>
+        <p:nvSpPr>
+          <p:cNvPr id="2" name="Slide Image Placeholder 1"/>
+          <p:cNvSpPr>
+            <a:spLocks noGrp="1"/>
+          </p:cNvSpPr>
+          <p:nvPr>
+            <p:ph type="sldImg" idx="2"/>
+          </p:nvPr>
+        </p:nvSpPr>
+        <p:spPr/>
+      </p:sp>
+      <p:sp>
+        <p:nvSpPr>
+          <p:cNvPr id="3" name="Notes Placeholder 2"/>
+          <p:cNvSpPr>
+            <a:spLocks noGrp="1"/>
+          </p:cNvSpPr>
+          <p:nvPr>
+            <p:ph type="body" idx="3" sz="quarter"/>
+          </p:nvPr>
+        </p:nvSpPr>
+        <p:spPr/>
+        <p:txBody>
+          <a:bodyPr/>
+          <a:lstStyle/>
+          <a:p>
+            <a:r>
+              <a:t>TEXTO COMPLETO DE LA LÁMINA (se proyecta resumido):</a:t>
+            </a:r>
+          </a:p>
+          <a:p/>
+          <a:p>
+            <a:r>
+              <a:t>Herramienta: Figma o Penpot · Excalidraw · Google Docs</a:t>
+            </a:r>
+          </a:p>
+          <a:p/>
+          <a:p>
+            <a:r>
+              <a:t>Demo: Se dibuja en vivo el wireframe de Registrar mascota en Penpot, le pone tres anotaciones numeradas y lo conecta con Buscar expediente para que la clase vea en la misma pantalla la diferencia entre wireframe, mockup y prototipo.</a:t>
+            </a:r>
+          </a:p>
+          <a:p/>
+          <a:p>
+            <a:r>
+              <a:t>Mismo dominio: la clinica veterinaria — no otro ejemplo. Aqui se diseña, no se programa.</a:t>
             </a:r>
           </a:p>
         </p:txBody>
@@ -5938,14 +6026,83 @@
       </p:sp>
       <p:sp>
         <p:nvSpPr>
-          <p:cNvPr id="5" name="TextBox 4"/>
+          <p:cNvPr id="5" name="Rounded Rectangle 4"/>
+          <p:cNvSpPr/>
+          <p:nvPr/>
+        </p:nvSpPr>
+        <p:spPr>
+          <a:xfrm>
+            <a:off x="5797149" y="1343926"/>
+            <a:ext cx="6010497" cy="4837658"/>
+          </a:xfrm>
+          <a:prstGeom prst="roundRect">
+            <a:avLst>
+              <a:gd name="adj" fmla="val 4000"/>
+            </a:avLst>
+          </a:prstGeom>
+          <a:solidFill>
+            <a:srgbClr val="E8EEF4"/>
+          </a:solidFill>
+          <a:ln>
+            <a:noFill/>
+          </a:ln>
+        </p:spPr>
+        <p:style>
+          <a:lnRef idx="1">
+            <a:schemeClr val="accent1"/>
+          </a:lnRef>
+          <a:fillRef idx="3">
+            <a:schemeClr val="accent1"/>
+          </a:fillRef>
+          <a:effectRef idx="2">
+            <a:schemeClr val="accent1"/>
+          </a:effectRef>
+          <a:fontRef idx="minor">
+            <a:schemeClr val="lt1"/>
+          </a:fontRef>
+        </p:style>
+        <p:txBody>
+          <a:bodyPr rtlCol="0" anchor="ctr"/>
+          <a:lstStyle/>
+          <a:p>
+            <a:pPr algn="ctr"/>
+          </a:p>
+        </p:txBody>
+      </p:sp>
+      <p:pic>
+        <p:nvPicPr>
+          <p:cNvPr id="6" name="Picture 5" descr="ilus-evaluar-interfaz-paso1.png"/>
+          <p:cNvPicPr>
+            <a:picLocks noChangeAspect="1"/>
+          </p:cNvPicPr>
+          <p:nvPr/>
+        </p:nvPicPr>
+        <p:blipFill>
+          <a:blip r:embed="rId2"/>
+          <a:stretch>
+            <a:fillRect/>
+          </a:stretch>
+        </p:blipFill>
+        <p:spPr>
+          <a:xfrm>
+            <a:off x="5870301" y="1417078"/>
+            <a:ext cx="5864193" cy="4691354"/>
+          </a:xfrm>
+          <a:prstGeom prst="rect">
+            <a:avLst/>
+          </a:prstGeom>
+        </p:spPr>
+      </p:pic>
+      <p:sp>
+        <p:nvSpPr>
+          <p:cNvPr id="7" name="TextBox 6"/>
           <p:cNvSpPr txBox="1"/>
           <p:nvPr/>
         </p:nvSpPr>
         <p:spPr>
           <a:xfrm>
-            <a:off x="457200" y="1170432"/>
-            <a:ext cx="11277295" cy="5230368"/>
+            <a:off x="457200" y="1353312"/>
+            <a:ext cx="5093061" cy="5047488"/>
           </a:xfrm>
           <a:prstGeom prst="rect">
             <a:avLst/>
@@ -6025,7 +6182,7 @@
       </p:sp>
       <p:sp>
         <p:nvSpPr>
-          <p:cNvPr id="6" name="TextBox 5"/>
+          <p:cNvPr id="8" name="TextBox 7"/>
           <p:cNvSpPr txBox="1"/>
           <p:nvPr/>
         </p:nvSpPr>
@@ -6206,14 +6363,83 @@
       </p:sp>
       <p:sp>
         <p:nvSpPr>
-          <p:cNvPr id="5" name="TextBox 4"/>
+          <p:cNvPr id="5" name="Rounded Rectangle 4"/>
+          <p:cNvSpPr/>
+          <p:nvPr/>
+        </p:nvSpPr>
+        <p:spPr>
+          <a:xfrm>
+            <a:off x="5797149" y="1343926"/>
+            <a:ext cx="6010497" cy="4837658"/>
+          </a:xfrm>
+          <a:prstGeom prst="roundRect">
+            <a:avLst>
+              <a:gd name="adj" fmla="val 4000"/>
+            </a:avLst>
+          </a:prstGeom>
+          <a:solidFill>
+            <a:srgbClr val="E8EEF4"/>
+          </a:solidFill>
+          <a:ln>
+            <a:noFill/>
+          </a:ln>
+        </p:spPr>
+        <p:style>
+          <a:lnRef idx="1">
+            <a:schemeClr val="accent1"/>
+          </a:lnRef>
+          <a:fillRef idx="3">
+            <a:schemeClr val="accent1"/>
+          </a:fillRef>
+          <a:effectRef idx="2">
+            <a:schemeClr val="accent1"/>
+          </a:effectRef>
+          <a:fontRef idx="minor">
+            <a:schemeClr val="lt1"/>
+          </a:fontRef>
+        </p:style>
+        <p:txBody>
+          <a:bodyPr rtlCol="0" anchor="ctr"/>
+          <a:lstStyle/>
+          <a:p>
+            <a:pPr algn="ctr"/>
+          </a:p>
+        </p:txBody>
+      </p:sp>
+      <p:pic>
+        <p:nvPicPr>
+          <p:cNvPr id="6" name="Picture 5" descr="ilus-demo-paso1.png"/>
+          <p:cNvPicPr>
+            <a:picLocks noChangeAspect="1"/>
+          </p:cNvPicPr>
+          <p:nvPr/>
+        </p:nvPicPr>
+        <p:blipFill>
+          <a:blip r:embed="rId2"/>
+          <a:stretch>
+            <a:fillRect/>
+          </a:stretch>
+        </p:blipFill>
+        <p:spPr>
+          <a:xfrm>
+            <a:off x="5870301" y="1417078"/>
+            <a:ext cx="5864193" cy="4691354"/>
+          </a:xfrm>
+          <a:prstGeom prst="rect">
+            <a:avLst/>
+          </a:prstGeom>
+        </p:spPr>
+      </p:pic>
+      <p:sp>
+        <p:nvSpPr>
+          <p:cNvPr id="7" name="TextBox 6"/>
           <p:cNvSpPr txBox="1"/>
           <p:nvPr/>
         </p:nvSpPr>
         <p:spPr>
           <a:xfrm>
-            <a:off x="457200" y="1170432"/>
-            <a:ext cx="11277295" cy="5230368"/>
+            <a:off x="457200" y="1353312"/>
+            <a:ext cx="5093061" cy="5047488"/>
           </a:xfrm>
           <a:prstGeom prst="rect">
             <a:avLst/>
@@ -6290,7 +6516,7 @@
                 </a:solidFill>
                 <a:latin typeface="Calibri"/>
               </a:rPr>
-              <a:t> Se dibuja en vivo el wireframe de Registrar mascota en Penpot, le pone tres anotaciones numeradas y lo conecta con Buscar expediente para que la clase vea en la misma pantalla la diferencia entre wireframe, mockup y prototipo.</a:t>
+              <a:t> Se dibuja en vivo el wireframe de Registrar mascota en Penpot, le pone tres anotaciones numeradas y lo conecta con Buscar expediente para…</a:t>
             </a:r>
           </a:p>
           <a:p>
@@ -6313,7 +6539,7 @@
       </p:sp>
       <p:sp>
         <p:nvSpPr>
-          <p:cNvPr id="6" name="TextBox 5"/>
+          <p:cNvPr id="8" name="TextBox 7"/>
           <p:cNvSpPr txBox="1"/>
           <p:nvPr/>
         </p:nvSpPr>

--- a/Seminario de Sistemas/Clases/Clase 13 - Diseño de interfaces/Presentacion.pptx
+++ b/Seminario de Sistemas/Clases/Clase 13 - Diseño de interfaces/Presentacion.pptx
@@ -4654,7 +4654,7 @@
         <p:spPr>
           <a:xfrm>
             <a:off x="457200" y="1261872"/>
-            <a:ext cx="11277295" cy="4530784"/>
+            <a:ext cx="11277295" cy="3755638"/>
           </a:xfrm>
           <a:prstGeom prst="roundRect">
             <a:avLst>
@@ -4903,8 +4903,8 @@
         </p:nvSpPr>
         <p:spPr>
           <a:xfrm>
-            <a:off x="1188720" y="1719072"/>
-            <a:ext cx="10271455" cy="3936424"/>
+            <a:off x="685800" y="1719072"/>
+            <a:ext cx="502920" cy="3161278"/>
           </a:xfrm>
           <a:prstGeom prst="rect">
             <a:avLst/>
@@ -4917,13 +4917,196 @@
           </a:bodyPr>
           <a:lstStyle/>
           <a:p>
+            <a:pPr algn="r">
+              <a:spcAft>
+                <a:spcPts val="364"/>
+              </a:spcAft>
+            </a:pPr>
+            <a:r>
+              <a:rPr sz="1700" i="0" b="0">
+                <a:solidFill>
+                  <a:srgbClr val="858585"/>
+                </a:solidFill>
+                <a:latin typeface="Consolas"/>
+              </a:rPr>
+              <a:t>1</a:t>
+            </a:r>
+          </a:p>
+          <a:p>
+            <a:pPr algn="r">
+              <a:spcAft>
+                <a:spcPts val="364"/>
+              </a:spcAft>
+            </a:pPr>
+            <a:r>
+              <a:rPr sz="1700" i="0" b="0">
+                <a:solidFill>
+                  <a:srgbClr val="858585"/>
+                </a:solidFill>
+                <a:latin typeface="Consolas"/>
+              </a:rPr>
+              <a:t>2</a:t>
+            </a:r>
+          </a:p>
+          <a:p>
+            <a:pPr algn="r">
+              <a:spcAft>
+                <a:spcPts val="364"/>
+              </a:spcAft>
+            </a:pPr>
+            <a:r>
+              <a:rPr sz="1700" i="0" b="0">
+                <a:solidFill>
+                  <a:srgbClr val="858585"/>
+                </a:solidFill>
+                <a:latin typeface="Consolas"/>
+              </a:rPr>
+              <a:t>3</a:t>
+            </a:r>
+          </a:p>
+          <a:p>
+            <a:pPr algn="r">
+              <a:spcAft>
+                <a:spcPts val="364"/>
+              </a:spcAft>
+            </a:pPr>
+            <a:r>
+              <a:rPr sz="1700" i="0" b="0">
+                <a:solidFill>
+                  <a:srgbClr val="858585"/>
+                </a:solidFill>
+                <a:latin typeface="Consolas"/>
+              </a:rPr>
+              <a:t>4</a:t>
+            </a:r>
+          </a:p>
+          <a:p>
+            <a:pPr algn="r">
+              <a:spcAft>
+                <a:spcPts val="364"/>
+              </a:spcAft>
+            </a:pPr>
+            <a:r>
+              <a:rPr sz="1700" i="0" b="0">
+                <a:solidFill>
+                  <a:srgbClr val="858585"/>
+                </a:solidFill>
+                <a:latin typeface="Consolas"/>
+              </a:rPr>
+              <a:t>5</a:t>
+            </a:r>
+          </a:p>
+          <a:p>
+            <a:pPr algn="r">
+              <a:spcAft>
+                <a:spcPts val="364"/>
+              </a:spcAft>
+            </a:pPr>
+            <a:r>
+              <a:rPr sz="1700" i="0" b="0">
+                <a:solidFill>
+                  <a:srgbClr val="858585"/>
+                </a:solidFill>
+                <a:latin typeface="Consolas"/>
+              </a:rPr>
+              <a:t>6</a:t>
+            </a:r>
+          </a:p>
+          <a:p>
+            <a:pPr algn="r">
+              <a:spcAft>
+                <a:spcPts val="364"/>
+              </a:spcAft>
+            </a:pPr>
+            <a:r>
+              <a:rPr sz="1700" i="0" b="0">
+                <a:solidFill>
+                  <a:srgbClr val="858585"/>
+                </a:solidFill>
+                <a:latin typeface="Consolas"/>
+              </a:rPr>
+              <a:t>7</a:t>
+            </a:r>
+          </a:p>
+          <a:p>
+            <a:pPr algn="r">
+              <a:spcAft>
+                <a:spcPts val="364"/>
+              </a:spcAft>
+            </a:pPr>
+            <a:r>
+              <a:rPr sz="1700" i="0" b="0">
+                <a:solidFill>
+                  <a:srgbClr val="858585"/>
+                </a:solidFill>
+                <a:latin typeface="Consolas"/>
+              </a:rPr>
+              <a:t>8</a:t>
+            </a:r>
+          </a:p>
+          <a:p>
+            <a:pPr algn="r">
+              <a:spcAft>
+                <a:spcPts val="364"/>
+              </a:spcAft>
+            </a:pPr>
+            <a:r>
+              <a:rPr sz="1700" i="0" b="0">
+                <a:solidFill>
+                  <a:srgbClr val="858585"/>
+                </a:solidFill>
+                <a:latin typeface="Consolas"/>
+              </a:rPr>
+              <a:t>9</a:t>
+            </a:r>
+          </a:p>
+          <a:p>
+            <a:pPr algn="r">
+              <a:spcAft>
+                <a:spcPts val="364"/>
+              </a:spcAft>
+            </a:pPr>
+            <a:r>
+              <a:rPr sz="1700" i="0" b="0">
+                <a:solidFill>
+                  <a:srgbClr val="858585"/>
+                </a:solidFill>
+                <a:latin typeface="Consolas"/>
+              </a:rPr>
+              <a:t>10</a:t>
+            </a:r>
+          </a:p>
+        </p:txBody>
+      </p:sp>
+      <p:sp>
+        <p:nvSpPr>
+          <p:cNvPr id="12" name="TextBox 11"/>
+          <p:cNvSpPr txBox="1"/>
+          <p:nvPr/>
+        </p:nvSpPr>
+        <p:spPr>
+          <a:xfrm>
+            <a:off x="1188720" y="1719072"/>
+            <a:ext cx="10271455" cy="3161278"/>
+          </a:xfrm>
+          <a:prstGeom prst="rect">
+            <a:avLst/>
+          </a:prstGeom>
+          <a:noFill/>
+        </p:spPr>
+        <p:txBody>
+          <a:bodyPr wrap="square">
+            <a:spAutoFit/>
+          </a:bodyPr>
+          <a:lstStyle/>
+          <a:p>
             <a:pPr>
               <a:spcAft>
-                <a:spcPts val="428"/>
+                <a:spcPts val="364"/>
               </a:spcAft>
             </a:pPr>
             <a:r>
-              <a:rPr sz="2000" i="0" b="0">
+              <a:rPr sz="1700" i="0" b="0">
                 <a:solidFill>
                   <a:srgbClr val="D4D4D4"/>
                 </a:solidFill>
@@ -4932,7 +5115,7 @@
               <a:t>| </a:t>
             </a:r>
             <a:r>
-              <a:rPr sz="2000" i="0" b="0">
+              <a:rPr sz="1700" i="0" b="0">
                 <a:solidFill>
                   <a:srgbClr val="D4D4D4"/>
                 </a:solidFill>
@@ -4941,7 +5124,7 @@
               <a:t>Campo</a:t>
             </a:r>
             <a:r>
-              <a:rPr sz="2000" i="0" b="0">
+              <a:rPr sz="1700" i="0" b="0">
                 <a:solidFill>
                   <a:srgbClr val="D4D4D4"/>
                 </a:solidFill>
@@ -4950,7 +5133,7 @@
               <a:t> </a:t>
             </a:r>
             <a:r>
-              <a:rPr sz="2000" i="0" b="0">
+              <a:rPr sz="1700" i="0" b="0">
                 <a:solidFill>
                   <a:srgbClr val="D4D4D4"/>
                 </a:solidFill>
@@ -4959,7 +5142,7 @@
               <a:t>de</a:t>
             </a:r>
             <a:r>
-              <a:rPr sz="2000" i="0" b="0">
+              <a:rPr sz="1700" i="0" b="0">
                 <a:solidFill>
                   <a:srgbClr val="D4D4D4"/>
                 </a:solidFill>
@@ -4968,7 +5151,7 @@
               <a:t> </a:t>
             </a:r>
             <a:r>
-              <a:rPr sz="2000" i="0" b="0">
+              <a:rPr sz="1700" i="0" b="0">
                 <a:solidFill>
                   <a:srgbClr val="D4D4D4"/>
                 </a:solidFill>
@@ -4977,7 +5160,7 @@
               <a:t>la</a:t>
             </a:r>
             <a:r>
-              <a:rPr sz="2000" i="0" b="0">
+              <a:rPr sz="1700" i="0" b="0">
                 <a:solidFill>
                   <a:srgbClr val="D4D4D4"/>
                 </a:solidFill>
@@ -4986,7 +5169,7 @@
               <a:t> </a:t>
             </a:r>
             <a:r>
-              <a:rPr sz="2000" i="0" b="0">
+              <a:rPr sz="1700" i="0" b="0">
                 <a:solidFill>
                   <a:srgbClr val="D4D4D4"/>
                 </a:solidFill>
@@ -4995,7 +5178,7 @@
               <a:t>pantalla</a:t>
             </a:r>
             <a:r>
-              <a:rPr sz="2000" i="0" b="0">
+              <a:rPr sz="1700" i="0" b="0">
                 <a:solidFill>
                   <a:srgbClr val="D4D4D4"/>
                 </a:solidFill>
@@ -5004,7 +5187,7 @@
               <a:t> | </a:t>
             </a:r>
             <a:r>
-              <a:rPr sz="2000" i="0" b="0">
+              <a:rPr sz="1700" i="0" b="0">
                 <a:solidFill>
                   <a:srgbClr val="D4D4D4"/>
                 </a:solidFill>
@@ -5013,7 +5196,7 @@
               <a:t>RF</a:t>
             </a:r>
             <a:r>
-              <a:rPr sz="2000" i="0" b="0">
+              <a:rPr sz="1700" i="0" b="0">
                 <a:solidFill>
                   <a:srgbClr val="D4D4D4"/>
                 </a:solidFill>
@@ -5022,7 +5205,7 @@
               <a:t> </a:t>
             </a:r>
             <a:r>
-              <a:rPr sz="2000" i="0" b="0">
+              <a:rPr sz="1700" i="0" b="0">
                 <a:solidFill>
                   <a:srgbClr val="D4D4D4"/>
                 </a:solidFill>
@@ -5031,7 +5214,7 @@
               <a:t>que</a:t>
             </a:r>
             <a:r>
-              <a:rPr sz="2000" i="0" b="0">
+              <a:rPr sz="1700" i="0" b="0">
                 <a:solidFill>
                   <a:srgbClr val="D4D4D4"/>
                 </a:solidFill>
@@ -5040,7 +5223,7 @@
               <a:t> </a:t>
             </a:r>
             <a:r>
-              <a:rPr sz="2000" i="0" b="0">
+              <a:rPr sz="1700" i="0" b="0">
                 <a:solidFill>
                   <a:srgbClr val="D4D4D4"/>
                 </a:solidFill>
@@ -5049,7 +5232,7 @@
               <a:t>lo</a:t>
             </a:r>
             <a:r>
-              <a:rPr sz="2000" i="0" b="0">
+              <a:rPr sz="1700" i="0" b="0">
                 <a:solidFill>
                   <a:srgbClr val="D4D4D4"/>
                 </a:solidFill>
@@ -5058,7 +5241,7 @@
               <a:t> </a:t>
             </a:r>
             <a:r>
-              <a:rPr sz="2000" i="0" b="0">
+              <a:rPr sz="1700" i="0" b="0">
                 <a:solidFill>
                   <a:srgbClr val="D4D4D4"/>
                 </a:solidFill>
@@ -5067,7 +5250,7 @@
               <a:t>exige</a:t>
             </a:r>
             <a:r>
-              <a:rPr sz="2000" i="0" b="0">
+              <a:rPr sz="1700" i="0" b="0">
                 <a:solidFill>
                   <a:srgbClr val="D4D4D4"/>
                 </a:solidFill>
@@ -5076,7 +5259,7 @@
               <a:t> | </a:t>
             </a:r>
             <a:r>
-              <a:rPr sz="2000" i="0" b="0">
+              <a:rPr sz="1700" i="0" b="0">
                 <a:solidFill>
                   <a:srgbClr val="D4D4D4"/>
                 </a:solidFill>
@@ -5085,7 +5268,7 @@
               <a:t>Atributo</a:t>
             </a:r>
             <a:r>
-              <a:rPr sz="2000" i="0" b="0">
+              <a:rPr sz="1700" i="0" b="0">
                 <a:solidFill>
                   <a:srgbClr val="D4D4D4"/>
                 </a:solidFill>
@@ -5094,7 +5277,7 @@
               <a:t> </a:t>
             </a:r>
             <a:r>
-              <a:rPr sz="2000" i="0" b="0">
+              <a:rPr sz="1700" i="0" b="0">
                 <a:solidFill>
                   <a:srgbClr val="D4D4D4"/>
                 </a:solidFill>
@@ -5103,7 +5286,7 @@
               <a:t>de</a:t>
             </a:r>
             <a:r>
-              <a:rPr sz="2000" i="0" b="0">
+              <a:rPr sz="1700" i="0" b="0">
                 <a:solidFill>
                   <a:srgbClr val="D4D4D4"/>
                 </a:solidFill>
@@ -5112,7 +5295,7 @@
               <a:t> </a:t>
             </a:r>
             <a:r>
-              <a:rPr sz="2000" i="0" b="0">
+              <a:rPr sz="1700" i="0" b="0">
                 <a:solidFill>
                   <a:srgbClr val="D4D4D4"/>
                 </a:solidFill>
@@ -5121,7 +5304,7 @@
               <a:t>la</a:t>
             </a:r>
             <a:r>
-              <a:rPr sz="2000" i="0" b="0">
+              <a:rPr sz="1700" i="0" b="0">
                 <a:solidFill>
                   <a:srgbClr val="D4D4D4"/>
                 </a:solidFill>
@@ -5130,7 +5313,7 @@
               <a:t> </a:t>
             </a:r>
             <a:r>
-              <a:rPr sz="2000" i="0" b="0">
+              <a:rPr sz="1700" i="0" b="0">
                 <a:solidFill>
                   <a:srgbClr val="D4D4D4"/>
                 </a:solidFill>
@@ -5139,7 +5322,7 @@
               <a:t>clase</a:t>
             </a:r>
             <a:r>
-              <a:rPr sz="2000" i="0" b="0">
+              <a:rPr sz="1700" i="0" b="0">
                 <a:solidFill>
                   <a:srgbClr val="D4D4D4"/>
                 </a:solidFill>
@@ -5148,7 +5331,7 @@
               <a:t>  | </a:t>
             </a:r>
             <a:r>
-              <a:rPr sz="2000" i="0" b="0">
+              <a:rPr sz="1700" i="0" b="0">
                 <a:solidFill>
                   <a:srgbClr val="D4D4D4"/>
                 </a:solidFill>
@@ -5157,7 +5340,7 @@
               <a:t>Validacion</a:t>
             </a:r>
             <a:r>
-              <a:rPr sz="2000" i="0" b="0">
+              <a:rPr sz="1700" i="0" b="0">
                 <a:solidFill>
                   <a:srgbClr val="D4D4D4"/>
                 </a:solidFill>
@@ -5169,11 +5352,11 @@
           <a:p>
             <a:pPr>
               <a:spcAft>
-                <a:spcPts val="428"/>
+                <a:spcPts val="364"/>
               </a:spcAft>
             </a:pPr>
             <a:r>
-              <a:rPr sz="2000" i="0" b="0">
+              <a:rPr sz="1700" i="0" b="0">
                 <a:solidFill>
                   <a:srgbClr val="D4D4D4"/>
                 </a:solidFill>
@@ -5182,7 +5365,7 @@
               <a:t>|--------------------</a:t>
             </a:r>
             <a:r>
-              <a:rPr sz="2000" i="0" b="0">
+              <a:rPr sz="1700" i="0" b="0">
                 <a:solidFill>
                   <a:srgbClr val="D4D4D4"/>
                 </a:solidFill>
@@ -5194,11 +5377,11 @@
           <a:p>
             <a:pPr>
               <a:spcAft>
-                <a:spcPts val="428"/>
+                <a:spcPts val="364"/>
               </a:spcAft>
             </a:pPr>
             <a:r>
-              <a:rPr sz="2000" i="0" b="0">
+              <a:rPr sz="1700" i="0" b="0">
                 <a:solidFill>
                   <a:srgbClr val="D4D4D4"/>
                 </a:solidFill>
@@ -5207,7 +5390,7 @@
               <a:t>| </a:t>
             </a:r>
             <a:r>
-              <a:rPr sz="2000" i="0" b="0">
+              <a:rPr sz="1700" i="0" b="0">
                 <a:solidFill>
                   <a:srgbClr val="D4D4D4"/>
                 </a:solidFill>
@@ -5216,7 +5399,7 @@
               <a:t>Nombre</a:t>
             </a:r>
             <a:r>
-              <a:rPr sz="2000" i="0" b="0">
+              <a:rPr sz="1700" i="0" b="0">
                 <a:solidFill>
                   <a:srgbClr val="D4D4D4"/>
                 </a:solidFill>
@@ -5225,7 +5408,7 @@
               <a:t>               | </a:t>
             </a:r>
             <a:r>
-              <a:rPr sz="2000" i="0" b="0">
+              <a:rPr sz="1700" i="0" b="0">
                 <a:solidFill>
                   <a:srgbClr val="D4D4D4"/>
                 </a:solidFill>
@@ -5234,7 +5417,7 @@
               <a:t>RF</a:t>
             </a:r>
             <a:r>
-              <a:rPr sz="2000" i="0" b="0">
+              <a:rPr sz="1700" i="0" b="0">
                 <a:solidFill>
                   <a:srgbClr val="D4D4D4"/>
                 </a:solidFill>
@@ -5243,7 +5426,7 @@
               <a:t>-</a:t>
             </a:r>
             <a:r>
-              <a:rPr sz="2000" i="0" b="0">
+              <a:rPr sz="1700" i="0" b="0">
                 <a:solidFill>
                   <a:srgbClr val="B5CEA8"/>
                 </a:solidFill>
@@ -5252,7 +5435,7 @@
               <a:t>01</a:t>
             </a:r>
             <a:r>
-              <a:rPr sz="2000" i="0" b="0">
+              <a:rPr sz="1700" i="0" b="0">
                 <a:solidFill>
                   <a:srgbClr val="D4D4D4"/>
                 </a:solidFill>
@@ -5261,7 +5444,7 @@
               <a:t>           | </a:t>
             </a:r>
             <a:r>
-              <a:rPr sz="2000" i="0" b="0">
+              <a:rPr sz="1700" i="0" b="0">
                 <a:solidFill>
                   <a:srgbClr val="D4D4D4"/>
                 </a:solidFill>
@@ -5270,7 +5453,7 @@
               <a:t>Mascota</a:t>
             </a:r>
             <a:r>
-              <a:rPr sz="2000" i="0" b="0">
+              <a:rPr sz="1700" i="0" b="0">
                 <a:solidFill>
                   <a:srgbClr val="D4D4D4"/>
                 </a:solidFill>
@@ -5279,7 +5462,7 @@
               <a:t>.</a:t>
             </a:r>
             <a:r>
-              <a:rPr sz="2000" i="0" b="0">
+              <a:rPr sz="1700" i="0" b="0">
                 <a:solidFill>
                   <a:srgbClr val="D4D4D4"/>
                 </a:solidFill>
@@ -5288,7 +5471,7 @@
               <a:t>nombre</a:t>
             </a:r>
             <a:r>
-              <a:rPr sz="2000" i="0" b="0">
+              <a:rPr sz="1700" i="0" b="0">
                 <a:solidFill>
                   <a:srgbClr val="D4D4D4"/>
                 </a:solidFill>
@@ -5297,7 +5480,7 @@
               <a:t>        | </a:t>
             </a:r>
             <a:r>
-              <a:rPr sz="2000" i="0" b="0">
+              <a:rPr sz="1700" i="0" b="0">
                 <a:solidFill>
                   <a:srgbClr val="D4D4D4"/>
                 </a:solidFill>
@@ -5306,7 +5489,7 @@
               <a:t>obligatorio</a:t>
             </a:r>
             <a:r>
-              <a:rPr sz="2000" i="0" b="0">
+              <a:rPr sz="1700" i="0" b="0">
                 <a:solidFill>
                   <a:srgbClr val="D4D4D4"/>
                 </a:solidFill>
@@ -5318,11 +5501,11 @@
           <a:p>
             <a:pPr>
               <a:spcAft>
-                <a:spcPts val="428"/>
+                <a:spcPts val="364"/>
               </a:spcAft>
             </a:pPr>
             <a:r>
-              <a:rPr sz="2000" i="0" b="0">
+              <a:rPr sz="1700" i="0" b="0">
                 <a:solidFill>
                   <a:srgbClr val="D4D4D4"/>
                 </a:solidFill>
@@ -5331,7 +5514,7 @@
               <a:t>| </a:t>
             </a:r>
             <a:r>
-              <a:rPr sz="2000" i="0" b="0">
+              <a:rPr sz="1700" i="0" b="0">
                 <a:solidFill>
                   <a:srgbClr val="D4D4D4"/>
                 </a:solidFill>
@@ -5340,7 +5523,7 @@
               <a:t>Especie</a:t>
             </a:r>
             <a:r>
-              <a:rPr sz="2000" i="0" b="0">
+              <a:rPr sz="1700" i="0" b="0">
                 <a:solidFill>
                   <a:srgbClr val="D4D4D4"/>
                 </a:solidFill>
@@ -5349,7 +5532,7 @@
               <a:t>              | </a:t>
             </a:r>
             <a:r>
-              <a:rPr sz="2000" i="0" b="0">
+              <a:rPr sz="1700" i="0" b="0">
                 <a:solidFill>
                   <a:srgbClr val="D4D4D4"/>
                 </a:solidFill>
@@ -5358,7 +5541,7 @@
               <a:t>RF</a:t>
             </a:r>
             <a:r>
-              <a:rPr sz="2000" i="0" b="0">
+              <a:rPr sz="1700" i="0" b="0">
                 <a:solidFill>
                   <a:srgbClr val="D4D4D4"/>
                 </a:solidFill>
@@ -5367,7 +5550,7 @@
               <a:t>-</a:t>
             </a:r>
             <a:r>
-              <a:rPr sz="2000" i="0" b="0">
+              <a:rPr sz="1700" i="0" b="0">
                 <a:solidFill>
                   <a:srgbClr val="B5CEA8"/>
                 </a:solidFill>
@@ -5376,7 +5559,7 @@
               <a:t>01</a:t>
             </a:r>
             <a:r>
-              <a:rPr sz="2000" i="0" b="0">
+              <a:rPr sz="1700" i="0" b="0">
                 <a:solidFill>
                   <a:srgbClr val="D4D4D4"/>
                 </a:solidFill>
@@ -5385,7 +5568,7 @@
               <a:t>           | </a:t>
             </a:r>
             <a:r>
-              <a:rPr sz="2000" i="0" b="0">
+              <a:rPr sz="1700" i="0" b="0">
                 <a:solidFill>
                   <a:srgbClr val="D4D4D4"/>
                 </a:solidFill>
@@ -5394,7 +5577,7 @@
               <a:t>Mascota</a:t>
             </a:r>
             <a:r>
-              <a:rPr sz="2000" i="0" b="0">
+              <a:rPr sz="1700" i="0" b="0">
                 <a:solidFill>
                   <a:srgbClr val="D4D4D4"/>
                 </a:solidFill>
@@ -5403,7 +5586,7 @@
               <a:t>.</a:t>
             </a:r>
             <a:r>
-              <a:rPr sz="2000" i="0" b="0">
+              <a:rPr sz="1700" i="0" b="0">
                 <a:solidFill>
                   <a:srgbClr val="D4D4D4"/>
                 </a:solidFill>
@@ -5412,7 +5595,7 @@
               <a:t>especie</a:t>
             </a:r>
             <a:r>
-              <a:rPr sz="2000" i="0" b="0">
+              <a:rPr sz="1700" i="0" b="0">
                 <a:solidFill>
                   <a:srgbClr val="D4D4D4"/>
                 </a:solidFill>
@@ -5421,7 +5604,7 @@
               <a:t>       | </a:t>
             </a:r>
             <a:r>
-              <a:rPr sz="2000" i="0" b="0">
+              <a:rPr sz="1700" i="0" b="0">
                 <a:solidFill>
                   <a:srgbClr val="D4D4D4"/>
                 </a:solidFill>
@@ -5430,7 +5613,7 @@
               <a:t>lista</a:t>
             </a:r>
             <a:r>
-              <a:rPr sz="2000" i="0" b="0">
+              <a:rPr sz="1700" i="0" b="0">
                 <a:solidFill>
                   <a:srgbClr val="D4D4D4"/>
                 </a:solidFill>
@@ -5439,7 +5622,7 @@
               <a:t> </a:t>
             </a:r>
             <a:r>
-              <a:rPr sz="2000" i="0" b="0">
+              <a:rPr sz="1700" i="0" b="0">
                 <a:solidFill>
                   <a:srgbClr val="D4D4D4"/>
                 </a:solidFill>
@@ -5448,7 +5631,7 @@
               <a:t>cerrada</a:t>
             </a:r>
             <a:r>
-              <a:rPr sz="2000" i="0" b="0">
+              <a:rPr sz="1700" i="0" b="0">
                 <a:solidFill>
                   <a:srgbClr val="D4D4D4"/>
                 </a:solidFill>
@@ -5460,11 +5643,11 @@
           <a:p>
             <a:pPr>
               <a:spcAft>
-                <a:spcPts val="428"/>
+                <a:spcPts val="364"/>
               </a:spcAft>
             </a:pPr>
             <a:r>
-              <a:rPr sz="2000" i="0" b="0">
+              <a:rPr sz="1700" i="0" b="0">
                 <a:solidFill>
                   <a:srgbClr val="D4D4D4"/>
                 </a:solidFill>
@@ -5473,7 +5656,7 @@
               <a:t>| </a:t>
             </a:r>
             <a:r>
-              <a:rPr sz="2000" i="0" b="0">
+              <a:rPr sz="1700" i="0" b="0">
                 <a:solidFill>
                   <a:srgbClr val="D4D4D4"/>
                 </a:solidFill>
@@ -5482,7 +5665,7 @@
               <a:t>Fecha</a:t>
             </a:r>
             <a:r>
-              <a:rPr sz="2000" i="0" b="0">
+              <a:rPr sz="1700" i="0" b="0">
                 <a:solidFill>
                   <a:srgbClr val="D4D4D4"/>
                 </a:solidFill>
@@ -5491,7 +5674,7 @@
               <a:t> </a:t>
             </a:r>
             <a:r>
-              <a:rPr sz="2000" i="0" b="0">
+              <a:rPr sz="1700" i="0" b="0">
                 <a:solidFill>
                   <a:srgbClr val="D4D4D4"/>
                 </a:solidFill>
@@ -5500,7 +5683,7 @@
               <a:t>de</a:t>
             </a:r>
             <a:r>
-              <a:rPr sz="2000" i="0" b="0">
+              <a:rPr sz="1700" i="0" b="0">
                 <a:solidFill>
                   <a:srgbClr val="D4D4D4"/>
                 </a:solidFill>
@@ -5509,7 +5692,7 @@
               <a:t> </a:t>
             </a:r>
             <a:r>
-              <a:rPr sz="2000" i="0" b="0">
+              <a:rPr sz="1700" i="0" b="0">
                 <a:solidFill>
                   <a:srgbClr val="D4D4D4"/>
                 </a:solidFill>
@@ -5518,7 +5701,7 @@
               <a:t>nacimiento</a:t>
             </a:r>
             <a:r>
-              <a:rPr sz="2000" i="0" b="0">
+              <a:rPr sz="1700" i="0" b="0">
                 <a:solidFill>
                   <a:srgbClr val="D4D4D4"/>
                 </a:solidFill>
@@ -5527,7 +5710,7 @@
               <a:t>  | </a:t>
             </a:r>
             <a:r>
-              <a:rPr sz="2000" i="0" b="0">
+              <a:rPr sz="1700" i="0" b="0">
                 <a:solidFill>
                   <a:srgbClr val="D4D4D4"/>
                 </a:solidFill>
@@ -5536,7 +5719,7 @@
               <a:t>RF</a:t>
             </a:r>
             <a:r>
-              <a:rPr sz="2000" i="0" b="0">
+              <a:rPr sz="1700" i="0" b="0">
                 <a:solidFill>
                   <a:srgbClr val="D4D4D4"/>
                 </a:solidFill>
@@ -5545,7 +5728,7 @@
               <a:t>-</a:t>
             </a:r>
             <a:r>
-              <a:rPr sz="2000" i="0" b="0">
+              <a:rPr sz="1700" i="0" b="0">
                 <a:solidFill>
                   <a:srgbClr val="B5CEA8"/>
                 </a:solidFill>
@@ -5554,7 +5737,7 @@
               <a:t>02</a:t>
             </a:r>
             <a:r>
-              <a:rPr sz="2000" i="0" b="0">
+              <a:rPr sz="1700" i="0" b="0">
                 <a:solidFill>
                   <a:srgbClr val="D4D4D4"/>
                 </a:solidFill>
@@ -5563,7 +5746,7 @@
               <a:t>           | </a:t>
             </a:r>
             <a:r>
-              <a:rPr sz="2000" i="0" b="0">
+              <a:rPr sz="1700" i="0" b="0">
                 <a:solidFill>
                   <a:srgbClr val="D4D4D4"/>
                 </a:solidFill>
@@ -5572,7 +5755,7 @@
               <a:t>Mascota</a:t>
             </a:r>
             <a:r>
-              <a:rPr sz="2000" i="0" b="0">
+              <a:rPr sz="1700" i="0" b="0">
                 <a:solidFill>
                   <a:srgbClr val="D4D4D4"/>
                 </a:solidFill>
@@ -5581,7 +5764,7 @@
               <a:t>.</a:t>
             </a:r>
             <a:r>
-              <a:rPr sz="2000" i="0" b="0">
+              <a:rPr sz="1700" i="0" b="0">
                 <a:solidFill>
                   <a:srgbClr val="D4D4D4"/>
                 </a:solidFill>
@@ -5590,7 +5773,7 @@
               <a:t>fechaNac</a:t>
             </a:r>
             <a:r>
-              <a:rPr sz="2000" i="0" b="0">
+              <a:rPr sz="1700" i="0" b="0">
                 <a:solidFill>
                   <a:srgbClr val="D4D4D4"/>
                 </a:solidFill>
@@ -5599,7 +5782,7 @@
               <a:t>      | </a:t>
             </a:r>
             <a:r>
-              <a:rPr sz="2000" i="0" b="0">
+              <a:rPr sz="1700" i="0" b="0">
                 <a:solidFill>
                   <a:srgbClr val="D4D4D4"/>
                 </a:solidFill>
@@ -5608,7 +5791,7 @@
               <a:t>no</a:t>
             </a:r>
             <a:r>
-              <a:rPr sz="2000" i="0" b="0">
+              <a:rPr sz="1700" i="0" b="0">
                 <a:solidFill>
                   <a:srgbClr val="D4D4D4"/>
                 </a:solidFill>
@@ -5617,7 +5800,7 @@
               <a:t> </a:t>
             </a:r>
             <a:r>
-              <a:rPr sz="2000" i="0" b="0">
+              <a:rPr sz="1700" i="0" b="0">
                 <a:solidFill>
                   <a:srgbClr val="D4D4D4"/>
                 </a:solidFill>
@@ -5626,7 +5809,7 @@
               <a:t>futura</a:t>
             </a:r>
             <a:r>
-              <a:rPr sz="2000" i="0" b="0">
+              <a:rPr sz="1700" i="0" b="0">
                 <a:solidFill>
                   <a:srgbClr val="D4D4D4"/>
                 </a:solidFill>
@@ -5638,11 +5821,11 @@
           <a:p>
             <a:pPr>
               <a:spcAft>
-                <a:spcPts val="428"/>
+                <a:spcPts val="364"/>
               </a:spcAft>
             </a:pPr>
             <a:r>
-              <a:rPr sz="2000" i="0" b="0">
+              <a:rPr sz="1700" i="0" b="0">
                 <a:solidFill>
                   <a:srgbClr val="D4D4D4"/>
                 </a:solidFill>
@@ -5651,7 +5834,7 @@
               <a:t>| </a:t>
             </a:r>
             <a:r>
-              <a:rPr sz="2000" i="0" b="0">
+              <a:rPr sz="1700" i="0" b="0">
                 <a:solidFill>
                   <a:srgbClr val="D4D4D4"/>
                 </a:solidFill>
@@ -5660,7 +5843,7 @@
               <a:t>Dueno</a:t>
             </a:r>
             <a:r>
-              <a:rPr sz="2000" i="0" b="0">
+              <a:rPr sz="1700" i="0" b="0">
                 <a:solidFill>
                   <a:srgbClr val="D4D4D4"/>
                 </a:solidFill>
@@ -5669,7 +5852,7 @@
               <a:t>                | </a:t>
             </a:r>
             <a:r>
-              <a:rPr sz="2000" i="0" b="0">
+              <a:rPr sz="1700" i="0" b="0">
                 <a:solidFill>
                   <a:srgbClr val="D4D4D4"/>
                 </a:solidFill>
@@ -5678,7 +5861,7 @@
               <a:t>RF</a:t>
             </a:r>
             <a:r>
-              <a:rPr sz="2000" i="0" b="0">
+              <a:rPr sz="1700" i="0" b="0">
                 <a:solidFill>
                   <a:srgbClr val="D4D4D4"/>
                 </a:solidFill>
@@ -5687,7 +5870,7 @@
               <a:t>-</a:t>
             </a:r>
             <a:r>
-              <a:rPr sz="2000" i="0" b="0">
+              <a:rPr sz="1700" i="0" b="0">
                 <a:solidFill>
                   <a:srgbClr val="B5CEA8"/>
                 </a:solidFill>
@@ -5696,7 +5879,7 @@
               <a:t>01</a:t>
             </a:r>
             <a:r>
-              <a:rPr sz="2000" i="0" b="0">
+              <a:rPr sz="1700" i="0" b="0">
                 <a:solidFill>
                   <a:srgbClr val="D4D4D4"/>
                 </a:solidFill>
@@ -5705,7 +5888,7 @@
               <a:t>           | </a:t>
             </a:r>
             <a:r>
-              <a:rPr sz="2000" i="0" b="0">
+              <a:rPr sz="1700" i="0" b="0">
                 <a:solidFill>
                   <a:srgbClr val="DCDCAA"/>
                 </a:solidFill>
@@ -5714,7 +5897,7 @@
               <a:t>Mascota.idDueno</a:t>
             </a:r>
             <a:r>
-              <a:rPr sz="2000" i="0" b="0">
+              <a:rPr sz="1700" i="0" b="0">
                 <a:solidFill>
                   <a:srgbClr val="D4D4D4"/>
                 </a:solidFill>
@@ -5723,7 +5906,7 @@
               <a:t> (</a:t>
             </a:r>
             <a:r>
-              <a:rPr sz="2000" i="0" b="0">
+              <a:rPr sz="1700" i="0" b="0">
                 <a:solidFill>
                   <a:srgbClr val="D4D4D4"/>
                 </a:solidFill>
@@ -5732,7 +5915,7 @@
               <a:t>FK</a:t>
             </a:r>
             <a:r>
-              <a:rPr sz="2000" i="0" b="0">
+              <a:rPr sz="1700" i="0" b="0">
                 <a:solidFill>
                   <a:srgbClr val="D4D4D4"/>
                 </a:solidFill>
@@ -5741,7 +5924,7 @@
               <a:t>)  | </a:t>
             </a:r>
             <a:r>
-              <a:rPr sz="2000" i="0" b="0">
+              <a:rPr sz="1700" i="0" b="0">
                 <a:solidFill>
                   <a:srgbClr val="D4D4D4"/>
                 </a:solidFill>
@@ -5750,7 +5933,7 @@
               <a:t>debe</a:t>
             </a:r>
             <a:r>
-              <a:rPr sz="2000" i="0" b="0">
+              <a:rPr sz="1700" i="0" b="0">
                 <a:solidFill>
                   <a:srgbClr val="D4D4D4"/>
                 </a:solidFill>
@@ -5759,7 +5942,7 @@
               <a:t> </a:t>
             </a:r>
             <a:r>
-              <a:rPr sz="2000" i="0" b="0">
+              <a:rPr sz="1700" i="0" b="0">
                 <a:solidFill>
                   <a:srgbClr val="D4D4D4"/>
                 </a:solidFill>
@@ -5768,7 +5951,7 @@
               <a:t>existir</a:t>
             </a:r>
             <a:r>
-              <a:rPr sz="2000" i="0" b="0">
+              <a:rPr sz="1700" i="0" b="0">
                 <a:solidFill>
                   <a:srgbClr val="D4D4D4"/>
                 </a:solidFill>
@@ -5780,11 +5963,11 @@
           <a:p>
             <a:pPr>
               <a:spcAft>
-                <a:spcPts val="428"/>
+                <a:spcPts val="364"/>
               </a:spcAft>
             </a:pPr>
             <a:r>
-              <a:rPr sz="2000" i="0" b="0">
+              <a:rPr sz="1700" i="0" b="0">
                 <a:solidFill>
                   <a:srgbClr val="D4D4D4"/>
                 </a:solidFill>
@@ -5796,11 +5979,11 @@
           <a:p>
             <a:pPr>
               <a:spcAft>
-                <a:spcPts val="428"/>
+                <a:spcPts val="364"/>
               </a:spcAft>
             </a:pPr>
             <a:r>
-              <a:rPr sz="2000" i="0" b="0">
+              <a:rPr sz="1700" i="0" b="0">
                 <a:solidFill>
                   <a:srgbClr val="D4D4D4"/>
                 </a:solidFill>
@@ -5812,11 +5995,11 @@
           <a:p>
             <a:pPr>
               <a:spcAft>
-                <a:spcPts val="428"/>
+                <a:spcPts val="364"/>
               </a:spcAft>
             </a:pPr>
             <a:r>
-              <a:rPr sz="2000" i="0" b="0">
+              <a:rPr sz="1700" i="0" b="0">
                 <a:solidFill>
                   <a:srgbClr val="D4D4D4"/>
                 </a:solidFill>
@@ -5828,11 +6011,11 @@
           <a:p>
             <a:pPr>
               <a:spcAft>
-                <a:spcPts val="428"/>
+                <a:spcPts val="364"/>
               </a:spcAft>
             </a:pPr>
             <a:r>
-              <a:rPr sz="2000" i="0" b="0">
+              <a:rPr sz="1700" i="0" b="0">
                 <a:solidFill>
                   <a:srgbClr val="D4D4D4"/>
                 </a:solidFill>
@@ -5845,7 +6028,7 @@
       </p:sp>
       <p:sp>
         <p:nvSpPr>
-          <p:cNvPr id="12" name="TextBox 11"/>
+          <p:cNvPr id="13" name="TextBox 12"/>
           <p:cNvSpPr txBox="1"/>
           <p:nvPr/>
         </p:nvSpPr>
@@ -9869,7 +10052,7 @@
         <p:spPr>
           <a:xfrm>
             <a:off x="457200" y="1261872"/>
-            <a:ext cx="11277295" cy="5179278"/>
+            <a:ext cx="6991923" cy="3204626"/>
           </a:xfrm>
           <a:prstGeom prst="roundRect">
             <a:avLst>
@@ -9914,7 +10097,7 @@
         <p:spPr>
           <a:xfrm>
             <a:off x="457200" y="1261872"/>
-            <a:ext cx="11277295" cy="365760"/>
+            <a:ext cx="6991923" cy="365760"/>
           </a:xfrm>
           <a:prstGeom prst="rect">
             <a:avLst/>
@@ -10086,7 +10269,7 @@
         <p:spPr>
           <a:xfrm>
             <a:off x="1371600" y="1298448"/>
-            <a:ext cx="10180015" cy="292608"/>
+            <a:ext cx="5894643" cy="292608"/>
           </a:xfrm>
           <a:prstGeom prst="rect">
             <a:avLst/>
@@ -10119,7 +10302,7 @@
         <p:spPr>
           <a:xfrm>
             <a:off x="685800" y="1719072"/>
-            <a:ext cx="502920" cy="4584918"/>
+            <a:ext cx="502920" cy="2610266"/>
           </a:xfrm>
           <a:prstGeom prst="rect">
             <a:avLst/>
@@ -10134,11 +10317,11 @@
           <a:p>
             <a:pPr algn="r">
               <a:spcAft>
-                <a:spcPts val="385"/>
+                <a:spcPts val="257"/>
               </a:spcAft>
             </a:pPr>
             <a:r>
-              <a:rPr sz="1800" i="0" b="0">
+              <a:rPr sz="1200" i="0" b="0">
                 <a:solidFill>
                   <a:srgbClr val="858585"/>
                 </a:solidFill>
@@ -10150,11 +10333,11 @@
           <a:p>
             <a:pPr algn="r">
               <a:spcAft>
-                <a:spcPts val="385"/>
+                <a:spcPts val="257"/>
               </a:spcAft>
             </a:pPr>
             <a:r>
-              <a:rPr sz="1800" i="0" b="0">
+              <a:rPr sz="1200" i="0" b="0">
                 <a:solidFill>
                   <a:srgbClr val="858585"/>
                 </a:solidFill>
@@ -10166,11 +10349,11 @@
           <a:p>
             <a:pPr algn="r">
               <a:spcAft>
-                <a:spcPts val="385"/>
+                <a:spcPts val="257"/>
               </a:spcAft>
             </a:pPr>
             <a:r>
-              <a:rPr sz="1800" i="0" b="0">
+              <a:rPr sz="1200" i="0" b="0">
                 <a:solidFill>
                   <a:srgbClr val="858585"/>
                 </a:solidFill>
@@ -10182,11 +10365,11 @@
           <a:p>
             <a:pPr algn="r">
               <a:spcAft>
-                <a:spcPts val="385"/>
+                <a:spcPts val="257"/>
               </a:spcAft>
             </a:pPr>
             <a:r>
-              <a:rPr sz="1800" i="0" b="0">
+              <a:rPr sz="1200" i="0" b="0">
                 <a:solidFill>
                   <a:srgbClr val="858585"/>
                 </a:solidFill>
@@ -10198,11 +10381,11 @@
           <a:p>
             <a:pPr algn="r">
               <a:spcAft>
-                <a:spcPts val="385"/>
+                <a:spcPts val="257"/>
               </a:spcAft>
             </a:pPr>
             <a:r>
-              <a:rPr sz="1800" i="0" b="0">
+              <a:rPr sz="1200" i="0" b="0">
                 <a:solidFill>
                   <a:srgbClr val="858585"/>
                 </a:solidFill>
@@ -10214,11 +10397,11 @@
           <a:p>
             <a:pPr algn="r">
               <a:spcAft>
-                <a:spcPts val="385"/>
+                <a:spcPts val="257"/>
               </a:spcAft>
             </a:pPr>
             <a:r>
-              <a:rPr sz="1800" i="0" b="0">
+              <a:rPr sz="1200" i="0" b="0">
                 <a:solidFill>
                   <a:srgbClr val="858585"/>
                 </a:solidFill>
@@ -10230,11 +10413,11 @@
           <a:p>
             <a:pPr algn="r">
               <a:spcAft>
-                <a:spcPts val="385"/>
+                <a:spcPts val="257"/>
               </a:spcAft>
             </a:pPr>
             <a:r>
-              <a:rPr sz="1800" i="0" b="0">
+              <a:rPr sz="1200" i="0" b="0">
                 <a:solidFill>
                   <a:srgbClr val="858585"/>
                 </a:solidFill>
@@ -10246,11 +10429,11 @@
           <a:p>
             <a:pPr algn="r">
               <a:spcAft>
-                <a:spcPts val="385"/>
+                <a:spcPts val="257"/>
               </a:spcAft>
             </a:pPr>
             <a:r>
-              <a:rPr sz="1800" i="0" b="0">
+              <a:rPr sz="1200" i="0" b="0">
                 <a:solidFill>
                   <a:srgbClr val="858585"/>
                 </a:solidFill>
@@ -10262,11 +10445,11 @@
           <a:p>
             <a:pPr algn="r">
               <a:spcAft>
-                <a:spcPts val="385"/>
+                <a:spcPts val="257"/>
               </a:spcAft>
             </a:pPr>
             <a:r>
-              <a:rPr sz="1800" i="0" b="0">
+              <a:rPr sz="1200" i="0" b="0">
                 <a:solidFill>
                   <a:srgbClr val="858585"/>
                 </a:solidFill>
@@ -10278,11 +10461,11 @@
           <a:p>
             <a:pPr algn="r">
               <a:spcAft>
-                <a:spcPts val="385"/>
+                <a:spcPts val="257"/>
               </a:spcAft>
             </a:pPr>
             <a:r>
-              <a:rPr sz="1800" i="0" b="0">
+              <a:rPr sz="1200" i="0" b="0">
                 <a:solidFill>
                   <a:srgbClr val="858585"/>
                 </a:solidFill>
@@ -10294,65 +10477,17 @@
           <a:p>
             <a:pPr algn="r">
               <a:spcAft>
-                <a:spcPts val="385"/>
+                <a:spcPts val="257"/>
               </a:spcAft>
             </a:pPr>
             <a:r>
-              <a:rPr sz="1800" i="0" b="0">
+              <a:rPr sz="1200" i="0" b="0">
                 <a:solidFill>
                   <a:srgbClr val="858585"/>
                 </a:solidFill>
                 <a:latin typeface="Consolas"/>
               </a:rPr>
               <a:t>11</a:t>
-            </a:r>
-          </a:p>
-          <a:p>
-            <a:pPr algn="r">
-              <a:spcAft>
-                <a:spcPts val="385"/>
-              </a:spcAft>
-            </a:pPr>
-            <a:r>
-              <a:rPr sz="1800" i="0" b="0">
-                <a:solidFill>
-                  <a:srgbClr val="858585"/>
-                </a:solidFill>
-                <a:latin typeface="Consolas"/>
-              </a:rPr>
-              <a:t>12</a:t>
-            </a:r>
-          </a:p>
-          <a:p>
-            <a:pPr algn="r">
-              <a:spcAft>
-                <a:spcPts val="385"/>
-              </a:spcAft>
-            </a:pPr>
-            <a:r>
-              <a:rPr sz="1800" i="0" b="0">
-                <a:solidFill>
-                  <a:srgbClr val="858585"/>
-                </a:solidFill>
-                <a:latin typeface="Consolas"/>
-              </a:rPr>
-              <a:t>13</a:t>
-            </a:r>
-          </a:p>
-          <a:p>
-            <a:pPr algn="r">
-              <a:spcAft>
-                <a:spcPts val="385"/>
-              </a:spcAft>
-            </a:pPr>
-            <a:r>
-              <a:rPr sz="1800" i="0" b="0">
-                <a:solidFill>
-                  <a:srgbClr val="858585"/>
-                </a:solidFill>
-                <a:latin typeface="Consolas"/>
-              </a:rPr>
-              <a:t>14</a:t>
             </a:r>
           </a:p>
         </p:txBody>
@@ -10366,7 +10501,7 @@
         <p:spPr>
           <a:xfrm>
             <a:off x="1188720" y="1719072"/>
-            <a:ext cx="10271455" cy="4584918"/>
+            <a:ext cx="5986083" cy="2610266"/>
           </a:xfrm>
           <a:prstGeom prst="rect">
             <a:avLst/>
@@ -10381,11 +10516,11 @@
           <a:p>
             <a:pPr>
               <a:spcAft>
-                <a:spcPts val="385"/>
+                <a:spcPts val="257"/>
               </a:spcAft>
             </a:pPr>
             <a:r>
-              <a:rPr sz="1800" i="0" b="0">
+              <a:rPr sz="1200" i="0" b="0">
                 <a:solidFill>
                   <a:srgbClr val="D4D4D4"/>
                 </a:solidFill>
@@ -10394,7 +10529,7 @@
               <a:t>flowchart</a:t>
             </a:r>
             <a:r>
-              <a:rPr sz="1800" i="0" b="0">
+              <a:rPr sz="1200" i="0" b="0">
                 <a:solidFill>
                   <a:srgbClr val="D4D4D4"/>
                 </a:solidFill>
@@ -10403,7 +10538,7 @@
               <a:t> </a:t>
             </a:r>
             <a:r>
-              <a:rPr sz="1800" i="0" b="0">
+              <a:rPr sz="1200" i="0" b="0">
                 <a:solidFill>
                   <a:srgbClr val="D4D4D4"/>
                 </a:solidFill>
@@ -10415,11 +10550,11 @@
           <a:p>
             <a:pPr>
               <a:spcAft>
-                <a:spcPts val="385"/>
+                <a:spcPts val="257"/>
               </a:spcAft>
             </a:pPr>
             <a:r>
-              <a:rPr sz="1800" i="0" b="0">
+              <a:rPr sz="1200" i="0" b="0">
                 <a:solidFill>
                   <a:srgbClr val="D4D4D4"/>
                 </a:solidFill>
@@ -10428,7 +10563,7 @@
               <a:t>  </a:t>
             </a:r>
             <a:r>
-              <a:rPr sz="1800" i="0" b="0">
+              <a:rPr sz="1200" i="0" b="0">
                 <a:solidFill>
                   <a:srgbClr val="D4D4D4"/>
                 </a:solidFill>
@@ -10437,7 +10572,7 @@
               <a:t>login</a:t>
             </a:r>
             <a:r>
-              <a:rPr sz="1800" i="0" b="0">
+              <a:rPr sz="1200" i="0" b="0">
                 <a:solidFill>
                   <a:srgbClr val="D4D4D4"/>
                 </a:solidFill>
@@ -10446,7 +10581,7 @@
               <a:t>[</a:t>
             </a:r>
             <a:r>
-              <a:rPr sz="1800" i="0" b="0">
+              <a:rPr sz="1200" i="0" b="0">
                 <a:solidFill>
                   <a:srgbClr val="D4D4D4"/>
                 </a:solidFill>
@@ -10455,7 +10590,7 @@
               <a:t>Ingreso</a:t>
             </a:r>
             <a:r>
-              <a:rPr sz="1800" i="0" b="0">
+              <a:rPr sz="1200" i="0" b="0">
                 <a:solidFill>
                   <a:srgbClr val="D4D4D4"/>
                 </a:solidFill>
@@ -10464,7 +10599,7 @@
               <a:t>] --&gt; </a:t>
             </a:r>
             <a:r>
-              <a:rPr sz="1800" i="0" b="0">
+              <a:rPr sz="1200" i="0" b="0">
                 <a:solidFill>
                   <a:srgbClr val="D4D4D4"/>
                 </a:solidFill>
@@ -10473,7 +10608,7 @@
               <a:t>menu</a:t>
             </a:r>
             <a:r>
-              <a:rPr sz="1800" i="0" b="0">
+              <a:rPr sz="1200" i="0" b="0">
                 <a:solidFill>
                   <a:srgbClr val="D4D4D4"/>
                 </a:solidFill>
@@ -10482,7 +10617,7 @@
               <a:t>[</a:t>
             </a:r>
             <a:r>
-              <a:rPr sz="1800" i="0" b="0">
+              <a:rPr sz="1200" i="0" b="0">
                 <a:solidFill>
                   <a:srgbClr val="D4D4D4"/>
                 </a:solidFill>
@@ -10491,7 +10626,7 @@
               <a:t>Menu</a:t>
             </a:r>
             <a:r>
-              <a:rPr sz="1800" i="0" b="0">
+              <a:rPr sz="1200" i="0" b="0">
                 <a:solidFill>
                   <a:srgbClr val="D4D4D4"/>
                 </a:solidFill>
@@ -10500,7 +10635,7 @@
               <a:t> </a:t>
             </a:r>
             <a:r>
-              <a:rPr sz="1800" i="0" b="0">
+              <a:rPr sz="1200" i="0" b="0">
                 <a:solidFill>
                   <a:srgbClr val="D4D4D4"/>
                 </a:solidFill>
@@ -10509,7 +10644,7 @@
               <a:t>principal</a:t>
             </a:r>
             <a:r>
-              <a:rPr sz="1800" i="0" b="0">
+              <a:rPr sz="1200" i="0" b="0">
                 <a:solidFill>
                   <a:srgbClr val="D4D4D4"/>
                 </a:solidFill>
@@ -10521,11 +10656,11 @@
           <a:p>
             <a:pPr>
               <a:spcAft>
-                <a:spcPts val="385"/>
+                <a:spcPts val="257"/>
               </a:spcAft>
             </a:pPr>
             <a:r>
-              <a:rPr sz="1800" i="0" b="0">
+              <a:rPr sz="1200" i="0" b="0">
                 <a:solidFill>
                   <a:srgbClr val="D4D4D4"/>
                 </a:solidFill>
@@ -10534,7 +10669,7 @@
               <a:t>  </a:t>
             </a:r>
             <a:r>
-              <a:rPr sz="1800" i="0" b="0">
+              <a:rPr sz="1200" i="0" b="0">
                 <a:solidFill>
                   <a:srgbClr val="D4D4D4"/>
                 </a:solidFill>
@@ -10543,7 +10678,7 @@
               <a:t>menu</a:t>
             </a:r>
             <a:r>
-              <a:rPr sz="1800" i="0" b="0">
+              <a:rPr sz="1200" i="0" b="0">
                 <a:solidFill>
                   <a:srgbClr val="D4D4D4"/>
                 </a:solidFill>
@@ -10552,7 +10687,7 @@
               <a:t> --&gt; </a:t>
             </a:r>
             <a:r>
-              <a:rPr sz="1800" i="0" b="0">
+              <a:rPr sz="1200" i="0" b="0">
                 <a:solidFill>
                   <a:srgbClr val="D4D4D4"/>
                 </a:solidFill>
@@ -10561,7 +10696,7 @@
               <a:t>regm</a:t>
             </a:r>
             <a:r>
-              <a:rPr sz="1800" i="0" b="0">
+              <a:rPr sz="1200" i="0" b="0">
                 <a:solidFill>
                   <a:srgbClr val="D4D4D4"/>
                 </a:solidFill>
@@ -10570,7 +10705,7 @@
               <a:t>[</a:t>
             </a:r>
             <a:r>
-              <a:rPr sz="1800" i="0" b="0">
+              <a:rPr sz="1200" i="0" b="0">
                 <a:solidFill>
                   <a:srgbClr val="D4D4D4"/>
                 </a:solidFill>
@@ -10579,7 +10714,7 @@
               <a:t>Registrar</a:t>
             </a:r>
             <a:r>
-              <a:rPr sz="1800" i="0" b="0">
+              <a:rPr sz="1200" i="0" b="0">
                 <a:solidFill>
                   <a:srgbClr val="D4D4D4"/>
                 </a:solidFill>
@@ -10588,7 +10723,7 @@
               <a:t> </a:t>
             </a:r>
             <a:r>
-              <a:rPr sz="1800" i="0" b="0">
+              <a:rPr sz="1200" i="0" b="0">
                 <a:solidFill>
                   <a:srgbClr val="D4D4D4"/>
                 </a:solidFill>
@@ -10597,7 +10732,7 @@
               <a:t>mascota</a:t>
             </a:r>
             <a:r>
-              <a:rPr sz="1800" i="0" b="0">
+              <a:rPr sz="1200" i="0" b="0">
                 <a:solidFill>
                   <a:srgbClr val="D4D4D4"/>
                 </a:solidFill>
@@ -10609,11 +10744,11 @@
           <a:p>
             <a:pPr>
               <a:spcAft>
-                <a:spcPts val="385"/>
+                <a:spcPts val="257"/>
               </a:spcAft>
             </a:pPr>
             <a:r>
-              <a:rPr sz="1800" i="0" b="0">
+              <a:rPr sz="1200" i="0" b="0">
                 <a:solidFill>
                   <a:srgbClr val="D4D4D4"/>
                 </a:solidFill>
@@ -10622,7 +10757,7 @@
               <a:t>  </a:t>
             </a:r>
             <a:r>
-              <a:rPr sz="1800" i="0" b="0">
+              <a:rPr sz="1200" i="0" b="0">
                 <a:solidFill>
                   <a:srgbClr val="D4D4D4"/>
                 </a:solidFill>
@@ -10631,7 +10766,7 @@
               <a:t>menu</a:t>
             </a:r>
             <a:r>
-              <a:rPr sz="1800" i="0" b="0">
+              <a:rPr sz="1200" i="0" b="0">
                 <a:solidFill>
                   <a:srgbClr val="D4D4D4"/>
                 </a:solidFill>
@@ -10640,7 +10775,7 @@
               <a:t> --&gt; </a:t>
             </a:r>
             <a:r>
-              <a:rPr sz="1800" i="0" b="0">
+              <a:rPr sz="1200" i="0" b="0">
                 <a:solidFill>
                   <a:srgbClr val="D4D4D4"/>
                 </a:solidFill>
@@ -10649,7 +10784,7 @@
               <a:t>busc</a:t>
             </a:r>
             <a:r>
-              <a:rPr sz="1800" i="0" b="0">
+              <a:rPr sz="1200" i="0" b="0">
                 <a:solidFill>
                   <a:srgbClr val="D4D4D4"/>
                 </a:solidFill>
@@ -10658,7 +10793,7 @@
               <a:t>[</a:t>
             </a:r>
             <a:r>
-              <a:rPr sz="1800" i="0" b="0">
+              <a:rPr sz="1200" i="0" b="0">
                 <a:solidFill>
                   <a:srgbClr val="D4D4D4"/>
                 </a:solidFill>
@@ -10667,7 +10802,7 @@
               <a:t>Buscar</a:t>
             </a:r>
             <a:r>
-              <a:rPr sz="1800" i="0" b="0">
+              <a:rPr sz="1200" i="0" b="0">
                 <a:solidFill>
                   <a:srgbClr val="D4D4D4"/>
                 </a:solidFill>
@@ -10676,7 +10811,7 @@
               <a:t> </a:t>
             </a:r>
             <a:r>
-              <a:rPr sz="1800" i="0" b="0">
+              <a:rPr sz="1200" i="0" b="0">
                 <a:solidFill>
                   <a:srgbClr val="D4D4D4"/>
                 </a:solidFill>
@@ -10685,7 +10820,7 @@
               <a:t>expediente</a:t>
             </a:r>
             <a:r>
-              <a:rPr sz="1800" i="0" b="0">
+              <a:rPr sz="1200" i="0" b="0">
                 <a:solidFill>
                   <a:srgbClr val="D4D4D4"/>
                 </a:solidFill>
@@ -10697,11 +10832,11 @@
           <a:p>
             <a:pPr>
               <a:spcAft>
-                <a:spcPts val="385"/>
+                <a:spcPts val="257"/>
               </a:spcAft>
             </a:pPr>
             <a:r>
-              <a:rPr sz="1800" i="0" b="0">
+              <a:rPr sz="1200" i="0" b="0">
                 <a:solidFill>
                   <a:srgbClr val="D4D4D4"/>
                 </a:solidFill>
@@ -10710,7 +10845,7 @@
               <a:t>  </a:t>
             </a:r>
             <a:r>
-              <a:rPr sz="1800" i="0" b="0">
+              <a:rPr sz="1200" i="0" b="0">
                 <a:solidFill>
                   <a:srgbClr val="D4D4D4"/>
                 </a:solidFill>
@@ -10719,7 +10854,7 @@
               <a:t>menu</a:t>
             </a:r>
             <a:r>
-              <a:rPr sz="1800" i="0" b="0">
+              <a:rPr sz="1200" i="0" b="0">
                 <a:solidFill>
                   <a:srgbClr val="D4D4D4"/>
                 </a:solidFill>
@@ -10728,7 +10863,7 @@
               <a:t> --&gt; </a:t>
             </a:r>
             <a:r>
-              <a:rPr sz="1800" i="0" b="0">
+              <a:rPr sz="1200" i="0" b="0">
                 <a:solidFill>
                   <a:srgbClr val="D4D4D4"/>
                 </a:solidFill>
@@ -10737,7 +10872,7 @@
               <a:t>agen</a:t>
             </a:r>
             <a:r>
-              <a:rPr sz="1800" i="0" b="0">
+              <a:rPr sz="1200" i="0" b="0">
                 <a:solidFill>
                   <a:srgbClr val="D4D4D4"/>
                 </a:solidFill>
@@ -10746,7 +10881,7 @@
               <a:t>[</a:t>
             </a:r>
             <a:r>
-              <a:rPr sz="1800" i="0" b="0">
+              <a:rPr sz="1200" i="0" b="0">
                 <a:solidFill>
                   <a:srgbClr val="D4D4D4"/>
                 </a:solidFill>
@@ -10755,7 +10890,7 @@
               <a:t>Agendar</a:t>
             </a:r>
             <a:r>
-              <a:rPr sz="1800" i="0" b="0">
+              <a:rPr sz="1200" i="0" b="0">
                 <a:solidFill>
                   <a:srgbClr val="D4D4D4"/>
                 </a:solidFill>
@@ -10764,7 +10899,7 @@
               <a:t> </a:t>
             </a:r>
             <a:r>
-              <a:rPr sz="1800" i="0" b="0">
+              <a:rPr sz="1200" i="0" b="0">
                 <a:solidFill>
                   <a:srgbClr val="D4D4D4"/>
                 </a:solidFill>
@@ -10773,7 +10908,7 @@
               <a:t>cita</a:t>
             </a:r>
             <a:r>
-              <a:rPr sz="1800" i="0" b="0">
+              <a:rPr sz="1200" i="0" b="0">
                 <a:solidFill>
                   <a:srgbClr val="D4D4D4"/>
                 </a:solidFill>
@@ -10785,11 +10920,11 @@
           <a:p>
             <a:pPr>
               <a:spcAft>
-                <a:spcPts val="385"/>
+                <a:spcPts val="257"/>
               </a:spcAft>
             </a:pPr>
             <a:r>
-              <a:rPr sz="1800" i="0" b="0">
+              <a:rPr sz="1200" i="0" b="0">
                 <a:solidFill>
                   <a:srgbClr val="D4D4D4"/>
                 </a:solidFill>
@@ -10801,11 +10936,11 @@
           <a:p>
             <a:pPr>
               <a:spcAft>
-                <a:spcPts val="385"/>
+                <a:spcPts val="257"/>
               </a:spcAft>
             </a:pPr>
             <a:r>
-              <a:rPr sz="1800" i="0" b="0">
+              <a:rPr sz="1200" i="0" b="0">
                 <a:solidFill>
                   <a:srgbClr val="D4D4D4"/>
                 </a:solidFill>
@@ -10814,7 +10949,7 @@
               <a:t>  </a:t>
             </a:r>
             <a:r>
-              <a:rPr sz="1800" i="0" b="0">
+              <a:rPr sz="1200" i="0" b="0">
                 <a:solidFill>
                   <a:srgbClr val="D4D4D4"/>
                 </a:solidFill>
@@ -10823,7 +10958,7 @@
               <a:t>regm</a:t>
             </a:r>
             <a:r>
-              <a:rPr sz="1800" i="0" b="0">
+              <a:rPr sz="1200" i="0" b="0">
                 <a:solidFill>
                   <a:srgbClr val="D4D4D4"/>
                 </a:solidFill>
@@ -10832,7 +10967,7 @@
               <a:t> --&gt;|</a:t>
             </a:r>
             <a:r>
-              <a:rPr sz="1800" i="0" b="0">
+              <a:rPr sz="1200" i="0" b="0">
                 <a:solidFill>
                   <a:srgbClr val="D4D4D4"/>
                 </a:solidFill>
@@ -10841,7 +10976,7 @@
               <a:t>guardar</a:t>
             </a:r>
             <a:r>
-              <a:rPr sz="1800" i="0" b="0">
+              <a:rPr sz="1200" i="0" b="0">
                 <a:solidFill>
                   <a:srgbClr val="D4D4D4"/>
                 </a:solidFill>
@@ -10850,7 +10985,7 @@
               <a:t>| </a:t>
             </a:r>
             <a:r>
-              <a:rPr sz="1800" i="0" b="0">
+              <a:rPr sz="1200" i="0" b="0">
                 <a:solidFill>
                   <a:srgbClr val="D4D4D4"/>
                 </a:solidFill>
@@ -10862,11 +10997,11 @@
           <a:p>
             <a:pPr>
               <a:spcAft>
-                <a:spcPts val="385"/>
+                <a:spcPts val="257"/>
               </a:spcAft>
             </a:pPr>
             <a:r>
-              <a:rPr sz="1800" i="0" b="0">
+              <a:rPr sz="1200" i="0" b="0">
                 <a:solidFill>
                   <a:srgbClr val="D4D4D4"/>
                 </a:solidFill>
@@ -10875,7 +11010,7 @@
               <a:t>  </a:t>
             </a:r>
             <a:r>
-              <a:rPr sz="1800" i="0" b="0">
+              <a:rPr sz="1200" i="0" b="0">
                 <a:solidFill>
                   <a:srgbClr val="D4D4D4"/>
                 </a:solidFill>
@@ -10884,7 +11019,7 @@
               <a:t>regm</a:t>
             </a:r>
             <a:r>
-              <a:rPr sz="1800" i="0" b="0">
+              <a:rPr sz="1200" i="0" b="0">
                 <a:solidFill>
                   <a:srgbClr val="D4D4D4"/>
                 </a:solidFill>
@@ -10893,7 +11028,7 @@
               <a:t> --&gt;|</a:t>
             </a:r>
             <a:r>
-              <a:rPr sz="1800" i="0" b="0">
+              <a:rPr sz="1200" i="0" b="0">
                 <a:solidFill>
                   <a:srgbClr val="D4D4D4"/>
                 </a:solidFill>
@@ -10902,7 +11037,7 @@
               <a:t>cancelar</a:t>
             </a:r>
             <a:r>
-              <a:rPr sz="1800" i="0" b="0">
+              <a:rPr sz="1200" i="0" b="0">
                 <a:solidFill>
                   <a:srgbClr val="D4D4D4"/>
                 </a:solidFill>
@@ -10911,7 +11046,7 @@
               <a:t>| </a:t>
             </a:r>
             <a:r>
-              <a:rPr sz="1800" i="0" b="0">
+              <a:rPr sz="1200" i="0" b="0">
                 <a:solidFill>
                   <a:srgbClr val="D4D4D4"/>
                 </a:solidFill>
@@ -10923,11 +11058,11 @@
           <a:p>
             <a:pPr>
               <a:spcAft>
-                <a:spcPts val="385"/>
+                <a:spcPts val="257"/>
               </a:spcAft>
             </a:pPr>
             <a:r>
-              <a:rPr sz="1800" i="0" b="0">
+              <a:rPr sz="1200" i="0" b="0">
                 <a:solidFill>
                   <a:srgbClr val="D4D4D4"/>
                 </a:solidFill>
@@ -10936,7 +11071,7 @@
               <a:t>  </a:t>
             </a:r>
             <a:r>
-              <a:rPr sz="1800" i="0" b="0">
+              <a:rPr sz="1200" i="0" b="0">
                 <a:solidFill>
                   <a:srgbClr val="D4D4D4"/>
                 </a:solidFill>
@@ -10945,7 +11080,7 @@
               <a:t>busc</a:t>
             </a:r>
             <a:r>
-              <a:rPr sz="1800" i="0" b="0">
+              <a:rPr sz="1200" i="0" b="0">
                 <a:solidFill>
                   <a:srgbClr val="D4D4D4"/>
                 </a:solidFill>
@@ -10954,7 +11089,7 @@
               <a:t> --&gt;|</a:t>
             </a:r>
             <a:r>
-              <a:rPr sz="1800" i="0" b="0">
+              <a:rPr sz="1200" i="0" b="0">
                 <a:solidFill>
                   <a:srgbClr val="B5CEA8"/>
                 </a:solidFill>
@@ -10963,7 +11098,7 @@
               <a:t>1</a:t>
             </a:r>
             <a:r>
-              <a:rPr sz="1800" i="0" b="0">
+              <a:rPr sz="1200" i="0" b="0">
                 <a:solidFill>
                   <a:srgbClr val="D4D4D4"/>
                 </a:solidFill>
@@ -10972,7 +11107,7 @@
               <a:t> </a:t>
             </a:r>
             <a:r>
-              <a:rPr sz="1800" i="0" b="0">
+              <a:rPr sz="1200" i="0" b="0">
                 <a:solidFill>
                   <a:srgbClr val="D4D4D4"/>
                 </a:solidFill>
@@ -10981,7 +11116,7 @@
               <a:t>resultado</a:t>
             </a:r>
             <a:r>
-              <a:rPr sz="1800" i="0" b="0">
+              <a:rPr sz="1200" i="0" b="0">
                 <a:solidFill>
                   <a:srgbClr val="D4D4D4"/>
                 </a:solidFill>
@@ -10990,7 +11125,7 @@
               <a:t>| </a:t>
             </a:r>
             <a:r>
-              <a:rPr sz="1800" i="0" b="0">
+              <a:rPr sz="1200" i="0" b="0">
                 <a:solidFill>
                   <a:srgbClr val="D4D4D4"/>
                 </a:solidFill>
@@ -10999,7 +11134,7 @@
               <a:t>det</a:t>
             </a:r>
             <a:r>
-              <a:rPr sz="1800" i="0" b="0">
+              <a:rPr sz="1200" i="0" b="0">
                 <a:solidFill>
                   <a:srgbClr val="D4D4D4"/>
                 </a:solidFill>
@@ -11008,7 +11143,7 @@
               <a:t>[</a:t>
             </a:r>
             <a:r>
-              <a:rPr sz="1800" i="0" b="0">
+              <a:rPr sz="1200" i="0" b="0">
                 <a:solidFill>
                   <a:srgbClr val="D4D4D4"/>
                 </a:solidFill>
@@ -11017,7 +11152,7 @@
               <a:t>Detalle</a:t>
             </a:r>
             <a:r>
-              <a:rPr sz="1800" i="0" b="0">
+              <a:rPr sz="1200" i="0" b="0">
                 <a:solidFill>
                   <a:srgbClr val="D4D4D4"/>
                 </a:solidFill>
@@ -11026,7 +11161,7 @@
               <a:t> </a:t>
             </a:r>
             <a:r>
-              <a:rPr sz="1800" i="0" b="0">
+              <a:rPr sz="1200" i="0" b="0">
                 <a:solidFill>
                   <a:srgbClr val="D4D4D4"/>
                 </a:solidFill>
@@ -11035,7 +11170,7 @@
               <a:t>del</a:t>
             </a:r>
             <a:r>
-              <a:rPr sz="1800" i="0" b="0">
+              <a:rPr sz="1200" i="0" b="0">
                 <a:solidFill>
                   <a:srgbClr val="D4D4D4"/>
                 </a:solidFill>
@@ -11044,7 +11179,7 @@
               <a:t> </a:t>
             </a:r>
             <a:r>
-              <a:rPr sz="1800" i="0" b="0">
+              <a:rPr sz="1200" i="0" b="0">
                 <a:solidFill>
                   <a:srgbClr val="D4D4D4"/>
                 </a:solidFill>
@@ -11053,7 +11188,7 @@
               <a:t>expediente</a:t>
             </a:r>
             <a:r>
-              <a:rPr sz="1800" i="0" b="0">
+              <a:rPr sz="1200" i="0" b="0">
                 <a:solidFill>
                   <a:srgbClr val="D4D4D4"/>
                 </a:solidFill>
@@ -11065,11 +11200,11 @@
           <a:p>
             <a:pPr>
               <a:spcAft>
-                <a:spcPts val="385"/>
+                <a:spcPts val="257"/>
               </a:spcAft>
             </a:pPr>
             <a:r>
-              <a:rPr sz="1800" i="0" b="0">
+              <a:rPr sz="1200" i="0" b="0">
                 <a:solidFill>
                   <a:srgbClr val="D4D4D4"/>
                 </a:solidFill>
@@ -11078,7 +11213,7 @@
               <a:t>  </a:t>
             </a:r>
             <a:r>
-              <a:rPr sz="1800" i="0" b="0">
+              <a:rPr sz="1200" i="0" b="0">
                 <a:solidFill>
                   <a:srgbClr val="D4D4D4"/>
                 </a:solidFill>
@@ -11087,7 +11222,7 @@
               <a:t>busc</a:t>
             </a:r>
             <a:r>
-              <a:rPr sz="1800" i="0" b="0">
+              <a:rPr sz="1200" i="0" b="0">
                 <a:solidFill>
                   <a:srgbClr val="D4D4D4"/>
                 </a:solidFill>
@@ -11096,7 +11231,7 @@
               <a:t> --&gt;|</a:t>
             </a:r>
             <a:r>
-              <a:rPr sz="1800" i="0" b="0">
+              <a:rPr sz="1200" i="0" b="0">
                 <a:solidFill>
                   <a:srgbClr val="D4D4D4"/>
                 </a:solidFill>
@@ -11105,7 +11240,7 @@
               <a:t>varios</a:t>
             </a:r>
             <a:r>
-              <a:rPr sz="1800" i="0" b="0">
+              <a:rPr sz="1200" i="0" b="0">
                 <a:solidFill>
                   <a:srgbClr val="D4D4D4"/>
                 </a:solidFill>
@@ -11114,7 +11249,7 @@
               <a:t>| </a:t>
             </a:r>
             <a:r>
-              <a:rPr sz="1800" i="0" b="0">
+              <a:rPr sz="1200" i="0" b="0">
                 <a:solidFill>
                   <a:srgbClr val="D4D4D4"/>
                 </a:solidFill>
@@ -11123,7 +11258,7 @@
               <a:t>lista</a:t>
             </a:r>
             <a:r>
-              <a:rPr sz="1800" i="0" b="0">
+              <a:rPr sz="1200" i="0" b="0">
                 <a:solidFill>
                   <a:srgbClr val="D4D4D4"/>
                 </a:solidFill>
@@ -11132,7 +11267,7 @@
               <a:t>[</a:t>
             </a:r>
             <a:r>
-              <a:rPr sz="1800" i="0" b="0">
+              <a:rPr sz="1200" i="0" b="0">
                 <a:solidFill>
                   <a:srgbClr val="D4D4D4"/>
                 </a:solidFill>
@@ -11141,7 +11276,7 @@
               <a:t>Lista</a:t>
             </a:r>
             <a:r>
-              <a:rPr sz="1800" i="0" b="0">
+              <a:rPr sz="1200" i="0" b="0">
                 <a:solidFill>
                   <a:srgbClr val="D4D4D4"/>
                 </a:solidFill>
@@ -11150,7 +11285,7 @@
               <a:t> </a:t>
             </a:r>
             <a:r>
-              <a:rPr sz="1800" i="0" b="0">
+              <a:rPr sz="1200" i="0" b="0">
                 <a:solidFill>
                   <a:srgbClr val="D4D4D4"/>
                 </a:solidFill>
@@ -11159,7 +11294,7 @@
               <a:t>de</a:t>
             </a:r>
             <a:r>
-              <a:rPr sz="1800" i="0" b="0">
+              <a:rPr sz="1200" i="0" b="0">
                 <a:solidFill>
                   <a:srgbClr val="D4D4D4"/>
                 </a:solidFill>
@@ -11168,7 +11303,7 @@
               <a:t> </a:t>
             </a:r>
             <a:r>
-              <a:rPr sz="1800" i="0" b="0">
+              <a:rPr sz="1200" i="0" b="0">
                 <a:solidFill>
                   <a:srgbClr val="D4D4D4"/>
                 </a:solidFill>
@@ -11177,7 +11312,7 @@
               <a:t>resultados</a:t>
             </a:r>
             <a:r>
-              <a:rPr sz="1800" i="0" b="0">
+              <a:rPr sz="1200" i="0" b="0">
                 <a:solidFill>
                   <a:srgbClr val="D4D4D4"/>
                 </a:solidFill>
@@ -11186,7 +11321,7 @@
               <a:t>] --&gt; </a:t>
             </a:r>
             <a:r>
-              <a:rPr sz="1800" i="0" b="0">
+              <a:rPr sz="1200" i="0" b="0">
                 <a:solidFill>
                   <a:srgbClr val="D4D4D4"/>
                 </a:solidFill>
@@ -11198,11 +11333,11 @@
           <a:p>
             <a:pPr>
               <a:spcAft>
-                <a:spcPts val="385"/>
+                <a:spcPts val="257"/>
               </a:spcAft>
             </a:pPr>
             <a:r>
-              <a:rPr sz="1800" i="0" b="0">
+              <a:rPr sz="1200" i="0" b="0">
                 <a:solidFill>
                   <a:srgbClr val="D4D4D4"/>
                 </a:solidFill>
@@ -11211,7 +11346,7 @@
               <a:t>  </a:t>
             </a:r>
             <a:r>
-              <a:rPr sz="1800" i="0" b="0">
+              <a:rPr sz="1200" i="0" b="0">
                 <a:solidFill>
                   <a:srgbClr val="D4D4D4"/>
                 </a:solidFill>
@@ -11220,7 +11355,7 @@
               <a:t>busc</a:t>
             </a:r>
             <a:r>
-              <a:rPr sz="1800" i="0" b="0">
+              <a:rPr sz="1200" i="0" b="0">
                 <a:solidFill>
                   <a:srgbClr val="D4D4D4"/>
                 </a:solidFill>
@@ -11229,7 +11364,7 @@
               <a:t> --&gt;|</a:t>
             </a:r>
             <a:r>
-              <a:rPr sz="1800" i="0" b="0">
+              <a:rPr sz="1200" i="0" b="0">
                 <a:solidFill>
                   <a:srgbClr val="D4D4D4"/>
                 </a:solidFill>
@@ -11238,7 +11373,7 @@
               <a:t>ninguno</a:t>
             </a:r>
             <a:r>
-              <a:rPr sz="1800" i="0" b="0">
+              <a:rPr sz="1200" i="0" b="0">
                 <a:solidFill>
                   <a:srgbClr val="D4D4D4"/>
                 </a:solidFill>
@@ -11247,7 +11382,7 @@
               <a:t>| </a:t>
             </a:r>
             <a:r>
-              <a:rPr sz="1800" i="0" b="0">
+              <a:rPr sz="1200" i="0" b="0">
                 <a:solidFill>
                   <a:srgbClr val="D4D4D4"/>
                 </a:solidFill>
@@ -11256,7 +11391,7 @@
               <a:t>vacio</a:t>
             </a:r>
             <a:r>
-              <a:rPr sz="1800" i="0" b="0">
+              <a:rPr sz="1200" i="0" b="0">
                 <a:solidFill>
                   <a:srgbClr val="D4D4D4"/>
                 </a:solidFill>
@@ -11265,7 +11400,7 @@
               <a:t>[</a:t>
             </a:r>
             <a:r>
-              <a:rPr sz="1800" i="0" b="0">
+              <a:rPr sz="1200" i="0" b="0">
                 <a:solidFill>
                   <a:srgbClr val="D4D4D4"/>
                 </a:solidFill>
@@ -11274,7 +11409,7 @@
               <a:t>Estado</a:t>
             </a:r>
             <a:r>
-              <a:rPr sz="1800" i="0" b="0">
+              <a:rPr sz="1200" i="0" b="0">
                 <a:solidFill>
                   <a:srgbClr val="D4D4D4"/>
                 </a:solidFill>
@@ -11283,7 +11418,7 @@
               <a:t> </a:t>
             </a:r>
             <a:r>
-              <a:rPr sz="1800" i="0" b="0">
+              <a:rPr sz="1200" i="0" b="0">
                 <a:solidFill>
                   <a:srgbClr val="D4D4D4"/>
                 </a:solidFill>
@@ -11292,7 +11427,7 @@
               <a:t>vacio</a:t>
             </a:r>
             <a:r>
-              <a:rPr sz="1800" i="0" b="0">
+              <a:rPr sz="1200" i="0" b="0">
                 <a:solidFill>
                   <a:srgbClr val="D4D4D4"/>
                 </a:solidFill>
@@ -11301,7 +11436,7 @@
               <a:t>&lt;</a:t>
             </a:r>
             <a:r>
-              <a:rPr sz="1800" i="0" b="0">
+              <a:rPr sz="1200" i="0" b="0">
                 <a:solidFill>
                   <a:srgbClr val="D4D4D4"/>
                 </a:solidFill>
@@ -11310,7 +11445,7 @@
               <a:t>br</a:t>
             </a:r>
             <a:r>
-              <a:rPr sz="1800" i="0" b="0">
+              <a:rPr sz="1200" i="0" b="0">
                 <a:solidFill>
                   <a:srgbClr val="D4D4D4"/>
                 </a:solidFill>
@@ -11319,7 +11454,7 @@
               <a:t>/&gt;</a:t>
             </a:r>
             <a:r>
-              <a:rPr sz="1800" i="0" b="0">
+              <a:rPr sz="1200" i="0" b="0">
                 <a:solidFill>
                   <a:srgbClr val="D4D4D4"/>
                 </a:solidFill>
@@ -11328,7 +11463,7 @@
               <a:t>con</a:t>
             </a:r>
             <a:r>
-              <a:rPr sz="1800" i="0" b="0">
+              <a:rPr sz="1200" i="0" b="0">
                 <a:solidFill>
                   <a:srgbClr val="D4D4D4"/>
                 </a:solidFill>
@@ -11337,7 +11472,7 @@
               <a:t> </a:t>
             </a:r>
             <a:r>
-              <a:rPr sz="1800" i="0" b="0">
+              <a:rPr sz="1200" i="0" b="0">
                 <a:solidFill>
                   <a:srgbClr val="D4D4D4"/>
                 </a:solidFill>
@@ -11346,7 +11481,7 @@
               <a:t>accion</a:t>
             </a:r>
             <a:r>
-              <a:rPr sz="1800" i="0" b="0">
+              <a:rPr sz="1200" i="0" b="0">
                 <a:solidFill>
                   <a:srgbClr val="D4D4D4"/>
                 </a:solidFill>
@@ -11355,7 +11490,7 @@
               <a:t> </a:t>
             </a:r>
             <a:r>
-              <a:rPr sz="1800" i="0" b="0">
+              <a:rPr sz="1200" i="0" b="0">
                 <a:solidFill>
                   <a:srgbClr val="D4D4D4"/>
                 </a:solidFill>
@@ -11364,7 +11499,7 @@
               <a:t>sugerida</a:t>
             </a:r>
             <a:r>
-              <a:rPr sz="1800" i="0" b="0">
+              <a:rPr sz="1200" i="0" b="0">
                 <a:solidFill>
                   <a:srgbClr val="D4D4D4"/>
                 </a:solidFill>
@@ -11373,59 +11508,150 @@
               <a:t>]</a:t>
             </a:r>
           </a:p>
-          <a:p>
-            <a:pPr>
-              <a:spcAft>
-                <a:spcPts val="385"/>
-              </a:spcAft>
-            </a:pPr>
-            <a:r>
-              <a:rPr sz="1800" i="0" b="0">
-                <a:solidFill>
-                  <a:srgbClr val="D4D4D4"/>
-                </a:solidFill>
-                <a:latin typeface="Consolas"/>
-              </a:rPr>
-              <a:t/>
-            </a:r>
-          </a:p>
-          <a:p>
-            <a:pPr>
-              <a:spcAft>
-                <a:spcPts val="385"/>
-              </a:spcAft>
-            </a:pPr>
-            <a:r>
-              <a:rPr sz="1800" i="1" b="0">
-                <a:solidFill>
-                  <a:srgbClr val="6A9955"/>
-                </a:solidFill>
-                <a:latin typeface="Consolas"/>
-              </a:rPr>
-              <a:t>%% Los tres caminos de una busqueda —uno, varios, ninguno— son lo que</a:t>
-            </a:r>
-          </a:p>
-          <a:p>
-            <a:pPr>
-              <a:spcAft>
-                <a:spcPts val="385"/>
-              </a:spcAft>
-            </a:pPr>
-            <a:r>
-              <a:rPr sz="1800" i="1" b="0">
-                <a:solidFill>
-                  <a:srgbClr val="6A9955"/>
-                </a:solidFill>
-                <a:latin typeface="Consolas"/>
-              </a:rPr>
-              <a:t>%% separa un wireframe de un dibujo. El «ninguno» es el que se olvida.</a:t>
-            </a:r>
-          </a:p>
-        </p:txBody>
-      </p:sp>
-      <p:sp>
-        <p:nvSpPr>
-          <p:cNvPr id="13" name="TextBox 12"/>
+        </p:txBody>
+      </p:sp>
+      <p:sp>
+        <p:nvSpPr>
+          <p:cNvPr id="13" name="Rounded Rectangle 12"/>
+          <p:cNvSpPr/>
+          <p:nvPr/>
+        </p:nvSpPr>
+        <p:spPr>
+          <a:xfrm>
+            <a:off x="7668579" y="1261872"/>
+            <a:ext cx="4120780" cy="3318569"/>
+          </a:xfrm>
+          <a:prstGeom prst="roundRect">
+            <a:avLst>
+              <a:gd name="adj" fmla="val 4000"/>
+            </a:avLst>
+          </a:prstGeom>
+          <a:solidFill>
+            <a:srgbClr val="E8EEF4"/>
+          </a:solidFill>
+          <a:ln>
+            <a:noFill/>
+          </a:ln>
+        </p:spPr>
+        <p:style>
+          <a:lnRef idx="1">
+            <a:schemeClr val="accent1"/>
+          </a:lnRef>
+          <a:fillRef idx="3">
+            <a:schemeClr val="accent1"/>
+          </a:fillRef>
+          <a:effectRef idx="2">
+            <a:schemeClr val="accent1"/>
+          </a:effectRef>
+          <a:fontRef idx="minor">
+            <a:schemeClr val="lt1"/>
+          </a:fontRef>
+        </p:style>
+        <p:txBody>
+          <a:bodyPr rtlCol="0" anchor="ctr"/>
+          <a:lstStyle/>
+          <a:p>
+            <a:pPr algn="ctr"/>
+          </a:p>
+        </p:txBody>
+      </p:sp>
+      <p:pic>
+        <p:nvPicPr>
+          <p:cNvPr id="14" name="Picture 13" descr="dg-navegacion-paso1.png"/>
+          <p:cNvPicPr>
+            <a:picLocks noChangeAspect="1"/>
+          </p:cNvPicPr>
+          <p:nvPr/>
+        </p:nvPicPr>
+        <p:blipFill>
+          <a:blip r:embed="rId2"/>
+          <a:stretch>
+            <a:fillRect/>
+          </a:stretch>
+        </p:blipFill>
+        <p:spPr>
+          <a:xfrm>
+            <a:off x="7723443" y="1316736"/>
+            <a:ext cx="4011052" cy="3208841"/>
+          </a:xfrm>
+          <a:prstGeom prst="rect">
+            <a:avLst/>
+          </a:prstGeom>
+        </p:spPr>
+      </p:pic>
+      <p:sp>
+        <p:nvSpPr>
+          <p:cNvPr id="15" name="TextBox 14"/>
+          <p:cNvSpPr txBox="1"/>
+          <p:nvPr/>
+        </p:nvSpPr>
+        <p:spPr>
+          <a:xfrm>
+            <a:off x="7723443" y="4580441"/>
+            <a:ext cx="4011052" cy="320040"/>
+          </a:xfrm>
+          <a:prstGeom prst="rect">
+            <a:avLst/>
+          </a:prstGeom>
+          <a:noFill/>
+        </p:spPr>
+        <p:txBody>
+          <a:bodyPr wrap="square">
+            <a:spAutoFit/>
+          </a:bodyPr>
+          <a:lstStyle/>
+          <a:p>
+            <a:pPr algn="ctr"/>
+            <a:r>
+              <a:rPr sz="1200" b="0" i="1">
+                <a:solidFill>
+                  <a:srgbClr val="666666"/>
+                </a:solidFill>
+                <a:latin typeface="Calibri"/>
+              </a:rPr>
+              <a:t>Lo que dibuja este código</a:t>
+            </a:r>
+          </a:p>
+        </p:txBody>
+      </p:sp>
+      <p:sp>
+        <p:nvSpPr>
+          <p:cNvPr id="16" name="TextBox 15"/>
+          <p:cNvSpPr txBox="1"/>
+          <p:nvPr/>
+        </p:nvSpPr>
+        <p:spPr>
+          <a:xfrm>
+            <a:off x="457200" y="6035040"/>
+            <a:ext cx="11277295" cy="365760"/>
+          </a:xfrm>
+          <a:prstGeom prst="rect">
+            <a:avLst/>
+          </a:prstGeom>
+          <a:noFill/>
+        </p:spPr>
+        <p:txBody>
+          <a:bodyPr wrap="square">
+            <a:spAutoFit/>
+          </a:bodyPr>
+          <a:lstStyle/>
+          <a:p>
+            <a:pPr algn="ctr"/>
+            <a:r>
+              <a:rPr sz="1300" b="0" i="1">
+                <a:solidFill>
+                  <a:srgbClr val="666666"/>
+                </a:solidFill>
+                <a:latin typeface="Calibri"/>
+              </a:rPr>
+              <a:t>Los tres caminos de una busqueda —uno, varios, ninguno— separan un wireframe de un dibujo.</a:t>
+            </a:r>
+          </a:p>
+        </p:txBody>
+      </p:sp>
+      <p:sp>
+        <p:nvSpPr>
+          <p:cNvPr id="17" name="TextBox 16"/>
           <p:cNvSpPr txBox="1"/>
           <p:nvPr/>
         </p:nvSpPr>
@@ -11613,7 +11839,7 @@
         <p:spPr>
           <a:xfrm>
             <a:off x="457200" y="1261872"/>
-            <a:ext cx="11277295" cy="4745196"/>
+            <a:ext cx="6991923" cy="4333711"/>
           </a:xfrm>
           <a:prstGeom prst="roundRect">
             <a:avLst>
@@ -11658,7 +11884,7 @@
         <p:spPr>
           <a:xfrm>
             <a:off x="457200" y="1261872"/>
-            <a:ext cx="11277295" cy="365760"/>
+            <a:ext cx="6991923" cy="365760"/>
           </a:xfrm>
           <a:prstGeom prst="rect">
             <a:avLst/>
@@ -11830,7 +12056,7 @@
         <p:spPr>
           <a:xfrm>
             <a:off x="1371600" y="1298448"/>
-            <a:ext cx="10180015" cy="292608"/>
+            <a:ext cx="5894643" cy="292608"/>
           </a:xfrm>
           <a:prstGeom prst="rect">
             <a:avLst/>
@@ -11863,7 +12089,7 @@
         <p:spPr>
           <a:xfrm>
             <a:off x="685800" y="1719072"/>
-            <a:ext cx="502920" cy="4150836"/>
+            <a:ext cx="502920" cy="3739351"/>
           </a:xfrm>
           <a:prstGeom prst="rect">
             <a:avLst/>
@@ -11878,11 +12104,11 @@
           <a:p>
             <a:pPr algn="r">
               <a:spcAft>
-                <a:spcPts val="342"/>
+                <a:spcPts val="278"/>
               </a:spcAft>
             </a:pPr>
             <a:r>
-              <a:rPr sz="1600" i="0" b="0">
+              <a:rPr sz="1300" i="0" b="0">
                 <a:solidFill>
                   <a:srgbClr val="858585"/>
                 </a:solidFill>
@@ -11894,11 +12120,11 @@
           <a:p>
             <a:pPr algn="r">
               <a:spcAft>
-                <a:spcPts val="342"/>
+                <a:spcPts val="278"/>
               </a:spcAft>
             </a:pPr>
             <a:r>
-              <a:rPr sz="1600" i="0" b="0">
+              <a:rPr sz="1300" i="0" b="0">
                 <a:solidFill>
                   <a:srgbClr val="858585"/>
                 </a:solidFill>
@@ -11910,11 +12136,11 @@
           <a:p>
             <a:pPr algn="r">
               <a:spcAft>
-                <a:spcPts val="342"/>
+                <a:spcPts val="278"/>
               </a:spcAft>
             </a:pPr>
             <a:r>
-              <a:rPr sz="1600" i="0" b="0">
+              <a:rPr sz="1300" i="0" b="0">
                 <a:solidFill>
                   <a:srgbClr val="858585"/>
                 </a:solidFill>
@@ -11926,11 +12152,11 @@
           <a:p>
             <a:pPr algn="r">
               <a:spcAft>
-                <a:spcPts val="342"/>
+                <a:spcPts val="278"/>
               </a:spcAft>
             </a:pPr>
             <a:r>
-              <a:rPr sz="1600" i="0" b="0">
+              <a:rPr sz="1300" i="0" b="0">
                 <a:solidFill>
                   <a:srgbClr val="858585"/>
                 </a:solidFill>
@@ -11942,11 +12168,11 @@
           <a:p>
             <a:pPr algn="r">
               <a:spcAft>
-                <a:spcPts val="342"/>
+                <a:spcPts val="278"/>
               </a:spcAft>
             </a:pPr>
             <a:r>
-              <a:rPr sz="1600" i="0" b="0">
+              <a:rPr sz="1300" i="0" b="0">
                 <a:solidFill>
                   <a:srgbClr val="858585"/>
                 </a:solidFill>
@@ -11958,11 +12184,11 @@
           <a:p>
             <a:pPr algn="r">
               <a:spcAft>
-                <a:spcPts val="342"/>
+                <a:spcPts val="278"/>
               </a:spcAft>
             </a:pPr>
             <a:r>
-              <a:rPr sz="1600" i="0" b="0">
+              <a:rPr sz="1300" i="0" b="0">
                 <a:solidFill>
                   <a:srgbClr val="858585"/>
                 </a:solidFill>
@@ -11974,11 +12200,11 @@
           <a:p>
             <a:pPr algn="r">
               <a:spcAft>
-                <a:spcPts val="342"/>
+                <a:spcPts val="278"/>
               </a:spcAft>
             </a:pPr>
             <a:r>
-              <a:rPr sz="1600" i="0" b="0">
+              <a:rPr sz="1300" i="0" b="0">
                 <a:solidFill>
                   <a:srgbClr val="858585"/>
                 </a:solidFill>
@@ -11990,11 +12216,11 @@
           <a:p>
             <a:pPr algn="r">
               <a:spcAft>
-                <a:spcPts val="342"/>
+                <a:spcPts val="278"/>
               </a:spcAft>
             </a:pPr>
             <a:r>
-              <a:rPr sz="1600" i="0" b="0">
+              <a:rPr sz="1300" i="0" b="0">
                 <a:solidFill>
                   <a:srgbClr val="858585"/>
                 </a:solidFill>
@@ -12006,11 +12232,11 @@
           <a:p>
             <a:pPr algn="r">
               <a:spcAft>
-                <a:spcPts val="342"/>
+                <a:spcPts val="278"/>
               </a:spcAft>
             </a:pPr>
             <a:r>
-              <a:rPr sz="1600" i="0" b="0">
+              <a:rPr sz="1300" i="0" b="0">
                 <a:solidFill>
                   <a:srgbClr val="858585"/>
                 </a:solidFill>
@@ -12022,11 +12248,11 @@
           <a:p>
             <a:pPr algn="r">
               <a:spcAft>
-                <a:spcPts val="342"/>
+                <a:spcPts val="278"/>
               </a:spcAft>
             </a:pPr>
             <a:r>
-              <a:rPr sz="1600" i="0" b="0">
+              <a:rPr sz="1300" i="0" b="0">
                 <a:solidFill>
                   <a:srgbClr val="858585"/>
                 </a:solidFill>
@@ -12038,11 +12264,11 @@
           <a:p>
             <a:pPr algn="r">
               <a:spcAft>
-                <a:spcPts val="342"/>
+                <a:spcPts val="278"/>
               </a:spcAft>
             </a:pPr>
             <a:r>
-              <a:rPr sz="1600" i="0" b="0">
+              <a:rPr sz="1300" i="0" b="0">
                 <a:solidFill>
                   <a:srgbClr val="858585"/>
                 </a:solidFill>
@@ -12054,11 +12280,11 @@
           <a:p>
             <a:pPr algn="r">
               <a:spcAft>
-                <a:spcPts val="342"/>
+                <a:spcPts val="278"/>
               </a:spcAft>
             </a:pPr>
             <a:r>
-              <a:rPr sz="1600" i="0" b="0">
+              <a:rPr sz="1300" i="0" b="0">
                 <a:solidFill>
                   <a:srgbClr val="858585"/>
                 </a:solidFill>
@@ -12070,11 +12296,11 @@
           <a:p>
             <a:pPr algn="r">
               <a:spcAft>
-                <a:spcPts val="342"/>
+                <a:spcPts val="278"/>
               </a:spcAft>
             </a:pPr>
             <a:r>
-              <a:rPr sz="1600" i="0" b="0">
+              <a:rPr sz="1300" i="0" b="0">
                 <a:solidFill>
                   <a:srgbClr val="858585"/>
                 </a:solidFill>
@@ -12086,17 +12312,33 @@
           <a:p>
             <a:pPr algn="r">
               <a:spcAft>
-                <a:spcPts val="342"/>
+                <a:spcPts val="278"/>
               </a:spcAft>
             </a:pPr>
             <a:r>
-              <a:rPr sz="1600" i="0" b="0">
+              <a:rPr sz="1300" i="0" b="0">
                 <a:solidFill>
                   <a:srgbClr val="858585"/>
                 </a:solidFill>
                 <a:latin typeface="Consolas"/>
               </a:rPr>
               <a:t>14</a:t>
+            </a:r>
+          </a:p>
+          <a:p>
+            <a:pPr algn="r">
+              <a:spcAft>
+                <a:spcPts val="278"/>
+              </a:spcAft>
+            </a:pPr>
+            <a:r>
+              <a:rPr sz="1300" i="0" b="0">
+                <a:solidFill>
+                  <a:srgbClr val="858585"/>
+                </a:solidFill>
+                <a:latin typeface="Consolas"/>
+              </a:rPr>
+              <a:t>15</a:t>
             </a:r>
           </a:p>
         </p:txBody>
@@ -12110,7 +12352,7 @@
         <p:spPr>
           <a:xfrm>
             <a:off x="1188720" y="1719072"/>
-            <a:ext cx="10271455" cy="4150836"/>
+            <a:ext cx="5986083" cy="3739351"/>
           </a:xfrm>
           <a:prstGeom prst="rect">
             <a:avLst/>
@@ -12125,11 +12367,11 @@
           <a:p>
             <a:pPr>
               <a:spcAft>
-                <a:spcPts val="342"/>
+                <a:spcPts val="278"/>
               </a:spcAft>
             </a:pPr>
             <a:r>
-              <a:rPr sz="1600" i="0" b="0">
+              <a:rPr sz="1300" i="0" b="0">
                 <a:solidFill>
                   <a:srgbClr val="D4D4D4"/>
                 </a:solidFill>
@@ -12138,7 +12380,7 @@
               <a:t>flowchart</a:t>
             </a:r>
             <a:r>
-              <a:rPr sz="1600" i="0" b="0">
+              <a:rPr sz="1300" i="0" b="0">
                 <a:solidFill>
                   <a:srgbClr val="D4D4D4"/>
                 </a:solidFill>
@@ -12147,7 +12389,7 @@
               <a:t> </a:t>
             </a:r>
             <a:r>
-              <a:rPr sz="1600" i="0" b="0">
+              <a:rPr sz="1300" i="0" b="0">
                 <a:solidFill>
                   <a:srgbClr val="D4D4D4"/>
                 </a:solidFill>
@@ -12159,11 +12401,11 @@
           <a:p>
             <a:pPr>
               <a:spcAft>
-                <a:spcPts val="342"/>
+                <a:spcPts val="278"/>
               </a:spcAft>
             </a:pPr>
             <a:r>
-              <a:rPr sz="1600" i="0" b="0">
+              <a:rPr sz="1300" i="0" b="0">
                 <a:solidFill>
                   <a:srgbClr val="D4D4D4"/>
                 </a:solidFill>
@@ -12172,7 +12414,7 @@
               <a:t>  </a:t>
             </a:r>
             <a:r>
-              <a:rPr sz="1600" i="0" b="0">
+              <a:rPr sz="1300" i="0" b="0">
                 <a:solidFill>
                   <a:srgbClr val="D4D4D4"/>
                 </a:solidFill>
@@ -12181,7 +12423,7 @@
               <a:t>A</a:t>
             </a:r>
             <a:r>
-              <a:rPr sz="1600" i="0" b="0">
+              <a:rPr sz="1300" i="0" b="0">
                 <a:solidFill>
                   <a:srgbClr val="D4D4D4"/>
                 </a:solidFill>
@@ -12190,7 +12432,7 @@
               <a:t>[</a:t>
             </a:r>
             <a:r>
-              <a:rPr sz="1600" i="0" b="0">
+              <a:rPr sz="1300" i="0" b="0">
                 <a:solidFill>
                   <a:srgbClr val="D4D4D4"/>
                 </a:solidFill>
@@ -12199,7 +12441,7 @@
               <a:t>Recepcion</a:t>
             </a:r>
             <a:r>
-              <a:rPr sz="1600" i="0" b="0">
+              <a:rPr sz="1300" i="0" b="0">
                 <a:solidFill>
                   <a:srgbClr val="D4D4D4"/>
                 </a:solidFill>
@@ -12208,7 +12450,7 @@
               <a:t>: </a:t>
             </a:r>
             <a:r>
-              <a:rPr sz="1600" i="0" b="0">
+              <a:rPr sz="1300" i="0" b="0">
                 <a:solidFill>
                   <a:srgbClr val="D4D4D4"/>
                 </a:solidFill>
@@ -12217,7 +12459,7 @@
               <a:t>llega</a:t>
             </a:r>
             <a:r>
-              <a:rPr sz="1600" i="0" b="0">
+              <a:rPr sz="1300" i="0" b="0">
                 <a:solidFill>
                   <a:srgbClr val="D4D4D4"/>
                 </a:solidFill>
@@ -12226,7 +12468,7 @@
               <a:t> </a:t>
             </a:r>
             <a:r>
-              <a:rPr sz="1600" i="0" b="0">
+              <a:rPr sz="1300" i="0" b="0">
                 <a:solidFill>
                   <a:srgbClr val="D4D4D4"/>
                 </a:solidFill>
@@ -12235,7 +12477,7 @@
               <a:t>el</a:t>
             </a:r>
             <a:r>
-              <a:rPr sz="1600" i="0" b="0">
+              <a:rPr sz="1300" i="0" b="0">
                 <a:solidFill>
                   <a:srgbClr val="D4D4D4"/>
                 </a:solidFill>
@@ -12244,7 +12486,7 @@
               <a:t> </a:t>
             </a:r>
             <a:r>
-              <a:rPr sz="1600" i="0" b="0">
+              <a:rPr sz="1300" i="0" b="0">
                 <a:solidFill>
                   <a:srgbClr val="D4D4D4"/>
                 </a:solidFill>
@@ -12253,7 +12495,7 @@
               <a:t>dueño</a:t>
             </a:r>
             <a:r>
-              <a:rPr sz="1600" i="0" b="0">
+              <a:rPr sz="1300" i="0" b="0">
                 <a:solidFill>
                   <a:srgbClr val="D4D4D4"/>
                 </a:solidFill>
@@ -12262,7 +12504,7 @@
               <a:t> </a:t>
             </a:r>
             <a:r>
-              <a:rPr sz="1600" i="0" b="0">
+              <a:rPr sz="1300" i="0" b="0">
                 <a:solidFill>
                   <a:srgbClr val="D4D4D4"/>
                 </a:solidFill>
@@ -12271,7 +12513,7 @@
               <a:t>con</a:t>
             </a:r>
             <a:r>
-              <a:rPr sz="1600" i="0" b="0">
+              <a:rPr sz="1300" i="0" b="0">
                 <a:solidFill>
                   <a:srgbClr val="D4D4D4"/>
                 </a:solidFill>
@@ -12280,7 +12522,7 @@
               <a:t> </a:t>
             </a:r>
             <a:r>
-              <a:rPr sz="1600" i="0" b="0">
+              <a:rPr sz="1300" i="0" b="0">
                 <a:solidFill>
                   <a:srgbClr val="D4D4D4"/>
                 </a:solidFill>
@@ -12289,7 +12531,7 @@
               <a:t>su</a:t>
             </a:r>
             <a:r>
-              <a:rPr sz="1600" i="0" b="0">
+              <a:rPr sz="1300" i="0" b="0">
                 <a:solidFill>
                   <a:srgbClr val="D4D4D4"/>
                 </a:solidFill>
@@ -12298,7 +12540,7 @@
               <a:t> </a:t>
             </a:r>
             <a:r>
-              <a:rPr sz="1600" i="0" b="0">
+              <a:rPr sz="1300" i="0" b="0">
                 <a:solidFill>
                   <a:srgbClr val="D4D4D4"/>
                 </a:solidFill>
@@ -12307,95 +12549,23 @@
               <a:t>mascota</a:t>
             </a:r>
             <a:r>
-              <a:rPr sz="1600" i="0" b="0">
-                <a:solidFill>
-                  <a:srgbClr val="D4D4D4"/>
-                </a:solidFill>
-                <a:latin typeface="Consolas"/>
-              </a:rPr>
-              <a:t>] --&gt; </a:t>
-            </a:r>
-            <a:r>
-              <a:rPr sz="1600" i="0" b="0">
-                <a:solidFill>
-                  <a:srgbClr val="D4D4D4"/>
-                </a:solidFill>
-                <a:latin typeface="Consolas"/>
-              </a:rPr>
-              <a:t>B</a:t>
-            </a:r>
-            <a:r>
-              <a:rPr sz="1600" i="0" b="0">
-                <a:solidFill>
-                  <a:srgbClr val="D4D4D4"/>
-                </a:solidFill>
-                <a:latin typeface="Consolas"/>
-              </a:rPr>
-              <a:t>{</a:t>
-            </a:r>
-            <a:r>
-              <a:rPr sz="1600" i="0" b="0">
-                <a:solidFill>
-                  <a:srgbClr val="D4D4D4"/>
-                </a:solidFill>
-                <a:latin typeface="Consolas"/>
-              </a:rPr>
-              <a:t>Dueño</a:t>
-            </a:r>
-            <a:r>
-              <a:rPr sz="1600" i="0" b="0">
-                <a:solidFill>
-                  <a:srgbClr val="D4D4D4"/>
-                </a:solidFill>
-                <a:latin typeface="Consolas"/>
-              </a:rPr>
-              <a:t> </a:t>
-            </a:r>
-            <a:r>
-              <a:rPr sz="1600" i="0" b="0">
-                <a:solidFill>
-                  <a:srgbClr val="D4D4D4"/>
-                </a:solidFill>
-                <a:latin typeface="Consolas"/>
-              </a:rPr>
-              <a:t>ya</a:t>
-            </a:r>
-            <a:r>
-              <a:rPr sz="1600" i="0" b="0">
-                <a:solidFill>
-                  <a:srgbClr val="D4D4D4"/>
-                </a:solidFill>
-                <a:latin typeface="Consolas"/>
-              </a:rPr>
-              <a:t> </a:t>
-            </a:r>
-            <a:r>
-              <a:rPr sz="1600" i="0" b="0">
-                <a:solidFill>
-                  <a:srgbClr val="D4D4D4"/>
-                </a:solidFill>
-                <a:latin typeface="Consolas"/>
-              </a:rPr>
-              <a:t>registrado</a:t>
-            </a:r>
-            <a:r>
-              <a:rPr sz="1600" i="0" b="0">
-                <a:solidFill>
-                  <a:srgbClr val="D4D4D4"/>
-                </a:solidFill>
-                <a:latin typeface="Consolas"/>
-              </a:rPr>
-              <a:t>?}</a:t>
+              <a:rPr sz="1300" i="0" b="0">
+                <a:solidFill>
+                  <a:srgbClr val="D4D4D4"/>
+                </a:solidFill>
+                <a:latin typeface="Consolas"/>
+              </a:rPr>
+              <a:t>]</a:t>
             </a:r>
           </a:p>
           <a:p>
             <a:pPr>
               <a:spcAft>
-                <a:spcPts val="342"/>
+                <a:spcPts val="278"/>
               </a:spcAft>
             </a:pPr>
             <a:r>
-              <a:rPr sz="1600" i="0" b="0">
+              <a:rPr sz="1300" i="0" b="0">
                 <a:solidFill>
                   <a:srgbClr val="D4D4D4"/>
                 </a:solidFill>
@@ -12404,7 +12574,25 @@
               <a:t>  </a:t>
             </a:r>
             <a:r>
-              <a:rPr sz="1600" i="0" b="0">
+              <a:rPr sz="1300" i="0" b="0">
+                <a:solidFill>
+                  <a:srgbClr val="D4D4D4"/>
+                </a:solidFill>
+                <a:latin typeface="Consolas"/>
+              </a:rPr>
+              <a:t>A</a:t>
+            </a:r>
+            <a:r>
+              <a:rPr sz="1300" i="0" b="0">
+                <a:solidFill>
+                  <a:srgbClr val="D4D4D4"/>
+                </a:solidFill>
+                <a:latin typeface="Consolas"/>
+              </a:rPr>
+              <a:t> --&gt; </a:t>
+            </a:r>
+            <a:r>
+              <a:rPr sz="1300" i="0" b="0">
                 <a:solidFill>
                   <a:srgbClr val="D4D4D4"/>
                 </a:solidFill>
@@ -12413,61 +12601,25 @@
               <a:t>B</a:t>
             </a:r>
             <a:r>
-              <a:rPr sz="1600" i="0" b="0">
-                <a:solidFill>
-                  <a:srgbClr val="D4D4D4"/>
-                </a:solidFill>
-                <a:latin typeface="Consolas"/>
-              </a:rPr>
-              <a:t> -- </a:t>
-            </a:r>
-            <a:r>
-              <a:rPr sz="1600" i="0" b="0">
-                <a:solidFill>
-                  <a:srgbClr val="D4D4D4"/>
-                </a:solidFill>
-                <a:latin typeface="Consolas"/>
-              </a:rPr>
-              <a:t>No</a:t>
-            </a:r>
-            <a:r>
-              <a:rPr sz="1600" i="0" b="0">
-                <a:solidFill>
-                  <a:srgbClr val="D4D4D4"/>
-                </a:solidFill>
-                <a:latin typeface="Consolas"/>
-              </a:rPr>
-              <a:t> --&gt; </a:t>
-            </a:r>
-            <a:r>
-              <a:rPr sz="1600" i="0" b="0">
-                <a:solidFill>
-                  <a:srgbClr val="D4D4D4"/>
-                </a:solidFill>
-                <a:latin typeface="Consolas"/>
-              </a:rPr>
-              <a:t>C</a:t>
-            </a:r>
-            <a:r>
-              <a:rPr sz="1600" i="0" b="0">
-                <a:solidFill>
-                  <a:srgbClr val="D4D4D4"/>
-                </a:solidFill>
-                <a:latin typeface="Consolas"/>
-              </a:rPr>
-              <a:t>[</a:t>
-            </a:r>
-            <a:r>
-              <a:rPr sz="1600" i="0" b="0">
-                <a:solidFill>
-                  <a:srgbClr val="D4D4D4"/>
-                </a:solidFill>
-                <a:latin typeface="Consolas"/>
-              </a:rPr>
-              <a:t>Pantalla</a:t>
-            </a:r>
-            <a:r>
-              <a:rPr sz="1600" i="0" b="0">
+              <a:rPr sz="1300" i="0" b="0">
+                <a:solidFill>
+                  <a:srgbClr val="D4D4D4"/>
+                </a:solidFill>
+                <a:latin typeface="Consolas"/>
+              </a:rPr>
+              <a:t>{</a:t>
+            </a:r>
+            <a:r>
+              <a:rPr sz="1300" i="0" b="0">
+                <a:solidFill>
+                  <a:srgbClr val="D4D4D4"/>
+                </a:solidFill>
+                <a:latin typeface="Consolas"/>
+              </a:rPr>
+              <a:t>Dueño</a:t>
+            </a:r>
+            <a:r>
+              <a:rPr sz="1300" i="0" b="0">
                 <a:solidFill>
                   <a:srgbClr val="D4D4D4"/>
                 </a:solidFill>
@@ -12476,16 +12628,16 @@
               <a:t> </a:t>
             </a:r>
             <a:r>
-              <a:rPr sz="1600" i="0" b="0">
-                <a:solidFill>
-                  <a:srgbClr val="D4D4D4"/>
-                </a:solidFill>
-                <a:latin typeface="Consolas"/>
-              </a:rPr>
-              <a:t>Registrar</a:t>
-            </a:r>
-            <a:r>
-              <a:rPr sz="1600" i="0" b="0">
+              <a:rPr sz="1300" i="0" b="0">
+                <a:solidFill>
+                  <a:srgbClr val="D4D4D4"/>
+                </a:solidFill>
+                <a:latin typeface="Consolas"/>
+              </a:rPr>
+              <a:t>ya</a:t>
+            </a:r>
+            <a:r>
+              <a:rPr sz="1300" i="0" b="0">
                 <a:solidFill>
                   <a:srgbClr val="D4D4D4"/>
                 </a:solidFill>
@@ -12494,32 +12646,32 @@
               <a:t> </a:t>
             </a:r>
             <a:r>
-              <a:rPr sz="1600" i="0" b="0">
-                <a:solidFill>
-                  <a:srgbClr val="D4D4D4"/>
-                </a:solidFill>
-                <a:latin typeface="Consolas"/>
-              </a:rPr>
-              <a:t>dueño</a:t>
-            </a:r>
-            <a:r>
-              <a:rPr sz="1600" i="0" b="0">
-                <a:solidFill>
-                  <a:srgbClr val="D4D4D4"/>
-                </a:solidFill>
-                <a:latin typeface="Consolas"/>
-              </a:rPr>
-              <a:t>]</a:t>
+              <a:rPr sz="1300" i="0" b="0">
+                <a:solidFill>
+                  <a:srgbClr val="D4D4D4"/>
+                </a:solidFill>
+                <a:latin typeface="Consolas"/>
+              </a:rPr>
+              <a:t>registrado</a:t>
+            </a:r>
+            <a:r>
+              <a:rPr sz="1300" i="0" b="0">
+                <a:solidFill>
+                  <a:srgbClr val="D4D4D4"/>
+                </a:solidFill>
+                <a:latin typeface="Consolas"/>
+              </a:rPr>
+              <a:t>?}</a:t>
             </a:r>
           </a:p>
           <a:p>
             <a:pPr>
               <a:spcAft>
-                <a:spcPts val="342"/>
+                <a:spcPts val="278"/>
               </a:spcAft>
             </a:pPr>
             <a:r>
-              <a:rPr sz="1600" i="0" b="0">
+              <a:rPr sz="1300" i="0" b="0">
                 <a:solidFill>
                   <a:srgbClr val="D4D4D4"/>
                 </a:solidFill>
@@ -12528,7 +12680,7 @@
               <a:t>  </a:t>
             </a:r>
             <a:r>
-              <a:rPr sz="1600" i="0" b="0">
+              <a:rPr sz="1300" i="0" b="0">
                 <a:solidFill>
                   <a:srgbClr val="D4D4D4"/>
                 </a:solidFill>
@@ -12537,7 +12689,7 @@
               <a:t>B</a:t>
             </a:r>
             <a:r>
-              <a:rPr sz="1600" i="0" b="0">
+              <a:rPr sz="1300" i="0" b="0">
                 <a:solidFill>
                   <a:srgbClr val="D4D4D4"/>
                 </a:solidFill>
@@ -12546,16 +12698,16 @@
               <a:t> -- </a:t>
             </a:r>
             <a:r>
-              <a:rPr sz="1600" i="0" b="0">
-                <a:solidFill>
-                  <a:srgbClr val="D4D4D4"/>
-                </a:solidFill>
-                <a:latin typeface="Consolas"/>
-              </a:rPr>
-              <a:t>Si</a:t>
-            </a:r>
-            <a:r>
-              <a:rPr sz="1600" i="0" b="0">
+              <a:rPr sz="1300" i="0" b="0">
+                <a:solidFill>
+                  <a:srgbClr val="D4D4D4"/>
+                </a:solidFill>
+                <a:latin typeface="Consolas"/>
+              </a:rPr>
+              <a:t>No</a:t>
+            </a:r>
+            <a:r>
+              <a:rPr sz="1300" i="0" b="0">
                 <a:solidFill>
                   <a:srgbClr val="D4D4D4"/>
                 </a:solidFill>
@@ -12564,16 +12716,16 @@
               <a:t> --&gt; </a:t>
             </a:r>
             <a:r>
-              <a:rPr sz="1600" i="0" b="0">
-                <a:solidFill>
-                  <a:srgbClr val="D4D4D4"/>
-                </a:solidFill>
-                <a:latin typeface="Consolas"/>
-              </a:rPr>
-              <a:t>D</a:t>
-            </a:r>
-            <a:r>
-              <a:rPr sz="1600" i="0" b="0">
+              <a:rPr sz="1300" i="0" b="0">
+                <a:solidFill>
+                  <a:srgbClr val="D4D4D4"/>
+                </a:solidFill>
+                <a:latin typeface="Consolas"/>
+              </a:rPr>
+              <a:t>C</a:t>
+            </a:r>
+            <a:r>
+              <a:rPr sz="1300" i="0" b="0">
                 <a:solidFill>
                   <a:srgbClr val="D4D4D4"/>
                 </a:solidFill>
@@ -12582,7 +12734,7 @@
               <a:t>[</a:t>
             </a:r>
             <a:r>
-              <a:rPr sz="1600" i="0" b="0">
+              <a:rPr sz="1300" i="0" b="0">
                 <a:solidFill>
                   <a:srgbClr val="D4D4D4"/>
                 </a:solidFill>
@@ -12591,7 +12743,7 @@
               <a:t>Pantalla</a:t>
             </a:r>
             <a:r>
-              <a:rPr sz="1600" i="0" b="0">
+              <a:rPr sz="1300" i="0" b="0">
                 <a:solidFill>
                   <a:srgbClr val="D4D4D4"/>
                 </a:solidFill>
@@ -12600,7 +12752,7 @@
               <a:t> </a:t>
             </a:r>
             <a:r>
-              <a:rPr sz="1600" i="0" b="0">
+              <a:rPr sz="1300" i="0" b="0">
                 <a:solidFill>
                   <a:srgbClr val="D4D4D4"/>
                 </a:solidFill>
@@ -12609,7 +12761,7 @@
               <a:t>Registrar</a:t>
             </a:r>
             <a:r>
-              <a:rPr sz="1600" i="0" b="0">
+              <a:rPr sz="1300" i="0" b="0">
                 <a:solidFill>
                   <a:srgbClr val="D4D4D4"/>
                 </a:solidFill>
@@ -12618,16 +12770,16 @@
               <a:t> </a:t>
             </a:r>
             <a:r>
-              <a:rPr sz="1600" i="0" b="0">
-                <a:solidFill>
-                  <a:srgbClr val="D4D4D4"/>
-                </a:solidFill>
-                <a:latin typeface="Consolas"/>
-              </a:rPr>
-              <a:t>mascota</a:t>
-            </a:r>
-            <a:r>
-              <a:rPr sz="1600" i="0" b="0">
+              <a:rPr sz="1300" i="0" b="0">
+                <a:solidFill>
+                  <a:srgbClr val="D4D4D4"/>
+                </a:solidFill>
+                <a:latin typeface="Consolas"/>
+              </a:rPr>
+              <a:t>dueño</a:t>
+            </a:r>
+            <a:r>
+              <a:rPr sz="1300" i="0" b="0">
                 <a:solidFill>
                   <a:srgbClr val="D4D4D4"/>
                 </a:solidFill>
@@ -12639,11 +12791,11 @@
           <a:p>
             <a:pPr>
               <a:spcAft>
-                <a:spcPts val="342"/>
+                <a:spcPts val="278"/>
               </a:spcAft>
             </a:pPr>
             <a:r>
-              <a:rPr sz="1600" i="0" b="0">
+              <a:rPr sz="1300" i="0" b="0">
                 <a:solidFill>
                   <a:srgbClr val="D4D4D4"/>
                 </a:solidFill>
@@ -12652,16 +12804,34 @@
               <a:t>  </a:t>
             </a:r>
             <a:r>
-              <a:rPr sz="1600" i="0" b="0">
-                <a:solidFill>
-                  <a:srgbClr val="D4D4D4"/>
-                </a:solidFill>
-                <a:latin typeface="Consolas"/>
-              </a:rPr>
-              <a:t>C</a:t>
-            </a:r>
-            <a:r>
-              <a:rPr sz="1600" i="0" b="0">
+              <a:rPr sz="1300" i="0" b="0">
+                <a:solidFill>
+                  <a:srgbClr val="D4D4D4"/>
+                </a:solidFill>
+                <a:latin typeface="Consolas"/>
+              </a:rPr>
+              <a:t>B</a:t>
+            </a:r>
+            <a:r>
+              <a:rPr sz="1300" i="0" b="0">
+                <a:solidFill>
+                  <a:srgbClr val="D4D4D4"/>
+                </a:solidFill>
+                <a:latin typeface="Consolas"/>
+              </a:rPr>
+              <a:t> -- </a:t>
+            </a:r>
+            <a:r>
+              <a:rPr sz="1300" i="0" b="0">
+                <a:solidFill>
+                  <a:srgbClr val="D4D4D4"/>
+                </a:solidFill>
+                <a:latin typeface="Consolas"/>
+              </a:rPr>
+              <a:t>Si</a:t>
+            </a:r>
+            <a:r>
+              <a:rPr sz="1300" i="0" b="0">
                 <a:solidFill>
                   <a:srgbClr val="D4D4D4"/>
                 </a:solidFill>
@@ -12670,23 +12840,86 @@
               <a:t> --&gt; </a:t>
             </a:r>
             <a:r>
-              <a:rPr sz="1600" i="0" b="0">
+              <a:rPr sz="1300" i="0" b="0">
                 <a:solidFill>
                   <a:srgbClr val="D4D4D4"/>
                 </a:solidFill>
                 <a:latin typeface="Consolas"/>
               </a:rPr>
               <a:t>D</a:t>
+            </a:r>
+            <a:r>
+              <a:rPr sz="1300" i="0" b="0">
+                <a:solidFill>
+                  <a:srgbClr val="D4D4D4"/>
+                </a:solidFill>
+                <a:latin typeface="Consolas"/>
+              </a:rPr>
+              <a:t>[</a:t>
+            </a:r>
+            <a:r>
+              <a:rPr sz="1300" i="0" b="0">
+                <a:solidFill>
+                  <a:srgbClr val="D4D4D4"/>
+                </a:solidFill>
+                <a:latin typeface="Consolas"/>
+              </a:rPr>
+              <a:t>Pantalla</a:t>
+            </a:r>
+            <a:r>
+              <a:rPr sz="1300" i="0" b="0">
+                <a:solidFill>
+                  <a:srgbClr val="D4D4D4"/>
+                </a:solidFill>
+                <a:latin typeface="Consolas"/>
+              </a:rPr>
+              <a:t> </a:t>
+            </a:r>
+            <a:r>
+              <a:rPr sz="1300" i="0" b="0">
+                <a:solidFill>
+                  <a:srgbClr val="D4D4D4"/>
+                </a:solidFill>
+                <a:latin typeface="Consolas"/>
+              </a:rPr>
+              <a:t>Registrar</a:t>
+            </a:r>
+            <a:r>
+              <a:rPr sz="1300" i="0" b="0">
+                <a:solidFill>
+                  <a:srgbClr val="D4D4D4"/>
+                </a:solidFill>
+                <a:latin typeface="Consolas"/>
+              </a:rPr>
+              <a:t> </a:t>
+            </a:r>
+            <a:r>
+              <a:rPr sz="1300" i="0" b="0">
+                <a:solidFill>
+                  <a:srgbClr val="D4D4D4"/>
+                </a:solidFill>
+                <a:latin typeface="Consolas"/>
+              </a:rPr>
+              <a:t>mascota</a:t>
+            </a:r>
+            <a:r>
+              <a:rPr sz="1300" i="0" b="0">
+                <a:solidFill>
+                  <a:srgbClr val="D4D4D4"/>
+                </a:solidFill>
+                <a:latin typeface="Consolas"/>
+              </a:rPr>
+              <a:t>]</a:t>
             </a:r>
           </a:p>
           <a:p>
             <a:pPr>
               <a:spcAft>
-                <a:spcPts val="342"/>
+                <a:spcPts val="278"/>
               </a:spcAft>
             </a:pPr>
             <a:r>
-              <a:rPr sz="1600" i="0" b="0">
+              <a:rPr sz="1300" i="0" b="0">
                 <a:solidFill>
                   <a:srgbClr val="D4D4D4"/>
                 </a:solidFill>
@@ -12695,104 +12928,41 @@
               <a:t>  </a:t>
             </a:r>
             <a:r>
-              <a:rPr sz="1600" i="0" b="0">
+              <a:rPr sz="1300" i="0" b="0">
+                <a:solidFill>
+                  <a:srgbClr val="D4D4D4"/>
+                </a:solidFill>
+                <a:latin typeface="Consolas"/>
+              </a:rPr>
+              <a:t>C</a:t>
+            </a:r>
+            <a:r>
+              <a:rPr sz="1300" i="0" b="0">
+                <a:solidFill>
+                  <a:srgbClr val="D4D4D4"/>
+                </a:solidFill>
+                <a:latin typeface="Consolas"/>
+              </a:rPr>
+              <a:t> --&gt; </a:t>
+            </a:r>
+            <a:r>
+              <a:rPr sz="1300" i="0" b="0">
                 <a:solidFill>
                   <a:srgbClr val="D4D4D4"/>
                 </a:solidFill>
                 <a:latin typeface="Consolas"/>
               </a:rPr>
               <a:t>D</a:t>
-            </a:r>
-            <a:r>
-              <a:rPr sz="1600" i="0" b="0">
-                <a:solidFill>
-                  <a:srgbClr val="D4D4D4"/>
-                </a:solidFill>
-                <a:latin typeface="Consolas"/>
-              </a:rPr>
-              <a:t> --&gt; </a:t>
-            </a:r>
-            <a:r>
-              <a:rPr sz="1600" i="0" b="0">
-                <a:solidFill>
-                  <a:srgbClr val="D4D4D4"/>
-                </a:solidFill>
-                <a:latin typeface="Consolas"/>
-              </a:rPr>
-              <a:t>E</a:t>
-            </a:r>
-            <a:r>
-              <a:rPr sz="1600" i="0" b="0">
-                <a:solidFill>
-                  <a:srgbClr val="D4D4D4"/>
-                </a:solidFill>
-                <a:latin typeface="Consolas"/>
-              </a:rPr>
-              <a:t>{</a:t>
-            </a:r>
-            <a:r>
-              <a:rPr sz="1600" i="0" b="0">
-                <a:solidFill>
-                  <a:srgbClr val="D4D4D4"/>
-                </a:solidFill>
-                <a:latin typeface="Consolas"/>
-              </a:rPr>
-              <a:t>Campos</a:t>
-            </a:r>
-            <a:r>
-              <a:rPr sz="1600" i="0" b="0">
-                <a:solidFill>
-                  <a:srgbClr val="D4D4D4"/>
-                </a:solidFill>
-                <a:latin typeface="Consolas"/>
-              </a:rPr>
-              <a:t> </a:t>
-            </a:r>
-            <a:r>
-              <a:rPr sz="1600" i="0" b="0">
-                <a:solidFill>
-                  <a:srgbClr val="D4D4D4"/>
-                </a:solidFill>
-                <a:latin typeface="Consolas"/>
-              </a:rPr>
-              <a:t>obligatorios</a:t>
-            </a:r>
-            <a:r>
-              <a:rPr sz="1600" i="0" b="0">
-                <a:solidFill>
-                  <a:srgbClr val="D4D4D4"/>
-                </a:solidFill>
-                <a:latin typeface="Consolas"/>
-              </a:rPr>
-              <a:t> </a:t>
-            </a:r>
-            <a:r>
-              <a:rPr sz="1600" i="0" b="0">
-                <a:solidFill>
-                  <a:srgbClr val="D4D4D4"/>
-                </a:solidFill>
-                <a:latin typeface="Consolas"/>
-              </a:rPr>
-              <a:t>completos</a:t>
-            </a:r>
-            <a:r>
-              <a:rPr sz="1600" i="0" b="0">
-                <a:solidFill>
-                  <a:srgbClr val="D4D4D4"/>
-                </a:solidFill>
-                <a:latin typeface="Consolas"/>
-              </a:rPr>
-              <a:t>?}</a:t>
             </a:r>
           </a:p>
           <a:p>
             <a:pPr>
               <a:spcAft>
-                <a:spcPts val="342"/>
+                <a:spcPts val="278"/>
               </a:spcAft>
             </a:pPr>
             <a:r>
-              <a:rPr sz="1600" i="0" b="0">
+              <a:rPr sz="1300" i="0" b="0">
                 <a:solidFill>
                   <a:srgbClr val="D4D4D4"/>
                 </a:solidFill>
@@ -12801,7 +12971,25 @@
               <a:t>  </a:t>
             </a:r>
             <a:r>
-              <a:rPr sz="1600" i="0" b="0">
+              <a:rPr sz="1300" i="0" b="0">
+                <a:solidFill>
+                  <a:srgbClr val="D4D4D4"/>
+                </a:solidFill>
+                <a:latin typeface="Consolas"/>
+              </a:rPr>
+              <a:t>D</a:t>
+            </a:r>
+            <a:r>
+              <a:rPr sz="1300" i="0" b="0">
+                <a:solidFill>
+                  <a:srgbClr val="D4D4D4"/>
+                </a:solidFill>
+                <a:latin typeface="Consolas"/>
+              </a:rPr>
+              <a:t> --&gt; </a:t>
+            </a:r>
+            <a:r>
+              <a:rPr sz="1300" i="0" b="0">
                 <a:solidFill>
                   <a:srgbClr val="D4D4D4"/>
                 </a:solidFill>
@@ -12810,61 +12998,25 @@
               <a:t>E</a:t>
             </a:r>
             <a:r>
-              <a:rPr sz="1600" i="0" b="0">
-                <a:solidFill>
-                  <a:srgbClr val="D4D4D4"/>
-                </a:solidFill>
-                <a:latin typeface="Consolas"/>
-              </a:rPr>
-              <a:t> -- </a:t>
-            </a:r>
-            <a:r>
-              <a:rPr sz="1600" i="0" b="0">
-                <a:solidFill>
-                  <a:srgbClr val="D4D4D4"/>
-                </a:solidFill>
-                <a:latin typeface="Consolas"/>
-              </a:rPr>
-              <a:t>No</a:t>
-            </a:r>
-            <a:r>
-              <a:rPr sz="1600" i="0" b="0">
-                <a:solidFill>
-                  <a:srgbClr val="D4D4D4"/>
-                </a:solidFill>
-                <a:latin typeface="Consolas"/>
-              </a:rPr>
-              <a:t> --&gt; </a:t>
-            </a:r>
-            <a:r>
-              <a:rPr sz="1600" i="0" b="0">
-                <a:solidFill>
-                  <a:srgbClr val="D4D4D4"/>
-                </a:solidFill>
-                <a:latin typeface="Consolas"/>
-              </a:rPr>
-              <a:t>F</a:t>
-            </a:r>
-            <a:r>
-              <a:rPr sz="1600" i="0" b="0">
-                <a:solidFill>
-                  <a:srgbClr val="D4D4D4"/>
-                </a:solidFill>
-                <a:latin typeface="Consolas"/>
-              </a:rPr>
-              <a:t>[</a:t>
-            </a:r>
-            <a:r>
-              <a:rPr sz="1600" i="0" b="0">
-                <a:solidFill>
-                  <a:srgbClr val="D4D4D4"/>
-                </a:solidFill>
-                <a:latin typeface="Consolas"/>
-              </a:rPr>
-              <a:t>Guardar</a:t>
-            </a:r>
-            <a:r>
-              <a:rPr sz="1600" i="0" b="0">
+              <a:rPr sz="1300" i="0" b="0">
+                <a:solidFill>
+                  <a:srgbClr val="D4D4D4"/>
+                </a:solidFill>
+                <a:latin typeface="Consolas"/>
+              </a:rPr>
+              <a:t>{</a:t>
+            </a:r>
+            <a:r>
+              <a:rPr sz="1300" i="0" b="0">
+                <a:solidFill>
+                  <a:srgbClr val="D4D4D4"/>
+                </a:solidFill>
+                <a:latin typeface="Consolas"/>
+              </a:rPr>
+              <a:t>Campos</a:t>
+            </a:r>
+            <a:r>
+              <a:rPr sz="1300" i="0" b="0">
                 <a:solidFill>
                   <a:srgbClr val="D4D4D4"/>
                 </a:solidFill>
@@ -12873,34 +13025,16 @@
               <a:t> </a:t>
             </a:r>
             <a:r>
-              <a:rPr sz="1600" i="0" b="0">
-                <a:solidFill>
-                  <a:srgbClr val="D4D4D4"/>
-                </a:solidFill>
-                <a:latin typeface="Consolas"/>
-              </a:rPr>
-              <a:t>deshabilitado</a:t>
-            </a:r>
-            <a:r>
-              <a:rPr sz="1600" i="0" b="0">
-                <a:solidFill>
-                  <a:srgbClr val="D4D4D4"/>
-                </a:solidFill>
-                <a:latin typeface="Consolas"/>
-              </a:rPr>
-              <a:t> + </a:t>
-            </a:r>
-            <a:r>
-              <a:rPr sz="1600" i="0" b="0">
-                <a:solidFill>
-                  <a:srgbClr val="D4D4D4"/>
-                </a:solidFill>
-                <a:latin typeface="Consolas"/>
-              </a:rPr>
-              <a:t>ayuda</a:t>
-            </a:r>
-            <a:r>
-              <a:rPr sz="1600" i="0" b="0">
+              <a:rPr sz="1300" i="0" b="0">
+                <a:solidFill>
+                  <a:srgbClr val="D4D4D4"/>
+                </a:solidFill>
+                <a:latin typeface="Consolas"/>
+              </a:rPr>
+              <a:t>obligatorios</a:t>
+            </a:r>
+            <a:r>
+              <a:rPr sz="1300" i="0" b="0">
                 <a:solidFill>
                   <a:srgbClr val="D4D4D4"/>
                 </a:solidFill>
@@ -12909,86 +13043,32 @@
               <a:t> </a:t>
             </a:r>
             <a:r>
-              <a:rPr sz="1600" i="0" b="0">
-                <a:solidFill>
-                  <a:srgbClr val="D4D4D4"/>
-                </a:solidFill>
-                <a:latin typeface="Consolas"/>
-              </a:rPr>
-              <a:t>en</a:t>
-            </a:r>
-            <a:r>
-              <a:rPr sz="1600" i="0" b="0">
-                <a:solidFill>
-                  <a:srgbClr val="D4D4D4"/>
-                </a:solidFill>
-                <a:latin typeface="Consolas"/>
-              </a:rPr>
-              <a:t> </a:t>
-            </a:r>
-            <a:r>
-              <a:rPr sz="1600" i="0" b="0">
-                <a:solidFill>
-                  <a:srgbClr val="D4D4D4"/>
-                </a:solidFill>
-                <a:latin typeface="Consolas"/>
-              </a:rPr>
-              <a:t>el</a:t>
-            </a:r>
-            <a:r>
-              <a:rPr sz="1600" i="0" b="0">
-                <a:solidFill>
-                  <a:srgbClr val="D4D4D4"/>
-                </a:solidFill>
-                <a:latin typeface="Consolas"/>
-              </a:rPr>
-              <a:t> </a:t>
-            </a:r>
-            <a:r>
-              <a:rPr sz="1600" i="0" b="0">
-                <a:solidFill>
-                  <a:srgbClr val="D4D4D4"/>
-                </a:solidFill>
-                <a:latin typeface="Consolas"/>
-              </a:rPr>
-              <a:t>campo</a:t>
-            </a:r>
-            <a:r>
-              <a:rPr sz="1600" i="0" b="0">
-                <a:solidFill>
-                  <a:srgbClr val="D4D4D4"/>
-                </a:solidFill>
-                <a:latin typeface="Consolas"/>
-              </a:rPr>
-              <a:t> </a:t>
-            </a:r>
-            <a:r>
-              <a:rPr sz="1600" i="0" b="0">
-                <a:solidFill>
-                  <a:srgbClr val="D4D4D4"/>
-                </a:solidFill>
-                <a:latin typeface="Consolas"/>
-              </a:rPr>
-              <a:t>faltante</a:t>
-            </a:r>
-            <a:r>
-              <a:rPr sz="1600" i="0" b="0">
-                <a:solidFill>
-                  <a:srgbClr val="D4D4D4"/>
-                </a:solidFill>
-                <a:latin typeface="Consolas"/>
-              </a:rPr>
-              <a:t>]</a:t>
+              <a:rPr sz="1300" i="0" b="0">
+                <a:solidFill>
+                  <a:srgbClr val="D4D4D4"/>
+                </a:solidFill>
+                <a:latin typeface="Consolas"/>
+              </a:rPr>
+              <a:t>completos</a:t>
+            </a:r>
+            <a:r>
+              <a:rPr sz="1300" i="0" b="0">
+                <a:solidFill>
+                  <a:srgbClr val="D4D4D4"/>
+                </a:solidFill>
+                <a:latin typeface="Consolas"/>
+              </a:rPr>
+              <a:t>?}</a:t>
             </a:r>
           </a:p>
           <a:p>
             <a:pPr>
               <a:spcAft>
-                <a:spcPts val="342"/>
+                <a:spcPts val="278"/>
               </a:spcAft>
             </a:pPr>
             <a:r>
-              <a:rPr sz="1600" i="0" b="0">
+              <a:rPr sz="1300" i="0" b="0">
                 <a:solidFill>
                   <a:srgbClr val="D4D4D4"/>
                 </a:solidFill>
@@ -12997,7 +13077,43 @@
               <a:t>  </a:t>
             </a:r>
             <a:r>
-              <a:rPr sz="1600" i="0" b="0">
+              <a:rPr sz="1300" i="0" b="0">
+                <a:solidFill>
+                  <a:srgbClr val="D4D4D4"/>
+                </a:solidFill>
+                <a:latin typeface="Consolas"/>
+              </a:rPr>
+              <a:t>E</a:t>
+            </a:r>
+            <a:r>
+              <a:rPr sz="1300" i="0" b="0">
+                <a:solidFill>
+                  <a:srgbClr val="D4D4D4"/>
+                </a:solidFill>
+                <a:latin typeface="Consolas"/>
+              </a:rPr>
+              <a:t> -- </a:t>
+            </a:r>
+            <a:r>
+              <a:rPr sz="1300" i="0" b="0">
+                <a:solidFill>
+                  <a:srgbClr val="D4D4D4"/>
+                </a:solidFill>
+                <a:latin typeface="Consolas"/>
+              </a:rPr>
+              <a:t>No</a:t>
+            </a:r>
+            <a:r>
+              <a:rPr sz="1300" i="0" b="0">
+                <a:solidFill>
+                  <a:srgbClr val="D4D4D4"/>
+                </a:solidFill>
+                <a:latin typeface="Consolas"/>
+              </a:rPr>
+              <a:t> --&gt; </a:t>
+            </a:r>
+            <a:r>
+              <a:rPr sz="1300" i="0" b="0">
                 <a:solidFill>
                   <a:srgbClr val="D4D4D4"/>
                 </a:solidFill>
@@ -13006,32 +13122,131 @@
               <a:t>F</a:t>
             </a:r>
             <a:r>
-              <a:rPr sz="1600" i="0" b="0">
-                <a:solidFill>
-                  <a:srgbClr val="D4D4D4"/>
-                </a:solidFill>
-                <a:latin typeface="Consolas"/>
-              </a:rPr>
-              <a:t> --&gt; </a:t>
-            </a:r>
-            <a:r>
-              <a:rPr sz="1600" i="0" b="0">
-                <a:solidFill>
-                  <a:srgbClr val="D4D4D4"/>
-                </a:solidFill>
-                <a:latin typeface="Consolas"/>
-              </a:rPr>
-              <a:t>D</a:t>
+              <a:rPr sz="1300" i="0" b="0">
+                <a:solidFill>
+                  <a:srgbClr val="D4D4D4"/>
+                </a:solidFill>
+                <a:latin typeface="Consolas"/>
+              </a:rPr>
+              <a:t>[</a:t>
+            </a:r>
+            <a:r>
+              <a:rPr sz="1300" i="0" b="0">
+                <a:solidFill>
+                  <a:srgbClr val="D4D4D4"/>
+                </a:solidFill>
+                <a:latin typeface="Consolas"/>
+              </a:rPr>
+              <a:t>Guardar</a:t>
+            </a:r>
+            <a:r>
+              <a:rPr sz="1300" i="0" b="0">
+                <a:solidFill>
+                  <a:srgbClr val="D4D4D4"/>
+                </a:solidFill>
+                <a:latin typeface="Consolas"/>
+              </a:rPr>
+              <a:t> </a:t>
+            </a:r>
+            <a:r>
+              <a:rPr sz="1300" i="0" b="0">
+                <a:solidFill>
+                  <a:srgbClr val="D4D4D4"/>
+                </a:solidFill>
+                <a:latin typeface="Consolas"/>
+              </a:rPr>
+              <a:t>deshabilitado</a:t>
+            </a:r>
+            <a:r>
+              <a:rPr sz="1300" i="0" b="0">
+                <a:solidFill>
+                  <a:srgbClr val="D4D4D4"/>
+                </a:solidFill>
+                <a:latin typeface="Consolas"/>
+              </a:rPr>
+              <a:t> + </a:t>
+            </a:r>
+            <a:r>
+              <a:rPr sz="1300" i="0" b="0">
+                <a:solidFill>
+                  <a:srgbClr val="D4D4D4"/>
+                </a:solidFill>
+                <a:latin typeface="Consolas"/>
+              </a:rPr>
+              <a:t>ayuda</a:t>
+            </a:r>
+            <a:r>
+              <a:rPr sz="1300" i="0" b="0">
+                <a:solidFill>
+                  <a:srgbClr val="D4D4D4"/>
+                </a:solidFill>
+                <a:latin typeface="Consolas"/>
+              </a:rPr>
+              <a:t> </a:t>
+            </a:r>
+            <a:r>
+              <a:rPr sz="1300" i="0" b="0">
+                <a:solidFill>
+                  <a:srgbClr val="D4D4D4"/>
+                </a:solidFill>
+                <a:latin typeface="Consolas"/>
+              </a:rPr>
+              <a:t>en</a:t>
+            </a:r>
+            <a:r>
+              <a:rPr sz="1300" i="0" b="0">
+                <a:solidFill>
+                  <a:srgbClr val="D4D4D4"/>
+                </a:solidFill>
+                <a:latin typeface="Consolas"/>
+              </a:rPr>
+              <a:t> </a:t>
+            </a:r>
+            <a:r>
+              <a:rPr sz="1300" i="0" b="0">
+                <a:solidFill>
+                  <a:srgbClr val="D4D4D4"/>
+                </a:solidFill>
+                <a:latin typeface="Consolas"/>
+              </a:rPr>
+              <a:t>el</a:t>
+            </a:r>
+            <a:r>
+              <a:rPr sz="1300" i="0" b="0">
+                <a:solidFill>
+                  <a:srgbClr val="D4D4D4"/>
+                </a:solidFill>
+                <a:latin typeface="Consolas"/>
+              </a:rPr>
+              <a:t> </a:t>
+            </a:r>
+            <a:r>
+              <a:rPr sz="1300" i="0" b="0">
+                <a:solidFill>
+                  <a:srgbClr val="D4D4D4"/>
+                </a:solidFill>
+                <a:latin typeface="Consolas"/>
+              </a:rPr>
+              <a:t>campo</a:t>
+            </a:r>
+            <a:r>
+              <a:rPr sz="1300" i="0" b="0">
+                <a:solidFill>
+                  <a:srgbClr val="D4D4D4"/>
+                </a:solidFill>
+                <a:latin typeface="Consolas"/>
+              </a:rPr>
+              <a:t>]</a:t>
             </a:r>
           </a:p>
           <a:p>
             <a:pPr>
               <a:spcAft>
-                <a:spcPts val="342"/>
+                <a:spcPts val="278"/>
               </a:spcAft>
             </a:pPr>
             <a:r>
-              <a:rPr sz="1600" i="0" b="0">
+              <a:rPr sz="1300" i="0" b="0">
                 <a:solidFill>
                   <a:srgbClr val="D4D4D4"/>
                 </a:solidFill>
@@ -13040,34 +13255,16 @@
               <a:t>  </a:t>
             </a:r>
             <a:r>
-              <a:rPr sz="1600" i="0" b="0">
-                <a:solidFill>
-                  <a:srgbClr val="D4D4D4"/>
-                </a:solidFill>
-                <a:latin typeface="Consolas"/>
-              </a:rPr>
-              <a:t>E</a:t>
-            </a:r>
-            <a:r>
-              <a:rPr sz="1600" i="0" b="0">
-                <a:solidFill>
-                  <a:srgbClr val="D4D4D4"/>
-                </a:solidFill>
-                <a:latin typeface="Consolas"/>
-              </a:rPr>
-              <a:t> -- </a:t>
-            </a:r>
-            <a:r>
-              <a:rPr sz="1600" i="0" b="0">
-                <a:solidFill>
-                  <a:srgbClr val="D4D4D4"/>
-                </a:solidFill>
-                <a:latin typeface="Consolas"/>
-              </a:rPr>
-              <a:t>Si</a:t>
-            </a:r>
-            <a:r>
-              <a:rPr sz="1600" i="0" b="0">
+              <a:rPr sz="1300" i="0" b="0">
+                <a:solidFill>
+                  <a:srgbClr val="D4D4D4"/>
+                </a:solidFill>
+                <a:latin typeface="Consolas"/>
+              </a:rPr>
+              <a:t>F</a:t>
+            </a:r>
+            <a:r>
+              <a:rPr sz="1300" i="0" b="0">
                 <a:solidFill>
                   <a:srgbClr val="D4D4D4"/>
                 </a:solidFill>
@@ -13076,140 +13273,23 @@
               <a:t> --&gt; </a:t>
             </a:r>
             <a:r>
-              <a:rPr sz="1600" i="0" b="0">
-                <a:solidFill>
-                  <a:srgbClr val="D4D4D4"/>
-                </a:solidFill>
-                <a:latin typeface="Consolas"/>
-              </a:rPr>
-              <a:t>G</a:t>
-            </a:r>
-            <a:r>
-              <a:rPr sz="1600" i="0" b="0">
-                <a:solidFill>
-                  <a:srgbClr val="D4D4D4"/>
-                </a:solidFill>
-                <a:latin typeface="Consolas"/>
-              </a:rPr>
-              <a:t>[</a:t>
-            </a:r>
-            <a:r>
-              <a:rPr sz="1600" i="0" b="0">
-                <a:solidFill>
-                  <a:srgbClr val="D4D4D4"/>
-                </a:solidFill>
-                <a:latin typeface="Consolas"/>
-              </a:rPr>
-              <a:t>Confirmacion</a:t>
-            </a:r>
-            <a:r>
-              <a:rPr sz="1600" i="0" b="0">
-                <a:solidFill>
-                  <a:srgbClr val="D4D4D4"/>
-                </a:solidFill>
-                <a:latin typeface="Consolas"/>
-              </a:rPr>
-              <a:t>: </a:t>
-            </a:r>
-            <a:r>
-              <a:rPr sz="1600" i="0" b="0">
-                <a:solidFill>
-                  <a:srgbClr val="D4D4D4"/>
-                </a:solidFill>
-                <a:latin typeface="Consolas"/>
-              </a:rPr>
-              <a:t>Ficha</a:t>
-            </a:r>
-            <a:r>
-              <a:rPr sz="1600" i="0" b="0">
-                <a:solidFill>
-                  <a:srgbClr val="D4D4D4"/>
-                </a:solidFill>
-                <a:latin typeface="Consolas"/>
-              </a:rPr>
-              <a:t> </a:t>
-            </a:r>
-            <a:r>
-              <a:rPr sz="1600" i="0" b="0">
-                <a:solidFill>
-                  <a:srgbClr val="D4D4D4"/>
-                </a:solidFill>
-                <a:latin typeface="Consolas"/>
-              </a:rPr>
-              <a:t>guardada</a:t>
-            </a:r>
-            <a:r>
-              <a:rPr sz="1600" i="0" b="0">
-                <a:solidFill>
-                  <a:srgbClr val="D4D4D4"/>
-                </a:solidFill>
-                <a:latin typeface="Consolas"/>
-              </a:rPr>
-              <a:t>, </a:t>
-            </a:r>
-            <a:r>
-              <a:rPr sz="1600" i="0" b="0">
-                <a:solidFill>
-                  <a:srgbClr val="D4D4D4"/>
-                </a:solidFill>
-                <a:latin typeface="Consolas"/>
-              </a:rPr>
-              <a:t>codigo</a:t>
-            </a:r>
-            <a:r>
-              <a:rPr sz="1600" i="0" b="0">
-                <a:solidFill>
-                  <a:srgbClr val="D4D4D4"/>
-                </a:solidFill>
-                <a:latin typeface="Consolas"/>
-              </a:rPr>
-              <a:t> </a:t>
-            </a:r>
-            <a:r>
-              <a:rPr sz="1600" i="0" b="0">
-                <a:solidFill>
-                  <a:srgbClr val="D4D4D4"/>
-                </a:solidFill>
-                <a:latin typeface="Consolas"/>
-              </a:rPr>
-              <a:t>M</a:t>
-            </a:r>
-            <a:r>
-              <a:rPr sz="1600" i="0" b="0">
-                <a:solidFill>
-                  <a:srgbClr val="D4D4D4"/>
-                </a:solidFill>
-                <a:latin typeface="Consolas"/>
-              </a:rPr>
-              <a:t>-</a:t>
-            </a:r>
-            <a:r>
-              <a:rPr sz="1600" i="0" b="0">
-                <a:solidFill>
-                  <a:srgbClr val="B5CEA8"/>
-                </a:solidFill>
-                <a:latin typeface="Consolas"/>
-              </a:rPr>
-              <a:t>0421</a:t>
-            </a:r>
-            <a:r>
-              <a:rPr sz="1600" i="0" b="0">
-                <a:solidFill>
-                  <a:srgbClr val="D4D4D4"/>
-                </a:solidFill>
-                <a:latin typeface="Consolas"/>
-              </a:rPr>
-              <a:t>]</a:t>
+              <a:rPr sz="1300" i="0" b="0">
+                <a:solidFill>
+                  <a:srgbClr val="D4D4D4"/>
+                </a:solidFill>
+                <a:latin typeface="Consolas"/>
+              </a:rPr>
+              <a:t>D</a:t>
             </a:r>
           </a:p>
           <a:p>
             <a:pPr>
               <a:spcAft>
-                <a:spcPts val="342"/>
+                <a:spcPts val="278"/>
               </a:spcAft>
             </a:pPr>
             <a:r>
-              <a:rPr sz="1600" i="0" b="0">
+              <a:rPr sz="1300" i="0" b="0">
                 <a:solidFill>
                   <a:srgbClr val="D4D4D4"/>
                 </a:solidFill>
@@ -13218,7 +13298,43 @@
               <a:t>  </a:t>
             </a:r>
             <a:r>
-              <a:rPr sz="1600" i="0" b="0">
+              <a:rPr sz="1300" i="0" b="0">
+                <a:solidFill>
+                  <a:srgbClr val="D4D4D4"/>
+                </a:solidFill>
+                <a:latin typeface="Consolas"/>
+              </a:rPr>
+              <a:t>E</a:t>
+            </a:r>
+            <a:r>
+              <a:rPr sz="1300" i="0" b="0">
+                <a:solidFill>
+                  <a:srgbClr val="D4D4D4"/>
+                </a:solidFill>
+                <a:latin typeface="Consolas"/>
+              </a:rPr>
+              <a:t> -- </a:t>
+            </a:r>
+            <a:r>
+              <a:rPr sz="1300" i="0" b="0">
+                <a:solidFill>
+                  <a:srgbClr val="D4D4D4"/>
+                </a:solidFill>
+                <a:latin typeface="Consolas"/>
+              </a:rPr>
+              <a:t>Si</a:t>
+            </a:r>
+            <a:r>
+              <a:rPr sz="1300" i="0" b="0">
+                <a:solidFill>
+                  <a:srgbClr val="D4D4D4"/>
+                </a:solidFill>
+                <a:latin typeface="Consolas"/>
+              </a:rPr>
+              <a:t> --&gt; </a:t>
+            </a:r>
+            <a:r>
+              <a:rPr sz="1300" i="0" b="0">
                 <a:solidFill>
                   <a:srgbClr val="D4D4D4"/>
                 </a:solidFill>
@@ -13227,25 +13343,7 @@
               <a:t>G</a:t>
             </a:r>
             <a:r>
-              <a:rPr sz="1600" i="0" b="0">
-                <a:solidFill>
-                  <a:srgbClr val="D4D4D4"/>
-                </a:solidFill>
-                <a:latin typeface="Consolas"/>
-              </a:rPr>
-              <a:t> --&gt; </a:t>
-            </a:r>
-            <a:r>
-              <a:rPr sz="1600" i="0" b="0">
-                <a:solidFill>
-                  <a:srgbClr val="D4D4D4"/>
-                </a:solidFill>
-                <a:latin typeface="Consolas"/>
-              </a:rPr>
-              <a:t>H</a:t>
-            </a:r>
-            <a:r>
-              <a:rPr sz="1600" i="0" b="0">
+              <a:rPr sz="1300" i="0" b="0">
                 <a:solidFill>
                   <a:srgbClr val="D4D4D4"/>
                 </a:solidFill>
@@ -13254,16 +13352,34 @@
               <a:t>[</a:t>
             </a:r>
             <a:r>
-              <a:rPr sz="1600" i="0" b="0">
-                <a:solidFill>
-                  <a:srgbClr val="D4D4D4"/>
-                </a:solidFill>
-                <a:latin typeface="Consolas"/>
-              </a:rPr>
-              <a:t>Pantalla</a:t>
-            </a:r>
-            <a:r>
-              <a:rPr sz="1600" i="0" b="0">
+              <a:rPr sz="1300" i="0" b="0">
+                <a:solidFill>
+                  <a:srgbClr val="D4D4D4"/>
+                </a:solidFill>
+                <a:latin typeface="Consolas"/>
+              </a:rPr>
+              <a:t>Confirmacion</a:t>
+            </a:r>
+            <a:r>
+              <a:rPr sz="1300" i="0" b="0">
+                <a:solidFill>
+                  <a:srgbClr val="D4D4D4"/>
+                </a:solidFill>
+                <a:latin typeface="Consolas"/>
+              </a:rPr>
+              <a:t>: </a:t>
+            </a:r>
+            <a:r>
+              <a:rPr sz="1300" i="0" b="0">
+                <a:solidFill>
+                  <a:srgbClr val="D4D4D4"/>
+                </a:solidFill>
+                <a:latin typeface="Consolas"/>
+              </a:rPr>
+              <a:t>Ficha</a:t>
+            </a:r>
+            <a:r>
+              <a:rPr sz="1300" i="0" b="0">
                 <a:solidFill>
                   <a:srgbClr val="D4D4D4"/>
                 </a:solidFill>
@@ -13272,16 +13388,34 @@
               <a:t> </a:t>
             </a:r>
             <a:r>
-              <a:rPr sz="1600" i="0" b="0">
-                <a:solidFill>
-                  <a:srgbClr val="D4D4D4"/>
-                </a:solidFill>
-                <a:latin typeface="Consolas"/>
-              </a:rPr>
-              <a:t>Buscar</a:t>
-            </a:r>
-            <a:r>
-              <a:rPr sz="1600" i="0" b="0">
+              <a:rPr sz="1300" i="0" b="0">
+                <a:solidFill>
+                  <a:srgbClr val="D4D4D4"/>
+                </a:solidFill>
+                <a:latin typeface="Consolas"/>
+              </a:rPr>
+              <a:t>guardada</a:t>
+            </a:r>
+            <a:r>
+              <a:rPr sz="1300" i="0" b="0">
+                <a:solidFill>
+                  <a:srgbClr val="D4D4D4"/>
+                </a:solidFill>
+                <a:latin typeface="Consolas"/>
+              </a:rPr>
+              <a:t>, </a:t>
+            </a:r>
+            <a:r>
+              <a:rPr sz="1300" i="0" b="0">
+                <a:solidFill>
+                  <a:srgbClr val="D4D4D4"/>
+                </a:solidFill>
+                <a:latin typeface="Consolas"/>
+              </a:rPr>
+              <a:t>codigo</a:t>
+            </a:r>
+            <a:r>
+              <a:rPr sz="1300" i="0" b="0">
                 <a:solidFill>
                   <a:srgbClr val="D4D4D4"/>
                 </a:solidFill>
@@ -13290,16 +13424,34 @@
               <a:t> </a:t>
             </a:r>
             <a:r>
-              <a:rPr sz="1600" i="0" b="0">
-                <a:solidFill>
-                  <a:srgbClr val="D4D4D4"/>
-                </a:solidFill>
-                <a:latin typeface="Consolas"/>
-              </a:rPr>
-              <a:t>expediente</a:t>
-            </a:r>
-            <a:r>
-              <a:rPr sz="1600" i="0" b="0">
+              <a:rPr sz="1300" i="0" b="0">
+                <a:solidFill>
+                  <a:srgbClr val="D4D4D4"/>
+                </a:solidFill>
+                <a:latin typeface="Consolas"/>
+              </a:rPr>
+              <a:t>M</a:t>
+            </a:r>
+            <a:r>
+              <a:rPr sz="1300" i="0" b="0">
+                <a:solidFill>
+                  <a:srgbClr val="D4D4D4"/>
+                </a:solidFill>
+                <a:latin typeface="Consolas"/>
+              </a:rPr>
+              <a:t>-</a:t>
+            </a:r>
+            <a:r>
+              <a:rPr sz="1300" i="0" b="0">
+                <a:solidFill>
+                  <a:srgbClr val="B5CEA8"/>
+                </a:solidFill>
+                <a:latin typeface="Consolas"/>
+              </a:rPr>
+              <a:t>0421</a:t>
+            </a:r>
+            <a:r>
+              <a:rPr sz="1300" i="0" b="0">
                 <a:solidFill>
                   <a:srgbClr val="D4D4D4"/>
                 </a:solidFill>
@@ -13311,11 +13463,11 @@
           <a:p>
             <a:pPr>
               <a:spcAft>
-                <a:spcPts val="342"/>
+                <a:spcPts val="278"/>
               </a:spcAft>
             </a:pPr>
             <a:r>
-              <a:rPr sz="1600" i="0" b="0">
+              <a:rPr sz="1300" i="0" b="0">
                 <a:solidFill>
                   <a:srgbClr val="D4D4D4"/>
                 </a:solidFill>
@@ -13324,7 +13476,25 @@
               <a:t>  </a:t>
             </a:r>
             <a:r>
-              <a:rPr sz="1600" i="0" b="0">
+              <a:rPr sz="1300" i="0" b="0">
+                <a:solidFill>
+                  <a:srgbClr val="D4D4D4"/>
+                </a:solidFill>
+                <a:latin typeface="Consolas"/>
+              </a:rPr>
+              <a:t>G</a:t>
+            </a:r>
+            <a:r>
+              <a:rPr sz="1300" i="0" b="0">
+                <a:solidFill>
+                  <a:srgbClr val="D4D4D4"/>
+                </a:solidFill>
+                <a:latin typeface="Consolas"/>
+              </a:rPr>
+              <a:t> --&gt; </a:t>
+            </a:r>
+            <a:r>
+              <a:rPr sz="1300" i="0" b="0">
                 <a:solidFill>
                   <a:srgbClr val="D4D4D4"/>
                 </a:solidFill>
@@ -13333,43 +13503,25 @@
               <a:t>H</a:t>
             </a:r>
             <a:r>
-              <a:rPr sz="1600" i="0" b="0">
-                <a:solidFill>
-                  <a:srgbClr val="D4D4D4"/>
-                </a:solidFill>
-                <a:latin typeface="Consolas"/>
-              </a:rPr>
-              <a:t> --&gt; </a:t>
-            </a:r>
-            <a:r>
-              <a:rPr sz="1600" i="0" b="0">
-                <a:solidFill>
-                  <a:srgbClr val="D4D4D4"/>
-                </a:solidFill>
-                <a:latin typeface="Consolas"/>
-              </a:rPr>
-              <a:t>I</a:t>
-            </a:r>
-            <a:r>
-              <a:rPr sz="1600" i="0" b="0">
-                <a:solidFill>
-                  <a:srgbClr val="D4D4D4"/>
-                </a:solidFill>
-                <a:latin typeface="Consolas"/>
-              </a:rPr>
-              <a:t>{</a:t>
-            </a:r>
-            <a:r>
-              <a:rPr sz="1600" i="0" b="0">
-                <a:solidFill>
-                  <a:srgbClr val="D4D4D4"/>
-                </a:solidFill>
-                <a:latin typeface="Consolas"/>
-              </a:rPr>
-              <a:t>Cuantos</a:t>
-            </a:r>
-            <a:r>
-              <a:rPr sz="1600" i="0" b="0">
+              <a:rPr sz="1300" i="0" b="0">
+                <a:solidFill>
+                  <a:srgbClr val="D4D4D4"/>
+                </a:solidFill>
+                <a:latin typeface="Consolas"/>
+              </a:rPr>
+              <a:t>[</a:t>
+            </a:r>
+            <a:r>
+              <a:rPr sz="1300" i="0" b="0">
+                <a:solidFill>
+                  <a:srgbClr val="D4D4D4"/>
+                </a:solidFill>
+                <a:latin typeface="Consolas"/>
+              </a:rPr>
+              <a:t>Pantalla</a:t>
+            </a:r>
+            <a:r>
+              <a:rPr sz="1300" i="0" b="0">
                 <a:solidFill>
                   <a:srgbClr val="D4D4D4"/>
                 </a:solidFill>
@@ -13378,32 +13530,50 @@
               <a:t> </a:t>
             </a:r>
             <a:r>
-              <a:rPr sz="1600" i="0" b="0">
-                <a:solidFill>
-                  <a:srgbClr val="D4D4D4"/>
-                </a:solidFill>
-                <a:latin typeface="Consolas"/>
-              </a:rPr>
-              <a:t>resultados</a:t>
-            </a:r>
-            <a:r>
-              <a:rPr sz="1600" i="0" b="0">
-                <a:solidFill>
-                  <a:srgbClr val="D4D4D4"/>
-                </a:solidFill>
-                <a:latin typeface="Consolas"/>
-              </a:rPr>
-              <a:t>?}</a:t>
+              <a:rPr sz="1300" i="0" b="0">
+                <a:solidFill>
+                  <a:srgbClr val="D4D4D4"/>
+                </a:solidFill>
+                <a:latin typeface="Consolas"/>
+              </a:rPr>
+              <a:t>Buscar</a:t>
+            </a:r>
+            <a:r>
+              <a:rPr sz="1300" i="0" b="0">
+                <a:solidFill>
+                  <a:srgbClr val="D4D4D4"/>
+                </a:solidFill>
+                <a:latin typeface="Consolas"/>
+              </a:rPr>
+              <a:t> </a:t>
+            </a:r>
+            <a:r>
+              <a:rPr sz="1300" i="0" b="0">
+                <a:solidFill>
+                  <a:srgbClr val="D4D4D4"/>
+                </a:solidFill>
+                <a:latin typeface="Consolas"/>
+              </a:rPr>
+              <a:t>expediente</a:t>
+            </a:r>
+            <a:r>
+              <a:rPr sz="1300" i="0" b="0">
+                <a:solidFill>
+                  <a:srgbClr val="D4D4D4"/>
+                </a:solidFill>
+                <a:latin typeface="Consolas"/>
+              </a:rPr>
+              <a:t>]</a:t>
             </a:r>
           </a:p>
           <a:p>
             <a:pPr>
               <a:spcAft>
-                <a:spcPts val="342"/>
+                <a:spcPts val="278"/>
               </a:spcAft>
             </a:pPr>
             <a:r>
-              <a:rPr sz="1600" i="0" b="0">
+              <a:rPr sz="1300" i="0" b="0">
                 <a:solidFill>
                   <a:srgbClr val="D4D4D4"/>
                 </a:solidFill>
@@ -13412,7 +13582,25 @@
               <a:t>  </a:t>
             </a:r>
             <a:r>
-              <a:rPr sz="1600" i="0" b="0">
+              <a:rPr sz="1300" i="0" b="0">
+                <a:solidFill>
+                  <a:srgbClr val="D4D4D4"/>
+                </a:solidFill>
+                <a:latin typeface="Consolas"/>
+              </a:rPr>
+              <a:t>H</a:t>
+            </a:r>
+            <a:r>
+              <a:rPr sz="1300" i="0" b="0">
+                <a:solidFill>
+                  <a:srgbClr val="D4D4D4"/>
+                </a:solidFill>
+                <a:latin typeface="Consolas"/>
+              </a:rPr>
+              <a:t> --&gt; </a:t>
+            </a:r>
+            <a:r>
+              <a:rPr sz="1300" i="0" b="0">
                 <a:solidFill>
                   <a:srgbClr val="D4D4D4"/>
                 </a:solidFill>
@@ -13421,61 +13609,25 @@
               <a:t>I</a:t>
             </a:r>
             <a:r>
-              <a:rPr sz="1600" i="0" b="0">
-                <a:solidFill>
-                  <a:srgbClr val="D4D4D4"/>
-                </a:solidFill>
-                <a:latin typeface="Consolas"/>
-              </a:rPr>
-              <a:t> -- </a:t>
-            </a:r>
-            <a:r>
-              <a:rPr sz="1600" i="0" b="0">
-                <a:solidFill>
-                  <a:srgbClr val="D4D4D4"/>
-                </a:solidFill>
-                <a:latin typeface="Consolas"/>
-              </a:rPr>
-              <a:t>Cero</a:t>
-            </a:r>
-            <a:r>
-              <a:rPr sz="1600" i="0" b="0">
-                <a:solidFill>
-                  <a:srgbClr val="D4D4D4"/>
-                </a:solidFill>
-                <a:latin typeface="Consolas"/>
-              </a:rPr>
-              <a:t> --&gt; </a:t>
-            </a:r>
-            <a:r>
-              <a:rPr sz="1600" i="0" b="0">
-                <a:solidFill>
-                  <a:srgbClr val="D4D4D4"/>
-                </a:solidFill>
-                <a:latin typeface="Consolas"/>
-              </a:rPr>
-              <a:t>J</a:t>
-            </a:r>
-            <a:r>
-              <a:rPr sz="1600" i="0" b="0">
-                <a:solidFill>
-                  <a:srgbClr val="D4D4D4"/>
-                </a:solidFill>
-                <a:latin typeface="Consolas"/>
-              </a:rPr>
-              <a:t>[</a:t>
-            </a:r>
-            <a:r>
-              <a:rPr sz="1600" i="0" b="0">
-                <a:solidFill>
-                  <a:srgbClr val="D4D4D4"/>
-                </a:solidFill>
-                <a:latin typeface="Consolas"/>
-              </a:rPr>
-              <a:t>Mensaje</a:t>
-            </a:r>
-            <a:r>
-              <a:rPr sz="1600" i="0" b="0">
+              <a:rPr sz="1300" i="0" b="0">
+                <a:solidFill>
+                  <a:srgbClr val="D4D4D4"/>
+                </a:solidFill>
+                <a:latin typeface="Consolas"/>
+              </a:rPr>
+              <a:t>{</a:t>
+            </a:r>
+            <a:r>
+              <a:rPr sz="1300" i="0" b="0">
+                <a:solidFill>
+                  <a:srgbClr val="D4D4D4"/>
+                </a:solidFill>
+                <a:latin typeface="Consolas"/>
+              </a:rPr>
+              <a:t>Cuantos</a:t>
+            </a:r>
+            <a:r>
+              <a:rPr sz="1300" i="0" b="0">
                 <a:solidFill>
                   <a:srgbClr val="D4D4D4"/>
                 </a:solidFill>
@@ -13484,25 +13636,7 @@
               <a:t> </a:t>
             </a:r>
             <a:r>
-              <a:rPr sz="1600" i="0" b="0">
-                <a:solidFill>
-                  <a:srgbClr val="D4D4D4"/>
-                </a:solidFill>
-                <a:latin typeface="Consolas"/>
-              </a:rPr>
-              <a:t>sin</a:t>
-            </a:r>
-            <a:r>
-              <a:rPr sz="1600" i="0" b="0">
-                <a:solidFill>
-                  <a:srgbClr val="D4D4D4"/>
-                </a:solidFill>
-                <a:latin typeface="Consolas"/>
-              </a:rPr>
-              <a:t> </a:t>
-            </a:r>
-            <a:r>
-              <a:rPr sz="1600" i="0" b="0">
+              <a:rPr sz="1300" i="0" b="0">
                 <a:solidFill>
                   <a:srgbClr val="D4D4D4"/>
                 </a:solidFill>
@@ -13511,95 +13645,23 @@
               <a:t>resultados</a:t>
             </a:r>
             <a:r>
-              <a:rPr sz="1600" i="0" b="0">
-                <a:solidFill>
-                  <a:srgbClr val="D4D4D4"/>
-                </a:solidFill>
-                <a:latin typeface="Consolas"/>
-              </a:rPr>
-              <a:t> + </a:t>
-            </a:r>
-            <a:r>
-              <a:rPr sz="1600" i="0" b="0">
-                <a:solidFill>
-                  <a:srgbClr val="D4D4D4"/>
-                </a:solidFill>
-                <a:latin typeface="Consolas"/>
-              </a:rPr>
-              <a:t>Buscar</a:t>
-            </a:r>
-            <a:r>
-              <a:rPr sz="1600" i="0" b="0">
-                <a:solidFill>
-                  <a:srgbClr val="D4D4D4"/>
-                </a:solidFill>
-                <a:latin typeface="Consolas"/>
-              </a:rPr>
-              <a:t> </a:t>
-            </a:r>
-            <a:r>
-              <a:rPr sz="1600" i="0" b="0">
-                <a:solidFill>
-                  <a:srgbClr val="D4D4D4"/>
-                </a:solidFill>
-                <a:latin typeface="Consolas"/>
-              </a:rPr>
-              <a:t>por</a:t>
-            </a:r>
-            <a:r>
-              <a:rPr sz="1600" i="0" b="0">
-                <a:solidFill>
-                  <a:srgbClr val="D4D4D4"/>
-                </a:solidFill>
-                <a:latin typeface="Consolas"/>
-              </a:rPr>
-              <a:t> </a:t>
-            </a:r>
-            <a:r>
-              <a:rPr sz="1600" i="0" b="0">
-                <a:solidFill>
-                  <a:srgbClr val="D4D4D4"/>
-                </a:solidFill>
-                <a:latin typeface="Consolas"/>
-              </a:rPr>
-              <a:t>otro</a:t>
-            </a:r>
-            <a:r>
-              <a:rPr sz="1600" i="0" b="0">
-                <a:solidFill>
-                  <a:srgbClr val="D4D4D4"/>
-                </a:solidFill>
-                <a:latin typeface="Consolas"/>
-              </a:rPr>
-              <a:t> </a:t>
-            </a:r>
-            <a:r>
-              <a:rPr sz="1600" i="0" b="0">
-                <a:solidFill>
-                  <a:srgbClr val="D4D4D4"/>
-                </a:solidFill>
-                <a:latin typeface="Consolas"/>
-              </a:rPr>
-              <a:t>criterio</a:t>
-            </a:r>
-            <a:r>
-              <a:rPr sz="1600" i="0" b="0">
-                <a:solidFill>
-                  <a:srgbClr val="D4D4D4"/>
-                </a:solidFill>
-                <a:latin typeface="Consolas"/>
-              </a:rPr>
-              <a:t>]</a:t>
+              <a:rPr sz="1300" i="0" b="0">
+                <a:solidFill>
+                  <a:srgbClr val="D4D4D4"/>
+                </a:solidFill>
+                <a:latin typeface="Consolas"/>
+              </a:rPr>
+              <a:t>?}</a:t>
             </a:r>
           </a:p>
           <a:p>
             <a:pPr>
               <a:spcAft>
-                <a:spcPts val="342"/>
+                <a:spcPts val="278"/>
               </a:spcAft>
             </a:pPr>
             <a:r>
-              <a:rPr sz="1600" i="0" b="0">
+              <a:rPr sz="1300" i="0" b="0">
                 <a:solidFill>
                   <a:srgbClr val="D4D4D4"/>
                 </a:solidFill>
@@ -13608,7 +13670,7 @@
               <a:t>  </a:t>
             </a:r>
             <a:r>
-              <a:rPr sz="1600" i="0" b="0">
+              <a:rPr sz="1300" i="0" b="0">
                 <a:solidFill>
                   <a:srgbClr val="D4D4D4"/>
                 </a:solidFill>
@@ -13617,7 +13679,7 @@
               <a:t>I</a:t>
             </a:r>
             <a:r>
-              <a:rPr sz="1600" i="0" b="0">
+              <a:rPr sz="1300" i="0" b="0">
                 <a:solidFill>
                   <a:srgbClr val="D4D4D4"/>
                 </a:solidFill>
@@ -13626,16 +13688,16 @@
               <a:t> -- </a:t>
             </a:r>
             <a:r>
-              <a:rPr sz="1600" i="0" b="0">
-                <a:solidFill>
-                  <a:srgbClr val="D4D4D4"/>
-                </a:solidFill>
-                <a:latin typeface="Consolas"/>
-              </a:rPr>
-              <a:t>Varios</a:t>
-            </a:r>
-            <a:r>
-              <a:rPr sz="1600" i="0" b="0">
+              <a:rPr sz="1300" i="0" b="0">
+                <a:solidFill>
+                  <a:srgbClr val="D4D4D4"/>
+                </a:solidFill>
+                <a:latin typeface="Consolas"/>
+              </a:rPr>
+              <a:t>Cero</a:t>
+            </a:r>
+            <a:r>
+              <a:rPr sz="1300" i="0" b="0">
                 <a:solidFill>
                   <a:srgbClr val="D4D4D4"/>
                 </a:solidFill>
@@ -13644,16 +13706,16 @@
               <a:t> --&gt; </a:t>
             </a:r>
             <a:r>
-              <a:rPr sz="1600" i="0" b="0">
-                <a:solidFill>
-                  <a:srgbClr val="D4D4D4"/>
-                </a:solidFill>
-                <a:latin typeface="Consolas"/>
-              </a:rPr>
-              <a:t>K</a:t>
-            </a:r>
-            <a:r>
-              <a:rPr sz="1600" i="0" b="0">
+              <a:rPr sz="1300" i="0" b="0">
+                <a:solidFill>
+                  <a:srgbClr val="D4D4D4"/>
+                </a:solidFill>
+                <a:latin typeface="Consolas"/>
+              </a:rPr>
+              <a:t>J</a:t>
+            </a:r>
+            <a:r>
+              <a:rPr sz="1300" i="0" b="0">
                 <a:solidFill>
                   <a:srgbClr val="D4D4D4"/>
                 </a:solidFill>
@@ -13662,16 +13724,16 @@
               <a:t>[</a:t>
             </a:r>
             <a:r>
-              <a:rPr sz="1600" i="0" b="0">
-                <a:solidFill>
-                  <a:srgbClr val="D4D4D4"/>
-                </a:solidFill>
-                <a:latin typeface="Consolas"/>
-              </a:rPr>
-              <a:t>Lista</a:t>
-            </a:r>
-            <a:r>
-              <a:rPr sz="1600" i="0" b="0">
+              <a:rPr sz="1300" i="0" b="0">
+                <a:solidFill>
+                  <a:srgbClr val="D4D4D4"/>
+                </a:solidFill>
+                <a:latin typeface="Consolas"/>
+              </a:rPr>
+              <a:t>Sin</a:t>
+            </a:r>
+            <a:r>
+              <a:rPr sz="1300" i="0" b="0">
                 <a:solidFill>
                   <a:srgbClr val="D4D4D4"/>
                 </a:solidFill>
@@ -13680,16 +13742,34 @@
               <a:t> </a:t>
             </a:r>
             <a:r>
-              <a:rPr sz="1600" i="0" b="0">
-                <a:solidFill>
-                  <a:srgbClr val="D4D4D4"/>
-                </a:solidFill>
-                <a:latin typeface="Consolas"/>
-              </a:rPr>
-              <a:t>con</a:t>
-            </a:r>
-            <a:r>
-              <a:rPr sz="1600" i="0" b="0">
+              <a:rPr sz="1300" i="0" b="0">
+                <a:solidFill>
+                  <a:srgbClr val="D4D4D4"/>
+                </a:solidFill>
+                <a:latin typeface="Consolas"/>
+              </a:rPr>
+              <a:t>resultados</a:t>
+            </a:r>
+            <a:r>
+              <a:rPr sz="1300" i="0" b="0">
+                <a:solidFill>
+                  <a:srgbClr val="D4D4D4"/>
+                </a:solidFill>
+                <a:latin typeface="Consolas"/>
+              </a:rPr>
+              <a:t> + </a:t>
+            </a:r>
+            <a:r>
+              <a:rPr sz="1300" i="0" b="0">
+                <a:solidFill>
+                  <a:srgbClr val="D4D4D4"/>
+                </a:solidFill>
+                <a:latin typeface="Consolas"/>
+              </a:rPr>
+              <a:t>Buscar</a:t>
+            </a:r>
+            <a:r>
+              <a:rPr sz="1300" i="0" b="0">
                 <a:solidFill>
                   <a:srgbClr val="D4D4D4"/>
                 </a:solidFill>
@@ -13698,34 +13778,16 @@
               <a:t> </a:t>
             </a:r>
             <a:r>
-              <a:rPr sz="1600" i="0" b="0">
-                <a:solidFill>
-                  <a:srgbClr val="D4D4D4"/>
-                </a:solidFill>
-                <a:latin typeface="Consolas"/>
-              </a:rPr>
-              <a:t>especie</a:t>
-            </a:r>
-            <a:r>
-              <a:rPr sz="1600" i="0" b="0">
-                <a:solidFill>
-                  <a:srgbClr val="D4D4D4"/>
-                </a:solidFill>
-                <a:latin typeface="Consolas"/>
-              </a:rPr>
-              <a:t>, </a:t>
-            </a:r>
-            <a:r>
-              <a:rPr sz="1600" i="0" b="0">
-                <a:solidFill>
-                  <a:srgbClr val="D4D4D4"/>
-                </a:solidFill>
-                <a:latin typeface="Consolas"/>
-              </a:rPr>
-              <a:t>edad</a:t>
-            </a:r>
-            <a:r>
-              <a:rPr sz="1600" i="0" b="0">
+              <a:rPr sz="1300" i="0" b="0">
+                <a:solidFill>
+                  <a:srgbClr val="D4D4D4"/>
+                </a:solidFill>
+                <a:latin typeface="Consolas"/>
+              </a:rPr>
+              <a:t>por</a:t>
+            </a:r>
+            <a:r>
+              <a:rPr sz="1300" i="0" b="0">
                 <a:solidFill>
                   <a:srgbClr val="D4D4D4"/>
                 </a:solidFill>
@@ -13734,16 +13796,16 @@
               <a:t> </a:t>
             </a:r>
             <a:r>
-              <a:rPr sz="1600" i="0" b="0">
-                <a:solidFill>
-                  <a:srgbClr val="D4D4D4"/>
-                </a:solidFill>
-                <a:latin typeface="Consolas"/>
-              </a:rPr>
-              <a:t>y</a:t>
-            </a:r>
-            <a:r>
-              <a:rPr sz="1600" i="0" b="0">
+              <a:rPr sz="1300" i="0" b="0">
+                <a:solidFill>
+                  <a:srgbClr val="D4D4D4"/>
+                </a:solidFill>
+                <a:latin typeface="Consolas"/>
+              </a:rPr>
+              <a:t>otro</a:t>
+            </a:r>
+            <a:r>
+              <a:rPr sz="1300" i="0" b="0">
                 <a:solidFill>
                   <a:srgbClr val="D4D4D4"/>
                 </a:solidFill>
@@ -13752,52 +13814,16 @@
               <a:t> </a:t>
             </a:r>
             <a:r>
-              <a:rPr sz="1600" i="0" b="0">
-                <a:solidFill>
-                  <a:srgbClr val="D4D4D4"/>
-                </a:solidFill>
-                <a:latin typeface="Consolas"/>
-              </a:rPr>
-              <a:t>dueño</a:t>
-            </a:r>
-            <a:r>
-              <a:rPr sz="1600" i="0" b="0">
-                <a:solidFill>
-                  <a:srgbClr val="D4D4D4"/>
-                </a:solidFill>
-                <a:latin typeface="Consolas"/>
-              </a:rPr>
-              <a:t> </a:t>
-            </a:r>
-            <a:r>
-              <a:rPr sz="1600" i="0" b="0">
-                <a:solidFill>
-                  <a:srgbClr val="D4D4D4"/>
-                </a:solidFill>
-                <a:latin typeface="Consolas"/>
-              </a:rPr>
-              <a:t>para</a:t>
-            </a:r>
-            <a:r>
-              <a:rPr sz="1600" i="0" b="0">
-                <a:solidFill>
-                  <a:srgbClr val="D4D4D4"/>
-                </a:solidFill>
-                <a:latin typeface="Consolas"/>
-              </a:rPr>
-              <a:t> </a:t>
-            </a:r>
-            <a:r>
-              <a:rPr sz="1600" i="0" b="0">
-                <a:solidFill>
-                  <a:srgbClr val="D4D4D4"/>
-                </a:solidFill>
-                <a:latin typeface="Consolas"/>
-              </a:rPr>
-              <a:t>desambiguar</a:t>
-            </a:r>
-            <a:r>
-              <a:rPr sz="1600" i="0" b="0">
+              <a:rPr sz="1300" i="0" b="0">
+                <a:solidFill>
+                  <a:srgbClr val="D4D4D4"/>
+                </a:solidFill>
+                <a:latin typeface="Consolas"/>
+              </a:rPr>
+              <a:t>criterio</a:t>
+            </a:r>
+            <a:r>
+              <a:rPr sz="1300" i="0" b="0">
                 <a:solidFill>
                   <a:srgbClr val="D4D4D4"/>
                 </a:solidFill>
@@ -13809,11 +13835,11 @@
           <a:p>
             <a:pPr>
               <a:spcAft>
-                <a:spcPts val="342"/>
+                <a:spcPts val="278"/>
               </a:spcAft>
             </a:pPr>
             <a:r>
-              <a:rPr sz="1600" i="0" b="0">
+              <a:rPr sz="1300" i="0" b="0">
                 <a:solidFill>
                   <a:srgbClr val="D4D4D4"/>
                 </a:solidFill>
@@ -13822,7 +13848,7 @@
               <a:t>  </a:t>
             </a:r>
             <a:r>
-              <a:rPr sz="1600" i="0" b="0">
+              <a:rPr sz="1300" i="0" b="0">
                 <a:solidFill>
                   <a:srgbClr val="D4D4D4"/>
                 </a:solidFill>
@@ -13831,7 +13857,7 @@
               <a:t>I</a:t>
             </a:r>
             <a:r>
-              <a:rPr sz="1600" i="0" b="0">
+              <a:rPr sz="1300" i="0" b="0">
                 <a:solidFill>
                   <a:srgbClr val="D4D4D4"/>
                 </a:solidFill>
@@ -13840,7 +13866,185 @@
               <a:t> -- </a:t>
             </a:r>
             <a:r>
-              <a:rPr sz="1600" i="0" b="0">
+              <a:rPr sz="1300" i="0" b="0">
+                <a:solidFill>
+                  <a:srgbClr val="D4D4D4"/>
+                </a:solidFill>
+                <a:latin typeface="Consolas"/>
+              </a:rPr>
+              <a:t>Varios</a:t>
+            </a:r>
+            <a:r>
+              <a:rPr sz="1300" i="0" b="0">
+                <a:solidFill>
+                  <a:srgbClr val="D4D4D4"/>
+                </a:solidFill>
+                <a:latin typeface="Consolas"/>
+              </a:rPr>
+              <a:t> --&gt; </a:t>
+            </a:r>
+            <a:r>
+              <a:rPr sz="1300" i="0" b="0">
+                <a:solidFill>
+                  <a:srgbClr val="D4D4D4"/>
+                </a:solidFill>
+                <a:latin typeface="Consolas"/>
+              </a:rPr>
+              <a:t>K</a:t>
+            </a:r>
+            <a:r>
+              <a:rPr sz="1300" i="0" b="0">
+                <a:solidFill>
+                  <a:srgbClr val="D4D4D4"/>
+                </a:solidFill>
+                <a:latin typeface="Consolas"/>
+              </a:rPr>
+              <a:t>[</a:t>
+            </a:r>
+            <a:r>
+              <a:rPr sz="1300" i="0" b="0">
+                <a:solidFill>
+                  <a:srgbClr val="D4D4D4"/>
+                </a:solidFill>
+                <a:latin typeface="Consolas"/>
+              </a:rPr>
+              <a:t>Lista</a:t>
+            </a:r>
+            <a:r>
+              <a:rPr sz="1300" i="0" b="0">
+                <a:solidFill>
+                  <a:srgbClr val="D4D4D4"/>
+                </a:solidFill>
+                <a:latin typeface="Consolas"/>
+              </a:rPr>
+              <a:t> </a:t>
+            </a:r>
+            <a:r>
+              <a:rPr sz="1300" i="0" b="0">
+                <a:solidFill>
+                  <a:srgbClr val="D4D4D4"/>
+                </a:solidFill>
+                <a:latin typeface="Consolas"/>
+              </a:rPr>
+              <a:t>con</a:t>
+            </a:r>
+            <a:r>
+              <a:rPr sz="1300" i="0" b="0">
+                <a:solidFill>
+                  <a:srgbClr val="D4D4D4"/>
+                </a:solidFill>
+                <a:latin typeface="Consolas"/>
+              </a:rPr>
+              <a:t> </a:t>
+            </a:r>
+            <a:r>
+              <a:rPr sz="1300" i="0" b="0">
+                <a:solidFill>
+                  <a:srgbClr val="D4D4D4"/>
+                </a:solidFill>
+                <a:latin typeface="Consolas"/>
+              </a:rPr>
+              <a:t>especie</a:t>
+            </a:r>
+            <a:r>
+              <a:rPr sz="1300" i="0" b="0">
+                <a:solidFill>
+                  <a:srgbClr val="D4D4D4"/>
+                </a:solidFill>
+                <a:latin typeface="Consolas"/>
+              </a:rPr>
+              <a:t>, </a:t>
+            </a:r>
+            <a:r>
+              <a:rPr sz="1300" i="0" b="0">
+                <a:solidFill>
+                  <a:srgbClr val="D4D4D4"/>
+                </a:solidFill>
+                <a:latin typeface="Consolas"/>
+              </a:rPr>
+              <a:t>edad</a:t>
+            </a:r>
+            <a:r>
+              <a:rPr sz="1300" i="0" b="0">
+                <a:solidFill>
+                  <a:srgbClr val="D4D4D4"/>
+                </a:solidFill>
+                <a:latin typeface="Consolas"/>
+              </a:rPr>
+              <a:t> </a:t>
+            </a:r>
+            <a:r>
+              <a:rPr sz="1300" i="0" b="0">
+                <a:solidFill>
+                  <a:srgbClr val="D4D4D4"/>
+                </a:solidFill>
+                <a:latin typeface="Consolas"/>
+              </a:rPr>
+              <a:t>y</a:t>
+            </a:r>
+            <a:r>
+              <a:rPr sz="1300" i="0" b="0">
+                <a:solidFill>
+                  <a:srgbClr val="D4D4D4"/>
+                </a:solidFill>
+                <a:latin typeface="Consolas"/>
+              </a:rPr>
+              <a:t> </a:t>
+            </a:r>
+            <a:r>
+              <a:rPr sz="1300" i="0" b="0">
+                <a:solidFill>
+                  <a:srgbClr val="D4D4D4"/>
+                </a:solidFill>
+                <a:latin typeface="Consolas"/>
+              </a:rPr>
+              <a:t>dueño</a:t>
+            </a:r>
+            <a:r>
+              <a:rPr sz="1300" i="0" b="0">
+                <a:solidFill>
+                  <a:srgbClr val="D4D4D4"/>
+                </a:solidFill>
+                <a:latin typeface="Consolas"/>
+              </a:rPr>
+              <a:t>]</a:t>
+            </a:r>
+          </a:p>
+          <a:p>
+            <a:pPr>
+              <a:spcAft>
+                <a:spcPts val="278"/>
+              </a:spcAft>
+            </a:pPr>
+            <a:r>
+              <a:rPr sz="1300" i="0" b="0">
+                <a:solidFill>
+                  <a:srgbClr val="D4D4D4"/>
+                </a:solidFill>
+                <a:latin typeface="Consolas"/>
+              </a:rPr>
+              <a:t>  </a:t>
+            </a:r>
+            <a:r>
+              <a:rPr sz="1300" i="0" b="0">
+                <a:solidFill>
+                  <a:srgbClr val="D4D4D4"/>
+                </a:solidFill>
+                <a:latin typeface="Consolas"/>
+              </a:rPr>
+              <a:t>I</a:t>
+            </a:r>
+            <a:r>
+              <a:rPr sz="1300" i="0" b="0">
+                <a:solidFill>
+                  <a:srgbClr val="D4D4D4"/>
+                </a:solidFill>
+                <a:latin typeface="Consolas"/>
+              </a:rPr>
+              <a:t> -- </a:t>
+            </a:r>
+            <a:r>
+              <a:rPr sz="1300" i="0" b="0">
                 <a:solidFill>
                   <a:srgbClr val="D4D4D4"/>
                 </a:solidFill>
@@ -13849,7 +14053,7 @@
               <a:t>Uno</a:t>
             </a:r>
             <a:r>
-              <a:rPr sz="1600" i="0" b="0">
+              <a:rPr sz="1300" i="0" b="0">
                 <a:solidFill>
                   <a:srgbClr val="D4D4D4"/>
                 </a:solidFill>
@@ -13858,7 +14062,7 @@
               <a:t> --&gt; </a:t>
             </a:r>
             <a:r>
-              <a:rPr sz="1600" i="0" b="0">
+              <a:rPr sz="1300" i="0" b="0">
                 <a:solidFill>
                   <a:srgbClr val="D4D4D4"/>
                 </a:solidFill>
@@ -13867,7 +14071,7 @@
               <a:t>L</a:t>
             </a:r>
             <a:r>
-              <a:rPr sz="1600" i="0" b="0">
+              <a:rPr sz="1300" i="0" b="0">
                 <a:solidFill>
                   <a:srgbClr val="D4D4D4"/>
                 </a:solidFill>
@@ -13876,7 +14080,7 @@
               <a:t>[</a:t>
             </a:r>
             <a:r>
-              <a:rPr sz="1600" i="0" b="0">
+              <a:rPr sz="1300" i="0" b="0">
                 <a:solidFill>
                   <a:srgbClr val="D4D4D4"/>
                 </a:solidFill>
@@ -13885,7 +14089,7 @@
               <a:t>Ficha</a:t>
             </a:r>
             <a:r>
-              <a:rPr sz="1600" i="0" b="0">
+              <a:rPr sz="1300" i="0" b="0">
                 <a:solidFill>
                   <a:srgbClr val="D4D4D4"/>
                 </a:solidFill>
@@ -13894,7 +14098,7 @@
               <a:t> </a:t>
             </a:r>
             <a:r>
-              <a:rPr sz="1600" i="0" b="0">
+              <a:rPr sz="1300" i="0" b="0">
                 <a:solidFill>
                   <a:srgbClr val="D4D4D4"/>
                 </a:solidFill>
@@ -13903,7 +14107,7 @@
               <a:t>del</a:t>
             </a:r>
             <a:r>
-              <a:rPr sz="1600" i="0" b="0">
+              <a:rPr sz="1300" i="0" b="0">
                 <a:solidFill>
                   <a:srgbClr val="D4D4D4"/>
                 </a:solidFill>
@@ -13912,7 +14116,7 @@
               <a:t> </a:t>
             </a:r>
             <a:r>
-              <a:rPr sz="1600" i="0" b="0">
+              <a:rPr sz="1300" i="0" b="0">
                 <a:solidFill>
                   <a:srgbClr val="D4D4D4"/>
                 </a:solidFill>
@@ -13921,7 +14125,7 @@
               <a:t>paciente</a:t>
             </a:r>
             <a:r>
-              <a:rPr sz="1600" i="0" b="0">
+              <a:rPr sz="1300" i="0" b="0">
                 <a:solidFill>
                   <a:srgbClr val="D4D4D4"/>
                 </a:solidFill>
@@ -13934,14 +14138,83 @@
       </p:sp>
       <p:sp>
         <p:nvSpPr>
-          <p:cNvPr id="13" name="TextBox 12"/>
+          <p:cNvPr id="13" name="Rounded Rectangle 12"/>
+          <p:cNvSpPr/>
+          <p:nvPr/>
+        </p:nvSpPr>
+        <p:spPr>
+          <a:xfrm>
+            <a:off x="7668579" y="1261872"/>
+            <a:ext cx="4120780" cy="3318569"/>
+          </a:xfrm>
+          <a:prstGeom prst="roundRect">
+            <a:avLst>
+              <a:gd name="adj" fmla="val 4000"/>
+            </a:avLst>
+          </a:prstGeom>
+          <a:solidFill>
+            <a:srgbClr val="E8EEF4"/>
+          </a:solidFill>
+          <a:ln>
+            <a:noFill/>
+          </a:ln>
+        </p:spPr>
+        <p:style>
+          <a:lnRef idx="1">
+            <a:schemeClr val="accent1"/>
+          </a:lnRef>
+          <a:fillRef idx="3">
+            <a:schemeClr val="accent1"/>
+          </a:fillRef>
+          <a:effectRef idx="2">
+            <a:schemeClr val="accent1"/>
+          </a:effectRef>
+          <a:fontRef idx="minor">
+            <a:schemeClr val="lt1"/>
+          </a:fontRef>
+        </p:style>
+        <p:txBody>
+          <a:bodyPr rtlCol="0" anchor="ctr"/>
+          <a:lstStyle/>
+          <a:p>
+            <a:pPr algn="ctr"/>
+          </a:p>
+        </p:txBody>
+      </p:sp>
+      <p:pic>
+        <p:nvPicPr>
+          <p:cNvPr id="14" name="Picture 13" descr="dg-flujo-tarea-paso1.png"/>
+          <p:cNvPicPr>
+            <a:picLocks noChangeAspect="1"/>
+          </p:cNvPicPr>
+          <p:nvPr/>
+        </p:nvPicPr>
+        <p:blipFill>
+          <a:blip r:embed="rId2"/>
+          <a:stretch>
+            <a:fillRect/>
+          </a:stretch>
+        </p:blipFill>
+        <p:spPr>
+          <a:xfrm>
+            <a:off x="7723443" y="1316736"/>
+            <a:ext cx="4011052" cy="3208841"/>
+          </a:xfrm>
+          <a:prstGeom prst="rect">
+            <a:avLst/>
+          </a:prstGeom>
+        </p:spPr>
+      </p:pic>
+      <p:sp>
+        <p:nvSpPr>
+          <p:cNvPr id="15" name="TextBox 14"/>
           <p:cNvSpPr txBox="1"/>
           <p:nvPr/>
         </p:nvSpPr>
         <p:spPr>
           <a:xfrm>
-            <a:off x="457200" y="6035040"/>
-            <a:ext cx="11277295" cy="365760"/>
+            <a:off x="7723443" y="4580441"/>
+            <a:ext cx="4011052" cy="320040"/>
           </a:xfrm>
           <a:prstGeom prst="rect">
             <a:avLst/>
@@ -13956,6 +14229,41 @@
           <a:p>
             <a:pPr algn="ctr"/>
             <a:r>
+              <a:rPr sz="1200" b="0" i="1">
+                <a:solidFill>
+                  <a:srgbClr val="666666"/>
+                </a:solidFill>
+                <a:latin typeface="Calibri"/>
+              </a:rPr>
+              <a:t>Lo que dibuja este código</a:t>
+            </a:r>
+          </a:p>
+        </p:txBody>
+      </p:sp>
+      <p:sp>
+        <p:nvSpPr>
+          <p:cNvPr id="16" name="TextBox 15"/>
+          <p:cNvSpPr txBox="1"/>
+          <p:nvPr/>
+        </p:nvSpPr>
+        <p:spPr>
+          <a:xfrm>
+            <a:off x="457200" y="6035040"/>
+            <a:ext cx="11277295" cy="365760"/>
+          </a:xfrm>
+          <a:prstGeom prst="rect">
+            <a:avLst/>
+          </a:prstGeom>
+          <a:noFill/>
+        </p:spPr>
+        <p:txBody>
+          <a:bodyPr wrap="square">
+            <a:spAutoFit/>
+          </a:bodyPr>
+          <a:lstStyle/>
+          <a:p>
+            <a:pPr algn="ctr"/>
+            <a:r>
               <a:rPr sz="1300" b="0" i="1">
                 <a:solidFill>
                   <a:srgbClr val="666666"/>
@@ -13969,7 +14277,7 @@
       </p:sp>
       <p:sp>
         <p:nvSpPr>
-          <p:cNvPr id="14" name="TextBox 13"/>
+          <p:cNvPr id="17" name="TextBox 16"/>
           <p:cNvSpPr txBox="1"/>
           <p:nvPr/>
         </p:nvSpPr>

--- a/Seminario de Sistemas/Clases/Clase 13 - Diseño de interfaces/Presentacion.pptx
+++ b/Seminario de Sistemas/Clases/Clase 13 - Diseño de interfaces/Presentacion.pptx
@@ -798,7 +798,7 @@
           <a:p/>
           <a:p>
             <a:r>
-              <a:t>Y ahi la respuesta de diseño es mostrar en la lista de resultados la especie, la edad y el nombre del dueño para poder desambiguar de un vistazo.</a:t>
+              <a:t>Y ahi la respuesta de diseño es mostrar en la lista de resultados la especie, la edad y el nombre del dueño para poder distinguirlas de un vistazo.</a:t>
             </a:r>
           </a:p>
           <a:p/>
@@ -9721,7 +9721,7 @@
                 </a:solidFill>
                 <a:latin typeface="Calibri"/>
               </a:rPr>
-              <a:t>–   Doce mascotas llamadas Firulais: mostrar especie, edad y dueño para desambiguar.</a:t>
+              <a:t>–   Doce mascotas llamadas Firulais: mostrar especie, edad y dueño para distinguirlas.</a:t>
             </a:r>
           </a:p>
         </p:txBody>
